--- a/production/ACT_0.pptx
+++ b/production/ACT_0.pptx
@@ -838,32 +838,138 @@
           <a:lstStyle/>
           <a:p>
             <a:r>
-              <a:rPr lang="en-US" dirty="0"/>
-              <a:t>## S04 — 파일명을 주지 않으면 Agent는 어디부터 볼까?
-Slide ID: S04
-Working Title: 파일명을 주지 않으면 Agent는 어디부터 볼까?
-ACT / Section: ACT 0 / 0D
-Allocated Time: 2 minutes
-Mode Split: Lecture 2 minutes
-Primary Message: Demo에서는 파일을 직접 지정하지 않았을 때의 Search → Read → Trace를 관찰한다.
-Opening Question: “Agent가 Test, 구현, 호출 경로를 어떻게 찾는가?”
-Speaker Flow:
-1. **OPEN (0:00–0:30):** 이번 관찰의 질문을 제시한다.
-2. **SET WATCH FOR (0:30–1:30):** failing Test, 관련 구현, call path 세 가지를 차례로 읽는다. 결과 영역은 비워 둔다.
-3. **SCOPE (1:30–2:00):** 기준 자료가 Codex CLI 0.154.0의 read-only TRIAL-001 기록임을 알리고 S05로 넘긴다.
-Evidence / Source: DEMO-01, STATE-00, TRIAL-001, BEAT-003, OQ-003, OQ-005. 이 장은 Trial setup이며 관찰 결과를 아직 공개하지 않는다.
-Claim Boundary: 기록된 Trial은 격리된 비대화형 Codex CLI 0.154.0, macOS, `--sandbox read-only`, `--ignore-user-config` 조건에서 수행됐다. Codex Desktop, 교육 계정 또는 현재 제품 동작을 입증하지 않는다.
-Beginner Explanation: 결과를 보기 전에 무엇을 관찰할지 정하면 단순히 답만 읽는 것보다 Demo를 따라가기 쉽다.
-Advanced Insight: 답변뿐 아니라 파일 발견과 호출 경로 추적을 관찰 대상으로 둔다.
-C++ Vision Bridge: N/A.
-Demo Operation: DEMO-01 / WATCH. 기본 자료는 TRIAL-001 기록에 기반한 정적 setup이다. 현재 제품 UI를 그리거나 Live/Hybrid 경로를 실행하지 않는다. WATCH FOR는 Test, Implementation, Call path이며 결과는 빈 상태로 둔다. HYBRID 실행은 발표 계정·surface와 runbook을 확인한 뒤에만 활성화한다.
-Audience Interaction: 응답을 요구하지 않는다. 세 관찰 항목을 청중이 마음속으로 따라오게 한다.
-Transition: “실제 기록에서 어떤 Test와 경로가 발견됐을까요?”라고 묻고 S05에서 근거를 연다.
-Time Management: 2분 안에 질문과 세 Watch For를 제시하고 Trial 환경의 범위를 한 문장으로 제한한다.
-Fallback: 화면이 불가능하면 세 관찰 기준만 말로 제시한다. 현재 CLI 또는 Desktop UI를 재현하지 않는다.
-Validation Status: PROVISIONAL — T05-A 첫 구현은 검토함; 현재 제품 surface, 교육 계정, Live/Hybrid 경로와 target display는 미검증.</a:t>
-            </a:r>
-            <a:endParaRPr lang="en-US" dirty="0"/>
+              <a:t>## S04 — 파일명을 주지 않으면 Agent는 어디부터 볼까?</a:t>
+            </a:r>
+          </a:p>
+          <a:p/>
+          <a:p>
+            <a:r>
+              <a:t>Slide ID: S04</a:t>
+            </a:r>
+          </a:p>
+          <a:p/>
+          <a:p>
+            <a:r>
+              <a:t>Working Title: 파일명을 주지 않으면 Agent는 어디부터 볼까?</a:t>
+            </a:r>
+          </a:p>
+          <a:p/>
+          <a:p>
+            <a:r>
+              <a:t>ACT / Section: ACT 0 / 0D</a:t>
+            </a:r>
+          </a:p>
+          <a:p/>
+          <a:p>
+            <a:r>
+              <a:t>Allocated Time: 2 minutes</a:t>
+            </a:r>
+          </a:p>
+          <a:p/>
+          <a:p>
+            <a:r>
+              <a:t>Mode Split: Lecture 2 minutes</a:t>
+            </a:r>
+          </a:p>
+          <a:p/>
+          <a:p>
+            <a:r>
+              <a:t>Primary Message: Demo에서는 파일을 직접 지정하지 않았을 때의 Search → Read → Trace를 관찰한다.</a:t>
+            </a:r>
+          </a:p>
+          <a:p/>
+          <a:p>
+            <a:r>
+              <a:t>Opening Question: “Agent가 Test, 구현, 호출 경로를 어떻게 찾는가?”</a:t>
+            </a:r>
+          </a:p>
+          <a:p/>
+          <a:p>
+            <a:r>
+              <a:t>Speaker Flow:</a:t>
+            </a:r>
+          </a:p>
+          <a:p/>
+          <a:p>
+            <a:r>
+              <a:t>1. **OPEN (0:00–0:30):** 이번 관찰의 질문을 제시한다.</a:t>
+            </a:r>
+          </a:p>
+          <a:p>
+            <a:r>
+              <a:t>2. **SET WATCH FOR (0:30–1:30):** failing Test, 관련 구현, call path 세 가지를 차례로 읽는다. 결과 영역은 비워 둔다.</a:t>
+            </a:r>
+          </a:p>
+          <a:p>
+            <a:r>
+              <a:t>3. **SCOPE (1:30–2:00):** 기준 자료가 Codex CLI 0.154.0의 read-only TRIAL-001 기록임을 알리고 S05로 넘긴다.</a:t>
+            </a:r>
+          </a:p>
+          <a:p/>
+          <a:p>
+            <a:r>
+              <a:t>Evidence / Source: DEMO-01, STATE-00, TRIAL-001, BEAT-003, OQ-003, OQ-005. 이 장은 Trial setup이며 관찰 결과를 아직 공개하지 않는다.</a:t>
+            </a:r>
+          </a:p>
+          <a:p/>
+          <a:p>
+            <a:r>
+              <a:t>Claim Boundary: 기록된 Trial은 격리된 비대화형 Codex CLI 0.154.0, macOS, `--sandbox read-only`, `--ignore-user-config` 조건에서 수행됐다. Codex Desktop, 교육 계정 또는 현재 제품 동작을 입증하지 않는다.</a:t>
+            </a:r>
+          </a:p>
+          <a:p/>
+          <a:p>
+            <a:r>
+              <a:t>Beginner Explanation: 결과를 보기 전에 무엇을 관찰할지 정하면 단순히 답만 읽는 것보다 Demo를 따라가기 쉽다.</a:t>
+            </a:r>
+          </a:p>
+          <a:p/>
+          <a:p>
+            <a:r>
+              <a:t>Advanced Insight: 답변뿐 아니라 파일 발견과 호출 경로 추적을 관찰 대상으로 둔다.</a:t>
+            </a:r>
+          </a:p>
+          <a:p/>
+          <a:p>
+            <a:r>
+              <a:t>C++ Vision Bridge: N/A.</a:t>
+            </a:r>
+          </a:p>
+          <a:p/>
+          <a:p>
+            <a:r>
+              <a:t>Demo Operation: DEMO-01 / WATCH. 기본 경로는 정적 발표다. S04에서 Test, Implementation, Call path의 관찰 기준을 보여 주고 결과 영역은 비워 둔 뒤 S05로 이동한다. 자료는 `production/ACT_0.pptx`의 S04–S06과 `production/preview/act0/S04.png`–`S06.png`다. PNG는 PPT의 정적 렌더이며 실제 CLI 캡처가 아니다. 현재 Desktop·교육 계정 surface와 Live/Hybrid는 미검증이므로 지금 활성화하지 않는다. 향후 활성화하려면 대상 계정·surface, read-only 실행 조건, runbook, 기대 관찰 결과와 복귀 cue를 발표 환경에서 먼저 확인한다.</a:t>
+            </a:r>
+          </a:p>
+          <a:p/>
+          <a:p>
+            <a:r>
+              <a:t>Audience Interaction: 응답을 요구하지 않는다. 세 관찰 항목을 청중이 마음속으로 따라오게 한다.</a:t>
+            </a:r>
+          </a:p>
+          <a:p/>
+          <a:p>
+            <a:r>
+              <a:t>Transition: “실제 기록에서 어떤 Test와 경로가 발견됐을까요?”라고 묻고 S05에서 근거를 연다.</a:t>
+            </a:r>
+          </a:p>
+          <a:p/>
+          <a:p>
+            <a:r>
+              <a:t>Time Management: 2분 안에 질문과 세 Watch For를 제시하고 Trial 환경의 범위를 한 문장으로 제한한다.</a:t>
+            </a:r>
+          </a:p>
+          <a:p/>
+          <a:p>
+            <a:r>
+              <a:t>Fallback: READY — `production/ACT_0.pptx`의 S04 정적 슬라이드와 `production/preview/act0/S04.png`를 기본 발표 자료로 사용한다. 두 파일은 수정된 PPTX의 최종 로컬 렌더 결과다. 화면 공유가 모두 불가능하면 Test → Implementation → Call path를 말로 제시하고 S05의 기록 근거로 이동한다. Live CLI/Desktop을 즉석에서 열지 않는다. Windows·발표 PC·교육장 표시는 미검증이다.</a:t>
+            </a:r>
+          </a:p>
+          <a:p/>
+          <a:p>
+            <a:r>
+              <a:t>Validation Status: REVIEWED — LOCAL STATIC PATH CONFIRMED — PPTX S04와 한글 표시 PNG를 확인함. 시간 리허설, 현재 제품 surface·교육 계정, Windows PowerPoint와 room readability는 UNVERIFIED.</a:t>
+            </a:r>
           </a:p>
         </p:txBody>
       </p:sp>
@@ -948,34 +1054,148 @@
           <a:lstStyle/>
           <a:p>
             <a:r>
-              <a:rPr lang="en-US" dirty="0"/>
-              <a:t>## S05 — Agent가 Test와 호출 경로를 찾았다
-Slide ID: S05
-Working Title: Agent가 Test와 호출 경로를 찾았다
-ACT / Section: ACT 0 / 0D
-Allocated Time: 8 minutes
-Mode Split: Demo 8 minutes (HYBRID in the Slide Map; captured-evidence baseline until the presentation environment is verified)
-Primary Message: TRIAL-001 한 번의 읽기 전용 CLI 조사에서 Agent가 실패 Test, 구현 파일, 계약과 호출 경로를 찾아냈다.
-Opening Question: “지정하지 않은 파일과 호출 경로를 실제로 찾아냈는가?”
-Speaker Flow:
-1. **OPEN (0:00–1:00):** 결과 요약이 TRIAL-001의 재구성 도식임을 먼저 밝힌다. 실제 CLI screenshot처럼 제시하지 않는다.
-2. **SHOW (1:00–3:00):** `tests/test_transform.py::test_crop_excludes_end_coordinate`를 가리킨다.
-3. **TRACE (3:00–5:00):** `cli.main()` → `pipeline.process_image()` → `transform.crop()` 경로를 따라간다.
-4. **INTERPRET (5:00–7:00):** 계약 `[x_start, x_end)`와 관찰된 `row[x_start : x_end + 1]` 구현의 차이를 설명한다. 수정은 아직 하지 않았다고 말한다.
-5. **SCOPE (7:00–8:00):** 이번 관찰은 단일 read-only CLI run이라고 한정하고 S06에서 결과와 환경 오류를 분리한다고 예고한다.
-Evidence / Source: TRIAL-001, DEMO-01, STATE-00, CLM-0002, CLM-0009. 실패 Test 발견, 계약·구현 확인, 호출 경로 추적, extra-column 결과 설명, no-edit 준수는 해당 단일 run 기록에 있다.
-Claim Boundary: Codex CLI 0.154.0의 단일 read-only 조사다. 반복성, Codex Desktop, 교육 계정, 현재 제품 기능 또는 보편적인 탐색 능력을 입증하지 않는다. 도식은 TRIAL-001 기록을 재구성한 설명이며 원본 screenshot이 아니다.
-Beginner Explanation: 파일명을 미리 주지 않은 한 번의 조사에서 실패 Test와 관련 구현·호출 경로가 찾아졌다.
-Advanced Insight: 찾은 경로와 설명은 그 run에서 확인된 범위다. 설명과 수정, 검증은 다른 단계이며 이 Trial에서는 코드를 바꾸지 않았다.
-C++ Vision Bridge: N/A.
-Demo Operation: DEMO-01 / Evidence. CAPTURED 기록과 재구성 도식을 기본으로 사용한다. 화면 Label: `RECONSTRUCTED DIAGRAM · TRIAL-001 RECORD`, `OBSERVED PRODUCT · CODEX CLI 0.154.0 · READ-ONLY`. 실제 터미널 캡처가 없으면 도식을 screenshot처럼 꾸미지 않는다. HYBRID는 발표 환경 확인 전까지 비활성이다.
-Audience Interaction: 청중은 S04의 세 Watch For를 확인한다. 중간 응답이나 실습을 요구하지 않는다.
-Transition: 발견 사실을 다음 장에서 Repository 관찰과 실행 환경 제한으로 나눈다.
-Time Management: 8분을 Test, path, contract, scope 순서로 쓴다. 전체 로그·파일 목록·코드 수정을 읽지 않는다. 마지막 1분을 S06 handoff에 남긴다.
-Fallback: 선택·검증된 capture가 없으면 TRIAL-001의 기록에서 Test, path, contract를 도식으로 재구성한다. `RECONSTRUCTED DIAGRAM`을 보이고 실제 Terminal screenshot으로 주장하지 않는다. 준비된 기록은 승인된 발표 media 자체가 아니므로 fallback은 아직 PLANNED다.
-Validation Status: PROVISIONAL — TRIAL-001 facts와 T07-A first implementation 대조 완료; 최종 media 선택, Hybrid activation, 발표 PC와 target-scale 가독성 미완료.</a:t>
-            </a:r>
-            <a:endParaRPr lang="en-US" dirty="0"/>
+              <a:t>## S05 — Agent가 Test와 호출 경로를 찾았다</a:t>
+            </a:r>
+          </a:p>
+          <a:p/>
+          <a:p>
+            <a:r>
+              <a:t>Slide ID: S05</a:t>
+            </a:r>
+          </a:p>
+          <a:p/>
+          <a:p>
+            <a:r>
+              <a:t>Working Title: Agent가 Test와 호출 경로를 찾았다</a:t>
+            </a:r>
+          </a:p>
+          <a:p/>
+          <a:p>
+            <a:r>
+              <a:t>ACT / Section: ACT 0 / 0D</a:t>
+            </a:r>
+          </a:p>
+          <a:p/>
+          <a:p>
+            <a:r>
+              <a:t>Allocated Time: 8 minutes</a:t>
+            </a:r>
+          </a:p>
+          <a:p/>
+          <a:p>
+            <a:r>
+              <a:t>Mode Split: Demo 8 minutes (정적 TRIAL-001 기록·재구성 도식 기본 경로; HYBRID는 발표 환경 검증 전까지 비활성)</a:t>
+            </a:r>
+          </a:p>
+          <a:p/>
+          <a:p>
+            <a:r>
+              <a:t>Primary Message: TRIAL-001 한 번의 읽기 전용 CLI 조사에서 Agent가 실패 Test, 구현 파일, 계약과 호출 경로를 찾아냈다.</a:t>
+            </a:r>
+          </a:p>
+          <a:p/>
+          <a:p>
+            <a:r>
+              <a:t>Opening Question: “지정하지 않은 파일과 호출 경로를 실제로 찾아냈는가?”</a:t>
+            </a:r>
+          </a:p>
+          <a:p/>
+          <a:p>
+            <a:r>
+              <a:t>Speaker Flow:</a:t>
+            </a:r>
+          </a:p>
+          <a:p/>
+          <a:p>
+            <a:r>
+              <a:t>1. **OPEN (0:00–1:00):** 기록 근거를 사용한 정적 발표임을 밝히고, S05는 TRIAL-001을 재구성한 도식이며 실제 CLI screenshot이 아님을 말한다.</a:t>
+            </a:r>
+          </a:p>
+          <a:p>
+            <a:r>
+              <a:t>2. **SHOW (1:00–3:00):** `tests/test_transform.py::test_crop_excludes_end_coordinate`를 가리킨다.</a:t>
+            </a:r>
+          </a:p>
+          <a:p>
+            <a:r>
+              <a:t>3. **TRACE (3:00–5:00):** `cli.main()` → `pipeline.process_image()` → `transform.crop()` 경로를 따라간다.</a:t>
+            </a:r>
+          </a:p>
+          <a:p>
+            <a:r>
+              <a:t>4. **INTERPRET (5:00–7:00):** 계약 `[x_start, x_end)`와 관찰된 `row[x_start : x_end + 1]` 구현의 차이를 설명한다. 수정은 아직 하지 않았다고 말한다.</a:t>
+            </a:r>
+          </a:p>
+          <a:p>
+            <a:r>
+              <a:t>5. **SCOPE / HANDOFF (7:00–8:00):** 관찰은 단일 read-only CLI run에 한정됨을 다시 말하고 S06에서 결과와 환경 오류를 분리한다. 기본 경로에서는 이 마지막 1분에 Trial 결과를 요약해 handoff한다. 향후 별도 검증 후 Live를 허용해도 7:00에 hard stop하고 기록된 정적 경로로 복귀한다.</a:t>
+            </a:r>
+          </a:p>
+          <a:p/>
+          <a:p>
+            <a:r>
+              <a:t>Evidence / Source: TRIAL-001, DEMO-01, STATE-00, CLM-0002, CLM-0009. 실패 Test 발견, 계약·구현 확인, 호출 경로 추적, extra-column 결과 설명, no-edit 준수는 해당 단일 run 기록에 있다.</a:t>
+            </a:r>
+          </a:p>
+          <a:p/>
+          <a:p>
+            <a:r>
+              <a:t>Claim Boundary: Codex CLI 0.154.0의 단일 read-only 조사다. 반복성, Codex Desktop, 교육 계정, 현재 제품 기능 또는 보편적인 탐색 능력을 입증하지 않는다. 도식은 TRIAL-001 기록을 재구성한 설명이며 원본 screenshot이 아니다.</a:t>
+            </a:r>
+          </a:p>
+          <a:p/>
+          <a:p>
+            <a:r>
+              <a:t>Beginner Explanation: 파일명을 미리 주지 않은 한 번의 조사에서 실패 Test와 관련 구현·호출 경로가 찾아졌다.</a:t>
+            </a:r>
+          </a:p>
+          <a:p/>
+          <a:p>
+            <a:r>
+              <a:t>Advanced Insight: 찾은 경로와 설명은 그 run에서 확인된 범위다. 설명과 수정, 검증은 다른 단계이며 이 Trial에서는 코드를 바꾸지 않았다.</a:t>
+            </a:r>
+          </a:p>
+          <a:p/>
+          <a:p>
+            <a:r>
+              <a:t>C++ Vision Bridge: N/A.</a:t>
+            </a:r>
+          </a:p>
+          <a:p/>
+          <a:p>
+            <a:r>
+              <a:t>Demo Operation: DEMO-01 / 기본 경로는 `production/ACT_0.pptx` S05 또는 `production/preview/act0/S05.png`의 정적 evidence다. 근거는 `plan/DEMO_MATRIX.md`의 TRIAL-001 기록이며, 현재 산출물의 도식은 해당 기록의 재구성이다. Label `RECONSTRUCTED DIAGRAM · TRIAL-001 RECORD`와 `OBSERVED PRODUCT · CODEX CLI 0.154.0 · READ-ONLY`를 유지한다. 원본 터미널 캡처는 없으며 도식을 실제 캡처로 제시하지 않는다. Live/Hybrid는 현재 발표 계정·surface와 실행 조건이 확인되지 않아 비활성이다. 향후 검증을 거쳐 허용된 Live가 기대 결과를 보이지 않거나 권한·setup이 다르면 즉시 중단하고 “현재 환경에서는 이 과정을 확인할 수 없어, 기록된 TRIAL-001로 돌아가겠습니다.”라고 말한 뒤 S05 정적 도식으로 복귀한다. 복귀는 약 15초를 예상하되 실제 운영 시간은 리허설 전까지 미검증이다.</a:t>
+            </a:r>
+          </a:p>
+          <a:p/>
+          <a:p>
+            <a:r>
+              <a:t>Audience Interaction: 청중은 S04의 세 Watch For를 확인한다. 중간 응답이나 실습을 요구하지 않는다.</a:t>
+            </a:r>
+          </a:p>
+          <a:p/>
+          <a:p>
+            <a:r>
+              <a:t>Transition: 발견 사실을 다음 장에서 Repository 관찰과 실행 환경 제한으로 나눈다.</a:t>
+            </a:r>
+          </a:p>
+          <a:p/>
+          <a:p>
+            <a:r>
+              <a:t>Time Management: 8분 배분은 유지한다: 0:00–1:00 범위와 재구성 표시, 1:00–3:00 Test, 3:00–5:00 path, 5:00–7:00 contract/구현 차이, 7:00–8:00 single-run 경계와 S06 handoff. 전체 로그·파일 목록·코드 수정은 보여 주지 않는다. Live를 향후 검증해 허용해도 7:00을 hard stop으로 삼고 총 8분을 넘기지 않는다.</a:t>
+            </a:r>
+          </a:p>
+          <a:p/>
+          <a:p>
+            <a:r>
+              <a:t>Fallback: READY — 기본 발표는 `production/ACT_0.pptx` S05와 `production/preview/act0/S05.png`의 정적 근거를 사용한다. 도식은 TRIAL-001 검증 기록을 재구성한 것이며 실제 terminal screenshot이 아니다. 현재 Live/HYBRID는 활성화하지 않는다. 향후 별도 검증 후 Live를 허용했을 때 권한, setup 또는 예상 관찰이 맞지 않으면 즉시 중단하고 “현재 환경에서는 이 과정을 확인할 수 없어, 기록된 TRIAL-001로 돌아가겠습니다.”라고 말한 뒤 S05 정적 도식으로 복귀한다. 전환은 약 15초로 예상하지만 리허설 전까지 UNVERIFIED. Windows·발표 PC·교육장 적합성은 미검증이다.</a:t>
+            </a:r>
+          </a:p>
+          <a:p/>
+          <a:p>
+            <a:r>
+              <a:t>Validation Status: REVIEWED — LOCAL STATIC PATH CONFIRMED — Trial 기록, 재구성 표시, 수정 PPTX와 최종 S05 PNG를 확인함. 실제 CLI capture는 없으며 Live/HYBRID, 교육 계정/surface, Windows, room readability 및 8분 리허설은 UNVERIFIED.</a:t>
+            </a:r>
           </a:p>
         </p:txBody>
       </p:sp>
@@ -1060,33 +1280,143 @@
           <a:lstStyle/>
           <a:p>
             <a:r>
-              <a:rPr lang="en-US" dirty="0"/>
-              <a:t>## S06 — 관찰 결과와 실행 제한을 분리한다
-Slide ID: S06
-Working Title: 관찰 결과와 실행 제한을 분리한다
-ACT / Section: ACT 0 / 0D
-Allocated Time: 5 minutes
-Mode Split: Case 5 minutes
-Primary Message: TRIAL-001은 Crop의 추가 열을 재현·설명했지만 코드는 수정하지 않았고, 임시 디렉터리를 만들지 못한 3건의 오류는 읽기 전용 환경 제한이었다.
-Opening Question: “어떤 결과가 Repository 관찰이고, 어떤 결과가 실행 환경 제한인가?”
-Speaker Flow:
-1. **OPEN (0:00–0:45):** 두 칸을 한 번에 보여 주되 Repository observation과 environment limitation을 서로 다른 질문으로 읽는다.
-2. **SHOW (0:45–2:15):** 관찰 칸에서 실패 Test, 계약/구현 차이, 코드 미수정을 짚는다.
-3. **SHOW (2:15–3:30):** 환경 칸에서 read-only sandbox가 임시 디렉터리 생성 3건을 막은 것을 짚는다.
-4. **INTERPRET / TRANSFER (3:30–5:00):** 환경 오류를 Crop 또는 Repository 결함으로 분류하지 않고 “관찰 사실과 실행 조건을 나눠 본다”로 마무리한다.
-Evidence / Source: TRIAL-001의 full suite 기록: 7 passing tests, 기대한 crop failure, 임시 디렉터리를 만들 수 없어 발생한 3 errors. Focused command 기록: 2 passing tests와 같은 crop failure. Working tree는 변경되지 않았다.
-Claim Boundary: 세 errors는 read-only 환경의 temp-directory 제한이며 crop bug의 근거가 아니다. TRIAL-001은 코드 수정을 수행하지 않았다. Trial 범위 밖의 테스트 결과, 제품 동작 또는 반복성을 추론하지 않는다.
-Beginner Explanation: 기능의 관찰 결과와 실행 환경의 제한을 서로 다른 원인으로 적는다.
-Advanced Insight: 실제 결함 징후, 권한·환경 오류, 미측정 사항을 분류해 후속 판단이 잘못된 원인에 고정되지 않게 한다.
-C++ Vision Bridge: N/A.
-Demo Operation: DEMO-01 / WHAT HAPPENED. 정적 evidence 요약만 사용한다. 실행이나 새 테스트를 하지 않는다. Observation과 Environment limitation은 다른 frame과 명시적 label로 분리한다.
-Audience Interaction: 질문은 결과 해석을 위한 Case cue다. 응답을 받거나 환경 오류를 해결하게 하지 않는다.
-Transition: “Context를 찾는 주체가 바뀌면 무엇이 달라질까요?”라는 질문으로 S07에 연결한다.
-Time Management: Repo observation과 environment limitation에 시간을 나눠 쓴다. 원인 경계를 줄여 말하더라도 3 errors를 crop 결함으로 부르지 않는다.
-Fallback: 화면을 사용할 수 없으면 두 구분을 말로 설명하고 기록된 숫자만 사용한다. 기억에 의존해 다른 결과를 만들지 않는다.
-Validation Status: PROVISIONAL — Trial record 및 T07-A first implementation 대조 완료; 최종 target display와 발표 속도 미검증.</a:t>
-            </a:r>
-            <a:endParaRPr lang="en-US" dirty="0"/>
+              <a:t>## S06 — 관찰 결과와 실행 제한을 분리한다</a:t>
+            </a:r>
+          </a:p>
+          <a:p/>
+          <a:p>
+            <a:r>
+              <a:t>Slide ID: S06</a:t>
+            </a:r>
+          </a:p>
+          <a:p/>
+          <a:p>
+            <a:r>
+              <a:t>Working Title: 관찰 결과와 실행 제한을 분리한다</a:t>
+            </a:r>
+          </a:p>
+          <a:p/>
+          <a:p>
+            <a:r>
+              <a:t>ACT / Section: ACT 0 / 0D</a:t>
+            </a:r>
+          </a:p>
+          <a:p/>
+          <a:p>
+            <a:r>
+              <a:t>Allocated Time: 5 minutes</a:t>
+            </a:r>
+          </a:p>
+          <a:p/>
+          <a:p>
+            <a:r>
+              <a:t>Mode Split: Case 5 minutes</a:t>
+            </a:r>
+          </a:p>
+          <a:p/>
+          <a:p>
+            <a:r>
+              <a:t>Primary Message: TRIAL-001은 Crop의 추가 열을 재현·설명했지만 코드는 수정하지 않았고, 임시 디렉터리를 만들지 못한 3건의 오류는 읽기 전용 환경 제한이었다.</a:t>
+            </a:r>
+          </a:p>
+          <a:p/>
+          <a:p>
+            <a:r>
+              <a:t>Opening Question: “어떤 결과가 Repository 관찰이고, 어떤 결과가 실행 환경 제한인가?”</a:t>
+            </a:r>
+          </a:p>
+          <a:p/>
+          <a:p>
+            <a:r>
+              <a:t>Speaker Flow:</a:t>
+            </a:r>
+          </a:p>
+          <a:p/>
+          <a:p>
+            <a:r>
+              <a:t>1. **OPEN (0:00–0:45):** 두 칸을 한 번에 보여 주되 Repository observation과 environment limitation을 서로 다른 질문으로 읽는다.</a:t>
+            </a:r>
+          </a:p>
+          <a:p>
+            <a:r>
+              <a:t>2. **SHOW (0:45–2:15):** 관찰 칸에서 실패 Test, 계약/구현 차이, 코드 미수정을 짚는다.</a:t>
+            </a:r>
+          </a:p>
+          <a:p>
+            <a:r>
+              <a:t>3. **SHOW (2:15–3:30):** 환경 칸에서 read-only sandbox가 임시 디렉터리 생성 3건을 막은 것을 짚는다.</a:t>
+            </a:r>
+          </a:p>
+          <a:p>
+            <a:r>
+              <a:t>4. **INTERPRET / TRANSFER (3:30–5:00):** 환경 오류를 Crop 또는 Repository 결함으로 분류하지 않고 “관찰 사실과 실행 조건을 나눠 본다”로 마무리한다.</a:t>
+            </a:r>
+          </a:p>
+          <a:p/>
+          <a:p>
+            <a:r>
+              <a:t>Evidence / Source: TRIAL-001의 full suite 기록: 7 passing tests, 기대한 crop failure, 임시 디렉터리를 만들 수 없어 발생한 3 errors. Focused command 기록: 2 passing tests와 같은 crop failure. Working tree는 변경되지 않았다.</a:t>
+            </a:r>
+          </a:p>
+          <a:p/>
+          <a:p>
+            <a:r>
+              <a:t>Claim Boundary: 세 errors는 read-only 환경의 temp-directory 제한이며 crop bug의 근거가 아니다. TRIAL-001은 코드 수정을 수행하지 않았다. Trial 범위 밖의 테스트 결과, 제품 동작 또는 반복성을 추론하지 않는다.</a:t>
+            </a:r>
+          </a:p>
+          <a:p/>
+          <a:p>
+            <a:r>
+              <a:t>Beginner Explanation: 기능의 관찰 결과와 실행 환경의 제한을 서로 다른 원인으로 적는다.</a:t>
+            </a:r>
+          </a:p>
+          <a:p/>
+          <a:p>
+            <a:r>
+              <a:t>Advanced Insight: 실제 결함 징후, 권한·환경 오류, 미측정 사항을 분류해 후속 판단이 잘못된 원인에 고정되지 않게 한다.</a:t>
+            </a:r>
+          </a:p>
+          <a:p/>
+          <a:p>
+            <a:r>
+              <a:t>C++ Vision Bridge: N/A.</a:t>
+            </a:r>
+          </a:p>
+          <a:p/>
+          <a:p>
+            <a:r>
+              <a:t>Demo Operation: DEMO-01 / WHAT HAPPENED. `production/ACT_0.pptx` S06 또는 `production/preview/act0/S06.png`로 관찰과 환경 제한을 정적으로 설명한다. 0:00–0:45 두 frame, 0:45–2:15 Repository observation, 2:15–3:30 environment limitation, 3:30–5:00 원인 경계와 S07 전이를 운영한다. 실행·새 테스트는 하지 않는다. Observation과 Environment limitation은 서로 다른 frame과 label로 유지한다.</a:t>
+            </a:r>
+          </a:p>
+          <a:p/>
+          <a:p>
+            <a:r>
+              <a:t>Audience Interaction: 질문은 결과 해석을 위한 Case cue다. 응답을 받거나 환경 오류를 해결하게 하지 않는다.</a:t>
+            </a:r>
+          </a:p>
+          <a:p/>
+          <a:p>
+            <a:r>
+              <a:t>Transition: “Context를 찾는 주체가 바뀌면 무엇이 달라질까요?”라는 질문으로 S07에 연결한다.</a:t>
+            </a:r>
+          </a:p>
+          <a:p/>
+          <a:p>
+            <a:r>
+              <a:t>Time Management: Repo observation과 environment limitation에 시간을 나눠 쓴다. 원인 경계를 줄여 말하더라도 3 errors를 crop 결함으로 부르지 않는다.</a:t>
+            </a:r>
+          </a:p>
+          <a:p/>
+          <a:p>
+            <a:r>
+              <a:t>Fallback: READY — 기본 발표는 `production/ACT_0.pptx` S06과 `production/preview/act0/S06.png`의 정적 화면을 사용한다. 화면이 안 보이면 TRIAL-001의 기록된 숫자와 Repository observation / environment limitation 두 범주만 말로 설명하고 새 결과를 보태지 않는다. S05에서 복귀한 경우 약 15초 뒤 S06으로 이어가며, 5분 Case time과 다음 Slide handoff를 지킨다. 전환 시간은 리허설 전까지 UNVERIFIED. Windows와 room visibility는 UNVERIFIED.</a:t>
+            </a:r>
+          </a:p>
+          <a:p/>
+          <a:p>
+            <a:r>
+              <a:t>Validation Status: REVIEWED — LOCAL STATIC PATH CONFIRMED — 수정 PPTX와 최종 한글 표시 S06 PNG를 확인함. 5분 운영 리허설, Windows PowerPoint 및 room readability는 UNVERIFIED.</a:t>
+            </a:r>
           </a:p>
         </p:txBody>
       </p:sp>
@@ -1887,7 +2217,7 @@
         <p:spPr>
           <a:xfrm>
             <a:off x="658368" y="384048"/>
-            <a:ext cx="3200400" cy="201168"/>
+            <a:ext cx="3200400" cy="237744"/>
           </a:xfrm>
           <a:prstGeom prst="rect">
             <a:avLst/>
@@ -1905,7 +2235,7 @@
               <a:buNone/>
             </a:pPr>
             <a:r>
-              <a:rPr lang="en-US" sz="1000" b="1" spc="30" kern="0" dirty="0">
+              <a:rPr lang="en-US" sz="1400" b="1" spc="30" kern="0" dirty="0">
                 <a:solidFill>
                   <a:srgbClr val="0B6172"/>
                 </a:solidFill>
@@ -1946,7 +2276,7 @@
               <a:buNone/>
             </a:pPr>
             <a:r>
-              <a:rPr lang="en-US" sz="3000" b="1" dirty="0">
+              <a:rPr lang="en-US" sz="3400" b="1" dirty="0">
                 <a:solidFill>
                   <a:srgbClr val="17212B"/>
                 </a:solidFill>
@@ -1968,8 +2298,8 @@
         </p:nvSpPr>
         <p:spPr>
           <a:xfrm>
-            <a:off x="9738360" y="6428232"/>
-            <a:ext cx="1783080" cy="182880"/>
+            <a:off x="9418320" y="6181344"/>
+            <a:ext cx="2103120" cy="228600"/>
           </a:xfrm>
           <a:prstGeom prst="rect">
             <a:avLst/>
@@ -1987,7 +2317,7 @@
               <a:buNone/>
             </a:pPr>
             <a:r>
-              <a:rPr lang="en-US" sz="900" dirty="0">
+              <a:rPr lang="en-US" sz="1400" dirty="0">
                 <a:solidFill>
                   <a:srgbClr val="5B6570"/>
                 </a:solidFill>
@@ -2010,7 +2340,7 @@
         <p:spPr>
           <a:xfrm>
             <a:off x="822960" y="1874520"/>
-            <a:ext cx="6400800" cy="201168"/>
+            <a:ext cx="6400800" cy="256032"/>
           </a:xfrm>
           <a:prstGeom prst="rect">
             <a:avLst/>
@@ -2028,7 +2358,7 @@
               <a:buNone/>
             </a:pPr>
             <a:r>
-              <a:rPr lang="en-US" sz="1000" b="1" spc="30" kern="0" dirty="0">
+              <a:rPr lang="en-US" sz="1400" b="1" spc="30" kern="0" dirty="0">
                 <a:solidFill>
                   <a:srgbClr val="5B6570"/>
                 </a:solidFill>
@@ -2567,7 +2897,7 @@
         <p:spPr>
           <a:xfrm>
             <a:off x="658368" y="384048"/>
-            <a:ext cx="3200400" cy="201168"/>
+            <a:ext cx="3200400" cy="237744"/>
           </a:xfrm>
           <a:prstGeom prst="rect">
             <a:avLst/>
@@ -2585,7 +2915,7 @@
               <a:buNone/>
             </a:pPr>
             <a:r>
-              <a:rPr lang="en-US" sz="1000" b="1" spc="30" kern="0" dirty="0">
+              <a:rPr lang="en-US" sz="1400" b="1" spc="30" kern="0" dirty="0">
                 <a:solidFill>
                   <a:srgbClr val="0B6172"/>
                 </a:solidFill>
@@ -2626,7 +2956,7 @@
               <a:buNone/>
             </a:pPr>
             <a:r>
-              <a:rPr lang="en-US" sz="3000" b="1" dirty="0">
+              <a:rPr lang="en-US" sz="3400" b="1" dirty="0">
                 <a:solidFill>
                   <a:srgbClr val="17212B"/>
                 </a:solidFill>
@@ -2648,8 +2978,8 @@
         </p:nvSpPr>
         <p:spPr>
           <a:xfrm>
-            <a:off x="9738360" y="6428232"/>
-            <a:ext cx="1783080" cy="182880"/>
+            <a:off x="9418320" y="6181344"/>
+            <a:ext cx="2103120" cy="228600"/>
           </a:xfrm>
           <a:prstGeom prst="rect">
             <a:avLst/>
@@ -2667,7 +2997,7 @@
               <a:buNone/>
             </a:pPr>
             <a:r>
-              <a:rPr lang="en-US" sz="900" dirty="0">
+              <a:rPr lang="en-US" sz="1400" dirty="0">
                 <a:solidFill>
                   <a:srgbClr val="5B6570"/>
                 </a:solidFill>
@@ -2717,7 +3047,7 @@
         <p:spPr>
           <a:xfrm>
             <a:off x="804672" y="2404872"/>
-            <a:ext cx="292608" cy="256032"/>
+            <a:ext cx="292608" cy="274320"/>
           </a:xfrm>
           <a:prstGeom prst="rect">
             <a:avLst/>
@@ -2735,7 +3065,7 @@
               <a:buNone/>
             </a:pPr>
             <a:r>
-              <a:rPr lang="en-US" sz="1200" b="1" dirty="0">
+              <a:rPr lang="en-US" sz="1400" b="1" dirty="0">
                 <a:solidFill>
                   <a:srgbClr val="0B6172"/>
                 </a:solidFill>
@@ -2776,7 +3106,7 @@
               <a:buNone/>
             </a:pPr>
             <a:r>
-              <a:rPr lang="en-US" sz="1700" b="1" dirty="0">
+              <a:rPr lang="en-US" sz="1800" b="1" dirty="0">
                 <a:solidFill>
                   <a:srgbClr val="17212B"/>
                 </a:solidFill>
@@ -2799,7 +3129,7 @@
         <p:spPr>
           <a:xfrm>
             <a:off x="786384" y="3163824"/>
-            <a:ext cx="1773936" cy="219456"/>
+            <a:ext cx="1773936" cy="256032"/>
           </a:xfrm>
           <a:prstGeom prst="rect">
             <a:avLst/>
@@ -2817,7 +3147,7 @@
               <a:buNone/>
             </a:pPr>
             <a:r>
-              <a:rPr lang="en-US" sz="1200" dirty="0">
+              <a:rPr lang="en-US" sz="1400" dirty="0">
                 <a:solidFill>
                   <a:srgbClr val="4D5A68"/>
                 </a:solidFill>
@@ -2908,7 +3238,7 @@
         <p:spPr>
           <a:xfrm>
             <a:off x="2999232" y="2404872"/>
-            <a:ext cx="292608" cy="256032"/>
+            <a:ext cx="292608" cy="274320"/>
           </a:xfrm>
           <a:prstGeom prst="rect">
             <a:avLst/>
@@ -2926,7 +3256,7 @@
               <a:buNone/>
             </a:pPr>
             <a:r>
-              <a:rPr lang="en-US" sz="1200" b="1" dirty="0">
+              <a:rPr lang="en-US" sz="1400" b="1" dirty="0">
                 <a:solidFill>
                   <a:srgbClr val="0B6172"/>
                 </a:solidFill>
@@ -2967,7 +3297,7 @@
               <a:buNone/>
             </a:pPr>
             <a:r>
-              <a:rPr lang="en-US" sz="1700" b="1" dirty="0">
+              <a:rPr lang="en-US" sz="1800" b="1" dirty="0">
                 <a:solidFill>
                   <a:srgbClr val="17212B"/>
                 </a:solidFill>
@@ -2990,7 +3320,7 @@
         <p:spPr>
           <a:xfrm>
             <a:off x="2980944" y="3163824"/>
-            <a:ext cx="1773936" cy="219456"/>
+            <a:ext cx="1773936" cy="256032"/>
           </a:xfrm>
           <a:prstGeom prst="rect">
             <a:avLst/>
@@ -3008,7 +3338,7 @@
               <a:buNone/>
             </a:pPr>
             <a:r>
-              <a:rPr lang="en-US" sz="1200" dirty="0">
+              <a:rPr lang="en-US" sz="1400" dirty="0">
                 <a:solidFill>
                   <a:srgbClr val="4D5A68"/>
                 </a:solidFill>
@@ -3099,7 +3429,7 @@
         <p:spPr>
           <a:xfrm>
             <a:off x="5193792" y="2404872"/>
-            <a:ext cx="292608" cy="256032"/>
+            <a:ext cx="292608" cy="274320"/>
           </a:xfrm>
           <a:prstGeom prst="rect">
             <a:avLst/>
@@ -3117,7 +3447,7 @@
               <a:buNone/>
             </a:pPr>
             <a:r>
-              <a:rPr lang="en-US" sz="1200" b="1" dirty="0">
+              <a:rPr lang="en-US" sz="1400" b="1" dirty="0">
                 <a:solidFill>
                   <a:srgbClr val="0B6172"/>
                 </a:solidFill>
@@ -3158,7 +3488,7 @@
               <a:buNone/>
             </a:pPr>
             <a:r>
-              <a:rPr lang="en-US" sz="1700" b="1" dirty="0">
+              <a:rPr lang="en-US" sz="1800" b="1" dirty="0">
                 <a:solidFill>
                   <a:srgbClr val="17212B"/>
                 </a:solidFill>
@@ -3181,7 +3511,7 @@
         <p:spPr>
           <a:xfrm>
             <a:off x="5175504" y="3163824"/>
-            <a:ext cx="1773936" cy="219456"/>
+            <a:ext cx="1773936" cy="256032"/>
           </a:xfrm>
           <a:prstGeom prst="rect">
             <a:avLst/>
@@ -3199,7 +3529,7 @@
               <a:buNone/>
             </a:pPr>
             <a:r>
-              <a:rPr lang="en-US" sz="1200" dirty="0">
+              <a:rPr lang="en-US" sz="1400" dirty="0">
                 <a:solidFill>
                   <a:srgbClr val="4D5A68"/>
                 </a:solidFill>
@@ -3290,7 +3620,7 @@
         <p:spPr>
           <a:xfrm>
             <a:off x="7388352" y="2404872"/>
-            <a:ext cx="292608" cy="256032"/>
+            <a:ext cx="292608" cy="274320"/>
           </a:xfrm>
           <a:prstGeom prst="rect">
             <a:avLst/>
@@ -3308,7 +3638,7 @@
               <a:buNone/>
             </a:pPr>
             <a:r>
-              <a:rPr lang="en-US" sz="1200" b="1" dirty="0">
+              <a:rPr lang="en-US" sz="1400" b="1" dirty="0">
                 <a:solidFill>
                   <a:srgbClr val="0B6172"/>
                 </a:solidFill>
@@ -3349,7 +3679,7 @@
               <a:buNone/>
             </a:pPr>
             <a:r>
-              <a:rPr lang="en-US" sz="1700" b="1" dirty="0">
+              <a:rPr lang="en-US" sz="1800" b="1" dirty="0">
                 <a:solidFill>
                   <a:srgbClr val="17212B"/>
                 </a:solidFill>
@@ -3372,7 +3702,7 @@
         <p:spPr>
           <a:xfrm>
             <a:off x="7370064" y="3163824"/>
-            <a:ext cx="1773936" cy="219456"/>
+            <a:ext cx="1773936" cy="256032"/>
           </a:xfrm>
           <a:prstGeom prst="rect">
             <a:avLst/>
@@ -3390,7 +3720,7 @@
               <a:buNone/>
             </a:pPr>
             <a:r>
-              <a:rPr lang="en-US" sz="1200" dirty="0">
+              <a:rPr lang="en-US" sz="1400" dirty="0">
                 <a:solidFill>
                   <a:srgbClr val="4D5A68"/>
                 </a:solidFill>
@@ -3481,7 +3811,7 @@
         <p:spPr>
           <a:xfrm>
             <a:off x="9582912" y="2404872"/>
-            <a:ext cx="292608" cy="256032"/>
+            <a:ext cx="292608" cy="274320"/>
           </a:xfrm>
           <a:prstGeom prst="rect">
             <a:avLst/>
@@ -3499,7 +3829,7 @@
               <a:buNone/>
             </a:pPr>
             <a:r>
-              <a:rPr lang="en-US" sz="1200" b="1" dirty="0">
+              <a:rPr lang="en-US" sz="1400" b="1" dirty="0">
                 <a:solidFill>
                   <a:srgbClr val="0B6172"/>
                 </a:solidFill>
@@ -3540,7 +3870,7 @@
               <a:buNone/>
             </a:pPr>
             <a:r>
-              <a:rPr lang="en-US" sz="1700" b="1" dirty="0">
+              <a:rPr lang="en-US" sz="1800" b="1" dirty="0">
                 <a:solidFill>
                   <a:srgbClr val="17212B"/>
                 </a:solidFill>
@@ -3563,7 +3893,7 @@
         <p:spPr>
           <a:xfrm>
             <a:off x="9564624" y="3163824"/>
-            <a:ext cx="1773936" cy="219456"/>
+            <a:ext cx="1773936" cy="256032"/>
           </a:xfrm>
           <a:prstGeom prst="rect">
             <a:avLst/>
@@ -3581,7 +3911,7 @@
               <a:buNone/>
             </a:pPr>
             <a:r>
-              <a:rPr lang="en-US" sz="1200" dirty="0">
+              <a:rPr lang="en-US" sz="1400" dirty="0">
                 <a:solidFill>
                   <a:srgbClr val="4D5A68"/>
                 </a:solidFill>
@@ -3672,7 +4002,7 @@
         <p:spPr>
           <a:xfrm>
             <a:off x="1115568" y="5394960"/>
-            <a:ext cx="6400800" cy="201168"/>
+            <a:ext cx="6400800" cy="256032"/>
           </a:xfrm>
           <a:prstGeom prst="rect">
             <a:avLst/>
@@ -3690,7 +4020,7 @@
               <a:buNone/>
             </a:pPr>
             <a:r>
-              <a:rPr lang="en-US" sz="1000" b="1" spc="30" kern="0" dirty="0">
+              <a:rPr lang="en-US" sz="1400" b="1" spc="30" kern="0" dirty="0">
                 <a:solidFill>
                   <a:srgbClr val="5B6570"/>
                 </a:solidFill>
@@ -3738,7 +4068,7 @@
         <p:spPr>
           <a:xfrm>
             <a:off x="658368" y="384048"/>
-            <a:ext cx="3200400" cy="201168"/>
+            <a:ext cx="3200400" cy="237744"/>
           </a:xfrm>
           <a:prstGeom prst="rect">
             <a:avLst/>
@@ -3756,7 +4086,7 @@
               <a:buNone/>
             </a:pPr>
             <a:r>
-              <a:rPr lang="en-US" sz="1000" b="1" spc="30" kern="0" dirty="0">
+              <a:rPr lang="en-US" sz="1400" b="1" spc="30" kern="0" dirty="0">
                 <a:solidFill>
                   <a:srgbClr val="0B6172"/>
                 </a:solidFill>
@@ -3797,7 +4127,7 @@
               <a:buNone/>
             </a:pPr>
             <a:r>
-              <a:rPr lang="en-US" sz="3000" b="1" dirty="0">
+              <a:rPr lang="en-US" sz="3400" b="1" dirty="0">
                 <a:solidFill>
                   <a:srgbClr val="17212B"/>
                 </a:solidFill>
@@ -3819,8 +4149,8 @@
         </p:nvSpPr>
         <p:spPr>
           <a:xfrm>
-            <a:off x="9738360" y="6428232"/>
-            <a:ext cx="1783080" cy="182880"/>
+            <a:off x="9418320" y="6181344"/>
+            <a:ext cx="2103120" cy="228600"/>
           </a:xfrm>
           <a:prstGeom prst="rect">
             <a:avLst/>
@@ -3838,7 +4168,7 @@
               <a:buNone/>
             </a:pPr>
             <a:r>
-              <a:rPr lang="en-US" sz="900" dirty="0">
+              <a:rPr lang="en-US" sz="1400" dirty="0">
                 <a:solidFill>
                   <a:srgbClr val="5B6570"/>
                 </a:solidFill>
@@ -3906,7 +4236,7 @@
               <a:buNone/>
             </a:pPr>
             <a:r>
-              <a:rPr lang="en-US" sz="1000" b="1" dirty="0">
+              <a:rPr lang="en-US" sz="1400" b="1" dirty="0">
                 <a:solidFill>
                   <a:srgbClr val="4D5A68"/>
                 </a:solidFill>
@@ -3956,7 +4286,7 @@
         <p:spPr>
           <a:xfrm>
             <a:off x="1024128" y="2542032"/>
-            <a:ext cx="1920240" cy="201168"/>
+            <a:ext cx="1920240" cy="256032"/>
           </a:xfrm>
           <a:prstGeom prst="rect">
             <a:avLst/>
@@ -3974,7 +4304,7 @@
               <a:buNone/>
             </a:pPr>
             <a:r>
-              <a:rPr lang="en-US" sz="1000" b="1" spc="30" kern="0" dirty="0">
+              <a:rPr lang="en-US" sz="1400" b="1" spc="30" kern="0" dirty="0">
                 <a:solidFill>
                   <a:srgbClr val="0B6172"/>
                 </a:solidFill>
@@ -4055,7 +4385,7 @@
         <p:spPr>
           <a:xfrm>
             <a:off x="1005840" y="4041648"/>
-            <a:ext cx="1975104" cy="347472"/>
+            <a:ext cx="1975104" cy="365760"/>
           </a:xfrm>
           <a:prstGeom prst="rect">
             <a:avLst/>
@@ -4073,7 +4403,7 @@
               <a:buNone/>
             </a:pPr>
             <a:r>
-              <a:rPr lang="en-US" sz="1300" dirty="0">
+              <a:rPr lang="en-US" sz="1500" dirty="0">
                 <a:solidFill>
                   <a:srgbClr val="4D5A68"/>
                 </a:solidFill>
@@ -4137,7 +4467,7 @@
         <p:spPr>
           <a:xfrm>
             <a:off x="3950208" y="2075688"/>
-            <a:ext cx="4114800" cy="201168"/>
+            <a:ext cx="4114800" cy="256032"/>
           </a:xfrm>
           <a:prstGeom prst="rect">
             <a:avLst/>
@@ -4155,7 +4485,7 @@
               <a:buNone/>
             </a:pPr>
             <a:r>
-              <a:rPr lang="en-US" sz="1000" b="1" spc="30" kern="0" dirty="0">
+              <a:rPr lang="en-US" sz="1400" b="1" spc="30" kern="0" dirty="0">
                 <a:solidFill>
                   <a:srgbClr val="5B6570"/>
                 </a:solidFill>
@@ -4223,7 +4553,7 @@
               <a:buNone/>
             </a:pPr>
             <a:r>
-              <a:rPr lang="en-US" sz="1600" b="1" dirty="0">
+              <a:rPr lang="en-US" sz="1700" b="1" dirty="0">
                 <a:solidFill>
                   <a:srgbClr val="17212B"/>
                 </a:solidFill>
@@ -4246,7 +4576,7 @@
         <p:spPr>
           <a:xfrm>
             <a:off x="4059936" y="2926080"/>
-            <a:ext cx="1609344" cy="201168"/>
+            <a:ext cx="1609344" cy="237744"/>
           </a:xfrm>
           <a:prstGeom prst="rect">
             <a:avLst/>
@@ -4264,7 +4594,7 @@
               <a:buNone/>
             </a:pPr>
             <a:r>
-              <a:rPr lang="en-US" sz="1100" dirty="0">
+              <a:rPr lang="en-US" sz="1400" dirty="0">
                 <a:solidFill>
                   <a:srgbClr val="4D5A68"/>
                 </a:solidFill>
@@ -4332,7 +4662,7 @@
               <a:buNone/>
             </a:pPr>
             <a:r>
-              <a:rPr lang="en-US" sz="1600" b="1" dirty="0">
+              <a:rPr lang="en-US" sz="1700" b="1" dirty="0">
                 <a:solidFill>
                   <a:srgbClr val="17212B"/>
                 </a:solidFill>
@@ -4355,7 +4685,7 @@
         <p:spPr>
           <a:xfrm>
             <a:off x="6071616" y="2926080"/>
-            <a:ext cx="1609344" cy="201168"/>
+            <a:ext cx="1609344" cy="237744"/>
           </a:xfrm>
           <a:prstGeom prst="rect">
             <a:avLst/>
@@ -4373,7 +4703,7 @@
               <a:buNone/>
             </a:pPr>
             <a:r>
-              <a:rPr lang="en-US" sz="1100" dirty="0">
+              <a:rPr lang="en-US" sz="1400" dirty="0">
                 <a:solidFill>
                   <a:srgbClr val="4D5A68"/>
                 </a:solidFill>
@@ -4441,7 +4771,7 @@
               <a:buNone/>
             </a:pPr>
             <a:r>
-              <a:rPr lang="en-US" sz="1600" b="1" dirty="0">
+              <a:rPr lang="en-US" sz="1700" b="1" dirty="0">
                 <a:solidFill>
                   <a:srgbClr val="17212B"/>
                 </a:solidFill>
@@ -4464,7 +4794,7 @@
         <p:spPr>
           <a:xfrm>
             <a:off x="4059936" y="4206240"/>
-            <a:ext cx="1609344" cy="201168"/>
+            <a:ext cx="1609344" cy="237744"/>
           </a:xfrm>
           <a:prstGeom prst="rect">
             <a:avLst/>
@@ -4482,7 +4812,7 @@
               <a:buNone/>
             </a:pPr>
             <a:r>
-              <a:rPr lang="en-US" sz="1100" dirty="0">
+              <a:rPr lang="en-US" sz="1400" dirty="0">
                 <a:solidFill>
                   <a:srgbClr val="4D5A68"/>
                 </a:solidFill>
@@ -4550,7 +4880,7 @@
               <a:buNone/>
             </a:pPr>
             <a:r>
-              <a:rPr lang="en-US" sz="1600" b="1" dirty="0">
+              <a:rPr lang="en-US" sz="1700" b="1" dirty="0">
                 <a:solidFill>
                   <a:srgbClr val="17212B"/>
                 </a:solidFill>
@@ -4573,7 +4903,7 @@
         <p:spPr>
           <a:xfrm>
             <a:off x="6071616" y="4206240"/>
-            <a:ext cx="1609344" cy="201168"/>
+            <a:ext cx="1609344" cy="237744"/>
           </a:xfrm>
           <a:prstGeom prst="rect">
             <a:avLst/>
@@ -4591,7 +4921,7 @@
               <a:buNone/>
             </a:pPr>
             <a:r>
-              <a:rPr lang="en-US" sz="1100" dirty="0">
+              <a:rPr lang="en-US" sz="1400" dirty="0">
                 <a:solidFill>
                   <a:srgbClr val="4D5A68"/>
                 </a:solidFill>
@@ -4682,7 +5012,7 @@
         <p:spPr>
           <a:xfrm>
             <a:off x="8750808" y="2578608"/>
-            <a:ext cx="2331720" cy="201168"/>
+            <a:ext cx="2331720" cy="256032"/>
           </a:xfrm>
           <a:prstGeom prst="rect">
             <a:avLst/>
@@ -4700,7 +5030,7 @@
               <a:buNone/>
             </a:pPr>
             <a:r>
-              <a:rPr lang="en-US" sz="1000" b="1" spc="30" kern="0" dirty="0">
+              <a:rPr lang="en-US" sz="1400" b="1" spc="30" kern="0" dirty="0">
                 <a:solidFill>
                   <a:srgbClr val="0B6172"/>
                 </a:solidFill>
@@ -4781,7 +5111,7 @@
         <p:spPr>
           <a:xfrm>
             <a:off x="8705088" y="4160520"/>
-            <a:ext cx="2414016" cy="274320"/>
+            <a:ext cx="2414016" cy="256032"/>
           </a:xfrm>
           <a:prstGeom prst="rect">
             <a:avLst/>
@@ -4799,7 +5129,7 @@
               <a:buNone/>
             </a:pPr>
             <a:r>
-              <a:rPr lang="en-US" sz="1200" dirty="0">
+              <a:rPr lang="en-US" sz="1400" dirty="0">
                 <a:solidFill>
                   <a:srgbClr val="4D5A68"/>
                 </a:solidFill>
@@ -4847,7 +5177,7 @@
         <p:spPr>
           <a:xfrm>
             <a:off x="658368" y="384048"/>
-            <a:ext cx="3200400" cy="201168"/>
+            <a:ext cx="3200400" cy="237744"/>
           </a:xfrm>
           <a:prstGeom prst="rect">
             <a:avLst/>
@@ -4865,7 +5195,7 @@
               <a:buNone/>
             </a:pPr>
             <a:r>
-              <a:rPr lang="en-US" sz="1000" b="1" spc="30" kern="0" dirty="0">
+              <a:rPr lang="en-US" sz="1400" b="1" spc="30" kern="0" dirty="0">
                 <a:solidFill>
                   <a:srgbClr val="0B6172"/>
                 </a:solidFill>
@@ -4906,7 +5236,7 @@
               <a:buNone/>
             </a:pPr>
             <a:r>
-              <a:rPr lang="en-US" sz="3000" b="1" dirty="0">
+              <a:rPr lang="en-US" sz="3400" b="1" dirty="0">
                 <a:solidFill>
                   <a:srgbClr val="17212B"/>
                 </a:solidFill>
@@ -4928,8 +5258,8 @@
         </p:nvSpPr>
         <p:spPr>
           <a:xfrm>
-            <a:off x="9738360" y="6428232"/>
-            <a:ext cx="1783080" cy="182880"/>
+            <a:off x="9418320" y="6181344"/>
+            <a:ext cx="2103120" cy="228600"/>
           </a:xfrm>
           <a:prstGeom prst="rect">
             <a:avLst/>
@@ -4947,7 +5277,7 @@
               <a:buNone/>
             </a:pPr>
             <a:r>
-              <a:rPr lang="en-US" sz="900" dirty="0">
+              <a:rPr lang="en-US" sz="1400" dirty="0">
                 <a:solidFill>
                   <a:srgbClr val="5B6570"/>
                 </a:solidFill>
@@ -4970,7 +5300,7 @@
         <p:spPr>
           <a:xfrm>
             <a:off x="786384" y="1664208"/>
-            <a:ext cx="1188720" cy="201168"/>
+            <a:ext cx="1188720" cy="256032"/>
           </a:xfrm>
           <a:prstGeom prst="rect">
             <a:avLst/>
@@ -4988,7 +5318,7 @@
               <a:buNone/>
             </a:pPr>
             <a:r>
-              <a:rPr lang="en-US" sz="1000" b="1" spc="30" kern="0" dirty="0">
+              <a:rPr lang="en-US" sz="1400" b="1" spc="30" kern="0" dirty="0">
                 <a:solidFill>
                   <a:srgbClr val="0B6172"/>
                 </a:solidFill>
@@ -5052,7 +5382,7 @@
         <p:spPr>
           <a:xfrm>
             <a:off x="786384" y="2514600"/>
-            <a:ext cx="2194560" cy="201168"/>
+            <a:ext cx="2194560" cy="256032"/>
           </a:xfrm>
           <a:prstGeom prst="rect">
             <a:avLst/>
@@ -5070,7 +5400,7 @@
               <a:buNone/>
             </a:pPr>
             <a:r>
-              <a:rPr lang="en-US" sz="1000" b="1" spc="30" kern="0" dirty="0">
+              <a:rPr lang="en-US" sz="1400" b="1" spc="30" kern="0" dirty="0">
                 <a:solidFill>
                   <a:srgbClr val="0B6172"/>
                 </a:solidFill>
@@ -5120,7 +5450,7 @@
         <p:spPr>
           <a:xfrm>
             <a:off x="950976" y="3063240"/>
-            <a:ext cx="402336" cy="274320"/>
+            <a:ext cx="402336" cy="292608"/>
           </a:xfrm>
           <a:prstGeom prst="rect">
             <a:avLst/>
@@ -5138,7 +5468,7 @@
               <a:buNone/>
             </a:pPr>
             <a:r>
-              <a:rPr lang="en-US" sz="1400" b="1" dirty="0">
+              <a:rPr lang="en-US" sz="1600" b="1" dirty="0">
                 <a:solidFill>
                   <a:srgbClr val="0B6172"/>
                 </a:solidFill>
@@ -5161,7 +5491,7 @@
         <p:spPr>
           <a:xfrm>
             <a:off x="1499616" y="3035808"/>
-            <a:ext cx="2450592" cy="329184"/>
+            <a:ext cx="2450592" cy="365760"/>
           </a:xfrm>
           <a:prstGeom prst="rect">
             <a:avLst/>
@@ -5179,7 +5509,7 @@
               <a:buNone/>
             </a:pPr>
             <a:r>
-              <a:rPr lang="en-US" sz="1900" b="1" dirty="0">
+              <a:rPr lang="en-US" sz="2000" b="1" dirty="0">
                 <a:solidFill>
                   <a:srgbClr val="17212B"/>
                 </a:solidFill>
@@ -5229,7 +5559,7 @@
         <p:spPr>
           <a:xfrm>
             <a:off x="4681728" y="3063240"/>
-            <a:ext cx="402336" cy="274320"/>
+            <a:ext cx="402336" cy="292608"/>
           </a:xfrm>
           <a:prstGeom prst="rect">
             <a:avLst/>
@@ -5247,7 +5577,7 @@
               <a:buNone/>
             </a:pPr>
             <a:r>
-              <a:rPr lang="en-US" sz="1400" b="1" dirty="0">
+              <a:rPr lang="en-US" sz="1600" b="1" dirty="0">
                 <a:solidFill>
                   <a:srgbClr val="0B6172"/>
                 </a:solidFill>
@@ -5270,7 +5600,7 @@
         <p:spPr>
           <a:xfrm>
             <a:off x="5230368" y="3035808"/>
-            <a:ext cx="2450592" cy="329184"/>
+            <a:ext cx="2450592" cy="365760"/>
           </a:xfrm>
           <a:prstGeom prst="rect">
             <a:avLst/>
@@ -5288,7 +5618,7 @@
               <a:buNone/>
             </a:pPr>
             <a:r>
-              <a:rPr lang="en-US" sz="1900" b="1" dirty="0">
+              <a:rPr lang="en-US" sz="2000" b="1" dirty="0">
                 <a:solidFill>
                   <a:srgbClr val="17212B"/>
                 </a:solidFill>
@@ -5338,7 +5668,7 @@
         <p:spPr>
           <a:xfrm>
             <a:off x="8412480" y="3063240"/>
-            <a:ext cx="402336" cy="274320"/>
+            <a:ext cx="402336" cy="292608"/>
           </a:xfrm>
           <a:prstGeom prst="rect">
             <a:avLst/>
@@ -5356,7 +5686,7 @@
               <a:buNone/>
             </a:pPr>
             <a:r>
-              <a:rPr lang="en-US" sz="1400" b="1" dirty="0">
+              <a:rPr lang="en-US" sz="1600" b="1" dirty="0">
                 <a:solidFill>
                   <a:srgbClr val="0B6172"/>
                 </a:solidFill>
@@ -5379,7 +5709,7 @@
         <p:spPr>
           <a:xfrm>
             <a:off x="8961120" y="3035808"/>
-            <a:ext cx="2450592" cy="329184"/>
+            <a:ext cx="2450592" cy="365760"/>
           </a:xfrm>
           <a:prstGeom prst="rect">
             <a:avLst/>
@@ -5397,7 +5727,7 @@
               <a:buNone/>
             </a:pPr>
             <a:r>
-              <a:rPr lang="en-US" sz="1900" b="1" dirty="0">
+              <a:rPr lang="en-US" sz="2000" b="1" dirty="0">
                 <a:solidFill>
                   <a:srgbClr val="17212B"/>
                 </a:solidFill>
@@ -5447,7 +5777,7 @@
         <p:spPr>
           <a:xfrm>
             <a:off x="1024128" y="4032504"/>
-            <a:ext cx="10405872" cy="274320"/>
+            <a:ext cx="10405872" cy="310896"/>
           </a:xfrm>
           <a:prstGeom prst="rect">
             <a:avLst/>
@@ -5465,7 +5795,7 @@
               <a:buNone/>
             </a:pPr>
             <a:r>
-              <a:rPr lang="en-US" sz="1500" b="1" dirty="0">
+              <a:rPr lang="en-US" sz="1600" b="1" dirty="0">
                 <a:solidFill>
                   <a:srgbClr val="17212B"/>
                 </a:solidFill>
@@ -5515,7 +5845,7 @@
         <p:spPr>
           <a:xfrm>
             <a:off x="1024128" y="5010912"/>
-            <a:ext cx="1143000" cy="201168"/>
+            <a:ext cx="1143000" cy="256032"/>
           </a:xfrm>
           <a:prstGeom prst="rect">
             <a:avLst/>
@@ -5533,7 +5863,7 @@
               <a:buNone/>
             </a:pPr>
             <a:r>
-              <a:rPr lang="en-US" sz="1000" b="1" spc="30" kern="0" dirty="0">
+              <a:rPr lang="en-US" sz="1400" b="1" spc="30" kern="0" dirty="0">
                 <a:solidFill>
                   <a:srgbClr val="5B6570"/>
                 </a:solidFill>
@@ -5555,8 +5885,8 @@
         </p:nvSpPr>
         <p:spPr>
           <a:xfrm>
-            <a:off x="822960" y="5742432"/>
-            <a:ext cx="10789920" cy="219456"/>
+            <a:off x="822960" y="5705856"/>
+            <a:ext cx="10789920" cy="292608"/>
           </a:xfrm>
           <a:prstGeom prst="rect">
             <a:avLst/>
@@ -5574,7 +5904,7 @@
               <a:buNone/>
             </a:pPr>
             <a:r>
-              <a:rPr lang="en-US" sz="1100" dirty="0">
+              <a:rPr lang="en-US" sz="1600" dirty="0">
                 <a:solidFill>
                   <a:srgbClr val="5B6570"/>
                 </a:solidFill>
@@ -5622,7 +5952,7 @@
         <p:spPr>
           <a:xfrm>
             <a:off x="658368" y="384048"/>
-            <a:ext cx="3200400" cy="201168"/>
+            <a:ext cx="3200400" cy="237744"/>
           </a:xfrm>
           <a:prstGeom prst="rect">
             <a:avLst/>
@@ -5640,7 +5970,7 @@
               <a:buNone/>
             </a:pPr>
             <a:r>
-              <a:rPr lang="en-US" sz="1000" b="1" spc="30" kern="0" dirty="0">
+              <a:rPr lang="en-US" sz="1400" b="1" spc="30" kern="0" dirty="0">
                 <a:solidFill>
                   <a:srgbClr val="0B6172"/>
                 </a:solidFill>
@@ -5681,7 +6011,7 @@
               <a:buNone/>
             </a:pPr>
             <a:r>
-              <a:rPr lang="en-US" sz="3000" b="1" dirty="0">
+              <a:rPr lang="en-US" sz="3400" b="1" dirty="0">
                 <a:solidFill>
                   <a:srgbClr val="17212B"/>
                 </a:solidFill>
@@ -5703,8 +6033,8 @@
         </p:nvSpPr>
         <p:spPr>
           <a:xfrm>
-            <a:off x="9738360" y="6428232"/>
-            <a:ext cx="1783080" cy="182880"/>
+            <a:off x="9418320" y="6181344"/>
+            <a:ext cx="2103120" cy="228600"/>
           </a:xfrm>
           <a:prstGeom prst="rect">
             <a:avLst/>
@@ -5722,7 +6052,7 @@
               <a:buNone/>
             </a:pPr>
             <a:r>
-              <a:rPr lang="en-US" sz="900" dirty="0">
+              <a:rPr lang="en-US" sz="1400" dirty="0">
                 <a:solidFill>
                   <a:srgbClr val="5B6570"/>
                 </a:solidFill>
@@ -5772,7 +6102,7 @@
         <p:spPr>
           <a:xfrm>
             <a:off x="896112" y="1746504"/>
-            <a:ext cx="3063240" cy="347472"/>
+            <a:ext cx="3520440" cy="347472"/>
           </a:xfrm>
           <a:prstGeom prst="roundRect">
             <a:avLst>
@@ -5799,7 +6129,7 @@
         <p:spPr>
           <a:xfrm>
             <a:off x="987552" y="1783080"/>
-            <a:ext cx="2880360" cy="256032"/>
+            <a:ext cx="3337560" cy="274320"/>
           </a:xfrm>
           <a:prstGeom prst="rect">
             <a:avLst/>
@@ -5817,7 +6147,7 @@
               <a:buNone/>
             </a:pPr>
             <a:r>
-              <a:rPr lang="en-US" sz="1000" b="1" dirty="0">
+              <a:rPr lang="en-US" sz="1400" b="1" dirty="0">
                 <a:solidFill>
                   <a:srgbClr val="176B4D"/>
                 </a:solidFill>
@@ -5839,8 +6169,8 @@
         </p:nvSpPr>
         <p:spPr>
           <a:xfrm>
-            <a:off x="7251192" y="1746504"/>
-            <a:ext cx="3968496" cy="347472"/>
+            <a:off x="6793992" y="1746504"/>
+            <a:ext cx="4425696" cy="347472"/>
           </a:xfrm>
           <a:prstGeom prst="roundRect">
             <a:avLst>
@@ -5866,8 +6196,8 @@
         </p:nvSpPr>
         <p:spPr>
           <a:xfrm>
-            <a:off x="7342632" y="1783080"/>
-            <a:ext cx="3785616" cy="256032"/>
+            <a:off x="6885432" y="1783080"/>
+            <a:ext cx="4242816" cy="274320"/>
           </a:xfrm>
           <a:prstGeom prst="rect">
             <a:avLst/>
@@ -5885,7 +6215,7 @@
               <a:buNone/>
             </a:pPr>
             <a:r>
-              <a:rPr lang="en-US" sz="1000" b="1" dirty="0">
+              <a:rPr lang="en-US" sz="1400" b="1" dirty="0">
                 <a:solidFill>
                   <a:srgbClr val="4D5A68"/>
                 </a:solidFill>
@@ -5908,7 +6238,7 @@
         <p:spPr>
           <a:xfrm>
             <a:off x="914400" y="2221992"/>
-            <a:ext cx="10369296" cy="237744"/>
+            <a:ext cx="10369296" cy="292608"/>
           </a:xfrm>
           <a:prstGeom prst="rect">
             <a:avLst/>
@@ -5926,7 +6256,7 @@
               <a:buNone/>
             </a:pPr>
             <a:r>
-              <a:rPr lang="en-US" sz="1200" dirty="0">
+              <a:rPr lang="en-US" sz="1600" dirty="0">
                 <a:solidFill>
                   <a:srgbClr val="5B6570"/>
                 </a:solidFill>
@@ -5949,7 +6279,7 @@
         <p:spPr>
           <a:xfrm>
             <a:off x="914400" y="2651760"/>
-            <a:ext cx="2743200" cy="201168"/>
+            <a:ext cx="2743200" cy="256032"/>
           </a:xfrm>
           <a:prstGeom prst="rect">
             <a:avLst/>
@@ -5967,7 +6297,7 @@
               <a:buNone/>
             </a:pPr>
             <a:r>
-              <a:rPr lang="en-US" sz="1000" b="1" spc="30" kern="0" dirty="0">
+              <a:rPr lang="en-US" sz="1400" b="1" spc="30" kern="0" dirty="0">
                 <a:solidFill>
                   <a:srgbClr val="0B6172"/>
                 </a:solidFill>
@@ -6017,7 +6347,7 @@
         <p:spPr>
           <a:xfrm>
             <a:off x="1143000" y="3054096"/>
-            <a:ext cx="9912096" cy="310896"/>
+            <a:ext cx="9912096" cy="347472"/>
           </a:xfrm>
           <a:prstGeom prst="rect">
             <a:avLst/>
@@ -6035,7 +6365,7 @@
               <a:buNone/>
             </a:pPr>
             <a:r>
-              <a:rPr lang="en-US" sz="1800" b="1" dirty="0">
+              <a:rPr lang="en-US" sz="2000" b="1" dirty="0">
                 <a:solidFill>
                   <a:srgbClr val="17212B"/>
                 </a:solidFill>
@@ -6058,7 +6388,7 @@
         <p:spPr>
           <a:xfrm>
             <a:off x="914400" y="3730752"/>
-            <a:ext cx="2743200" cy="201168"/>
+            <a:ext cx="2743200" cy="256032"/>
           </a:xfrm>
           <a:prstGeom prst="rect">
             <a:avLst/>
@@ -6076,7 +6406,7 @@
               <a:buNone/>
             </a:pPr>
             <a:r>
-              <a:rPr lang="en-US" sz="1000" b="1" spc="30" kern="0" dirty="0">
+              <a:rPr lang="en-US" sz="1400" b="1" spc="30" kern="0" dirty="0">
                 <a:solidFill>
                   <a:srgbClr val="0B6172"/>
                 </a:solidFill>
@@ -6125,8 +6455,8 @@
         </p:nvSpPr>
         <p:spPr>
           <a:xfrm>
-            <a:off x="1024128" y="4142232"/>
-            <a:ext cx="3026664" cy="292608"/>
+            <a:off x="1024128" y="4114800"/>
+            <a:ext cx="3026664" cy="347472"/>
           </a:xfrm>
           <a:prstGeom prst="rect">
             <a:avLst/>
@@ -6144,7 +6474,7 @@
               <a:buNone/>
             </a:pPr>
             <a:r>
-              <a:rPr lang="en-US" sz="1400" b="1" dirty="0">
+              <a:rPr lang="en-US" sz="1600" b="1" dirty="0">
                 <a:solidFill>
                   <a:srgbClr val="17212B"/>
                 </a:solidFill>
@@ -6234,8 +6564,8 @@
         </p:nvSpPr>
         <p:spPr>
           <a:xfrm>
-            <a:off x="4681728" y="4142232"/>
-            <a:ext cx="3026664" cy="292608"/>
+            <a:off x="4681728" y="4114800"/>
+            <a:ext cx="3026664" cy="347472"/>
           </a:xfrm>
           <a:prstGeom prst="rect">
             <a:avLst/>
@@ -6253,7 +6583,7 @@
               <a:buNone/>
             </a:pPr>
             <a:r>
-              <a:rPr lang="en-US" sz="1400" b="1" dirty="0">
+              <a:rPr lang="en-US" sz="1600" b="1" dirty="0">
                 <a:solidFill>
                   <a:srgbClr val="17212B"/>
                 </a:solidFill>
@@ -6343,8 +6673,8 @@
         </p:nvSpPr>
         <p:spPr>
           <a:xfrm>
-            <a:off x="8339328" y="4142232"/>
-            <a:ext cx="3026664" cy="292608"/>
+            <a:off x="8339328" y="4114800"/>
+            <a:ext cx="3026664" cy="347472"/>
           </a:xfrm>
           <a:prstGeom prst="rect">
             <a:avLst/>
@@ -6362,7 +6692,7 @@
               <a:buNone/>
             </a:pPr>
             <a:r>
-              <a:rPr lang="en-US" sz="1400" b="1" dirty="0">
+              <a:rPr lang="en-US" sz="1600" b="1" dirty="0">
                 <a:solidFill>
                   <a:srgbClr val="17212B"/>
                 </a:solidFill>
@@ -6412,7 +6742,7 @@
         <p:spPr>
           <a:xfrm>
             <a:off x="1097280" y="5038344"/>
-            <a:ext cx="1371600" cy="201168"/>
+            <a:ext cx="1371600" cy="256032"/>
           </a:xfrm>
           <a:prstGeom prst="rect">
             <a:avLst/>
@@ -6430,7 +6760,7 @@
               <a:buNone/>
             </a:pPr>
             <a:r>
-              <a:rPr lang="en-US" sz="1000" b="1" spc="30" kern="0" dirty="0">
+              <a:rPr lang="en-US" sz="1400" b="1" spc="30" kern="0" dirty="0">
                 <a:solidFill>
                   <a:srgbClr val="805400"/>
                 </a:solidFill>
@@ -6452,8 +6782,8 @@
         </p:nvSpPr>
         <p:spPr>
           <a:xfrm>
-            <a:off x="1097280" y="5285232"/>
-            <a:ext cx="4590288" cy="283464"/>
+            <a:off x="1097280" y="5271516"/>
+            <a:ext cx="4590288" cy="329184"/>
           </a:xfrm>
           <a:prstGeom prst="rect">
             <a:avLst/>
@@ -6471,7 +6801,7 @@
               <a:buNone/>
             </a:pPr>
             <a:r>
-              <a:rPr lang="en-US" sz="1500" b="1" dirty="0">
+              <a:rPr lang="en-US" sz="1800" b="1" dirty="0">
                 <a:solidFill>
                   <a:srgbClr val="17212B"/>
                 </a:solidFill>
@@ -6521,7 +6851,7 @@
         <p:spPr>
           <a:xfrm>
             <a:off x="6492240" y="5038344"/>
-            <a:ext cx="2743200" cy="201168"/>
+            <a:ext cx="2743200" cy="256032"/>
           </a:xfrm>
           <a:prstGeom prst="rect">
             <a:avLst/>
@@ -6539,7 +6869,7 @@
               <a:buNone/>
             </a:pPr>
             <a:r>
-              <a:rPr lang="en-US" sz="1000" b="1" spc="30" kern="0" dirty="0">
+              <a:rPr lang="en-US" sz="1400" b="1" spc="30" kern="0" dirty="0">
                 <a:solidFill>
                   <a:srgbClr val="B42318"/>
                 </a:solidFill>
@@ -6561,8 +6891,8 @@
         </p:nvSpPr>
         <p:spPr>
           <a:xfrm>
-            <a:off x="6492240" y="5285232"/>
-            <a:ext cx="4590288" cy="283464"/>
+            <a:off x="6492240" y="5271516"/>
+            <a:ext cx="4590288" cy="329184"/>
           </a:xfrm>
           <a:prstGeom prst="rect">
             <a:avLst/>
@@ -6580,7 +6910,7 @@
               <a:buNone/>
             </a:pPr>
             <a:r>
-              <a:rPr lang="en-US" sz="1500" b="1" dirty="0">
+              <a:rPr lang="en-US" sz="1800" b="1" dirty="0">
                 <a:solidFill>
                   <a:srgbClr val="17212B"/>
                 </a:solidFill>
@@ -6628,7 +6958,7 @@
         <p:spPr>
           <a:xfrm>
             <a:off x="658368" y="384048"/>
-            <a:ext cx="3200400" cy="201168"/>
+            <a:ext cx="3200400" cy="237744"/>
           </a:xfrm>
           <a:prstGeom prst="rect">
             <a:avLst/>
@@ -6646,7 +6976,7 @@
               <a:buNone/>
             </a:pPr>
             <a:r>
-              <a:rPr lang="en-US" sz="1000" b="1" spc="30" kern="0" dirty="0">
+              <a:rPr lang="en-US" sz="1400" b="1" spc="30" kern="0" dirty="0">
                 <a:solidFill>
                   <a:srgbClr val="0B6172"/>
                 </a:solidFill>
@@ -6687,7 +7017,7 @@
               <a:buNone/>
             </a:pPr>
             <a:r>
-              <a:rPr lang="en-US" sz="3000" b="1" dirty="0">
+              <a:rPr lang="en-US" sz="3400" b="1" dirty="0">
                 <a:solidFill>
                   <a:srgbClr val="17212B"/>
                 </a:solidFill>
@@ -6709,8 +7039,8 @@
         </p:nvSpPr>
         <p:spPr>
           <a:xfrm>
-            <a:off x="9738360" y="6428232"/>
-            <a:ext cx="1783080" cy="182880"/>
+            <a:off x="9418320" y="6181344"/>
+            <a:ext cx="2103120" cy="228600"/>
           </a:xfrm>
           <a:prstGeom prst="rect">
             <a:avLst/>
@@ -6728,7 +7058,7 @@
               <a:buNone/>
             </a:pPr>
             <a:r>
-              <a:rPr lang="en-US" sz="900" dirty="0">
+              <a:rPr lang="en-US" sz="1400" dirty="0">
                 <a:solidFill>
                   <a:srgbClr val="5B6570"/>
                 </a:solidFill>
@@ -6751,7 +7081,7 @@
         <p:spPr>
           <a:xfrm>
             <a:off x="786384" y="1664208"/>
-            <a:ext cx="4114800" cy="201168"/>
+            <a:ext cx="4114800" cy="256032"/>
           </a:xfrm>
           <a:prstGeom prst="rect">
             <a:avLst/>
@@ -6769,7 +7099,7 @@
               <a:buNone/>
             </a:pPr>
             <a:r>
-              <a:rPr lang="en-US" sz="1000" b="1" spc="30" kern="0" dirty="0">
+              <a:rPr lang="en-US" sz="1400" b="1" spc="30" kern="0" dirty="0">
                 <a:solidFill>
                   <a:srgbClr val="176B4D"/>
                 </a:solidFill>
@@ -6819,7 +7149,7 @@
         <p:spPr>
           <a:xfrm>
             <a:off x="1078992" y="2267712"/>
-            <a:ext cx="4480560" cy="201168"/>
+            <a:ext cx="4480560" cy="256032"/>
           </a:xfrm>
           <a:prstGeom prst="rect">
             <a:avLst/>
@@ -6837,7 +7167,7 @@
               <a:buNone/>
             </a:pPr>
             <a:r>
-              <a:rPr lang="en-US" sz="1000" b="1" spc="30" kern="0" dirty="0">
+              <a:rPr lang="en-US" sz="1400" b="1" spc="30" kern="0" dirty="0">
                 <a:solidFill>
                   <a:srgbClr val="0B6172"/>
                 </a:solidFill>
@@ -7001,7 +7331,7 @@
               <a:buNone/>
             </a:pPr>
             <a:r>
-              <a:rPr lang="en-US" sz="1500" dirty="0">
+              <a:rPr lang="en-US" sz="1600" dirty="0">
                 <a:solidFill>
                   <a:srgbClr val="4D5A68"/>
                 </a:solidFill>
@@ -7024,7 +7354,7 @@
         <p:spPr>
           <a:xfrm>
             <a:off x="6236208" y="1664208"/>
-            <a:ext cx="4206240" cy="201168"/>
+            <a:ext cx="4206240" cy="256032"/>
           </a:xfrm>
           <a:prstGeom prst="rect">
             <a:avLst/>
@@ -7042,7 +7372,7 @@
               <a:buNone/>
             </a:pPr>
             <a:r>
-              <a:rPr lang="en-US" sz="1000" b="1" spc="30" kern="0" dirty="0">
+              <a:rPr lang="en-US" sz="1400" b="1" spc="30" kern="0" dirty="0">
                 <a:solidFill>
                   <a:srgbClr val="805400"/>
                 </a:solidFill>
@@ -7133,7 +7463,7 @@
         <p:spPr>
           <a:xfrm>
             <a:off x="7525512" y="2898648"/>
-            <a:ext cx="3520440" cy="292608"/>
+            <a:ext cx="3520440" cy="329184"/>
           </a:xfrm>
           <a:prstGeom prst="rect">
             <a:avLst/>
@@ -7174,7 +7504,7 @@
         <p:spPr>
           <a:xfrm>
             <a:off x="6547104" y="3611880"/>
-            <a:ext cx="4480560" cy="658368"/>
+            <a:ext cx="4709160" cy="658368"/>
           </a:xfrm>
           <a:prstGeom prst="rect">
             <a:avLst/>
@@ -7192,7 +7522,7 @@
               <a:buNone/>
             </a:pPr>
             <a:r>
-              <a:rPr lang="en-US" sz="1700" b="1" dirty="0">
+              <a:rPr lang="en-US" sz="1600" b="1" dirty="0">
                 <a:solidFill>
                   <a:srgbClr val="17212B"/>
                 </a:solidFill>
@@ -7233,7 +7563,7 @@
               <a:buNone/>
             </a:pPr>
             <a:r>
-              <a:rPr lang="en-US" sz="1500" dirty="0">
+              <a:rPr lang="en-US" sz="1600" dirty="0">
                 <a:solidFill>
                   <a:srgbClr val="4D5A68"/>
                 </a:solidFill>
@@ -7282,8 +7612,8 @@
         </p:nvSpPr>
         <p:spPr>
           <a:xfrm>
-            <a:off x="1325880" y="5614416"/>
-            <a:ext cx="9537192" cy="256032"/>
+            <a:off x="1325880" y="5586984"/>
+            <a:ext cx="9537192" cy="310896"/>
           </a:xfrm>
           <a:prstGeom prst="rect">
             <a:avLst/>
@@ -7301,7 +7631,7 @@
               <a:buNone/>
             </a:pPr>
             <a:r>
-              <a:rPr lang="en-US" sz="1400" b="1" dirty="0">
+              <a:rPr lang="en-US" sz="1600" b="1" dirty="0">
                 <a:solidFill>
                   <a:srgbClr val="17212B"/>
                 </a:solidFill>
@@ -7349,7 +7679,7 @@
         <p:spPr>
           <a:xfrm>
             <a:off x="658368" y="384048"/>
-            <a:ext cx="3200400" cy="201168"/>
+            <a:ext cx="3200400" cy="237744"/>
           </a:xfrm>
           <a:prstGeom prst="rect">
             <a:avLst/>
@@ -7367,7 +7697,7 @@
               <a:buNone/>
             </a:pPr>
             <a:r>
-              <a:rPr lang="en-US" sz="1000" b="1" spc="30" kern="0" dirty="0">
+              <a:rPr lang="en-US" sz="1400" b="1" spc="30" kern="0" dirty="0">
                 <a:solidFill>
                   <a:srgbClr val="0B6172"/>
                 </a:solidFill>
@@ -7408,7 +7738,7 @@
               <a:buNone/>
             </a:pPr>
             <a:r>
-              <a:rPr lang="en-US" sz="3000" b="1" dirty="0">
+              <a:rPr lang="en-US" sz="3400" b="1" dirty="0">
                 <a:solidFill>
                   <a:srgbClr val="17212B"/>
                 </a:solidFill>
@@ -7430,8 +7760,8 @@
         </p:nvSpPr>
         <p:spPr>
           <a:xfrm>
-            <a:off x="9738360" y="6428232"/>
-            <a:ext cx="1783080" cy="182880"/>
+            <a:off x="9418320" y="6181344"/>
+            <a:ext cx="2103120" cy="228600"/>
           </a:xfrm>
           <a:prstGeom prst="rect">
             <a:avLst/>
@@ -7449,7 +7779,7 @@
               <a:buNone/>
             </a:pPr>
             <a:r>
-              <a:rPr lang="en-US" sz="900" dirty="0">
+              <a:rPr lang="en-US" sz="1400" dirty="0">
                 <a:solidFill>
                   <a:srgbClr val="5B6570"/>
                 </a:solidFill>
@@ -7472,7 +7802,7 @@
         <p:spPr>
           <a:xfrm>
             <a:off x="786384" y="1609344"/>
-            <a:ext cx="3840480" cy="201168"/>
+            <a:ext cx="3840480" cy="274320"/>
           </a:xfrm>
           <a:prstGeom prst="rect">
             <a:avLst/>
@@ -7490,7 +7820,7 @@
               <a:buNone/>
             </a:pPr>
             <a:r>
-              <a:rPr lang="en-US" sz="1000" b="1" spc="30" kern="0" dirty="0">
+              <a:rPr lang="en-US" sz="1400" b="1" spc="30" kern="0" dirty="0">
                 <a:solidFill>
                   <a:srgbClr val="0B6172"/>
                 </a:solidFill>
@@ -7540,7 +7870,7 @@
         <p:spPr>
           <a:xfrm>
             <a:off x="1060704" y="2231136"/>
-            <a:ext cx="3383280" cy="201168"/>
+            <a:ext cx="3383280" cy="274320"/>
           </a:xfrm>
           <a:prstGeom prst="rect">
             <a:avLst/>
@@ -7558,7 +7888,7 @@
               <a:buNone/>
             </a:pPr>
             <a:r>
-              <a:rPr lang="en-US" sz="1000" b="1" spc="30" kern="0" dirty="0">
+              <a:rPr lang="en-US" sz="1400" b="1" spc="30" kern="0" dirty="0">
                 <a:solidFill>
                   <a:srgbClr val="5B6570"/>
                 </a:solidFill>
@@ -7707,7 +8037,7 @@
         <p:spPr>
           <a:xfrm>
             <a:off x="6693408" y="2231136"/>
-            <a:ext cx="3931920" cy="201168"/>
+            <a:ext cx="3931920" cy="274320"/>
           </a:xfrm>
           <a:prstGeom prst="rect">
             <a:avLst/>
@@ -7725,7 +8055,7 @@
               <a:buNone/>
             </a:pPr>
             <a:r>
-              <a:rPr lang="en-US" sz="1000" b="1" spc="30" kern="0" dirty="0">
+              <a:rPr lang="en-US" sz="1400" b="1" spc="30" kern="0" dirty="0">
                 <a:solidFill>
                   <a:srgbClr val="0B6172"/>
                 </a:solidFill>
@@ -7860,7 +8190,7 @@
         <p:spPr>
           <a:xfrm>
             <a:off x="1078992" y="4453128"/>
-            <a:ext cx="1773936" cy="256032"/>
+            <a:ext cx="1773936" cy="274320"/>
           </a:xfrm>
           <a:prstGeom prst="rect">
             <a:avLst/>
@@ -7878,7 +8208,7 @@
               <a:buNone/>
             </a:pPr>
             <a:r>
-              <a:rPr lang="en-US" sz="1000" b="1" dirty="0">
+              <a:rPr lang="en-US" sz="1400" b="1" dirty="0">
                 <a:solidFill>
                   <a:srgbClr val="176B4D"/>
                 </a:solidFill>
@@ -7919,7 +8249,7 @@
               <a:buNone/>
             </a:pPr>
             <a:r>
-              <a:rPr lang="en-US" sz="1500" b="1" dirty="0">
+              <a:rPr lang="en-US" sz="1600" b="1" dirty="0">
                 <a:solidFill>
                   <a:srgbClr val="17212B"/>
                 </a:solidFill>
@@ -7942,7 +8272,7 @@
         <p:spPr>
           <a:xfrm>
             <a:off x="1024128" y="5303520"/>
-            <a:ext cx="5029200" cy="201168"/>
+            <a:ext cx="5029200" cy="274320"/>
           </a:xfrm>
           <a:prstGeom prst="rect">
             <a:avLst/>
@@ -7960,7 +8290,7 @@
               <a:buNone/>
             </a:pPr>
             <a:r>
-              <a:rPr lang="en-US" sz="1000" dirty="0">
+              <a:rPr lang="en-US" sz="1400" dirty="0">
                 <a:solidFill>
                   <a:srgbClr val="5B6570"/>
                 </a:solidFill>
@@ -8037,7 +8367,7 @@
         <p:spPr>
           <a:xfrm>
             <a:off x="6876288" y="4453128"/>
-            <a:ext cx="2450592" cy="256032"/>
+            <a:ext cx="2450592" cy="274320"/>
           </a:xfrm>
           <a:prstGeom prst="rect">
             <a:avLst/>
@@ -8055,7 +8385,7 @@
               <a:buNone/>
             </a:pPr>
             <a:r>
-              <a:rPr lang="en-US" sz="1000" b="1" dirty="0">
+              <a:rPr lang="en-US" sz="1400" b="1" dirty="0">
                 <a:solidFill>
                   <a:srgbClr val="0B6172"/>
                 </a:solidFill>
@@ -8078,7 +8408,7 @@
         <p:spPr>
           <a:xfrm>
             <a:off x="6821424" y="4892040"/>
-            <a:ext cx="4169664" cy="475488"/>
+            <a:ext cx="4169664" cy="566928"/>
           </a:xfrm>
           <a:prstGeom prst="rect">
             <a:avLst/>
@@ -8096,7 +8426,7 @@
               <a:buNone/>
             </a:pPr>
             <a:r>
-              <a:rPr lang="en-US" sz="1400" b="1" dirty="0">
+              <a:rPr lang="en-US" sz="1600" b="1" dirty="0">
                 <a:solidFill>
                   <a:srgbClr val="17212B"/>
                 </a:solidFill>
@@ -8113,7 +8443,7 @@
               <a:buNone/>
             </a:pPr>
             <a:r>
-              <a:rPr lang="en-US" sz="1400" b="1" dirty="0">
+              <a:rPr lang="en-US" sz="1600" b="1" dirty="0">
                 <a:solidFill>
                   <a:srgbClr val="17212B"/>
                 </a:solidFill>
@@ -8161,7 +8491,7 @@
         <p:spPr>
           <a:xfrm>
             <a:off x="658368" y="384048"/>
-            <a:ext cx="3200400" cy="201168"/>
+            <a:ext cx="3200400" cy="237744"/>
           </a:xfrm>
           <a:prstGeom prst="rect">
             <a:avLst/>
@@ -8179,7 +8509,7 @@
               <a:buNone/>
             </a:pPr>
             <a:r>
-              <a:rPr lang="en-US" sz="1000" b="1" spc="30" kern="0" dirty="0">
+              <a:rPr lang="en-US" sz="1400" b="1" spc="30" kern="0" dirty="0">
                 <a:solidFill>
                   <a:srgbClr val="0B6172"/>
                 </a:solidFill>
@@ -8220,7 +8550,7 @@
               <a:buNone/>
             </a:pPr>
             <a:r>
-              <a:rPr lang="en-US" sz="3000" b="1" dirty="0">
+              <a:rPr lang="en-US" sz="3400" b="1" dirty="0">
                 <a:solidFill>
                   <a:srgbClr val="17212B"/>
                 </a:solidFill>
@@ -8242,8 +8572,8 @@
         </p:nvSpPr>
         <p:spPr>
           <a:xfrm>
-            <a:off x="9738360" y="6428232"/>
-            <a:ext cx="1783080" cy="182880"/>
+            <a:off x="9418320" y="6181344"/>
+            <a:ext cx="2103120" cy="228600"/>
           </a:xfrm>
           <a:prstGeom prst="rect">
             <a:avLst/>
@@ -8261,7 +8591,7 @@
               <a:buNone/>
             </a:pPr>
             <a:r>
-              <a:rPr lang="en-US" sz="900" dirty="0">
+              <a:rPr lang="en-US" sz="1400" dirty="0">
                 <a:solidFill>
                   <a:srgbClr val="5B6570"/>
                 </a:solidFill>
@@ -8284,7 +8614,7 @@
         <p:spPr>
           <a:xfrm>
             <a:off x="786384" y="1664208"/>
-            <a:ext cx="2743200" cy="201168"/>
+            <a:ext cx="2743200" cy="256032"/>
           </a:xfrm>
           <a:prstGeom prst="rect">
             <a:avLst/>
@@ -8302,7 +8632,7 @@
               <a:buNone/>
             </a:pPr>
             <a:r>
-              <a:rPr lang="en-US" sz="1000" b="1" spc="30" kern="0" dirty="0">
+              <a:rPr lang="en-US" sz="1400" b="1" spc="30" kern="0" dirty="0">
                 <a:solidFill>
                   <a:srgbClr val="0B6172"/>
                 </a:solidFill>
@@ -8352,7 +8682,7 @@
         <p:spPr>
           <a:xfrm>
             <a:off x="1078992" y="2395728"/>
-            <a:ext cx="3200400" cy="201168"/>
+            <a:ext cx="3200400" cy="256032"/>
           </a:xfrm>
           <a:prstGeom prst="rect">
             <a:avLst/>
@@ -8370,7 +8700,7 @@
               <a:buNone/>
             </a:pPr>
             <a:r>
-              <a:rPr lang="en-US" sz="1000" b="1" spc="30" kern="0" dirty="0">
+              <a:rPr lang="en-US" sz="1400" b="1" spc="30" kern="0" dirty="0">
                 <a:solidFill>
                   <a:srgbClr val="5B6570"/>
                 </a:solidFill>
@@ -8434,7 +8764,7 @@
         <p:spPr>
           <a:xfrm>
             <a:off x="1078992" y="3547872"/>
-            <a:ext cx="3767328" cy="420624"/>
+            <a:ext cx="3767328" cy="438912"/>
           </a:xfrm>
           <a:prstGeom prst="rect">
             <a:avLst/>
@@ -8452,7 +8782,7 @@
               <a:buNone/>
             </a:pPr>
             <a:r>
-              <a:rPr lang="en-US" sz="1700" dirty="0">
+              <a:rPr lang="en-US" sz="1800" dirty="0">
                 <a:solidFill>
                   <a:srgbClr val="4D5A68"/>
                 </a:solidFill>
@@ -8543,7 +8873,7 @@
         <p:spPr>
           <a:xfrm>
             <a:off x="6821424" y="2395728"/>
-            <a:ext cx="3200400" cy="201168"/>
+            <a:ext cx="3200400" cy="256032"/>
           </a:xfrm>
           <a:prstGeom prst="rect">
             <a:avLst/>
@@ -8561,7 +8891,7 @@
               <a:buNone/>
             </a:pPr>
             <a:r>
-              <a:rPr lang="en-US" sz="1000" b="1" spc="30" kern="0" dirty="0">
+              <a:rPr lang="en-US" sz="1400" b="1" spc="30" kern="0" dirty="0">
                 <a:solidFill>
                   <a:srgbClr val="0B6172"/>
                 </a:solidFill>
@@ -8625,7 +8955,7 @@
         <p:spPr>
           <a:xfrm>
             <a:off x="6821424" y="3547872"/>
-            <a:ext cx="4078224" cy="420624"/>
+            <a:ext cx="4078224" cy="438912"/>
           </a:xfrm>
           <a:prstGeom prst="rect">
             <a:avLst/>
@@ -8643,7 +8973,7 @@
               <a:buNone/>
             </a:pPr>
             <a:r>
-              <a:rPr lang="en-US" sz="1700" dirty="0">
+              <a:rPr lang="en-US" sz="1800" dirty="0">
                 <a:solidFill>
                   <a:srgbClr val="4D5A68"/>
                 </a:solidFill>
@@ -8693,7 +9023,7 @@
         <p:spPr>
           <a:xfrm>
             <a:off x="2103120" y="5202936"/>
-            <a:ext cx="7982712" cy="310896"/>
+            <a:ext cx="7982712" cy="347472"/>
           </a:xfrm>
           <a:prstGeom prst="rect">
             <a:avLst/>
@@ -8711,7 +9041,7 @@
               <a:buNone/>
             </a:pPr>
             <a:r>
-              <a:rPr lang="en-US" sz="1700" b="1" dirty="0">
+              <a:rPr lang="en-US" sz="1800" b="1" dirty="0">
                 <a:solidFill>
                   <a:srgbClr val="17212B"/>
                 </a:solidFill>
@@ -8759,7 +9089,7 @@
         <p:spPr>
           <a:xfrm>
             <a:off x="658368" y="384048"/>
-            <a:ext cx="3200400" cy="201168"/>
+            <a:ext cx="3200400" cy="237744"/>
           </a:xfrm>
           <a:prstGeom prst="rect">
             <a:avLst/>
@@ -8777,7 +9107,7 @@
               <a:buNone/>
             </a:pPr>
             <a:r>
-              <a:rPr lang="en-US" sz="1000" b="1" spc="30" kern="0" dirty="0">
+              <a:rPr lang="en-US" sz="1400" b="1" spc="30" kern="0" dirty="0">
                 <a:solidFill>
                   <a:srgbClr val="0B6172"/>
                 </a:solidFill>
@@ -8818,7 +9148,7 @@
               <a:buNone/>
             </a:pPr>
             <a:r>
-              <a:rPr lang="en-US" sz="3000" b="1" dirty="0">
+              <a:rPr lang="en-US" sz="3400" b="1" dirty="0">
                 <a:solidFill>
                   <a:srgbClr val="17212B"/>
                 </a:solidFill>
@@ -8840,8 +9170,8 @@
         </p:nvSpPr>
         <p:spPr>
           <a:xfrm>
-            <a:off x="9738360" y="6428232"/>
-            <a:ext cx="1783080" cy="182880"/>
+            <a:off x="9418320" y="6181344"/>
+            <a:ext cx="2103120" cy="228600"/>
           </a:xfrm>
           <a:prstGeom prst="rect">
             <a:avLst/>
@@ -8859,7 +9189,7 @@
               <a:buNone/>
             </a:pPr>
             <a:r>
-              <a:rPr lang="en-US" sz="900" dirty="0">
+              <a:rPr lang="en-US" sz="1400" dirty="0">
                 <a:solidFill>
                   <a:srgbClr val="5B6570"/>
                 </a:solidFill>
@@ -8909,7 +9239,7 @@
         <p:spPr>
           <a:xfrm>
             <a:off x="1115568" y="2167128"/>
-            <a:ext cx="2377440" cy="201168"/>
+            <a:ext cx="2377440" cy="274320"/>
           </a:xfrm>
           <a:prstGeom prst="rect">
             <a:avLst/>
@@ -8927,7 +9257,7 @@
               <a:buNone/>
             </a:pPr>
             <a:r>
-              <a:rPr lang="en-US" sz="1000" b="1" spc="30" kern="0" dirty="0">
+              <a:rPr lang="en-US" sz="1400" b="1" spc="30" kern="0" dirty="0">
                 <a:solidFill>
                   <a:srgbClr val="5B6570"/>
                 </a:solidFill>
@@ -9059,7 +9389,7 @@
         <p:spPr>
           <a:xfrm>
             <a:off x="5340096" y="2039112"/>
-            <a:ext cx="3108960" cy="201168"/>
+            <a:ext cx="3108960" cy="274320"/>
           </a:xfrm>
           <a:prstGeom prst="rect">
             <a:avLst/>
@@ -9077,7 +9407,7 @@
               <a:buNone/>
             </a:pPr>
             <a:r>
-              <a:rPr lang="en-US" sz="1000" b="1" spc="30" kern="0" dirty="0">
+              <a:rPr lang="en-US" sz="1400" b="1" spc="30" kern="0" dirty="0">
                 <a:solidFill>
                   <a:srgbClr val="0B6172"/>
                 </a:solidFill>
@@ -9141,7 +9471,7 @@
         <p:spPr>
           <a:xfrm>
             <a:off x="5340096" y="3063240"/>
-            <a:ext cx="5440680" cy="219456"/>
+            <a:ext cx="5440680" cy="274320"/>
           </a:xfrm>
           <a:prstGeom prst="rect">
             <a:avLst/>
@@ -9159,7 +9489,7 @@
               <a:buNone/>
             </a:pPr>
             <a:r>
-              <a:rPr lang="en-US" sz="1200" dirty="0">
+              <a:rPr lang="en-US" sz="1600" dirty="0">
                 <a:solidFill>
                   <a:srgbClr val="4D5A68"/>
                 </a:solidFill>
@@ -9277,7 +9607,7 @@
         <p:spPr>
           <a:xfrm>
             <a:off x="4078224" y="5449824"/>
-            <a:ext cx="4041648" cy="256032"/>
+            <a:ext cx="4041648" cy="274320"/>
           </a:xfrm>
           <a:prstGeom prst="rect">
             <a:avLst/>
@@ -9295,7 +9625,7 @@
               <a:buNone/>
             </a:pPr>
             <a:r>
-              <a:rPr lang="en-US" sz="1000" b="1" dirty="0">
+              <a:rPr lang="en-US" sz="1400" b="1" dirty="0">
                 <a:solidFill>
                   <a:srgbClr val="4D5A68"/>
                 </a:solidFill>

--- a/production/ACT_0.pptx
+++ b/production/ACT_0.pptx
@@ -2,21 +2,21 @@
 <file path=ppt/presentation.xml><?xml version="1.0" encoding="utf-8"?>
 <p:presentation xmlns:p="http://schemas.openxmlformats.org/presentationml/2006/main">
   <p:sldMasterIdLst>
-    <p:sldMasterId xmlns:r="http://schemas.openxmlformats.org/officeDocument/2006/relationships" id="2147483648" r:id="R181fbfcfd7f444e8"/>
+    <p:sldMasterId xmlns:r="http://schemas.openxmlformats.org/officeDocument/2006/relationships" id="2147483648" r:id="Rcfd6545bab244fac"/>
   </p:sldMasterIdLst>
   <p:notesMasterIdLst>
-    <p:notesMasterId xmlns:r="http://schemas.openxmlformats.org/officeDocument/2006/relationships" r:id="R08973efd2f904e72"/>
+    <p:notesMasterId xmlns:r="http://schemas.openxmlformats.org/officeDocument/2006/relationships" r:id="R350057a401cd4097"/>
   </p:notesMasterIdLst>
   <p:sldIdLst>
-    <p:sldId xmlns:r="http://schemas.openxmlformats.org/officeDocument/2006/relationships" id="256" r:id="Re4f251785f6a47ab"/>
-    <p:sldId xmlns:r="http://schemas.openxmlformats.org/officeDocument/2006/relationships" id="257" r:id="Rabc2fbe354804f9e"/>
-    <p:sldId xmlns:r="http://schemas.openxmlformats.org/officeDocument/2006/relationships" id="258" r:id="Rcb6ab11be9504592"/>
-    <p:sldId xmlns:r="http://schemas.openxmlformats.org/officeDocument/2006/relationships" id="259" r:id="R750adaabec674bcb"/>
-    <p:sldId xmlns:r="http://schemas.openxmlformats.org/officeDocument/2006/relationships" id="260" r:id="R9087f672cc634105"/>
-    <p:sldId xmlns:r="http://schemas.openxmlformats.org/officeDocument/2006/relationships" id="261" r:id="R62cfd5ac15c9483c"/>
-    <p:sldId xmlns:r="http://schemas.openxmlformats.org/officeDocument/2006/relationships" id="262" r:id="Rbc050e588c0a4ba1"/>
-    <p:sldId xmlns:r="http://schemas.openxmlformats.org/officeDocument/2006/relationships" id="263" r:id="R4befc3877e93419e"/>
-    <p:sldId xmlns:r="http://schemas.openxmlformats.org/officeDocument/2006/relationships" id="264" r:id="Ra318d8a0adc94f26"/>
+    <p:sldId xmlns:r="http://schemas.openxmlformats.org/officeDocument/2006/relationships" id="256" r:id="R8aa5610ce38e47a7"/>
+    <p:sldId xmlns:r="http://schemas.openxmlformats.org/officeDocument/2006/relationships" id="257" r:id="Rc8664a6622f84cc2"/>
+    <p:sldId xmlns:r="http://schemas.openxmlformats.org/officeDocument/2006/relationships" id="258" r:id="R3307bd078a3b4b3d"/>
+    <p:sldId xmlns:r="http://schemas.openxmlformats.org/officeDocument/2006/relationships" id="259" r:id="R2742a3743ca94081"/>
+    <p:sldId xmlns:r="http://schemas.openxmlformats.org/officeDocument/2006/relationships" id="260" r:id="Rf6b8b11adf524050"/>
+    <p:sldId xmlns:r="http://schemas.openxmlformats.org/officeDocument/2006/relationships" id="261" r:id="R02b04352c9514a53"/>
+    <p:sldId xmlns:r="http://schemas.openxmlformats.org/officeDocument/2006/relationships" id="262" r:id="R88fd7c0275744020"/>
+    <p:sldId xmlns:r="http://schemas.openxmlformats.org/officeDocument/2006/relationships" id="263" r:id="R720eb58830fb4207"/>
+    <p:sldId xmlns:r="http://schemas.openxmlformats.org/officeDocument/2006/relationships" id="264" r:id="Rd0f438ce06e842fc"/>
   </p:sldIdLst>
   <p:sldSz cx="12192000" cy="6858000"/>
   <p:notesSz cx="6858000" cy="9144000"/>
@@ -2230,12 +2230,12 @@
           </a:p>
           <a:p xmlns:a="http://schemas.openxmlformats.org/drawingml/2006/main">
             <a:r>
-              <a:t>1. **CALL BACK (0:00–0:45):** 위쪽 Repository → 개발자 선택·복사 → AI 관계로 S02를 짧게 회수한다.</a:t>
-            </a:r>
-          </a:p>
-          <a:p xmlns:a="http://schemas.openxmlformats.org/drawingml/2006/main">
-            <a:r>
-              <a:t>2. **TRANSFER (0:45–2:00):** 아래쪽 개발자 조사 요청 → Agent ↔ Repository로 시선을 옮긴다. 바뀌는 것은 Context를 찾는 주체의 일부이며 목표와 검증 책임을 전부 넘긴다는 뜻이 아니다.</a:t>
+              <a:t>1. **CALL BACK (0:00–0:45):** 왼쪽 Repository → 개발자 선택·복사 → AI 관계로 S02를 짧게 회수한다.</a:t>
+            </a:r>
+          </a:p>
+          <a:p xmlns:a="http://schemas.openxmlformats.org/drawingml/2006/main">
+            <a:r>
+              <a:t>2. **TRANSFER (0:45–2:00):** 오른쪽 개발자 조사 요청 → Agent ↔ Repository로 시선을 옮긴다. 바뀌는 것은 Context를 찾는 주체의 일부이며 목표와 검증 책임을 전부 넘긴다는 뜻이 아니다.</a:t>
             </a:r>
           </a:p>
           <a:p xmlns:a="http://schemas.openxmlformats.org/drawingml/2006/main">
@@ -2250,7 +2250,7 @@
           </a:p>
           <a:p xmlns:a="http://schemas.openxmlformats.org/drawingml/2006/main">
             <a:r>
-              <a:t>Evidence / Source: DEMO-01 / TRIAL-001 단일 CLI 관찰; BEAT-003, CLM-0002, CLM-0009. 본문은 Context 수집 역할을 비교하는 TEACHING_MODEL이며 하단에 연결된 과거 관찰의 범위를 별도로 표시한다.</a:t>
+              <a:t>Evidence / Source: DEMO-01 / TRIAL-001 단일 CLI 관찰; BEAT-003, CLM-0002, CLM-0009. 본문은 Context 수집 역할을 비교하는 TEACHING_MODEL이며 하단에 연결된 과거 관찰의 범위를 별도로 표시한다. 삽화 출처: prototype/image-illustration-pilot/assets/S07.png, built-in image_gen, 2026-10-18. 생성 프롬프트: prototype/image-illustration-pilot/PROMPTS.md. 실제 화면·현장 사진·관찰 자료가 아니다.</a:t>
             </a:r>
           </a:p>
           <a:p xmlns:a="http://schemas.openxmlformats.org/drawingml/2006/main">
@@ -2300,7 +2300,7 @@
           </a:p>
           <a:p xmlns:a="http://schemas.openxmlformats.org/drawingml/2006/main">
             <a:r>
-              <a:t>Demo Operation: DEMO-01 bounded callback. 본문 화살표는 교육 모델이고 새 제품 동작 관찰이 아니다. S05에서 본 단일 CLI 기록을 근거로 한 가능성을 설명하며 새 UI나 실행을 보여 주지 않는다.</a:t>
+              <a:t>Demo Operation: DEMO-01 bounded callback. 본문 삽화는 교육 모델이고 새 제품 동작 관찰이 아니다. S05에서 본 단일 CLI 기록을 근거로 한 가능성을 설명하며 새 UI나 실행을 보여 주지 않는다.</a:t>
             </a:r>
           </a:p>
           <a:p xmlns:a="http://schemas.openxmlformats.org/drawingml/2006/main">
@@ -2330,7 +2330,7 @@
           </a:p>
           <a:p xmlns:a="http://schemas.openxmlformats.org/drawingml/2006/main">
             <a:r>
-              <a:t>Time Management: 위·아래 관계의 변화에 집중한다. Trial 상세와 수치를 반복하지 않는다. C++ 연결은 선택적인 한 문장이며 3분 안에 S08로 이동한다.</a:t>
+              <a:t>Time Management: 좌·우 관계의 변화에 집중한다. Trial 상세와 수치를 반복하지 않는다. C++ 연결은 선택적인 한 문장이며 3분 안에 S08로 이동한다.</a:t>
             </a:r>
           </a:p>
           <a:p xmlns:a="http://schemas.openxmlformats.org/drawingml/2006/main">
@@ -2340,7 +2340,7 @@
           </a:p>
           <a:p xmlns:a="http://schemas.openxmlformats.org/drawingml/2006/main">
             <a:r>
-              <a:t>Fallback: Trial record를 표시할 수 없으면 Mental Shift만 Teaching Model로 설명한다. 제품 전반의 사실처럼 말하지 않는다.</a:t>
+              <a:t>Fallback: Trial record를 표시할 수 없으면 Mental Shift만 Teaching Model로 설명한다. 제품 전반의 사실처럼 말하지 않는다. 정적 파일: production/preview/act0/S07.png 및 production/preview/full/S07.png.</a:t>
             </a:r>
           </a:p>
           <a:p xmlns:a="http://schemas.openxmlformats.org/drawingml/2006/main">
@@ -2350,7 +2350,7 @@
           </a:p>
           <a:p xmlns:a="http://schemas.openxmlformats.org/drawingml/2006/main">
             <a:r>
-              <a:t>Validation Status: REVIEWED — 원문·Claim 경계, 화면의 설명 순서와 운영 지침을 대조했다. 최종 PPT/Notes/PNG 대조 결과는 production/evaluation/FULL_DECK_PRESENTATION_REVISION.md에 기록한다. Windows PowerPoint, 발표 PC 글꼴, 교육장 투사, 실제 시간 리허설은 UNVERIFIED.</a:t>
+              <a:t>Validation Status: REVIEWED — 사용자 승인 삽화를 전체 제작본에 반영했다. PPT/Notes/PNG 대조와 S72 잘림 재검토 결과는 production/evaluation/FULL_DECK_IMAGE_INTEGRATION.md에 기록한다. Windows PowerPoint, 발표 PC 글꼴, 교육장 투사, 실제 시간 리허설은 UNVERIFIED.</a:t>
             </a:r>
           </a:p>
         </p:txBody>
@@ -2952,7 +2952,7 @@
           <p:cNvPr id="3" name="Title">
             <a:extLst xmlns:a="http://schemas.openxmlformats.org/drawingml/2006/main">
               <a:ext uri="{FF2B5EF4-FFF2-40B4-BE49-F238E27FC236}">
-                <a16:creationId xmlns:a16="http://schemas.microsoft.com/office/drawing/2014/main" id="{0F6397C8-BA58-4FB1-97AE-C3824E99516F}"/>
+                <a16:creationId xmlns:a16="http://schemas.microsoft.com/office/drawing/2014/main" id="{94110EEA-940A-4AD2-BBE7-968E0EF24364}"/>
               </a:ext>
             </a:extLst>
           </p:cNvPr>
@@ -3181,7 +3181,7 @@
           <p:cNvPr id="2" name="Subtitle">
             <a:extLst xmlns:a="http://schemas.openxmlformats.org/drawingml/2006/main">
               <a:ext uri="{FF2B5EF4-FFF2-40B4-BE49-F238E27FC236}">
-                <a16:creationId xmlns:a16="http://schemas.microsoft.com/office/drawing/2014/main" id="{884C2596-C325-40DE-97C3-56C298C4DF4A}"/>
+                <a16:creationId xmlns:a16="http://schemas.microsoft.com/office/drawing/2014/main" id="{7FA1BB11-8B66-49D0-BE34-290F1A19EFD3}"/>
               </a:ext>
             </a:extLst>
           </p:cNvPr>
@@ -3427,7 +3427,7 @@
           <p:cNvPr id="2" name="Section title">
             <a:extLst xmlns:a="http://schemas.openxmlformats.org/drawingml/2006/main">
               <a:ext uri="{FF2B5EF4-FFF2-40B4-BE49-F238E27FC236}">
-                <a16:creationId xmlns:a16="http://schemas.microsoft.com/office/drawing/2014/main" id="{9A50FD74-C8F5-440C-8B77-42D38B58F9E1}"/>
+                <a16:creationId xmlns:a16="http://schemas.microsoft.com/office/drawing/2014/main" id="{AB2C153A-C5DF-40FF-8852-848EDDCBEFF7}"/>
               </a:ext>
             </a:extLst>
           </p:cNvPr>
@@ -3673,7 +3673,7 @@
           <p:cNvPr id="3" name="Title">
             <a:extLst xmlns:a="http://schemas.openxmlformats.org/drawingml/2006/main">
               <a:ext uri="{FF2B5EF4-FFF2-40B4-BE49-F238E27FC236}">
-                <a16:creationId xmlns:a16="http://schemas.microsoft.com/office/drawing/2014/main" id="{AAC0D9B6-CED3-4F63-8044-8A2732096003}"/>
+                <a16:creationId xmlns:a16="http://schemas.microsoft.com/office/drawing/2014/main" id="{6F7D2F4B-5F3F-4C2E-8BD9-81D76AD7834A}"/>
               </a:ext>
             </a:extLst>
           </p:cNvPr>
@@ -3902,7 +3902,7 @@
           <p:cNvPr id="2" name="Body">
             <a:extLst xmlns:a="http://schemas.openxmlformats.org/drawingml/2006/main">
               <a:ext uri="{FF2B5EF4-FFF2-40B4-BE49-F238E27FC236}">
-                <a16:creationId xmlns:a16="http://schemas.microsoft.com/office/drawing/2014/main" id="{5970F2DC-7AC5-4DC0-BDE8-F4C905DB4B5B}"/>
+                <a16:creationId xmlns:a16="http://schemas.microsoft.com/office/drawing/2014/main" id="{EDA97300-1F49-4EA0-AE6B-264659C21BD9}"/>
               </a:ext>
             </a:extLst>
           </p:cNvPr>
@@ -4148,7 +4148,7 @@
           <p:cNvPr id="4" name="Title">
             <a:extLst xmlns:a="http://schemas.openxmlformats.org/drawingml/2006/main">
               <a:ext uri="{FF2B5EF4-FFF2-40B4-BE49-F238E27FC236}">
-                <a16:creationId xmlns:a16="http://schemas.microsoft.com/office/drawing/2014/main" id="{6AE504CA-646C-4EF7-8041-59CD9E73742B}"/>
+                <a16:creationId xmlns:a16="http://schemas.microsoft.com/office/drawing/2014/main" id="{EAFD4979-0372-49B7-A350-B633B5F69312}"/>
               </a:ext>
             </a:extLst>
           </p:cNvPr>
@@ -4377,7 +4377,7 @@
           <p:cNvPr id="2" name="Left column">
             <a:extLst xmlns:a="http://schemas.openxmlformats.org/drawingml/2006/main">
               <a:ext uri="{FF2B5EF4-FFF2-40B4-BE49-F238E27FC236}">
-                <a16:creationId xmlns:a16="http://schemas.microsoft.com/office/drawing/2014/main" id="{4F570224-FBE1-4777-8022-2846F1FED69E}"/>
+                <a16:creationId xmlns:a16="http://schemas.microsoft.com/office/drawing/2014/main" id="{86E7BFDC-6B98-4669-9567-B7C8FDE753A7}"/>
               </a:ext>
             </a:extLst>
           </p:cNvPr>
@@ -4606,7 +4606,7 @@
           <p:cNvPr id="3" name="Right column">
             <a:extLst xmlns:a="http://schemas.openxmlformats.org/drawingml/2006/main">
               <a:ext uri="{FF2B5EF4-FFF2-40B4-BE49-F238E27FC236}">
-                <a16:creationId xmlns:a16="http://schemas.microsoft.com/office/drawing/2014/main" id="{39F2A6FA-F76F-4CFD-94F1-DD2C5F8ADAD3}"/>
+                <a16:creationId xmlns:a16="http://schemas.microsoft.com/office/drawing/2014/main" id="{E36A8AF9-84CB-4594-8BEE-60A04A7591C5}"/>
               </a:ext>
             </a:extLst>
           </p:cNvPr>
@@ -4852,7 +4852,7 @@
           <p:cNvPr id="3" name="Title">
             <a:extLst xmlns:a="http://schemas.openxmlformats.org/drawingml/2006/main">
               <a:ext uri="{FF2B5EF4-FFF2-40B4-BE49-F238E27FC236}">
-                <a16:creationId xmlns:a16="http://schemas.microsoft.com/office/drawing/2014/main" id="{7FABA1AF-0674-4073-B5BA-E38D032139AC}"/>
+                <a16:creationId xmlns:a16="http://schemas.microsoft.com/office/drawing/2014/main" id="{1DC08E22-0AEB-43A5-A962-53D304376F3A}"/>
               </a:ext>
             </a:extLst>
           </p:cNvPr>
@@ -5081,7 +5081,7 @@
           <p:cNvPr id="2" name="Left column">
             <a:extLst xmlns:a="http://schemas.openxmlformats.org/drawingml/2006/main">
               <a:ext uri="{FF2B5EF4-FFF2-40B4-BE49-F238E27FC236}">
-                <a16:creationId xmlns:a16="http://schemas.microsoft.com/office/drawing/2014/main" id="{64E7D74E-5666-4598-8B90-AE05415A086A}"/>
+                <a16:creationId xmlns:a16="http://schemas.microsoft.com/office/drawing/2014/main" id="{950C57F3-BD06-4430-BC23-7BFAC09ACB12}"/>
               </a:ext>
             </a:extLst>
           </p:cNvPr>
@@ -5348,12 +5348,12 @@
   </p:cSld>
   <p:clrMap bg1="lt1" tx1="dk1" bg2="lt2" tx2="dk2" accent1="accent1" accent2="accent2" accent3="accent3" accent4="accent4" accent5="accent5" accent6="accent6" hlink="hlink" folHlink="folHlink"/>
   <p:sldLayoutIdLst>
-    <p:sldLayoutId xmlns:r="http://schemas.openxmlformats.org/officeDocument/2006/relationships" id="2147483649" r:id="Rc11899a5584f4993"/>
-    <p:sldLayoutId xmlns:r="http://schemas.openxmlformats.org/officeDocument/2006/relationships" id="2147483650" r:id="R7e189d64db2644d1"/>
-    <p:sldLayoutId xmlns:r="http://schemas.openxmlformats.org/officeDocument/2006/relationships" id="2147483651" r:id="Rddc01e430abf4daa"/>
-    <p:sldLayoutId xmlns:r="http://schemas.openxmlformats.org/officeDocument/2006/relationships" id="2147483652" r:id="R8f01799c1a44404e"/>
-    <p:sldLayoutId xmlns:r="http://schemas.openxmlformats.org/officeDocument/2006/relationships" id="2147483653" r:id="Rd7918ddd1ebb410f"/>
-    <p:sldLayoutId xmlns:r="http://schemas.openxmlformats.org/officeDocument/2006/relationships" id="2147483654" r:id="Rf16b138183d64295"/>
+    <p:sldLayoutId xmlns:r="http://schemas.openxmlformats.org/officeDocument/2006/relationships" id="2147483649" r:id="Rb752b259b5e24bff"/>
+    <p:sldLayoutId xmlns:r="http://schemas.openxmlformats.org/officeDocument/2006/relationships" id="2147483650" r:id="R0705ceca7eac4600"/>
+    <p:sldLayoutId xmlns:r="http://schemas.openxmlformats.org/officeDocument/2006/relationships" id="2147483651" r:id="Rb61348a9444347e0"/>
+    <p:sldLayoutId xmlns:r="http://schemas.openxmlformats.org/officeDocument/2006/relationships" id="2147483652" r:id="Rb80442465c9846ba"/>
+    <p:sldLayoutId xmlns:r="http://schemas.openxmlformats.org/officeDocument/2006/relationships" id="2147483653" r:id="R1e1f8b93462c4dd7"/>
+    <p:sldLayoutId xmlns:r="http://schemas.openxmlformats.org/officeDocument/2006/relationships" id="2147483654" r:id="R0dc66cb90aed4f23"/>
   </p:sldLayoutIdLst>
   <p:txStyles>
     <p:titleStyle>
@@ -5904,7 +5904,7 @@
           <p:cNvPr id="12" name="ACT 0 · 익숙한 사용에서 시작하기">
             <a:extLst xmlns:a="http://schemas.openxmlformats.org/drawingml/2006/main">
               <a:ext uri="{FF2B5EF4-FFF2-40B4-BE49-F238E27FC236}">
-                <a16:creationId xmlns:a16="http://schemas.microsoft.com/office/drawing/2014/main" id="{DFEEEE41-D005-4BAE-BF69-BCA3B5604D83}"/>
+                <a16:creationId xmlns:a16="http://schemas.microsoft.com/office/drawing/2014/main" id="{794B5716-827F-4FDA-9F7C-ECF6CE773359}"/>
               </a:ext>
             </a:extLst>
           </p:cNvPr>
@@ -6062,7 +6062,7 @@
           <p:cNvPr id="2" name="S01">
             <a:extLst xmlns:a="http://schemas.openxmlformats.org/drawingml/2006/main">
               <a:ext uri="{FF2B5EF4-FFF2-40B4-BE49-F238E27FC236}">
-                <a16:creationId xmlns:a16="http://schemas.microsoft.com/office/drawing/2014/main" id="{CB2CA460-D20C-41EE-BBE0-CFBE051F43A3}"/>
+                <a16:creationId xmlns:a16="http://schemas.microsoft.com/office/drawing/2014/main" id="{2330EF03-A4D6-4625-A968-C24E56F042E1}"/>
               </a:ext>
             </a:extLst>
           </p:cNvPr>
@@ -6220,7 +6220,7 @@
           <p:cNvPr id="3" name="AI에게 지금 무엇을 맡기고 있는가?">
             <a:extLst xmlns:a="http://schemas.openxmlformats.org/drawingml/2006/main">
               <a:ext uri="{FF2B5EF4-FFF2-40B4-BE49-F238E27FC236}">
-                <a16:creationId xmlns:a16="http://schemas.microsoft.com/office/drawing/2014/main" id="{9CCEFD00-0304-4947-B688-13C585524EE4}"/>
+                <a16:creationId xmlns:a16="http://schemas.microsoft.com/office/drawing/2014/main" id="{97302C9F-50E4-4822-AC83-CB89C3498065}"/>
               </a:ext>
             </a:extLst>
           </p:cNvPr>
@@ -6378,7 +6378,7 @@
           <p:cNvPr id="4" name="">
             <a:extLst xmlns:a="http://schemas.openxmlformats.org/drawingml/2006/main">
               <a:ext uri="{FF2B5EF4-FFF2-40B4-BE49-F238E27FC236}">
-                <a16:creationId xmlns:a16="http://schemas.microsoft.com/office/drawing/2014/main" id="{ED53C485-96AF-4F44-B060-46940A7BA256}"/>
+                <a16:creationId xmlns:a16="http://schemas.microsoft.com/office/drawing/2014/main" id="{31B379DF-65B3-40B9-8EB3-D094F89FEC8D}"/>
               </a:ext>
             </a:extLst>
           </p:cNvPr>
@@ -6409,7 +6409,7 @@
           <p:cNvPr id="5" name="생각해 보기 · 이 과정의 교육 모델">
             <a:extLst xmlns:a="http://schemas.openxmlformats.org/drawingml/2006/main">
               <a:ext uri="{FF2B5EF4-FFF2-40B4-BE49-F238E27FC236}">
-                <a16:creationId xmlns:a16="http://schemas.microsoft.com/office/drawing/2014/main" id="{EDB0722F-322A-4BD4-A16F-A086FB157015}"/>
+                <a16:creationId xmlns:a16="http://schemas.microsoft.com/office/drawing/2014/main" id="{B60C50D0-DC58-4AF3-A952-C6494D58A60B}"/>
               </a:ext>
             </a:extLst>
           </p:cNvPr>
@@ -6567,7 +6567,7 @@
           <p:cNvPr id="6" name="자신의 경험 하나만 떠올려 보세요. 사용 수준을 평가하는 질문이 아닙니다.">
             <a:extLst xmlns:a="http://schemas.openxmlformats.org/drawingml/2006/main">
               <a:ext uri="{FF2B5EF4-FFF2-40B4-BE49-F238E27FC236}">
-                <a16:creationId xmlns:a16="http://schemas.microsoft.com/office/drawing/2014/main" id="{49635723-3D87-45CC-8DE5-EB13749796AA}"/>
+                <a16:creationId xmlns:a16="http://schemas.microsoft.com/office/drawing/2014/main" id="{581A929F-54A3-438F-B150-6F2F1C173480}"/>
               </a:ext>
             </a:extLst>
           </p:cNvPr>
@@ -6725,7 +6725,7 @@
           <p:cNvPr id="7" name="가장 최근에 AI에게 맡긴 일 하나">
             <a:extLst xmlns:a="http://schemas.openxmlformats.org/drawingml/2006/main">
               <a:ext uri="{FF2B5EF4-FFF2-40B4-BE49-F238E27FC236}">
-                <a16:creationId xmlns:a16="http://schemas.microsoft.com/office/drawing/2014/main" id="{98A5C025-5E65-4F65-81C5-F5BCD6C43290}"/>
+                <a16:creationId xmlns:a16="http://schemas.microsoft.com/office/drawing/2014/main" id="{51B5D4AC-28A6-4A21-A0B6-E744F7F3E040}"/>
               </a:ext>
             </a:extLst>
           </p:cNvPr>
@@ -6883,7 +6883,7 @@
           <p:cNvPr id="8" name="오류 설명을 들었나요?&#10;관련 코드를 조사하게 했나요?&#10;수정한 결과까지 확인하게 했나요?">
             <a:extLst xmlns:a="http://schemas.openxmlformats.org/drawingml/2006/main">
               <a:ext uri="{FF2B5EF4-FFF2-40B4-BE49-F238E27FC236}">
-                <a16:creationId xmlns:a16="http://schemas.microsoft.com/office/drawing/2014/main" id="{A906EEFD-05F9-4286-977A-2A9FB37A0054}"/>
+                <a16:creationId xmlns:a16="http://schemas.microsoft.com/office/drawing/2014/main" id="{79C38499-9C13-4711-AF29-3AF8CD9166AB}"/>
               </a:ext>
             </a:extLst>
           </p:cNvPr>
@@ -7087,7 +7087,7 @@
           <p:cNvPr id="9" name="">
             <a:extLst xmlns:a="http://schemas.openxmlformats.org/drawingml/2006/main">
               <a:ext uri="{FF2B5EF4-FFF2-40B4-BE49-F238E27FC236}">
-                <a16:creationId xmlns:a16="http://schemas.microsoft.com/office/drawing/2014/main" id="{FA937596-6A54-4B5C-ACE9-AF5600A9ADC9}"/>
+                <a16:creationId xmlns:a16="http://schemas.microsoft.com/office/drawing/2014/main" id="{7FFA8CE1-DF2E-4C54-BBF0-E731A658DA0B}"/>
               </a:ext>
             </a:extLst>
           </p:cNvPr>
@@ -7118,7 +7118,7 @@
           <p:cNvPr id="10" name="질문 · 생성&#10;조사 · 변경&#10;검증 · 작업 방식 개선">
             <a:extLst xmlns:a="http://schemas.openxmlformats.org/drawingml/2006/main">
               <a:ext uri="{FF2B5EF4-FFF2-40B4-BE49-F238E27FC236}">
-                <a16:creationId xmlns:a16="http://schemas.microsoft.com/office/drawing/2014/main" id="{F2D0ABAE-6517-4A90-A124-DEFD7CE888EB}"/>
+                <a16:creationId xmlns:a16="http://schemas.microsoft.com/office/drawing/2014/main" id="{8E5FD42F-9A0D-4175-A752-3EC9BAEDC141}"/>
               </a:ext>
             </a:extLst>
           </p:cNvPr>
@@ -7322,7 +7322,7 @@
           <p:cNvPr id="11" name="익숙한 방식에서 출발해도 괜찮습니다.">
             <a:extLst xmlns:a="http://schemas.openxmlformats.org/drawingml/2006/main">
               <a:ext uri="{FF2B5EF4-FFF2-40B4-BE49-F238E27FC236}">
-                <a16:creationId xmlns:a16="http://schemas.microsoft.com/office/drawing/2014/main" id="{589C132A-A71F-4A40-896F-62276C3652FC}"/>
+                <a16:creationId xmlns:a16="http://schemas.microsoft.com/office/drawing/2014/main" id="{2DC890F4-E3B1-4B31-90EA-6763310B9F5C}"/>
               </a:ext>
             </a:extLst>
           </p:cNvPr>
@@ -7478,7 +7478,7 @@
     </p:spTree>
     <p:extLst>
       <p:ext uri="{BB962C8B-B14F-4D97-AF65-F5344CB8AC3E}">
-        <p14:creationId xmlns:p14="http://schemas.microsoft.com/office/powerpoint/2010/main" val="1420439844"/>
+        <p14:creationId xmlns:p14="http://schemas.microsoft.com/office/powerpoint/2010/main" val="290401250"/>
       </p:ext>
     </p:extLst>
   </p:cSld>
@@ -7509,7 +7509,7 @@
           <p:cNvPr id="23" name="ACT 0 · 작은 코드 질문">
             <a:extLst xmlns:a="http://schemas.openxmlformats.org/drawingml/2006/main">
               <a:ext uri="{FF2B5EF4-FFF2-40B4-BE49-F238E27FC236}">
-                <a16:creationId xmlns:a16="http://schemas.microsoft.com/office/drawing/2014/main" id="{8979F82F-B11F-4229-A54F-F26EB8CEA400}"/>
+                <a16:creationId xmlns:a16="http://schemas.microsoft.com/office/drawing/2014/main" id="{55A384A2-849B-4D39-9B4D-D609DC471474}"/>
               </a:ext>
             </a:extLst>
           </p:cNvPr>
@@ -7667,7 +7667,7 @@
           <p:cNvPr id="2" name="S02">
             <a:extLst xmlns:a="http://schemas.openxmlformats.org/drawingml/2006/main">
               <a:ext uri="{FF2B5EF4-FFF2-40B4-BE49-F238E27FC236}">
-                <a16:creationId xmlns:a16="http://schemas.microsoft.com/office/drawing/2014/main" id="{59D2CE75-782B-4902-B01A-DCB48C8E0518}"/>
+                <a16:creationId xmlns:a16="http://schemas.microsoft.com/office/drawing/2014/main" id="{28F0E739-6A89-4667-A373-FEA4D4C27D74}"/>
               </a:ext>
             </a:extLst>
           </p:cNvPr>
@@ -7825,7 +7825,7 @@
           <p:cNvPr id="3" name="작은 질문에는 Chatbot이 유용하다">
             <a:extLst xmlns:a="http://schemas.openxmlformats.org/drawingml/2006/main">
               <a:ext uri="{FF2B5EF4-FFF2-40B4-BE49-F238E27FC236}">
-                <a16:creationId xmlns:a16="http://schemas.microsoft.com/office/drawing/2014/main" id="{F735B182-7EF1-4FFA-BD89-56CF0DC2FAF4}"/>
+                <a16:creationId xmlns:a16="http://schemas.microsoft.com/office/drawing/2014/main" id="{B8F20E60-BFC1-4F07-B6B5-2A10CDD04338}"/>
               </a:ext>
             </a:extLst>
           </p:cNvPr>
@@ -7983,7 +7983,7 @@
           <p:cNvPr id="4" name="">
             <a:extLst xmlns:a="http://schemas.openxmlformats.org/drawingml/2006/main">
               <a:ext uri="{FF2B5EF4-FFF2-40B4-BE49-F238E27FC236}">
-                <a16:creationId xmlns:a16="http://schemas.microsoft.com/office/drawing/2014/main" id="{570057A1-8844-4818-9153-040017783FDD}"/>
+                <a16:creationId xmlns:a16="http://schemas.microsoft.com/office/drawing/2014/main" id="{60077921-AFDD-4307-8D19-2408BC8A2947}"/>
               </a:ext>
             </a:extLst>
           </p:cNvPr>
@@ -8014,7 +8014,7 @@
           <p:cNvPr id="5" name="교육용 예시 · 실제 ChatGPT 대화 캡처가 아님">
             <a:extLst xmlns:a="http://schemas.openxmlformats.org/drawingml/2006/main">
               <a:ext uri="{FF2B5EF4-FFF2-40B4-BE49-F238E27FC236}">
-                <a16:creationId xmlns:a16="http://schemas.microsoft.com/office/drawing/2014/main" id="{EB0DAA43-AD48-4D98-BAD6-AA0B76F7D01C}"/>
+                <a16:creationId xmlns:a16="http://schemas.microsoft.com/office/drawing/2014/main" id="{A89D04C8-B19C-40B8-B0FB-99D659A29C52}"/>
               </a:ext>
             </a:extLst>
           </p:cNvPr>
@@ -8172,7 +8172,7 @@
           <p:cNvPr id="6" name="일반적인 질문 흐름을 설명하며 특정 제품의 정확도나 우월성을 주장하지 않습니다.">
             <a:extLst xmlns:a="http://schemas.openxmlformats.org/drawingml/2006/main">
               <a:ext uri="{FF2B5EF4-FFF2-40B4-BE49-F238E27FC236}">
-                <a16:creationId xmlns:a16="http://schemas.microsoft.com/office/drawing/2014/main" id="{FAAA8596-5321-4FAB-A26F-F76AFA36A572}"/>
+                <a16:creationId xmlns:a16="http://schemas.microsoft.com/office/drawing/2014/main" id="{0D7D3CB7-9180-4ACF-A35E-B1AC5982B5FA}"/>
               </a:ext>
             </a:extLst>
           </p:cNvPr>
@@ -8330,7 +8330,7 @@
           <p:cNvPr id="7" name="“이 코드에서 무엇이 남을까?”">
             <a:extLst xmlns:a="http://schemas.openxmlformats.org/drawingml/2006/main">
               <a:ext uri="{FF2B5EF4-FFF2-40B4-BE49-F238E27FC236}">
-                <a16:creationId xmlns:a16="http://schemas.microsoft.com/office/drawing/2014/main" id="{6667156C-362D-4A2F-A778-C7B8DC961A5C}"/>
+                <a16:creationId xmlns:a16="http://schemas.microsoft.com/office/drawing/2014/main" id="{6BA89199-33BE-4A2A-AC25-D055D0D67900}"/>
               </a:ext>
             </a:extLst>
           </p:cNvPr>
@@ -8488,7 +8488,7 @@
           <p:cNvPr id="8" name="">
             <a:extLst xmlns:a="http://schemas.openxmlformats.org/drawingml/2006/main">
               <a:ext uri="{FF2B5EF4-FFF2-40B4-BE49-F238E27FC236}">
-                <a16:creationId xmlns:a16="http://schemas.microsoft.com/office/drawing/2014/main" id="{E7CE4B47-91FA-4370-9E7D-9D280F538C0E}"/>
+                <a16:creationId xmlns:a16="http://schemas.microsoft.com/office/drawing/2014/main" id="{40C40B88-24A0-4D1C-8F90-8A4DB51FB187}"/>
               </a:ext>
             </a:extLst>
           </p:cNvPr>
@@ -8519,7 +8519,7 @@
           <p:cNvPr id="9" name="row = [1, 2, 3, 4]&#10;row[1:3]">
             <a:extLst xmlns:a="http://schemas.openxmlformats.org/drawingml/2006/main">
               <a:ext uri="{FF2B5EF4-FFF2-40B4-BE49-F238E27FC236}">
-                <a16:creationId xmlns:a16="http://schemas.microsoft.com/office/drawing/2014/main" id="{41D454DA-D081-40A8-B28E-8F55F0D62A90}"/>
+                <a16:creationId xmlns:a16="http://schemas.microsoft.com/office/drawing/2014/main" id="{DF82A4D6-4358-4B10-ABFC-B82CF68A5AA2}"/>
               </a:ext>
             </a:extLst>
           </p:cNvPr>
@@ -8700,7 +8700,7 @@
           <p:cNvPr id="10" name="">
             <a:extLst xmlns:a="http://schemas.openxmlformats.org/drawingml/2006/main">
               <a:ext uri="{FF2B5EF4-FFF2-40B4-BE49-F238E27FC236}">
-                <a16:creationId xmlns:a16="http://schemas.microsoft.com/office/drawing/2014/main" id="{6D9EFBE5-3D03-406D-B862-0702C3E4AA5A}"/>
+                <a16:creationId xmlns:a16="http://schemas.microsoft.com/office/drawing/2014/main" id="{A10D5A97-2A13-4A4D-B763-9EAB7B80B770}"/>
               </a:ext>
             </a:extLst>
           </p:cNvPr>
@@ -8730,7 +8730,7 @@
           <p:cNvPr id="11" name="[2, 3]">
             <a:extLst xmlns:a="http://schemas.openxmlformats.org/drawingml/2006/main">
               <a:ext uri="{FF2B5EF4-FFF2-40B4-BE49-F238E27FC236}">
-                <a16:creationId xmlns:a16="http://schemas.microsoft.com/office/drawing/2014/main" id="{DFA05C67-DC95-4EA2-B831-C5BF0E0C6407}"/>
+                <a16:creationId xmlns:a16="http://schemas.microsoft.com/office/drawing/2014/main" id="{B6D3240D-7C45-4554-9EF2-D5919991F953}"/>
               </a:ext>
             </a:extLst>
           </p:cNvPr>
@@ -8888,7 +8888,7 @@
           <p:cNvPr id="12" name="끝 index 3은 포함하지 않습니다.">
             <a:extLst xmlns:a="http://schemas.openxmlformats.org/drawingml/2006/main">
               <a:ext uri="{FF2B5EF4-FFF2-40B4-BE49-F238E27FC236}">
-                <a16:creationId xmlns:a16="http://schemas.microsoft.com/office/drawing/2014/main" id="{D5AC0D1C-FD3A-4A66-AB9D-3C66C220F0B9}"/>
+                <a16:creationId xmlns:a16="http://schemas.microsoft.com/office/drawing/2014/main" id="{D14B5AF2-D564-4C9B-A3FA-92250A79EF8C}"/>
               </a:ext>
             </a:extLst>
           </p:cNvPr>
@@ -9046,7 +9046,7 @@
           <p:cNvPr id="13" name="코드·오류">
             <a:extLst xmlns:a="http://schemas.openxmlformats.org/drawingml/2006/main">
               <a:ext uri="{FF2B5EF4-FFF2-40B4-BE49-F238E27FC236}">
-                <a16:creationId xmlns:a16="http://schemas.microsoft.com/office/drawing/2014/main" id="{8111CAE2-A6D0-48C6-8457-6E1245E9ED29}"/>
+                <a16:creationId xmlns:a16="http://schemas.microsoft.com/office/drawing/2014/main" id="{4A9F775C-7F12-4773-8AFF-911AA6FF2EF7}"/>
               </a:ext>
             </a:extLst>
           </p:cNvPr>
@@ -9204,7 +9204,7 @@
           <p:cNvPr id="14" name="">
             <a:extLst xmlns:a="http://schemas.openxmlformats.org/drawingml/2006/main">
               <a:ext uri="{FF2B5EF4-FFF2-40B4-BE49-F238E27FC236}">
-                <a16:creationId xmlns:a16="http://schemas.microsoft.com/office/drawing/2014/main" id="{7FD878AF-E131-49B8-88F4-B30BDAB78A09}"/>
+                <a16:creationId xmlns:a16="http://schemas.microsoft.com/office/drawing/2014/main" id="{B9E4DD11-52B4-4868-BB8B-49AEC113667A}"/>
               </a:ext>
             </a:extLst>
           </p:cNvPr>
@@ -9234,7 +9234,7 @@
           <p:cNvPr id="15" name="복사">
             <a:extLst xmlns:a="http://schemas.openxmlformats.org/drawingml/2006/main">
               <a:ext uri="{FF2B5EF4-FFF2-40B4-BE49-F238E27FC236}">
-                <a16:creationId xmlns:a16="http://schemas.microsoft.com/office/drawing/2014/main" id="{03B82AB6-6FCA-4167-9581-23210DA5FDE0}"/>
+                <a16:creationId xmlns:a16="http://schemas.microsoft.com/office/drawing/2014/main" id="{2D64D5A7-B267-425A-B017-EA76F4F2B37C}"/>
               </a:ext>
             </a:extLst>
           </p:cNvPr>
@@ -9392,7 +9392,7 @@
           <p:cNvPr id="16" name="">
             <a:extLst xmlns:a="http://schemas.openxmlformats.org/drawingml/2006/main">
               <a:ext uri="{FF2B5EF4-FFF2-40B4-BE49-F238E27FC236}">
-                <a16:creationId xmlns:a16="http://schemas.microsoft.com/office/drawing/2014/main" id="{67F25E0F-43D4-496C-B2F3-6982444BEC72}"/>
+                <a16:creationId xmlns:a16="http://schemas.microsoft.com/office/drawing/2014/main" id="{551080FC-4440-483F-A120-81F1FD82F825}"/>
               </a:ext>
             </a:extLst>
           </p:cNvPr>
@@ -9422,7 +9422,7 @@
           <p:cNvPr id="17" name="질문">
             <a:extLst xmlns:a="http://schemas.openxmlformats.org/drawingml/2006/main">
               <a:ext uri="{FF2B5EF4-FFF2-40B4-BE49-F238E27FC236}">
-                <a16:creationId xmlns:a16="http://schemas.microsoft.com/office/drawing/2014/main" id="{3D4CF0A2-DEAD-4A1D-BB82-608F757501B3}"/>
+                <a16:creationId xmlns:a16="http://schemas.microsoft.com/office/drawing/2014/main" id="{6531BE24-4005-48B4-9464-E4B7195C1605}"/>
               </a:ext>
             </a:extLst>
           </p:cNvPr>
@@ -9580,7 +9580,7 @@
           <p:cNvPr id="18" name="">
             <a:extLst xmlns:a="http://schemas.openxmlformats.org/drawingml/2006/main">
               <a:ext uri="{FF2B5EF4-FFF2-40B4-BE49-F238E27FC236}">
-                <a16:creationId xmlns:a16="http://schemas.microsoft.com/office/drawing/2014/main" id="{DEAEE93D-783F-4A54-9B0C-365F03BB2817}"/>
+                <a16:creationId xmlns:a16="http://schemas.microsoft.com/office/drawing/2014/main" id="{F9AA33F4-7ED8-4BE1-A09C-125560393EE3}"/>
               </a:ext>
             </a:extLst>
           </p:cNvPr>
@@ -9610,7 +9610,7 @@
           <p:cNvPr id="19" name="답 확인">
             <a:extLst xmlns:a="http://schemas.openxmlformats.org/drawingml/2006/main">
               <a:ext uri="{FF2B5EF4-FFF2-40B4-BE49-F238E27FC236}">
-                <a16:creationId xmlns:a16="http://schemas.microsoft.com/office/drawing/2014/main" id="{92A0087B-F9E9-42F7-98F9-4F98A5E5B36C}"/>
+                <a16:creationId xmlns:a16="http://schemas.microsoft.com/office/drawing/2014/main" id="{50F9C3C0-90FB-4D54-9396-550C408B278B}"/>
               </a:ext>
             </a:extLst>
           </p:cNvPr>
@@ -9768,7 +9768,7 @@
           <p:cNvPr id="20" name="">
             <a:extLst xmlns:a="http://schemas.openxmlformats.org/drawingml/2006/main">
               <a:ext uri="{FF2B5EF4-FFF2-40B4-BE49-F238E27FC236}">
-                <a16:creationId xmlns:a16="http://schemas.microsoft.com/office/drawing/2014/main" id="{590FFC41-8A63-4B13-8445-FAF5F8FB61F1}"/>
+                <a16:creationId xmlns:a16="http://schemas.microsoft.com/office/drawing/2014/main" id="{1D78FEF0-DC4C-48D6-AE0C-155FA355F85B}"/>
               </a:ext>
             </a:extLst>
           </p:cNvPr>
@@ -9798,7 +9798,7 @@
           <p:cNvPr id="21" name="IDE로 복귀">
             <a:extLst xmlns:a="http://schemas.openxmlformats.org/drawingml/2006/main">
               <a:ext uri="{FF2B5EF4-FFF2-40B4-BE49-F238E27FC236}">
-                <a16:creationId xmlns:a16="http://schemas.microsoft.com/office/drawing/2014/main" id="{5FA6D124-3A53-4E8B-94C9-206155FEF259}"/>
+                <a16:creationId xmlns:a16="http://schemas.microsoft.com/office/drawing/2014/main" id="{D1457468-9A74-4A54-8EFF-336E645FEFBA}"/>
               </a:ext>
             </a:extLst>
           </p:cNvPr>
@@ -9956,7 +9956,7 @@
           <p:cNvPr id="22" name="">
             <a:extLst xmlns:a="http://schemas.openxmlformats.org/drawingml/2006/main">
               <a:ext uri="{FF2B5EF4-FFF2-40B4-BE49-F238E27FC236}">
-                <a16:creationId xmlns:a16="http://schemas.microsoft.com/office/drawing/2014/main" id="{6A245F98-2184-41BB-9C7A-66CE6CFF85D5}"/>
+                <a16:creationId xmlns:a16="http://schemas.microsoft.com/office/drawing/2014/main" id="{31A1B519-7DDA-4D1B-8F45-C8384A666540}"/>
               </a:ext>
             </a:extLst>
           </p:cNvPr>
@@ -9985,7 +9985,7 @@
     </p:spTree>
     <p:extLst>
       <p:ext uri="{BB962C8B-B14F-4D97-AF65-F5344CB8AC3E}">
-        <p14:creationId xmlns:p14="http://schemas.microsoft.com/office/powerpoint/2010/main" val="640138592"/>
+        <p14:creationId xmlns:p14="http://schemas.microsoft.com/office/powerpoint/2010/main" val="75978775"/>
       </p:ext>
     </p:extLst>
   </p:cSld>
@@ -10016,7 +10016,7 @@
           <p:cNvPr id="24" name="ACT 0 · 여러 파일을 가로지르는 질문">
             <a:extLst xmlns:a="http://schemas.openxmlformats.org/drawingml/2006/main">
               <a:ext uri="{FF2B5EF4-FFF2-40B4-BE49-F238E27FC236}">
-                <a16:creationId xmlns:a16="http://schemas.microsoft.com/office/drawing/2014/main" id="{20C9B3CC-79A6-4877-A46B-C909EC51B98F}"/>
+                <a16:creationId xmlns:a16="http://schemas.microsoft.com/office/drawing/2014/main" id="{6EF967D4-6E49-4D0B-894B-1C696D2560D5}"/>
               </a:ext>
             </a:extLst>
           </p:cNvPr>
@@ -10174,7 +10174,7 @@
           <p:cNvPr id="2" name="S03">
             <a:extLst xmlns:a="http://schemas.openxmlformats.org/drawingml/2006/main">
               <a:ext uri="{FF2B5EF4-FFF2-40B4-BE49-F238E27FC236}">
-                <a16:creationId xmlns:a16="http://schemas.microsoft.com/office/drawing/2014/main" id="{82B18227-23E9-4407-B5B2-A2FB23D92E6D}"/>
+                <a16:creationId xmlns:a16="http://schemas.microsoft.com/office/drawing/2014/main" id="{F735BAD6-3051-4CDA-BEC7-1303F9995D5D}"/>
               </a:ext>
             </a:extLst>
           </p:cNvPr>
@@ -10332,7 +10332,7 @@
           <p:cNvPr id="3" name="질문이 커지면 Context를 모으는 일이 생긴다">
             <a:extLst xmlns:a="http://schemas.openxmlformats.org/drawingml/2006/main">
               <a:ext uri="{FF2B5EF4-FFF2-40B4-BE49-F238E27FC236}">
-                <a16:creationId xmlns:a16="http://schemas.microsoft.com/office/drawing/2014/main" id="{79E15B9F-6A09-41D3-8392-A26A5619E4E1}"/>
+                <a16:creationId xmlns:a16="http://schemas.microsoft.com/office/drawing/2014/main" id="{4803C8E1-FBA3-4300-87B7-DDDCA44A62C2}"/>
               </a:ext>
             </a:extLst>
           </p:cNvPr>
@@ -10490,7 +10490,7 @@
           <p:cNvPr id="4" name="">
             <a:extLst xmlns:a="http://schemas.openxmlformats.org/drawingml/2006/main">
               <a:ext uri="{FF2B5EF4-FFF2-40B4-BE49-F238E27FC236}">
-                <a16:creationId xmlns:a16="http://schemas.microsoft.com/office/drawing/2014/main" id="{4C506AA8-70E9-4883-B945-C892D0D430F4}"/>
+                <a16:creationId xmlns:a16="http://schemas.microsoft.com/office/drawing/2014/main" id="{E75CC2B1-A7CB-4B07-BDA8-D72076B620E0}"/>
               </a:ext>
             </a:extLst>
           </p:cNvPr>
@@ -10521,7 +10521,7 @@
           <p:cNvPr id="5" name="개념 사례 · Repository 수준의 질문을 설명하는 관계도">
             <a:extLst xmlns:a="http://schemas.openxmlformats.org/drawingml/2006/main">
               <a:ext uri="{FF2B5EF4-FFF2-40B4-BE49-F238E27FC236}">
-                <a16:creationId xmlns:a16="http://schemas.microsoft.com/office/drawing/2014/main" id="{74D2709C-9A22-4BAC-A3DF-FDAE2C2B1321}"/>
+                <a16:creationId xmlns:a16="http://schemas.microsoft.com/office/drawing/2014/main" id="{70BC8169-016A-4181-883C-BC235264E458}"/>
               </a:ext>
             </a:extLst>
           </p:cNvPr>
@@ -10679,7 +10679,7 @@
           <p:cNvPr id="6" name="특정 Trial에서 실제로 발생한 비용이나 실패를 뜻하지 않습니다.">
             <a:extLst xmlns:a="http://schemas.openxmlformats.org/drawingml/2006/main">
               <a:ext uri="{FF2B5EF4-FFF2-40B4-BE49-F238E27FC236}">
-                <a16:creationId xmlns:a16="http://schemas.microsoft.com/office/drawing/2014/main" id="{3FDDB3BD-C34E-415E-831C-5A471362E0FB}"/>
+                <a16:creationId xmlns:a16="http://schemas.microsoft.com/office/drawing/2014/main" id="{7DEB3097-D1D6-4215-9D13-25B0C6F7D75E}"/>
               </a:ext>
             </a:extLst>
           </p:cNvPr>
@@ -10837,7 +10837,7 @@
           <p:cNvPr id="7" name="“CLI 결과가 기대와 다른데, 어디서부터 봐야 할까?”">
             <a:extLst xmlns:a="http://schemas.openxmlformats.org/drawingml/2006/main">
               <a:ext uri="{FF2B5EF4-FFF2-40B4-BE49-F238E27FC236}">
-                <a16:creationId xmlns:a16="http://schemas.microsoft.com/office/drawing/2014/main" id="{EA4344A5-99F5-4E85-A6A8-676B965B1BD2}"/>
+                <a16:creationId xmlns:a16="http://schemas.microsoft.com/office/drawing/2014/main" id="{B3EDA43F-4CC6-4CF3-8922-961C91359502}"/>
               </a:ext>
             </a:extLst>
           </p:cNvPr>
@@ -10995,7 +10995,7 @@
           <p:cNvPr id="8" name="">
             <a:extLst xmlns:a="http://schemas.openxmlformats.org/drawingml/2006/main">
               <a:ext uri="{FF2B5EF4-FFF2-40B4-BE49-F238E27FC236}">
-                <a16:creationId xmlns:a16="http://schemas.microsoft.com/office/drawing/2014/main" id="{77206CB0-CD58-43AD-BDFD-2D2A42875550}"/>
+                <a16:creationId xmlns:a16="http://schemas.microsoft.com/office/drawing/2014/main" id="{4C381C7E-110E-4F96-A6F7-1615A4D5B8C3}"/>
               </a:ext>
             </a:extLst>
           </p:cNvPr>
@@ -11028,7 +11028,7 @@
           <p:cNvPr id="9" name="CLI">
             <a:extLst xmlns:a="http://schemas.openxmlformats.org/drawingml/2006/main">
               <a:ext uri="{FF2B5EF4-FFF2-40B4-BE49-F238E27FC236}">
-                <a16:creationId xmlns:a16="http://schemas.microsoft.com/office/drawing/2014/main" id="{DB7D2555-52AF-4638-B261-F462AD112B6B}"/>
+                <a16:creationId xmlns:a16="http://schemas.microsoft.com/office/drawing/2014/main" id="{AE2B4DE8-2D4D-45C1-9EB1-F3C8C6318351}"/>
               </a:ext>
             </a:extLst>
           </p:cNvPr>
@@ -11186,7 +11186,7 @@
           <p:cNvPr id="10" name="입력은 어떻게 받나?">
             <a:extLst xmlns:a="http://schemas.openxmlformats.org/drawingml/2006/main">
               <a:ext uri="{FF2B5EF4-FFF2-40B4-BE49-F238E27FC236}">
-                <a16:creationId xmlns:a16="http://schemas.microsoft.com/office/drawing/2014/main" id="{ADE71B36-6CF6-4A11-B985-5C79C22FBB99}"/>
+                <a16:creationId xmlns:a16="http://schemas.microsoft.com/office/drawing/2014/main" id="{F2EB3C2F-3ED9-4815-9928-56598E1C87F2}"/>
               </a:ext>
             </a:extLst>
           </p:cNvPr>
@@ -11344,7 +11344,7 @@
           <p:cNvPr id="11" name="">
             <a:extLst xmlns:a="http://schemas.openxmlformats.org/drawingml/2006/main">
               <a:ext uri="{FF2B5EF4-FFF2-40B4-BE49-F238E27FC236}">
-                <a16:creationId xmlns:a16="http://schemas.microsoft.com/office/drawing/2014/main" id="{B1457122-1345-4CD9-B1A2-1C6C2B028BF5}"/>
+                <a16:creationId xmlns:a16="http://schemas.microsoft.com/office/drawing/2014/main" id="{DD165A6B-0CBE-40B2-A3CF-00C0C285173D}"/>
               </a:ext>
             </a:extLst>
           </p:cNvPr>
@@ -11374,7 +11374,7 @@
           <p:cNvPr id="12" name="">
             <a:extLst xmlns:a="http://schemas.openxmlformats.org/drawingml/2006/main">
               <a:ext uri="{FF2B5EF4-FFF2-40B4-BE49-F238E27FC236}">
-                <a16:creationId xmlns:a16="http://schemas.microsoft.com/office/drawing/2014/main" id="{9913B79C-D304-4197-83FA-AD1547916B7A}"/>
+                <a16:creationId xmlns:a16="http://schemas.microsoft.com/office/drawing/2014/main" id="{3D63E960-787B-4993-B5AB-C133C8CB6DE3}"/>
               </a:ext>
             </a:extLst>
           </p:cNvPr>
@@ -11407,7 +11407,7 @@
           <p:cNvPr id="13" name="처리 흐름">
             <a:extLst xmlns:a="http://schemas.openxmlformats.org/drawingml/2006/main">
               <a:ext uri="{FF2B5EF4-FFF2-40B4-BE49-F238E27FC236}">
-                <a16:creationId xmlns:a16="http://schemas.microsoft.com/office/drawing/2014/main" id="{D62CB819-F154-40A9-8156-61A5CEE082C9}"/>
+                <a16:creationId xmlns:a16="http://schemas.microsoft.com/office/drawing/2014/main" id="{CBD3D4F9-F692-42D1-BB9B-18ABC532F4DB}"/>
               </a:ext>
             </a:extLst>
           </p:cNvPr>
@@ -11565,7 +11565,7 @@
           <p:cNvPr id="14" name="어떤 연산을 호출하나?">
             <a:extLst xmlns:a="http://schemas.openxmlformats.org/drawingml/2006/main">
               <a:ext uri="{FF2B5EF4-FFF2-40B4-BE49-F238E27FC236}">
-                <a16:creationId xmlns:a16="http://schemas.microsoft.com/office/drawing/2014/main" id="{18BD5504-6A7B-4DCC-AFA3-FACE93CD5289}"/>
+                <a16:creationId xmlns:a16="http://schemas.microsoft.com/office/drawing/2014/main" id="{58B50DFE-C171-4EAA-9240-5CB7BA403ECE}"/>
               </a:ext>
             </a:extLst>
           </p:cNvPr>
@@ -11723,7 +11723,7 @@
           <p:cNvPr id="15" name="">
             <a:extLst xmlns:a="http://schemas.openxmlformats.org/drawingml/2006/main">
               <a:ext uri="{FF2B5EF4-FFF2-40B4-BE49-F238E27FC236}">
-                <a16:creationId xmlns:a16="http://schemas.microsoft.com/office/drawing/2014/main" id="{7DCDB5C6-A149-466B-96B3-E3F5B8EF3432}"/>
+                <a16:creationId xmlns:a16="http://schemas.microsoft.com/office/drawing/2014/main" id="{0F7F459F-01C0-4876-AA36-2EDAADC229CA}"/>
               </a:ext>
             </a:extLst>
           </p:cNvPr>
@@ -11753,7 +11753,7 @@
           <p:cNvPr id="16" name="">
             <a:extLst xmlns:a="http://schemas.openxmlformats.org/drawingml/2006/main">
               <a:ext uri="{FF2B5EF4-FFF2-40B4-BE49-F238E27FC236}">
-                <a16:creationId xmlns:a16="http://schemas.microsoft.com/office/drawing/2014/main" id="{534206B7-BA7C-4D17-A614-AFD30DD53452}"/>
+                <a16:creationId xmlns:a16="http://schemas.microsoft.com/office/drawing/2014/main" id="{2DB830D5-0934-4335-BD02-2BBABB1E27C9}"/>
               </a:ext>
             </a:extLst>
           </p:cNvPr>
@@ -11786,7 +11786,7 @@
           <p:cNvPr id="17" name="이미지 연산">
             <a:extLst xmlns:a="http://schemas.openxmlformats.org/drawingml/2006/main">
               <a:ext uri="{FF2B5EF4-FFF2-40B4-BE49-F238E27FC236}">
-                <a16:creationId xmlns:a16="http://schemas.microsoft.com/office/drawing/2014/main" id="{7827A661-AEDA-4B6E-8EEC-60093B3598D4}"/>
+                <a16:creationId xmlns:a16="http://schemas.microsoft.com/office/drawing/2014/main" id="{0A6C6DA3-5BBD-4D0E-A798-62F0384106A9}"/>
               </a:ext>
             </a:extLst>
           </p:cNvPr>
@@ -11944,7 +11944,7 @@
           <p:cNvPr id="18" name="구현은 어떻게 생겼나?">
             <a:extLst xmlns:a="http://schemas.openxmlformats.org/drawingml/2006/main">
               <a:ext uri="{FF2B5EF4-FFF2-40B4-BE49-F238E27FC236}">
-                <a16:creationId xmlns:a16="http://schemas.microsoft.com/office/drawing/2014/main" id="{49AF0C83-6214-473D-A60C-D406305B66A4}"/>
+                <a16:creationId xmlns:a16="http://schemas.microsoft.com/office/drawing/2014/main" id="{95E7D3E8-ED4C-4849-8E5A-47088D52C280}"/>
               </a:ext>
             </a:extLst>
           </p:cNvPr>
@@ -12102,7 +12102,7 @@
           <p:cNvPr id="19" name="">
             <a:extLst xmlns:a="http://schemas.openxmlformats.org/drawingml/2006/main">
               <a:ext uri="{FF2B5EF4-FFF2-40B4-BE49-F238E27FC236}">
-                <a16:creationId xmlns:a16="http://schemas.microsoft.com/office/drawing/2014/main" id="{D265AC1C-2138-4122-B60A-5CDF4B9BCA31}"/>
+                <a16:creationId xmlns:a16="http://schemas.microsoft.com/office/drawing/2014/main" id="{7782C34F-9AB7-4B8E-8D4A-CBF7A2345B82}"/>
               </a:ext>
             </a:extLst>
           </p:cNvPr>
@@ -12133,7 +12133,7 @@
           <p:cNvPr id="20" name="테스트">
             <a:extLst xmlns:a="http://schemas.openxmlformats.org/drawingml/2006/main">
               <a:ext uri="{FF2B5EF4-FFF2-40B4-BE49-F238E27FC236}">
-                <a16:creationId xmlns:a16="http://schemas.microsoft.com/office/drawing/2014/main" id="{D59A9E7F-3DC8-425A-85A1-C8C4E7813B01}"/>
+                <a16:creationId xmlns:a16="http://schemas.microsoft.com/office/drawing/2014/main" id="{934D07B6-4F69-424F-A939-04B3D6DD893B}"/>
               </a:ext>
             </a:extLst>
           </p:cNvPr>
@@ -12291,7 +12291,7 @@
           <p:cNvPr id="21" name="어떤 조건에서 실패했나?">
             <a:extLst xmlns:a="http://schemas.openxmlformats.org/drawingml/2006/main">
               <a:ext uri="{FF2B5EF4-FFF2-40B4-BE49-F238E27FC236}">
-                <a16:creationId xmlns:a16="http://schemas.microsoft.com/office/drawing/2014/main" id="{87ED4527-80D7-42C7-A5E5-85A4FC253052}"/>
+                <a16:creationId xmlns:a16="http://schemas.microsoft.com/office/drawing/2014/main" id="{5A3D9022-B80D-4BB4-86A8-8B2903D84FBB}"/>
               </a:ext>
             </a:extLst>
           </p:cNvPr>
@@ -12449,7 +12449,7 @@
           <p:cNvPr id="22" name="계약">
             <a:extLst xmlns:a="http://schemas.openxmlformats.org/drawingml/2006/main">
               <a:ext uri="{FF2B5EF4-FFF2-40B4-BE49-F238E27FC236}">
-                <a16:creationId xmlns:a16="http://schemas.microsoft.com/office/drawing/2014/main" id="{D11D6791-94A3-4933-A8DB-EA08A9A8D52B}"/>
+                <a16:creationId xmlns:a16="http://schemas.microsoft.com/office/drawing/2014/main" id="{EAF5AB63-9B7B-4E84-AA84-2BCDA14872F4}"/>
               </a:ext>
             </a:extLst>
           </p:cNvPr>
@@ -12607,7 +12607,7 @@
           <p:cNvPr id="23" name="원래 기대한 동작은?">
             <a:extLst xmlns:a="http://schemas.openxmlformats.org/drawingml/2006/main">
               <a:ext uri="{FF2B5EF4-FFF2-40B4-BE49-F238E27FC236}">
-                <a16:creationId xmlns:a16="http://schemas.microsoft.com/office/drawing/2014/main" id="{983FF6EF-DEF0-41D2-971A-A957C09D6E31}"/>
+                <a16:creationId xmlns:a16="http://schemas.microsoft.com/office/drawing/2014/main" id="{DA242F5F-855A-4097-A095-30B68471B7EF}"/>
               </a:ext>
             </a:extLst>
           </p:cNvPr>
@@ -12763,7 +12763,7 @@
     </p:spTree>
     <p:extLst>
       <p:ext uri="{BB962C8B-B14F-4D97-AF65-F5344CB8AC3E}">
-        <p14:creationId xmlns:p14="http://schemas.microsoft.com/office/powerpoint/2010/main" val="89141231"/>
+        <p14:creationId xmlns:p14="http://schemas.microsoft.com/office/powerpoint/2010/main" val="482290962"/>
       </p:ext>
     </p:extLst>
   </p:cSld>
@@ -12794,7 +12794,7 @@
           <p:cNvPr id="13" name="ACT 0 · Repository 조사 관찰">
             <a:extLst xmlns:a="http://schemas.openxmlformats.org/drawingml/2006/main">
               <a:ext uri="{FF2B5EF4-FFF2-40B4-BE49-F238E27FC236}">
-                <a16:creationId xmlns:a16="http://schemas.microsoft.com/office/drawing/2014/main" id="{755733BE-67C6-4C5B-AA5D-C5513FA5E7F5}"/>
+                <a16:creationId xmlns:a16="http://schemas.microsoft.com/office/drawing/2014/main" id="{870E97A9-6A78-4471-B1FF-2ADED3AD836E}"/>
               </a:ext>
             </a:extLst>
           </p:cNvPr>
@@ -12952,7 +12952,7 @@
           <p:cNvPr id="2" name="S04">
             <a:extLst xmlns:a="http://schemas.openxmlformats.org/drawingml/2006/main">
               <a:ext uri="{FF2B5EF4-FFF2-40B4-BE49-F238E27FC236}">
-                <a16:creationId xmlns:a16="http://schemas.microsoft.com/office/drawing/2014/main" id="{6DBB672B-7F0A-4791-A550-F33A88B55712}"/>
+                <a16:creationId xmlns:a16="http://schemas.microsoft.com/office/drawing/2014/main" id="{83CE539E-0BC0-4534-B11A-CF82D43DE9FF}"/>
               </a:ext>
             </a:extLst>
           </p:cNvPr>
@@ -13110,7 +13110,7 @@
           <p:cNvPr id="3" name="파일명을 주지 않으면 Agent는 어디부터 볼까?">
             <a:extLst xmlns:a="http://schemas.openxmlformats.org/drawingml/2006/main">
               <a:ext uri="{FF2B5EF4-FFF2-40B4-BE49-F238E27FC236}">
-                <a16:creationId xmlns:a16="http://schemas.microsoft.com/office/drawing/2014/main" id="{6033ECAE-D0CD-4DEC-8ED6-C287ABD7930D}"/>
+                <a16:creationId xmlns:a16="http://schemas.microsoft.com/office/drawing/2014/main" id="{BA7AC396-982B-4F91-90E7-DFC026798779}"/>
               </a:ext>
             </a:extLst>
           </p:cNvPr>
@@ -13268,7 +13268,7 @@
           <p:cNvPr id="4" name="">
             <a:extLst xmlns:a="http://schemas.openxmlformats.org/drawingml/2006/main">
               <a:ext uri="{FF2B5EF4-FFF2-40B4-BE49-F238E27FC236}">
-                <a16:creationId xmlns:a16="http://schemas.microsoft.com/office/drawing/2014/main" id="{775D51B3-6792-409B-A31C-2200DC374344}"/>
+                <a16:creationId xmlns:a16="http://schemas.microsoft.com/office/drawing/2014/main" id="{D6857545-9336-49B1-8216-2EFB585705AA}"/>
               </a:ext>
             </a:extLst>
           </p:cNvPr>
@@ -13299,7 +13299,7 @@
           <p:cNvPr id="5" name="TRIAL-001 실제 요청 발췌 · Codex CLI 0.154.0 · macOS · 읽기 전용">
             <a:extLst xmlns:a="http://schemas.openxmlformats.org/drawingml/2006/main">
               <a:ext uri="{FF2B5EF4-FFF2-40B4-BE49-F238E27FC236}">
-                <a16:creationId xmlns:a16="http://schemas.microsoft.com/office/drawing/2014/main" id="{CE88BD4D-92D0-4106-B95C-91801726B761}"/>
+                <a16:creationId xmlns:a16="http://schemas.microsoft.com/office/drawing/2014/main" id="{09294517-2C43-4042-954E-86F78C7028AC}"/>
               </a:ext>
             </a:extLst>
           </p:cNvPr>
@@ -13457,7 +13457,7 @@
           <p:cNvPr id="6" name="과거 단일 실행의 기록을 살펴봅니다. 현재 Desktop 동작은 미검증입니다.">
             <a:extLst xmlns:a="http://schemas.openxmlformats.org/drawingml/2006/main">
               <a:ext uri="{FF2B5EF4-FFF2-40B4-BE49-F238E27FC236}">
-                <a16:creationId xmlns:a16="http://schemas.microsoft.com/office/drawing/2014/main" id="{A03818A7-F4D7-40BD-ABC9-B4E72E0F1A69}"/>
+                <a16:creationId xmlns:a16="http://schemas.microsoft.com/office/drawing/2014/main" id="{3CED6BA1-E533-4104-A973-702A261D9206}"/>
               </a:ext>
             </a:extLst>
           </p:cNvPr>
@@ -13615,7 +13615,7 @@
           <p:cNvPr id="7" name="“현재 이 저장소에서 테스트 하나가 실패하고 있다.&#10;실패 원인을 조사해줘. 관련 구현과 호출 경로,&#10;실패하는">
             <a:extLst xmlns:a="http://schemas.openxmlformats.org/drawingml/2006/main">
               <a:ext uri="{FF2B5EF4-FFF2-40B4-BE49-F238E27FC236}">
-                <a16:creationId xmlns:a16="http://schemas.microsoft.com/office/drawing/2014/main" id="{41B86B5C-256B-4059-A045-DAC3EA287D8B}"/>
+                <a16:creationId xmlns:a16="http://schemas.microsoft.com/office/drawing/2014/main" id="{C0030077-35DC-43EC-8416-3914313C8CF4}"/>
               </a:ext>
             </a:extLst>
           </p:cNvPr>
@@ -13842,7 +13842,7 @@
           <p:cNvPr id="8" name="">
             <a:extLst xmlns:a="http://schemas.openxmlformats.org/drawingml/2006/main">
               <a:ext uri="{FF2B5EF4-FFF2-40B4-BE49-F238E27FC236}">
-                <a16:creationId xmlns:a16="http://schemas.microsoft.com/office/drawing/2014/main" id="{D6765482-B178-447D-A678-767AF9A351AA}"/>
+                <a16:creationId xmlns:a16="http://schemas.microsoft.com/office/drawing/2014/main" id="{CC8BED9E-11D6-479E-833A-E0EF9D8D1B7F}"/>
               </a:ext>
             </a:extLst>
           </p:cNvPr>
@@ -13873,7 +13873,7 @@
           <p:cNvPr id="9" name="찾았는지 확인할 세 가지">
             <a:extLst xmlns:a="http://schemas.openxmlformats.org/drawingml/2006/main">
               <a:ext uri="{FF2B5EF4-FFF2-40B4-BE49-F238E27FC236}">
-                <a16:creationId xmlns:a16="http://schemas.microsoft.com/office/drawing/2014/main" id="{A22D14D9-10BE-4E82-B288-B975C314E3E5}"/>
+                <a16:creationId xmlns:a16="http://schemas.microsoft.com/office/drawing/2014/main" id="{0FC283F8-73C6-451C-93D6-506327AF6FC5}"/>
               </a:ext>
             </a:extLst>
           </p:cNvPr>
@@ -14031,7 +14031,7 @@
           <p:cNvPr id="10" name="01  실패하는 테스트">
             <a:extLst xmlns:a="http://schemas.openxmlformats.org/drawingml/2006/main">
               <a:ext uri="{FF2B5EF4-FFF2-40B4-BE49-F238E27FC236}">
-                <a16:creationId xmlns:a16="http://schemas.microsoft.com/office/drawing/2014/main" id="{FBC26B72-87B3-418B-B0CA-A46302609F98}"/>
+                <a16:creationId xmlns:a16="http://schemas.microsoft.com/office/drawing/2014/main" id="{71936572-BB34-4ED8-989A-E5D57FD6446D}"/>
               </a:ext>
             </a:extLst>
           </p:cNvPr>
@@ -14189,7 +14189,7 @@
           <p:cNvPr id="11" name="02  관련 구현">
             <a:extLst xmlns:a="http://schemas.openxmlformats.org/drawingml/2006/main">
               <a:ext uri="{FF2B5EF4-FFF2-40B4-BE49-F238E27FC236}">
-                <a16:creationId xmlns:a16="http://schemas.microsoft.com/office/drawing/2014/main" id="{96A3F463-2D6F-43FA-8D4B-6662077C75D4}"/>
+                <a16:creationId xmlns:a16="http://schemas.microsoft.com/office/drawing/2014/main" id="{8499124B-9CD3-44B8-8B24-C28767814088}"/>
               </a:ext>
             </a:extLst>
           </p:cNvPr>
@@ -14347,7 +14347,7 @@
           <p:cNvPr id="12" name="03  제품의 호출 경로">
             <a:extLst xmlns:a="http://schemas.openxmlformats.org/drawingml/2006/main">
               <a:ext uri="{FF2B5EF4-FFF2-40B4-BE49-F238E27FC236}">
-                <a16:creationId xmlns:a16="http://schemas.microsoft.com/office/drawing/2014/main" id="{E6EAC86B-7868-4DE7-8BC1-14D5E0E3CC23}"/>
+                <a16:creationId xmlns:a16="http://schemas.microsoft.com/office/drawing/2014/main" id="{02D41078-7CBC-4858-AB59-7004CA088818}"/>
               </a:ext>
             </a:extLst>
           </p:cNvPr>
@@ -14503,7 +14503,7 @@
     </p:spTree>
     <p:extLst>
       <p:ext uri="{BB962C8B-B14F-4D97-AF65-F5344CB8AC3E}">
-        <p14:creationId xmlns:p14="http://schemas.microsoft.com/office/powerpoint/2010/main" val="521511032"/>
+        <p14:creationId xmlns:p14="http://schemas.microsoft.com/office/powerpoint/2010/main" val="1273137831"/>
       </p:ext>
     </p:extLst>
   </p:cSld>
@@ -14534,7 +14534,7 @@
           <p:cNvPr id="63" name="ACT 0  ·  Repository 탐색">
             <a:extLst xmlns:a="http://schemas.openxmlformats.org/drawingml/2006/main">
               <a:ext uri="{FF2B5EF4-FFF2-40B4-BE49-F238E27FC236}">
-                <a16:creationId xmlns:a16="http://schemas.microsoft.com/office/drawing/2014/main" id="{9FACE76E-7B57-42F9-89BD-6C522FD6100D}"/>
+                <a16:creationId xmlns:a16="http://schemas.microsoft.com/office/drawing/2014/main" id="{8518F184-3E73-43DA-88BD-143CF3885CAC}"/>
               </a:ext>
             </a:extLst>
           </p:cNvPr>
@@ -14692,7 +14692,7 @@
           <p:cNvPr id="2" name="S05">
             <a:extLst xmlns:a="http://schemas.openxmlformats.org/drawingml/2006/main">
               <a:ext uri="{FF2B5EF4-FFF2-40B4-BE49-F238E27FC236}">
-                <a16:creationId xmlns:a16="http://schemas.microsoft.com/office/drawing/2014/main" id="{A4ADC61D-9B13-43CE-839E-C91861CF9DE9}"/>
+                <a16:creationId xmlns:a16="http://schemas.microsoft.com/office/drawing/2014/main" id="{5DCCF0F2-4CD9-4B37-8D91-7D661579346A}"/>
               </a:ext>
             </a:extLst>
           </p:cNvPr>
@@ -14850,7 +14850,7 @@
           <p:cNvPr id="3" name="Agent가 Test와 호출 경로를 찾았다">
             <a:extLst xmlns:a="http://schemas.openxmlformats.org/drawingml/2006/main">
               <a:ext uri="{FF2B5EF4-FFF2-40B4-BE49-F238E27FC236}">
-                <a16:creationId xmlns:a16="http://schemas.microsoft.com/office/drawing/2014/main" id="{C1A174EE-8155-49DB-AB65-339C1131C6A4}"/>
+                <a16:creationId xmlns:a16="http://schemas.microsoft.com/office/drawing/2014/main" id="{A011AC77-0E82-4CE1-A15A-4D14E261FF25}"/>
               </a:ext>
             </a:extLst>
           </p:cNvPr>
@@ -15008,7 +15008,7 @@
           <p:cNvPr id="4" name="">
             <a:extLst xmlns:a="http://schemas.openxmlformats.org/drawingml/2006/main">
               <a:ext uri="{FF2B5EF4-FFF2-40B4-BE49-F238E27FC236}">
-                <a16:creationId xmlns:a16="http://schemas.microsoft.com/office/drawing/2014/main" id="{E04062D7-24FB-4251-81E4-F68194945901}"/>
+                <a16:creationId xmlns:a16="http://schemas.microsoft.com/office/drawing/2014/main" id="{053CCAAD-E6D9-46E3-8A8A-0238D746A431}"/>
               </a:ext>
             </a:extLst>
           </p:cNvPr>
@@ -15039,7 +15039,7 @@
           <p:cNvPr id="5" name="TRIAL-001 기록·STATE-00 테스트 재구성  |  Codex CLI 0.154.0 · 읽기 전용">
             <a:extLst xmlns:a="http://schemas.openxmlformats.org/drawingml/2006/main">
               <a:ext uri="{FF2B5EF4-FFF2-40B4-BE49-F238E27FC236}">
-                <a16:creationId xmlns:a16="http://schemas.microsoft.com/office/drawing/2014/main" id="{4409C441-D49C-4510-9DA9-05886094005E}"/>
+                <a16:creationId xmlns:a16="http://schemas.microsoft.com/office/drawing/2014/main" id="{8909BD09-9120-4284-8BB0-318E9F80FBAF}"/>
               </a:ext>
             </a:extLst>
           </p:cNvPr>
@@ -15197,7 +15197,7 @@
           <p:cNvPr id="6" name="실제 실행 화면이 아님 · 이 조사에서는 코드 수정 없음 · 현재 Desktop 동작 미검증">
             <a:extLst xmlns:a="http://schemas.openxmlformats.org/drawingml/2006/main">
               <a:ext uri="{FF2B5EF4-FFF2-40B4-BE49-F238E27FC236}">
-                <a16:creationId xmlns:a16="http://schemas.microsoft.com/office/drawing/2014/main" id="{ACEC5FC5-A2AA-474B-953F-F1C59433737E}"/>
+                <a16:creationId xmlns:a16="http://schemas.microsoft.com/office/drawing/2014/main" id="{736FAF93-8F1F-4383-8E24-BD9708564BDD}"/>
               </a:ext>
             </a:extLst>
           </p:cNvPr>
@@ -15355,7 +15355,7 @@
           <p:cNvPr id="7" name="crop(image, 1, 3)">
             <a:extLst xmlns:a="http://schemas.openxmlformats.org/drawingml/2006/main">
               <a:ext uri="{FF2B5EF4-FFF2-40B4-BE49-F238E27FC236}">
-                <a16:creationId xmlns:a16="http://schemas.microsoft.com/office/drawing/2014/main" id="{460EBF11-4378-4EB8-9084-AAF06E69895B}"/>
+                <a16:creationId xmlns:a16="http://schemas.microsoft.com/office/drawing/2014/main" id="{88D63B04-C9FF-43ED-A023-6370965471FE}"/>
               </a:ext>
             </a:extLst>
           </p:cNvPr>
@@ -15513,7 +15513,7 @@
           <p:cNvPr id="8" name="끝 좌표 3은 포함하지 않는 계약">
             <a:extLst xmlns:a="http://schemas.openxmlformats.org/drawingml/2006/main">
               <a:ext uri="{FF2B5EF4-FFF2-40B4-BE49-F238E27FC236}">
-                <a16:creationId xmlns:a16="http://schemas.microsoft.com/office/drawing/2014/main" id="{A1156D34-1BDA-444A-A3A3-AC113F0D493F}"/>
+                <a16:creationId xmlns:a16="http://schemas.microsoft.com/office/drawing/2014/main" id="{2D677F69-3CAC-48E8-A486-D261FFDB1E76}"/>
               </a:ext>
             </a:extLst>
           </p:cNvPr>
@@ -15671,7 +15671,7 @@
           <p:cNvPr id="9" name="입력">
             <a:extLst xmlns:a="http://schemas.openxmlformats.org/drawingml/2006/main">
               <a:ext uri="{FF2B5EF4-FFF2-40B4-BE49-F238E27FC236}">
-                <a16:creationId xmlns:a16="http://schemas.microsoft.com/office/drawing/2014/main" id="{A847EADF-1CA8-4198-8FAA-AE4A51D01B11}"/>
+                <a16:creationId xmlns:a16="http://schemas.microsoft.com/office/drawing/2014/main" id="{0B41E804-D694-4B0E-86E7-BFC516A096B7}"/>
               </a:ext>
             </a:extLst>
           </p:cNvPr>
@@ -15829,7 +15829,7 @@
           <p:cNvPr id="10" name="0">
             <a:extLst xmlns:a="http://schemas.openxmlformats.org/drawingml/2006/main">
               <a:ext uri="{FF2B5EF4-FFF2-40B4-BE49-F238E27FC236}">
-                <a16:creationId xmlns:a16="http://schemas.microsoft.com/office/drawing/2014/main" id="{B593020C-1C4D-4040-8FEF-64ACD8C6C02D}"/>
+                <a16:creationId xmlns:a16="http://schemas.microsoft.com/office/drawing/2014/main" id="{D53B8266-F181-4DFA-A396-B90925895EF2}"/>
               </a:ext>
             </a:extLst>
           </p:cNvPr>
@@ -15987,7 +15987,7 @@
           <p:cNvPr id="11" name="1">
             <a:extLst xmlns:a="http://schemas.openxmlformats.org/drawingml/2006/main">
               <a:ext uri="{FF2B5EF4-FFF2-40B4-BE49-F238E27FC236}">
-                <a16:creationId xmlns:a16="http://schemas.microsoft.com/office/drawing/2014/main" id="{A43CF62C-9078-49E4-9B85-B726B81A63EF}"/>
+                <a16:creationId xmlns:a16="http://schemas.microsoft.com/office/drawing/2014/main" id="{507702EC-5944-421C-BDB8-E2776D6C7909}"/>
               </a:ext>
             </a:extLst>
           </p:cNvPr>
@@ -16145,7 +16145,7 @@
           <p:cNvPr id="12" name="2">
             <a:extLst xmlns:a="http://schemas.openxmlformats.org/drawingml/2006/main">
               <a:ext uri="{FF2B5EF4-FFF2-40B4-BE49-F238E27FC236}">
-                <a16:creationId xmlns:a16="http://schemas.microsoft.com/office/drawing/2014/main" id="{A083641A-B939-42CE-8454-F91580B0269C}"/>
+                <a16:creationId xmlns:a16="http://schemas.microsoft.com/office/drawing/2014/main" id="{BD907127-30BF-410A-B4B2-6E8953470AAF}"/>
               </a:ext>
             </a:extLst>
           </p:cNvPr>
@@ -16303,7 +16303,7 @@
           <p:cNvPr id="13" name="3">
             <a:extLst xmlns:a="http://schemas.openxmlformats.org/drawingml/2006/main">
               <a:ext uri="{FF2B5EF4-FFF2-40B4-BE49-F238E27FC236}">
-                <a16:creationId xmlns:a16="http://schemas.microsoft.com/office/drawing/2014/main" id="{6CA58E3A-FF63-402E-9D9E-2A81B33C7019}"/>
+                <a16:creationId xmlns:a16="http://schemas.microsoft.com/office/drawing/2014/main" id="{D6B6F232-6B81-467D-ACE8-8AE17EBF32DE}"/>
               </a:ext>
             </a:extLst>
           </p:cNvPr>
@@ -16461,7 +16461,7 @@
           <p:cNvPr id="14" name="">
             <a:extLst xmlns:a="http://schemas.openxmlformats.org/drawingml/2006/main">
               <a:ext uri="{FF2B5EF4-FFF2-40B4-BE49-F238E27FC236}">
-                <a16:creationId xmlns:a16="http://schemas.microsoft.com/office/drawing/2014/main" id="{0D4E60B3-3B39-4190-960B-2B321D2CAA05}"/>
+                <a16:creationId xmlns:a16="http://schemas.microsoft.com/office/drawing/2014/main" id="{887C240B-E5BD-4E5F-8F73-426ED04D8302}"/>
               </a:ext>
             </a:extLst>
           </p:cNvPr>
@@ -16494,7 +16494,7 @@
           <p:cNvPr id="15" name="1">
             <a:extLst xmlns:a="http://schemas.openxmlformats.org/drawingml/2006/main">
               <a:ext uri="{FF2B5EF4-FFF2-40B4-BE49-F238E27FC236}">
-                <a16:creationId xmlns:a16="http://schemas.microsoft.com/office/drawing/2014/main" id="{10D29338-878B-4488-9B92-81152174B1BA}"/>
+                <a16:creationId xmlns:a16="http://schemas.microsoft.com/office/drawing/2014/main" id="{C4CDABD1-70F5-4F8D-B15E-252732857E29}"/>
               </a:ext>
             </a:extLst>
           </p:cNvPr>
@@ -16652,7 +16652,7 @@
           <p:cNvPr id="16" name="">
             <a:extLst xmlns:a="http://schemas.openxmlformats.org/drawingml/2006/main">
               <a:ext uri="{FF2B5EF4-FFF2-40B4-BE49-F238E27FC236}">
-                <a16:creationId xmlns:a16="http://schemas.microsoft.com/office/drawing/2014/main" id="{BAE9A808-3681-4D31-B00D-66A9A5E54B2E}"/>
+                <a16:creationId xmlns:a16="http://schemas.microsoft.com/office/drawing/2014/main" id="{E9853536-03AF-421D-9175-8D9B03014043}"/>
               </a:ext>
             </a:extLst>
           </p:cNvPr>
@@ -16685,7 +16685,7 @@
           <p:cNvPr id="17" name="2">
             <a:extLst xmlns:a="http://schemas.openxmlformats.org/drawingml/2006/main">
               <a:ext uri="{FF2B5EF4-FFF2-40B4-BE49-F238E27FC236}">
-                <a16:creationId xmlns:a16="http://schemas.microsoft.com/office/drawing/2014/main" id="{402F948E-8273-4564-9DAB-0BB4A27F4A8C}"/>
+                <a16:creationId xmlns:a16="http://schemas.microsoft.com/office/drawing/2014/main" id="{C56C962D-F0ED-4A2C-9CBB-5AC8080171B6}"/>
               </a:ext>
             </a:extLst>
           </p:cNvPr>
@@ -16843,7 +16843,7 @@
           <p:cNvPr id="18" name="">
             <a:extLst xmlns:a="http://schemas.openxmlformats.org/drawingml/2006/main">
               <a:ext uri="{FF2B5EF4-FFF2-40B4-BE49-F238E27FC236}">
-                <a16:creationId xmlns:a16="http://schemas.microsoft.com/office/drawing/2014/main" id="{ADF1CE69-4209-4306-AC91-DD8A6BC411A0}"/>
+                <a16:creationId xmlns:a16="http://schemas.microsoft.com/office/drawing/2014/main" id="{AF01D817-2B67-48CD-BC99-655B56BBC24D}"/>
               </a:ext>
             </a:extLst>
           </p:cNvPr>
@@ -16876,7 +16876,7 @@
           <p:cNvPr id="19" name="3">
             <a:extLst xmlns:a="http://schemas.openxmlformats.org/drawingml/2006/main">
               <a:ext uri="{FF2B5EF4-FFF2-40B4-BE49-F238E27FC236}">
-                <a16:creationId xmlns:a16="http://schemas.microsoft.com/office/drawing/2014/main" id="{145C15FA-7578-4E2B-8651-468463F33A93}"/>
+                <a16:creationId xmlns:a16="http://schemas.microsoft.com/office/drawing/2014/main" id="{6F1472AA-1F5A-4775-A0B1-31A5B838AB7D}"/>
               </a:ext>
             </a:extLst>
           </p:cNvPr>
@@ -17034,7 +17034,7 @@
           <p:cNvPr id="20" name="">
             <a:extLst xmlns:a="http://schemas.openxmlformats.org/drawingml/2006/main">
               <a:ext uri="{FF2B5EF4-FFF2-40B4-BE49-F238E27FC236}">
-                <a16:creationId xmlns:a16="http://schemas.microsoft.com/office/drawing/2014/main" id="{F863ABEF-44D0-4588-A9B5-A986EBDEFCE9}"/>
+                <a16:creationId xmlns:a16="http://schemas.microsoft.com/office/drawing/2014/main" id="{980EDBBC-4B84-45E0-8197-C1D77A240A56}"/>
               </a:ext>
             </a:extLst>
           </p:cNvPr>
@@ -17067,7 +17067,7 @@
           <p:cNvPr id="21" name="4">
             <a:extLst xmlns:a="http://schemas.openxmlformats.org/drawingml/2006/main">
               <a:ext uri="{FF2B5EF4-FFF2-40B4-BE49-F238E27FC236}">
-                <a16:creationId xmlns:a16="http://schemas.microsoft.com/office/drawing/2014/main" id="{6F08BF28-9AAA-474C-9EBE-50EEA8F69323}"/>
+                <a16:creationId xmlns:a16="http://schemas.microsoft.com/office/drawing/2014/main" id="{9EAC9726-E74B-4DD6-A8C7-181EC88A7782}"/>
               </a:ext>
             </a:extLst>
           </p:cNvPr>
@@ -17225,7 +17225,7 @@
           <p:cNvPr id="22" name="">
             <a:extLst xmlns:a="http://schemas.openxmlformats.org/drawingml/2006/main">
               <a:ext uri="{FF2B5EF4-FFF2-40B4-BE49-F238E27FC236}">
-                <a16:creationId xmlns:a16="http://schemas.microsoft.com/office/drawing/2014/main" id="{9601A62E-F1B6-479F-B489-79DAE63734E9}"/>
+                <a16:creationId xmlns:a16="http://schemas.microsoft.com/office/drawing/2014/main" id="{6CBA4ECA-7CBC-4AA0-9A37-A86F169B1733}"/>
               </a:ext>
             </a:extLst>
           </p:cNvPr>
@@ -17258,7 +17258,7 @@
           <p:cNvPr id="23" name="5">
             <a:extLst xmlns:a="http://schemas.openxmlformats.org/drawingml/2006/main">
               <a:ext uri="{FF2B5EF4-FFF2-40B4-BE49-F238E27FC236}">
-                <a16:creationId xmlns:a16="http://schemas.microsoft.com/office/drawing/2014/main" id="{80067ED4-B72D-4110-86CE-BC676D0773E0}"/>
+                <a16:creationId xmlns:a16="http://schemas.microsoft.com/office/drawing/2014/main" id="{09A51057-F701-4ED1-B2BE-7A129845B9E6}"/>
               </a:ext>
             </a:extLst>
           </p:cNvPr>
@@ -17416,7 +17416,7 @@
           <p:cNvPr id="24" name="">
             <a:extLst xmlns:a="http://schemas.openxmlformats.org/drawingml/2006/main">
               <a:ext uri="{FF2B5EF4-FFF2-40B4-BE49-F238E27FC236}">
-                <a16:creationId xmlns:a16="http://schemas.microsoft.com/office/drawing/2014/main" id="{1B619C0C-4191-4390-A792-1EFC7F34BDA2}"/>
+                <a16:creationId xmlns:a16="http://schemas.microsoft.com/office/drawing/2014/main" id="{9811364F-E849-4DFC-8A9E-264B96839C02}"/>
               </a:ext>
             </a:extLst>
           </p:cNvPr>
@@ -17449,7 +17449,7 @@
           <p:cNvPr id="25" name="6">
             <a:extLst xmlns:a="http://schemas.openxmlformats.org/drawingml/2006/main">
               <a:ext uri="{FF2B5EF4-FFF2-40B4-BE49-F238E27FC236}">
-                <a16:creationId xmlns:a16="http://schemas.microsoft.com/office/drawing/2014/main" id="{4247990D-8CE6-4D4A-B92E-5612CF4A43FC}"/>
+                <a16:creationId xmlns:a16="http://schemas.microsoft.com/office/drawing/2014/main" id="{D120C28E-B3EB-4291-9D16-2C99067243F5}"/>
               </a:ext>
             </a:extLst>
           </p:cNvPr>
@@ -17607,7 +17607,7 @@
           <p:cNvPr id="26" name="">
             <a:extLst xmlns:a="http://schemas.openxmlformats.org/drawingml/2006/main">
               <a:ext uri="{FF2B5EF4-FFF2-40B4-BE49-F238E27FC236}">
-                <a16:creationId xmlns:a16="http://schemas.microsoft.com/office/drawing/2014/main" id="{CA1180B8-9809-48AC-955F-CE112D86504B}"/>
+                <a16:creationId xmlns:a16="http://schemas.microsoft.com/office/drawing/2014/main" id="{65A69F10-9287-41B5-8306-9361E506ACA5}"/>
               </a:ext>
             </a:extLst>
           </p:cNvPr>
@@ -17640,7 +17640,7 @@
           <p:cNvPr id="27" name="7">
             <a:extLst xmlns:a="http://schemas.openxmlformats.org/drawingml/2006/main">
               <a:ext uri="{FF2B5EF4-FFF2-40B4-BE49-F238E27FC236}">
-                <a16:creationId xmlns:a16="http://schemas.microsoft.com/office/drawing/2014/main" id="{99A01CED-B880-4A5B-933F-5B6071B40364}"/>
+                <a16:creationId xmlns:a16="http://schemas.microsoft.com/office/drawing/2014/main" id="{1338A769-7105-46C1-9792-8AA5E8D9144B}"/>
               </a:ext>
             </a:extLst>
           </p:cNvPr>
@@ -17798,7 +17798,7 @@
           <p:cNvPr id="28" name="">
             <a:extLst xmlns:a="http://schemas.openxmlformats.org/drawingml/2006/main">
               <a:ext uri="{FF2B5EF4-FFF2-40B4-BE49-F238E27FC236}">
-                <a16:creationId xmlns:a16="http://schemas.microsoft.com/office/drawing/2014/main" id="{EC2E324F-FC10-4C70-A2B5-8CA9F7144DD0}"/>
+                <a16:creationId xmlns:a16="http://schemas.microsoft.com/office/drawing/2014/main" id="{F924E3FE-4227-4995-B94A-1A4407E4C673}"/>
               </a:ext>
             </a:extLst>
           </p:cNvPr>
@@ -17831,7 +17831,7 @@
           <p:cNvPr id="29" name="8">
             <a:extLst xmlns:a="http://schemas.openxmlformats.org/drawingml/2006/main">
               <a:ext uri="{FF2B5EF4-FFF2-40B4-BE49-F238E27FC236}">
-                <a16:creationId xmlns:a16="http://schemas.microsoft.com/office/drawing/2014/main" id="{0D56F148-3DA4-4C0A-979B-FD75545FBF55}"/>
+                <a16:creationId xmlns:a16="http://schemas.microsoft.com/office/drawing/2014/main" id="{D494C8EC-9321-45F9-AFDD-354C3428D4BA}"/>
               </a:ext>
             </a:extLst>
           </p:cNvPr>
@@ -17989,7 +17989,7 @@
           <p:cNvPr id="30" name="열 index">
             <a:extLst xmlns:a="http://schemas.openxmlformats.org/drawingml/2006/main">
               <a:ext uri="{FF2B5EF4-FFF2-40B4-BE49-F238E27FC236}">
-                <a16:creationId xmlns:a16="http://schemas.microsoft.com/office/drawing/2014/main" id="{8E10F026-F97E-49EC-9A75-67B83DE237E9}"/>
+                <a16:creationId xmlns:a16="http://schemas.microsoft.com/office/drawing/2014/main" id="{C10D3F5A-178D-431D-A326-C73D0835FC37}"/>
               </a:ext>
             </a:extLst>
           </p:cNvPr>
@@ -18147,7 +18147,7 @@
           <p:cNvPr id="31" name="기대">
             <a:extLst xmlns:a="http://schemas.openxmlformats.org/drawingml/2006/main">
               <a:ext uri="{FF2B5EF4-FFF2-40B4-BE49-F238E27FC236}">
-                <a16:creationId xmlns:a16="http://schemas.microsoft.com/office/drawing/2014/main" id="{E3ECAAFD-5C30-4047-BB27-240CC90C9743}"/>
+                <a16:creationId xmlns:a16="http://schemas.microsoft.com/office/drawing/2014/main" id="{FAA145FD-57DF-4F69-AD0B-3170054C5CD2}"/>
               </a:ext>
             </a:extLst>
           </p:cNvPr>
@@ -18305,7 +18305,7 @@
           <p:cNvPr id="32" name="">
             <a:extLst xmlns:a="http://schemas.openxmlformats.org/drawingml/2006/main">
               <a:ext uri="{FF2B5EF4-FFF2-40B4-BE49-F238E27FC236}">
-                <a16:creationId xmlns:a16="http://schemas.microsoft.com/office/drawing/2014/main" id="{629A9BFA-B1B4-4FDC-BF58-3B9CC4DBE66A}"/>
+                <a16:creationId xmlns:a16="http://schemas.microsoft.com/office/drawing/2014/main" id="{05C8A3D9-A103-4DE3-AB48-32F77364B67B}"/>
               </a:ext>
             </a:extLst>
           </p:cNvPr>
@@ -18338,7 +18338,7 @@
           <p:cNvPr id="33" name="2">
             <a:extLst xmlns:a="http://schemas.openxmlformats.org/drawingml/2006/main">
               <a:ext uri="{FF2B5EF4-FFF2-40B4-BE49-F238E27FC236}">
-                <a16:creationId xmlns:a16="http://schemas.microsoft.com/office/drawing/2014/main" id="{7C322986-1E95-4AF2-9FF1-4A0498338B55}"/>
+                <a16:creationId xmlns:a16="http://schemas.microsoft.com/office/drawing/2014/main" id="{D8F04A78-9CB8-4E73-BF07-EB8555166235}"/>
               </a:ext>
             </a:extLst>
           </p:cNvPr>
@@ -18496,7 +18496,7 @@
           <p:cNvPr id="34" name="">
             <a:extLst xmlns:a="http://schemas.openxmlformats.org/drawingml/2006/main">
               <a:ext uri="{FF2B5EF4-FFF2-40B4-BE49-F238E27FC236}">
-                <a16:creationId xmlns:a16="http://schemas.microsoft.com/office/drawing/2014/main" id="{7595719E-865C-4A39-9BE2-2ABC1A9F1CB8}"/>
+                <a16:creationId xmlns:a16="http://schemas.microsoft.com/office/drawing/2014/main" id="{01F9C932-CF4C-4405-8B76-236B6260F7B0}"/>
               </a:ext>
             </a:extLst>
           </p:cNvPr>
@@ -18529,7 +18529,7 @@
           <p:cNvPr id="35" name="3">
             <a:extLst xmlns:a="http://schemas.openxmlformats.org/drawingml/2006/main">
               <a:ext uri="{FF2B5EF4-FFF2-40B4-BE49-F238E27FC236}">
-                <a16:creationId xmlns:a16="http://schemas.microsoft.com/office/drawing/2014/main" id="{4D33C8E2-AE6B-444A-A8BA-5463A5E37BA5}"/>
+                <a16:creationId xmlns:a16="http://schemas.microsoft.com/office/drawing/2014/main" id="{53C04F83-C59E-42CE-A15F-6F7D9C7837FE}"/>
               </a:ext>
             </a:extLst>
           </p:cNvPr>
@@ -18687,7 +18687,7 @@
           <p:cNvPr id="36" name="">
             <a:extLst xmlns:a="http://schemas.openxmlformats.org/drawingml/2006/main">
               <a:ext uri="{FF2B5EF4-FFF2-40B4-BE49-F238E27FC236}">
-                <a16:creationId xmlns:a16="http://schemas.microsoft.com/office/drawing/2014/main" id="{EA497666-C54E-4AC5-A04E-26AC7D119433}"/>
+                <a16:creationId xmlns:a16="http://schemas.microsoft.com/office/drawing/2014/main" id="{E50278CC-5072-4236-8CC3-0DA27DF1EBF8}"/>
               </a:ext>
             </a:extLst>
           </p:cNvPr>
@@ -18720,7 +18720,7 @@
           <p:cNvPr id="37" name="6">
             <a:extLst xmlns:a="http://schemas.openxmlformats.org/drawingml/2006/main">
               <a:ext uri="{FF2B5EF4-FFF2-40B4-BE49-F238E27FC236}">
-                <a16:creationId xmlns:a16="http://schemas.microsoft.com/office/drawing/2014/main" id="{7E5A69C0-1DA9-4055-968C-D5CFD462AC84}"/>
+                <a16:creationId xmlns:a16="http://schemas.microsoft.com/office/drawing/2014/main" id="{B340A21E-B368-49A0-9A7E-9E198DF61667}"/>
               </a:ext>
             </a:extLst>
           </p:cNvPr>
@@ -18878,7 +18878,7 @@
           <p:cNvPr id="38" name="">
             <a:extLst xmlns:a="http://schemas.openxmlformats.org/drawingml/2006/main">
               <a:ext uri="{FF2B5EF4-FFF2-40B4-BE49-F238E27FC236}">
-                <a16:creationId xmlns:a16="http://schemas.microsoft.com/office/drawing/2014/main" id="{AE9FBB0B-45F7-4F82-B531-E93A5A10710B}"/>
+                <a16:creationId xmlns:a16="http://schemas.microsoft.com/office/drawing/2014/main" id="{8F42283F-50A1-4B2A-AE41-95321A9ABCCE}"/>
               </a:ext>
             </a:extLst>
           </p:cNvPr>
@@ -18911,7 +18911,7 @@
           <p:cNvPr id="39" name="7">
             <a:extLst xmlns:a="http://schemas.openxmlformats.org/drawingml/2006/main">
               <a:ext uri="{FF2B5EF4-FFF2-40B4-BE49-F238E27FC236}">
-                <a16:creationId xmlns:a16="http://schemas.microsoft.com/office/drawing/2014/main" id="{0EFCF640-43E0-4067-8750-D45D5B4B13FD}"/>
+                <a16:creationId xmlns:a16="http://schemas.microsoft.com/office/drawing/2014/main" id="{D640C229-6D45-4D19-A3B6-A8868A072AF7}"/>
               </a:ext>
             </a:extLst>
           </p:cNvPr>
@@ -19069,7 +19069,7 @@
           <p:cNvPr id="40" name="구현 결과">
             <a:extLst xmlns:a="http://schemas.openxmlformats.org/drawingml/2006/main">
               <a:ext uri="{FF2B5EF4-FFF2-40B4-BE49-F238E27FC236}">
-                <a16:creationId xmlns:a16="http://schemas.microsoft.com/office/drawing/2014/main" id="{E0B60AB8-BF6E-46E9-99D1-B3EFC57BED6B}"/>
+                <a16:creationId xmlns:a16="http://schemas.microsoft.com/office/drawing/2014/main" id="{B1160814-1D9F-428A-973B-F39C07F19A3D}"/>
               </a:ext>
             </a:extLst>
           </p:cNvPr>
@@ -19227,7 +19227,7 @@
           <p:cNvPr id="41" name="">
             <a:extLst xmlns:a="http://schemas.openxmlformats.org/drawingml/2006/main">
               <a:ext uri="{FF2B5EF4-FFF2-40B4-BE49-F238E27FC236}">
-                <a16:creationId xmlns:a16="http://schemas.microsoft.com/office/drawing/2014/main" id="{C1810931-58CD-4435-8102-9BCA40A57FC3}"/>
+                <a16:creationId xmlns:a16="http://schemas.microsoft.com/office/drawing/2014/main" id="{F40404C2-8686-4AC4-96DD-088314B1138F}"/>
               </a:ext>
             </a:extLst>
           </p:cNvPr>
@@ -19260,7 +19260,7 @@
           <p:cNvPr id="42" name="2">
             <a:extLst xmlns:a="http://schemas.openxmlformats.org/drawingml/2006/main">
               <a:ext uri="{FF2B5EF4-FFF2-40B4-BE49-F238E27FC236}">
-                <a16:creationId xmlns:a16="http://schemas.microsoft.com/office/drawing/2014/main" id="{C912A7CA-B71F-4042-82F8-CFF6CDD872D0}"/>
+                <a16:creationId xmlns:a16="http://schemas.microsoft.com/office/drawing/2014/main" id="{933262DC-D8D7-4AE8-8CDF-0A7A6037337C}"/>
               </a:ext>
             </a:extLst>
           </p:cNvPr>
@@ -19418,7 +19418,7 @@
           <p:cNvPr id="43" name="">
             <a:extLst xmlns:a="http://schemas.openxmlformats.org/drawingml/2006/main">
               <a:ext uri="{FF2B5EF4-FFF2-40B4-BE49-F238E27FC236}">
-                <a16:creationId xmlns:a16="http://schemas.microsoft.com/office/drawing/2014/main" id="{7B59658B-D809-4A04-89B2-6CB83DAC7E8D}"/>
+                <a16:creationId xmlns:a16="http://schemas.microsoft.com/office/drawing/2014/main" id="{116C401B-937F-4584-9175-B39A65946217}"/>
               </a:ext>
             </a:extLst>
           </p:cNvPr>
@@ -19451,7 +19451,7 @@
           <p:cNvPr id="44" name="3">
             <a:extLst xmlns:a="http://schemas.openxmlformats.org/drawingml/2006/main">
               <a:ext uri="{FF2B5EF4-FFF2-40B4-BE49-F238E27FC236}">
-                <a16:creationId xmlns:a16="http://schemas.microsoft.com/office/drawing/2014/main" id="{0CAE9F55-BB2B-465C-84F2-1973AD9F4BE1}"/>
+                <a16:creationId xmlns:a16="http://schemas.microsoft.com/office/drawing/2014/main" id="{9A276D30-D3EC-4611-8EA0-9A56AF98924F}"/>
               </a:ext>
             </a:extLst>
           </p:cNvPr>
@@ -19609,7 +19609,7 @@
           <p:cNvPr id="45" name="">
             <a:extLst xmlns:a="http://schemas.openxmlformats.org/drawingml/2006/main">
               <a:ext uri="{FF2B5EF4-FFF2-40B4-BE49-F238E27FC236}">
-                <a16:creationId xmlns:a16="http://schemas.microsoft.com/office/drawing/2014/main" id="{CD124092-80B3-4781-87BB-A469A378DC06}"/>
+                <a16:creationId xmlns:a16="http://schemas.microsoft.com/office/drawing/2014/main" id="{45690614-BF26-4F43-BF6F-7FCE5CBF93FE}"/>
               </a:ext>
             </a:extLst>
           </p:cNvPr>
@@ -19642,7 +19642,7 @@
           <p:cNvPr id="46" name="4">
             <a:extLst xmlns:a="http://schemas.openxmlformats.org/drawingml/2006/main">
               <a:ext uri="{FF2B5EF4-FFF2-40B4-BE49-F238E27FC236}">
-                <a16:creationId xmlns:a16="http://schemas.microsoft.com/office/drawing/2014/main" id="{91D093EA-7D43-4C64-BF26-57A808D92C34}"/>
+                <a16:creationId xmlns:a16="http://schemas.microsoft.com/office/drawing/2014/main" id="{6C24387B-EA59-4B0B-9903-2EC01CCA5040}"/>
               </a:ext>
             </a:extLst>
           </p:cNvPr>
@@ -19800,7 +19800,7 @@
           <p:cNvPr id="47" name="">
             <a:extLst xmlns:a="http://schemas.openxmlformats.org/drawingml/2006/main">
               <a:ext uri="{FF2B5EF4-FFF2-40B4-BE49-F238E27FC236}">
-                <a16:creationId xmlns:a16="http://schemas.microsoft.com/office/drawing/2014/main" id="{8A88E31C-1A7B-4065-9CE6-BB6EE99F034D}"/>
+                <a16:creationId xmlns:a16="http://schemas.microsoft.com/office/drawing/2014/main" id="{3904D452-B58A-4F19-A275-A846E98F828F}"/>
               </a:ext>
             </a:extLst>
           </p:cNvPr>
@@ -19833,7 +19833,7 @@
           <p:cNvPr id="48" name="6">
             <a:extLst xmlns:a="http://schemas.openxmlformats.org/drawingml/2006/main">
               <a:ext uri="{FF2B5EF4-FFF2-40B4-BE49-F238E27FC236}">
-                <a16:creationId xmlns:a16="http://schemas.microsoft.com/office/drawing/2014/main" id="{F96B2B3C-A9A3-474E-A572-4804E8C1F3BB}"/>
+                <a16:creationId xmlns:a16="http://schemas.microsoft.com/office/drawing/2014/main" id="{06F88A1B-FE47-472F-9889-C71F99CECAD7}"/>
               </a:ext>
             </a:extLst>
           </p:cNvPr>
@@ -19991,7 +19991,7 @@
           <p:cNvPr id="49" name="">
             <a:extLst xmlns:a="http://schemas.openxmlformats.org/drawingml/2006/main">
               <a:ext uri="{FF2B5EF4-FFF2-40B4-BE49-F238E27FC236}">
-                <a16:creationId xmlns:a16="http://schemas.microsoft.com/office/drawing/2014/main" id="{4F21079D-A133-4471-A1D1-F6062B742ABE}"/>
+                <a16:creationId xmlns:a16="http://schemas.microsoft.com/office/drawing/2014/main" id="{104392A5-4430-4DFD-95C7-ADB065146F26}"/>
               </a:ext>
             </a:extLst>
           </p:cNvPr>
@@ -20024,7 +20024,7 @@
           <p:cNvPr id="50" name="7">
             <a:extLst xmlns:a="http://schemas.openxmlformats.org/drawingml/2006/main">
               <a:ext uri="{FF2B5EF4-FFF2-40B4-BE49-F238E27FC236}">
-                <a16:creationId xmlns:a16="http://schemas.microsoft.com/office/drawing/2014/main" id="{B6477658-FB3A-455A-9524-A3DB8E856900}"/>
+                <a16:creationId xmlns:a16="http://schemas.microsoft.com/office/drawing/2014/main" id="{E7004BD7-64BB-4992-BB55-A5D213132CCA}"/>
               </a:ext>
             </a:extLst>
           </p:cNvPr>
@@ -20182,7 +20182,7 @@
           <p:cNvPr id="51" name="">
             <a:extLst xmlns:a="http://schemas.openxmlformats.org/drawingml/2006/main">
               <a:ext uri="{FF2B5EF4-FFF2-40B4-BE49-F238E27FC236}">
-                <a16:creationId xmlns:a16="http://schemas.microsoft.com/office/drawing/2014/main" id="{8A119B3B-990F-41E8-8C92-F670CFAC7C5B}"/>
+                <a16:creationId xmlns:a16="http://schemas.microsoft.com/office/drawing/2014/main" id="{DCC959C9-BB83-4D07-9950-C7740DACDC96}"/>
               </a:ext>
             </a:extLst>
           </p:cNvPr>
@@ -20215,7 +20215,7 @@
           <p:cNvPr id="52" name="8">
             <a:extLst xmlns:a="http://schemas.openxmlformats.org/drawingml/2006/main">
               <a:ext uri="{FF2B5EF4-FFF2-40B4-BE49-F238E27FC236}">
-                <a16:creationId xmlns:a16="http://schemas.microsoft.com/office/drawing/2014/main" id="{39256F7E-6684-42D5-B735-BCC927ADD05D}"/>
+                <a16:creationId xmlns:a16="http://schemas.microsoft.com/office/drawing/2014/main" id="{4B97DAF4-AA31-4B73-89BD-1181DBD649ED}"/>
               </a:ext>
             </a:extLst>
           </p:cNvPr>
@@ -20373,7 +20373,7 @@
           <p:cNvPr id="53" name="한 열이 더 포함됨">
             <a:extLst xmlns:a="http://schemas.openxmlformats.org/drawingml/2006/main">
               <a:ext uri="{FF2B5EF4-FFF2-40B4-BE49-F238E27FC236}">
-                <a16:creationId xmlns:a16="http://schemas.microsoft.com/office/drawing/2014/main" id="{9AD94C41-1290-499E-9BD6-04E7F04ED9BB}"/>
+                <a16:creationId xmlns:a16="http://schemas.microsoft.com/office/drawing/2014/main" id="{E27BC1FF-D7E8-464C-A80F-B951B829030F}"/>
               </a:ext>
             </a:extLst>
           </p:cNvPr>
@@ -20531,7 +20531,7 @@
           <p:cNvPr id="54" name="">
             <a:extLst xmlns:a="http://schemas.openxmlformats.org/drawingml/2006/main">
               <a:ext uri="{FF2B5EF4-FFF2-40B4-BE49-F238E27FC236}">
-                <a16:creationId xmlns:a16="http://schemas.microsoft.com/office/drawing/2014/main" id="{05339DD0-56F3-480C-A6F6-35105360ADD5}"/>
+                <a16:creationId xmlns:a16="http://schemas.microsoft.com/office/drawing/2014/main" id="{9EDB1D1A-86C6-48A0-B366-470B94189752}"/>
               </a:ext>
             </a:extLst>
           </p:cNvPr>
@@ -20562,7 +20562,7 @@
           <p:cNvPr id="55" name="조사에서 연결한 근거">
             <a:extLst xmlns:a="http://schemas.openxmlformats.org/drawingml/2006/main">
               <a:ext uri="{FF2B5EF4-FFF2-40B4-BE49-F238E27FC236}">
-                <a16:creationId xmlns:a16="http://schemas.microsoft.com/office/drawing/2014/main" id="{18BB63CD-9A9F-457D-86A4-100B518B621E}"/>
+                <a16:creationId xmlns:a16="http://schemas.microsoft.com/office/drawing/2014/main" id="{B7883911-6A00-4DE3-9A81-3B5A2F033CD9}"/>
               </a:ext>
             </a:extLst>
           </p:cNvPr>
@@ -20720,7 +20720,7 @@
           <p:cNvPr id="56" name="01  실패 테스트">
             <a:extLst xmlns:a="http://schemas.openxmlformats.org/drawingml/2006/main">
               <a:ext uri="{FF2B5EF4-FFF2-40B4-BE49-F238E27FC236}">
-                <a16:creationId xmlns:a16="http://schemas.microsoft.com/office/drawing/2014/main" id="{44FFFAFF-23A5-4558-BC02-414F1EF7902A}"/>
+                <a16:creationId xmlns:a16="http://schemas.microsoft.com/office/drawing/2014/main" id="{99F822DD-99DC-4DFE-A19E-6C82E0A495FF}"/>
               </a:ext>
             </a:extLst>
           </p:cNvPr>
@@ -20878,7 +20878,7 @@
           <p:cNvPr id="57" name="test_crop_excludes_&#10;end_coordinate">
             <a:extLst xmlns:a="http://schemas.openxmlformats.org/drawingml/2006/main">
               <a:ext uri="{FF2B5EF4-FFF2-40B4-BE49-F238E27FC236}">
-                <a16:creationId xmlns:a16="http://schemas.microsoft.com/office/drawing/2014/main" id="{68A92D7F-CFE2-41F1-BA01-EEFB3D8F042F}"/>
+                <a16:creationId xmlns:a16="http://schemas.microsoft.com/office/drawing/2014/main" id="{3DEA5A3D-922A-48EE-9772-834BF3AFE22B}"/>
               </a:ext>
             </a:extLst>
           </p:cNvPr>
@@ -21059,7 +21059,7 @@
           <p:cNvPr id="58" name="02  제품의 호출 경로">
             <a:extLst xmlns:a="http://schemas.openxmlformats.org/drawingml/2006/main">
               <a:ext uri="{FF2B5EF4-FFF2-40B4-BE49-F238E27FC236}">
-                <a16:creationId xmlns:a16="http://schemas.microsoft.com/office/drawing/2014/main" id="{34EBC5D3-6C84-4804-BA45-AFEE5FE1836B}"/>
+                <a16:creationId xmlns:a16="http://schemas.microsoft.com/office/drawing/2014/main" id="{280132EC-5F58-48C7-BDB9-5BF2F60C1D81}"/>
               </a:ext>
             </a:extLst>
           </p:cNvPr>
@@ -21217,7 +21217,7 @@
           <p:cNvPr id="59" name="cli.main → process_image → crop">
             <a:extLst xmlns:a="http://schemas.openxmlformats.org/drawingml/2006/main">
               <a:ext uri="{FF2B5EF4-FFF2-40B4-BE49-F238E27FC236}">
-                <a16:creationId xmlns:a16="http://schemas.microsoft.com/office/drawing/2014/main" id="{2C8AF3A3-A02E-4323-8E0A-9E2123DF28A0}"/>
+                <a16:creationId xmlns:a16="http://schemas.microsoft.com/office/drawing/2014/main" id="{F49729DB-294A-472F-9312-601049F1B592}"/>
               </a:ext>
             </a:extLst>
           </p:cNvPr>
@@ -21375,7 +21375,7 @@
           <p:cNvPr id="60" name="03  계약과 다른 구현">
             <a:extLst xmlns:a="http://schemas.openxmlformats.org/drawingml/2006/main">
               <a:ext uri="{FF2B5EF4-FFF2-40B4-BE49-F238E27FC236}">
-                <a16:creationId xmlns:a16="http://schemas.microsoft.com/office/drawing/2014/main" id="{4AC1F69F-5C16-482D-A904-FC8D91265466}"/>
+                <a16:creationId xmlns:a16="http://schemas.microsoft.com/office/drawing/2014/main" id="{40CD9D22-3169-43DA-89C1-9B78DFD53A3A}"/>
               </a:ext>
             </a:extLst>
           </p:cNvPr>
@@ -21533,7 +21533,7 @@
           <p:cNvPr id="61" name="row[x_start : x_end + 1]">
             <a:extLst xmlns:a="http://schemas.openxmlformats.org/drawingml/2006/main">
               <a:ext uri="{FF2B5EF4-FFF2-40B4-BE49-F238E27FC236}">
-                <a16:creationId xmlns:a16="http://schemas.microsoft.com/office/drawing/2014/main" id="{8B56F0EB-F48C-4C7B-B4FC-590141313623}"/>
+                <a16:creationId xmlns:a16="http://schemas.microsoft.com/office/drawing/2014/main" id="{7EF1B601-F658-4C30-BE0C-297894BECEC3}"/>
               </a:ext>
             </a:extLst>
           </p:cNvPr>
@@ -21691,7 +21691,7 @@
           <p:cNvPr id="62" name="계약: [x_start, x_end)">
             <a:extLst xmlns:a="http://schemas.openxmlformats.org/drawingml/2006/main">
               <a:ext uri="{FF2B5EF4-FFF2-40B4-BE49-F238E27FC236}">
-                <a16:creationId xmlns:a16="http://schemas.microsoft.com/office/drawing/2014/main" id="{59C25C2A-4174-4803-8D71-05DDEDC3859C}"/>
+                <a16:creationId xmlns:a16="http://schemas.microsoft.com/office/drawing/2014/main" id="{B56B41A5-F04C-4F46-B35E-2E6C78AB3218}"/>
               </a:ext>
             </a:extLst>
           </p:cNvPr>
@@ -21847,7 +21847,7 @@
     </p:spTree>
     <p:extLst>
       <p:ext uri="{BB962C8B-B14F-4D97-AF65-F5344CB8AC3E}">
-        <p14:creationId xmlns:p14="http://schemas.microsoft.com/office/powerpoint/2010/main" val="1603699594"/>
+        <p14:creationId xmlns:p14="http://schemas.microsoft.com/office/powerpoint/2010/main" val="148551870"/>
       </p:ext>
     </p:extLst>
   </p:cSld>
@@ -21878,7 +21878,7 @@
           <p:cNvPr id="17" name="ACT 0 · 조사 결과 읽기">
             <a:extLst xmlns:a="http://schemas.openxmlformats.org/drawingml/2006/main">
               <a:ext uri="{FF2B5EF4-FFF2-40B4-BE49-F238E27FC236}">
-                <a16:creationId xmlns:a16="http://schemas.microsoft.com/office/drawing/2014/main" id="{7D794C63-7A43-45B2-8025-B04CE6834ECD}"/>
+                <a16:creationId xmlns:a16="http://schemas.microsoft.com/office/drawing/2014/main" id="{9CB89B9A-3E07-4942-A5AF-9CD7678E5149}"/>
               </a:ext>
             </a:extLst>
           </p:cNvPr>
@@ -22036,7 +22036,7 @@
           <p:cNvPr id="2" name="S06">
             <a:extLst xmlns:a="http://schemas.openxmlformats.org/drawingml/2006/main">
               <a:ext uri="{FF2B5EF4-FFF2-40B4-BE49-F238E27FC236}">
-                <a16:creationId xmlns:a16="http://schemas.microsoft.com/office/drawing/2014/main" id="{A1E32591-4F3E-4002-A5C0-2F48DE229C30}"/>
+                <a16:creationId xmlns:a16="http://schemas.microsoft.com/office/drawing/2014/main" id="{2673C32F-E530-4C52-9D97-99614F22CAF9}"/>
               </a:ext>
             </a:extLst>
           </p:cNvPr>
@@ -22194,7 +22194,7 @@
           <p:cNvPr id="3" name="관찰 결과와 실행 제한을 분리한다">
             <a:extLst xmlns:a="http://schemas.openxmlformats.org/drawingml/2006/main">
               <a:ext uri="{FF2B5EF4-FFF2-40B4-BE49-F238E27FC236}">
-                <a16:creationId xmlns:a16="http://schemas.microsoft.com/office/drawing/2014/main" id="{9676E8EB-A793-4571-B048-04E4A27E7A47}"/>
+                <a16:creationId xmlns:a16="http://schemas.microsoft.com/office/drawing/2014/main" id="{93E87592-96B5-4118-9669-4AD934C8E402}"/>
               </a:ext>
             </a:extLst>
           </p:cNvPr>
@@ -22352,7 +22352,7 @@
           <p:cNvPr id="4" name="">
             <a:extLst xmlns:a="http://schemas.openxmlformats.org/drawingml/2006/main">
               <a:ext uri="{FF2B5EF4-FFF2-40B4-BE49-F238E27FC236}">
-                <a16:creationId xmlns:a16="http://schemas.microsoft.com/office/drawing/2014/main" id="{DB84AA2C-EDAD-46EB-AA66-D5100A3FF8D2}"/>
+                <a16:creationId xmlns:a16="http://schemas.microsoft.com/office/drawing/2014/main" id="{41A0E2F7-A08A-4C4D-BADF-43972C5DE4A2}"/>
               </a:ext>
             </a:extLst>
           </p:cNvPr>
@@ -22383,7 +22383,7 @@
           <p:cNvPr id="5" name="TRIAL-001 기록 재구성 · Codex CLI 0.154.0 · 단일 읽기 전용 조사">
             <a:extLst xmlns:a="http://schemas.openxmlformats.org/drawingml/2006/main">
               <a:ext uri="{FF2B5EF4-FFF2-40B4-BE49-F238E27FC236}">
-                <a16:creationId xmlns:a16="http://schemas.microsoft.com/office/drawing/2014/main" id="{232B7CEE-370B-40A9-9F37-C08AFEC59C1C}"/>
+                <a16:creationId xmlns:a16="http://schemas.microsoft.com/office/drawing/2014/main" id="{323208BF-3A17-4FE2-AF9C-BF34077A09FD}"/>
               </a:ext>
             </a:extLst>
           </p:cNvPr>
@@ -22541,7 +22541,7 @@
           <p:cNvPr id="6" name="환경 오류 3건은 crop 결함의 증거가 아닙니다. 이 조사에서 코드는 수정하지 않았습니다.">
             <a:extLst xmlns:a="http://schemas.openxmlformats.org/drawingml/2006/main">
               <a:ext uri="{FF2B5EF4-FFF2-40B4-BE49-F238E27FC236}">
-                <a16:creationId xmlns:a16="http://schemas.microsoft.com/office/drawing/2014/main" id="{F2364938-B962-48D7-AE21-8AC1BE60C555}"/>
+                <a16:creationId xmlns:a16="http://schemas.microsoft.com/office/drawing/2014/main" id="{A66FF0D7-C3A7-49EC-9C9B-5130DA1D3498}"/>
               </a:ext>
             </a:extLst>
           </p:cNvPr>
@@ -22699,7 +22699,7 @@
           <p:cNvPr id="7" name="코드에서 확인한 문제">
             <a:extLst xmlns:a="http://schemas.openxmlformats.org/drawingml/2006/main">
               <a:ext uri="{FF2B5EF4-FFF2-40B4-BE49-F238E27FC236}">
-                <a16:creationId xmlns:a16="http://schemas.microsoft.com/office/drawing/2014/main" id="{E55B2ACE-816C-429B-B86B-FEBC95AB3865}"/>
+                <a16:creationId xmlns:a16="http://schemas.microsoft.com/office/drawing/2014/main" id="{E2A9F7F7-B20D-41BC-B32F-E68A419107AA}"/>
               </a:ext>
             </a:extLst>
           </p:cNvPr>
@@ -22857,7 +22857,7 @@
           <p:cNvPr id="8" name="실행 환경에서 생긴 제한">
             <a:extLst xmlns:a="http://schemas.openxmlformats.org/drawingml/2006/main">
               <a:ext uri="{FF2B5EF4-FFF2-40B4-BE49-F238E27FC236}">
-                <a16:creationId xmlns:a16="http://schemas.microsoft.com/office/drawing/2014/main" id="{387AC485-CB73-43FE-8CE1-A7F577C8E97B}"/>
+                <a16:creationId xmlns:a16="http://schemas.microsoft.com/office/drawing/2014/main" id="{A226862D-9AB1-475E-AC93-9A2F0CBD1E25}"/>
               </a:ext>
             </a:extLst>
           </p:cNvPr>
@@ -23015,7 +23015,7 @@
           <p:cNvPr id="9" name="">
             <a:extLst xmlns:a="http://schemas.openxmlformats.org/drawingml/2006/main">
               <a:ext uri="{FF2B5EF4-FFF2-40B4-BE49-F238E27FC236}">
-                <a16:creationId xmlns:a16="http://schemas.microsoft.com/office/drawing/2014/main" id="{A418CAC2-0A88-41ED-A51C-3842DFBE140C}"/>
+                <a16:creationId xmlns:a16="http://schemas.microsoft.com/office/drawing/2014/main" id="{F3C1701F-F204-471E-81FF-D860D1FEAF38}"/>
               </a:ext>
             </a:extLst>
           </p:cNvPr>
@@ -23048,7 +23048,7 @@
           <p:cNvPr id="10" name="">
             <a:extLst xmlns:a="http://schemas.openxmlformats.org/drawingml/2006/main">
               <a:ext uri="{FF2B5EF4-FFF2-40B4-BE49-F238E27FC236}">
-                <a16:creationId xmlns:a16="http://schemas.microsoft.com/office/drawing/2014/main" id="{6E2772FD-00DF-4982-9B97-7E1E39633180}"/>
+                <a16:creationId xmlns:a16="http://schemas.microsoft.com/office/drawing/2014/main" id="{05047DB2-A099-4369-B679-198FF856A984}"/>
               </a:ext>
             </a:extLst>
           </p:cNvPr>
@@ -23079,7 +23079,7 @@
           <p:cNvPr id="11" name="crop에 한 열이 더 포함됨">
             <a:extLst xmlns:a="http://schemas.openxmlformats.org/drawingml/2006/main">
               <a:ext uri="{FF2B5EF4-FFF2-40B4-BE49-F238E27FC236}">
-                <a16:creationId xmlns:a16="http://schemas.microsoft.com/office/drawing/2014/main" id="{FE95396A-54F2-4E7C-8DC6-2B5CFC462FB8}"/>
+                <a16:creationId xmlns:a16="http://schemas.microsoft.com/office/drawing/2014/main" id="{224AF0A5-DA88-4A9A-93A5-3DE6010776CB}"/>
               </a:ext>
             </a:extLst>
           </p:cNvPr>
@@ -23237,7 +23237,7 @@
           <p:cNvPr id="12" name="테스트·호출 경로·계약 연결&#10;원인 설명 / 코드 수정 없음">
             <a:extLst xmlns:a="http://schemas.openxmlformats.org/drawingml/2006/main">
               <a:ext uri="{FF2B5EF4-FFF2-40B4-BE49-F238E27FC236}">
-                <a16:creationId xmlns:a16="http://schemas.microsoft.com/office/drawing/2014/main" id="{BFC47FB8-9700-4966-B5CC-283132DF0E0F}"/>
+                <a16:creationId xmlns:a16="http://schemas.microsoft.com/office/drawing/2014/main" id="{B83FD470-C275-4684-9872-400182C0265A}"/>
               </a:ext>
             </a:extLst>
           </p:cNvPr>
@@ -23418,7 +23418,7 @@
           <p:cNvPr id="13" name="임시 디렉터리를 만들 수 없음">
             <a:extLst xmlns:a="http://schemas.openxmlformats.org/drawingml/2006/main">
               <a:ext uri="{FF2B5EF4-FFF2-40B4-BE49-F238E27FC236}">
-                <a16:creationId xmlns:a16="http://schemas.microsoft.com/office/drawing/2014/main" id="{ADF68B0F-E31F-45DE-97B7-66C7FED92668}"/>
+                <a16:creationId xmlns:a16="http://schemas.microsoft.com/office/drawing/2014/main" id="{77FEFDDF-35B0-4234-B7DA-F09D4E9571DB}"/>
               </a:ext>
             </a:extLst>
           </p:cNvPr>
@@ -23576,7 +23576,7 @@
           <p:cNvPr id="14" name="읽기 전용 권한 때문에&#10;서로 다른 테스트 3건이 오류">
             <a:extLst xmlns:a="http://schemas.openxmlformats.org/drawingml/2006/main">
               <a:ext uri="{FF2B5EF4-FFF2-40B4-BE49-F238E27FC236}">
-                <a16:creationId xmlns:a16="http://schemas.microsoft.com/office/drawing/2014/main" id="{E9A4387C-22DC-4CAF-A525-5E627AD5DA73}"/>
+                <a16:creationId xmlns:a16="http://schemas.microsoft.com/office/drawing/2014/main" id="{50E122C1-4388-4FC8-AB52-8988E8D78503}"/>
               </a:ext>
             </a:extLst>
           </p:cNvPr>
@@ -23757,7 +23757,7 @@
           <p:cNvPr id="15" name="">
             <a:extLst xmlns:a="http://schemas.openxmlformats.org/drawingml/2006/main">
               <a:ext uri="{FF2B5EF4-FFF2-40B4-BE49-F238E27FC236}">
-                <a16:creationId xmlns:a16="http://schemas.microsoft.com/office/drawing/2014/main" id="{A35F19E9-C27A-483F-B8D5-2C9F0A3A9904}"/>
+                <a16:creationId xmlns:a16="http://schemas.microsoft.com/office/drawing/2014/main" id="{C90765A1-8207-473D-9482-786A36DD9BFD}"/>
               </a:ext>
             </a:extLst>
           </p:cNvPr>
@@ -23788,7 +23788,7 @@
           <p:cNvPr id="16" name="전체 실행 기록: 7개 통과 + crop 실패 + 환경 오류 3건">
             <a:extLst xmlns:a="http://schemas.openxmlformats.org/drawingml/2006/main">
               <a:ext uri="{FF2B5EF4-FFF2-40B4-BE49-F238E27FC236}">
-                <a16:creationId xmlns:a16="http://schemas.microsoft.com/office/drawing/2014/main" id="{2CB9EEE1-1A34-4F2A-9645-42CD1AA6B780}"/>
+                <a16:creationId xmlns:a16="http://schemas.microsoft.com/office/drawing/2014/main" id="{EF9E5F0C-08D2-44C2-A469-574D5BD8790D}"/>
               </a:ext>
             </a:extLst>
           </p:cNvPr>
@@ -23944,7 +23944,7 @@
     </p:spTree>
     <p:extLst>
       <p:ext uri="{BB962C8B-B14F-4D97-AF65-F5344CB8AC3E}">
-        <p14:creationId xmlns:p14="http://schemas.microsoft.com/office/powerpoint/2010/main" val="807368928"/>
+        <p14:creationId xmlns:p14="http://schemas.microsoft.com/office/powerpoint/2010/main" val="1556357695"/>
       </p:ext>
     </p:extLst>
   </p:cSld>
@@ -23972,10 +23972,10 @@
       </p:grpSpPr>
       <p:sp>
         <p:nvSpPr>
-          <p:cNvPr id="19" name="ACT 0 · Context를 찾는 주체">
+          <p:cNvPr id="12" name="ACT 0 · Context를 찾는 주체">
             <a:extLst xmlns:a="http://schemas.openxmlformats.org/drawingml/2006/main">
               <a:ext uri="{FF2B5EF4-FFF2-40B4-BE49-F238E27FC236}">
-                <a16:creationId xmlns:a16="http://schemas.microsoft.com/office/drawing/2014/main" id="{D81E54E1-D30E-47D9-82F0-B7F990FCA44F}"/>
+                <a16:creationId xmlns:a16="http://schemas.microsoft.com/office/drawing/2014/main" id="{13FC8076-79D0-4DEC-8993-FB44772D9249}"/>
               </a:ext>
             </a:extLst>
           </p:cNvPr>
@@ -24133,7 +24133,7 @@
           <p:cNvPr id="2" name="S07">
             <a:extLst xmlns:a="http://schemas.openxmlformats.org/drawingml/2006/main">
               <a:ext uri="{FF2B5EF4-FFF2-40B4-BE49-F238E27FC236}">
-                <a16:creationId xmlns:a16="http://schemas.microsoft.com/office/drawing/2014/main" id="{3CE6CF3C-95EA-4AD2-8ADD-5DE02BC10A47}"/>
+                <a16:creationId xmlns:a16="http://schemas.microsoft.com/office/drawing/2014/main" id="{01BFBD3C-6B4D-4C79-957B-4184617EC34F}"/>
               </a:ext>
             </a:extLst>
           </p:cNvPr>
@@ -24291,7 +24291,7 @@
           <p:cNvPr id="3" name="코드를 AI에게 가져가는 대신&#10;AI를 Repository로 데려간다">
             <a:extLst xmlns:a="http://schemas.openxmlformats.org/drawingml/2006/main">
               <a:ext uri="{FF2B5EF4-FFF2-40B4-BE49-F238E27FC236}">
-                <a16:creationId xmlns:a16="http://schemas.microsoft.com/office/drawing/2014/main" id="{0546D1AB-33CB-4055-80BC-FD392056A7E5}"/>
+                <a16:creationId xmlns:a16="http://schemas.microsoft.com/office/drawing/2014/main" id="{A3AD61F3-891E-4E58-BD98-F9F8FCD2DF33}"/>
               </a:ext>
             </a:extLst>
           </p:cNvPr>
@@ -24472,7 +24472,7 @@
           <p:cNvPr id="4" name="">
             <a:extLst xmlns:a="http://schemas.openxmlformats.org/drawingml/2006/main">
               <a:ext uri="{FF2B5EF4-FFF2-40B4-BE49-F238E27FC236}">
-                <a16:creationId xmlns:a16="http://schemas.microsoft.com/office/drawing/2014/main" id="{D0BDA96A-628A-48E8-A215-1CE43F4731DD}"/>
+                <a16:creationId xmlns:a16="http://schemas.microsoft.com/office/drawing/2014/main" id="{93102F3E-CBA5-41F4-AED7-389C6F2655F4}"/>
               </a:ext>
             </a:extLst>
           </p:cNvPr>
@@ -24500,10 +24500,10 @@
       </p:sp>
       <p:sp>
         <p:nvSpPr>
-          <p:cNvPr id="5" name="교육 모델 · 연결된 관찰: TRIAL-001에서 테스트·구현·호출 경로를 확인">
+          <p:cNvPr id="5" name="교육 모델 · TRIAL-001 단일 CLI 관찰과 연결 · AI 생성 설명용 삽화">
             <a:extLst xmlns:a="http://schemas.openxmlformats.org/drawingml/2006/main">
               <a:ext uri="{FF2B5EF4-FFF2-40B4-BE49-F238E27FC236}">
-                <a16:creationId xmlns:a16="http://schemas.microsoft.com/office/drawing/2014/main" id="{AC988D66-0729-487B-9A46-E89683469FF0}"/>
+                <a16:creationId xmlns:a16="http://schemas.microsoft.com/office/drawing/2014/main" id="{5AA366D2-9468-4C99-B214-C34BF10A13C0}"/>
               </a:ext>
             </a:extLst>
           </p:cNvPr>
@@ -24651,17 +24651,17 @@
                 <a:ea typeface="Malgun Gothic"/>
                 <a:cs typeface="Malgun Gothic"/>
               </a:rPr>
-              <a:t>교육 모델 · 연결된 관찰: TRIAL-001에서 테스트·구현·호출 경로를 확인</a:t>
+              <a:t>교육 모델 · TRIAL-001 단일 CLI 관찰과 연결 · AI 생성 설명용 삽화</a:t>
             </a:r>
           </a:p>
         </p:txBody>
       </p:sp>
       <p:sp>
         <p:nvSpPr>
-          <p:cNvPr id="6" name="관찰은 단일 CLI 조사에 한정됩니다. Repository 접근이 작업의 목표까지 정하지는 않습니다.">
+          <p:cNvPr id="6" name="목표 설정과 근거 검토는 개발자에게 남습니다. Repository 접근이 Task 의도를 정하지는 않습니다.">
             <a:extLst xmlns:a="http://schemas.openxmlformats.org/drawingml/2006/main">
               <a:ext uri="{FF2B5EF4-FFF2-40B4-BE49-F238E27FC236}">
-                <a16:creationId xmlns:a16="http://schemas.microsoft.com/office/drawing/2014/main" id="{3F9A02B1-B11F-471E-9986-6794CB180685}"/>
+                <a16:creationId xmlns:a16="http://schemas.microsoft.com/office/drawing/2014/main" id="{641C2680-2797-4E78-ABBB-9C9A7FDA3EDE}"/>
               </a:ext>
             </a:extLst>
           </p:cNvPr>
@@ -24809,17 +24809,17 @@
                 <a:ea typeface="Malgun Gothic"/>
                 <a:cs typeface="Malgun Gothic"/>
               </a:rPr>
-              <a:t>관찰은 단일 CLI 조사에 한정됩니다. Repository 접근이 작업의 목표까지 정하지는 않습니다.</a:t>
+              <a:t>목표 설정과 근거 검토는 개발자에게 남습니다. Repository 접근이 Task 의도를 정하지는 않습니다.</a:t>
             </a:r>
           </a:p>
         </p:txBody>
       </p:sp>
       <p:sp>
         <p:nvSpPr>
-          <p:cNvPr id="7" name="내가 관련 코드를 모아 전달">
+          <p:cNvPr id="7" name="내가 골라 전달하는 Context">
             <a:extLst xmlns:a="http://schemas.openxmlformats.org/drawingml/2006/main">
               <a:ext uri="{FF2B5EF4-FFF2-40B4-BE49-F238E27FC236}">
-                <a16:creationId xmlns:a16="http://schemas.microsoft.com/office/drawing/2014/main" id="{D467F06D-861A-4184-9339-A489C765B31F}"/>
+                <a16:creationId xmlns:a16="http://schemas.microsoft.com/office/drawing/2014/main" id="{73FB7380-49C3-4AE4-BF00-B26AEF41747D}"/>
               </a:ext>
             </a:extLst>
           </p:cNvPr>
@@ -24830,8 +24830,8 @@
         </p:nvSpPr>
         <p:spPr>
           <a:xfrm xmlns:a="http://schemas.openxmlformats.org/drawingml/2006/main">
-            <a:off x="609600" y="2257425"/>
-            <a:ext cx="10972800" cy="400050"/>
+            <a:off x="609600" y="2038350"/>
+            <a:ext cx="5238750" cy="323850"/>
           </a:xfrm>
           <a:prstGeom xmlns:a="http://schemas.openxmlformats.org/drawingml/2006/main" prst="rect">
             <a:avLst/>
@@ -24847,7 +24847,7 @@
           </a:bodyPr>
           <a:lstStyle xmlns:a="http://schemas.openxmlformats.org/drawingml/2006/main">
             <a:defPPr algn="l">
-              <a:defRPr sz="2325" b="1">
+              <a:defRPr sz="2100" b="1">
                 <a:solidFill>
                   <a:srgbClr val="4D5A68"/>
                 </a:solidFill>
@@ -24857,7 +24857,7 @@
               </a:defRPr>
             </a:defPPr>
             <a:lvl1pPr algn="l">
-              <a:defRPr sz="2325" b="1">
+              <a:defRPr sz="2100" b="1">
                 <a:solidFill>
                   <a:srgbClr val="4D5A68"/>
                 </a:solidFill>
@@ -24867,7 +24867,7 @@
               </a:defRPr>
             </a:lvl1pPr>
             <a:lvl2pPr algn="l">
-              <a:defRPr sz="2325" b="1">
+              <a:defRPr sz="2100" b="1">
                 <a:solidFill>
                   <a:srgbClr val="4D5A68"/>
                 </a:solidFill>
@@ -24877,7 +24877,7 @@
               </a:defRPr>
             </a:lvl2pPr>
             <a:lvl3pPr algn="l">
-              <a:defRPr sz="2325" b="1">
+              <a:defRPr sz="2100" b="1">
                 <a:solidFill>
                   <a:srgbClr val="4D5A68"/>
                 </a:solidFill>
@@ -24887,7 +24887,7 @@
               </a:defRPr>
             </a:lvl3pPr>
             <a:lvl4pPr algn="l">
-              <a:defRPr sz="2325" b="1">
+              <a:defRPr sz="2100" b="1">
                 <a:solidFill>
                   <a:srgbClr val="4D5A68"/>
                 </a:solidFill>
@@ -24897,7 +24897,7 @@
               </a:defRPr>
             </a:lvl4pPr>
             <a:lvl5pPr algn="l">
-              <a:defRPr sz="2325" b="1">
+              <a:defRPr sz="2100" b="1">
                 <a:solidFill>
                   <a:srgbClr val="4D5A68"/>
                 </a:solidFill>
@@ -24907,7 +24907,7 @@
               </a:defRPr>
             </a:lvl5pPr>
             <a:lvl6pPr algn="l">
-              <a:defRPr sz="2325" b="1">
+              <a:defRPr sz="2100" b="1">
                 <a:solidFill>
                   <a:srgbClr val="4D5A68"/>
                 </a:solidFill>
@@ -24917,7 +24917,7 @@
               </a:defRPr>
             </a:lvl6pPr>
             <a:lvl7pPr algn="l">
-              <a:defRPr sz="2325" b="1">
+              <a:defRPr sz="2100" b="1">
                 <a:solidFill>
                   <a:srgbClr val="4D5A68"/>
                 </a:solidFill>
@@ -24927,7 +24927,7 @@
               </a:defRPr>
             </a:lvl7pPr>
             <a:lvl8pPr algn="l">
-              <a:defRPr sz="2325" b="1">
+              <a:defRPr sz="2100" b="1">
                 <a:solidFill>
                   <a:srgbClr val="4D5A68"/>
                 </a:solidFill>
@@ -24937,7 +24937,7 @@
               </a:defRPr>
             </a:lvl8pPr>
             <a:lvl9pPr algn="l">
-              <a:defRPr sz="2325" b="1">
+              <a:defRPr sz="2100" b="1">
                 <a:solidFill>
                   <a:srgbClr val="4D5A68"/>
                 </a:solidFill>
@@ -24949,7 +24949,7 @@
           </a:lstStyle>
           <a:p xmlns:a="http://schemas.openxmlformats.org/drawingml/2006/main">
             <a:pPr algn="l">
-              <a:defRPr sz="2325" b="1">
+              <a:defRPr sz="2100" b="1">
                 <a:solidFill>
                   <a:srgbClr val="4D5A68"/>
                 </a:solidFill>
@@ -24959,7 +24959,7 @@
               </a:defRPr>
             </a:pPr>
             <a:r>
-              <a:rPr sz="2325" b="1">
+              <a:rPr sz="2100" b="1">
                 <a:solidFill>
                   <a:srgbClr val="4D5A68"/>
                 </a:solidFill>
@@ -24967,17 +24967,17 @@
                 <a:ea typeface="Malgun Gothic"/>
                 <a:cs typeface="Malgun Gothic"/>
               </a:rPr>
-              <a:t>내가 관련 코드를 모아 전달</a:t>
+              <a:t>내가 골라 전달하는 Context</a:t>
             </a:r>
           </a:p>
         </p:txBody>
       </p:sp>
       <p:sp>
         <p:nvSpPr>
-          <p:cNvPr id="8" name="Repository">
+          <p:cNvPr id="8" name="조사를 맡기고 근거를 확인">
             <a:extLst xmlns:a="http://schemas.openxmlformats.org/drawingml/2006/main">
               <a:ext uri="{FF2B5EF4-FFF2-40B4-BE49-F238E27FC236}">
-                <a16:creationId xmlns:a16="http://schemas.microsoft.com/office/drawing/2014/main" id="{9004D112-4C54-457F-8DC6-D3B7EDE4F467}"/>
+                <a16:creationId xmlns:a16="http://schemas.microsoft.com/office/drawing/2014/main" id="{40B489DA-5337-44CC-AB7B-982D2CB47FBD}"/>
               </a:ext>
             </a:extLst>
           </p:cNvPr>
@@ -24988,8 +24988,8 @@
         </p:nvSpPr>
         <p:spPr>
           <a:xfrm xmlns:a="http://schemas.openxmlformats.org/drawingml/2006/main">
-            <a:off x="609600" y="2924175"/>
-            <a:ext cx="2647950" cy="476250"/>
+            <a:off x="6381750" y="2038350"/>
+            <a:ext cx="5200650" cy="323850"/>
           </a:xfrm>
           <a:prstGeom xmlns:a="http://schemas.openxmlformats.org/drawingml/2006/main" prst="rect">
             <a:avLst/>
@@ -25005,9 +25005,9 @@
           </a:bodyPr>
           <a:lstStyle xmlns:a="http://schemas.openxmlformats.org/drawingml/2006/main">
             <a:defPPr algn="l">
-              <a:defRPr sz="2550" b="1">
-                <a:solidFill>
-                  <a:srgbClr val="17212B"/>
+              <a:defRPr sz="2100" b="1">
+                <a:solidFill>
+                  <a:srgbClr val="0B6172"/>
                 </a:solidFill>
                 <a:latin typeface="Malgun Gothic"/>
                 <a:ea typeface="Malgun Gothic"/>
@@ -25015,9 +25015,9 @@
               </a:defRPr>
             </a:defPPr>
             <a:lvl1pPr algn="l">
-              <a:defRPr sz="2550" b="1">
-                <a:solidFill>
-                  <a:srgbClr val="17212B"/>
+              <a:defRPr sz="2100" b="1">
+                <a:solidFill>
+                  <a:srgbClr val="0B6172"/>
                 </a:solidFill>
                 <a:latin typeface="Malgun Gothic"/>
                 <a:ea typeface="Malgun Gothic"/>
@@ -25025,9 +25025,9 @@
               </a:defRPr>
             </a:lvl1pPr>
             <a:lvl2pPr algn="l">
-              <a:defRPr sz="2550" b="1">
-                <a:solidFill>
-                  <a:srgbClr val="17212B"/>
+              <a:defRPr sz="2100" b="1">
+                <a:solidFill>
+                  <a:srgbClr val="0B6172"/>
                 </a:solidFill>
                 <a:latin typeface="Malgun Gothic"/>
                 <a:ea typeface="Malgun Gothic"/>
@@ -25035,9 +25035,9 @@
               </a:defRPr>
             </a:lvl2pPr>
             <a:lvl3pPr algn="l">
-              <a:defRPr sz="2550" b="1">
-                <a:solidFill>
-                  <a:srgbClr val="17212B"/>
+              <a:defRPr sz="2100" b="1">
+                <a:solidFill>
+                  <a:srgbClr val="0B6172"/>
                 </a:solidFill>
                 <a:latin typeface="Malgun Gothic"/>
                 <a:ea typeface="Malgun Gothic"/>
@@ -25045,9 +25045,9 @@
               </a:defRPr>
             </a:lvl3pPr>
             <a:lvl4pPr algn="l">
-              <a:defRPr sz="2550" b="1">
-                <a:solidFill>
-                  <a:srgbClr val="17212B"/>
+              <a:defRPr sz="2100" b="1">
+                <a:solidFill>
+                  <a:srgbClr val="0B6172"/>
                 </a:solidFill>
                 <a:latin typeface="Malgun Gothic"/>
                 <a:ea typeface="Malgun Gothic"/>
@@ -25055,9 +25055,9 @@
               </a:defRPr>
             </a:lvl4pPr>
             <a:lvl5pPr algn="l">
-              <a:defRPr sz="2550" b="1">
-                <a:solidFill>
-                  <a:srgbClr val="17212B"/>
+              <a:defRPr sz="2100" b="1">
+                <a:solidFill>
+                  <a:srgbClr val="0B6172"/>
                 </a:solidFill>
                 <a:latin typeface="Malgun Gothic"/>
                 <a:ea typeface="Malgun Gothic"/>
@@ -25065,9 +25065,9 @@
               </a:defRPr>
             </a:lvl5pPr>
             <a:lvl6pPr algn="l">
-              <a:defRPr sz="2550" b="1">
-                <a:solidFill>
-                  <a:srgbClr val="17212B"/>
+              <a:defRPr sz="2100" b="1">
+                <a:solidFill>
+                  <a:srgbClr val="0B6172"/>
                 </a:solidFill>
                 <a:latin typeface="Malgun Gothic"/>
                 <a:ea typeface="Malgun Gothic"/>
@@ -25075,9 +25075,9 @@
               </a:defRPr>
             </a:lvl6pPr>
             <a:lvl7pPr algn="l">
-              <a:defRPr sz="2550" b="1">
-                <a:solidFill>
-                  <a:srgbClr val="17212B"/>
+              <a:defRPr sz="2100" b="1">
+                <a:solidFill>
+                  <a:srgbClr val="0B6172"/>
                 </a:solidFill>
                 <a:latin typeface="Malgun Gothic"/>
                 <a:ea typeface="Malgun Gothic"/>
@@ -25085,9 +25085,9 @@
               </a:defRPr>
             </a:lvl7pPr>
             <a:lvl8pPr algn="l">
-              <a:defRPr sz="2550" b="1">
-                <a:solidFill>
-                  <a:srgbClr val="17212B"/>
+              <a:defRPr sz="2100" b="1">
+                <a:solidFill>
+                  <a:srgbClr val="0B6172"/>
                 </a:solidFill>
                 <a:latin typeface="Malgun Gothic"/>
                 <a:ea typeface="Malgun Gothic"/>
@@ -25095,9 +25095,9 @@
               </a:defRPr>
             </a:lvl8pPr>
             <a:lvl9pPr algn="l">
-              <a:defRPr sz="2550" b="1">
-                <a:solidFill>
-                  <a:srgbClr val="17212B"/>
+              <a:defRPr sz="2100" b="1">
+                <a:solidFill>
+                  <a:srgbClr val="0B6172"/>
                 </a:solidFill>
                 <a:latin typeface="Malgun Gothic"/>
                 <a:ea typeface="Malgun Gothic"/>
@@ -25107,9 +25107,9 @@
           </a:lstStyle>
           <a:p xmlns:a="http://schemas.openxmlformats.org/drawingml/2006/main">
             <a:pPr algn="l">
-              <a:defRPr sz="2550" b="1">
-                <a:solidFill>
-                  <a:srgbClr val="17212B"/>
+              <a:defRPr sz="2100" b="1">
+                <a:solidFill>
+                  <a:srgbClr val="0B6172"/>
                 </a:solidFill>
                 <a:latin typeface="Malgun Gothic"/>
                 <a:ea typeface="Malgun Gothic"/>
@@ -25117,25 +25117,54 @@
               </a:defRPr>
             </a:pPr>
             <a:r>
-              <a:rPr sz="2550" b="1">
-                <a:solidFill>
-                  <a:srgbClr val="17212B"/>
+              <a:rPr sz="2100" b="1">
+                <a:solidFill>
+                  <a:srgbClr val="0B6172"/>
                 </a:solidFill>
                 <a:latin typeface="Malgun Gothic"/>
                 <a:ea typeface="Malgun Gothic"/>
                 <a:cs typeface="Malgun Gothic"/>
               </a:rPr>
-              <a:t>Repository</a:t>
+              <a:t>조사를 맡기고 근거를 확인</a:t>
             </a:r>
           </a:p>
         </p:txBody>
       </p:sp>
-      <p:sp>
-        <p:nvSpPr>
+      <p:pic>
+        <p:nvPicPr>
           <p:cNvPr id="9" name="">
             <a:extLst xmlns:a="http://schemas.openxmlformats.org/drawingml/2006/main">
               <a:ext uri="{FF2B5EF4-FFF2-40B4-BE49-F238E27FC236}">
-                <a16:creationId xmlns:a16="http://schemas.microsoft.com/office/drawing/2014/main" id="{FB6F6ABF-A2D5-4893-B017-79D30EF4125F}"/>
+                <a16:creationId xmlns:a16="http://schemas.microsoft.com/office/drawing/2014/main" id="{867EA41E-7698-4507-A11F-84E39FFB02E2}"/>
+              </a:ext>
+            </a:extLst>
+          </p:cNvPr>
+          <p:cNvPicPr>
+            <a:picLocks xmlns:a="http://schemas.openxmlformats.org/drawingml/2006/main" noChangeAspect="1"/>
+          </p:cNvPicPr>
+          <p:nvPr/>
+        </p:nvPicPr>
+        <p:blipFill>
+          <a:blip xmlns:r="http://schemas.openxmlformats.org/officeDocument/2006/relationships" xmlns:a="http://schemas.openxmlformats.org/drawingml/2006/main" r:embed="R869af1ec4cca4bc7"/>
+          <a:srcRect xmlns:a="http://schemas.openxmlformats.org/drawingml/2006/main" l="0" t="18000" r="0" b="15000"/>
+          <a:stretch xmlns:a="http://schemas.openxmlformats.org/drawingml/2006/main"/>
+        </p:blipFill>
+        <p:spPr>
+          <a:xfrm xmlns:a="http://schemas.openxmlformats.org/drawingml/2006/main">
+            <a:off x="1562100" y="2343150"/>
+            <a:ext cx="9067800" cy="3038475"/>
+          </a:xfrm>
+          <a:prstGeom xmlns:a="http://schemas.openxmlformats.org/drawingml/2006/main" prst="rect">
+            <a:avLst/>
+          </a:prstGeom>
+        </p:spPr>
+      </p:pic>
+      <p:sp>
+        <p:nvSpPr>
+          <p:cNvPr id="10" name="코드 조각을 선택·복사">
+            <a:extLst xmlns:a="http://schemas.openxmlformats.org/drawingml/2006/main">
+              <a:ext uri="{FF2B5EF4-FFF2-40B4-BE49-F238E27FC236}">
+                <a16:creationId xmlns:a16="http://schemas.microsoft.com/office/drawing/2014/main" id="{46B9CBEB-295E-43ED-95C1-E83C0153656A}"/>
               </a:ext>
             </a:extLst>
           </p:cNvPr>
@@ -25146,71 +25175,8 @@
         </p:nvSpPr>
         <p:spPr>
           <a:xfrm xmlns:a="http://schemas.openxmlformats.org/drawingml/2006/main">
-            <a:off x="3324225" y="3057525"/>
-            <a:ext cx="533400" cy="228600"/>
-          </a:xfrm>
-          <a:prstGeom xmlns:a="http://schemas.openxmlformats.org/drawingml/2006/main" prst="rightArrow">
-            <a:avLst/>
-          </a:prstGeom>
-          <a:solidFill xmlns:a="http://schemas.openxmlformats.org/drawingml/2006/main">
-            <a:srgbClr val="0B6172"/>
-          </a:solidFill>
-          <a:ln xmlns:a="http://schemas.openxmlformats.org/drawingml/2006/main" w="0">
-            <a:noFill/>
-          </a:ln>
-        </p:spPr>
-      </p:sp>
-      <p:sp>
-        <p:nvSpPr>
-          <p:cNvPr id="10" name="">
-            <a:extLst xmlns:a="http://schemas.openxmlformats.org/drawingml/2006/main">
-              <a:ext uri="{FF2B5EF4-FFF2-40B4-BE49-F238E27FC236}">
-                <a16:creationId xmlns:a16="http://schemas.microsoft.com/office/drawing/2014/main" id="{078C194B-2F5D-412A-8D40-89765FAE4899}"/>
-              </a:ext>
-            </a:extLst>
-          </p:cNvPr>
-          <p:cNvSpPr>
-            <a:spLocks xmlns:a="http://schemas.openxmlformats.org/drawingml/2006/main" noGrp="1"/>
-          </p:cNvSpPr>
-          <p:nvPr/>
-        </p:nvSpPr>
-        <p:spPr>
-          <a:xfrm xmlns:a="http://schemas.openxmlformats.org/drawingml/2006/main">
-            <a:off x="4095750" y="2800350"/>
-            <a:ext cx="3286125" cy="742950"/>
-          </a:xfrm>
-          <a:prstGeom xmlns:a="http://schemas.openxmlformats.org/drawingml/2006/main" prst="rect">
-            <a:avLst/>
-          </a:prstGeom>
-          <a:solidFill xmlns:a="http://schemas.openxmlformats.org/drawingml/2006/main">
-            <a:srgbClr val="FFFFFF"/>
-          </a:solidFill>
-          <a:ln xmlns:a="http://schemas.openxmlformats.org/drawingml/2006/main" w="9525">
-            <a:solidFill>
-              <a:srgbClr val="C7D0DA"/>
-            </a:solidFill>
-            <a:prstDash val="solid"/>
-          </a:ln>
-        </p:spPr>
-      </p:sp>
-      <p:sp>
-        <p:nvSpPr>
-          <p:cNvPr id="11" name="개발자: 선택·복사">
-            <a:extLst xmlns:a="http://schemas.openxmlformats.org/drawingml/2006/main">
-              <a:ext uri="{FF2B5EF4-FFF2-40B4-BE49-F238E27FC236}">
-                <a16:creationId xmlns:a16="http://schemas.microsoft.com/office/drawing/2014/main" id="{3062FF7D-4359-450B-9304-16CDD4ABB1B0}"/>
-              </a:ext>
-            </a:extLst>
-          </p:cNvPr>
-          <p:cNvSpPr>
-            <a:spLocks xmlns:a="http://schemas.openxmlformats.org/drawingml/2006/main" noGrp="1"/>
-          </p:cNvSpPr>
-          <p:nvPr/>
-        </p:nvSpPr>
-        <p:spPr>
-          <a:xfrm xmlns:a="http://schemas.openxmlformats.org/drawingml/2006/main">
-            <a:off x="4324350" y="2952750"/>
-            <a:ext cx="2828925" cy="438150"/>
+            <a:off x="609600" y="5314950"/>
+            <a:ext cx="5238750" cy="342900"/>
           </a:xfrm>
           <a:prstGeom xmlns:a="http://schemas.openxmlformats.org/drawingml/2006/main" prst="rect">
             <a:avLst/>
@@ -25226,7 +25192,7 @@
           </a:bodyPr>
           <a:lstStyle xmlns:a="http://schemas.openxmlformats.org/drawingml/2006/main">
             <a:defPPr algn="l">
-              <a:defRPr sz="2175" b="1">
+              <a:defRPr sz="2100" b="1">
                 <a:solidFill>
                   <a:srgbClr val="17212B"/>
                 </a:solidFill>
@@ -25236,7 +25202,7 @@
               </a:defRPr>
             </a:defPPr>
             <a:lvl1pPr algn="l">
-              <a:defRPr sz="2175" b="1">
+              <a:defRPr sz="2100" b="1">
                 <a:solidFill>
                   <a:srgbClr val="17212B"/>
                 </a:solidFill>
@@ -25246,7 +25212,7 @@
               </a:defRPr>
             </a:lvl1pPr>
             <a:lvl2pPr algn="l">
-              <a:defRPr sz="2175" b="1">
+              <a:defRPr sz="2100" b="1">
                 <a:solidFill>
                   <a:srgbClr val="17212B"/>
                 </a:solidFill>
@@ -25256,7 +25222,7 @@
               </a:defRPr>
             </a:lvl2pPr>
             <a:lvl3pPr algn="l">
-              <a:defRPr sz="2175" b="1">
+              <a:defRPr sz="2100" b="1">
                 <a:solidFill>
                   <a:srgbClr val="17212B"/>
                 </a:solidFill>
@@ -25266,7 +25232,7 @@
               </a:defRPr>
             </a:lvl3pPr>
             <a:lvl4pPr algn="l">
-              <a:defRPr sz="2175" b="1">
+              <a:defRPr sz="2100" b="1">
                 <a:solidFill>
                   <a:srgbClr val="17212B"/>
                 </a:solidFill>
@@ -25276,7 +25242,7 @@
               </a:defRPr>
             </a:lvl4pPr>
             <a:lvl5pPr algn="l">
-              <a:defRPr sz="2175" b="1">
+              <a:defRPr sz="2100" b="1">
                 <a:solidFill>
                   <a:srgbClr val="17212B"/>
                 </a:solidFill>
@@ -25286,7 +25252,7 @@
               </a:defRPr>
             </a:lvl5pPr>
             <a:lvl6pPr algn="l">
-              <a:defRPr sz="2175" b="1">
+              <a:defRPr sz="2100" b="1">
                 <a:solidFill>
                   <a:srgbClr val="17212B"/>
                 </a:solidFill>
@@ -25296,7 +25262,7 @@
               </a:defRPr>
             </a:lvl6pPr>
             <a:lvl7pPr algn="l">
-              <a:defRPr sz="2175" b="1">
+              <a:defRPr sz="2100" b="1">
                 <a:solidFill>
                   <a:srgbClr val="17212B"/>
                 </a:solidFill>
@@ -25306,7 +25272,7 @@
               </a:defRPr>
             </a:lvl7pPr>
             <a:lvl8pPr algn="l">
-              <a:defRPr sz="2175" b="1">
+              <a:defRPr sz="2100" b="1">
                 <a:solidFill>
                   <a:srgbClr val="17212B"/>
                 </a:solidFill>
@@ -25316,7 +25282,7 @@
               </a:defRPr>
             </a:lvl8pPr>
             <a:lvl9pPr algn="l">
-              <a:defRPr sz="2175" b="1">
+              <a:defRPr sz="2100" b="1">
                 <a:solidFill>
                   <a:srgbClr val="17212B"/>
                 </a:solidFill>
@@ -25328,7 +25294,7 @@
           </a:lstStyle>
           <a:p xmlns:a="http://schemas.openxmlformats.org/drawingml/2006/main">
             <a:pPr algn="l">
-              <a:defRPr sz="2175" b="1">
+              <a:defRPr sz="2100" b="1">
                 <a:solidFill>
                   <a:srgbClr val="17212B"/>
                 </a:solidFill>
@@ -25338,7 +25304,7 @@
               </a:defRPr>
             </a:pPr>
             <a:r>
-              <a:rPr sz="2175" b="1">
+              <a:rPr sz="2100" b="1">
                 <a:solidFill>
                   <a:srgbClr val="17212B"/>
                 </a:solidFill>
@@ -25346,17 +25312,17 @@
                 <a:ea typeface="Malgun Gothic"/>
                 <a:cs typeface="Malgun Gothic"/>
               </a:rPr>
-              <a:t>개발자: 선택·복사</a:t>
+              <a:t>코드 조각을 선택·복사</a:t>
             </a:r>
           </a:p>
         </p:txBody>
       </p:sp>
       <p:sp>
         <p:nvSpPr>
-          <p:cNvPr id="12" name="">
+          <p:cNvPr id="11" name="목표는 사람이, 탐색은 Agent와">
             <a:extLst xmlns:a="http://schemas.openxmlformats.org/drawingml/2006/main">
               <a:ext uri="{FF2B5EF4-FFF2-40B4-BE49-F238E27FC236}">
-                <a16:creationId xmlns:a16="http://schemas.microsoft.com/office/drawing/2014/main" id="{08E53FBA-8F04-4981-81A1-D3588394C703}"/>
+                <a16:creationId xmlns:a16="http://schemas.microsoft.com/office/drawing/2014/main" id="{0453DBC3-CA8B-472E-BD2F-49F6F610491D}"/>
               </a:ext>
             </a:extLst>
           </p:cNvPr>
@@ -25367,38 +25333,8 @@
         </p:nvSpPr>
         <p:spPr>
           <a:xfrm xmlns:a="http://schemas.openxmlformats.org/drawingml/2006/main">
-            <a:off x="7648575" y="3057525"/>
-            <a:ext cx="533400" cy="228600"/>
-          </a:xfrm>
-          <a:prstGeom xmlns:a="http://schemas.openxmlformats.org/drawingml/2006/main" prst="rightArrow">
-            <a:avLst/>
-          </a:prstGeom>
-          <a:solidFill xmlns:a="http://schemas.openxmlformats.org/drawingml/2006/main">
-            <a:srgbClr val="0B6172"/>
-          </a:solidFill>
-          <a:ln xmlns:a="http://schemas.openxmlformats.org/drawingml/2006/main" w="0">
-            <a:noFill/>
-          </a:ln>
-        </p:spPr>
-      </p:sp>
-      <p:sp>
-        <p:nvSpPr>
-          <p:cNvPr id="13" name="AI">
-            <a:extLst xmlns:a="http://schemas.openxmlformats.org/drawingml/2006/main">
-              <a:ext uri="{FF2B5EF4-FFF2-40B4-BE49-F238E27FC236}">
-                <a16:creationId xmlns:a16="http://schemas.microsoft.com/office/drawing/2014/main" id="{EBB9F12C-4609-4632-A0A5-6EDC6C941FC9}"/>
-              </a:ext>
-            </a:extLst>
-          </p:cNvPr>
-          <p:cNvSpPr>
-            <a:spLocks xmlns:a="http://schemas.openxmlformats.org/drawingml/2006/main" noGrp="1"/>
-          </p:cNvSpPr>
-          <p:nvPr/>
-        </p:nvSpPr>
-        <p:spPr>
-          <a:xfrm xmlns:a="http://schemas.openxmlformats.org/drawingml/2006/main">
-            <a:off x="8667750" y="2924175"/>
-            <a:ext cx="2628900" cy="476250"/>
+            <a:off x="6381750" y="5314950"/>
+            <a:ext cx="5200650" cy="342900"/>
           </a:xfrm>
           <a:prstGeom xmlns:a="http://schemas.openxmlformats.org/drawingml/2006/main" prst="rect">
             <a:avLst/>
@@ -25414,9 +25350,9 @@
           </a:bodyPr>
           <a:lstStyle xmlns:a="http://schemas.openxmlformats.org/drawingml/2006/main">
             <a:defPPr algn="l">
-              <a:defRPr sz="2550" b="1">
-                <a:solidFill>
-                  <a:srgbClr val="17212B"/>
+              <a:defRPr sz="2100" b="1">
+                <a:solidFill>
+                  <a:srgbClr val="0B6172"/>
                 </a:solidFill>
                 <a:latin typeface="Malgun Gothic"/>
                 <a:ea typeface="Malgun Gothic"/>
@@ -25424,9 +25360,9 @@
               </a:defRPr>
             </a:defPPr>
             <a:lvl1pPr algn="l">
-              <a:defRPr sz="2550" b="1">
-                <a:solidFill>
-                  <a:srgbClr val="17212B"/>
+              <a:defRPr sz="2100" b="1">
+                <a:solidFill>
+                  <a:srgbClr val="0B6172"/>
                 </a:solidFill>
                 <a:latin typeface="Malgun Gothic"/>
                 <a:ea typeface="Malgun Gothic"/>
@@ -25434,9 +25370,9 @@
               </a:defRPr>
             </a:lvl1pPr>
             <a:lvl2pPr algn="l">
-              <a:defRPr sz="2550" b="1">
-                <a:solidFill>
-                  <a:srgbClr val="17212B"/>
+              <a:defRPr sz="2100" b="1">
+                <a:solidFill>
+                  <a:srgbClr val="0B6172"/>
                 </a:solidFill>
                 <a:latin typeface="Malgun Gothic"/>
                 <a:ea typeface="Malgun Gothic"/>
@@ -25444,9 +25380,9 @@
               </a:defRPr>
             </a:lvl2pPr>
             <a:lvl3pPr algn="l">
-              <a:defRPr sz="2550" b="1">
-                <a:solidFill>
-                  <a:srgbClr val="17212B"/>
+              <a:defRPr sz="2100" b="1">
+                <a:solidFill>
+                  <a:srgbClr val="0B6172"/>
                 </a:solidFill>
                 <a:latin typeface="Malgun Gothic"/>
                 <a:ea typeface="Malgun Gothic"/>
@@ -25454,9 +25390,9 @@
               </a:defRPr>
             </a:lvl3pPr>
             <a:lvl4pPr algn="l">
-              <a:defRPr sz="2550" b="1">
-                <a:solidFill>
-                  <a:srgbClr val="17212B"/>
+              <a:defRPr sz="2100" b="1">
+                <a:solidFill>
+                  <a:srgbClr val="0B6172"/>
                 </a:solidFill>
                 <a:latin typeface="Malgun Gothic"/>
                 <a:ea typeface="Malgun Gothic"/>
@@ -25464,9 +25400,9 @@
               </a:defRPr>
             </a:lvl4pPr>
             <a:lvl5pPr algn="l">
-              <a:defRPr sz="2550" b="1">
-                <a:solidFill>
-                  <a:srgbClr val="17212B"/>
+              <a:defRPr sz="2100" b="1">
+                <a:solidFill>
+                  <a:srgbClr val="0B6172"/>
                 </a:solidFill>
                 <a:latin typeface="Malgun Gothic"/>
                 <a:ea typeface="Malgun Gothic"/>
@@ -25474,9 +25410,9 @@
               </a:defRPr>
             </a:lvl5pPr>
             <a:lvl6pPr algn="l">
-              <a:defRPr sz="2550" b="1">
-                <a:solidFill>
-                  <a:srgbClr val="17212B"/>
+              <a:defRPr sz="2100" b="1">
+                <a:solidFill>
+                  <a:srgbClr val="0B6172"/>
                 </a:solidFill>
                 <a:latin typeface="Malgun Gothic"/>
                 <a:ea typeface="Malgun Gothic"/>
@@ -25484,9 +25420,9 @@
               </a:defRPr>
             </a:lvl6pPr>
             <a:lvl7pPr algn="l">
-              <a:defRPr sz="2550" b="1">
-                <a:solidFill>
-                  <a:srgbClr val="17212B"/>
+              <a:defRPr sz="2100" b="1">
+                <a:solidFill>
+                  <a:srgbClr val="0B6172"/>
                 </a:solidFill>
                 <a:latin typeface="Malgun Gothic"/>
                 <a:ea typeface="Malgun Gothic"/>
@@ -25494,9 +25430,9 @@
               </a:defRPr>
             </a:lvl7pPr>
             <a:lvl8pPr algn="l">
-              <a:defRPr sz="2550" b="1">
-                <a:solidFill>
-                  <a:srgbClr val="17212B"/>
+              <a:defRPr sz="2100" b="1">
+                <a:solidFill>
+                  <a:srgbClr val="0B6172"/>
                 </a:solidFill>
                 <a:latin typeface="Malgun Gothic"/>
                 <a:ea typeface="Malgun Gothic"/>
@@ -25504,9 +25440,9 @@
               </a:defRPr>
             </a:lvl8pPr>
             <a:lvl9pPr algn="l">
-              <a:defRPr sz="2550" b="1">
-                <a:solidFill>
-                  <a:srgbClr val="17212B"/>
+              <a:defRPr sz="2100" b="1">
+                <a:solidFill>
+                  <a:srgbClr val="0B6172"/>
                 </a:solidFill>
                 <a:latin typeface="Malgun Gothic"/>
                 <a:ea typeface="Malgun Gothic"/>
@@ -25516,9 +25452,9 @@
           </a:lstStyle>
           <a:p xmlns:a="http://schemas.openxmlformats.org/drawingml/2006/main">
             <a:pPr algn="l">
-              <a:defRPr sz="2550" b="1">
-                <a:solidFill>
-                  <a:srgbClr val="17212B"/>
+              <a:defRPr sz="2100" b="1">
+                <a:solidFill>
+                  <a:srgbClr val="0B6172"/>
                 </a:solidFill>
                 <a:latin typeface="Malgun Gothic"/>
                 <a:ea typeface="Malgun Gothic"/>
@@ -25526,550 +25462,15 @@
               </a:defRPr>
             </a:pPr>
             <a:r>
-              <a:rPr sz="2550" b="1">
-                <a:solidFill>
-                  <a:srgbClr val="17212B"/>
+              <a:rPr sz="2100" b="1">
+                <a:solidFill>
+                  <a:srgbClr val="0B6172"/>
                 </a:solidFill>
                 <a:latin typeface="Malgun Gothic"/>
                 <a:ea typeface="Malgun Gothic"/>
                 <a:cs typeface="Malgun Gothic"/>
               </a:rPr>
-              <a:t>AI</a:t>
-            </a:r>
-          </a:p>
-        </p:txBody>
-      </p:sp>
-      <p:sp>
-        <p:nvSpPr>
-          <p:cNvPr id="14" name="">
-            <a:extLst xmlns:a="http://schemas.openxmlformats.org/drawingml/2006/main">
-              <a:ext uri="{FF2B5EF4-FFF2-40B4-BE49-F238E27FC236}">
-                <a16:creationId xmlns:a16="http://schemas.microsoft.com/office/drawing/2014/main" id="{ECF3A8DA-DEB0-4005-96C0-D9AA6568B81F}"/>
-              </a:ext>
-            </a:extLst>
-          </p:cNvPr>
-          <p:cNvSpPr>
-            <a:spLocks xmlns:a="http://schemas.openxmlformats.org/drawingml/2006/main" noGrp="1"/>
-          </p:cNvSpPr>
-          <p:nvPr/>
-        </p:nvSpPr>
-        <p:spPr>
-          <a:xfrm xmlns:a="http://schemas.openxmlformats.org/drawingml/2006/main">
-            <a:off x="609600" y="3905250"/>
-            <a:ext cx="10972800" cy="0"/>
-          </a:xfrm>
-          <a:prstGeom xmlns:a="http://schemas.openxmlformats.org/drawingml/2006/main" prst="line">
-            <a:avLst/>
-          </a:prstGeom>
-          <a:noFill xmlns:a="http://schemas.openxmlformats.org/drawingml/2006/main"/>
-          <a:ln xmlns:a="http://schemas.openxmlformats.org/drawingml/2006/main" w="9525">
-            <a:solidFill>
-              <a:srgbClr val="C7D0DA"/>
-            </a:solidFill>
-            <a:prstDash val="solid"/>
-          </a:ln>
-        </p:spPr>
-      </p:sp>
-      <p:sp>
-        <p:nvSpPr>
-          <p:cNvPr id="15" name="조사할 일을 맡기고 근거를 확인">
-            <a:extLst xmlns:a="http://schemas.openxmlformats.org/drawingml/2006/main">
-              <a:ext uri="{FF2B5EF4-FFF2-40B4-BE49-F238E27FC236}">
-                <a16:creationId xmlns:a16="http://schemas.microsoft.com/office/drawing/2014/main" id="{0A8EB831-3CB9-46C6-B1E1-2C554EE145FD}"/>
-              </a:ext>
-            </a:extLst>
-          </p:cNvPr>
-          <p:cNvSpPr>
-            <a:spLocks xmlns:a="http://schemas.openxmlformats.org/drawingml/2006/main" noGrp="1"/>
-          </p:cNvSpPr>
-          <p:nvPr/>
-        </p:nvSpPr>
-        <p:spPr>
-          <a:xfrm xmlns:a="http://schemas.openxmlformats.org/drawingml/2006/main">
-            <a:off x="609600" y="4210050"/>
-            <a:ext cx="10972800" cy="409575"/>
-          </a:xfrm>
-          <a:prstGeom xmlns:a="http://schemas.openxmlformats.org/drawingml/2006/main" prst="rect">
-            <a:avLst/>
-          </a:prstGeom>
-          <a:noFill xmlns:a="http://schemas.openxmlformats.org/drawingml/2006/main"/>
-          <a:ln xmlns:a="http://schemas.openxmlformats.org/drawingml/2006/main" w="0">
-            <a:noFill/>
-          </a:ln>
-        </p:spPr>
-        <p:txBody>
-          <a:bodyPr xmlns:a="http://schemas.openxmlformats.org/drawingml/2006/main" wrap="none" lIns="0" tIns="0" rIns="0" bIns="0" anchor="ctr">
-            <a:noAutofit/>
-          </a:bodyPr>
-          <a:lstStyle xmlns:a="http://schemas.openxmlformats.org/drawingml/2006/main">
-            <a:defPPr algn="l">
-              <a:defRPr sz="2325" b="1">
-                <a:solidFill>
-                  <a:srgbClr val="0B6172"/>
-                </a:solidFill>
-                <a:latin typeface="Malgun Gothic"/>
-                <a:ea typeface="Malgun Gothic"/>
-                <a:cs typeface="Malgun Gothic"/>
-              </a:defRPr>
-            </a:defPPr>
-            <a:lvl1pPr algn="l">
-              <a:defRPr sz="2325" b="1">
-                <a:solidFill>
-                  <a:srgbClr val="0B6172"/>
-                </a:solidFill>
-                <a:latin typeface="Malgun Gothic"/>
-                <a:ea typeface="Malgun Gothic"/>
-                <a:cs typeface="Malgun Gothic"/>
-              </a:defRPr>
-            </a:lvl1pPr>
-            <a:lvl2pPr algn="l">
-              <a:defRPr sz="2325" b="1">
-                <a:solidFill>
-                  <a:srgbClr val="0B6172"/>
-                </a:solidFill>
-                <a:latin typeface="Malgun Gothic"/>
-                <a:ea typeface="Malgun Gothic"/>
-                <a:cs typeface="Malgun Gothic"/>
-              </a:defRPr>
-            </a:lvl2pPr>
-            <a:lvl3pPr algn="l">
-              <a:defRPr sz="2325" b="1">
-                <a:solidFill>
-                  <a:srgbClr val="0B6172"/>
-                </a:solidFill>
-                <a:latin typeface="Malgun Gothic"/>
-                <a:ea typeface="Malgun Gothic"/>
-                <a:cs typeface="Malgun Gothic"/>
-              </a:defRPr>
-            </a:lvl3pPr>
-            <a:lvl4pPr algn="l">
-              <a:defRPr sz="2325" b="1">
-                <a:solidFill>
-                  <a:srgbClr val="0B6172"/>
-                </a:solidFill>
-                <a:latin typeface="Malgun Gothic"/>
-                <a:ea typeface="Malgun Gothic"/>
-                <a:cs typeface="Malgun Gothic"/>
-              </a:defRPr>
-            </a:lvl4pPr>
-            <a:lvl5pPr algn="l">
-              <a:defRPr sz="2325" b="1">
-                <a:solidFill>
-                  <a:srgbClr val="0B6172"/>
-                </a:solidFill>
-                <a:latin typeface="Malgun Gothic"/>
-                <a:ea typeface="Malgun Gothic"/>
-                <a:cs typeface="Malgun Gothic"/>
-              </a:defRPr>
-            </a:lvl5pPr>
-            <a:lvl6pPr algn="l">
-              <a:defRPr sz="2325" b="1">
-                <a:solidFill>
-                  <a:srgbClr val="0B6172"/>
-                </a:solidFill>
-                <a:latin typeface="Malgun Gothic"/>
-                <a:ea typeface="Malgun Gothic"/>
-                <a:cs typeface="Malgun Gothic"/>
-              </a:defRPr>
-            </a:lvl6pPr>
-            <a:lvl7pPr algn="l">
-              <a:defRPr sz="2325" b="1">
-                <a:solidFill>
-                  <a:srgbClr val="0B6172"/>
-                </a:solidFill>
-                <a:latin typeface="Malgun Gothic"/>
-                <a:ea typeface="Malgun Gothic"/>
-                <a:cs typeface="Malgun Gothic"/>
-              </a:defRPr>
-            </a:lvl7pPr>
-            <a:lvl8pPr algn="l">
-              <a:defRPr sz="2325" b="1">
-                <a:solidFill>
-                  <a:srgbClr val="0B6172"/>
-                </a:solidFill>
-                <a:latin typeface="Malgun Gothic"/>
-                <a:ea typeface="Malgun Gothic"/>
-                <a:cs typeface="Malgun Gothic"/>
-              </a:defRPr>
-            </a:lvl8pPr>
-            <a:lvl9pPr algn="l">
-              <a:defRPr sz="2325" b="1">
-                <a:solidFill>
-                  <a:srgbClr val="0B6172"/>
-                </a:solidFill>
-                <a:latin typeface="Malgun Gothic"/>
-                <a:ea typeface="Malgun Gothic"/>
-                <a:cs typeface="Malgun Gothic"/>
-              </a:defRPr>
-            </a:lvl9pPr>
-          </a:lstStyle>
-          <a:p xmlns:a="http://schemas.openxmlformats.org/drawingml/2006/main">
-            <a:pPr algn="l">
-              <a:defRPr sz="2325" b="1">
-                <a:solidFill>
-                  <a:srgbClr val="0B6172"/>
-                </a:solidFill>
-                <a:latin typeface="Malgun Gothic"/>
-                <a:ea typeface="Malgun Gothic"/>
-                <a:cs typeface="Malgun Gothic"/>
-              </a:defRPr>
-            </a:pPr>
-            <a:r>
-              <a:rPr sz="2325" b="1">
-                <a:solidFill>
-                  <a:srgbClr val="0B6172"/>
-                </a:solidFill>
-                <a:latin typeface="Malgun Gothic"/>
-                <a:ea typeface="Malgun Gothic"/>
-                <a:cs typeface="Malgun Gothic"/>
-              </a:rPr>
-              <a:t>조사할 일을 맡기고 근거를 확인</a:t>
-            </a:r>
-          </a:p>
-        </p:txBody>
-      </p:sp>
-      <p:sp>
-        <p:nvSpPr>
-          <p:cNvPr id="16" name="개발자: 조사 요청">
-            <a:extLst xmlns:a="http://schemas.openxmlformats.org/drawingml/2006/main">
-              <a:ext uri="{FF2B5EF4-FFF2-40B4-BE49-F238E27FC236}">
-                <a16:creationId xmlns:a16="http://schemas.microsoft.com/office/drawing/2014/main" id="{78F3283B-AEA2-4709-90C1-E09DDCE9ABF3}"/>
-              </a:ext>
-            </a:extLst>
-          </p:cNvPr>
-          <p:cNvSpPr>
-            <a:spLocks xmlns:a="http://schemas.openxmlformats.org/drawingml/2006/main" noGrp="1"/>
-          </p:cNvSpPr>
-          <p:nvPr/>
-        </p:nvSpPr>
-        <p:spPr>
-          <a:xfrm xmlns:a="http://schemas.openxmlformats.org/drawingml/2006/main">
-            <a:off x="609600" y="4933950"/>
-            <a:ext cx="3333750" cy="457200"/>
-          </a:xfrm>
-          <a:prstGeom xmlns:a="http://schemas.openxmlformats.org/drawingml/2006/main" prst="rect">
-            <a:avLst/>
-          </a:prstGeom>
-          <a:noFill xmlns:a="http://schemas.openxmlformats.org/drawingml/2006/main"/>
-          <a:ln xmlns:a="http://schemas.openxmlformats.org/drawingml/2006/main" w="0">
-            <a:noFill/>
-          </a:ln>
-        </p:spPr>
-        <p:txBody>
-          <a:bodyPr xmlns:a="http://schemas.openxmlformats.org/drawingml/2006/main" wrap="none" lIns="0" tIns="0" rIns="0" bIns="0" anchor="ctr">
-            <a:noAutofit/>
-          </a:bodyPr>
-          <a:lstStyle xmlns:a="http://schemas.openxmlformats.org/drawingml/2006/main">
-            <a:defPPr algn="l">
-              <a:defRPr sz="2175" b="1">
-                <a:solidFill>
-                  <a:srgbClr val="17212B"/>
-                </a:solidFill>
-                <a:latin typeface="Malgun Gothic"/>
-                <a:ea typeface="Malgun Gothic"/>
-                <a:cs typeface="Malgun Gothic"/>
-              </a:defRPr>
-            </a:defPPr>
-            <a:lvl1pPr algn="l">
-              <a:defRPr sz="2175" b="1">
-                <a:solidFill>
-                  <a:srgbClr val="17212B"/>
-                </a:solidFill>
-                <a:latin typeface="Malgun Gothic"/>
-                <a:ea typeface="Malgun Gothic"/>
-                <a:cs typeface="Malgun Gothic"/>
-              </a:defRPr>
-            </a:lvl1pPr>
-            <a:lvl2pPr algn="l">
-              <a:defRPr sz="2175" b="1">
-                <a:solidFill>
-                  <a:srgbClr val="17212B"/>
-                </a:solidFill>
-                <a:latin typeface="Malgun Gothic"/>
-                <a:ea typeface="Malgun Gothic"/>
-                <a:cs typeface="Malgun Gothic"/>
-              </a:defRPr>
-            </a:lvl2pPr>
-            <a:lvl3pPr algn="l">
-              <a:defRPr sz="2175" b="1">
-                <a:solidFill>
-                  <a:srgbClr val="17212B"/>
-                </a:solidFill>
-                <a:latin typeface="Malgun Gothic"/>
-                <a:ea typeface="Malgun Gothic"/>
-                <a:cs typeface="Malgun Gothic"/>
-              </a:defRPr>
-            </a:lvl3pPr>
-            <a:lvl4pPr algn="l">
-              <a:defRPr sz="2175" b="1">
-                <a:solidFill>
-                  <a:srgbClr val="17212B"/>
-                </a:solidFill>
-                <a:latin typeface="Malgun Gothic"/>
-                <a:ea typeface="Malgun Gothic"/>
-                <a:cs typeface="Malgun Gothic"/>
-              </a:defRPr>
-            </a:lvl4pPr>
-            <a:lvl5pPr algn="l">
-              <a:defRPr sz="2175" b="1">
-                <a:solidFill>
-                  <a:srgbClr val="17212B"/>
-                </a:solidFill>
-                <a:latin typeface="Malgun Gothic"/>
-                <a:ea typeface="Malgun Gothic"/>
-                <a:cs typeface="Malgun Gothic"/>
-              </a:defRPr>
-            </a:lvl5pPr>
-            <a:lvl6pPr algn="l">
-              <a:defRPr sz="2175" b="1">
-                <a:solidFill>
-                  <a:srgbClr val="17212B"/>
-                </a:solidFill>
-                <a:latin typeface="Malgun Gothic"/>
-                <a:ea typeface="Malgun Gothic"/>
-                <a:cs typeface="Malgun Gothic"/>
-              </a:defRPr>
-            </a:lvl6pPr>
-            <a:lvl7pPr algn="l">
-              <a:defRPr sz="2175" b="1">
-                <a:solidFill>
-                  <a:srgbClr val="17212B"/>
-                </a:solidFill>
-                <a:latin typeface="Malgun Gothic"/>
-                <a:ea typeface="Malgun Gothic"/>
-                <a:cs typeface="Malgun Gothic"/>
-              </a:defRPr>
-            </a:lvl7pPr>
-            <a:lvl8pPr algn="l">
-              <a:defRPr sz="2175" b="1">
-                <a:solidFill>
-                  <a:srgbClr val="17212B"/>
-                </a:solidFill>
-                <a:latin typeface="Malgun Gothic"/>
-                <a:ea typeface="Malgun Gothic"/>
-                <a:cs typeface="Malgun Gothic"/>
-              </a:defRPr>
-            </a:lvl8pPr>
-            <a:lvl9pPr algn="l">
-              <a:defRPr sz="2175" b="1">
-                <a:solidFill>
-                  <a:srgbClr val="17212B"/>
-                </a:solidFill>
-                <a:latin typeface="Malgun Gothic"/>
-                <a:ea typeface="Malgun Gothic"/>
-                <a:cs typeface="Malgun Gothic"/>
-              </a:defRPr>
-            </a:lvl9pPr>
-          </a:lstStyle>
-          <a:p xmlns:a="http://schemas.openxmlformats.org/drawingml/2006/main">
-            <a:pPr algn="l">
-              <a:defRPr sz="2175" b="1">
-                <a:solidFill>
-                  <a:srgbClr val="17212B"/>
-                </a:solidFill>
-                <a:latin typeface="Malgun Gothic"/>
-                <a:ea typeface="Malgun Gothic"/>
-                <a:cs typeface="Malgun Gothic"/>
-              </a:defRPr>
-            </a:pPr>
-            <a:r>
-              <a:rPr sz="2175" b="1">
-                <a:solidFill>
-                  <a:srgbClr val="17212B"/>
-                </a:solidFill>
-                <a:latin typeface="Malgun Gothic"/>
-                <a:ea typeface="Malgun Gothic"/>
-                <a:cs typeface="Malgun Gothic"/>
-              </a:rPr>
-              <a:t>개발자: 조사 요청</a:t>
-            </a:r>
-          </a:p>
-        </p:txBody>
-      </p:sp>
-      <p:sp>
-        <p:nvSpPr>
-          <p:cNvPr id="17" name="">
-            <a:extLst xmlns:a="http://schemas.openxmlformats.org/drawingml/2006/main">
-              <a:ext uri="{FF2B5EF4-FFF2-40B4-BE49-F238E27FC236}">
-                <a16:creationId xmlns:a16="http://schemas.microsoft.com/office/drawing/2014/main" id="{2D086AF5-CB4E-45A4-933A-704A91E57DA0}"/>
-              </a:ext>
-            </a:extLst>
-          </p:cNvPr>
-          <p:cNvSpPr>
-            <a:spLocks xmlns:a="http://schemas.openxmlformats.org/drawingml/2006/main" noGrp="1"/>
-          </p:cNvSpPr>
-          <p:nvPr/>
-        </p:nvSpPr>
-        <p:spPr>
-          <a:xfrm xmlns:a="http://schemas.openxmlformats.org/drawingml/2006/main">
-            <a:off x="4000500" y="5067300"/>
-            <a:ext cx="533400" cy="228600"/>
-          </a:xfrm>
-          <a:prstGeom xmlns:a="http://schemas.openxmlformats.org/drawingml/2006/main" prst="rightArrow">
-            <a:avLst/>
-          </a:prstGeom>
-          <a:solidFill xmlns:a="http://schemas.openxmlformats.org/drawingml/2006/main">
-            <a:srgbClr val="0B6172"/>
-          </a:solidFill>
-          <a:ln xmlns:a="http://schemas.openxmlformats.org/drawingml/2006/main" w="0">
-            <a:noFill/>
-          </a:ln>
-        </p:spPr>
-      </p:sp>
-      <p:sp>
-        <p:nvSpPr>
-          <p:cNvPr id="18" name="Agent ↔ Repository">
-            <a:extLst xmlns:a="http://schemas.openxmlformats.org/drawingml/2006/main">
-              <a:ext uri="{FF2B5EF4-FFF2-40B4-BE49-F238E27FC236}">
-                <a16:creationId xmlns:a16="http://schemas.microsoft.com/office/drawing/2014/main" id="{792B88CB-44B5-439E-881A-EA53837B1EF0}"/>
-              </a:ext>
-            </a:extLst>
-          </p:cNvPr>
-          <p:cNvSpPr>
-            <a:spLocks xmlns:a="http://schemas.openxmlformats.org/drawingml/2006/main" noGrp="1"/>
-          </p:cNvSpPr>
-          <p:nvPr/>
-        </p:nvSpPr>
-        <p:spPr>
-          <a:xfrm xmlns:a="http://schemas.openxmlformats.org/drawingml/2006/main">
-            <a:off x="4991100" y="4848225"/>
-            <a:ext cx="6591300" cy="638175"/>
-          </a:xfrm>
-          <a:prstGeom xmlns:a="http://schemas.openxmlformats.org/drawingml/2006/main" prst="rect">
-            <a:avLst/>
-          </a:prstGeom>
-          <a:noFill xmlns:a="http://schemas.openxmlformats.org/drawingml/2006/main"/>
-          <a:ln xmlns:a="http://schemas.openxmlformats.org/drawingml/2006/main" w="0">
-            <a:noFill/>
-          </a:ln>
-        </p:spPr>
-        <p:txBody>
-          <a:bodyPr xmlns:a="http://schemas.openxmlformats.org/drawingml/2006/main" wrap="none" lIns="0" tIns="0" rIns="0" bIns="0" anchor="ctr">
-            <a:noAutofit/>
-          </a:bodyPr>
-          <a:lstStyle xmlns:a="http://schemas.openxmlformats.org/drawingml/2006/main">
-            <a:defPPr algn="l">
-              <a:defRPr sz="2850" b="1">
-                <a:solidFill>
-                  <a:srgbClr val="0B6172"/>
-                </a:solidFill>
-                <a:latin typeface="Malgun Gothic"/>
-                <a:ea typeface="Malgun Gothic"/>
-                <a:cs typeface="Malgun Gothic"/>
-              </a:defRPr>
-            </a:defPPr>
-            <a:lvl1pPr algn="l">
-              <a:defRPr sz="2850" b="1">
-                <a:solidFill>
-                  <a:srgbClr val="0B6172"/>
-                </a:solidFill>
-                <a:latin typeface="Malgun Gothic"/>
-                <a:ea typeface="Malgun Gothic"/>
-                <a:cs typeface="Malgun Gothic"/>
-              </a:defRPr>
-            </a:lvl1pPr>
-            <a:lvl2pPr algn="l">
-              <a:defRPr sz="2850" b="1">
-                <a:solidFill>
-                  <a:srgbClr val="0B6172"/>
-                </a:solidFill>
-                <a:latin typeface="Malgun Gothic"/>
-                <a:ea typeface="Malgun Gothic"/>
-                <a:cs typeface="Malgun Gothic"/>
-              </a:defRPr>
-            </a:lvl2pPr>
-            <a:lvl3pPr algn="l">
-              <a:defRPr sz="2850" b="1">
-                <a:solidFill>
-                  <a:srgbClr val="0B6172"/>
-                </a:solidFill>
-                <a:latin typeface="Malgun Gothic"/>
-                <a:ea typeface="Malgun Gothic"/>
-                <a:cs typeface="Malgun Gothic"/>
-              </a:defRPr>
-            </a:lvl3pPr>
-            <a:lvl4pPr algn="l">
-              <a:defRPr sz="2850" b="1">
-                <a:solidFill>
-                  <a:srgbClr val="0B6172"/>
-                </a:solidFill>
-                <a:latin typeface="Malgun Gothic"/>
-                <a:ea typeface="Malgun Gothic"/>
-                <a:cs typeface="Malgun Gothic"/>
-              </a:defRPr>
-            </a:lvl4pPr>
-            <a:lvl5pPr algn="l">
-              <a:defRPr sz="2850" b="1">
-                <a:solidFill>
-                  <a:srgbClr val="0B6172"/>
-                </a:solidFill>
-                <a:latin typeface="Malgun Gothic"/>
-                <a:ea typeface="Malgun Gothic"/>
-                <a:cs typeface="Malgun Gothic"/>
-              </a:defRPr>
-            </a:lvl5pPr>
-            <a:lvl6pPr algn="l">
-              <a:defRPr sz="2850" b="1">
-                <a:solidFill>
-                  <a:srgbClr val="0B6172"/>
-                </a:solidFill>
-                <a:latin typeface="Malgun Gothic"/>
-                <a:ea typeface="Malgun Gothic"/>
-                <a:cs typeface="Malgun Gothic"/>
-              </a:defRPr>
-            </a:lvl6pPr>
-            <a:lvl7pPr algn="l">
-              <a:defRPr sz="2850" b="1">
-                <a:solidFill>
-                  <a:srgbClr val="0B6172"/>
-                </a:solidFill>
-                <a:latin typeface="Malgun Gothic"/>
-                <a:ea typeface="Malgun Gothic"/>
-                <a:cs typeface="Malgun Gothic"/>
-              </a:defRPr>
-            </a:lvl7pPr>
-            <a:lvl8pPr algn="l">
-              <a:defRPr sz="2850" b="1">
-                <a:solidFill>
-                  <a:srgbClr val="0B6172"/>
-                </a:solidFill>
-                <a:latin typeface="Malgun Gothic"/>
-                <a:ea typeface="Malgun Gothic"/>
-                <a:cs typeface="Malgun Gothic"/>
-              </a:defRPr>
-            </a:lvl8pPr>
-            <a:lvl9pPr algn="l">
-              <a:defRPr sz="2850" b="1">
-                <a:solidFill>
-                  <a:srgbClr val="0B6172"/>
-                </a:solidFill>
-                <a:latin typeface="Malgun Gothic"/>
-                <a:ea typeface="Malgun Gothic"/>
-                <a:cs typeface="Malgun Gothic"/>
-              </a:defRPr>
-            </a:lvl9pPr>
-          </a:lstStyle>
-          <a:p xmlns:a="http://schemas.openxmlformats.org/drawingml/2006/main">
-            <a:pPr algn="l">
-              <a:defRPr sz="2850" b="1">
-                <a:solidFill>
-                  <a:srgbClr val="0B6172"/>
-                </a:solidFill>
-                <a:latin typeface="Malgun Gothic"/>
-                <a:ea typeface="Malgun Gothic"/>
-                <a:cs typeface="Malgun Gothic"/>
-              </a:defRPr>
-            </a:pPr>
-            <a:r>
-              <a:rPr sz="2850" b="1">
-                <a:solidFill>
-                  <a:srgbClr val="0B6172"/>
-                </a:solidFill>
-                <a:latin typeface="Malgun Gothic"/>
-                <a:ea typeface="Malgun Gothic"/>
-                <a:cs typeface="Malgun Gothic"/>
-              </a:rPr>
-              <a:t>Agent ↔ Repository</a:t>
+              <a:t>목표는 사람이, 탐색은 Agent와</a:t>
             </a:r>
           </a:p>
         </p:txBody>
@@ -26077,7 +25478,7 @@
     </p:spTree>
     <p:extLst>
       <p:ext uri="{BB962C8B-B14F-4D97-AF65-F5344CB8AC3E}">
-        <p14:creationId xmlns:p14="http://schemas.microsoft.com/office/powerpoint/2010/main" val="1102795099"/>
+        <p14:creationId xmlns:p14="http://schemas.microsoft.com/office/powerpoint/2010/main" val="801953783"/>
       </p:ext>
     </p:extLst>
   </p:cSld>
@@ -26108,7 +25509,7 @@
           <p:cNvPr id="15" name="ACT 0 · 접근할 정보와 정할 목표">
             <a:extLst xmlns:a="http://schemas.openxmlformats.org/drawingml/2006/main">
               <a:ext uri="{FF2B5EF4-FFF2-40B4-BE49-F238E27FC236}">
-                <a16:creationId xmlns:a16="http://schemas.microsoft.com/office/drawing/2014/main" id="{5308952F-1E1F-4C79-8CE0-ECE7641160F8}"/>
+                <a16:creationId xmlns:a16="http://schemas.microsoft.com/office/drawing/2014/main" id="{736312E8-09FD-4AA7-97B4-EF62BE1E0069}"/>
               </a:ext>
             </a:extLst>
           </p:cNvPr>
@@ -26266,7 +25667,7 @@
           <p:cNvPr id="2" name="S08">
             <a:extLst xmlns:a="http://schemas.openxmlformats.org/drawingml/2006/main">
               <a:ext uri="{FF2B5EF4-FFF2-40B4-BE49-F238E27FC236}">
-                <a16:creationId xmlns:a16="http://schemas.microsoft.com/office/drawing/2014/main" id="{BC730E58-F8FC-4518-80E4-1131A96C399D}"/>
+                <a16:creationId xmlns:a16="http://schemas.microsoft.com/office/drawing/2014/main" id="{B0714574-E7BB-4EB3-846B-C8E6322E9574}"/>
               </a:ext>
             </a:extLst>
           </p:cNvPr>
@@ -26424,7 +25825,7 @@
           <p:cNvPr id="3" name="Repository 접근과 Task 의도는 별개다">
             <a:extLst xmlns:a="http://schemas.openxmlformats.org/drawingml/2006/main">
               <a:ext uri="{FF2B5EF4-FFF2-40B4-BE49-F238E27FC236}">
-                <a16:creationId xmlns:a16="http://schemas.microsoft.com/office/drawing/2014/main" id="{D77C5C35-C51E-46A7-94FD-E4FA3A59A6DA}"/>
+                <a16:creationId xmlns:a16="http://schemas.microsoft.com/office/drawing/2014/main" id="{2317D594-8238-4154-B9B2-BF209B3E5B3B}"/>
               </a:ext>
             </a:extLst>
           </p:cNvPr>
@@ -26582,7 +25983,7 @@
           <p:cNvPr id="4" name="">
             <a:extLst xmlns:a="http://schemas.openxmlformats.org/drawingml/2006/main">
               <a:ext uri="{FF2B5EF4-FFF2-40B4-BE49-F238E27FC236}">
-                <a16:creationId xmlns:a16="http://schemas.microsoft.com/office/drawing/2014/main" id="{18222A7C-0BED-4B04-89B7-8695DBA64D18}"/>
+                <a16:creationId xmlns:a16="http://schemas.microsoft.com/office/drawing/2014/main" id="{B6DF42F4-B249-4BFC-8269-9DD558281ACC}"/>
               </a:ext>
             </a:extLst>
           </p:cNvPr>
@@ -26613,7 +26014,7 @@
           <p:cNvPr id="5" name="이 과정의 교육 모델 · Repository 접근과 작업 의도의 관계">
             <a:extLst xmlns:a="http://schemas.openxmlformats.org/drawingml/2006/main">
               <a:ext uri="{FF2B5EF4-FFF2-40B4-BE49-F238E27FC236}">
-                <a16:creationId xmlns:a16="http://schemas.microsoft.com/office/drawing/2014/main" id="{7804C0D4-D88E-40E2-95AD-A9909F19CBB2}"/>
+                <a16:creationId xmlns:a16="http://schemas.microsoft.com/office/drawing/2014/main" id="{86655B16-5A10-4071-9E6E-17A4EA419802}"/>
               </a:ext>
             </a:extLst>
           </p:cNvPr>
@@ -26771,7 +26172,7 @@
           <p:cNvPr id="6" name="모든 제품이나 환경의 기능을 설명하는 공식 분류가 아닙니다.">
             <a:extLst xmlns:a="http://schemas.openxmlformats.org/drawingml/2006/main">
               <a:ext uri="{FF2B5EF4-FFF2-40B4-BE49-F238E27FC236}">
-                <a16:creationId xmlns:a16="http://schemas.microsoft.com/office/drawing/2014/main" id="{E3C8C4C7-8A13-4EE8-B536-06746E2BA9A7}"/>
+                <a16:creationId xmlns:a16="http://schemas.microsoft.com/office/drawing/2014/main" id="{B6966F82-C238-495D-A45E-384E6CC283D5}"/>
               </a:ext>
             </a:extLst>
           </p:cNvPr>
@@ -26929,7 +26330,7 @@
           <p:cNvPr id="7" name="볼 수 있는 것">
             <a:extLst xmlns:a="http://schemas.openxmlformats.org/drawingml/2006/main">
               <a:ext uri="{FF2B5EF4-FFF2-40B4-BE49-F238E27FC236}">
-                <a16:creationId xmlns:a16="http://schemas.microsoft.com/office/drawing/2014/main" id="{6161C70E-9E59-48B5-887E-75DDB9CEBCC3}"/>
+                <a16:creationId xmlns:a16="http://schemas.microsoft.com/office/drawing/2014/main" id="{075735BF-D4F9-41AF-BB15-3E6F48ECED2F}"/>
               </a:ext>
             </a:extLst>
           </p:cNvPr>
@@ -27087,7 +26488,7 @@
           <p:cNvPr id="8" name="정해야 하는 것">
             <a:extLst xmlns:a="http://schemas.openxmlformats.org/drawingml/2006/main">
               <a:ext uri="{FF2B5EF4-FFF2-40B4-BE49-F238E27FC236}">
-                <a16:creationId xmlns:a16="http://schemas.microsoft.com/office/drawing/2014/main" id="{3643B274-994E-4719-B1BA-4023B871C38E}"/>
+                <a16:creationId xmlns:a16="http://schemas.microsoft.com/office/drawing/2014/main" id="{B4C9DDD8-55B1-4482-84CF-5A35EE6C9279}"/>
               </a:ext>
             </a:extLst>
           </p:cNvPr>
@@ -27245,7 +26646,7 @@
           <p:cNvPr id="9" name="">
             <a:extLst xmlns:a="http://schemas.openxmlformats.org/drawingml/2006/main">
               <a:ext uri="{FF2B5EF4-FFF2-40B4-BE49-F238E27FC236}">
-                <a16:creationId xmlns:a16="http://schemas.microsoft.com/office/drawing/2014/main" id="{0D37C7BC-BA01-4BD6-A46D-A811B90959AB}"/>
+                <a16:creationId xmlns:a16="http://schemas.microsoft.com/office/drawing/2014/main" id="{CE59D22A-4C11-4D74-BF38-6178BBC89D0E}"/>
               </a:ext>
             </a:extLst>
           </p:cNvPr>
@@ -27276,7 +26677,7 @@
           <p:cNvPr id="10" name="">
             <a:extLst xmlns:a="http://schemas.openxmlformats.org/drawingml/2006/main">
               <a:ext uri="{FF2B5EF4-FFF2-40B4-BE49-F238E27FC236}">
-                <a16:creationId xmlns:a16="http://schemas.microsoft.com/office/drawing/2014/main" id="{5335E5CE-3822-4BBA-8397-B5328FBE410B}"/>
+                <a16:creationId xmlns:a16="http://schemas.microsoft.com/office/drawing/2014/main" id="{DE6D561E-BE9D-4A8C-BD7D-3BAF4FE4CC14}"/>
               </a:ext>
             </a:extLst>
           </p:cNvPr>
@@ -27307,7 +26708,7 @@
           <p:cNvPr id="11" name="파일&#10;구현&#10;테스트">
             <a:extLst xmlns:a="http://schemas.openxmlformats.org/drawingml/2006/main">
               <a:ext uri="{FF2B5EF4-FFF2-40B4-BE49-F238E27FC236}">
-                <a16:creationId xmlns:a16="http://schemas.microsoft.com/office/drawing/2014/main" id="{0813E547-6E6D-4A78-B800-20A2C5DB5F85}"/>
+                <a16:creationId xmlns:a16="http://schemas.microsoft.com/office/drawing/2014/main" id="{A4114561-53EF-4DE2-969E-826652E90CD4}"/>
               </a:ext>
             </a:extLst>
           </p:cNvPr>
@@ -27511,7 +26912,7 @@
           <p:cNvPr id="12" name="원하는 변화&#10;허용할 범위&#10;완료 판단">
             <a:extLst xmlns:a="http://schemas.openxmlformats.org/drawingml/2006/main">
               <a:ext uri="{FF2B5EF4-FFF2-40B4-BE49-F238E27FC236}">
-                <a16:creationId xmlns:a16="http://schemas.microsoft.com/office/drawing/2014/main" id="{4E12C489-D705-4062-BE7F-3438AD585A85}"/>
+                <a16:creationId xmlns:a16="http://schemas.microsoft.com/office/drawing/2014/main" id="{8F58E778-6CCF-4601-AAFF-26EABE3EE8D9}"/>
               </a:ext>
             </a:extLst>
           </p:cNvPr>
@@ -27715,7 +27116,7 @@
           <p:cNvPr id="13" name="≠">
             <a:extLst xmlns:a="http://schemas.openxmlformats.org/drawingml/2006/main">
               <a:ext uri="{FF2B5EF4-FFF2-40B4-BE49-F238E27FC236}">
-                <a16:creationId xmlns:a16="http://schemas.microsoft.com/office/drawing/2014/main" id="{B2B132CD-B49C-4C5C-961C-086855E6D1AF}"/>
+                <a16:creationId xmlns:a16="http://schemas.microsoft.com/office/drawing/2014/main" id="{2EF81E67-F72A-41A1-BAF8-17CA10D941AA}"/>
               </a:ext>
             </a:extLst>
           </p:cNvPr>
@@ -27873,7 +27274,7 @@
           <p:cNvPr id="14" name="코드가 보여도, 원하는 일은 따로 전달해야 한다.">
             <a:extLst xmlns:a="http://schemas.openxmlformats.org/drawingml/2006/main">
               <a:ext uri="{FF2B5EF4-FFF2-40B4-BE49-F238E27FC236}">
-                <a16:creationId xmlns:a16="http://schemas.microsoft.com/office/drawing/2014/main" id="{4F977953-ECC5-4485-B0C8-78BD23018E38}"/>
+                <a16:creationId xmlns:a16="http://schemas.microsoft.com/office/drawing/2014/main" id="{3FA6128A-CB7F-424B-A75C-51433F7CEDFB}"/>
               </a:ext>
             </a:extLst>
           </p:cNvPr>
@@ -28029,7 +27430,7 @@
     </p:spTree>
     <p:extLst>
       <p:ext uri="{BB962C8B-B14F-4D97-AF65-F5344CB8AC3E}">
-        <p14:creationId xmlns:p14="http://schemas.microsoft.com/office/powerpoint/2010/main" val="1637417503"/>
+        <p14:creationId xmlns:p14="http://schemas.microsoft.com/office/powerpoint/2010/main" val="1031975324"/>
       </p:ext>
     </p:extLst>
   </p:cSld>
@@ -28060,7 +27461,7 @@
           <p:cNvPr id="11" name="ACT 0 · 다음 질문">
             <a:extLst xmlns:a="http://schemas.openxmlformats.org/drawingml/2006/main">
               <a:ext uri="{FF2B5EF4-FFF2-40B4-BE49-F238E27FC236}">
-                <a16:creationId xmlns:a16="http://schemas.microsoft.com/office/drawing/2014/main" id="{D1D65604-89A1-4D5B-990A-11D966443DC8}"/>
+                <a16:creationId xmlns:a16="http://schemas.microsoft.com/office/drawing/2014/main" id="{4110378D-0819-4B6A-AD54-411BA2F37EE9}"/>
               </a:ext>
             </a:extLst>
           </p:cNvPr>
@@ -28218,7 +27619,7 @@
           <p:cNvPr id="2" name="S09">
             <a:extLst xmlns:a="http://schemas.openxmlformats.org/drawingml/2006/main">
               <a:ext uri="{FF2B5EF4-FFF2-40B4-BE49-F238E27FC236}">
-                <a16:creationId xmlns:a16="http://schemas.microsoft.com/office/drawing/2014/main" id="{31B2FDD3-0E8D-4501-9F15-FD6F73B657A5}"/>
+                <a16:creationId xmlns:a16="http://schemas.microsoft.com/office/drawing/2014/main" id="{6F410E56-9FBA-48D4-B4D3-DBFC65C2056C}"/>
               </a:ext>
             </a:extLst>
           </p:cNvPr>
@@ -28376,7 +27777,7 @@
           <p:cNvPr id="3" name="Repository를 보면 내가 원하는 것까지 알까?">
             <a:extLst xmlns:a="http://schemas.openxmlformats.org/drawingml/2006/main">
               <a:ext uri="{FF2B5EF4-FFF2-40B4-BE49-F238E27FC236}">
-                <a16:creationId xmlns:a16="http://schemas.microsoft.com/office/drawing/2014/main" id="{4AADDDEB-FCD2-4C12-BDB9-6BA3743068D9}"/>
+                <a16:creationId xmlns:a16="http://schemas.microsoft.com/office/drawing/2014/main" id="{0EE21C5F-1F68-40FE-B709-6C3C1C7640EC}"/>
               </a:ext>
             </a:extLst>
           </p:cNvPr>
@@ -28534,7 +27935,7 @@
           <p:cNvPr id="4" name="">
             <a:extLst xmlns:a="http://schemas.openxmlformats.org/drawingml/2006/main">
               <a:ext uri="{FF2B5EF4-FFF2-40B4-BE49-F238E27FC236}">
-                <a16:creationId xmlns:a16="http://schemas.microsoft.com/office/drawing/2014/main" id="{CAD60898-055D-46F2-90AA-B8479D266EA2}"/>
+                <a16:creationId xmlns:a16="http://schemas.microsoft.com/office/drawing/2014/main" id="{9E8D6EA4-A8E9-4004-B97E-E3C48686C750}"/>
               </a:ext>
             </a:extLst>
           </p:cNvPr>
@@ -28565,7 +27966,7 @@
           <p:cNvPr id="5" name="함께 생각해 보기 · 교육 모델">
             <a:extLst xmlns:a="http://schemas.openxmlformats.org/drawingml/2006/main">
               <a:ext uri="{FF2B5EF4-FFF2-40B4-BE49-F238E27FC236}">
-                <a16:creationId xmlns:a16="http://schemas.microsoft.com/office/drawing/2014/main" id="{C8D3E784-C8E2-42A9-9910-A7EBEB0070D4}"/>
+                <a16:creationId xmlns:a16="http://schemas.microsoft.com/office/drawing/2014/main" id="{38F2D000-33AD-4F1D-8C88-854667B5F97E}"/>
               </a:ext>
             </a:extLst>
           </p:cNvPr>
@@ -28723,7 +28124,7 @@
           <p:cNvPr id="6" name="현재 맡기고 싶은 일을 떠올려 보세요. 질문과 경험 공유는 자발적으로 진행합니다.">
             <a:extLst xmlns:a="http://schemas.openxmlformats.org/drawingml/2006/main">
               <a:ext uri="{FF2B5EF4-FFF2-40B4-BE49-F238E27FC236}">
-                <a16:creationId xmlns:a16="http://schemas.microsoft.com/office/drawing/2014/main" id="{711D75FD-E2C6-4668-B924-7A421A3B9B50}"/>
+                <a16:creationId xmlns:a16="http://schemas.microsoft.com/office/drawing/2014/main" id="{FFFABE36-7EE0-4299-8791-3EACD886F95A}"/>
               </a:ext>
             </a:extLst>
           </p:cNvPr>
@@ -28881,7 +28282,7 @@
           <p:cNvPr id="7" name="지금 이 저장소에&#10;어떤 일을 맡기고 싶으신가요?">
             <a:extLst xmlns:a="http://schemas.openxmlformats.org/drawingml/2006/main">
               <a:ext uri="{FF2B5EF4-FFF2-40B4-BE49-F238E27FC236}">
-                <a16:creationId xmlns:a16="http://schemas.microsoft.com/office/drawing/2014/main" id="{08D734E1-A595-4042-9023-C77786C8C6A5}"/>
+                <a16:creationId xmlns:a16="http://schemas.microsoft.com/office/drawing/2014/main" id="{E368DECD-EC4B-476F-A27D-46EFACB2F518}"/>
               </a:ext>
             </a:extLst>
           </p:cNvPr>
@@ -29062,7 +28463,7 @@
           <p:cNvPr id="8" name="?">
             <a:extLst xmlns:a="http://schemas.openxmlformats.org/drawingml/2006/main">
               <a:ext uri="{FF2B5EF4-FFF2-40B4-BE49-F238E27FC236}">
-                <a16:creationId xmlns:a16="http://schemas.microsoft.com/office/drawing/2014/main" id="{ADB4C4E6-5F5B-430B-9B31-D3C62F5F8DA2}"/>
+                <a16:creationId xmlns:a16="http://schemas.microsoft.com/office/drawing/2014/main" id="{3C1A6E4F-B4A2-4DC8-9DD2-187E546ED4D8}"/>
               </a:ext>
             </a:extLst>
           </p:cNvPr>
@@ -29220,7 +28621,7 @@
           <p:cNvPr id="9" name="">
             <a:extLst xmlns:a="http://schemas.openxmlformats.org/drawingml/2006/main">
               <a:ext uri="{FF2B5EF4-FFF2-40B4-BE49-F238E27FC236}">
-                <a16:creationId xmlns:a16="http://schemas.microsoft.com/office/drawing/2014/main" id="{5F1DB834-61D3-4381-A018-431CD5B121B1}"/>
+                <a16:creationId xmlns:a16="http://schemas.microsoft.com/office/drawing/2014/main" id="{FE6ECC70-592E-4656-BA0C-A0668993086A}"/>
               </a:ext>
             </a:extLst>
           </p:cNvPr>
@@ -29251,7 +28652,7 @@
           <p:cNvPr id="10" name="그 원하는 결과까지&#10;코드에 적혀 있을까요?">
             <a:extLst xmlns:a="http://schemas.openxmlformats.org/drawingml/2006/main">
               <a:ext uri="{FF2B5EF4-FFF2-40B4-BE49-F238E27FC236}">
-                <a16:creationId xmlns:a16="http://schemas.microsoft.com/office/drawing/2014/main" id="{1DC55DB4-D661-4650-ABCA-3DBABFAD99FC}"/>
+                <a16:creationId xmlns:a16="http://schemas.microsoft.com/office/drawing/2014/main" id="{13518D1C-7D8B-424E-BB0E-3080084A0DF0}"/>
               </a:ext>
             </a:extLst>
           </p:cNvPr>
@@ -29430,7 +28831,7 @@
     </p:spTree>
     <p:extLst>
       <p:ext uri="{BB962C8B-B14F-4D97-AF65-F5344CB8AC3E}">
-        <p14:creationId xmlns:p14="http://schemas.microsoft.com/office/powerpoint/2010/main" val="1127780549"/>
+        <p14:creationId xmlns:p14="http://schemas.microsoft.com/office/powerpoint/2010/main" val="754504573"/>
       </p:ext>
     </p:extLst>
   </p:cSld>

--- a/production/ACT_0.pptx
+++ b/production/ACT_0.pptx
@@ -2,21 +2,21 @@
 <file path=ppt/presentation.xml><?xml version="1.0" encoding="utf-8"?>
 <p:presentation xmlns:p="http://schemas.openxmlformats.org/presentationml/2006/main">
   <p:sldMasterIdLst>
-    <p:sldMasterId xmlns:r="http://schemas.openxmlformats.org/officeDocument/2006/relationships" id="2147483648" r:id="Rcfd6545bab244fac"/>
+    <p:sldMasterId xmlns:r="http://schemas.openxmlformats.org/officeDocument/2006/relationships" id="2147483648" r:id="Rbde8ed4e0f7e4171"/>
   </p:sldMasterIdLst>
   <p:notesMasterIdLst>
-    <p:notesMasterId xmlns:r="http://schemas.openxmlformats.org/officeDocument/2006/relationships" r:id="R350057a401cd4097"/>
+    <p:notesMasterId xmlns:r="http://schemas.openxmlformats.org/officeDocument/2006/relationships" r:id="R7890dc169501488c"/>
   </p:notesMasterIdLst>
   <p:sldIdLst>
-    <p:sldId xmlns:r="http://schemas.openxmlformats.org/officeDocument/2006/relationships" id="256" r:id="R8aa5610ce38e47a7"/>
-    <p:sldId xmlns:r="http://schemas.openxmlformats.org/officeDocument/2006/relationships" id="257" r:id="Rc8664a6622f84cc2"/>
-    <p:sldId xmlns:r="http://schemas.openxmlformats.org/officeDocument/2006/relationships" id="258" r:id="R3307bd078a3b4b3d"/>
-    <p:sldId xmlns:r="http://schemas.openxmlformats.org/officeDocument/2006/relationships" id="259" r:id="R2742a3743ca94081"/>
-    <p:sldId xmlns:r="http://schemas.openxmlformats.org/officeDocument/2006/relationships" id="260" r:id="Rf6b8b11adf524050"/>
-    <p:sldId xmlns:r="http://schemas.openxmlformats.org/officeDocument/2006/relationships" id="261" r:id="R02b04352c9514a53"/>
-    <p:sldId xmlns:r="http://schemas.openxmlformats.org/officeDocument/2006/relationships" id="262" r:id="R88fd7c0275744020"/>
-    <p:sldId xmlns:r="http://schemas.openxmlformats.org/officeDocument/2006/relationships" id="263" r:id="R720eb58830fb4207"/>
-    <p:sldId xmlns:r="http://schemas.openxmlformats.org/officeDocument/2006/relationships" id="264" r:id="Rd0f438ce06e842fc"/>
+    <p:sldId xmlns:r="http://schemas.openxmlformats.org/officeDocument/2006/relationships" id="256" r:id="Rcf54a016f06f409c"/>
+    <p:sldId xmlns:r="http://schemas.openxmlformats.org/officeDocument/2006/relationships" id="257" r:id="R066b0f0225a843ae"/>
+    <p:sldId xmlns:r="http://schemas.openxmlformats.org/officeDocument/2006/relationships" id="258" r:id="R03386f7911ee4a5c"/>
+    <p:sldId xmlns:r="http://schemas.openxmlformats.org/officeDocument/2006/relationships" id="259" r:id="R2f7d86f2eb934a6f"/>
+    <p:sldId xmlns:r="http://schemas.openxmlformats.org/officeDocument/2006/relationships" id="260" r:id="R8a2da33828c3498d"/>
+    <p:sldId xmlns:r="http://schemas.openxmlformats.org/officeDocument/2006/relationships" id="261" r:id="Rf58b438d8f4848fd"/>
+    <p:sldId xmlns:r="http://schemas.openxmlformats.org/officeDocument/2006/relationships" id="262" r:id="R219d7eb1d7704c80"/>
+    <p:sldId xmlns:r="http://schemas.openxmlformats.org/officeDocument/2006/relationships" id="263" r:id="R70ce4b244ce645c7"/>
+    <p:sldId xmlns:r="http://schemas.openxmlformats.org/officeDocument/2006/relationships" id="264" r:id="Rd0bd723886b348e4"/>
   </p:sldIdLst>
   <p:sldSz cx="12192000" cy="6858000"/>
   <p:notesSz cx="6858000" cy="9144000"/>
@@ -1100,7 +1100,7 @@
           </a:p>
           <a:p xmlns:a="http://schemas.openxmlformats.org/drawingml/2006/main">
             <a:r>
-              <a:t>2. **SHOW (1:00–2:30):** CLI → 처리 흐름 → 이미지 연산 관계를 따라간 뒤 아래의 테스트와 계약 질문을 짚는다. 실제 제품 호출 기록을 그대로 그린 화면이라고 하지 않는다.</a:t>
+              <a:t>2. **SHOW (1:00–2:30):** 사람이 여러 자료를 골라 모으는 삽화를 가리킨다. 오른쪽 구현·호출 경로(CLI → 처리 흐름 → 연산), 테스트, 계약의 세 질문을 차례로 짚는다. 실제 제품 호출 기록을 그대로 그린 화면이라고 하지 않는다.</a:t>
             </a:r>
           </a:p>
           <a:p xmlns:a="http://schemas.openxmlformats.org/drawingml/2006/main">
@@ -1115,7 +1115,7 @@
           </a:p>
           <a:p xmlns:a="http://schemas.openxmlformats.org/drawingml/2006/main">
             <a:r>
-              <a:t>Evidence / Source: BEAT-002, CLM-0004, CLM-0009. TEACHING_MODEL / CONCEPTUAL.</a:t>
+              <a:t>Evidence / Source: BEAT-002, CLM-0004, CLM-0009. TEACHING_MODEL / CONCEPTUAL. 삽화: assets/slide-illustrations/S03-context-collection.png, built-in image_gen, 2026-10-18. 생성 프롬프트: assets/slide-illustrations/PROMPTS.md. 실제 인물·작업 장면·제품 실행 자료가 아니다.</a:t>
             </a:r>
           </a:p>
           <a:p xmlns:a="http://schemas.openxmlformats.org/drawingml/2006/main">
@@ -1205,7 +1205,7 @@
           </a:p>
           <a:p xmlns:a="http://schemas.openxmlformats.org/drawingml/2006/main">
             <a:r>
-              <a:t>Fallback: 도식이 보이지 않으면 CLI 입력, 처리 흐름, 연산 구현의 세 관계와 테스트·계약 질문을 말로 연결한다. 이 사례를 특정 Trial의 실제 실패로 표현하지 않는다.</a:t>
+              <a:t>Fallback: production/preview/full/S03.png 또는 production/preview/act0/S03.png를 사용한다. 삽화가 보이지 않으면 CLI 입력, 처리 흐름, 연산 구현의 세 관계와 테스트·계약 질문을 말로 연결한다. 이 사례를 특정 Trial의 실제 실패로 표현하지 않는다.</a:t>
             </a:r>
           </a:p>
           <a:p xmlns:a="http://schemas.openxmlformats.org/drawingml/2006/main">
@@ -1215,7 +1215,7 @@
           </a:p>
           <a:p xmlns:a="http://schemas.openxmlformats.org/drawingml/2006/main">
             <a:r>
-              <a:t>Validation Status: REVIEWED — 원문·Claim 경계, 화면의 설명 순서와 운영 지침을 대조했다. 최종 PPT/Notes/PNG 대조 결과는 production/evaluation/FULL_DECK_PRESENTATION_REVISION.md에 기록한다. Windows PowerPoint, 발표 PC 글꼴, 교육장 투사, 실제 시간 리허설은 UNVERIFIED.</a:t>
+              <a:t>Validation Status: REVIEWED — 승인된 전체 이미지 후보의 반영과 로컬 렌더링 결과는 production/evaluation/FULL_DECK_IMAGE_EXPANSION.md에 기록한다. Windows PowerPoint, 발표 PC 글꼴, 교육장 투사, 실제 시간 리허설은 UNVERIFIED.</a:t>
             </a:r>
           </a:p>
         </p:txBody>
@@ -2952,7 +2952,7 @@
           <p:cNvPr id="3" name="Title">
             <a:extLst xmlns:a="http://schemas.openxmlformats.org/drawingml/2006/main">
               <a:ext uri="{FF2B5EF4-FFF2-40B4-BE49-F238E27FC236}">
-                <a16:creationId xmlns:a16="http://schemas.microsoft.com/office/drawing/2014/main" id="{94110EEA-940A-4AD2-BBE7-968E0EF24364}"/>
+                <a16:creationId xmlns:a16="http://schemas.microsoft.com/office/drawing/2014/main" id="{6B42B9B9-C82D-43A2-821F-7D81F4AABFDF}"/>
               </a:ext>
             </a:extLst>
           </p:cNvPr>
@@ -3181,7 +3181,7 @@
           <p:cNvPr id="2" name="Subtitle">
             <a:extLst xmlns:a="http://schemas.openxmlformats.org/drawingml/2006/main">
               <a:ext uri="{FF2B5EF4-FFF2-40B4-BE49-F238E27FC236}">
-                <a16:creationId xmlns:a16="http://schemas.microsoft.com/office/drawing/2014/main" id="{7FA1BB11-8B66-49D0-BE34-290F1A19EFD3}"/>
+                <a16:creationId xmlns:a16="http://schemas.microsoft.com/office/drawing/2014/main" id="{8F0D60A5-81DF-46A3-ACC4-4098114035BA}"/>
               </a:ext>
             </a:extLst>
           </p:cNvPr>
@@ -3427,7 +3427,7 @@
           <p:cNvPr id="2" name="Section title">
             <a:extLst xmlns:a="http://schemas.openxmlformats.org/drawingml/2006/main">
               <a:ext uri="{FF2B5EF4-FFF2-40B4-BE49-F238E27FC236}">
-                <a16:creationId xmlns:a16="http://schemas.microsoft.com/office/drawing/2014/main" id="{AB2C153A-C5DF-40FF-8852-848EDDCBEFF7}"/>
+                <a16:creationId xmlns:a16="http://schemas.microsoft.com/office/drawing/2014/main" id="{C0088B39-ED82-4D4B-94E3-0F64D32EEFEF}"/>
               </a:ext>
             </a:extLst>
           </p:cNvPr>
@@ -3673,7 +3673,7 @@
           <p:cNvPr id="3" name="Title">
             <a:extLst xmlns:a="http://schemas.openxmlformats.org/drawingml/2006/main">
               <a:ext uri="{FF2B5EF4-FFF2-40B4-BE49-F238E27FC236}">
-                <a16:creationId xmlns:a16="http://schemas.microsoft.com/office/drawing/2014/main" id="{6F7D2F4B-5F3F-4C2E-8BD9-81D76AD7834A}"/>
+                <a16:creationId xmlns:a16="http://schemas.microsoft.com/office/drawing/2014/main" id="{F47E57A8-D696-44C5-87AD-06CCC6A0F8BE}"/>
               </a:ext>
             </a:extLst>
           </p:cNvPr>
@@ -3902,7 +3902,7 @@
           <p:cNvPr id="2" name="Body">
             <a:extLst xmlns:a="http://schemas.openxmlformats.org/drawingml/2006/main">
               <a:ext uri="{FF2B5EF4-FFF2-40B4-BE49-F238E27FC236}">
-                <a16:creationId xmlns:a16="http://schemas.microsoft.com/office/drawing/2014/main" id="{EDA97300-1F49-4EA0-AE6B-264659C21BD9}"/>
+                <a16:creationId xmlns:a16="http://schemas.microsoft.com/office/drawing/2014/main" id="{BD11460E-7EDE-4DC4-B245-E5D286D75594}"/>
               </a:ext>
             </a:extLst>
           </p:cNvPr>
@@ -4148,7 +4148,7 @@
           <p:cNvPr id="4" name="Title">
             <a:extLst xmlns:a="http://schemas.openxmlformats.org/drawingml/2006/main">
               <a:ext uri="{FF2B5EF4-FFF2-40B4-BE49-F238E27FC236}">
-                <a16:creationId xmlns:a16="http://schemas.microsoft.com/office/drawing/2014/main" id="{EAFD4979-0372-49B7-A350-B633B5F69312}"/>
+                <a16:creationId xmlns:a16="http://schemas.microsoft.com/office/drawing/2014/main" id="{E276F02D-0E41-4A79-9B25-D94FC6D9810C}"/>
               </a:ext>
             </a:extLst>
           </p:cNvPr>
@@ -4377,7 +4377,7 @@
           <p:cNvPr id="2" name="Left column">
             <a:extLst xmlns:a="http://schemas.openxmlformats.org/drawingml/2006/main">
               <a:ext uri="{FF2B5EF4-FFF2-40B4-BE49-F238E27FC236}">
-                <a16:creationId xmlns:a16="http://schemas.microsoft.com/office/drawing/2014/main" id="{86E7BFDC-6B98-4669-9567-B7C8FDE753A7}"/>
+                <a16:creationId xmlns:a16="http://schemas.microsoft.com/office/drawing/2014/main" id="{71CD0E1A-3D9F-46B7-A1AE-D35468F2FC53}"/>
               </a:ext>
             </a:extLst>
           </p:cNvPr>
@@ -4606,7 +4606,7 @@
           <p:cNvPr id="3" name="Right column">
             <a:extLst xmlns:a="http://schemas.openxmlformats.org/drawingml/2006/main">
               <a:ext uri="{FF2B5EF4-FFF2-40B4-BE49-F238E27FC236}">
-                <a16:creationId xmlns:a16="http://schemas.microsoft.com/office/drawing/2014/main" id="{E36A8AF9-84CB-4594-8BEE-60A04A7591C5}"/>
+                <a16:creationId xmlns:a16="http://schemas.microsoft.com/office/drawing/2014/main" id="{1F769DE5-73BD-422E-857C-1C8DEE78146C}"/>
               </a:ext>
             </a:extLst>
           </p:cNvPr>
@@ -4852,7 +4852,7 @@
           <p:cNvPr id="3" name="Title">
             <a:extLst xmlns:a="http://schemas.openxmlformats.org/drawingml/2006/main">
               <a:ext uri="{FF2B5EF4-FFF2-40B4-BE49-F238E27FC236}">
-                <a16:creationId xmlns:a16="http://schemas.microsoft.com/office/drawing/2014/main" id="{1DC08E22-0AEB-43A5-A962-53D304376F3A}"/>
+                <a16:creationId xmlns:a16="http://schemas.microsoft.com/office/drawing/2014/main" id="{BC6D5CFF-C1F6-40A3-8CF2-EF8B8AC8FD33}"/>
               </a:ext>
             </a:extLst>
           </p:cNvPr>
@@ -5081,7 +5081,7 @@
           <p:cNvPr id="2" name="Left column">
             <a:extLst xmlns:a="http://schemas.openxmlformats.org/drawingml/2006/main">
               <a:ext uri="{FF2B5EF4-FFF2-40B4-BE49-F238E27FC236}">
-                <a16:creationId xmlns:a16="http://schemas.microsoft.com/office/drawing/2014/main" id="{950C57F3-BD06-4430-BC23-7BFAC09ACB12}"/>
+                <a16:creationId xmlns:a16="http://schemas.microsoft.com/office/drawing/2014/main" id="{F22C23BF-344B-40E8-8549-0018EBC5CBFF}"/>
               </a:ext>
             </a:extLst>
           </p:cNvPr>
@@ -5348,12 +5348,12 @@
   </p:cSld>
   <p:clrMap bg1="lt1" tx1="dk1" bg2="lt2" tx2="dk2" accent1="accent1" accent2="accent2" accent3="accent3" accent4="accent4" accent5="accent5" accent6="accent6" hlink="hlink" folHlink="folHlink"/>
   <p:sldLayoutIdLst>
-    <p:sldLayoutId xmlns:r="http://schemas.openxmlformats.org/officeDocument/2006/relationships" id="2147483649" r:id="Rb752b259b5e24bff"/>
-    <p:sldLayoutId xmlns:r="http://schemas.openxmlformats.org/officeDocument/2006/relationships" id="2147483650" r:id="R0705ceca7eac4600"/>
-    <p:sldLayoutId xmlns:r="http://schemas.openxmlformats.org/officeDocument/2006/relationships" id="2147483651" r:id="Rb61348a9444347e0"/>
-    <p:sldLayoutId xmlns:r="http://schemas.openxmlformats.org/officeDocument/2006/relationships" id="2147483652" r:id="Rb80442465c9846ba"/>
-    <p:sldLayoutId xmlns:r="http://schemas.openxmlformats.org/officeDocument/2006/relationships" id="2147483653" r:id="R1e1f8b93462c4dd7"/>
-    <p:sldLayoutId xmlns:r="http://schemas.openxmlformats.org/officeDocument/2006/relationships" id="2147483654" r:id="R0dc66cb90aed4f23"/>
+    <p:sldLayoutId xmlns:r="http://schemas.openxmlformats.org/officeDocument/2006/relationships" id="2147483649" r:id="R93f90dacae85418b"/>
+    <p:sldLayoutId xmlns:r="http://schemas.openxmlformats.org/officeDocument/2006/relationships" id="2147483650" r:id="R65e31a878c2446b0"/>
+    <p:sldLayoutId xmlns:r="http://schemas.openxmlformats.org/officeDocument/2006/relationships" id="2147483651" r:id="R3d6173e105c14914"/>
+    <p:sldLayoutId xmlns:r="http://schemas.openxmlformats.org/officeDocument/2006/relationships" id="2147483652" r:id="R78f48415b30c422e"/>
+    <p:sldLayoutId xmlns:r="http://schemas.openxmlformats.org/officeDocument/2006/relationships" id="2147483653" r:id="Rfd1580ee1c0c4d5a"/>
+    <p:sldLayoutId xmlns:r="http://schemas.openxmlformats.org/officeDocument/2006/relationships" id="2147483654" r:id="R5ab352659bdc46c8"/>
   </p:sldLayoutIdLst>
   <p:txStyles>
     <p:titleStyle>
@@ -5904,7 +5904,7 @@
           <p:cNvPr id="12" name="ACT 0 · 익숙한 사용에서 시작하기">
             <a:extLst xmlns:a="http://schemas.openxmlformats.org/drawingml/2006/main">
               <a:ext uri="{FF2B5EF4-FFF2-40B4-BE49-F238E27FC236}">
-                <a16:creationId xmlns:a16="http://schemas.microsoft.com/office/drawing/2014/main" id="{794B5716-827F-4FDA-9F7C-ECF6CE773359}"/>
+                <a16:creationId xmlns:a16="http://schemas.microsoft.com/office/drawing/2014/main" id="{7B1E21FB-939D-410B-A049-5EBB07770680}"/>
               </a:ext>
             </a:extLst>
           </p:cNvPr>
@@ -6062,7 +6062,7 @@
           <p:cNvPr id="2" name="S01">
             <a:extLst xmlns:a="http://schemas.openxmlformats.org/drawingml/2006/main">
               <a:ext uri="{FF2B5EF4-FFF2-40B4-BE49-F238E27FC236}">
-                <a16:creationId xmlns:a16="http://schemas.microsoft.com/office/drawing/2014/main" id="{2330EF03-A4D6-4625-A968-C24E56F042E1}"/>
+                <a16:creationId xmlns:a16="http://schemas.microsoft.com/office/drawing/2014/main" id="{0D500242-1780-453D-90F4-D89A4F369E84}"/>
               </a:ext>
             </a:extLst>
           </p:cNvPr>
@@ -6220,7 +6220,7 @@
           <p:cNvPr id="3" name="AI에게 지금 무엇을 맡기고 있는가?">
             <a:extLst xmlns:a="http://schemas.openxmlformats.org/drawingml/2006/main">
               <a:ext uri="{FF2B5EF4-FFF2-40B4-BE49-F238E27FC236}">
-                <a16:creationId xmlns:a16="http://schemas.microsoft.com/office/drawing/2014/main" id="{97302C9F-50E4-4822-AC83-CB89C3498065}"/>
+                <a16:creationId xmlns:a16="http://schemas.microsoft.com/office/drawing/2014/main" id="{CC1CBF9B-08A7-4A33-AF72-73EEAEA5954F}"/>
               </a:ext>
             </a:extLst>
           </p:cNvPr>
@@ -6378,7 +6378,7 @@
           <p:cNvPr id="4" name="">
             <a:extLst xmlns:a="http://schemas.openxmlformats.org/drawingml/2006/main">
               <a:ext uri="{FF2B5EF4-FFF2-40B4-BE49-F238E27FC236}">
-                <a16:creationId xmlns:a16="http://schemas.microsoft.com/office/drawing/2014/main" id="{31B379DF-65B3-40B9-8EB3-D094F89FEC8D}"/>
+                <a16:creationId xmlns:a16="http://schemas.microsoft.com/office/drawing/2014/main" id="{DCE81CDB-E407-4EFF-B2C7-36CFA13563B6}"/>
               </a:ext>
             </a:extLst>
           </p:cNvPr>
@@ -6409,7 +6409,7 @@
           <p:cNvPr id="5" name="생각해 보기 · 이 과정의 교육 모델">
             <a:extLst xmlns:a="http://schemas.openxmlformats.org/drawingml/2006/main">
               <a:ext uri="{FF2B5EF4-FFF2-40B4-BE49-F238E27FC236}">
-                <a16:creationId xmlns:a16="http://schemas.microsoft.com/office/drawing/2014/main" id="{B60C50D0-DC58-4AF3-A952-C6494D58A60B}"/>
+                <a16:creationId xmlns:a16="http://schemas.microsoft.com/office/drawing/2014/main" id="{0D34FB7E-372E-42C7-AC2C-CFBEB4990376}"/>
               </a:ext>
             </a:extLst>
           </p:cNvPr>
@@ -6567,7 +6567,7 @@
           <p:cNvPr id="6" name="자신의 경험 하나만 떠올려 보세요. 사용 수준을 평가하는 질문이 아닙니다.">
             <a:extLst xmlns:a="http://schemas.openxmlformats.org/drawingml/2006/main">
               <a:ext uri="{FF2B5EF4-FFF2-40B4-BE49-F238E27FC236}">
-                <a16:creationId xmlns:a16="http://schemas.microsoft.com/office/drawing/2014/main" id="{581A929F-54A3-438F-B150-6F2F1C173480}"/>
+                <a16:creationId xmlns:a16="http://schemas.microsoft.com/office/drawing/2014/main" id="{9A008C5B-CED9-4270-AF8B-7588D38BAB6C}"/>
               </a:ext>
             </a:extLst>
           </p:cNvPr>
@@ -6725,7 +6725,7 @@
           <p:cNvPr id="7" name="가장 최근에 AI에게 맡긴 일 하나">
             <a:extLst xmlns:a="http://schemas.openxmlformats.org/drawingml/2006/main">
               <a:ext uri="{FF2B5EF4-FFF2-40B4-BE49-F238E27FC236}">
-                <a16:creationId xmlns:a16="http://schemas.microsoft.com/office/drawing/2014/main" id="{51B5D4AC-28A6-4A21-A0B6-E744F7F3E040}"/>
+                <a16:creationId xmlns:a16="http://schemas.microsoft.com/office/drawing/2014/main" id="{BFDF4C03-67E6-4124-B5C0-9184571DD32D}"/>
               </a:ext>
             </a:extLst>
           </p:cNvPr>
@@ -6883,7 +6883,7 @@
           <p:cNvPr id="8" name="오류 설명을 들었나요?&#10;관련 코드를 조사하게 했나요?&#10;수정한 결과까지 확인하게 했나요?">
             <a:extLst xmlns:a="http://schemas.openxmlformats.org/drawingml/2006/main">
               <a:ext uri="{FF2B5EF4-FFF2-40B4-BE49-F238E27FC236}">
-                <a16:creationId xmlns:a16="http://schemas.microsoft.com/office/drawing/2014/main" id="{79C38499-9C13-4711-AF29-3AF8CD9166AB}"/>
+                <a16:creationId xmlns:a16="http://schemas.microsoft.com/office/drawing/2014/main" id="{81DE875A-2B17-446A-A771-528D6FBCADD1}"/>
               </a:ext>
             </a:extLst>
           </p:cNvPr>
@@ -7087,7 +7087,7 @@
           <p:cNvPr id="9" name="">
             <a:extLst xmlns:a="http://schemas.openxmlformats.org/drawingml/2006/main">
               <a:ext uri="{FF2B5EF4-FFF2-40B4-BE49-F238E27FC236}">
-                <a16:creationId xmlns:a16="http://schemas.microsoft.com/office/drawing/2014/main" id="{7FFA8CE1-DF2E-4C54-BBF0-E731A658DA0B}"/>
+                <a16:creationId xmlns:a16="http://schemas.microsoft.com/office/drawing/2014/main" id="{D18049FF-B0B5-4967-9F49-47401D53DBB7}"/>
               </a:ext>
             </a:extLst>
           </p:cNvPr>
@@ -7118,7 +7118,7 @@
           <p:cNvPr id="10" name="질문 · 생성&#10;조사 · 변경&#10;검증 · 작업 방식 개선">
             <a:extLst xmlns:a="http://schemas.openxmlformats.org/drawingml/2006/main">
               <a:ext uri="{FF2B5EF4-FFF2-40B4-BE49-F238E27FC236}">
-                <a16:creationId xmlns:a16="http://schemas.microsoft.com/office/drawing/2014/main" id="{8E5FD42F-9A0D-4175-A752-3EC9BAEDC141}"/>
+                <a16:creationId xmlns:a16="http://schemas.microsoft.com/office/drawing/2014/main" id="{7C988389-38EE-4E13-8F6C-4ADB0A599CAB}"/>
               </a:ext>
             </a:extLst>
           </p:cNvPr>
@@ -7322,7 +7322,7 @@
           <p:cNvPr id="11" name="익숙한 방식에서 출발해도 괜찮습니다.">
             <a:extLst xmlns:a="http://schemas.openxmlformats.org/drawingml/2006/main">
               <a:ext uri="{FF2B5EF4-FFF2-40B4-BE49-F238E27FC236}">
-                <a16:creationId xmlns:a16="http://schemas.microsoft.com/office/drawing/2014/main" id="{2DC890F4-E3B1-4B31-90EA-6763310B9F5C}"/>
+                <a16:creationId xmlns:a16="http://schemas.microsoft.com/office/drawing/2014/main" id="{4CE2BEF0-86B7-4F89-8CEC-B93952B42BE5}"/>
               </a:ext>
             </a:extLst>
           </p:cNvPr>
@@ -7478,7 +7478,7 @@
     </p:spTree>
     <p:extLst>
       <p:ext uri="{BB962C8B-B14F-4D97-AF65-F5344CB8AC3E}">
-        <p14:creationId xmlns:p14="http://schemas.microsoft.com/office/powerpoint/2010/main" val="290401250"/>
+        <p14:creationId xmlns:p14="http://schemas.microsoft.com/office/powerpoint/2010/main" val="738171509"/>
       </p:ext>
     </p:extLst>
   </p:cSld>
@@ -7509,7 +7509,7 @@
           <p:cNvPr id="23" name="ACT 0 · 작은 코드 질문">
             <a:extLst xmlns:a="http://schemas.openxmlformats.org/drawingml/2006/main">
               <a:ext uri="{FF2B5EF4-FFF2-40B4-BE49-F238E27FC236}">
-                <a16:creationId xmlns:a16="http://schemas.microsoft.com/office/drawing/2014/main" id="{55A384A2-849B-4D39-9B4D-D609DC471474}"/>
+                <a16:creationId xmlns:a16="http://schemas.microsoft.com/office/drawing/2014/main" id="{EBA624AF-013A-4756-AD03-A080891D9D3B}"/>
               </a:ext>
             </a:extLst>
           </p:cNvPr>
@@ -7667,7 +7667,7 @@
           <p:cNvPr id="2" name="S02">
             <a:extLst xmlns:a="http://schemas.openxmlformats.org/drawingml/2006/main">
               <a:ext uri="{FF2B5EF4-FFF2-40B4-BE49-F238E27FC236}">
-                <a16:creationId xmlns:a16="http://schemas.microsoft.com/office/drawing/2014/main" id="{28F0E739-6A89-4667-A373-FEA4D4C27D74}"/>
+                <a16:creationId xmlns:a16="http://schemas.microsoft.com/office/drawing/2014/main" id="{300256B8-EF47-4BE8-AE70-1F0830290B13}"/>
               </a:ext>
             </a:extLst>
           </p:cNvPr>
@@ -7825,7 +7825,7 @@
           <p:cNvPr id="3" name="작은 질문에는 Chatbot이 유용하다">
             <a:extLst xmlns:a="http://schemas.openxmlformats.org/drawingml/2006/main">
               <a:ext uri="{FF2B5EF4-FFF2-40B4-BE49-F238E27FC236}">
-                <a16:creationId xmlns:a16="http://schemas.microsoft.com/office/drawing/2014/main" id="{B8F20E60-BFC1-4F07-B6B5-2A10CDD04338}"/>
+                <a16:creationId xmlns:a16="http://schemas.microsoft.com/office/drawing/2014/main" id="{CE8DD933-7BF0-4D3C-9EE1-FC9FE1B6FD74}"/>
               </a:ext>
             </a:extLst>
           </p:cNvPr>
@@ -7983,7 +7983,7 @@
           <p:cNvPr id="4" name="">
             <a:extLst xmlns:a="http://schemas.openxmlformats.org/drawingml/2006/main">
               <a:ext uri="{FF2B5EF4-FFF2-40B4-BE49-F238E27FC236}">
-                <a16:creationId xmlns:a16="http://schemas.microsoft.com/office/drawing/2014/main" id="{60077921-AFDD-4307-8D19-2408BC8A2947}"/>
+                <a16:creationId xmlns:a16="http://schemas.microsoft.com/office/drawing/2014/main" id="{B4D3C240-DD10-4B3E-8CC2-990C4B81D370}"/>
               </a:ext>
             </a:extLst>
           </p:cNvPr>
@@ -8014,7 +8014,7 @@
           <p:cNvPr id="5" name="교육용 예시 · 실제 ChatGPT 대화 캡처가 아님">
             <a:extLst xmlns:a="http://schemas.openxmlformats.org/drawingml/2006/main">
               <a:ext uri="{FF2B5EF4-FFF2-40B4-BE49-F238E27FC236}">
-                <a16:creationId xmlns:a16="http://schemas.microsoft.com/office/drawing/2014/main" id="{A89D04C8-B19C-40B8-B0FB-99D659A29C52}"/>
+                <a16:creationId xmlns:a16="http://schemas.microsoft.com/office/drawing/2014/main" id="{FEC4FA66-2512-4CAA-8681-D0B6AB5FC100}"/>
               </a:ext>
             </a:extLst>
           </p:cNvPr>
@@ -8172,7 +8172,7 @@
           <p:cNvPr id="6" name="일반적인 질문 흐름을 설명하며 특정 제품의 정확도나 우월성을 주장하지 않습니다.">
             <a:extLst xmlns:a="http://schemas.openxmlformats.org/drawingml/2006/main">
               <a:ext uri="{FF2B5EF4-FFF2-40B4-BE49-F238E27FC236}">
-                <a16:creationId xmlns:a16="http://schemas.microsoft.com/office/drawing/2014/main" id="{0D7D3CB7-9180-4ACF-A35E-B1AC5982B5FA}"/>
+                <a16:creationId xmlns:a16="http://schemas.microsoft.com/office/drawing/2014/main" id="{1108AAD9-1002-401B-8A6C-C324793A0F32}"/>
               </a:ext>
             </a:extLst>
           </p:cNvPr>
@@ -8330,7 +8330,7 @@
           <p:cNvPr id="7" name="“이 코드에서 무엇이 남을까?”">
             <a:extLst xmlns:a="http://schemas.openxmlformats.org/drawingml/2006/main">
               <a:ext uri="{FF2B5EF4-FFF2-40B4-BE49-F238E27FC236}">
-                <a16:creationId xmlns:a16="http://schemas.microsoft.com/office/drawing/2014/main" id="{6BA89199-33BE-4A2A-AC25-D055D0D67900}"/>
+                <a16:creationId xmlns:a16="http://schemas.microsoft.com/office/drawing/2014/main" id="{FE88DCBA-D5A2-40E8-AF01-78E57EF3CE1B}"/>
               </a:ext>
             </a:extLst>
           </p:cNvPr>
@@ -8488,7 +8488,7 @@
           <p:cNvPr id="8" name="">
             <a:extLst xmlns:a="http://schemas.openxmlformats.org/drawingml/2006/main">
               <a:ext uri="{FF2B5EF4-FFF2-40B4-BE49-F238E27FC236}">
-                <a16:creationId xmlns:a16="http://schemas.microsoft.com/office/drawing/2014/main" id="{40C40B88-24A0-4D1C-8F90-8A4DB51FB187}"/>
+                <a16:creationId xmlns:a16="http://schemas.microsoft.com/office/drawing/2014/main" id="{6531F4FA-6278-46C9-896D-3314A8CAFA53}"/>
               </a:ext>
             </a:extLst>
           </p:cNvPr>
@@ -8519,7 +8519,7 @@
           <p:cNvPr id="9" name="row = [1, 2, 3, 4]&#10;row[1:3]">
             <a:extLst xmlns:a="http://schemas.openxmlformats.org/drawingml/2006/main">
               <a:ext uri="{FF2B5EF4-FFF2-40B4-BE49-F238E27FC236}">
-                <a16:creationId xmlns:a16="http://schemas.microsoft.com/office/drawing/2014/main" id="{DF82A4D6-4358-4B10-ABFC-B82CF68A5AA2}"/>
+                <a16:creationId xmlns:a16="http://schemas.microsoft.com/office/drawing/2014/main" id="{66DFF1C4-6EE1-46F7-B8E0-996B80CD33FA}"/>
               </a:ext>
             </a:extLst>
           </p:cNvPr>
@@ -8700,7 +8700,7 @@
           <p:cNvPr id="10" name="">
             <a:extLst xmlns:a="http://schemas.openxmlformats.org/drawingml/2006/main">
               <a:ext uri="{FF2B5EF4-FFF2-40B4-BE49-F238E27FC236}">
-                <a16:creationId xmlns:a16="http://schemas.microsoft.com/office/drawing/2014/main" id="{A10D5A97-2A13-4A4D-B763-9EAB7B80B770}"/>
+                <a16:creationId xmlns:a16="http://schemas.microsoft.com/office/drawing/2014/main" id="{7201C793-D2BB-4E9A-8193-DE4B0A7CF676}"/>
               </a:ext>
             </a:extLst>
           </p:cNvPr>
@@ -8730,7 +8730,7 @@
           <p:cNvPr id="11" name="[2, 3]">
             <a:extLst xmlns:a="http://schemas.openxmlformats.org/drawingml/2006/main">
               <a:ext uri="{FF2B5EF4-FFF2-40B4-BE49-F238E27FC236}">
-                <a16:creationId xmlns:a16="http://schemas.microsoft.com/office/drawing/2014/main" id="{B6D3240D-7C45-4554-9EF2-D5919991F953}"/>
+                <a16:creationId xmlns:a16="http://schemas.microsoft.com/office/drawing/2014/main" id="{91A883A1-2325-40D9-8E01-A7CF02BE6DF5}"/>
               </a:ext>
             </a:extLst>
           </p:cNvPr>
@@ -8888,7 +8888,7 @@
           <p:cNvPr id="12" name="끝 index 3은 포함하지 않습니다.">
             <a:extLst xmlns:a="http://schemas.openxmlformats.org/drawingml/2006/main">
               <a:ext uri="{FF2B5EF4-FFF2-40B4-BE49-F238E27FC236}">
-                <a16:creationId xmlns:a16="http://schemas.microsoft.com/office/drawing/2014/main" id="{D14B5AF2-D564-4C9B-A3FA-92250A79EF8C}"/>
+                <a16:creationId xmlns:a16="http://schemas.microsoft.com/office/drawing/2014/main" id="{68FC4D55-140C-4010-BC8F-99BDBA754429}"/>
               </a:ext>
             </a:extLst>
           </p:cNvPr>
@@ -9046,7 +9046,7 @@
           <p:cNvPr id="13" name="코드·오류">
             <a:extLst xmlns:a="http://schemas.openxmlformats.org/drawingml/2006/main">
               <a:ext uri="{FF2B5EF4-FFF2-40B4-BE49-F238E27FC236}">
-                <a16:creationId xmlns:a16="http://schemas.microsoft.com/office/drawing/2014/main" id="{4A9F775C-7F12-4773-8AFF-911AA6FF2EF7}"/>
+                <a16:creationId xmlns:a16="http://schemas.microsoft.com/office/drawing/2014/main" id="{64202124-A1E8-482B-8BFD-8F99E90183BD}"/>
               </a:ext>
             </a:extLst>
           </p:cNvPr>
@@ -9204,7 +9204,7 @@
           <p:cNvPr id="14" name="">
             <a:extLst xmlns:a="http://schemas.openxmlformats.org/drawingml/2006/main">
               <a:ext uri="{FF2B5EF4-FFF2-40B4-BE49-F238E27FC236}">
-                <a16:creationId xmlns:a16="http://schemas.microsoft.com/office/drawing/2014/main" id="{B9E4DD11-52B4-4868-BB8B-49AEC113667A}"/>
+                <a16:creationId xmlns:a16="http://schemas.microsoft.com/office/drawing/2014/main" id="{7804D775-6FA6-4A82-96E4-19E16D080016}"/>
               </a:ext>
             </a:extLst>
           </p:cNvPr>
@@ -9234,7 +9234,7 @@
           <p:cNvPr id="15" name="복사">
             <a:extLst xmlns:a="http://schemas.openxmlformats.org/drawingml/2006/main">
               <a:ext uri="{FF2B5EF4-FFF2-40B4-BE49-F238E27FC236}">
-                <a16:creationId xmlns:a16="http://schemas.microsoft.com/office/drawing/2014/main" id="{2D64D5A7-B267-425A-B017-EA76F4F2B37C}"/>
+                <a16:creationId xmlns:a16="http://schemas.microsoft.com/office/drawing/2014/main" id="{D7283F99-3CA7-475A-9EC9-846ABF375AAF}"/>
               </a:ext>
             </a:extLst>
           </p:cNvPr>
@@ -9392,7 +9392,7 @@
           <p:cNvPr id="16" name="">
             <a:extLst xmlns:a="http://schemas.openxmlformats.org/drawingml/2006/main">
               <a:ext uri="{FF2B5EF4-FFF2-40B4-BE49-F238E27FC236}">
-                <a16:creationId xmlns:a16="http://schemas.microsoft.com/office/drawing/2014/main" id="{551080FC-4440-483F-A120-81F1FD82F825}"/>
+                <a16:creationId xmlns:a16="http://schemas.microsoft.com/office/drawing/2014/main" id="{5389E282-C107-4BFF-9033-4A75BA7BE998}"/>
               </a:ext>
             </a:extLst>
           </p:cNvPr>
@@ -9422,7 +9422,7 @@
           <p:cNvPr id="17" name="질문">
             <a:extLst xmlns:a="http://schemas.openxmlformats.org/drawingml/2006/main">
               <a:ext uri="{FF2B5EF4-FFF2-40B4-BE49-F238E27FC236}">
-                <a16:creationId xmlns:a16="http://schemas.microsoft.com/office/drawing/2014/main" id="{6531BE24-4005-48B4-9464-E4B7195C1605}"/>
+                <a16:creationId xmlns:a16="http://schemas.microsoft.com/office/drawing/2014/main" id="{6B2E9E8D-2F96-4674-BCA0-AF9CA481918E}"/>
               </a:ext>
             </a:extLst>
           </p:cNvPr>
@@ -9580,7 +9580,7 @@
           <p:cNvPr id="18" name="">
             <a:extLst xmlns:a="http://schemas.openxmlformats.org/drawingml/2006/main">
               <a:ext uri="{FF2B5EF4-FFF2-40B4-BE49-F238E27FC236}">
-                <a16:creationId xmlns:a16="http://schemas.microsoft.com/office/drawing/2014/main" id="{F9AA33F4-7ED8-4BE1-A09C-125560393EE3}"/>
+                <a16:creationId xmlns:a16="http://schemas.microsoft.com/office/drawing/2014/main" id="{2C15C240-2FB3-4250-BE29-83B6DD1484F1}"/>
               </a:ext>
             </a:extLst>
           </p:cNvPr>
@@ -9610,7 +9610,7 @@
           <p:cNvPr id="19" name="답 확인">
             <a:extLst xmlns:a="http://schemas.openxmlformats.org/drawingml/2006/main">
               <a:ext uri="{FF2B5EF4-FFF2-40B4-BE49-F238E27FC236}">
-                <a16:creationId xmlns:a16="http://schemas.microsoft.com/office/drawing/2014/main" id="{50F9C3C0-90FB-4D54-9396-550C408B278B}"/>
+                <a16:creationId xmlns:a16="http://schemas.microsoft.com/office/drawing/2014/main" id="{66E122F9-68C5-418E-BF85-06AD3DD35C2A}"/>
               </a:ext>
             </a:extLst>
           </p:cNvPr>
@@ -9768,7 +9768,7 @@
           <p:cNvPr id="20" name="">
             <a:extLst xmlns:a="http://schemas.openxmlformats.org/drawingml/2006/main">
               <a:ext uri="{FF2B5EF4-FFF2-40B4-BE49-F238E27FC236}">
-                <a16:creationId xmlns:a16="http://schemas.microsoft.com/office/drawing/2014/main" id="{1D78FEF0-DC4C-48D6-AE0C-155FA355F85B}"/>
+                <a16:creationId xmlns:a16="http://schemas.microsoft.com/office/drawing/2014/main" id="{F79E3DF2-2854-4C1E-BDF5-5F6FFFEED77C}"/>
               </a:ext>
             </a:extLst>
           </p:cNvPr>
@@ -9798,7 +9798,7 @@
           <p:cNvPr id="21" name="IDE로 복귀">
             <a:extLst xmlns:a="http://schemas.openxmlformats.org/drawingml/2006/main">
               <a:ext uri="{FF2B5EF4-FFF2-40B4-BE49-F238E27FC236}">
-                <a16:creationId xmlns:a16="http://schemas.microsoft.com/office/drawing/2014/main" id="{D1457468-9A74-4A54-8EFF-336E645FEFBA}"/>
+                <a16:creationId xmlns:a16="http://schemas.microsoft.com/office/drawing/2014/main" id="{FDB5D05A-8A76-4CB8-93DE-1F567C8183E3}"/>
               </a:ext>
             </a:extLst>
           </p:cNvPr>
@@ -9956,7 +9956,7 @@
           <p:cNvPr id="22" name="">
             <a:extLst xmlns:a="http://schemas.openxmlformats.org/drawingml/2006/main">
               <a:ext uri="{FF2B5EF4-FFF2-40B4-BE49-F238E27FC236}">
-                <a16:creationId xmlns:a16="http://schemas.microsoft.com/office/drawing/2014/main" id="{31A1B519-7DDA-4D1B-8F45-C8384A666540}"/>
+                <a16:creationId xmlns:a16="http://schemas.microsoft.com/office/drawing/2014/main" id="{92E589A4-FE4E-4C69-8B20-8CC8EB424B2B}"/>
               </a:ext>
             </a:extLst>
           </p:cNvPr>
@@ -9985,7 +9985,7 @@
     </p:spTree>
     <p:extLst>
       <p:ext uri="{BB962C8B-B14F-4D97-AF65-F5344CB8AC3E}">
-        <p14:creationId xmlns:p14="http://schemas.microsoft.com/office/powerpoint/2010/main" val="75978775"/>
+        <p14:creationId xmlns:p14="http://schemas.microsoft.com/office/powerpoint/2010/main" val="781278197"/>
       </p:ext>
     </p:extLst>
   </p:cSld>
@@ -10013,10 +10013,10 @@
       </p:grpSpPr>
       <p:sp>
         <p:nvSpPr>
-          <p:cNvPr id="24" name="ACT 0 · 여러 파일을 가로지르는 질문">
+          <p:cNvPr id="16" name="ACT 0 · 여러 파일을 가로지르는 질문">
             <a:extLst xmlns:a="http://schemas.openxmlformats.org/drawingml/2006/main">
               <a:ext uri="{FF2B5EF4-FFF2-40B4-BE49-F238E27FC236}">
-                <a16:creationId xmlns:a16="http://schemas.microsoft.com/office/drawing/2014/main" id="{6EF967D4-6E49-4D0B-894B-1C696D2560D5}"/>
+                <a16:creationId xmlns:a16="http://schemas.microsoft.com/office/drawing/2014/main" id="{8C879627-BB46-4FBD-80BD-EA04F24602AE}"/>
               </a:ext>
             </a:extLst>
           </p:cNvPr>
@@ -10174,7 +10174,7 @@
           <p:cNvPr id="2" name="S03">
             <a:extLst xmlns:a="http://schemas.openxmlformats.org/drawingml/2006/main">
               <a:ext uri="{FF2B5EF4-FFF2-40B4-BE49-F238E27FC236}">
-                <a16:creationId xmlns:a16="http://schemas.microsoft.com/office/drawing/2014/main" id="{F735BAD6-3051-4CDA-BEC7-1303F9995D5D}"/>
+                <a16:creationId xmlns:a16="http://schemas.microsoft.com/office/drawing/2014/main" id="{746155A7-8827-485B-A89A-8B05D7133DE2}"/>
               </a:ext>
             </a:extLst>
           </p:cNvPr>
@@ -10332,7 +10332,7 @@
           <p:cNvPr id="3" name="질문이 커지면 Context를 모으는 일이 생긴다">
             <a:extLst xmlns:a="http://schemas.openxmlformats.org/drawingml/2006/main">
               <a:ext uri="{FF2B5EF4-FFF2-40B4-BE49-F238E27FC236}">
-                <a16:creationId xmlns:a16="http://schemas.microsoft.com/office/drawing/2014/main" id="{4803C8E1-FBA3-4300-87B7-DDDCA44A62C2}"/>
+                <a16:creationId xmlns:a16="http://schemas.microsoft.com/office/drawing/2014/main" id="{D0DEF59A-DFB3-45FD-8F43-903F19418367}"/>
               </a:ext>
             </a:extLst>
           </p:cNvPr>
@@ -10490,7 +10490,7 @@
           <p:cNvPr id="4" name="">
             <a:extLst xmlns:a="http://schemas.openxmlformats.org/drawingml/2006/main">
               <a:ext uri="{FF2B5EF4-FFF2-40B4-BE49-F238E27FC236}">
-                <a16:creationId xmlns:a16="http://schemas.microsoft.com/office/drawing/2014/main" id="{E75CC2B1-A7CB-4B07-BDA8-D72076B620E0}"/>
+                <a16:creationId xmlns:a16="http://schemas.microsoft.com/office/drawing/2014/main" id="{D5FEF454-2656-4201-8446-E19C228B7C48}"/>
               </a:ext>
             </a:extLst>
           </p:cNvPr>
@@ -10518,10 +10518,10 @@
       </p:sp>
       <p:sp>
         <p:nvSpPr>
-          <p:cNvPr id="5" name="개념 사례 · Repository 수준의 질문을 설명하는 관계도">
+          <p:cNvPr id="5" name="개념 사례 · 사람이 Context를 모으는 장면 · AI 생성 설명용 삽화">
             <a:extLst xmlns:a="http://schemas.openxmlformats.org/drawingml/2006/main">
               <a:ext uri="{FF2B5EF4-FFF2-40B4-BE49-F238E27FC236}">
-                <a16:creationId xmlns:a16="http://schemas.microsoft.com/office/drawing/2014/main" id="{70BC8169-016A-4181-883C-BC235264E458}"/>
+                <a16:creationId xmlns:a16="http://schemas.microsoft.com/office/drawing/2014/main" id="{EFEF0493-FD3D-4594-9AF4-F77EFA167FE3}"/>
               </a:ext>
             </a:extLst>
           </p:cNvPr>
@@ -10669,7 +10669,7 @@
                 <a:ea typeface="Malgun Gothic"/>
                 <a:cs typeface="Malgun Gothic"/>
               </a:rPr>
-              <a:t>개념 사례 · Repository 수준의 질문을 설명하는 관계도</a:t>
+              <a:t>개념 사례 · 사람이 Context를 모으는 장면 · AI 생성 설명용 삽화</a:t>
             </a:r>
           </a:p>
         </p:txBody>
@@ -10679,7 +10679,7 @@
           <p:cNvPr id="6" name="특정 Trial에서 실제로 발생한 비용이나 실패를 뜻하지 않습니다.">
             <a:extLst xmlns:a="http://schemas.openxmlformats.org/drawingml/2006/main">
               <a:ext uri="{FF2B5EF4-FFF2-40B4-BE49-F238E27FC236}">
-                <a16:creationId xmlns:a16="http://schemas.microsoft.com/office/drawing/2014/main" id="{7DEB3097-D1D6-4215-9D13-25B0C6F7D75E}"/>
+                <a16:creationId xmlns:a16="http://schemas.microsoft.com/office/drawing/2014/main" id="{E80AFD1A-3B23-4DB6-BD70-581367672CB9}"/>
               </a:ext>
             </a:extLst>
           </p:cNvPr>
@@ -10691,7 +10691,7 @@
         <p:spPr>
           <a:xfrm xmlns:a="http://schemas.openxmlformats.org/drawingml/2006/main">
             <a:off x="609600" y="6191250"/>
-            <a:ext cx="10972800" cy="209550"/>
+            <a:ext cx="10972800" cy="285750"/>
           </a:xfrm>
           <a:prstGeom xmlns:a="http://schemas.openxmlformats.org/drawingml/2006/main" prst="rect">
             <a:avLst/>
@@ -10837,7 +10837,7 @@
           <p:cNvPr id="7" name="“CLI 결과가 기대와 다른데, 어디서부터 봐야 할까?”">
             <a:extLst xmlns:a="http://schemas.openxmlformats.org/drawingml/2006/main">
               <a:ext uri="{FF2B5EF4-FFF2-40B4-BE49-F238E27FC236}">
-                <a16:creationId xmlns:a16="http://schemas.microsoft.com/office/drawing/2014/main" id="{B3EDA43F-4CC6-4CF3-8922-961C91359502}"/>
+                <a16:creationId xmlns:a16="http://schemas.microsoft.com/office/drawing/2014/main" id="{4E06622F-010C-476D-8C7E-6500B58E930B}"/>
               </a:ext>
             </a:extLst>
           </p:cNvPr>
@@ -10848,8 +10848,8 @@
         </p:nvSpPr>
         <p:spPr>
           <a:xfrm xmlns:a="http://schemas.openxmlformats.org/drawingml/2006/main">
-            <a:off x="609600" y="2152650"/>
-            <a:ext cx="10972800" cy="457200"/>
+            <a:off x="609600" y="1628775"/>
+            <a:ext cx="10972800" cy="438150"/>
           </a:xfrm>
           <a:prstGeom xmlns:a="http://schemas.openxmlformats.org/drawingml/2006/main" prst="rect">
             <a:avLst/>
@@ -10865,7 +10865,7 @@
           </a:bodyPr>
           <a:lstStyle xmlns:a="http://schemas.openxmlformats.org/drawingml/2006/main">
             <a:defPPr algn="l">
-              <a:defRPr sz="2475" b="1">
+              <a:defRPr sz="2400" b="1">
                 <a:solidFill>
                   <a:srgbClr val="0B6172"/>
                 </a:solidFill>
@@ -10875,7 +10875,7 @@
               </a:defRPr>
             </a:defPPr>
             <a:lvl1pPr algn="l">
-              <a:defRPr sz="2475" b="1">
+              <a:defRPr sz="2400" b="1">
                 <a:solidFill>
                   <a:srgbClr val="0B6172"/>
                 </a:solidFill>
@@ -10885,7 +10885,7 @@
               </a:defRPr>
             </a:lvl1pPr>
             <a:lvl2pPr algn="l">
-              <a:defRPr sz="2475" b="1">
+              <a:defRPr sz="2400" b="1">
                 <a:solidFill>
                   <a:srgbClr val="0B6172"/>
                 </a:solidFill>
@@ -10895,7 +10895,7 @@
               </a:defRPr>
             </a:lvl2pPr>
             <a:lvl3pPr algn="l">
-              <a:defRPr sz="2475" b="1">
+              <a:defRPr sz="2400" b="1">
                 <a:solidFill>
                   <a:srgbClr val="0B6172"/>
                 </a:solidFill>
@@ -10905,7 +10905,7 @@
               </a:defRPr>
             </a:lvl3pPr>
             <a:lvl4pPr algn="l">
-              <a:defRPr sz="2475" b="1">
+              <a:defRPr sz="2400" b="1">
                 <a:solidFill>
                   <a:srgbClr val="0B6172"/>
                 </a:solidFill>
@@ -10915,7 +10915,7 @@
               </a:defRPr>
             </a:lvl4pPr>
             <a:lvl5pPr algn="l">
-              <a:defRPr sz="2475" b="1">
+              <a:defRPr sz="2400" b="1">
                 <a:solidFill>
                   <a:srgbClr val="0B6172"/>
                 </a:solidFill>
@@ -10925,7 +10925,7 @@
               </a:defRPr>
             </a:lvl5pPr>
             <a:lvl6pPr algn="l">
-              <a:defRPr sz="2475" b="1">
+              <a:defRPr sz="2400" b="1">
                 <a:solidFill>
                   <a:srgbClr val="0B6172"/>
                 </a:solidFill>
@@ -10935,7 +10935,7 @@
               </a:defRPr>
             </a:lvl6pPr>
             <a:lvl7pPr algn="l">
-              <a:defRPr sz="2475" b="1">
+              <a:defRPr sz="2400" b="1">
                 <a:solidFill>
                   <a:srgbClr val="0B6172"/>
                 </a:solidFill>
@@ -10945,7 +10945,7 @@
               </a:defRPr>
             </a:lvl7pPr>
             <a:lvl8pPr algn="l">
-              <a:defRPr sz="2475" b="1">
+              <a:defRPr sz="2400" b="1">
                 <a:solidFill>
                   <a:srgbClr val="0B6172"/>
                 </a:solidFill>
@@ -10955,7 +10955,7 @@
               </a:defRPr>
             </a:lvl8pPr>
             <a:lvl9pPr algn="l">
-              <a:defRPr sz="2475" b="1">
+              <a:defRPr sz="2400" b="1">
                 <a:solidFill>
                   <a:srgbClr val="0B6172"/>
                 </a:solidFill>
@@ -10967,7 +10967,7 @@
           </a:lstStyle>
           <a:p xmlns:a="http://schemas.openxmlformats.org/drawingml/2006/main">
             <a:pPr algn="l">
-              <a:defRPr sz="2475" b="1">
+              <a:defRPr sz="2400" b="1">
                 <a:solidFill>
                   <a:srgbClr val="0B6172"/>
                 </a:solidFill>
@@ -10977,7 +10977,7 @@
               </a:defRPr>
             </a:pPr>
             <a:r>
-              <a:rPr sz="2475" b="1">
+              <a:rPr sz="2400" b="1">
                 <a:solidFill>
                   <a:srgbClr val="0B6172"/>
                 </a:solidFill>
@@ -10990,12 +10990,40 @@
           </a:p>
         </p:txBody>
       </p:sp>
-      <p:sp>
-        <p:nvSpPr>
+      <p:pic>
+        <p:nvPicPr>
           <p:cNvPr id="8" name="">
             <a:extLst xmlns:a="http://schemas.openxmlformats.org/drawingml/2006/main">
               <a:ext uri="{FF2B5EF4-FFF2-40B4-BE49-F238E27FC236}">
-                <a16:creationId xmlns:a16="http://schemas.microsoft.com/office/drawing/2014/main" id="{4C381C7E-110E-4F96-A6F7-1615A4D5B8C3}"/>
+                <a16:creationId xmlns:a16="http://schemas.microsoft.com/office/drawing/2014/main" id="{31BC5AE2-9BBA-4B7B-B9DF-9CE20B7021DC}"/>
+              </a:ext>
+            </a:extLst>
+          </p:cNvPr>
+          <p:cNvPicPr>
+            <a:picLocks xmlns:a="http://schemas.openxmlformats.org/drawingml/2006/main" noChangeAspect="1"/>
+          </p:cNvPicPr>
+          <p:nvPr/>
+        </p:nvPicPr>
+        <p:blipFill>
+          <a:blip xmlns:r="http://schemas.openxmlformats.org/officeDocument/2006/relationships" xmlns:a="http://schemas.openxmlformats.org/drawingml/2006/main" r:embed="R99cd477771fd497a"/>
+          <a:stretch xmlns:a="http://schemas.openxmlformats.org/drawingml/2006/main"/>
+        </p:blipFill>
+        <p:spPr>
+          <a:xfrm xmlns:a="http://schemas.openxmlformats.org/drawingml/2006/main">
+            <a:off x="609600" y="2124075"/>
+            <a:ext cx="7086600" cy="3543300"/>
+          </a:xfrm>
+          <a:prstGeom xmlns:a="http://schemas.openxmlformats.org/drawingml/2006/main" prst="rect">
+            <a:avLst/>
+          </a:prstGeom>
+        </p:spPr>
+      </p:pic>
+      <p:sp>
+        <p:nvSpPr>
+          <p:cNvPr id="9" name="구현 · 호출 경로">
+            <a:extLst xmlns:a="http://schemas.openxmlformats.org/drawingml/2006/main">
+              <a:ext uri="{FF2B5EF4-FFF2-40B4-BE49-F238E27FC236}">
+                <a16:creationId xmlns:a16="http://schemas.microsoft.com/office/drawing/2014/main" id="{A45039C8-AF19-43E1-93A3-519A607418F5}"/>
               </a:ext>
             </a:extLst>
           </p:cNvPr>
@@ -11006,41 +11034,8 @@
         </p:nvSpPr>
         <p:spPr>
           <a:xfrm xmlns:a="http://schemas.openxmlformats.org/drawingml/2006/main">
-            <a:off x="609600" y="2981325"/>
-            <a:ext cx="3429000" cy="1200150"/>
-          </a:xfrm>
-          <a:prstGeom xmlns:a="http://schemas.openxmlformats.org/drawingml/2006/main" prst="rect">
-            <a:avLst/>
-          </a:prstGeom>
-          <a:solidFill xmlns:a="http://schemas.openxmlformats.org/drawingml/2006/main">
-            <a:srgbClr val="FFFFFF"/>
-          </a:solidFill>
-          <a:ln xmlns:a="http://schemas.openxmlformats.org/drawingml/2006/main" w="9525">
-            <a:solidFill>
-              <a:srgbClr val="C7D0DA"/>
-            </a:solidFill>
-            <a:prstDash val="solid"/>
-          </a:ln>
-        </p:spPr>
-      </p:sp>
-      <p:sp>
-        <p:nvSpPr>
-          <p:cNvPr id="9" name="CLI">
-            <a:extLst xmlns:a="http://schemas.openxmlformats.org/drawingml/2006/main">
-              <a:ext uri="{FF2B5EF4-FFF2-40B4-BE49-F238E27FC236}">
-                <a16:creationId xmlns:a16="http://schemas.microsoft.com/office/drawing/2014/main" id="{AE2B4DE8-2D4D-45C1-9EB1-F3C8C6318351}"/>
-              </a:ext>
-            </a:extLst>
-          </p:cNvPr>
-          <p:cNvSpPr>
-            <a:spLocks xmlns:a="http://schemas.openxmlformats.org/drawingml/2006/main" noGrp="1"/>
-          </p:cNvSpPr>
-          <p:nvPr/>
-        </p:nvSpPr>
-        <p:spPr>
-          <a:xfrm xmlns:a="http://schemas.openxmlformats.org/drawingml/2006/main">
-            <a:off x="838200" y="3133725"/>
-            <a:ext cx="2971800" cy="390525"/>
+            <a:off x="8096250" y="2295525"/>
+            <a:ext cx="3486150" cy="361950"/>
           </a:xfrm>
           <a:prstGeom xmlns:a="http://schemas.openxmlformats.org/drawingml/2006/main" prst="rect">
             <a:avLst/>
@@ -11056,9 +11051,9 @@
           </a:bodyPr>
           <a:lstStyle xmlns:a="http://schemas.openxmlformats.org/drawingml/2006/main">
             <a:defPPr algn="l">
-              <a:defRPr sz="2475" b="1">
-                <a:solidFill>
-                  <a:srgbClr val="17212B"/>
+              <a:defRPr sz="2100" b="1">
+                <a:solidFill>
+                  <a:srgbClr val="0B6172"/>
                 </a:solidFill>
                 <a:latin typeface="Malgun Gothic"/>
                 <a:ea typeface="Malgun Gothic"/>
@@ -11066,9 +11061,9 @@
               </a:defRPr>
             </a:defPPr>
             <a:lvl1pPr algn="l">
-              <a:defRPr sz="2475" b="1">
-                <a:solidFill>
-                  <a:srgbClr val="17212B"/>
+              <a:defRPr sz="2100" b="1">
+                <a:solidFill>
+                  <a:srgbClr val="0B6172"/>
                 </a:solidFill>
                 <a:latin typeface="Malgun Gothic"/>
                 <a:ea typeface="Malgun Gothic"/>
@@ -11076,9 +11071,9 @@
               </a:defRPr>
             </a:lvl1pPr>
             <a:lvl2pPr algn="l">
-              <a:defRPr sz="2475" b="1">
-                <a:solidFill>
-                  <a:srgbClr val="17212B"/>
+              <a:defRPr sz="2100" b="1">
+                <a:solidFill>
+                  <a:srgbClr val="0B6172"/>
                 </a:solidFill>
                 <a:latin typeface="Malgun Gothic"/>
                 <a:ea typeface="Malgun Gothic"/>
@@ -11086,9 +11081,9 @@
               </a:defRPr>
             </a:lvl2pPr>
             <a:lvl3pPr algn="l">
-              <a:defRPr sz="2475" b="1">
-                <a:solidFill>
-                  <a:srgbClr val="17212B"/>
+              <a:defRPr sz="2100" b="1">
+                <a:solidFill>
+                  <a:srgbClr val="0B6172"/>
                 </a:solidFill>
                 <a:latin typeface="Malgun Gothic"/>
                 <a:ea typeface="Malgun Gothic"/>
@@ -11096,9 +11091,9 @@
               </a:defRPr>
             </a:lvl3pPr>
             <a:lvl4pPr algn="l">
-              <a:defRPr sz="2475" b="1">
-                <a:solidFill>
-                  <a:srgbClr val="17212B"/>
+              <a:defRPr sz="2100" b="1">
+                <a:solidFill>
+                  <a:srgbClr val="0B6172"/>
                 </a:solidFill>
                 <a:latin typeface="Malgun Gothic"/>
                 <a:ea typeface="Malgun Gothic"/>
@@ -11106,9 +11101,9 @@
               </a:defRPr>
             </a:lvl4pPr>
             <a:lvl5pPr algn="l">
-              <a:defRPr sz="2475" b="1">
-                <a:solidFill>
-                  <a:srgbClr val="17212B"/>
+              <a:defRPr sz="2100" b="1">
+                <a:solidFill>
+                  <a:srgbClr val="0B6172"/>
                 </a:solidFill>
                 <a:latin typeface="Malgun Gothic"/>
                 <a:ea typeface="Malgun Gothic"/>
@@ -11116,9 +11111,9 @@
               </a:defRPr>
             </a:lvl5pPr>
             <a:lvl6pPr algn="l">
-              <a:defRPr sz="2475" b="1">
-                <a:solidFill>
-                  <a:srgbClr val="17212B"/>
+              <a:defRPr sz="2100" b="1">
+                <a:solidFill>
+                  <a:srgbClr val="0B6172"/>
                 </a:solidFill>
                 <a:latin typeface="Malgun Gothic"/>
                 <a:ea typeface="Malgun Gothic"/>
@@ -11126,9 +11121,9 @@
               </a:defRPr>
             </a:lvl6pPr>
             <a:lvl7pPr algn="l">
-              <a:defRPr sz="2475" b="1">
-                <a:solidFill>
-                  <a:srgbClr val="17212B"/>
+              <a:defRPr sz="2100" b="1">
+                <a:solidFill>
+                  <a:srgbClr val="0B6172"/>
                 </a:solidFill>
                 <a:latin typeface="Malgun Gothic"/>
                 <a:ea typeface="Malgun Gothic"/>
@@ -11136,9 +11131,9 @@
               </a:defRPr>
             </a:lvl7pPr>
             <a:lvl8pPr algn="l">
-              <a:defRPr sz="2475" b="1">
-                <a:solidFill>
-                  <a:srgbClr val="17212B"/>
+              <a:defRPr sz="2100" b="1">
+                <a:solidFill>
+                  <a:srgbClr val="0B6172"/>
                 </a:solidFill>
                 <a:latin typeface="Malgun Gothic"/>
                 <a:ea typeface="Malgun Gothic"/>
@@ -11146,9 +11141,9 @@
               </a:defRPr>
             </a:lvl8pPr>
             <a:lvl9pPr algn="l">
-              <a:defRPr sz="2475" b="1">
-                <a:solidFill>
-                  <a:srgbClr val="17212B"/>
+              <a:defRPr sz="2100" b="1">
+                <a:solidFill>
+                  <a:srgbClr val="0B6172"/>
                 </a:solidFill>
                 <a:latin typeface="Malgun Gothic"/>
                 <a:ea typeface="Malgun Gothic"/>
@@ -11158,9 +11153,9 @@
           </a:lstStyle>
           <a:p xmlns:a="http://schemas.openxmlformats.org/drawingml/2006/main">
             <a:pPr algn="l">
-              <a:defRPr sz="2475" b="1">
-                <a:solidFill>
-                  <a:srgbClr val="17212B"/>
+              <a:defRPr sz="2100" b="1">
+                <a:solidFill>
+                  <a:srgbClr val="0B6172"/>
                 </a:solidFill>
                 <a:latin typeface="Malgun Gothic"/>
                 <a:ea typeface="Malgun Gothic"/>
@@ -11168,25 +11163,25 @@
               </a:defRPr>
             </a:pPr>
             <a:r>
-              <a:rPr sz="2475" b="1">
-                <a:solidFill>
-                  <a:srgbClr val="17212B"/>
+              <a:rPr sz="2100" b="1">
+                <a:solidFill>
+                  <a:srgbClr val="0B6172"/>
                 </a:solidFill>
                 <a:latin typeface="Malgun Gothic"/>
                 <a:ea typeface="Malgun Gothic"/>
                 <a:cs typeface="Malgun Gothic"/>
               </a:rPr>
-              <a:t>CLI</a:t>
+              <a:t>구현 · 호출 경로</a:t>
             </a:r>
           </a:p>
         </p:txBody>
       </p:sp>
       <p:sp>
         <p:nvSpPr>
-          <p:cNvPr id="10" name="입력은 어떻게 받나?">
+          <p:cNvPr id="10" name="CLI → 처리 흐름 → 연산">
             <a:extLst xmlns:a="http://schemas.openxmlformats.org/drawingml/2006/main">
               <a:ext uri="{FF2B5EF4-FFF2-40B4-BE49-F238E27FC236}">
-                <a16:creationId xmlns:a16="http://schemas.microsoft.com/office/drawing/2014/main" id="{F2EB3C2F-3ED9-4815-9928-56598E1C87F2}"/>
+                <a16:creationId xmlns:a16="http://schemas.microsoft.com/office/drawing/2014/main" id="{EFB894D7-24E9-4B46-B0F0-BE41CABE6705}"/>
               </a:ext>
             </a:extLst>
           </p:cNvPr>
@@ -11197,8 +11192,8 @@
         </p:nvSpPr>
         <p:spPr>
           <a:xfrm xmlns:a="http://schemas.openxmlformats.org/drawingml/2006/main">
-            <a:off x="838200" y="3648075"/>
-            <a:ext cx="2971800" cy="342900"/>
+            <a:off x="8096250" y="2705100"/>
+            <a:ext cx="3486150" cy="342900"/>
           </a:xfrm>
           <a:prstGeom xmlns:a="http://schemas.openxmlformats.org/drawingml/2006/main" prst="rect">
             <a:avLst/>
@@ -11214,7 +11209,7 @@
           </a:bodyPr>
           <a:lstStyle xmlns:a="http://schemas.openxmlformats.org/drawingml/2006/main">
             <a:defPPr algn="l">
-              <a:defRPr sz="2100" b="0">
+              <a:defRPr sz="1800" b="0">
                 <a:solidFill>
                   <a:srgbClr val="4D5A68"/>
                 </a:solidFill>
@@ -11224,7 +11219,7 @@
               </a:defRPr>
             </a:defPPr>
             <a:lvl1pPr algn="l">
-              <a:defRPr sz="2100" b="0">
+              <a:defRPr sz="1800" b="0">
                 <a:solidFill>
                   <a:srgbClr val="4D5A68"/>
                 </a:solidFill>
@@ -11234,7 +11229,7 @@
               </a:defRPr>
             </a:lvl1pPr>
             <a:lvl2pPr algn="l">
-              <a:defRPr sz="2100" b="0">
+              <a:defRPr sz="1800" b="0">
                 <a:solidFill>
                   <a:srgbClr val="4D5A68"/>
                 </a:solidFill>
@@ -11244,7 +11239,7 @@
               </a:defRPr>
             </a:lvl2pPr>
             <a:lvl3pPr algn="l">
-              <a:defRPr sz="2100" b="0">
+              <a:defRPr sz="1800" b="0">
                 <a:solidFill>
                   <a:srgbClr val="4D5A68"/>
                 </a:solidFill>
@@ -11254,7 +11249,7 @@
               </a:defRPr>
             </a:lvl3pPr>
             <a:lvl4pPr algn="l">
-              <a:defRPr sz="2100" b="0">
+              <a:defRPr sz="1800" b="0">
                 <a:solidFill>
                   <a:srgbClr val="4D5A68"/>
                 </a:solidFill>
@@ -11264,7 +11259,7 @@
               </a:defRPr>
             </a:lvl4pPr>
             <a:lvl5pPr algn="l">
-              <a:defRPr sz="2100" b="0">
+              <a:defRPr sz="1800" b="0">
                 <a:solidFill>
                   <a:srgbClr val="4D5A68"/>
                 </a:solidFill>
@@ -11274,7 +11269,7 @@
               </a:defRPr>
             </a:lvl5pPr>
             <a:lvl6pPr algn="l">
-              <a:defRPr sz="2100" b="0">
+              <a:defRPr sz="1800" b="0">
                 <a:solidFill>
                   <a:srgbClr val="4D5A68"/>
                 </a:solidFill>
@@ -11284,7 +11279,7 @@
               </a:defRPr>
             </a:lvl6pPr>
             <a:lvl7pPr algn="l">
-              <a:defRPr sz="2100" b="0">
+              <a:defRPr sz="1800" b="0">
                 <a:solidFill>
                   <a:srgbClr val="4D5A68"/>
                 </a:solidFill>
@@ -11294,7 +11289,7 @@
               </a:defRPr>
             </a:lvl7pPr>
             <a:lvl8pPr algn="l">
-              <a:defRPr sz="2100" b="0">
+              <a:defRPr sz="1800" b="0">
                 <a:solidFill>
                   <a:srgbClr val="4D5A68"/>
                 </a:solidFill>
@@ -11304,7 +11299,7 @@
               </a:defRPr>
             </a:lvl8pPr>
             <a:lvl9pPr algn="l">
-              <a:defRPr sz="2100" b="0">
+              <a:defRPr sz="1800" b="0">
                 <a:solidFill>
                   <a:srgbClr val="4D5A68"/>
                 </a:solidFill>
@@ -11316,7 +11311,7 @@
           </a:lstStyle>
           <a:p xmlns:a="http://schemas.openxmlformats.org/drawingml/2006/main">
             <a:pPr algn="l">
-              <a:defRPr sz="2100" b="0">
+              <a:defRPr sz="1800" b="0">
                 <a:solidFill>
                   <a:srgbClr val="4D5A68"/>
                 </a:solidFill>
@@ -11326,7 +11321,7 @@
               </a:defRPr>
             </a:pPr>
             <a:r>
-              <a:rPr sz="2100" b="0">
+              <a:rPr sz="1800" b="0">
                 <a:solidFill>
                   <a:srgbClr val="4D5A68"/>
                 </a:solidFill>
@@ -11334,17 +11329,17 @@
                 <a:ea typeface="Malgun Gothic"/>
                 <a:cs typeface="Malgun Gothic"/>
               </a:rPr>
-              <a:t>입력은 어떻게 받나?</a:t>
+              <a:t>CLI → 처리 흐름 → 연산</a:t>
             </a:r>
           </a:p>
         </p:txBody>
       </p:sp>
       <p:sp>
         <p:nvSpPr>
-          <p:cNvPr id="11" name="">
+          <p:cNvPr id="11" name="테스트">
             <a:extLst xmlns:a="http://schemas.openxmlformats.org/drawingml/2006/main">
               <a:ext uri="{FF2B5EF4-FFF2-40B4-BE49-F238E27FC236}">
-                <a16:creationId xmlns:a16="http://schemas.microsoft.com/office/drawing/2014/main" id="{DD165A6B-0CBE-40B2-A3CF-00C0C285173D}"/>
+                <a16:creationId xmlns:a16="http://schemas.microsoft.com/office/drawing/2014/main" id="{2920A941-A578-4C5B-B130-547B3284560F}"/>
               </a:ext>
             </a:extLst>
           </p:cNvPr>
@@ -11355,71 +11350,8 @@
         </p:nvSpPr>
         <p:spPr>
           <a:xfrm xmlns:a="http://schemas.openxmlformats.org/drawingml/2006/main">
-            <a:off x="4105275" y="3448050"/>
-            <a:ext cx="219075" cy="171450"/>
-          </a:xfrm>
-          <a:prstGeom xmlns:a="http://schemas.openxmlformats.org/drawingml/2006/main" prst="rightArrow">
-            <a:avLst/>
-          </a:prstGeom>
-          <a:solidFill xmlns:a="http://schemas.openxmlformats.org/drawingml/2006/main">
-            <a:srgbClr val="0B6172"/>
-          </a:solidFill>
-          <a:ln xmlns:a="http://schemas.openxmlformats.org/drawingml/2006/main" w="0">
-            <a:noFill/>
-          </a:ln>
-        </p:spPr>
-      </p:sp>
-      <p:sp>
-        <p:nvSpPr>
-          <p:cNvPr id="12" name="">
-            <a:extLst xmlns:a="http://schemas.openxmlformats.org/drawingml/2006/main">
-              <a:ext uri="{FF2B5EF4-FFF2-40B4-BE49-F238E27FC236}">
-                <a16:creationId xmlns:a16="http://schemas.microsoft.com/office/drawing/2014/main" id="{3D63E960-787B-4993-B5AB-C133C8CB6DE3}"/>
-              </a:ext>
-            </a:extLst>
-          </p:cNvPr>
-          <p:cNvSpPr>
-            <a:spLocks xmlns:a="http://schemas.openxmlformats.org/drawingml/2006/main" noGrp="1"/>
-          </p:cNvSpPr>
-          <p:nvPr/>
-        </p:nvSpPr>
-        <p:spPr>
-          <a:xfrm xmlns:a="http://schemas.openxmlformats.org/drawingml/2006/main">
-            <a:off x="4381500" y="2981325"/>
-            <a:ext cx="3429000" cy="1200150"/>
-          </a:xfrm>
-          <a:prstGeom xmlns:a="http://schemas.openxmlformats.org/drawingml/2006/main" prst="rect">
-            <a:avLst/>
-          </a:prstGeom>
-          <a:solidFill xmlns:a="http://schemas.openxmlformats.org/drawingml/2006/main">
-            <a:srgbClr val="FFFFFF"/>
-          </a:solidFill>
-          <a:ln xmlns:a="http://schemas.openxmlformats.org/drawingml/2006/main" w="9525">
-            <a:solidFill>
-              <a:srgbClr val="C7D0DA"/>
-            </a:solidFill>
-            <a:prstDash val="solid"/>
-          </a:ln>
-        </p:spPr>
-      </p:sp>
-      <p:sp>
-        <p:nvSpPr>
-          <p:cNvPr id="13" name="처리 흐름">
-            <a:extLst xmlns:a="http://schemas.openxmlformats.org/drawingml/2006/main">
-              <a:ext uri="{FF2B5EF4-FFF2-40B4-BE49-F238E27FC236}">
-                <a16:creationId xmlns:a16="http://schemas.microsoft.com/office/drawing/2014/main" id="{CBD3D4F9-F692-42D1-BB9B-18ABC532F4DB}"/>
-              </a:ext>
-            </a:extLst>
-          </p:cNvPr>
-          <p:cNvSpPr>
-            <a:spLocks xmlns:a="http://schemas.openxmlformats.org/drawingml/2006/main" noGrp="1"/>
-          </p:cNvSpPr>
-          <p:nvPr/>
-        </p:nvSpPr>
-        <p:spPr>
-          <a:xfrm xmlns:a="http://schemas.openxmlformats.org/drawingml/2006/main">
-            <a:off x="4610100" y="3133725"/>
-            <a:ext cx="2971800" cy="390525"/>
+            <a:off x="8096250" y="3333750"/>
+            <a:ext cx="3486150" cy="361950"/>
           </a:xfrm>
           <a:prstGeom xmlns:a="http://schemas.openxmlformats.org/drawingml/2006/main" prst="rect">
             <a:avLst/>
@@ -11435,9 +11367,9 @@
           </a:bodyPr>
           <a:lstStyle xmlns:a="http://schemas.openxmlformats.org/drawingml/2006/main">
             <a:defPPr algn="l">
-              <a:defRPr sz="2475" b="1">
-                <a:solidFill>
-                  <a:srgbClr val="17212B"/>
+              <a:defRPr sz="2100" b="1">
+                <a:solidFill>
+                  <a:srgbClr val="0B6172"/>
                 </a:solidFill>
                 <a:latin typeface="Malgun Gothic"/>
                 <a:ea typeface="Malgun Gothic"/>
@@ -11445,9 +11377,9 @@
               </a:defRPr>
             </a:defPPr>
             <a:lvl1pPr algn="l">
-              <a:defRPr sz="2475" b="1">
-                <a:solidFill>
-                  <a:srgbClr val="17212B"/>
+              <a:defRPr sz="2100" b="1">
+                <a:solidFill>
+                  <a:srgbClr val="0B6172"/>
                 </a:solidFill>
                 <a:latin typeface="Malgun Gothic"/>
                 <a:ea typeface="Malgun Gothic"/>
@@ -11455,9 +11387,9 @@
               </a:defRPr>
             </a:lvl1pPr>
             <a:lvl2pPr algn="l">
-              <a:defRPr sz="2475" b="1">
-                <a:solidFill>
-                  <a:srgbClr val="17212B"/>
+              <a:defRPr sz="2100" b="1">
+                <a:solidFill>
+                  <a:srgbClr val="0B6172"/>
                 </a:solidFill>
                 <a:latin typeface="Malgun Gothic"/>
                 <a:ea typeface="Malgun Gothic"/>
@@ -11465,9 +11397,9 @@
               </a:defRPr>
             </a:lvl2pPr>
             <a:lvl3pPr algn="l">
-              <a:defRPr sz="2475" b="1">
-                <a:solidFill>
-                  <a:srgbClr val="17212B"/>
+              <a:defRPr sz="2100" b="1">
+                <a:solidFill>
+                  <a:srgbClr val="0B6172"/>
                 </a:solidFill>
                 <a:latin typeface="Malgun Gothic"/>
                 <a:ea typeface="Malgun Gothic"/>
@@ -11475,9 +11407,9 @@
               </a:defRPr>
             </a:lvl3pPr>
             <a:lvl4pPr algn="l">
-              <a:defRPr sz="2475" b="1">
-                <a:solidFill>
-                  <a:srgbClr val="17212B"/>
+              <a:defRPr sz="2100" b="1">
+                <a:solidFill>
+                  <a:srgbClr val="0B6172"/>
                 </a:solidFill>
                 <a:latin typeface="Malgun Gothic"/>
                 <a:ea typeface="Malgun Gothic"/>
@@ -11485,9 +11417,9 @@
               </a:defRPr>
             </a:lvl4pPr>
             <a:lvl5pPr algn="l">
-              <a:defRPr sz="2475" b="1">
-                <a:solidFill>
-                  <a:srgbClr val="17212B"/>
+              <a:defRPr sz="2100" b="1">
+                <a:solidFill>
+                  <a:srgbClr val="0B6172"/>
                 </a:solidFill>
                 <a:latin typeface="Malgun Gothic"/>
                 <a:ea typeface="Malgun Gothic"/>
@@ -11495,9 +11427,9 @@
               </a:defRPr>
             </a:lvl5pPr>
             <a:lvl6pPr algn="l">
-              <a:defRPr sz="2475" b="1">
-                <a:solidFill>
-                  <a:srgbClr val="17212B"/>
+              <a:defRPr sz="2100" b="1">
+                <a:solidFill>
+                  <a:srgbClr val="0B6172"/>
                 </a:solidFill>
                 <a:latin typeface="Malgun Gothic"/>
                 <a:ea typeface="Malgun Gothic"/>
@@ -11505,9 +11437,9 @@
               </a:defRPr>
             </a:lvl6pPr>
             <a:lvl7pPr algn="l">
-              <a:defRPr sz="2475" b="1">
-                <a:solidFill>
-                  <a:srgbClr val="17212B"/>
+              <a:defRPr sz="2100" b="1">
+                <a:solidFill>
+                  <a:srgbClr val="0B6172"/>
                 </a:solidFill>
                 <a:latin typeface="Malgun Gothic"/>
                 <a:ea typeface="Malgun Gothic"/>
@@ -11515,9 +11447,9 @@
               </a:defRPr>
             </a:lvl7pPr>
             <a:lvl8pPr algn="l">
-              <a:defRPr sz="2475" b="1">
-                <a:solidFill>
-                  <a:srgbClr val="17212B"/>
+              <a:defRPr sz="2100" b="1">
+                <a:solidFill>
+                  <a:srgbClr val="0B6172"/>
                 </a:solidFill>
                 <a:latin typeface="Malgun Gothic"/>
                 <a:ea typeface="Malgun Gothic"/>
@@ -11525,9 +11457,9 @@
               </a:defRPr>
             </a:lvl8pPr>
             <a:lvl9pPr algn="l">
-              <a:defRPr sz="2475" b="1">
-                <a:solidFill>
-                  <a:srgbClr val="17212B"/>
+              <a:defRPr sz="2100" b="1">
+                <a:solidFill>
+                  <a:srgbClr val="0B6172"/>
                 </a:solidFill>
                 <a:latin typeface="Malgun Gothic"/>
                 <a:ea typeface="Malgun Gothic"/>
@@ -11537,9 +11469,9 @@
           </a:lstStyle>
           <a:p xmlns:a="http://schemas.openxmlformats.org/drawingml/2006/main">
             <a:pPr algn="l">
-              <a:defRPr sz="2475" b="1">
-                <a:solidFill>
-                  <a:srgbClr val="17212B"/>
+              <a:defRPr sz="2100" b="1">
+                <a:solidFill>
+                  <a:srgbClr val="0B6172"/>
                 </a:solidFill>
                 <a:latin typeface="Malgun Gothic"/>
                 <a:ea typeface="Malgun Gothic"/>
@@ -11547,25 +11479,25 @@
               </a:defRPr>
             </a:pPr>
             <a:r>
-              <a:rPr sz="2475" b="1">
-                <a:solidFill>
-                  <a:srgbClr val="17212B"/>
+              <a:rPr sz="2100" b="1">
+                <a:solidFill>
+                  <a:srgbClr val="0B6172"/>
                 </a:solidFill>
                 <a:latin typeface="Malgun Gothic"/>
                 <a:ea typeface="Malgun Gothic"/>
                 <a:cs typeface="Malgun Gothic"/>
               </a:rPr>
-              <a:t>처리 흐름</a:t>
+              <a:t>테스트</a:t>
             </a:r>
           </a:p>
         </p:txBody>
       </p:sp>
       <p:sp>
         <p:nvSpPr>
-          <p:cNvPr id="14" name="어떤 연산을 호출하나?">
+          <p:cNvPr id="12" name="어떤 조건에서 실패했나?">
             <a:extLst xmlns:a="http://schemas.openxmlformats.org/drawingml/2006/main">
               <a:ext uri="{FF2B5EF4-FFF2-40B4-BE49-F238E27FC236}">
-                <a16:creationId xmlns:a16="http://schemas.microsoft.com/office/drawing/2014/main" id="{58B50DFE-C171-4EAA-9240-5CB7BA403ECE}"/>
+                <a16:creationId xmlns:a16="http://schemas.microsoft.com/office/drawing/2014/main" id="{606DEFAE-F6A4-4412-8F93-EAB43071C812}"/>
               </a:ext>
             </a:extLst>
           </p:cNvPr>
@@ -11576,8 +11508,8 @@
         </p:nvSpPr>
         <p:spPr>
           <a:xfrm xmlns:a="http://schemas.openxmlformats.org/drawingml/2006/main">
-            <a:off x="4610100" y="3648075"/>
-            <a:ext cx="2971800" cy="342900"/>
+            <a:off x="8096250" y="3743325"/>
+            <a:ext cx="3486150" cy="342900"/>
           </a:xfrm>
           <a:prstGeom xmlns:a="http://schemas.openxmlformats.org/drawingml/2006/main" prst="rect">
             <a:avLst/>
@@ -11593,7 +11525,7 @@
           </a:bodyPr>
           <a:lstStyle xmlns:a="http://schemas.openxmlformats.org/drawingml/2006/main">
             <a:defPPr algn="l">
-              <a:defRPr sz="2100" b="0">
+              <a:defRPr sz="1800" b="0">
                 <a:solidFill>
                   <a:srgbClr val="4D5A68"/>
                 </a:solidFill>
@@ -11603,7 +11535,7 @@
               </a:defRPr>
             </a:defPPr>
             <a:lvl1pPr algn="l">
-              <a:defRPr sz="2100" b="0">
+              <a:defRPr sz="1800" b="0">
                 <a:solidFill>
                   <a:srgbClr val="4D5A68"/>
                 </a:solidFill>
@@ -11613,7 +11545,7 @@
               </a:defRPr>
             </a:lvl1pPr>
             <a:lvl2pPr algn="l">
-              <a:defRPr sz="2100" b="0">
+              <a:defRPr sz="1800" b="0">
                 <a:solidFill>
                   <a:srgbClr val="4D5A68"/>
                 </a:solidFill>
@@ -11623,7 +11555,7 @@
               </a:defRPr>
             </a:lvl2pPr>
             <a:lvl3pPr algn="l">
-              <a:defRPr sz="2100" b="0">
+              <a:defRPr sz="1800" b="0">
                 <a:solidFill>
                   <a:srgbClr val="4D5A68"/>
                 </a:solidFill>
@@ -11633,7 +11565,7 @@
               </a:defRPr>
             </a:lvl3pPr>
             <a:lvl4pPr algn="l">
-              <a:defRPr sz="2100" b="0">
+              <a:defRPr sz="1800" b="0">
                 <a:solidFill>
                   <a:srgbClr val="4D5A68"/>
                 </a:solidFill>
@@ -11643,7 +11575,7 @@
               </a:defRPr>
             </a:lvl4pPr>
             <a:lvl5pPr algn="l">
-              <a:defRPr sz="2100" b="0">
+              <a:defRPr sz="1800" b="0">
                 <a:solidFill>
                   <a:srgbClr val="4D5A68"/>
                 </a:solidFill>
@@ -11653,7 +11585,7 @@
               </a:defRPr>
             </a:lvl5pPr>
             <a:lvl6pPr algn="l">
-              <a:defRPr sz="2100" b="0">
+              <a:defRPr sz="1800" b="0">
                 <a:solidFill>
                   <a:srgbClr val="4D5A68"/>
                 </a:solidFill>
@@ -11663,7 +11595,7 @@
               </a:defRPr>
             </a:lvl6pPr>
             <a:lvl7pPr algn="l">
-              <a:defRPr sz="2100" b="0">
+              <a:defRPr sz="1800" b="0">
                 <a:solidFill>
                   <a:srgbClr val="4D5A68"/>
                 </a:solidFill>
@@ -11673,7 +11605,7 @@
               </a:defRPr>
             </a:lvl7pPr>
             <a:lvl8pPr algn="l">
-              <a:defRPr sz="2100" b="0">
+              <a:defRPr sz="1800" b="0">
                 <a:solidFill>
                   <a:srgbClr val="4D5A68"/>
                 </a:solidFill>
@@ -11683,7 +11615,7 @@
               </a:defRPr>
             </a:lvl8pPr>
             <a:lvl9pPr algn="l">
-              <a:defRPr sz="2100" b="0">
+              <a:defRPr sz="1800" b="0">
                 <a:solidFill>
                   <a:srgbClr val="4D5A68"/>
                 </a:solidFill>
@@ -11695,7 +11627,7 @@
           </a:lstStyle>
           <a:p xmlns:a="http://schemas.openxmlformats.org/drawingml/2006/main">
             <a:pPr algn="l">
-              <a:defRPr sz="2100" b="0">
+              <a:defRPr sz="1800" b="0">
                 <a:solidFill>
                   <a:srgbClr val="4D5A68"/>
                 </a:solidFill>
@@ -11705,7 +11637,7 @@
               </a:defRPr>
             </a:pPr>
             <a:r>
-              <a:rPr sz="2100" b="0">
+              <a:rPr sz="1800" b="0">
                 <a:solidFill>
                   <a:srgbClr val="4D5A68"/>
                 </a:solidFill>
@@ -11713,17 +11645,17 @@
                 <a:ea typeface="Malgun Gothic"/>
                 <a:cs typeface="Malgun Gothic"/>
               </a:rPr>
-              <a:t>어떤 연산을 호출하나?</a:t>
+              <a:t>어떤 조건에서 실패했나?</a:t>
             </a:r>
           </a:p>
         </p:txBody>
       </p:sp>
       <p:sp>
         <p:nvSpPr>
-          <p:cNvPr id="15" name="">
+          <p:cNvPr id="13" name="계약">
             <a:extLst xmlns:a="http://schemas.openxmlformats.org/drawingml/2006/main">
               <a:ext uri="{FF2B5EF4-FFF2-40B4-BE49-F238E27FC236}">
-                <a16:creationId xmlns:a16="http://schemas.microsoft.com/office/drawing/2014/main" id="{0F7F459F-01C0-4876-AA36-2EDAADC229CA}"/>
+                <a16:creationId xmlns:a16="http://schemas.microsoft.com/office/drawing/2014/main" id="{00F20D52-212C-489C-A04D-1B77FAEAF952}"/>
               </a:ext>
             </a:extLst>
           </p:cNvPr>
@@ -11734,71 +11666,8 @@
         </p:nvSpPr>
         <p:spPr>
           <a:xfrm xmlns:a="http://schemas.openxmlformats.org/drawingml/2006/main">
-            <a:off x="7877175" y="3448050"/>
-            <a:ext cx="219075" cy="171450"/>
-          </a:xfrm>
-          <a:prstGeom xmlns:a="http://schemas.openxmlformats.org/drawingml/2006/main" prst="rightArrow">
-            <a:avLst/>
-          </a:prstGeom>
-          <a:solidFill xmlns:a="http://schemas.openxmlformats.org/drawingml/2006/main">
-            <a:srgbClr val="0B6172"/>
-          </a:solidFill>
-          <a:ln xmlns:a="http://schemas.openxmlformats.org/drawingml/2006/main" w="0">
-            <a:noFill/>
-          </a:ln>
-        </p:spPr>
-      </p:sp>
-      <p:sp>
-        <p:nvSpPr>
-          <p:cNvPr id="16" name="">
-            <a:extLst xmlns:a="http://schemas.openxmlformats.org/drawingml/2006/main">
-              <a:ext uri="{FF2B5EF4-FFF2-40B4-BE49-F238E27FC236}">
-                <a16:creationId xmlns:a16="http://schemas.microsoft.com/office/drawing/2014/main" id="{2DB830D5-0934-4335-BD02-2BBABB1E27C9}"/>
-              </a:ext>
-            </a:extLst>
-          </p:cNvPr>
-          <p:cNvSpPr>
-            <a:spLocks xmlns:a="http://schemas.openxmlformats.org/drawingml/2006/main" noGrp="1"/>
-          </p:cNvSpPr>
-          <p:nvPr/>
-        </p:nvSpPr>
-        <p:spPr>
-          <a:xfrm xmlns:a="http://schemas.openxmlformats.org/drawingml/2006/main">
-            <a:off x="8153400" y="2981325"/>
-            <a:ext cx="3429000" cy="1200150"/>
-          </a:xfrm>
-          <a:prstGeom xmlns:a="http://schemas.openxmlformats.org/drawingml/2006/main" prst="rect">
-            <a:avLst/>
-          </a:prstGeom>
-          <a:solidFill xmlns:a="http://schemas.openxmlformats.org/drawingml/2006/main">
-            <a:srgbClr val="E0EFF0"/>
-          </a:solidFill>
-          <a:ln xmlns:a="http://schemas.openxmlformats.org/drawingml/2006/main" w="9525">
-            <a:solidFill>
-              <a:srgbClr val="C7D0DA"/>
-            </a:solidFill>
-            <a:prstDash val="solid"/>
-          </a:ln>
-        </p:spPr>
-      </p:sp>
-      <p:sp>
-        <p:nvSpPr>
-          <p:cNvPr id="17" name="이미지 연산">
-            <a:extLst xmlns:a="http://schemas.openxmlformats.org/drawingml/2006/main">
-              <a:ext uri="{FF2B5EF4-FFF2-40B4-BE49-F238E27FC236}">
-                <a16:creationId xmlns:a16="http://schemas.microsoft.com/office/drawing/2014/main" id="{0A6C6DA3-5BBD-4D0E-A798-62F0384106A9}"/>
-              </a:ext>
-            </a:extLst>
-          </p:cNvPr>
-          <p:cNvSpPr>
-            <a:spLocks xmlns:a="http://schemas.openxmlformats.org/drawingml/2006/main" noGrp="1"/>
-          </p:cNvSpPr>
-          <p:nvPr/>
-        </p:nvSpPr>
-        <p:spPr>
-          <a:xfrm xmlns:a="http://schemas.openxmlformats.org/drawingml/2006/main">
-            <a:off x="8382000" y="3133725"/>
-            <a:ext cx="2971800" cy="390525"/>
+            <a:off x="8096250" y="4371975"/>
+            <a:ext cx="3486150" cy="361950"/>
           </a:xfrm>
           <a:prstGeom xmlns:a="http://schemas.openxmlformats.org/drawingml/2006/main" prst="rect">
             <a:avLst/>
@@ -11814,9 +11683,9 @@
           </a:bodyPr>
           <a:lstStyle xmlns:a="http://schemas.openxmlformats.org/drawingml/2006/main">
             <a:defPPr algn="l">
-              <a:defRPr sz="2475" b="1">
-                <a:solidFill>
-                  <a:srgbClr val="17212B"/>
+              <a:defRPr sz="2100" b="1">
+                <a:solidFill>
+                  <a:srgbClr val="0B6172"/>
                 </a:solidFill>
                 <a:latin typeface="Malgun Gothic"/>
                 <a:ea typeface="Malgun Gothic"/>
@@ -11824,9 +11693,9 @@
               </a:defRPr>
             </a:defPPr>
             <a:lvl1pPr algn="l">
-              <a:defRPr sz="2475" b="1">
-                <a:solidFill>
-                  <a:srgbClr val="17212B"/>
+              <a:defRPr sz="2100" b="1">
+                <a:solidFill>
+                  <a:srgbClr val="0B6172"/>
                 </a:solidFill>
                 <a:latin typeface="Malgun Gothic"/>
                 <a:ea typeface="Malgun Gothic"/>
@@ -11834,9 +11703,9 @@
               </a:defRPr>
             </a:lvl1pPr>
             <a:lvl2pPr algn="l">
-              <a:defRPr sz="2475" b="1">
-                <a:solidFill>
-                  <a:srgbClr val="17212B"/>
+              <a:defRPr sz="2100" b="1">
+                <a:solidFill>
+                  <a:srgbClr val="0B6172"/>
                 </a:solidFill>
                 <a:latin typeface="Malgun Gothic"/>
                 <a:ea typeface="Malgun Gothic"/>
@@ -11844,9 +11713,9 @@
               </a:defRPr>
             </a:lvl2pPr>
             <a:lvl3pPr algn="l">
-              <a:defRPr sz="2475" b="1">
-                <a:solidFill>
-                  <a:srgbClr val="17212B"/>
+              <a:defRPr sz="2100" b="1">
+                <a:solidFill>
+                  <a:srgbClr val="0B6172"/>
                 </a:solidFill>
                 <a:latin typeface="Malgun Gothic"/>
                 <a:ea typeface="Malgun Gothic"/>
@@ -11854,9 +11723,9 @@
               </a:defRPr>
             </a:lvl3pPr>
             <a:lvl4pPr algn="l">
-              <a:defRPr sz="2475" b="1">
-                <a:solidFill>
-                  <a:srgbClr val="17212B"/>
+              <a:defRPr sz="2100" b="1">
+                <a:solidFill>
+                  <a:srgbClr val="0B6172"/>
                 </a:solidFill>
                 <a:latin typeface="Malgun Gothic"/>
                 <a:ea typeface="Malgun Gothic"/>
@@ -11864,9 +11733,9 @@
               </a:defRPr>
             </a:lvl4pPr>
             <a:lvl5pPr algn="l">
-              <a:defRPr sz="2475" b="1">
-                <a:solidFill>
-                  <a:srgbClr val="17212B"/>
+              <a:defRPr sz="2100" b="1">
+                <a:solidFill>
+                  <a:srgbClr val="0B6172"/>
                 </a:solidFill>
                 <a:latin typeface="Malgun Gothic"/>
                 <a:ea typeface="Malgun Gothic"/>
@@ -11874,9 +11743,9 @@
               </a:defRPr>
             </a:lvl5pPr>
             <a:lvl6pPr algn="l">
-              <a:defRPr sz="2475" b="1">
-                <a:solidFill>
-                  <a:srgbClr val="17212B"/>
+              <a:defRPr sz="2100" b="1">
+                <a:solidFill>
+                  <a:srgbClr val="0B6172"/>
                 </a:solidFill>
                 <a:latin typeface="Malgun Gothic"/>
                 <a:ea typeface="Malgun Gothic"/>
@@ -11884,9 +11753,9 @@
               </a:defRPr>
             </a:lvl6pPr>
             <a:lvl7pPr algn="l">
-              <a:defRPr sz="2475" b="1">
-                <a:solidFill>
-                  <a:srgbClr val="17212B"/>
+              <a:defRPr sz="2100" b="1">
+                <a:solidFill>
+                  <a:srgbClr val="0B6172"/>
                 </a:solidFill>
                 <a:latin typeface="Malgun Gothic"/>
                 <a:ea typeface="Malgun Gothic"/>
@@ -11894,9 +11763,9 @@
               </a:defRPr>
             </a:lvl7pPr>
             <a:lvl8pPr algn="l">
-              <a:defRPr sz="2475" b="1">
-                <a:solidFill>
-                  <a:srgbClr val="17212B"/>
+              <a:defRPr sz="2100" b="1">
+                <a:solidFill>
+                  <a:srgbClr val="0B6172"/>
                 </a:solidFill>
                 <a:latin typeface="Malgun Gothic"/>
                 <a:ea typeface="Malgun Gothic"/>
@@ -11904,9 +11773,9 @@
               </a:defRPr>
             </a:lvl8pPr>
             <a:lvl9pPr algn="l">
-              <a:defRPr sz="2475" b="1">
-                <a:solidFill>
-                  <a:srgbClr val="17212B"/>
+              <a:defRPr sz="2100" b="1">
+                <a:solidFill>
+                  <a:srgbClr val="0B6172"/>
                 </a:solidFill>
                 <a:latin typeface="Malgun Gothic"/>
                 <a:ea typeface="Malgun Gothic"/>
@@ -11916,9 +11785,9 @@
           </a:lstStyle>
           <a:p xmlns:a="http://schemas.openxmlformats.org/drawingml/2006/main">
             <a:pPr algn="l">
-              <a:defRPr sz="2475" b="1">
-                <a:solidFill>
-                  <a:srgbClr val="17212B"/>
+              <a:defRPr sz="2100" b="1">
+                <a:solidFill>
+                  <a:srgbClr val="0B6172"/>
                 </a:solidFill>
                 <a:latin typeface="Malgun Gothic"/>
                 <a:ea typeface="Malgun Gothic"/>
@@ -11926,25 +11795,25 @@
               </a:defRPr>
             </a:pPr>
             <a:r>
-              <a:rPr sz="2475" b="1">
-                <a:solidFill>
-                  <a:srgbClr val="17212B"/>
+              <a:rPr sz="2100" b="1">
+                <a:solidFill>
+                  <a:srgbClr val="0B6172"/>
                 </a:solidFill>
                 <a:latin typeface="Malgun Gothic"/>
                 <a:ea typeface="Malgun Gothic"/>
                 <a:cs typeface="Malgun Gothic"/>
               </a:rPr>
-              <a:t>이미지 연산</a:t>
+              <a:t>계약</a:t>
             </a:r>
           </a:p>
         </p:txBody>
       </p:sp>
       <p:sp>
         <p:nvSpPr>
-          <p:cNvPr id="18" name="구현은 어떻게 생겼나?">
+          <p:cNvPr id="14" name="원래 기대한 동작은?">
             <a:extLst xmlns:a="http://schemas.openxmlformats.org/drawingml/2006/main">
               <a:ext uri="{FF2B5EF4-FFF2-40B4-BE49-F238E27FC236}">
-                <a16:creationId xmlns:a16="http://schemas.microsoft.com/office/drawing/2014/main" id="{95E7D3E8-ED4C-4849-8E5A-47088D52C280}"/>
+                <a16:creationId xmlns:a16="http://schemas.microsoft.com/office/drawing/2014/main" id="{05EA532B-8889-4B2A-B594-FE56F22014D1}"/>
               </a:ext>
             </a:extLst>
           </p:cNvPr>
@@ -11955,8 +11824,8 @@
         </p:nvSpPr>
         <p:spPr>
           <a:xfrm xmlns:a="http://schemas.openxmlformats.org/drawingml/2006/main">
-            <a:off x="8382000" y="3648075"/>
-            <a:ext cx="2971800" cy="342900"/>
+            <a:off x="8096250" y="4781550"/>
+            <a:ext cx="3486150" cy="342900"/>
           </a:xfrm>
           <a:prstGeom xmlns:a="http://schemas.openxmlformats.org/drawingml/2006/main" prst="rect">
             <a:avLst/>
@@ -11972,7 +11841,7 @@
           </a:bodyPr>
           <a:lstStyle xmlns:a="http://schemas.openxmlformats.org/drawingml/2006/main">
             <a:defPPr algn="l">
-              <a:defRPr sz="2100" b="0">
+              <a:defRPr sz="1800" b="0">
                 <a:solidFill>
                   <a:srgbClr val="4D5A68"/>
                 </a:solidFill>
@@ -11982,7 +11851,7 @@
               </a:defRPr>
             </a:defPPr>
             <a:lvl1pPr algn="l">
-              <a:defRPr sz="2100" b="0">
+              <a:defRPr sz="1800" b="0">
                 <a:solidFill>
                   <a:srgbClr val="4D5A68"/>
                 </a:solidFill>
@@ -11992,7 +11861,7 @@
               </a:defRPr>
             </a:lvl1pPr>
             <a:lvl2pPr algn="l">
-              <a:defRPr sz="2100" b="0">
+              <a:defRPr sz="1800" b="0">
                 <a:solidFill>
                   <a:srgbClr val="4D5A68"/>
                 </a:solidFill>
@@ -12002,7 +11871,7 @@
               </a:defRPr>
             </a:lvl2pPr>
             <a:lvl3pPr algn="l">
-              <a:defRPr sz="2100" b="0">
+              <a:defRPr sz="1800" b="0">
                 <a:solidFill>
                   <a:srgbClr val="4D5A68"/>
                 </a:solidFill>
@@ -12012,7 +11881,7 @@
               </a:defRPr>
             </a:lvl3pPr>
             <a:lvl4pPr algn="l">
-              <a:defRPr sz="2100" b="0">
+              <a:defRPr sz="1800" b="0">
                 <a:solidFill>
                   <a:srgbClr val="4D5A68"/>
                 </a:solidFill>
@@ -12022,7 +11891,7 @@
               </a:defRPr>
             </a:lvl4pPr>
             <a:lvl5pPr algn="l">
-              <a:defRPr sz="2100" b="0">
+              <a:defRPr sz="1800" b="0">
                 <a:solidFill>
                   <a:srgbClr val="4D5A68"/>
                 </a:solidFill>
@@ -12032,7 +11901,7 @@
               </a:defRPr>
             </a:lvl5pPr>
             <a:lvl6pPr algn="l">
-              <a:defRPr sz="2100" b="0">
+              <a:defRPr sz="1800" b="0">
                 <a:solidFill>
                   <a:srgbClr val="4D5A68"/>
                 </a:solidFill>
@@ -12042,7 +11911,7 @@
               </a:defRPr>
             </a:lvl6pPr>
             <a:lvl7pPr algn="l">
-              <a:defRPr sz="2100" b="0">
+              <a:defRPr sz="1800" b="0">
                 <a:solidFill>
                   <a:srgbClr val="4D5A68"/>
                 </a:solidFill>
@@ -12052,7 +11921,7 @@
               </a:defRPr>
             </a:lvl7pPr>
             <a:lvl8pPr algn="l">
-              <a:defRPr sz="2100" b="0">
+              <a:defRPr sz="1800" b="0">
                 <a:solidFill>
                   <a:srgbClr val="4D5A68"/>
                 </a:solidFill>
@@ -12062,7 +11931,7 @@
               </a:defRPr>
             </a:lvl8pPr>
             <a:lvl9pPr algn="l">
-              <a:defRPr sz="2100" b="0">
+              <a:defRPr sz="1800" b="0">
                 <a:solidFill>
                   <a:srgbClr val="4D5A68"/>
                 </a:solidFill>
@@ -12074,7 +11943,7 @@
           </a:lstStyle>
           <a:p xmlns:a="http://schemas.openxmlformats.org/drawingml/2006/main">
             <a:pPr algn="l">
-              <a:defRPr sz="2100" b="0">
+              <a:defRPr sz="1800" b="0">
                 <a:solidFill>
                   <a:srgbClr val="4D5A68"/>
                 </a:solidFill>
@@ -12084,7 +11953,7 @@
               </a:defRPr>
             </a:pPr>
             <a:r>
-              <a:rPr sz="2100" b="0">
+              <a:rPr sz="1800" b="0">
                 <a:solidFill>
                   <a:srgbClr val="4D5A68"/>
                 </a:solidFill>
@@ -12092,17 +11961,17 @@
                 <a:ea typeface="Malgun Gothic"/>
                 <a:cs typeface="Malgun Gothic"/>
               </a:rPr>
-              <a:t>구현은 어떻게 생겼나?</a:t>
+              <a:t>원래 기대한 동작은?</a:t>
             </a:r>
           </a:p>
         </p:txBody>
       </p:sp>
       <p:sp>
         <p:nvSpPr>
-          <p:cNvPr id="19" name="">
+          <p:cNvPr id="15" name="질문에 옮길 자료는?">
             <a:extLst xmlns:a="http://schemas.openxmlformats.org/drawingml/2006/main">
               <a:ext uri="{FF2B5EF4-FFF2-40B4-BE49-F238E27FC236}">
-                <a16:creationId xmlns:a16="http://schemas.microsoft.com/office/drawing/2014/main" id="{7782C34F-9AB7-4B8E-8D4A-CBF7A2345B82}"/>
+                <a16:creationId xmlns:a16="http://schemas.microsoft.com/office/drawing/2014/main" id="{AED84CD0-EAA2-4877-A7F3-97560EE6A595}"/>
               </a:ext>
             </a:extLst>
           </p:cNvPr>
@@ -12113,39 +11982,8 @@
         </p:nvSpPr>
         <p:spPr>
           <a:xfrm xmlns:a="http://schemas.openxmlformats.org/drawingml/2006/main">
-            <a:off x="609600" y="4581525"/>
-            <a:ext cx="10972800" cy="0"/>
-          </a:xfrm>
-          <a:prstGeom xmlns:a="http://schemas.openxmlformats.org/drawingml/2006/main" prst="line">
-            <a:avLst/>
-          </a:prstGeom>
-          <a:noFill xmlns:a="http://schemas.openxmlformats.org/drawingml/2006/main"/>
-          <a:ln xmlns:a="http://schemas.openxmlformats.org/drawingml/2006/main" w="9525">
-            <a:solidFill>
-              <a:srgbClr val="C7D0DA"/>
-            </a:solidFill>
-            <a:prstDash val="solid"/>
-          </a:ln>
-        </p:spPr>
-      </p:sp>
-      <p:sp>
-        <p:nvSpPr>
-          <p:cNvPr id="20" name="테스트">
-            <a:extLst xmlns:a="http://schemas.openxmlformats.org/drawingml/2006/main">
-              <a:ext uri="{FF2B5EF4-FFF2-40B4-BE49-F238E27FC236}">
-                <a16:creationId xmlns:a16="http://schemas.microsoft.com/office/drawing/2014/main" id="{934D07B6-4F69-424F-A939-04B3D6DD893B}"/>
-              </a:ext>
-            </a:extLst>
-          </p:cNvPr>
-          <p:cNvSpPr>
-            <a:spLocks xmlns:a="http://schemas.openxmlformats.org/drawingml/2006/main" noGrp="1"/>
-          </p:cNvSpPr>
-          <p:nvPr/>
-        </p:nvSpPr>
-        <p:spPr>
-          <a:xfrm xmlns:a="http://schemas.openxmlformats.org/drawingml/2006/main">
-            <a:off x="609600" y="4876800"/>
-            <a:ext cx="1524000" cy="381000"/>
+            <a:off x="8096250" y="5314950"/>
+            <a:ext cx="3486150" cy="361950"/>
           </a:xfrm>
           <a:prstGeom xmlns:a="http://schemas.openxmlformats.org/drawingml/2006/main" prst="rect">
             <a:avLst/>
@@ -12161,9 +11999,9 @@
           </a:bodyPr>
           <a:lstStyle xmlns:a="http://schemas.openxmlformats.org/drawingml/2006/main">
             <a:defPPr algn="l">
-              <a:defRPr sz="2250" b="1">
-                <a:solidFill>
-                  <a:srgbClr val="0B6172"/>
+              <a:defRPr sz="2025" b="1">
+                <a:solidFill>
+                  <a:srgbClr val="17212B"/>
                 </a:solidFill>
                 <a:latin typeface="Malgun Gothic"/>
                 <a:ea typeface="Malgun Gothic"/>
@@ -12171,9 +12009,9 @@
               </a:defRPr>
             </a:defPPr>
             <a:lvl1pPr algn="l">
-              <a:defRPr sz="2250" b="1">
-                <a:solidFill>
-                  <a:srgbClr val="0B6172"/>
+              <a:defRPr sz="2025" b="1">
+                <a:solidFill>
+                  <a:srgbClr val="17212B"/>
                 </a:solidFill>
                 <a:latin typeface="Malgun Gothic"/>
                 <a:ea typeface="Malgun Gothic"/>
@@ -12181,9 +12019,9 @@
               </a:defRPr>
             </a:lvl1pPr>
             <a:lvl2pPr algn="l">
-              <a:defRPr sz="2250" b="1">
-                <a:solidFill>
-                  <a:srgbClr val="0B6172"/>
+              <a:defRPr sz="2025" b="1">
+                <a:solidFill>
+                  <a:srgbClr val="17212B"/>
                 </a:solidFill>
                 <a:latin typeface="Malgun Gothic"/>
                 <a:ea typeface="Malgun Gothic"/>
@@ -12191,9 +12029,9 @@
               </a:defRPr>
             </a:lvl2pPr>
             <a:lvl3pPr algn="l">
-              <a:defRPr sz="2250" b="1">
-                <a:solidFill>
-                  <a:srgbClr val="0B6172"/>
+              <a:defRPr sz="2025" b="1">
+                <a:solidFill>
+                  <a:srgbClr val="17212B"/>
                 </a:solidFill>
                 <a:latin typeface="Malgun Gothic"/>
                 <a:ea typeface="Malgun Gothic"/>
@@ -12201,9 +12039,9 @@
               </a:defRPr>
             </a:lvl3pPr>
             <a:lvl4pPr algn="l">
-              <a:defRPr sz="2250" b="1">
-                <a:solidFill>
-                  <a:srgbClr val="0B6172"/>
+              <a:defRPr sz="2025" b="1">
+                <a:solidFill>
+                  <a:srgbClr val="17212B"/>
                 </a:solidFill>
                 <a:latin typeface="Malgun Gothic"/>
                 <a:ea typeface="Malgun Gothic"/>
@@ -12211,9 +12049,9 @@
               </a:defRPr>
             </a:lvl4pPr>
             <a:lvl5pPr algn="l">
-              <a:defRPr sz="2250" b="1">
-                <a:solidFill>
-                  <a:srgbClr val="0B6172"/>
+              <a:defRPr sz="2025" b="1">
+                <a:solidFill>
+                  <a:srgbClr val="17212B"/>
                 </a:solidFill>
                 <a:latin typeface="Malgun Gothic"/>
                 <a:ea typeface="Malgun Gothic"/>
@@ -12221,9 +12059,9 @@
               </a:defRPr>
             </a:lvl5pPr>
             <a:lvl6pPr algn="l">
-              <a:defRPr sz="2250" b="1">
-                <a:solidFill>
-                  <a:srgbClr val="0B6172"/>
+              <a:defRPr sz="2025" b="1">
+                <a:solidFill>
+                  <a:srgbClr val="17212B"/>
                 </a:solidFill>
                 <a:latin typeface="Malgun Gothic"/>
                 <a:ea typeface="Malgun Gothic"/>
@@ -12231,9 +12069,9 @@
               </a:defRPr>
             </a:lvl6pPr>
             <a:lvl7pPr algn="l">
-              <a:defRPr sz="2250" b="1">
-                <a:solidFill>
-                  <a:srgbClr val="0B6172"/>
+              <a:defRPr sz="2025" b="1">
+                <a:solidFill>
+                  <a:srgbClr val="17212B"/>
                 </a:solidFill>
                 <a:latin typeface="Malgun Gothic"/>
                 <a:ea typeface="Malgun Gothic"/>
@@ -12241,9 +12079,9 @@
               </a:defRPr>
             </a:lvl7pPr>
             <a:lvl8pPr algn="l">
-              <a:defRPr sz="2250" b="1">
-                <a:solidFill>
-                  <a:srgbClr val="0B6172"/>
+              <a:defRPr sz="2025" b="1">
+                <a:solidFill>
+                  <a:srgbClr val="17212B"/>
                 </a:solidFill>
                 <a:latin typeface="Malgun Gothic"/>
                 <a:ea typeface="Malgun Gothic"/>
@@ -12251,9 +12089,9 @@
               </a:defRPr>
             </a:lvl8pPr>
             <a:lvl9pPr algn="l">
-              <a:defRPr sz="2250" b="1">
-                <a:solidFill>
-                  <a:srgbClr val="0B6172"/>
+              <a:defRPr sz="2025" b="1">
+                <a:solidFill>
+                  <a:srgbClr val="17212B"/>
                 </a:solidFill>
                 <a:latin typeface="Malgun Gothic"/>
                 <a:ea typeface="Malgun Gothic"/>
@@ -12263,9 +12101,9 @@
           </a:lstStyle>
           <a:p xmlns:a="http://schemas.openxmlformats.org/drawingml/2006/main">
             <a:pPr algn="l">
-              <a:defRPr sz="2250" b="1">
-                <a:solidFill>
-                  <a:srgbClr val="0B6172"/>
+              <a:defRPr sz="2025" b="1">
+                <a:solidFill>
+                  <a:srgbClr val="17212B"/>
                 </a:solidFill>
                 <a:latin typeface="Malgun Gothic"/>
                 <a:ea typeface="Malgun Gothic"/>
@@ -12273,489 +12111,15 @@
               </a:defRPr>
             </a:pPr>
             <a:r>
-              <a:rPr sz="2250" b="1">
-                <a:solidFill>
-                  <a:srgbClr val="0B6172"/>
+              <a:rPr sz="2025" b="1">
+                <a:solidFill>
+                  <a:srgbClr val="17212B"/>
                 </a:solidFill>
                 <a:latin typeface="Malgun Gothic"/>
                 <a:ea typeface="Malgun Gothic"/>
                 <a:cs typeface="Malgun Gothic"/>
               </a:rPr>
-              <a:t>테스트</a:t>
-            </a:r>
-          </a:p>
-        </p:txBody>
-      </p:sp>
-      <p:sp>
-        <p:nvSpPr>
-          <p:cNvPr id="21" name="어떤 조건에서 실패했나?">
-            <a:extLst xmlns:a="http://schemas.openxmlformats.org/drawingml/2006/main">
-              <a:ext uri="{FF2B5EF4-FFF2-40B4-BE49-F238E27FC236}">
-                <a16:creationId xmlns:a16="http://schemas.microsoft.com/office/drawing/2014/main" id="{5A3D9022-B80D-4BB4-86A8-8B2903D84FBB}"/>
-              </a:ext>
-            </a:extLst>
-          </p:cNvPr>
-          <p:cNvSpPr>
-            <a:spLocks xmlns:a="http://schemas.openxmlformats.org/drawingml/2006/main" noGrp="1"/>
-          </p:cNvSpPr>
-          <p:nvPr/>
-        </p:nvSpPr>
-        <p:spPr>
-          <a:xfrm xmlns:a="http://schemas.openxmlformats.org/drawingml/2006/main">
-            <a:off x="2181225" y="4876800"/>
-            <a:ext cx="3962400" cy="381000"/>
-          </a:xfrm>
-          <a:prstGeom xmlns:a="http://schemas.openxmlformats.org/drawingml/2006/main" prst="rect">
-            <a:avLst/>
-          </a:prstGeom>
-          <a:noFill xmlns:a="http://schemas.openxmlformats.org/drawingml/2006/main"/>
-          <a:ln xmlns:a="http://schemas.openxmlformats.org/drawingml/2006/main" w="0">
-            <a:noFill/>
-          </a:ln>
-        </p:spPr>
-        <p:txBody>
-          <a:bodyPr xmlns:a="http://schemas.openxmlformats.org/drawingml/2006/main" wrap="none" lIns="0" tIns="0" rIns="0" bIns="0" anchor="ctr">
-            <a:noAutofit/>
-          </a:bodyPr>
-          <a:lstStyle xmlns:a="http://schemas.openxmlformats.org/drawingml/2006/main">
-            <a:defPPr algn="l">
-              <a:defRPr sz="2175" b="0">
-                <a:solidFill>
-                  <a:srgbClr val="17212B"/>
-                </a:solidFill>
-                <a:latin typeface="Malgun Gothic"/>
-                <a:ea typeface="Malgun Gothic"/>
-                <a:cs typeface="Malgun Gothic"/>
-              </a:defRPr>
-            </a:defPPr>
-            <a:lvl1pPr algn="l">
-              <a:defRPr sz="2175" b="0">
-                <a:solidFill>
-                  <a:srgbClr val="17212B"/>
-                </a:solidFill>
-                <a:latin typeface="Malgun Gothic"/>
-                <a:ea typeface="Malgun Gothic"/>
-                <a:cs typeface="Malgun Gothic"/>
-              </a:defRPr>
-            </a:lvl1pPr>
-            <a:lvl2pPr algn="l">
-              <a:defRPr sz="2175" b="0">
-                <a:solidFill>
-                  <a:srgbClr val="17212B"/>
-                </a:solidFill>
-                <a:latin typeface="Malgun Gothic"/>
-                <a:ea typeface="Malgun Gothic"/>
-                <a:cs typeface="Malgun Gothic"/>
-              </a:defRPr>
-            </a:lvl2pPr>
-            <a:lvl3pPr algn="l">
-              <a:defRPr sz="2175" b="0">
-                <a:solidFill>
-                  <a:srgbClr val="17212B"/>
-                </a:solidFill>
-                <a:latin typeface="Malgun Gothic"/>
-                <a:ea typeface="Malgun Gothic"/>
-                <a:cs typeface="Malgun Gothic"/>
-              </a:defRPr>
-            </a:lvl3pPr>
-            <a:lvl4pPr algn="l">
-              <a:defRPr sz="2175" b="0">
-                <a:solidFill>
-                  <a:srgbClr val="17212B"/>
-                </a:solidFill>
-                <a:latin typeface="Malgun Gothic"/>
-                <a:ea typeface="Malgun Gothic"/>
-                <a:cs typeface="Malgun Gothic"/>
-              </a:defRPr>
-            </a:lvl4pPr>
-            <a:lvl5pPr algn="l">
-              <a:defRPr sz="2175" b="0">
-                <a:solidFill>
-                  <a:srgbClr val="17212B"/>
-                </a:solidFill>
-                <a:latin typeface="Malgun Gothic"/>
-                <a:ea typeface="Malgun Gothic"/>
-                <a:cs typeface="Malgun Gothic"/>
-              </a:defRPr>
-            </a:lvl5pPr>
-            <a:lvl6pPr algn="l">
-              <a:defRPr sz="2175" b="0">
-                <a:solidFill>
-                  <a:srgbClr val="17212B"/>
-                </a:solidFill>
-                <a:latin typeface="Malgun Gothic"/>
-                <a:ea typeface="Malgun Gothic"/>
-                <a:cs typeface="Malgun Gothic"/>
-              </a:defRPr>
-            </a:lvl6pPr>
-            <a:lvl7pPr algn="l">
-              <a:defRPr sz="2175" b="0">
-                <a:solidFill>
-                  <a:srgbClr val="17212B"/>
-                </a:solidFill>
-                <a:latin typeface="Malgun Gothic"/>
-                <a:ea typeface="Malgun Gothic"/>
-                <a:cs typeface="Malgun Gothic"/>
-              </a:defRPr>
-            </a:lvl7pPr>
-            <a:lvl8pPr algn="l">
-              <a:defRPr sz="2175" b="0">
-                <a:solidFill>
-                  <a:srgbClr val="17212B"/>
-                </a:solidFill>
-                <a:latin typeface="Malgun Gothic"/>
-                <a:ea typeface="Malgun Gothic"/>
-                <a:cs typeface="Malgun Gothic"/>
-              </a:defRPr>
-            </a:lvl8pPr>
-            <a:lvl9pPr algn="l">
-              <a:defRPr sz="2175" b="0">
-                <a:solidFill>
-                  <a:srgbClr val="17212B"/>
-                </a:solidFill>
-                <a:latin typeface="Malgun Gothic"/>
-                <a:ea typeface="Malgun Gothic"/>
-                <a:cs typeface="Malgun Gothic"/>
-              </a:defRPr>
-            </a:lvl9pPr>
-          </a:lstStyle>
-          <a:p xmlns:a="http://schemas.openxmlformats.org/drawingml/2006/main">
-            <a:pPr algn="l">
-              <a:defRPr sz="2175" b="0">
-                <a:solidFill>
-                  <a:srgbClr val="17212B"/>
-                </a:solidFill>
-                <a:latin typeface="Malgun Gothic"/>
-                <a:ea typeface="Malgun Gothic"/>
-                <a:cs typeface="Malgun Gothic"/>
-              </a:defRPr>
-            </a:pPr>
-            <a:r>
-              <a:rPr sz="2175" b="0">
-                <a:solidFill>
-                  <a:srgbClr val="17212B"/>
-                </a:solidFill>
-                <a:latin typeface="Malgun Gothic"/>
-                <a:ea typeface="Malgun Gothic"/>
-                <a:cs typeface="Malgun Gothic"/>
-              </a:rPr>
-              <a:t>어떤 조건에서 실패했나?</a:t>
-            </a:r>
-          </a:p>
-        </p:txBody>
-      </p:sp>
-      <p:sp>
-        <p:nvSpPr>
-          <p:cNvPr id="22" name="계약">
-            <a:extLst xmlns:a="http://schemas.openxmlformats.org/drawingml/2006/main">
-              <a:ext uri="{FF2B5EF4-FFF2-40B4-BE49-F238E27FC236}">
-                <a16:creationId xmlns:a16="http://schemas.microsoft.com/office/drawing/2014/main" id="{EAF5AB63-9B7B-4E84-AA84-2BCDA14872F4}"/>
-              </a:ext>
-            </a:extLst>
-          </p:cNvPr>
-          <p:cNvSpPr>
-            <a:spLocks xmlns:a="http://schemas.openxmlformats.org/drawingml/2006/main" noGrp="1"/>
-          </p:cNvSpPr>
-          <p:nvPr/>
-        </p:nvSpPr>
-        <p:spPr>
-          <a:xfrm xmlns:a="http://schemas.openxmlformats.org/drawingml/2006/main">
-            <a:off x="6705600" y="4876800"/>
-            <a:ext cx="1047750" cy="381000"/>
-          </a:xfrm>
-          <a:prstGeom xmlns:a="http://schemas.openxmlformats.org/drawingml/2006/main" prst="rect">
-            <a:avLst/>
-          </a:prstGeom>
-          <a:noFill xmlns:a="http://schemas.openxmlformats.org/drawingml/2006/main"/>
-          <a:ln xmlns:a="http://schemas.openxmlformats.org/drawingml/2006/main" w="0">
-            <a:noFill/>
-          </a:ln>
-        </p:spPr>
-        <p:txBody>
-          <a:bodyPr xmlns:a="http://schemas.openxmlformats.org/drawingml/2006/main" wrap="none" lIns="0" tIns="0" rIns="0" bIns="0" anchor="ctr">
-            <a:noAutofit/>
-          </a:bodyPr>
-          <a:lstStyle xmlns:a="http://schemas.openxmlformats.org/drawingml/2006/main">
-            <a:defPPr algn="l">
-              <a:defRPr sz="2250" b="1">
-                <a:solidFill>
-                  <a:srgbClr val="0B6172"/>
-                </a:solidFill>
-                <a:latin typeface="Malgun Gothic"/>
-                <a:ea typeface="Malgun Gothic"/>
-                <a:cs typeface="Malgun Gothic"/>
-              </a:defRPr>
-            </a:defPPr>
-            <a:lvl1pPr algn="l">
-              <a:defRPr sz="2250" b="1">
-                <a:solidFill>
-                  <a:srgbClr val="0B6172"/>
-                </a:solidFill>
-                <a:latin typeface="Malgun Gothic"/>
-                <a:ea typeface="Malgun Gothic"/>
-                <a:cs typeface="Malgun Gothic"/>
-              </a:defRPr>
-            </a:lvl1pPr>
-            <a:lvl2pPr algn="l">
-              <a:defRPr sz="2250" b="1">
-                <a:solidFill>
-                  <a:srgbClr val="0B6172"/>
-                </a:solidFill>
-                <a:latin typeface="Malgun Gothic"/>
-                <a:ea typeface="Malgun Gothic"/>
-                <a:cs typeface="Malgun Gothic"/>
-              </a:defRPr>
-            </a:lvl2pPr>
-            <a:lvl3pPr algn="l">
-              <a:defRPr sz="2250" b="1">
-                <a:solidFill>
-                  <a:srgbClr val="0B6172"/>
-                </a:solidFill>
-                <a:latin typeface="Malgun Gothic"/>
-                <a:ea typeface="Malgun Gothic"/>
-                <a:cs typeface="Malgun Gothic"/>
-              </a:defRPr>
-            </a:lvl3pPr>
-            <a:lvl4pPr algn="l">
-              <a:defRPr sz="2250" b="1">
-                <a:solidFill>
-                  <a:srgbClr val="0B6172"/>
-                </a:solidFill>
-                <a:latin typeface="Malgun Gothic"/>
-                <a:ea typeface="Malgun Gothic"/>
-                <a:cs typeface="Malgun Gothic"/>
-              </a:defRPr>
-            </a:lvl4pPr>
-            <a:lvl5pPr algn="l">
-              <a:defRPr sz="2250" b="1">
-                <a:solidFill>
-                  <a:srgbClr val="0B6172"/>
-                </a:solidFill>
-                <a:latin typeface="Malgun Gothic"/>
-                <a:ea typeface="Malgun Gothic"/>
-                <a:cs typeface="Malgun Gothic"/>
-              </a:defRPr>
-            </a:lvl5pPr>
-            <a:lvl6pPr algn="l">
-              <a:defRPr sz="2250" b="1">
-                <a:solidFill>
-                  <a:srgbClr val="0B6172"/>
-                </a:solidFill>
-                <a:latin typeface="Malgun Gothic"/>
-                <a:ea typeface="Malgun Gothic"/>
-                <a:cs typeface="Malgun Gothic"/>
-              </a:defRPr>
-            </a:lvl6pPr>
-            <a:lvl7pPr algn="l">
-              <a:defRPr sz="2250" b="1">
-                <a:solidFill>
-                  <a:srgbClr val="0B6172"/>
-                </a:solidFill>
-                <a:latin typeface="Malgun Gothic"/>
-                <a:ea typeface="Malgun Gothic"/>
-                <a:cs typeface="Malgun Gothic"/>
-              </a:defRPr>
-            </a:lvl7pPr>
-            <a:lvl8pPr algn="l">
-              <a:defRPr sz="2250" b="1">
-                <a:solidFill>
-                  <a:srgbClr val="0B6172"/>
-                </a:solidFill>
-                <a:latin typeface="Malgun Gothic"/>
-                <a:ea typeface="Malgun Gothic"/>
-                <a:cs typeface="Malgun Gothic"/>
-              </a:defRPr>
-            </a:lvl8pPr>
-            <a:lvl9pPr algn="l">
-              <a:defRPr sz="2250" b="1">
-                <a:solidFill>
-                  <a:srgbClr val="0B6172"/>
-                </a:solidFill>
-                <a:latin typeface="Malgun Gothic"/>
-                <a:ea typeface="Malgun Gothic"/>
-                <a:cs typeface="Malgun Gothic"/>
-              </a:defRPr>
-            </a:lvl9pPr>
-          </a:lstStyle>
-          <a:p xmlns:a="http://schemas.openxmlformats.org/drawingml/2006/main">
-            <a:pPr algn="l">
-              <a:defRPr sz="2250" b="1">
-                <a:solidFill>
-                  <a:srgbClr val="0B6172"/>
-                </a:solidFill>
-                <a:latin typeface="Malgun Gothic"/>
-                <a:ea typeface="Malgun Gothic"/>
-                <a:cs typeface="Malgun Gothic"/>
-              </a:defRPr>
-            </a:pPr>
-            <a:r>
-              <a:rPr sz="2250" b="1">
-                <a:solidFill>
-                  <a:srgbClr val="0B6172"/>
-                </a:solidFill>
-                <a:latin typeface="Malgun Gothic"/>
-                <a:ea typeface="Malgun Gothic"/>
-                <a:cs typeface="Malgun Gothic"/>
-              </a:rPr>
-              <a:t>계약</a:t>
-            </a:r>
-          </a:p>
-        </p:txBody>
-      </p:sp>
-      <p:sp>
-        <p:nvSpPr>
-          <p:cNvPr id="23" name="원래 기대한 동작은?">
-            <a:extLst xmlns:a="http://schemas.openxmlformats.org/drawingml/2006/main">
-              <a:ext uri="{FF2B5EF4-FFF2-40B4-BE49-F238E27FC236}">
-                <a16:creationId xmlns:a16="http://schemas.microsoft.com/office/drawing/2014/main" id="{DA242F5F-855A-4097-A095-30B68471B7EF}"/>
-              </a:ext>
-            </a:extLst>
-          </p:cNvPr>
-          <p:cNvSpPr>
-            <a:spLocks xmlns:a="http://schemas.openxmlformats.org/drawingml/2006/main" noGrp="1"/>
-          </p:cNvSpPr>
-          <p:nvPr/>
-        </p:nvSpPr>
-        <p:spPr>
-          <a:xfrm xmlns:a="http://schemas.openxmlformats.org/drawingml/2006/main">
-            <a:off x="7867650" y="4876800"/>
-            <a:ext cx="3714750" cy="381000"/>
-          </a:xfrm>
-          <a:prstGeom xmlns:a="http://schemas.openxmlformats.org/drawingml/2006/main" prst="rect">
-            <a:avLst/>
-          </a:prstGeom>
-          <a:noFill xmlns:a="http://schemas.openxmlformats.org/drawingml/2006/main"/>
-          <a:ln xmlns:a="http://schemas.openxmlformats.org/drawingml/2006/main" w="0">
-            <a:noFill/>
-          </a:ln>
-        </p:spPr>
-        <p:txBody>
-          <a:bodyPr xmlns:a="http://schemas.openxmlformats.org/drawingml/2006/main" wrap="none" lIns="0" tIns="0" rIns="0" bIns="0" anchor="ctr">
-            <a:noAutofit/>
-          </a:bodyPr>
-          <a:lstStyle xmlns:a="http://schemas.openxmlformats.org/drawingml/2006/main">
-            <a:defPPr algn="l">
-              <a:defRPr sz="2175" b="0">
-                <a:solidFill>
-                  <a:srgbClr val="17212B"/>
-                </a:solidFill>
-                <a:latin typeface="Malgun Gothic"/>
-                <a:ea typeface="Malgun Gothic"/>
-                <a:cs typeface="Malgun Gothic"/>
-              </a:defRPr>
-            </a:defPPr>
-            <a:lvl1pPr algn="l">
-              <a:defRPr sz="2175" b="0">
-                <a:solidFill>
-                  <a:srgbClr val="17212B"/>
-                </a:solidFill>
-                <a:latin typeface="Malgun Gothic"/>
-                <a:ea typeface="Malgun Gothic"/>
-                <a:cs typeface="Malgun Gothic"/>
-              </a:defRPr>
-            </a:lvl1pPr>
-            <a:lvl2pPr algn="l">
-              <a:defRPr sz="2175" b="0">
-                <a:solidFill>
-                  <a:srgbClr val="17212B"/>
-                </a:solidFill>
-                <a:latin typeface="Malgun Gothic"/>
-                <a:ea typeface="Malgun Gothic"/>
-                <a:cs typeface="Malgun Gothic"/>
-              </a:defRPr>
-            </a:lvl2pPr>
-            <a:lvl3pPr algn="l">
-              <a:defRPr sz="2175" b="0">
-                <a:solidFill>
-                  <a:srgbClr val="17212B"/>
-                </a:solidFill>
-                <a:latin typeface="Malgun Gothic"/>
-                <a:ea typeface="Malgun Gothic"/>
-                <a:cs typeface="Malgun Gothic"/>
-              </a:defRPr>
-            </a:lvl3pPr>
-            <a:lvl4pPr algn="l">
-              <a:defRPr sz="2175" b="0">
-                <a:solidFill>
-                  <a:srgbClr val="17212B"/>
-                </a:solidFill>
-                <a:latin typeface="Malgun Gothic"/>
-                <a:ea typeface="Malgun Gothic"/>
-                <a:cs typeface="Malgun Gothic"/>
-              </a:defRPr>
-            </a:lvl4pPr>
-            <a:lvl5pPr algn="l">
-              <a:defRPr sz="2175" b="0">
-                <a:solidFill>
-                  <a:srgbClr val="17212B"/>
-                </a:solidFill>
-                <a:latin typeface="Malgun Gothic"/>
-                <a:ea typeface="Malgun Gothic"/>
-                <a:cs typeface="Malgun Gothic"/>
-              </a:defRPr>
-            </a:lvl5pPr>
-            <a:lvl6pPr algn="l">
-              <a:defRPr sz="2175" b="0">
-                <a:solidFill>
-                  <a:srgbClr val="17212B"/>
-                </a:solidFill>
-                <a:latin typeface="Malgun Gothic"/>
-                <a:ea typeface="Malgun Gothic"/>
-                <a:cs typeface="Malgun Gothic"/>
-              </a:defRPr>
-            </a:lvl6pPr>
-            <a:lvl7pPr algn="l">
-              <a:defRPr sz="2175" b="0">
-                <a:solidFill>
-                  <a:srgbClr val="17212B"/>
-                </a:solidFill>
-                <a:latin typeface="Malgun Gothic"/>
-                <a:ea typeface="Malgun Gothic"/>
-                <a:cs typeface="Malgun Gothic"/>
-              </a:defRPr>
-            </a:lvl7pPr>
-            <a:lvl8pPr algn="l">
-              <a:defRPr sz="2175" b="0">
-                <a:solidFill>
-                  <a:srgbClr val="17212B"/>
-                </a:solidFill>
-                <a:latin typeface="Malgun Gothic"/>
-                <a:ea typeface="Malgun Gothic"/>
-                <a:cs typeface="Malgun Gothic"/>
-              </a:defRPr>
-            </a:lvl8pPr>
-            <a:lvl9pPr algn="l">
-              <a:defRPr sz="2175" b="0">
-                <a:solidFill>
-                  <a:srgbClr val="17212B"/>
-                </a:solidFill>
-                <a:latin typeface="Malgun Gothic"/>
-                <a:ea typeface="Malgun Gothic"/>
-                <a:cs typeface="Malgun Gothic"/>
-              </a:defRPr>
-            </a:lvl9pPr>
-          </a:lstStyle>
-          <a:p xmlns:a="http://schemas.openxmlformats.org/drawingml/2006/main">
-            <a:pPr algn="l">
-              <a:defRPr sz="2175" b="0">
-                <a:solidFill>
-                  <a:srgbClr val="17212B"/>
-                </a:solidFill>
-                <a:latin typeface="Malgun Gothic"/>
-                <a:ea typeface="Malgun Gothic"/>
-                <a:cs typeface="Malgun Gothic"/>
-              </a:defRPr>
-            </a:pPr>
-            <a:r>
-              <a:rPr sz="2175" b="0">
-                <a:solidFill>
-                  <a:srgbClr val="17212B"/>
-                </a:solidFill>
-                <a:latin typeface="Malgun Gothic"/>
-                <a:ea typeface="Malgun Gothic"/>
-                <a:cs typeface="Malgun Gothic"/>
-              </a:rPr>
-              <a:t>원래 기대한 동작은?</a:t>
+              <a:t>질문에 옮길 자료는?</a:t>
             </a:r>
           </a:p>
         </p:txBody>
@@ -12763,7 +12127,7 @@
     </p:spTree>
     <p:extLst>
       <p:ext uri="{BB962C8B-B14F-4D97-AF65-F5344CB8AC3E}">
-        <p14:creationId xmlns:p14="http://schemas.microsoft.com/office/powerpoint/2010/main" val="482290962"/>
+        <p14:creationId xmlns:p14="http://schemas.microsoft.com/office/powerpoint/2010/main" val="1222811546"/>
       </p:ext>
     </p:extLst>
   </p:cSld>
@@ -12794,7 +12158,7 @@
           <p:cNvPr id="13" name="ACT 0 · Repository 조사 관찰">
             <a:extLst xmlns:a="http://schemas.openxmlformats.org/drawingml/2006/main">
               <a:ext uri="{FF2B5EF4-FFF2-40B4-BE49-F238E27FC236}">
-                <a16:creationId xmlns:a16="http://schemas.microsoft.com/office/drawing/2014/main" id="{870E97A9-6A78-4471-B1FF-2ADED3AD836E}"/>
+                <a16:creationId xmlns:a16="http://schemas.microsoft.com/office/drawing/2014/main" id="{0C94E3FA-8A54-4FCF-AF0D-E8560DC5CC83}"/>
               </a:ext>
             </a:extLst>
           </p:cNvPr>
@@ -12952,7 +12316,7 @@
           <p:cNvPr id="2" name="S04">
             <a:extLst xmlns:a="http://schemas.openxmlformats.org/drawingml/2006/main">
               <a:ext uri="{FF2B5EF4-FFF2-40B4-BE49-F238E27FC236}">
-                <a16:creationId xmlns:a16="http://schemas.microsoft.com/office/drawing/2014/main" id="{83CE539E-0BC0-4534-B11A-CF82D43DE9FF}"/>
+                <a16:creationId xmlns:a16="http://schemas.microsoft.com/office/drawing/2014/main" id="{93425AA1-2B1D-4671-99D0-89126C0FD630}"/>
               </a:ext>
             </a:extLst>
           </p:cNvPr>
@@ -13110,7 +12474,7 @@
           <p:cNvPr id="3" name="파일명을 주지 않으면 Agent는 어디부터 볼까?">
             <a:extLst xmlns:a="http://schemas.openxmlformats.org/drawingml/2006/main">
               <a:ext uri="{FF2B5EF4-FFF2-40B4-BE49-F238E27FC236}">
-                <a16:creationId xmlns:a16="http://schemas.microsoft.com/office/drawing/2014/main" id="{BA7AC396-982B-4F91-90E7-DFC026798779}"/>
+                <a16:creationId xmlns:a16="http://schemas.microsoft.com/office/drawing/2014/main" id="{E89C87DE-7F44-4B7A-BFF0-8A2BF94733F6}"/>
               </a:ext>
             </a:extLst>
           </p:cNvPr>
@@ -13268,7 +12632,7 @@
           <p:cNvPr id="4" name="">
             <a:extLst xmlns:a="http://schemas.openxmlformats.org/drawingml/2006/main">
               <a:ext uri="{FF2B5EF4-FFF2-40B4-BE49-F238E27FC236}">
-                <a16:creationId xmlns:a16="http://schemas.microsoft.com/office/drawing/2014/main" id="{D6857545-9336-49B1-8216-2EFB585705AA}"/>
+                <a16:creationId xmlns:a16="http://schemas.microsoft.com/office/drawing/2014/main" id="{63BF2002-FA0F-4655-B6C4-ABDD379380C5}"/>
               </a:ext>
             </a:extLst>
           </p:cNvPr>
@@ -13299,7 +12663,7 @@
           <p:cNvPr id="5" name="TRIAL-001 실제 요청 발췌 · Codex CLI 0.154.0 · macOS · 읽기 전용">
             <a:extLst xmlns:a="http://schemas.openxmlformats.org/drawingml/2006/main">
               <a:ext uri="{FF2B5EF4-FFF2-40B4-BE49-F238E27FC236}">
-                <a16:creationId xmlns:a16="http://schemas.microsoft.com/office/drawing/2014/main" id="{09294517-2C43-4042-954E-86F78C7028AC}"/>
+                <a16:creationId xmlns:a16="http://schemas.microsoft.com/office/drawing/2014/main" id="{1C8ABAD6-F002-4C43-806F-D96E636F02B6}"/>
               </a:ext>
             </a:extLst>
           </p:cNvPr>
@@ -13457,7 +12821,7 @@
           <p:cNvPr id="6" name="과거 단일 실행의 기록을 살펴봅니다. 현재 Desktop 동작은 미검증입니다.">
             <a:extLst xmlns:a="http://schemas.openxmlformats.org/drawingml/2006/main">
               <a:ext uri="{FF2B5EF4-FFF2-40B4-BE49-F238E27FC236}">
-                <a16:creationId xmlns:a16="http://schemas.microsoft.com/office/drawing/2014/main" id="{3CED6BA1-E533-4104-A973-702A261D9206}"/>
+                <a16:creationId xmlns:a16="http://schemas.microsoft.com/office/drawing/2014/main" id="{E7D748CC-038C-4EE7-9008-0C878149FEB3}"/>
               </a:ext>
             </a:extLst>
           </p:cNvPr>
@@ -13615,7 +12979,7 @@
           <p:cNvPr id="7" name="“현재 이 저장소에서 테스트 하나가 실패하고 있다.&#10;실패 원인을 조사해줘. 관련 구현과 호출 경로,&#10;실패하는">
             <a:extLst xmlns:a="http://schemas.openxmlformats.org/drawingml/2006/main">
               <a:ext uri="{FF2B5EF4-FFF2-40B4-BE49-F238E27FC236}">
-                <a16:creationId xmlns:a16="http://schemas.microsoft.com/office/drawing/2014/main" id="{C0030077-35DC-43EC-8416-3914313C8CF4}"/>
+                <a16:creationId xmlns:a16="http://schemas.microsoft.com/office/drawing/2014/main" id="{F33304CB-EA6D-4D18-9FEF-10B2714AEE55}"/>
               </a:ext>
             </a:extLst>
           </p:cNvPr>
@@ -13842,7 +13206,7 @@
           <p:cNvPr id="8" name="">
             <a:extLst xmlns:a="http://schemas.openxmlformats.org/drawingml/2006/main">
               <a:ext uri="{FF2B5EF4-FFF2-40B4-BE49-F238E27FC236}">
-                <a16:creationId xmlns:a16="http://schemas.microsoft.com/office/drawing/2014/main" id="{CC8BED9E-11D6-479E-833A-E0EF9D8D1B7F}"/>
+                <a16:creationId xmlns:a16="http://schemas.microsoft.com/office/drawing/2014/main" id="{3BDA4F60-1E1A-4795-916D-1A43BC8E48BE}"/>
               </a:ext>
             </a:extLst>
           </p:cNvPr>
@@ -13873,7 +13237,7 @@
           <p:cNvPr id="9" name="찾았는지 확인할 세 가지">
             <a:extLst xmlns:a="http://schemas.openxmlformats.org/drawingml/2006/main">
               <a:ext uri="{FF2B5EF4-FFF2-40B4-BE49-F238E27FC236}">
-                <a16:creationId xmlns:a16="http://schemas.microsoft.com/office/drawing/2014/main" id="{0FC283F8-73C6-451C-93D6-506327AF6FC5}"/>
+                <a16:creationId xmlns:a16="http://schemas.microsoft.com/office/drawing/2014/main" id="{D9D3927F-54D8-44B6-A80C-0BE7384D5059}"/>
               </a:ext>
             </a:extLst>
           </p:cNvPr>
@@ -14031,7 +13395,7 @@
           <p:cNvPr id="10" name="01  실패하는 테스트">
             <a:extLst xmlns:a="http://schemas.openxmlformats.org/drawingml/2006/main">
               <a:ext uri="{FF2B5EF4-FFF2-40B4-BE49-F238E27FC236}">
-                <a16:creationId xmlns:a16="http://schemas.microsoft.com/office/drawing/2014/main" id="{71936572-BB34-4ED8-989A-E5D57FD6446D}"/>
+                <a16:creationId xmlns:a16="http://schemas.microsoft.com/office/drawing/2014/main" id="{9F0FC140-FDE4-43AF-9684-75E807966FF4}"/>
               </a:ext>
             </a:extLst>
           </p:cNvPr>
@@ -14189,7 +13553,7 @@
           <p:cNvPr id="11" name="02  관련 구현">
             <a:extLst xmlns:a="http://schemas.openxmlformats.org/drawingml/2006/main">
               <a:ext uri="{FF2B5EF4-FFF2-40B4-BE49-F238E27FC236}">
-                <a16:creationId xmlns:a16="http://schemas.microsoft.com/office/drawing/2014/main" id="{8499124B-9CD3-44B8-8B24-C28767814088}"/>
+                <a16:creationId xmlns:a16="http://schemas.microsoft.com/office/drawing/2014/main" id="{285D67A6-2F13-4D13-A090-DC715DC50182}"/>
               </a:ext>
             </a:extLst>
           </p:cNvPr>
@@ -14347,7 +13711,7 @@
           <p:cNvPr id="12" name="03  제품의 호출 경로">
             <a:extLst xmlns:a="http://schemas.openxmlformats.org/drawingml/2006/main">
               <a:ext uri="{FF2B5EF4-FFF2-40B4-BE49-F238E27FC236}">
-                <a16:creationId xmlns:a16="http://schemas.microsoft.com/office/drawing/2014/main" id="{02D41078-7CBC-4858-AB59-7004CA088818}"/>
+                <a16:creationId xmlns:a16="http://schemas.microsoft.com/office/drawing/2014/main" id="{347F9352-DBDE-45F0-89EF-FA4CFCF091D5}"/>
               </a:ext>
             </a:extLst>
           </p:cNvPr>
@@ -14503,7 +13867,7 @@
     </p:spTree>
     <p:extLst>
       <p:ext uri="{BB962C8B-B14F-4D97-AF65-F5344CB8AC3E}">
-        <p14:creationId xmlns:p14="http://schemas.microsoft.com/office/powerpoint/2010/main" val="1273137831"/>
+        <p14:creationId xmlns:p14="http://schemas.microsoft.com/office/powerpoint/2010/main" val="249993681"/>
       </p:ext>
     </p:extLst>
   </p:cSld>
@@ -14534,7 +13898,7 @@
           <p:cNvPr id="63" name="ACT 0  ·  Repository 탐색">
             <a:extLst xmlns:a="http://schemas.openxmlformats.org/drawingml/2006/main">
               <a:ext uri="{FF2B5EF4-FFF2-40B4-BE49-F238E27FC236}">
-                <a16:creationId xmlns:a16="http://schemas.microsoft.com/office/drawing/2014/main" id="{8518F184-3E73-43DA-88BD-143CF3885CAC}"/>
+                <a16:creationId xmlns:a16="http://schemas.microsoft.com/office/drawing/2014/main" id="{090F1E7B-AC3F-474E-AC57-6BBF7A36D465}"/>
               </a:ext>
             </a:extLst>
           </p:cNvPr>
@@ -14692,7 +14056,7 @@
           <p:cNvPr id="2" name="S05">
             <a:extLst xmlns:a="http://schemas.openxmlformats.org/drawingml/2006/main">
               <a:ext uri="{FF2B5EF4-FFF2-40B4-BE49-F238E27FC236}">
-                <a16:creationId xmlns:a16="http://schemas.microsoft.com/office/drawing/2014/main" id="{5DCCF0F2-4CD9-4B37-8D91-7D661579346A}"/>
+                <a16:creationId xmlns:a16="http://schemas.microsoft.com/office/drawing/2014/main" id="{E2CFC4B5-B1EF-4E68-B7AE-C40E03220E09}"/>
               </a:ext>
             </a:extLst>
           </p:cNvPr>
@@ -14850,7 +14214,7 @@
           <p:cNvPr id="3" name="Agent가 Test와 호출 경로를 찾았다">
             <a:extLst xmlns:a="http://schemas.openxmlformats.org/drawingml/2006/main">
               <a:ext uri="{FF2B5EF4-FFF2-40B4-BE49-F238E27FC236}">
-                <a16:creationId xmlns:a16="http://schemas.microsoft.com/office/drawing/2014/main" id="{A011AC77-0E82-4CE1-A15A-4D14E261FF25}"/>
+                <a16:creationId xmlns:a16="http://schemas.microsoft.com/office/drawing/2014/main" id="{7D7864AB-A953-4429-9689-0084D5401266}"/>
               </a:ext>
             </a:extLst>
           </p:cNvPr>
@@ -15008,7 +14372,7 @@
           <p:cNvPr id="4" name="">
             <a:extLst xmlns:a="http://schemas.openxmlformats.org/drawingml/2006/main">
               <a:ext uri="{FF2B5EF4-FFF2-40B4-BE49-F238E27FC236}">
-                <a16:creationId xmlns:a16="http://schemas.microsoft.com/office/drawing/2014/main" id="{053CCAAD-E6D9-46E3-8A8A-0238D746A431}"/>
+                <a16:creationId xmlns:a16="http://schemas.microsoft.com/office/drawing/2014/main" id="{336FE0C9-A711-43A9-8CC6-359E3CE0CE72}"/>
               </a:ext>
             </a:extLst>
           </p:cNvPr>
@@ -15039,7 +14403,7 @@
           <p:cNvPr id="5" name="TRIAL-001 기록·STATE-00 테스트 재구성  |  Codex CLI 0.154.0 · 읽기 전용">
             <a:extLst xmlns:a="http://schemas.openxmlformats.org/drawingml/2006/main">
               <a:ext uri="{FF2B5EF4-FFF2-40B4-BE49-F238E27FC236}">
-                <a16:creationId xmlns:a16="http://schemas.microsoft.com/office/drawing/2014/main" id="{8909BD09-9120-4284-8BB0-318E9F80FBAF}"/>
+                <a16:creationId xmlns:a16="http://schemas.microsoft.com/office/drawing/2014/main" id="{8EBB4BD6-7E05-45F6-9CF3-9B5718AE64A2}"/>
               </a:ext>
             </a:extLst>
           </p:cNvPr>
@@ -15197,7 +14561,7 @@
           <p:cNvPr id="6" name="실제 실행 화면이 아님 · 이 조사에서는 코드 수정 없음 · 현재 Desktop 동작 미검증">
             <a:extLst xmlns:a="http://schemas.openxmlformats.org/drawingml/2006/main">
               <a:ext uri="{FF2B5EF4-FFF2-40B4-BE49-F238E27FC236}">
-                <a16:creationId xmlns:a16="http://schemas.microsoft.com/office/drawing/2014/main" id="{736FAF93-8F1F-4383-8E24-BD9708564BDD}"/>
+                <a16:creationId xmlns:a16="http://schemas.microsoft.com/office/drawing/2014/main" id="{BBC3DCE3-4C52-435E-82ED-6567189FA892}"/>
               </a:ext>
             </a:extLst>
           </p:cNvPr>
@@ -15355,7 +14719,7 @@
           <p:cNvPr id="7" name="crop(image, 1, 3)">
             <a:extLst xmlns:a="http://schemas.openxmlformats.org/drawingml/2006/main">
               <a:ext uri="{FF2B5EF4-FFF2-40B4-BE49-F238E27FC236}">
-                <a16:creationId xmlns:a16="http://schemas.microsoft.com/office/drawing/2014/main" id="{88D63B04-C9FF-43ED-A023-6370965471FE}"/>
+                <a16:creationId xmlns:a16="http://schemas.microsoft.com/office/drawing/2014/main" id="{6460E3CE-B598-443E-AFB3-5B07821FD00C}"/>
               </a:ext>
             </a:extLst>
           </p:cNvPr>
@@ -15513,7 +14877,7 @@
           <p:cNvPr id="8" name="끝 좌표 3은 포함하지 않는 계약">
             <a:extLst xmlns:a="http://schemas.openxmlformats.org/drawingml/2006/main">
               <a:ext uri="{FF2B5EF4-FFF2-40B4-BE49-F238E27FC236}">
-                <a16:creationId xmlns:a16="http://schemas.microsoft.com/office/drawing/2014/main" id="{2D677F69-3CAC-48E8-A486-D261FFDB1E76}"/>
+                <a16:creationId xmlns:a16="http://schemas.microsoft.com/office/drawing/2014/main" id="{29A31DD0-D499-4D0D-B7BB-AB8450A1AF85}"/>
               </a:ext>
             </a:extLst>
           </p:cNvPr>
@@ -15671,7 +15035,7 @@
           <p:cNvPr id="9" name="입력">
             <a:extLst xmlns:a="http://schemas.openxmlformats.org/drawingml/2006/main">
               <a:ext uri="{FF2B5EF4-FFF2-40B4-BE49-F238E27FC236}">
-                <a16:creationId xmlns:a16="http://schemas.microsoft.com/office/drawing/2014/main" id="{0B41E804-D694-4B0E-86E7-BFC516A096B7}"/>
+                <a16:creationId xmlns:a16="http://schemas.microsoft.com/office/drawing/2014/main" id="{656005C9-4127-40CA-BEC7-6DAF2A7A7807}"/>
               </a:ext>
             </a:extLst>
           </p:cNvPr>
@@ -15829,7 +15193,7 @@
           <p:cNvPr id="10" name="0">
             <a:extLst xmlns:a="http://schemas.openxmlformats.org/drawingml/2006/main">
               <a:ext uri="{FF2B5EF4-FFF2-40B4-BE49-F238E27FC236}">
-                <a16:creationId xmlns:a16="http://schemas.microsoft.com/office/drawing/2014/main" id="{D53B8266-F181-4DFA-A396-B90925895EF2}"/>
+                <a16:creationId xmlns:a16="http://schemas.microsoft.com/office/drawing/2014/main" id="{8115D241-58CA-41A5-843B-20AF1EC8F022}"/>
               </a:ext>
             </a:extLst>
           </p:cNvPr>
@@ -15987,7 +15351,7 @@
           <p:cNvPr id="11" name="1">
             <a:extLst xmlns:a="http://schemas.openxmlformats.org/drawingml/2006/main">
               <a:ext uri="{FF2B5EF4-FFF2-40B4-BE49-F238E27FC236}">
-                <a16:creationId xmlns:a16="http://schemas.microsoft.com/office/drawing/2014/main" id="{507702EC-5944-421C-BDB8-E2776D6C7909}"/>
+                <a16:creationId xmlns:a16="http://schemas.microsoft.com/office/drawing/2014/main" id="{83EFCE0B-F3EE-42BE-B320-15BE3F75771E}"/>
               </a:ext>
             </a:extLst>
           </p:cNvPr>
@@ -16145,7 +15509,7 @@
           <p:cNvPr id="12" name="2">
             <a:extLst xmlns:a="http://schemas.openxmlformats.org/drawingml/2006/main">
               <a:ext uri="{FF2B5EF4-FFF2-40B4-BE49-F238E27FC236}">
-                <a16:creationId xmlns:a16="http://schemas.microsoft.com/office/drawing/2014/main" id="{BD907127-30BF-410A-B4B2-6E8953470AAF}"/>
+                <a16:creationId xmlns:a16="http://schemas.microsoft.com/office/drawing/2014/main" id="{E3C82293-C0AF-43D4-B886-36D501B2C790}"/>
               </a:ext>
             </a:extLst>
           </p:cNvPr>
@@ -16303,7 +15667,7 @@
           <p:cNvPr id="13" name="3">
             <a:extLst xmlns:a="http://schemas.openxmlformats.org/drawingml/2006/main">
               <a:ext uri="{FF2B5EF4-FFF2-40B4-BE49-F238E27FC236}">
-                <a16:creationId xmlns:a16="http://schemas.microsoft.com/office/drawing/2014/main" id="{D6B6F232-6B81-467D-ACE8-8AE17EBF32DE}"/>
+                <a16:creationId xmlns:a16="http://schemas.microsoft.com/office/drawing/2014/main" id="{CCE1593C-8530-4113-ABB4-0B8DC21F0193}"/>
               </a:ext>
             </a:extLst>
           </p:cNvPr>
@@ -16461,7 +15825,7 @@
           <p:cNvPr id="14" name="">
             <a:extLst xmlns:a="http://schemas.openxmlformats.org/drawingml/2006/main">
               <a:ext uri="{FF2B5EF4-FFF2-40B4-BE49-F238E27FC236}">
-                <a16:creationId xmlns:a16="http://schemas.microsoft.com/office/drawing/2014/main" id="{887C240B-E5BD-4E5F-8F73-426ED04D8302}"/>
+                <a16:creationId xmlns:a16="http://schemas.microsoft.com/office/drawing/2014/main" id="{8418689C-BE8F-4E87-A5C1-C4B08BE77565}"/>
               </a:ext>
             </a:extLst>
           </p:cNvPr>
@@ -16494,7 +15858,7 @@
           <p:cNvPr id="15" name="1">
             <a:extLst xmlns:a="http://schemas.openxmlformats.org/drawingml/2006/main">
               <a:ext uri="{FF2B5EF4-FFF2-40B4-BE49-F238E27FC236}">
-                <a16:creationId xmlns:a16="http://schemas.microsoft.com/office/drawing/2014/main" id="{C4CDABD1-70F5-4F8D-B15E-252732857E29}"/>
+                <a16:creationId xmlns:a16="http://schemas.microsoft.com/office/drawing/2014/main" id="{C5E30B15-C5C6-4597-AB39-1D48E5455880}"/>
               </a:ext>
             </a:extLst>
           </p:cNvPr>
@@ -16652,7 +16016,7 @@
           <p:cNvPr id="16" name="">
             <a:extLst xmlns:a="http://schemas.openxmlformats.org/drawingml/2006/main">
               <a:ext uri="{FF2B5EF4-FFF2-40B4-BE49-F238E27FC236}">
-                <a16:creationId xmlns:a16="http://schemas.microsoft.com/office/drawing/2014/main" id="{E9853536-03AF-421D-9175-8D9B03014043}"/>
+                <a16:creationId xmlns:a16="http://schemas.microsoft.com/office/drawing/2014/main" id="{1FBAE4A4-D62E-4FBC-A250-CAA09D21E763}"/>
               </a:ext>
             </a:extLst>
           </p:cNvPr>
@@ -16685,7 +16049,7 @@
           <p:cNvPr id="17" name="2">
             <a:extLst xmlns:a="http://schemas.openxmlformats.org/drawingml/2006/main">
               <a:ext uri="{FF2B5EF4-FFF2-40B4-BE49-F238E27FC236}">
-                <a16:creationId xmlns:a16="http://schemas.microsoft.com/office/drawing/2014/main" id="{C56C962D-F0ED-4A2C-9CBB-5AC8080171B6}"/>
+                <a16:creationId xmlns:a16="http://schemas.microsoft.com/office/drawing/2014/main" id="{1D788CAB-352A-4FAA-B7E5-80C21011EA3A}"/>
               </a:ext>
             </a:extLst>
           </p:cNvPr>
@@ -16843,7 +16207,7 @@
           <p:cNvPr id="18" name="">
             <a:extLst xmlns:a="http://schemas.openxmlformats.org/drawingml/2006/main">
               <a:ext uri="{FF2B5EF4-FFF2-40B4-BE49-F238E27FC236}">
-                <a16:creationId xmlns:a16="http://schemas.microsoft.com/office/drawing/2014/main" id="{AF01D817-2B67-48CD-BC99-655B56BBC24D}"/>
+                <a16:creationId xmlns:a16="http://schemas.microsoft.com/office/drawing/2014/main" id="{F9080762-9141-4081-A626-61853B1A6A3C}"/>
               </a:ext>
             </a:extLst>
           </p:cNvPr>
@@ -16876,7 +16240,7 @@
           <p:cNvPr id="19" name="3">
             <a:extLst xmlns:a="http://schemas.openxmlformats.org/drawingml/2006/main">
               <a:ext uri="{FF2B5EF4-FFF2-40B4-BE49-F238E27FC236}">
-                <a16:creationId xmlns:a16="http://schemas.microsoft.com/office/drawing/2014/main" id="{6F1472AA-1F5A-4775-A0B1-31A5B838AB7D}"/>
+                <a16:creationId xmlns:a16="http://schemas.microsoft.com/office/drawing/2014/main" id="{1A42FC53-5F54-414F-9827-82C7D7159170}"/>
               </a:ext>
             </a:extLst>
           </p:cNvPr>
@@ -17034,7 +16398,7 @@
           <p:cNvPr id="20" name="">
             <a:extLst xmlns:a="http://schemas.openxmlformats.org/drawingml/2006/main">
               <a:ext uri="{FF2B5EF4-FFF2-40B4-BE49-F238E27FC236}">
-                <a16:creationId xmlns:a16="http://schemas.microsoft.com/office/drawing/2014/main" id="{980EDBBC-4B84-45E0-8197-C1D77A240A56}"/>
+                <a16:creationId xmlns:a16="http://schemas.microsoft.com/office/drawing/2014/main" id="{7C82B4DF-4B13-4F7D-B414-5BF549794C9B}"/>
               </a:ext>
             </a:extLst>
           </p:cNvPr>
@@ -17067,7 +16431,7 @@
           <p:cNvPr id="21" name="4">
             <a:extLst xmlns:a="http://schemas.openxmlformats.org/drawingml/2006/main">
               <a:ext uri="{FF2B5EF4-FFF2-40B4-BE49-F238E27FC236}">
-                <a16:creationId xmlns:a16="http://schemas.microsoft.com/office/drawing/2014/main" id="{9EAC9726-E74B-4DD6-A8C7-181EC88A7782}"/>
+                <a16:creationId xmlns:a16="http://schemas.microsoft.com/office/drawing/2014/main" id="{C1B0E5F4-EB34-44F4-B787-34187B62622D}"/>
               </a:ext>
             </a:extLst>
           </p:cNvPr>
@@ -17225,7 +16589,7 @@
           <p:cNvPr id="22" name="">
             <a:extLst xmlns:a="http://schemas.openxmlformats.org/drawingml/2006/main">
               <a:ext uri="{FF2B5EF4-FFF2-40B4-BE49-F238E27FC236}">
-                <a16:creationId xmlns:a16="http://schemas.microsoft.com/office/drawing/2014/main" id="{6CBA4ECA-7CBC-4AA0-9A37-A86F169B1733}"/>
+                <a16:creationId xmlns:a16="http://schemas.microsoft.com/office/drawing/2014/main" id="{CEC51832-DE41-4838-AB12-6FCB7C1778A4}"/>
               </a:ext>
             </a:extLst>
           </p:cNvPr>
@@ -17258,7 +16622,7 @@
           <p:cNvPr id="23" name="5">
             <a:extLst xmlns:a="http://schemas.openxmlformats.org/drawingml/2006/main">
               <a:ext uri="{FF2B5EF4-FFF2-40B4-BE49-F238E27FC236}">
-                <a16:creationId xmlns:a16="http://schemas.microsoft.com/office/drawing/2014/main" id="{09A51057-F701-4ED1-B2BE-7A129845B9E6}"/>
+                <a16:creationId xmlns:a16="http://schemas.microsoft.com/office/drawing/2014/main" id="{A42E62B6-603C-4DB0-8B6B-550ED1C8F522}"/>
               </a:ext>
             </a:extLst>
           </p:cNvPr>
@@ -17416,7 +16780,7 @@
           <p:cNvPr id="24" name="">
             <a:extLst xmlns:a="http://schemas.openxmlformats.org/drawingml/2006/main">
               <a:ext uri="{FF2B5EF4-FFF2-40B4-BE49-F238E27FC236}">
-                <a16:creationId xmlns:a16="http://schemas.microsoft.com/office/drawing/2014/main" id="{9811364F-E849-4DFC-8A9E-264B96839C02}"/>
+                <a16:creationId xmlns:a16="http://schemas.microsoft.com/office/drawing/2014/main" id="{3EB64767-877B-4A19-968F-2090724BE4AC}"/>
               </a:ext>
             </a:extLst>
           </p:cNvPr>
@@ -17449,7 +16813,7 @@
           <p:cNvPr id="25" name="6">
             <a:extLst xmlns:a="http://schemas.openxmlformats.org/drawingml/2006/main">
               <a:ext uri="{FF2B5EF4-FFF2-40B4-BE49-F238E27FC236}">
-                <a16:creationId xmlns:a16="http://schemas.microsoft.com/office/drawing/2014/main" id="{D120C28E-B3EB-4291-9D16-2C99067243F5}"/>
+                <a16:creationId xmlns:a16="http://schemas.microsoft.com/office/drawing/2014/main" id="{F38596DA-F253-42C1-8185-91605B1FE62E}"/>
               </a:ext>
             </a:extLst>
           </p:cNvPr>
@@ -17607,7 +16971,7 @@
           <p:cNvPr id="26" name="">
             <a:extLst xmlns:a="http://schemas.openxmlformats.org/drawingml/2006/main">
               <a:ext uri="{FF2B5EF4-FFF2-40B4-BE49-F238E27FC236}">
-                <a16:creationId xmlns:a16="http://schemas.microsoft.com/office/drawing/2014/main" id="{65A69F10-9287-41B5-8306-9361E506ACA5}"/>
+                <a16:creationId xmlns:a16="http://schemas.microsoft.com/office/drawing/2014/main" id="{1F9655AD-D56F-4D51-BC4B-288BA1A76547}"/>
               </a:ext>
             </a:extLst>
           </p:cNvPr>
@@ -17640,7 +17004,7 @@
           <p:cNvPr id="27" name="7">
             <a:extLst xmlns:a="http://schemas.openxmlformats.org/drawingml/2006/main">
               <a:ext uri="{FF2B5EF4-FFF2-40B4-BE49-F238E27FC236}">
-                <a16:creationId xmlns:a16="http://schemas.microsoft.com/office/drawing/2014/main" id="{1338A769-7105-46C1-9792-8AA5E8D9144B}"/>
+                <a16:creationId xmlns:a16="http://schemas.microsoft.com/office/drawing/2014/main" id="{E0524178-0849-4876-9FE5-DAE2FC5FFA48}"/>
               </a:ext>
             </a:extLst>
           </p:cNvPr>
@@ -17798,7 +17162,7 @@
           <p:cNvPr id="28" name="">
             <a:extLst xmlns:a="http://schemas.openxmlformats.org/drawingml/2006/main">
               <a:ext uri="{FF2B5EF4-FFF2-40B4-BE49-F238E27FC236}">
-                <a16:creationId xmlns:a16="http://schemas.microsoft.com/office/drawing/2014/main" id="{F924E3FE-4227-4995-B94A-1A4407E4C673}"/>
+                <a16:creationId xmlns:a16="http://schemas.microsoft.com/office/drawing/2014/main" id="{C5840843-6F69-4702-96DF-924F272D7918}"/>
               </a:ext>
             </a:extLst>
           </p:cNvPr>
@@ -17831,7 +17195,7 @@
           <p:cNvPr id="29" name="8">
             <a:extLst xmlns:a="http://schemas.openxmlformats.org/drawingml/2006/main">
               <a:ext uri="{FF2B5EF4-FFF2-40B4-BE49-F238E27FC236}">
-                <a16:creationId xmlns:a16="http://schemas.microsoft.com/office/drawing/2014/main" id="{D494C8EC-9321-45F9-AFDD-354C3428D4BA}"/>
+                <a16:creationId xmlns:a16="http://schemas.microsoft.com/office/drawing/2014/main" id="{0F56AFBA-11A2-4D18-B114-57F257FC0B0A}"/>
               </a:ext>
             </a:extLst>
           </p:cNvPr>
@@ -17989,7 +17353,7 @@
           <p:cNvPr id="30" name="열 index">
             <a:extLst xmlns:a="http://schemas.openxmlformats.org/drawingml/2006/main">
               <a:ext uri="{FF2B5EF4-FFF2-40B4-BE49-F238E27FC236}">
-                <a16:creationId xmlns:a16="http://schemas.microsoft.com/office/drawing/2014/main" id="{C10D3F5A-178D-431D-A326-C73D0835FC37}"/>
+                <a16:creationId xmlns:a16="http://schemas.microsoft.com/office/drawing/2014/main" id="{A4ECD5E3-1C72-420D-9BD3-869353E5B3E7}"/>
               </a:ext>
             </a:extLst>
           </p:cNvPr>
@@ -18147,7 +17511,7 @@
           <p:cNvPr id="31" name="기대">
             <a:extLst xmlns:a="http://schemas.openxmlformats.org/drawingml/2006/main">
               <a:ext uri="{FF2B5EF4-FFF2-40B4-BE49-F238E27FC236}">
-                <a16:creationId xmlns:a16="http://schemas.microsoft.com/office/drawing/2014/main" id="{FAA145FD-57DF-4F69-AD0B-3170054C5CD2}"/>
+                <a16:creationId xmlns:a16="http://schemas.microsoft.com/office/drawing/2014/main" id="{462D7073-485C-4A26-950B-D66C0F8AC2D2}"/>
               </a:ext>
             </a:extLst>
           </p:cNvPr>
@@ -18305,7 +17669,7 @@
           <p:cNvPr id="32" name="">
             <a:extLst xmlns:a="http://schemas.openxmlformats.org/drawingml/2006/main">
               <a:ext uri="{FF2B5EF4-FFF2-40B4-BE49-F238E27FC236}">
-                <a16:creationId xmlns:a16="http://schemas.microsoft.com/office/drawing/2014/main" id="{05C8A3D9-A103-4DE3-AB48-32F77364B67B}"/>
+                <a16:creationId xmlns:a16="http://schemas.microsoft.com/office/drawing/2014/main" id="{A7B0616E-A5E2-41E4-AFDD-35888CF4878A}"/>
               </a:ext>
             </a:extLst>
           </p:cNvPr>
@@ -18338,7 +17702,7 @@
           <p:cNvPr id="33" name="2">
             <a:extLst xmlns:a="http://schemas.openxmlformats.org/drawingml/2006/main">
               <a:ext uri="{FF2B5EF4-FFF2-40B4-BE49-F238E27FC236}">
-                <a16:creationId xmlns:a16="http://schemas.microsoft.com/office/drawing/2014/main" id="{D8F04A78-9CB8-4E73-BF07-EB8555166235}"/>
+                <a16:creationId xmlns:a16="http://schemas.microsoft.com/office/drawing/2014/main" id="{2313EDFB-7A10-48E0-A37F-9ACCFD8A01EC}"/>
               </a:ext>
             </a:extLst>
           </p:cNvPr>
@@ -18496,7 +17860,7 @@
           <p:cNvPr id="34" name="">
             <a:extLst xmlns:a="http://schemas.openxmlformats.org/drawingml/2006/main">
               <a:ext uri="{FF2B5EF4-FFF2-40B4-BE49-F238E27FC236}">
-                <a16:creationId xmlns:a16="http://schemas.microsoft.com/office/drawing/2014/main" id="{01F9C932-CF4C-4405-8B76-236B6260F7B0}"/>
+                <a16:creationId xmlns:a16="http://schemas.microsoft.com/office/drawing/2014/main" id="{A5002CE8-B117-42A9-9A9F-FA7407D5947A}"/>
               </a:ext>
             </a:extLst>
           </p:cNvPr>
@@ -18529,7 +17893,7 @@
           <p:cNvPr id="35" name="3">
             <a:extLst xmlns:a="http://schemas.openxmlformats.org/drawingml/2006/main">
               <a:ext uri="{FF2B5EF4-FFF2-40B4-BE49-F238E27FC236}">
-                <a16:creationId xmlns:a16="http://schemas.microsoft.com/office/drawing/2014/main" id="{53C04F83-C59E-42CE-A15F-6F7D9C7837FE}"/>
+                <a16:creationId xmlns:a16="http://schemas.microsoft.com/office/drawing/2014/main" id="{15BE8618-4BD6-4F13-BB8F-17ABB8D7E3D7}"/>
               </a:ext>
             </a:extLst>
           </p:cNvPr>
@@ -18687,7 +18051,7 @@
           <p:cNvPr id="36" name="">
             <a:extLst xmlns:a="http://schemas.openxmlformats.org/drawingml/2006/main">
               <a:ext uri="{FF2B5EF4-FFF2-40B4-BE49-F238E27FC236}">
-                <a16:creationId xmlns:a16="http://schemas.microsoft.com/office/drawing/2014/main" id="{E50278CC-5072-4236-8CC3-0DA27DF1EBF8}"/>
+                <a16:creationId xmlns:a16="http://schemas.microsoft.com/office/drawing/2014/main" id="{2B9841AC-CF75-4D2F-85F1-A4FBADDE6212}"/>
               </a:ext>
             </a:extLst>
           </p:cNvPr>
@@ -18720,7 +18084,7 @@
           <p:cNvPr id="37" name="6">
             <a:extLst xmlns:a="http://schemas.openxmlformats.org/drawingml/2006/main">
               <a:ext uri="{FF2B5EF4-FFF2-40B4-BE49-F238E27FC236}">
-                <a16:creationId xmlns:a16="http://schemas.microsoft.com/office/drawing/2014/main" id="{B340A21E-B368-49A0-9A7E-9E198DF61667}"/>
+                <a16:creationId xmlns:a16="http://schemas.microsoft.com/office/drawing/2014/main" id="{3D2DAF53-9205-4B3F-A9BC-4B78BFB210E7}"/>
               </a:ext>
             </a:extLst>
           </p:cNvPr>
@@ -18878,7 +18242,7 @@
           <p:cNvPr id="38" name="">
             <a:extLst xmlns:a="http://schemas.openxmlformats.org/drawingml/2006/main">
               <a:ext uri="{FF2B5EF4-FFF2-40B4-BE49-F238E27FC236}">
-                <a16:creationId xmlns:a16="http://schemas.microsoft.com/office/drawing/2014/main" id="{8F42283F-50A1-4B2A-AE41-95321A9ABCCE}"/>
+                <a16:creationId xmlns:a16="http://schemas.microsoft.com/office/drawing/2014/main" id="{5E19EB09-CC62-497B-A00B-717345CECC52}"/>
               </a:ext>
             </a:extLst>
           </p:cNvPr>
@@ -18911,7 +18275,7 @@
           <p:cNvPr id="39" name="7">
             <a:extLst xmlns:a="http://schemas.openxmlformats.org/drawingml/2006/main">
               <a:ext uri="{FF2B5EF4-FFF2-40B4-BE49-F238E27FC236}">
-                <a16:creationId xmlns:a16="http://schemas.microsoft.com/office/drawing/2014/main" id="{D640C229-6D45-4D19-A3B6-A8868A072AF7}"/>
+                <a16:creationId xmlns:a16="http://schemas.microsoft.com/office/drawing/2014/main" id="{7E11F8BA-4543-4E48-99D8-CE07B83FB98A}"/>
               </a:ext>
             </a:extLst>
           </p:cNvPr>
@@ -19069,7 +18433,7 @@
           <p:cNvPr id="40" name="구현 결과">
             <a:extLst xmlns:a="http://schemas.openxmlformats.org/drawingml/2006/main">
               <a:ext uri="{FF2B5EF4-FFF2-40B4-BE49-F238E27FC236}">
-                <a16:creationId xmlns:a16="http://schemas.microsoft.com/office/drawing/2014/main" id="{B1160814-1D9F-428A-973B-F39C07F19A3D}"/>
+                <a16:creationId xmlns:a16="http://schemas.microsoft.com/office/drawing/2014/main" id="{65E48E6F-00D7-4539-B0AC-FC891F66B808}"/>
               </a:ext>
             </a:extLst>
           </p:cNvPr>
@@ -19227,7 +18591,7 @@
           <p:cNvPr id="41" name="">
             <a:extLst xmlns:a="http://schemas.openxmlformats.org/drawingml/2006/main">
               <a:ext uri="{FF2B5EF4-FFF2-40B4-BE49-F238E27FC236}">
-                <a16:creationId xmlns:a16="http://schemas.microsoft.com/office/drawing/2014/main" id="{F40404C2-8686-4AC4-96DD-088314B1138F}"/>
+                <a16:creationId xmlns:a16="http://schemas.microsoft.com/office/drawing/2014/main" id="{094BD095-598D-4840-8C8F-BCC2D81893FC}"/>
               </a:ext>
             </a:extLst>
           </p:cNvPr>
@@ -19260,7 +18624,7 @@
           <p:cNvPr id="42" name="2">
             <a:extLst xmlns:a="http://schemas.openxmlformats.org/drawingml/2006/main">
               <a:ext uri="{FF2B5EF4-FFF2-40B4-BE49-F238E27FC236}">
-                <a16:creationId xmlns:a16="http://schemas.microsoft.com/office/drawing/2014/main" id="{933262DC-D8D7-4AE8-8CDF-0A7A6037337C}"/>
+                <a16:creationId xmlns:a16="http://schemas.microsoft.com/office/drawing/2014/main" id="{6588BB52-AA11-4BA3-AC73-632961FAC18B}"/>
               </a:ext>
             </a:extLst>
           </p:cNvPr>
@@ -19418,7 +18782,7 @@
           <p:cNvPr id="43" name="">
             <a:extLst xmlns:a="http://schemas.openxmlformats.org/drawingml/2006/main">
               <a:ext uri="{FF2B5EF4-FFF2-40B4-BE49-F238E27FC236}">
-                <a16:creationId xmlns:a16="http://schemas.microsoft.com/office/drawing/2014/main" id="{116C401B-937F-4584-9175-B39A65946217}"/>
+                <a16:creationId xmlns:a16="http://schemas.microsoft.com/office/drawing/2014/main" id="{063FA254-AA32-4B1B-B349-3A53659A9832}"/>
               </a:ext>
             </a:extLst>
           </p:cNvPr>
@@ -19451,7 +18815,7 @@
           <p:cNvPr id="44" name="3">
             <a:extLst xmlns:a="http://schemas.openxmlformats.org/drawingml/2006/main">
               <a:ext uri="{FF2B5EF4-FFF2-40B4-BE49-F238E27FC236}">
-                <a16:creationId xmlns:a16="http://schemas.microsoft.com/office/drawing/2014/main" id="{9A276D30-D3EC-4611-8EA0-9A56AF98924F}"/>
+                <a16:creationId xmlns:a16="http://schemas.microsoft.com/office/drawing/2014/main" id="{E93124AD-E5B9-418A-A611-E4B0952E0470}"/>
               </a:ext>
             </a:extLst>
           </p:cNvPr>
@@ -19609,7 +18973,7 @@
           <p:cNvPr id="45" name="">
             <a:extLst xmlns:a="http://schemas.openxmlformats.org/drawingml/2006/main">
               <a:ext uri="{FF2B5EF4-FFF2-40B4-BE49-F238E27FC236}">
-                <a16:creationId xmlns:a16="http://schemas.microsoft.com/office/drawing/2014/main" id="{45690614-BF26-4F43-BF6F-7FCE5CBF93FE}"/>
+                <a16:creationId xmlns:a16="http://schemas.microsoft.com/office/drawing/2014/main" id="{97DFC535-4D87-4FD4-ADEC-E4457429C3D5}"/>
               </a:ext>
             </a:extLst>
           </p:cNvPr>
@@ -19642,7 +19006,7 @@
           <p:cNvPr id="46" name="4">
             <a:extLst xmlns:a="http://schemas.openxmlformats.org/drawingml/2006/main">
               <a:ext uri="{FF2B5EF4-FFF2-40B4-BE49-F238E27FC236}">
-                <a16:creationId xmlns:a16="http://schemas.microsoft.com/office/drawing/2014/main" id="{6C24387B-EA59-4B0B-9903-2EC01CCA5040}"/>
+                <a16:creationId xmlns:a16="http://schemas.microsoft.com/office/drawing/2014/main" id="{36F245BC-876B-4537-9BCE-AF9DA6D1D955}"/>
               </a:ext>
             </a:extLst>
           </p:cNvPr>
@@ -19800,7 +19164,7 @@
           <p:cNvPr id="47" name="">
             <a:extLst xmlns:a="http://schemas.openxmlformats.org/drawingml/2006/main">
               <a:ext uri="{FF2B5EF4-FFF2-40B4-BE49-F238E27FC236}">
-                <a16:creationId xmlns:a16="http://schemas.microsoft.com/office/drawing/2014/main" id="{3904D452-B58A-4F19-A275-A846E98F828F}"/>
+                <a16:creationId xmlns:a16="http://schemas.microsoft.com/office/drawing/2014/main" id="{44215016-85A3-41B0-8955-42AEEECBEE49}"/>
               </a:ext>
             </a:extLst>
           </p:cNvPr>
@@ -19833,7 +19197,7 @@
           <p:cNvPr id="48" name="6">
             <a:extLst xmlns:a="http://schemas.openxmlformats.org/drawingml/2006/main">
               <a:ext uri="{FF2B5EF4-FFF2-40B4-BE49-F238E27FC236}">
-                <a16:creationId xmlns:a16="http://schemas.microsoft.com/office/drawing/2014/main" id="{06F88A1B-FE47-472F-9889-C71F99CECAD7}"/>
+                <a16:creationId xmlns:a16="http://schemas.microsoft.com/office/drawing/2014/main" id="{C40DC2BB-466B-4DCE-8E34-7B1E56C0437C}"/>
               </a:ext>
             </a:extLst>
           </p:cNvPr>
@@ -19991,7 +19355,7 @@
           <p:cNvPr id="49" name="">
             <a:extLst xmlns:a="http://schemas.openxmlformats.org/drawingml/2006/main">
               <a:ext uri="{FF2B5EF4-FFF2-40B4-BE49-F238E27FC236}">
-                <a16:creationId xmlns:a16="http://schemas.microsoft.com/office/drawing/2014/main" id="{104392A5-4430-4DFD-95C7-ADB065146F26}"/>
+                <a16:creationId xmlns:a16="http://schemas.microsoft.com/office/drawing/2014/main" id="{5D22134E-A5DB-476A-9533-85C50F6412E5}"/>
               </a:ext>
             </a:extLst>
           </p:cNvPr>
@@ -20024,7 +19388,7 @@
           <p:cNvPr id="50" name="7">
             <a:extLst xmlns:a="http://schemas.openxmlformats.org/drawingml/2006/main">
               <a:ext uri="{FF2B5EF4-FFF2-40B4-BE49-F238E27FC236}">
-                <a16:creationId xmlns:a16="http://schemas.microsoft.com/office/drawing/2014/main" id="{E7004BD7-64BB-4992-BB55-A5D213132CCA}"/>
+                <a16:creationId xmlns:a16="http://schemas.microsoft.com/office/drawing/2014/main" id="{BC1BE0B9-F544-4424-84FC-F28EF2020BB9}"/>
               </a:ext>
             </a:extLst>
           </p:cNvPr>
@@ -20182,7 +19546,7 @@
           <p:cNvPr id="51" name="">
             <a:extLst xmlns:a="http://schemas.openxmlformats.org/drawingml/2006/main">
               <a:ext uri="{FF2B5EF4-FFF2-40B4-BE49-F238E27FC236}">
-                <a16:creationId xmlns:a16="http://schemas.microsoft.com/office/drawing/2014/main" id="{DCC959C9-BB83-4D07-9950-C7740DACDC96}"/>
+                <a16:creationId xmlns:a16="http://schemas.microsoft.com/office/drawing/2014/main" id="{B3E59BC5-6E48-4B48-B28C-710764BC7C12}"/>
               </a:ext>
             </a:extLst>
           </p:cNvPr>
@@ -20215,7 +19579,7 @@
           <p:cNvPr id="52" name="8">
             <a:extLst xmlns:a="http://schemas.openxmlformats.org/drawingml/2006/main">
               <a:ext uri="{FF2B5EF4-FFF2-40B4-BE49-F238E27FC236}">
-                <a16:creationId xmlns:a16="http://schemas.microsoft.com/office/drawing/2014/main" id="{4B97DAF4-AA31-4B73-89BD-1181DBD649ED}"/>
+                <a16:creationId xmlns:a16="http://schemas.microsoft.com/office/drawing/2014/main" id="{1B62E5B8-0B47-47FE-9438-F8FD208D288A}"/>
               </a:ext>
             </a:extLst>
           </p:cNvPr>
@@ -20373,7 +19737,7 @@
           <p:cNvPr id="53" name="한 열이 더 포함됨">
             <a:extLst xmlns:a="http://schemas.openxmlformats.org/drawingml/2006/main">
               <a:ext uri="{FF2B5EF4-FFF2-40B4-BE49-F238E27FC236}">
-                <a16:creationId xmlns:a16="http://schemas.microsoft.com/office/drawing/2014/main" id="{E27BC1FF-D7E8-464C-A80F-B951B829030F}"/>
+                <a16:creationId xmlns:a16="http://schemas.microsoft.com/office/drawing/2014/main" id="{3ED942C9-F930-4532-A542-FF74116B3A9C}"/>
               </a:ext>
             </a:extLst>
           </p:cNvPr>
@@ -20531,7 +19895,7 @@
           <p:cNvPr id="54" name="">
             <a:extLst xmlns:a="http://schemas.openxmlformats.org/drawingml/2006/main">
               <a:ext uri="{FF2B5EF4-FFF2-40B4-BE49-F238E27FC236}">
-                <a16:creationId xmlns:a16="http://schemas.microsoft.com/office/drawing/2014/main" id="{9EDB1D1A-86C6-48A0-B366-470B94189752}"/>
+                <a16:creationId xmlns:a16="http://schemas.microsoft.com/office/drawing/2014/main" id="{6996C952-64D7-4B6B-834D-4E7BF00082B6}"/>
               </a:ext>
             </a:extLst>
           </p:cNvPr>
@@ -20562,7 +19926,7 @@
           <p:cNvPr id="55" name="조사에서 연결한 근거">
             <a:extLst xmlns:a="http://schemas.openxmlformats.org/drawingml/2006/main">
               <a:ext uri="{FF2B5EF4-FFF2-40B4-BE49-F238E27FC236}">
-                <a16:creationId xmlns:a16="http://schemas.microsoft.com/office/drawing/2014/main" id="{B7883911-6A00-4DE3-9A81-3B5A2F033CD9}"/>
+                <a16:creationId xmlns:a16="http://schemas.microsoft.com/office/drawing/2014/main" id="{92FA8907-ED0F-4B84-8292-FC949057D154}"/>
               </a:ext>
             </a:extLst>
           </p:cNvPr>
@@ -20720,7 +20084,7 @@
           <p:cNvPr id="56" name="01  실패 테스트">
             <a:extLst xmlns:a="http://schemas.openxmlformats.org/drawingml/2006/main">
               <a:ext uri="{FF2B5EF4-FFF2-40B4-BE49-F238E27FC236}">
-                <a16:creationId xmlns:a16="http://schemas.microsoft.com/office/drawing/2014/main" id="{99F822DD-99DC-4DFE-A19E-6C82E0A495FF}"/>
+                <a16:creationId xmlns:a16="http://schemas.microsoft.com/office/drawing/2014/main" id="{CEB216B4-1C24-4FA0-9789-667398868AA0}"/>
               </a:ext>
             </a:extLst>
           </p:cNvPr>
@@ -20878,7 +20242,7 @@
           <p:cNvPr id="57" name="test_crop_excludes_&#10;end_coordinate">
             <a:extLst xmlns:a="http://schemas.openxmlformats.org/drawingml/2006/main">
               <a:ext uri="{FF2B5EF4-FFF2-40B4-BE49-F238E27FC236}">
-                <a16:creationId xmlns:a16="http://schemas.microsoft.com/office/drawing/2014/main" id="{3DEA5A3D-922A-48EE-9772-834BF3AFE22B}"/>
+                <a16:creationId xmlns:a16="http://schemas.microsoft.com/office/drawing/2014/main" id="{18FBE978-B234-422F-8756-C7EC1B873239}"/>
               </a:ext>
             </a:extLst>
           </p:cNvPr>
@@ -21059,7 +20423,7 @@
           <p:cNvPr id="58" name="02  제품의 호출 경로">
             <a:extLst xmlns:a="http://schemas.openxmlformats.org/drawingml/2006/main">
               <a:ext uri="{FF2B5EF4-FFF2-40B4-BE49-F238E27FC236}">
-                <a16:creationId xmlns:a16="http://schemas.microsoft.com/office/drawing/2014/main" id="{280132EC-5F58-48C7-BDB9-5BF2F60C1D81}"/>
+                <a16:creationId xmlns:a16="http://schemas.microsoft.com/office/drawing/2014/main" id="{A70E908C-8B80-41A3-B765-B817350F416A}"/>
               </a:ext>
             </a:extLst>
           </p:cNvPr>
@@ -21217,7 +20581,7 @@
           <p:cNvPr id="59" name="cli.main → process_image → crop">
             <a:extLst xmlns:a="http://schemas.openxmlformats.org/drawingml/2006/main">
               <a:ext uri="{FF2B5EF4-FFF2-40B4-BE49-F238E27FC236}">
-                <a16:creationId xmlns:a16="http://schemas.microsoft.com/office/drawing/2014/main" id="{F49729DB-294A-472F-9312-601049F1B592}"/>
+                <a16:creationId xmlns:a16="http://schemas.microsoft.com/office/drawing/2014/main" id="{A9549513-8CD6-41A0-A952-6E0B9F45DB8B}"/>
               </a:ext>
             </a:extLst>
           </p:cNvPr>
@@ -21375,7 +20739,7 @@
           <p:cNvPr id="60" name="03  계약과 다른 구현">
             <a:extLst xmlns:a="http://schemas.openxmlformats.org/drawingml/2006/main">
               <a:ext uri="{FF2B5EF4-FFF2-40B4-BE49-F238E27FC236}">
-                <a16:creationId xmlns:a16="http://schemas.microsoft.com/office/drawing/2014/main" id="{40CD9D22-3169-43DA-89C1-9B78DFD53A3A}"/>
+                <a16:creationId xmlns:a16="http://schemas.microsoft.com/office/drawing/2014/main" id="{A2EC5EEE-86DB-42CF-9B34-10A1DA2750DF}"/>
               </a:ext>
             </a:extLst>
           </p:cNvPr>
@@ -21533,7 +20897,7 @@
           <p:cNvPr id="61" name="row[x_start : x_end + 1]">
             <a:extLst xmlns:a="http://schemas.openxmlformats.org/drawingml/2006/main">
               <a:ext uri="{FF2B5EF4-FFF2-40B4-BE49-F238E27FC236}">
-                <a16:creationId xmlns:a16="http://schemas.microsoft.com/office/drawing/2014/main" id="{7EF1B601-F658-4C30-BE0C-297894BECEC3}"/>
+                <a16:creationId xmlns:a16="http://schemas.microsoft.com/office/drawing/2014/main" id="{6340E590-298C-4B57-A1D2-F8F3D16E7123}"/>
               </a:ext>
             </a:extLst>
           </p:cNvPr>
@@ -21691,7 +21055,7 @@
           <p:cNvPr id="62" name="계약: [x_start, x_end)">
             <a:extLst xmlns:a="http://schemas.openxmlformats.org/drawingml/2006/main">
               <a:ext uri="{FF2B5EF4-FFF2-40B4-BE49-F238E27FC236}">
-                <a16:creationId xmlns:a16="http://schemas.microsoft.com/office/drawing/2014/main" id="{B56B41A5-F04C-4F46-B35E-2E6C78AB3218}"/>
+                <a16:creationId xmlns:a16="http://schemas.microsoft.com/office/drawing/2014/main" id="{856CED10-E19A-4E82-B03F-C0F295370BF0}"/>
               </a:ext>
             </a:extLst>
           </p:cNvPr>
@@ -21847,7 +21211,7 @@
     </p:spTree>
     <p:extLst>
       <p:ext uri="{BB962C8B-B14F-4D97-AF65-F5344CB8AC3E}">
-        <p14:creationId xmlns:p14="http://schemas.microsoft.com/office/powerpoint/2010/main" val="148551870"/>
+        <p14:creationId xmlns:p14="http://schemas.microsoft.com/office/powerpoint/2010/main" val="365614759"/>
       </p:ext>
     </p:extLst>
   </p:cSld>
@@ -21878,7 +21242,7 @@
           <p:cNvPr id="17" name="ACT 0 · 조사 결과 읽기">
             <a:extLst xmlns:a="http://schemas.openxmlformats.org/drawingml/2006/main">
               <a:ext uri="{FF2B5EF4-FFF2-40B4-BE49-F238E27FC236}">
-                <a16:creationId xmlns:a16="http://schemas.microsoft.com/office/drawing/2014/main" id="{9CB89B9A-3E07-4942-A5AF-9CD7678E5149}"/>
+                <a16:creationId xmlns:a16="http://schemas.microsoft.com/office/drawing/2014/main" id="{061204E5-7505-4BAA-BE70-5A72058C10F3}"/>
               </a:ext>
             </a:extLst>
           </p:cNvPr>
@@ -22036,7 +21400,7 @@
           <p:cNvPr id="2" name="S06">
             <a:extLst xmlns:a="http://schemas.openxmlformats.org/drawingml/2006/main">
               <a:ext uri="{FF2B5EF4-FFF2-40B4-BE49-F238E27FC236}">
-                <a16:creationId xmlns:a16="http://schemas.microsoft.com/office/drawing/2014/main" id="{2673C32F-E530-4C52-9D97-99614F22CAF9}"/>
+                <a16:creationId xmlns:a16="http://schemas.microsoft.com/office/drawing/2014/main" id="{7C505121-B7E4-4F75-AB78-4869F663CA37}"/>
               </a:ext>
             </a:extLst>
           </p:cNvPr>
@@ -22194,7 +21558,7 @@
           <p:cNvPr id="3" name="관찰 결과와 실행 제한을 분리한다">
             <a:extLst xmlns:a="http://schemas.openxmlformats.org/drawingml/2006/main">
               <a:ext uri="{FF2B5EF4-FFF2-40B4-BE49-F238E27FC236}">
-                <a16:creationId xmlns:a16="http://schemas.microsoft.com/office/drawing/2014/main" id="{93E87592-96B5-4118-9669-4AD934C8E402}"/>
+                <a16:creationId xmlns:a16="http://schemas.microsoft.com/office/drawing/2014/main" id="{E5AE4D75-9C63-43D9-903B-80D781B0A840}"/>
               </a:ext>
             </a:extLst>
           </p:cNvPr>
@@ -22352,7 +21716,7 @@
           <p:cNvPr id="4" name="">
             <a:extLst xmlns:a="http://schemas.openxmlformats.org/drawingml/2006/main">
               <a:ext uri="{FF2B5EF4-FFF2-40B4-BE49-F238E27FC236}">
-                <a16:creationId xmlns:a16="http://schemas.microsoft.com/office/drawing/2014/main" id="{41A0E2F7-A08A-4C4D-BADF-43972C5DE4A2}"/>
+                <a16:creationId xmlns:a16="http://schemas.microsoft.com/office/drawing/2014/main" id="{1A740151-9A07-4B91-A0EF-2CC2282403A8}"/>
               </a:ext>
             </a:extLst>
           </p:cNvPr>
@@ -22383,7 +21747,7 @@
           <p:cNvPr id="5" name="TRIAL-001 기록 재구성 · Codex CLI 0.154.0 · 단일 읽기 전용 조사">
             <a:extLst xmlns:a="http://schemas.openxmlformats.org/drawingml/2006/main">
               <a:ext uri="{FF2B5EF4-FFF2-40B4-BE49-F238E27FC236}">
-                <a16:creationId xmlns:a16="http://schemas.microsoft.com/office/drawing/2014/main" id="{323208BF-3A17-4FE2-AF9C-BF34077A09FD}"/>
+                <a16:creationId xmlns:a16="http://schemas.microsoft.com/office/drawing/2014/main" id="{C211EB60-46FA-4316-AD9E-25A3C4539C20}"/>
               </a:ext>
             </a:extLst>
           </p:cNvPr>
@@ -22541,7 +21905,7 @@
           <p:cNvPr id="6" name="환경 오류 3건은 crop 결함의 증거가 아닙니다. 이 조사에서 코드는 수정하지 않았습니다.">
             <a:extLst xmlns:a="http://schemas.openxmlformats.org/drawingml/2006/main">
               <a:ext uri="{FF2B5EF4-FFF2-40B4-BE49-F238E27FC236}">
-                <a16:creationId xmlns:a16="http://schemas.microsoft.com/office/drawing/2014/main" id="{A66FF0D7-C3A7-49EC-9C9B-5130DA1D3498}"/>
+                <a16:creationId xmlns:a16="http://schemas.microsoft.com/office/drawing/2014/main" id="{C1822762-E6B5-4B54-8916-195736D8CF84}"/>
               </a:ext>
             </a:extLst>
           </p:cNvPr>
@@ -22699,7 +22063,7 @@
           <p:cNvPr id="7" name="코드에서 확인한 문제">
             <a:extLst xmlns:a="http://schemas.openxmlformats.org/drawingml/2006/main">
               <a:ext uri="{FF2B5EF4-FFF2-40B4-BE49-F238E27FC236}">
-                <a16:creationId xmlns:a16="http://schemas.microsoft.com/office/drawing/2014/main" id="{E2A9F7F7-B20D-41BC-B32F-E68A419107AA}"/>
+                <a16:creationId xmlns:a16="http://schemas.microsoft.com/office/drawing/2014/main" id="{C3442315-78A5-44F8-895D-81508985A250}"/>
               </a:ext>
             </a:extLst>
           </p:cNvPr>
@@ -22857,7 +22221,7 @@
           <p:cNvPr id="8" name="실행 환경에서 생긴 제한">
             <a:extLst xmlns:a="http://schemas.openxmlformats.org/drawingml/2006/main">
               <a:ext uri="{FF2B5EF4-FFF2-40B4-BE49-F238E27FC236}">
-                <a16:creationId xmlns:a16="http://schemas.microsoft.com/office/drawing/2014/main" id="{A226862D-9AB1-475E-AC93-9A2F0CBD1E25}"/>
+                <a16:creationId xmlns:a16="http://schemas.microsoft.com/office/drawing/2014/main" id="{5C6D6161-DCF6-4C50-9B35-E8499E460FDD}"/>
               </a:ext>
             </a:extLst>
           </p:cNvPr>
@@ -23015,7 +22379,7 @@
           <p:cNvPr id="9" name="">
             <a:extLst xmlns:a="http://schemas.openxmlformats.org/drawingml/2006/main">
               <a:ext uri="{FF2B5EF4-FFF2-40B4-BE49-F238E27FC236}">
-                <a16:creationId xmlns:a16="http://schemas.microsoft.com/office/drawing/2014/main" id="{F3C1701F-F204-471E-81FF-D860D1FEAF38}"/>
+                <a16:creationId xmlns:a16="http://schemas.microsoft.com/office/drawing/2014/main" id="{F02E316E-7359-419B-8ED5-706F683A14F5}"/>
               </a:ext>
             </a:extLst>
           </p:cNvPr>
@@ -23048,7 +22412,7 @@
           <p:cNvPr id="10" name="">
             <a:extLst xmlns:a="http://schemas.openxmlformats.org/drawingml/2006/main">
               <a:ext uri="{FF2B5EF4-FFF2-40B4-BE49-F238E27FC236}">
-                <a16:creationId xmlns:a16="http://schemas.microsoft.com/office/drawing/2014/main" id="{05047DB2-A099-4369-B679-198FF856A984}"/>
+                <a16:creationId xmlns:a16="http://schemas.microsoft.com/office/drawing/2014/main" id="{67C16D64-73A7-4CFF-B515-17C613D7D32B}"/>
               </a:ext>
             </a:extLst>
           </p:cNvPr>
@@ -23079,7 +22443,7 @@
           <p:cNvPr id="11" name="crop에 한 열이 더 포함됨">
             <a:extLst xmlns:a="http://schemas.openxmlformats.org/drawingml/2006/main">
               <a:ext uri="{FF2B5EF4-FFF2-40B4-BE49-F238E27FC236}">
-                <a16:creationId xmlns:a16="http://schemas.microsoft.com/office/drawing/2014/main" id="{224AF0A5-DA88-4A9A-93A5-3DE6010776CB}"/>
+                <a16:creationId xmlns:a16="http://schemas.microsoft.com/office/drawing/2014/main" id="{CC94824A-C8F8-42DC-983C-4013DE9A36E5}"/>
               </a:ext>
             </a:extLst>
           </p:cNvPr>
@@ -23237,7 +22601,7 @@
           <p:cNvPr id="12" name="테스트·호출 경로·계약 연결&#10;원인 설명 / 코드 수정 없음">
             <a:extLst xmlns:a="http://schemas.openxmlformats.org/drawingml/2006/main">
               <a:ext uri="{FF2B5EF4-FFF2-40B4-BE49-F238E27FC236}">
-                <a16:creationId xmlns:a16="http://schemas.microsoft.com/office/drawing/2014/main" id="{B83FD470-C275-4684-9872-400182C0265A}"/>
+                <a16:creationId xmlns:a16="http://schemas.microsoft.com/office/drawing/2014/main" id="{6161DBBD-5A0B-4537-8306-3A9FEA4B8339}"/>
               </a:ext>
             </a:extLst>
           </p:cNvPr>
@@ -23418,7 +22782,7 @@
           <p:cNvPr id="13" name="임시 디렉터리를 만들 수 없음">
             <a:extLst xmlns:a="http://schemas.openxmlformats.org/drawingml/2006/main">
               <a:ext uri="{FF2B5EF4-FFF2-40B4-BE49-F238E27FC236}">
-                <a16:creationId xmlns:a16="http://schemas.microsoft.com/office/drawing/2014/main" id="{77FEFDDF-35B0-4234-B7DA-F09D4E9571DB}"/>
+                <a16:creationId xmlns:a16="http://schemas.microsoft.com/office/drawing/2014/main" id="{B4D7F965-6598-4543-B93A-8F46642B602F}"/>
               </a:ext>
             </a:extLst>
           </p:cNvPr>
@@ -23576,7 +22940,7 @@
           <p:cNvPr id="14" name="읽기 전용 권한 때문에&#10;서로 다른 테스트 3건이 오류">
             <a:extLst xmlns:a="http://schemas.openxmlformats.org/drawingml/2006/main">
               <a:ext uri="{FF2B5EF4-FFF2-40B4-BE49-F238E27FC236}">
-                <a16:creationId xmlns:a16="http://schemas.microsoft.com/office/drawing/2014/main" id="{50E122C1-4388-4FC8-AB52-8988E8D78503}"/>
+                <a16:creationId xmlns:a16="http://schemas.microsoft.com/office/drawing/2014/main" id="{6C27689F-52D5-46C3-AD54-505585388ED9}"/>
               </a:ext>
             </a:extLst>
           </p:cNvPr>
@@ -23757,7 +23121,7 @@
           <p:cNvPr id="15" name="">
             <a:extLst xmlns:a="http://schemas.openxmlformats.org/drawingml/2006/main">
               <a:ext uri="{FF2B5EF4-FFF2-40B4-BE49-F238E27FC236}">
-                <a16:creationId xmlns:a16="http://schemas.microsoft.com/office/drawing/2014/main" id="{C90765A1-8207-473D-9482-786A36DD9BFD}"/>
+                <a16:creationId xmlns:a16="http://schemas.microsoft.com/office/drawing/2014/main" id="{34A29DBC-5C8C-4738-A809-D06ED5CF7D03}"/>
               </a:ext>
             </a:extLst>
           </p:cNvPr>
@@ -23788,7 +23152,7 @@
           <p:cNvPr id="16" name="전체 실행 기록: 7개 통과 + crop 실패 + 환경 오류 3건">
             <a:extLst xmlns:a="http://schemas.openxmlformats.org/drawingml/2006/main">
               <a:ext uri="{FF2B5EF4-FFF2-40B4-BE49-F238E27FC236}">
-                <a16:creationId xmlns:a16="http://schemas.microsoft.com/office/drawing/2014/main" id="{EF9E5F0C-08D2-44C2-A469-574D5BD8790D}"/>
+                <a16:creationId xmlns:a16="http://schemas.microsoft.com/office/drawing/2014/main" id="{1DE94CDA-3614-4528-96B0-A8637DDCA81C}"/>
               </a:ext>
             </a:extLst>
           </p:cNvPr>
@@ -23944,7 +23308,7 @@
     </p:spTree>
     <p:extLst>
       <p:ext uri="{BB962C8B-B14F-4D97-AF65-F5344CB8AC3E}">
-        <p14:creationId xmlns:p14="http://schemas.microsoft.com/office/powerpoint/2010/main" val="1556357695"/>
+        <p14:creationId xmlns:p14="http://schemas.microsoft.com/office/powerpoint/2010/main" val="53074992"/>
       </p:ext>
     </p:extLst>
   </p:cSld>
@@ -23975,7 +23339,7 @@
           <p:cNvPr id="12" name="ACT 0 · Context를 찾는 주체">
             <a:extLst xmlns:a="http://schemas.openxmlformats.org/drawingml/2006/main">
               <a:ext uri="{FF2B5EF4-FFF2-40B4-BE49-F238E27FC236}">
-                <a16:creationId xmlns:a16="http://schemas.microsoft.com/office/drawing/2014/main" id="{13FC8076-79D0-4DEC-8993-FB44772D9249}"/>
+                <a16:creationId xmlns:a16="http://schemas.microsoft.com/office/drawing/2014/main" id="{DF261AA8-ED77-46F7-B672-12D4935686C4}"/>
               </a:ext>
             </a:extLst>
           </p:cNvPr>
@@ -24133,7 +23497,7 @@
           <p:cNvPr id="2" name="S07">
             <a:extLst xmlns:a="http://schemas.openxmlformats.org/drawingml/2006/main">
               <a:ext uri="{FF2B5EF4-FFF2-40B4-BE49-F238E27FC236}">
-                <a16:creationId xmlns:a16="http://schemas.microsoft.com/office/drawing/2014/main" id="{01BFBD3C-6B4D-4C79-957B-4184617EC34F}"/>
+                <a16:creationId xmlns:a16="http://schemas.microsoft.com/office/drawing/2014/main" id="{ACEC01B8-67D5-4591-8A50-F356683974A6}"/>
               </a:ext>
             </a:extLst>
           </p:cNvPr>
@@ -24291,7 +23655,7 @@
           <p:cNvPr id="3" name="코드를 AI에게 가져가는 대신&#10;AI를 Repository로 데려간다">
             <a:extLst xmlns:a="http://schemas.openxmlformats.org/drawingml/2006/main">
               <a:ext uri="{FF2B5EF4-FFF2-40B4-BE49-F238E27FC236}">
-                <a16:creationId xmlns:a16="http://schemas.microsoft.com/office/drawing/2014/main" id="{A3AD61F3-891E-4E58-BD98-F9F8FCD2DF33}"/>
+                <a16:creationId xmlns:a16="http://schemas.microsoft.com/office/drawing/2014/main" id="{FD4A72AF-E326-4C6C-A7B7-A3086501A9DF}"/>
               </a:ext>
             </a:extLst>
           </p:cNvPr>
@@ -24472,7 +23836,7 @@
           <p:cNvPr id="4" name="">
             <a:extLst xmlns:a="http://schemas.openxmlformats.org/drawingml/2006/main">
               <a:ext uri="{FF2B5EF4-FFF2-40B4-BE49-F238E27FC236}">
-                <a16:creationId xmlns:a16="http://schemas.microsoft.com/office/drawing/2014/main" id="{93102F3E-CBA5-41F4-AED7-389C6F2655F4}"/>
+                <a16:creationId xmlns:a16="http://schemas.microsoft.com/office/drawing/2014/main" id="{CB75F9E7-F0AA-4EBB-A4E5-FBE748BF0B92}"/>
               </a:ext>
             </a:extLst>
           </p:cNvPr>
@@ -24503,7 +23867,7 @@
           <p:cNvPr id="5" name="교육 모델 · TRIAL-001 단일 CLI 관찰과 연결 · AI 생성 설명용 삽화">
             <a:extLst xmlns:a="http://schemas.openxmlformats.org/drawingml/2006/main">
               <a:ext uri="{FF2B5EF4-FFF2-40B4-BE49-F238E27FC236}">
-                <a16:creationId xmlns:a16="http://schemas.microsoft.com/office/drawing/2014/main" id="{5AA366D2-9468-4C99-B214-C34BF10A13C0}"/>
+                <a16:creationId xmlns:a16="http://schemas.microsoft.com/office/drawing/2014/main" id="{8FC7F62C-6807-4AB6-B984-8FC595B8980C}"/>
               </a:ext>
             </a:extLst>
           </p:cNvPr>
@@ -24661,7 +24025,7 @@
           <p:cNvPr id="6" name="목표 설정과 근거 검토는 개발자에게 남습니다. Repository 접근이 Task 의도를 정하지는 않습니다.">
             <a:extLst xmlns:a="http://schemas.openxmlformats.org/drawingml/2006/main">
               <a:ext uri="{FF2B5EF4-FFF2-40B4-BE49-F238E27FC236}">
-                <a16:creationId xmlns:a16="http://schemas.microsoft.com/office/drawing/2014/main" id="{641C2680-2797-4E78-ABBB-9C9A7FDA3EDE}"/>
+                <a16:creationId xmlns:a16="http://schemas.microsoft.com/office/drawing/2014/main" id="{28AA34C9-8ECA-4507-89CF-57BAA80395B7}"/>
               </a:ext>
             </a:extLst>
           </p:cNvPr>
@@ -24819,7 +24183,7 @@
           <p:cNvPr id="7" name="내가 골라 전달하는 Context">
             <a:extLst xmlns:a="http://schemas.openxmlformats.org/drawingml/2006/main">
               <a:ext uri="{FF2B5EF4-FFF2-40B4-BE49-F238E27FC236}">
-                <a16:creationId xmlns:a16="http://schemas.microsoft.com/office/drawing/2014/main" id="{73FB7380-49C3-4AE4-BF00-B26AEF41747D}"/>
+                <a16:creationId xmlns:a16="http://schemas.microsoft.com/office/drawing/2014/main" id="{1C13C35E-77D9-4BC1-A6CE-51AE79E943DE}"/>
               </a:ext>
             </a:extLst>
           </p:cNvPr>
@@ -24977,7 +24341,7 @@
           <p:cNvPr id="8" name="조사를 맡기고 근거를 확인">
             <a:extLst xmlns:a="http://schemas.openxmlformats.org/drawingml/2006/main">
               <a:ext uri="{FF2B5EF4-FFF2-40B4-BE49-F238E27FC236}">
-                <a16:creationId xmlns:a16="http://schemas.microsoft.com/office/drawing/2014/main" id="{40B489DA-5337-44CC-AB7B-982D2CB47FBD}"/>
+                <a16:creationId xmlns:a16="http://schemas.microsoft.com/office/drawing/2014/main" id="{7B450BA3-63B0-4C3D-A26A-FE4210293D8A}"/>
               </a:ext>
             </a:extLst>
           </p:cNvPr>
@@ -25135,7 +24499,7 @@
           <p:cNvPr id="9" name="">
             <a:extLst xmlns:a="http://schemas.openxmlformats.org/drawingml/2006/main">
               <a:ext uri="{FF2B5EF4-FFF2-40B4-BE49-F238E27FC236}">
-                <a16:creationId xmlns:a16="http://schemas.microsoft.com/office/drawing/2014/main" id="{867EA41E-7698-4507-A11F-84E39FFB02E2}"/>
+                <a16:creationId xmlns:a16="http://schemas.microsoft.com/office/drawing/2014/main" id="{C4F72CA0-BE39-4180-84AA-C782D51FE60C}"/>
               </a:ext>
             </a:extLst>
           </p:cNvPr>
@@ -25145,7 +24509,7 @@
           <p:nvPr/>
         </p:nvPicPr>
         <p:blipFill>
-          <a:blip xmlns:r="http://schemas.openxmlformats.org/officeDocument/2006/relationships" xmlns:a="http://schemas.openxmlformats.org/drawingml/2006/main" r:embed="R869af1ec4cca4bc7"/>
+          <a:blip xmlns:r="http://schemas.openxmlformats.org/officeDocument/2006/relationships" xmlns:a="http://schemas.openxmlformats.org/drawingml/2006/main" r:embed="Rf0977a8fc8ce46b4"/>
           <a:srcRect xmlns:a="http://schemas.openxmlformats.org/drawingml/2006/main" l="0" t="18000" r="0" b="15000"/>
           <a:stretch xmlns:a="http://schemas.openxmlformats.org/drawingml/2006/main"/>
         </p:blipFill>
@@ -25164,7 +24528,7 @@
           <p:cNvPr id="10" name="코드 조각을 선택·복사">
             <a:extLst xmlns:a="http://schemas.openxmlformats.org/drawingml/2006/main">
               <a:ext uri="{FF2B5EF4-FFF2-40B4-BE49-F238E27FC236}">
-                <a16:creationId xmlns:a16="http://schemas.microsoft.com/office/drawing/2014/main" id="{46B9CBEB-295E-43ED-95C1-E83C0153656A}"/>
+                <a16:creationId xmlns:a16="http://schemas.microsoft.com/office/drawing/2014/main" id="{AC18A833-21FC-4EFA-BEA8-5DD9D7F58017}"/>
               </a:ext>
             </a:extLst>
           </p:cNvPr>
@@ -25322,7 +24686,7 @@
           <p:cNvPr id="11" name="목표는 사람이, 탐색은 Agent와">
             <a:extLst xmlns:a="http://schemas.openxmlformats.org/drawingml/2006/main">
               <a:ext uri="{FF2B5EF4-FFF2-40B4-BE49-F238E27FC236}">
-                <a16:creationId xmlns:a16="http://schemas.microsoft.com/office/drawing/2014/main" id="{0453DBC3-CA8B-472E-BD2F-49F6F610491D}"/>
+                <a16:creationId xmlns:a16="http://schemas.microsoft.com/office/drawing/2014/main" id="{594D53E0-3778-4E4C-8AA6-45A3CA8FE13A}"/>
               </a:ext>
             </a:extLst>
           </p:cNvPr>
@@ -25478,7 +24842,7 @@
     </p:spTree>
     <p:extLst>
       <p:ext uri="{BB962C8B-B14F-4D97-AF65-F5344CB8AC3E}">
-        <p14:creationId xmlns:p14="http://schemas.microsoft.com/office/powerpoint/2010/main" val="801953783"/>
+        <p14:creationId xmlns:p14="http://schemas.microsoft.com/office/powerpoint/2010/main" val="1643376365"/>
       </p:ext>
     </p:extLst>
   </p:cSld>
@@ -25509,7 +24873,7 @@
           <p:cNvPr id="15" name="ACT 0 · 접근할 정보와 정할 목표">
             <a:extLst xmlns:a="http://schemas.openxmlformats.org/drawingml/2006/main">
               <a:ext uri="{FF2B5EF4-FFF2-40B4-BE49-F238E27FC236}">
-                <a16:creationId xmlns:a16="http://schemas.microsoft.com/office/drawing/2014/main" id="{736312E8-09FD-4AA7-97B4-EF62BE1E0069}"/>
+                <a16:creationId xmlns:a16="http://schemas.microsoft.com/office/drawing/2014/main" id="{E2BF1C1E-2682-4A05-90BF-202D7D9C0809}"/>
               </a:ext>
             </a:extLst>
           </p:cNvPr>
@@ -25667,7 +25031,7 @@
           <p:cNvPr id="2" name="S08">
             <a:extLst xmlns:a="http://schemas.openxmlformats.org/drawingml/2006/main">
               <a:ext uri="{FF2B5EF4-FFF2-40B4-BE49-F238E27FC236}">
-                <a16:creationId xmlns:a16="http://schemas.microsoft.com/office/drawing/2014/main" id="{B0714574-E7BB-4EB3-846B-C8E6322E9574}"/>
+                <a16:creationId xmlns:a16="http://schemas.microsoft.com/office/drawing/2014/main" id="{D136EF37-B68C-455C-9E48-9D217D6EAD60}"/>
               </a:ext>
             </a:extLst>
           </p:cNvPr>
@@ -25825,7 +25189,7 @@
           <p:cNvPr id="3" name="Repository 접근과 Task 의도는 별개다">
             <a:extLst xmlns:a="http://schemas.openxmlformats.org/drawingml/2006/main">
               <a:ext uri="{FF2B5EF4-FFF2-40B4-BE49-F238E27FC236}">
-                <a16:creationId xmlns:a16="http://schemas.microsoft.com/office/drawing/2014/main" id="{2317D594-8238-4154-B9B2-BF209B3E5B3B}"/>
+                <a16:creationId xmlns:a16="http://schemas.microsoft.com/office/drawing/2014/main" id="{C5E995D3-3939-4652-A8E7-5626163A662B}"/>
               </a:ext>
             </a:extLst>
           </p:cNvPr>
@@ -25983,7 +25347,7 @@
           <p:cNvPr id="4" name="">
             <a:extLst xmlns:a="http://schemas.openxmlformats.org/drawingml/2006/main">
               <a:ext uri="{FF2B5EF4-FFF2-40B4-BE49-F238E27FC236}">
-                <a16:creationId xmlns:a16="http://schemas.microsoft.com/office/drawing/2014/main" id="{B6DF42F4-B249-4BFC-8269-9DD558281ACC}"/>
+                <a16:creationId xmlns:a16="http://schemas.microsoft.com/office/drawing/2014/main" id="{AA364CE8-4531-45E3-B4BB-5FAA63521EAC}"/>
               </a:ext>
             </a:extLst>
           </p:cNvPr>
@@ -26014,7 +25378,7 @@
           <p:cNvPr id="5" name="이 과정의 교육 모델 · Repository 접근과 작업 의도의 관계">
             <a:extLst xmlns:a="http://schemas.openxmlformats.org/drawingml/2006/main">
               <a:ext uri="{FF2B5EF4-FFF2-40B4-BE49-F238E27FC236}">
-                <a16:creationId xmlns:a16="http://schemas.microsoft.com/office/drawing/2014/main" id="{86655B16-5A10-4071-9E6E-17A4EA419802}"/>
+                <a16:creationId xmlns:a16="http://schemas.microsoft.com/office/drawing/2014/main" id="{D7AB7F99-DC2B-4F91-A05F-615638B09509}"/>
               </a:ext>
             </a:extLst>
           </p:cNvPr>
@@ -26172,7 +25536,7 @@
           <p:cNvPr id="6" name="모든 제품이나 환경의 기능을 설명하는 공식 분류가 아닙니다.">
             <a:extLst xmlns:a="http://schemas.openxmlformats.org/drawingml/2006/main">
               <a:ext uri="{FF2B5EF4-FFF2-40B4-BE49-F238E27FC236}">
-                <a16:creationId xmlns:a16="http://schemas.microsoft.com/office/drawing/2014/main" id="{B6966F82-C238-495D-A45E-384E6CC283D5}"/>
+                <a16:creationId xmlns:a16="http://schemas.microsoft.com/office/drawing/2014/main" id="{316C8112-E0E6-4809-92E5-EC48DD643AB5}"/>
               </a:ext>
             </a:extLst>
           </p:cNvPr>
@@ -26330,7 +25694,7 @@
           <p:cNvPr id="7" name="볼 수 있는 것">
             <a:extLst xmlns:a="http://schemas.openxmlformats.org/drawingml/2006/main">
               <a:ext uri="{FF2B5EF4-FFF2-40B4-BE49-F238E27FC236}">
-                <a16:creationId xmlns:a16="http://schemas.microsoft.com/office/drawing/2014/main" id="{075735BF-D4F9-41AF-BB15-3E6F48ECED2F}"/>
+                <a16:creationId xmlns:a16="http://schemas.microsoft.com/office/drawing/2014/main" id="{A3DC94D2-F3FA-4C0C-B64C-4E0C6694573F}"/>
               </a:ext>
             </a:extLst>
           </p:cNvPr>
@@ -26488,7 +25852,7 @@
           <p:cNvPr id="8" name="정해야 하는 것">
             <a:extLst xmlns:a="http://schemas.openxmlformats.org/drawingml/2006/main">
               <a:ext uri="{FF2B5EF4-FFF2-40B4-BE49-F238E27FC236}">
-                <a16:creationId xmlns:a16="http://schemas.microsoft.com/office/drawing/2014/main" id="{B4C9DDD8-55B1-4482-84CF-5A35EE6C9279}"/>
+                <a16:creationId xmlns:a16="http://schemas.microsoft.com/office/drawing/2014/main" id="{707F1DBA-02C1-4BA1-9AE0-55F4696DD5F8}"/>
               </a:ext>
             </a:extLst>
           </p:cNvPr>
@@ -26646,7 +26010,7 @@
           <p:cNvPr id="9" name="">
             <a:extLst xmlns:a="http://schemas.openxmlformats.org/drawingml/2006/main">
               <a:ext uri="{FF2B5EF4-FFF2-40B4-BE49-F238E27FC236}">
-                <a16:creationId xmlns:a16="http://schemas.microsoft.com/office/drawing/2014/main" id="{CE59D22A-4C11-4D74-BF38-6178BBC89D0E}"/>
+                <a16:creationId xmlns:a16="http://schemas.microsoft.com/office/drawing/2014/main" id="{5A538ABC-7BEF-4DC1-B6FA-D5B09721F180}"/>
               </a:ext>
             </a:extLst>
           </p:cNvPr>
@@ -26677,7 +26041,7 @@
           <p:cNvPr id="10" name="">
             <a:extLst xmlns:a="http://schemas.openxmlformats.org/drawingml/2006/main">
               <a:ext uri="{FF2B5EF4-FFF2-40B4-BE49-F238E27FC236}">
-                <a16:creationId xmlns:a16="http://schemas.microsoft.com/office/drawing/2014/main" id="{DE6D561E-BE9D-4A8C-BD7D-3BAF4FE4CC14}"/>
+                <a16:creationId xmlns:a16="http://schemas.microsoft.com/office/drawing/2014/main" id="{820BF176-6974-4D94-A527-624043348ECF}"/>
               </a:ext>
             </a:extLst>
           </p:cNvPr>
@@ -26708,7 +26072,7 @@
           <p:cNvPr id="11" name="파일&#10;구현&#10;테스트">
             <a:extLst xmlns:a="http://schemas.openxmlformats.org/drawingml/2006/main">
               <a:ext uri="{FF2B5EF4-FFF2-40B4-BE49-F238E27FC236}">
-                <a16:creationId xmlns:a16="http://schemas.microsoft.com/office/drawing/2014/main" id="{A4114561-53EF-4DE2-969E-826652E90CD4}"/>
+                <a16:creationId xmlns:a16="http://schemas.microsoft.com/office/drawing/2014/main" id="{226DF72D-27AC-4A69-82B7-BDE7F428DBA9}"/>
               </a:ext>
             </a:extLst>
           </p:cNvPr>
@@ -26912,7 +26276,7 @@
           <p:cNvPr id="12" name="원하는 변화&#10;허용할 범위&#10;완료 판단">
             <a:extLst xmlns:a="http://schemas.openxmlformats.org/drawingml/2006/main">
               <a:ext uri="{FF2B5EF4-FFF2-40B4-BE49-F238E27FC236}">
-                <a16:creationId xmlns:a16="http://schemas.microsoft.com/office/drawing/2014/main" id="{8F58E778-6CCF-4601-AAFF-26EABE3EE8D9}"/>
+                <a16:creationId xmlns:a16="http://schemas.microsoft.com/office/drawing/2014/main" id="{82BAA65C-3D99-4A4B-A253-8FC278733F15}"/>
               </a:ext>
             </a:extLst>
           </p:cNvPr>
@@ -27116,7 +26480,7 @@
           <p:cNvPr id="13" name="≠">
             <a:extLst xmlns:a="http://schemas.openxmlformats.org/drawingml/2006/main">
               <a:ext uri="{FF2B5EF4-FFF2-40B4-BE49-F238E27FC236}">
-                <a16:creationId xmlns:a16="http://schemas.microsoft.com/office/drawing/2014/main" id="{2EF81E67-F72A-41A1-BAF8-17CA10D941AA}"/>
+                <a16:creationId xmlns:a16="http://schemas.microsoft.com/office/drawing/2014/main" id="{9BCA4971-33E6-44CF-B7B1-F5536C7980AF}"/>
               </a:ext>
             </a:extLst>
           </p:cNvPr>
@@ -27274,7 +26638,7 @@
           <p:cNvPr id="14" name="코드가 보여도, 원하는 일은 따로 전달해야 한다.">
             <a:extLst xmlns:a="http://schemas.openxmlformats.org/drawingml/2006/main">
               <a:ext uri="{FF2B5EF4-FFF2-40B4-BE49-F238E27FC236}">
-                <a16:creationId xmlns:a16="http://schemas.microsoft.com/office/drawing/2014/main" id="{3FA6128A-CB7F-424B-A75C-51433F7CEDFB}"/>
+                <a16:creationId xmlns:a16="http://schemas.microsoft.com/office/drawing/2014/main" id="{FB7130CE-9204-4DC1-B315-129107083A9C}"/>
               </a:ext>
             </a:extLst>
           </p:cNvPr>
@@ -27430,7 +26794,7 @@
     </p:spTree>
     <p:extLst>
       <p:ext uri="{BB962C8B-B14F-4D97-AF65-F5344CB8AC3E}">
-        <p14:creationId xmlns:p14="http://schemas.microsoft.com/office/powerpoint/2010/main" val="1031975324"/>
+        <p14:creationId xmlns:p14="http://schemas.microsoft.com/office/powerpoint/2010/main" val="1575183741"/>
       </p:ext>
     </p:extLst>
   </p:cSld>
@@ -27461,7 +26825,7 @@
           <p:cNvPr id="11" name="ACT 0 · 다음 질문">
             <a:extLst xmlns:a="http://schemas.openxmlformats.org/drawingml/2006/main">
               <a:ext uri="{FF2B5EF4-FFF2-40B4-BE49-F238E27FC236}">
-                <a16:creationId xmlns:a16="http://schemas.microsoft.com/office/drawing/2014/main" id="{4110378D-0819-4B6A-AD54-411BA2F37EE9}"/>
+                <a16:creationId xmlns:a16="http://schemas.microsoft.com/office/drawing/2014/main" id="{0715B9A0-45A6-4958-99B4-1BDB162D32D8}"/>
               </a:ext>
             </a:extLst>
           </p:cNvPr>
@@ -27619,7 +26983,7 @@
           <p:cNvPr id="2" name="S09">
             <a:extLst xmlns:a="http://schemas.openxmlformats.org/drawingml/2006/main">
               <a:ext uri="{FF2B5EF4-FFF2-40B4-BE49-F238E27FC236}">
-                <a16:creationId xmlns:a16="http://schemas.microsoft.com/office/drawing/2014/main" id="{6F410E56-9FBA-48D4-B4D3-DBFC65C2056C}"/>
+                <a16:creationId xmlns:a16="http://schemas.microsoft.com/office/drawing/2014/main" id="{C68B83E7-86AA-4194-BA87-E5377044B362}"/>
               </a:ext>
             </a:extLst>
           </p:cNvPr>
@@ -27777,7 +27141,7 @@
           <p:cNvPr id="3" name="Repository를 보면 내가 원하는 것까지 알까?">
             <a:extLst xmlns:a="http://schemas.openxmlformats.org/drawingml/2006/main">
               <a:ext uri="{FF2B5EF4-FFF2-40B4-BE49-F238E27FC236}">
-                <a16:creationId xmlns:a16="http://schemas.microsoft.com/office/drawing/2014/main" id="{0EE21C5F-1F68-40FE-B709-6C3C1C7640EC}"/>
+                <a16:creationId xmlns:a16="http://schemas.microsoft.com/office/drawing/2014/main" id="{1E213C83-0153-4C08-96BB-46326CDF6832}"/>
               </a:ext>
             </a:extLst>
           </p:cNvPr>
@@ -27935,7 +27299,7 @@
           <p:cNvPr id="4" name="">
             <a:extLst xmlns:a="http://schemas.openxmlformats.org/drawingml/2006/main">
               <a:ext uri="{FF2B5EF4-FFF2-40B4-BE49-F238E27FC236}">
-                <a16:creationId xmlns:a16="http://schemas.microsoft.com/office/drawing/2014/main" id="{9E8D6EA4-A8E9-4004-B97E-E3C48686C750}"/>
+                <a16:creationId xmlns:a16="http://schemas.microsoft.com/office/drawing/2014/main" id="{80728951-3F89-4D7C-83AF-C75DDD44FB02}"/>
               </a:ext>
             </a:extLst>
           </p:cNvPr>
@@ -27966,7 +27330,7 @@
           <p:cNvPr id="5" name="함께 생각해 보기 · 교육 모델">
             <a:extLst xmlns:a="http://schemas.openxmlformats.org/drawingml/2006/main">
               <a:ext uri="{FF2B5EF4-FFF2-40B4-BE49-F238E27FC236}">
-                <a16:creationId xmlns:a16="http://schemas.microsoft.com/office/drawing/2014/main" id="{38F2D000-33AD-4F1D-8C88-854667B5F97E}"/>
+                <a16:creationId xmlns:a16="http://schemas.microsoft.com/office/drawing/2014/main" id="{0D81BD3E-91DF-46ED-999D-78BE3DD71DAC}"/>
               </a:ext>
             </a:extLst>
           </p:cNvPr>
@@ -28124,7 +27488,7 @@
           <p:cNvPr id="6" name="현재 맡기고 싶은 일을 떠올려 보세요. 질문과 경험 공유는 자발적으로 진행합니다.">
             <a:extLst xmlns:a="http://schemas.openxmlformats.org/drawingml/2006/main">
               <a:ext uri="{FF2B5EF4-FFF2-40B4-BE49-F238E27FC236}">
-                <a16:creationId xmlns:a16="http://schemas.microsoft.com/office/drawing/2014/main" id="{FFFABE36-7EE0-4299-8791-3EACD886F95A}"/>
+                <a16:creationId xmlns:a16="http://schemas.microsoft.com/office/drawing/2014/main" id="{D409D152-2A2B-4ABF-B286-3DBD11B08DEF}"/>
               </a:ext>
             </a:extLst>
           </p:cNvPr>
@@ -28282,7 +27646,7 @@
           <p:cNvPr id="7" name="지금 이 저장소에&#10;어떤 일을 맡기고 싶으신가요?">
             <a:extLst xmlns:a="http://schemas.openxmlformats.org/drawingml/2006/main">
               <a:ext uri="{FF2B5EF4-FFF2-40B4-BE49-F238E27FC236}">
-                <a16:creationId xmlns:a16="http://schemas.microsoft.com/office/drawing/2014/main" id="{E368DECD-EC4B-476F-A27D-46EFACB2F518}"/>
+                <a16:creationId xmlns:a16="http://schemas.microsoft.com/office/drawing/2014/main" id="{ED521D85-7A30-4169-90ED-191D3FBCE05D}"/>
               </a:ext>
             </a:extLst>
           </p:cNvPr>
@@ -28463,7 +27827,7 @@
           <p:cNvPr id="8" name="?">
             <a:extLst xmlns:a="http://schemas.openxmlformats.org/drawingml/2006/main">
               <a:ext uri="{FF2B5EF4-FFF2-40B4-BE49-F238E27FC236}">
-                <a16:creationId xmlns:a16="http://schemas.microsoft.com/office/drawing/2014/main" id="{3C1A6E4F-B4A2-4DC8-9DD2-187E546ED4D8}"/>
+                <a16:creationId xmlns:a16="http://schemas.microsoft.com/office/drawing/2014/main" id="{FA9A1F3D-E627-4190-894E-CF1CD514D720}"/>
               </a:ext>
             </a:extLst>
           </p:cNvPr>
@@ -28621,7 +27985,7 @@
           <p:cNvPr id="9" name="">
             <a:extLst xmlns:a="http://schemas.openxmlformats.org/drawingml/2006/main">
               <a:ext uri="{FF2B5EF4-FFF2-40B4-BE49-F238E27FC236}">
-                <a16:creationId xmlns:a16="http://schemas.microsoft.com/office/drawing/2014/main" id="{FE6ECC70-592E-4656-BA0C-A0668993086A}"/>
+                <a16:creationId xmlns:a16="http://schemas.microsoft.com/office/drawing/2014/main" id="{5CA54179-2021-43E2-82F3-EDA96C5A6CE9}"/>
               </a:ext>
             </a:extLst>
           </p:cNvPr>
@@ -28652,7 +28016,7 @@
           <p:cNvPr id="10" name="그 원하는 결과까지&#10;코드에 적혀 있을까요?">
             <a:extLst xmlns:a="http://schemas.openxmlformats.org/drawingml/2006/main">
               <a:ext uri="{FF2B5EF4-FFF2-40B4-BE49-F238E27FC236}">
-                <a16:creationId xmlns:a16="http://schemas.microsoft.com/office/drawing/2014/main" id="{13518D1C-7D8B-424E-BB0E-3080084A0DF0}"/>
+                <a16:creationId xmlns:a16="http://schemas.microsoft.com/office/drawing/2014/main" id="{E0982958-9045-405D-A133-A2A634935E56}"/>
               </a:ext>
             </a:extLst>
           </p:cNvPr>
@@ -28831,7 +28195,7 @@
     </p:spTree>
     <p:extLst>
       <p:ext uri="{BB962C8B-B14F-4D97-AF65-F5344CB8AC3E}">
-        <p14:creationId xmlns:p14="http://schemas.microsoft.com/office/powerpoint/2010/main" val="754504573"/>
+        <p14:creationId xmlns:p14="http://schemas.microsoft.com/office/powerpoint/2010/main" val="780849956"/>
       </p:ext>
     </p:extLst>
   </p:cSld>

--- a/production/ACT_0.pptx
+++ b/production/ACT_0.pptx
@@ -2,21 +2,21 @@
 <file path=ppt/presentation.xml><?xml version="1.0" encoding="utf-8"?>
 <p:presentation xmlns:p="http://schemas.openxmlformats.org/presentationml/2006/main">
   <p:sldMasterIdLst>
-    <p:sldMasterId xmlns:r="http://schemas.openxmlformats.org/officeDocument/2006/relationships" id="2147483648" r:id="Rbde8ed4e0f7e4171"/>
+    <p:sldMasterId xmlns:r="http://schemas.openxmlformats.org/officeDocument/2006/relationships" id="2147483648" r:id="Rbdbfeafa66684e10"/>
   </p:sldMasterIdLst>
   <p:notesMasterIdLst>
-    <p:notesMasterId xmlns:r="http://schemas.openxmlformats.org/officeDocument/2006/relationships" r:id="R7890dc169501488c"/>
+    <p:notesMasterId xmlns:r="http://schemas.openxmlformats.org/officeDocument/2006/relationships" r:id="Rbde1282568e4442b"/>
   </p:notesMasterIdLst>
   <p:sldIdLst>
-    <p:sldId xmlns:r="http://schemas.openxmlformats.org/officeDocument/2006/relationships" id="256" r:id="Rcf54a016f06f409c"/>
-    <p:sldId xmlns:r="http://schemas.openxmlformats.org/officeDocument/2006/relationships" id="257" r:id="R066b0f0225a843ae"/>
-    <p:sldId xmlns:r="http://schemas.openxmlformats.org/officeDocument/2006/relationships" id="258" r:id="R03386f7911ee4a5c"/>
-    <p:sldId xmlns:r="http://schemas.openxmlformats.org/officeDocument/2006/relationships" id="259" r:id="R2f7d86f2eb934a6f"/>
-    <p:sldId xmlns:r="http://schemas.openxmlformats.org/officeDocument/2006/relationships" id="260" r:id="R8a2da33828c3498d"/>
-    <p:sldId xmlns:r="http://schemas.openxmlformats.org/officeDocument/2006/relationships" id="261" r:id="Rf58b438d8f4848fd"/>
-    <p:sldId xmlns:r="http://schemas.openxmlformats.org/officeDocument/2006/relationships" id="262" r:id="R219d7eb1d7704c80"/>
-    <p:sldId xmlns:r="http://schemas.openxmlformats.org/officeDocument/2006/relationships" id="263" r:id="R70ce4b244ce645c7"/>
-    <p:sldId xmlns:r="http://schemas.openxmlformats.org/officeDocument/2006/relationships" id="264" r:id="Rd0bd723886b348e4"/>
+    <p:sldId xmlns:r="http://schemas.openxmlformats.org/officeDocument/2006/relationships" id="256" r:id="Re25ba3eaa5e7449f"/>
+    <p:sldId xmlns:r="http://schemas.openxmlformats.org/officeDocument/2006/relationships" id="257" r:id="Rf86159611443443a"/>
+    <p:sldId xmlns:r="http://schemas.openxmlformats.org/officeDocument/2006/relationships" id="258" r:id="Ra0feeb9f4c4843d4"/>
+    <p:sldId xmlns:r="http://schemas.openxmlformats.org/officeDocument/2006/relationships" id="259" r:id="Re282c6bbb06a4c8d"/>
+    <p:sldId xmlns:r="http://schemas.openxmlformats.org/officeDocument/2006/relationships" id="260" r:id="R7f0ce758eaba4e2b"/>
+    <p:sldId xmlns:r="http://schemas.openxmlformats.org/officeDocument/2006/relationships" id="261" r:id="Rc20c590bffc44f96"/>
+    <p:sldId xmlns:r="http://schemas.openxmlformats.org/officeDocument/2006/relationships" id="262" r:id="Rc8df4fc184e04353"/>
+    <p:sldId xmlns:r="http://schemas.openxmlformats.org/officeDocument/2006/relationships" id="263" r:id="R870e1f9c893a401b"/>
+    <p:sldId xmlns:r="http://schemas.openxmlformats.org/officeDocument/2006/relationships" id="264" r:id="R0772e28dabd64f86"/>
   </p:sldIdLst>
   <p:sldSz cx="12192000" cy="6858000"/>
   <p:notesSz cx="6858000" cy="9144000"/>
@@ -2952,7 +2952,7 @@
           <p:cNvPr id="3" name="Title">
             <a:extLst xmlns:a="http://schemas.openxmlformats.org/drawingml/2006/main">
               <a:ext uri="{FF2B5EF4-FFF2-40B4-BE49-F238E27FC236}">
-                <a16:creationId xmlns:a16="http://schemas.microsoft.com/office/drawing/2014/main" id="{6B42B9B9-C82D-43A2-821F-7D81F4AABFDF}"/>
+                <a16:creationId xmlns:a16="http://schemas.microsoft.com/office/drawing/2014/main" id="{56B82EC1-4702-4D17-ABC7-6FC1B9832792}"/>
               </a:ext>
             </a:extLst>
           </p:cNvPr>
@@ -3181,7 +3181,7 @@
           <p:cNvPr id="2" name="Subtitle">
             <a:extLst xmlns:a="http://schemas.openxmlformats.org/drawingml/2006/main">
               <a:ext uri="{FF2B5EF4-FFF2-40B4-BE49-F238E27FC236}">
-                <a16:creationId xmlns:a16="http://schemas.microsoft.com/office/drawing/2014/main" id="{8F0D60A5-81DF-46A3-ACC4-4098114035BA}"/>
+                <a16:creationId xmlns:a16="http://schemas.microsoft.com/office/drawing/2014/main" id="{B09A683E-4342-470B-8D9B-7BAA6D2F7BE6}"/>
               </a:ext>
             </a:extLst>
           </p:cNvPr>
@@ -3427,7 +3427,7 @@
           <p:cNvPr id="2" name="Section title">
             <a:extLst xmlns:a="http://schemas.openxmlformats.org/drawingml/2006/main">
               <a:ext uri="{FF2B5EF4-FFF2-40B4-BE49-F238E27FC236}">
-                <a16:creationId xmlns:a16="http://schemas.microsoft.com/office/drawing/2014/main" id="{C0088B39-ED82-4D4B-94E3-0F64D32EEFEF}"/>
+                <a16:creationId xmlns:a16="http://schemas.microsoft.com/office/drawing/2014/main" id="{A9C251AF-C835-4DB8-92E8-52DCADAFD9CC}"/>
               </a:ext>
             </a:extLst>
           </p:cNvPr>
@@ -3673,7 +3673,7 @@
           <p:cNvPr id="3" name="Title">
             <a:extLst xmlns:a="http://schemas.openxmlformats.org/drawingml/2006/main">
               <a:ext uri="{FF2B5EF4-FFF2-40B4-BE49-F238E27FC236}">
-                <a16:creationId xmlns:a16="http://schemas.microsoft.com/office/drawing/2014/main" id="{F47E57A8-D696-44C5-87AD-06CCC6A0F8BE}"/>
+                <a16:creationId xmlns:a16="http://schemas.microsoft.com/office/drawing/2014/main" id="{7AEAAD17-B335-48B9-8EA1-5304E3647D04}"/>
               </a:ext>
             </a:extLst>
           </p:cNvPr>
@@ -3902,7 +3902,7 @@
           <p:cNvPr id="2" name="Body">
             <a:extLst xmlns:a="http://schemas.openxmlformats.org/drawingml/2006/main">
               <a:ext uri="{FF2B5EF4-FFF2-40B4-BE49-F238E27FC236}">
-                <a16:creationId xmlns:a16="http://schemas.microsoft.com/office/drawing/2014/main" id="{BD11460E-7EDE-4DC4-B245-E5D286D75594}"/>
+                <a16:creationId xmlns:a16="http://schemas.microsoft.com/office/drawing/2014/main" id="{711547CA-25E8-4812-87AA-B975B12E9300}"/>
               </a:ext>
             </a:extLst>
           </p:cNvPr>
@@ -4148,7 +4148,7 @@
           <p:cNvPr id="4" name="Title">
             <a:extLst xmlns:a="http://schemas.openxmlformats.org/drawingml/2006/main">
               <a:ext uri="{FF2B5EF4-FFF2-40B4-BE49-F238E27FC236}">
-                <a16:creationId xmlns:a16="http://schemas.microsoft.com/office/drawing/2014/main" id="{E276F02D-0E41-4A79-9B25-D94FC6D9810C}"/>
+                <a16:creationId xmlns:a16="http://schemas.microsoft.com/office/drawing/2014/main" id="{069A56BA-2EF7-4D13-9EC1-B006E6A69479}"/>
               </a:ext>
             </a:extLst>
           </p:cNvPr>
@@ -4377,7 +4377,7 @@
           <p:cNvPr id="2" name="Left column">
             <a:extLst xmlns:a="http://schemas.openxmlformats.org/drawingml/2006/main">
               <a:ext uri="{FF2B5EF4-FFF2-40B4-BE49-F238E27FC236}">
-                <a16:creationId xmlns:a16="http://schemas.microsoft.com/office/drawing/2014/main" id="{71CD0E1A-3D9F-46B7-A1AE-D35468F2FC53}"/>
+                <a16:creationId xmlns:a16="http://schemas.microsoft.com/office/drawing/2014/main" id="{8E71181F-D300-42FD-8582-8DFE40FCBF70}"/>
               </a:ext>
             </a:extLst>
           </p:cNvPr>
@@ -4606,7 +4606,7 @@
           <p:cNvPr id="3" name="Right column">
             <a:extLst xmlns:a="http://schemas.openxmlformats.org/drawingml/2006/main">
               <a:ext uri="{FF2B5EF4-FFF2-40B4-BE49-F238E27FC236}">
-                <a16:creationId xmlns:a16="http://schemas.microsoft.com/office/drawing/2014/main" id="{1F769DE5-73BD-422E-857C-1C8DEE78146C}"/>
+                <a16:creationId xmlns:a16="http://schemas.microsoft.com/office/drawing/2014/main" id="{7AE94604-D544-41DF-A0DF-DC057E7FF1AC}"/>
               </a:ext>
             </a:extLst>
           </p:cNvPr>
@@ -4852,7 +4852,7 @@
           <p:cNvPr id="3" name="Title">
             <a:extLst xmlns:a="http://schemas.openxmlformats.org/drawingml/2006/main">
               <a:ext uri="{FF2B5EF4-FFF2-40B4-BE49-F238E27FC236}">
-                <a16:creationId xmlns:a16="http://schemas.microsoft.com/office/drawing/2014/main" id="{BC6D5CFF-C1F6-40A3-8CF2-EF8B8AC8FD33}"/>
+                <a16:creationId xmlns:a16="http://schemas.microsoft.com/office/drawing/2014/main" id="{52D3C4D7-0563-45C3-BE24-42B315BFF3DF}"/>
               </a:ext>
             </a:extLst>
           </p:cNvPr>
@@ -5081,7 +5081,7 @@
           <p:cNvPr id="2" name="Left column">
             <a:extLst xmlns:a="http://schemas.openxmlformats.org/drawingml/2006/main">
               <a:ext uri="{FF2B5EF4-FFF2-40B4-BE49-F238E27FC236}">
-                <a16:creationId xmlns:a16="http://schemas.microsoft.com/office/drawing/2014/main" id="{F22C23BF-344B-40E8-8549-0018EBC5CBFF}"/>
+                <a16:creationId xmlns:a16="http://schemas.microsoft.com/office/drawing/2014/main" id="{F6838C4E-3A01-4DB3-92B1-9476BB0F7B19}"/>
               </a:ext>
             </a:extLst>
           </p:cNvPr>
@@ -5348,12 +5348,12 @@
   </p:cSld>
   <p:clrMap bg1="lt1" tx1="dk1" bg2="lt2" tx2="dk2" accent1="accent1" accent2="accent2" accent3="accent3" accent4="accent4" accent5="accent5" accent6="accent6" hlink="hlink" folHlink="folHlink"/>
   <p:sldLayoutIdLst>
-    <p:sldLayoutId xmlns:r="http://schemas.openxmlformats.org/officeDocument/2006/relationships" id="2147483649" r:id="R93f90dacae85418b"/>
-    <p:sldLayoutId xmlns:r="http://schemas.openxmlformats.org/officeDocument/2006/relationships" id="2147483650" r:id="R65e31a878c2446b0"/>
-    <p:sldLayoutId xmlns:r="http://schemas.openxmlformats.org/officeDocument/2006/relationships" id="2147483651" r:id="R3d6173e105c14914"/>
-    <p:sldLayoutId xmlns:r="http://schemas.openxmlformats.org/officeDocument/2006/relationships" id="2147483652" r:id="R78f48415b30c422e"/>
-    <p:sldLayoutId xmlns:r="http://schemas.openxmlformats.org/officeDocument/2006/relationships" id="2147483653" r:id="Rfd1580ee1c0c4d5a"/>
-    <p:sldLayoutId xmlns:r="http://schemas.openxmlformats.org/officeDocument/2006/relationships" id="2147483654" r:id="R5ab352659bdc46c8"/>
+    <p:sldLayoutId xmlns:r="http://schemas.openxmlformats.org/officeDocument/2006/relationships" id="2147483649" r:id="R760eeeebe00e4854"/>
+    <p:sldLayoutId xmlns:r="http://schemas.openxmlformats.org/officeDocument/2006/relationships" id="2147483650" r:id="Rb89cff5448d849ef"/>
+    <p:sldLayoutId xmlns:r="http://schemas.openxmlformats.org/officeDocument/2006/relationships" id="2147483651" r:id="R3869a27fa66c42ac"/>
+    <p:sldLayoutId xmlns:r="http://schemas.openxmlformats.org/officeDocument/2006/relationships" id="2147483652" r:id="R4ab4eb98220b4dd1"/>
+    <p:sldLayoutId xmlns:r="http://schemas.openxmlformats.org/officeDocument/2006/relationships" id="2147483653" r:id="R5fdcce939a084bb4"/>
+    <p:sldLayoutId xmlns:r="http://schemas.openxmlformats.org/officeDocument/2006/relationships" id="2147483654" r:id="Rd21e8ce8c73348d7"/>
   </p:sldLayoutIdLst>
   <p:txStyles>
     <p:titleStyle>
@@ -5904,7 +5904,7 @@
           <p:cNvPr id="12" name="ACT 0 · 익숙한 사용에서 시작하기">
             <a:extLst xmlns:a="http://schemas.openxmlformats.org/drawingml/2006/main">
               <a:ext uri="{FF2B5EF4-FFF2-40B4-BE49-F238E27FC236}">
-                <a16:creationId xmlns:a16="http://schemas.microsoft.com/office/drawing/2014/main" id="{7B1E21FB-939D-410B-A049-5EBB07770680}"/>
+                <a16:creationId xmlns:a16="http://schemas.microsoft.com/office/drawing/2014/main" id="{B0E71037-44E2-4D2E-860B-04216000CEFD}"/>
               </a:ext>
             </a:extLst>
           </p:cNvPr>
@@ -6062,7 +6062,7 @@
           <p:cNvPr id="2" name="S01">
             <a:extLst xmlns:a="http://schemas.openxmlformats.org/drawingml/2006/main">
               <a:ext uri="{FF2B5EF4-FFF2-40B4-BE49-F238E27FC236}">
-                <a16:creationId xmlns:a16="http://schemas.microsoft.com/office/drawing/2014/main" id="{0D500242-1780-453D-90F4-D89A4F369E84}"/>
+                <a16:creationId xmlns:a16="http://schemas.microsoft.com/office/drawing/2014/main" id="{59EE76F0-CFBA-4037-9619-BDDA16E10F2E}"/>
               </a:ext>
             </a:extLst>
           </p:cNvPr>
@@ -6220,7 +6220,7 @@
           <p:cNvPr id="3" name="AI에게 지금 무엇을 맡기고 있는가?">
             <a:extLst xmlns:a="http://schemas.openxmlformats.org/drawingml/2006/main">
               <a:ext uri="{FF2B5EF4-FFF2-40B4-BE49-F238E27FC236}">
-                <a16:creationId xmlns:a16="http://schemas.microsoft.com/office/drawing/2014/main" id="{CC1CBF9B-08A7-4A33-AF72-73EEAEA5954F}"/>
+                <a16:creationId xmlns:a16="http://schemas.microsoft.com/office/drawing/2014/main" id="{A7591E0F-2ACF-4232-854E-4CECA34CFF12}"/>
               </a:ext>
             </a:extLst>
           </p:cNvPr>
@@ -6378,7 +6378,7 @@
           <p:cNvPr id="4" name="">
             <a:extLst xmlns:a="http://schemas.openxmlformats.org/drawingml/2006/main">
               <a:ext uri="{FF2B5EF4-FFF2-40B4-BE49-F238E27FC236}">
-                <a16:creationId xmlns:a16="http://schemas.microsoft.com/office/drawing/2014/main" id="{DCE81CDB-E407-4EFF-B2C7-36CFA13563B6}"/>
+                <a16:creationId xmlns:a16="http://schemas.microsoft.com/office/drawing/2014/main" id="{DAFEEFB8-FA25-4212-AFDA-69C9791B95DA}"/>
               </a:ext>
             </a:extLst>
           </p:cNvPr>
@@ -6409,7 +6409,7 @@
           <p:cNvPr id="5" name="생각해 보기 · 이 과정의 교육 모델">
             <a:extLst xmlns:a="http://schemas.openxmlformats.org/drawingml/2006/main">
               <a:ext uri="{FF2B5EF4-FFF2-40B4-BE49-F238E27FC236}">
-                <a16:creationId xmlns:a16="http://schemas.microsoft.com/office/drawing/2014/main" id="{0D34FB7E-372E-42C7-AC2C-CFBEB4990376}"/>
+                <a16:creationId xmlns:a16="http://schemas.microsoft.com/office/drawing/2014/main" id="{D09B0A56-2E9C-4838-A214-BB8BD60F8E50}"/>
               </a:ext>
             </a:extLst>
           </p:cNvPr>
@@ -6567,7 +6567,7 @@
           <p:cNvPr id="6" name="자신의 경험 하나만 떠올려 보세요. 사용 수준을 평가하는 질문이 아닙니다.">
             <a:extLst xmlns:a="http://schemas.openxmlformats.org/drawingml/2006/main">
               <a:ext uri="{FF2B5EF4-FFF2-40B4-BE49-F238E27FC236}">
-                <a16:creationId xmlns:a16="http://schemas.microsoft.com/office/drawing/2014/main" id="{9A008C5B-CED9-4270-AF8B-7588D38BAB6C}"/>
+                <a16:creationId xmlns:a16="http://schemas.microsoft.com/office/drawing/2014/main" id="{29AB6231-4CA2-4F31-A542-219CA173BE7C}"/>
               </a:ext>
             </a:extLst>
           </p:cNvPr>
@@ -6725,7 +6725,7 @@
           <p:cNvPr id="7" name="가장 최근에 AI에게 맡긴 일 하나">
             <a:extLst xmlns:a="http://schemas.openxmlformats.org/drawingml/2006/main">
               <a:ext uri="{FF2B5EF4-FFF2-40B4-BE49-F238E27FC236}">
-                <a16:creationId xmlns:a16="http://schemas.microsoft.com/office/drawing/2014/main" id="{BFDF4C03-67E6-4124-B5C0-9184571DD32D}"/>
+                <a16:creationId xmlns:a16="http://schemas.microsoft.com/office/drawing/2014/main" id="{B626279D-700C-4752-AAB4-7BDE5B5A2E39}"/>
               </a:ext>
             </a:extLst>
           </p:cNvPr>
@@ -6883,7 +6883,7 @@
           <p:cNvPr id="8" name="오류 설명을 들었나요?&#10;관련 코드를 조사하게 했나요?&#10;수정한 결과까지 확인하게 했나요?">
             <a:extLst xmlns:a="http://schemas.openxmlformats.org/drawingml/2006/main">
               <a:ext uri="{FF2B5EF4-FFF2-40B4-BE49-F238E27FC236}">
-                <a16:creationId xmlns:a16="http://schemas.microsoft.com/office/drawing/2014/main" id="{81DE875A-2B17-446A-A771-528D6FBCADD1}"/>
+                <a16:creationId xmlns:a16="http://schemas.microsoft.com/office/drawing/2014/main" id="{1DE8D726-A6BB-47F9-B477-D7BAF21DD1C8}"/>
               </a:ext>
             </a:extLst>
           </p:cNvPr>
@@ -7087,7 +7087,7 @@
           <p:cNvPr id="9" name="">
             <a:extLst xmlns:a="http://schemas.openxmlformats.org/drawingml/2006/main">
               <a:ext uri="{FF2B5EF4-FFF2-40B4-BE49-F238E27FC236}">
-                <a16:creationId xmlns:a16="http://schemas.microsoft.com/office/drawing/2014/main" id="{D18049FF-B0B5-4967-9F49-47401D53DBB7}"/>
+                <a16:creationId xmlns:a16="http://schemas.microsoft.com/office/drawing/2014/main" id="{01CFB95B-5A7D-4FFD-AF8D-C853A8BFC425}"/>
               </a:ext>
             </a:extLst>
           </p:cNvPr>
@@ -7118,7 +7118,7 @@
           <p:cNvPr id="10" name="질문 · 생성&#10;조사 · 변경&#10;검증 · 작업 방식 개선">
             <a:extLst xmlns:a="http://schemas.openxmlformats.org/drawingml/2006/main">
               <a:ext uri="{FF2B5EF4-FFF2-40B4-BE49-F238E27FC236}">
-                <a16:creationId xmlns:a16="http://schemas.microsoft.com/office/drawing/2014/main" id="{7C988389-38EE-4E13-8F6C-4ADB0A599CAB}"/>
+                <a16:creationId xmlns:a16="http://schemas.microsoft.com/office/drawing/2014/main" id="{35CC1EAD-0ED3-4339-9252-D507E540DA1F}"/>
               </a:ext>
             </a:extLst>
           </p:cNvPr>
@@ -7322,7 +7322,7 @@
           <p:cNvPr id="11" name="익숙한 방식에서 출발해도 괜찮습니다.">
             <a:extLst xmlns:a="http://schemas.openxmlformats.org/drawingml/2006/main">
               <a:ext uri="{FF2B5EF4-FFF2-40B4-BE49-F238E27FC236}">
-                <a16:creationId xmlns:a16="http://schemas.microsoft.com/office/drawing/2014/main" id="{4CE2BEF0-86B7-4F89-8CEC-B93952B42BE5}"/>
+                <a16:creationId xmlns:a16="http://schemas.microsoft.com/office/drawing/2014/main" id="{6BA06903-C1D5-48A2-9443-AA6C6EB1384A}"/>
               </a:ext>
             </a:extLst>
           </p:cNvPr>
@@ -7478,7 +7478,7 @@
     </p:spTree>
     <p:extLst>
       <p:ext uri="{BB962C8B-B14F-4D97-AF65-F5344CB8AC3E}">
-        <p14:creationId xmlns:p14="http://schemas.microsoft.com/office/powerpoint/2010/main" val="738171509"/>
+        <p14:creationId xmlns:p14="http://schemas.microsoft.com/office/powerpoint/2010/main" val="643857892"/>
       </p:ext>
     </p:extLst>
   </p:cSld>
@@ -7509,7 +7509,7 @@
           <p:cNvPr id="23" name="ACT 0 · 작은 코드 질문">
             <a:extLst xmlns:a="http://schemas.openxmlformats.org/drawingml/2006/main">
               <a:ext uri="{FF2B5EF4-FFF2-40B4-BE49-F238E27FC236}">
-                <a16:creationId xmlns:a16="http://schemas.microsoft.com/office/drawing/2014/main" id="{EBA624AF-013A-4756-AD03-A080891D9D3B}"/>
+                <a16:creationId xmlns:a16="http://schemas.microsoft.com/office/drawing/2014/main" id="{D4250985-CFB0-4A92-A960-7C2CA8A7356B}"/>
               </a:ext>
             </a:extLst>
           </p:cNvPr>
@@ -7667,7 +7667,7 @@
           <p:cNvPr id="2" name="S02">
             <a:extLst xmlns:a="http://schemas.openxmlformats.org/drawingml/2006/main">
               <a:ext uri="{FF2B5EF4-FFF2-40B4-BE49-F238E27FC236}">
-                <a16:creationId xmlns:a16="http://schemas.microsoft.com/office/drawing/2014/main" id="{300256B8-EF47-4BE8-AE70-1F0830290B13}"/>
+                <a16:creationId xmlns:a16="http://schemas.microsoft.com/office/drawing/2014/main" id="{F833CB1B-8FC1-4516-8417-CE54F25AF518}"/>
               </a:ext>
             </a:extLst>
           </p:cNvPr>
@@ -7825,7 +7825,7 @@
           <p:cNvPr id="3" name="작은 질문에는 Chatbot이 유용하다">
             <a:extLst xmlns:a="http://schemas.openxmlformats.org/drawingml/2006/main">
               <a:ext uri="{FF2B5EF4-FFF2-40B4-BE49-F238E27FC236}">
-                <a16:creationId xmlns:a16="http://schemas.microsoft.com/office/drawing/2014/main" id="{CE8DD933-7BF0-4D3C-9EE1-FC9FE1B6FD74}"/>
+                <a16:creationId xmlns:a16="http://schemas.microsoft.com/office/drawing/2014/main" id="{E0AE5EA2-A16F-461A-B92D-85C55D3AA66F}"/>
               </a:ext>
             </a:extLst>
           </p:cNvPr>
@@ -7983,7 +7983,7 @@
           <p:cNvPr id="4" name="">
             <a:extLst xmlns:a="http://schemas.openxmlformats.org/drawingml/2006/main">
               <a:ext uri="{FF2B5EF4-FFF2-40B4-BE49-F238E27FC236}">
-                <a16:creationId xmlns:a16="http://schemas.microsoft.com/office/drawing/2014/main" id="{B4D3C240-DD10-4B3E-8CC2-990C4B81D370}"/>
+                <a16:creationId xmlns:a16="http://schemas.microsoft.com/office/drawing/2014/main" id="{EAD31D19-9B29-40A2-80FD-0CE6C8E02B41}"/>
               </a:ext>
             </a:extLst>
           </p:cNvPr>
@@ -8014,7 +8014,7 @@
           <p:cNvPr id="5" name="교육용 예시 · 실제 ChatGPT 대화 캡처가 아님">
             <a:extLst xmlns:a="http://schemas.openxmlformats.org/drawingml/2006/main">
               <a:ext uri="{FF2B5EF4-FFF2-40B4-BE49-F238E27FC236}">
-                <a16:creationId xmlns:a16="http://schemas.microsoft.com/office/drawing/2014/main" id="{FEC4FA66-2512-4CAA-8681-D0B6AB5FC100}"/>
+                <a16:creationId xmlns:a16="http://schemas.microsoft.com/office/drawing/2014/main" id="{19727E38-45C0-4ABD-BFC9-47FE8178C40E}"/>
               </a:ext>
             </a:extLst>
           </p:cNvPr>
@@ -8172,7 +8172,7 @@
           <p:cNvPr id="6" name="일반적인 질문 흐름을 설명하며 특정 제품의 정확도나 우월성을 주장하지 않습니다.">
             <a:extLst xmlns:a="http://schemas.openxmlformats.org/drawingml/2006/main">
               <a:ext uri="{FF2B5EF4-FFF2-40B4-BE49-F238E27FC236}">
-                <a16:creationId xmlns:a16="http://schemas.microsoft.com/office/drawing/2014/main" id="{1108AAD9-1002-401B-8A6C-C324793A0F32}"/>
+                <a16:creationId xmlns:a16="http://schemas.microsoft.com/office/drawing/2014/main" id="{A34330F6-4345-4B40-8A49-0DE5010FA880}"/>
               </a:ext>
             </a:extLst>
           </p:cNvPr>
@@ -8330,7 +8330,7 @@
           <p:cNvPr id="7" name="“이 코드에서 무엇이 남을까?”">
             <a:extLst xmlns:a="http://schemas.openxmlformats.org/drawingml/2006/main">
               <a:ext uri="{FF2B5EF4-FFF2-40B4-BE49-F238E27FC236}">
-                <a16:creationId xmlns:a16="http://schemas.microsoft.com/office/drawing/2014/main" id="{FE88DCBA-D5A2-40E8-AF01-78E57EF3CE1B}"/>
+                <a16:creationId xmlns:a16="http://schemas.microsoft.com/office/drawing/2014/main" id="{F9383DBB-ACEC-432B-97F7-21C79447C244}"/>
               </a:ext>
             </a:extLst>
           </p:cNvPr>
@@ -8488,7 +8488,7 @@
           <p:cNvPr id="8" name="">
             <a:extLst xmlns:a="http://schemas.openxmlformats.org/drawingml/2006/main">
               <a:ext uri="{FF2B5EF4-FFF2-40B4-BE49-F238E27FC236}">
-                <a16:creationId xmlns:a16="http://schemas.microsoft.com/office/drawing/2014/main" id="{6531F4FA-6278-46C9-896D-3314A8CAFA53}"/>
+                <a16:creationId xmlns:a16="http://schemas.microsoft.com/office/drawing/2014/main" id="{3849AAD5-1CA3-49EB-8D83-EECB17F88314}"/>
               </a:ext>
             </a:extLst>
           </p:cNvPr>
@@ -8519,7 +8519,7 @@
           <p:cNvPr id="9" name="row = [1, 2, 3, 4]&#10;row[1:3]">
             <a:extLst xmlns:a="http://schemas.openxmlformats.org/drawingml/2006/main">
               <a:ext uri="{FF2B5EF4-FFF2-40B4-BE49-F238E27FC236}">
-                <a16:creationId xmlns:a16="http://schemas.microsoft.com/office/drawing/2014/main" id="{66DFF1C4-6EE1-46F7-B8E0-996B80CD33FA}"/>
+                <a16:creationId xmlns:a16="http://schemas.microsoft.com/office/drawing/2014/main" id="{86BD8B17-4C87-47E7-BE95-4497D634CB2C}"/>
               </a:ext>
             </a:extLst>
           </p:cNvPr>
@@ -8700,7 +8700,7 @@
           <p:cNvPr id="10" name="">
             <a:extLst xmlns:a="http://schemas.openxmlformats.org/drawingml/2006/main">
               <a:ext uri="{FF2B5EF4-FFF2-40B4-BE49-F238E27FC236}">
-                <a16:creationId xmlns:a16="http://schemas.microsoft.com/office/drawing/2014/main" id="{7201C793-D2BB-4E9A-8193-DE4B0A7CF676}"/>
+                <a16:creationId xmlns:a16="http://schemas.microsoft.com/office/drawing/2014/main" id="{3058AC4F-325A-440C-BB96-31818B32CDAC}"/>
               </a:ext>
             </a:extLst>
           </p:cNvPr>
@@ -8730,7 +8730,7 @@
           <p:cNvPr id="11" name="[2, 3]">
             <a:extLst xmlns:a="http://schemas.openxmlformats.org/drawingml/2006/main">
               <a:ext uri="{FF2B5EF4-FFF2-40B4-BE49-F238E27FC236}">
-                <a16:creationId xmlns:a16="http://schemas.microsoft.com/office/drawing/2014/main" id="{91A883A1-2325-40D9-8E01-A7CF02BE6DF5}"/>
+                <a16:creationId xmlns:a16="http://schemas.microsoft.com/office/drawing/2014/main" id="{7822315C-5EBF-4165-A77B-6BF8FE925D68}"/>
               </a:ext>
             </a:extLst>
           </p:cNvPr>
@@ -8888,7 +8888,7 @@
           <p:cNvPr id="12" name="끝 index 3은 포함하지 않습니다.">
             <a:extLst xmlns:a="http://schemas.openxmlformats.org/drawingml/2006/main">
               <a:ext uri="{FF2B5EF4-FFF2-40B4-BE49-F238E27FC236}">
-                <a16:creationId xmlns:a16="http://schemas.microsoft.com/office/drawing/2014/main" id="{68FC4D55-140C-4010-BC8F-99BDBA754429}"/>
+                <a16:creationId xmlns:a16="http://schemas.microsoft.com/office/drawing/2014/main" id="{1A55F59F-11E1-4D3E-A84E-77D28E48229D}"/>
               </a:ext>
             </a:extLst>
           </p:cNvPr>
@@ -9046,7 +9046,7 @@
           <p:cNvPr id="13" name="코드·오류">
             <a:extLst xmlns:a="http://schemas.openxmlformats.org/drawingml/2006/main">
               <a:ext uri="{FF2B5EF4-FFF2-40B4-BE49-F238E27FC236}">
-                <a16:creationId xmlns:a16="http://schemas.microsoft.com/office/drawing/2014/main" id="{64202124-A1E8-482B-8BFD-8F99E90183BD}"/>
+                <a16:creationId xmlns:a16="http://schemas.microsoft.com/office/drawing/2014/main" id="{E4446420-ECBA-48F7-BA36-A13D344AA09C}"/>
               </a:ext>
             </a:extLst>
           </p:cNvPr>
@@ -9204,7 +9204,7 @@
           <p:cNvPr id="14" name="">
             <a:extLst xmlns:a="http://schemas.openxmlformats.org/drawingml/2006/main">
               <a:ext uri="{FF2B5EF4-FFF2-40B4-BE49-F238E27FC236}">
-                <a16:creationId xmlns:a16="http://schemas.microsoft.com/office/drawing/2014/main" id="{7804D775-6FA6-4A82-96E4-19E16D080016}"/>
+                <a16:creationId xmlns:a16="http://schemas.microsoft.com/office/drawing/2014/main" id="{35989B9F-9C4C-45FA-927E-274982805298}"/>
               </a:ext>
             </a:extLst>
           </p:cNvPr>
@@ -9234,7 +9234,7 @@
           <p:cNvPr id="15" name="복사">
             <a:extLst xmlns:a="http://schemas.openxmlformats.org/drawingml/2006/main">
               <a:ext uri="{FF2B5EF4-FFF2-40B4-BE49-F238E27FC236}">
-                <a16:creationId xmlns:a16="http://schemas.microsoft.com/office/drawing/2014/main" id="{D7283F99-3CA7-475A-9EC9-846ABF375AAF}"/>
+                <a16:creationId xmlns:a16="http://schemas.microsoft.com/office/drawing/2014/main" id="{F85ED7BB-4F8E-483C-92C7-ED71A02CF75E}"/>
               </a:ext>
             </a:extLst>
           </p:cNvPr>
@@ -9392,7 +9392,7 @@
           <p:cNvPr id="16" name="">
             <a:extLst xmlns:a="http://schemas.openxmlformats.org/drawingml/2006/main">
               <a:ext uri="{FF2B5EF4-FFF2-40B4-BE49-F238E27FC236}">
-                <a16:creationId xmlns:a16="http://schemas.microsoft.com/office/drawing/2014/main" id="{5389E282-C107-4BFF-9033-4A75BA7BE998}"/>
+                <a16:creationId xmlns:a16="http://schemas.microsoft.com/office/drawing/2014/main" id="{8B41D2D2-71DF-47DB-96BA-A5879297188C}"/>
               </a:ext>
             </a:extLst>
           </p:cNvPr>
@@ -9422,7 +9422,7 @@
           <p:cNvPr id="17" name="질문">
             <a:extLst xmlns:a="http://schemas.openxmlformats.org/drawingml/2006/main">
               <a:ext uri="{FF2B5EF4-FFF2-40B4-BE49-F238E27FC236}">
-                <a16:creationId xmlns:a16="http://schemas.microsoft.com/office/drawing/2014/main" id="{6B2E9E8D-2F96-4674-BCA0-AF9CA481918E}"/>
+                <a16:creationId xmlns:a16="http://schemas.microsoft.com/office/drawing/2014/main" id="{13E48595-F03E-4F16-804C-5C1ECCADA6A7}"/>
               </a:ext>
             </a:extLst>
           </p:cNvPr>
@@ -9580,7 +9580,7 @@
           <p:cNvPr id="18" name="">
             <a:extLst xmlns:a="http://schemas.openxmlformats.org/drawingml/2006/main">
               <a:ext uri="{FF2B5EF4-FFF2-40B4-BE49-F238E27FC236}">
-                <a16:creationId xmlns:a16="http://schemas.microsoft.com/office/drawing/2014/main" id="{2C15C240-2FB3-4250-BE29-83B6DD1484F1}"/>
+                <a16:creationId xmlns:a16="http://schemas.microsoft.com/office/drawing/2014/main" id="{2F5D97A5-BB1D-4BD3-89F4-FAABC382A967}"/>
               </a:ext>
             </a:extLst>
           </p:cNvPr>
@@ -9610,7 +9610,7 @@
           <p:cNvPr id="19" name="답 확인">
             <a:extLst xmlns:a="http://schemas.openxmlformats.org/drawingml/2006/main">
               <a:ext uri="{FF2B5EF4-FFF2-40B4-BE49-F238E27FC236}">
-                <a16:creationId xmlns:a16="http://schemas.microsoft.com/office/drawing/2014/main" id="{66E122F9-68C5-418E-BF85-06AD3DD35C2A}"/>
+                <a16:creationId xmlns:a16="http://schemas.microsoft.com/office/drawing/2014/main" id="{E441FCA2-2E19-4B2C-B8B1-DD0E19724CE7}"/>
               </a:ext>
             </a:extLst>
           </p:cNvPr>
@@ -9768,7 +9768,7 @@
           <p:cNvPr id="20" name="">
             <a:extLst xmlns:a="http://schemas.openxmlformats.org/drawingml/2006/main">
               <a:ext uri="{FF2B5EF4-FFF2-40B4-BE49-F238E27FC236}">
-                <a16:creationId xmlns:a16="http://schemas.microsoft.com/office/drawing/2014/main" id="{F79E3DF2-2854-4C1E-BDF5-5F6FFFEED77C}"/>
+                <a16:creationId xmlns:a16="http://schemas.microsoft.com/office/drawing/2014/main" id="{F240AE65-6744-4A7B-B356-7FAED59A57EA}"/>
               </a:ext>
             </a:extLst>
           </p:cNvPr>
@@ -9798,7 +9798,7 @@
           <p:cNvPr id="21" name="IDE로 복귀">
             <a:extLst xmlns:a="http://schemas.openxmlformats.org/drawingml/2006/main">
               <a:ext uri="{FF2B5EF4-FFF2-40B4-BE49-F238E27FC236}">
-                <a16:creationId xmlns:a16="http://schemas.microsoft.com/office/drawing/2014/main" id="{FDB5D05A-8A76-4CB8-93DE-1F567C8183E3}"/>
+                <a16:creationId xmlns:a16="http://schemas.microsoft.com/office/drawing/2014/main" id="{B47814E5-7E72-4625-827B-2EB24A04D2BA}"/>
               </a:ext>
             </a:extLst>
           </p:cNvPr>
@@ -9956,7 +9956,7 @@
           <p:cNvPr id="22" name="">
             <a:extLst xmlns:a="http://schemas.openxmlformats.org/drawingml/2006/main">
               <a:ext uri="{FF2B5EF4-FFF2-40B4-BE49-F238E27FC236}">
-                <a16:creationId xmlns:a16="http://schemas.microsoft.com/office/drawing/2014/main" id="{92E589A4-FE4E-4C69-8B20-8CC8EB424B2B}"/>
+                <a16:creationId xmlns:a16="http://schemas.microsoft.com/office/drawing/2014/main" id="{89C19AF1-013B-4FC6-897A-608504B363F4}"/>
               </a:ext>
             </a:extLst>
           </p:cNvPr>
@@ -9985,7 +9985,7 @@
     </p:spTree>
     <p:extLst>
       <p:ext uri="{BB962C8B-B14F-4D97-AF65-F5344CB8AC3E}">
-        <p14:creationId xmlns:p14="http://schemas.microsoft.com/office/powerpoint/2010/main" val="781278197"/>
+        <p14:creationId xmlns:p14="http://schemas.microsoft.com/office/powerpoint/2010/main" val="1296655413"/>
       </p:ext>
     </p:extLst>
   </p:cSld>
@@ -10016,7 +10016,7 @@
           <p:cNvPr id="16" name="ACT 0 · 여러 파일을 가로지르는 질문">
             <a:extLst xmlns:a="http://schemas.openxmlformats.org/drawingml/2006/main">
               <a:ext uri="{FF2B5EF4-FFF2-40B4-BE49-F238E27FC236}">
-                <a16:creationId xmlns:a16="http://schemas.microsoft.com/office/drawing/2014/main" id="{8C879627-BB46-4FBD-80BD-EA04F24602AE}"/>
+                <a16:creationId xmlns:a16="http://schemas.microsoft.com/office/drawing/2014/main" id="{781825B7-CD47-46B0-B733-1B345B946DD4}"/>
               </a:ext>
             </a:extLst>
           </p:cNvPr>
@@ -10174,7 +10174,7 @@
           <p:cNvPr id="2" name="S03">
             <a:extLst xmlns:a="http://schemas.openxmlformats.org/drawingml/2006/main">
               <a:ext uri="{FF2B5EF4-FFF2-40B4-BE49-F238E27FC236}">
-                <a16:creationId xmlns:a16="http://schemas.microsoft.com/office/drawing/2014/main" id="{746155A7-8827-485B-A89A-8B05D7133DE2}"/>
+                <a16:creationId xmlns:a16="http://schemas.microsoft.com/office/drawing/2014/main" id="{AE7B40F9-66F0-4FA4-B61E-97F81955E77B}"/>
               </a:ext>
             </a:extLst>
           </p:cNvPr>
@@ -10332,7 +10332,7 @@
           <p:cNvPr id="3" name="질문이 커지면 Context를 모으는 일이 생긴다">
             <a:extLst xmlns:a="http://schemas.openxmlformats.org/drawingml/2006/main">
               <a:ext uri="{FF2B5EF4-FFF2-40B4-BE49-F238E27FC236}">
-                <a16:creationId xmlns:a16="http://schemas.microsoft.com/office/drawing/2014/main" id="{D0DEF59A-DFB3-45FD-8F43-903F19418367}"/>
+                <a16:creationId xmlns:a16="http://schemas.microsoft.com/office/drawing/2014/main" id="{94C7CC41-B3FC-48B1-BA09-A4DACA1BCE2E}"/>
               </a:ext>
             </a:extLst>
           </p:cNvPr>
@@ -10490,7 +10490,7 @@
           <p:cNvPr id="4" name="">
             <a:extLst xmlns:a="http://schemas.openxmlformats.org/drawingml/2006/main">
               <a:ext uri="{FF2B5EF4-FFF2-40B4-BE49-F238E27FC236}">
-                <a16:creationId xmlns:a16="http://schemas.microsoft.com/office/drawing/2014/main" id="{D5FEF454-2656-4201-8446-E19C228B7C48}"/>
+                <a16:creationId xmlns:a16="http://schemas.microsoft.com/office/drawing/2014/main" id="{075B7535-7053-4A2D-BA25-5E08B61484B7}"/>
               </a:ext>
             </a:extLst>
           </p:cNvPr>
@@ -10521,7 +10521,7 @@
           <p:cNvPr id="5" name="개념 사례 · 사람이 Context를 모으는 장면 · AI 생성 설명용 삽화">
             <a:extLst xmlns:a="http://schemas.openxmlformats.org/drawingml/2006/main">
               <a:ext uri="{FF2B5EF4-FFF2-40B4-BE49-F238E27FC236}">
-                <a16:creationId xmlns:a16="http://schemas.microsoft.com/office/drawing/2014/main" id="{EFEF0493-FD3D-4594-9AF4-F77EFA167FE3}"/>
+                <a16:creationId xmlns:a16="http://schemas.microsoft.com/office/drawing/2014/main" id="{541EAB7A-5813-478E-94B8-AF2FD15FAA17}"/>
               </a:ext>
             </a:extLst>
           </p:cNvPr>
@@ -10679,7 +10679,7 @@
           <p:cNvPr id="6" name="특정 Trial에서 실제로 발생한 비용이나 실패를 뜻하지 않습니다.">
             <a:extLst xmlns:a="http://schemas.openxmlformats.org/drawingml/2006/main">
               <a:ext uri="{FF2B5EF4-FFF2-40B4-BE49-F238E27FC236}">
-                <a16:creationId xmlns:a16="http://schemas.microsoft.com/office/drawing/2014/main" id="{E80AFD1A-3B23-4DB6-BD70-581367672CB9}"/>
+                <a16:creationId xmlns:a16="http://schemas.microsoft.com/office/drawing/2014/main" id="{DCD3D4E0-B37F-4520-8ED4-98DD98DA571E}"/>
               </a:ext>
             </a:extLst>
           </p:cNvPr>
@@ -10837,7 +10837,7 @@
           <p:cNvPr id="7" name="“CLI 결과가 기대와 다른데, 어디서부터 봐야 할까?”">
             <a:extLst xmlns:a="http://schemas.openxmlformats.org/drawingml/2006/main">
               <a:ext uri="{FF2B5EF4-FFF2-40B4-BE49-F238E27FC236}">
-                <a16:creationId xmlns:a16="http://schemas.microsoft.com/office/drawing/2014/main" id="{4E06622F-010C-476D-8C7E-6500B58E930B}"/>
+                <a16:creationId xmlns:a16="http://schemas.microsoft.com/office/drawing/2014/main" id="{8EDAF773-7FA9-474E-ADC3-11D3E5E7312E}"/>
               </a:ext>
             </a:extLst>
           </p:cNvPr>
@@ -10995,7 +10995,7 @@
           <p:cNvPr id="8" name="">
             <a:extLst xmlns:a="http://schemas.openxmlformats.org/drawingml/2006/main">
               <a:ext uri="{FF2B5EF4-FFF2-40B4-BE49-F238E27FC236}">
-                <a16:creationId xmlns:a16="http://schemas.microsoft.com/office/drawing/2014/main" id="{31BC5AE2-9BBA-4B7B-B9DF-9CE20B7021DC}"/>
+                <a16:creationId xmlns:a16="http://schemas.microsoft.com/office/drawing/2014/main" id="{2AA22F74-7536-423C-AEBC-5068EC2724BD}"/>
               </a:ext>
             </a:extLst>
           </p:cNvPr>
@@ -11005,7 +11005,7 @@
           <p:nvPr/>
         </p:nvPicPr>
         <p:blipFill>
-          <a:blip xmlns:r="http://schemas.openxmlformats.org/officeDocument/2006/relationships" xmlns:a="http://schemas.openxmlformats.org/drawingml/2006/main" r:embed="R99cd477771fd497a"/>
+          <a:blip xmlns:r="http://schemas.openxmlformats.org/officeDocument/2006/relationships" xmlns:a="http://schemas.openxmlformats.org/drawingml/2006/main" r:embed="Rb22c8ee1771e477c"/>
           <a:stretch xmlns:a="http://schemas.openxmlformats.org/drawingml/2006/main"/>
         </p:blipFill>
         <p:spPr>
@@ -11023,7 +11023,7 @@
           <p:cNvPr id="9" name="구현 · 호출 경로">
             <a:extLst xmlns:a="http://schemas.openxmlformats.org/drawingml/2006/main">
               <a:ext uri="{FF2B5EF4-FFF2-40B4-BE49-F238E27FC236}">
-                <a16:creationId xmlns:a16="http://schemas.microsoft.com/office/drawing/2014/main" id="{A45039C8-AF19-43E1-93A3-519A607418F5}"/>
+                <a16:creationId xmlns:a16="http://schemas.microsoft.com/office/drawing/2014/main" id="{D3C7E384-8480-4F02-B736-C696FA471798}"/>
               </a:ext>
             </a:extLst>
           </p:cNvPr>
@@ -11181,7 +11181,7 @@
           <p:cNvPr id="10" name="CLI → 처리 흐름 → 연산">
             <a:extLst xmlns:a="http://schemas.openxmlformats.org/drawingml/2006/main">
               <a:ext uri="{FF2B5EF4-FFF2-40B4-BE49-F238E27FC236}">
-                <a16:creationId xmlns:a16="http://schemas.microsoft.com/office/drawing/2014/main" id="{EFB894D7-24E9-4B46-B0F0-BE41CABE6705}"/>
+                <a16:creationId xmlns:a16="http://schemas.microsoft.com/office/drawing/2014/main" id="{441122E2-36AD-48F3-AD62-320CAF13F242}"/>
               </a:ext>
             </a:extLst>
           </p:cNvPr>
@@ -11339,7 +11339,7 @@
           <p:cNvPr id="11" name="테스트">
             <a:extLst xmlns:a="http://schemas.openxmlformats.org/drawingml/2006/main">
               <a:ext uri="{FF2B5EF4-FFF2-40B4-BE49-F238E27FC236}">
-                <a16:creationId xmlns:a16="http://schemas.microsoft.com/office/drawing/2014/main" id="{2920A941-A578-4C5B-B130-547B3284560F}"/>
+                <a16:creationId xmlns:a16="http://schemas.microsoft.com/office/drawing/2014/main" id="{5C76FA18-B0E2-44DE-A22C-862857DA2208}"/>
               </a:ext>
             </a:extLst>
           </p:cNvPr>
@@ -11497,7 +11497,7 @@
           <p:cNvPr id="12" name="어떤 조건에서 실패했나?">
             <a:extLst xmlns:a="http://schemas.openxmlformats.org/drawingml/2006/main">
               <a:ext uri="{FF2B5EF4-FFF2-40B4-BE49-F238E27FC236}">
-                <a16:creationId xmlns:a16="http://schemas.microsoft.com/office/drawing/2014/main" id="{606DEFAE-F6A4-4412-8F93-EAB43071C812}"/>
+                <a16:creationId xmlns:a16="http://schemas.microsoft.com/office/drawing/2014/main" id="{2DD66CC1-4CC6-427C-98E8-053F1B7DAD19}"/>
               </a:ext>
             </a:extLst>
           </p:cNvPr>
@@ -11655,7 +11655,7 @@
           <p:cNvPr id="13" name="계약">
             <a:extLst xmlns:a="http://schemas.openxmlformats.org/drawingml/2006/main">
               <a:ext uri="{FF2B5EF4-FFF2-40B4-BE49-F238E27FC236}">
-                <a16:creationId xmlns:a16="http://schemas.microsoft.com/office/drawing/2014/main" id="{00F20D52-212C-489C-A04D-1B77FAEAF952}"/>
+                <a16:creationId xmlns:a16="http://schemas.microsoft.com/office/drawing/2014/main" id="{0EA742D7-BE50-4A05-B050-972CBD2F5559}"/>
               </a:ext>
             </a:extLst>
           </p:cNvPr>
@@ -11813,7 +11813,7 @@
           <p:cNvPr id="14" name="원래 기대한 동작은?">
             <a:extLst xmlns:a="http://schemas.openxmlformats.org/drawingml/2006/main">
               <a:ext uri="{FF2B5EF4-FFF2-40B4-BE49-F238E27FC236}">
-                <a16:creationId xmlns:a16="http://schemas.microsoft.com/office/drawing/2014/main" id="{05EA532B-8889-4B2A-B594-FE56F22014D1}"/>
+                <a16:creationId xmlns:a16="http://schemas.microsoft.com/office/drawing/2014/main" id="{692B0987-0C2D-4554-94FA-B65F08A0A9B6}"/>
               </a:ext>
             </a:extLst>
           </p:cNvPr>
@@ -11971,7 +11971,7 @@
           <p:cNvPr id="15" name="질문에 옮길 자료는?">
             <a:extLst xmlns:a="http://schemas.openxmlformats.org/drawingml/2006/main">
               <a:ext uri="{FF2B5EF4-FFF2-40B4-BE49-F238E27FC236}">
-                <a16:creationId xmlns:a16="http://schemas.microsoft.com/office/drawing/2014/main" id="{AED84CD0-EAA2-4877-A7F3-97560EE6A595}"/>
+                <a16:creationId xmlns:a16="http://schemas.microsoft.com/office/drawing/2014/main" id="{CC3D8A4F-4D56-4AA1-BB78-2FF306FBD3B8}"/>
               </a:ext>
             </a:extLst>
           </p:cNvPr>
@@ -12127,7 +12127,7 @@
     </p:spTree>
     <p:extLst>
       <p:ext uri="{BB962C8B-B14F-4D97-AF65-F5344CB8AC3E}">
-        <p14:creationId xmlns:p14="http://schemas.microsoft.com/office/powerpoint/2010/main" val="1222811546"/>
+        <p14:creationId xmlns:p14="http://schemas.microsoft.com/office/powerpoint/2010/main" val="1902386995"/>
       </p:ext>
     </p:extLst>
   </p:cSld>
@@ -12158,7 +12158,7 @@
           <p:cNvPr id="13" name="ACT 0 · Repository 조사 관찰">
             <a:extLst xmlns:a="http://schemas.openxmlformats.org/drawingml/2006/main">
               <a:ext uri="{FF2B5EF4-FFF2-40B4-BE49-F238E27FC236}">
-                <a16:creationId xmlns:a16="http://schemas.microsoft.com/office/drawing/2014/main" id="{0C94E3FA-8A54-4FCF-AF0D-E8560DC5CC83}"/>
+                <a16:creationId xmlns:a16="http://schemas.microsoft.com/office/drawing/2014/main" id="{64525698-0BA4-4BB9-AED6-BDD0E969701C}"/>
               </a:ext>
             </a:extLst>
           </p:cNvPr>
@@ -12316,7 +12316,7 @@
           <p:cNvPr id="2" name="S04">
             <a:extLst xmlns:a="http://schemas.openxmlformats.org/drawingml/2006/main">
               <a:ext uri="{FF2B5EF4-FFF2-40B4-BE49-F238E27FC236}">
-                <a16:creationId xmlns:a16="http://schemas.microsoft.com/office/drawing/2014/main" id="{93425AA1-2B1D-4671-99D0-89126C0FD630}"/>
+                <a16:creationId xmlns:a16="http://schemas.microsoft.com/office/drawing/2014/main" id="{43C75485-654E-4921-BA76-ACBAB8B17686}"/>
               </a:ext>
             </a:extLst>
           </p:cNvPr>
@@ -12474,7 +12474,7 @@
           <p:cNvPr id="3" name="파일명을 주지 않으면 Agent는 어디부터 볼까?">
             <a:extLst xmlns:a="http://schemas.openxmlformats.org/drawingml/2006/main">
               <a:ext uri="{FF2B5EF4-FFF2-40B4-BE49-F238E27FC236}">
-                <a16:creationId xmlns:a16="http://schemas.microsoft.com/office/drawing/2014/main" id="{E89C87DE-7F44-4B7A-BFF0-8A2BF94733F6}"/>
+                <a16:creationId xmlns:a16="http://schemas.microsoft.com/office/drawing/2014/main" id="{9AB6660D-08AF-4F9A-A7E3-0C666C9F706D}"/>
               </a:ext>
             </a:extLst>
           </p:cNvPr>
@@ -12632,7 +12632,7 @@
           <p:cNvPr id="4" name="">
             <a:extLst xmlns:a="http://schemas.openxmlformats.org/drawingml/2006/main">
               <a:ext uri="{FF2B5EF4-FFF2-40B4-BE49-F238E27FC236}">
-                <a16:creationId xmlns:a16="http://schemas.microsoft.com/office/drawing/2014/main" id="{63BF2002-FA0F-4655-B6C4-ABDD379380C5}"/>
+                <a16:creationId xmlns:a16="http://schemas.microsoft.com/office/drawing/2014/main" id="{48408277-3ED1-4588-B6BC-985825F5AD0A}"/>
               </a:ext>
             </a:extLst>
           </p:cNvPr>
@@ -12663,7 +12663,7 @@
           <p:cNvPr id="5" name="TRIAL-001 실제 요청 발췌 · Codex CLI 0.154.0 · macOS · 읽기 전용">
             <a:extLst xmlns:a="http://schemas.openxmlformats.org/drawingml/2006/main">
               <a:ext uri="{FF2B5EF4-FFF2-40B4-BE49-F238E27FC236}">
-                <a16:creationId xmlns:a16="http://schemas.microsoft.com/office/drawing/2014/main" id="{1C8ABAD6-F002-4C43-806F-D96E636F02B6}"/>
+                <a16:creationId xmlns:a16="http://schemas.microsoft.com/office/drawing/2014/main" id="{7765DBDE-DF08-4930-8B87-5D9E045F3C67}"/>
               </a:ext>
             </a:extLst>
           </p:cNvPr>
@@ -12821,7 +12821,7 @@
           <p:cNvPr id="6" name="과거 단일 실행의 기록을 살펴봅니다. 현재 Desktop 동작은 미검증입니다.">
             <a:extLst xmlns:a="http://schemas.openxmlformats.org/drawingml/2006/main">
               <a:ext uri="{FF2B5EF4-FFF2-40B4-BE49-F238E27FC236}">
-                <a16:creationId xmlns:a16="http://schemas.microsoft.com/office/drawing/2014/main" id="{E7D748CC-038C-4EE7-9008-0C878149FEB3}"/>
+                <a16:creationId xmlns:a16="http://schemas.microsoft.com/office/drawing/2014/main" id="{1E85B68D-C84E-4C61-B32A-7998B8046285}"/>
               </a:ext>
             </a:extLst>
           </p:cNvPr>
@@ -12979,7 +12979,7 @@
           <p:cNvPr id="7" name="“현재 이 저장소에서 테스트 하나가 실패하고 있다.&#10;실패 원인을 조사해줘. 관련 구현과 호출 경로,&#10;실패하는">
             <a:extLst xmlns:a="http://schemas.openxmlformats.org/drawingml/2006/main">
               <a:ext uri="{FF2B5EF4-FFF2-40B4-BE49-F238E27FC236}">
-                <a16:creationId xmlns:a16="http://schemas.microsoft.com/office/drawing/2014/main" id="{F33304CB-EA6D-4D18-9FEF-10B2714AEE55}"/>
+                <a16:creationId xmlns:a16="http://schemas.microsoft.com/office/drawing/2014/main" id="{319D54FC-592C-4BAF-A0DC-7AB02C28A735}"/>
               </a:ext>
             </a:extLst>
           </p:cNvPr>
@@ -13206,7 +13206,7 @@
           <p:cNvPr id="8" name="">
             <a:extLst xmlns:a="http://schemas.openxmlformats.org/drawingml/2006/main">
               <a:ext uri="{FF2B5EF4-FFF2-40B4-BE49-F238E27FC236}">
-                <a16:creationId xmlns:a16="http://schemas.microsoft.com/office/drawing/2014/main" id="{3BDA4F60-1E1A-4795-916D-1A43BC8E48BE}"/>
+                <a16:creationId xmlns:a16="http://schemas.microsoft.com/office/drawing/2014/main" id="{AC2FEBAD-8ACB-46DE-91B8-1141D0CADE1B}"/>
               </a:ext>
             </a:extLst>
           </p:cNvPr>
@@ -13237,7 +13237,7 @@
           <p:cNvPr id="9" name="찾았는지 확인할 세 가지">
             <a:extLst xmlns:a="http://schemas.openxmlformats.org/drawingml/2006/main">
               <a:ext uri="{FF2B5EF4-FFF2-40B4-BE49-F238E27FC236}">
-                <a16:creationId xmlns:a16="http://schemas.microsoft.com/office/drawing/2014/main" id="{D9D3927F-54D8-44B6-A80C-0BE7384D5059}"/>
+                <a16:creationId xmlns:a16="http://schemas.microsoft.com/office/drawing/2014/main" id="{CC293402-743A-4E45-B286-308433944C37}"/>
               </a:ext>
             </a:extLst>
           </p:cNvPr>
@@ -13395,7 +13395,7 @@
           <p:cNvPr id="10" name="01  실패하는 테스트">
             <a:extLst xmlns:a="http://schemas.openxmlformats.org/drawingml/2006/main">
               <a:ext uri="{FF2B5EF4-FFF2-40B4-BE49-F238E27FC236}">
-                <a16:creationId xmlns:a16="http://schemas.microsoft.com/office/drawing/2014/main" id="{9F0FC140-FDE4-43AF-9684-75E807966FF4}"/>
+                <a16:creationId xmlns:a16="http://schemas.microsoft.com/office/drawing/2014/main" id="{7609FCA4-1EC8-4613-B371-4BE7037C8D93}"/>
               </a:ext>
             </a:extLst>
           </p:cNvPr>
@@ -13553,7 +13553,7 @@
           <p:cNvPr id="11" name="02  관련 구현">
             <a:extLst xmlns:a="http://schemas.openxmlformats.org/drawingml/2006/main">
               <a:ext uri="{FF2B5EF4-FFF2-40B4-BE49-F238E27FC236}">
-                <a16:creationId xmlns:a16="http://schemas.microsoft.com/office/drawing/2014/main" id="{285D67A6-2F13-4D13-A090-DC715DC50182}"/>
+                <a16:creationId xmlns:a16="http://schemas.microsoft.com/office/drawing/2014/main" id="{844D9765-016C-4515-8F65-D4257861ED8F}"/>
               </a:ext>
             </a:extLst>
           </p:cNvPr>
@@ -13711,7 +13711,7 @@
           <p:cNvPr id="12" name="03  제품의 호출 경로">
             <a:extLst xmlns:a="http://schemas.openxmlformats.org/drawingml/2006/main">
               <a:ext uri="{FF2B5EF4-FFF2-40B4-BE49-F238E27FC236}">
-                <a16:creationId xmlns:a16="http://schemas.microsoft.com/office/drawing/2014/main" id="{347F9352-DBDE-45F0-89EF-FA4CFCF091D5}"/>
+                <a16:creationId xmlns:a16="http://schemas.microsoft.com/office/drawing/2014/main" id="{4E7483B8-7D63-45DD-9C80-4AFBF9E53A68}"/>
               </a:ext>
             </a:extLst>
           </p:cNvPr>
@@ -13867,7 +13867,7 @@
     </p:spTree>
     <p:extLst>
       <p:ext uri="{BB962C8B-B14F-4D97-AF65-F5344CB8AC3E}">
-        <p14:creationId xmlns:p14="http://schemas.microsoft.com/office/powerpoint/2010/main" val="249993681"/>
+        <p14:creationId xmlns:p14="http://schemas.microsoft.com/office/powerpoint/2010/main" val="162951531"/>
       </p:ext>
     </p:extLst>
   </p:cSld>
@@ -13898,7 +13898,7 @@
           <p:cNvPr id="63" name="ACT 0  ·  Repository 탐색">
             <a:extLst xmlns:a="http://schemas.openxmlformats.org/drawingml/2006/main">
               <a:ext uri="{FF2B5EF4-FFF2-40B4-BE49-F238E27FC236}">
-                <a16:creationId xmlns:a16="http://schemas.microsoft.com/office/drawing/2014/main" id="{090F1E7B-AC3F-474E-AC57-6BBF7A36D465}"/>
+                <a16:creationId xmlns:a16="http://schemas.microsoft.com/office/drawing/2014/main" id="{A28C6163-8893-4324-8831-0B5B2D757019}"/>
               </a:ext>
             </a:extLst>
           </p:cNvPr>
@@ -14056,7 +14056,7 @@
           <p:cNvPr id="2" name="S05">
             <a:extLst xmlns:a="http://schemas.openxmlformats.org/drawingml/2006/main">
               <a:ext uri="{FF2B5EF4-FFF2-40B4-BE49-F238E27FC236}">
-                <a16:creationId xmlns:a16="http://schemas.microsoft.com/office/drawing/2014/main" id="{E2CFC4B5-B1EF-4E68-B7AE-C40E03220E09}"/>
+                <a16:creationId xmlns:a16="http://schemas.microsoft.com/office/drawing/2014/main" id="{85F57126-48EB-4E2F-B284-D3C4E3B3E112}"/>
               </a:ext>
             </a:extLst>
           </p:cNvPr>
@@ -14214,7 +14214,7 @@
           <p:cNvPr id="3" name="Agent가 Test와 호출 경로를 찾았다">
             <a:extLst xmlns:a="http://schemas.openxmlformats.org/drawingml/2006/main">
               <a:ext uri="{FF2B5EF4-FFF2-40B4-BE49-F238E27FC236}">
-                <a16:creationId xmlns:a16="http://schemas.microsoft.com/office/drawing/2014/main" id="{7D7864AB-A953-4429-9689-0084D5401266}"/>
+                <a16:creationId xmlns:a16="http://schemas.microsoft.com/office/drawing/2014/main" id="{CA07B924-8690-45E6-9F75-086D7833435E}"/>
               </a:ext>
             </a:extLst>
           </p:cNvPr>
@@ -14372,7 +14372,7 @@
           <p:cNvPr id="4" name="">
             <a:extLst xmlns:a="http://schemas.openxmlformats.org/drawingml/2006/main">
               <a:ext uri="{FF2B5EF4-FFF2-40B4-BE49-F238E27FC236}">
-                <a16:creationId xmlns:a16="http://schemas.microsoft.com/office/drawing/2014/main" id="{336FE0C9-A711-43A9-8CC6-359E3CE0CE72}"/>
+                <a16:creationId xmlns:a16="http://schemas.microsoft.com/office/drawing/2014/main" id="{F45E206B-4E85-4E23-87DE-BBC24C1FA338}"/>
               </a:ext>
             </a:extLst>
           </p:cNvPr>
@@ -14403,7 +14403,7 @@
           <p:cNvPr id="5" name="TRIAL-001 기록·STATE-00 테스트 재구성  |  Codex CLI 0.154.0 · 읽기 전용">
             <a:extLst xmlns:a="http://schemas.openxmlformats.org/drawingml/2006/main">
               <a:ext uri="{FF2B5EF4-FFF2-40B4-BE49-F238E27FC236}">
-                <a16:creationId xmlns:a16="http://schemas.microsoft.com/office/drawing/2014/main" id="{8EBB4BD6-7E05-45F6-9CF3-9B5718AE64A2}"/>
+                <a16:creationId xmlns:a16="http://schemas.microsoft.com/office/drawing/2014/main" id="{E64D3D26-4BC8-406A-98A8-15C73212A983}"/>
               </a:ext>
             </a:extLst>
           </p:cNvPr>
@@ -14561,7 +14561,7 @@
           <p:cNvPr id="6" name="실제 실행 화면이 아님 · 이 조사에서는 코드 수정 없음 · 현재 Desktop 동작 미검증">
             <a:extLst xmlns:a="http://schemas.openxmlformats.org/drawingml/2006/main">
               <a:ext uri="{FF2B5EF4-FFF2-40B4-BE49-F238E27FC236}">
-                <a16:creationId xmlns:a16="http://schemas.microsoft.com/office/drawing/2014/main" id="{BBC3DCE3-4C52-435E-82ED-6567189FA892}"/>
+                <a16:creationId xmlns:a16="http://schemas.microsoft.com/office/drawing/2014/main" id="{05145761-93BB-4F01-B5B9-F26BE0CA0F5B}"/>
               </a:ext>
             </a:extLst>
           </p:cNvPr>
@@ -14719,7 +14719,7 @@
           <p:cNvPr id="7" name="crop(image, 1, 3)">
             <a:extLst xmlns:a="http://schemas.openxmlformats.org/drawingml/2006/main">
               <a:ext uri="{FF2B5EF4-FFF2-40B4-BE49-F238E27FC236}">
-                <a16:creationId xmlns:a16="http://schemas.microsoft.com/office/drawing/2014/main" id="{6460E3CE-B598-443E-AFB3-5B07821FD00C}"/>
+                <a16:creationId xmlns:a16="http://schemas.microsoft.com/office/drawing/2014/main" id="{659A57B9-5AF9-4D2D-A57D-B60FFFF47483}"/>
               </a:ext>
             </a:extLst>
           </p:cNvPr>
@@ -14877,7 +14877,7 @@
           <p:cNvPr id="8" name="끝 좌표 3은 포함하지 않는 계약">
             <a:extLst xmlns:a="http://schemas.openxmlformats.org/drawingml/2006/main">
               <a:ext uri="{FF2B5EF4-FFF2-40B4-BE49-F238E27FC236}">
-                <a16:creationId xmlns:a16="http://schemas.microsoft.com/office/drawing/2014/main" id="{29A31DD0-D499-4D0D-B7BB-AB8450A1AF85}"/>
+                <a16:creationId xmlns:a16="http://schemas.microsoft.com/office/drawing/2014/main" id="{DE85840D-BFB1-449C-9B61-F6D1E9724C22}"/>
               </a:ext>
             </a:extLst>
           </p:cNvPr>
@@ -15035,7 +15035,7 @@
           <p:cNvPr id="9" name="입력">
             <a:extLst xmlns:a="http://schemas.openxmlformats.org/drawingml/2006/main">
               <a:ext uri="{FF2B5EF4-FFF2-40B4-BE49-F238E27FC236}">
-                <a16:creationId xmlns:a16="http://schemas.microsoft.com/office/drawing/2014/main" id="{656005C9-4127-40CA-BEC7-6DAF2A7A7807}"/>
+                <a16:creationId xmlns:a16="http://schemas.microsoft.com/office/drawing/2014/main" id="{93A71639-4101-4E8B-987E-2029D80F809B}"/>
               </a:ext>
             </a:extLst>
           </p:cNvPr>
@@ -15193,7 +15193,7 @@
           <p:cNvPr id="10" name="0">
             <a:extLst xmlns:a="http://schemas.openxmlformats.org/drawingml/2006/main">
               <a:ext uri="{FF2B5EF4-FFF2-40B4-BE49-F238E27FC236}">
-                <a16:creationId xmlns:a16="http://schemas.microsoft.com/office/drawing/2014/main" id="{8115D241-58CA-41A5-843B-20AF1EC8F022}"/>
+                <a16:creationId xmlns:a16="http://schemas.microsoft.com/office/drawing/2014/main" id="{B60F650D-AC26-441F-8D76-42A258EE5F89}"/>
               </a:ext>
             </a:extLst>
           </p:cNvPr>
@@ -15351,7 +15351,7 @@
           <p:cNvPr id="11" name="1">
             <a:extLst xmlns:a="http://schemas.openxmlformats.org/drawingml/2006/main">
               <a:ext uri="{FF2B5EF4-FFF2-40B4-BE49-F238E27FC236}">
-                <a16:creationId xmlns:a16="http://schemas.microsoft.com/office/drawing/2014/main" id="{83EFCE0B-F3EE-42BE-B320-15BE3F75771E}"/>
+                <a16:creationId xmlns:a16="http://schemas.microsoft.com/office/drawing/2014/main" id="{DD512365-3B82-4B97-85F9-F74966F8D60D}"/>
               </a:ext>
             </a:extLst>
           </p:cNvPr>
@@ -15509,7 +15509,7 @@
           <p:cNvPr id="12" name="2">
             <a:extLst xmlns:a="http://schemas.openxmlformats.org/drawingml/2006/main">
               <a:ext uri="{FF2B5EF4-FFF2-40B4-BE49-F238E27FC236}">
-                <a16:creationId xmlns:a16="http://schemas.microsoft.com/office/drawing/2014/main" id="{E3C82293-C0AF-43D4-B886-36D501B2C790}"/>
+                <a16:creationId xmlns:a16="http://schemas.microsoft.com/office/drawing/2014/main" id="{80A84589-66D7-4DE4-B3A7-9E2C9D973042}"/>
               </a:ext>
             </a:extLst>
           </p:cNvPr>
@@ -15667,7 +15667,7 @@
           <p:cNvPr id="13" name="3">
             <a:extLst xmlns:a="http://schemas.openxmlformats.org/drawingml/2006/main">
               <a:ext uri="{FF2B5EF4-FFF2-40B4-BE49-F238E27FC236}">
-                <a16:creationId xmlns:a16="http://schemas.microsoft.com/office/drawing/2014/main" id="{CCE1593C-8530-4113-ABB4-0B8DC21F0193}"/>
+                <a16:creationId xmlns:a16="http://schemas.microsoft.com/office/drawing/2014/main" id="{9E4F864A-FF94-453F-9DB5-B316F6E72D21}"/>
               </a:ext>
             </a:extLst>
           </p:cNvPr>
@@ -15825,7 +15825,7 @@
           <p:cNvPr id="14" name="">
             <a:extLst xmlns:a="http://schemas.openxmlformats.org/drawingml/2006/main">
               <a:ext uri="{FF2B5EF4-FFF2-40B4-BE49-F238E27FC236}">
-                <a16:creationId xmlns:a16="http://schemas.microsoft.com/office/drawing/2014/main" id="{8418689C-BE8F-4E87-A5C1-C4B08BE77565}"/>
+                <a16:creationId xmlns:a16="http://schemas.microsoft.com/office/drawing/2014/main" id="{3E3F6F4B-2BE1-46AE-A0F1-9ECA3142208D}"/>
               </a:ext>
             </a:extLst>
           </p:cNvPr>
@@ -15858,7 +15858,7 @@
           <p:cNvPr id="15" name="1">
             <a:extLst xmlns:a="http://schemas.openxmlformats.org/drawingml/2006/main">
               <a:ext uri="{FF2B5EF4-FFF2-40B4-BE49-F238E27FC236}">
-                <a16:creationId xmlns:a16="http://schemas.microsoft.com/office/drawing/2014/main" id="{C5E30B15-C5C6-4597-AB39-1D48E5455880}"/>
+                <a16:creationId xmlns:a16="http://schemas.microsoft.com/office/drawing/2014/main" id="{827587CE-20BB-4F4F-9012-A1F1F59000B5}"/>
               </a:ext>
             </a:extLst>
           </p:cNvPr>
@@ -16016,7 +16016,7 @@
           <p:cNvPr id="16" name="">
             <a:extLst xmlns:a="http://schemas.openxmlformats.org/drawingml/2006/main">
               <a:ext uri="{FF2B5EF4-FFF2-40B4-BE49-F238E27FC236}">
-                <a16:creationId xmlns:a16="http://schemas.microsoft.com/office/drawing/2014/main" id="{1FBAE4A4-D62E-4FBC-A250-CAA09D21E763}"/>
+                <a16:creationId xmlns:a16="http://schemas.microsoft.com/office/drawing/2014/main" id="{CDC07D59-129A-4499-982A-BE7D849620A1}"/>
               </a:ext>
             </a:extLst>
           </p:cNvPr>
@@ -16049,7 +16049,7 @@
           <p:cNvPr id="17" name="2">
             <a:extLst xmlns:a="http://schemas.openxmlformats.org/drawingml/2006/main">
               <a:ext uri="{FF2B5EF4-FFF2-40B4-BE49-F238E27FC236}">
-                <a16:creationId xmlns:a16="http://schemas.microsoft.com/office/drawing/2014/main" id="{1D788CAB-352A-4FAA-B7E5-80C21011EA3A}"/>
+                <a16:creationId xmlns:a16="http://schemas.microsoft.com/office/drawing/2014/main" id="{66D7AE24-2436-45B9-9D12-2245567E1D24}"/>
               </a:ext>
             </a:extLst>
           </p:cNvPr>
@@ -16207,7 +16207,7 @@
           <p:cNvPr id="18" name="">
             <a:extLst xmlns:a="http://schemas.openxmlformats.org/drawingml/2006/main">
               <a:ext uri="{FF2B5EF4-FFF2-40B4-BE49-F238E27FC236}">
-                <a16:creationId xmlns:a16="http://schemas.microsoft.com/office/drawing/2014/main" id="{F9080762-9141-4081-A626-61853B1A6A3C}"/>
+                <a16:creationId xmlns:a16="http://schemas.microsoft.com/office/drawing/2014/main" id="{8E6148B2-4256-4DC6-9CB4-99D972029635}"/>
               </a:ext>
             </a:extLst>
           </p:cNvPr>
@@ -16240,7 +16240,7 @@
           <p:cNvPr id="19" name="3">
             <a:extLst xmlns:a="http://schemas.openxmlformats.org/drawingml/2006/main">
               <a:ext uri="{FF2B5EF4-FFF2-40B4-BE49-F238E27FC236}">
-                <a16:creationId xmlns:a16="http://schemas.microsoft.com/office/drawing/2014/main" id="{1A42FC53-5F54-414F-9827-82C7D7159170}"/>
+                <a16:creationId xmlns:a16="http://schemas.microsoft.com/office/drawing/2014/main" id="{FDE9B079-5CFE-4C29-BA1D-0646D8421EF4}"/>
               </a:ext>
             </a:extLst>
           </p:cNvPr>
@@ -16398,7 +16398,7 @@
           <p:cNvPr id="20" name="">
             <a:extLst xmlns:a="http://schemas.openxmlformats.org/drawingml/2006/main">
               <a:ext uri="{FF2B5EF4-FFF2-40B4-BE49-F238E27FC236}">
-                <a16:creationId xmlns:a16="http://schemas.microsoft.com/office/drawing/2014/main" id="{7C82B4DF-4B13-4F7D-B414-5BF549794C9B}"/>
+                <a16:creationId xmlns:a16="http://schemas.microsoft.com/office/drawing/2014/main" id="{22E0DF92-D139-4F38-9DA3-BA574566E234}"/>
               </a:ext>
             </a:extLst>
           </p:cNvPr>
@@ -16431,7 +16431,7 @@
           <p:cNvPr id="21" name="4">
             <a:extLst xmlns:a="http://schemas.openxmlformats.org/drawingml/2006/main">
               <a:ext uri="{FF2B5EF4-FFF2-40B4-BE49-F238E27FC236}">
-                <a16:creationId xmlns:a16="http://schemas.microsoft.com/office/drawing/2014/main" id="{C1B0E5F4-EB34-44F4-B787-34187B62622D}"/>
+                <a16:creationId xmlns:a16="http://schemas.microsoft.com/office/drawing/2014/main" id="{686EEB9E-18D0-45EA-B084-E4D3BF919976}"/>
               </a:ext>
             </a:extLst>
           </p:cNvPr>
@@ -16589,7 +16589,7 @@
           <p:cNvPr id="22" name="">
             <a:extLst xmlns:a="http://schemas.openxmlformats.org/drawingml/2006/main">
               <a:ext uri="{FF2B5EF4-FFF2-40B4-BE49-F238E27FC236}">
-                <a16:creationId xmlns:a16="http://schemas.microsoft.com/office/drawing/2014/main" id="{CEC51832-DE41-4838-AB12-6FCB7C1778A4}"/>
+                <a16:creationId xmlns:a16="http://schemas.microsoft.com/office/drawing/2014/main" id="{B889F4D2-7BB5-493B-BEAC-305A1E8D3F10}"/>
               </a:ext>
             </a:extLst>
           </p:cNvPr>
@@ -16622,7 +16622,7 @@
           <p:cNvPr id="23" name="5">
             <a:extLst xmlns:a="http://schemas.openxmlformats.org/drawingml/2006/main">
               <a:ext uri="{FF2B5EF4-FFF2-40B4-BE49-F238E27FC236}">
-                <a16:creationId xmlns:a16="http://schemas.microsoft.com/office/drawing/2014/main" id="{A42E62B6-603C-4DB0-8B6B-550ED1C8F522}"/>
+                <a16:creationId xmlns:a16="http://schemas.microsoft.com/office/drawing/2014/main" id="{1F7801C6-BE9E-4325-B00E-FC6D162FFC15}"/>
               </a:ext>
             </a:extLst>
           </p:cNvPr>
@@ -16780,7 +16780,7 @@
           <p:cNvPr id="24" name="">
             <a:extLst xmlns:a="http://schemas.openxmlformats.org/drawingml/2006/main">
               <a:ext uri="{FF2B5EF4-FFF2-40B4-BE49-F238E27FC236}">
-                <a16:creationId xmlns:a16="http://schemas.microsoft.com/office/drawing/2014/main" id="{3EB64767-877B-4A19-968F-2090724BE4AC}"/>
+                <a16:creationId xmlns:a16="http://schemas.microsoft.com/office/drawing/2014/main" id="{7BFF0FDE-F58A-450F-9F2B-3086F96DDF53}"/>
               </a:ext>
             </a:extLst>
           </p:cNvPr>
@@ -16813,7 +16813,7 @@
           <p:cNvPr id="25" name="6">
             <a:extLst xmlns:a="http://schemas.openxmlformats.org/drawingml/2006/main">
               <a:ext uri="{FF2B5EF4-FFF2-40B4-BE49-F238E27FC236}">
-                <a16:creationId xmlns:a16="http://schemas.microsoft.com/office/drawing/2014/main" id="{F38596DA-F253-42C1-8185-91605B1FE62E}"/>
+                <a16:creationId xmlns:a16="http://schemas.microsoft.com/office/drawing/2014/main" id="{7F9B01B9-FCBB-487C-9B89-D3B7FDBB5A8B}"/>
               </a:ext>
             </a:extLst>
           </p:cNvPr>
@@ -16971,7 +16971,7 @@
           <p:cNvPr id="26" name="">
             <a:extLst xmlns:a="http://schemas.openxmlformats.org/drawingml/2006/main">
               <a:ext uri="{FF2B5EF4-FFF2-40B4-BE49-F238E27FC236}">
-                <a16:creationId xmlns:a16="http://schemas.microsoft.com/office/drawing/2014/main" id="{1F9655AD-D56F-4D51-BC4B-288BA1A76547}"/>
+                <a16:creationId xmlns:a16="http://schemas.microsoft.com/office/drawing/2014/main" id="{235944E3-CCA0-43FB-A331-524D624B7BA6}"/>
               </a:ext>
             </a:extLst>
           </p:cNvPr>
@@ -17004,7 +17004,7 @@
           <p:cNvPr id="27" name="7">
             <a:extLst xmlns:a="http://schemas.openxmlformats.org/drawingml/2006/main">
               <a:ext uri="{FF2B5EF4-FFF2-40B4-BE49-F238E27FC236}">
-                <a16:creationId xmlns:a16="http://schemas.microsoft.com/office/drawing/2014/main" id="{E0524178-0849-4876-9FE5-DAE2FC5FFA48}"/>
+                <a16:creationId xmlns:a16="http://schemas.microsoft.com/office/drawing/2014/main" id="{2B96941B-E676-4425-9EA4-3AE822E85741}"/>
               </a:ext>
             </a:extLst>
           </p:cNvPr>
@@ -17162,7 +17162,7 @@
           <p:cNvPr id="28" name="">
             <a:extLst xmlns:a="http://schemas.openxmlformats.org/drawingml/2006/main">
               <a:ext uri="{FF2B5EF4-FFF2-40B4-BE49-F238E27FC236}">
-                <a16:creationId xmlns:a16="http://schemas.microsoft.com/office/drawing/2014/main" id="{C5840843-6F69-4702-96DF-924F272D7918}"/>
+                <a16:creationId xmlns:a16="http://schemas.microsoft.com/office/drawing/2014/main" id="{C4F25686-B100-4C62-AA9E-1D73D544CA38}"/>
               </a:ext>
             </a:extLst>
           </p:cNvPr>
@@ -17195,7 +17195,7 @@
           <p:cNvPr id="29" name="8">
             <a:extLst xmlns:a="http://schemas.openxmlformats.org/drawingml/2006/main">
               <a:ext uri="{FF2B5EF4-FFF2-40B4-BE49-F238E27FC236}">
-                <a16:creationId xmlns:a16="http://schemas.microsoft.com/office/drawing/2014/main" id="{0F56AFBA-11A2-4D18-B114-57F257FC0B0A}"/>
+                <a16:creationId xmlns:a16="http://schemas.microsoft.com/office/drawing/2014/main" id="{E60E7160-4AEE-4B20-B782-A7629DD9133B}"/>
               </a:ext>
             </a:extLst>
           </p:cNvPr>
@@ -17353,7 +17353,7 @@
           <p:cNvPr id="30" name="열 index">
             <a:extLst xmlns:a="http://schemas.openxmlformats.org/drawingml/2006/main">
               <a:ext uri="{FF2B5EF4-FFF2-40B4-BE49-F238E27FC236}">
-                <a16:creationId xmlns:a16="http://schemas.microsoft.com/office/drawing/2014/main" id="{A4ECD5E3-1C72-420D-9BD3-869353E5B3E7}"/>
+                <a16:creationId xmlns:a16="http://schemas.microsoft.com/office/drawing/2014/main" id="{69F28F92-74DD-4F09-A20F-E65AEC112048}"/>
               </a:ext>
             </a:extLst>
           </p:cNvPr>
@@ -17511,7 +17511,7 @@
           <p:cNvPr id="31" name="기대">
             <a:extLst xmlns:a="http://schemas.openxmlformats.org/drawingml/2006/main">
               <a:ext uri="{FF2B5EF4-FFF2-40B4-BE49-F238E27FC236}">
-                <a16:creationId xmlns:a16="http://schemas.microsoft.com/office/drawing/2014/main" id="{462D7073-485C-4A26-950B-D66C0F8AC2D2}"/>
+                <a16:creationId xmlns:a16="http://schemas.microsoft.com/office/drawing/2014/main" id="{CDEBF285-2E54-44EA-AC93-BE5C112E52C2}"/>
               </a:ext>
             </a:extLst>
           </p:cNvPr>
@@ -17669,7 +17669,7 @@
           <p:cNvPr id="32" name="">
             <a:extLst xmlns:a="http://schemas.openxmlformats.org/drawingml/2006/main">
               <a:ext uri="{FF2B5EF4-FFF2-40B4-BE49-F238E27FC236}">
-                <a16:creationId xmlns:a16="http://schemas.microsoft.com/office/drawing/2014/main" id="{A7B0616E-A5E2-41E4-AFDD-35888CF4878A}"/>
+                <a16:creationId xmlns:a16="http://schemas.microsoft.com/office/drawing/2014/main" id="{DB158E8E-2E7D-4458-B369-E52BDC12FD3B}"/>
               </a:ext>
             </a:extLst>
           </p:cNvPr>
@@ -17702,7 +17702,7 @@
           <p:cNvPr id="33" name="2">
             <a:extLst xmlns:a="http://schemas.openxmlformats.org/drawingml/2006/main">
               <a:ext uri="{FF2B5EF4-FFF2-40B4-BE49-F238E27FC236}">
-                <a16:creationId xmlns:a16="http://schemas.microsoft.com/office/drawing/2014/main" id="{2313EDFB-7A10-48E0-A37F-9ACCFD8A01EC}"/>
+                <a16:creationId xmlns:a16="http://schemas.microsoft.com/office/drawing/2014/main" id="{FC238C07-99FE-466E-81BA-7F8A5692FA65}"/>
               </a:ext>
             </a:extLst>
           </p:cNvPr>
@@ -17860,7 +17860,7 @@
           <p:cNvPr id="34" name="">
             <a:extLst xmlns:a="http://schemas.openxmlformats.org/drawingml/2006/main">
               <a:ext uri="{FF2B5EF4-FFF2-40B4-BE49-F238E27FC236}">
-                <a16:creationId xmlns:a16="http://schemas.microsoft.com/office/drawing/2014/main" id="{A5002CE8-B117-42A9-9A9F-FA7407D5947A}"/>
+                <a16:creationId xmlns:a16="http://schemas.microsoft.com/office/drawing/2014/main" id="{5FC52A6C-1645-4F13-BB66-097B691055A9}"/>
               </a:ext>
             </a:extLst>
           </p:cNvPr>
@@ -17893,7 +17893,7 @@
           <p:cNvPr id="35" name="3">
             <a:extLst xmlns:a="http://schemas.openxmlformats.org/drawingml/2006/main">
               <a:ext uri="{FF2B5EF4-FFF2-40B4-BE49-F238E27FC236}">
-                <a16:creationId xmlns:a16="http://schemas.microsoft.com/office/drawing/2014/main" id="{15BE8618-4BD6-4F13-BB8F-17ABB8D7E3D7}"/>
+                <a16:creationId xmlns:a16="http://schemas.microsoft.com/office/drawing/2014/main" id="{1C31D1A1-8856-4381-AE62-E587AAF9D186}"/>
               </a:ext>
             </a:extLst>
           </p:cNvPr>
@@ -18051,7 +18051,7 @@
           <p:cNvPr id="36" name="">
             <a:extLst xmlns:a="http://schemas.openxmlformats.org/drawingml/2006/main">
               <a:ext uri="{FF2B5EF4-FFF2-40B4-BE49-F238E27FC236}">
-                <a16:creationId xmlns:a16="http://schemas.microsoft.com/office/drawing/2014/main" id="{2B9841AC-CF75-4D2F-85F1-A4FBADDE6212}"/>
+                <a16:creationId xmlns:a16="http://schemas.microsoft.com/office/drawing/2014/main" id="{30ACC7B0-EC87-4F5C-8097-C02B69197A8D}"/>
               </a:ext>
             </a:extLst>
           </p:cNvPr>
@@ -18084,7 +18084,7 @@
           <p:cNvPr id="37" name="6">
             <a:extLst xmlns:a="http://schemas.openxmlformats.org/drawingml/2006/main">
               <a:ext uri="{FF2B5EF4-FFF2-40B4-BE49-F238E27FC236}">
-                <a16:creationId xmlns:a16="http://schemas.microsoft.com/office/drawing/2014/main" id="{3D2DAF53-9205-4B3F-A9BC-4B78BFB210E7}"/>
+                <a16:creationId xmlns:a16="http://schemas.microsoft.com/office/drawing/2014/main" id="{F794AC6F-8310-47F8-9D32-7B3000DE61C5}"/>
               </a:ext>
             </a:extLst>
           </p:cNvPr>
@@ -18242,7 +18242,7 @@
           <p:cNvPr id="38" name="">
             <a:extLst xmlns:a="http://schemas.openxmlformats.org/drawingml/2006/main">
               <a:ext uri="{FF2B5EF4-FFF2-40B4-BE49-F238E27FC236}">
-                <a16:creationId xmlns:a16="http://schemas.microsoft.com/office/drawing/2014/main" id="{5E19EB09-CC62-497B-A00B-717345CECC52}"/>
+                <a16:creationId xmlns:a16="http://schemas.microsoft.com/office/drawing/2014/main" id="{4208037F-3133-461C-9080-41085FF9E9B1}"/>
               </a:ext>
             </a:extLst>
           </p:cNvPr>
@@ -18275,7 +18275,7 @@
           <p:cNvPr id="39" name="7">
             <a:extLst xmlns:a="http://schemas.openxmlformats.org/drawingml/2006/main">
               <a:ext uri="{FF2B5EF4-FFF2-40B4-BE49-F238E27FC236}">
-                <a16:creationId xmlns:a16="http://schemas.microsoft.com/office/drawing/2014/main" id="{7E11F8BA-4543-4E48-99D8-CE07B83FB98A}"/>
+                <a16:creationId xmlns:a16="http://schemas.microsoft.com/office/drawing/2014/main" id="{5BE96E4B-614C-436F-94E3-9DC48182C7C2}"/>
               </a:ext>
             </a:extLst>
           </p:cNvPr>
@@ -18433,7 +18433,7 @@
           <p:cNvPr id="40" name="구현 결과">
             <a:extLst xmlns:a="http://schemas.openxmlformats.org/drawingml/2006/main">
               <a:ext uri="{FF2B5EF4-FFF2-40B4-BE49-F238E27FC236}">
-                <a16:creationId xmlns:a16="http://schemas.microsoft.com/office/drawing/2014/main" id="{65E48E6F-00D7-4539-B0AC-FC891F66B808}"/>
+                <a16:creationId xmlns:a16="http://schemas.microsoft.com/office/drawing/2014/main" id="{D9231841-2614-4433-A9DF-0CF3BEB1026F}"/>
               </a:ext>
             </a:extLst>
           </p:cNvPr>
@@ -18591,7 +18591,7 @@
           <p:cNvPr id="41" name="">
             <a:extLst xmlns:a="http://schemas.openxmlformats.org/drawingml/2006/main">
               <a:ext uri="{FF2B5EF4-FFF2-40B4-BE49-F238E27FC236}">
-                <a16:creationId xmlns:a16="http://schemas.microsoft.com/office/drawing/2014/main" id="{094BD095-598D-4840-8C8F-BCC2D81893FC}"/>
+                <a16:creationId xmlns:a16="http://schemas.microsoft.com/office/drawing/2014/main" id="{E306A718-A7C2-4EDF-B06C-CD074E0470BB}"/>
               </a:ext>
             </a:extLst>
           </p:cNvPr>
@@ -18624,7 +18624,7 @@
           <p:cNvPr id="42" name="2">
             <a:extLst xmlns:a="http://schemas.openxmlformats.org/drawingml/2006/main">
               <a:ext uri="{FF2B5EF4-FFF2-40B4-BE49-F238E27FC236}">
-                <a16:creationId xmlns:a16="http://schemas.microsoft.com/office/drawing/2014/main" id="{6588BB52-AA11-4BA3-AC73-632961FAC18B}"/>
+                <a16:creationId xmlns:a16="http://schemas.microsoft.com/office/drawing/2014/main" id="{2CE5BF02-07B2-42AC-97E7-A5AF32232CDA}"/>
               </a:ext>
             </a:extLst>
           </p:cNvPr>
@@ -18782,7 +18782,7 @@
           <p:cNvPr id="43" name="">
             <a:extLst xmlns:a="http://schemas.openxmlformats.org/drawingml/2006/main">
               <a:ext uri="{FF2B5EF4-FFF2-40B4-BE49-F238E27FC236}">
-                <a16:creationId xmlns:a16="http://schemas.microsoft.com/office/drawing/2014/main" id="{063FA254-AA32-4B1B-B349-3A53659A9832}"/>
+                <a16:creationId xmlns:a16="http://schemas.microsoft.com/office/drawing/2014/main" id="{E82A4C9D-73F6-4A3F-90A0-8C19CEC8CCC4}"/>
               </a:ext>
             </a:extLst>
           </p:cNvPr>
@@ -18815,7 +18815,7 @@
           <p:cNvPr id="44" name="3">
             <a:extLst xmlns:a="http://schemas.openxmlformats.org/drawingml/2006/main">
               <a:ext uri="{FF2B5EF4-FFF2-40B4-BE49-F238E27FC236}">
-                <a16:creationId xmlns:a16="http://schemas.microsoft.com/office/drawing/2014/main" id="{E93124AD-E5B9-418A-A611-E4B0952E0470}"/>
+                <a16:creationId xmlns:a16="http://schemas.microsoft.com/office/drawing/2014/main" id="{564FCE95-307B-42B5-8693-640A52AEAE47}"/>
               </a:ext>
             </a:extLst>
           </p:cNvPr>
@@ -18973,7 +18973,7 @@
           <p:cNvPr id="45" name="">
             <a:extLst xmlns:a="http://schemas.openxmlformats.org/drawingml/2006/main">
               <a:ext uri="{FF2B5EF4-FFF2-40B4-BE49-F238E27FC236}">
-                <a16:creationId xmlns:a16="http://schemas.microsoft.com/office/drawing/2014/main" id="{97DFC535-4D87-4FD4-ADEC-E4457429C3D5}"/>
+                <a16:creationId xmlns:a16="http://schemas.microsoft.com/office/drawing/2014/main" id="{46184D81-0F4A-4296-B43E-A707EC233021}"/>
               </a:ext>
             </a:extLst>
           </p:cNvPr>
@@ -19006,7 +19006,7 @@
           <p:cNvPr id="46" name="4">
             <a:extLst xmlns:a="http://schemas.openxmlformats.org/drawingml/2006/main">
               <a:ext uri="{FF2B5EF4-FFF2-40B4-BE49-F238E27FC236}">
-                <a16:creationId xmlns:a16="http://schemas.microsoft.com/office/drawing/2014/main" id="{36F245BC-876B-4537-9BCE-AF9DA6D1D955}"/>
+                <a16:creationId xmlns:a16="http://schemas.microsoft.com/office/drawing/2014/main" id="{6F14C018-821A-4724-A845-0C4EA807B13F}"/>
               </a:ext>
             </a:extLst>
           </p:cNvPr>
@@ -19164,7 +19164,7 @@
           <p:cNvPr id="47" name="">
             <a:extLst xmlns:a="http://schemas.openxmlformats.org/drawingml/2006/main">
               <a:ext uri="{FF2B5EF4-FFF2-40B4-BE49-F238E27FC236}">
-                <a16:creationId xmlns:a16="http://schemas.microsoft.com/office/drawing/2014/main" id="{44215016-85A3-41B0-8955-42AEEECBEE49}"/>
+                <a16:creationId xmlns:a16="http://schemas.microsoft.com/office/drawing/2014/main" id="{0E45D62F-91A7-4EA0-A4E5-794D99960D84}"/>
               </a:ext>
             </a:extLst>
           </p:cNvPr>
@@ -19197,7 +19197,7 @@
           <p:cNvPr id="48" name="6">
             <a:extLst xmlns:a="http://schemas.openxmlformats.org/drawingml/2006/main">
               <a:ext uri="{FF2B5EF4-FFF2-40B4-BE49-F238E27FC236}">
-                <a16:creationId xmlns:a16="http://schemas.microsoft.com/office/drawing/2014/main" id="{C40DC2BB-466B-4DCE-8E34-7B1E56C0437C}"/>
+                <a16:creationId xmlns:a16="http://schemas.microsoft.com/office/drawing/2014/main" id="{C3340BCB-8DFF-4959-AE65-76EAA16F8D54}"/>
               </a:ext>
             </a:extLst>
           </p:cNvPr>
@@ -19355,7 +19355,7 @@
           <p:cNvPr id="49" name="">
             <a:extLst xmlns:a="http://schemas.openxmlformats.org/drawingml/2006/main">
               <a:ext uri="{FF2B5EF4-FFF2-40B4-BE49-F238E27FC236}">
-                <a16:creationId xmlns:a16="http://schemas.microsoft.com/office/drawing/2014/main" id="{5D22134E-A5DB-476A-9533-85C50F6412E5}"/>
+                <a16:creationId xmlns:a16="http://schemas.microsoft.com/office/drawing/2014/main" id="{DFB1C48E-5571-4F48-B6BB-EBAC555FB004}"/>
               </a:ext>
             </a:extLst>
           </p:cNvPr>
@@ -19388,7 +19388,7 @@
           <p:cNvPr id="50" name="7">
             <a:extLst xmlns:a="http://schemas.openxmlformats.org/drawingml/2006/main">
               <a:ext uri="{FF2B5EF4-FFF2-40B4-BE49-F238E27FC236}">
-                <a16:creationId xmlns:a16="http://schemas.microsoft.com/office/drawing/2014/main" id="{BC1BE0B9-F544-4424-84FC-F28EF2020BB9}"/>
+                <a16:creationId xmlns:a16="http://schemas.microsoft.com/office/drawing/2014/main" id="{8A561DD1-C76C-4E46-88FF-BB69076ECA85}"/>
               </a:ext>
             </a:extLst>
           </p:cNvPr>
@@ -19546,7 +19546,7 @@
           <p:cNvPr id="51" name="">
             <a:extLst xmlns:a="http://schemas.openxmlformats.org/drawingml/2006/main">
               <a:ext uri="{FF2B5EF4-FFF2-40B4-BE49-F238E27FC236}">
-                <a16:creationId xmlns:a16="http://schemas.microsoft.com/office/drawing/2014/main" id="{B3E59BC5-6E48-4B48-B28C-710764BC7C12}"/>
+                <a16:creationId xmlns:a16="http://schemas.microsoft.com/office/drawing/2014/main" id="{CA9A1938-32D2-49EF-8D7C-21DA2537A9F7}"/>
               </a:ext>
             </a:extLst>
           </p:cNvPr>
@@ -19579,7 +19579,7 @@
           <p:cNvPr id="52" name="8">
             <a:extLst xmlns:a="http://schemas.openxmlformats.org/drawingml/2006/main">
               <a:ext uri="{FF2B5EF4-FFF2-40B4-BE49-F238E27FC236}">
-                <a16:creationId xmlns:a16="http://schemas.microsoft.com/office/drawing/2014/main" id="{1B62E5B8-0B47-47FE-9438-F8FD208D288A}"/>
+                <a16:creationId xmlns:a16="http://schemas.microsoft.com/office/drawing/2014/main" id="{46A2B3E1-986F-459C-9885-CE65D267262E}"/>
               </a:ext>
             </a:extLst>
           </p:cNvPr>
@@ -19737,7 +19737,7 @@
           <p:cNvPr id="53" name="한 열이 더 포함됨">
             <a:extLst xmlns:a="http://schemas.openxmlformats.org/drawingml/2006/main">
               <a:ext uri="{FF2B5EF4-FFF2-40B4-BE49-F238E27FC236}">
-                <a16:creationId xmlns:a16="http://schemas.microsoft.com/office/drawing/2014/main" id="{3ED942C9-F930-4532-A542-FF74116B3A9C}"/>
+                <a16:creationId xmlns:a16="http://schemas.microsoft.com/office/drawing/2014/main" id="{043C1B4B-E6D4-4198-B261-9462EDC4277F}"/>
               </a:ext>
             </a:extLst>
           </p:cNvPr>
@@ -19895,7 +19895,7 @@
           <p:cNvPr id="54" name="">
             <a:extLst xmlns:a="http://schemas.openxmlformats.org/drawingml/2006/main">
               <a:ext uri="{FF2B5EF4-FFF2-40B4-BE49-F238E27FC236}">
-                <a16:creationId xmlns:a16="http://schemas.microsoft.com/office/drawing/2014/main" id="{6996C952-64D7-4B6B-834D-4E7BF00082B6}"/>
+                <a16:creationId xmlns:a16="http://schemas.microsoft.com/office/drawing/2014/main" id="{4E0BB297-85BD-4347-9F00-0BEFA21C8673}"/>
               </a:ext>
             </a:extLst>
           </p:cNvPr>
@@ -19926,7 +19926,7 @@
           <p:cNvPr id="55" name="조사에서 연결한 근거">
             <a:extLst xmlns:a="http://schemas.openxmlformats.org/drawingml/2006/main">
               <a:ext uri="{FF2B5EF4-FFF2-40B4-BE49-F238E27FC236}">
-                <a16:creationId xmlns:a16="http://schemas.microsoft.com/office/drawing/2014/main" id="{92FA8907-ED0F-4B84-8292-FC949057D154}"/>
+                <a16:creationId xmlns:a16="http://schemas.microsoft.com/office/drawing/2014/main" id="{C4154AE2-4B1B-4BC4-9129-3249F96C8B6D}"/>
               </a:ext>
             </a:extLst>
           </p:cNvPr>
@@ -20084,7 +20084,7 @@
           <p:cNvPr id="56" name="01  실패 테스트">
             <a:extLst xmlns:a="http://schemas.openxmlformats.org/drawingml/2006/main">
               <a:ext uri="{FF2B5EF4-FFF2-40B4-BE49-F238E27FC236}">
-                <a16:creationId xmlns:a16="http://schemas.microsoft.com/office/drawing/2014/main" id="{CEB216B4-1C24-4FA0-9789-667398868AA0}"/>
+                <a16:creationId xmlns:a16="http://schemas.microsoft.com/office/drawing/2014/main" id="{C4218ED4-8EF8-45AE-BE2F-A43CC7FA00EF}"/>
               </a:ext>
             </a:extLst>
           </p:cNvPr>
@@ -20242,7 +20242,7 @@
           <p:cNvPr id="57" name="test_crop_excludes_&#10;end_coordinate">
             <a:extLst xmlns:a="http://schemas.openxmlformats.org/drawingml/2006/main">
               <a:ext uri="{FF2B5EF4-FFF2-40B4-BE49-F238E27FC236}">
-                <a16:creationId xmlns:a16="http://schemas.microsoft.com/office/drawing/2014/main" id="{18FBE978-B234-422F-8756-C7EC1B873239}"/>
+                <a16:creationId xmlns:a16="http://schemas.microsoft.com/office/drawing/2014/main" id="{98F8FCF7-5D68-4DB1-A0CD-198DFA2AAFAF}"/>
               </a:ext>
             </a:extLst>
           </p:cNvPr>
@@ -20423,7 +20423,7 @@
           <p:cNvPr id="58" name="02  제품의 호출 경로">
             <a:extLst xmlns:a="http://schemas.openxmlformats.org/drawingml/2006/main">
               <a:ext uri="{FF2B5EF4-FFF2-40B4-BE49-F238E27FC236}">
-                <a16:creationId xmlns:a16="http://schemas.microsoft.com/office/drawing/2014/main" id="{A70E908C-8B80-41A3-B765-B817350F416A}"/>
+                <a16:creationId xmlns:a16="http://schemas.microsoft.com/office/drawing/2014/main" id="{8DF47607-2DC5-43B7-A97C-111ACB523496}"/>
               </a:ext>
             </a:extLst>
           </p:cNvPr>
@@ -20581,7 +20581,7 @@
           <p:cNvPr id="59" name="cli.main → process_image → crop">
             <a:extLst xmlns:a="http://schemas.openxmlformats.org/drawingml/2006/main">
               <a:ext uri="{FF2B5EF4-FFF2-40B4-BE49-F238E27FC236}">
-                <a16:creationId xmlns:a16="http://schemas.microsoft.com/office/drawing/2014/main" id="{A9549513-8CD6-41A0-A952-6E0B9F45DB8B}"/>
+                <a16:creationId xmlns:a16="http://schemas.microsoft.com/office/drawing/2014/main" id="{144A5F19-B05D-45F9-BD78-AB2C444A28E7}"/>
               </a:ext>
             </a:extLst>
           </p:cNvPr>
@@ -20739,7 +20739,7 @@
           <p:cNvPr id="60" name="03  계약과 다른 구현">
             <a:extLst xmlns:a="http://schemas.openxmlformats.org/drawingml/2006/main">
               <a:ext uri="{FF2B5EF4-FFF2-40B4-BE49-F238E27FC236}">
-                <a16:creationId xmlns:a16="http://schemas.microsoft.com/office/drawing/2014/main" id="{A2EC5EEE-86DB-42CF-9B34-10A1DA2750DF}"/>
+                <a16:creationId xmlns:a16="http://schemas.microsoft.com/office/drawing/2014/main" id="{A556D3A0-62CB-4BFB-B4AA-9AE86C33B8BA}"/>
               </a:ext>
             </a:extLst>
           </p:cNvPr>
@@ -20897,7 +20897,7 @@
           <p:cNvPr id="61" name="row[x_start : x_end + 1]">
             <a:extLst xmlns:a="http://schemas.openxmlformats.org/drawingml/2006/main">
               <a:ext uri="{FF2B5EF4-FFF2-40B4-BE49-F238E27FC236}">
-                <a16:creationId xmlns:a16="http://schemas.microsoft.com/office/drawing/2014/main" id="{6340E590-298C-4B57-A1D2-F8F3D16E7123}"/>
+                <a16:creationId xmlns:a16="http://schemas.microsoft.com/office/drawing/2014/main" id="{44372683-9E34-4CD6-9D8A-0C5226675748}"/>
               </a:ext>
             </a:extLst>
           </p:cNvPr>
@@ -21055,7 +21055,7 @@
           <p:cNvPr id="62" name="계약: [x_start, x_end)">
             <a:extLst xmlns:a="http://schemas.openxmlformats.org/drawingml/2006/main">
               <a:ext uri="{FF2B5EF4-FFF2-40B4-BE49-F238E27FC236}">
-                <a16:creationId xmlns:a16="http://schemas.microsoft.com/office/drawing/2014/main" id="{856CED10-E19A-4E82-B03F-C0F295370BF0}"/>
+                <a16:creationId xmlns:a16="http://schemas.microsoft.com/office/drawing/2014/main" id="{4332D0A5-E17D-46C3-9127-60E1326F9744}"/>
               </a:ext>
             </a:extLst>
           </p:cNvPr>
@@ -21211,7 +21211,7 @@
     </p:spTree>
     <p:extLst>
       <p:ext uri="{BB962C8B-B14F-4D97-AF65-F5344CB8AC3E}">
-        <p14:creationId xmlns:p14="http://schemas.microsoft.com/office/powerpoint/2010/main" val="365614759"/>
+        <p14:creationId xmlns:p14="http://schemas.microsoft.com/office/powerpoint/2010/main" val="1753789983"/>
       </p:ext>
     </p:extLst>
   </p:cSld>
@@ -21242,7 +21242,7 @@
           <p:cNvPr id="17" name="ACT 0 · 조사 결과 읽기">
             <a:extLst xmlns:a="http://schemas.openxmlformats.org/drawingml/2006/main">
               <a:ext uri="{FF2B5EF4-FFF2-40B4-BE49-F238E27FC236}">
-                <a16:creationId xmlns:a16="http://schemas.microsoft.com/office/drawing/2014/main" id="{061204E5-7505-4BAA-BE70-5A72058C10F3}"/>
+                <a16:creationId xmlns:a16="http://schemas.microsoft.com/office/drawing/2014/main" id="{3B864686-9B8F-4513-BD93-DE82A8E99978}"/>
               </a:ext>
             </a:extLst>
           </p:cNvPr>
@@ -21400,7 +21400,7 @@
           <p:cNvPr id="2" name="S06">
             <a:extLst xmlns:a="http://schemas.openxmlformats.org/drawingml/2006/main">
               <a:ext uri="{FF2B5EF4-FFF2-40B4-BE49-F238E27FC236}">
-                <a16:creationId xmlns:a16="http://schemas.microsoft.com/office/drawing/2014/main" id="{7C505121-B7E4-4F75-AB78-4869F663CA37}"/>
+                <a16:creationId xmlns:a16="http://schemas.microsoft.com/office/drawing/2014/main" id="{C44E7110-ADDB-432C-B5AB-8E44065F2668}"/>
               </a:ext>
             </a:extLst>
           </p:cNvPr>
@@ -21558,7 +21558,7 @@
           <p:cNvPr id="3" name="관찰 결과와 실행 제한을 분리한다">
             <a:extLst xmlns:a="http://schemas.openxmlformats.org/drawingml/2006/main">
               <a:ext uri="{FF2B5EF4-FFF2-40B4-BE49-F238E27FC236}">
-                <a16:creationId xmlns:a16="http://schemas.microsoft.com/office/drawing/2014/main" id="{E5AE4D75-9C63-43D9-903B-80D781B0A840}"/>
+                <a16:creationId xmlns:a16="http://schemas.microsoft.com/office/drawing/2014/main" id="{5755E4BE-05E2-46AD-845E-4346C9C497F6}"/>
               </a:ext>
             </a:extLst>
           </p:cNvPr>
@@ -21716,7 +21716,7 @@
           <p:cNvPr id="4" name="">
             <a:extLst xmlns:a="http://schemas.openxmlformats.org/drawingml/2006/main">
               <a:ext uri="{FF2B5EF4-FFF2-40B4-BE49-F238E27FC236}">
-                <a16:creationId xmlns:a16="http://schemas.microsoft.com/office/drawing/2014/main" id="{1A740151-9A07-4B91-A0EF-2CC2282403A8}"/>
+                <a16:creationId xmlns:a16="http://schemas.microsoft.com/office/drawing/2014/main" id="{C14160A9-DD94-46C7-B59E-3DA105C4F08C}"/>
               </a:ext>
             </a:extLst>
           </p:cNvPr>
@@ -21747,7 +21747,7 @@
           <p:cNvPr id="5" name="TRIAL-001 기록 재구성 · Codex CLI 0.154.0 · 단일 읽기 전용 조사">
             <a:extLst xmlns:a="http://schemas.openxmlformats.org/drawingml/2006/main">
               <a:ext uri="{FF2B5EF4-FFF2-40B4-BE49-F238E27FC236}">
-                <a16:creationId xmlns:a16="http://schemas.microsoft.com/office/drawing/2014/main" id="{C211EB60-46FA-4316-AD9E-25A3C4539C20}"/>
+                <a16:creationId xmlns:a16="http://schemas.microsoft.com/office/drawing/2014/main" id="{BAE60D57-6CF8-45AA-A8B7-640FFA3B8747}"/>
               </a:ext>
             </a:extLst>
           </p:cNvPr>
@@ -21905,7 +21905,7 @@
           <p:cNvPr id="6" name="환경 오류 3건은 crop 결함의 증거가 아닙니다. 이 조사에서 코드는 수정하지 않았습니다.">
             <a:extLst xmlns:a="http://schemas.openxmlformats.org/drawingml/2006/main">
               <a:ext uri="{FF2B5EF4-FFF2-40B4-BE49-F238E27FC236}">
-                <a16:creationId xmlns:a16="http://schemas.microsoft.com/office/drawing/2014/main" id="{C1822762-E6B5-4B54-8916-195736D8CF84}"/>
+                <a16:creationId xmlns:a16="http://schemas.microsoft.com/office/drawing/2014/main" id="{FFF6A0CC-B20F-421E-8047-F688273DA1BD}"/>
               </a:ext>
             </a:extLst>
           </p:cNvPr>
@@ -22063,7 +22063,7 @@
           <p:cNvPr id="7" name="코드에서 확인한 문제">
             <a:extLst xmlns:a="http://schemas.openxmlformats.org/drawingml/2006/main">
               <a:ext uri="{FF2B5EF4-FFF2-40B4-BE49-F238E27FC236}">
-                <a16:creationId xmlns:a16="http://schemas.microsoft.com/office/drawing/2014/main" id="{C3442315-78A5-44F8-895D-81508985A250}"/>
+                <a16:creationId xmlns:a16="http://schemas.microsoft.com/office/drawing/2014/main" id="{80B2CC0F-FC63-4F90-A2EA-7A7ED9A336CF}"/>
               </a:ext>
             </a:extLst>
           </p:cNvPr>
@@ -22221,7 +22221,7 @@
           <p:cNvPr id="8" name="실행 환경에서 생긴 제한">
             <a:extLst xmlns:a="http://schemas.openxmlformats.org/drawingml/2006/main">
               <a:ext uri="{FF2B5EF4-FFF2-40B4-BE49-F238E27FC236}">
-                <a16:creationId xmlns:a16="http://schemas.microsoft.com/office/drawing/2014/main" id="{5C6D6161-DCF6-4C50-9B35-E8499E460FDD}"/>
+                <a16:creationId xmlns:a16="http://schemas.microsoft.com/office/drawing/2014/main" id="{6B299B80-0487-40D8-9178-DB3A89CCE8F8}"/>
               </a:ext>
             </a:extLst>
           </p:cNvPr>
@@ -22379,7 +22379,7 @@
           <p:cNvPr id="9" name="">
             <a:extLst xmlns:a="http://schemas.openxmlformats.org/drawingml/2006/main">
               <a:ext uri="{FF2B5EF4-FFF2-40B4-BE49-F238E27FC236}">
-                <a16:creationId xmlns:a16="http://schemas.microsoft.com/office/drawing/2014/main" id="{F02E316E-7359-419B-8ED5-706F683A14F5}"/>
+                <a16:creationId xmlns:a16="http://schemas.microsoft.com/office/drawing/2014/main" id="{D7F0E53C-14B6-41FF-A217-C30E46E4BAEB}"/>
               </a:ext>
             </a:extLst>
           </p:cNvPr>
@@ -22412,7 +22412,7 @@
           <p:cNvPr id="10" name="">
             <a:extLst xmlns:a="http://schemas.openxmlformats.org/drawingml/2006/main">
               <a:ext uri="{FF2B5EF4-FFF2-40B4-BE49-F238E27FC236}">
-                <a16:creationId xmlns:a16="http://schemas.microsoft.com/office/drawing/2014/main" id="{67C16D64-73A7-4CFF-B515-17C613D7D32B}"/>
+                <a16:creationId xmlns:a16="http://schemas.microsoft.com/office/drawing/2014/main" id="{EA5BAE07-1E3D-45FE-8160-E730D90F6BCA}"/>
               </a:ext>
             </a:extLst>
           </p:cNvPr>
@@ -22443,7 +22443,7 @@
           <p:cNvPr id="11" name="crop에 한 열이 더 포함됨">
             <a:extLst xmlns:a="http://schemas.openxmlformats.org/drawingml/2006/main">
               <a:ext uri="{FF2B5EF4-FFF2-40B4-BE49-F238E27FC236}">
-                <a16:creationId xmlns:a16="http://schemas.microsoft.com/office/drawing/2014/main" id="{CC94824A-C8F8-42DC-983C-4013DE9A36E5}"/>
+                <a16:creationId xmlns:a16="http://schemas.microsoft.com/office/drawing/2014/main" id="{8FCB2624-28B2-4A4F-8EDC-8C61825A4780}"/>
               </a:ext>
             </a:extLst>
           </p:cNvPr>
@@ -22601,7 +22601,7 @@
           <p:cNvPr id="12" name="테스트·호출 경로·계약 연결&#10;원인 설명 / 코드 수정 없음">
             <a:extLst xmlns:a="http://schemas.openxmlformats.org/drawingml/2006/main">
               <a:ext uri="{FF2B5EF4-FFF2-40B4-BE49-F238E27FC236}">
-                <a16:creationId xmlns:a16="http://schemas.microsoft.com/office/drawing/2014/main" id="{6161DBBD-5A0B-4537-8306-3A9FEA4B8339}"/>
+                <a16:creationId xmlns:a16="http://schemas.microsoft.com/office/drawing/2014/main" id="{312C2044-8330-436E-83A2-52F518213AEB}"/>
               </a:ext>
             </a:extLst>
           </p:cNvPr>
@@ -22782,7 +22782,7 @@
           <p:cNvPr id="13" name="임시 디렉터리를 만들 수 없음">
             <a:extLst xmlns:a="http://schemas.openxmlformats.org/drawingml/2006/main">
               <a:ext uri="{FF2B5EF4-FFF2-40B4-BE49-F238E27FC236}">
-                <a16:creationId xmlns:a16="http://schemas.microsoft.com/office/drawing/2014/main" id="{B4D7F965-6598-4543-B93A-8F46642B602F}"/>
+                <a16:creationId xmlns:a16="http://schemas.microsoft.com/office/drawing/2014/main" id="{11EBB362-788F-4BC4-B6C5-EF31EC03FAA1}"/>
               </a:ext>
             </a:extLst>
           </p:cNvPr>
@@ -22940,7 +22940,7 @@
           <p:cNvPr id="14" name="읽기 전용 권한 때문에&#10;서로 다른 테스트 3건이 오류">
             <a:extLst xmlns:a="http://schemas.openxmlformats.org/drawingml/2006/main">
               <a:ext uri="{FF2B5EF4-FFF2-40B4-BE49-F238E27FC236}">
-                <a16:creationId xmlns:a16="http://schemas.microsoft.com/office/drawing/2014/main" id="{6C27689F-52D5-46C3-AD54-505585388ED9}"/>
+                <a16:creationId xmlns:a16="http://schemas.microsoft.com/office/drawing/2014/main" id="{32BA6164-4DE0-4EEE-9016-72C3147E531E}"/>
               </a:ext>
             </a:extLst>
           </p:cNvPr>
@@ -23121,7 +23121,7 @@
           <p:cNvPr id="15" name="">
             <a:extLst xmlns:a="http://schemas.openxmlformats.org/drawingml/2006/main">
               <a:ext uri="{FF2B5EF4-FFF2-40B4-BE49-F238E27FC236}">
-                <a16:creationId xmlns:a16="http://schemas.microsoft.com/office/drawing/2014/main" id="{34A29DBC-5C8C-4738-A809-D06ED5CF7D03}"/>
+                <a16:creationId xmlns:a16="http://schemas.microsoft.com/office/drawing/2014/main" id="{C1F55548-6F81-4341-843B-A3693956FC21}"/>
               </a:ext>
             </a:extLst>
           </p:cNvPr>
@@ -23152,7 +23152,7 @@
           <p:cNvPr id="16" name="전체 실행 기록: 7개 통과 + crop 실패 + 환경 오류 3건">
             <a:extLst xmlns:a="http://schemas.openxmlformats.org/drawingml/2006/main">
               <a:ext uri="{FF2B5EF4-FFF2-40B4-BE49-F238E27FC236}">
-                <a16:creationId xmlns:a16="http://schemas.microsoft.com/office/drawing/2014/main" id="{1DE94CDA-3614-4528-96B0-A8637DDCA81C}"/>
+                <a16:creationId xmlns:a16="http://schemas.microsoft.com/office/drawing/2014/main" id="{D2F95E94-7379-48C2-A363-6068F0A9525E}"/>
               </a:ext>
             </a:extLst>
           </p:cNvPr>
@@ -23308,7 +23308,7 @@
     </p:spTree>
     <p:extLst>
       <p:ext uri="{BB962C8B-B14F-4D97-AF65-F5344CB8AC3E}">
-        <p14:creationId xmlns:p14="http://schemas.microsoft.com/office/powerpoint/2010/main" val="53074992"/>
+        <p14:creationId xmlns:p14="http://schemas.microsoft.com/office/powerpoint/2010/main" val="78045899"/>
       </p:ext>
     </p:extLst>
   </p:cSld>
@@ -23339,7 +23339,7 @@
           <p:cNvPr id="12" name="ACT 0 · Context를 찾는 주체">
             <a:extLst xmlns:a="http://schemas.openxmlformats.org/drawingml/2006/main">
               <a:ext uri="{FF2B5EF4-FFF2-40B4-BE49-F238E27FC236}">
-                <a16:creationId xmlns:a16="http://schemas.microsoft.com/office/drawing/2014/main" id="{DF261AA8-ED77-46F7-B672-12D4935686C4}"/>
+                <a16:creationId xmlns:a16="http://schemas.microsoft.com/office/drawing/2014/main" id="{22BC5D49-9BA2-4801-A583-D705A22CB299}"/>
               </a:ext>
             </a:extLst>
           </p:cNvPr>
@@ -23497,7 +23497,7 @@
           <p:cNvPr id="2" name="S07">
             <a:extLst xmlns:a="http://schemas.openxmlformats.org/drawingml/2006/main">
               <a:ext uri="{FF2B5EF4-FFF2-40B4-BE49-F238E27FC236}">
-                <a16:creationId xmlns:a16="http://schemas.microsoft.com/office/drawing/2014/main" id="{ACEC01B8-67D5-4591-8A50-F356683974A6}"/>
+                <a16:creationId xmlns:a16="http://schemas.microsoft.com/office/drawing/2014/main" id="{34432BF5-5A81-4009-90D2-9DD7B12A5019}"/>
               </a:ext>
             </a:extLst>
           </p:cNvPr>
@@ -23655,7 +23655,7 @@
           <p:cNvPr id="3" name="코드를 AI에게 가져가는 대신&#10;AI를 Repository로 데려간다">
             <a:extLst xmlns:a="http://schemas.openxmlformats.org/drawingml/2006/main">
               <a:ext uri="{FF2B5EF4-FFF2-40B4-BE49-F238E27FC236}">
-                <a16:creationId xmlns:a16="http://schemas.microsoft.com/office/drawing/2014/main" id="{FD4A72AF-E326-4C6C-A7B7-A3086501A9DF}"/>
+                <a16:creationId xmlns:a16="http://schemas.microsoft.com/office/drawing/2014/main" id="{555743DE-921F-4463-AC5B-A6401A00FE5C}"/>
               </a:ext>
             </a:extLst>
           </p:cNvPr>
@@ -23836,7 +23836,7 @@
           <p:cNvPr id="4" name="">
             <a:extLst xmlns:a="http://schemas.openxmlformats.org/drawingml/2006/main">
               <a:ext uri="{FF2B5EF4-FFF2-40B4-BE49-F238E27FC236}">
-                <a16:creationId xmlns:a16="http://schemas.microsoft.com/office/drawing/2014/main" id="{CB75F9E7-F0AA-4EBB-A4E5-FBE748BF0B92}"/>
+                <a16:creationId xmlns:a16="http://schemas.microsoft.com/office/drawing/2014/main" id="{AFC5A4E3-EB0C-4CBD-B3EA-9DCB0DB12BAF}"/>
               </a:ext>
             </a:extLst>
           </p:cNvPr>
@@ -23867,7 +23867,7 @@
           <p:cNvPr id="5" name="교육 모델 · TRIAL-001 단일 CLI 관찰과 연결 · AI 생성 설명용 삽화">
             <a:extLst xmlns:a="http://schemas.openxmlformats.org/drawingml/2006/main">
               <a:ext uri="{FF2B5EF4-FFF2-40B4-BE49-F238E27FC236}">
-                <a16:creationId xmlns:a16="http://schemas.microsoft.com/office/drawing/2014/main" id="{8FC7F62C-6807-4AB6-B984-8FC595B8980C}"/>
+                <a16:creationId xmlns:a16="http://schemas.microsoft.com/office/drawing/2014/main" id="{4DBE7960-9800-4F61-9780-DFB1D4D5FCC9}"/>
               </a:ext>
             </a:extLst>
           </p:cNvPr>
@@ -24025,7 +24025,7 @@
           <p:cNvPr id="6" name="목표 설정과 근거 검토는 개발자에게 남습니다. Repository 접근이 Task 의도를 정하지는 않습니다.">
             <a:extLst xmlns:a="http://schemas.openxmlformats.org/drawingml/2006/main">
               <a:ext uri="{FF2B5EF4-FFF2-40B4-BE49-F238E27FC236}">
-                <a16:creationId xmlns:a16="http://schemas.microsoft.com/office/drawing/2014/main" id="{28AA34C9-8ECA-4507-89CF-57BAA80395B7}"/>
+                <a16:creationId xmlns:a16="http://schemas.microsoft.com/office/drawing/2014/main" id="{F1361B50-3F15-46C4-84BB-7B8BA7842B57}"/>
               </a:ext>
             </a:extLst>
           </p:cNvPr>
@@ -24183,7 +24183,7 @@
           <p:cNvPr id="7" name="내가 골라 전달하는 Context">
             <a:extLst xmlns:a="http://schemas.openxmlformats.org/drawingml/2006/main">
               <a:ext uri="{FF2B5EF4-FFF2-40B4-BE49-F238E27FC236}">
-                <a16:creationId xmlns:a16="http://schemas.microsoft.com/office/drawing/2014/main" id="{1C13C35E-77D9-4BC1-A6CE-51AE79E943DE}"/>
+                <a16:creationId xmlns:a16="http://schemas.microsoft.com/office/drawing/2014/main" id="{AC2F2314-CDFD-4AC3-99B7-3C3F14840EAD}"/>
               </a:ext>
             </a:extLst>
           </p:cNvPr>
@@ -24341,7 +24341,7 @@
           <p:cNvPr id="8" name="조사를 맡기고 근거를 확인">
             <a:extLst xmlns:a="http://schemas.openxmlformats.org/drawingml/2006/main">
               <a:ext uri="{FF2B5EF4-FFF2-40B4-BE49-F238E27FC236}">
-                <a16:creationId xmlns:a16="http://schemas.microsoft.com/office/drawing/2014/main" id="{7B450BA3-63B0-4C3D-A26A-FE4210293D8A}"/>
+                <a16:creationId xmlns:a16="http://schemas.microsoft.com/office/drawing/2014/main" id="{8B3662BF-91B8-43BB-81F5-42F9E5F736F3}"/>
               </a:ext>
             </a:extLst>
           </p:cNvPr>
@@ -24499,7 +24499,7 @@
           <p:cNvPr id="9" name="">
             <a:extLst xmlns:a="http://schemas.openxmlformats.org/drawingml/2006/main">
               <a:ext uri="{FF2B5EF4-FFF2-40B4-BE49-F238E27FC236}">
-                <a16:creationId xmlns:a16="http://schemas.microsoft.com/office/drawing/2014/main" id="{C4F72CA0-BE39-4180-84AA-C782D51FE60C}"/>
+                <a16:creationId xmlns:a16="http://schemas.microsoft.com/office/drawing/2014/main" id="{4387A1F4-6B27-471F-B367-77ACEDA01A67}"/>
               </a:ext>
             </a:extLst>
           </p:cNvPr>
@@ -24509,7 +24509,7 @@
           <p:nvPr/>
         </p:nvPicPr>
         <p:blipFill>
-          <a:blip xmlns:r="http://schemas.openxmlformats.org/officeDocument/2006/relationships" xmlns:a="http://schemas.openxmlformats.org/drawingml/2006/main" r:embed="Rf0977a8fc8ce46b4"/>
+          <a:blip xmlns:r="http://schemas.openxmlformats.org/officeDocument/2006/relationships" xmlns:a="http://schemas.openxmlformats.org/drawingml/2006/main" r:embed="R262508a418ae4203"/>
           <a:srcRect xmlns:a="http://schemas.openxmlformats.org/drawingml/2006/main" l="0" t="18000" r="0" b="15000"/>
           <a:stretch xmlns:a="http://schemas.openxmlformats.org/drawingml/2006/main"/>
         </p:blipFill>
@@ -24528,7 +24528,7 @@
           <p:cNvPr id="10" name="코드 조각을 선택·복사">
             <a:extLst xmlns:a="http://schemas.openxmlformats.org/drawingml/2006/main">
               <a:ext uri="{FF2B5EF4-FFF2-40B4-BE49-F238E27FC236}">
-                <a16:creationId xmlns:a16="http://schemas.microsoft.com/office/drawing/2014/main" id="{AC18A833-21FC-4EFA-BEA8-5DD9D7F58017}"/>
+                <a16:creationId xmlns:a16="http://schemas.microsoft.com/office/drawing/2014/main" id="{B6ACB744-A320-46CB-9B6A-932E740F15BA}"/>
               </a:ext>
             </a:extLst>
           </p:cNvPr>
@@ -24686,7 +24686,7 @@
           <p:cNvPr id="11" name="목표는 사람이, 탐색은 Agent와">
             <a:extLst xmlns:a="http://schemas.openxmlformats.org/drawingml/2006/main">
               <a:ext uri="{FF2B5EF4-FFF2-40B4-BE49-F238E27FC236}">
-                <a16:creationId xmlns:a16="http://schemas.microsoft.com/office/drawing/2014/main" id="{594D53E0-3778-4E4C-8AA6-45A3CA8FE13A}"/>
+                <a16:creationId xmlns:a16="http://schemas.microsoft.com/office/drawing/2014/main" id="{3069110F-8940-44F1-9637-CA7A5810769C}"/>
               </a:ext>
             </a:extLst>
           </p:cNvPr>
@@ -24842,7 +24842,7 @@
     </p:spTree>
     <p:extLst>
       <p:ext uri="{BB962C8B-B14F-4D97-AF65-F5344CB8AC3E}">
-        <p14:creationId xmlns:p14="http://schemas.microsoft.com/office/powerpoint/2010/main" val="1643376365"/>
+        <p14:creationId xmlns:p14="http://schemas.microsoft.com/office/powerpoint/2010/main" val="86831313"/>
       </p:ext>
     </p:extLst>
   </p:cSld>
@@ -24873,7 +24873,7 @@
           <p:cNvPr id="15" name="ACT 0 · 접근할 정보와 정할 목표">
             <a:extLst xmlns:a="http://schemas.openxmlformats.org/drawingml/2006/main">
               <a:ext uri="{FF2B5EF4-FFF2-40B4-BE49-F238E27FC236}">
-                <a16:creationId xmlns:a16="http://schemas.microsoft.com/office/drawing/2014/main" id="{E2BF1C1E-2682-4A05-90BF-202D7D9C0809}"/>
+                <a16:creationId xmlns:a16="http://schemas.microsoft.com/office/drawing/2014/main" id="{F1FAFA2D-C926-4583-9708-5E2339F2366E}"/>
               </a:ext>
             </a:extLst>
           </p:cNvPr>
@@ -25031,7 +25031,7 @@
           <p:cNvPr id="2" name="S08">
             <a:extLst xmlns:a="http://schemas.openxmlformats.org/drawingml/2006/main">
               <a:ext uri="{FF2B5EF4-FFF2-40B4-BE49-F238E27FC236}">
-                <a16:creationId xmlns:a16="http://schemas.microsoft.com/office/drawing/2014/main" id="{D136EF37-B68C-455C-9E48-9D217D6EAD60}"/>
+                <a16:creationId xmlns:a16="http://schemas.microsoft.com/office/drawing/2014/main" id="{32100E83-D6EE-488C-B86E-2A1FEBF4F39D}"/>
               </a:ext>
             </a:extLst>
           </p:cNvPr>
@@ -25189,7 +25189,7 @@
           <p:cNvPr id="3" name="Repository 접근과 Task 의도는 별개다">
             <a:extLst xmlns:a="http://schemas.openxmlformats.org/drawingml/2006/main">
               <a:ext uri="{FF2B5EF4-FFF2-40B4-BE49-F238E27FC236}">
-                <a16:creationId xmlns:a16="http://schemas.microsoft.com/office/drawing/2014/main" id="{C5E995D3-3939-4652-A8E7-5626163A662B}"/>
+                <a16:creationId xmlns:a16="http://schemas.microsoft.com/office/drawing/2014/main" id="{0936280A-0B56-4654-81C8-799884E33718}"/>
               </a:ext>
             </a:extLst>
           </p:cNvPr>
@@ -25347,7 +25347,7 @@
           <p:cNvPr id="4" name="">
             <a:extLst xmlns:a="http://schemas.openxmlformats.org/drawingml/2006/main">
               <a:ext uri="{FF2B5EF4-FFF2-40B4-BE49-F238E27FC236}">
-                <a16:creationId xmlns:a16="http://schemas.microsoft.com/office/drawing/2014/main" id="{AA364CE8-4531-45E3-B4BB-5FAA63521EAC}"/>
+                <a16:creationId xmlns:a16="http://schemas.microsoft.com/office/drawing/2014/main" id="{3285C100-8F17-4779-A3A0-F4068D9244ED}"/>
               </a:ext>
             </a:extLst>
           </p:cNvPr>
@@ -25378,7 +25378,7 @@
           <p:cNvPr id="5" name="이 과정의 교육 모델 · Repository 접근과 작업 의도의 관계">
             <a:extLst xmlns:a="http://schemas.openxmlformats.org/drawingml/2006/main">
               <a:ext uri="{FF2B5EF4-FFF2-40B4-BE49-F238E27FC236}">
-                <a16:creationId xmlns:a16="http://schemas.microsoft.com/office/drawing/2014/main" id="{D7AB7F99-DC2B-4F91-A05F-615638B09509}"/>
+                <a16:creationId xmlns:a16="http://schemas.microsoft.com/office/drawing/2014/main" id="{1F763618-1CED-4821-AFDC-CF0D4B9E8F53}"/>
               </a:ext>
             </a:extLst>
           </p:cNvPr>
@@ -25536,7 +25536,7 @@
           <p:cNvPr id="6" name="모든 제품이나 환경의 기능을 설명하는 공식 분류가 아닙니다.">
             <a:extLst xmlns:a="http://schemas.openxmlformats.org/drawingml/2006/main">
               <a:ext uri="{FF2B5EF4-FFF2-40B4-BE49-F238E27FC236}">
-                <a16:creationId xmlns:a16="http://schemas.microsoft.com/office/drawing/2014/main" id="{316C8112-E0E6-4809-92E5-EC48DD643AB5}"/>
+                <a16:creationId xmlns:a16="http://schemas.microsoft.com/office/drawing/2014/main" id="{3E4A0E48-5BA9-4B94-A404-0D2AF6FC8CAA}"/>
               </a:ext>
             </a:extLst>
           </p:cNvPr>
@@ -25694,7 +25694,7 @@
           <p:cNvPr id="7" name="볼 수 있는 것">
             <a:extLst xmlns:a="http://schemas.openxmlformats.org/drawingml/2006/main">
               <a:ext uri="{FF2B5EF4-FFF2-40B4-BE49-F238E27FC236}">
-                <a16:creationId xmlns:a16="http://schemas.microsoft.com/office/drawing/2014/main" id="{A3DC94D2-F3FA-4C0C-B64C-4E0C6694573F}"/>
+                <a16:creationId xmlns:a16="http://schemas.microsoft.com/office/drawing/2014/main" id="{14862882-3170-451E-8254-BF727D27BECC}"/>
               </a:ext>
             </a:extLst>
           </p:cNvPr>
@@ -25852,7 +25852,7 @@
           <p:cNvPr id="8" name="정해야 하는 것">
             <a:extLst xmlns:a="http://schemas.openxmlformats.org/drawingml/2006/main">
               <a:ext uri="{FF2B5EF4-FFF2-40B4-BE49-F238E27FC236}">
-                <a16:creationId xmlns:a16="http://schemas.microsoft.com/office/drawing/2014/main" id="{707F1DBA-02C1-4BA1-9AE0-55F4696DD5F8}"/>
+                <a16:creationId xmlns:a16="http://schemas.microsoft.com/office/drawing/2014/main" id="{B753E983-F6E0-4C89-9E70-BF41C420C413}"/>
               </a:ext>
             </a:extLst>
           </p:cNvPr>
@@ -26010,7 +26010,7 @@
           <p:cNvPr id="9" name="">
             <a:extLst xmlns:a="http://schemas.openxmlformats.org/drawingml/2006/main">
               <a:ext uri="{FF2B5EF4-FFF2-40B4-BE49-F238E27FC236}">
-                <a16:creationId xmlns:a16="http://schemas.microsoft.com/office/drawing/2014/main" id="{5A538ABC-7BEF-4DC1-B6FA-D5B09721F180}"/>
+                <a16:creationId xmlns:a16="http://schemas.microsoft.com/office/drawing/2014/main" id="{95D0ED03-9012-44A1-995D-0CA8DDA1C25A}"/>
               </a:ext>
             </a:extLst>
           </p:cNvPr>
@@ -26041,7 +26041,7 @@
           <p:cNvPr id="10" name="">
             <a:extLst xmlns:a="http://schemas.openxmlformats.org/drawingml/2006/main">
               <a:ext uri="{FF2B5EF4-FFF2-40B4-BE49-F238E27FC236}">
-                <a16:creationId xmlns:a16="http://schemas.microsoft.com/office/drawing/2014/main" id="{820BF176-6974-4D94-A527-624043348ECF}"/>
+                <a16:creationId xmlns:a16="http://schemas.microsoft.com/office/drawing/2014/main" id="{D74524AB-437E-4C03-94E1-F31DF7EC1437}"/>
               </a:ext>
             </a:extLst>
           </p:cNvPr>
@@ -26072,7 +26072,7 @@
           <p:cNvPr id="11" name="파일&#10;구현&#10;테스트">
             <a:extLst xmlns:a="http://schemas.openxmlformats.org/drawingml/2006/main">
               <a:ext uri="{FF2B5EF4-FFF2-40B4-BE49-F238E27FC236}">
-                <a16:creationId xmlns:a16="http://schemas.microsoft.com/office/drawing/2014/main" id="{226DF72D-27AC-4A69-82B7-BDE7F428DBA9}"/>
+                <a16:creationId xmlns:a16="http://schemas.microsoft.com/office/drawing/2014/main" id="{11FE6A99-8415-439A-8552-8353582F1743}"/>
               </a:ext>
             </a:extLst>
           </p:cNvPr>
@@ -26276,7 +26276,7 @@
           <p:cNvPr id="12" name="원하는 변화&#10;허용할 범위&#10;완료 판단">
             <a:extLst xmlns:a="http://schemas.openxmlformats.org/drawingml/2006/main">
               <a:ext uri="{FF2B5EF4-FFF2-40B4-BE49-F238E27FC236}">
-                <a16:creationId xmlns:a16="http://schemas.microsoft.com/office/drawing/2014/main" id="{82BAA65C-3D99-4A4B-A253-8FC278733F15}"/>
+                <a16:creationId xmlns:a16="http://schemas.microsoft.com/office/drawing/2014/main" id="{2A071D5C-81EA-43D3-891D-9757F1D3F117}"/>
               </a:ext>
             </a:extLst>
           </p:cNvPr>
@@ -26480,7 +26480,7 @@
           <p:cNvPr id="13" name="≠">
             <a:extLst xmlns:a="http://schemas.openxmlformats.org/drawingml/2006/main">
               <a:ext uri="{FF2B5EF4-FFF2-40B4-BE49-F238E27FC236}">
-                <a16:creationId xmlns:a16="http://schemas.microsoft.com/office/drawing/2014/main" id="{9BCA4971-33E6-44CF-B7B1-F5536C7980AF}"/>
+                <a16:creationId xmlns:a16="http://schemas.microsoft.com/office/drawing/2014/main" id="{82170E5B-E8FE-4C5D-85A8-0C2B5CD7E6B3}"/>
               </a:ext>
             </a:extLst>
           </p:cNvPr>
@@ -26638,7 +26638,7 @@
           <p:cNvPr id="14" name="코드가 보여도, 원하는 일은 따로 전달해야 한다.">
             <a:extLst xmlns:a="http://schemas.openxmlformats.org/drawingml/2006/main">
               <a:ext uri="{FF2B5EF4-FFF2-40B4-BE49-F238E27FC236}">
-                <a16:creationId xmlns:a16="http://schemas.microsoft.com/office/drawing/2014/main" id="{FB7130CE-9204-4DC1-B315-129107083A9C}"/>
+                <a16:creationId xmlns:a16="http://schemas.microsoft.com/office/drawing/2014/main" id="{FB32683E-E195-40A3-8895-2ED7B6E0FACB}"/>
               </a:ext>
             </a:extLst>
           </p:cNvPr>
@@ -26794,7 +26794,7 @@
     </p:spTree>
     <p:extLst>
       <p:ext uri="{BB962C8B-B14F-4D97-AF65-F5344CB8AC3E}">
-        <p14:creationId xmlns:p14="http://schemas.microsoft.com/office/powerpoint/2010/main" val="1575183741"/>
+        <p14:creationId xmlns:p14="http://schemas.microsoft.com/office/powerpoint/2010/main" val="1505983663"/>
       </p:ext>
     </p:extLst>
   </p:cSld>
@@ -26825,7 +26825,7 @@
           <p:cNvPr id="11" name="ACT 0 · 다음 질문">
             <a:extLst xmlns:a="http://schemas.openxmlformats.org/drawingml/2006/main">
               <a:ext uri="{FF2B5EF4-FFF2-40B4-BE49-F238E27FC236}">
-                <a16:creationId xmlns:a16="http://schemas.microsoft.com/office/drawing/2014/main" id="{0715B9A0-45A6-4958-99B4-1BDB162D32D8}"/>
+                <a16:creationId xmlns:a16="http://schemas.microsoft.com/office/drawing/2014/main" id="{5ADF2C27-5D43-4DEC-AE4A-B64E5FD69416}"/>
               </a:ext>
             </a:extLst>
           </p:cNvPr>
@@ -26983,7 +26983,7 @@
           <p:cNvPr id="2" name="S09">
             <a:extLst xmlns:a="http://schemas.openxmlformats.org/drawingml/2006/main">
               <a:ext uri="{FF2B5EF4-FFF2-40B4-BE49-F238E27FC236}">
-                <a16:creationId xmlns:a16="http://schemas.microsoft.com/office/drawing/2014/main" id="{C68B83E7-86AA-4194-BA87-E5377044B362}"/>
+                <a16:creationId xmlns:a16="http://schemas.microsoft.com/office/drawing/2014/main" id="{DCF5A65E-3D42-4870-B047-811D652BB2C9}"/>
               </a:ext>
             </a:extLst>
           </p:cNvPr>
@@ -27141,7 +27141,7 @@
           <p:cNvPr id="3" name="Repository를 보면 내가 원하는 것까지 알까?">
             <a:extLst xmlns:a="http://schemas.openxmlformats.org/drawingml/2006/main">
               <a:ext uri="{FF2B5EF4-FFF2-40B4-BE49-F238E27FC236}">
-                <a16:creationId xmlns:a16="http://schemas.microsoft.com/office/drawing/2014/main" id="{1E213C83-0153-4C08-96BB-46326CDF6832}"/>
+                <a16:creationId xmlns:a16="http://schemas.microsoft.com/office/drawing/2014/main" id="{CC95F8A8-75EB-4F8D-9545-53E6606D3328}"/>
               </a:ext>
             </a:extLst>
           </p:cNvPr>
@@ -27299,7 +27299,7 @@
           <p:cNvPr id="4" name="">
             <a:extLst xmlns:a="http://schemas.openxmlformats.org/drawingml/2006/main">
               <a:ext uri="{FF2B5EF4-FFF2-40B4-BE49-F238E27FC236}">
-                <a16:creationId xmlns:a16="http://schemas.microsoft.com/office/drawing/2014/main" id="{80728951-3F89-4D7C-83AF-C75DDD44FB02}"/>
+                <a16:creationId xmlns:a16="http://schemas.microsoft.com/office/drawing/2014/main" id="{7ACCCC14-1114-4CA8-B872-C1435CFEB9C7}"/>
               </a:ext>
             </a:extLst>
           </p:cNvPr>
@@ -27330,7 +27330,7 @@
           <p:cNvPr id="5" name="함께 생각해 보기 · 교육 모델">
             <a:extLst xmlns:a="http://schemas.openxmlformats.org/drawingml/2006/main">
               <a:ext uri="{FF2B5EF4-FFF2-40B4-BE49-F238E27FC236}">
-                <a16:creationId xmlns:a16="http://schemas.microsoft.com/office/drawing/2014/main" id="{0D81BD3E-91DF-46ED-999D-78BE3DD71DAC}"/>
+                <a16:creationId xmlns:a16="http://schemas.microsoft.com/office/drawing/2014/main" id="{FE1E7F69-9209-4296-A49D-E7E3A7A46FDE}"/>
               </a:ext>
             </a:extLst>
           </p:cNvPr>
@@ -27488,7 +27488,7 @@
           <p:cNvPr id="6" name="현재 맡기고 싶은 일을 떠올려 보세요. 질문과 경험 공유는 자발적으로 진행합니다.">
             <a:extLst xmlns:a="http://schemas.openxmlformats.org/drawingml/2006/main">
               <a:ext uri="{FF2B5EF4-FFF2-40B4-BE49-F238E27FC236}">
-                <a16:creationId xmlns:a16="http://schemas.microsoft.com/office/drawing/2014/main" id="{D409D152-2A2B-4ABF-B286-3DBD11B08DEF}"/>
+                <a16:creationId xmlns:a16="http://schemas.microsoft.com/office/drawing/2014/main" id="{AA90E931-42EC-46EE-AD2D-FA580C99A09F}"/>
               </a:ext>
             </a:extLst>
           </p:cNvPr>
@@ -27646,7 +27646,7 @@
           <p:cNvPr id="7" name="지금 이 저장소에&#10;어떤 일을 맡기고 싶으신가요?">
             <a:extLst xmlns:a="http://schemas.openxmlformats.org/drawingml/2006/main">
               <a:ext uri="{FF2B5EF4-FFF2-40B4-BE49-F238E27FC236}">
-                <a16:creationId xmlns:a16="http://schemas.microsoft.com/office/drawing/2014/main" id="{ED521D85-7A30-4169-90ED-191D3FBCE05D}"/>
+                <a16:creationId xmlns:a16="http://schemas.microsoft.com/office/drawing/2014/main" id="{5DEAA14E-00BA-4028-BCC9-CF0E88C03349}"/>
               </a:ext>
             </a:extLst>
           </p:cNvPr>
@@ -27827,7 +27827,7 @@
           <p:cNvPr id="8" name="?">
             <a:extLst xmlns:a="http://schemas.openxmlformats.org/drawingml/2006/main">
               <a:ext uri="{FF2B5EF4-FFF2-40B4-BE49-F238E27FC236}">
-                <a16:creationId xmlns:a16="http://schemas.microsoft.com/office/drawing/2014/main" id="{FA9A1F3D-E627-4190-894E-CF1CD514D720}"/>
+                <a16:creationId xmlns:a16="http://schemas.microsoft.com/office/drawing/2014/main" id="{7E277A2C-64E6-457B-9EF1-EC36B8112EBC}"/>
               </a:ext>
             </a:extLst>
           </p:cNvPr>
@@ -27985,7 +27985,7 @@
           <p:cNvPr id="9" name="">
             <a:extLst xmlns:a="http://schemas.openxmlformats.org/drawingml/2006/main">
               <a:ext uri="{FF2B5EF4-FFF2-40B4-BE49-F238E27FC236}">
-                <a16:creationId xmlns:a16="http://schemas.microsoft.com/office/drawing/2014/main" id="{5CA54179-2021-43E2-82F3-EDA96C5A6CE9}"/>
+                <a16:creationId xmlns:a16="http://schemas.microsoft.com/office/drawing/2014/main" id="{AA2027C2-D60B-45EC-82F4-C62F1C5E3FAF}"/>
               </a:ext>
             </a:extLst>
           </p:cNvPr>
@@ -28016,7 +28016,7 @@
           <p:cNvPr id="10" name="그 원하는 결과까지&#10;코드에 적혀 있을까요?">
             <a:extLst xmlns:a="http://schemas.openxmlformats.org/drawingml/2006/main">
               <a:ext uri="{FF2B5EF4-FFF2-40B4-BE49-F238E27FC236}">
-                <a16:creationId xmlns:a16="http://schemas.microsoft.com/office/drawing/2014/main" id="{E0982958-9045-405D-A133-A2A634935E56}"/>
+                <a16:creationId xmlns:a16="http://schemas.microsoft.com/office/drawing/2014/main" id="{56867C9B-7C1D-46FD-86C0-20BF17B77B25}"/>
               </a:ext>
             </a:extLst>
           </p:cNvPr>
@@ -28195,7 +28195,7 @@
     </p:spTree>
     <p:extLst>
       <p:ext uri="{BB962C8B-B14F-4D97-AF65-F5344CB8AC3E}">
-        <p14:creationId xmlns:p14="http://schemas.microsoft.com/office/powerpoint/2010/main" val="780849956"/>
+        <p14:creationId xmlns:p14="http://schemas.microsoft.com/office/powerpoint/2010/main" val="1367839002"/>
       </p:ext>
     </p:extLst>
   </p:cSld>

--- a/production/ACT_0.pptx
+++ b/production/ACT_0.pptx
@@ -2,21 +2,21 @@
 <file path=ppt/presentation.xml><?xml version="1.0" encoding="utf-8"?>
 <p:presentation xmlns:p="http://schemas.openxmlformats.org/presentationml/2006/main">
   <p:sldMasterIdLst>
-    <p:sldMasterId xmlns:r="http://schemas.openxmlformats.org/officeDocument/2006/relationships" id="2147483648" r:id="Rbdbfeafa66684e10"/>
+    <p:sldMasterId xmlns:r="http://schemas.openxmlformats.org/officeDocument/2006/relationships" id="2147483648" r:id="R989e4991c2d548ea"/>
   </p:sldMasterIdLst>
   <p:notesMasterIdLst>
-    <p:notesMasterId xmlns:r="http://schemas.openxmlformats.org/officeDocument/2006/relationships" r:id="Rbde1282568e4442b"/>
+    <p:notesMasterId xmlns:r="http://schemas.openxmlformats.org/officeDocument/2006/relationships" r:id="Ra3ce76a09b3b476b"/>
   </p:notesMasterIdLst>
   <p:sldIdLst>
-    <p:sldId xmlns:r="http://schemas.openxmlformats.org/officeDocument/2006/relationships" id="256" r:id="Re25ba3eaa5e7449f"/>
-    <p:sldId xmlns:r="http://schemas.openxmlformats.org/officeDocument/2006/relationships" id="257" r:id="Rf86159611443443a"/>
-    <p:sldId xmlns:r="http://schemas.openxmlformats.org/officeDocument/2006/relationships" id="258" r:id="Ra0feeb9f4c4843d4"/>
-    <p:sldId xmlns:r="http://schemas.openxmlformats.org/officeDocument/2006/relationships" id="259" r:id="Re282c6bbb06a4c8d"/>
-    <p:sldId xmlns:r="http://schemas.openxmlformats.org/officeDocument/2006/relationships" id="260" r:id="R7f0ce758eaba4e2b"/>
-    <p:sldId xmlns:r="http://schemas.openxmlformats.org/officeDocument/2006/relationships" id="261" r:id="Rc20c590bffc44f96"/>
-    <p:sldId xmlns:r="http://schemas.openxmlformats.org/officeDocument/2006/relationships" id="262" r:id="Rc8df4fc184e04353"/>
-    <p:sldId xmlns:r="http://schemas.openxmlformats.org/officeDocument/2006/relationships" id="263" r:id="R870e1f9c893a401b"/>
-    <p:sldId xmlns:r="http://schemas.openxmlformats.org/officeDocument/2006/relationships" id="264" r:id="R0772e28dabd64f86"/>
+    <p:sldId xmlns:r="http://schemas.openxmlformats.org/officeDocument/2006/relationships" id="256" r:id="Rbe3edf4d711b4bef"/>
+    <p:sldId xmlns:r="http://schemas.openxmlformats.org/officeDocument/2006/relationships" id="257" r:id="R3813f64f3c1b4e70"/>
+    <p:sldId xmlns:r="http://schemas.openxmlformats.org/officeDocument/2006/relationships" id="258" r:id="Re40e8ac4f067479d"/>
+    <p:sldId xmlns:r="http://schemas.openxmlformats.org/officeDocument/2006/relationships" id="259" r:id="Ra5488453189044f8"/>
+    <p:sldId xmlns:r="http://schemas.openxmlformats.org/officeDocument/2006/relationships" id="260" r:id="R0fa2cb3c33054a26"/>
+    <p:sldId xmlns:r="http://schemas.openxmlformats.org/officeDocument/2006/relationships" id="261" r:id="Rf54b10b297d3491f"/>
+    <p:sldId xmlns:r="http://schemas.openxmlformats.org/officeDocument/2006/relationships" id="262" r:id="R3ba2099e54944792"/>
+    <p:sldId xmlns:r="http://schemas.openxmlformats.org/officeDocument/2006/relationships" id="263" r:id="R8e31cf9bacb94408"/>
+    <p:sldId xmlns:r="http://schemas.openxmlformats.org/officeDocument/2006/relationships" id="264" r:id="Rc0b894f1171d4565"/>
   </p:sldIdLst>
   <p:sldSz cx="12192000" cy="6858000"/>
   <p:notesSz cx="6858000" cy="9144000"/>
@@ -2520,7 +2520,7 @@
           </a:p>
           <a:p xmlns:a="http://schemas.openxmlformats.org/drawingml/2006/main">
             <a:r>
-              <a:t>3. **TRANSFER (1:30–2:00):** 가운데 ≠를 짚고 “코드가 보여도 원하는 일은 따로 전달해야 한다”로 마친다. ACT 1의 구체적인 요청 구조는 아직 소개하지 않는다.</a:t>
+              <a:t>3. **TRANSFER (1:30–2:00):** 가운데 ≠를 짚고 “코드가 보여도 원하는 일은 따로 전달해야 한다”로 정리한다. 이어 이 구분을 각자가 맡기고 싶은 작업에 대입할 질문을 남긴다. ACT 1의 구체적인 요청 구조는 아직 소개하지 않는다.</a:t>
             </a:r>
           </a:p>
           <a:p xmlns:a="http://schemas.openxmlformats.org/drawingml/2006/main">
@@ -2600,7 +2600,7 @@
           </a:p>
           <a:p xmlns:a="http://schemas.openxmlformats.org/drawingml/2006/main">
             <a:r>
-              <a:t>Transition: “그렇다면 Repository를 보면 내가 원하는 것까지 알까요?”라고 S09의 논의 질문을 연다.</a:t>
+              <a:t>Transition: “이 구분을 여러분이 지금 맡기고 싶은 일에 대입해 보겠습니다.”라고 S09의 개인 적용 질문을 연다.</a:t>
             </a:r>
           </a:p>
           <a:p xmlns:a="http://schemas.openxmlformats.org/drawingml/2006/main">
@@ -2770,7 +2770,7 @@
           </a:p>
           <a:p xmlns:a="http://schemas.openxmlformats.org/drawingml/2006/main">
             <a:r>
-              <a:t>Opening Question: “Repository를 볼 수 있으면 내가 원하는 것까지 알 수 있을까?”</a:t>
+              <a:t>Opening Question: “내가 지금 맡기고 싶은 일의 원하는 결과까지 코드에 적혀 있을까?”</a:t>
             </a:r>
           </a:p>
           <a:p xmlns:a="http://schemas.openxmlformats.org/drawingml/2006/main">
@@ -2790,7 +2790,7 @@
           </a:p>
           <a:p xmlns:a="http://schemas.openxmlformats.org/drawingml/2006/main">
             <a:r>
-              <a:t>1. **DISCUSS / TRANSITION (0:00–3:00):** “지금 이 저장소에 어떤 일을 맡기고 싶은가?”와 “그 원하는 결과까지 코드에 적혀 있는가?”를 차례로 읽는다. 답이나 다음 단계의 체크리스트를 제시하지 않는다.</a:t>
+              <a:t>1. **DISCUSS / TRANSITION (0:00–3:00):** 화면 상단의 “내 작업에 적용할 질문”을 짚고, 각자가 지금 맡기고 싶은 일 하나를 떠올리게 한다. “지금 이 저장소에 어떤 일을 맡기고 싶은가?”와 “그 원하는 결과까지 코드에 적혀 있는가?”를 차례로 읽는다. S08의 구분을 자기 작업에 대입하며 답이나 다음 단계의 체크리스트를 제시하지 않는다.</a:t>
             </a:r>
           </a:p>
           <a:p xmlns:a="http://schemas.openxmlformats.org/drawingml/2006/main">
@@ -2875,7 +2875,7 @@
           </a:p>
           <a:p xmlns:a="http://schemas.openxmlformats.org/drawingml/2006/main">
             <a:r>
-              <a:t>Transition: `Chatbot → Prompt`로 다음 ACT에 handoff한다. ACT 1의 내부 구조는 소개하지 않는다.</a:t>
+              <a:t>Transition: “방금 떠올린 원하는 결과를 작업 요청으로 전달하려면 무엇이 더 필요할까요?”라는 질문으로 `Chatbot → Prompt`를 handoff한다. ACT 1의 내부 구조는 소개하지 않는다.</a:t>
             </a:r>
           </a:p>
           <a:p xmlns:a="http://schemas.openxmlformats.org/drawingml/2006/main">
@@ -2952,7 +2952,7 @@
           <p:cNvPr id="3" name="Title">
             <a:extLst xmlns:a="http://schemas.openxmlformats.org/drawingml/2006/main">
               <a:ext uri="{FF2B5EF4-FFF2-40B4-BE49-F238E27FC236}">
-                <a16:creationId xmlns:a16="http://schemas.microsoft.com/office/drawing/2014/main" id="{56B82EC1-4702-4D17-ABC7-6FC1B9832792}"/>
+                <a16:creationId xmlns:a16="http://schemas.microsoft.com/office/drawing/2014/main" id="{A95267A7-CF47-4D92-BB0A-124F1BDB6E5A}"/>
               </a:ext>
             </a:extLst>
           </p:cNvPr>
@@ -3181,7 +3181,7 @@
           <p:cNvPr id="2" name="Subtitle">
             <a:extLst xmlns:a="http://schemas.openxmlformats.org/drawingml/2006/main">
               <a:ext uri="{FF2B5EF4-FFF2-40B4-BE49-F238E27FC236}">
-                <a16:creationId xmlns:a16="http://schemas.microsoft.com/office/drawing/2014/main" id="{B09A683E-4342-470B-8D9B-7BAA6D2F7BE6}"/>
+                <a16:creationId xmlns:a16="http://schemas.microsoft.com/office/drawing/2014/main" id="{0A521828-CFAB-4A98-A01A-D8542644EBB3}"/>
               </a:ext>
             </a:extLst>
           </p:cNvPr>
@@ -3427,7 +3427,7 @@
           <p:cNvPr id="2" name="Section title">
             <a:extLst xmlns:a="http://schemas.openxmlformats.org/drawingml/2006/main">
               <a:ext uri="{FF2B5EF4-FFF2-40B4-BE49-F238E27FC236}">
-                <a16:creationId xmlns:a16="http://schemas.microsoft.com/office/drawing/2014/main" id="{A9C251AF-C835-4DB8-92E8-52DCADAFD9CC}"/>
+                <a16:creationId xmlns:a16="http://schemas.microsoft.com/office/drawing/2014/main" id="{D6C87A90-95FA-4251-A027-F5C449E38396}"/>
               </a:ext>
             </a:extLst>
           </p:cNvPr>
@@ -3673,7 +3673,7 @@
           <p:cNvPr id="3" name="Title">
             <a:extLst xmlns:a="http://schemas.openxmlformats.org/drawingml/2006/main">
               <a:ext uri="{FF2B5EF4-FFF2-40B4-BE49-F238E27FC236}">
-                <a16:creationId xmlns:a16="http://schemas.microsoft.com/office/drawing/2014/main" id="{7AEAAD17-B335-48B9-8EA1-5304E3647D04}"/>
+                <a16:creationId xmlns:a16="http://schemas.microsoft.com/office/drawing/2014/main" id="{8FB009FD-BD3D-42D0-8E42-0D93D4B46AE7}"/>
               </a:ext>
             </a:extLst>
           </p:cNvPr>
@@ -3902,7 +3902,7 @@
           <p:cNvPr id="2" name="Body">
             <a:extLst xmlns:a="http://schemas.openxmlformats.org/drawingml/2006/main">
               <a:ext uri="{FF2B5EF4-FFF2-40B4-BE49-F238E27FC236}">
-                <a16:creationId xmlns:a16="http://schemas.microsoft.com/office/drawing/2014/main" id="{711547CA-25E8-4812-87AA-B975B12E9300}"/>
+                <a16:creationId xmlns:a16="http://schemas.microsoft.com/office/drawing/2014/main" id="{9D8BE5BC-80CA-4539-A8B5-02E23D6113D1}"/>
               </a:ext>
             </a:extLst>
           </p:cNvPr>
@@ -4148,7 +4148,7 @@
           <p:cNvPr id="4" name="Title">
             <a:extLst xmlns:a="http://schemas.openxmlformats.org/drawingml/2006/main">
               <a:ext uri="{FF2B5EF4-FFF2-40B4-BE49-F238E27FC236}">
-                <a16:creationId xmlns:a16="http://schemas.microsoft.com/office/drawing/2014/main" id="{069A56BA-2EF7-4D13-9EC1-B006E6A69479}"/>
+                <a16:creationId xmlns:a16="http://schemas.microsoft.com/office/drawing/2014/main" id="{BB9C8362-3D71-4BFA-BB8F-6E88A3F22045}"/>
               </a:ext>
             </a:extLst>
           </p:cNvPr>
@@ -4377,7 +4377,7 @@
           <p:cNvPr id="2" name="Left column">
             <a:extLst xmlns:a="http://schemas.openxmlformats.org/drawingml/2006/main">
               <a:ext uri="{FF2B5EF4-FFF2-40B4-BE49-F238E27FC236}">
-                <a16:creationId xmlns:a16="http://schemas.microsoft.com/office/drawing/2014/main" id="{8E71181F-D300-42FD-8582-8DFE40FCBF70}"/>
+                <a16:creationId xmlns:a16="http://schemas.microsoft.com/office/drawing/2014/main" id="{42DB8546-DA19-4562-85CD-1D53EFEA29F1}"/>
               </a:ext>
             </a:extLst>
           </p:cNvPr>
@@ -4606,7 +4606,7 @@
           <p:cNvPr id="3" name="Right column">
             <a:extLst xmlns:a="http://schemas.openxmlformats.org/drawingml/2006/main">
               <a:ext uri="{FF2B5EF4-FFF2-40B4-BE49-F238E27FC236}">
-                <a16:creationId xmlns:a16="http://schemas.microsoft.com/office/drawing/2014/main" id="{7AE94604-D544-41DF-A0DF-DC057E7FF1AC}"/>
+                <a16:creationId xmlns:a16="http://schemas.microsoft.com/office/drawing/2014/main" id="{CD74B3E9-6B31-4C4E-A33F-B2A38A82E784}"/>
               </a:ext>
             </a:extLst>
           </p:cNvPr>
@@ -4852,7 +4852,7 @@
           <p:cNvPr id="3" name="Title">
             <a:extLst xmlns:a="http://schemas.openxmlformats.org/drawingml/2006/main">
               <a:ext uri="{FF2B5EF4-FFF2-40B4-BE49-F238E27FC236}">
-                <a16:creationId xmlns:a16="http://schemas.microsoft.com/office/drawing/2014/main" id="{52D3C4D7-0563-45C3-BE24-42B315BFF3DF}"/>
+                <a16:creationId xmlns:a16="http://schemas.microsoft.com/office/drawing/2014/main" id="{88D851D8-68DF-4EE2-AC62-76F983F5800C}"/>
               </a:ext>
             </a:extLst>
           </p:cNvPr>
@@ -5081,7 +5081,7 @@
           <p:cNvPr id="2" name="Left column">
             <a:extLst xmlns:a="http://schemas.openxmlformats.org/drawingml/2006/main">
               <a:ext uri="{FF2B5EF4-FFF2-40B4-BE49-F238E27FC236}">
-                <a16:creationId xmlns:a16="http://schemas.microsoft.com/office/drawing/2014/main" id="{F6838C4E-3A01-4DB3-92B1-9476BB0F7B19}"/>
+                <a16:creationId xmlns:a16="http://schemas.microsoft.com/office/drawing/2014/main" id="{8E3A6D66-9369-4C58-84F4-8560B59E8139}"/>
               </a:ext>
             </a:extLst>
           </p:cNvPr>
@@ -5348,12 +5348,12 @@
   </p:cSld>
   <p:clrMap bg1="lt1" tx1="dk1" bg2="lt2" tx2="dk2" accent1="accent1" accent2="accent2" accent3="accent3" accent4="accent4" accent5="accent5" accent6="accent6" hlink="hlink" folHlink="folHlink"/>
   <p:sldLayoutIdLst>
-    <p:sldLayoutId xmlns:r="http://schemas.openxmlformats.org/officeDocument/2006/relationships" id="2147483649" r:id="R760eeeebe00e4854"/>
-    <p:sldLayoutId xmlns:r="http://schemas.openxmlformats.org/officeDocument/2006/relationships" id="2147483650" r:id="Rb89cff5448d849ef"/>
-    <p:sldLayoutId xmlns:r="http://schemas.openxmlformats.org/officeDocument/2006/relationships" id="2147483651" r:id="R3869a27fa66c42ac"/>
-    <p:sldLayoutId xmlns:r="http://schemas.openxmlformats.org/officeDocument/2006/relationships" id="2147483652" r:id="R4ab4eb98220b4dd1"/>
-    <p:sldLayoutId xmlns:r="http://schemas.openxmlformats.org/officeDocument/2006/relationships" id="2147483653" r:id="R5fdcce939a084bb4"/>
-    <p:sldLayoutId xmlns:r="http://schemas.openxmlformats.org/officeDocument/2006/relationships" id="2147483654" r:id="Rd21e8ce8c73348d7"/>
+    <p:sldLayoutId xmlns:r="http://schemas.openxmlformats.org/officeDocument/2006/relationships" id="2147483649" r:id="R1dd30c3f689d42d0"/>
+    <p:sldLayoutId xmlns:r="http://schemas.openxmlformats.org/officeDocument/2006/relationships" id="2147483650" r:id="R2cc305f1172d4cbd"/>
+    <p:sldLayoutId xmlns:r="http://schemas.openxmlformats.org/officeDocument/2006/relationships" id="2147483651" r:id="Rfd57267e9f5b4719"/>
+    <p:sldLayoutId xmlns:r="http://schemas.openxmlformats.org/officeDocument/2006/relationships" id="2147483652" r:id="R36c2362580c74212"/>
+    <p:sldLayoutId xmlns:r="http://schemas.openxmlformats.org/officeDocument/2006/relationships" id="2147483653" r:id="Rca3dd13ee4b04884"/>
+    <p:sldLayoutId xmlns:r="http://schemas.openxmlformats.org/officeDocument/2006/relationships" id="2147483654" r:id="R61b6fa0bfb914156"/>
   </p:sldLayoutIdLst>
   <p:txStyles>
     <p:titleStyle>
@@ -5904,7 +5904,7 @@
           <p:cNvPr id="12" name="ACT 0 · 익숙한 사용에서 시작하기">
             <a:extLst xmlns:a="http://schemas.openxmlformats.org/drawingml/2006/main">
               <a:ext uri="{FF2B5EF4-FFF2-40B4-BE49-F238E27FC236}">
-                <a16:creationId xmlns:a16="http://schemas.microsoft.com/office/drawing/2014/main" id="{B0E71037-44E2-4D2E-860B-04216000CEFD}"/>
+                <a16:creationId xmlns:a16="http://schemas.microsoft.com/office/drawing/2014/main" id="{3AADC76C-115B-4BE9-9130-6D1CD354E8D6}"/>
               </a:ext>
             </a:extLst>
           </p:cNvPr>
@@ -6062,7 +6062,7 @@
           <p:cNvPr id="2" name="S01">
             <a:extLst xmlns:a="http://schemas.openxmlformats.org/drawingml/2006/main">
               <a:ext uri="{FF2B5EF4-FFF2-40B4-BE49-F238E27FC236}">
-                <a16:creationId xmlns:a16="http://schemas.microsoft.com/office/drawing/2014/main" id="{59EE76F0-CFBA-4037-9619-BDDA16E10F2E}"/>
+                <a16:creationId xmlns:a16="http://schemas.microsoft.com/office/drawing/2014/main" id="{7EFAB365-A79A-41EF-97C3-162460057F68}"/>
               </a:ext>
             </a:extLst>
           </p:cNvPr>
@@ -6220,7 +6220,7 @@
           <p:cNvPr id="3" name="AI에게 지금 무엇을 맡기고 있는가?">
             <a:extLst xmlns:a="http://schemas.openxmlformats.org/drawingml/2006/main">
               <a:ext uri="{FF2B5EF4-FFF2-40B4-BE49-F238E27FC236}">
-                <a16:creationId xmlns:a16="http://schemas.microsoft.com/office/drawing/2014/main" id="{A7591E0F-2ACF-4232-854E-4CECA34CFF12}"/>
+                <a16:creationId xmlns:a16="http://schemas.microsoft.com/office/drawing/2014/main" id="{A520DE28-90DE-4EC9-8CCA-141D5D04E140}"/>
               </a:ext>
             </a:extLst>
           </p:cNvPr>
@@ -6378,7 +6378,7 @@
           <p:cNvPr id="4" name="">
             <a:extLst xmlns:a="http://schemas.openxmlformats.org/drawingml/2006/main">
               <a:ext uri="{FF2B5EF4-FFF2-40B4-BE49-F238E27FC236}">
-                <a16:creationId xmlns:a16="http://schemas.microsoft.com/office/drawing/2014/main" id="{DAFEEFB8-FA25-4212-AFDA-69C9791B95DA}"/>
+                <a16:creationId xmlns:a16="http://schemas.microsoft.com/office/drawing/2014/main" id="{F64453AC-C2C0-42B1-9E36-FEB6956888D7}"/>
               </a:ext>
             </a:extLst>
           </p:cNvPr>
@@ -6409,7 +6409,7 @@
           <p:cNvPr id="5" name="생각해 보기 · 이 과정의 교육 모델">
             <a:extLst xmlns:a="http://schemas.openxmlformats.org/drawingml/2006/main">
               <a:ext uri="{FF2B5EF4-FFF2-40B4-BE49-F238E27FC236}">
-                <a16:creationId xmlns:a16="http://schemas.microsoft.com/office/drawing/2014/main" id="{D09B0A56-2E9C-4838-A214-BB8BD60F8E50}"/>
+                <a16:creationId xmlns:a16="http://schemas.microsoft.com/office/drawing/2014/main" id="{97F9F82F-E969-4E47-9227-07C2A1E89132}"/>
               </a:ext>
             </a:extLst>
           </p:cNvPr>
@@ -6567,7 +6567,7 @@
           <p:cNvPr id="6" name="자신의 경험 하나만 떠올려 보세요. 사용 수준을 평가하는 질문이 아닙니다.">
             <a:extLst xmlns:a="http://schemas.openxmlformats.org/drawingml/2006/main">
               <a:ext uri="{FF2B5EF4-FFF2-40B4-BE49-F238E27FC236}">
-                <a16:creationId xmlns:a16="http://schemas.microsoft.com/office/drawing/2014/main" id="{29AB6231-4CA2-4F31-A542-219CA173BE7C}"/>
+                <a16:creationId xmlns:a16="http://schemas.microsoft.com/office/drawing/2014/main" id="{70DD41FF-7C8B-43EE-8260-C733E67B2FB3}"/>
               </a:ext>
             </a:extLst>
           </p:cNvPr>
@@ -6725,7 +6725,7 @@
           <p:cNvPr id="7" name="가장 최근에 AI에게 맡긴 일 하나">
             <a:extLst xmlns:a="http://schemas.openxmlformats.org/drawingml/2006/main">
               <a:ext uri="{FF2B5EF4-FFF2-40B4-BE49-F238E27FC236}">
-                <a16:creationId xmlns:a16="http://schemas.microsoft.com/office/drawing/2014/main" id="{B626279D-700C-4752-AAB4-7BDE5B5A2E39}"/>
+                <a16:creationId xmlns:a16="http://schemas.microsoft.com/office/drawing/2014/main" id="{9266A557-7961-4CCD-A200-9AEFD59E0AC3}"/>
               </a:ext>
             </a:extLst>
           </p:cNvPr>
@@ -6883,7 +6883,7 @@
           <p:cNvPr id="8" name="오류 설명을 들었나요?&#10;관련 코드를 조사하게 했나요?&#10;수정한 결과까지 확인하게 했나요?">
             <a:extLst xmlns:a="http://schemas.openxmlformats.org/drawingml/2006/main">
               <a:ext uri="{FF2B5EF4-FFF2-40B4-BE49-F238E27FC236}">
-                <a16:creationId xmlns:a16="http://schemas.microsoft.com/office/drawing/2014/main" id="{1DE8D726-A6BB-47F9-B477-D7BAF21DD1C8}"/>
+                <a16:creationId xmlns:a16="http://schemas.microsoft.com/office/drawing/2014/main" id="{543B52AB-03DC-4BB6-BEA8-91006F8B70EF}"/>
               </a:ext>
             </a:extLst>
           </p:cNvPr>
@@ -7087,7 +7087,7 @@
           <p:cNvPr id="9" name="">
             <a:extLst xmlns:a="http://schemas.openxmlformats.org/drawingml/2006/main">
               <a:ext uri="{FF2B5EF4-FFF2-40B4-BE49-F238E27FC236}">
-                <a16:creationId xmlns:a16="http://schemas.microsoft.com/office/drawing/2014/main" id="{01CFB95B-5A7D-4FFD-AF8D-C853A8BFC425}"/>
+                <a16:creationId xmlns:a16="http://schemas.microsoft.com/office/drawing/2014/main" id="{8321A8C4-A43A-48FE-8727-57446498EE64}"/>
               </a:ext>
             </a:extLst>
           </p:cNvPr>
@@ -7118,7 +7118,7 @@
           <p:cNvPr id="10" name="질문 · 생성&#10;조사 · 변경&#10;검증 · 작업 방식 개선">
             <a:extLst xmlns:a="http://schemas.openxmlformats.org/drawingml/2006/main">
               <a:ext uri="{FF2B5EF4-FFF2-40B4-BE49-F238E27FC236}">
-                <a16:creationId xmlns:a16="http://schemas.microsoft.com/office/drawing/2014/main" id="{35CC1EAD-0ED3-4339-9252-D507E540DA1F}"/>
+                <a16:creationId xmlns:a16="http://schemas.microsoft.com/office/drawing/2014/main" id="{A1108B2E-2085-4886-9D5B-97B571FFB41A}"/>
               </a:ext>
             </a:extLst>
           </p:cNvPr>
@@ -7322,7 +7322,7 @@
           <p:cNvPr id="11" name="익숙한 방식에서 출발해도 괜찮습니다.">
             <a:extLst xmlns:a="http://schemas.openxmlformats.org/drawingml/2006/main">
               <a:ext uri="{FF2B5EF4-FFF2-40B4-BE49-F238E27FC236}">
-                <a16:creationId xmlns:a16="http://schemas.microsoft.com/office/drawing/2014/main" id="{6BA06903-C1D5-48A2-9443-AA6C6EB1384A}"/>
+                <a16:creationId xmlns:a16="http://schemas.microsoft.com/office/drawing/2014/main" id="{50535BAB-B021-4CB1-A957-C5F98E960515}"/>
               </a:ext>
             </a:extLst>
           </p:cNvPr>
@@ -7478,7 +7478,7 @@
     </p:spTree>
     <p:extLst>
       <p:ext uri="{BB962C8B-B14F-4D97-AF65-F5344CB8AC3E}">
-        <p14:creationId xmlns:p14="http://schemas.microsoft.com/office/powerpoint/2010/main" val="643857892"/>
+        <p14:creationId xmlns:p14="http://schemas.microsoft.com/office/powerpoint/2010/main" val="1770550529"/>
       </p:ext>
     </p:extLst>
   </p:cSld>
@@ -7509,7 +7509,7 @@
           <p:cNvPr id="23" name="ACT 0 · 작은 코드 질문">
             <a:extLst xmlns:a="http://schemas.openxmlformats.org/drawingml/2006/main">
               <a:ext uri="{FF2B5EF4-FFF2-40B4-BE49-F238E27FC236}">
-                <a16:creationId xmlns:a16="http://schemas.microsoft.com/office/drawing/2014/main" id="{D4250985-CFB0-4A92-A960-7C2CA8A7356B}"/>
+                <a16:creationId xmlns:a16="http://schemas.microsoft.com/office/drawing/2014/main" id="{BEBA06D7-3F2E-4934-86D1-08852A8C7A7F}"/>
               </a:ext>
             </a:extLst>
           </p:cNvPr>
@@ -7667,7 +7667,7 @@
           <p:cNvPr id="2" name="S02">
             <a:extLst xmlns:a="http://schemas.openxmlformats.org/drawingml/2006/main">
               <a:ext uri="{FF2B5EF4-FFF2-40B4-BE49-F238E27FC236}">
-                <a16:creationId xmlns:a16="http://schemas.microsoft.com/office/drawing/2014/main" id="{F833CB1B-8FC1-4516-8417-CE54F25AF518}"/>
+                <a16:creationId xmlns:a16="http://schemas.microsoft.com/office/drawing/2014/main" id="{926FE628-6FAA-47C8-A570-92C8047C4ED9}"/>
               </a:ext>
             </a:extLst>
           </p:cNvPr>
@@ -7825,7 +7825,7 @@
           <p:cNvPr id="3" name="작은 질문에는 Chatbot이 유용하다">
             <a:extLst xmlns:a="http://schemas.openxmlformats.org/drawingml/2006/main">
               <a:ext uri="{FF2B5EF4-FFF2-40B4-BE49-F238E27FC236}">
-                <a16:creationId xmlns:a16="http://schemas.microsoft.com/office/drawing/2014/main" id="{E0AE5EA2-A16F-461A-B92D-85C55D3AA66F}"/>
+                <a16:creationId xmlns:a16="http://schemas.microsoft.com/office/drawing/2014/main" id="{03200FD3-10C7-45C0-8B7C-1553DEEEBAC5}"/>
               </a:ext>
             </a:extLst>
           </p:cNvPr>
@@ -7983,7 +7983,7 @@
           <p:cNvPr id="4" name="">
             <a:extLst xmlns:a="http://schemas.openxmlformats.org/drawingml/2006/main">
               <a:ext uri="{FF2B5EF4-FFF2-40B4-BE49-F238E27FC236}">
-                <a16:creationId xmlns:a16="http://schemas.microsoft.com/office/drawing/2014/main" id="{EAD31D19-9B29-40A2-80FD-0CE6C8E02B41}"/>
+                <a16:creationId xmlns:a16="http://schemas.microsoft.com/office/drawing/2014/main" id="{CAF9C324-2E45-469B-A91B-A36186107488}"/>
               </a:ext>
             </a:extLst>
           </p:cNvPr>
@@ -8014,7 +8014,7 @@
           <p:cNvPr id="5" name="교육용 예시 · 실제 ChatGPT 대화 캡처가 아님">
             <a:extLst xmlns:a="http://schemas.openxmlformats.org/drawingml/2006/main">
               <a:ext uri="{FF2B5EF4-FFF2-40B4-BE49-F238E27FC236}">
-                <a16:creationId xmlns:a16="http://schemas.microsoft.com/office/drawing/2014/main" id="{19727E38-45C0-4ABD-BFC9-47FE8178C40E}"/>
+                <a16:creationId xmlns:a16="http://schemas.microsoft.com/office/drawing/2014/main" id="{EE4C7340-1CDD-4F5E-860C-408D2E6A74AF}"/>
               </a:ext>
             </a:extLst>
           </p:cNvPr>
@@ -8172,7 +8172,7 @@
           <p:cNvPr id="6" name="일반적인 질문 흐름을 설명하며 특정 제품의 정확도나 우월성을 주장하지 않습니다.">
             <a:extLst xmlns:a="http://schemas.openxmlformats.org/drawingml/2006/main">
               <a:ext uri="{FF2B5EF4-FFF2-40B4-BE49-F238E27FC236}">
-                <a16:creationId xmlns:a16="http://schemas.microsoft.com/office/drawing/2014/main" id="{A34330F6-4345-4B40-8A49-0DE5010FA880}"/>
+                <a16:creationId xmlns:a16="http://schemas.microsoft.com/office/drawing/2014/main" id="{8D9F09A3-5424-4E24-8688-596EFD79E272}"/>
               </a:ext>
             </a:extLst>
           </p:cNvPr>
@@ -8330,7 +8330,7 @@
           <p:cNvPr id="7" name="“이 코드에서 무엇이 남을까?”">
             <a:extLst xmlns:a="http://schemas.openxmlformats.org/drawingml/2006/main">
               <a:ext uri="{FF2B5EF4-FFF2-40B4-BE49-F238E27FC236}">
-                <a16:creationId xmlns:a16="http://schemas.microsoft.com/office/drawing/2014/main" id="{F9383DBB-ACEC-432B-97F7-21C79447C244}"/>
+                <a16:creationId xmlns:a16="http://schemas.microsoft.com/office/drawing/2014/main" id="{50701A39-18B7-4115-815A-FDEA1C0AC53C}"/>
               </a:ext>
             </a:extLst>
           </p:cNvPr>
@@ -8488,7 +8488,7 @@
           <p:cNvPr id="8" name="">
             <a:extLst xmlns:a="http://schemas.openxmlformats.org/drawingml/2006/main">
               <a:ext uri="{FF2B5EF4-FFF2-40B4-BE49-F238E27FC236}">
-                <a16:creationId xmlns:a16="http://schemas.microsoft.com/office/drawing/2014/main" id="{3849AAD5-1CA3-49EB-8D83-EECB17F88314}"/>
+                <a16:creationId xmlns:a16="http://schemas.microsoft.com/office/drawing/2014/main" id="{C9D9B71C-836D-40B9-A45B-F0967E73A7F1}"/>
               </a:ext>
             </a:extLst>
           </p:cNvPr>
@@ -8519,7 +8519,7 @@
           <p:cNvPr id="9" name="row = [1, 2, 3, 4]&#10;row[1:3]">
             <a:extLst xmlns:a="http://schemas.openxmlformats.org/drawingml/2006/main">
               <a:ext uri="{FF2B5EF4-FFF2-40B4-BE49-F238E27FC236}">
-                <a16:creationId xmlns:a16="http://schemas.microsoft.com/office/drawing/2014/main" id="{86BD8B17-4C87-47E7-BE95-4497D634CB2C}"/>
+                <a16:creationId xmlns:a16="http://schemas.microsoft.com/office/drawing/2014/main" id="{A4BC6C82-CD1A-4DD7-944A-726DDAA80989}"/>
               </a:ext>
             </a:extLst>
           </p:cNvPr>
@@ -8700,7 +8700,7 @@
           <p:cNvPr id="10" name="">
             <a:extLst xmlns:a="http://schemas.openxmlformats.org/drawingml/2006/main">
               <a:ext uri="{FF2B5EF4-FFF2-40B4-BE49-F238E27FC236}">
-                <a16:creationId xmlns:a16="http://schemas.microsoft.com/office/drawing/2014/main" id="{3058AC4F-325A-440C-BB96-31818B32CDAC}"/>
+                <a16:creationId xmlns:a16="http://schemas.microsoft.com/office/drawing/2014/main" id="{222CCAD9-39F6-48D7-AA4F-4FE617CBE691}"/>
               </a:ext>
             </a:extLst>
           </p:cNvPr>
@@ -8730,7 +8730,7 @@
           <p:cNvPr id="11" name="[2, 3]">
             <a:extLst xmlns:a="http://schemas.openxmlformats.org/drawingml/2006/main">
               <a:ext uri="{FF2B5EF4-FFF2-40B4-BE49-F238E27FC236}">
-                <a16:creationId xmlns:a16="http://schemas.microsoft.com/office/drawing/2014/main" id="{7822315C-5EBF-4165-A77B-6BF8FE925D68}"/>
+                <a16:creationId xmlns:a16="http://schemas.microsoft.com/office/drawing/2014/main" id="{391FFD42-398B-4CFE-9C2A-12226C9E0A15}"/>
               </a:ext>
             </a:extLst>
           </p:cNvPr>
@@ -8888,7 +8888,7 @@
           <p:cNvPr id="12" name="끝 index 3은 포함하지 않습니다.">
             <a:extLst xmlns:a="http://schemas.openxmlformats.org/drawingml/2006/main">
               <a:ext uri="{FF2B5EF4-FFF2-40B4-BE49-F238E27FC236}">
-                <a16:creationId xmlns:a16="http://schemas.microsoft.com/office/drawing/2014/main" id="{1A55F59F-11E1-4D3E-A84E-77D28E48229D}"/>
+                <a16:creationId xmlns:a16="http://schemas.microsoft.com/office/drawing/2014/main" id="{8507E433-182A-4CDE-90E7-EF5F1963B649}"/>
               </a:ext>
             </a:extLst>
           </p:cNvPr>
@@ -9046,7 +9046,7 @@
           <p:cNvPr id="13" name="코드·오류">
             <a:extLst xmlns:a="http://schemas.openxmlformats.org/drawingml/2006/main">
               <a:ext uri="{FF2B5EF4-FFF2-40B4-BE49-F238E27FC236}">
-                <a16:creationId xmlns:a16="http://schemas.microsoft.com/office/drawing/2014/main" id="{E4446420-ECBA-48F7-BA36-A13D344AA09C}"/>
+                <a16:creationId xmlns:a16="http://schemas.microsoft.com/office/drawing/2014/main" id="{F88AB9CB-B7FC-4A71-9422-B85DE9D96010}"/>
               </a:ext>
             </a:extLst>
           </p:cNvPr>
@@ -9204,7 +9204,7 @@
           <p:cNvPr id="14" name="">
             <a:extLst xmlns:a="http://schemas.openxmlformats.org/drawingml/2006/main">
               <a:ext uri="{FF2B5EF4-FFF2-40B4-BE49-F238E27FC236}">
-                <a16:creationId xmlns:a16="http://schemas.microsoft.com/office/drawing/2014/main" id="{35989B9F-9C4C-45FA-927E-274982805298}"/>
+                <a16:creationId xmlns:a16="http://schemas.microsoft.com/office/drawing/2014/main" id="{6105A4C2-4977-4DE7-BEF9-FD86090CD94D}"/>
               </a:ext>
             </a:extLst>
           </p:cNvPr>
@@ -9234,7 +9234,7 @@
           <p:cNvPr id="15" name="복사">
             <a:extLst xmlns:a="http://schemas.openxmlformats.org/drawingml/2006/main">
               <a:ext uri="{FF2B5EF4-FFF2-40B4-BE49-F238E27FC236}">
-                <a16:creationId xmlns:a16="http://schemas.microsoft.com/office/drawing/2014/main" id="{F85ED7BB-4F8E-483C-92C7-ED71A02CF75E}"/>
+                <a16:creationId xmlns:a16="http://schemas.microsoft.com/office/drawing/2014/main" id="{3C19579A-F62E-47CD-8A93-180E78509BB9}"/>
               </a:ext>
             </a:extLst>
           </p:cNvPr>
@@ -9392,7 +9392,7 @@
           <p:cNvPr id="16" name="">
             <a:extLst xmlns:a="http://schemas.openxmlformats.org/drawingml/2006/main">
               <a:ext uri="{FF2B5EF4-FFF2-40B4-BE49-F238E27FC236}">
-                <a16:creationId xmlns:a16="http://schemas.microsoft.com/office/drawing/2014/main" id="{8B41D2D2-71DF-47DB-96BA-A5879297188C}"/>
+                <a16:creationId xmlns:a16="http://schemas.microsoft.com/office/drawing/2014/main" id="{210B8E70-A9BA-4F71-B2B9-0CB8E6364F08}"/>
               </a:ext>
             </a:extLst>
           </p:cNvPr>
@@ -9422,7 +9422,7 @@
           <p:cNvPr id="17" name="질문">
             <a:extLst xmlns:a="http://schemas.openxmlformats.org/drawingml/2006/main">
               <a:ext uri="{FF2B5EF4-FFF2-40B4-BE49-F238E27FC236}">
-                <a16:creationId xmlns:a16="http://schemas.microsoft.com/office/drawing/2014/main" id="{13E48595-F03E-4F16-804C-5C1ECCADA6A7}"/>
+                <a16:creationId xmlns:a16="http://schemas.microsoft.com/office/drawing/2014/main" id="{3233FB2F-01E3-4B4A-8EED-C46CB86E69DF}"/>
               </a:ext>
             </a:extLst>
           </p:cNvPr>
@@ -9580,7 +9580,7 @@
           <p:cNvPr id="18" name="">
             <a:extLst xmlns:a="http://schemas.openxmlformats.org/drawingml/2006/main">
               <a:ext uri="{FF2B5EF4-FFF2-40B4-BE49-F238E27FC236}">
-                <a16:creationId xmlns:a16="http://schemas.microsoft.com/office/drawing/2014/main" id="{2F5D97A5-BB1D-4BD3-89F4-FAABC382A967}"/>
+                <a16:creationId xmlns:a16="http://schemas.microsoft.com/office/drawing/2014/main" id="{278BC83E-DFD6-4EC1-8287-61E774DB8913}"/>
               </a:ext>
             </a:extLst>
           </p:cNvPr>
@@ -9610,7 +9610,7 @@
           <p:cNvPr id="19" name="답 확인">
             <a:extLst xmlns:a="http://schemas.openxmlformats.org/drawingml/2006/main">
               <a:ext uri="{FF2B5EF4-FFF2-40B4-BE49-F238E27FC236}">
-                <a16:creationId xmlns:a16="http://schemas.microsoft.com/office/drawing/2014/main" id="{E441FCA2-2E19-4B2C-B8B1-DD0E19724CE7}"/>
+                <a16:creationId xmlns:a16="http://schemas.microsoft.com/office/drawing/2014/main" id="{2305953F-269F-4778-8242-37A9DE8B2C52}"/>
               </a:ext>
             </a:extLst>
           </p:cNvPr>
@@ -9768,7 +9768,7 @@
           <p:cNvPr id="20" name="">
             <a:extLst xmlns:a="http://schemas.openxmlformats.org/drawingml/2006/main">
               <a:ext uri="{FF2B5EF4-FFF2-40B4-BE49-F238E27FC236}">
-                <a16:creationId xmlns:a16="http://schemas.microsoft.com/office/drawing/2014/main" id="{F240AE65-6744-4A7B-B356-7FAED59A57EA}"/>
+                <a16:creationId xmlns:a16="http://schemas.microsoft.com/office/drawing/2014/main" id="{B8FE87B7-1412-4677-80C0-DEAEA6D2A43A}"/>
               </a:ext>
             </a:extLst>
           </p:cNvPr>
@@ -9798,7 +9798,7 @@
           <p:cNvPr id="21" name="IDE로 복귀">
             <a:extLst xmlns:a="http://schemas.openxmlformats.org/drawingml/2006/main">
               <a:ext uri="{FF2B5EF4-FFF2-40B4-BE49-F238E27FC236}">
-                <a16:creationId xmlns:a16="http://schemas.microsoft.com/office/drawing/2014/main" id="{B47814E5-7E72-4625-827B-2EB24A04D2BA}"/>
+                <a16:creationId xmlns:a16="http://schemas.microsoft.com/office/drawing/2014/main" id="{537E04CE-794C-4C03-8D42-915BF356DB9B}"/>
               </a:ext>
             </a:extLst>
           </p:cNvPr>
@@ -9956,7 +9956,7 @@
           <p:cNvPr id="22" name="">
             <a:extLst xmlns:a="http://schemas.openxmlformats.org/drawingml/2006/main">
               <a:ext uri="{FF2B5EF4-FFF2-40B4-BE49-F238E27FC236}">
-                <a16:creationId xmlns:a16="http://schemas.microsoft.com/office/drawing/2014/main" id="{89C19AF1-013B-4FC6-897A-608504B363F4}"/>
+                <a16:creationId xmlns:a16="http://schemas.microsoft.com/office/drawing/2014/main" id="{1D0BEBEC-B96D-4BF4-85C4-691D1952DAF4}"/>
               </a:ext>
             </a:extLst>
           </p:cNvPr>
@@ -9985,7 +9985,7 @@
     </p:spTree>
     <p:extLst>
       <p:ext uri="{BB962C8B-B14F-4D97-AF65-F5344CB8AC3E}">
-        <p14:creationId xmlns:p14="http://schemas.microsoft.com/office/powerpoint/2010/main" val="1296655413"/>
+        <p14:creationId xmlns:p14="http://schemas.microsoft.com/office/powerpoint/2010/main" val="1781120492"/>
       </p:ext>
     </p:extLst>
   </p:cSld>
@@ -10016,7 +10016,7 @@
           <p:cNvPr id="16" name="ACT 0 · 여러 파일을 가로지르는 질문">
             <a:extLst xmlns:a="http://schemas.openxmlformats.org/drawingml/2006/main">
               <a:ext uri="{FF2B5EF4-FFF2-40B4-BE49-F238E27FC236}">
-                <a16:creationId xmlns:a16="http://schemas.microsoft.com/office/drawing/2014/main" id="{781825B7-CD47-46B0-B733-1B345B946DD4}"/>
+                <a16:creationId xmlns:a16="http://schemas.microsoft.com/office/drawing/2014/main" id="{E32EC5B5-CF0B-4E9C-9FF0-08D3CB3ED87E}"/>
               </a:ext>
             </a:extLst>
           </p:cNvPr>
@@ -10174,7 +10174,7 @@
           <p:cNvPr id="2" name="S03">
             <a:extLst xmlns:a="http://schemas.openxmlformats.org/drawingml/2006/main">
               <a:ext uri="{FF2B5EF4-FFF2-40B4-BE49-F238E27FC236}">
-                <a16:creationId xmlns:a16="http://schemas.microsoft.com/office/drawing/2014/main" id="{AE7B40F9-66F0-4FA4-B61E-97F81955E77B}"/>
+                <a16:creationId xmlns:a16="http://schemas.microsoft.com/office/drawing/2014/main" id="{1D02F321-B9EF-4624-BC85-F4C866873794}"/>
               </a:ext>
             </a:extLst>
           </p:cNvPr>
@@ -10332,7 +10332,7 @@
           <p:cNvPr id="3" name="질문이 커지면 Context를 모으는 일이 생긴다">
             <a:extLst xmlns:a="http://schemas.openxmlformats.org/drawingml/2006/main">
               <a:ext uri="{FF2B5EF4-FFF2-40B4-BE49-F238E27FC236}">
-                <a16:creationId xmlns:a16="http://schemas.microsoft.com/office/drawing/2014/main" id="{94C7CC41-B3FC-48B1-BA09-A4DACA1BCE2E}"/>
+                <a16:creationId xmlns:a16="http://schemas.microsoft.com/office/drawing/2014/main" id="{DA9FE124-4AA4-4DD8-9D1D-6BBA2733E8C2}"/>
               </a:ext>
             </a:extLst>
           </p:cNvPr>
@@ -10490,7 +10490,7 @@
           <p:cNvPr id="4" name="">
             <a:extLst xmlns:a="http://schemas.openxmlformats.org/drawingml/2006/main">
               <a:ext uri="{FF2B5EF4-FFF2-40B4-BE49-F238E27FC236}">
-                <a16:creationId xmlns:a16="http://schemas.microsoft.com/office/drawing/2014/main" id="{075B7535-7053-4A2D-BA25-5E08B61484B7}"/>
+                <a16:creationId xmlns:a16="http://schemas.microsoft.com/office/drawing/2014/main" id="{9C059CC0-A021-4F04-8FAC-A8A186D21797}"/>
               </a:ext>
             </a:extLst>
           </p:cNvPr>
@@ -10521,7 +10521,7 @@
           <p:cNvPr id="5" name="개념 사례 · 사람이 Context를 모으는 장면 · AI 생성 설명용 삽화">
             <a:extLst xmlns:a="http://schemas.openxmlformats.org/drawingml/2006/main">
               <a:ext uri="{FF2B5EF4-FFF2-40B4-BE49-F238E27FC236}">
-                <a16:creationId xmlns:a16="http://schemas.microsoft.com/office/drawing/2014/main" id="{541EAB7A-5813-478E-94B8-AF2FD15FAA17}"/>
+                <a16:creationId xmlns:a16="http://schemas.microsoft.com/office/drawing/2014/main" id="{4BF4598B-2D02-4CBF-BBBB-89E9502D0ED1}"/>
               </a:ext>
             </a:extLst>
           </p:cNvPr>
@@ -10679,7 +10679,7 @@
           <p:cNvPr id="6" name="특정 Trial에서 실제로 발생한 비용이나 실패를 뜻하지 않습니다.">
             <a:extLst xmlns:a="http://schemas.openxmlformats.org/drawingml/2006/main">
               <a:ext uri="{FF2B5EF4-FFF2-40B4-BE49-F238E27FC236}">
-                <a16:creationId xmlns:a16="http://schemas.microsoft.com/office/drawing/2014/main" id="{DCD3D4E0-B37F-4520-8ED4-98DD98DA571E}"/>
+                <a16:creationId xmlns:a16="http://schemas.microsoft.com/office/drawing/2014/main" id="{DD846C2A-6C66-4ED5-B225-69533FEAFC98}"/>
               </a:ext>
             </a:extLst>
           </p:cNvPr>
@@ -10837,7 +10837,7 @@
           <p:cNvPr id="7" name="“CLI 결과가 기대와 다른데, 어디서부터 봐야 할까?”">
             <a:extLst xmlns:a="http://schemas.openxmlformats.org/drawingml/2006/main">
               <a:ext uri="{FF2B5EF4-FFF2-40B4-BE49-F238E27FC236}">
-                <a16:creationId xmlns:a16="http://schemas.microsoft.com/office/drawing/2014/main" id="{8EDAF773-7FA9-474E-ADC3-11D3E5E7312E}"/>
+                <a16:creationId xmlns:a16="http://schemas.microsoft.com/office/drawing/2014/main" id="{17B68042-9365-493C-96BE-D75113A01E06}"/>
               </a:ext>
             </a:extLst>
           </p:cNvPr>
@@ -10995,7 +10995,7 @@
           <p:cNvPr id="8" name="">
             <a:extLst xmlns:a="http://schemas.openxmlformats.org/drawingml/2006/main">
               <a:ext uri="{FF2B5EF4-FFF2-40B4-BE49-F238E27FC236}">
-                <a16:creationId xmlns:a16="http://schemas.microsoft.com/office/drawing/2014/main" id="{2AA22F74-7536-423C-AEBC-5068EC2724BD}"/>
+                <a16:creationId xmlns:a16="http://schemas.microsoft.com/office/drawing/2014/main" id="{90F3B1DB-7BF8-472E-957A-BBC35327AFF1}"/>
               </a:ext>
             </a:extLst>
           </p:cNvPr>
@@ -11005,7 +11005,7 @@
           <p:nvPr/>
         </p:nvPicPr>
         <p:blipFill>
-          <a:blip xmlns:r="http://schemas.openxmlformats.org/officeDocument/2006/relationships" xmlns:a="http://schemas.openxmlformats.org/drawingml/2006/main" r:embed="Rb22c8ee1771e477c"/>
+          <a:blip xmlns:r="http://schemas.openxmlformats.org/officeDocument/2006/relationships" xmlns:a="http://schemas.openxmlformats.org/drawingml/2006/main" r:embed="R34c67a750acc4c48"/>
           <a:stretch xmlns:a="http://schemas.openxmlformats.org/drawingml/2006/main"/>
         </p:blipFill>
         <p:spPr>
@@ -11023,7 +11023,7 @@
           <p:cNvPr id="9" name="구현 · 호출 경로">
             <a:extLst xmlns:a="http://schemas.openxmlformats.org/drawingml/2006/main">
               <a:ext uri="{FF2B5EF4-FFF2-40B4-BE49-F238E27FC236}">
-                <a16:creationId xmlns:a16="http://schemas.microsoft.com/office/drawing/2014/main" id="{D3C7E384-8480-4F02-B736-C696FA471798}"/>
+                <a16:creationId xmlns:a16="http://schemas.microsoft.com/office/drawing/2014/main" id="{98092A52-5B30-4E66-B1FC-0D1353EB61BD}"/>
               </a:ext>
             </a:extLst>
           </p:cNvPr>
@@ -11181,7 +11181,7 @@
           <p:cNvPr id="10" name="CLI → 처리 흐름 → 연산">
             <a:extLst xmlns:a="http://schemas.openxmlformats.org/drawingml/2006/main">
               <a:ext uri="{FF2B5EF4-FFF2-40B4-BE49-F238E27FC236}">
-                <a16:creationId xmlns:a16="http://schemas.microsoft.com/office/drawing/2014/main" id="{441122E2-36AD-48F3-AD62-320CAF13F242}"/>
+                <a16:creationId xmlns:a16="http://schemas.microsoft.com/office/drawing/2014/main" id="{E1E24024-4084-43A0-889F-C73414A8559C}"/>
               </a:ext>
             </a:extLst>
           </p:cNvPr>
@@ -11339,7 +11339,7 @@
           <p:cNvPr id="11" name="테스트">
             <a:extLst xmlns:a="http://schemas.openxmlformats.org/drawingml/2006/main">
               <a:ext uri="{FF2B5EF4-FFF2-40B4-BE49-F238E27FC236}">
-                <a16:creationId xmlns:a16="http://schemas.microsoft.com/office/drawing/2014/main" id="{5C76FA18-B0E2-44DE-A22C-862857DA2208}"/>
+                <a16:creationId xmlns:a16="http://schemas.microsoft.com/office/drawing/2014/main" id="{DD485D76-4658-4F44-824F-FDCB8506B220}"/>
               </a:ext>
             </a:extLst>
           </p:cNvPr>
@@ -11497,7 +11497,7 @@
           <p:cNvPr id="12" name="어떤 조건에서 실패했나?">
             <a:extLst xmlns:a="http://schemas.openxmlformats.org/drawingml/2006/main">
               <a:ext uri="{FF2B5EF4-FFF2-40B4-BE49-F238E27FC236}">
-                <a16:creationId xmlns:a16="http://schemas.microsoft.com/office/drawing/2014/main" id="{2DD66CC1-4CC6-427C-98E8-053F1B7DAD19}"/>
+                <a16:creationId xmlns:a16="http://schemas.microsoft.com/office/drawing/2014/main" id="{10BC8032-4C71-4614-9ECE-2BCC52EAE42C}"/>
               </a:ext>
             </a:extLst>
           </p:cNvPr>
@@ -11655,7 +11655,7 @@
           <p:cNvPr id="13" name="계약">
             <a:extLst xmlns:a="http://schemas.openxmlformats.org/drawingml/2006/main">
               <a:ext uri="{FF2B5EF4-FFF2-40B4-BE49-F238E27FC236}">
-                <a16:creationId xmlns:a16="http://schemas.microsoft.com/office/drawing/2014/main" id="{0EA742D7-BE50-4A05-B050-972CBD2F5559}"/>
+                <a16:creationId xmlns:a16="http://schemas.microsoft.com/office/drawing/2014/main" id="{0C29D29D-97C8-4E47-B063-87429B734E45}"/>
               </a:ext>
             </a:extLst>
           </p:cNvPr>
@@ -11813,7 +11813,7 @@
           <p:cNvPr id="14" name="원래 기대한 동작은?">
             <a:extLst xmlns:a="http://schemas.openxmlformats.org/drawingml/2006/main">
               <a:ext uri="{FF2B5EF4-FFF2-40B4-BE49-F238E27FC236}">
-                <a16:creationId xmlns:a16="http://schemas.microsoft.com/office/drawing/2014/main" id="{692B0987-0C2D-4554-94FA-B65F08A0A9B6}"/>
+                <a16:creationId xmlns:a16="http://schemas.microsoft.com/office/drawing/2014/main" id="{A971205B-F7B8-4129-BA44-727F9BC1FDF5}"/>
               </a:ext>
             </a:extLst>
           </p:cNvPr>
@@ -11971,7 +11971,7 @@
           <p:cNvPr id="15" name="질문에 옮길 자료는?">
             <a:extLst xmlns:a="http://schemas.openxmlformats.org/drawingml/2006/main">
               <a:ext uri="{FF2B5EF4-FFF2-40B4-BE49-F238E27FC236}">
-                <a16:creationId xmlns:a16="http://schemas.microsoft.com/office/drawing/2014/main" id="{CC3D8A4F-4D56-4AA1-BB78-2FF306FBD3B8}"/>
+                <a16:creationId xmlns:a16="http://schemas.microsoft.com/office/drawing/2014/main" id="{1DCB780E-1F07-4E22-821A-E042F687EB5E}"/>
               </a:ext>
             </a:extLst>
           </p:cNvPr>
@@ -12127,7 +12127,7 @@
     </p:spTree>
     <p:extLst>
       <p:ext uri="{BB962C8B-B14F-4D97-AF65-F5344CB8AC3E}">
-        <p14:creationId xmlns:p14="http://schemas.microsoft.com/office/powerpoint/2010/main" val="1902386995"/>
+        <p14:creationId xmlns:p14="http://schemas.microsoft.com/office/powerpoint/2010/main" val="495378236"/>
       </p:ext>
     </p:extLst>
   </p:cSld>
@@ -12158,7 +12158,7 @@
           <p:cNvPr id="13" name="ACT 0 · Repository 조사 관찰">
             <a:extLst xmlns:a="http://schemas.openxmlformats.org/drawingml/2006/main">
               <a:ext uri="{FF2B5EF4-FFF2-40B4-BE49-F238E27FC236}">
-                <a16:creationId xmlns:a16="http://schemas.microsoft.com/office/drawing/2014/main" id="{64525698-0BA4-4BB9-AED6-BDD0E969701C}"/>
+                <a16:creationId xmlns:a16="http://schemas.microsoft.com/office/drawing/2014/main" id="{FDEDE37D-6F6A-46EF-A169-739CD4FD124A}"/>
               </a:ext>
             </a:extLst>
           </p:cNvPr>
@@ -12316,7 +12316,7 @@
           <p:cNvPr id="2" name="S04">
             <a:extLst xmlns:a="http://schemas.openxmlformats.org/drawingml/2006/main">
               <a:ext uri="{FF2B5EF4-FFF2-40B4-BE49-F238E27FC236}">
-                <a16:creationId xmlns:a16="http://schemas.microsoft.com/office/drawing/2014/main" id="{43C75485-654E-4921-BA76-ACBAB8B17686}"/>
+                <a16:creationId xmlns:a16="http://schemas.microsoft.com/office/drawing/2014/main" id="{FD7A7D32-827F-4CA3-BCAA-F5EAC5096B11}"/>
               </a:ext>
             </a:extLst>
           </p:cNvPr>
@@ -12474,7 +12474,7 @@
           <p:cNvPr id="3" name="파일명을 주지 않으면 Agent는 어디부터 볼까?">
             <a:extLst xmlns:a="http://schemas.openxmlformats.org/drawingml/2006/main">
               <a:ext uri="{FF2B5EF4-FFF2-40B4-BE49-F238E27FC236}">
-                <a16:creationId xmlns:a16="http://schemas.microsoft.com/office/drawing/2014/main" id="{9AB6660D-08AF-4F9A-A7E3-0C666C9F706D}"/>
+                <a16:creationId xmlns:a16="http://schemas.microsoft.com/office/drawing/2014/main" id="{2BC2B3E5-0697-467C-BA80-B3F00F85FD0B}"/>
               </a:ext>
             </a:extLst>
           </p:cNvPr>
@@ -12632,7 +12632,7 @@
           <p:cNvPr id="4" name="">
             <a:extLst xmlns:a="http://schemas.openxmlformats.org/drawingml/2006/main">
               <a:ext uri="{FF2B5EF4-FFF2-40B4-BE49-F238E27FC236}">
-                <a16:creationId xmlns:a16="http://schemas.microsoft.com/office/drawing/2014/main" id="{48408277-3ED1-4588-B6BC-985825F5AD0A}"/>
+                <a16:creationId xmlns:a16="http://schemas.microsoft.com/office/drawing/2014/main" id="{10BCA94E-8DD7-4897-AC34-1F4F9A9CF783}"/>
               </a:ext>
             </a:extLst>
           </p:cNvPr>
@@ -12663,7 +12663,7 @@
           <p:cNvPr id="5" name="TRIAL-001 실제 요청 발췌 · Codex CLI 0.154.0 · macOS · 읽기 전용">
             <a:extLst xmlns:a="http://schemas.openxmlformats.org/drawingml/2006/main">
               <a:ext uri="{FF2B5EF4-FFF2-40B4-BE49-F238E27FC236}">
-                <a16:creationId xmlns:a16="http://schemas.microsoft.com/office/drawing/2014/main" id="{7765DBDE-DF08-4930-8B87-5D9E045F3C67}"/>
+                <a16:creationId xmlns:a16="http://schemas.microsoft.com/office/drawing/2014/main" id="{94F4925B-2E64-4FD2-B4D0-AE2280B48953}"/>
               </a:ext>
             </a:extLst>
           </p:cNvPr>
@@ -12821,7 +12821,7 @@
           <p:cNvPr id="6" name="과거 단일 실행의 기록을 살펴봅니다. 현재 Desktop 동작은 미검증입니다.">
             <a:extLst xmlns:a="http://schemas.openxmlformats.org/drawingml/2006/main">
               <a:ext uri="{FF2B5EF4-FFF2-40B4-BE49-F238E27FC236}">
-                <a16:creationId xmlns:a16="http://schemas.microsoft.com/office/drawing/2014/main" id="{1E85B68D-C84E-4C61-B32A-7998B8046285}"/>
+                <a16:creationId xmlns:a16="http://schemas.microsoft.com/office/drawing/2014/main" id="{1B9E8C22-EEAD-405E-AE1D-2C73081E0E3E}"/>
               </a:ext>
             </a:extLst>
           </p:cNvPr>
@@ -12979,7 +12979,7 @@
           <p:cNvPr id="7" name="“현재 이 저장소에서 테스트 하나가 실패하고 있다.&#10;실패 원인을 조사해줘. 관련 구현과 호출 경로,&#10;실패하는">
             <a:extLst xmlns:a="http://schemas.openxmlformats.org/drawingml/2006/main">
               <a:ext uri="{FF2B5EF4-FFF2-40B4-BE49-F238E27FC236}">
-                <a16:creationId xmlns:a16="http://schemas.microsoft.com/office/drawing/2014/main" id="{319D54FC-592C-4BAF-A0DC-7AB02C28A735}"/>
+                <a16:creationId xmlns:a16="http://schemas.microsoft.com/office/drawing/2014/main" id="{541A9946-A504-4F48-90F4-12D8CEF434FC}"/>
               </a:ext>
             </a:extLst>
           </p:cNvPr>
@@ -13206,7 +13206,7 @@
           <p:cNvPr id="8" name="">
             <a:extLst xmlns:a="http://schemas.openxmlformats.org/drawingml/2006/main">
               <a:ext uri="{FF2B5EF4-FFF2-40B4-BE49-F238E27FC236}">
-                <a16:creationId xmlns:a16="http://schemas.microsoft.com/office/drawing/2014/main" id="{AC2FEBAD-8ACB-46DE-91B8-1141D0CADE1B}"/>
+                <a16:creationId xmlns:a16="http://schemas.microsoft.com/office/drawing/2014/main" id="{6BF05883-528A-42D0-BB13-FA7BAD6D515B}"/>
               </a:ext>
             </a:extLst>
           </p:cNvPr>
@@ -13237,7 +13237,7 @@
           <p:cNvPr id="9" name="찾았는지 확인할 세 가지">
             <a:extLst xmlns:a="http://schemas.openxmlformats.org/drawingml/2006/main">
               <a:ext uri="{FF2B5EF4-FFF2-40B4-BE49-F238E27FC236}">
-                <a16:creationId xmlns:a16="http://schemas.microsoft.com/office/drawing/2014/main" id="{CC293402-743A-4E45-B286-308433944C37}"/>
+                <a16:creationId xmlns:a16="http://schemas.microsoft.com/office/drawing/2014/main" id="{06FE472F-3B34-4CBD-BBDE-66FAFB0E4049}"/>
               </a:ext>
             </a:extLst>
           </p:cNvPr>
@@ -13395,7 +13395,7 @@
           <p:cNvPr id="10" name="01  실패하는 테스트">
             <a:extLst xmlns:a="http://schemas.openxmlformats.org/drawingml/2006/main">
               <a:ext uri="{FF2B5EF4-FFF2-40B4-BE49-F238E27FC236}">
-                <a16:creationId xmlns:a16="http://schemas.microsoft.com/office/drawing/2014/main" id="{7609FCA4-1EC8-4613-B371-4BE7037C8D93}"/>
+                <a16:creationId xmlns:a16="http://schemas.microsoft.com/office/drawing/2014/main" id="{6BD57DC0-1A84-4381-B6F0-DB39DA04E7FA}"/>
               </a:ext>
             </a:extLst>
           </p:cNvPr>
@@ -13553,7 +13553,7 @@
           <p:cNvPr id="11" name="02  관련 구현">
             <a:extLst xmlns:a="http://schemas.openxmlformats.org/drawingml/2006/main">
               <a:ext uri="{FF2B5EF4-FFF2-40B4-BE49-F238E27FC236}">
-                <a16:creationId xmlns:a16="http://schemas.microsoft.com/office/drawing/2014/main" id="{844D9765-016C-4515-8F65-D4257861ED8F}"/>
+                <a16:creationId xmlns:a16="http://schemas.microsoft.com/office/drawing/2014/main" id="{C5466243-39DA-401A-84A9-E924E6BBC795}"/>
               </a:ext>
             </a:extLst>
           </p:cNvPr>
@@ -13711,7 +13711,7 @@
           <p:cNvPr id="12" name="03  제품의 호출 경로">
             <a:extLst xmlns:a="http://schemas.openxmlformats.org/drawingml/2006/main">
               <a:ext uri="{FF2B5EF4-FFF2-40B4-BE49-F238E27FC236}">
-                <a16:creationId xmlns:a16="http://schemas.microsoft.com/office/drawing/2014/main" id="{4E7483B8-7D63-45DD-9C80-4AFBF9E53A68}"/>
+                <a16:creationId xmlns:a16="http://schemas.microsoft.com/office/drawing/2014/main" id="{4BA22D99-3739-4026-B9D0-778175CF8D5A}"/>
               </a:ext>
             </a:extLst>
           </p:cNvPr>
@@ -13867,7 +13867,7 @@
     </p:spTree>
     <p:extLst>
       <p:ext uri="{BB962C8B-B14F-4D97-AF65-F5344CB8AC3E}">
-        <p14:creationId xmlns:p14="http://schemas.microsoft.com/office/powerpoint/2010/main" val="162951531"/>
+        <p14:creationId xmlns:p14="http://schemas.microsoft.com/office/powerpoint/2010/main" val="1065014673"/>
       </p:ext>
     </p:extLst>
   </p:cSld>
@@ -13898,7 +13898,7 @@
           <p:cNvPr id="63" name="ACT 0  ·  Repository 탐색">
             <a:extLst xmlns:a="http://schemas.openxmlformats.org/drawingml/2006/main">
               <a:ext uri="{FF2B5EF4-FFF2-40B4-BE49-F238E27FC236}">
-                <a16:creationId xmlns:a16="http://schemas.microsoft.com/office/drawing/2014/main" id="{A28C6163-8893-4324-8831-0B5B2D757019}"/>
+                <a16:creationId xmlns:a16="http://schemas.microsoft.com/office/drawing/2014/main" id="{12A5DA8C-EC33-4556-8C1D-722A8E592990}"/>
               </a:ext>
             </a:extLst>
           </p:cNvPr>
@@ -14056,7 +14056,7 @@
           <p:cNvPr id="2" name="S05">
             <a:extLst xmlns:a="http://schemas.openxmlformats.org/drawingml/2006/main">
               <a:ext uri="{FF2B5EF4-FFF2-40B4-BE49-F238E27FC236}">
-                <a16:creationId xmlns:a16="http://schemas.microsoft.com/office/drawing/2014/main" id="{85F57126-48EB-4E2F-B284-D3C4E3B3E112}"/>
+                <a16:creationId xmlns:a16="http://schemas.microsoft.com/office/drawing/2014/main" id="{5EAB9181-2CB4-4D16-B062-E0A4E78C3F23}"/>
               </a:ext>
             </a:extLst>
           </p:cNvPr>
@@ -14214,7 +14214,7 @@
           <p:cNvPr id="3" name="Agent가 Test와 호출 경로를 찾았다">
             <a:extLst xmlns:a="http://schemas.openxmlformats.org/drawingml/2006/main">
               <a:ext uri="{FF2B5EF4-FFF2-40B4-BE49-F238E27FC236}">
-                <a16:creationId xmlns:a16="http://schemas.microsoft.com/office/drawing/2014/main" id="{CA07B924-8690-45E6-9F75-086D7833435E}"/>
+                <a16:creationId xmlns:a16="http://schemas.microsoft.com/office/drawing/2014/main" id="{45CCE3D3-1B68-4F40-9925-E161CE2F12D4}"/>
               </a:ext>
             </a:extLst>
           </p:cNvPr>
@@ -14372,7 +14372,7 @@
           <p:cNvPr id="4" name="">
             <a:extLst xmlns:a="http://schemas.openxmlformats.org/drawingml/2006/main">
               <a:ext uri="{FF2B5EF4-FFF2-40B4-BE49-F238E27FC236}">
-                <a16:creationId xmlns:a16="http://schemas.microsoft.com/office/drawing/2014/main" id="{F45E206B-4E85-4E23-87DE-BBC24C1FA338}"/>
+                <a16:creationId xmlns:a16="http://schemas.microsoft.com/office/drawing/2014/main" id="{34BD1638-7EF0-48D5-9AAD-33C0712635B7}"/>
               </a:ext>
             </a:extLst>
           </p:cNvPr>
@@ -14403,7 +14403,7 @@
           <p:cNvPr id="5" name="TRIAL-001 기록·STATE-00 테스트 재구성  |  Codex CLI 0.154.0 · 읽기 전용">
             <a:extLst xmlns:a="http://schemas.openxmlformats.org/drawingml/2006/main">
               <a:ext uri="{FF2B5EF4-FFF2-40B4-BE49-F238E27FC236}">
-                <a16:creationId xmlns:a16="http://schemas.microsoft.com/office/drawing/2014/main" id="{E64D3D26-4BC8-406A-98A8-15C73212A983}"/>
+                <a16:creationId xmlns:a16="http://schemas.microsoft.com/office/drawing/2014/main" id="{26596F36-AED1-4D60-9ED1-DA3BB8DCE5C4}"/>
               </a:ext>
             </a:extLst>
           </p:cNvPr>
@@ -14561,7 +14561,7 @@
           <p:cNvPr id="6" name="실제 실행 화면이 아님 · 이 조사에서는 코드 수정 없음 · 현재 Desktop 동작 미검증">
             <a:extLst xmlns:a="http://schemas.openxmlformats.org/drawingml/2006/main">
               <a:ext uri="{FF2B5EF4-FFF2-40B4-BE49-F238E27FC236}">
-                <a16:creationId xmlns:a16="http://schemas.microsoft.com/office/drawing/2014/main" id="{05145761-93BB-4F01-B5B9-F26BE0CA0F5B}"/>
+                <a16:creationId xmlns:a16="http://schemas.microsoft.com/office/drawing/2014/main" id="{33BC5ACA-F063-4F5C-A9C0-F8CD81C3C38B}"/>
               </a:ext>
             </a:extLst>
           </p:cNvPr>
@@ -14719,7 +14719,7 @@
           <p:cNvPr id="7" name="crop(image, 1, 3)">
             <a:extLst xmlns:a="http://schemas.openxmlformats.org/drawingml/2006/main">
               <a:ext uri="{FF2B5EF4-FFF2-40B4-BE49-F238E27FC236}">
-                <a16:creationId xmlns:a16="http://schemas.microsoft.com/office/drawing/2014/main" id="{659A57B9-5AF9-4D2D-A57D-B60FFFF47483}"/>
+                <a16:creationId xmlns:a16="http://schemas.microsoft.com/office/drawing/2014/main" id="{BCB92C82-56CD-484F-9406-326B8DC92A3E}"/>
               </a:ext>
             </a:extLst>
           </p:cNvPr>
@@ -14877,7 +14877,7 @@
           <p:cNvPr id="8" name="끝 좌표 3은 포함하지 않는 계약">
             <a:extLst xmlns:a="http://schemas.openxmlformats.org/drawingml/2006/main">
               <a:ext uri="{FF2B5EF4-FFF2-40B4-BE49-F238E27FC236}">
-                <a16:creationId xmlns:a16="http://schemas.microsoft.com/office/drawing/2014/main" id="{DE85840D-BFB1-449C-9B61-F6D1E9724C22}"/>
+                <a16:creationId xmlns:a16="http://schemas.microsoft.com/office/drawing/2014/main" id="{A89C020E-E1B6-4DAB-AB8E-A0FC008CE699}"/>
               </a:ext>
             </a:extLst>
           </p:cNvPr>
@@ -15035,7 +15035,7 @@
           <p:cNvPr id="9" name="입력">
             <a:extLst xmlns:a="http://schemas.openxmlformats.org/drawingml/2006/main">
               <a:ext uri="{FF2B5EF4-FFF2-40B4-BE49-F238E27FC236}">
-                <a16:creationId xmlns:a16="http://schemas.microsoft.com/office/drawing/2014/main" id="{93A71639-4101-4E8B-987E-2029D80F809B}"/>
+                <a16:creationId xmlns:a16="http://schemas.microsoft.com/office/drawing/2014/main" id="{4615F64B-A0FD-4C63-84E7-A516DAB9D87E}"/>
               </a:ext>
             </a:extLst>
           </p:cNvPr>
@@ -15193,7 +15193,7 @@
           <p:cNvPr id="10" name="0">
             <a:extLst xmlns:a="http://schemas.openxmlformats.org/drawingml/2006/main">
               <a:ext uri="{FF2B5EF4-FFF2-40B4-BE49-F238E27FC236}">
-                <a16:creationId xmlns:a16="http://schemas.microsoft.com/office/drawing/2014/main" id="{B60F650D-AC26-441F-8D76-42A258EE5F89}"/>
+                <a16:creationId xmlns:a16="http://schemas.microsoft.com/office/drawing/2014/main" id="{8063EA6A-6101-42E9-BB2A-98DE90192D4B}"/>
               </a:ext>
             </a:extLst>
           </p:cNvPr>
@@ -15351,7 +15351,7 @@
           <p:cNvPr id="11" name="1">
             <a:extLst xmlns:a="http://schemas.openxmlformats.org/drawingml/2006/main">
               <a:ext uri="{FF2B5EF4-FFF2-40B4-BE49-F238E27FC236}">
-                <a16:creationId xmlns:a16="http://schemas.microsoft.com/office/drawing/2014/main" id="{DD512365-3B82-4B97-85F9-F74966F8D60D}"/>
+                <a16:creationId xmlns:a16="http://schemas.microsoft.com/office/drawing/2014/main" id="{7EB327C5-9B31-4C27-8230-9BFE06DCE1A6}"/>
               </a:ext>
             </a:extLst>
           </p:cNvPr>
@@ -15509,7 +15509,7 @@
           <p:cNvPr id="12" name="2">
             <a:extLst xmlns:a="http://schemas.openxmlformats.org/drawingml/2006/main">
               <a:ext uri="{FF2B5EF4-FFF2-40B4-BE49-F238E27FC236}">
-                <a16:creationId xmlns:a16="http://schemas.microsoft.com/office/drawing/2014/main" id="{80A84589-66D7-4DE4-B3A7-9E2C9D973042}"/>
+                <a16:creationId xmlns:a16="http://schemas.microsoft.com/office/drawing/2014/main" id="{53E37CDF-B630-46DD-94E1-496AAD338856}"/>
               </a:ext>
             </a:extLst>
           </p:cNvPr>
@@ -15667,7 +15667,7 @@
           <p:cNvPr id="13" name="3">
             <a:extLst xmlns:a="http://schemas.openxmlformats.org/drawingml/2006/main">
               <a:ext uri="{FF2B5EF4-FFF2-40B4-BE49-F238E27FC236}">
-                <a16:creationId xmlns:a16="http://schemas.microsoft.com/office/drawing/2014/main" id="{9E4F864A-FF94-453F-9DB5-B316F6E72D21}"/>
+                <a16:creationId xmlns:a16="http://schemas.microsoft.com/office/drawing/2014/main" id="{2ADE90CC-7AFC-4953-842A-77C32C48CF9C}"/>
               </a:ext>
             </a:extLst>
           </p:cNvPr>
@@ -15825,7 +15825,7 @@
           <p:cNvPr id="14" name="">
             <a:extLst xmlns:a="http://schemas.openxmlformats.org/drawingml/2006/main">
               <a:ext uri="{FF2B5EF4-FFF2-40B4-BE49-F238E27FC236}">
-                <a16:creationId xmlns:a16="http://schemas.microsoft.com/office/drawing/2014/main" id="{3E3F6F4B-2BE1-46AE-A0F1-9ECA3142208D}"/>
+                <a16:creationId xmlns:a16="http://schemas.microsoft.com/office/drawing/2014/main" id="{06BD1C95-C3DE-43EB-86C9-692E7083B8AD}"/>
               </a:ext>
             </a:extLst>
           </p:cNvPr>
@@ -15858,7 +15858,7 @@
           <p:cNvPr id="15" name="1">
             <a:extLst xmlns:a="http://schemas.openxmlformats.org/drawingml/2006/main">
               <a:ext uri="{FF2B5EF4-FFF2-40B4-BE49-F238E27FC236}">
-                <a16:creationId xmlns:a16="http://schemas.microsoft.com/office/drawing/2014/main" id="{827587CE-20BB-4F4F-9012-A1F1F59000B5}"/>
+                <a16:creationId xmlns:a16="http://schemas.microsoft.com/office/drawing/2014/main" id="{82E41269-F7A4-4ECC-9266-38234C9002B4}"/>
               </a:ext>
             </a:extLst>
           </p:cNvPr>
@@ -16016,7 +16016,7 @@
           <p:cNvPr id="16" name="">
             <a:extLst xmlns:a="http://schemas.openxmlformats.org/drawingml/2006/main">
               <a:ext uri="{FF2B5EF4-FFF2-40B4-BE49-F238E27FC236}">
-                <a16:creationId xmlns:a16="http://schemas.microsoft.com/office/drawing/2014/main" id="{CDC07D59-129A-4499-982A-BE7D849620A1}"/>
+                <a16:creationId xmlns:a16="http://schemas.microsoft.com/office/drawing/2014/main" id="{C2E457FD-60A5-4ED2-A9F9-B334DFEC9739}"/>
               </a:ext>
             </a:extLst>
           </p:cNvPr>
@@ -16049,7 +16049,7 @@
           <p:cNvPr id="17" name="2">
             <a:extLst xmlns:a="http://schemas.openxmlformats.org/drawingml/2006/main">
               <a:ext uri="{FF2B5EF4-FFF2-40B4-BE49-F238E27FC236}">
-                <a16:creationId xmlns:a16="http://schemas.microsoft.com/office/drawing/2014/main" id="{66D7AE24-2436-45B9-9D12-2245567E1D24}"/>
+                <a16:creationId xmlns:a16="http://schemas.microsoft.com/office/drawing/2014/main" id="{D8E99907-1996-4076-9E03-AC97EAAED6E5}"/>
               </a:ext>
             </a:extLst>
           </p:cNvPr>
@@ -16207,7 +16207,7 @@
           <p:cNvPr id="18" name="">
             <a:extLst xmlns:a="http://schemas.openxmlformats.org/drawingml/2006/main">
               <a:ext uri="{FF2B5EF4-FFF2-40B4-BE49-F238E27FC236}">
-                <a16:creationId xmlns:a16="http://schemas.microsoft.com/office/drawing/2014/main" id="{8E6148B2-4256-4DC6-9CB4-99D972029635}"/>
+                <a16:creationId xmlns:a16="http://schemas.microsoft.com/office/drawing/2014/main" id="{C92EC8F8-9606-47C3-A7D5-0E0E2862BF73}"/>
               </a:ext>
             </a:extLst>
           </p:cNvPr>
@@ -16240,7 +16240,7 @@
           <p:cNvPr id="19" name="3">
             <a:extLst xmlns:a="http://schemas.openxmlformats.org/drawingml/2006/main">
               <a:ext uri="{FF2B5EF4-FFF2-40B4-BE49-F238E27FC236}">
-                <a16:creationId xmlns:a16="http://schemas.microsoft.com/office/drawing/2014/main" id="{FDE9B079-5CFE-4C29-BA1D-0646D8421EF4}"/>
+                <a16:creationId xmlns:a16="http://schemas.microsoft.com/office/drawing/2014/main" id="{2C75EB76-5574-4753-AF15-E64472C2B28C}"/>
               </a:ext>
             </a:extLst>
           </p:cNvPr>
@@ -16398,7 +16398,7 @@
           <p:cNvPr id="20" name="">
             <a:extLst xmlns:a="http://schemas.openxmlformats.org/drawingml/2006/main">
               <a:ext uri="{FF2B5EF4-FFF2-40B4-BE49-F238E27FC236}">
-                <a16:creationId xmlns:a16="http://schemas.microsoft.com/office/drawing/2014/main" id="{22E0DF92-D139-4F38-9DA3-BA574566E234}"/>
+                <a16:creationId xmlns:a16="http://schemas.microsoft.com/office/drawing/2014/main" id="{1EE5CC05-28E2-4DD6-A542-8EF233425BAB}"/>
               </a:ext>
             </a:extLst>
           </p:cNvPr>
@@ -16431,7 +16431,7 @@
           <p:cNvPr id="21" name="4">
             <a:extLst xmlns:a="http://schemas.openxmlformats.org/drawingml/2006/main">
               <a:ext uri="{FF2B5EF4-FFF2-40B4-BE49-F238E27FC236}">
-                <a16:creationId xmlns:a16="http://schemas.microsoft.com/office/drawing/2014/main" id="{686EEB9E-18D0-45EA-B084-E4D3BF919976}"/>
+                <a16:creationId xmlns:a16="http://schemas.microsoft.com/office/drawing/2014/main" id="{1A3EF5D8-BA1B-4B62-9179-E79DAC6D46D4}"/>
               </a:ext>
             </a:extLst>
           </p:cNvPr>
@@ -16589,7 +16589,7 @@
           <p:cNvPr id="22" name="">
             <a:extLst xmlns:a="http://schemas.openxmlformats.org/drawingml/2006/main">
               <a:ext uri="{FF2B5EF4-FFF2-40B4-BE49-F238E27FC236}">
-                <a16:creationId xmlns:a16="http://schemas.microsoft.com/office/drawing/2014/main" id="{B889F4D2-7BB5-493B-BEAC-305A1E8D3F10}"/>
+                <a16:creationId xmlns:a16="http://schemas.microsoft.com/office/drawing/2014/main" id="{BC021F57-380B-496F-9D66-D49D48D4E4C8}"/>
               </a:ext>
             </a:extLst>
           </p:cNvPr>
@@ -16622,7 +16622,7 @@
           <p:cNvPr id="23" name="5">
             <a:extLst xmlns:a="http://schemas.openxmlformats.org/drawingml/2006/main">
               <a:ext uri="{FF2B5EF4-FFF2-40B4-BE49-F238E27FC236}">
-                <a16:creationId xmlns:a16="http://schemas.microsoft.com/office/drawing/2014/main" id="{1F7801C6-BE9E-4325-B00E-FC6D162FFC15}"/>
+                <a16:creationId xmlns:a16="http://schemas.microsoft.com/office/drawing/2014/main" id="{943F4401-D8AF-4DE5-9E65-2CD179A2679C}"/>
               </a:ext>
             </a:extLst>
           </p:cNvPr>
@@ -16780,7 +16780,7 @@
           <p:cNvPr id="24" name="">
             <a:extLst xmlns:a="http://schemas.openxmlformats.org/drawingml/2006/main">
               <a:ext uri="{FF2B5EF4-FFF2-40B4-BE49-F238E27FC236}">
-                <a16:creationId xmlns:a16="http://schemas.microsoft.com/office/drawing/2014/main" id="{7BFF0FDE-F58A-450F-9F2B-3086F96DDF53}"/>
+                <a16:creationId xmlns:a16="http://schemas.microsoft.com/office/drawing/2014/main" id="{0F9266B4-F51A-4116-B310-830714AA86C1}"/>
               </a:ext>
             </a:extLst>
           </p:cNvPr>
@@ -16813,7 +16813,7 @@
           <p:cNvPr id="25" name="6">
             <a:extLst xmlns:a="http://schemas.openxmlformats.org/drawingml/2006/main">
               <a:ext uri="{FF2B5EF4-FFF2-40B4-BE49-F238E27FC236}">
-                <a16:creationId xmlns:a16="http://schemas.microsoft.com/office/drawing/2014/main" id="{7F9B01B9-FCBB-487C-9B89-D3B7FDBB5A8B}"/>
+                <a16:creationId xmlns:a16="http://schemas.microsoft.com/office/drawing/2014/main" id="{FE5789B1-EE64-47C1-A243-AC179C7A3435}"/>
               </a:ext>
             </a:extLst>
           </p:cNvPr>
@@ -16971,7 +16971,7 @@
           <p:cNvPr id="26" name="">
             <a:extLst xmlns:a="http://schemas.openxmlformats.org/drawingml/2006/main">
               <a:ext uri="{FF2B5EF4-FFF2-40B4-BE49-F238E27FC236}">
-                <a16:creationId xmlns:a16="http://schemas.microsoft.com/office/drawing/2014/main" id="{235944E3-CCA0-43FB-A331-524D624B7BA6}"/>
+                <a16:creationId xmlns:a16="http://schemas.microsoft.com/office/drawing/2014/main" id="{057D8FFB-BDE3-4820-AFC6-8089BDB15B4F}"/>
               </a:ext>
             </a:extLst>
           </p:cNvPr>
@@ -17004,7 +17004,7 @@
           <p:cNvPr id="27" name="7">
             <a:extLst xmlns:a="http://schemas.openxmlformats.org/drawingml/2006/main">
               <a:ext uri="{FF2B5EF4-FFF2-40B4-BE49-F238E27FC236}">
-                <a16:creationId xmlns:a16="http://schemas.microsoft.com/office/drawing/2014/main" id="{2B96941B-E676-4425-9EA4-3AE822E85741}"/>
+                <a16:creationId xmlns:a16="http://schemas.microsoft.com/office/drawing/2014/main" id="{FA12FE57-BFA5-4769-AA76-5C854BBD8B4B}"/>
               </a:ext>
             </a:extLst>
           </p:cNvPr>
@@ -17162,7 +17162,7 @@
           <p:cNvPr id="28" name="">
             <a:extLst xmlns:a="http://schemas.openxmlformats.org/drawingml/2006/main">
               <a:ext uri="{FF2B5EF4-FFF2-40B4-BE49-F238E27FC236}">
-                <a16:creationId xmlns:a16="http://schemas.microsoft.com/office/drawing/2014/main" id="{C4F25686-B100-4C62-AA9E-1D73D544CA38}"/>
+                <a16:creationId xmlns:a16="http://schemas.microsoft.com/office/drawing/2014/main" id="{06FAA3FC-691C-48C9-99E7-D1B9FFDFE7B3}"/>
               </a:ext>
             </a:extLst>
           </p:cNvPr>
@@ -17195,7 +17195,7 @@
           <p:cNvPr id="29" name="8">
             <a:extLst xmlns:a="http://schemas.openxmlformats.org/drawingml/2006/main">
               <a:ext uri="{FF2B5EF4-FFF2-40B4-BE49-F238E27FC236}">
-                <a16:creationId xmlns:a16="http://schemas.microsoft.com/office/drawing/2014/main" id="{E60E7160-4AEE-4B20-B782-A7629DD9133B}"/>
+                <a16:creationId xmlns:a16="http://schemas.microsoft.com/office/drawing/2014/main" id="{2F07EF8F-8C37-40FE-B63C-510E934698D1}"/>
               </a:ext>
             </a:extLst>
           </p:cNvPr>
@@ -17353,7 +17353,7 @@
           <p:cNvPr id="30" name="열 index">
             <a:extLst xmlns:a="http://schemas.openxmlformats.org/drawingml/2006/main">
               <a:ext uri="{FF2B5EF4-FFF2-40B4-BE49-F238E27FC236}">
-                <a16:creationId xmlns:a16="http://schemas.microsoft.com/office/drawing/2014/main" id="{69F28F92-74DD-4F09-A20F-E65AEC112048}"/>
+                <a16:creationId xmlns:a16="http://schemas.microsoft.com/office/drawing/2014/main" id="{7EC12473-2F3E-44C8-A5CC-EBB36A11BCBE}"/>
               </a:ext>
             </a:extLst>
           </p:cNvPr>
@@ -17511,7 +17511,7 @@
           <p:cNvPr id="31" name="기대">
             <a:extLst xmlns:a="http://schemas.openxmlformats.org/drawingml/2006/main">
               <a:ext uri="{FF2B5EF4-FFF2-40B4-BE49-F238E27FC236}">
-                <a16:creationId xmlns:a16="http://schemas.microsoft.com/office/drawing/2014/main" id="{CDEBF285-2E54-44EA-AC93-BE5C112E52C2}"/>
+                <a16:creationId xmlns:a16="http://schemas.microsoft.com/office/drawing/2014/main" id="{0B867AC5-8CBA-4B60-A5E6-A8F22CEC3ADC}"/>
               </a:ext>
             </a:extLst>
           </p:cNvPr>
@@ -17669,7 +17669,7 @@
           <p:cNvPr id="32" name="">
             <a:extLst xmlns:a="http://schemas.openxmlformats.org/drawingml/2006/main">
               <a:ext uri="{FF2B5EF4-FFF2-40B4-BE49-F238E27FC236}">
-                <a16:creationId xmlns:a16="http://schemas.microsoft.com/office/drawing/2014/main" id="{DB158E8E-2E7D-4458-B369-E52BDC12FD3B}"/>
+                <a16:creationId xmlns:a16="http://schemas.microsoft.com/office/drawing/2014/main" id="{F41B2CEB-44E4-4EA8-A2AD-727F3373DFA0}"/>
               </a:ext>
             </a:extLst>
           </p:cNvPr>
@@ -17702,7 +17702,7 @@
           <p:cNvPr id="33" name="2">
             <a:extLst xmlns:a="http://schemas.openxmlformats.org/drawingml/2006/main">
               <a:ext uri="{FF2B5EF4-FFF2-40B4-BE49-F238E27FC236}">
-                <a16:creationId xmlns:a16="http://schemas.microsoft.com/office/drawing/2014/main" id="{FC238C07-99FE-466E-81BA-7F8A5692FA65}"/>
+                <a16:creationId xmlns:a16="http://schemas.microsoft.com/office/drawing/2014/main" id="{45E8EA9B-F07E-4D4F-9C91-EA542BE2897F}"/>
               </a:ext>
             </a:extLst>
           </p:cNvPr>
@@ -17860,7 +17860,7 @@
           <p:cNvPr id="34" name="">
             <a:extLst xmlns:a="http://schemas.openxmlformats.org/drawingml/2006/main">
               <a:ext uri="{FF2B5EF4-FFF2-40B4-BE49-F238E27FC236}">
-                <a16:creationId xmlns:a16="http://schemas.microsoft.com/office/drawing/2014/main" id="{5FC52A6C-1645-4F13-BB66-097B691055A9}"/>
+                <a16:creationId xmlns:a16="http://schemas.microsoft.com/office/drawing/2014/main" id="{85EF2207-C3BF-46E5-9C07-0BA8743C183C}"/>
               </a:ext>
             </a:extLst>
           </p:cNvPr>
@@ -17893,7 +17893,7 @@
           <p:cNvPr id="35" name="3">
             <a:extLst xmlns:a="http://schemas.openxmlformats.org/drawingml/2006/main">
               <a:ext uri="{FF2B5EF4-FFF2-40B4-BE49-F238E27FC236}">
-                <a16:creationId xmlns:a16="http://schemas.microsoft.com/office/drawing/2014/main" id="{1C31D1A1-8856-4381-AE62-E587AAF9D186}"/>
+                <a16:creationId xmlns:a16="http://schemas.microsoft.com/office/drawing/2014/main" id="{42C5D0DA-0E24-4CFA-8DD7-F0E72435021E}"/>
               </a:ext>
             </a:extLst>
           </p:cNvPr>
@@ -18051,7 +18051,7 @@
           <p:cNvPr id="36" name="">
             <a:extLst xmlns:a="http://schemas.openxmlformats.org/drawingml/2006/main">
               <a:ext uri="{FF2B5EF4-FFF2-40B4-BE49-F238E27FC236}">
-                <a16:creationId xmlns:a16="http://schemas.microsoft.com/office/drawing/2014/main" id="{30ACC7B0-EC87-4F5C-8097-C02B69197A8D}"/>
+                <a16:creationId xmlns:a16="http://schemas.microsoft.com/office/drawing/2014/main" id="{73D98B00-C1D9-47B5-8451-8C7844F53BEC}"/>
               </a:ext>
             </a:extLst>
           </p:cNvPr>
@@ -18084,7 +18084,7 @@
           <p:cNvPr id="37" name="6">
             <a:extLst xmlns:a="http://schemas.openxmlformats.org/drawingml/2006/main">
               <a:ext uri="{FF2B5EF4-FFF2-40B4-BE49-F238E27FC236}">
-                <a16:creationId xmlns:a16="http://schemas.microsoft.com/office/drawing/2014/main" id="{F794AC6F-8310-47F8-9D32-7B3000DE61C5}"/>
+                <a16:creationId xmlns:a16="http://schemas.microsoft.com/office/drawing/2014/main" id="{828A5298-233E-4C99-B4E7-2107DEDD8215}"/>
               </a:ext>
             </a:extLst>
           </p:cNvPr>
@@ -18242,7 +18242,7 @@
           <p:cNvPr id="38" name="">
             <a:extLst xmlns:a="http://schemas.openxmlformats.org/drawingml/2006/main">
               <a:ext uri="{FF2B5EF4-FFF2-40B4-BE49-F238E27FC236}">
-                <a16:creationId xmlns:a16="http://schemas.microsoft.com/office/drawing/2014/main" id="{4208037F-3133-461C-9080-41085FF9E9B1}"/>
+                <a16:creationId xmlns:a16="http://schemas.microsoft.com/office/drawing/2014/main" id="{6A768BD2-710B-4D19-A15E-89769991BB00}"/>
               </a:ext>
             </a:extLst>
           </p:cNvPr>
@@ -18275,7 +18275,7 @@
           <p:cNvPr id="39" name="7">
             <a:extLst xmlns:a="http://schemas.openxmlformats.org/drawingml/2006/main">
               <a:ext uri="{FF2B5EF4-FFF2-40B4-BE49-F238E27FC236}">
-                <a16:creationId xmlns:a16="http://schemas.microsoft.com/office/drawing/2014/main" id="{5BE96E4B-614C-436F-94E3-9DC48182C7C2}"/>
+                <a16:creationId xmlns:a16="http://schemas.microsoft.com/office/drawing/2014/main" id="{F596A7BC-13C4-4889-BF33-6237EA2117C8}"/>
               </a:ext>
             </a:extLst>
           </p:cNvPr>
@@ -18433,7 +18433,7 @@
           <p:cNvPr id="40" name="구현 결과">
             <a:extLst xmlns:a="http://schemas.openxmlformats.org/drawingml/2006/main">
               <a:ext uri="{FF2B5EF4-FFF2-40B4-BE49-F238E27FC236}">
-                <a16:creationId xmlns:a16="http://schemas.microsoft.com/office/drawing/2014/main" id="{D9231841-2614-4433-A9DF-0CF3BEB1026F}"/>
+                <a16:creationId xmlns:a16="http://schemas.microsoft.com/office/drawing/2014/main" id="{7BE2C592-D8A4-4275-95BD-54A198C4DA77}"/>
               </a:ext>
             </a:extLst>
           </p:cNvPr>
@@ -18591,7 +18591,7 @@
           <p:cNvPr id="41" name="">
             <a:extLst xmlns:a="http://schemas.openxmlformats.org/drawingml/2006/main">
               <a:ext uri="{FF2B5EF4-FFF2-40B4-BE49-F238E27FC236}">
-                <a16:creationId xmlns:a16="http://schemas.microsoft.com/office/drawing/2014/main" id="{E306A718-A7C2-4EDF-B06C-CD074E0470BB}"/>
+                <a16:creationId xmlns:a16="http://schemas.microsoft.com/office/drawing/2014/main" id="{ABF1BC1F-F3D0-4826-94CB-291354B44D99}"/>
               </a:ext>
             </a:extLst>
           </p:cNvPr>
@@ -18624,7 +18624,7 @@
           <p:cNvPr id="42" name="2">
             <a:extLst xmlns:a="http://schemas.openxmlformats.org/drawingml/2006/main">
               <a:ext uri="{FF2B5EF4-FFF2-40B4-BE49-F238E27FC236}">
-                <a16:creationId xmlns:a16="http://schemas.microsoft.com/office/drawing/2014/main" id="{2CE5BF02-07B2-42AC-97E7-A5AF32232CDA}"/>
+                <a16:creationId xmlns:a16="http://schemas.microsoft.com/office/drawing/2014/main" id="{41A8DE41-10CA-4E0A-B822-33C83D657513}"/>
               </a:ext>
             </a:extLst>
           </p:cNvPr>
@@ -18782,7 +18782,7 @@
           <p:cNvPr id="43" name="">
             <a:extLst xmlns:a="http://schemas.openxmlformats.org/drawingml/2006/main">
               <a:ext uri="{FF2B5EF4-FFF2-40B4-BE49-F238E27FC236}">
-                <a16:creationId xmlns:a16="http://schemas.microsoft.com/office/drawing/2014/main" id="{E82A4C9D-73F6-4A3F-90A0-8C19CEC8CCC4}"/>
+                <a16:creationId xmlns:a16="http://schemas.microsoft.com/office/drawing/2014/main" id="{842528E0-6510-4992-A5AF-A9E1694D0CDB}"/>
               </a:ext>
             </a:extLst>
           </p:cNvPr>
@@ -18815,7 +18815,7 @@
           <p:cNvPr id="44" name="3">
             <a:extLst xmlns:a="http://schemas.openxmlformats.org/drawingml/2006/main">
               <a:ext uri="{FF2B5EF4-FFF2-40B4-BE49-F238E27FC236}">
-                <a16:creationId xmlns:a16="http://schemas.microsoft.com/office/drawing/2014/main" id="{564FCE95-307B-42B5-8693-640A52AEAE47}"/>
+                <a16:creationId xmlns:a16="http://schemas.microsoft.com/office/drawing/2014/main" id="{4015365F-186A-4D63-8A7B-57924780F169}"/>
               </a:ext>
             </a:extLst>
           </p:cNvPr>
@@ -18973,7 +18973,7 @@
           <p:cNvPr id="45" name="">
             <a:extLst xmlns:a="http://schemas.openxmlformats.org/drawingml/2006/main">
               <a:ext uri="{FF2B5EF4-FFF2-40B4-BE49-F238E27FC236}">
-                <a16:creationId xmlns:a16="http://schemas.microsoft.com/office/drawing/2014/main" id="{46184D81-0F4A-4296-B43E-A707EC233021}"/>
+                <a16:creationId xmlns:a16="http://schemas.microsoft.com/office/drawing/2014/main" id="{66E01B19-5ED3-4B2D-8B33-2FD7D0AD767A}"/>
               </a:ext>
             </a:extLst>
           </p:cNvPr>
@@ -19006,7 +19006,7 @@
           <p:cNvPr id="46" name="4">
             <a:extLst xmlns:a="http://schemas.openxmlformats.org/drawingml/2006/main">
               <a:ext uri="{FF2B5EF4-FFF2-40B4-BE49-F238E27FC236}">
-                <a16:creationId xmlns:a16="http://schemas.microsoft.com/office/drawing/2014/main" id="{6F14C018-821A-4724-A845-0C4EA807B13F}"/>
+                <a16:creationId xmlns:a16="http://schemas.microsoft.com/office/drawing/2014/main" id="{D6DD83FD-D7FC-4959-BCAF-2E1801DE8982}"/>
               </a:ext>
             </a:extLst>
           </p:cNvPr>
@@ -19164,7 +19164,7 @@
           <p:cNvPr id="47" name="">
             <a:extLst xmlns:a="http://schemas.openxmlformats.org/drawingml/2006/main">
               <a:ext uri="{FF2B5EF4-FFF2-40B4-BE49-F238E27FC236}">
-                <a16:creationId xmlns:a16="http://schemas.microsoft.com/office/drawing/2014/main" id="{0E45D62F-91A7-4EA0-A4E5-794D99960D84}"/>
+                <a16:creationId xmlns:a16="http://schemas.microsoft.com/office/drawing/2014/main" id="{5C564E35-BA00-45C3-9324-C2FAC57DCD24}"/>
               </a:ext>
             </a:extLst>
           </p:cNvPr>
@@ -19197,7 +19197,7 @@
           <p:cNvPr id="48" name="6">
             <a:extLst xmlns:a="http://schemas.openxmlformats.org/drawingml/2006/main">
               <a:ext uri="{FF2B5EF4-FFF2-40B4-BE49-F238E27FC236}">
-                <a16:creationId xmlns:a16="http://schemas.microsoft.com/office/drawing/2014/main" id="{C3340BCB-8DFF-4959-AE65-76EAA16F8D54}"/>
+                <a16:creationId xmlns:a16="http://schemas.microsoft.com/office/drawing/2014/main" id="{53128EEE-89ED-4312-913D-F424B383775B}"/>
               </a:ext>
             </a:extLst>
           </p:cNvPr>
@@ -19355,7 +19355,7 @@
           <p:cNvPr id="49" name="">
             <a:extLst xmlns:a="http://schemas.openxmlformats.org/drawingml/2006/main">
               <a:ext uri="{FF2B5EF4-FFF2-40B4-BE49-F238E27FC236}">
-                <a16:creationId xmlns:a16="http://schemas.microsoft.com/office/drawing/2014/main" id="{DFB1C48E-5571-4F48-B6BB-EBAC555FB004}"/>
+                <a16:creationId xmlns:a16="http://schemas.microsoft.com/office/drawing/2014/main" id="{BE279224-96D4-4D9B-9BD1-A13864E04845}"/>
               </a:ext>
             </a:extLst>
           </p:cNvPr>
@@ -19388,7 +19388,7 @@
           <p:cNvPr id="50" name="7">
             <a:extLst xmlns:a="http://schemas.openxmlformats.org/drawingml/2006/main">
               <a:ext uri="{FF2B5EF4-FFF2-40B4-BE49-F238E27FC236}">
-                <a16:creationId xmlns:a16="http://schemas.microsoft.com/office/drawing/2014/main" id="{8A561DD1-C76C-4E46-88FF-BB69076ECA85}"/>
+                <a16:creationId xmlns:a16="http://schemas.microsoft.com/office/drawing/2014/main" id="{533AD69C-4587-4E4B-A571-D8BB4D129192}"/>
               </a:ext>
             </a:extLst>
           </p:cNvPr>
@@ -19546,7 +19546,7 @@
           <p:cNvPr id="51" name="">
             <a:extLst xmlns:a="http://schemas.openxmlformats.org/drawingml/2006/main">
               <a:ext uri="{FF2B5EF4-FFF2-40B4-BE49-F238E27FC236}">
-                <a16:creationId xmlns:a16="http://schemas.microsoft.com/office/drawing/2014/main" id="{CA9A1938-32D2-49EF-8D7C-21DA2537A9F7}"/>
+                <a16:creationId xmlns:a16="http://schemas.microsoft.com/office/drawing/2014/main" id="{3E524C95-181A-4580-8EEF-9D50A4D3D8D4}"/>
               </a:ext>
             </a:extLst>
           </p:cNvPr>
@@ -19579,7 +19579,7 @@
           <p:cNvPr id="52" name="8">
             <a:extLst xmlns:a="http://schemas.openxmlformats.org/drawingml/2006/main">
               <a:ext uri="{FF2B5EF4-FFF2-40B4-BE49-F238E27FC236}">
-                <a16:creationId xmlns:a16="http://schemas.microsoft.com/office/drawing/2014/main" id="{46A2B3E1-986F-459C-9885-CE65D267262E}"/>
+                <a16:creationId xmlns:a16="http://schemas.microsoft.com/office/drawing/2014/main" id="{74581E97-EE16-4BE3-B75D-3145B5A5A038}"/>
               </a:ext>
             </a:extLst>
           </p:cNvPr>
@@ -19737,7 +19737,7 @@
           <p:cNvPr id="53" name="한 열이 더 포함됨">
             <a:extLst xmlns:a="http://schemas.openxmlformats.org/drawingml/2006/main">
               <a:ext uri="{FF2B5EF4-FFF2-40B4-BE49-F238E27FC236}">
-                <a16:creationId xmlns:a16="http://schemas.microsoft.com/office/drawing/2014/main" id="{043C1B4B-E6D4-4198-B261-9462EDC4277F}"/>
+                <a16:creationId xmlns:a16="http://schemas.microsoft.com/office/drawing/2014/main" id="{F12889A6-9D8B-4D98-A61D-5AB8ED8D3241}"/>
               </a:ext>
             </a:extLst>
           </p:cNvPr>
@@ -19895,7 +19895,7 @@
           <p:cNvPr id="54" name="">
             <a:extLst xmlns:a="http://schemas.openxmlformats.org/drawingml/2006/main">
               <a:ext uri="{FF2B5EF4-FFF2-40B4-BE49-F238E27FC236}">
-                <a16:creationId xmlns:a16="http://schemas.microsoft.com/office/drawing/2014/main" id="{4E0BB297-85BD-4347-9F00-0BEFA21C8673}"/>
+                <a16:creationId xmlns:a16="http://schemas.microsoft.com/office/drawing/2014/main" id="{11F0CE93-5773-4E02-A9BD-FDB48DDECFA6}"/>
               </a:ext>
             </a:extLst>
           </p:cNvPr>
@@ -19926,7 +19926,7 @@
           <p:cNvPr id="55" name="조사에서 연결한 근거">
             <a:extLst xmlns:a="http://schemas.openxmlformats.org/drawingml/2006/main">
               <a:ext uri="{FF2B5EF4-FFF2-40B4-BE49-F238E27FC236}">
-                <a16:creationId xmlns:a16="http://schemas.microsoft.com/office/drawing/2014/main" id="{C4154AE2-4B1B-4BC4-9129-3249F96C8B6D}"/>
+                <a16:creationId xmlns:a16="http://schemas.microsoft.com/office/drawing/2014/main" id="{8FC1E815-DB1C-457A-9E2A-1938D4A4AB67}"/>
               </a:ext>
             </a:extLst>
           </p:cNvPr>
@@ -20084,7 +20084,7 @@
           <p:cNvPr id="56" name="01  실패 테스트">
             <a:extLst xmlns:a="http://schemas.openxmlformats.org/drawingml/2006/main">
               <a:ext uri="{FF2B5EF4-FFF2-40B4-BE49-F238E27FC236}">
-                <a16:creationId xmlns:a16="http://schemas.microsoft.com/office/drawing/2014/main" id="{C4218ED4-8EF8-45AE-BE2F-A43CC7FA00EF}"/>
+                <a16:creationId xmlns:a16="http://schemas.microsoft.com/office/drawing/2014/main" id="{D32960B7-290C-417F-BFA6-F56BF94272E4}"/>
               </a:ext>
             </a:extLst>
           </p:cNvPr>
@@ -20242,7 +20242,7 @@
           <p:cNvPr id="57" name="test_crop_excludes_&#10;end_coordinate">
             <a:extLst xmlns:a="http://schemas.openxmlformats.org/drawingml/2006/main">
               <a:ext uri="{FF2B5EF4-FFF2-40B4-BE49-F238E27FC236}">
-                <a16:creationId xmlns:a16="http://schemas.microsoft.com/office/drawing/2014/main" id="{98F8FCF7-5D68-4DB1-A0CD-198DFA2AAFAF}"/>
+                <a16:creationId xmlns:a16="http://schemas.microsoft.com/office/drawing/2014/main" id="{88D91FCF-100B-473B-9C7B-765EB4A7E886}"/>
               </a:ext>
             </a:extLst>
           </p:cNvPr>
@@ -20423,7 +20423,7 @@
           <p:cNvPr id="58" name="02  제품의 호출 경로">
             <a:extLst xmlns:a="http://schemas.openxmlformats.org/drawingml/2006/main">
               <a:ext uri="{FF2B5EF4-FFF2-40B4-BE49-F238E27FC236}">
-                <a16:creationId xmlns:a16="http://schemas.microsoft.com/office/drawing/2014/main" id="{8DF47607-2DC5-43B7-A97C-111ACB523496}"/>
+                <a16:creationId xmlns:a16="http://schemas.microsoft.com/office/drawing/2014/main" id="{74425C27-DC90-4A4D-A6E8-792C5D5A1F09}"/>
               </a:ext>
             </a:extLst>
           </p:cNvPr>
@@ -20581,7 +20581,7 @@
           <p:cNvPr id="59" name="cli.main → process_image → crop">
             <a:extLst xmlns:a="http://schemas.openxmlformats.org/drawingml/2006/main">
               <a:ext uri="{FF2B5EF4-FFF2-40B4-BE49-F238E27FC236}">
-                <a16:creationId xmlns:a16="http://schemas.microsoft.com/office/drawing/2014/main" id="{144A5F19-B05D-45F9-BD78-AB2C444A28E7}"/>
+                <a16:creationId xmlns:a16="http://schemas.microsoft.com/office/drawing/2014/main" id="{CB3C743E-8383-4E95-941E-2D646CD7E602}"/>
               </a:ext>
             </a:extLst>
           </p:cNvPr>
@@ -20739,7 +20739,7 @@
           <p:cNvPr id="60" name="03  계약과 다른 구현">
             <a:extLst xmlns:a="http://schemas.openxmlformats.org/drawingml/2006/main">
               <a:ext uri="{FF2B5EF4-FFF2-40B4-BE49-F238E27FC236}">
-                <a16:creationId xmlns:a16="http://schemas.microsoft.com/office/drawing/2014/main" id="{A556D3A0-62CB-4BFB-B4AA-9AE86C33B8BA}"/>
+                <a16:creationId xmlns:a16="http://schemas.microsoft.com/office/drawing/2014/main" id="{214B7ED6-D33B-4708-8CF0-1523E75DB274}"/>
               </a:ext>
             </a:extLst>
           </p:cNvPr>
@@ -20897,7 +20897,7 @@
           <p:cNvPr id="61" name="row[x_start : x_end + 1]">
             <a:extLst xmlns:a="http://schemas.openxmlformats.org/drawingml/2006/main">
               <a:ext uri="{FF2B5EF4-FFF2-40B4-BE49-F238E27FC236}">
-                <a16:creationId xmlns:a16="http://schemas.microsoft.com/office/drawing/2014/main" id="{44372683-9E34-4CD6-9D8A-0C5226675748}"/>
+                <a16:creationId xmlns:a16="http://schemas.microsoft.com/office/drawing/2014/main" id="{26B41980-4D8D-476A-9BEC-CAF3560EC31A}"/>
               </a:ext>
             </a:extLst>
           </p:cNvPr>
@@ -21055,7 +21055,7 @@
           <p:cNvPr id="62" name="계약: [x_start, x_end)">
             <a:extLst xmlns:a="http://schemas.openxmlformats.org/drawingml/2006/main">
               <a:ext uri="{FF2B5EF4-FFF2-40B4-BE49-F238E27FC236}">
-                <a16:creationId xmlns:a16="http://schemas.microsoft.com/office/drawing/2014/main" id="{4332D0A5-E17D-46C3-9127-60E1326F9744}"/>
+                <a16:creationId xmlns:a16="http://schemas.microsoft.com/office/drawing/2014/main" id="{21B2993B-6B11-4C6B-8946-8221435773B2}"/>
               </a:ext>
             </a:extLst>
           </p:cNvPr>
@@ -21211,7 +21211,7 @@
     </p:spTree>
     <p:extLst>
       <p:ext uri="{BB962C8B-B14F-4D97-AF65-F5344CB8AC3E}">
-        <p14:creationId xmlns:p14="http://schemas.microsoft.com/office/powerpoint/2010/main" val="1753789983"/>
+        <p14:creationId xmlns:p14="http://schemas.microsoft.com/office/powerpoint/2010/main" val="1470115050"/>
       </p:ext>
     </p:extLst>
   </p:cSld>
@@ -21242,7 +21242,7 @@
           <p:cNvPr id="17" name="ACT 0 · 조사 결과 읽기">
             <a:extLst xmlns:a="http://schemas.openxmlformats.org/drawingml/2006/main">
               <a:ext uri="{FF2B5EF4-FFF2-40B4-BE49-F238E27FC236}">
-                <a16:creationId xmlns:a16="http://schemas.microsoft.com/office/drawing/2014/main" id="{3B864686-9B8F-4513-BD93-DE82A8E99978}"/>
+                <a16:creationId xmlns:a16="http://schemas.microsoft.com/office/drawing/2014/main" id="{8FB1803A-62DC-4595-8C9A-4DE716C6EA7E}"/>
               </a:ext>
             </a:extLst>
           </p:cNvPr>
@@ -21400,7 +21400,7 @@
           <p:cNvPr id="2" name="S06">
             <a:extLst xmlns:a="http://schemas.openxmlformats.org/drawingml/2006/main">
               <a:ext uri="{FF2B5EF4-FFF2-40B4-BE49-F238E27FC236}">
-                <a16:creationId xmlns:a16="http://schemas.microsoft.com/office/drawing/2014/main" id="{C44E7110-ADDB-432C-B5AB-8E44065F2668}"/>
+                <a16:creationId xmlns:a16="http://schemas.microsoft.com/office/drawing/2014/main" id="{559DF794-AB07-4218-8B4A-87D3BE98EA9F}"/>
               </a:ext>
             </a:extLst>
           </p:cNvPr>
@@ -21558,7 +21558,7 @@
           <p:cNvPr id="3" name="관찰 결과와 실행 제한을 분리한다">
             <a:extLst xmlns:a="http://schemas.openxmlformats.org/drawingml/2006/main">
               <a:ext uri="{FF2B5EF4-FFF2-40B4-BE49-F238E27FC236}">
-                <a16:creationId xmlns:a16="http://schemas.microsoft.com/office/drawing/2014/main" id="{5755E4BE-05E2-46AD-845E-4346C9C497F6}"/>
+                <a16:creationId xmlns:a16="http://schemas.microsoft.com/office/drawing/2014/main" id="{BB5CAA6F-470E-46A2-B5A8-85A1687AE682}"/>
               </a:ext>
             </a:extLst>
           </p:cNvPr>
@@ -21716,7 +21716,7 @@
           <p:cNvPr id="4" name="">
             <a:extLst xmlns:a="http://schemas.openxmlformats.org/drawingml/2006/main">
               <a:ext uri="{FF2B5EF4-FFF2-40B4-BE49-F238E27FC236}">
-                <a16:creationId xmlns:a16="http://schemas.microsoft.com/office/drawing/2014/main" id="{C14160A9-DD94-46C7-B59E-3DA105C4F08C}"/>
+                <a16:creationId xmlns:a16="http://schemas.microsoft.com/office/drawing/2014/main" id="{E855CD61-A384-4CB5-A4CB-5F4386FD67B6}"/>
               </a:ext>
             </a:extLst>
           </p:cNvPr>
@@ -21747,7 +21747,7 @@
           <p:cNvPr id="5" name="TRIAL-001 기록 재구성 · Codex CLI 0.154.0 · 단일 읽기 전용 조사">
             <a:extLst xmlns:a="http://schemas.openxmlformats.org/drawingml/2006/main">
               <a:ext uri="{FF2B5EF4-FFF2-40B4-BE49-F238E27FC236}">
-                <a16:creationId xmlns:a16="http://schemas.microsoft.com/office/drawing/2014/main" id="{BAE60D57-6CF8-45AA-A8B7-640FFA3B8747}"/>
+                <a16:creationId xmlns:a16="http://schemas.microsoft.com/office/drawing/2014/main" id="{4F722E5B-0872-486F-B368-6AE21DCB66C0}"/>
               </a:ext>
             </a:extLst>
           </p:cNvPr>
@@ -21905,7 +21905,7 @@
           <p:cNvPr id="6" name="환경 오류 3건은 crop 결함의 증거가 아닙니다. 이 조사에서 코드는 수정하지 않았습니다.">
             <a:extLst xmlns:a="http://schemas.openxmlformats.org/drawingml/2006/main">
               <a:ext uri="{FF2B5EF4-FFF2-40B4-BE49-F238E27FC236}">
-                <a16:creationId xmlns:a16="http://schemas.microsoft.com/office/drawing/2014/main" id="{FFF6A0CC-B20F-421E-8047-F688273DA1BD}"/>
+                <a16:creationId xmlns:a16="http://schemas.microsoft.com/office/drawing/2014/main" id="{93866C2D-A945-40C2-8930-ADD0F8FB1CD0}"/>
               </a:ext>
             </a:extLst>
           </p:cNvPr>
@@ -22063,7 +22063,7 @@
           <p:cNvPr id="7" name="코드에서 확인한 문제">
             <a:extLst xmlns:a="http://schemas.openxmlformats.org/drawingml/2006/main">
               <a:ext uri="{FF2B5EF4-FFF2-40B4-BE49-F238E27FC236}">
-                <a16:creationId xmlns:a16="http://schemas.microsoft.com/office/drawing/2014/main" id="{80B2CC0F-FC63-4F90-A2EA-7A7ED9A336CF}"/>
+                <a16:creationId xmlns:a16="http://schemas.microsoft.com/office/drawing/2014/main" id="{74242780-6E11-48BF-84FF-A51F3F1AFC48}"/>
               </a:ext>
             </a:extLst>
           </p:cNvPr>
@@ -22221,7 +22221,7 @@
           <p:cNvPr id="8" name="실행 환경에서 생긴 제한">
             <a:extLst xmlns:a="http://schemas.openxmlformats.org/drawingml/2006/main">
               <a:ext uri="{FF2B5EF4-FFF2-40B4-BE49-F238E27FC236}">
-                <a16:creationId xmlns:a16="http://schemas.microsoft.com/office/drawing/2014/main" id="{6B299B80-0487-40D8-9178-DB3A89CCE8F8}"/>
+                <a16:creationId xmlns:a16="http://schemas.microsoft.com/office/drawing/2014/main" id="{0D6ED851-9893-4703-A9FE-67652915AA0E}"/>
               </a:ext>
             </a:extLst>
           </p:cNvPr>
@@ -22379,7 +22379,7 @@
           <p:cNvPr id="9" name="">
             <a:extLst xmlns:a="http://schemas.openxmlformats.org/drawingml/2006/main">
               <a:ext uri="{FF2B5EF4-FFF2-40B4-BE49-F238E27FC236}">
-                <a16:creationId xmlns:a16="http://schemas.microsoft.com/office/drawing/2014/main" id="{D7F0E53C-14B6-41FF-A217-C30E46E4BAEB}"/>
+                <a16:creationId xmlns:a16="http://schemas.microsoft.com/office/drawing/2014/main" id="{8CC49B84-6C83-47DB-9216-1B3503B744A0}"/>
               </a:ext>
             </a:extLst>
           </p:cNvPr>
@@ -22412,7 +22412,7 @@
           <p:cNvPr id="10" name="">
             <a:extLst xmlns:a="http://schemas.openxmlformats.org/drawingml/2006/main">
               <a:ext uri="{FF2B5EF4-FFF2-40B4-BE49-F238E27FC236}">
-                <a16:creationId xmlns:a16="http://schemas.microsoft.com/office/drawing/2014/main" id="{EA5BAE07-1E3D-45FE-8160-E730D90F6BCA}"/>
+                <a16:creationId xmlns:a16="http://schemas.microsoft.com/office/drawing/2014/main" id="{2D471211-ECAF-4E0C-886A-5C381B2672B7}"/>
               </a:ext>
             </a:extLst>
           </p:cNvPr>
@@ -22443,7 +22443,7 @@
           <p:cNvPr id="11" name="crop에 한 열이 더 포함됨">
             <a:extLst xmlns:a="http://schemas.openxmlformats.org/drawingml/2006/main">
               <a:ext uri="{FF2B5EF4-FFF2-40B4-BE49-F238E27FC236}">
-                <a16:creationId xmlns:a16="http://schemas.microsoft.com/office/drawing/2014/main" id="{8FCB2624-28B2-4A4F-8EDC-8C61825A4780}"/>
+                <a16:creationId xmlns:a16="http://schemas.microsoft.com/office/drawing/2014/main" id="{E4B665C6-AFD1-4293-B2DE-B1DA1730987E}"/>
               </a:ext>
             </a:extLst>
           </p:cNvPr>
@@ -22601,7 +22601,7 @@
           <p:cNvPr id="12" name="테스트·호출 경로·계약 연결&#10;원인 설명 / 코드 수정 없음">
             <a:extLst xmlns:a="http://schemas.openxmlformats.org/drawingml/2006/main">
               <a:ext uri="{FF2B5EF4-FFF2-40B4-BE49-F238E27FC236}">
-                <a16:creationId xmlns:a16="http://schemas.microsoft.com/office/drawing/2014/main" id="{312C2044-8330-436E-83A2-52F518213AEB}"/>
+                <a16:creationId xmlns:a16="http://schemas.microsoft.com/office/drawing/2014/main" id="{4000687F-9CFC-4220-A9CB-63219E328D24}"/>
               </a:ext>
             </a:extLst>
           </p:cNvPr>
@@ -22782,7 +22782,7 @@
           <p:cNvPr id="13" name="임시 디렉터리를 만들 수 없음">
             <a:extLst xmlns:a="http://schemas.openxmlformats.org/drawingml/2006/main">
               <a:ext uri="{FF2B5EF4-FFF2-40B4-BE49-F238E27FC236}">
-                <a16:creationId xmlns:a16="http://schemas.microsoft.com/office/drawing/2014/main" id="{11EBB362-788F-4BC4-B6C5-EF31EC03FAA1}"/>
+                <a16:creationId xmlns:a16="http://schemas.microsoft.com/office/drawing/2014/main" id="{D11170B4-5388-429E-944E-895FB8428698}"/>
               </a:ext>
             </a:extLst>
           </p:cNvPr>
@@ -22940,7 +22940,7 @@
           <p:cNvPr id="14" name="읽기 전용 권한 때문에&#10;서로 다른 테스트 3건이 오류">
             <a:extLst xmlns:a="http://schemas.openxmlformats.org/drawingml/2006/main">
               <a:ext uri="{FF2B5EF4-FFF2-40B4-BE49-F238E27FC236}">
-                <a16:creationId xmlns:a16="http://schemas.microsoft.com/office/drawing/2014/main" id="{32BA6164-4DE0-4EEE-9016-72C3147E531E}"/>
+                <a16:creationId xmlns:a16="http://schemas.microsoft.com/office/drawing/2014/main" id="{30173CBE-D135-48E2-A2EB-C01C0D270B08}"/>
               </a:ext>
             </a:extLst>
           </p:cNvPr>
@@ -23121,7 +23121,7 @@
           <p:cNvPr id="15" name="">
             <a:extLst xmlns:a="http://schemas.openxmlformats.org/drawingml/2006/main">
               <a:ext uri="{FF2B5EF4-FFF2-40B4-BE49-F238E27FC236}">
-                <a16:creationId xmlns:a16="http://schemas.microsoft.com/office/drawing/2014/main" id="{C1F55548-6F81-4341-843B-A3693956FC21}"/>
+                <a16:creationId xmlns:a16="http://schemas.microsoft.com/office/drawing/2014/main" id="{97765F9F-A606-499D-9BFD-DFE2B8AA7121}"/>
               </a:ext>
             </a:extLst>
           </p:cNvPr>
@@ -23152,7 +23152,7 @@
           <p:cNvPr id="16" name="전체 실행 기록: 7개 통과 + crop 실패 + 환경 오류 3건">
             <a:extLst xmlns:a="http://schemas.openxmlformats.org/drawingml/2006/main">
               <a:ext uri="{FF2B5EF4-FFF2-40B4-BE49-F238E27FC236}">
-                <a16:creationId xmlns:a16="http://schemas.microsoft.com/office/drawing/2014/main" id="{D2F95E94-7379-48C2-A363-6068F0A9525E}"/>
+                <a16:creationId xmlns:a16="http://schemas.microsoft.com/office/drawing/2014/main" id="{621C5D12-5DD9-45AE-9A2E-AA8123689974}"/>
               </a:ext>
             </a:extLst>
           </p:cNvPr>
@@ -23308,7 +23308,7 @@
     </p:spTree>
     <p:extLst>
       <p:ext uri="{BB962C8B-B14F-4D97-AF65-F5344CB8AC3E}">
-        <p14:creationId xmlns:p14="http://schemas.microsoft.com/office/powerpoint/2010/main" val="78045899"/>
+        <p14:creationId xmlns:p14="http://schemas.microsoft.com/office/powerpoint/2010/main" val="119272415"/>
       </p:ext>
     </p:extLst>
   </p:cSld>
@@ -23339,7 +23339,7 @@
           <p:cNvPr id="12" name="ACT 0 · Context를 찾는 주체">
             <a:extLst xmlns:a="http://schemas.openxmlformats.org/drawingml/2006/main">
               <a:ext uri="{FF2B5EF4-FFF2-40B4-BE49-F238E27FC236}">
-                <a16:creationId xmlns:a16="http://schemas.microsoft.com/office/drawing/2014/main" id="{22BC5D49-9BA2-4801-A583-D705A22CB299}"/>
+                <a16:creationId xmlns:a16="http://schemas.microsoft.com/office/drawing/2014/main" id="{2C7072AD-F5F3-4730-94E1-FE5134DB00D5}"/>
               </a:ext>
             </a:extLst>
           </p:cNvPr>
@@ -23497,7 +23497,7 @@
           <p:cNvPr id="2" name="S07">
             <a:extLst xmlns:a="http://schemas.openxmlformats.org/drawingml/2006/main">
               <a:ext uri="{FF2B5EF4-FFF2-40B4-BE49-F238E27FC236}">
-                <a16:creationId xmlns:a16="http://schemas.microsoft.com/office/drawing/2014/main" id="{34432BF5-5A81-4009-90D2-9DD7B12A5019}"/>
+                <a16:creationId xmlns:a16="http://schemas.microsoft.com/office/drawing/2014/main" id="{4767C2B0-467D-413C-B591-16B2EA28B369}"/>
               </a:ext>
             </a:extLst>
           </p:cNvPr>
@@ -23655,7 +23655,7 @@
           <p:cNvPr id="3" name="코드를 AI에게 가져가는 대신&#10;AI를 Repository로 데려간다">
             <a:extLst xmlns:a="http://schemas.openxmlformats.org/drawingml/2006/main">
               <a:ext uri="{FF2B5EF4-FFF2-40B4-BE49-F238E27FC236}">
-                <a16:creationId xmlns:a16="http://schemas.microsoft.com/office/drawing/2014/main" id="{555743DE-921F-4463-AC5B-A6401A00FE5C}"/>
+                <a16:creationId xmlns:a16="http://schemas.microsoft.com/office/drawing/2014/main" id="{CE408362-7007-4570-982F-BBD94F1E952D}"/>
               </a:ext>
             </a:extLst>
           </p:cNvPr>
@@ -23836,7 +23836,7 @@
           <p:cNvPr id="4" name="">
             <a:extLst xmlns:a="http://schemas.openxmlformats.org/drawingml/2006/main">
               <a:ext uri="{FF2B5EF4-FFF2-40B4-BE49-F238E27FC236}">
-                <a16:creationId xmlns:a16="http://schemas.microsoft.com/office/drawing/2014/main" id="{AFC5A4E3-EB0C-4CBD-B3EA-9DCB0DB12BAF}"/>
+                <a16:creationId xmlns:a16="http://schemas.microsoft.com/office/drawing/2014/main" id="{51B5685D-99D0-4C75-9CF5-10309CDDE697}"/>
               </a:ext>
             </a:extLst>
           </p:cNvPr>
@@ -23867,7 +23867,7 @@
           <p:cNvPr id="5" name="교육 모델 · TRIAL-001 단일 CLI 관찰과 연결 · AI 생성 설명용 삽화">
             <a:extLst xmlns:a="http://schemas.openxmlformats.org/drawingml/2006/main">
               <a:ext uri="{FF2B5EF4-FFF2-40B4-BE49-F238E27FC236}">
-                <a16:creationId xmlns:a16="http://schemas.microsoft.com/office/drawing/2014/main" id="{4DBE7960-9800-4F61-9780-DFB1D4D5FCC9}"/>
+                <a16:creationId xmlns:a16="http://schemas.microsoft.com/office/drawing/2014/main" id="{679C787C-819F-4271-890D-D5F83009F861}"/>
               </a:ext>
             </a:extLst>
           </p:cNvPr>
@@ -24025,7 +24025,7 @@
           <p:cNvPr id="6" name="목표 설정과 근거 검토는 개발자에게 남습니다. Repository 접근이 Task 의도를 정하지는 않습니다.">
             <a:extLst xmlns:a="http://schemas.openxmlformats.org/drawingml/2006/main">
               <a:ext uri="{FF2B5EF4-FFF2-40B4-BE49-F238E27FC236}">
-                <a16:creationId xmlns:a16="http://schemas.microsoft.com/office/drawing/2014/main" id="{F1361B50-3F15-46C4-84BB-7B8BA7842B57}"/>
+                <a16:creationId xmlns:a16="http://schemas.microsoft.com/office/drawing/2014/main" id="{56F34592-A6BC-47A0-B2A2-7D74545E8BF0}"/>
               </a:ext>
             </a:extLst>
           </p:cNvPr>
@@ -24183,7 +24183,7 @@
           <p:cNvPr id="7" name="내가 골라 전달하는 Context">
             <a:extLst xmlns:a="http://schemas.openxmlformats.org/drawingml/2006/main">
               <a:ext uri="{FF2B5EF4-FFF2-40B4-BE49-F238E27FC236}">
-                <a16:creationId xmlns:a16="http://schemas.microsoft.com/office/drawing/2014/main" id="{AC2F2314-CDFD-4AC3-99B7-3C3F14840EAD}"/>
+                <a16:creationId xmlns:a16="http://schemas.microsoft.com/office/drawing/2014/main" id="{D513DEF8-60D9-4C4D-8581-3EF48D4995FD}"/>
               </a:ext>
             </a:extLst>
           </p:cNvPr>
@@ -24341,7 +24341,7 @@
           <p:cNvPr id="8" name="조사를 맡기고 근거를 확인">
             <a:extLst xmlns:a="http://schemas.openxmlformats.org/drawingml/2006/main">
               <a:ext uri="{FF2B5EF4-FFF2-40B4-BE49-F238E27FC236}">
-                <a16:creationId xmlns:a16="http://schemas.microsoft.com/office/drawing/2014/main" id="{8B3662BF-91B8-43BB-81F5-42F9E5F736F3}"/>
+                <a16:creationId xmlns:a16="http://schemas.microsoft.com/office/drawing/2014/main" id="{44E82618-1E8D-4F56-9273-129BFE37CE1D}"/>
               </a:ext>
             </a:extLst>
           </p:cNvPr>
@@ -24499,7 +24499,7 @@
           <p:cNvPr id="9" name="">
             <a:extLst xmlns:a="http://schemas.openxmlformats.org/drawingml/2006/main">
               <a:ext uri="{FF2B5EF4-FFF2-40B4-BE49-F238E27FC236}">
-                <a16:creationId xmlns:a16="http://schemas.microsoft.com/office/drawing/2014/main" id="{4387A1F4-6B27-471F-B367-77ACEDA01A67}"/>
+                <a16:creationId xmlns:a16="http://schemas.microsoft.com/office/drawing/2014/main" id="{DF953E15-79B3-411F-A783-09F0C01A6A53}"/>
               </a:ext>
             </a:extLst>
           </p:cNvPr>
@@ -24509,7 +24509,7 @@
           <p:nvPr/>
         </p:nvPicPr>
         <p:blipFill>
-          <a:blip xmlns:r="http://schemas.openxmlformats.org/officeDocument/2006/relationships" xmlns:a="http://schemas.openxmlformats.org/drawingml/2006/main" r:embed="R262508a418ae4203"/>
+          <a:blip xmlns:r="http://schemas.openxmlformats.org/officeDocument/2006/relationships" xmlns:a="http://schemas.openxmlformats.org/drawingml/2006/main" r:embed="Re64e844e08024e6f"/>
           <a:srcRect xmlns:a="http://schemas.openxmlformats.org/drawingml/2006/main" l="0" t="18000" r="0" b="15000"/>
           <a:stretch xmlns:a="http://schemas.openxmlformats.org/drawingml/2006/main"/>
         </p:blipFill>
@@ -24528,7 +24528,7 @@
           <p:cNvPr id="10" name="코드 조각을 선택·복사">
             <a:extLst xmlns:a="http://schemas.openxmlformats.org/drawingml/2006/main">
               <a:ext uri="{FF2B5EF4-FFF2-40B4-BE49-F238E27FC236}">
-                <a16:creationId xmlns:a16="http://schemas.microsoft.com/office/drawing/2014/main" id="{B6ACB744-A320-46CB-9B6A-932E740F15BA}"/>
+                <a16:creationId xmlns:a16="http://schemas.microsoft.com/office/drawing/2014/main" id="{FB237846-7700-4617-97BD-865154E854AB}"/>
               </a:ext>
             </a:extLst>
           </p:cNvPr>
@@ -24686,7 +24686,7 @@
           <p:cNvPr id="11" name="목표는 사람이, 탐색은 Agent와">
             <a:extLst xmlns:a="http://schemas.openxmlformats.org/drawingml/2006/main">
               <a:ext uri="{FF2B5EF4-FFF2-40B4-BE49-F238E27FC236}">
-                <a16:creationId xmlns:a16="http://schemas.microsoft.com/office/drawing/2014/main" id="{3069110F-8940-44F1-9637-CA7A5810769C}"/>
+                <a16:creationId xmlns:a16="http://schemas.microsoft.com/office/drawing/2014/main" id="{CB5A462D-A92C-4F96-9677-C40E4D0D519B}"/>
               </a:ext>
             </a:extLst>
           </p:cNvPr>
@@ -24842,7 +24842,7 @@
     </p:spTree>
     <p:extLst>
       <p:ext uri="{BB962C8B-B14F-4D97-AF65-F5344CB8AC3E}">
-        <p14:creationId xmlns:p14="http://schemas.microsoft.com/office/powerpoint/2010/main" val="86831313"/>
+        <p14:creationId xmlns:p14="http://schemas.microsoft.com/office/powerpoint/2010/main" val="207870649"/>
       </p:ext>
     </p:extLst>
   </p:cSld>
@@ -24873,7 +24873,7 @@
           <p:cNvPr id="15" name="ACT 0 · 접근할 정보와 정할 목표">
             <a:extLst xmlns:a="http://schemas.openxmlformats.org/drawingml/2006/main">
               <a:ext uri="{FF2B5EF4-FFF2-40B4-BE49-F238E27FC236}">
-                <a16:creationId xmlns:a16="http://schemas.microsoft.com/office/drawing/2014/main" id="{F1FAFA2D-C926-4583-9708-5E2339F2366E}"/>
+                <a16:creationId xmlns:a16="http://schemas.microsoft.com/office/drawing/2014/main" id="{C9C4537B-ECAF-4578-9049-333165B70239}"/>
               </a:ext>
             </a:extLst>
           </p:cNvPr>
@@ -25031,7 +25031,7 @@
           <p:cNvPr id="2" name="S08">
             <a:extLst xmlns:a="http://schemas.openxmlformats.org/drawingml/2006/main">
               <a:ext uri="{FF2B5EF4-FFF2-40B4-BE49-F238E27FC236}">
-                <a16:creationId xmlns:a16="http://schemas.microsoft.com/office/drawing/2014/main" id="{32100E83-D6EE-488C-B86E-2A1FEBF4F39D}"/>
+                <a16:creationId xmlns:a16="http://schemas.microsoft.com/office/drawing/2014/main" id="{5AC85863-87F6-43DB-B923-7CDAB00E5B40}"/>
               </a:ext>
             </a:extLst>
           </p:cNvPr>
@@ -25189,7 +25189,7 @@
           <p:cNvPr id="3" name="Repository 접근과 Task 의도는 별개다">
             <a:extLst xmlns:a="http://schemas.openxmlformats.org/drawingml/2006/main">
               <a:ext uri="{FF2B5EF4-FFF2-40B4-BE49-F238E27FC236}">
-                <a16:creationId xmlns:a16="http://schemas.microsoft.com/office/drawing/2014/main" id="{0936280A-0B56-4654-81C8-799884E33718}"/>
+                <a16:creationId xmlns:a16="http://schemas.microsoft.com/office/drawing/2014/main" id="{CC022088-675E-466B-A25D-84B8CD841C7F}"/>
               </a:ext>
             </a:extLst>
           </p:cNvPr>
@@ -25347,7 +25347,7 @@
           <p:cNvPr id="4" name="">
             <a:extLst xmlns:a="http://schemas.openxmlformats.org/drawingml/2006/main">
               <a:ext uri="{FF2B5EF4-FFF2-40B4-BE49-F238E27FC236}">
-                <a16:creationId xmlns:a16="http://schemas.microsoft.com/office/drawing/2014/main" id="{3285C100-8F17-4779-A3A0-F4068D9244ED}"/>
+                <a16:creationId xmlns:a16="http://schemas.microsoft.com/office/drawing/2014/main" id="{3C4938B8-368A-4828-880A-F1994864E3D6}"/>
               </a:ext>
             </a:extLst>
           </p:cNvPr>
@@ -25378,7 +25378,7 @@
           <p:cNvPr id="5" name="이 과정의 교육 모델 · Repository 접근과 작업 의도의 관계">
             <a:extLst xmlns:a="http://schemas.openxmlformats.org/drawingml/2006/main">
               <a:ext uri="{FF2B5EF4-FFF2-40B4-BE49-F238E27FC236}">
-                <a16:creationId xmlns:a16="http://schemas.microsoft.com/office/drawing/2014/main" id="{1F763618-1CED-4821-AFDC-CF0D4B9E8F53}"/>
+                <a16:creationId xmlns:a16="http://schemas.microsoft.com/office/drawing/2014/main" id="{587B8924-B1D1-4ED2-9932-586CAE8F20FE}"/>
               </a:ext>
             </a:extLst>
           </p:cNvPr>
@@ -25536,7 +25536,7 @@
           <p:cNvPr id="6" name="모든 제품이나 환경의 기능을 설명하는 공식 분류가 아닙니다.">
             <a:extLst xmlns:a="http://schemas.openxmlformats.org/drawingml/2006/main">
               <a:ext uri="{FF2B5EF4-FFF2-40B4-BE49-F238E27FC236}">
-                <a16:creationId xmlns:a16="http://schemas.microsoft.com/office/drawing/2014/main" id="{3E4A0E48-5BA9-4B94-A404-0D2AF6FC8CAA}"/>
+                <a16:creationId xmlns:a16="http://schemas.microsoft.com/office/drawing/2014/main" id="{17C7B65A-19AE-4436-BC89-2CC4A7A9961E}"/>
               </a:ext>
             </a:extLst>
           </p:cNvPr>
@@ -25694,7 +25694,7 @@
           <p:cNvPr id="7" name="볼 수 있는 것">
             <a:extLst xmlns:a="http://schemas.openxmlformats.org/drawingml/2006/main">
               <a:ext uri="{FF2B5EF4-FFF2-40B4-BE49-F238E27FC236}">
-                <a16:creationId xmlns:a16="http://schemas.microsoft.com/office/drawing/2014/main" id="{14862882-3170-451E-8254-BF727D27BECC}"/>
+                <a16:creationId xmlns:a16="http://schemas.microsoft.com/office/drawing/2014/main" id="{70D2132F-1245-4AFB-B6ED-20C7843DC60C}"/>
               </a:ext>
             </a:extLst>
           </p:cNvPr>
@@ -25852,7 +25852,7 @@
           <p:cNvPr id="8" name="정해야 하는 것">
             <a:extLst xmlns:a="http://schemas.openxmlformats.org/drawingml/2006/main">
               <a:ext uri="{FF2B5EF4-FFF2-40B4-BE49-F238E27FC236}">
-                <a16:creationId xmlns:a16="http://schemas.microsoft.com/office/drawing/2014/main" id="{B753E983-F6E0-4C89-9E70-BF41C420C413}"/>
+                <a16:creationId xmlns:a16="http://schemas.microsoft.com/office/drawing/2014/main" id="{8AA56CE4-62A4-4FC1-9872-FC8A1AAAACEB}"/>
               </a:ext>
             </a:extLst>
           </p:cNvPr>
@@ -26010,7 +26010,7 @@
           <p:cNvPr id="9" name="">
             <a:extLst xmlns:a="http://schemas.openxmlformats.org/drawingml/2006/main">
               <a:ext uri="{FF2B5EF4-FFF2-40B4-BE49-F238E27FC236}">
-                <a16:creationId xmlns:a16="http://schemas.microsoft.com/office/drawing/2014/main" id="{95D0ED03-9012-44A1-995D-0CA8DDA1C25A}"/>
+                <a16:creationId xmlns:a16="http://schemas.microsoft.com/office/drawing/2014/main" id="{2303AF2A-5314-4905-883A-9A3C566C5E0A}"/>
               </a:ext>
             </a:extLst>
           </p:cNvPr>
@@ -26041,7 +26041,7 @@
           <p:cNvPr id="10" name="">
             <a:extLst xmlns:a="http://schemas.openxmlformats.org/drawingml/2006/main">
               <a:ext uri="{FF2B5EF4-FFF2-40B4-BE49-F238E27FC236}">
-                <a16:creationId xmlns:a16="http://schemas.microsoft.com/office/drawing/2014/main" id="{D74524AB-437E-4C03-94E1-F31DF7EC1437}"/>
+                <a16:creationId xmlns:a16="http://schemas.microsoft.com/office/drawing/2014/main" id="{E59E61ED-9252-4254-ADF0-01C135A7AAB4}"/>
               </a:ext>
             </a:extLst>
           </p:cNvPr>
@@ -26072,7 +26072,7 @@
           <p:cNvPr id="11" name="파일&#10;구현&#10;테스트">
             <a:extLst xmlns:a="http://schemas.openxmlformats.org/drawingml/2006/main">
               <a:ext uri="{FF2B5EF4-FFF2-40B4-BE49-F238E27FC236}">
-                <a16:creationId xmlns:a16="http://schemas.microsoft.com/office/drawing/2014/main" id="{11FE6A99-8415-439A-8552-8353582F1743}"/>
+                <a16:creationId xmlns:a16="http://schemas.microsoft.com/office/drawing/2014/main" id="{6FA08858-F1F1-4096-993C-F352E87D0491}"/>
               </a:ext>
             </a:extLst>
           </p:cNvPr>
@@ -26276,7 +26276,7 @@
           <p:cNvPr id="12" name="원하는 변화&#10;허용할 범위&#10;완료 판단">
             <a:extLst xmlns:a="http://schemas.openxmlformats.org/drawingml/2006/main">
               <a:ext uri="{FF2B5EF4-FFF2-40B4-BE49-F238E27FC236}">
-                <a16:creationId xmlns:a16="http://schemas.microsoft.com/office/drawing/2014/main" id="{2A071D5C-81EA-43D3-891D-9757F1D3F117}"/>
+                <a16:creationId xmlns:a16="http://schemas.microsoft.com/office/drawing/2014/main" id="{890AA244-3627-44F2-ACCB-E6BF94F02389}"/>
               </a:ext>
             </a:extLst>
           </p:cNvPr>
@@ -26480,7 +26480,7 @@
           <p:cNvPr id="13" name="≠">
             <a:extLst xmlns:a="http://schemas.openxmlformats.org/drawingml/2006/main">
               <a:ext uri="{FF2B5EF4-FFF2-40B4-BE49-F238E27FC236}">
-                <a16:creationId xmlns:a16="http://schemas.microsoft.com/office/drawing/2014/main" id="{82170E5B-E8FE-4C5D-85A8-0C2B5CD7E6B3}"/>
+                <a16:creationId xmlns:a16="http://schemas.microsoft.com/office/drawing/2014/main" id="{F4BF25FF-87B8-43F6-95FE-E62E806B2383}"/>
               </a:ext>
             </a:extLst>
           </p:cNvPr>
@@ -26638,7 +26638,7 @@
           <p:cNvPr id="14" name="코드가 보여도, 원하는 일은 따로 전달해야 한다.">
             <a:extLst xmlns:a="http://schemas.openxmlformats.org/drawingml/2006/main">
               <a:ext uri="{FF2B5EF4-FFF2-40B4-BE49-F238E27FC236}">
-                <a16:creationId xmlns:a16="http://schemas.microsoft.com/office/drawing/2014/main" id="{FB32683E-E195-40A3-8895-2ED7B6E0FACB}"/>
+                <a16:creationId xmlns:a16="http://schemas.microsoft.com/office/drawing/2014/main" id="{8FB69391-44B2-4F42-8C17-8A800E77C195}"/>
               </a:ext>
             </a:extLst>
           </p:cNvPr>
@@ -26794,7 +26794,7 @@
     </p:spTree>
     <p:extLst>
       <p:ext uri="{BB962C8B-B14F-4D97-AF65-F5344CB8AC3E}">
-        <p14:creationId xmlns:p14="http://schemas.microsoft.com/office/powerpoint/2010/main" val="1505983663"/>
+        <p14:creationId xmlns:p14="http://schemas.microsoft.com/office/powerpoint/2010/main" val="1841214156"/>
       </p:ext>
     </p:extLst>
   </p:cSld>
@@ -26822,10 +26822,10 @@
       </p:grpSpPr>
       <p:sp>
         <p:nvSpPr>
-          <p:cNvPr id="11" name="ACT 0 · 다음 질문">
+          <p:cNvPr id="11" name="ACT 0 · 내 작업에 적용할 질문">
             <a:extLst xmlns:a="http://schemas.openxmlformats.org/drawingml/2006/main">
               <a:ext uri="{FF2B5EF4-FFF2-40B4-BE49-F238E27FC236}">
-                <a16:creationId xmlns:a16="http://schemas.microsoft.com/office/drawing/2014/main" id="{5ADF2C27-5D43-4DEC-AE4A-B64E5FD69416}"/>
+                <a16:creationId xmlns:a16="http://schemas.microsoft.com/office/drawing/2014/main" id="{FABC6482-F3BB-487D-BF50-7174F7FC097E}"/>
               </a:ext>
             </a:extLst>
           </p:cNvPr>
@@ -26973,7 +26973,7 @@
                 <a:ea typeface="Malgun Gothic"/>
                 <a:cs typeface="Malgun Gothic"/>
               </a:rPr>
-              <a:t>ACT 0 · 다음 질문</a:t>
+              <a:t>ACT 0 · 내 작업에 적용할 질문</a:t>
             </a:r>
           </a:p>
         </p:txBody>
@@ -26983,7 +26983,7 @@
           <p:cNvPr id="2" name="S09">
             <a:extLst xmlns:a="http://schemas.openxmlformats.org/drawingml/2006/main">
               <a:ext uri="{FF2B5EF4-FFF2-40B4-BE49-F238E27FC236}">
-                <a16:creationId xmlns:a16="http://schemas.microsoft.com/office/drawing/2014/main" id="{DCF5A65E-3D42-4870-B047-811D652BB2C9}"/>
+                <a16:creationId xmlns:a16="http://schemas.microsoft.com/office/drawing/2014/main" id="{4C75E311-3CF2-40BA-8E04-CB7E68E987C6}"/>
               </a:ext>
             </a:extLst>
           </p:cNvPr>
@@ -27141,7 +27141,7 @@
           <p:cNvPr id="3" name="Repository를 보면 내가 원하는 것까지 알까?">
             <a:extLst xmlns:a="http://schemas.openxmlformats.org/drawingml/2006/main">
               <a:ext uri="{FF2B5EF4-FFF2-40B4-BE49-F238E27FC236}">
-                <a16:creationId xmlns:a16="http://schemas.microsoft.com/office/drawing/2014/main" id="{CC95F8A8-75EB-4F8D-9545-53E6606D3328}"/>
+                <a16:creationId xmlns:a16="http://schemas.microsoft.com/office/drawing/2014/main" id="{38D2DC58-FABD-446C-9614-07FA30485C28}"/>
               </a:ext>
             </a:extLst>
           </p:cNvPr>
@@ -27299,7 +27299,7 @@
           <p:cNvPr id="4" name="">
             <a:extLst xmlns:a="http://schemas.openxmlformats.org/drawingml/2006/main">
               <a:ext uri="{FF2B5EF4-FFF2-40B4-BE49-F238E27FC236}">
-                <a16:creationId xmlns:a16="http://schemas.microsoft.com/office/drawing/2014/main" id="{7ACCCC14-1114-4CA8-B872-C1435CFEB9C7}"/>
+                <a16:creationId xmlns:a16="http://schemas.microsoft.com/office/drawing/2014/main" id="{09FE15A7-CE3B-4BAF-9EF5-0EC561E75EAE}"/>
               </a:ext>
             </a:extLst>
           </p:cNvPr>
@@ -27330,7 +27330,7 @@
           <p:cNvPr id="5" name="함께 생각해 보기 · 교육 모델">
             <a:extLst xmlns:a="http://schemas.openxmlformats.org/drawingml/2006/main">
               <a:ext uri="{FF2B5EF4-FFF2-40B4-BE49-F238E27FC236}">
-                <a16:creationId xmlns:a16="http://schemas.microsoft.com/office/drawing/2014/main" id="{FE1E7F69-9209-4296-A49D-E7E3A7A46FDE}"/>
+                <a16:creationId xmlns:a16="http://schemas.microsoft.com/office/drawing/2014/main" id="{4CD10FA1-2CFB-44F6-94AB-7CC57EC46791}"/>
               </a:ext>
             </a:extLst>
           </p:cNvPr>
@@ -27488,7 +27488,7 @@
           <p:cNvPr id="6" name="현재 맡기고 싶은 일을 떠올려 보세요. 질문과 경험 공유는 자발적으로 진행합니다.">
             <a:extLst xmlns:a="http://schemas.openxmlformats.org/drawingml/2006/main">
               <a:ext uri="{FF2B5EF4-FFF2-40B4-BE49-F238E27FC236}">
-                <a16:creationId xmlns:a16="http://schemas.microsoft.com/office/drawing/2014/main" id="{AA90E931-42EC-46EE-AD2D-FA580C99A09F}"/>
+                <a16:creationId xmlns:a16="http://schemas.microsoft.com/office/drawing/2014/main" id="{F2222AE9-76F0-4788-99D5-70C2653223D5}"/>
               </a:ext>
             </a:extLst>
           </p:cNvPr>
@@ -27646,7 +27646,7 @@
           <p:cNvPr id="7" name="지금 이 저장소에&#10;어떤 일을 맡기고 싶으신가요?">
             <a:extLst xmlns:a="http://schemas.openxmlformats.org/drawingml/2006/main">
               <a:ext uri="{FF2B5EF4-FFF2-40B4-BE49-F238E27FC236}">
-                <a16:creationId xmlns:a16="http://schemas.microsoft.com/office/drawing/2014/main" id="{5DEAA14E-00BA-4028-BCC9-CF0E88C03349}"/>
+                <a16:creationId xmlns:a16="http://schemas.microsoft.com/office/drawing/2014/main" id="{5AA74C95-A44F-4E49-AADE-27EA3BD49655}"/>
               </a:ext>
             </a:extLst>
           </p:cNvPr>
@@ -27827,7 +27827,7 @@
           <p:cNvPr id="8" name="?">
             <a:extLst xmlns:a="http://schemas.openxmlformats.org/drawingml/2006/main">
               <a:ext uri="{FF2B5EF4-FFF2-40B4-BE49-F238E27FC236}">
-                <a16:creationId xmlns:a16="http://schemas.microsoft.com/office/drawing/2014/main" id="{7E277A2C-64E6-457B-9EF1-EC36B8112EBC}"/>
+                <a16:creationId xmlns:a16="http://schemas.microsoft.com/office/drawing/2014/main" id="{F303C102-F5CC-4092-A2C7-FAA9FF715593}"/>
               </a:ext>
             </a:extLst>
           </p:cNvPr>
@@ -27985,7 +27985,7 @@
           <p:cNvPr id="9" name="">
             <a:extLst xmlns:a="http://schemas.openxmlformats.org/drawingml/2006/main">
               <a:ext uri="{FF2B5EF4-FFF2-40B4-BE49-F238E27FC236}">
-                <a16:creationId xmlns:a16="http://schemas.microsoft.com/office/drawing/2014/main" id="{AA2027C2-D60B-45EC-82F4-C62F1C5E3FAF}"/>
+                <a16:creationId xmlns:a16="http://schemas.microsoft.com/office/drawing/2014/main" id="{134F206F-7311-4FF5-9813-8E4F5B956915}"/>
               </a:ext>
             </a:extLst>
           </p:cNvPr>
@@ -28016,7 +28016,7 @@
           <p:cNvPr id="10" name="그 원하는 결과까지&#10;코드에 적혀 있을까요?">
             <a:extLst xmlns:a="http://schemas.openxmlformats.org/drawingml/2006/main">
               <a:ext uri="{FF2B5EF4-FFF2-40B4-BE49-F238E27FC236}">
-                <a16:creationId xmlns:a16="http://schemas.microsoft.com/office/drawing/2014/main" id="{56867C9B-7C1D-46FD-86C0-20BF17B77B25}"/>
+                <a16:creationId xmlns:a16="http://schemas.microsoft.com/office/drawing/2014/main" id="{8FC2890A-09E2-45F8-B4C6-8B1B3F587F02}"/>
               </a:ext>
             </a:extLst>
           </p:cNvPr>
@@ -28195,7 +28195,7 @@
     </p:spTree>
     <p:extLst>
       <p:ext uri="{BB962C8B-B14F-4D97-AF65-F5344CB8AC3E}">
-        <p14:creationId xmlns:p14="http://schemas.microsoft.com/office/powerpoint/2010/main" val="1367839002"/>
+        <p14:creationId xmlns:p14="http://schemas.microsoft.com/office/powerpoint/2010/main" val="1344863587"/>
       </p:ext>
     </p:extLst>
   </p:cSld>

--- a/production/ACT_0.pptx
+++ b/production/ACT_0.pptx
@@ -2,21 +2,21 @@
 <file path=ppt/presentation.xml><?xml version="1.0" encoding="utf-8"?>
 <p:presentation xmlns:p="http://schemas.openxmlformats.org/presentationml/2006/main">
   <p:sldMasterIdLst>
-    <p:sldMasterId xmlns:r="http://schemas.openxmlformats.org/officeDocument/2006/relationships" id="2147483648" r:id="R989e4991c2d548ea"/>
+    <p:sldMasterId xmlns:r="http://schemas.openxmlformats.org/officeDocument/2006/relationships" id="2147483648" r:id="Rd46ec42edbc74c1e"/>
   </p:sldMasterIdLst>
   <p:notesMasterIdLst>
-    <p:notesMasterId xmlns:r="http://schemas.openxmlformats.org/officeDocument/2006/relationships" r:id="Ra3ce76a09b3b476b"/>
+    <p:notesMasterId xmlns:r="http://schemas.openxmlformats.org/officeDocument/2006/relationships" r:id="R7bb78e93cea74500"/>
   </p:notesMasterIdLst>
   <p:sldIdLst>
-    <p:sldId xmlns:r="http://schemas.openxmlformats.org/officeDocument/2006/relationships" id="256" r:id="Rbe3edf4d711b4bef"/>
-    <p:sldId xmlns:r="http://schemas.openxmlformats.org/officeDocument/2006/relationships" id="257" r:id="R3813f64f3c1b4e70"/>
-    <p:sldId xmlns:r="http://schemas.openxmlformats.org/officeDocument/2006/relationships" id="258" r:id="Re40e8ac4f067479d"/>
-    <p:sldId xmlns:r="http://schemas.openxmlformats.org/officeDocument/2006/relationships" id="259" r:id="Ra5488453189044f8"/>
-    <p:sldId xmlns:r="http://schemas.openxmlformats.org/officeDocument/2006/relationships" id="260" r:id="R0fa2cb3c33054a26"/>
-    <p:sldId xmlns:r="http://schemas.openxmlformats.org/officeDocument/2006/relationships" id="261" r:id="Rf54b10b297d3491f"/>
-    <p:sldId xmlns:r="http://schemas.openxmlformats.org/officeDocument/2006/relationships" id="262" r:id="R3ba2099e54944792"/>
-    <p:sldId xmlns:r="http://schemas.openxmlformats.org/officeDocument/2006/relationships" id="263" r:id="R8e31cf9bacb94408"/>
-    <p:sldId xmlns:r="http://schemas.openxmlformats.org/officeDocument/2006/relationships" id="264" r:id="Rc0b894f1171d4565"/>
+    <p:sldId xmlns:r="http://schemas.openxmlformats.org/officeDocument/2006/relationships" id="256" r:id="Rbe7eef6ab00f4451"/>
+    <p:sldId xmlns:r="http://schemas.openxmlformats.org/officeDocument/2006/relationships" id="257" r:id="Ra905045b93f64bd8"/>
+    <p:sldId xmlns:r="http://schemas.openxmlformats.org/officeDocument/2006/relationships" id="258" r:id="Rb6005ade27554d69"/>
+    <p:sldId xmlns:r="http://schemas.openxmlformats.org/officeDocument/2006/relationships" id="259" r:id="Re422ca2cc9214935"/>
+    <p:sldId xmlns:r="http://schemas.openxmlformats.org/officeDocument/2006/relationships" id="260" r:id="R3a43a86e17f040e9"/>
+    <p:sldId xmlns:r="http://schemas.openxmlformats.org/officeDocument/2006/relationships" id="261" r:id="R7960d1e1573d4a3f"/>
+    <p:sldId xmlns:r="http://schemas.openxmlformats.org/officeDocument/2006/relationships" id="262" r:id="R1f7119be10814bf1"/>
+    <p:sldId xmlns:r="http://schemas.openxmlformats.org/officeDocument/2006/relationships" id="263" r:id="R509e585b25f14843"/>
+    <p:sldId xmlns:r="http://schemas.openxmlformats.org/officeDocument/2006/relationships" id="264" r:id="R9c1072b4a5e9469f"/>
   </p:sldIdLst>
   <p:sldSz cx="12192000" cy="6858000"/>
   <p:notesSz cx="6858000" cy="9144000"/>
@@ -2230,17 +2230,22 @@
           </a:p>
           <a:p xmlns:a="http://schemas.openxmlformats.org/drawingml/2006/main">
             <a:r>
-              <a:t>1. **CALL BACK (0:00–0:45):** 왼쪽 Repository → 개발자 선택·복사 → AI 관계로 S02를 짧게 회수한다.</a:t>
-            </a:r>
-          </a:p>
-          <a:p xmlns:a="http://schemas.openxmlformats.org/drawingml/2006/main">
-            <a:r>
-              <a:t>2. **TRANSFER (0:45–2:00):** 오른쪽 개발자 조사 요청 → Agent ↔ Repository로 시선을 옮긴다. 바뀌는 것은 Context를 찾는 주체의 일부이며 목표와 검증 책임을 전부 넘긴다는 뜻이 아니다.</a:t>
-            </a:r>
-          </a:p>
-          <a:p xmlns:a="http://schemas.openxmlformats.org/drawingml/2006/main">
-            <a:r>
-              <a:t>3. **TRANSFER / TRANSITION (2:00–3:00):** 필요하면 큰 C++ 저장소에서도 모듈·테스트·계약을 찾는 상황을 한 문장으로 연결한다. Repository 접근이 원하는 Task를 정하지는 않는다는 S08 질문으로 이동한다.</a:t>
+              <a:t>1. **CALL BACK (0:00–0:30):** 왼쪽 Repository → 개발자 선택·복사 → AI 관계로 S02를 짧게 회수한다.</a:t>
+            </a:r>
+          </a:p>
+          <a:p xmlns:a="http://schemas.openxmlformats.org/drawingml/2006/main">
+            <a:r>
+              <a:t>2. **TRANSFER (0:30–1:30):** 오른쪽 개발자 조사 요청 → Agent ↔ Repository로 시선을 옮긴다. 바뀌는 것은 Context를 찾는 주체의 일부이며 목표와 검증 책임을 전부 넘긴다는 뜻이 아니다.</a:t>
+            </a:r>
+          </a:p>
+          <a:p xmlns:a="http://schemas.openxmlformats.org/drawingml/2006/main">
+            <a:r>
+              <a:t>3. **ACCESS BOUNDARY (1:30–2:15):** Repository를 연결하거나 자료를 전달하기 전에 승인된 도구·계정, 입력 가능한 자료와 허용된 접근 권한 범위를 먼저 확인한다고 설명한다. 회사의 실제 허용·금지 목록과 승인 절차는 이 자료에서 확정하지 않았으므로 해당 조직의 정책을 확인해야 한다. 새로운 제품 설정이나 정책 목록을 가르치지 않는다.</a:t>
+            </a:r>
+          </a:p>
+          <a:p xmlns:a="http://schemas.openxmlformats.org/drawingml/2006/main">
+            <a:r>
+              <a:t>4. **TRANSFER / TRANSITION (2:15–3:00):** 필요하면 큰 C++ 저장소에서도 모듈·테스트·계약을 찾는 상황을 한 문장으로만 연결한다. Repository 접근이 원하는 Task를 정하지는 않는다는 S08 질문으로 이동한다.</a:t>
             </a:r>
           </a:p>
           <a:p xmlns:a="http://schemas.openxmlformats.org/drawingml/2006/main">
@@ -2260,7 +2265,7 @@
           </a:p>
           <a:p xmlns:a="http://schemas.openxmlformats.org/drawingml/2006/main">
             <a:r>
-              <a:t>Claim Boundary: 이 관찰은 CLI 한 번에 한정되며 제품의 보편적 성능·반복성 주장이 아니다. Repository 접근이 Task 의도나 성공을 자동으로 정한다는 뜻이 아니다.</a:t>
+              <a:t>Claim Boundary: 이 관찰은 CLI 한 번에 한정되며 제품의 보편적 성능·반복성 주장이 아니다. Repository 접근이 Task 의도나 성공을 자동으로 정한다는 뜻이 아니다. 도구·계정·자료·접근 권한의 사전 확인은 교육용 판단 지침이며 특정 회사의 허용·금지 정책이나 현재 제품의 보안 보장을 확인한 결과가 아니다.</a:t>
             </a:r>
           </a:p>
           <a:p xmlns:a="http://schemas.openxmlformats.org/drawingml/2006/main">
@@ -2330,7 +2335,7 @@
           </a:p>
           <a:p xmlns:a="http://schemas.openxmlformats.org/drawingml/2006/main">
             <a:r>
-              <a:t>Time Management: 좌·우 관계의 변화에 집중한다. Trial 상세와 수치를 반복하지 않는다. C++ 연결은 선택적인 한 문장이며 3분 안에 S08로 이동한다.</a:t>
+              <a:t>Time Management: 좌·우 관계의 변화에 집중한다. Trial 상세와 수치를 반복하지 않는다. 기존 관계 재설명과 선택적 C++ 해설을 줄여 접근 범위 확인 45초를 배치한다. C++ 연결은 선택적인 한 문장에 한정하고 Lecture 3분 안에 S08로 이동한다. 실제 시간 적합성은 리허설 전까지 UNVERIFIED다.</a:t>
             </a:r>
           </a:p>
           <a:p xmlns:a="http://schemas.openxmlformats.org/drawingml/2006/main">
@@ -2952,7 +2957,7 @@
           <p:cNvPr id="3" name="Title">
             <a:extLst xmlns:a="http://schemas.openxmlformats.org/drawingml/2006/main">
               <a:ext uri="{FF2B5EF4-FFF2-40B4-BE49-F238E27FC236}">
-                <a16:creationId xmlns:a16="http://schemas.microsoft.com/office/drawing/2014/main" id="{A95267A7-CF47-4D92-BB0A-124F1BDB6E5A}"/>
+                <a16:creationId xmlns:a16="http://schemas.microsoft.com/office/drawing/2014/main" id="{B04B6CCE-E6B7-4EF6-BA58-536BA3A8A043}"/>
               </a:ext>
             </a:extLst>
           </p:cNvPr>
@@ -3181,7 +3186,7 @@
           <p:cNvPr id="2" name="Subtitle">
             <a:extLst xmlns:a="http://schemas.openxmlformats.org/drawingml/2006/main">
               <a:ext uri="{FF2B5EF4-FFF2-40B4-BE49-F238E27FC236}">
-                <a16:creationId xmlns:a16="http://schemas.microsoft.com/office/drawing/2014/main" id="{0A521828-CFAB-4A98-A01A-D8542644EBB3}"/>
+                <a16:creationId xmlns:a16="http://schemas.microsoft.com/office/drawing/2014/main" id="{40BF02FF-EF7D-4880-841E-569E445DBAE8}"/>
               </a:ext>
             </a:extLst>
           </p:cNvPr>
@@ -3427,7 +3432,7 @@
           <p:cNvPr id="2" name="Section title">
             <a:extLst xmlns:a="http://schemas.openxmlformats.org/drawingml/2006/main">
               <a:ext uri="{FF2B5EF4-FFF2-40B4-BE49-F238E27FC236}">
-                <a16:creationId xmlns:a16="http://schemas.microsoft.com/office/drawing/2014/main" id="{D6C87A90-95FA-4251-A027-F5C449E38396}"/>
+                <a16:creationId xmlns:a16="http://schemas.microsoft.com/office/drawing/2014/main" id="{B3F3CDF8-BAB3-49A2-B6C9-C51F1CDEA9D9}"/>
               </a:ext>
             </a:extLst>
           </p:cNvPr>
@@ -3673,7 +3678,7 @@
           <p:cNvPr id="3" name="Title">
             <a:extLst xmlns:a="http://schemas.openxmlformats.org/drawingml/2006/main">
               <a:ext uri="{FF2B5EF4-FFF2-40B4-BE49-F238E27FC236}">
-                <a16:creationId xmlns:a16="http://schemas.microsoft.com/office/drawing/2014/main" id="{8FB009FD-BD3D-42D0-8E42-0D93D4B46AE7}"/>
+                <a16:creationId xmlns:a16="http://schemas.microsoft.com/office/drawing/2014/main" id="{99916697-06E3-47AC-8BBE-6EA973E60CD9}"/>
               </a:ext>
             </a:extLst>
           </p:cNvPr>
@@ -3902,7 +3907,7 @@
           <p:cNvPr id="2" name="Body">
             <a:extLst xmlns:a="http://schemas.openxmlformats.org/drawingml/2006/main">
               <a:ext uri="{FF2B5EF4-FFF2-40B4-BE49-F238E27FC236}">
-                <a16:creationId xmlns:a16="http://schemas.microsoft.com/office/drawing/2014/main" id="{9D8BE5BC-80CA-4539-A8B5-02E23D6113D1}"/>
+                <a16:creationId xmlns:a16="http://schemas.microsoft.com/office/drawing/2014/main" id="{3F5CDE66-F6CF-40E3-A4AE-B6EC9C5C3603}"/>
               </a:ext>
             </a:extLst>
           </p:cNvPr>
@@ -4148,7 +4153,7 @@
           <p:cNvPr id="4" name="Title">
             <a:extLst xmlns:a="http://schemas.openxmlformats.org/drawingml/2006/main">
               <a:ext uri="{FF2B5EF4-FFF2-40B4-BE49-F238E27FC236}">
-                <a16:creationId xmlns:a16="http://schemas.microsoft.com/office/drawing/2014/main" id="{BB9C8362-3D71-4BFA-BB8F-6E88A3F22045}"/>
+                <a16:creationId xmlns:a16="http://schemas.microsoft.com/office/drawing/2014/main" id="{62F06056-CE20-42B5-AF91-7A1303315626}"/>
               </a:ext>
             </a:extLst>
           </p:cNvPr>
@@ -4377,7 +4382,7 @@
           <p:cNvPr id="2" name="Left column">
             <a:extLst xmlns:a="http://schemas.openxmlformats.org/drawingml/2006/main">
               <a:ext uri="{FF2B5EF4-FFF2-40B4-BE49-F238E27FC236}">
-                <a16:creationId xmlns:a16="http://schemas.microsoft.com/office/drawing/2014/main" id="{42DB8546-DA19-4562-85CD-1D53EFEA29F1}"/>
+                <a16:creationId xmlns:a16="http://schemas.microsoft.com/office/drawing/2014/main" id="{8B827D0F-F6B0-4C7D-87F8-981EC5897A97}"/>
               </a:ext>
             </a:extLst>
           </p:cNvPr>
@@ -4606,7 +4611,7 @@
           <p:cNvPr id="3" name="Right column">
             <a:extLst xmlns:a="http://schemas.openxmlformats.org/drawingml/2006/main">
               <a:ext uri="{FF2B5EF4-FFF2-40B4-BE49-F238E27FC236}">
-                <a16:creationId xmlns:a16="http://schemas.microsoft.com/office/drawing/2014/main" id="{CD74B3E9-6B31-4C4E-A33F-B2A38A82E784}"/>
+                <a16:creationId xmlns:a16="http://schemas.microsoft.com/office/drawing/2014/main" id="{3DA10C1C-F51F-43AE-9354-76A164069C10}"/>
               </a:ext>
             </a:extLst>
           </p:cNvPr>
@@ -4852,7 +4857,7 @@
           <p:cNvPr id="3" name="Title">
             <a:extLst xmlns:a="http://schemas.openxmlformats.org/drawingml/2006/main">
               <a:ext uri="{FF2B5EF4-FFF2-40B4-BE49-F238E27FC236}">
-                <a16:creationId xmlns:a16="http://schemas.microsoft.com/office/drawing/2014/main" id="{88D851D8-68DF-4EE2-AC62-76F983F5800C}"/>
+                <a16:creationId xmlns:a16="http://schemas.microsoft.com/office/drawing/2014/main" id="{50833CA1-45A0-4AA9-B215-FE7A9A540485}"/>
               </a:ext>
             </a:extLst>
           </p:cNvPr>
@@ -5081,7 +5086,7 @@
           <p:cNvPr id="2" name="Left column">
             <a:extLst xmlns:a="http://schemas.openxmlformats.org/drawingml/2006/main">
               <a:ext uri="{FF2B5EF4-FFF2-40B4-BE49-F238E27FC236}">
-                <a16:creationId xmlns:a16="http://schemas.microsoft.com/office/drawing/2014/main" id="{8E3A6D66-9369-4C58-84F4-8560B59E8139}"/>
+                <a16:creationId xmlns:a16="http://schemas.microsoft.com/office/drawing/2014/main" id="{D92501DC-EA9D-4B8E-A1C4-6FFBCEF55E9A}"/>
               </a:ext>
             </a:extLst>
           </p:cNvPr>
@@ -5348,12 +5353,12 @@
   </p:cSld>
   <p:clrMap bg1="lt1" tx1="dk1" bg2="lt2" tx2="dk2" accent1="accent1" accent2="accent2" accent3="accent3" accent4="accent4" accent5="accent5" accent6="accent6" hlink="hlink" folHlink="folHlink"/>
   <p:sldLayoutIdLst>
-    <p:sldLayoutId xmlns:r="http://schemas.openxmlformats.org/officeDocument/2006/relationships" id="2147483649" r:id="R1dd30c3f689d42d0"/>
-    <p:sldLayoutId xmlns:r="http://schemas.openxmlformats.org/officeDocument/2006/relationships" id="2147483650" r:id="R2cc305f1172d4cbd"/>
-    <p:sldLayoutId xmlns:r="http://schemas.openxmlformats.org/officeDocument/2006/relationships" id="2147483651" r:id="Rfd57267e9f5b4719"/>
-    <p:sldLayoutId xmlns:r="http://schemas.openxmlformats.org/officeDocument/2006/relationships" id="2147483652" r:id="R36c2362580c74212"/>
-    <p:sldLayoutId xmlns:r="http://schemas.openxmlformats.org/officeDocument/2006/relationships" id="2147483653" r:id="Rca3dd13ee4b04884"/>
-    <p:sldLayoutId xmlns:r="http://schemas.openxmlformats.org/officeDocument/2006/relationships" id="2147483654" r:id="R61b6fa0bfb914156"/>
+    <p:sldLayoutId xmlns:r="http://schemas.openxmlformats.org/officeDocument/2006/relationships" id="2147483649" r:id="R983ab538b90e47a4"/>
+    <p:sldLayoutId xmlns:r="http://schemas.openxmlformats.org/officeDocument/2006/relationships" id="2147483650" r:id="R6039d398156549bf"/>
+    <p:sldLayoutId xmlns:r="http://schemas.openxmlformats.org/officeDocument/2006/relationships" id="2147483651" r:id="Rc86e3e5263d6479d"/>
+    <p:sldLayoutId xmlns:r="http://schemas.openxmlformats.org/officeDocument/2006/relationships" id="2147483652" r:id="R5d74c07f07c14e07"/>
+    <p:sldLayoutId xmlns:r="http://schemas.openxmlformats.org/officeDocument/2006/relationships" id="2147483653" r:id="R5379178709a64286"/>
+    <p:sldLayoutId xmlns:r="http://schemas.openxmlformats.org/officeDocument/2006/relationships" id="2147483654" r:id="R464a67b7448c4412"/>
   </p:sldLayoutIdLst>
   <p:txStyles>
     <p:titleStyle>
@@ -5901,10 +5906,10 @@
       </p:grpSpPr>
       <p:sp>
         <p:nvSpPr>
-          <p:cNvPr id="12" name="ACT 0 · 익숙한 사용에서 시작하기">
+          <p:cNvPr id="13" name="ACT 0 · 익숙한 사용에서 시작하기">
             <a:extLst xmlns:a="http://schemas.openxmlformats.org/drawingml/2006/main">
               <a:ext uri="{FF2B5EF4-FFF2-40B4-BE49-F238E27FC236}">
-                <a16:creationId xmlns:a16="http://schemas.microsoft.com/office/drawing/2014/main" id="{3AADC76C-115B-4BE9-9130-6D1CD354E8D6}"/>
+                <a16:creationId xmlns:a16="http://schemas.microsoft.com/office/drawing/2014/main" id="{423AA686-DBD9-41C7-A24E-E6CBA22446E7}"/>
               </a:ext>
             </a:extLst>
           </p:cNvPr>
@@ -6062,7 +6067,7 @@
           <p:cNvPr id="2" name="S01">
             <a:extLst xmlns:a="http://schemas.openxmlformats.org/drawingml/2006/main">
               <a:ext uri="{FF2B5EF4-FFF2-40B4-BE49-F238E27FC236}">
-                <a16:creationId xmlns:a16="http://schemas.microsoft.com/office/drawing/2014/main" id="{7EFAB365-A79A-41EF-97C3-162460057F68}"/>
+                <a16:creationId xmlns:a16="http://schemas.microsoft.com/office/drawing/2014/main" id="{36C2E773-5F02-491B-8F5B-765CDF62C3C0}"/>
               </a:ext>
             </a:extLst>
           </p:cNvPr>
@@ -6220,7 +6225,7 @@
           <p:cNvPr id="3" name="AI에게 지금 무엇을 맡기고 있는가?">
             <a:extLst xmlns:a="http://schemas.openxmlformats.org/drawingml/2006/main">
               <a:ext uri="{FF2B5EF4-FFF2-40B4-BE49-F238E27FC236}">
-                <a16:creationId xmlns:a16="http://schemas.microsoft.com/office/drawing/2014/main" id="{A520DE28-90DE-4EC9-8CCA-141D5D04E140}"/>
+                <a16:creationId xmlns:a16="http://schemas.microsoft.com/office/drawing/2014/main" id="{B68D01BE-08C5-4A1B-80FA-CB9A4D151BAD}"/>
               </a:ext>
             </a:extLst>
           </p:cNvPr>
@@ -6378,7 +6383,7 @@
           <p:cNvPr id="4" name="">
             <a:extLst xmlns:a="http://schemas.openxmlformats.org/drawingml/2006/main">
               <a:ext uri="{FF2B5EF4-FFF2-40B4-BE49-F238E27FC236}">
-                <a16:creationId xmlns:a16="http://schemas.microsoft.com/office/drawing/2014/main" id="{F64453AC-C2C0-42B1-9E36-FEB6956888D7}"/>
+                <a16:creationId xmlns:a16="http://schemas.microsoft.com/office/drawing/2014/main" id="{8381EB6D-FA2C-452E-B5F6-B828C7CE26FE}"/>
               </a:ext>
             </a:extLst>
           </p:cNvPr>
@@ -6389,7 +6394,7 @@
         </p:nvSpPr>
         <p:spPr>
           <a:xfrm xmlns:a="http://schemas.openxmlformats.org/drawingml/2006/main">
-            <a:off x="609600" y="5829300"/>
+            <a:off x="609600" y="5753100"/>
             <a:ext cx="10972800" cy="0"/>
           </a:xfrm>
           <a:prstGeom xmlns:a="http://schemas.openxmlformats.org/drawingml/2006/main" prst="line">
@@ -6409,7 +6414,7 @@
           <p:cNvPr id="5" name="생각해 보기 · 이 과정의 교육 모델">
             <a:extLst xmlns:a="http://schemas.openxmlformats.org/drawingml/2006/main">
               <a:ext uri="{FF2B5EF4-FFF2-40B4-BE49-F238E27FC236}">
-                <a16:creationId xmlns:a16="http://schemas.microsoft.com/office/drawing/2014/main" id="{97F9F82F-E969-4E47-9227-07C2A1E89132}"/>
+                <a16:creationId xmlns:a16="http://schemas.microsoft.com/office/drawing/2014/main" id="{865CF366-89E9-4355-905C-7FBB3C4D7799}"/>
               </a:ext>
             </a:extLst>
           </p:cNvPr>
@@ -6420,8 +6425,8 @@
         </p:nvSpPr>
         <p:spPr>
           <a:xfrm xmlns:a="http://schemas.openxmlformats.org/drawingml/2006/main">
-            <a:off x="609600" y="5915025"/>
-            <a:ext cx="10972800" cy="247650"/>
+            <a:off x="609600" y="5791200"/>
+            <a:ext cx="10972800" cy="228600"/>
           </a:xfrm>
           <a:prstGeom xmlns:a="http://schemas.openxmlformats.org/drawingml/2006/main" prst="rect">
             <a:avLst/>
@@ -6567,7 +6572,7 @@
           <p:cNvPr id="6" name="자신의 경험 하나만 떠올려 보세요. 사용 수준을 평가하는 질문이 아닙니다.">
             <a:extLst xmlns:a="http://schemas.openxmlformats.org/drawingml/2006/main">
               <a:ext uri="{FF2B5EF4-FFF2-40B4-BE49-F238E27FC236}">
-                <a16:creationId xmlns:a16="http://schemas.microsoft.com/office/drawing/2014/main" id="{70DD41FF-7C8B-43EE-8260-C733E67B2FB3}"/>
+                <a16:creationId xmlns:a16="http://schemas.microsoft.com/office/drawing/2014/main" id="{E580CF78-8EA9-40B0-BBD4-C407F64ED4A9}"/>
               </a:ext>
             </a:extLst>
           </p:cNvPr>
@@ -6578,7 +6583,7 @@
         </p:nvSpPr>
         <p:spPr>
           <a:xfrm xmlns:a="http://schemas.openxmlformats.org/drawingml/2006/main">
-            <a:off x="609600" y="6191250"/>
+            <a:off x="609600" y="6019800"/>
             <a:ext cx="10972800" cy="209550"/>
           </a:xfrm>
           <a:prstGeom xmlns:a="http://schemas.openxmlformats.org/drawingml/2006/main" prst="rect">
@@ -6725,7 +6730,7 @@
           <p:cNvPr id="7" name="가장 최근에 AI에게 맡긴 일 하나">
             <a:extLst xmlns:a="http://schemas.openxmlformats.org/drawingml/2006/main">
               <a:ext uri="{FF2B5EF4-FFF2-40B4-BE49-F238E27FC236}">
-                <a16:creationId xmlns:a16="http://schemas.microsoft.com/office/drawing/2014/main" id="{9266A557-7961-4CCD-A200-9AEFD59E0AC3}"/>
+                <a16:creationId xmlns:a16="http://schemas.microsoft.com/office/drawing/2014/main" id="{1380C1FE-E2EA-4197-B2D8-464C9E81F037}"/>
               </a:ext>
             </a:extLst>
           </p:cNvPr>
@@ -6883,7 +6888,7 @@
           <p:cNvPr id="8" name="오류 설명을 들었나요?&#10;관련 코드를 조사하게 했나요?&#10;수정한 결과까지 확인하게 했나요?">
             <a:extLst xmlns:a="http://schemas.openxmlformats.org/drawingml/2006/main">
               <a:ext uri="{FF2B5EF4-FFF2-40B4-BE49-F238E27FC236}">
-                <a16:creationId xmlns:a16="http://schemas.microsoft.com/office/drawing/2014/main" id="{543B52AB-03DC-4BB6-BEA8-91006F8B70EF}"/>
+                <a16:creationId xmlns:a16="http://schemas.microsoft.com/office/drawing/2014/main" id="{CE7747A6-8A70-41EB-84A8-E49BC16F2624}"/>
               </a:ext>
             </a:extLst>
           </p:cNvPr>
@@ -7087,7 +7092,7 @@
           <p:cNvPr id="9" name="">
             <a:extLst xmlns:a="http://schemas.openxmlformats.org/drawingml/2006/main">
               <a:ext uri="{FF2B5EF4-FFF2-40B4-BE49-F238E27FC236}">
-                <a16:creationId xmlns:a16="http://schemas.microsoft.com/office/drawing/2014/main" id="{8321A8C4-A43A-48FE-8727-57446498EE64}"/>
+                <a16:creationId xmlns:a16="http://schemas.microsoft.com/office/drawing/2014/main" id="{D098AD4D-86DE-4634-B106-2DF6AA79A94F}"/>
               </a:ext>
             </a:extLst>
           </p:cNvPr>
@@ -7118,7 +7123,7 @@
           <p:cNvPr id="10" name="질문 · 생성&#10;조사 · 변경&#10;검증 · 작업 방식 개선">
             <a:extLst xmlns:a="http://schemas.openxmlformats.org/drawingml/2006/main">
               <a:ext uri="{FF2B5EF4-FFF2-40B4-BE49-F238E27FC236}">
-                <a16:creationId xmlns:a16="http://schemas.microsoft.com/office/drawing/2014/main" id="{A1108B2E-2085-4886-9D5B-97B571FFB41A}"/>
+                <a16:creationId xmlns:a16="http://schemas.microsoft.com/office/drawing/2014/main" id="{FD8D0C66-CBB4-41C9-81B3-F5AF8E51A9D9}"/>
               </a:ext>
             </a:extLst>
           </p:cNvPr>
@@ -7322,7 +7327,7 @@
           <p:cNvPr id="11" name="익숙한 방식에서 출발해도 괜찮습니다.">
             <a:extLst xmlns:a="http://schemas.openxmlformats.org/drawingml/2006/main">
               <a:ext uri="{FF2B5EF4-FFF2-40B4-BE49-F238E27FC236}">
-                <a16:creationId xmlns:a16="http://schemas.microsoft.com/office/drawing/2014/main" id="{50535BAB-B021-4CB1-A957-C5F98E960515}"/>
+                <a16:creationId xmlns:a16="http://schemas.microsoft.com/office/drawing/2014/main" id="{C2D49ABE-F86F-4EAE-A4E1-756273A8394F}"/>
               </a:ext>
             </a:extLst>
           </p:cNvPr>
@@ -7475,10 +7480,168 @@
           </a:p>
         </p:txBody>
       </p:sp>
+      <p:sp>
+        <p:nvSpPr>
+          <p:cNvPr id="12" name="Legacy module connection">
+            <a:extLst xmlns:a="http://schemas.openxmlformats.org/drawingml/2006/main">
+              <a:ext uri="{FF2B5EF4-FFF2-40B4-BE49-F238E27FC236}">
+                <a16:creationId xmlns:a16="http://schemas.microsoft.com/office/drawing/2014/main" id="{ACF221DB-BBA4-48E9-A2D4-B247B81A5413}"/>
+              </a:ext>
+            </a:extLst>
+          </p:cNvPr>
+          <p:cNvSpPr>
+            <a:spLocks xmlns:a="http://schemas.openxmlformats.org/drawingml/2006/main" noGrp="1"/>
+          </p:cNvSpPr>
+          <p:nvPr/>
+        </p:nvSpPr>
+        <p:spPr>
+          <a:xfrm xmlns:a="http://schemas.openxmlformats.org/drawingml/2006/main">
+            <a:off x="609600" y="6229350"/>
+            <a:ext cx="10972800" cy="171450"/>
+          </a:xfrm>
+          <a:prstGeom xmlns:a="http://schemas.openxmlformats.org/drawingml/2006/main" prst="rect">
+            <a:avLst/>
+          </a:prstGeom>
+          <a:noFill xmlns:a="http://schemas.openxmlformats.org/drawingml/2006/main"/>
+          <a:ln xmlns:a="http://schemas.openxmlformats.org/drawingml/2006/main" w="0">
+            <a:noFill/>
+          </a:ln>
+        </p:spPr>
+        <p:txBody>
+          <a:bodyPr xmlns:a="http://schemas.openxmlformats.org/drawingml/2006/main" wrap="none" lIns="0" tIns="0" rIns="0" bIns="0" anchor="ctr">
+            <a:noAutofit/>
+          </a:bodyPr>
+          <a:lstStyle xmlns:a="http://schemas.openxmlformats.org/drawingml/2006/main">
+            <a:defPPr algn="r">
+              <a:defRPr sz="1200" b="0">
+                <a:solidFill>
+                  <a:srgbClr val="4D5A68"/>
+                </a:solidFill>
+                <a:latin typeface="Malgun Gothic"/>
+                <a:ea typeface="Malgun Gothic"/>
+                <a:cs typeface="Malgun Gothic"/>
+              </a:defRPr>
+            </a:defPPr>
+            <a:lvl1pPr algn="r">
+              <a:defRPr sz="1200" b="0">
+                <a:solidFill>
+                  <a:srgbClr val="4D5A68"/>
+                </a:solidFill>
+                <a:latin typeface="Malgun Gothic"/>
+                <a:ea typeface="Malgun Gothic"/>
+                <a:cs typeface="Malgun Gothic"/>
+              </a:defRPr>
+            </a:lvl1pPr>
+            <a:lvl2pPr algn="r">
+              <a:defRPr sz="1200" b="0">
+                <a:solidFill>
+                  <a:srgbClr val="4D5A68"/>
+                </a:solidFill>
+                <a:latin typeface="Malgun Gothic"/>
+                <a:ea typeface="Malgun Gothic"/>
+                <a:cs typeface="Malgun Gothic"/>
+              </a:defRPr>
+            </a:lvl2pPr>
+            <a:lvl3pPr algn="r">
+              <a:defRPr sz="1200" b="0">
+                <a:solidFill>
+                  <a:srgbClr val="4D5A68"/>
+                </a:solidFill>
+                <a:latin typeface="Malgun Gothic"/>
+                <a:ea typeface="Malgun Gothic"/>
+                <a:cs typeface="Malgun Gothic"/>
+              </a:defRPr>
+            </a:lvl3pPr>
+            <a:lvl4pPr algn="r">
+              <a:defRPr sz="1200" b="0">
+                <a:solidFill>
+                  <a:srgbClr val="4D5A68"/>
+                </a:solidFill>
+                <a:latin typeface="Malgun Gothic"/>
+                <a:ea typeface="Malgun Gothic"/>
+                <a:cs typeface="Malgun Gothic"/>
+              </a:defRPr>
+            </a:lvl4pPr>
+            <a:lvl5pPr algn="r">
+              <a:defRPr sz="1200" b="0">
+                <a:solidFill>
+                  <a:srgbClr val="4D5A68"/>
+                </a:solidFill>
+                <a:latin typeface="Malgun Gothic"/>
+                <a:ea typeface="Malgun Gothic"/>
+                <a:cs typeface="Malgun Gothic"/>
+              </a:defRPr>
+            </a:lvl5pPr>
+            <a:lvl6pPr algn="r">
+              <a:defRPr sz="1200" b="0">
+                <a:solidFill>
+                  <a:srgbClr val="4D5A68"/>
+                </a:solidFill>
+                <a:latin typeface="Malgun Gothic"/>
+                <a:ea typeface="Malgun Gothic"/>
+                <a:cs typeface="Malgun Gothic"/>
+              </a:defRPr>
+            </a:lvl6pPr>
+            <a:lvl7pPr algn="r">
+              <a:defRPr sz="1200" b="0">
+                <a:solidFill>
+                  <a:srgbClr val="4D5A68"/>
+                </a:solidFill>
+                <a:latin typeface="Malgun Gothic"/>
+                <a:ea typeface="Malgun Gothic"/>
+                <a:cs typeface="Malgun Gothic"/>
+              </a:defRPr>
+            </a:lvl7pPr>
+            <a:lvl8pPr algn="r">
+              <a:defRPr sz="1200" b="0">
+                <a:solidFill>
+                  <a:srgbClr val="4D5A68"/>
+                </a:solidFill>
+                <a:latin typeface="Malgun Gothic"/>
+                <a:ea typeface="Malgun Gothic"/>
+                <a:cs typeface="Malgun Gothic"/>
+              </a:defRPr>
+            </a:lvl8pPr>
+            <a:lvl9pPr algn="r">
+              <a:defRPr sz="1200" b="0">
+                <a:solidFill>
+                  <a:srgbClr val="4D5A68"/>
+                </a:solidFill>
+                <a:latin typeface="Malgun Gothic"/>
+                <a:ea typeface="Malgun Gothic"/>
+                <a:cs typeface="Malgun Gothic"/>
+              </a:defRPr>
+            </a:lvl9pPr>
+          </a:lstStyle>
+          <a:p xmlns:a="http://schemas.openxmlformats.org/drawingml/2006/main">
+            <a:pPr algn="r">
+              <a:defRPr sz="1200" b="0">
+                <a:solidFill>
+                  <a:srgbClr val="4D5A68"/>
+                </a:solidFill>
+                <a:latin typeface="Malgun Gothic"/>
+                <a:ea typeface="Malgun Gothic"/>
+                <a:cs typeface="Malgun Gothic"/>
+              </a:defRPr>
+            </a:pPr>
+            <a:r>
+              <a:rPr sz="1200" b="0">
+                <a:solidFill>
+                  <a:srgbClr val="4D5A68"/>
+                </a:solidFill>
+                <a:latin typeface="Malgun Gothic"/>
+                <a:ea typeface="Malgun Gothic"/>
+                <a:cs typeface="Malgun Gothic"/>
+              </a:rPr>
+              <a:t>M 연계 · M1</a:t>
+            </a:r>
+          </a:p>
+        </p:txBody>
+      </p:sp>
     </p:spTree>
     <p:extLst>
       <p:ext uri="{BB962C8B-B14F-4D97-AF65-F5344CB8AC3E}">
-        <p14:creationId xmlns:p14="http://schemas.microsoft.com/office/powerpoint/2010/main" val="1770550529"/>
+        <p14:creationId xmlns:p14="http://schemas.microsoft.com/office/powerpoint/2010/main" val="978292269"/>
       </p:ext>
     </p:extLst>
   </p:cSld>
@@ -7506,10 +7669,10 @@
       </p:grpSpPr>
       <p:sp>
         <p:nvSpPr>
-          <p:cNvPr id="23" name="ACT 0 · 작은 코드 질문">
+          <p:cNvPr id="24" name="ACT 0 · 작은 코드 질문">
             <a:extLst xmlns:a="http://schemas.openxmlformats.org/drawingml/2006/main">
               <a:ext uri="{FF2B5EF4-FFF2-40B4-BE49-F238E27FC236}">
-                <a16:creationId xmlns:a16="http://schemas.microsoft.com/office/drawing/2014/main" id="{BEBA06D7-3F2E-4934-86D1-08852A8C7A7F}"/>
+                <a16:creationId xmlns:a16="http://schemas.microsoft.com/office/drawing/2014/main" id="{48F5711D-2FD0-4138-AEF2-3D1349414598}"/>
               </a:ext>
             </a:extLst>
           </p:cNvPr>
@@ -7667,7 +7830,7 @@
           <p:cNvPr id="2" name="S02">
             <a:extLst xmlns:a="http://schemas.openxmlformats.org/drawingml/2006/main">
               <a:ext uri="{FF2B5EF4-FFF2-40B4-BE49-F238E27FC236}">
-                <a16:creationId xmlns:a16="http://schemas.microsoft.com/office/drawing/2014/main" id="{926FE628-6FAA-47C8-A570-92C8047C4ED9}"/>
+                <a16:creationId xmlns:a16="http://schemas.microsoft.com/office/drawing/2014/main" id="{7B9CC4B7-0DA5-4459-B4FC-8E67C50AF8A1}"/>
               </a:ext>
             </a:extLst>
           </p:cNvPr>
@@ -7825,7 +7988,7 @@
           <p:cNvPr id="3" name="작은 질문에는 Chatbot이 유용하다">
             <a:extLst xmlns:a="http://schemas.openxmlformats.org/drawingml/2006/main">
               <a:ext uri="{FF2B5EF4-FFF2-40B4-BE49-F238E27FC236}">
-                <a16:creationId xmlns:a16="http://schemas.microsoft.com/office/drawing/2014/main" id="{03200FD3-10C7-45C0-8B7C-1553DEEEBAC5}"/>
+                <a16:creationId xmlns:a16="http://schemas.microsoft.com/office/drawing/2014/main" id="{6F48A90C-988A-467D-9F3B-7A6C91FF03B0}"/>
               </a:ext>
             </a:extLst>
           </p:cNvPr>
@@ -7983,7 +8146,7 @@
           <p:cNvPr id="4" name="">
             <a:extLst xmlns:a="http://schemas.openxmlformats.org/drawingml/2006/main">
               <a:ext uri="{FF2B5EF4-FFF2-40B4-BE49-F238E27FC236}">
-                <a16:creationId xmlns:a16="http://schemas.microsoft.com/office/drawing/2014/main" id="{CAF9C324-2E45-469B-A91B-A36186107488}"/>
+                <a16:creationId xmlns:a16="http://schemas.microsoft.com/office/drawing/2014/main" id="{94C95CAA-8812-4B46-B71D-F7EBB9888808}"/>
               </a:ext>
             </a:extLst>
           </p:cNvPr>
@@ -7994,7 +8157,7 @@
         </p:nvSpPr>
         <p:spPr>
           <a:xfrm xmlns:a="http://schemas.openxmlformats.org/drawingml/2006/main">
-            <a:off x="609600" y="5829300"/>
+            <a:off x="609600" y="5753100"/>
             <a:ext cx="10972800" cy="0"/>
           </a:xfrm>
           <a:prstGeom xmlns:a="http://schemas.openxmlformats.org/drawingml/2006/main" prst="line">
@@ -8014,7 +8177,7 @@
           <p:cNvPr id="5" name="교육용 예시 · 실제 ChatGPT 대화 캡처가 아님">
             <a:extLst xmlns:a="http://schemas.openxmlformats.org/drawingml/2006/main">
               <a:ext uri="{FF2B5EF4-FFF2-40B4-BE49-F238E27FC236}">
-                <a16:creationId xmlns:a16="http://schemas.microsoft.com/office/drawing/2014/main" id="{EE4C7340-1CDD-4F5E-860C-408D2E6A74AF}"/>
+                <a16:creationId xmlns:a16="http://schemas.microsoft.com/office/drawing/2014/main" id="{B1DE9206-D581-463A-9175-04EB878496D0}"/>
               </a:ext>
             </a:extLst>
           </p:cNvPr>
@@ -8025,8 +8188,8 @@
         </p:nvSpPr>
         <p:spPr>
           <a:xfrm xmlns:a="http://schemas.openxmlformats.org/drawingml/2006/main">
-            <a:off x="609600" y="5915025"/>
-            <a:ext cx="10972800" cy="247650"/>
+            <a:off x="609600" y="5791200"/>
+            <a:ext cx="10972800" cy="228600"/>
           </a:xfrm>
           <a:prstGeom xmlns:a="http://schemas.openxmlformats.org/drawingml/2006/main" prst="rect">
             <a:avLst/>
@@ -8172,7 +8335,7 @@
           <p:cNvPr id="6" name="일반적인 질문 흐름을 설명하며 특정 제품의 정확도나 우월성을 주장하지 않습니다.">
             <a:extLst xmlns:a="http://schemas.openxmlformats.org/drawingml/2006/main">
               <a:ext uri="{FF2B5EF4-FFF2-40B4-BE49-F238E27FC236}">
-                <a16:creationId xmlns:a16="http://schemas.microsoft.com/office/drawing/2014/main" id="{8D9F09A3-5424-4E24-8688-596EFD79E272}"/>
+                <a16:creationId xmlns:a16="http://schemas.microsoft.com/office/drawing/2014/main" id="{4F498621-A3C5-4926-8CF3-0BECE48994AA}"/>
               </a:ext>
             </a:extLst>
           </p:cNvPr>
@@ -8183,7 +8346,7 @@
         </p:nvSpPr>
         <p:spPr>
           <a:xfrm xmlns:a="http://schemas.openxmlformats.org/drawingml/2006/main">
-            <a:off x="609600" y="6191250"/>
+            <a:off x="609600" y="6019800"/>
             <a:ext cx="10972800" cy="209550"/>
           </a:xfrm>
           <a:prstGeom xmlns:a="http://schemas.openxmlformats.org/drawingml/2006/main" prst="rect">
@@ -8330,7 +8493,7 @@
           <p:cNvPr id="7" name="“이 코드에서 무엇이 남을까?”">
             <a:extLst xmlns:a="http://schemas.openxmlformats.org/drawingml/2006/main">
               <a:ext uri="{FF2B5EF4-FFF2-40B4-BE49-F238E27FC236}">
-                <a16:creationId xmlns:a16="http://schemas.microsoft.com/office/drawing/2014/main" id="{50701A39-18B7-4115-815A-FDEA1C0AC53C}"/>
+                <a16:creationId xmlns:a16="http://schemas.microsoft.com/office/drawing/2014/main" id="{8412B5FC-C5A6-4FD7-BA85-B9F45F264296}"/>
               </a:ext>
             </a:extLst>
           </p:cNvPr>
@@ -8488,7 +8651,7 @@
           <p:cNvPr id="8" name="">
             <a:extLst xmlns:a="http://schemas.openxmlformats.org/drawingml/2006/main">
               <a:ext uri="{FF2B5EF4-FFF2-40B4-BE49-F238E27FC236}">
-                <a16:creationId xmlns:a16="http://schemas.microsoft.com/office/drawing/2014/main" id="{C9D9B71C-836D-40B9-A45B-F0967E73A7F1}"/>
+                <a16:creationId xmlns:a16="http://schemas.microsoft.com/office/drawing/2014/main" id="{8ED2E236-82DF-4C07-92A4-E5534DD00D8E}"/>
               </a:ext>
             </a:extLst>
           </p:cNvPr>
@@ -8519,7 +8682,7 @@
           <p:cNvPr id="9" name="row = [1, 2, 3, 4]&#10;row[1:3]">
             <a:extLst xmlns:a="http://schemas.openxmlformats.org/drawingml/2006/main">
               <a:ext uri="{FF2B5EF4-FFF2-40B4-BE49-F238E27FC236}">
-                <a16:creationId xmlns:a16="http://schemas.microsoft.com/office/drawing/2014/main" id="{A4BC6C82-CD1A-4DD7-944A-726DDAA80989}"/>
+                <a16:creationId xmlns:a16="http://schemas.microsoft.com/office/drawing/2014/main" id="{DFDFD2D4-6B5B-47CD-BDF3-0EA4A643259C}"/>
               </a:ext>
             </a:extLst>
           </p:cNvPr>
@@ -8700,7 +8863,7 @@
           <p:cNvPr id="10" name="">
             <a:extLst xmlns:a="http://schemas.openxmlformats.org/drawingml/2006/main">
               <a:ext uri="{FF2B5EF4-FFF2-40B4-BE49-F238E27FC236}">
-                <a16:creationId xmlns:a16="http://schemas.microsoft.com/office/drawing/2014/main" id="{222CCAD9-39F6-48D7-AA4F-4FE617CBE691}"/>
+                <a16:creationId xmlns:a16="http://schemas.microsoft.com/office/drawing/2014/main" id="{9AE35211-C085-49F3-854F-7735CFEA969C}"/>
               </a:ext>
             </a:extLst>
           </p:cNvPr>
@@ -8730,7 +8893,7 @@
           <p:cNvPr id="11" name="[2, 3]">
             <a:extLst xmlns:a="http://schemas.openxmlformats.org/drawingml/2006/main">
               <a:ext uri="{FF2B5EF4-FFF2-40B4-BE49-F238E27FC236}">
-                <a16:creationId xmlns:a16="http://schemas.microsoft.com/office/drawing/2014/main" id="{391FFD42-398B-4CFE-9C2A-12226C9E0A15}"/>
+                <a16:creationId xmlns:a16="http://schemas.microsoft.com/office/drawing/2014/main" id="{F6EEF706-461C-4B9E-A9F4-7C99DA04AC0E}"/>
               </a:ext>
             </a:extLst>
           </p:cNvPr>
@@ -8888,7 +9051,7 @@
           <p:cNvPr id="12" name="끝 index 3은 포함하지 않습니다.">
             <a:extLst xmlns:a="http://schemas.openxmlformats.org/drawingml/2006/main">
               <a:ext uri="{FF2B5EF4-FFF2-40B4-BE49-F238E27FC236}">
-                <a16:creationId xmlns:a16="http://schemas.microsoft.com/office/drawing/2014/main" id="{8507E433-182A-4CDE-90E7-EF5F1963B649}"/>
+                <a16:creationId xmlns:a16="http://schemas.microsoft.com/office/drawing/2014/main" id="{EA67853B-F7FD-483B-8146-96B350607127}"/>
               </a:ext>
             </a:extLst>
           </p:cNvPr>
@@ -9046,7 +9209,7 @@
           <p:cNvPr id="13" name="코드·오류">
             <a:extLst xmlns:a="http://schemas.openxmlformats.org/drawingml/2006/main">
               <a:ext uri="{FF2B5EF4-FFF2-40B4-BE49-F238E27FC236}">
-                <a16:creationId xmlns:a16="http://schemas.microsoft.com/office/drawing/2014/main" id="{F88AB9CB-B7FC-4A71-9422-B85DE9D96010}"/>
+                <a16:creationId xmlns:a16="http://schemas.microsoft.com/office/drawing/2014/main" id="{0C47247C-46F5-4BD9-8F82-8358A19FF22A}"/>
               </a:ext>
             </a:extLst>
           </p:cNvPr>
@@ -9204,7 +9367,7 @@
           <p:cNvPr id="14" name="">
             <a:extLst xmlns:a="http://schemas.openxmlformats.org/drawingml/2006/main">
               <a:ext uri="{FF2B5EF4-FFF2-40B4-BE49-F238E27FC236}">
-                <a16:creationId xmlns:a16="http://schemas.microsoft.com/office/drawing/2014/main" id="{6105A4C2-4977-4DE7-BEF9-FD86090CD94D}"/>
+                <a16:creationId xmlns:a16="http://schemas.microsoft.com/office/drawing/2014/main" id="{148B2BD5-103A-4F10-BE75-FB6CC1FEC700}"/>
               </a:ext>
             </a:extLst>
           </p:cNvPr>
@@ -9234,7 +9397,7 @@
           <p:cNvPr id="15" name="복사">
             <a:extLst xmlns:a="http://schemas.openxmlformats.org/drawingml/2006/main">
               <a:ext uri="{FF2B5EF4-FFF2-40B4-BE49-F238E27FC236}">
-                <a16:creationId xmlns:a16="http://schemas.microsoft.com/office/drawing/2014/main" id="{3C19579A-F62E-47CD-8A93-180E78509BB9}"/>
+                <a16:creationId xmlns:a16="http://schemas.microsoft.com/office/drawing/2014/main" id="{D997F5EB-CBFD-4991-92D4-F823FCA8AD9F}"/>
               </a:ext>
             </a:extLst>
           </p:cNvPr>
@@ -9392,7 +9555,7 @@
           <p:cNvPr id="16" name="">
             <a:extLst xmlns:a="http://schemas.openxmlformats.org/drawingml/2006/main">
               <a:ext uri="{FF2B5EF4-FFF2-40B4-BE49-F238E27FC236}">
-                <a16:creationId xmlns:a16="http://schemas.microsoft.com/office/drawing/2014/main" id="{210B8E70-A9BA-4F71-B2B9-0CB8E6364F08}"/>
+                <a16:creationId xmlns:a16="http://schemas.microsoft.com/office/drawing/2014/main" id="{193619EE-9D1A-4C7F-BC85-99549E2242EE}"/>
               </a:ext>
             </a:extLst>
           </p:cNvPr>
@@ -9422,7 +9585,7 @@
           <p:cNvPr id="17" name="질문">
             <a:extLst xmlns:a="http://schemas.openxmlformats.org/drawingml/2006/main">
               <a:ext uri="{FF2B5EF4-FFF2-40B4-BE49-F238E27FC236}">
-                <a16:creationId xmlns:a16="http://schemas.microsoft.com/office/drawing/2014/main" id="{3233FB2F-01E3-4B4A-8EED-C46CB86E69DF}"/>
+                <a16:creationId xmlns:a16="http://schemas.microsoft.com/office/drawing/2014/main" id="{3DB436B3-DA88-4BA6-B342-54ACB0A19BB6}"/>
               </a:ext>
             </a:extLst>
           </p:cNvPr>
@@ -9580,7 +9743,7 @@
           <p:cNvPr id="18" name="">
             <a:extLst xmlns:a="http://schemas.openxmlformats.org/drawingml/2006/main">
               <a:ext uri="{FF2B5EF4-FFF2-40B4-BE49-F238E27FC236}">
-                <a16:creationId xmlns:a16="http://schemas.microsoft.com/office/drawing/2014/main" id="{278BC83E-DFD6-4EC1-8287-61E774DB8913}"/>
+                <a16:creationId xmlns:a16="http://schemas.microsoft.com/office/drawing/2014/main" id="{2CA16A93-EBDF-405D-B09E-9A843122327F}"/>
               </a:ext>
             </a:extLst>
           </p:cNvPr>
@@ -9610,7 +9773,7 @@
           <p:cNvPr id="19" name="답 확인">
             <a:extLst xmlns:a="http://schemas.openxmlformats.org/drawingml/2006/main">
               <a:ext uri="{FF2B5EF4-FFF2-40B4-BE49-F238E27FC236}">
-                <a16:creationId xmlns:a16="http://schemas.microsoft.com/office/drawing/2014/main" id="{2305953F-269F-4778-8242-37A9DE8B2C52}"/>
+                <a16:creationId xmlns:a16="http://schemas.microsoft.com/office/drawing/2014/main" id="{45D76A0E-D43A-4C4B-8110-81E87FD9F8FC}"/>
               </a:ext>
             </a:extLst>
           </p:cNvPr>
@@ -9768,7 +9931,7 @@
           <p:cNvPr id="20" name="">
             <a:extLst xmlns:a="http://schemas.openxmlformats.org/drawingml/2006/main">
               <a:ext uri="{FF2B5EF4-FFF2-40B4-BE49-F238E27FC236}">
-                <a16:creationId xmlns:a16="http://schemas.microsoft.com/office/drawing/2014/main" id="{B8FE87B7-1412-4677-80C0-DEAEA6D2A43A}"/>
+                <a16:creationId xmlns:a16="http://schemas.microsoft.com/office/drawing/2014/main" id="{109C37F5-9A6E-4675-A3A2-03D8366576BA}"/>
               </a:ext>
             </a:extLst>
           </p:cNvPr>
@@ -9798,7 +9961,7 @@
           <p:cNvPr id="21" name="IDE로 복귀">
             <a:extLst xmlns:a="http://schemas.openxmlformats.org/drawingml/2006/main">
               <a:ext uri="{FF2B5EF4-FFF2-40B4-BE49-F238E27FC236}">
-                <a16:creationId xmlns:a16="http://schemas.microsoft.com/office/drawing/2014/main" id="{537E04CE-794C-4C03-8D42-915BF356DB9B}"/>
+                <a16:creationId xmlns:a16="http://schemas.microsoft.com/office/drawing/2014/main" id="{3B0D947A-6BAD-4B29-A332-28FBF538CEF0}"/>
               </a:ext>
             </a:extLst>
           </p:cNvPr>
@@ -9956,7 +10119,7 @@
           <p:cNvPr id="22" name="">
             <a:extLst xmlns:a="http://schemas.openxmlformats.org/drawingml/2006/main">
               <a:ext uri="{FF2B5EF4-FFF2-40B4-BE49-F238E27FC236}">
-                <a16:creationId xmlns:a16="http://schemas.microsoft.com/office/drawing/2014/main" id="{1D0BEBEC-B96D-4BF4-85C4-691D1952DAF4}"/>
+                <a16:creationId xmlns:a16="http://schemas.microsoft.com/office/drawing/2014/main" id="{73FEA8B4-C03C-45FC-A864-02A0E1476C41}"/>
               </a:ext>
             </a:extLst>
           </p:cNvPr>
@@ -9982,10 +10145,168 @@
           </a:ln>
         </p:spPr>
       </p:sp>
+      <p:sp>
+        <p:nvSpPr>
+          <p:cNvPr id="23" name="Legacy module connection">
+            <a:extLst xmlns:a="http://schemas.openxmlformats.org/drawingml/2006/main">
+              <a:ext uri="{FF2B5EF4-FFF2-40B4-BE49-F238E27FC236}">
+                <a16:creationId xmlns:a16="http://schemas.microsoft.com/office/drawing/2014/main" id="{9A080492-351E-4EBB-B651-07ABA853672C}"/>
+              </a:ext>
+            </a:extLst>
+          </p:cNvPr>
+          <p:cNvSpPr>
+            <a:spLocks xmlns:a="http://schemas.openxmlformats.org/drawingml/2006/main" noGrp="1"/>
+          </p:cNvSpPr>
+          <p:nvPr/>
+        </p:nvSpPr>
+        <p:spPr>
+          <a:xfrm xmlns:a="http://schemas.openxmlformats.org/drawingml/2006/main">
+            <a:off x="609600" y="6229350"/>
+            <a:ext cx="10972800" cy="171450"/>
+          </a:xfrm>
+          <a:prstGeom xmlns:a="http://schemas.openxmlformats.org/drawingml/2006/main" prst="rect">
+            <a:avLst/>
+          </a:prstGeom>
+          <a:noFill xmlns:a="http://schemas.openxmlformats.org/drawingml/2006/main"/>
+          <a:ln xmlns:a="http://schemas.openxmlformats.org/drawingml/2006/main" w="0">
+            <a:noFill/>
+          </a:ln>
+        </p:spPr>
+        <p:txBody>
+          <a:bodyPr xmlns:a="http://schemas.openxmlformats.org/drawingml/2006/main" wrap="none" lIns="0" tIns="0" rIns="0" bIns="0" anchor="ctr">
+            <a:noAutofit/>
+          </a:bodyPr>
+          <a:lstStyle xmlns:a="http://schemas.openxmlformats.org/drawingml/2006/main">
+            <a:defPPr algn="r">
+              <a:defRPr sz="1200" b="0">
+                <a:solidFill>
+                  <a:srgbClr val="4D5A68"/>
+                </a:solidFill>
+                <a:latin typeface="Malgun Gothic"/>
+                <a:ea typeface="Malgun Gothic"/>
+                <a:cs typeface="Malgun Gothic"/>
+              </a:defRPr>
+            </a:defPPr>
+            <a:lvl1pPr algn="r">
+              <a:defRPr sz="1200" b="0">
+                <a:solidFill>
+                  <a:srgbClr val="4D5A68"/>
+                </a:solidFill>
+                <a:latin typeface="Malgun Gothic"/>
+                <a:ea typeface="Malgun Gothic"/>
+                <a:cs typeface="Malgun Gothic"/>
+              </a:defRPr>
+            </a:lvl1pPr>
+            <a:lvl2pPr algn="r">
+              <a:defRPr sz="1200" b="0">
+                <a:solidFill>
+                  <a:srgbClr val="4D5A68"/>
+                </a:solidFill>
+                <a:latin typeface="Malgun Gothic"/>
+                <a:ea typeface="Malgun Gothic"/>
+                <a:cs typeface="Malgun Gothic"/>
+              </a:defRPr>
+            </a:lvl2pPr>
+            <a:lvl3pPr algn="r">
+              <a:defRPr sz="1200" b="0">
+                <a:solidFill>
+                  <a:srgbClr val="4D5A68"/>
+                </a:solidFill>
+                <a:latin typeface="Malgun Gothic"/>
+                <a:ea typeface="Malgun Gothic"/>
+                <a:cs typeface="Malgun Gothic"/>
+              </a:defRPr>
+            </a:lvl3pPr>
+            <a:lvl4pPr algn="r">
+              <a:defRPr sz="1200" b="0">
+                <a:solidFill>
+                  <a:srgbClr val="4D5A68"/>
+                </a:solidFill>
+                <a:latin typeface="Malgun Gothic"/>
+                <a:ea typeface="Malgun Gothic"/>
+                <a:cs typeface="Malgun Gothic"/>
+              </a:defRPr>
+            </a:lvl4pPr>
+            <a:lvl5pPr algn="r">
+              <a:defRPr sz="1200" b="0">
+                <a:solidFill>
+                  <a:srgbClr val="4D5A68"/>
+                </a:solidFill>
+                <a:latin typeface="Malgun Gothic"/>
+                <a:ea typeface="Malgun Gothic"/>
+                <a:cs typeface="Malgun Gothic"/>
+              </a:defRPr>
+            </a:lvl5pPr>
+            <a:lvl6pPr algn="r">
+              <a:defRPr sz="1200" b="0">
+                <a:solidFill>
+                  <a:srgbClr val="4D5A68"/>
+                </a:solidFill>
+                <a:latin typeface="Malgun Gothic"/>
+                <a:ea typeface="Malgun Gothic"/>
+                <a:cs typeface="Malgun Gothic"/>
+              </a:defRPr>
+            </a:lvl6pPr>
+            <a:lvl7pPr algn="r">
+              <a:defRPr sz="1200" b="0">
+                <a:solidFill>
+                  <a:srgbClr val="4D5A68"/>
+                </a:solidFill>
+                <a:latin typeface="Malgun Gothic"/>
+                <a:ea typeface="Malgun Gothic"/>
+                <a:cs typeface="Malgun Gothic"/>
+              </a:defRPr>
+            </a:lvl7pPr>
+            <a:lvl8pPr algn="r">
+              <a:defRPr sz="1200" b="0">
+                <a:solidFill>
+                  <a:srgbClr val="4D5A68"/>
+                </a:solidFill>
+                <a:latin typeface="Malgun Gothic"/>
+                <a:ea typeface="Malgun Gothic"/>
+                <a:cs typeface="Malgun Gothic"/>
+              </a:defRPr>
+            </a:lvl8pPr>
+            <a:lvl9pPr algn="r">
+              <a:defRPr sz="1200" b="0">
+                <a:solidFill>
+                  <a:srgbClr val="4D5A68"/>
+                </a:solidFill>
+                <a:latin typeface="Malgun Gothic"/>
+                <a:ea typeface="Malgun Gothic"/>
+                <a:cs typeface="Malgun Gothic"/>
+              </a:defRPr>
+            </a:lvl9pPr>
+          </a:lstStyle>
+          <a:p xmlns:a="http://schemas.openxmlformats.org/drawingml/2006/main">
+            <a:pPr algn="r">
+              <a:defRPr sz="1200" b="0">
+                <a:solidFill>
+                  <a:srgbClr val="4D5A68"/>
+                </a:solidFill>
+                <a:latin typeface="Malgun Gothic"/>
+                <a:ea typeface="Malgun Gothic"/>
+                <a:cs typeface="Malgun Gothic"/>
+              </a:defRPr>
+            </a:pPr>
+            <a:r>
+              <a:rPr sz="1200" b="0">
+                <a:solidFill>
+                  <a:srgbClr val="4D5A68"/>
+                </a:solidFill>
+                <a:latin typeface="Malgun Gothic"/>
+                <a:ea typeface="Malgun Gothic"/>
+                <a:cs typeface="Malgun Gothic"/>
+              </a:rPr>
+              <a:t>M 연계 · M1</a:t>
+            </a:r>
+          </a:p>
+        </p:txBody>
+      </p:sp>
     </p:spTree>
     <p:extLst>
       <p:ext uri="{BB962C8B-B14F-4D97-AF65-F5344CB8AC3E}">
-        <p14:creationId xmlns:p14="http://schemas.microsoft.com/office/powerpoint/2010/main" val="1781120492"/>
+        <p14:creationId xmlns:p14="http://schemas.microsoft.com/office/powerpoint/2010/main" val="1165911941"/>
       </p:ext>
     </p:extLst>
   </p:cSld>
@@ -10013,10 +10334,10 @@
       </p:grpSpPr>
       <p:sp>
         <p:nvSpPr>
-          <p:cNvPr id="16" name="ACT 0 · 여러 파일을 가로지르는 질문">
+          <p:cNvPr id="17" name="ACT 0 · 여러 파일을 가로지르는 질문">
             <a:extLst xmlns:a="http://schemas.openxmlformats.org/drawingml/2006/main">
               <a:ext uri="{FF2B5EF4-FFF2-40B4-BE49-F238E27FC236}">
-                <a16:creationId xmlns:a16="http://schemas.microsoft.com/office/drawing/2014/main" id="{E32EC5B5-CF0B-4E9C-9FF0-08D3CB3ED87E}"/>
+                <a16:creationId xmlns:a16="http://schemas.microsoft.com/office/drawing/2014/main" id="{D60ACA65-37E9-4BB9-8D88-37043D02511C}"/>
               </a:ext>
             </a:extLst>
           </p:cNvPr>
@@ -10174,7 +10495,7 @@
           <p:cNvPr id="2" name="S03">
             <a:extLst xmlns:a="http://schemas.openxmlformats.org/drawingml/2006/main">
               <a:ext uri="{FF2B5EF4-FFF2-40B4-BE49-F238E27FC236}">
-                <a16:creationId xmlns:a16="http://schemas.microsoft.com/office/drawing/2014/main" id="{1D02F321-B9EF-4624-BC85-F4C866873794}"/>
+                <a16:creationId xmlns:a16="http://schemas.microsoft.com/office/drawing/2014/main" id="{478AB67B-4CB2-4E0F-92CF-77761476BD5C}"/>
               </a:ext>
             </a:extLst>
           </p:cNvPr>
@@ -10332,7 +10653,7 @@
           <p:cNvPr id="3" name="질문이 커지면 Context를 모으는 일이 생긴다">
             <a:extLst xmlns:a="http://schemas.openxmlformats.org/drawingml/2006/main">
               <a:ext uri="{FF2B5EF4-FFF2-40B4-BE49-F238E27FC236}">
-                <a16:creationId xmlns:a16="http://schemas.microsoft.com/office/drawing/2014/main" id="{DA9FE124-4AA4-4DD8-9D1D-6BBA2733E8C2}"/>
+                <a16:creationId xmlns:a16="http://schemas.microsoft.com/office/drawing/2014/main" id="{6D2023FC-90B4-457F-84C6-44D6FD606CFD}"/>
               </a:ext>
             </a:extLst>
           </p:cNvPr>
@@ -10490,7 +10811,7 @@
           <p:cNvPr id="4" name="">
             <a:extLst xmlns:a="http://schemas.openxmlformats.org/drawingml/2006/main">
               <a:ext uri="{FF2B5EF4-FFF2-40B4-BE49-F238E27FC236}">
-                <a16:creationId xmlns:a16="http://schemas.microsoft.com/office/drawing/2014/main" id="{9C059CC0-A021-4F04-8FAC-A8A186D21797}"/>
+                <a16:creationId xmlns:a16="http://schemas.microsoft.com/office/drawing/2014/main" id="{3E32B17B-545C-49AC-8657-38C67E57A5ED}"/>
               </a:ext>
             </a:extLst>
           </p:cNvPr>
@@ -10501,7 +10822,7 @@
         </p:nvSpPr>
         <p:spPr>
           <a:xfrm xmlns:a="http://schemas.openxmlformats.org/drawingml/2006/main">
-            <a:off x="609600" y="5829300"/>
+            <a:off x="609600" y="5753100"/>
             <a:ext cx="10972800" cy="0"/>
           </a:xfrm>
           <a:prstGeom xmlns:a="http://schemas.openxmlformats.org/drawingml/2006/main" prst="line">
@@ -10521,7 +10842,7 @@
           <p:cNvPr id="5" name="개념 사례 · 사람이 Context를 모으는 장면 · AI 생성 설명용 삽화">
             <a:extLst xmlns:a="http://schemas.openxmlformats.org/drawingml/2006/main">
               <a:ext uri="{FF2B5EF4-FFF2-40B4-BE49-F238E27FC236}">
-                <a16:creationId xmlns:a16="http://schemas.microsoft.com/office/drawing/2014/main" id="{4BF4598B-2D02-4CBF-BBBB-89E9502D0ED1}"/>
+                <a16:creationId xmlns:a16="http://schemas.microsoft.com/office/drawing/2014/main" id="{62797A69-9E0E-4584-BCE9-B95978D5602B}"/>
               </a:ext>
             </a:extLst>
           </p:cNvPr>
@@ -10532,8 +10853,8 @@
         </p:nvSpPr>
         <p:spPr>
           <a:xfrm xmlns:a="http://schemas.openxmlformats.org/drawingml/2006/main">
-            <a:off x="609600" y="5915025"/>
-            <a:ext cx="10972800" cy="247650"/>
+            <a:off x="609600" y="5791200"/>
+            <a:ext cx="10972800" cy="228600"/>
           </a:xfrm>
           <a:prstGeom xmlns:a="http://schemas.openxmlformats.org/drawingml/2006/main" prst="rect">
             <a:avLst/>
@@ -10679,7 +11000,7 @@
           <p:cNvPr id="6" name="특정 Trial에서 실제로 발생한 비용이나 실패를 뜻하지 않습니다.">
             <a:extLst xmlns:a="http://schemas.openxmlformats.org/drawingml/2006/main">
               <a:ext uri="{FF2B5EF4-FFF2-40B4-BE49-F238E27FC236}">
-                <a16:creationId xmlns:a16="http://schemas.microsoft.com/office/drawing/2014/main" id="{DD846C2A-6C66-4ED5-B225-69533FEAFC98}"/>
+                <a16:creationId xmlns:a16="http://schemas.microsoft.com/office/drawing/2014/main" id="{B5C6DC98-DDA1-4A44-B847-47C4FFA54C5A}"/>
               </a:ext>
             </a:extLst>
           </p:cNvPr>
@@ -10690,8 +11011,8 @@
         </p:nvSpPr>
         <p:spPr>
           <a:xfrm xmlns:a="http://schemas.openxmlformats.org/drawingml/2006/main">
-            <a:off x="609600" y="6191250"/>
-            <a:ext cx="10972800" cy="285750"/>
+            <a:off x="609600" y="6019800"/>
+            <a:ext cx="10972800" cy="209550"/>
           </a:xfrm>
           <a:prstGeom xmlns:a="http://schemas.openxmlformats.org/drawingml/2006/main" prst="rect">
             <a:avLst/>
@@ -10837,7 +11158,7 @@
           <p:cNvPr id="7" name="“CLI 결과가 기대와 다른데, 어디서부터 봐야 할까?”">
             <a:extLst xmlns:a="http://schemas.openxmlformats.org/drawingml/2006/main">
               <a:ext uri="{FF2B5EF4-FFF2-40B4-BE49-F238E27FC236}">
-                <a16:creationId xmlns:a16="http://schemas.microsoft.com/office/drawing/2014/main" id="{17B68042-9365-493C-96BE-D75113A01E06}"/>
+                <a16:creationId xmlns:a16="http://schemas.microsoft.com/office/drawing/2014/main" id="{2FC0AF27-7E96-42C5-8755-A4C6CD25CCEC}"/>
               </a:ext>
             </a:extLst>
           </p:cNvPr>
@@ -10995,7 +11316,7 @@
           <p:cNvPr id="8" name="">
             <a:extLst xmlns:a="http://schemas.openxmlformats.org/drawingml/2006/main">
               <a:ext uri="{FF2B5EF4-FFF2-40B4-BE49-F238E27FC236}">
-                <a16:creationId xmlns:a16="http://schemas.microsoft.com/office/drawing/2014/main" id="{90F3B1DB-7BF8-472E-957A-BBC35327AFF1}"/>
+                <a16:creationId xmlns:a16="http://schemas.microsoft.com/office/drawing/2014/main" id="{7F3BE60F-8C6E-4A23-944D-AD4384782122}"/>
               </a:ext>
             </a:extLst>
           </p:cNvPr>
@@ -11005,7 +11326,7 @@
           <p:nvPr/>
         </p:nvPicPr>
         <p:blipFill>
-          <a:blip xmlns:r="http://schemas.openxmlformats.org/officeDocument/2006/relationships" xmlns:a="http://schemas.openxmlformats.org/drawingml/2006/main" r:embed="R34c67a750acc4c48"/>
+          <a:blip xmlns:r="http://schemas.openxmlformats.org/officeDocument/2006/relationships" xmlns:a="http://schemas.openxmlformats.org/drawingml/2006/main" r:embed="R4aaaad75f8ef4961"/>
           <a:stretch xmlns:a="http://schemas.openxmlformats.org/drawingml/2006/main"/>
         </p:blipFill>
         <p:spPr>
@@ -11023,7 +11344,7 @@
           <p:cNvPr id="9" name="구현 · 호출 경로">
             <a:extLst xmlns:a="http://schemas.openxmlformats.org/drawingml/2006/main">
               <a:ext uri="{FF2B5EF4-FFF2-40B4-BE49-F238E27FC236}">
-                <a16:creationId xmlns:a16="http://schemas.microsoft.com/office/drawing/2014/main" id="{98092A52-5B30-4E66-B1FC-0D1353EB61BD}"/>
+                <a16:creationId xmlns:a16="http://schemas.microsoft.com/office/drawing/2014/main" id="{C5414102-2071-4FAD-9A4A-D907FD589DBC}"/>
               </a:ext>
             </a:extLst>
           </p:cNvPr>
@@ -11181,7 +11502,7 @@
           <p:cNvPr id="10" name="CLI → 처리 흐름 → 연산">
             <a:extLst xmlns:a="http://schemas.openxmlformats.org/drawingml/2006/main">
               <a:ext uri="{FF2B5EF4-FFF2-40B4-BE49-F238E27FC236}">
-                <a16:creationId xmlns:a16="http://schemas.microsoft.com/office/drawing/2014/main" id="{E1E24024-4084-43A0-889F-C73414A8559C}"/>
+                <a16:creationId xmlns:a16="http://schemas.microsoft.com/office/drawing/2014/main" id="{072C5725-8FE7-4BC9-A43B-E88FA905B48E}"/>
               </a:ext>
             </a:extLst>
           </p:cNvPr>
@@ -11339,7 +11660,7 @@
           <p:cNvPr id="11" name="테스트">
             <a:extLst xmlns:a="http://schemas.openxmlformats.org/drawingml/2006/main">
               <a:ext uri="{FF2B5EF4-FFF2-40B4-BE49-F238E27FC236}">
-                <a16:creationId xmlns:a16="http://schemas.microsoft.com/office/drawing/2014/main" id="{DD485D76-4658-4F44-824F-FDCB8506B220}"/>
+                <a16:creationId xmlns:a16="http://schemas.microsoft.com/office/drawing/2014/main" id="{D8A81AEB-0C46-4544-83CE-011CA625B266}"/>
               </a:ext>
             </a:extLst>
           </p:cNvPr>
@@ -11497,7 +11818,7 @@
           <p:cNvPr id="12" name="어떤 조건에서 실패했나?">
             <a:extLst xmlns:a="http://schemas.openxmlformats.org/drawingml/2006/main">
               <a:ext uri="{FF2B5EF4-FFF2-40B4-BE49-F238E27FC236}">
-                <a16:creationId xmlns:a16="http://schemas.microsoft.com/office/drawing/2014/main" id="{10BC8032-4C71-4614-9ECE-2BCC52EAE42C}"/>
+                <a16:creationId xmlns:a16="http://schemas.microsoft.com/office/drawing/2014/main" id="{1B0BE875-5B90-4221-A120-FB1312EA07C4}"/>
               </a:ext>
             </a:extLst>
           </p:cNvPr>
@@ -11655,7 +11976,7 @@
           <p:cNvPr id="13" name="계약">
             <a:extLst xmlns:a="http://schemas.openxmlformats.org/drawingml/2006/main">
               <a:ext uri="{FF2B5EF4-FFF2-40B4-BE49-F238E27FC236}">
-                <a16:creationId xmlns:a16="http://schemas.microsoft.com/office/drawing/2014/main" id="{0C29D29D-97C8-4E47-B063-87429B734E45}"/>
+                <a16:creationId xmlns:a16="http://schemas.microsoft.com/office/drawing/2014/main" id="{4A229DCD-FA9D-4ACE-A537-D79290D45B1A}"/>
               </a:ext>
             </a:extLst>
           </p:cNvPr>
@@ -11813,7 +12134,7 @@
           <p:cNvPr id="14" name="원래 기대한 동작은?">
             <a:extLst xmlns:a="http://schemas.openxmlformats.org/drawingml/2006/main">
               <a:ext uri="{FF2B5EF4-FFF2-40B4-BE49-F238E27FC236}">
-                <a16:creationId xmlns:a16="http://schemas.microsoft.com/office/drawing/2014/main" id="{A971205B-F7B8-4129-BA44-727F9BC1FDF5}"/>
+                <a16:creationId xmlns:a16="http://schemas.microsoft.com/office/drawing/2014/main" id="{F97A8B2A-E556-4328-95C1-E6121BD2EB1B}"/>
               </a:ext>
             </a:extLst>
           </p:cNvPr>
@@ -11971,7 +12292,7 @@
           <p:cNvPr id="15" name="질문에 옮길 자료는?">
             <a:extLst xmlns:a="http://schemas.openxmlformats.org/drawingml/2006/main">
               <a:ext uri="{FF2B5EF4-FFF2-40B4-BE49-F238E27FC236}">
-                <a16:creationId xmlns:a16="http://schemas.microsoft.com/office/drawing/2014/main" id="{1DCB780E-1F07-4E22-821A-E042F687EB5E}"/>
+                <a16:creationId xmlns:a16="http://schemas.microsoft.com/office/drawing/2014/main" id="{14A748A3-42CA-41E1-8AF9-F853F895FA53}"/>
               </a:ext>
             </a:extLst>
           </p:cNvPr>
@@ -12124,10 +12445,168 @@
           </a:p>
         </p:txBody>
       </p:sp>
+      <p:sp>
+        <p:nvSpPr>
+          <p:cNvPr id="16" name="Legacy module connection">
+            <a:extLst xmlns:a="http://schemas.openxmlformats.org/drawingml/2006/main">
+              <a:ext uri="{FF2B5EF4-FFF2-40B4-BE49-F238E27FC236}">
+                <a16:creationId xmlns:a16="http://schemas.microsoft.com/office/drawing/2014/main" id="{B112591C-0A83-4D07-943E-401763C673B1}"/>
+              </a:ext>
+            </a:extLst>
+          </p:cNvPr>
+          <p:cNvSpPr>
+            <a:spLocks xmlns:a="http://schemas.openxmlformats.org/drawingml/2006/main" noGrp="1"/>
+          </p:cNvSpPr>
+          <p:nvPr/>
+        </p:nvSpPr>
+        <p:spPr>
+          <a:xfrm xmlns:a="http://schemas.openxmlformats.org/drawingml/2006/main">
+            <a:off x="609600" y="6229350"/>
+            <a:ext cx="10972800" cy="171450"/>
+          </a:xfrm>
+          <a:prstGeom xmlns:a="http://schemas.openxmlformats.org/drawingml/2006/main" prst="rect">
+            <a:avLst/>
+          </a:prstGeom>
+          <a:noFill xmlns:a="http://schemas.openxmlformats.org/drawingml/2006/main"/>
+          <a:ln xmlns:a="http://schemas.openxmlformats.org/drawingml/2006/main" w="0">
+            <a:noFill/>
+          </a:ln>
+        </p:spPr>
+        <p:txBody>
+          <a:bodyPr xmlns:a="http://schemas.openxmlformats.org/drawingml/2006/main" wrap="none" lIns="0" tIns="0" rIns="0" bIns="0" anchor="ctr">
+            <a:noAutofit/>
+          </a:bodyPr>
+          <a:lstStyle xmlns:a="http://schemas.openxmlformats.org/drawingml/2006/main">
+            <a:defPPr algn="r">
+              <a:defRPr sz="1200" b="0">
+                <a:solidFill>
+                  <a:srgbClr val="4D5A68"/>
+                </a:solidFill>
+                <a:latin typeface="Malgun Gothic"/>
+                <a:ea typeface="Malgun Gothic"/>
+                <a:cs typeface="Malgun Gothic"/>
+              </a:defRPr>
+            </a:defPPr>
+            <a:lvl1pPr algn="r">
+              <a:defRPr sz="1200" b="0">
+                <a:solidFill>
+                  <a:srgbClr val="4D5A68"/>
+                </a:solidFill>
+                <a:latin typeface="Malgun Gothic"/>
+                <a:ea typeface="Malgun Gothic"/>
+                <a:cs typeface="Malgun Gothic"/>
+              </a:defRPr>
+            </a:lvl1pPr>
+            <a:lvl2pPr algn="r">
+              <a:defRPr sz="1200" b="0">
+                <a:solidFill>
+                  <a:srgbClr val="4D5A68"/>
+                </a:solidFill>
+                <a:latin typeface="Malgun Gothic"/>
+                <a:ea typeface="Malgun Gothic"/>
+                <a:cs typeface="Malgun Gothic"/>
+              </a:defRPr>
+            </a:lvl2pPr>
+            <a:lvl3pPr algn="r">
+              <a:defRPr sz="1200" b="0">
+                <a:solidFill>
+                  <a:srgbClr val="4D5A68"/>
+                </a:solidFill>
+                <a:latin typeface="Malgun Gothic"/>
+                <a:ea typeface="Malgun Gothic"/>
+                <a:cs typeface="Malgun Gothic"/>
+              </a:defRPr>
+            </a:lvl3pPr>
+            <a:lvl4pPr algn="r">
+              <a:defRPr sz="1200" b="0">
+                <a:solidFill>
+                  <a:srgbClr val="4D5A68"/>
+                </a:solidFill>
+                <a:latin typeface="Malgun Gothic"/>
+                <a:ea typeface="Malgun Gothic"/>
+                <a:cs typeface="Malgun Gothic"/>
+              </a:defRPr>
+            </a:lvl4pPr>
+            <a:lvl5pPr algn="r">
+              <a:defRPr sz="1200" b="0">
+                <a:solidFill>
+                  <a:srgbClr val="4D5A68"/>
+                </a:solidFill>
+                <a:latin typeface="Malgun Gothic"/>
+                <a:ea typeface="Malgun Gothic"/>
+                <a:cs typeface="Malgun Gothic"/>
+              </a:defRPr>
+            </a:lvl5pPr>
+            <a:lvl6pPr algn="r">
+              <a:defRPr sz="1200" b="0">
+                <a:solidFill>
+                  <a:srgbClr val="4D5A68"/>
+                </a:solidFill>
+                <a:latin typeface="Malgun Gothic"/>
+                <a:ea typeface="Malgun Gothic"/>
+                <a:cs typeface="Malgun Gothic"/>
+              </a:defRPr>
+            </a:lvl6pPr>
+            <a:lvl7pPr algn="r">
+              <a:defRPr sz="1200" b="0">
+                <a:solidFill>
+                  <a:srgbClr val="4D5A68"/>
+                </a:solidFill>
+                <a:latin typeface="Malgun Gothic"/>
+                <a:ea typeface="Malgun Gothic"/>
+                <a:cs typeface="Malgun Gothic"/>
+              </a:defRPr>
+            </a:lvl7pPr>
+            <a:lvl8pPr algn="r">
+              <a:defRPr sz="1200" b="0">
+                <a:solidFill>
+                  <a:srgbClr val="4D5A68"/>
+                </a:solidFill>
+                <a:latin typeface="Malgun Gothic"/>
+                <a:ea typeface="Malgun Gothic"/>
+                <a:cs typeface="Malgun Gothic"/>
+              </a:defRPr>
+            </a:lvl8pPr>
+            <a:lvl9pPr algn="r">
+              <a:defRPr sz="1200" b="0">
+                <a:solidFill>
+                  <a:srgbClr val="4D5A68"/>
+                </a:solidFill>
+                <a:latin typeface="Malgun Gothic"/>
+                <a:ea typeface="Malgun Gothic"/>
+                <a:cs typeface="Malgun Gothic"/>
+              </a:defRPr>
+            </a:lvl9pPr>
+          </a:lstStyle>
+          <a:p xmlns:a="http://schemas.openxmlformats.org/drawingml/2006/main">
+            <a:pPr algn="r">
+              <a:defRPr sz="1200" b="0">
+                <a:solidFill>
+                  <a:srgbClr val="4D5A68"/>
+                </a:solidFill>
+                <a:latin typeface="Malgun Gothic"/>
+                <a:ea typeface="Malgun Gothic"/>
+                <a:cs typeface="Malgun Gothic"/>
+              </a:defRPr>
+            </a:pPr>
+            <a:r>
+              <a:rPr sz="1200" b="0">
+                <a:solidFill>
+                  <a:srgbClr val="4D5A68"/>
+                </a:solidFill>
+                <a:latin typeface="Malgun Gothic"/>
+                <a:ea typeface="Malgun Gothic"/>
+                <a:cs typeface="Malgun Gothic"/>
+              </a:rPr>
+              <a:t>M 연계 · M1 · M6</a:t>
+            </a:r>
+          </a:p>
+        </p:txBody>
+      </p:sp>
     </p:spTree>
     <p:extLst>
       <p:ext uri="{BB962C8B-B14F-4D97-AF65-F5344CB8AC3E}">
-        <p14:creationId xmlns:p14="http://schemas.microsoft.com/office/powerpoint/2010/main" val="495378236"/>
+        <p14:creationId xmlns:p14="http://schemas.microsoft.com/office/powerpoint/2010/main" val="111320051"/>
       </p:ext>
     </p:extLst>
   </p:cSld>
@@ -12155,10 +12634,10 @@
       </p:grpSpPr>
       <p:sp>
         <p:nvSpPr>
-          <p:cNvPr id="13" name="ACT 0 · Repository 조사 관찰">
+          <p:cNvPr id="14" name="ACT 0 · Repository 조사 관찰">
             <a:extLst xmlns:a="http://schemas.openxmlformats.org/drawingml/2006/main">
               <a:ext uri="{FF2B5EF4-FFF2-40B4-BE49-F238E27FC236}">
-                <a16:creationId xmlns:a16="http://schemas.microsoft.com/office/drawing/2014/main" id="{FDEDE37D-6F6A-46EF-A169-739CD4FD124A}"/>
+                <a16:creationId xmlns:a16="http://schemas.microsoft.com/office/drawing/2014/main" id="{4BAD9634-1B19-4260-B574-64D375C1E9CA}"/>
               </a:ext>
             </a:extLst>
           </p:cNvPr>
@@ -12316,7 +12795,7 @@
           <p:cNvPr id="2" name="S04">
             <a:extLst xmlns:a="http://schemas.openxmlformats.org/drawingml/2006/main">
               <a:ext uri="{FF2B5EF4-FFF2-40B4-BE49-F238E27FC236}">
-                <a16:creationId xmlns:a16="http://schemas.microsoft.com/office/drawing/2014/main" id="{FD7A7D32-827F-4CA3-BCAA-F5EAC5096B11}"/>
+                <a16:creationId xmlns:a16="http://schemas.microsoft.com/office/drawing/2014/main" id="{F414504B-BD96-45DA-B194-EACAFF0B5EE4}"/>
               </a:ext>
             </a:extLst>
           </p:cNvPr>
@@ -12474,7 +12953,7 @@
           <p:cNvPr id="3" name="파일명을 주지 않으면 Agent는 어디부터 볼까?">
             <a:extLst xmlns:a="http://schemas.openxmlformats.org/drawingml/2006/main">
               <a:ext uri="{FF2B5EF4-FFF2-40B4-BE49-F238E27FC236}">
-                <a16:creationId xmlns:a16="http://schemas.microsoft.com/office/drawing/2014/main" id="{2BC2B3E5-0697-467C-BA80-B3F00F85FD0B}"/>
+                <a16:creationId xmlns:a16="http://schemas.microsoft.com/office/drawing/2014/main" id="{E2C36EA0-861F-4203-8228-E7CE3C903FFC}"/>
               </a:ext>
             </a:extLst>
           </p:cNvPr>
@@ -12632,7 +13111,7 @@
           <p:cNvPr id="4" name="">
             <a:extLst xmlns:a="http://schemas.openxmlformats.org/drawingml/2006/main">
               <a:ext uri="{FF2B5EF4-FFF2-40B4-BE49-F238E27FC236}">
-                <a16:creationId xmlns:a16="http://schemas.microsoft.com/office/drawing/2014/main" id="{10BCA94E-8DD7-4897-AC34-1F4F9A9CF783}"/>
+                <a16:creationId xmlns:a16="http://schemas.microsoft.com/office/drawing/2014/main" id="{19B02C1E-7093-44FC-BC1D-6FDF864AE00F}"/>
               </a:ext>
             </a:extLst>
           </p:cNvPr>
@@ -12643,7 +13122,7 @@
         </p:nvSpPr>
         <p:spPr>
           <a:xfrm xmlns:a="http://schemas.openxmlformats.org/drawingml/2006/main">
-            <a:off x="609600" y="5829300"/>
+            <a:off x="609600" y="5753100"/>
             <a:ext cx="10972800" cy="0"/>
           </a:xfrm>
           <a:prstGeom xmlns:a="http://schemas.openxmlformats.org/drawingml/2006/main" prst="line">
@@ -12663,7 +13142,7 @@
           <p:cNvPr id="5" name="TRIAL-001 실제 요청 발췌 · Codex CLI 0.154.0 · macOS · 읽기 전용">
             <a:extLst xmlns:a="http://schemas.openxmlformats.org/drawingml/2006/main">
               <a:ext uri="{FF2B5EF4-FFF2-40B4-BE49-F238E27FC236}">
-                <a16:creationId xmlns:a16="http://schemas.microsoft.com/office/drawing/2014/main" id="{94F4925B-2E64-4FD2-B4D0-AE2280B48953}"/>
+                <a16:creationId xmlns:a16="http://schemas.microsoft.com/office/drawing/2014/main" id="{F133790D-72E6-4422-948B-5863A6B891B2}"/>
               </a:ext>
             </a:extLst>
           </p:cNvPr>
@@ -12674,8 +13153,8 @@
         </p:nvSpPr>
         <p:spPr>
           <a:xfrm xmlns:a="http://schemas.openxmlformats.org/drawingml/2006/main">
-            <a:off x="609600" y="5915025"/>
-            <a:ext cx="10972800" cy="247650"/>
+            <a:off x="609600" y="5791200"/>
+            <a:ext cx="10972800" cy="228600"/>
           </a:xfrm>
           <a:prstGeom xmlns:a="http://schemas.openxmlformats.org/drawingml/2006/main" prst="rect">
             <a:avLst/>
@@ -12821,7 +13300,7 @@
           <p:cNvPr id="6" name="과거 단일 실행의 기록을 살펴봅니다. 현재 Desktop 동작은 미검증입니다.">
             <a:extLst xmlns:a="http://schemas.openxmlformats.org/drawingml/2006/main">
               <a:ext uri="{FF2B5EF4-FFF2-40B4-BE49-F238E27FC236}">
-                <a16:creationId xmlns:a16="http://schemas.microsoft.com/office/drawing/2014/main" id="{1B9E8C22-EEAD-405E-AE1D-2C73081E0E3E}"/>
+                <a16:creationId xmlns:a16="http://schemas.microsoft.com/office/drawing/2014/main" id="{D3C1E44E-DF14-4287-AADC-71C61B3285FF}"/>
               </a:ext>
             </a:extLst>
           </p:cNvPr>
@@ -12832,7 +13311,7 @@
         </p:nvSpPr>
         <p:spPr>
           <a:xfrm xmlns:a="http://schemas.openxmlformats.org/drawingml/2006/main">
-            <a:off x="609600" y="6191250"/>
+            <a:off x="609600" y="6019800"/>
             <a:ext cx="10972800" cy="209550"/>
           </a:xfrm>
           <a:prstGeom xmlns:a="http://schemas.openxmlformats.org/drawingml/2006/main" prst="rect">
@@ -12979,7 +13458,7 @@
           <p:cNvPr id="7" name="“현재 이 저장소에서 테스트 하나가 실패하고 있다.&#10;실패 원인을 조사해줘. 관련 구현과 호출 경로,&#10;실패하는">
             <a:extLst xmlns:a="http://schemas.openxmlformats.org/drawingml/2006/main">
               <a:ext uri="{FF2B5EF4-FFF2-40B4-BE49-F238E27FC236}">
-                <a16:creationId xmlns:a16="http://schemas.microsoft.com/office/drawing/2014/main" id="{541A9946-A504-4F48-90F4-12D8CEF434FC}"/>
+                <a16:creationId xmlns:a16="http://schemas.microsoft.com/office/drawing/2014/main" id="{DDC4CEA4-236F-4C28-9D00-0F6C234DCEBB}"/>
               </a:ext>
             </a:extLst>
           </p:cNvPr>
@@ -13206,7 +13685,7 @@
           <p:cNvPr id="8" name="">
             <a:extLst xmlns:a="http://schemas.openxmlformats.org/drawingml/2006/main">
               <a:ext uri="{FF2B5EF4-FFF2-40B4-BE49-F238E27FC236}">
-                <a16:creationId xmlns:a16="http://schemas.microsoft.com/office/drawing/2014/main" id="{6BF05883-528A-42D0-BB13-FA7BAD6D515B}"/>
+                <a16:creationId xmlns:a16="http://schemas.microsoft.com/office/drawing/2014/main" id="{74E0DE5A-C8B7-46F9-9059-2A2EA4E11B4A}"/>
               </a:ext>
             </a:extLst>
           </p:cNvPr>
@@ -13237,7 +13716,7 @@
           <p:cNvPr id="9" name="찾았는지 확인할 세 가지">
             <a:extLst xmlns:a="http://schemas.openxmlformats.org/drawingml/2006/main">
               <a:ext uri="{FF2B5EF4-FFF2-40B4-BE49-F238E27FC236}">
-                <a16:creationId xmlns:a16="http://schemas.microsoft.com/office/drawing/2014/main" id="{06FE472F-3B34-4CBD-BBDE-66FAFB0E4049}"/>
+                <a16:creationId xmlns:a16="http://schemas.microsoft.com/office/drawing/2014/main" id="{4192E423-7DD3-4BC5-941A-B5BC09D4086F}"/>
               </a:ext>
             </a:extLst>
           </p:cNvPr>
@@ -13395,7 +13874,7 @@
           <p:cNvPr id="10" name="01  실패하는 테스트">
             <a:extLst xmlns:a="http://schemas.openxmlformats.org/drawingml/2006/main">
               <a:ext uri="{FF2B5EF4-FFF2-40B4-BE49-F238E27FC236}">
-                <a16:creationId xmlns:a16="http://schemas.microsoft.com/office/drawing/2014/main" id="{6BD57DC0-1A84-4381-B6F0-DB39DA04E7FA}"/>
+                <a16:creationId xmlns:a16="http://schemas.microsoft.com/office/drawing/2014/main" id="{98990F5D-06A0-46CB-8910-2EC473C99F64}"/>
               </a:ext>
             </a:extLst>
           </p:cNvPr>
@@ -13553,7 +14032,7 @@
           <p:cNvPr id="11" name="02  관련 구현">
             <a:extLst xmlns:a="http://schemas.openxmlformats.org/drawingml/2006/main">
               <a:ext uri="{FF2B5EF4-FFF2-40B4-BE49-F238E27FC236}">
-                <a16:creationId xmlns:a16="http://schemas.microsoft.com/office/drawing/2014/main" id="{C5466243-39DA-401A-84A9-E924E6BBC795}"/>
+                <a16:creationId xmlns:a16="http://schemas.microsoft.com/office/drawing/2014/main" id="{7C3C20FE-576C-4B79-A7B1-EFD000584996}"/>
               </a:ext>
             </a:extLst>
           </p:cNvPr>
@@ -13711,7 +14190,7 @@
           <p:cNvPr id="12" name="03  제품의 호출 경로">
             <a:extLst xmlns:a="http://schemas.openxmlformats.org/drawingml/2006/main">
               <a:ext uri="{FF2B5EF4-FFF2-40B4-BE49-F238E27FC236}">
-                <a16:creationId xmlns:a16="http://schemas.microsoft.com/office/drawing/2014/main" id="{4BA22D99-3739-4026-B9D0-778175CF8D5A}"/>
+                <a16:creationId xmlns:a16="http://schemas.microsoft.com/office/drawing/2014/main" id="{249E3405-A390-4AB7-A10A-434F80F68376}"/>
               </a:ext>
             </a:extLst>
           </p:cNvPr>
@@ -13864,10 +14343,168 @@
           </a:p>
         </p:txBody>
       </p:sp>
+      <p:sp>
+        <p:nvSpPr>
+          <p:cNvPr id="13" name="Legacy module connection">
+            <a:extLst xmlns:a="http://schemas.openxmlformats.org/drawingml/2006/main">
+              <a:ext uri="{FF2B5EF4-FFF2-40B4-BE49-F238E27FC236}">
+                <a16:creationId xmlns:a16="http://schemas.microsoft.com/office/drawing/2014/main" id="{94857329-0022-4D4A-8EE4-DF4D28E3E776}"/>
+              </a:ext>
+            </a:extLst>
+          </p:cNvPr>
+          <p:cNvSpPr>
+            <a:spLocks xmlns:a="http://schemas.openxmlformats.org/drawingml/2006/main" noGrp="1"/>
+          </p:cNvSpPr>
+          <p:nvPr/>
+        </p:nvSpPr>
+        <p:spPr>
+          <a:xfrm xmlns:a="http://schemas.openxmlformats.org/drawingml/2006/main">
+            <a:off x="609600" y="6229350"/>
+            <a:ext cx="10972800" cy="171450"/>
+          </a:xfrm>
+          <a:prstGeom xmlns:a="http://schemas.openxmlformats.org/drawingml/2006/main" prst="rect">
+            <a:avLst/>
+          </a:prstGeom>
+          <a:noFill xmlns:a="http://schemas.openxmlformats.org/drawingml/2006/main"/>
+          <a:ln xmlns:a="http://schemas.openxmlformats.org/drawingml/2006/main" w="0">
+            <a:noFill/>
+          </a:ln>
+        </p:spPr>
+        <p:txBody>
+          <a:bodyPr xmlns:a="http://schemas.openxmlformats.org/drawingml/2006/main" wrap="none" lIns="0" tIns="0" rIns="0" bIns="0" anchor="ctr">
+            <a:noAutofit/>
+          </a:bodyPr>
+          <a:lstStyle xmlns:a="http://schemas.openxmlformats.org/drawingml/2006/main">
+            <a:defPPr algn="r">
+              <a:defRPr sz="1200" b="0">
+                <a:solidFill>
+                  <a:srgbClr val="4D5A68"/>
+                </a:solidFill>
+                <a:latin typeface="Malgun Gothic"/>
+                <a:ea typeface="Malgun Gothic"/>
+                <a:cs typeface="Malgun Gothic"/>
+              </a:defRPr>
+            </a:defPPr>
+            <a:lvl1pPr algn="r">
+              <a:defRPr sz="1200" b="0">
+                <a:solidFill>
+                  <a:srgbClr val="4D5A68"/>
+                </a:solidFill>
+                <a:latin typeface="Malgun Gothic"/>
+                <a:ea typeface="Malgun Gothic"/>
+                <a:cs typeface="Malgun Gothic"/>
+              </a:defRPr>
+            </a:lvl1pPr>
+            <a:lvl2pPr algn="r">
+              <a:defRPr sz="1200" b="0">
+                <a:solidFill>
+                  <a:srgbClr val="4D5A68"/>
+                </a:solidFill>
+                <a:latin typeface="Malgun Gothic"/>
+                <a:ea typeface="Malgun Gothic"/>
+                <a:cs typeface="Malgun Gothic"/>
+              </a:defRPr>
+            </a:lvl2pPr>
+            <a:lvl3pPr algn="r">
+              <a:defRPr sz="1200" b="0">
+                <a:solidFill>
+                  <a:srgbClr val="4D5A68"/>
+                </a:solidFill>
+                <a:latin typeface="Malgun Gothic"/>
+                <a:ea typeface="Malgun Gothic"/>
+                <a:cs typeface="Malgun Gothic"/>
+              </a:defRPr>
+            </a:lvl3pPr>
+            <a:lvl4pPr algn="r">
+              <a:defRPr sz="1200" b="0">
+                <a:solidFill>
+                  <a:srgbClr val="4D5A68"/>
+                </a:solidFill>
+                <a:latin typeface="Malgun Gothic"/>
+                <a:ea typeface="Malgun Gothic"/>
+                <a:cs typeface="Malgun Gothic"/>
+              </a:defRPr>
+            </a:lvl4pPr>
+            <a:lvl5pPr algn="r">
+              <a:defRPr sz="1200" b="0">
+                <a:solidFill>
+                  <a:srgbClr val="4D5A68"/>
+                </a:solidFill>
+                <a:latin typeface="Malgun Gothic"/>
+                <a:ea typeface="Malgun Gothic"/>
+                <a:cs typeface="Malgun Gothic"/>
+              </a:defRPr>
+            </a:lvl5pPr>
+            <a:lvl6pPr algn="r">
+              <a:defRPr sz="1200" b="0">
+                <a:solidFill>
+                  <a:srgbClr val="4D5A68"/>
+                </a:solidFill>
+                <a:latin typeface="Malgun Gothic"/>
+                <a:ea typeface="Malgun Gothic"/>
+                <a:cs typeface="Malgun Gothic"/>
+              </a:defRPr>
+            </a:lvl6pPr>
+            <a:lvl7pPr algn="r">
+              <a:defRPr sz="1200" b="0">
+                <a:solidFill>
+                  <a:srgbClr val="4D5A68"/>
+                </a:solidFill>
+                <a:latin typeface="Malgun Gothic"/>
+                <a:ea typeface="Malgun Gothic"/>
+                <a:cs typeface="Malgun Gothic"/>
+              </a:defRPr>
+            </a:lvl7pPr>
+            <a:lvl8pPr algn="r">
+              <a:defRPr sz="1200" b="0">
+                <a:solidFill>
+                  <a:srgbClr val="4D5A68"/>
+                </a:solidFill>
+                <a:latin typeface="Malgun Gothic"/>
+                <a:ea typeface="Malgun Gothic"/>
+                <a:cs typeface="Malgun Gothic"/>
+              </a:defRPr>
+            </a:lvl8pPr>
+            <a:lvl9pPr algn="r">
+              <a:defRPr sz="1200" b="0">
+                <a:solidFill>
+                  <a:srgbClr val="4D5A68"/>
+                </a:solidFill>
+                <a:latin typeface="Malgun Gothic"/>
+                <a:ea typeface="Malgun Gothic"/>
+                <a:cs typeface="Malgun Gothic"/>
+              </a:defRPr>
+            </a:lvl9pPr>
+          </a:lstStyle>
+          <a:p xmlns:a="http://schemas.openxmlformats.org/drawingml/2006/main">
+            <a:pPr algn="r">
+              <a:defRPr sz="1200" b="0">
+                <a:solidFill>
+                  <a:srgbClr val="4D5A68"/>
+                </a:solidFill>
+                <a:latin typeface="Malgun Gothic"/>
+                <a:ea typeface="Malgun Gothic"/>
+                <a:cs typeface="Malgun Gothic"/>
+              </a:defRPr>
+            </a:pPr>
+            <a:r>
+              <a:rPr sz="1200" b="0">
+                <a:solidFill>
+                  <a:srgbClr val="4D5A68"/>
+                </a:solidFill>
+                <a:latin typeface="Malgun Gothic"/>
+                <a:ea typeface="Malgun Gothic"/>
+                <a:cs typeface="Malgun Gothic"/>
+              </a:rPr>
+              <a:t>M 연계 · M6</a:t>
+            </a:r>
+          </a:p>
+        </p:txBody>
+      </p:sp>
     </p:spTree>
     <p:extLst>
       <p:ext uri="{BB962C8B-B14F-4D97-AF65-F5344CB8AC3E}">
-        <p14:creationId xmlns:p14="http://schemas.microsoft.com/office/powerpoint/2010/main" val="1065014673"/>
+        <p14:creationId xmlns:p14="http://schemas.microsoft.com/office/powerpoint/2010/main" val="404181943"/>
       </p:ext>
     </p:extLst>
   </p:cSld>
@@ -13895,10 +14532,10 @@
       </p:grpSpPr>
       <p:sp>
         <p:nvSpPr>
-          <p:cNvPr id="63" name="ACT 0  ·  Repository 탐색">
+          <p:cNvPr id="64" name="ACT 0  ·  Repository 탐색">
             <a:extLst xmlns:a="http://schemas.openxmlformats.org/drawingml/2006/main">
               <a:ext uri="{FF2B5EF4-FFF2-40B4-BE49-F238E27FC236}">
-                <a16:creationId xmlns:a16="http://schemas.microsoft.com/office/drawing/2014/main" id="{12A5DA8C-EC33-4556-8C1D-722A8E592990}"/>
+                <a16:creationId xmlns:a16="http://schemas.microsoft.com/office/drawing/2014/main" id="{84AC7136-05F0-44C6-A9A2-B305A3E6873D}"/>
               </a:ext>
             </a:extLst>
           </p:cNvPr>
@@ -14056,7 +14693,7 @@
           <p:cNvPr id="2" name="S05">
             <a:extLst xmlns:a="http://schemas.openxmlformats.org/drawingml/2006/main">
               <a:ext uri="{FF2B5EF4-FFF2-40B4-BE49-F238E27FC236}">
-                <a16:creationId xmlns:a16="http://schemas.microsoft.com/office/drawing/2014/main" id="{5EAB9181-2CB4-4D16-B062-E0A4E78C3F23}"/>
+                <a16:creationId xmlns:a16="http://schemas.microsoft.com/office/drawing/2014/main" id="{435F6478-92E5-4339-BD54-D850952540FD}"/>
               </a:ext>
             </a:extLst>
           </p:cNvPr>
@@ -14214,7 +14851,7 @@
           <p:cNvPr id="3" name="Agent가 Test와 호출 경로를 찾았다">
             <a:extLst xmlns:a="http://schemas.openxmlformats.org/drawingml/2006/main">
               <a:ext uri="{FF2B5EF4-FFF2-40B4-BE49-F238E27FC236}">
-                <a16:creationId xmlns:a16="http://schemas.microsoft.com/office/drawing/2014/main" id="{45CCE3D3-1B68-4F40-9925-E161CE2F12D4}"/>
+                <a16:creationId xmlns:a16="http://schemas.microsoft.com/office/drawing/2014/main" id="{9B19921F-47D9-468C-9D8F-5FA88DC03150}"/>
               </a:ext>
             </a:extLst>
           </p:cNvPr>
@@ -14372,7 +15009,7 @@
           <p:cNvPr id="4" name="">
             <a:extLst xmlns:a="http://schemas.openxmlformats.org/drawingml/2006/main">
               <a:ext uri="{FF2B5EF4-FFF2-40B4-BE49-F238E27FC236}">
-                <a16:creationId xmlns:a16="http://schemas.microsoft.com/office/drawing/2014/main" id="{34BD1638-7EF0-48D5-9AAD-33C0712635B7}"/>
+                <a16:creationId xmlns:a16="http://schemas.microsoft.com/office/drawing/2014/main" id="{5B5A9757-0499-49F7-BBDE-D0E7559620F2}"/>
               </a:ext>
             </a:extLst>
           </p:cNvPr>
@@ -14383,7 +15020,7 @@
         </p:nvSpPr>
         <p:spPr>
           <a:xfrm xmlns:a="http://schemas.openxmlformats.org/drawingml/2006/main">
-            <a:off x="609600" y="5829300"/>
+            <a:off x="609600" y="5753100"/>
             <a:ext cx="10972800" cy="0"/>
           </a:xfrm>
           <a:prstGeom xmlns:a="http://schemas.openxmlformats.org/drawingml/2006/main" prst="line">
@@ -14403,7 +15040,7 @@
           <p:cNvPr id="5" name="TRIAL-001 기록·STATE-00 테스트 재구성  |  Codex CLI 0.154.0 · 읽기 전용">
             <a:extLst xmlns:a="http://schemas.openxmlformats.org/drawingml/2006/main">
               <a:ext uri="{FF2B5EF4-FFF2-40B4-BE49-F238E27FC236}">
-                <a16:creationId xmlns:a16="http://schemas.microsoft.com/office/drawing/2014/main" id="{26596F36-AED1-4D60-9ED1-DA3BB8DCE5C4}"/>
+                <a16:creationId xmlns:a16="http://schemas.microsoft.com/office/drawing/2014/main" id="{F5521CFB-E0B7-4DC9-BA55-094028A1322C}"/>
               </a:ext>
             </a:extLst>
           </p:cNvPr>
@@ -14414,8 +15051,8 @@
         </p:nvSpPr>
         <p:spPr>
           <a:xfrm xmlns:a="http://schemas.openxmlformats.org/drawingml/2006/main">
-            <a:off x="609600" y="5915025"/>
-            <a:ext cx="10972800" cy="247650"/>
+            <a:off x="609600" y="5791200"/>
+            <a:ext cx="10972800" cy="228600"/>
           </a:xfrm>
           <a:prstGeom xmlns:a="http://schemas.openxmlformats.org/drawingml/2006/main" prst="rect">
             <a:avLst/>
@@ -14561,7 +15198,7 @@
           <p:cNvPr id="6" name="실제 실행 화면이 아님 · 이 조사에서는 코드 수정 없음 · 현재 Desktop 동작 미검증">
             <a:extLst xmlns:a="http://schemas.openxmlformats.org/drawingml/2006/main">
               <a:ext uri="{FF2B5EF4-FFF2-40B4-BE49-F238E27FC236}">
-                <a16:creationId xmlns:a16="http://schemas.microsoft.com/office/drawing/2014/main" id="{33BC5ACA-F063-4F5C-A9C0-F8CD81C3C38B}"/>
+                <a16:creationId xmlns:a16="http://schemas.microsoft.com/office/drawing/2014/main" id="{7391F311-9D35-4DD1-BE43-98972F654871}"/>
               </a:ext>
             </a:extLst>
           </p:cNvPr>
@@ -14572,7 +15209,7 @@
         </p:nvSpPr>
         <p:spPr>
           <a:xfrm xmlns:a="http://schemas.openxmlformats.org/drawingml/2006/main">
-            <a:off x="609600" y="6191250"/>
+            <a:off x="609600" y="6019800"/>
             <a:ext cx="10972800" cy="209550"/>
           </a:xfrm>
           <a:prstGeom xmlns:a="http://schemas.openxmlformats.org/drawingml/2006/main" prst="rect">
@@ -14719,7 +15356,7 @@
           <p:cNvPr id="7" name="crop(image, 1, 3)">
             <a:extLst xmlns:a="http://schemas.openxmlformats.org/drawingml/2006/main">
               <a:ext uri="{FF2B5EF4-FFF2-40B4-BE49-F238E27FC236}">
-                <a16:creationId xmlns:a16="http://schemas.microsoft.com/office/drawing/2014/main" id="{BCB92C82-56CD-484F-9406-326B8DC92A3E}"/>
+                <a16:creationId xmlns:a16="http://schemas.microsoft.com/office/drawing/2014/main" id="{2C0D2F52-8862-4084-B50A-DB7B4CECC760}"/>
               </a:ext>
             </a:extLst>
           </p:cNvPr>
@@ -14877,7 +15514,7 @@
           <p:cNvPr id="8" name="끝 좌표 3은 포함하지 않는 계약">
             <a:extLst xmlns:a="http://schemas.openxmlformats.org/drawingml/2006/main">
               <a:ext uri="{FF2B5EF4-FFF2-40B4-BE49-F238E27FC236}">
-                <a16:creationId xmlns:a16="http://schemas.microsoft.com/office/drawing/2014/main" id="{A89C020E-E1B6-4DAB-AB8E-A0FC008CE699}"/>
+                <a16:creationId xmlns:a16="http://schemas.microsoft.com/office/drawing/2014/main" id="{0AB58E16-742F-47EB-A096-D57D052AC18B}"/>
               </a:ext>
             </a:extLst>
           </p:cNvPr>
@@ -15035,7 +15672,7 @@
           <p:cNvPr id="9" name="입력">
             <a:extLst xmlns:a="http://schemas.openxmlformats.org/drawingml/2006/main">
               <a:ext uri="{FF2B5EF4-FFF2-40B4-BE49-F238E27FC236}">
-                <a16:creationId xmlns:a16="http://schemas.microsoft.com/office/drawing/2014/main" id="{4615F64B-A0FD-4C63-84E7-A516DAB9D87E}"/>
+                <a16:creationId xmlns:a16="http://schemas.microsoft.com/office/drawing/2014/main" id="{E5119863-A906-4A6E-AD2A-E60D7B94C8B5}"/>
               </a:ext>
             </a:extLst>
           </p:cNvPr>
@@ -15193,7 +15830,7 @@
           <p:cNvPr id="10" name="0">
             <a:extLst xmlns:a="http://schemas.openxmlformats.org/drawingml/2006/main">
               <a:ext uri="{FF2B5EF4-FFF2-40B4-BE49-F238E27FC236}">
-                <a16:creationId xmlns:a16="http://schemas.microsoft.com/office/drawing/2014/main" id="{8063EA6A-6101-42E9-BB2A-98DE90192D4B}"/>
+                <a16:creationId xmlns:a16="http://schemas.microsoft.com/office/drawing/2014/main" id="{AC6B8CF3-3A9E-4C5F-8C8B-4AF6FC5D988D}"/>
               </a:ext>
             </a:extLst>
           </p:cNvPr>
@@ -15351,7 +15988,7 @@
           <p:cNvPr id="11" name="1">
             <a:extLst xmlns:a="http://schemas.openxmlformats.org/drawingml/2006/main">
               <a:ext uri="{FF2B5EF4-FFF2-40B4-BE49-F238E27FC236}">
-                <a16:creationId xmlns:a16="http://schemas.microsoft.com/office/drawing/2014/main" id="{7EB327C5-9B31-4C27-8230-9BFE06DCE1A6}"/>
+                <a16:creationId xmlns:a16="http://schemas.microsoft.com/office/drawing/2014/main" id="{C6A6EB16-C34D-41CA-B764-E47DEE956AA9}"/>
               </a:ext>
             </a:extLst>
           </p:cNvPr>
@@ -15509,7 +16146,7 @@
           <p:cNvPr id="12" name="2">
             <a:extLst xmlns:a="http://schemas.openxmlformats.org/drawingml/2006/main">
               <a:ext uri="{FF2B5EF4-FFF2-40B4-BE49-F238E27FC236}">
-                <a16:creationId xmlns:a16="http://schemas.microsoft.com/office/drawing/2014/main" id="{53E37CDF-B630-46DD-94E1-496AAD338856}"/>
+                <a16:creationId xmlns:a16="http://schemas.microsoft.com/office/drawing/2014/main" id="{9227887E-09BD-4D0C-9DA7-029BA9CF137A}"/>
               </a:ext>
             </a:extLst>
           </p:cNvPr>
@@ -15667,7 +16304,7 @@
           <p:cNvPr id="13" name="3">
             <a:extLst xmlns:a="http://schemas.openxmlformats.org/drawingml/2006/main">
               <a:ext uri="{FF2B5EF4-FFF2-40B4-BE49-F238E27FC236}">
-                <a16:creationId xmlns:a16="http://schemas.microsoft.com/office/drawing/2014/main" id="{2ADE90CC-7AFC-4953-842A-77C32C48CF9C}"/>
+                <a16:creationId xmlns:a16="http://schemas.microsoft.com/office/drawing/2014/main" id="{541E0378-6F7F-41F0-BD9B-4DA1A99C2721}"/>
               </a:ext>
             </a:extLst>
           </p:cNvPr>
@@ -15825,7 +16462,7 @@
           <p:cNvPr id="14" name="">
             <a:extLst xmlns:a="http://schemas.openxmlformats.org/drawingml/2006/main">
               <a:ext uri="{FF2B5EF4-FFF2-40B4-BE49-F238E27FC236}">
-                <a16:creationId xmlns:a16="http://schemas.microsoft.com/office/drawing/2014/main" id="{06BD1C95-C3DE-43EB-86C9-692E7083B8AD}"/>
+                <a16:creationId xmlns:a16="http://schemas.microsoft.com/office/drawing/2014/main" id="{5AB90F58-5364-49E7-9226-1F1F2FDEB9FA}"/>
               </a:ext>
             </a:extLst>
           </p:cNvPr>
@@ -15858,7 +16495,7 @@
           <p:cNvPr id="15" name="1">
             <a:extLst xmlns:a="http://schemas.openxmlformats.org/drawingml/2006/main">
               <a:ext uri="{FF2B5EF4-FFF2-40B4-BE49-F238E27FC236}">
-                <a16:creationId xmlns:a16="http://schemas.microsoft.com/office/drawing/2014/main" id="{82E41269-F7A4-4ECC-9266-38234C9002B4}"/>
+                <a16:creationId xmlns:a16="http://schemas.microsoft.com/office/drawing/2014/main" id="{DF1CB3B2-2F12-4785-8E26-14E2A82CA927}"/>
               </a:ext>
             </a:extLst>
           </p:cNvPr>
@@ -16016,7 +16653,7 @@
           <p:cNvPr id="16" name="">
             <a:extLst xmlns:a="http://schemas.openxmlformats.org/drawingml/2006/main">
               <a:ext uri="{FF2B5EF4-FFF2-40B4-BE49-F238E27FC236}">
-                <a16:creationId xmlns:a16="http://schemas.microsoft.com/office/drawing/2014/main" id="{C2E457FD-60A5-4ED2-A9F9-B334DFEC9739}"/>
+                <a16:creationId xmlns:a16="http://schemas.microsoft.com/office/drawing/2014/main" id="{A765B4D7-436C-4A7E-B3EE-B96703BC74E6}"/>
               </a:ext>
             </a:extLst>
           </p:cNvPr>
@@ -16049,7 +16686,7 @@
           <p:cNvPr id="17" name="2">
             <a:extLst xmlns:a="http://schemas.openxmlformats.org/drawingml/2006/main">
               <a:ext uri="{FF2B5EF4-FFF2-40B4-BE49-F238E27FC236}">
-                <a16:creationId xmlns:a16="http://schemas.microsoft.com/office/drawing/2014/main" id="{D8E99907-1996-4076-9E03-AC97EAAED6E5}"/>
+                <a16:creationId xmlns:a16="http://schemas.microsoft.com/office/drawing/2014/main" id="{58ED2734-2949-4E10-989A-25E3AF417A1F}"/>
               </a:ext>
             </a:extLst>
           </p:cNvPr>
@@ -16207,7 +16844,7 @@
           <p:cNvPr id="18" name="">
             <a:extLst xmlns:a="http://schemas.openxmlformats.org/drawingml/2006/main">
               <a:ext uri="{FF2B5EF4-FFF2-40B4-BE49-F238E27FC236}">
-                <a16:creationId xmlns:a16="http://schemas.microsoft.com/office/drawing/2014/main" id="{C92EC8F8-9606-47C3-A7D5-0E0E2862BF73}"/>
+                <a16:creationId xmlns:a16="http://schemas.microsoft.com/office/drawing/2014/main" id="{D0FA3A17-FC68-42E4-A724-7A5F90411339}"/>
               </a:ext>
             </a:extLst>
           </p:cNvPr>
@@ -16240,7 +16877,7 @@
           <p:cNvPr id="19" name="3">
             <a:extLst xmlns:a="http://schemas.openxmlformats.org/drawingml/2006/main">
               <a:ext uri="{FF2B5EF4-FFF2-40B4-BE49-F238E27FC236}">
-                <a16:creationId xmlns:a16="http://schemas.microsoft.com/office/drawing/2014/main" id="{2C75EB76-5574-4753-AF15-E64472C2B28C}"/>
+                <a16:creationId xmlns:a16="http://schemas.microsoft.com/office/drawing/2014/main" id="{D75F3553-518E-4F5A-9C7D-EE444AA81118}"/>
               </a:ext>
             </a:extLst>
           </p:cNvPr>
@@ -16398,7 +17035,7 @@
           <p:cNvPr id="20" name="">
             <a:extLst xmlns:a="http://schemas.openxmlformats.org/drawingml/2006/main">
               <a:ext uri="{FF2B5EF4-FFF2-40B4-BE49-F238E27FC236}">
-                <a16:creationId xmlns:a16="http://schemas.microsoft.com/office/drawing/2014/main" id="{1EE5CC05-28E2-4DD6-A542-8EF233425BAB}"/>
+                <a16:creationId xmlns:a16="http://schemas.microsoft.com/office/drawing/2014/main" id="{5B9B09E0-A26D-4624-9F0D-C301216499AC}"/>
               </a:ext>
             </a:extLst>
           </p:cNvPr>
@@ -16431,7 +17068,7 @@
           <p:cNvPr id="21" name="4">
             <a:extLst xmlns:a="http://schemas.openxmlformats.org/drawingml/2006/main">
               <a:ext uri="{FF2B5EF4-FFF2-40B4-BE49-F238E27FC236}">
-                <a16:creationId xmlns:a16="http://schemas.microsoft.com/office/drawing/2014/main" id="{1A3EF5D8-BA1B-4B62-9179-E79DAC6D46D4}"/>
+                <a16:creationId xmlns:a16="http://schemas.microsoft.com/office/drawing/2014/main" id="{A6F8ADA3-A797-480D-A64F-BB15A5DC4323}"/>
               </a:ext>
             </a:extLst>
           </p:cNvPr>
@@ -16589,7 +17226,7 @@
           <p:cNvPr id="22" name="">
             <a:extLst xmlns:a="http://schemas.openxmlformats.org/drawingml/2006/main">
               <a:ext uri="{FF2B5EF4-FFF2-40B4-BE49-F238E27FC236}">
-                <a16:creationId xmlns:a16="http://schemas.microsoft.com/office/drawing/2014/main" id="{BC021F57-380B-496F-9D66-D49D48D4E4C8}"/>
+                <a16:creationId xmlns:a16="http://schemas.microsoft.com/office/drawing/2014/main" id="{1EF45531-AE50-4D0E-ADF3-2266D4B83EDA}"/>
               </a:ext>
             </a:extLst>
           </p:cNvPr>
@@ -16622,7 +17259,7 @@
           <p:cNvPr id="23" name="5">
             <a:extLst xmlns:a="http://schemas.openxmlformats.org/drawingml/2006/main">
               <a:ext uri="{FF2B5EF4-FFF2-40B4-BE49-F238E27FC236}">
-                <a16:creationId xmlns:a16="http://schemas.microsoft.com/office/drawing/2014/main" id="{943F4401-D8AF-4DE5-9E65-2CD179A2679C}"/>
+                <a16:creationId xmlns:a16="http://schemas.microsoft.com/office/drawing/2014/main" id="{4AB2E513-053B-425E-A309-F03B1BF0234A}"/>
               </a:ext>
             </a:extLst>
           </p:cNvPr>
@@ -16780,7 +17417,7 @@
           <p:cNvPr id="24" name="">
             <a:extLst xmlns:a="http://schemas.openxmlformats.org/drawingml/2006/main">
               <a:ext uri="{FF2B5EF4-FFF2-40B4-BE49-F238E27FC236}">
-                <a16:creationId xmlns:a16="http://schemas.microsoft.com/office/drawing/2014/main" id="{0F9266B4-F51A-4116-B310-830714AA86C1}"/>
+                <a16:creationId xmlns:a16="http://schemas.microsoft.com/office/drawing/2014/main" id="{CBAEC953-5F94-4B9D-ACB5-FB1A0BFAFF16}"/>
               </a:ext>
             </a:extLst>
           </p:cNvPr>
@@ -16813,7 +17450,7 @@
           <p:cNvPr id="25" name="6">
             <a:extLst xmlns:a="http://schemas.openxmlformats.org/drawingml/2006/main">
               <a:ext uri="{FF2B5EF4-FFF2-40B4-BE49-F238E27FC236}">
-                <a16:creationId xmlns:a16="http://schemas.microsoft.com/office/drawing/2014/main" id="{FE5789B1-EE64-47C1-A243-AC179C7A3435}"/>
+                <a16:creationId xmlns:a16="http://schemas.microsoft.com/office/drawing/2014/main" id="{3C3AF4AB-18BB-4CDC-B99D-ADD5C9E6C2E1}"/>
               </a:ext>
             </a:extLst>
           </p:cNvPr>
@@ -16971,7 +17608,7 @@
           <p:cNvPr id="26" name="">
             <a:extLst xmlns:a="http://schemas.openxmlformats.org/drawingml/2006/main">
               <a:ext uri="{FF2B5EF4-FFF2-40B4-BE49-F238E27FC236}">
-                <a16:creationId xmlns:a16="http://schemas.microsoft.com/office/drawing/2014/main" id="{057D8FFB-BDE3-4820-AFC6-8089BDB15B4F}"/>
+                <a16:creationId xmlns:a16="http://schemas.microsoft.com/office/drawing/2014/main" id="{8759923B-E9CA-4085-B684-3B1D431D12E6}"/>
               </a:ext>
             </a:extLst>
           </p:cNvPr>
@@ -17004,7 +17641,7 @@
           <p:cNvPr id="27" name="7">
             <a:extLst xmlns:a="http://schemas.openxmlformats.org/drawingml/2006/main">
               <a:ext uri="{FF2B5EF4-FFF2-40B4-BE49-F238E27FC236}">
-                <a16:creationId xmlns:a16="http://schemas.microsoft.com/office/drawing/2014/main" id="{FA12FE57-BFA5-4769-AA76-5C854BBD8B4B}"/>
+                <a16:creationId xmlns:a16="http://schemas.microsoft.com/office/drawing/2014/main" id="{1BF94BA5-C38C-48FF-AEC7-DC45214E5AC9}"/>
               </a:ext>
             </a:extLst>
           </p:cNvPr>
@@ -17162,7 +17799,7 @@
           <p:cNvPr id="28" name="">
             <a:extLst xmlns:a="http://schemas.openxmlformats.org/drawingml/2006/main">
               <a:ext uri="{FF2B5EF4-FFF2-40B4-BE49-F238E27FC236}">
-                <a16:creationId xmlns:a16="http://schemas.microsoft.com/office/drawing/2014/main" id="{06FAA3FC-691C-48C9-99E7-D1B9FFDFE7B3}"/>
+                <a16:creationId xmlns:a16="http://schemas.microsoft.com/office/drawing/2014/main" id="{EBFAF6D8-6AA5-471F-999F-283D0E71856D}"/>
               </a:ext>
             </a:extLst>
           </p:cNvPr>
@@ -17195,7 +17832,7 @@
           <p:cNvPr id="29" name="8">
             <a:extLst xmlns:a="http://schemas.openxmlformats.org/drawingml/2006/main">
               <a:ext uri="{FF2B5EF4-FFF2-40B4-BE49-F238E27FC236}">
-                <a16:creationId xmlns:a16="http://schemas.microsoft.com/office/drawing/2014/main" id="{2F07EF8F-8C37-40FE-B63C-510E934698D1}"/>
+                <a16:creationId xmlns:a16="http://schemas.microsoft.com/office/drawing/2014/main" id="{460706B0-10E2-43A4-864D-CFD60E36C387}"/>
               </a:ext>
             </a:extLst>
           </p:cNvPr>
@@ -17353,7 +17990,7 @@
           <p:cNvPr id="30" name="열 index">
             <a:extLst xmlns:a="http://schemas.openxmlformats.org/drawingml/2006/main">
               <a:ext uri="{FF2B5EF4-FFF2-40B4-BE49-F238E27FC236}">
-                <a16:creationId xmlns:a16="http://schemas.microsoft.com/office/drawing/2014/main" id="{7EC12473-2F3E-44C8-A5CC-EBB36A11BCBE}"/>
+                <a16:creationId xmlns:a16="http://schemas.microsoft.com/office/drawing/2014/main" id="{23CD3CEF-FCED-4220-BA6D-65DF0B31FB4A}"/>
               </a:ext>
             </a:extLst>
           </p:cNvPr>
@@ -17511,7 +18148,7 @@
           <p:cNvPr id="31" name="기대">
             <a:extLst xmlns:a="http://schemas.openxmlformats.org/drawingml/2006/main">
               <a:ext uri="{FF2B5EF4-FFF2-40B4-BE49-F238E27FC236}">
-                <a16:creationId xmlns:a16="http://schemas.microsoft.com/office/drawing/2014/main" id="{0B867AC5-8CBA-4B60-A5E6-A8F22CEC3ADC}"/>
+                <a16:creationId xmlns:a16="http://schemas.microsoft.com/office/drawing/2014/main" id="{B7922327-70F4-47B5-B976-2F56FFF90CC9}"/>
               </a:ext>
             </a:extLst>
           </p:cNvPr>
@@ -17669,7 +18306,7 @@
           <p:cNvPr id="32" name="">
             <a:extLst xmlns:a="http://schemas.openxmlformats.org/drawingml/2006/main">
               <a:ext uri="{FF2B5EF4-FFF2-40B4-BE49-F238E27FC236}">
-                <a16:creationId xmlns:a16="http://schemas.microsoft.com/office/drawing/2014/main" id="{F41B2CEB-44E4-4EA8-A2AD-727F3373DFA0}"/>
+                <a16:creationId xmlns:a16="http://schemas.microsoft.com/office/drawing/2014/main" id="{BC182384-448D-493F-AE3E-794632904362}"/>
               </a:ext>
             </a:extLst>
           </p:cNvPr>
@@ -17702,7 +18339,7 @@
           <p:cNvPr id="33" name="2">
             <a:extLst xmlns:a="http://schemas.openxmlformats.org/drawingml/2006/main">
               <a:ext uri="{FF2B5EF4-FFF2-40B4-BE49-F238E27FC236}">
-                <a16:creationId xmlns:a16="http://schemas.microsoft.com/office/drawing/2014/main" id="{45E8EA9B-F07E-4D4F-9C91-EA542BE2897F}"/>
+                <a16:creationId xmlns:a16="http://schemas.microsoft.com/office/drawing/2014/main" id="{DFF70AB1-6926-4581-AE4F-D3A751B81E34}"/>
               </a:ext>
             </a:extLst>
           </p:cNvPr>
@@ -17860,7 +18497,7 @@
           <p:cNvPr id="34" name="">
             <a:extLst xmlns:a="http://schemas.openxmlformats.org/drawingml/2006/main">
               <a:ext uri="{FF2B5EF4-FFF2-40B4-BE49-F238E27FC236}">
-                <a16:creationId xmlns:a16="http://schemas.microsoft.com/office/drawing/2014/main" id="{85EF2207-C3BF-46E5-9C07-0BA8743C183C}"/>
+                <a16:creationId xmlns:a16="http://schemas.microsoft.com/office/drawing/2014/main" id="{22FC284B-675B-4CD1-986A-33946002628F}"/>
               </a:ext>
             </a:extLst>
           </p:cNvPr>
@@ -17893,7 +18530,7 @@
           <p:cNvPr id="35" name="3">
             <a:extLst xmlns:a="http://schemas.openxmlformats.org/drawingml/2006/main">
               <a:ext uri="{FF2B5EF4-FFF2-40B4-BE49-F238E27FC236}">
-                <a16:creationId xmlns:a16="http://schemas.microsoft.com/office/drawing/2014/main" id="{42C5D0DA-0E24-4CFA-8DD7-F0E72435021E}"/>
+                <a16:creationId xmlns:a16="http://schemas.microsoft.com/office/drawing/2014/main" id="{33E34EA7-DE2D-42B1-B7BE-43962D965F0A}"/>
               </a:ext>
             </a:extLst>
           </p:cNvPr>
@@ -18051,7 +18688,7 @@
           <p:cNvPr id="36" name="">
             <a:extLst xmlns:a="http://schemas.openxmlformats.org/drawingml/2006/main">
               <a:ext uri="{FF2B5EF4-FFF2-40B4-BE49-F238E27FC236}">
-                <a16:creationId xmlns:a16="http://schemas.microsoft.com/office/drawing/2014/main" id="{73D98B00-C1D9-47B5-8451-8C7844F53BEC}"/>
+                <a16:creationId xmlns:a16="http://schemas.microsoft.com/office/drawing/2014/main" id="{BEEC9E11-2049-4ABD-85AB-909DE58BD6F2}"/>
               </a:ext>
             </a:extLst>
           </p:cNvPr>
@@ -18084,7 +18721,7 @@
           <p:cNvPr id="37" name="6">
             <a:extLst xmlns:a="http://schemas.openxmlformats.org/drawingml/2006/main">
               <a:ext uri="{FF2B5EF4-FFF2-40B4-BE49-F238E27FC236}">
-                <a16:creationId xmlns:a16="http://schemas.microsoft.com/office/drawing/2014/main" id="{828A5298-233E-4C99-B4E7-2107DEDD8215}"/>
+                <a16:creationId xmlns:a16="http://schemas.microsoft.com/office/drawing/2014/main" id="{6874B7AE-8E95-4C73-8424-DBB244258C50}"/>
               </a:ext>
             </a:extLst>
           </p:cNvPr>
@@ -18242,7 +18879,7 @@
           <p:cNvPr id="38" name="">
             <a:extLst xmlns:a="http://schemas.openxmlformats.org/drawingml/2006/main">
               <a:ext uri="{FF2B5EF4-FFF2-40B4-BE49-F238E27FC236}">
-                <a16:creationId xmlns:a16="http://schemas.microsoft.com/office/drawing/2014/main" id="{6A768BD2-710B-4D19-A15E-89769991BB00}"/>
+                <a16:creationId xmlns:a16="http://schemas.microsoft.com/office/drawing/2014/main" id="{B6E83861-1096-4750-B1D5-0000D1BB654E}"/>
               </a:ext>
             </a:extLst>
           </p:cNvPr>
@@ -18275,7 +18912,7 @@
           <p:cNvPr id="39" name="7">
             <a:extLst xmlns:a="http://schemas.openxmlformats.org/drawingml/2006/main">
               <a:ext uri="{FF2B5EF4-FFF2-40B4-BE49-F238E27FC236}">
-                <a16:creationId xmlns:a16="http://schemas.microsoft.com/office/drawing/2014/main" id="{F596A7BC-13C4-4889-BF33-6237EA2117C8}"/>
+                <a16:creationId xmlns:a16="http://schemas.microsoft.com/office/drawing/2014/main" id="{AB0244F9-6015-4A5F-8945-7C07BE674E69}"/>
               </a:ext>
             </a:extLst>
           </p:cNvPr>
@@ -18433,7 +19070,7 @@
           <p:cNvPr id="40" name="구현 결과">
             <a:extLst xmlns:a="http://schemas.openxmlformats.org/drawingml/2006/main">
               <a:ext uri="{FF2B5EF4-FFF2-40B4-BE49-F238E27FC236}">
-                <a16:creationId xmlns:a16="http://schemas.microsoft.com/office/drawing/2014/main" id="{7BE2C592-D8A4-4275-95BD-54A198C4DA77}"/>
+                <a16:creationId xmlns:a16="http://schemas.microsoft.com/office/drawing/2014/main" id="{91CAAAD0-9848-4B64-8EDC-6A69D18A412B}"/>
               </a:ext>
             </a:extLst>
           </p:cNvPr>
@@ -18591,7 +19228,7 @@
           <p:cNvPr id="41" name="">
             <a:extLst xmlns:a="http://schemas.openxmlformats.org/drawingml/2006/main">
               <a:ext uri="{FF2B5EF4-FFF2-40B4-BE49-F238E27FC236}">
-                <a16:creationId xmlns:a16="http://schemas.microsoft.com/office/drawing/2014/main" id="{ABF1BC1F-F3D0-4826-94CB-291354B44D99}"/>
+                <a16:creationId xmlns:a16="http://schemas.microsoft.com/office/drawing/2014/main" id="{52596742-9E92-4CBB-8CF3-920A1465E7D3}"/>
               </a:ext>
             </a:extLst>
           </p:cNvPr>
@@ -18624,7 +19261,7 @@
           <p:cNvPr id="42" name="2">
             <a:extLst xmlns:a="http://schemas.openxmlformats.org/drawingml/2006/main">
               <a:ext uri="{FF2B5EF4-FFF2-40B4-BE49-F238E27FC236}">
-                <a16:creationId xmlns:a16="http://schemas.microsoft.com/office/drawing/2014/main" id="{41A8DE41-10CA-4E0A-B822-33C83D657513}"/>
+                <a16:creationId xmlns:a16="http://schemas.microsoft.com/office/drawing/2014/main" id="{BA703FA2-B3D2-4899-9295-F57D279FF667}"/>
               </a:ext>
             </a:extLst>
           </p:cNvPr>
@@ -18782,7 +19419,7 @@
           <p:cNvPr id="43" name="">
             <a:extLst xmlns:a="http://schemas.openxmlformats.org/drawingml/2006/main">
               <a:ext uri="{FF2B5EF4-FFF2-40B4-BE49-F238E27FC236}">
-                <a16:creationId xmlns:a16="http://schemas.microsoft.com/office/drawing/2014/main" id="{842528E0-6510-4992-A5AF-A9E1694D0CDB}"/>
+                <a16:creationId xmlns:a16="http://schemas.microsoft.com/office/drawing/2014/main" id="{591F6F03-D798-4F2A-8020-99B4F5CD1690}"/>
               </a:ext>
             </a:extLst>
           </p:cNvPr>
@@ -18815,7 +19452,7 @@
           <p:cNvPr id="44" name="3">
             <a:extLst xmlns:a="http://schemas.openxmlformats.org/drawingml/2006/main">
               <a:ext uri="{FF2B5EF4-FFF2-40B4-BE49-F238E27FC236}">
-                <a16:creationId xmlns:a16="http://schemas.microsoft.com/office/drawing/2014/main" id="{4015365F-186A-4D63-8A7B-57924780F169}"/>
+                <a16:creationId xmlns:a16="http://schemas.microsoft.com/office/drawing/2014/main" id="{FAD40835-8959-4864-8CAD-FDB0E051AAE9}"/>
               </a:ext>
             </a:extLst>
           </p:cNvPr>
@@ -18973,7 +19610,7 @@
           <p:cNvPr id="45" name="">
             <a:extLst xmlns:a="http://schemas.openxmlformats.org/drawingml/2006/main">
               <a:ext uri="{FF2B5EF4-FFF2-40B4-BE49-F238E27FC236}">
-                <a16:creationId xmlns:a16="http://schemas.microsoft.com/office/drawing/2014/main" id="{66E01B19-5ED3-4B2D-8B33-2FD7D0AD767A}"/>
+                <a16:creationId xmlns:a16="http://schemas.microsoft.com/office/drawing/2014/main" id="{B3177E27-B9EF-4BE3-8273-538251FEEC5B}"/>
               </a:ext>
             </a:extLst>
           </p:cNvPr>
@@ -19006,7 +19643,7 @@
           <p:cNvPr id="46" name="4">
             <a:extLst xmlns:a="http://schemas.openxmlformats.org/drawingml/2006/main">
               <a:ext uri="{FF2B5EF4-FFF2-40B4-BE49-F238E27FC236}">
-                <a16:creationId xmlns:a16="http://schemas.microsoft.com/office/drawing/2014/main" id="{D6DD83FD-D7FC-4959-BCAF-2E1801DE8982}"/>
+                <a16:creationId xmlns:a16="http://schemas.microsoft.com/office/drawing/2014/main" id="{DC735CF5-1F1A-42F5-82EC-BD1A6307DD5A}"/>
               </a:ext>
             </a:extLst>
           </p:cNvPr>
@@ -19164,7 +19801,7 @@
           <p:cNvPr id="47" name="">
             <a:extLst xmlns:a="http://schemas.openxmlformats.org/drawingml/2006/main">
               <a:ext uri="{FF2B5EF4-FFF2-40B4-BE49-F238E27FC236}">
-                <a16:creationId xmlns:a16="http://schemas.microsoft.com/office/drawing/2014/main" id="{5C564E35-BA00-45C3-9324-C2FAC57DCD24}"/>
+                <a16:creationId xmlns:a16="http://schemas.microsoft.com/office/drawing/2014/main" id="{95E98B1C-EEB7-4665-B9DE-9756D9EDB1FB}"/>
               </a:ext>
             </a:extLst>
           </p:cNvPr>
@@ -19197,7 +19834,7 @@
           <p:cNvPr id="48" name="6">
             <a:extLst xmlns:a="http://schemas.openxmlformats.org/drawingml/2006/main">
               <a:ext uri="{FF2B5EF4-FFF2-40B4-BE49-F238E27FC236}">
-                <a16:creationId xmlns:a16="http://schemas.microsoft.com/office/drawing/2014/main" id="{53128EEE-89ED-4312-913D-F424B383775B}"/>
+                <a16:creationId xmlns:a16="http://schemas.microsoft.com/office/drawing/2014/main" id="{38A203BD-E7FA-4B0D-8EE8-77A00A2C3CFD}"/>
               </a:ext>
             </a:extLst>
           </p:cNvPr>
@@ -19355,7 +19992,7 @@
           <p:cNvPr id="49" name="">
             <a:extLst xmlns:a="http://schemas.openxmlformats.org/drawingml/2006/main">
               <a:ext uri="{FF2B5EF4-FFF2-40B4-BE49-F238E27FC236}">
-                <a16:creationId xmlns:a16="http://schemas.microsoft.com/office/drawing/2014/main" id="{BE279224-96D4-4D9B-9BD1-A13864E04845}"/>
+                <a16:creationId xmlns:a16="http://schemas.microsoft.com/office/drawing/2014/main" id="{DF08531C-512B-4B2E-B3A7-C0C9EDD921D9}"/>
               </a:ext>
             </a:extLst>
           </p:cNvPr>
@@ -19388,7 +20025,7 @@
           <p:cNvPr id="50" name="7">
             <a:extLst xmlns:a="http://schemas.openxmlformats.org/drawingml/2006/main">
               <a:ext uri="{FF2B5EF4-FFF2-40B4-BE49-F238E27FC236}">
-                <a16:creationId xmlns:a16="http://schemas.microsoft.com/office/drawing/2014/main" id="{533AD69C-4587-4E4B-A571-D8BB4D129192}"/>
+                <a16:creationId xmlns:a16="http://schemas.microsoft.com/office/drawing/2014/main" id="{08A5D51A-B027-4D8A-82CE-F1976A49B8BC}"/>
               </a:ext>
             </a:extLst>
           </p:cNvPr>
@@ -19546,7 +20183,7 @@
           <p:cNvPr id="51" name="">
             <a:extLst xmlns:a="http://schemas.openxmlformats.org/drawingml/2006/main">
               <a:ext uri="{FF2B5EF4-FFF2-40B4-BE49-F238E27FC236}">
-                <a16:creationId xmlns:a16="http://schemas.microsoft.com/office/drawing/2014/main" id="{3E524C95-181A-4580-8EEF-9D50A4D3D8D4}"/>
+                <a16:creationId xmlns:a16="http://schemas.microsoft.com/office/drawing/2014/main" id="{BB00271F-4214-46F3-9C52-7F1605F5759E}"/>
               </a:ext>
             </a:extLst>
           </p:cNvPr>
@@ -19579,7 +20216,7 @@
           <p:cNvPr id="52" name="8">
             <a:extLst xmlns:a="http://schemas.openxmlformats.org/drawingml/2006/main">
               <a:ext uri="{FF2B5EF4-FFF2-40B4-BE49-F238E27FC236}">
-                <a16:creationId xmlns:a16="http://schemas.microsoft.com/office/drawing/2014/main" id="{74581E97-EE16-4BE3-B75D-3145B5A5A038}"/>
+                <a16:creationId xmlns:a16="http://schemas.microsoft.com/office/drawing/2014/main" id="{A5CF0F58-8356-4E4D-B59F-0269FF19D351}"/>
               </a:ext>
             </a:extLst>
           </p:cNvPr>
@@ -19737,7 +20374,7 @@
           <p:cNvPr id="53" name="한 열이 더 포함됨">
             <a:extLst xmlns:a="http://schemas.openxmlformats.org/drawingml/2006/main">
               <a:ext uri="{FF2B5EF4-FFF2-40B4-BE49-F238E27FC236}">
-                <a16:creationId xmlns:a16="http://schemas.microsoft.com/office/drawing/2014/main" id="{F12889A6-9D8B-4D98-A61D-5AB8ED8D3241}"/>
+                <a16:creationId xmlns:a16="http://schemas.microsoft.com/office/drawing/2014/main" id="{DDB5DC87-8E62-40C8-AC3A-71C21C585171}"/>
               </a:ext>
             </a:extLst>
           </p:cNvPr>
@@ -19895,7 +20532,7 @@
           <p:cNvPr id="54" name="">
             <a:extLst xmlns:a="http://schemas.openxmlformats.org/drawingml/2006/main">
               <a:ext uri="{FF2B5EF4-FFF2-40B4-BE49-F238E27FC236}">
-                <a16:creationId xmlns:a16="http://schemas.microsoft.com/office/drawing/2014/main" id="{11F0CE93-5773-4E02-A9BD-FDB48DDECFA6}"/>
+                <a16:creationId xmlns:a16="http://schemas.microsoft.com/office/drawing/2014/main" id="{506211F5-1C31-41E9-BE48-62A7143F5177}"/>
               </a:ext>
             </a:extLst>
           </p:cNvPr>
@@ -19926,7 +20563,7 @@
           <p:cNvPr id="55" name="조사에서 연결한 근거">
             <a:extLst xmlns:a="http://schemas.openxmlformats.org/drawingml/2006/main">
               <a:ext uri="{FF2B5EF4-FFF2-40B4-BE49-F238E27FC236}">
-                <a16:creationId xmlns:a16="http://schemas.microsoft.com/office/drawing/2014/main" id="{8FC1E815-DB1C-457A-9E2A-1938D4A4AB67}"/>
+                <a16:creationId xmlns:a16="http://schemas.microsoft.com/office/drawing/2014/main" id="{123DED55-4AFE-4C76-BDF3-C381C84CEFE9}"/>
               </a:ext>
             </a:extLst>
           </p:cNvPr>
@@ -20084,7 +20721,7 @@
           <p:cNvPr id="56" name="01  실패 테스트">
             <a:extLst xmlns:a="http://schemas.openxmlformats.org/drawingml/2006/main">
               <a:ext uri="{FF2B5EF4-FFF2-40B4-BE49-F238E27FC236}">
-                <a16:creationId xmlns:a16="http://schemas.microsoft.com/office/drawing/2014/main" id="{D32960B7-290C-417F-BFA6-F56BF94272E4}"/>
+                <a16:creationId xmlns:a16="http://schemas.microsoft.com/office/drawing/2014/main" id="{81DB0144-66F1-48E7-B0ED-B7EBBB87CD25}"/>
               </a:ext>
             </a:extLst>
           </p:cNvPr>
@@ -20242,7 +20879,7 @@
           <p:cNvPr id="57" name="test_crop_excludes_&#10;end_coordinate">
             <a:extLst xmlns:a="http://schemas.openxmlformats.org/drawingml/2006/main">
               <a:ext uri="{FF2B5EF4-FFF2-40B4-BE49-F238E27FC236}">
-                <a16:creationId xmlns:a16="http://schemas.microsoft.com/office/drawing/2014/main" id="{88D91FCF-100B-473B-9C7B-765EB4A7E886}"/>
+                <a16:creationId xmlns:a16="http://schemas.microsoft.com/office/drawing/2014/main" id="{3E6B3CCF-E056-4E6C-9C20-FB75DACB52BC}"/>
               </a:ext>
             </a:extLst>
           </p:cNvPr>
@@ -20423,7 +21060,7 @@
           <p:cNvPr id="58" name="02  제품의 호출 경로">
             <a:extLst xmlns:a="http://schemas.openxmlformats.org/drawingml/2006/main">
               <a:ext uri="{FF2B5EF4-FFF2-40B4-BE49-F238E27FC236}">
-                <a16:creationId xmlns:a16="http://schemas.microsoft.com/office/drawing/2014/main" id="{74425C27-DC90-4A4D-A6E8-792C5D5A1F09}"/>
+                <a16:creationId xmlns:a16="http://schemas.microsoft.com/office/drawing/2014/main" id="{619E73A9-A98C-40F1-A37C-F5B12B50CBD0}"/>
               </a:ext>
             </a:extLst>
           </p:cNvPr>
@@ -20581,7 +21218,7 @@
           <p:cNvPr id="59" name="cli.main → process_image → crop">
             <a:extLst xmlns:a="http://schemas.openxmlformats.org/drawingml/2006/main">
               <a:ext uri="{FF2B5EF4-FFF2-40B4-BE49-F238E27FC236}">
-                <a16:creationId xmlns:a16="http://schemas.microsoft.com/office/drawing/2014/main" id="{CB3C743E-8383-4E95-941E-2D646CD7E602}"/>
+                <a16:creationId xmlns:a16="http://schemas.microsoft.com/office/drawing/2014/main" id="{07A1F37C-58D2-470F-B21F-17A94B520DE6}"/>
               </a:ext>
             </a:extLst>
           </p:cNvPr>
@@ -20739,7 +21376,7 @@
           <p:cNvPr id="60" name="03  계약과 다른 구현">
             <a:extLst xmlns:a="http://schemas.openxmlformats.org/drawingml/2006/main">
               <a:ext uri="{FF2B5EF4-FFF2-40B4-BE49-F238E27FC236}">
-                <a16:creationId xmlns:a16="http://schemas.microsoft.com/office/drawing/2014/main" id="{214B7ED6-D33B-4708-8CF0-1523E75DB274}"/>
+                <a16:creationId xmlns:a16="http://schemas.microsoft.com/office/drawing/2014/main" id="{CAB17B27-C025-42BA-9FE3-7A39E8EBA5C3}"/>
               </a:ext>
             </a:extLst>
           </p:cNvPr>
@@ -20897,7 +21534,7 @@
           <p:cNvPr id="61" name="row[x_start : x_end + 1]">
             <a:extLst xmlns:a="http://schemas.openxmlformats.org/drawingml/2006/main">
               <a:ext uri="{FF2B5EF4-FFF2-40B4-BE49-F238E27FC236}">
-                <a16:creationId xmlns:a16="http://schemas.microsoft.com/office/drawing/2014/main" id="{26B41980-4D8D-476A-9BEC-CAF3560EC31A}"/>
+                <a16:creationId xmlns:a16="http://schemas.microsoft.com/office/drawing/2014/main" id="{FCBB739B-D2BD-4F06-9CB5-9A6CB1D377C9}"/>
               </a:ext>
             </a:extLst>
           </p:cNvPr>
@@ -21055,7 +21692,7 @@
           <p:cNvPr id="62" name="계약: [x_start, x_end)">
             <a:extLst xmlns:a="http://schemas.openxmlformats.org/drawingml/2006/main">
               <a:ext uri="{FF2B5EF4-FFF2-40B4-BE49-F238E27FC236}">
-                <a16:creationId xmlns:a16="http://schemas.microsoft.com/office/drawing/2014/main" id="{21B2993B-6B11-4C6B-8946-8221435773B2}"/>
+                <a16:creationId xmlns:a16="http://schemas.microsoft.com/office/drawing/2014/main" id="{6ACBC565-CAA9-4B0A-9F14-46C2605CF475}"/>
               </a:ext>
             </a:extLst>
           </p:cNvPr>
@@ -21208,10 +21845,168 @@
           </a:p>
         </p:txBody>
       </p:sp>
+      <p:sp>
+        <p:nvSpPr>
+          <p:cNvPr id="63" name="Legacy module connection">
+            <a:extLst xmlns:a="http://schemas.openxmlformats.org/drawingml/2006/main">
+              <a:ext uri="{FF2B5EF4-FFF2-40B4-BE49-F238E27FC236}">
+                <a16:creationId xmlns:a16="http://schemas.microsoft.com/office/drawing/2014/main" id="{0B98CFA3-BA6F-48BA-95FB-6685BD787959}"/>
+              </a:ext>
+            </a:extLst>
+          </p:cNvPr>
+          <p:cNvSpPr>
+            <a:spLocks xmlns:a="http://schemas.openxmlformats.org/drawingml/2006/main" noGrp="1"/>
+          </p:cNvSpPr>
+          <p:nvPr/>
+        </p:nvSpPr>
+        <p:spPr>
+          <a:xfrm xmlns:a="http://schemas.openxmlformats.org/drawingml/2006/main">
+            <a:off x="609600" y="6229350"/>
+            <a:ext cx="10972800" cy="171450"/>
+          </a:xfrm>
+          <a:prstGeom xmlns:a="http://schemas.openxmlformats.org/drawingml/2006/main" prst="rect">
+            <a:avLst/>
+          </a:prstGeom>
+          <a:noFill xmlns:a="http://schemas.openxmlformats.org/drawingml/2006/main"/>
+          <a:ln xmlns:a="http://schemas.openxmlformats.org/drawingml/2006/main" w="0">
+            <a:noFill/>
+          </a:ln>
+        </p:spPr>
+        <p:txBody>
+          <a:bodyPr xmlns:a="http://schemas.openxmlformats.org/drawingml/2006/main" wrap="none" lIns="0" tIns="0" rIns="0" bIns="0" anchor="ctr">
+            <a:noAutofit/>
+          </a:bodyPr>
+          <a:lstStyle xmlns:a="http://schemas.openxmlformats.org/drawingml/2006/main">
+            <a:defPPr algn="r">
+              <a:defRPr sz="1200" b="0">
+                <a:solidFill>
+                  <a:srgbClr val="4D5A68"/>
+                </a:solidFill>
+                <a:latin typeface="Malgun Gothic"/>
+                <a:ea typeface="Malgun Gothic"/>
+                <a:cs typeface="Malgun Gothic"/>
+              </a:defRPr>
+            </a:defPPr>
+            <a:lvl1pPr algn="r">
+              <a:defRPr sz="1200" b="0">
+                <a:solidFill>
+                  <a:srgbClr val="4D5A68"/>
+                </a:solidFill>
+                <a:latin typeface="Malgun Gothic"/>
+                <a:ea typeface="Malgun Gothic"/>
+                <a:cs typeface="Malgun Gothic"/>
+              </a:defRPr>
+            </a:lvl1pPr>
+            <a:lvl2pPr algn="r">
+              <a:defRPr sz="1200" b="0">
+                <a:solidFill>
+                  <a:srgbClr val="4D5A68"/>
+                </a:solidFill>
+                <a:latin typeface="Malgun Gothic"/>
+                <a:ea typeface="Malgun Gothic"/>
+                <a:cs typeface="Malgun Gothic"/>
+              </a:defRPr>
+            </a:lvl2pPr>
+            <a:lvl3pPr algn="r">
+              <a:defRPr sz="1200" b="0">
+                <a:solidFill>
+                  <a:srgbClr val="4D5A68"/>
+                </a:solidFill>
+                <a:latin typeface="Malgun Gothic"/>
+                <a:ea typeface="Malgun Gothic"/>
+                <a:cs typeface="Malgun Gothic"/>
+              </a:defRPr>
+            </a:lvl3pPr>
+            <a:lvl4pPr algn="r">
+              <a:defRPr sz="1200" b="0">
+                <a:solidFill>
+                  <a:srgbClr val="4D5A68"/>
+                </a:solidFill>
+                <a:latin typeface="Malgun Gothic"/>
+                <a:ea typeface="Malgun Gothic"/>
+                <a:cs typeface="Malgun Gothic"/>
+              </a:defRPr>
+            </a:lvl4pPr>
+            <a:lvl5pPr algn="r">
+              <a:defRPr sz="1200" b="0">
+                <a:solidFill>
+                  <a:srgbClr val="4D5A68"/>
+                </a:solidFill>
+                <a:latin typeface="Malgun Gothic"/>
+                <a:ea typeface="Malgun Gothic"/>
+                <a:cs typeface="Malgun Gothic"/>
+              </a:defRPr>
+            </a:lvl5pPr>
+            <a:lvl6pPr algn="r">
+              <a:defRPr sz="1200" b="0">
+                <a:solidFill>
+                  <a:srgbClr val="4D5A68"/>
+                </a:solidFill>
+                <a:latin typeface="Malgun Gothic"/>
+                <a:ea typeface="Malgun Gothic"/>
+                <a:cs typeface="Malgun Gothic"/>
+              </a:defRPr>
+            </a:lvl6pPr>
+            <a:lvl7pPr algn="r">
+              <a:defRPr sz="1200" b="0">
+                <a:solidFill>
+                  <a:srgbClr val="4D5A68"/>
+                </a:solidFill>
+                <a:latin typeface="Malgun Gothic"/>
+                <a:ea typeface="Malgun Gothic"/>
+                <a:cs typeface="Malgun Gothic"/>
+              </a:defRPr>
+            </a:lvl7pPr>
+            <a:lvl8pPr algn="r">
+              <a:defRPr sz="1200" b="0">
+                <a:solidFill>
+                  <a:srgbClr val="4D5A68"/>
+                </a:solidFill>
+                <a:latin typeface="Malgun Gothic"/>
+                <a:ea typeface="Malgun Gothic"/>
+                <a:cs typeface="Malgun Gothic"/>
+              </a:defRPr>
+            </a:lvl8pPr>
+            <a:lvl9pPr algn="r">
+              <a:defRPr sz="1200" b="0">
+                <a:solidFill>
+                  <a:srgbClr val="4D5A68"/>
+                </a:solidFill>
+                <a:latin typeface="Malgun Gothic"/>
+                <a:ea typeface="Malgun Gothic"/>
+                <a:cs typeface="Malgun Gothic"/>
+              </a:defRPr>
+            </a:lvl9pPr>
+          </a:lstStyle>
+          <a:p xmlns:a="http://schemas.openxmlformats.org/drawingml/2006/main">
+            <a:pPr algn="r">
+              <a:defRPr sz="1200" b="0">
+                <a:solidFill>
+                  <a:srgbClr val="4D5A68"/>
+                </a:solidFill>
+                <a:latin typeface="Malgun Gothic"/>
+                <a:ea typeface="Malgun Gothic"/>
+                <a:cs typeface="Malgun Gothic"/>
+              </a:defRPr>
+            </a:pPr>
+            <a:r>
+              <a:rPr sz="1200" b="0">
+                <a:solidFill>
+                  <a:srgbClr val="4D5A68"/>
+                </a:solidFill>
+                <a:latin typeface="Malgun Gothic"/>
+                <a:ea typeface="Malgun Gothic"/>
+                <a:cs typeface="Malgun Gothic"/>
+              </a:rPr>
+              <a:t>M 연계 · M5 · M6</a:t>
+            </a:r>
+          </a:p>
+        </p:txBody>
+      </p:sp>
     </p:spTree>
     <p:extLst>
       <p:ext uri="{BB962C8B-B14F-4D97-AF65-F5344CB8AC3E}">
-        <p14:creationId xmlns:p14="http://schemas.microsoft.com/office/powerpoint/2010/main" val="1470115050"/>
+        <p14:creationId xmlns:p14="http://schemas.microsoft.com/office/powerpoint/2010/main" val="1562077318"/>
       </p:ext>
     </p:extLst>
   </p:cSld>
@@ -21239,10 +22034,10 @@
       </p:grpSpPr>
       <p:sp>
         <p:nvSpPr>
-          <p:cNvPr id="17" name="ACT 0 · 조사 결과 읽기">
+          <p:cNvPr id="18" name="ACT 0 · 조사 결과 읽기">
             <a:extLst xmlns:a="http://schemas.openxmlformats.org/drawingml/2006/main">
               <a:ext uri="{FF2B5EF4-FFF2-40B4-BE49-F238E27FC236}">
-                <a16:creationId xmlns:a16="http://schemas.microsoft.com/office/drawing/2014/main" id="{8FB1803A-62DC-4595-8C9A-4DE716C6EA7E}"/>
+                <a16:creationId xmlns:a16="http://schemas.microsoft.com/office/drawing/2014/main" id="{F27897F9-AB3C-434A-9BB6-E050ADC48C96}"/>
               </a:ext>
             </a:extLst>
           </p:cNvPr>
@@ -21400,7 +22195,7 @@
           <p:cNvPr id="2" name="S06">
             <a:extLst xmlns:a="http://schemas.openxmlformats.org/drawingml/2006/main">
               <a:ext uri="{FF2B5EF4-FFF2-40B4-BE49-F238E27FC236}">
-                <a16:creationId xmlns:a16="http://schemas.microsoft.com/office/drawing/2014/main" id="{559DF794-AB07-4218-8B4A-87D3BE98EA9F}"/>
+                <a16:creationId xmlns:a16="http://schemas.microsoft.com/office/drawing/2014/main" id="{FF9B136A-6549-4152-AE86-BC8FFB5534A1}"/>
               </a:ext>
             </a:extLst>
           </p:cNvPr>
@@ -21558,7 +22353,7 @@
           <p:cNvPr id="3" name="관찰 결과와 실행 제한을 분리한다">
             <a:extLst xmlns:a="http://schemas.openxmlformats.org/drawingml/2006/main">
               <a:ext uri="{FF2B5EF4-FFF2-40B4-BE49-F238E27FC236}">
-                <a16:creationId xmlns:a16="http://schemas.microsoft.com/office/drawing/2014/main" id="{BB5CAA6F-470E-46A2-B5A8-85A1687AE682}"/>
+                <a16:creationId xmlns:a16="http://schemas.microsoft.com/office/drawing/2014/main" id="{668BE7BF-75A4-4485-90B1-32C6C8929835}"/>
               </a:ext>
             </a:extLst>
           </p:cNvPr>
@@ -21716,7 +22511,7 @@
           <p:cNvPr id="4" name="">
             <a:extLst xmlns:a="http://schemas.openxmlformats.org/drawingml/2006/main">
               <a:ext uri="{FF2B5EF4-FFF2-40B4-BE49-F238E27FC236}">
-                <a16:creationId xmlns:a16="http://schemas.microsoft.com/office/drawing/2014/main" id="{E855CD61-A384-4CB5-A4CB-5F4386FD67B6}"/>
+                <a16:creationId xmlns:a16="http://schemas.microsoft.com/office/drawing/2014/main" id="{44913FAB-4985-40CF-9091-BDEBD6DCAB85}"/>
               </a:ext>
             </a:extLst>
           </p:cNvPr>
@@ -21727,7 +22522,7 @@
         </p:nvSpPr>
         <p:spPr>
           <a:xfrm xmlns:a="http://schemas.openxmlformats.org/drawingml/2006/main">
-            <a:off x="609600" y="5829300"/>
+            <a:off x="609600" y="5753100"/>
             <a:ext cx="10972800" cy="0"/>
           </a:xfrm>
           <a:prstGeom xmlns:a="http://schemas.openxmlformats.org/drawingml/2006/main" prst="line">
@@ -21747,7 +22542,7 @@
           <p:cNvPr id="5" name="TRIAL-001 기록 재구성 · Codex CLI 0.154.0 · 단일 읽기 전용 조사">
             <a:extLst xmlns:a="http://schemas.openxmlformats.org/drawingml/2006/main">
               <a:ext uri="{FF2B5EF4-FFF2-40B4-BE49-F238E27FC236}">
-                <a16:creationId xmlns:a16="http://schemas.microsoft.com/office/drawing/2014/main" id="{4F722E5B-0872-486F-B368-6AE21DCB66C0}"/>
+                <a16:creationId xmlns:a16="http://schemas.microsoft.com/office/drawing/2014/main" id="{D9959EFB-1CA7-4EC7-891C-085DB2F2A3F6}"/>
               </a:ext>
             </a:extLst>
           </p:cNvPr>
@@ -21758,8 +22553,8 @@
         </p:nvSpPr>
         <p:spPr>
           <a:xfrm xmlns:a="http://schemas.openxmlformats.org/drawingml/2006/main">
-            <a:off x="609600" y="5915025"/>
-            <a:ext cx="10972800" cy="247650"/>
+            <a:off x="609600" y="5791200"/>
+            <a:ext cx="10972800" cy="228600"/>
           </a:xfrm>
           <a:prstGeom xmlns:a="http://schemas.openxmlformats.org/drawingml/2006/main" prst="rect">
             <a:avLst/>
@@ -21905,7 +22700,7 @@
           <p:cNvPr id="6" name="환경 오류 3건은 crop 결함의 증거가 아닙니다. 이 조사에서 코드는 수정하지 않았습니다.">
             <a:extLst xmlns:a="http://schemas.openxmlformats.org/drawingml/2006/main">
               <a:ext uri="{FF2B5EF4-FFF2-40B4-BE49-F238E27FC236}">
-                <a16:creationId xmlns:a16="http://schemas.microsoft.com/office/drawing/2014/main" id="{93866C2D-A945-40C2-8930-ADD0F8FB1CD0}"/>
+                <a16:creationId xmlns:a16="http://schemas.microsoft.com/office/drawing/2014/main" id="{4B67AAF0-E311-4016-819E-A7694D4C90B0}"/>
               </a:ext>
             </a:extLst>
           </p:cNvPr>
@@ -21916,7 +22711,7 @@
         </p:nvSpPr>
         <p:spPr>
           <a:xfrm xmlns:a="http://schemas.openxmlformats.org/drawingml/2006/main">
-            <a:off x="609600" y="6191250"/>
+            <a:off x="609600" y="6019800"/>
             <a:ext cx="10972800" cy="209550"/>
           </a:xfrm>
           <a:prstGeom xmlns:a="http://schemas.openxmlformats.org/drawingml/2006/main" prst="rect">
@@ -22063,7 +22858,7 @@
           <p:cNvPr id="7" name="코드에서 확인한 문제">
             <a:extLst xmlns:a="http://schemas.openxmlformats.org/drawingml/2006/main">
               <a:ext uri="{FF2B5EF4-FFF2-40B4-BE49-F238E27FC236}">
-                <a16:creationId xmlns:a16="http://schemas.microsoft.com/office/drawing/2014/main" id="{74242780-6E11-48BF-84FF-A51F3F1AFC48}"/>
+                <a16:creationId xmlns:a16="http://schemas.microsoft.com/office/drawing/2014/main" id="{BBDA64F0-F822-40C0-BCA9-8DF26E14EB25}"/>
               </a:ext>
             </a:extLst>
           </p:cNvPr>
@@ -22221,7 +23016,7 @@
           <p:cNvPr id="8" name="실행 환경에서 생긴 제한">
             <a:extLst xmlns:a="http://schemas.openxmlformats.org/drawingml/2006/main">
               <a:ext uri="{FF2B5EF4-FFF2-40B4-BE49-F238E27FC236}">
-                <a16:creationId xmlns:a16="http://schemas.microsoft.com/office/drawing/2014/main" id="{0D6ED851-9893-4703-A9FE-67652915AA0E}"/>
+                <a16:creationId xmlns:a16="http://schemas.microsoft.com/office/drawing/2014/main" id="{7A20EA63-D5D6-4777-A7F3-26C4F1EE3B34}"/>
               </a:ext>
             </a:extLst>
           </p:cNvPr>
@@ -22379,7 +23174,7 @@
           <p:cNvPr id="9" name="">
             <a:extLst xmlns:a="http://schemas.openxmlformats.org/drawingml/2006/main">
               <a:ext uri="{FF2B5EF4-FFF2-40B4-BE49-F238E27FC236}">
-                <a16:creationId xmlns:a16="http://schemas.microsoft.com/office/drawing/2014/main" id="{8CC49B84-6C83-47DB-9216-1B3503B744A0}"/>
+                <a16:creationId xmlns:a16="http://schemas.microsoft.com/office/drawing/2014/main" id="{C51F26C1-9D59-45D9-BC93-BB314C151DAC}"/>
               </a:ext>
             </a:extLst>
           </p:cNvPr>
@@ -22412,7 +23207,7 @@
           <p:cNvPr id="10" name="">
             <a:extLst xmlns:a="http://schemas.openxmlformats.org/drawingml/2006/main">
               <a:ext uri="{FF2B5EF4-FFF2-40B4-BE49-F238E27FC236}">
-                <a16:creationId xmlns:a16="http://schemas.microsoft.com/office/drawing/2014/main" id="{2D471211-ECAF-4E0C-886A-5C381B2672B7}"/>
+                <a16:creationId xmlns:a16="http://schemas.microsoft.com/office/drawing/2014/main" id="{D29BA189-1125-49C7-9E1B-CABBEE8DF014}"/>
               </a:ext>
             </a:extLst>
           </p:cNvPr>
@@ -22443,7 +23238,7 @@
           <p:cNvPr id="11" name="crop에 한 열이 더 포함됨">
             <a:extLst xmlns:a="http://schemas.openxmlformats.org/drawingml/2006/main">
               <a:ext uri="{FF2B5EF4-FFF2-40B4-BE49-F238E27FC236}">
-                <a16:creationId xmlns:a16="http://schemas.microsoft.com/office/drawing/2014/main" id="{E4B665C6-AFD1-4293-B2DE-B1DA1730987E}"/>
+                <a16:creationId xmlns:a16="http://schemas.microsoft.com/office/drawing/2014/main" id="{874321DA-51F7-45CD-B3E7-EE3096097B39}"/>
               </a:ext>
             </a:extLst>
           </p:cNvPr>
@@ -22601,7 +23396,7 @@
           <p:cNvPr id="12" name="테스트·호출 경로·계약 연결&#10;원인 설명 / 코드 수정 없음">
             <a:extLst xmlns:a="http://schemas.openxmlformats.org/drawingml/2006/main">
               <a:ext uri="{FF2B5EF4-FFF2-40B4-BE49-F238E27FC236}">
-                <a16:creationId xmlns:a16="http://schemas.microsoft.com/office/drawing/2014/main" id="{4000687F-9CFC-4220-A9CB-63219E328D24}"/>
+                <a16:creationId xmlns:a16="http://schemas.microsoft.com/office/drawing/2014/main" id="{05012E6F-8A04-4460-BE75-F5C58C78C151}"/>
               </a:ext>
             </a:extLst>
           </p:cNvPr>
@@ -22782,7 +23577,7 @@
           <p:cNvPr id="13" name="임시 디렉터리를 만들 수 없음">
             <a:extLst xmlns:a="http://schemas.openxmlformats.org/drawingml/2006/main">
               <a:ext uri="{FF2B5EF4-FFF2-40B4-BE49-F238E27FC236}">
-                <a16:creationId xmlns:a16="http://schemas.microsoft.com/office/drawing/2014/main" id="{D11170B4-5388-429E-944E-895FB8428698}"/>
+                <a16:creationId xmlns:a16="http://schemas.microsoft.com/office/drawing/2014/main" id="{76FE49E3-E79C-4807-B157-C1E5243B4DA6}"/>
               </a:ext>
             </a:extLst>
           </p:cNvPr>
@@ -22940,7 +23735,7 @@
           <p:cNvPr id="14" name="읽기 전용 권한 때문에&#10;서로 다른 테스트 3건이 오류">
             <a:extLst xmlns:a="http://schemas.openxmlformats.org/drawingml/2006/main">
               <a:ext uri="{FF2B5EF4-FFF2-40B4-BE49-F238E27FC236}">
-                <a16:creationId xmlns:a16="http://schemas.microsoft.com/office/drawing/2014/main" id="{30173CBE-D135-48E2-A2EB-C01C0D270B08}"/>
+                <a16:creationId xmlns:a16="http://schemas.microsoft.com/office/drawing/2014/main" id="{6AFE3F3B-8D10-4E5E-A677-7CE7D542C973}"/>
               </a:ext>
             </a:extLst>
           </p:cNvPr>
@@ -23121,7 +23916,7 @@
           <p:cNvPr id="15" name="">
             <a:extLst xmlns:a="http://schemas.openxmlformats.org/drawingml/2006/main">
               <a:ext uri="{FF2B5EF4-FFF2-40B4-BE49-F238E27FC236}">
-                <a16:creationId xmlns:a16="http://schemas.microsoft.com/office/drawing/2014/main" id="{97765F9F-A606-499D-9BFD-DFE2B8AA7121}"/>
+                <a16:creationId xmlns:a16="http://schemas.microsoft.com/office/drawing/2014/main" id="{B2F074A9-F540-48F8-A68B-635B16269112}"/>
               </a:ext>
             </a:extLst>
           </p:cNvPr>
@@ -23152,7 +23947,7 @@
           <p:cNvPr id="16" name="전체 실행 기록: 7개 통과 + crop 실패 + 환경 오류 3건">
             <a:extLst xmlns:a="http://schemas.openxmlformats.org/drawingml/2006/main">
               <a:ext uri="{FF2B5EF4-FFF2-40B4-BE49-F238E27FC236}">
-                <a16:creationId xmlns:a16="http://schemas.microsoft.com/office/drawing/2014/main" id="{621C5D12-5DD9-45AE-9A2E-AA8123689974}"/>
+                <a16:creationId xmlns:a16="http://schemas.microsoft.com/office/drawing/2014/main" id="{A9D182C0-750E-4067-A0B6-C8C8AACB622B}"/>
               </a:ext>
             </a:extLst>
           </p:cNvPr>
@@ -23305,10 +24100,168 @@
           </a:p>
         </p:txBody>
       </p:sp>
+      <p:sp>
+        <p:nvSpPr>
+          <p:cNvPr id="17" name="Legacy module connection">
+            <a:extLst xmlns:a="http://schemas.openxmlformats.org/drawingml/2006/main">
+              <a:ext uri="{FF2B5EF4-FFF2-40B4-BE49-F238E27FC236}">
+                <a16:creationId xmlns:a16="http://schemas.microsoft.com/office/drawing/2014/main" id="{407DBDA1-88E2-4E57-8C50-F320194F3AE8}"/>
+              </a:ext>
+            </a:extLst>
+          </p:cNvPr>
+          <p:cNvSpPr>
+            <a:spLocks xmlns:a="http://schemas.openxmlformats.org/drawingml/2006/main" noGrp="1"/>
+          </p:cNvSpPr>
+          <p:nvPr/>
+        </p:nvSpPr>
+        <p:spPr>
+          <a:xfrm xmlns:a="http://schemas.openxmlformats.org/drawingml/2006/main">
+            <a:off x="609600" y="6229350"/>
+            <a:ext cx="10972800" cy="171450"/>
+          </a:xfrm>
+          <a:prstGeom xmlns:a="http://schemas.openxmlformats.org/drawingml/2006/main" prst="rect">
+            <a:avLst/>
+          </a:prstGeom>
+          <a:noFill xmlns:a="http://schemas.openxmlformats.org/drawingml/2006/main"/>
+          <a:ln xmlns:a="http://schemas.openxmlformats.org/drawingml/2006/main" w="0">
+            <a:noFill/>
+          </a:ln>
+        </p:spPr>
+        <p:txBody>
+          <a:bodyPr xmlns:a="http://schemas.openxmlformats.org/drawingml/2006/main" wrap="none" lIns="0" tIns="0" rIns="0" bIns="0" anchor="ctr">
+            <a:noAutofit/>
+          </a:bodyPr>
+          <a:lstStyle xmlns:a="http://schemas.openxmlformats.org/drawingml/2006/main">
+            <a:defPPr algn="r">
+              <a:defRPr sz="1200" b="0">
+                <a:solidFill>
+                  <a:srgbClr val="4D5A68"/>
+                </a:solidFill>
+                <a:latin typeface="Malgun Gothic"/>
+                <a:ea typeface="Malgun Gothic"/>
+                <a:cs typeface="Malgun Gothic"/>
+              </a:defRPr>
+            </a:defPPr>
+            <a:lvl1pPr algn="r">
+              <a:defRPr sz="1200" b="0">
+                <a:solidFill>
+                  <a:srgbClr val="4D5A68"/>
+                </a:solidFill>
+                <a:latin typeface="Malgun Gothic"/>
+                <a:ea typeface="Malgun Gothic"/>
+                <a:cs typeface="Malgun Gothic"/>
+              </a:defRPr>
+            </a:lvl1pPr>
+            <a:lvl2pPr algn="r">
+              <a:defRPr sz="1200" b="0">
+                <a:solidFill>
+                  <a:srgbClr val="4D5A68"/>
+                </a:solidFill>
+                <a:latin typeface="Malgun Gothic"/>
+                <a:ea typeface="Malgun Gothic"/>
+                <a:cs typeface="Malgun Gothic"/>
+              </a:defRPr>
+            </a:lvl2pPr>
+            <a:lvl3pPr algn="r">
+              <a:defRPr sz="1200" b="0">
+                <a:solidFill>
+                  <a:srgbClr val="4D5A68"/>
+                </a:solidFill>
+                <a:latin typeface="Malgun Gothic"/>
+                <a:ea typeface="Malgun Gothic"/>
+                <a:cs typeface="Malgun Gothic"/>
+              </a:defRPr>
+            </a:lvl3pPr>
+            <a:lvl4pPr algn="r">
+              <a:defRPr sz="1200" b="0">
+                <a:solidFill>
+                  <a:srgbClr val="4D5A68"/>
+                </a:solidFill>
+                <a:latin typeface="Malgun Gothic"/>
+                <a:ea typeface="Malgun Gothic"/>
+                <a:cs typeface="Malgun Gothic"/>
+              </a:defRPr>
+            </a:lvl4pPr>
+            <a:lvl5pPr algn="r">
+              <a:defRPr sz="1200" b="0">
+                <a:solidFill>
+                  <a:srgbClr val="4D5A68"/>
+                </a:solidFill>
+                <a:latin typeface="Malgun Gothic"/>
+                <a:ea typeface="Malgun Gothic"/>
+                <a:cs typeface="Malgun Gothic"/>
+              </a:defRPr>
+            </a:lvl5pPr>
+            <a:lvl6pPr algn="r">
+              <a:defRPr sz="1200" b="0">
+                <a:solidFill>
+                  <a:srgbClr val="4D5A68"/>
+                </a:solidFill>
+                <a:latin typeface="Malgun Gothic"/>
+                <a:ea typeface="Malgun Gothic"/>
+                <a:cs typeface="Malgun Gothic"/>
+              </a:defRPr>
+            </a:lvl6pPr>
+            <a:lvl7pPr algn="r">
+              <a:defRPr sz="1200" b="0">
+                <a:solidFill>
+                  <a:srgbClr val="4D5A68"/>
+                </a:solidFill>
+                <a:latin typeface="Malgun Gothic"/>
+                <a:ea typeface="Malgun Gothic"/>
+                <a:cs typeface="Malgun Gothic"/>
+              </a:defRPr>
+            </a:lvl7pPr>
+            <a:lvl8pPr algn="r">
+              <a:defRPr sz="1200" b="0">
+                <a:solidFill>
+                  <a:srgbClr val="4D5A68"/>
+                </a:solidFill>
+                <a:latin typeface="Malgun Gothic"/>
+                <a:ea typeface="Malgun Gothic"/>
+                <a:cs typeface="Malgun Gothic"/>
+              </a:defRPr>
+            </a:lvl8pPr>
+            <a:lvl9pPr algn="r">
+              <a:defRPr sz="1200" b="0">
+                <a:solidFill>
+                  <a:srgbClr val="4D5A68"/>
+                </a:solidFill>
+                <a:latin typeface="Malgun Gothic"/>
+                <a:ea typeface="Malgun Gothic"/>
+                <a:cs typeface="Malgun Gothic"/>
+              </a:defRPr>
+            </a:lvl9pPr>
+          </a:lstStyle>
+          <a:p xmlns:a="http://schemas.openxmlformats.org/drawingml/2006/main">
+            <a:pPr algn="r">
+              <a:defRPr sz="1200" b="0">
+                <a:solidFill>
+                  <a:srgbClr val="4D5A68"/>
+                </a:solidFill>
+                <a:latin typeface="Malgun Gothic"/>
+                <a:ea typeface="Malgun Gothic"/>
+                <a:cs typeface="Malgun Gothic"/>
+              </a:defRPr>
+            </a:pPr>
+            <a:r>
+              <a:rPr sz="1200" b="0">
+                <a:solidFill>
+                  <a:srgbClr val="4D5A68"/>
+                </a:solidFill>
+                <a:latin typeface="Malgun Gothic"/>
+                <a:ea typeface="Malgun Gothic"/>
+                <a:cs typeface="Malgun Gothic"/>
+              </a:rPr>
+              <a:t>M 연계 · M6</a:t>
+            </a:r>
+          </a:p>
+        </p:txBody>
+      </p:sp>
     </p:spTree>
     <p:extLst>
       <p:ext uri="{BB962C8B-B14F-4D97-AF65-F5344CB8AC3E}">
-        <p14:creationId xmlns:p14="http://schemas.microsoft.com/office/powerpoint/2010/main" val="119272415"/>
+        <p14:creationId xmlns:p14="http://schemas.microsoft.com/office/powerpoint/2010/main" val="1968831839"/>
       </p:ext>
     </p:extLst>
   </p:cSld>
@@ -23336,10 +24289,10 @@
       </p:grpSpPr>
       <p:sp>
         <p:nvSpPr>
-          <p:cNvPr id="12" name="ACT 0 · Context를 찾는 주체">
+          <p:cNvPr id="14" name="ACT 0 · Context를 찾는 주체">
             <a:extLst xmlns:a="http://schemas.openxmlformats.org/drawingml/2006/main">
               <a:ext uri="{FF2B5EF4-FFF2-40B4-BE49-F238E27FC236}">
-                <a16:creationId xmlns:a16="http://schemas.microsoft.com/office/drawing/2014/main" id="{2C7072AD-F5F3-4730-94E1-FE5134DB00D5}"/>
+                <a16:creationId xmlns:a16="http://schemas.microsoft.com/office/drawing/2014/main" id="{696ECCBD-DCFD-4CBD-8678-0FB3017D7AB2}"/>
               </a:ext>
             </a:extLst>
           </p:cNvPr>
@@ -23497,7 +24450,7 @@
           <p:cNvPr id="2" name="S07">
             <a:extLst xmlns:a="http://schemas.openxmlformats.org/drawingml/2006/main">
               <a:ext uri="{FF2B5EF4-FFF2-40B4-BE49-F238E27FC236}">
-                <a16:creationId xmlns:a16="http://schemas.microsoft.com/office/drawing/2014/main" id="{4767C2B0-467D-413C-B591-16B2EA28B369}"/>
+                <a16:creationId xmlns:a16="http://schemas.microsoft.com/office/drawing/2014/main" id="{AB0519F4-FF7F-458A-8378-6BB738C94565}"/>
               </a:ext>
             </a:extLst>
           </p:cNvPr>
@@ -23655,7 +24608,7 @@
           <p:cNvPr id="3" name="코드를 AI에게 가져가는 대신&#10;AI를 Repository로 데려간다">
             <a:extLst xmlns:a="http://schemas.openxmlformats.org/drawingml/2006/main">
               <a:ext uri="{FF2B5EF4-FFF2-40B4-BE49-F238E27FC236}">
-                <a16:creationId xmlns:a16="http://schemas.microsoft.com/office/drawing/2014/main" id="{CE408362-7007-4570-982F-BBD94F1E952D}"/>
+                <a16:creationId xmlns:a16="http://schemas.microsoft.com/office/drawing/2014/main" id="{B50686A5-B5FF-457C-8519-705A71F92986}"/>
               </a:ext>
             </a:extLst>
           </p:cNvPr>
@@ -23836,7 +24789,7 @@
           <p:cNvPr id="4" name="">
             <a:extLst xmlns:a="http://schemas.openxmlformats.org/drawingml/2006/main">
               <a:ext uri="{FF2B5EF4-FFF2-40B4-BE49-F238E27FC236}">
-                <a16:creationId xmlns:a16="http://schemas.microsoft.com/office/drawing/2014/main" id="{51B5685D-99D0-4C75-9CF5-10309CDDE697}"/>
+                <a16:creationId xmlns:a16="http://schemas.microsoft.com/office/drawing/2014/main" id="{EC0EEC3B-BA55-4FEC-8C5E-BB14ED3E01A3}"/>
               </a:ext>
             </a:extLst>
           </p:cNvPr>
@@ -23847,7 +24800,7 @@
         </p:nvSpPr>
         <p:spPr>
           <a:xfrm xmlns:a="http://schemas.openxmlformats.org/drawingml/2006/main">
-            <a:off x="609600" y="5829300"/>
+            <a:off x="609600" y="5753100"/>
             <a:ext cx="10972800" cy="0"/>
           </a:xfrm>
           <a:prstGeom xmlns:a="http://schemas.openxmlformats.org/drawingml/2006/main" prst="line">
@@ -23867,7 +24820,7 @@
           <p:cNvPr id="5" name="교육 모델 · TRIAL-001 단일 CLI 관찰과 연결 · AI 생성 설명용 삽화">
             <a:extLst xmlns:a="http://schemas.openxmlformats.org/drawingml/2006/main">
               <a:ext uri="{FF2B5EF4-FFF2-40B4-BE49-F238E27FC236}">
-                <a16:creationId xmlns:a16="http://schemas.microsoft.com/office/drawing/2014/main" id="{679C787C-819F-4271-890D-D5F83009F861}"/>
+                <a16:creationId xmlns:a16="http://schemas.microsoft.com/office/drawing/2014/main" id="{E0BA2F5D-59EA-47DE-8C15-B61B8F924A77}"/>
               </a:ext>
             </a:extLst>
           </p:cNvPr>
@@ -23878,8 +24831,8 @@
         </p:nvSpPr>
         <p:spPr>
           <a:xfrm xmlns:a="http://schemas.openxmlformats.org/drawingml/2006/main">
-            <a:off x="609600" y="5915025"/>
-            <a:ext cx="10972800" cy="247650"/>
+            <a:off x="609600" y="5791200"/>
+            <a:ext cx="10972800" cy="228600"/>
           </a:xfrm>
           <a:prstGeom xmlns:a="http://schemas.openxmlformats.org/drawingml/2006/main" prst="rect">
             <a:avLst/>
@@ -24025,7 +24978,7 @@
           <p:cNvPr id="6" name="목표 설정과 근거 검토는 개발자에게 남습니다. Repository 접근이 Task 의도를 정하지는 않습니다.">
             <a:extLst xmlns:a="http://schemas.openxmlformats.org/drawingml/2006/main">
               <a:ext uri="{FF2B5EF4-FFF2-40B4-BE49-F238E27FC236}">
-                <a16:creationId xmlns:a16="http://schemas.microsoft.com/office/drawing/2014/main" id="{56F34592-A6BC-47A0-B2A2-7D74545E8BF0}"/>
+                <a16:creationId xmlns:a16="http://schemas.microsoft.com/office/drawing/2014/main" id="{941B4F4A-1B74-412C-AD39-6CE271D03A38}"/>
               </a:ext>
             </a:extLst>
           </p:cNvPr>
@@ -24036,7 +24989,7 @@
         </p:nvSpPr>
         <p:spPr>
           <a:xfrm xmlns:a="http://schemas.openxmlformats.org/drawingml/2006/main">
-            <a:off x="609600" y="6191250"/>
+            <a:off x="609600" y="6019800"/>
             <a:ext cx="10972800" cy="209550"/>
           </a:xfrm>
           <a:prstGeom xmlns:a="http://schemas.openxmlformats.org/drawingml/2006/main" prst="rect">
@@ -24183,7 +25136,7 @@
           <p:cNvPr id="7" name="내가 골라 전달하는 Context">
             <a:extLst xmlns:a="http://schemas.openxmlformats.org/drawingml/2006/main">
               <a:ext uri="{FF2B5EF4-FFF2-40B4-BE49-F238E27FC236}">
-                <a16:creationId xmlns:a16="http://schemas.microsoft.com/office/drawing/2014/main" id="{D513DEF8-60D9-4C4D-8581-3EF48D4995FD}"/>
+                <a16:creationId xmlns:a16="http://schemas.microsoft.com/office/drawing/2014/main" id="{6E032D8E-C056-4D05-8402-6792CCC35389}"/>
               </a:ext>
             </a:extLst>
           </p:cNvPr>
@@ -24341,7 +25294,7 @@
           <p:cNvPr id="8" name="조사를 맡기고 근거를 확인">
             <a:extLst xmlns:a="http://schemas.openxmlformats.org/drawingml/2006/main">
               <a:ext uri="{FF2B5EF4-FFF2-40B4-BE49-F238E27FC236}">
-                <a16:creationId xmlns:a16="http://schemas.microsoft.com/office/drawing/2014/main" id="{44E82618-1E8D-4F56-9273-129BFE37CE1D}"/>
+                <a16:creationId xmlns:a16="http://schemas.microsoft.com/office/drawing/2014/main" id="{55CEA4DE-1C81-478D-9624-510B6178D00D}"/>
               </a:ext>
             </a:extLst>
           </p:cNvPr>
@@ -24499,7 +25452,7 @@
           <p:cNvPr id="9" name="">
             <a:extLst xmlns:a="http://schemas.openxmlformats.org/drawingml/2006/main">
               <a:ext uri="{FF2B5EF4-FFF2-40B4-BE49-F238E27FC236}">
-                <a16:creationId xmlns:a16="http://schemas.microsoft.com/office/drawing/2014/main" id="{DF953E15-79B3-411F-A783-09F0C01A6A53}"/>
+                <a16:creationId xmlns:a16="http://schemas.microsoft.com/office/drawing/2014/main" id="{2603A427-BAB7-4D45-85C8-C8A5DCD9EFCF}"/>
               </a:ext>
             </a:extLst>
           </p:cNvPr>
@@ -24509,14 +25462,14 @@
           <p:nvPr/>
         </p:nvPicPr>
         <p:blipFill>
-          <a:blip xmlns:r="http://schemas.openxmlformats.org/officeDocument/2006/relationships" xmlns:a="http://schemas.openxmlformats.org/drawingml/2006/main" r:embed="Re64e844e08024e6f"/>
+          <a:blip xmlns:r="http://schemas.openxmlformats.org/officeDocument/2006/relationships" xmlns:a="http://schemas.openxmlformats.org/drawingml/2006/main" r:embed="Rbcb8206f499d43bd"/>
           <a:srcRect xmlns:a="http://schemas.openxmlformats.org/drawingml/2006/main" l="0" t="18000" r="0" b="15000"/>
           <a:stretch xmlns:a="http://schemas.openxmlformats.org/drawingml/2006/main"/>
         </p:blipFill>
         <p:spPr>
           <a:xfrm xmlns:a="http://schemas.openxmlformats.org/drawingml/2006/main">
-            <a:off x="1562100" y="2343150"/>
-            <a:ext cx="9067800" cy="3038475"/>
+            <a:off x="2371725" y="2343150"/>
+            <a:ext cx="7448550" cy="2495550"/>
           </a:xfrm>
           <a:prstGeom xmlns:a="http://schemas.openxmlformats.org/drawingml/2006/main" prst="rect">
             <a:avLst/>
@@ -24528,7 +25481,7 @@
           <p:cNvPr id="10" name="코드 조각을 선택·복사">
             <a:extLst xmlns:a="http://schemas.openxmlformats.org/drawingml/2006/main">
               <a:ext uri="{FF2B5EF4-FFF2-40B4-BE49-F238E27FC236}">
-                <a16:creationId xmlns:a16="http://schemas.microsoft.com/office/drawing/2014/main" id="{FB237846-7700-4617-97BD-865154E854AB}"/>
+                <a16:creationId xmlns:a16="http://schemas.microsoft.com/office/drawing/2014/main" id="{1C83D286-A9F3-4509-968E-011D91101EB2}"/>
               </a:ext>
             </a:extLst>
           </p:cNvPr>
@@ -24539,7 +25492,7 @@
         </p:nvSpPr>
         <p:spPr>
           <a:xfrm xmlns:a="http://schemas.openxmlformats.org/drawingml/2006/main">
-            <a:off x="609600" y="5314950"/>
+            <a:off x="609600" y="4886325"/>
             <a:ext cx="5238750" cy="342900"/>
           </a:xfrm>
           <a:prstGeom xmlns:a="http://schemas.openxmlformats.org/drawingml/2006/main" prst="rect">
@@ -24686,7 +25639,7 @@
           <p:cNvPr id="11" name="목표는 사람이, 탐색은 Agent와">
             <a:extLst xmlns:a="http://schemas.openxmlformats.org/drawingml/2006/main">
               <a:ext uri="{FF2B5EF4-FFF2-40B4-BE49-F238E27FC236}">
-                <a16:creationId xmlns:a16="http://schemas.microsoft.com/office/drawing/2014/main" id="{CB5A462D-A92C-4F96-9677-C40E4D0D519B}"/>
+                <a16:creationId xmlns:a16="http://schemas.microsoft.com/office/drawing/2014/main" id="{C64E5284-174C-4400-B53A-DF747037667C}"/>
               </a:ext>
             </a:extLst>
           </p:cNvPr>
@@ -24697,7 +25650,7 @@
         </p:nvSpPr>
         <p:spPr>
           <a:xfrm xmlns:a="http://schemas.openxmlformats.org/drawingml/2006/main">
-            <a:off x="6381750" y="5314950"/>
+            <a:off x="6381750" y="4886325"/>
             <a:ext cx="5200650" cy="342900"/>
           </a:xfrm>
           <a:prstGeom xmlns:a="http://schemas.openxmlformats.org/drawingml/2006/main" prst="rect">
@@ -24839,10 +25792,326 @@
           </a:p>
         </p:txBody>
       </p:sp>
+      <p:sp>
+        <p:nvSpPr>
+          <p:cNvPr id="12" name="접근 전: 승인된 도구·계정·자료·권한 범위를 확인한다.">
+            <a:extLst xmlns:a="http://schemas.openxmlformats.org/drawingml/2006/main">
+              <a:ext uri="{FF2B5EF4-FFF2-40B4-BE49-F238E27FC236}">
+                <a16:creationId xmlns:a16="http://schemas.microsoft.com/office/drawing/2014/main" id="{CFC09BEB-3EB3-4D68-83F7-57E748E89FA1}"/>
+              </a:ext>
+            </a:extLst>
+          </p:cNvPr>
+          <p:cNvSpPr>
+            <a:spLocks xmlns:a="http://schemas.openxmlformats.org/drawingml/2006/main" noGrp="1"/>
+          </p:cNvSpPr>
+          <p:nvPr/>
+        </p:nvSpPr>
+        <p:spPr>
+          <a:xfrm xmlns:a="http://schemas.openxmlformats.org/drawingml/2006/main">
+            <a:off x="609600" y="5343525"/>
+            <a:ext cx="10972800" cy="314325"/>
+          </a:xfrm>
+          <a:prstGeom xmlns:a="http://schemas.openxmlformats.org/drawingml/2006/main" prst="rect">
+            <a:avLst/>
+          </a:prstGeom>
+          <a:noFill xmlns:a="http://schemas.openxmlformats.org/drawingml/2006/main"/>
+          <a:ln xmlns:a="http://schemas.openxmlformats.org/drawingml/2006/main" w="0">
+            <a:noFill/>
+          </a:ln>
+        </p:spPr>
+        <p:txBody>
+          <a:bodyPr xmlns:a="http://schemas.openxmlformats.org/drawingml/2006/main" wrap="none" lIns="0" tIns="0" rIns="0" bIns="0" anchor="ctr">
+            <a:noAutofit/>
+          </a:bodyPr>
+          <a:lstStyle xmlns:a="http://schemas.openxmlformats.org/drawingml/2006/main">
+            <a:defPPr algn="l">
+              <a:defRPr sz="1875" b="0">
+                <a:solidFill>
+                  <a:srgbClr val="4D5A68"/>
+                </a:solidFill>
+                <a:latin typeface="Malgun Gothic"/>
+                <a:ea typeface="Malgun Gothic"/>
+                <a:cs typeface="Malgun Gothic"/>
+              </a:defRPr>
+            </a:defPPr>
+            <a:lvl1pPr algn="l">
+              <a:defRPr sz="1875" b="0">
+                <a:solidFill>
+                  <a:srgbClr val="4D5A68"/>
+                </a:solidFill>
+                <a:latin typeface="Malgun Gothic"/>
+                <a:ea typeface="Malgun Gothic"/>
+                <a:cs typeface="Malgun Gothic"/>
+              </a:defRPr>
+            </a:lvl1pPr>
+            <a:lvl2pPr algn="l">
+              <a:defRPr sz="1875" b="0">
+                <a:solidFill>
+                  <a:srgbClr val="4D5A68"/>
+                </a:solidFill>
+                <a:latin typeface="Malgun Gothic"/>
+                <a:ea typeface="Malgun Gothic"/>
+                <a:cs typeface="Malgun Gothic"/>
+              </a:defRPr>
+            </a:lvl2pPr>
+            <a:lvl3pPr algn="l">
+              <a:defRPr sz="1875" b="0">
+                <a:solidFill>
+                  <a:srgbClr val="4D5A68"/>
+                </a:solidFill>
+                <a:latin typeface="Malgun Gothic"/>
+                <a:ea typeface="Malgun Gothic"/>
+                <a:cs typeface="Malgun Gothic"/>
+              </a:defRPr>
+            </a:lvl3pPr>
+            <a:lvl4pPr algn="l">
+              <a:defRPr sz="1875" b="0">
+                <a:solidFill>
+                  <a:srgbClr val="4D5A68"/>
+                </a:solidFill>
+                <a:latin typeface="Malgun Gothic"/>
+                <a:ea typeface="Malgun Gothic"/>
+                <a:cs typeface="Malgun Gothic"/>
+              </a:defRPr>
+            </a:lvl4pPr>
+            <a:lvl5pPr algn="l">
+              <a:defRPr sz="1875" b="0">
+                <a:solidFill>
+                  <a:srgbClr val="4D5A68"/>
+                </a:solidFill>
+                <a:latin typeface="Malgun Gothic"/>
+                <a:ea typeface="Malgun Gothic"/>
+                <a:cs typeface="Malgun Gothic"/>
+              </a:defRPr>
+            </a:lvl5pPr>
+            <a:lvl6pPr algn="l">
+              <a:defRPr sz="1875" b="0">
+                <a:solidFill>
+                  <a:srgbClr val="4D5A68"/>
+                </a:solidFill>
+                <a:latin typeface="Malgun Gothic"/>
+                <a:ea typeface="Malgun Gothic"/>
+                <a:cs typeface="Malgun Gothic"/>
+              </a:defRPr>
+            </a:lvl6pPr>
+            <a:lvl7pPr algn="l">
+              <a:defRPr sz="1875" b="0">
+                <a:solidFill>
+                  <a:srgbClr val="4D5A68"/>
+                </a:solidFill>
+                <a:latin typeface="Malgun Gothic"/>
+                <a:ea typeface="Malgun Gothic"/>
+                <a:cs typeface="Malgun Gothic"/>
+              </a:defRPr>
+            </a:lvl7pPr>
+            <a:lvl8pPr algn="l">
+              <a:defRPr sz="1875" b="0">
+                <a:solidFill>
+                  <a:srgbClr val="4D5A68"/>
+                </a:solidFill>
+                <a:latin typeface="Malgun Gothic"/>
+                <a:ea typeface="Malgun Gothic"/>
+                <a:cs typeface="Malgun Gothic"/>
+              </a:defRPr>
+            </a:lvl8pPr>
+            <a:lvl9pPr algn="l">
+              <a:defRPr sz="1875" b="0">
+                <a:solidFill>
+                  <a:srgbClr val="4D5A68"/>
+                </a:solidFill>
+                <a:latin typeface="Malgun Gothic"/>
+                <a:ea typeface="Malgun Gothic"/>
+                <a:cs typeface="Malgun Gothic"/>
+              </a:defRPr>
+            </a:lvl9pPr>
+          </a:lstStyle>
+          <a:p xmlns:a="http://schemas.openxmlformats.org/drawingml/2006/main">
+            <a:pPr algn="l">
+              <a:defRPr sz="1875" b="0">
+                <a:solidFill>
+                  <a:srgbClr val="4D5A68"/>
+                </a:solidFill>
+                <a:latin typeface="Malgun Gothic"/>
+                <a:ea typeface="Malgun Gothic"/>
+                <a:cs typeface="Malgun Gothic"/>
+              </a:defRPr>
+            </a:pPr>
+            <a:r>
+              <a:rPr sz="1875" b="0">
+                <a:solidFill>
+                  <a:srgbClr val="4D5A68"/>
+                </a:solidFill>
+                <a:latin typeface="Malgun Gothic"/>
+                <a:ea typeface="Malgun Gothic"/>
+                <a:cs typeface="Malgun Gothic"/>
+              </a:rPr>
+              <a:t>접근 전: 승인된 도구·계정·자료·권한 범위를 확인한다.</a:t>
+            </a:r>
+          </a:p>
+        </p:txBody>
+      </p:sp>
+      <p:sp>
+        <p:nvSpPr>
+          <p:cNvPr id="13" name="Legacy module connection">
+            <a:extLst xmlns:a="http://schemas.openxmlformats.org/drawingml/2006/main">
+              <a:ext uri="{FF2B5EF4-FFF2-40B4-BE49-F238E27FC236}">
+                <a16:creationId xmlns:a16="http://schemas.microsoft.com/office/drawing/2014/main" id="{0BDAE7B8-9617-4350-82BB-349E8D98AD75}"/>
+              </a:ext>
+            </a:extLst>
+          </p:cNvPr>
+          <p:cNvSpPr>
+            <a:spLocks xmlns:a="http://schemas.openxmlformats.org/drawingml/2006/main" noGrp="1"/>
+          </p:cNvSpPr>
+          <p:nvPr/>
+        </p:nvSpPr>
+        <p:spPr>
+          <a:xfrm xmlns:a="http://schemas.openxmlformats.org/drawingml/2006/main">
+            <a:off x="609600" y="6229350"/>
+            <a:ext cx="10972800" cy="171450"/>
+          </a:xfrm>
+          <a:prstGeom xmlns:a="http://schemas.openxmlformats.org/drawingml/2006/main" prst="rect">
+            <a:avLst/>
+          </a:prstGeom>
+          <a:noFill xmlns:a="http://schemas.openxmlformats.org/drawingml/2006/main"/>
+          <a:ln xmlns:a="http://schemas.openxmlformats.org/drawingml/2006/main" w="0">
+            <a:noFill/>
+          </a:ln>
+        </p:spPr>
+        <p:txBody>
+          <a:bodyPr xmlns:a="http://schemas.openxmlformats.org/drawingml/2006/main" wrap="none" lIns="0" tIns="0" rIns="0" bIns="0" anchor="ctr">
+            <a:noAutofit/>
+          </a:bodyPr>
+          <a:lstStyle xmlns:a="http://schemas.openxmlformats.org/drawingml/2006/main">
+            <a:defPPr algn="r">
+              <a:defRPr sz="1200" b="0">
+                <a:solidFill>
+                  <a:srgbClr val="4D5A68"/>
+                </a:solidFill>
+                <a:latin typeface="Malgun Gothic"/>
+                <a:ea typeface="Malgun Gothic"/>
+                <a:cs typeface="Malgun Gothic"/>
+              </a:defRPr>
+            </a:defPPr>
+            <a:lvl1pPr algn="r">
+              <a:defRPr sz="1200" b="0">
+                <a:solidFill>
+                  <a:srgbClr val="4D5A68"/>
+                </a:solidFill>
+                <a:latin typeface="Malgun Gothic"/>
+                <a:ea typeface="Malgun Gothic"/>
+                <a:cs typeface="Malgun Gothic"/>
+              </a:defRPr>
+            </a:lvl1pPr>
+            <a:lvl2pPr algn="r">
+              <a:defRPr sz="1200" b="0">
+                <a:solidFill>
+                  <a:srgbClr val="4D5A68"/>
+                </a:solidFill>
+                <a:latin typeface="Malgun Gothic"/>
+                <a:ea typeface="Malgun Gothic"/>
+                <a:cs typeface="Malgun Gothic"/>
+              </a:defRPr>
+            </a:lvl2pPr>
+            <a:lvl3pPr algn="r">
+              <a:defRPr sz="1200" b="0">
+                <a:solidFill>
+                  <a:srgbClr val="4D5A68"/>
+                </a:solidFill>
+                <a:latin typeface="Malgun Gothic"/>
+                <a:ea typeface="Malgun Gothic"/>
+                <a:cs typeface="Malgun Gothic"/>
+              </a:defRPr>
+            </a:lvl3pPr>
+            <a:lvl4pPr algn="r">
+              <a:defRPr sz="1200" b="0">
+                <a:solidFill>
+                  <a:srgbClr val="4D5A68"/>
+                </a:solidFill>
+                <a:latin typeface="Malgun Gothic"/>
+                <a:ea typeface="Malgun Gothic"/>
+                <a:cs typeface="Malgun Gothic"/>
+              </a:defRPr>
+            </a:lvl4pPr>
+            <a:lvl5pPr algn="r">
+              <a:defRPr sz="1200" b="0">
+                <a:solidFill>
+                  <a:srgbClr val="4D5A68"/>
+                </a:solidFill>
+                <a:latin typeface="Malgun Gothic"/>
+                <a:ea typeface="Malgun Gothic"/>
+                <a:cs typeface="Malgun Gothic"/>
+              </a:defRPr>
+            </a:lvl5pPr>
+            <a:lvl6pPr algn="r">
+              <a:defRPr sz="1200" b="0">
+                <a:solidFill>
+                  <a:srgbClr val="4D5A68"/>
+                </a:solidFill>
+                <a:latin typeface="Malgun Gothic"/>
+                <a:ea typeface="Malgun Gothic"/>
+                <a:cs typeface="Malgun Gothic"/>
+              </a:defRPr>
+            </a:lvl6pPr>
+            <a:lvl7pPr algn="r">
+              <a:defRPr sz="1200" b="0">
+                <a:solidFill>
+                  <a:srgbClr val="4D5A68"/>
+                </a:solidFill>
+                <a:latin typeface="Malgun Gothic"/>
+                <a:ea typeface="Malgun Gothic"/>
+                <a:cs typeface="Malgun Gothic"/>
+              </a:defRPr>
+            </a:lvl7pPr>
+            <a:lvl8pPr algn="r">
+              <a:defRPr sz="1200" b="0">
+                <a:solidFill>
+                  <a:srgbClr val="4D5A68"/>
+                </a:solidFill>
+                <a:latin typeface="Malgun Gothic"/>
+                <a:ea typeface="Malgun Gothic"/>
+                <a:cs typeface="Malgun Gothic"/>
+              </a:defRPr>
+            </a:lvl8pPr>
+            <a:lvl9pPr algn="r">
+              <a:defRPr sz="1200" b="0">
+                <a:solidFill>
+                  <a:srgbClr val="4D5A68"/>
+                </a:solidFill>
+                <a:latin typeface="Malgun Gothic"/>
+                <a:ea typeface="Malgun Gothic"/>
+                <a:cs typeface="Malgun Gothic"/>
+              </a:defRPr>
+            </a:lvl9pPr>
+          </a:lstStyle>
+          <a:p xmlns:a="http://schemas.openxmlformats.org/drawingml/2006/main">
+            <a:pPr algn="r">
+              <a:defRPr sz="1200" b="0">
+                <a:solidFill>
+                  <a:srgbClr val="4D5A68"/>
+                </a:solidFill>
+                <a:latin typeface="Malgun Gothic"/>
+                <a:ea typeface="Malgun Gothic"/>
+                <a:cs typeface="Malgun Gothic"/>
+              </a:defRPr>
+            </a:pPr>
+            <a:r>
+              <a:rPr sz="1200" b="0">
+                <a:solidFill>
+                  <a:srgbClr val="4D5A68"/>
+                </a:solidFill>
+                <a:latin typeface="Malgun Gothic"/>
+                <a:ea typeface="Malgun Gothic"/>
+                <a:cs typeface="Malgun Gothic"/>
+              </a:rPr>
+              <a:t>M 연계 · M1</a:t>
+            </a:r>
+          </a:p>
+        </p:txBody>
+      </p:sp>
     </p:spTree>
     <p:extLst>
       <p:ext uri="{BB962C8B-B14F-4D97-AF65-F5344CB8AC3E}">
-        <p14:creationId xmlns:p14="http://schemas.microsoft.com/office/powerpoint/2010/main" val="207870649"/>
+        <p14:creationId xmlns:p14="http://schemas.microsoft.com/office/powerpoint/2010/main" val="1084761041"/>
       </p:ext>
     </p:extLst>
   </p:cSld>
@@ -24870,10 +26139,10 @@
       </p:grpSpPr>
       <p:sp>
         <p:nvSpPr>
-          <p:cNvPr id="15" name="ACT 0 · 접근할 정보와 정할 목표">
+          <p:cNvPr id="16" name="ACT 0 · 접근할 정보와 정할 목표">
             <a:extLst xmlns:a="http://schemas.openxmlformats.org/drawingml/2006/main">
               <a:ext uri="{FF2B5EF4-FFF2-40B4-BE49-F238E27FC236}">
-                <a16:creationId xmlns:a16="http://schemas.microsoft.com/office/drawing/2014/main" id="{C9C4537B-ECAF-4578-9049-333165B70239}"/>
+                <a16:creationId xmlns:a16="http://schemas.microsoft.com/office/drawing/2014/main" id="{C3C5F600-962D-400A-A285-C995AF81AC05}"/>
               </a:ext>
             </a:extLst>
           </p:cNvPr>
@@ -25031,7 +26300,7 @@
           <p:cNvPr id="2" name="S08">
             <a:extLst xmlns:a="http://schemas.openxmlformats.org/drawingml/2006/main">
               <a:ext uri="{FF2B5EF4-FFF2-40B4-BE49-F238E27FC236}">
-                <a16:creationId xmlns:a16="http://schemas.microsoft.com/office/drawing/2014/main" id="{5AC85863-87F6-43DB-B923-7CDAB00E5B40}"/>
+                <a16:creationId xmlns:a16="http://schemas.microsoft.com/office/drawing/2014/main" id="{D6F39F33-7BCB-4CC5-AAD8-51DC4B08F0B7}"/>
               </a:ext>
             </a:extLst>
           </p:cNvPr>
@@ -25189,7 +26458,7 @@
           <p:cNvPr id="3" name="Repository 접근과 Task 의도는 별개다">
             <a:extLst xmlns:a="http://schemas.openxmlformats.org/drawingml/2006/main">
               <a:ext uri="{FF2B5EF4-FFF2-40B4-BE49-F238E27FC236}">
-                <a16:creationId xmlns:a16="http://schemas.microsoft.com/office/drawing/2014/main" id="{CC022088-675E-466B-A25D-84B8CD841C7F}"/>
+                <a16:creationId xmlns:a16="http://schemas.microsoft.com/office/drawing/2014/main" id="{4CF63798-6A3B-4B22-B79A-E3C0653E5D0B}"/>
               </a:ext>
             </a:extLst>
           </p:cNvPr>
@@ -25347,7 +26616,7 @@
           <p:cNvPr id="4" name="">
             <a:extLst xmlns:a="http://schemas.openxmlformats.org/drawingml/2006/main">
               <a:ext uri="{FF2B5EF4-FFF2-40B4-BE49-F238E27FC236}">
-                <a16:creationId xmlns:a16="http://schemas.microsoft.com/office/drawing/2014/main" id="{3C4938B8-368A-4828-880A-F1994864E3D6}"/>
+                <a16:creationId xmlns:a16="http://schemas.microsoft.com/office/drawing/2014/main" id="{001E05E4-E855-4894-9086-2589F783C478}"/>
               </a:ext>
             </a:extLst>
           </p:cNvPr>
@@ -25358,7 +26627,7 @@
         </p:nvSpPr>
         <p:spPr>
           <a:xfrm xmlns:a="http://schemas.openxmlformats.org/drawingml/2006/main">
-            <a:off x="609600" y="5829300"/>
+            <a:off x="609600" y="5753100"/>
             <a:ext cx="10972800" cy="0"/>
           </a:xfrm>
           <a:prstGeom xmlns:a="http://schemas.openxmlformats.org/drawingml/2006/main" prst="line">
@@ -25378,7 +26647,7 @@
           <p:cNvPr id="5" name="이 과정의 교육 모델 · Repository 접근과 작업 의도의 관계">
             <a:extLst xmlns:a="http://schemas.openxmlformats.org/drawingml/2006/main">
               <a:ext uri="{FF2B5EF4-FFF2-40B4-BE49-F238E27FC236}">
-                <a16:creationId xmlns:a16="http://schemas.microsoft.com/office/drawing/2014/main" id="{587B8924-B1D1-4ED2-9932-586CAE8F20FE}"/>
+                <a16:creationId xmlns:a16="http://schemas.microsoft.com/office/drawing/2014/main" id="{3E15C6B6-3945-45BC-B80D-5DDC51F4CB7C}"/>
               </a:ext>
             </a:extLst>
           </p:cNvPr>
@@ -25389,8 +26658,8 @@
         </p:nvSpPr>
         <p:spPr>
           <a:xfrm xmlns:a="http://schemas.openxmlformats.org/drawingml/2006/main">
-            <a:off x="609600" y="5915025"/>
-            <a:ext cx="10972800" cy="247650"/>
+            <a:off x="609600" y="5791200"/>
+            <a:ext cx="10972800" cy="228600"/>
           </a:xfrm>
           <a:prstGeom xmlns:a="http://schemas.openxmlformats.org/drawingml/2006/main" prst="rect">
             <a:avLst/>
@@ -25536,7 +26805,7 @@
           <p:cNvPr id="6" name="모든 제품이나 환경의 기능을 설명하는 공식 분류가 아닙니다.">
             <a:extLst xmlns:a="http://schemas.openxmlformats.org/drawingml/2006/main">
               <a:ext uri="{FF2B5EF4-FFF2-40B4-BE49-F238E27FC236}">
-                <a16:creationId xmlns:a16="http://schemas.microsoft.com/office/drawing/2014/main" id="{17C7B65A-19AE-4436-BC89-2CC4A7A9961E}"/>
+                <a16:creationId xmlns:a16="http://schemas.microsoft.com/office/drawing/2014/main" id="{2BBDA07F-BD3C-471A-92F1-0810978B86DE}"/>
               </a:ext>
             </a:extLst>
           </p:cNvPr>
@@ -25547,7 +26816,7 @@
         </p:nvSpPr>
         <p:spPr>
           <a:xfrm xmlns:a="http://schemas.openxmlformats.org/drawingml/2006/main">
-            <a:off x="609600" y="6191250"/>
+            <a:off x="609600" y="6019800"/>
             <a:ext cx="10972800" cy="209550"/>
           </a:xfrm>
           <a:prstGeom xmlns:a="http://schemas.openxmlformats.org/drawingml/2006/main" prst="rect">
@@ -25694,7 +26963,7 @@
           <p:cNvPr id="7" name="볼 수 있는 것">
             <a:extLst xmlns:a="http://schemas.openxmlformats.org/drawingml/2006/main">
               <a:ext uri="{FF2B5EF4-FFF2-40B4-BE49-F238E27FC236}">
-                <a16:creationId xmlns:a16="http://schemas.microsoft.com/office/drawing/2014/main" id="{70D2132F-1245-4AFB-B6ED-20C7843DC60C}"/>
+                <a16:creationId xmlns:a16="http://schemas.microsoft.com/office/drawing/2014/main" id="{EF5D98F0-86AE-4617-B3AD-A086E1C64734}"/>
               </a:ext>
             </a:extLst>
           </p:cNvPr>
@@ -25852,7 +27121,7 @@
           <p:cNvPr id="8" name="정해야 하는 것">
             <a:extLst xmlns:a="http://schemas.openxmlformats.org/drawingml/2006/main">
               <a:ext uri="{FF2B5EF4-FFF2-40B4-BE49-F238E27FC236}">
-                <a16:creationId xmlns:a16="http://schemas.microsoft.com/office/drawing/2014/main" id="{8AA56CE4-62A4-4FC1-9872-FC8A1AAAACEB}"/>
+                <a16:creationId xmlns:a16="http://schemas.microsoft.com/office/drawing/2014/main" id="{73362E6D-C34F-40B9-B5C2-A25BCE59E15C}"/>
               </a:ext>
             </a:extLst>
           </p:cNvPr>
@@ -26010,7 +27279,7 @@
           <p:cNvPr id="9" name="">
             <a:extLst xmlns:a="http://schemas.openxmlformats.org/drawingml/2006/main">
               <a:ext uri="{FF2B5EF4-FFF2-40B4-BE49-F238E27FC236}">
-                <a16:creationId xmlns:a16="http://schemas.microsoft.com/office/drawing/2014/main" id="{2303AF2A-5314-4905-883A-9A3C566C5E0A}"/>
+                <a16:creationId xmlns:a16="http://schemas.microsoft.com/office/drawing/2014/main" id="{FDB3DB39-82B0-42BA-BA6C-5B08EFE951B1}"/>
               </a:ext>
             </a:extLst>
           </p:cNvPr>
@@ -26041,7 +27310,7 @@
           <p:cNvPr id="10" name="">
             <a:extLst xmlns:a="http://schemas.openxmlformats.org/drawingml/2006/main">
               <a:ext uri="{FF2B5EF4-FFF2-40B4-BE49-F238E27FC236}">
-                <a16:creationId xmlns:a16="http://schemas.microsoft.com/office/drawing/2014/main" id="{E59E61ED-9252-4254-ADF0-01C135A7AAB4}"/>
+                <a16:creationId xmlns:a16="http://schemas.microsoft.com/office/drawing/2014/main" id="{FA8E3A8D-3EBB-41E2-8FD3-4C28222E61D2}"/>
               </a:ext>
             </a:extLst>
           </p:cNvPr>
@@ -26072,7 +27341,7 @@
           <p:cNvPr id="11" name="파일&#10;구현&#10;테스트">
             <a:extLst xmlns:a="http://schemas.openxmlformats.org/drawingml/2006/main">
               <a:ext uri="{FF2B5EF4-FFF2-40B4-BE49-F238E27FC236}">
-                <a16:creationId xmlns:a16="http://schemas.microsoft.com/office/drawing/2014/main" id="{6FA08858-F1F1-4096-993C-F352E87D0491}"/>
+                <a16:creationId xmlns:a16="http://schemas.microsoft.com/office/drawing/2014/main" id="{87794A5B-7582-46E0-89B7-6717E8FD0A11}"/>
               </a:ext>
             </a:extLst>
           </p:cNvPr>
@@ -26276,7 +27545,7 @@
           <p:cNvPr id="12" name="원하는 변화&#10;허용할 범위&#10;완료 판단">
             <a:extLst xmlns:a="http://schemas.openxmlformats.org/drawingml/2006/main">
               <a:ext uri="{FF2B5EF4-FFF2-40B4-BE49-F238E27FC236}">
-                <a16:creationId xmlns:a16="http://schemas.microsoft.com/office/drawing/2014/main" id="{890AA244-3627-44F2-ACCB-E6BF94F02389}"/>
+                <a16:creationId xmlns:a16="http://schemas.microsoft.com/office/drawing/2014/main" id="{65FC7C99-AC75-48F2-A214-B26A52771C7D}"/>
               </a:ext>
             </a:extLst>
           </p:cNvPr>
@@ -26480,7 +27749,7 @@
           <p:cNvPr id="13" name="≠">
             <a:extLst xmlns:a="http://schemas.openxmlformats.org/drawingml/2006/main">
               <a:ext uri="{FF2B5EF4-FFF2-40B4-BE49-F238E27FC236}">
-                <a16:creationId xmlns:a16="http://schemas.microsoft.com/office/drawing/2014/main" id="{F4BF25FF-87B8-43F6-95FE-E62E806B2383}"/>
+                <a16:creationId xmlns:a16="http://schemas.microsoft.com/office/drawing/2014/main" id="{4FF2C88A-2459-44DC-9A27-FD15AEAECCAD}"/>
               </a:ext>
             </a:extLst>
           </p:cNvPr>
@@ -26638,7 +27907,7 @@
           <p:cNvPr id="14" name="코드가 보여도, 원하는 일은 따로 전달해야 한다.">
             <a:extLst xmlns:a="http://schemas.openxmlformats.org/drawingml/2006/main">
               <a:ext uri="{FF2B5EF4-FFF2-40B4-BE49-F238E27FC236}">
-                <a16:creationId xmlns:a16="http://schemas.microsoft.com/office/drawing/2014/main" id="{8FB69391-44B2-4F42-8C17-8A800E77C195}"/>
+                <a16:creationId xmlns:a16="http://schemas.microsoft.com/office/drawing/2014/main" id="{48390CEA-10C4-44F6-A157-3D4CECB3E2DC}"/>
               </a:ext>
             </a:extLst>
           </p:cNvPr>
@@ -26791,10 +28060,168 @@
           </a:p>
         </p:txBody>
       </p:sp>
+      <p:sp>
+        <p:nvSpPr>
+          <p:cNvPr id="15" name="Legacy module connection">
+            <a:extLst xmlns:a="http://schemas.openxmlformats.org/drawingml/2006/main">
+              <a:ext uri="{FF2B5EF4-FFF2-40B4-BE49-F238E27FC236}">
+                <a16:creationId xmlns:a16="http://schemas.microsoft.com/office/drawing/2014/main" id="{BC789C25-541B-416C-A0B7-6A40F4C1AD27}"/>
+              </a:ext>
+            </a:extLst>
+          </p:cNvPr>
+          <p:cNvSpPr>
+            <a:spLocks xmlns:a="http://schemas.openxmlformats.org/drawingml/2006/main" noGrp="1"/>
+          </p:cNvSpPr>
+          <p:nvPr/>
+        </p:nvSpPr>
+        <p:spPr>
+          <a:xfrm xmlns:a="http://schemas.openxmlformats.org/drawingml/2006/main">
+            <a:off x="609600" y="6229350"/>
+            <a:ext cx="10972800" cy="171450"/>
+          </a:xfrm>
+          <a:prstGeom xmlns:a="http://schemas.openxmlformats.org/drawingml/2006/main" prst="rect">
+            <a:avLst/>
+          </a:prstGeom>
+          <a:noFill xmlns:a="http://schemas.openxmlformats.org/drawingml/2006/main"/>
+          <a:ln xmlns:a="http://schemas.openxmlformats.org/drawingml/2006/main" w="0">
+            <a:noFill/>
+          </a:ln>
+        </p:spPr>
+        <p:txBody>
+          <a:bodyPr xmlns:a="http://schemas.openxmlformats.org/drawingml/2006/main" wrap="none" lIns="0" tIns="0" rIns="0" bIns="0" anchor="ctr">
+            <a:noAutofit/>
+          </a:bodyPr>
+          <a:lstStyle xmlns:a="http://schemas.openxmlformats.org/drawingml/2006/main">
+            <a:defPPr algn="r">
+              <a:defRPr sz="1200" b="0">
+                <a:solidFill>
+                  <a:srgbClr val="4D5A68"/>
+                </a:solidFill>
+                <a:latin typeface="Malgun Gothic"/>
+                <a:ea typeface="Malgun Gothic"/>
+                <a:cs typeface="Malgun Gothic"/>
+              </a:defRPr>
+            </a:defPPr>
+            <a:lvl1pPr algn="r">
+              <a:defRPr sz="1200" b="0">
+                <a:solidFill>
+                  <a:srgbClr val="4D5A68"/>
+                </a:solidFill>
+                <a:latin typeface="Malgun Gothic"/>
+                <a:ea typeface="Malgun Gothic"/>
+                <a:cs typeface="Malgun Gothic"/>
+              </a:defRPr>
+            </a:lvl1pPr>
+            <a:lvl2pPr algn="r">
+              <a:defRPr sz="1200" b="0">
+                <a:solidFill>
+                  <a:srgbClr val="4D5A68"/>
+                </a:solidFill>
+                <a:latin typeface="Malgun Gothic"/>
+                <a:ea typeface="Malgun Gothic"/>
+                <a:cs typeface="Malgun Gothic"/>
+              </a:defRPr>
+            </a:lvl2pPr>
+            <a:lvl3pPr algn="r">
+              <a:defRPr sz="1200" b="0">
+                <a:solidFill>
+                  <a:srgbClr val="4D5A68"/>
+                </a:solidFill>
+                <a:latin typeface="Malgun Gothic"/>
+                <a:ea typeface="Malgun Gothic"/>
+                <a:cs typeface="Malgun Gothic"/>
+              </a:defRPr>
+            </a:lvl3pPr>
+            <a:lvl4pPr algn="r">
+              <a:defRPr sz="1200" b="0">
+                <a:solidFill>
+                  <a:srgbClr val="4D5A68"/>
+                </a:solidFill>
+                <a:latin typeface="Malgun Gothic"/>
+                <a:ea typeface="Malgun Gothic"/>
+                <a:cs typeface="Malgun Gothic"/>
+              </a:defRPr>
+            </a:lvl4pPr>
+            <a:lvl5pPr algn="r">
+              <a:defRPr sz="1200" b="0">
+                <a:solidFill>
+                  <a:srgbClr val="4D5A68"/>
+                </a:solidFill>
+                <a:latin typeface="Malgun Gothic"/>
+                <a:ea typeface="Malgun Gothic"/>
+                <a:cs typeface="Malgun Gothic"/>
+              </a:defRPr>
+            </a:lvl5pPr>
+            <a:lvl6pPr algn="r">
+              <a:defRPr sz="1200" b="0">
+                <a:solidFill>
+                  <a:srgbClr val="4D5A68"/>
+                </a:solidFill>
+                <a:latin typeface="Malgun Gothic"/>
+                <a:ea typeface="Malgun Gothic"/>
+                <a:cs typeface="Malgun Gothic"/>
+              </a:defRPr>
+            </a:lvl6pPr>
+            <a:lvl7pPr algn="r">
+              <a:defRPr sz="1200" b="0">
+                <a:solidFill>
+                  <a:srgbClr val="4D5A68"/>
+                </a:solidFill>
+                <a:latin typeface="Malgun Gothic"/>
+                <a:ea typeface="Malgun Gothic"/>
+                <a:cs typeface="Malgun Gothic"/>
+              </a:defRPr>
+            </a:lvl7pPr>
+            <a:lvl8pPr algn="r">
+              <a:defRPr sz="1200" b="0">
+                <a:solidFill>
+                  <a:srgbClr val="4D5A68"/>
+                </a:solidFill>
+                <a:latin typeface="Malgun Gothic"/>
+                <a:ea typeface="Malgun Gothic"/>
+                <a:cs typeface="Malgun Gothic"/>
+              </a:defRPr>
+            </a:lvl8pPr>
+            <a:lvl9pPr algn="r">
+              <a:defRPr sz="1200" b="0">
+                <a:solidFill>
+                  <a:srgbClr val="4D5A68"/>
+                </a:solidFill>
+                <a:latin typeface="Malgun Gothic"/>
+                <a:ea typeface="Malgun Gothic"/>
+                <a:cs typeface="Malgun Gothic"/>
+              </a:defRPr>
+            </a:lvl9pPr>
+          </a:lstStyle>
+          <a:p xmlns:a="http://schemas.openxmlformats.org/drawingml/2006/main">
+            <a:pPr algn="r">
+              <a:defRPr sz="1200" b="0">
+                <a:solidFill>
+                  <a:srgbClr val="4D5A68"/>
+                </a:solidFill>
+                <a:latin typeface="Malgun Gothic"/>
+                <a:ea typeface="Malgun Gothic"/>
+                <a:cs typeface="Malgun Gothic"/>
+              </a:defRPr>
+            </a:pPr>
+            <a:r>
+              <a:rPr sz="1200" b="0">
+                <a:solidFill>
+                  <a:srgbClr val="4D5A68"/>
+                </a:solidFill>
+                <a:latin typeface="Malgun Gothic"/>
+                <a:ea typeface="Malgun Gothic"/>
+                <a:cs typeface="Malgun Gothic"/>
+              </a:rPr>
+              <a:t>M 연계 · M1 · M2</a:t>
+            </a:r>
+          </a:p>
+        </p:txBody>
+      </p:sp>
     </p:spTree>
     <p:extLst>
       <p:ext uri="{BB962C8B-B14F-4D97-AF65-F5344CB8AC3E}">
-        <p14:creationId xmlns:p14="http://schemas.microsoft.com/office/powerpoint/2010/main" val="1841214156"/>
+        <p14:creationId xmlns:p14="http://schemas.microsoft.com/office/powerpoint/2010/main" val="2003669124"/>
       </p:ext>
     </p:extLst>
   </p:cSld>
@@ -26822,10 +28249,10 @@
       </p:grpSpPr>
       <p:sp>
         <p:nvSpPr>
-          <p:cNvPr id="11" name="ACT 0 · 내 작업에 적용할 질문">
+          <p:cNvPr id="12" name="ACT 0 · 내 작업에 적용할 질문">
             <a:extLst xmlns:a="http://schemas.openxmlformats.org/drawingml/2006/main">
               <a:ext uri="{FF2B5EF4-FFF2-40B4-BE49-F238E27FC236}">
-                <a16:creationId xmlns:a16="http://schemas.microsoft.com/office/drawing/2014/main" id="{FABC6482-F3BB-487D-BF50-7174F7FC097E}"/>
+                <a16:creationId xmlns:a16="http://schemas.microsoft.com/office/drawing/2014/main" id="{545FAA95-6DC7-4296-BFA5-CA892D601F21}"/>
               </a:ext>
             </a:extLst>
           </p:cNvPr>
@@ -26983,7 +28410,7 @@
           <p:cNvPr id="2" name="S09">
             <a:extLst xmlns:a="http://schemas.openxmlformats.org/drawingml/2006/main">
               <a:ext uri="{FF2B5EF4-FFF2-40B4-BE49-F238E27FC236}">
-                <a16:creationId xmlns:a16="http://schemas.microsoft.com/office/drawing/2014/main" id="{4C75E311-3CF2-40BA-8E04-CB7E68E987C6}"/>
+                <a16:creationId xmlns:a16="http://schemas.microsoft.com/office/drawing/2014/main" id="{266C4A78-D914-4833-8100-BA1D685360ED}"/>
               </a:ext>
             </a:extLst>
           </p:cNvPr>
@@ -27141,7 +28568,7 @@
           <p:cNvPr id="3" name="Repository를 보면 내가 원하는 것까지 알까?">
             <a:extLst xmlns:a="http://schemas.openxmlformats.org/drawingml/2006/main">
               <a:ext uri="{FF2B5EF4-FFF2-40B4-BE49-F238E27FC236}">
-                <a16:creationId xmlns:a16="http://schemas.microsoft.com/office/drawing/2014/main" id="{38D2DC58-FABD-446C-9614-07FA30485C28}"/>
+                <a16:creationId xmlns:a16="http://schemas.microsoft.com/office/drawing/2014/main" id="{48CFF8B9-FA11-4C94-98EF-B3947B5E3FE9}"/>
               </a:ext>
             </a:extLst>
           </p:cNvPr>
@@ -27299,7 +28726,7 @@
           <p:cNvPr id="4" name="">
             <a:extLst xmlns:a="http://schemas.openxmlformats.org/drawingml/2006/main">
               <a:ext uri="{FF2B5EF4-FFF2-40B4-BE49-F238E27FC236}">
-                <a16:creationId xmlns:a16="http://schemas.microsoft.com/office/drawing/2014/main" id="{09FE15A7-CE3B-4BAF-9EF5-0EC561E75EAE}"/>
+                <a16:creationId xmlns:a16="http://schemas.microsoft.com/office/drawing/2014/main" id="{13781463-00FA-43C9-A85E-8351594CE687}"/>
               </a:ext>
             </a:extLst>
           </p:cNvPr>
@@ -27310,7 +28737,7 @@
         </p:nvSpPr>
         <p:spPr>
           <a:xfrm xmlns:a="http://schemas.openxmlformats.org/drawingml/2006/main">
-            <a:off x="609600" y="5829300"/>
+            <a:off x="609600" y="5753100"/>
             <a:ext cx="10972800" cy="0"/>
           </a:xfrm>
           <a:prstGeom xmlns:a="http://schemas.openxmlformats.org/drawingml/2006/main" prst="line">
@@ -27330,7 +28757,7 @@
           <p:cNvPr id="5" name="함께 생각해 보기 · 교육 모델">
             <a:extLst xmlns:a="http://schemas.openxmlformats.org/drawingml/2006/main">
               <a:ext uri="{FF2B5EF4-FFF2-40B4-BE49-F238E27FC236}">
-                <a16:creationId xmlns:a16="http://schemas.microsoft.com/office/drawing/2014/main" id="{4CD10FA1-2CFB-44F6-94AB-7CC57EC46791}"/>
+                <a16:creationId xmlns:a16="http://schemas.microsoft.com/office/drawing/2014/main" id="{E82DD95C-9385-4EB0-A651-42434C312521}"/>
               </a:ext>
             </a:extLst>
           </p:cNvPr>
@@ -27341,8 +28768,8 @@
         </p:nvSpPr>
         <p:spPr>
           <a:xfrm xmlns:a="http://schemas.openxmlformats.org/drawingml/2006/main">
-            <a:off x="609600" y="5915025"/>
-            <a:ext cx="10972800" cy="247650"/>
+            <a:off x="609600" y="5791200"/>
+            <a:ext cx="10972800" cy="228600"/>
           </a:xfrm>
           <a:prstGeom xmlns:a="http://schemas.openxmlformats.org/drawingml/2006/main" prst="rect">
             <a:avLst/>
@@ -27488,7 +28915,7 @@
           <p:cNvPr id="6" name="현재 맡기고 싶은 일을 떠올려 보세요. 질문과 경험 공유는 자발적으로 진행합니다.">
             <a:extLst xmlns:a="http://schemas.openxmlformats.org/drawingml/2006/main">
               <a:ext uri="{FF2B5EF4-FFF2-40B4-BE49-F238E27FC236}">
-                <a16:creationId xmlns:a16="http://schemas.microsoft.com/office/drawing/2014/main" id="{F2222AE9-76F0-4788-99D5-70C2653223D5}"/>
+                <a16:creationId xmlns:a16="http://schemas.microsoft.com/office/drawing/2014/main" id="{7157A8E5-37DD-444E-8C5F-025B8E1A7F13}"/>
               </a:ext>
             </a:extLst>
           </p:cNvPr>
@@ -27499,7 +28926,7 @@
         </p:nvSpPr>
         <p:spPr>
           <a:xfrm xmlns:a="http://schemas.openxmlformats.org/drawingml/2006/main">
-            <a:off x="609600" y="6191250"/>
+            <a:off x="609600" y="6019800"/>
             <a:ext cx="10972800" cy="209550"/>
           </a:xfrm>
           <a:prstGeom xmlns:a="http://schemas.openxmlformats.org/drawingml/2006/main" prst="rect">
@@ -27646,7 +29073,7 @@
           <p:cNvPr id="7" name="지금 이 저장소에&#10;어떤 일을 맡기고 싶으신가요?">
             <a:extLst xmlns:a="http://schemas.openxmlformats.org/drawingml/2006/main">
               <a:ext uri="{FF2B5EF4-FFF2-40B4-BE49-F238E27FC236}">
-                <a16:creationId xmlns:a16="http://schemas.microsoft.com/office/drawing/2014/main" id="{5AA74C95-A44F-4E49-AADE-27EA3BD49655}"/>
+                <a16:creationId xmlns:a16="http://schemas.microsoft.com/office/drawing/2014/main" id="{4D6FFDC8-E637-4FB0-849E-1CED67F81FED}"/>
               </a:ext>
             </a:extLst>
           </p:cNvPr>
@@ -27827,7 +29254,7 @@
           <p:cNvPr id="8" name="?">
             <a:extLst xmlns:a="http://schemas.openxmlformats.org/drawingml/2006/main">
               <a:ext uri="{FF2B5EF4-FFF2-40B4-BE49-F238E27FC236}">
-                <a16:creationId xmlns:a16="http://schemas.microsoft.com/office/drawing/2014/main" id="{F303C102-F5CC-4092-A2C7-FAA9FF715593}"/>
+                <a16:creationId xmlns:a16="http://schemas.microsoft.com/office/drawing/2014/main" id="{72776F5E-CA2E-4090-9595-BE007046E4E8}"/>
               </a:ext>
             </a:extLst>
           </p:cNvPr>
@@ -27985,7 +29412,7 @@
           <p:cNvPr id="9" name="">
             <a:extLst xmlns:a="http://schemas.openxmlformats.org/drawingml/2006/main">
               <a:ext uri="{FF2B5EF4-FFF2-40B4-BE49-F238E27FC236}">
-                <a16:creationId xmlns:a16="http://schemas.microsoft.com/office/drawing/2014/main" id="{134F206F-7311-4FF5-9813-8E4F5B956915}"/>
+                <a16:creationId xmlns:a16="http://schemas.microsoft.com/office/drawing/2014/main" id="{1393A6A6-E3CF-4660-875B-7BB51AF7C367}"/>
               </a:ext>
             </a:extLst>
           </p:cNvPr>
@@ -28016,7 +29443,7 @@
           <p:cNvPr id="10" name="그 원하는 결과까지&#10;코드에 적혀 있을까요?">
             <a:extLst xmlns:a="http://schemas.openxmlformats.org/drawingml/2006/main">
               <a:ext uri="{FF2B5EF4-FFF2-40B4-BE49-F238E27FC236}">
-                <a16:creationId xmlns:a16="http://schemas.microsoft.com/office/drawing/2014/main" id="{8FC2890A-09E2-45F8-B4C6-8B1B3F587F02}"/>
+                <a16:creationId xmlns:a16="http://schemas.microsoft.com/office/drawing/2014/main" id="{96EA1588-2553-449B-B9D2-29ADA07869F7}"/>
               </a:ext>
             </a:extLst>
           </p:cNvPr>
@@ -28192,10 +29619,168 @@
           </a:p>
         </p:txBody>
       </p:sp>
+      <p:sp>
+        <p:nvSpPr>
+          <p:cNvPr id="11" name="Legacy module connection">
+            <a:extLst xmlns:a="http://schemas.openxmlformats.org/drawingml/2006/main">
+              <a:ext uri="{FF2B5EF4-FFF2-40B4-BE49-F238E27FC236}">
+                <a16:creationId xmlns:a16="http://schemas.microsoft.com/office/drawing/2014/main" id="{07A842BA-E007-4F94-B981-ED610D8C8659}"/>
+              </a:ext>
+            </a:extLst>
+          </p:cNvPr>
+          <p:cNvSpPr>
+            <a:spLocks xmlns:a="http://schemas.openxmlformats.org/drawingml/2006/main" noGrp="1"/>
+          </p:cNvSpPr>
+          <p:nvPr/>
+        </p:nvSpPr>
+        <p:spPr>
+          <a:xfrm xmlns:a="http://schemas.openxmlformats.org/drawingml/2006/main">
+            <a:off x="609600" y="6229350"/>
+            <a:ext cx="10972800" cy="171450"/>
+          </a:xfrm>
+          <a:prstGeom xmlns:a="http://schemas.openxmlformats.org/drawingml/2006/main" prst="rect">
+            <a:avLst/>
+          </a:prstGeom>
+          <a:noFill xmlns:a="http://schemas.openxmlformats.org/drawingml/2006/main"/>
+          <a:ln xmlns:a="http://schemas.openxmlformats.org/drawingml/2006/main" w="0">
+            <a:noFill/>
+          </a:ln>
+        </p:spPr>
+        <p:txBody>
+          <a:bodyPr xmlns:a="http://schemas.openxmlformats.org/drawingml/2006/main" wrap="none" lIns="0" tIns="0" rIns="0" bIns="0" anchor="ctr">
+            <a:noAutofit/>
+          </a:bodyPr>
+          <a:lstStyle xmlns:a="http://schemas.openxmlformats.org/drawingml/2006/main">
+            <a:defPPr algn="r">
+              <a:defRPr sz="1200" b="0">
+                <a:solidFill>
+                  <a:srgbClr val="4D5A68"/>
+                </a:solidFill>
+                <a:latin typeface="Malgun Gothic"/>
+                <a:ea typeface="Malgun Gothic"/>
+                <a:cs typeface="Malgun Gothic"/>
+              </a:defRPr>
+            </a:defPPr>
+            <a:lvl1pPr algn="r">
+              <a:defRPr sz="1200" b="0">
+                <a:solidFill>
+                  <a:srgbClr val="4D5A68"/>
+                </a:solidFill>
+                <a:latin typeface="Malgun Gothic"/>
+                <a:ea typeface="Malgun Gothic"/>
+                <a:cs typeface="Malgun Gothic"/>
+              </a:defRPr>
+            </a:lvl1pPr>
+            <a:lvl2pPr algn="r">
+              <a:defRPr sz="1200" b="0">
+                <a:solidFill>
+                  <a:srgbClr val="4D5A68"/>
+                </a:solidFill>
+                <a:latin typeface="Malgun Gothic"/>
+                <a:ea typeface="Malgun Gothic"/>
+                <a:cs typeface="Malgun Gothic"/>
+              </a:defRPr>
+            </a:lvl2pPr>
+            <a:lvl3pPr algn="r">
+              <a:defRPr sz="1200" b="0">
+                <a:solidFill>
+                  <a:srgbClr val="4D5A68"/>
+                </a:solidFill>
+                <a:latin typeface="Malgun Gothic"/>
+                <a:ea typeface="Malgun Gothic"/>
+                <a:cs typeface="Malgun Gothic"/>
+              </a:defRPr>
+            </a:lvl3pPr>
+            <a:lvl4pPr algn="r">
+              <a:defRPr sz="1200" b="0">
+                <a:solidFill>
+                  <a:srgbClr val="4D5A68"/>
+                </a:solidFill>
+                <a:latin typeface="Malgun Gothic"/>
+                <a:ea typeface="Malgun Gothic"/>
+                <a:cs typeface="Malgun Gothic"/>
+              </a:defRPr>
+            </a:lvl4pPr>
+            <a:lvl5pPr algn="r">
+              <a:defRPr sz="1200" b="0">
+                <a:solidFill>
+                  <a:srgbClr val="4D5A68"/>
+                </a:solidFill>
+                <a:latin typeface="Malgun Gothic"/>
+                <a:ea typeface="Malgun Gothic"/>
+                <a:cs typeface="Malgun Gothic"/>
+              </a:defRPr>
+            </a:lvl5pPr>
+            <a:lvl6pPr algn="r">
+              <a:defRPr sz="1200" b="0">
+                <a:solidFill>
+                  <a:srgbClr val="4D5A68"/>
+                </a:solidFill>
+                <a:latin typeface="Malgun Gothic"/>
+                <a:ea typeface="Malgun Gothic"/>
+                <a:cs typeface="Malgun Gothic"/>
+              </a:defRPr>
+            </a:lvl6pPr>
+            <a:lvl7pPr algn="r">
+              <a:defRPr sz="1200" b="0">
+                <a:solidFill>
+                  <a:srgbClr val="4D5A68"/>
+                </a:solidFill>
+                <a:latin typeface="Malgun Gothic"/>
+                <a:ea typeface="Malgun Gothic"/>
+                <a:cs typeface="Malgun Gothic"/>
+              </a:defRPr>
+            </a:lvl7pPr>
+            <a:lvl8pPr algn="r">
+              <a:defRPr sz="1200" b="0">
+                <a:solidFill>
+                  <a:srgbClr val="4D5A68"/>
+                </a:solidFill>
+                <a:latin typeface="Malgun Gothic"/>
+                <a:ea typeface="Malgun Gothic"/>
+                <a:cs typeface="Malgun Gothic"/>
+              </a:defRPr>
+            </a:lvl8pPr>
+            <a:lvl9pPr algn="r">
+              <a:defRPr sz="1200" b="0">
+                <a:solidFill>
+                  <a:srgbClr val="4D5A68"/>
+                </a:solidFill>
+                <a:latin typeface="Malgun Gothic"/>
+                <a:ea typeface="Malgun Gothic"/>
+                <a:cs typeface="Malgun Gothic"/>
+              </a:defRPr>
+            </a:lvl9pPr>
+          </a:lstStyle>
+          <a:p xmlns:a="http://schemas.openxmlformats.org/drawingml/2006/main">
+            <a:pPr algn="r">
+              <a:defRPr sz="1200" b="0">
+                <a:solidFill>
+                  <a:srgbClr val="4D5A68"/>
+                </a:solidFill>
+                <a:latin typeface="Malgun Gothic"/>
+                <a:ea typeface="Malgun Gothic"/>
+                <a:cs typeface="Malgun Gothic"/>
+              </a:defRPr>
+            </a:pPr>
+            <a:r>
+              <a:rPr sz="1200" b="0">
+                <a:solidFill>
+                  <a:srgbClr val="4D5A68"/>
+                </a:solidFill>
+                <a:latin typeface="Malgun Gothic"/>
+                <a:ea typeface="Malgun Gothic"/>
+                <a:cs typeface="Malgun Gothic"/>
+              </a:rPr>
+              <a:t>M 연계 · M1 · M2</a:t>
+            </a:r>
+          </a:p>
+        </p:txBody>
+      </p:sp>
     </p:spTree>
     <p:extLst>
       <p:ext uri="{BB962C8B-B14F-4D97-AF65-F5344CB8AC3E}">
-        <p14:creationId xmlns:p14="http://schemas.microsoft.com/office/powerpoint/2010/main" val="1344863587"/>
+        <p14:creationId xmlns:p14="http://schemas.microsoft.com/office/powerpoint/2010/main" val="2103535252"/>
       </p:ext>
     </p:extLst>
   </p:cSld>

--- a/production/ACT_0.pptx
+++ b/production/ACT_0.pptx
@@ -2,21 +2,21 @@
 <file path=ppt/presentation.xml><?xml version="1.0" encoding="utf-8"?>
 <p:presentation xmlns:p="http://schemas.openxmlformats.org/presentationml/2006/main">
   <p:sldMasterIdLst>
-    <p:sldMasterId xmlns:r="http://schemas.openxmlformats.org/officeDocument/2006/relationships" id="2147483648" r:id="Raef144a93ee54e13"/>
+    <p:sldMasterId xmlns:r="http://schemas.openxmlformats.org/officeDocument/2006/relationships" id="2147483648" r:id="R0006350e80584923"/>
   </p:sldMasterIdLst>
   <p:notesMasterIdLst>
-    <p:notesMasterId xmlns:r="http://schemas.openxmlformats.org/officeDocument/2006/relationships" r:id="R819d33106aef4e6f"/>
+    <p:notesMasterId xmlns:r="http://schemas.openxmlformats.org/officeDocument/2006/relationships" r:id="Rac2733a811f44619"/>
   </p:notesMasterIdLst>
   <p:sldIdLst>
-    <p:sldId xmlns:r="http://schemas.openxmlformats.org/officeDocument/2006/relationships" id="256" r:id="Rc4ebd88fd8eb4c2b"/>
-    <p:sldId xmlns:r="http://schemas.openxmlformats.org/officeDocument/2006/relationships" id="257" r:id="R22a67a715e804677"/>
-    <p:sldId xmlns:r="http://schemas.openxmlformats.org/officeDocument/2006/relationships" id="258" r:id="R7cbafd7dedfc4505"/>
-    <p:sldId xmlns:r="http://schemas.openxmlformats.org/officeDocument/2006/relationships" id="259" r:id="R82468d67d1ea4472"/>
-    <p:sldId xmlns:r="http://schemas.openxmlformats.org/officeDocument/2006/relationships" id="260" r:id="Rd060e73b045a43df"/>
-    <p:sldId xmlns:r="http://schemas.openxmlformats.org/officeDocument/2006/relationships" id="261" r:id="R319f4fda8bf94dea"/>
-    <p:sldId xmlns:r="http://schemas.openxmlformats.org/officeDocument/2006/relationships" id="262" r:id="Rba9536dc1c44425e"/>
-    <p:sldId xmlns:r="http://schemas.openxmlformats.org/officeDocument/2006/relationships" id="263" r:id="R0a7bc861bce84833"/>
-    <p:sldId xmlns:r="http://schemas.openxmlformats.org/officeDocument/2006/relationships" id="264" r:id="Rd53bd395b98b4c42"/>
+    <p:sldId xmlns:r="http://schemas.openxmlformats.org/officeDocument/2006/relationships" id="256" r:id="Ra75efc88eb164bc1"/>
+    <p:sldId xmlns:r="http://schemas.openxmlformats.org/officeDocument/2006/relationships" id="257" r:id="R308a1100439c4ef1"/>
+    <p:sldId xmlns:r="http://schemas.openxmlformats.org/officeDocument/2006/relationships" id="258" r:id="R4485ad4f09004de6"/>
+    <p:sldId xmlns:r="http://schemas.openxmlformats.org/officeDocument/2006/relationships" id="259" r:id="Rd30a477e21334bae"/>
+    <p:sldId xmlns:r="http://schemas.openxmlformats.org/officeDocument/2006/relationships" id="260" r:id="R8f1a72716d3246b0"/>
+    <p:sldId xmlns:r="http://schemas.openxmlformats.org/officeDocument/2006/relationships" id="261" r:id="R78a290c9ffbd4b6f"/>
+    <p:sldId xmlns:r="http://schemas.openxmlformats.org/officeDocument/2006/relationships" id="262" r:id="Rdae2a47de4404f8b"/>
+    <p:sldId xmlns:r="http://schemas.openxmlformats.org/officeDocument/2006/relationships" id="263" r:id="R92cc87ab002140e5"/>
+    <p:sldId xmlns:r="http://schemas.openxmlformats.org/officeDocument/2006/relationships" id="264" r:id="R1c3df8e91b894f01"/>
   </p:sldIdLst>
   <p:sldSz cx="12192000" cy="6858000"/>
   <p:notesSz cx="6858000" cy="9144000"/>
@@ -1675,27 +1675,27 @@
           </a:p>
           <a:p xmlns:a="http://schemas.openxmlformats.org/drawingml/2006/main">
             <a:r>
-              <a:t>1. (0:00–1:00) TRIAL-001 기록과 STATE-00 테스트를 재구성한 화면임을 밝힌다. 입력의 숫자는 픽셀 값이며 색은 영역 구분용이다.</a:t>
-            </a:r>
-          </a:p>
-          <a:p xmlns:a="http://schemas.openxmlformats.org/drawingml/2006/main">
-            <a:r>
-              <a:t>2. (1:00–3:00) `crop(image, 1, 3)`의 끝 좌표 제외 계약을 짚고 입력, 기대 두 열, 구현에 포함된 세 번째 열을 차례로 가리킨다. 결과 tuple은 원본 소스에 근거한 정적 재구성이다.</a:t>
-            </a:r>
-          </a:p>
-          <a:p xmlns:a="http://schemas.openxmlformats.org/drawingml/2006/main">
-            <a:r>
-              <a:t>3. (3:00–5:00) 실패 테스트명과 `cli.main → pipeline.process_image → transform.crop` 호출 경로를 연결한다. 오른쪽 01–03은 설명 순서이며 Agent의 실제 파일 접근 시각 순서가 아니다.</a:t>
-            </a:r>
-          </a:p>
-          <a:p xmlns:a="http://schemas.openxmlformats.org/drawingml/2006/main">
-            <a:r>
-              <a:t>4. (5:00–7:00) `row[x_start : x_end + 1]`에서 끝 좌표를 포함하게 되는 지점을 짚는다. 코드를 고치거나 새 Test를 실행하지 않는다.</a:t>
-            </a:r>
-          </a:p>
-          <a:p xmlns:a="http://schemas.openxmlformats.org/drawingml/2006/main">
-            <a:r>
-              <a:t>5. (7:00–8:00) 읽기 전용 단일 CLI 조사 범위를 확인하고 S06의 관찰과 환경 한계 분리로 넘어간다.</a:t>
+              <a:t>1. (0:00–1:00) S02의 두 Vector 초기화는 모두 유효하지만 원소 수와 값이 다르다는 점을 짧게 회수한다. 이번에는 실제 crop 조사에서 “의도한 폭과 실제로 포함된 열 수가 달랐다”고 연결한다. C++ 메모리 할당 사고로 바꾸지 않는다. TRIAL-001 기록·STATE-00 소스에 따른 재구성이며, 화면은 원본 두 행 중 첫 행만 보여 준다고 밝힌다.</a:t>
+            </a:r>
+          </a:p>
+          <a:p xmlns:a="http://schemas.openxmlformats.org/drawingml/2006/main">
+            <a:r>
+              <a:t>2. (1:00–3:00) `crop(image, 1, 3)`의 명세는 끝 좌표 3을 제외한다. 첫 행 `1, 2, 3, 4`의 열 index 1·2를 선택하면 값 `2, 3`, 폭 2다. 구현이 포함한 값 `2, 3, 4`는 폭 3이므로 한 열이 더해졌음을 비교한다. 숫자는 픽셀 값이며 색은 영역 구분용이다.</a:t>
+            </a:r>
+          </a:p>
+          <a:p xmlns:a="http://schemas.openxmlformats.org/drawingml/2006/main">
+            <a:r>
+              <a:t>3. (3:00–5:00) 실패 테스트 `test_crop_excludes_end_coordinate`와 `cli.main → pipeline.process_image → transform.crop` 호출 관계를 연결한다. 짧은 화면 표기 `process_image → crop`는 같은 경로의 축약이다. 오른쪽 01–03은 강사의 설명 순서이며 Agent의 실제 파일 접근 시각 순서가 아니다.</a:t>
+            </a:r>
+          </a:p>
+          <a:p xmlns:a="http://schemas.openxmlformats.org/drawingml/2006/main">
+            <a:r>
+              <a:t>4. (5:00–7:00) `row[x_start : x_end + 1]`과 `[x_start, x_end)` 명세를 대조한다. 끝 좌표를 더 포함한 범위 문제이지, allocator·capacity·메모리 할당·버퍼 오버런이 관찰된 사건은 아니다. 코드를 고치거나 새 Test를 실행하지 않는다.</a:t>
+            </a:r>
+          </a:p>
+          <a:p xmlns:a="http://schemas.openxmlformats.org/drawingml/2006/main">
+            <a:r>
+              <a:t>5. (7:00–8:00) 읽기 전용 단일 CLI 조사의 범위를 확인한다. 이어 S06에서 코드에서 설명한 문제와 실행 환경에서 드러난 제한을 나눈다.</a:t>
             </a:r>
           </a:p>
           <a:p xmlns:a="http://schemas.openxmlformats.org/drawingml/2006/main">
@@ -1705,7 +1705,7 @@
           </a:p>
           <a:p xmlns:a="http://schemas.openxmlformats.org/drawingml/2006/main">
             <a:r>
-              <a:t>Evidence / Source: TRIAL-001, DEMO-01, STATE-00, CLM-0002, CLM-0009. `plan/DEMO_MATRIX.md` TRIAL-001; Demo tag STATE-00 `22e7e2f806de2419b0df649107bbae14dea082eb`: `tests/test_transform.py:9–14`, `src/graypipe/transform.py:7–13`. 입력 ((1,2,3,4),(5,6,7,8)); 기대 ((2,3),(6,7)); 코드에 따른 결과 ((2,3,4),(6,7,8)). 마지막 배열은 새 실행 기록이 아닌 정적 재구성이다.</a:t>
+              <a:t>Evidence / Source: TRIAL-001, DEMO-01, STATE-00, CLM-0002, CLM-0009. `plan/DEMO_MATRIX.md` TRIAL-001; Demo tag STATE-00 `22e7e2f806de2419b0df649107bbae14dea082eb`: `tests/test_transform.py:9–14`, `src/graypipe/transform.py:7–13`. 원본 입력 ((1,2,3,4),(5,6,7,8)); 기대 ((2,3),(6,7)); 코드에 따른 결과 ((2,3,4),(6,7,8)). 수정 화면은 두 행 중 첫 행만 발췌해 입력 1·2·3·4, 기대 2·3/폭 2, 구현 결과 2·3·4/폭 3을 표시한다. 새 실행 기록이 아닌 원본 소스·테스트에 따른 정적 재구성이다. S02와의 원소 수 연결은 DEC-0035의 교육용 해석이며 새로운 C++ Trial이 아니다.</a:t>
             </a:r>
           </a:p>
           <a:p xmlns:a="http://schemas.openxmlformats.org/drawingml/2006/main">
@@ -1715,7 +1715,7 @@
           </a:p>
           <a:p xmlns:a="http://schemas.openxmlformats.org/drawingml/2006/main">
             <a:r>
-              <a:t>Claim Boundary: Codex CLI 0.154.0의 단일 읽기 전용 조사. 코드 수정 없음. 테스트 배열·구현에 따른 도식이며 screenshot이 아니다. 호출 화살표는 제품 호출 관계이고 Agent 접근 순서가 아니다. README에 기존 결함 안내가 있으므로 아무 힌트 없이 독자 발견했다고 말하지 않는다. 현재 Desktop, 계정, 반복 재현성과 보편적 탐색 능력은 미검증이다.</a:t>
+              <a:t>Claim Boundary: Codex CLI 0.154.0의 단일 읽기 전용 조사이며 코드 수정은 없었다. 화면은 원본 두 행 중 첫 행을 발췌한 재구성으로 screenshot이 아니다. 호출 화살표는 제품 호출 관계이며 Agent 접근 순서가 아니다. README에 기존 결함 안내가 있으므로 아무 힌트 없이 독자 발견했다고 말하지 않는다. S02의 두 Vector 표현은 모두 유효하다. 연결하는 것은 의도한 크기와 실제 포함 원소를 확인한다는 판단이며 실제 allocator·capacity·메모리 할당 실패·버퍼 오버런·C++ 실행을 관찰했다는 주장이 아니다. 현재 Desktop·계정·반복 재현성·보편적 탐색 능력은 미검증이다.</a:t>
             </a:r>
           </a:p>
           <a:p xmlns:a="http://schemas.openxmlformats.org/drawingml/2006/main">
@@ -1725,7 +1725,7 @@
           </a:p>
           <a:p xmlns:a="http://schemas.openxmlformats.org/drawingml/2006/main">
             <a:r>
-              <a:t>Beginner Explanation: 파일명을 미리 주지 않은 한 번의 조사에서 실패 Test와 관련 구현·호출 경로가 찾아졌다.</a:t>
+              <a:t>Beginner Explanation: 끝 좌표를 포함하느냐에 따라 기대한 폭 2와 실제 포함 폭 3이 달라진다. Agent는 한 번의 조사에서 이 차이를 설명할 Test·구현·호출 경로를 찾아냈다.</a:t>
             </a:r>
           </a:p>
           <a:p xmlns:a="http://schemas.openxmlformats.org/drawingml/2006/main">
@@ -1735,7 +1735,7 @@
           </a:p>
           <a:p xmlns:a="http://schemas.openxmlformats.org/drawingml/2006/main">
             <a:r>
-              <a:t>Advanced Insight: 찾은 경로와 설명은 그 run에서 확인된 범위다. 설명과 수정, 검증은 다른 단계이며 이 Trial에서는 코드를 바꾸지 않았다.</a:t>
+              <a:t>Advanced Insight: S02의 생성자 의미 차이와 S05의 끝 좌표 포함 결함은 서로 다른 현상이다. 의도한 개수와 실제 포함 범위를 근거로 확인한다는 공통 질문만 연결한다. 설명·수정·검증은 별개이며 이 Trial에서는 코드를 바꾸지 않았다.</a:t>
             </a:r>
           </a:p>
           <a:p xmlns:a="http://schemas.openxmlformats.org/drawingml/2006/main">
@@ -1745,7 +1745,7 @@
           </a:p>
           <a:p xmlns:a="http://schemas.openxmlformats.org/drawingml/2006/main">
             <a:r>
-              <a:t>C++ Vision Bridge: N/A.</a:t>
+              <a:t>C++ Vision Bridge: S02의 `std::vector&lt;int&gt;` 초기화 비교를 원소 수·범위 확인의 교육용 연결로만 회수한다. 실제 Demo는 Python crop이며 C++ 메모리 할당·capacity·버퍼 오버런 사건이나 실행 근거로 바꾸지 않는다.</a:t>
             </a:r>
           </a:p>
           <a:p xmlns:a="http://schemas.openxmlformats.org/drawingml/2006/main">
@@ -1755,7 +1755,7 @@
           </a:p>
           <a:p xmlns:a="http://schemas.openxmlformats.org/drawingml/2006/main">
             <a:r>
-              <a:t>Demo Operation: 정적 자료만 사용한다. `production/ACT_0.pptx` S05 / `production/preview/act0/S05.png`의 입력 → 기대/구현 결과 → 실패 Test/호출 경로/구현 순서로 가리킨다. Live/HYBRID는 비활성. 기존 DEMO-01 원본 기록은 `demos/runbooks/demo-01.md` 및 `plan/DEMO_MATRIX.md`. 마지막 1분에는 S06 handoff로 이동한다.</a:t>
+              <a:t>Demo Operation: 정적 자료만 사용한다. `production/ACT_0.pptx` S05 / `production/preview/act0/S05.png`에서 원본 첫 행 발췌 → 끝 좌표 제외 명세 → 기대 폭 2/포함 폭 3 → 실패 Test·호출 경로·구현 순서로 가리킨다. Live/HYBRID는 비활성이다. 실제 DEMO-01 기록은 `demos/runbooks/demo-01.md` 및 `plan/DEMO_MATRIX.md`로 유지한다. 마지막 1분에는 S06의 코드 Context/환경 Context 구분으로 넘어간다.</a:t>
             </a:r>
           </a:p>
           <a:p xmlns:a="http://schemas.openxmlformats.org/drawingml/2006/main">
@@ -1775,7 +1775,7 @@
           </a:p>
           <a:p xmlns:a="http://schemas.openxmlformats.org/drawingml/2006/main">
             <a:r>
-              <a:t>Transition: 발견 사실을 다음 장에서 Repository 관찰과 실행 환경 제한으로 나눈다.</a:t>
+              <a:t>Transition: “이 범위 차이는 코드와 명세에서 설명할 단서가 있습니다. 그런데 실행 중의 오류도 같은 정보로 설명할 수 있을까요?”라고 묻고 S06으로 간다.</a:t>
             </a:r>
           </a:p>
           <a:p xmlns:a="http://schemas.openxmlformats.org/drawingml/2006/main">
@@ -1785,7 +1785,7 @@
           </a:p>
           <a:p xmlns:a="http://schemas.openxmlformats.org/drawingml/2006/main">
             <a:r>
-              <a:t>Time Management: Demo 8분 유지. 1분 출처, 2분 배열, 2분 Test/호출 경로, 2분 구현 차이, 1분 범위와 전환. 초과 시 파일 경로 반복 설명을 줄인다. 새 실행 또는 수정은 하지 않는다.</a:t>
+              <a:t>Time Management: Demo 8분 유지. S02 연결·출처 1분, 첫 행/폭 비교 2분, Test·호출 경로 2분, 구현과 명세 대조 2분, 관찰 범위·S06 전환 1분이다. 연결은 기존 출처 설명 일부를 대체하며 시간을 더하지 않는다. 초과 시 경로 반복을 줄인다. 새 실행·수정은 없다.</a:t>
             </a:r>
           </a:p>
           <a:p xmlns:a="http://schemas.openxmlformats.org/drawingml/2006/main">
@@ -1795,7 +1795,7 @@
           </a:p>
           <a:p xmlns:a="http://schemas.openxmlformats.org/drawingml/2006/main">
             <a:r>
-              <a:t>Fallback: 승인된 정적 도식 — `production/ACT_0.pptx` S05와 `production/preview/act0/S05.png`를 사용한다. 새 제작본 삽입·렌더 대조는 통합 단계에서 수행한다. 원본 Trial 캡처나 Live 결과로 표현하지 않는다. 발표용 시각 방향은 사용자 승인 완료이며 Windows·교육장·실제 운영 검증은 별도다.</a:t>
+              <a:t>Fallback: 정적 기본 경로 — `production/ACT_0.pptx` S05 또는 `production/preview/act0/S05.png`에서 첫 행 발췌·폭 2/3·Test·호출 경로를 설명한다. 이번 수정본의 삽입·렌더 대조는 제작 단계에서 확인한다. 원본 Trial 캡처·Live 결과·새 C++ 실행으로 표현하지 않는다. Windows·교육장·실제 운영 시간 검증은 별도다.</a:t>
             </a:r>
           </a:p>
           <a:p xmlns:a="http://schemas.openxmlformats.org/drawingml/2006/main">
@@ -1805,7 +1805,7 @@
           </a:p>
           <a:p xmlns:a="http://schemas.openxmlformats.org/drawingml/2006/main">
             <a:r>
-              <a:t>Validation Status: REVIEWED — 원문·Claim 경계, 화면의 설명 순서와 운영 지침을 대조했다. 최종 PPT/Notes/PNG 대조 결과는 production/evaluation/FULL_DECK_PRESENTATION_REVISION.md에 기록한다. Windows PowerPoint, 발표 PC 글꼴, 교육장 투사, 실제 시간 리허설은 UNVERIFIED.</a:t>
+              <a:t>Validation Status: ALIGNED — DEC-0035에 따라 실제 관찰과 교육용 해석의 경계를 유지하며 화면·운영 지침을 정렬했다. 이번 수정본의 PPT 내장 Notes·최종 PNG 대조와 렌더링 검토 결과는 `production/evaluation/ACT_0_CONTEXT_SCOPE_REVISION.md`에서 별도로 기록한다. 문서 정렬은 새 제작본의 렌더링 PASS나 실환경 검증을 뜻하지 않는다. Windows PowerPoint·발표 PC 글꼴·교육장 투사·현재 제품/계정·실측 리허설은 UNVERIFIED.</a:t>
             </a:r>
           </a:p>
         </p:txBody>
@@ -1945,7 +1945,7 @@
           </a:p>
           <a:p xmlns:a="http://schemas.openxmlformats.org/drawingml/2006/main">
             <a:r>
-              <a:t>Opening Question: “어떤 결과가 Repository 관찰이고, 어떤 결과가 실행 환경 제한인가?”</a:t>
+              <a:t>Opening Question: “Chatbot에 코드·명세만 골라 넣었다면, 실행 환경의 어떤 정보가 빠질까?” 실제 비교 실행 결과가 아니라 전달한 Context의 범위를 묻는 가정이다.</a:t>
             </a:r>
           </a:p>
           <a:p xmlns:a="http://schemas.openxmlformats.org/drawingml/2006/main">
@@ -1965,22 +1965,27 @@
           </a:p>
           <a:p xmlns:a="http://schemas.openxmlformats.org/drawingml/2006/main">
             <a:r>
-              <a:t>1. **OPEN (0:00–0:45):** 왼쪽 “코드에서 확인한 문제”와 오른쪽 “실행 환경에서 생긴 제한”을 서로 다른 원인으로 읽는다.</a:t>
-            </a:r>
-          </a:p>
-          <a:p xmlns:a="http://schemas.openxmlformats.org/drawingml/2006/main">
-            <a:r>
-              <a:t>2. **SHOW (0:45–2:15):** 왼쪽에서 한 열이 더 포함된 crop 동작과 테스트·호출 경로·계약의 연결을 짚는다. 조사 결과이며 코드는 그대로였음을 말한다.</a:t>
-            </a:r>
-          </a:p>
-          <a:p xmlns:a="http://schemas.openxmlformats.org/drawingml/2006/main">
-            <a:r>
-              <a:t>3. **SHOW (2:15–3:30):** 오른쪽에서 읽기 전용 권한으로 임시 디렉터리 생성이 막힌 세 오류를 설명한다. crop 결함의 세 추가 증거가 아니다.</a:t>
-            </a:r>
-          </a:p>
-          <a:p xmlns:a="http://schemas.openxmlformats.org/drawingml/2006/main">
-            <a:r>
-              <a:t>4. **INTERPRET / TRANSFER (3:30–5:00):** 아래의 전체 기록 7개 통과 + crop 실패 + 환경 오류 3건을 확인하고 관찰 사실과 실행 조건을 분리하는 판단으로 마무리한다.</a:t>
+              <a:t>1. **OPEN (0:00–0:45):** 상단 “Chatbot에 코드·명세만 골라 넣었다면?”을 가정으로 읽는다. Chatbot과 Agent를 실제로 비교한 실험이 아니라, 전달한 정보와 빠진 정보를 구분하는 교육용 해석임을 밝힌다.</a:t>
+            </a:r>
+          </a:p>
+          <a:p xmlns:a="http://schemas.openxmlformats.org/drawingml/2006/main">
+            <a:r>
+              <a:t>2. **CODE CONTEXT (0:45–2:00):** 왼쪽 “코드 Context로 논의할 수 있는 부분”에서 기대 폭 2와 포함 폭 3, 명세·테스트·구현의 비교를 짚는다. 실제 Trial은 그 원인을 설명했으며 코드는 수정하지 않았다는 사실을 유지한다. 관련 코드를 충분히 전달한 대화에서도 이런 원인 분석의 단서는 생길 수 있다는 가정이다.</a:t>
+            </a:r>
+          </a:p>
+          <a:p xmlns:a="http://schemas.openxmlformats.org/drawingml/2006/main">
+            <a:r>
+              <a:t>3. **ENVIRONMENT CONTEXT (2:00–3:15):** 오른쪽 “함께 전달하지 않은 실행 환경”에서 읽기 전용·임시 디렉터리 생성 제한과 환경 오류 3건을 짚는다. 코드만 입력했다는 가정에서는 실행 로그·권한 정보가 빠져 있으므로, 코드 문제와 같은 정보만으로 이 원인을 판단하기 어렵다고 설명한다. 세 오류를 crop 결함의 추가 증거로 세지 않는다.</a:t>
+            </a:r>
+          </a:p>
+          <a:p xmlns:a="http://schemas.openxmlformats.org/drawingml/2006/main">
+            <a:r>
+              <a:t>4. **BOUNDARY (3:15–4:15):** “코드만 옮기면, 실행 환경의 단서는 빠진다”를 강조한다. 환경 로그·권한 정보까지 전달하면 Chatbot에도 분석 단서가 생길 수 있다. 이번 Agent도 권한 제한을 해제하거나 코드를 수정하지 않았으므로, Chatbot의 불가능이나 Agent의 해결 우위를 주장하지 않는다.</a:t>
+            </a:r>
+          </a:p>
+          <a:p xmlns:a="http://schemas.openxmlformats.org/drawingml/2006/main">
+            <a:r>
+              <a:t>5. **RECAP / TRANSITION (4:15–5:00):** 실제 전체 기록 7개 통과 + crop 실패 1건 + 환경 오류 3건을 확인한다. 코드와 실행 환경을 모두 Context로 본 뒤 “누가 이 정보를 찾아 연결할 것인가?”라는 질문으로 S07에 간다.</a:t>
             </a:r>
           </a:p>
           <a:p xmlns:a="http://schemas.openxmlformats.org/drawingml/2006/main">
@@ -1990,7 +1995,7 @@
           </a:p>
           <a:p xmlns:a="http://schemas.openxmlformats.org/drawingml/2006/main">
             <a:r>
-              <a:t>Evidence / Source: TRIAL-001의 full suite 기록: 7 passing tests, 기대한 crop failure, 임시 디렉터리를 만들 수 없어 발생한 3 errors. Focused command 기록: 2 passing tests와 같은 crop failure. Working tree는 변경되지 않았다.</a:t>
+              <a:t>Evidence / Source: TRIAL-001의 full suite 기록은 7 passing tests + 기대한 crop failure 1건 + 읽기 전용 sandbox가 임시 디렉터리를 만들 수 없어 발생한 환경 errors 3건이다. Focused command는 2 passing tests와 같은 crop failure였다. Working tree는 변경되지 않았다. 근거 원본: `plan/DEMO_MATRIX.md` TRIAL-001. “Chatbot에 코드·명세만 입력했다면”이라는 가정과 전달/누락 Context의 비교는 DEC-0035의 교육용 해석이며 실제 Chatbot/Agent 비교 실행이나 관찰된 우열 결과가 아니다.</a:t>
             </a:r>
           </a:p>
           <a:p xmlns:a="http://schemas.openxmlformats.org/drawingml/2006/main">
@@ -2000,7 +2005,7 @@
           </a:p>
           <a:p xmlns:a="http://schemas.openxmlformats.org/drawingml/2006/main">
             <a:r>
-              <a:t>Claim Boundary: 세 errors는 read-only 환경의 temp-directory 제한이며 crop bug의 근거가 아니다. TRIAL-001은 코드 수정을 수행하지 않았다. Trial 범위 밖의 테스트 결과, 제품 동작 또는 반복성을 추론하지 않는다.</a:t>
+              <a:t>Claim Boundary: 세 errors는 read-only 환경의 temp-directory 제한이며 crop bug의 근거가 아니다. TRIAL-001은 코드를 수정하거나 권한 제한을 해제하지 않았다. 코드·명세만 대화에 전달했다는 설정은 교육용 가정이며 특정 Chatbot 제품의 능력·도구 지원·해결 불가능성을 입증하지 않는다. 실행 로그·권한 정보까지 전달한다면 Chatbot도 원인 분석 단서를 가질 수 있다. 이번 기록으로 Chatbot 대비 Agent의 해결 우위를 주장하지 않는다. 실제 관찰과 교육용 해석을 분리하며 Trial 범위 밖의 테스트 결과·현재 제품 동작·반복성을 추론하지 않는다.</a:t>
             </a:r>
           </a:p>
           <a:p xmlns:a="http://schemas.openxmlformats.org/drawingml/2006/main">
@@ -2010,7 +2015,7 @@
           </a:p>
           <a:p xmlns:a="http://schemas.openxmlformats.org/drawingml/2006/main">
             <a:r>
-              <a:t>Beginner Explanation: 기능의 관찰 결과와 실행 환경의 제한을 서로 다른 원인으로 적는다.</a:t>
+              <a:t>Beginner Explanation: 복사한 코드와 명세에는 코드 문제의 단서가 있을 수 있다. 실제 실행 로그와 권한 정보를 함께 전달하지 않았다면 환경 오류의 단서는 빠져 있다. 어느 도구가 무조건 더 잘하느냐보다 어떤 Context가 있는지 먼저 본다.</a:t>
             </a:r>
           </a:p>
           <a:p xmlns:a="http://schemas.openxmlformats.org/drawingml/2006/main">
@@ -2020,7 +2025,7 @@
           </a:p>
           <a:p xmlns:a="http://schemas.openxmlformats.org/drawingml/2006/main">
             <a:r>
-              <a:t>Advanced Insight: 실제 결함 징후, 권한·환경 오류, 미측정 사항을 분류해 후속 판단이 잘못된 원인에 고정되지 않게 한다.</a:t>
+              <a:t>Advanced Insight: 정보를 전달하지 않은 것과 도구가 그 문제를 해결할 능력이 없는 것은 다르다. 실제 결함 징후와 환경·권한 오류를 분리하고, 재현·실행에서 얻은 Context가 빠졌는지 확인한다. 이번 Agent는 제한을 관찰했을 뿐 해제하지 않았다.</a:t>
             </a:r>
           </a:p>
           <a:p xmlns:a="http://schemas.openxmlformats.org/drawingml/2006/main">
@@ -2040,7 +2045,7 @@
           </a:p>
           <a:p xmlns:a="http://schemas.openxmlformats.org/drawingml/2006/main">
             <a:r>
-              <a:t>Demo Operation: DEMO-01 / WHAT HAPPENED. `production/ACT_0.pptx` S06의 흰 관찰 영역과 amber 환경 제한 영역을 순서대로 설명한다. 0:00–0:45 구분, 0:45–2:15 crop 관찰, 2:15–3:30 환경, 3:30–5:00 기록의 범위와 전환이다. 새 테스트나 제품 실행은 하지 않는다.</a:t>
+              <a:t>Demo Operation: DEMO-01 / WHAT HAPPENED. `production/ACT_0.pptx` S06 또는 `production/preview/act0/S06.png`에서 상단 가정 → 왼쪽 코드 Context → 오른쪽 환경 Context → 전달하지 않은 정보에 대한 해석 → 실제 7/1/3 기록 순서로 설명한다. 가정과 실제 Trial을 구분하고 새 Chatbot 대화·테스트·제품 실행이나 환경 복구를 하지 않는다.</a:t>
             </a:r>
           </a:p>
           <a:p xmlns:a="http://schemas.openxmlformats.org/drawingml/2006/main">
@@ -2050,7 +2055,7 @@
           </a:p>
           <a:p xmlns:a="http://schemas.openxmlformats.org/drawingml/2006/main">
             <a:r>
-              <a:t>Audience Interaction: 질문은 결과 해석을 위한 Case cue다. 응답을 받거나 환경 오류를 해결하게 하지 않는다.</a:t>
+              <a:t>Audience Interaction: 질문은 전달한 정보와 빠진 정보를 생각하게 하는 Case cue다. 응답·실습·환경 해결을 요구하거나 Chatbot과 Agent의 승자를 고르게 하지 않는다.</a:t>
             </a:r>
           </a:p>
           <a:p xmlns:a="http://schemas.openxmlformats.org/drawingml/2006/main">
@@ -2060,7 +2065,7 @@
           </a:p>
           <a:p xmlns:a="http://schemas.openxmlformats.org/drawingml/2006/main">
             <a:r>
-              <a:t>Transition: “Context를 찾는 주체가 바뀌면 무엇이 달라질까요?”라는 질문으로 S07에 연결한다.</a:t>
+              <a:t>Transition: “코드 밖의 실행 환경도 Context라면, 누가 필요한 정보를 찾아 연결할까요?”라고 묻고 S07의 Context 수집 주체 비교로 간다.</a:t>
             </a:r>
           </a:p>
           <a:p xmlns:a="http://schemas.openxmlformats.org/drawingml/2006/main">
@@ -2070,7 +2075,7 @@
           </a:p>
           <a:p xmlns:a="http://schemas.openxmlformats.org/drawingml/2006/main">
             <a:r>
-              <a:t>Time Management: Repo observation과 environment limitation에 시간을 나눠 쓴다. 원인 경계를 줄여 말하더라도 3 errors를 crop 결함으로 부르지 않는다.</a:t>
+              <a:t>Time Management: Case 5분 유지. 가정과 실제 구분 45초, 코드 Context 75초, 실행 환경 Context 75초, 비교 주장 경계·누락 정보 해석 60초, 실제 기록·전환 45초다. 시간 초과 시 반복 설명을 줄이되 3 errors를 crop 결함으로 부르거나 도구 우열로 단정하지 않는다. 실제 시간 적합성은 리허설 전까지 미검증이다.</a:t>
             </a:r>
           </a:p>
           <a:p xmlns:a="http://schemas.openxmlformats.org/drawingml/2006/main">
@@ -2080,7 +2085,7 @@
           </a:p>
           <a:p xmlns:a="http://schemas.openxmlformats.org/drawingml/2006/main">
             <a:r>
-              <a:t>Fallback: 정적 기본 경로 — `production/ACT_0.pptx` S06 또는 `production/preview/act0/S06.png`. 새 제작본 렌더 검토는 통합 단계에서 수행한다. 화면을 사용할 수 없으면 기록된 숫자와 코드 문제/환경 제한 두 범주만 말로 설명한다. S05에서 이어지는 복귀 cue: “기록된 결과에서, 코드 문제와 실행 제한을 나눠 보겠습니다.” 운영 시간·Windows·room visibility는 UNVERIFIED.</a:t>
+              <a:t>Fallback: 정적 기본 경로 — `production/ACT_0.pptx` S06 또는 `production/preview/act0/S06.png`. 새 수정본의 렌더·내장 Notes 대조는 제작 단계에서 확인한다. 화면이 없으면 실제 7개 통과/crop 실패 1건/환경 오류 3건을 먼저 밝히고, 코드만 전달한 가정에서는 실행 환경 정보가 빠진다는 해석을 말로 설명한다. 실제 Chatbot 비교나 환경 해결 결과로 대체하지 않는다. 운영 시간·Windows·교육장 표시는 UNVERIFIED.</a:t>
             </a:r>
           </a:p>
           <a:p xmlns:a="http://schemas.openxmlformats.org/drawingml/2006/main">
@@ -2090,7 +2095,7 @@
           </a:p>
           <a:p xmlns:a="http://schemas.openxmlformats.org/drawingml/2006/main">
             <a:r>
-              <a:t>Validation Status: REVIEWED — 원문·Claim 경계, 화면의 설명 순서와 운영 지침을 대조했다. 최종 PPT/Notes/PNG 대조 결과는 production/evaluation/FULL_DECK_PRESENTATION_REVISION.md에 기록한다. Windows PowerPoint, 발표 PC 글꼴, 교육장 투사, 실제 시간 리허설은 UNVERIFIED.</a:t>
+              <a:t>Validation Status: ALIGNED — DEC-0035에 따라 실제 관찰과 교육용 해석의 경계를 유지하며 화면·운영 지침을 정렬했다. 이번 수정본의 PPT 내장 Notes·최종 PNG 대조와 렌더링 검토 결과는 `production/evaluation/ACT_0_CONTEXT_SCOPE_REVISION.md`에서 별도로 기록한다. 문서 정렬은 새 제작본의 렌더링 PASS나 실환경 검증을 뜻하지 않는다. Windows PowerPoint·발표 PC 글꼴·교육장 투사·현재 제품/계정·실측 리허설은 UNVERIFIED.</a:t>
             </a:r>
           </a:p>
         </p:txBody>
@@ -2977,7 +2982,7 @@
           <p:cNvPr id="3" name="Title">
             <a:extLst xmlns:a="http://schemas.openxmlformats.org/drawingml/2006/main">
               <a:ext uri="{FF2B5EF4-FFF2-40B4-BE49-F238E27FC236}">
-                <a16:creationId xmlns:a16="http://schemas.microsoft.com/office/drawing/2014/main" id="{EDA9C8E8-C066-45B7-90B6-29505CF2E485}"/>
+                <a16:creationId xmlns:a16="http://schemas.microsoft.com/office/drawing/2014/main" id="{5933EAC9-7281-410C-AAEB-94FD6C42CF5C}"/>
               </a:ext>
             </a:extLst>
           </p:cNvPr>
@@ -3206,7 +3211,7 @@
           <p:cNvPr id="2" name="Subtitle">
             <a:extLst xmlns:a="http://schemas.openxmlformats.org/drawingml/2006/main">
               <a:ext uri="{FF2B5EF4-FFF2-40B4-BE49-F238E27FC236}">
-                <a16:creationId xmlns:a16="http://schemas.microsoft.com/office/drawing/2014/main" id="{4774CD75-C310-4BB9-ABAE-9538E2AAF411}"/>
+                <a16:creationId xmlns:a16="http://schemas.microsoft.com/office/drawing/2014/main" id="{B26FC804-3545-431E-AAAD-D7068D63E069}"/>
               </a:ext>
             </a:extLst>
           </p:cNvPr>
@@ -3452,7 +3457,7 @@
           <p:cNvPr id="2" name="Section title">
             <a:extLst xmlns:a="http://schemas.openxmlformats.org/drawingml/2006/main">
               <a:ext uri="{FF2B5EF4-FFF2-40B4-BE49-F238E27FC236}">
-                <a16:creationId xmlns:a16="http://schemas.microsoft.com/office/drawing/2014/main" id="{4673BEE1-032B-440E-A12F-71677456EC3C}"/>
+                <a16:creationId xmlns:a16="http://schemas.microsoft.com/office/drawing/2014/main" id="{993D1C9B-49EB-4004-9675-7F6C4FFF3B9A}"/>
               </a:ext>
             </a:extLst>
           </p:cNvPr>
@@ -3698,7 +3703,7 @@
           <p:cNvPr id="3" name="Title">
             <a:extLst xmlns:a="http://schemas.openxmlformats.org/drawingml/2006/main">
               <a:ext uri="{FF2B5EF4-FFF2-40B4-BE49-F238E27FC236}">
-                <a16:creationId xmlns:a16="http://schemas.microsoft.com/office/drawing/2014/main" id="{7211EF1E-F6E8-4778-B559-9382E725150C}"/>
+                <a16:creationId xmlns:a16="http://schemas.microsoft.com/office/drawing/2014/main" id="{4EBBEF1F-1209-49D3-B126-C59FCEE97C5E}"/>
               </a:ext>
             </a:extLst>
           </p:cNvPr>
@@ -3927,7 +3932,7 @@
           <p:cNvPr id="2" name="Body">
             <a:extLst xmlns:a="http://schemas.openxmlformats.org/drawingml/2006/main">
               <a:ext uri="{FF2B5EF4-FFF2-40B4-BE49-F238E27FC236}">
-                <a16:creationId xmlns:a16="http://schemas.microsoft.com/office/drawing/2014/main" id="{678DE9B5-FFAE-45FF-8C64-06761A3339AB}"/>
+                <a16:creationId xmlns:a16="http://schemas.microsoft.com/office/drawing/2014/main" id="{1ABBDC9B-D9B6-42F2-87B1-354492DB83DC}"/>
               </a:ext>
             </a:extLst>
           </p:cNvPr>
@@ -4173,7 +4178,7 @@
           <p:cNvPr id="4" name="Title">
             <a:extLst xmlns:a="http://schemas.openxmlformats.org/drawingml/2006/main">
               <a:ext uri="{FF2B5EF4-FFF2-40B4-BE49-F238E27FC236}">
-                <a16:creationId xmlns:a16="http://schemas.microsoft.com/office/drawing/2014/main" id="{6F0E31D4-1371-4F6E-AC49-29FF2BCCA58C}"/>
+                <a16:creationId xmlns:a16="http://schemas.microsoft.com/office/drawing/2014/main" id="{6E82BA32-AAF6-466A-8C48-26B83A54203F}"/>
               </a:ext>
             </a:extLst>
           </p:cNvPr>
@@ -4402,7 +4407,7 @@
           <p:cNvPr id="2" name="Left column">
             <a:extLst xmlns:a="http://schemas.openxmlformats.org/drawingml/2006/main">
               <a:ext uri="{FF2B5EF4-FFF2-40B4-BE49-F238E27FC236}">
-                <a16:creationId xmlns:a16="http://schemas.microsoft.com/office/drawing/2014/main" id="{16A99AEA-94E1-43EF-B6BD-97C09464A32F}"/>
+                <a16:creationId xmlns:a16="http://schemas.microsoft.com/office/drawing/2014/main" id="{4A18D02C-3349-4085-A406-AE519CC939BB}"/>
               </a:ext>
             </a:extLst>
           </p:cNvPr>
@@ -4631,7 +4636,7 @@
           <p:cNvPr id="3" name="Right column">
             <a:extLst xmlns:a="http://schemas.openxmlformats.org/drawingml/2006/main">
               <a:ext uri="{FF2B5EF4-FFF2-40B4-BE49-F238E27FC236}">
-                <a16:creationId xmlns:a16="http://schemas.microsoft.com/office/drawing/2014/main" id="{AEC044E9-8F35-4541-89A1-C83275DF67F3}"/>
+                <a16:creationId xmlns:a16="http://schemas.microsoft.com/office/drawing/2014/main" id="{57E5ACB9-1C58-4A83-8F05-28D8999632E0}"/>
               </a:ext>
             </a:extLst>
           </p:cNvPr>
@@ -4877,7 +4882,7 @@
           <p:cNvPr id="3" name="Title">
             <a:extLst xmlns:a="http://schemas.openxmlformats.org/drawingml/2006/main">
               <a:ext uri="{FF2B5EF4-FFF2-40B4-BE49-F238E27FC236}">
-                <a16:creationId xmlns:a16="http://schemas.microsoft.com/office/drawing/2014/main" id="{795F725F-CFED-4E30-87C6-DA488F5FDC75}"/>
+                <a16:creationId xmlns:a16="http://schemas.microsoft.com/office/drawing/2014/main" id="{D5A85298-1B5A-4D92-8055-9D6C07EE52D0}"/>
               </a:ext>
             </a:extLst>
           </p:cNvPr>
@@ -5106,7 +5111,7 @@
           <p:cNvPr id="2" name="Left column">
             <a:extLst xmlns:a="http://schemas.openxmlformats.org/drawingml/2006/main">
               <a:ext uri="{FF2B5EF4-FFF2-40B4-BE49-F238E27FC236}">
-                <a16:creationId xmlns:a16="http://schemas.microsoft.com/office/drawing/2014/main" id="{683FEB3E-86FC-449A-AC9F-AAEC8F58CD20}"/>
+                <a16:creationId xmlns:a16="http://schemas.microsoft.com/office/drawing/2014/main" id="{5EDD1C8F-7393-480F-9B42-FAD619D3FB71}"/>
               </a:ext>
             </a:extLst>
           </p:cNvPr>
@@ -5373,12 +5378,12 @@
   </p:cSld>
   <p:clrMap bg1="lt1" tx1="dk1" bg2="lt2" tx2="dk2" accent1="accent1" accent2="accent2" accent3="accent3" accent4="accent4" accent5="accent5" accent6="accent6" hlink="hlink" folHlink="folHlink"/>
   <p:sldLayoutIdLst>
-    <p:sldLayoutId xmlns:r="http://schemas.openxmlformats.org/officeDocument/2006/relationships" id="2147483649" r:id="R02f97e90de89499a"/>
-    <p:sldLayoutId xmlns:r="http://schemas.openxmlformats.org/officeDocument/2006/relationships" id="2147483650" r:id="R40560a5ee7d54532"/>
-    <p:sldLayoutId xmlns:r="http://schemas.openxmlformats.org/officeDocument/2006/relationships" id="2147483651" r:id="R92c0b664abe14957"/>
-    <p:sldLayoutId xmlns:r="http://schemas.openxmlformats.org/officeDocument/2006/relationships" id="2147483652" r:id="Rf7ee358e457d412a"/>
-    <p:sldLayoutId xmlns:r="http://schemas.openxmlformats.org/officeDocument/2006/relationships" id="2147483653" r:id="R0dddd886338a4cf3"/>
-    <p:sldLayoutId xmlns:r="http://schemas.openxmlformats.org/officeDocument/2006/relationships" id="2147483654" r:id="R9b1d6e6fc9134e6d"/>
+    <p:sldLayoutId xmlns:r="http://schemas.openxmlformats.org/officeDocument/2006/relationships" id="2147483649" r:id="R554fcec3636e45fb"/>
+    <p:sldLayoutId xmlns:r="http://schemas.openxmlformats.org/officeDocument/2006/relationships" id="2147483650" r:id="R941cf3754f9640ec"/>
+    <p:sldLayoutId xmlns:r="http://schemas.openxmlformats.org/officeDocument/2006/relationships" id="2147483651" r:id="R6e62641127b74b41"/>
+    <p:sldLayoutId xmlns:r="http://schemas.openxmlformats.org/officeDocument/2006/relationships" id="2147483652" r:id="R986633b992984469"/>
+    <p:sldLayoutId xmlns:r="http://schemas.openxmlformats.org/officeDocument/2006/relationships" id="2147483653" r:id="R36081cab6cef496b"/>
+    <p:sldLayoutId xmlns:r="http://schemas.openxmlformats.org/officeDocument/2006/relationships" id="2147483654" r:id="Rb396b8aa277a46ba"/>
   </p:sldLayoutIdLst>
   <p:txStyles>
     <p:titleStyle>
@@ -5929,7 +5934,7 @@
           <p:cNvPr id="13" name="ACT 0 · 익숙한 사용에서 출발하기">
             <a:extLst xmlns:a="http://schemas.openxmlformats.org/drawingml/2006/main">
               <a:ext uri="{FF2B5EF4-FFF2-40B4-BE49-F238E27FC236}">
-                <a16:creationId xmlns:a16="http://schemas.microsoft.com/office/drawing/2014/main" id="{9FBA0A30-178C-4E06-86DC-60526CD719B0}"/>
+                <a16:creationId xmlns:a16="http://schemas.microsoft.com/office/drawing/2014/main" id="{3984D748-1F93-45C4-9F38-15B60BFCD880}"/>
               </a:ext>
             </a:extLst>
           </p:cNvPr>
@@ -6087,7 +6092,7 @@
           <p:cNvPr id="2" name="S01">
             <a:extLst xmlns:a="http://schemas.openxmlformats.org/drawingml/2006/main">
               <a:ext uri="{FF2B5EF4-FFF2-40B4-BE49-F238E27FC236}">
-                <a16:creationId xmlns:a16="http://schemas.microsoft.com/office/drawing/2014/main" id="{B93B08BF-2CA7-4199-88EA-E5AB49824EE4}"/>
+                <a16:creationId xmlns:a16="http://schemas.microsoft.com/office/drawing/2014/main" id="{6EF38F9F-D99F-4B46-B5F5-752C98926988}"/>
               </a:ext>
             </a:extLst>
           </p:cNvPr>
@@ -6245,7 +6250,7 @@
           <p:cNvPr id="3" name="AI에게 지금 무엇을 맡기고 있는가?">
             <a:extLst xmlns:a="http://schemas.openxmlformats.org/drawingml/2006/main">
               <a:ext uri="{FF2B5EF4-FFF2-40B4-BE49-F238E27FC236}">
-                <a16:creationId xmlns:a16="http://schemas.microsoft.com/office/drawing/2014/main" id="{8BDE6ADA-5787-443E-B14B-F3B286DD6320}"/>
+                <a16:creationId xmlns:a16="http://schemas.microsoft.com/office/drawing/2014/main" id="{81AD7F3B-9088-49F4-8AB9-2C5A97462596}"/>
               </a:ext>
             </a:extLst>
           </p:cNvPr>
@@ -6403,7 +6408,7 @@
           <p:cNvPr id="4" name="">
             <a:extLst xmlns:a="http://schemas.openxmlformats.org/drawingml/2006/main">
               <a:ext uri="{FF2B5EF4-FFF2-40B4-BE49-F238E27FC236}">
-                <a16:creationId xmlns:a16="http://schemas.microsoft.com/office/drawing/2014/main" id="{EFD81530-18EC-4492-8701-51D65C841881}"/>
+                <a16:creationId xmlns:a16="http://schemas.microsoft.com/office/drawing/2014/main" id="{9956F10A-C733-417B-8E94-97B13CCF13EC}"/>
               </a:ext>
             </a:extLst>
           </p:cNvPr>
@@ -6434,7 +6439,7 @@
           <p:cNvPr id="5" name="교육용 사례 삽화 · AI 생성 이미지 · 실제 제품 실행 화면 아님">
             <a:extLst xmlns:a="http://schemas.openxmlformats.org/drawingml/2006/main">
               <a:ext uri="{FF2B5EF4-FFF2-40B4-BE49-F238E27FC236}">
-                <a16:creationId xmlns:a16="http://schemas.microsoft.com/office/drawing/2014/main" id="{5C94C89A-547A-49EE-B06C-6313EC348B3E}"/>
+                <a16:creationId xmlns:a16="http://schemas.microsoft.com/office/drawing/2014/main" id="{E713A9DF-C607-4CCC-A691-A8905EDE248A}"/>
               </a:ext>
             </a:extLst>
           </p:cNvPr>
@@ -6592,7 +6597,7 @@
           <p:cNvPr id="6" name="자신의 경험 하나만 떠올려 보세요. 사용 수준을 평가하는 질문이 아닙니다.">
             <a:extLst xmlns:a="http://schemas.openxmlformats.org/drawingml/2006/main">
               <a:ext uri="{FF2B5EF4-FFF2-40B4-BE49-F238E27FC236}">
-                <a16:creationId xmlns:a16="http://schemas.microsoft.com/office/drawing/2014/main" id="{F2DCC9BB-48B8-4788-A236-3C96F7553880}"/>
+                <a16:creationId xmlns:a16="http://schemas.microsoft.com/office/drawing/2014/main" id="{FC4B5237-3494-4633-959F-764391CE60E9}"/>
               </a:ext>
             </a:extLst>
           </p:cNvPr>
@@ -6750,7 +6755,7 @@
           <p:cNvPr id="7" name="최근 AI에 맡긴 일 하나를 떠올려 보세요.">
             <a:extLst xmlns:a="http://schemas.openxmlformats.org/drawingml/2006/main">
               <a:ext uri="{FF2B5EF4-FFF2-40B4-BE49-F238E27FC236}">
-                <a16:creationId xmlns:a16="http://schemas.microsoft.com/office/drawing/2014/main" id="{B0F844DE-3017-4961-B13C-4BC9B22914F3}"/>
+                <a16:creationId xmlns:a16="http://schemas.microsoft.com/office/drawing/2014/main" id="{B6DC5323-7235-4B39-9AC9-E158277FF060}"/>
               </a:ext>
             </a:extLst>
           </p:cNvPr>
@@ -6908,7 +6913,7 @@
           <p:cNvPr id="8" name="">
             <a:extLst xmlns:a="http://schemas.openxmlformats.org/drawingml/2006/main">
               <a:ext uri="{FF2B5EF4-FFF2-40B4-BE49-F238E27FC236}">
-                <a16:creationId xmlns:a16="http://schemas.microsoft.com/office/drawing/2014/main" id="{1997FC2D-88EA-49B3-A15B-4C465169EFF0}"/>
+                <a16:creationId xmlns:a16="http://schemas.microsoft.com/office/drawing/2014/main" id="{1D708921-5F67-4872-9C06-88DCFFAEC8B7}"/>
               </a:ext>
             </a:extLst>
           </p:cNvPr>
@@ -6918,7 +6923,7 @@
           <p:nvPr/>
         </p:nvPicPr>
         <p:blipFill>
-          <a:blip xmlns:r="http://schemas.openxmlformats.org/officeDocument/2006/relationships" xmlns:a="http://schemas.openxmlformats.org/drawingml/2006/main" r:embed="R9033169864fa455e"/>
+          <a:blip xmlns:r="http://schemas.openxmlformats.org/officeDocument/2006/relationships" xmlns:a="http://schemas.openxmlformats.org/drawingml/2006/main" r:embed="R37e4031e3d134e67"/>
           <a:stretch xmlns:a="http://schemas.openxmlformats.org/drawingml/2006/main"/>
         </p:blipFill>
         <p:spPr>
@@ -6936,7 +6941,7 @@
           <p:cNvPr id="9" name="설명 받기">
             <a:extLst xmlns:a="http://schemas.openxmlformats.org/drawingml/2006/main">
               <a:ext uri="{FF2B5EF4-FFF2-40B4-BE49-F238E27FC236}">
-                <a16:creationId xmlns:a16="http://schemas.microsoft.com/office/drawing/2014/main" id="{FA4B6B6D-B3FD-4BCC-A742-3441A8C992E1}"/>
+                <a16:creationId xmlns:a16="http://schemas.microsoft.com/office/drawing/2014/main" id="{392369A7-75C7-4BB8-883C-66C47A2D4574}"/>
               </a:ext>
             </a:extLst>
           </p:cNvPr>
@@ -7094,7 +7099,7 @@
           <p:cNvPr id="10" name="조사 맡기기">
             <a:extLst xmlns:a="http://schemas.openxmlformats.org/drawingml/2006/main">
               <a:ext uri="{FF2B5EF4-FFF2-40B4-BE49-F238E27FC236}">
-                <a16:creationId xmlns:a16="http://schemas.microsoft.com/office/drawing/2014/main" id="{900EFC29-0495-48E2-ADF8-B7A1D6075B41}"/>
+                <a16:creationId xmlns:a16="http://schemas.microsoft.com/office/drawing/2014/main" id="{91293FC5-27CC-4BF4-B9D2-04F44C513726}"/>
               </a:ext>
             </a:extLst>
           </p:cNvPr>
@@ -7252,7 +7257,7 @@
           <p:cNvPr id="11" name="결과 확인">
             <a:extLst xmlns:a="http://schemas.openxmlformats.org/drawingml/2006/main">
               <a:ext uri="{FF2B5EF4-FFF2-40B4-BE49-F238E27FC236}">
-                <a16:creationId xmlns:a16="http://schemas.microsoft.com/office/drawing/2014/main" id="{444507FB-85E8-4CB5-AF58-8C2274D64A5D}"/>
+                <a16:creationId xmlns:a16="http://schemas.microsoft.com/office/drawing/2014/main" id="{E96FA58C-7E6A-44D7-B970-7154FD0230EF}"/>
               </a:ext>
             </a:extLst>
           </p:cNvPr>
@@ -7410,7 +7415,7 @@
           <p:cNvPr id="12" name="Legacy module connection">
             <a:extLst xmlns:a="http://schemas.openxmlformats.org/drawingml/2006/main">
               <a:ext uri="{FF2B5EF4-FFF2-40B4-BE49-F238E27FC236}">
-                <a16:creationId xmlns:a16="http://schemas.microsoft.com/office/drawing/2014/main" id="{C7B9EADE-04B8-415A-BD0B-0AD2C044B164}"/>
+                <a16:creationId xmlns:a16="http://schemas.microsoft.com/office/drawing/2014/main" id="{8BEBB1D1-4CC2-4EDA-B1FA-B0428CB1E804}"/>
               </a:ext>
             </a:extLst>
           </p:cNvPr>
@@ -7566,7 +7571,7 @@
     </p:spTree>
     <p:extLst>
       <p:ext uri="{BB962C8B-B14F-4D97-AF65-F5344CB8AC3E}">
-        <p14:creationId xmlns:p14="http://schemas.microsoft.com/office/powerpoint/2010/main" val="1978168408"/>
+        <p14:creationId xmlns:p14="http://schemas.microsoft.com/office/powerpoint/2010/main" val="54391211"/>
       </p:ext>
     </p:extLst>
   </p:cSld>
@@ -7597,7 +7602,7 @@
           <p:cNvPr id="39" name="ACT 0 · 혼동하기 쉬운 C++ 초기화">
             <a:extLst xmlns:a="http://schemas.openxmlformats.org/drawingml/2006/main">
               <a:ext uri="{FF2B5EF4-FFF2-40B4-BE49-F238E27FC236}">
-                <a16:creationId xmlns:a16="http://schemas.microsoft.com/office/drawing/2014/main" id="{C0E2A56D-F920-4FB5-B982-6E171342F5D5}"/>
+                <a16:creationId xmlns:a16="http://schemas.microsoft.com/office/drawing/2014/main" id="{49948178-BEE7-4727-BAF2-86140EFCC78D}"/>
               </a:ext>
             </a:extLst>
           </p:cNvPr>
@@ -7755,7 +7760,7 @@
           <p:cNvPr id="2" name="S02">
             <a:extLst xmlns:a="http://schemas.openxmlformats.org/drawingml/2006/main">
               <a:ext uri="{FF2B5EF4-FFF2-40B4-BE49-F238E27FC236}">
-                <a16:creationId xmlns:a16="http://schemas.microsoft.com/office/drawing/2014/main" id="{C27FBA1D-5D00-4579-B0EB-C6981B36813D}"/>
+                <a16:creationId xmlns:a16="http://schemas.microsoft.com/office/drawing/2014/main" id="{820ADE24-AF41-4329-9AEC-54CF179266E7}"/>
               </a:ext>
             </a:extLst>
           </p:cNvPr>
@@ -7913,7 +7918,7 @@
           <p:cNvPr id="3" name="작은 질문에는 Chatbot이 유용하다">
             <a:extLst xmlns:a="http://schemas.openxmlformats.org/drawingml/2006/main">
               <a:ext uri="{FF2B5EF4-FFF2-40B4-BE49-F238E27FC236}">
-                <a16:creationId xmlns:a16="http://schemas.microsoft.com/office/drawing/2014/main" id="{E05B9A7D-28CA-4FB0-8E0A-9EF073B26EB5}"/>
+                <a16:creationId xmlns:a16="http://schemas.microsoft.com/office/drawing/2014/main" id="{1D190064-5EAD-4CC1-9C68-775BD3E399D3}"/>
               </a:ext>
             </a:extLst>
           </p:cNvPr>
@@ -8071,7 +8076,7 @@
           <p:cNvPr id="4" name="">
             <a:extLst xmlns:a="http://schemas.openxmlformats.org/drawingml/2006/main">
               <a:ext uri="{FF2B5EF4-FFF2-40B4-BE49-F238E27FC236}">
-                <a16:creationId xmlns:a16="http://schemas.microsoft.com/office/drawing/2014/main" id="{CF161751-12D0-4206-9EF3-B38FD9A0EB7B}"/>
+                <a16:creationId xmlns:a16="http://schemas.microsoft.com/office/drawing/2014/main" id="{FC1C1E94-F921-41BA-8F67-F06146146754}"/>
               </a:ext>
             </a:extLst>
           </p:cNvPr>
@@ -8102,7 +8107,7 @@
           <p:cNvPr id="5" name="Microsoft C++ 문서 기반 교육 예시 · 실제 ChatGPT 대화·실행 화면 아님">
             <a:extLst xmlns:a="http://schemas.openxmlformats.org/drawingml/2006/main">
               <a:ext uri="{FF2B5EF4-FFF2-40B4-BE49-F238E27FC236}">
-                <a16:creationId xmlns:a16="http://schemas.microsoft.com/office/drawing/2014/main" id="{934F1822-7A9D-4D08-ADCC-81504C6225E0}"/>
+                <a16:creationId xmlns:a16="http://schemas.microsoft.com/office/drawing/2014/main" id="{38D65CED-B786-4301-8FB8-A4254EBF501F}"/>
               </a:ext>
             </a:extLst>
           </p:cNvPr>
@@ -8260,7 +8265,7 @@
           <p:cNvPr id="6" name="괄호는 개수·값 생성자, 중괄호는 이 예시의 initializer_list 생성자를 사용합니다.">
             <a:extLst xmlns:a="http://schemas.openxmlformats.org/drawingml/2006/main">
               <a:ext uri="{FF2B5EF4-FFF2-40B4-BE49-F238E27FC236}">
-                <a16:creationId xmlns:a16="http://schemas.microsoft.com/office/drawing/2014/main" id="{045E791D-21F1-4C4E-914C-B89FDFC38265}"/>
+                <a16:creationId xmlns:a16="http://schemas.microsoft.com/office/drawing/2014/main" id="{E93BC56A-FFAF-4726-8260-BE392DFAAE0E}"/>
               </a:ext>
             </a:extLst>
           </p:cNvPr>
@@ -8418,7 +8423,7 @@
           <p:cNvPr id="7" name="괄호만 바뀌었는데, 같은 Vector일까?">
             <a:extLst xmlns:a="http://schemas.openxmlformats.org/drawingml/2006/main">
               <a:ext uri="{FF2B5EF4-FFF2-40B4-BE49-F238E27FC236}">
-                <a16:creationId xmlns:a16="http://schemas.microsoft.com/office/drawing/2014/main" id="{2C1A4FAB-2A94-410C-B974-A72F6470F9E7}"/>
+                <a16:creationId xmlns:a16="http://schemas.microsoft.com/office/drawing/2014/main" id="{7EAF42E4-3FE5-4D92-AF00-7EC2A902359E}"/>
               </a:ext>
             </a:extLst>
           </p:cNvPr>
@@ -8576,7 +8581,7 @@
           <p:cNvPr id="8" name="">
             <a:extLst xmlns:a="http://schemas.openxmlformats.org/drawingml/2006/main">
               <a:ext uri="{FF2B5EF4-FFF2-40B4-BE49-F238E27FC236}">
-                <a16:creationId xmlns:a16="http://schemas.microsoft.com/office/drawing/2014/main" id="{BA1AE06E-1487-4087-AEAD-E51FDDECB4EA}"/>
+                <a16:creationId xmlns:a16="http://schemas.microsoft.com/office/drawing/2014/main" id="{86EAA020-D152-4D87-9939-C452EBA4A1FB}"/>
               </a:ext>
             </a:extLst>
           </p:cNvPr>
@@ -8607,7 +8612,7 @@
           <p:cNvPr id="9" name="std::vector&lt;int&gt; a(3, 1);">
             <a:extLst xmlns:a="http://schemas.openxmlformats.org/drawingml/2006/main">
               <a:ext uri="{FF2B5EF4-FFF2-40B4-BE49-F238E27FC236}">
-                <a16:creationId xmlns:a16="http://schemas.microsoft.com/office/drawing/2014/main" id="{E73B30B1-A8A2-42FF-BAF7-769CFBFE62A3}"/>
+                <a16:creationId xmlns:a16="http://schemas.microsoft.com/office/drawing/2014/main" id="{B979B36D-DAA8-4CD7-AF62-E27DC46819EB}"/>
               </a:ext>
             </a:extLst>
           </p:cNvPr>
@@ -8765,7 +8770,7 @@
           <p:cNvPr id="10" name="">
             <a:extLst xmlns:a="http://schemas.openxmlformats.org/drawingml/2006/main">
               <a:ext uri="{FF2B5EF4-FFF2-40B4-BE49-F238E27FC236}">
-                <a16:creationId xmlns:a16="http://schemas.microsoft.com/office/drawing/2014/main" id="{5912B27B-1818-4F61-8DD4-366E79A3363E}"/>
+                <a16:creationId xmlns:a16="http://schemas.microsoft.com/office/drawing/2014/main" id="{0A200057-7FA7-4631-AF9F-0757FACF7DE0}"/>
               </a:ext>
             </a:extLst>
           </p:cNvPr>
@@ -8795,7 +8800,7 @@
           <p:cNvPr id="11" name="">
             <a:extLst xmlns:a="http://schemas.openxmlformats.org/drawingml/2006/main">
               <a:ext uri="{FF2B5EF4-FFF2-40B4-BE49-F238E27FC236}">
-                <a16:creationId xmlns:a16="http://schemas.microsoft.com/office/drawing/2014/main" id="{05DE6902-6E98-4D10-9972-DC5243B99C60}"/>
+                <a16:creationId xmlns:a16="http://schemas.microsoft.com/office/drawing/2014/main" id="{3B01B226-3299-4078-9065-CB1C09806366}"/>
               </a:ext>
             </a:extLst>
           </p:cNvPr>
@@ -8828,7 +8833,7 @@
           <p:cNvPr id="12" name="1">
             <a:extLst xmlns:a="http://schemas.openxmlformats.org/drawingml/2006/main">
               <a:ext uri="{FF2B5EF4-FFF2-40B4-BE49-F238E27FC236}">
-                <a16:creationId xmlns:a16="http://schemas.microsoft.com/office/drawing/2014/main" id="{333B077E-5C9C-4F09-8E6B-8C140839B290}"/>
+                <a16:creationId xmlns:a16="http://schemas.microsoft.com/office/drawing/2014/main" id="{81AA9D1C-E27A-44B7-BBDA-FF379D9CD71A}"/>
               </a:ext>
             </a:extLst>
           </p:cNvPr>
@@ -8986,7 +8991,7 @@
           <p:cNvPr id="13" name="">
             <a:extLst xmlns:a="http://schemas.openxmlformats.org/drawingml/2006/main">
               <a:ext uri="{FF2B5EF4-FFF2-40B4-BE49-F238E27FC236}">
-                <a16:creationId xmlns:a16="http://schemas.microsoft.com/office/drawing/2014/main" id="{E35A9942-A99E-4058-A03D-46F560609ED9}"/>
+                <a16:creationId xmlns:a16="http://schemas.microsoft.com/office/drawing/2014/main" id="{3C83AE81-4D90-4ADE-8290-F5FC9BE5246C}"/>
               </a:ext>
             </a:extLst>
           </p:cNvPr>
@@ -9019,7 +9024,7 @@
           <p:cNvPr id="14" name="1">
             <a:extLst xmlns:a="http://schemas.openxmlformats.org/drawingml/2006/main">
               <a:ext uri="{FF2B5EF4-FFF2-40B4-BE49-F238E27FC236}">
-                <a16:creationId xmlns:a16="http://schemas.microsoft.com/office/drawing/2014/main" id="{C6857174-D431-45F4-89E9-65D37665DC4D}"/>
+                <a16:creationId xmlns:a16="http://schemas.microsoft.com/office/drawing/2014/main" id="{DDD728F1-FC03-4105-8A11-A17A1355B869}"/>
               </a:ext>
             </a:extLst>
           </p:cNvPr>
@@ -9177,7 +9182,7 @@
           <p:cNvPr id="15" name="">
             <a:extLst xmlns:a="http://schemas.openxmlformats.org/drawingml/2006/main">
               <a:ext uri="{FF2B5EF4-FFF2-40B4-BE49-F238E27FC236}">
-                <a16:creationId xmlns:a16="http://schemas.microsoft.com/office/drawing/2014/main" id="{0B40E2AE-46BE-4949-A7EC-074F0BA8C652}"/>
+                <a16:creationId xmlns:a16="http://schemas.microsoft.com/office/drawing/2014/main" id="{1D40629D-3C5D-418F-B626-74FC97BC541C}"/>
               </a:ext>
             </a:extLst>
           </p:cNvPr>
@@ -9210,7 +9215,7 @@
           <p:cNvPr id="16" name="1">
             <a:extLst xmlns:a="http://schemas.openxmlformats.org/drawingml/2006/main">
               <a:ext uri="{FF2B5EF4-FFF2-40B4-BE49-F238E27FC236}">
-                <a16:creationId xmlns:a16="http://schemas.microsoft.com/office/drawing/2014/main" id="{4051F1EB-C1A3-4F7D-9675-4D9C486BA993}"/>
+                <a16:creationId xmlns:a16="http://schemas.microsoft.com/office/drawing/2014/main" id="{44885AC3-CA44-461D-B14E-F4D69E0E84E0}"/>
               </a:ext>
             </a:extLst>
           </p:cNvPr>
@@ -9368,7 +9373,7 @@
           <p:cNvPr id="17" name="3개">
             <a:extLst xmlns:a="http://schemas.openxmlformats.org/drawingml/2006/main">
               <a:ext uri="{FF2B5EF4-FFF2-40B4-BE49-F238E27FC236}">
-                <a16:creationId xmlns:a16="http://schemas.microsoft.com/office/drawing/2014/main" id="{898F9FB1-141E-475E-8214-1A45B686FB02}"/>
+                <a16:creationId xmlns:a16="http://schemas.microsoft.com/office/drawing/2014/main" id="{B33A6611-002F-4E1E-96EF-87718E4062D1}"/>
               </a:ext>
             </a:extLst>
           </p:cNvPr>
@@ -9526,7 +9531,7 @@
           <p:cNvPr id="18" name="">
             <a:extLst xmlns:a="http://schemas.openxmlformats.org/drawingml/2006/main">
               <a:ext uri="{FF2B5EF4-FFF2-40B4-BE49-F238E27FC236}">
-                <a16:creationId xmlns:a16="http://schemas.microsoft.com/office/drawing/2014/main" id="{AAF83255-117E-4937-9606-2D4B52474CEF}"/>
+                <a16:creationId xmlns:a16="http://schemas.microsoft.com/office/drawing/2014/main" id="{456D4E38-0840-47D0-95B1-7EFC8DD5CD60}"/>
               </a:ext>
             </a:extLst>
           </p:cNvPr>
@@ -9557,7 +9562,7 @@
           <p:cNvPr id="19" name="std::vector&lt;int&gt; b{3, 1};">
             <a:extLst xmlns:a="http://schemas.openxmlformats.org/drawingml/2006/main">
               <a:ext uri="{FF2B5EF4-FFF2-40B4-BE49-F238E27FC236}">
-                <a16:creationId xmlns:a16="http://schemas.microsoft.com/office/drawing/2014/main" id="{AE68D0C0-476A-48AA-AF3B-DA2455F1CAFC}"/>
+                <a16:creationId xmlns:a16="http://schemas.microsoft.com/office/drawing/2014/main" id="{48368637-C413-488A-8E5C-55C8FCC967AB}"/>
               </a:ext>
             </a:extLst>
           </p:cNvPr>
@@ -9715,7 +9720,7 @@
           <p:cNvPr id="20" name="">
             <a:extLst xmlns:a="http://schemas.openxmlformats.org/drawingml/2006/main">
               <a:ext uri="{FF2B5EF4-FFF2-40B4-BE49-F238E27FC236}">
-                <a16:creationId xmlns:a16="http://schemas.microsoft.com/office/drawing/2014/main" id="{6592EDD2-0B66-4AE4-9E8B-CBDB16814559}"/>
+                <a16:creationId xmlns:a16="http://schemas.microsoft.com/office/drawing/2014/main" id="{960E5209-80D3-44D2-9557-17A7C5166A88}"/>
               </a:ext>
             </a:extLst>
           </p:cNvPr>
@@ -9745,7 +9750,7 @@
           <p:cNvPr id="21" name="">
             <a:extLst xmlns:a="http://schemas.openxmlformats.org/drawingml/2006/main">
               <a:ext uri="{FF2B5EF4-FFF2-40B4-BE49-F238E27FC236}">
-                <a16:creationId xmlns:a16="http://schemas.microsoft.com/office/drawing/2014/main" id="{A1401811-5B90-421B-B705-2FA02191162D}"/>
+                <a16:creationId xmlns:a16="http://schemas.microsoft.com/office/drawing/2014/main" id="{249CD70B-FF85-4932-925E-AA2DA239B8AF}"/>
               </a:ext>
             </a:extLst>
           </p:cNvPr>
@@ -9778,7 +9783,7 @@
           <p:cNvPr id="22" name="3">
             <a:extLst xmlns:a="http://schemas.openxmlformats.org/drawingml/2006/main">
               <a:ext uri="{FF2B5EF4-FFF2-40B4-BE49-F238E27FC236}">
-                <a16:creationId xmlns:a16="http://schemas.microsoft.com/office/drawing/2014/main" id="{B97A04BC-2D54-4621-AC1D-2666CD251AEE}"/>
+                <a16:creationId xmlns:a16="http://schemas.microsoft.com/office/drawing/2014/main" id="{113CB842-E268-4B4B-9916-D29B5616B006}"/>
               </a:ext>
             </a:extLst>
           </p:cNvPr>
@@ -9936,7 +9941,7 @@
           <p:cNvPr id="23" name="">
             <a:extLst xmlns:a="http://schemas.openxmlformats.org/drawingml/2006/main">
               <a:ext uri="{FF2B5EF4-FFF2-40B4-BE49-F238E27FC236}">
-                <a16:creationId xmlns:a16="http://schemas.microsoft.com/office/drawing/2014/main" id="{5593695F-24D9-4126-BBED-759457311EF7}"/>
+                <a16:creationId xmlns:a16="http://schemas.microsoft.com/office/drawing/2014/main" id="{6DBACCDF-39A7-4E58-A5BB-A3CD92D72B43}"/>
               </a:ext>
             </a:extLst>
           </p:cNvPr>
@@ -9969,7 +9974,7 @@
           <p:cNvPr id="24" name="1">
             <a:extLst xmlns:a="http://schemas.openxmlformats.org/drawingml/2006/main">
               <a:ext uri="{FF2B5EF4-FFF2-40B4-BE49-F238E27FC236}">
-                <a16:creationId xmlns:a16="http://schemas.microsoft.com/office/drawing/2014/main" id="{FB295BBA-14B2-44D8-B050-56DCDA9C8B64}"/>
+                <a16:creationId xmlns:a16="http://schemas.microsoft.com/office/drawing/2014/main" id="{6506E9A5-24F0-457A-8B45-52D804A6E9EA}"/>
               </a:ext>
             </a:extLst>
           </p:cNvPr>
@@ -10127,7 +10132,7 @@
           <p:cNvPr id="25" name="2개">
             <a:extLst xmlns:a="http://schemas.openxmlformats.org/drawingml/2006/main">
               <a:ext uri="{FF2B5EF4-FFF2-40B4-BE49-F238E27FC236}">
-                <a16:creationId xmlns:a16="http://schemas.microsoft.com/office/drawing/2014/main" id="{E3CEE1F8-D550-4B47-9F86-146144190255}"/>
+                <a16:creationId xmlns:a16="http://schemas.microsoft.com/office/drawing/2014/main" id="{CC35DF09-C92B-4E60-A8EF-E0CD9844367A}"/>
               </a:ext>
             </a:extLst>
           </p:cNvPr>
@@ -10285,7 +10290,7 @@
           <p:cNvPr id="26" name="">
             <a:extLst xmlns:a="http://schemas.openxmlformats.org/drawingml/2006/main">
               <a:ext uri="{FF2B5EF4-FFF2-40B4-BE49-F238E27FC236}">
-                <a16:creationId xmlns:a16="http://schemas.microsoft.com/office/drawing/2014/main" id="{3EB8EAFA-E245-45F9-9A93-FA54F16361A7}"/>
+                <a16:creationId xmlns:a16="http://schemas.microsoft.com/office/drawing/2014/main" id="{AE04542C-A7F4-4DC8-935D-6336840260F6}"/>
               </a:ext>
             </a:extLst>
           </p:cNvPr>
@@ -10318,7 +10323,7 @@
           <p:cNvPr id="27" name="IDE">
             <a:extLst xmlns:a="http://schemas.openxmlformats.org/drawingml/2006/main">
               <a:ext uri="{FF2B5EF4-FFF2-40B4-BE49-F238E27FC236}">
-                <a16:creationId xmlns:a16="http://schemas.microsoft.com/office/drawing/2014/main" id="{CEFB22D0-7E43-4DEC-9522-1E93FCC8F686}"/>
+                <a16:creationId xmlns:a16="http://schemas.microsoft.com/office/drawing/2014/main" id="{E85E83B4-6408-48D9-BC32-0271D06A4B69}"/>
               </a:ext>
             </a:extLst>
           </p:cNvPr>
@@ -10476,7 +10481,7 @@
           <p:cNvPr id="28" name="코드 선택·복사">
             <a:extLst xmlns:a="http://schemas.openxmlformats.org/drawingml/2006/main">
               <a:ext uri="{FF2B5EF4-FFF2-40B4-BE49-F238E27FC236}">
-                <a16:creationId xmlns:a16="http://schemas.microsoft.com/office/drawing/2014/main" id="{7DD0332B-9592-4866-AADE-8E850C4E7D32}"/>
+                <a16:creationId xmlns:a16="http://schemas.microsoft.com/office/drawing/2014/main" id="{2E43F827-D693-416C-AFFF-A70598D8DA6D}"/>
               </a:ext>
             </a:extLst>
           </p:cNvPr>
@@ -10634,7 +10639,7 @@
           <p:cNvPr id="29" name="">
             <a:extLst xmlns:a="http://schemas.openxmlformats.org/drawingml/2006/main">
               <a:ext uri="{FF2B5EF4-FFF2-40B4-BE49-F238E27FC236}">
-                <a16:creationId xmlns:a16="http://schemas.microsoft.com/office/drawing/2014/main" id="{9412135B-A7FE-44D1-9EE5-554AE9097B70}"/>
+                <a16:creationId xmlns:a16="http://schemas.microsoft.com/office/drawing/2014/main" id="{6DBD3352-0443-4208-A301-3A7CA915F966}"/>
               </a:ext>
             </a:extLst>
           </p:cNvPr>
@@ -10667,7 +10672,7 @@
           <p:cNvPr id="30" name="Chatbot">
             <a:extLst xmlns:a="http://schemas.openxmlformats.org/drawingml/2006/main">
               <a:ext uri="{FF2B5EF4-FFF2-40B4-BE49-F238E27FC236}">
-                <a16:creationId xmlns:a16="http://schemas.microsoft.com/office/drawing/2014/main" id="{44323308-4410-4AE3-89EA-F90E3471A11C}"/>
+                <a16:creationId xmlns:a16="http://schemas.microsoft.com/office/drawing/2014/main" id="{B08B0B3D-C8FC-4183-88E0-46EBBD20B816}"/>
               </a:ext>
             </a:extLst>
           </p:cNvPr>
@@ -10825,7 +10830,7 @@
           <p:cNvPr id="31" name="붙여넣고 질문">
             <a:extLst xmlns:a="http://schemas.openxmlformats.org/drawingml/2006/main">
               <a:ext uri="{FF2B5EF4-FFF2-40B4-BE49-F238E27FC236}">
-                <a16:creationId xmlns:a16="http://schemas.microsoft.com/office/drawing/2014/main" id="{C3947F09-D030-4131-986F-1663E4DB63A5}"/>
+                <a16:creationId xmlns:a16="http://schemas.microsoft.com/office/drawing/2014/main" id="{31FB3AA8-216C-4209-A24B-008E77EFD01A}"/>
               </a:ext>
             </a:extLst>
           </p:cNvPr>
@@ -10983,7 +10988,7 @@
           <p:cNvPr id="32" name="">
             <a:extLst xmlns:a="http://schemas.openxmlformats.org/drawingml/2006/main">
               <a:ext uri="{FF2B5EF4-FFF2-40B4-BE49-F238E27FC236}">
-                <a16:creationId xmlns:a16="http://schemas.microsoft.com/office/drawing/2014/main" id="{6746B9FF-8A84-4C5C-98DA-25C3FFBAE14C}"/>
+                <a16:creationId xmlns:a16="http://schemas.microsoft.com/office/drawing/2014/main" id="{02087D4B-26CF-44AE-A6C5-247139558EBB}"/>
               </a:ext>
             </a:extLst>
           </p:cNvPr>
@@ -11016,7 +11021,7 @@
           <p:cNvPr id="33" name="IDE">
             <a:extLst xmlns:a="http://schemas.openxmlformats.org/drawingml/2006/main">
               <a:ext uri="{FF2B5EF4-FFF2-40B4-BE49-F238E27FC236}">
-                <a16:creationId xmlns:a16="http://schemas.microsoft.com/office/drawing/2014/main" id="{C018744C-4BB1-435A-82DC-894CE40C4D7E}"/>
+                <a16:creationId xmlns:a16="http://schemas.microsoft.com/office/drawing/2014/main" id="{0F9914DB-EC82-4E10-9370-9E67F2B44212}"/>
               </a:ext>
             </a:extLst>
           </p:cNvPr>
@@ -11174,7 +11179,7 @@
           <p:cNvPr id="34" name="답 확인·적용">
             <a:extLst xmlns:a="http://schemas.openxmlformats.org/drawingml/2006/main">
               <a:ext uri="{FF2B5EF4-FFF2-40B4-BE49-F238E27FC236}">
-                <a16:creationId xmlns:a16="http://schemas.microsoft.com/office/drawing/2014/main" id="{216A0235-1E04-4A4A-B190-EA057BC7A48C}"/>
+                <a16:creationId xmlns:a16="http://schemas.microsoft.com/office/drawing/2014/main" id="{A56B7C8D-E3FB-4BC4-BCC3-C46204D9C167}"/>
               </a:ext>
             </a:extLst>
           </p:cNvPr>
@@ -11332,7 +11337,7 @@
           <p:cNvPr id="35" name="">
             <a:extLst xmlns:a="http://schemas.openxmlformats.org/drawingml/2006/main">
               <a:ext uri="{FF2B5EF4-FFF2-40B4-BE49-F238E27FC236}">
-                <a16:creationId xmlns:a16="http://schemas.microsoft.com/office/drawing/2014/main" id="{B752D02F-F481-4DB0-9CF9-0926923D6C2F}"/>
+                <a16:creationId xmlns:a16="http://schemas.microsoft.com/office/drawing/2014/main" id="{AE1DFF6B-0EF2-4757-93A1-86515CE58CEE}"/>
               </a:ext>
             </a:extLst>
           </p:cNvPr>
@@ -11362,7 +11367,7 @@
           <p:cNvPr id="36" name="">
             <a:extLst xmlns:a="http://schemas.openxmlformats.org/drawingml/2006/main">
               <a:ext uri="{FF2B5EF4-FFF2-40B4-BE49-F238E27FC236}">
-                <a16:creationId xmlns:a16="http://schemas.microsoft.com/office/drawing/2014/main" id="{905A74F3-2EEF-4B80-9A1E-88D93534E922}"/>
+                <a16:creationId xmlns:a16="http://schemas.microsoft.com/office/drawing/2014/main" id="{A1BB1F1C-1FDB-48EA-9353-C884090EE74C}"/>
               </a:ext>
             </a:extLst>
           </p:cNvPr>
@@ -11392,7 +11397,7 @@
           <p:cNvPr id="37" name="필요한 코드와 맥락을 사람이 골라 전달한다.">
             <a:extLst xmlns:a="http://schemas.openxmlformats.org/drawingml/2006/main">
               <a:ext uri="{FF2B5EF4-FFF2-40B4-BE49-F238E27FC236}">
-                <a16:creationId xmlns:a16="http://schemas.microsoft.com/office/drawing/2014/main" id="{89B572E4-54E7-411D-A958-26142EE9D954}"/>
+                <a16:creationId xmlns:a16="http://schemas.microsoft.com/office/drawing/2014/main" id="{57FAFDC1-5B4C-448E-B689-7B9D5A51ADF3}"/>
               </a:ext>
             </a:extLst>
           </p:cNvPr>
@@ -11550,7 +11555,7 @@
           <p:cNvPr id="38" name="Legacy module connection">
             <a:extLst xmlns:a="http://schemas.openxmlformats.org/drawingml/2006/main">
               <a:ext uri="{FF2B5EF4-FFF2-40B4-BE49-F238E27FC236}">
-                <a16:creationId xmlns:a16="http://schemas.microsoft.com/office/drawing/2014/main" id="{54BD49A3-3AE3-4899-A74F-D9B90454B910}"/>
+                <a16:creationId xmlns:a16="http://schemas.microsoft.com/office/drawing/2014/main" id="{61080872-55DD-4B51-A77D-4882CFAD5DCF}"/>
               </a:ext>
             </a:extLst>
           </p:cNvPr>
@@ -11706,7 +11711,7 @@
     </p:spTree>
     <p:extLst>
       <p:ext uri="{BB962C8B-B14F-4D97-AF65-F5344CB8AC3E}">
-        <p14:creationId xmlns:p14="http://schemas.microsoft.com/office/powerpoint/2010/main" val="146657314"/>
+        <p14:creationId xmlns:p14="http://schemas.microsoft.com/office/powerpoint/2010/main" val="413691871"/>
       </p:ext>
     </p:extLst>
   </p:cSld>
@@ -11737,7 +11742,7 @@
           <p:cNvPr id="34" name="ACT 0 · Visual Studio에서 디버깅할 때 살펴보던 정보">
             <a:extLst xmlns:a="http://schemas.openxmlformats.org/drawingml/2006/main">
               <a:ext uri="{FF2B5EF4-FFF2-40B4-BE49-F238E27FC236}">
-                <a16:creationId xmlns:a16="http://schemas.microsoft.com/office/drawing/2014/main" id="{46A86F6B-5CE2-434A-B574-9B6FCD6DF415}"/>
+                <a16:creationId xmlns:a16="http://schemas.microsoft.com/office/drawing/2014/main" id="{9DE228F8-A269-4E28-B70B-3CDD891D5B8A}"/>
               </a:ext>
             </a:extLst>
           </p:cNvPr>
@@ -11895,7 +11900,7 @@
           <p:cNvPr id="2" name="S03">
             <a:extLst xmlns:a="http://schemas.openxmlformats.org/drawingml/2006/main">
               <a:ext uri="{FF2B5EF4-FFF2-40B4-BE49-F238E27FC236}">
-                <a16:creationId xmlns:a16="http://schemas.microsoft.com/office/drawing/2014/main" id="{07BE95C7-94F2-437E-BE78-0D7003254B5D}"/>
+                <a16:creationId xmlns:a16="http://schemas.microsoft.com/office/drawing/2014/main" id="{2FB59E02-F790-4CB8-8102-F187C0283FCA}"/>
               </a:ext>
             </a:extLst>
           </p:cNvPr>
@@ -12053,7 +12058,7 @@
           <p:cNvPr id="3" name="질문이 커지면 Context를 모으는 일이 생긴다">
             <a:extLst xmlns:a="http://schemas.openxmlformats.org/drawingml/2006/main">
               <a:ext uri="{FF2B5EF4-FFF2-40B4-BE49-F238E27FC236}">
-                <a16:creationId xmlns:a16="http://schemas.microsoft.com/office/drawing/2014/main" id="{FDA56448-B338-4FCB-B4E7-98BB95795F51}"/>
+                <a16:creationId xmlns:a16="http://schemas.microsoft.com/office/drawing/2014/main" id="{6FB21F9A-83DA-488A-9249-69D6C75AC745}"/>
               </a:ext>
             </a:extLst>
           </p:cNvPr>
@@ -12211,7 +12216,7 @@
           <p:cNvPr id="4" name="">
             <a:extLst xmlns:a="http://schemas.openxmlformats.org/drawingml/2006/main">
               <a:ext uri="{FF2B5EF4-FFF2-40B4-BE49-F238E27FC236}">
-                <a16:creationId xmlns:a16="http://schemas.microsoft.com/office/drawing/2014/main" id="{34266187-84FD-46E6-A67D-CC5ABC251AA5}"/>
+                <a16:creationId xmlns:a16="http://schemas.microsoft.com/office/drawing/2014/main" id="{B4893C9C-3BA9-4E4C-A2F0-C8EED7546BEE}"/>
               </a:ext>
             </a:extLst>
           </p:cNvPr>
@@ -12242,7 +12247,7 @@
           <p:cNvPr id="5" name="Visual Studio 사용자의 디버깅 정보를 설명하는 교육용 병렬 도식">
             <a:extLst xmlns:a="http://schemas.openxmlformats.org/drawingml/2006/main">
               <a:ext uri="{FF2B5EF4-FFF2-40B4-BE49-F238E27FC236}">
-                <a16:creationId xmlns:a16="http://schemas.microsoft.com/office/drawing/2014/main" id="{01EBBF91-0B4D-4CF3-B28B-DDFE306DECC5}"/>
+                <a16:creationId xmlns:a16="http://schemas.microsoft.com/office/drawing/2014/main" id="{5576832C-F256-44B3-A54A-C6784912F5A6}"/>
               </a:ext>
             </a:extLst>
           </p:cNvPr>
@@ -12400,7 +12405,7 @@
           <p:cNvPr id="6" name="특정 Trial의 실제 화면이 아닙니다. 명세서는 IDE 밖에서도 함께 참고하는 문서입니다.">
             <a:extLst xmlns:a="http://schemas.openxmlformats.org/drawingml/2006/main">
               <a:ext uri="{FF2B5EF4-FFF2-40B4-BE49-F238E27FC236}">
-                <a16:creationId xmlns:a16="http://schemas.microsoft.com/office/drawing/2014/main" id="{2E9CD168-C3BD-49BE-8B04-5EFBEF8A7231}"/>
+                <a16:creationId xmlns:a16="http://schemas.microsoft.com/office/drawing/2014/main" id="{95515E08-F67E-4103-B391-1B37B2BDB7D1}"/>
               </a:ext>
             </a:extLst>
           </p:cNvPr>
@@ -12558,7 +12563,7 @@
           <p:cNvPr id="7" name="“결과가 기대와 다르다” — 우리는 어디를 살펴볼까?">
             <a:extLst xmlns:a="http://schemas.openxmlformats.org/drawingml/2006/main">
               <a:ext uri="{FF2B5EF4-FFF2-40B4-BE49-F238E27FC236}">
-                <a16:creationId xmlns:a16="http://schemas.microsoft.com/office/drawing/2014/main" id="{8776689A-D0A4-45E4-83E9-6A3945C9488C}"/>
+                <a16:creationId xmlns:a16="http://schemas.microsoft.com/office/drawing/2014/main" id="{8C130E9D-3021-4204-8E83-98F99BD60EC7}"/>
               </a:ext>
             </a:extLst>
           </p:cNvPr>
@@ -12716,7 +12721,7 @@
           <p:cNvPr id="8" name="">
             <a:extLst xmlns:a="http://schemas.openxmlformats.org/drawingml/2006/main">
               <a:ext uri="{FF2B5EF4-FFF2-40B4-BE49-F238E27FC236}">
-                <a16:creationId xmlns:a16="http://schemas.microsoft.com/office/drawing/2014/main" id="{D3E535CE-1C49-4C7C-93C5-9AA7A427C3EA}"/>
+                <a16:creationId xmlns:a16="http://schemas.microsoft.com/office/drawing/2014/main" id="{4E836679-BA7B-4F21-94CD-3771A05CEC7A}"/>
               </a:ext>
             </a:extLst>
           </p:cNvPr>
@@ -12749,7 +12754,7 @@
           <p:cNvPr id="9" name="테스트 탐색기">
             <a:extLst xmlns:a="http://schemas.openxmlformats.org/drawingml/2006/main">
               <a:ext uri="{FF2B5EF4-FFF2-40B4-BE49-F238E27FC236}">
-                <a16:creationId xmlns:a16="http://schemas.microsoft.com/office/drawing/2014/main" id="{87BF6B9E-DF40-4E05-B907-DCA95C882218}"/>
+                <a16:creationId xmlns:a16="http://schemas.microsoft.com/office/drawing/2014/main" id="{490F2575-CC81-4B8F-8C73-A0DB13FF0B7E}"/>
               </a:ext>
             </a:extLst>
           </p:cNvPr>
@@ -12907,7 +12912,7 @@
           <p:cNvPr id="10" name="">
             <a:extLst xmlns:a="http://schemas.openxmlformats.org/drawingml/2006/main">
               <a:ext uri="{FF2B5EF4-FFF2-40B4-BE49-F238E27FC236}">
-                <a16:creationId xmlns:a16="http://schemas.microsoft.com/office/drawing/2014/main" id="{6F4C22C6-8358-4AD9-BD10-70DFF9F93D7A}"/>
+                <a16:creationId xmlns:a16="http://schemas.microsoft.com/office/drawing/2014/main" id="{29CA23CA-1434-4437-91A9-787987F6EA28}"/>
               </a:ext>
             </a:extLst>
           </p:cNvPr>
@@ -12938,7 +12943,7 @@
           <p:cNvPr id="11" name="실패한 테스트&#10;기대값과 실제값">
             <a:extLst xmlns:a="http://schemas.openxmlformats.org/drawingml/2006/main">
               <a:ext uri="{FF2B5EF4-FFF2-40B4-BE49-F238E27FC236}">
-                <a16:creationId xmlns:a16="http://schemas.microsoft.com/office/drawing/2014/main" id="{CAB85A24-1205-4DD9-BE11-8120DBA76DDD}"/>
+                <a16:creationId xmlns:a16="http://schemas.microsoft.com/office/drawing/2014/main" id="{7948EEAB-C701-4D34-8E8F-9B4C5BE1B2F5}"/>
               </a:ext>
             </a:extLst>
           </p:cNvPr>
@@ -13119,7 +13124,7 @@
           <p:cNvPr id="12" name="">
             <a:extLst xmlns:a="http://schemas.openxmlformats.org/drawingml/2006/main">
               <a:ext uri="{FF2B5EF4-FFF2-40B4-BE49-F238E27FC236}">
-                <a16:creationId xmlns:a16="http://schemas.microsoft.com/office/drawing/2014/main" id="{0673EF4A-478A-4BE4-A1A8-81411F347DCD}"/>
+                <a16:creationId xmlns:a16="http://schemas.microsoft.com/office/drawing/2014/main" id="{E1B81865-7A6A-4E61-971B-870B5E5487FB}"/>
               </a:ext>
             </a:extLst>
           </p:cNvPr>
@@ -13152,7 +13157,7 @@
           <p:cNvPr id="13" name="호출 스택">
             <a:extLst xmlns:a="http://schemas.openxmlformats.org/drawingml/2006/main">
               <a:ext uri="{FF2B5EF4-FFF2-40B4-BE49-F238E27FC236}">
-                <a16:creationId xmlns:a16="http://schemas.microsoft.com/office/drawing/2014/main" id="{03E994B4-3FC4-4619-956E-44FA40C51777}"/>
+                <a16:creationId xmlns:a16="http://schemas.microsoft.com/office/drawing/2014/main" id="{1E7AD3CB-6128-4F4F-8439-47324D0A3A91}"/>
               </a:ext>
             </a:extLst>
           </p:cNvPr>
@@ -13310,7 +13315,7 @@
           <p:cNvPr id="14" name="">
             <a:extLst xmlns:a="http://schemas.openxmlformats.org/drawingml/2006/main">
               <a:ext uri="{FF2B5EF4-FFF2-40B4-BE49-F238E27FC236}">
-                <a16:creationId xmlns:a16="http://schemas.microsoft.com/office/drawing/2014/main" id="{F6B43768-600E-46EE-9C52-F1DAC700315B}"/>
+                <a16:creationId xmlns:a16="http://schemas.microsoft.com/office/drawing/2014/main" id="{492874C6-7396-4368-B934-A54D03475E7A}"/>
               </a:ext>
             </a:extLst>
           </p:cNvPr>
@@ -13341,7 +13346,7 @@
           <p:cNvPr id="15" name="어디서 호출됐나?&#10;함수와 호출 순서">
             <a:extLst xmlns:a="http://schemas.openxmlformats.org/drawingml/2006/main">
               <a:ext uri="{FF2B5EF4-FFF2-40B4-BE49-F238E27FC236}">
-                <a16:creationId xmlns:a16="http://schemas.microsoft.com/office/drawing/2014/main" id="{EED122D4-7ECD-4CB9-8444-03B095CB5193}"/>
+                <a16:creationId xmlns:a16="http://schemas.microsoft.com/office/drawing/2014/main" id="{D09AD326-1D4E-498C-A6CA-0F0691080540}"/>
               </a:ext>
             </a:extLst>
           </p:cNvPr>
@@ -13522,7 +13527,7 @@
           <p:cNvPr id="16" name="">
             <a:extLst xmlns:a="http://schemas.openxmlformats.org/drawingml/2006/main">
               <a:ext uri="{FF2B5EF4-FFF2-40B4-BE49-F238E27FC236}">
-                <a16:creationId xmlns:a16="http://schemas.microsoft.com/office/drawing/2014/main" id="{57523533-91A8-4AF1-891E-3C8D12B582C0}"/>
+                <a16:creationId xmlns:a16="http://schemas.microsoft.com/office/drawing/2014/main" id="{0644506D-2EF3-462E-A4E3-94DF9E75AFB5}"/>
               </a:ext>
             </a:extLst>
           </p:cNvPr>
@@ -13555,7 +13560,7 @@
           <p:cNvPr id="17" name="소스·참조">
             <a:extLst xmlns:a="http://schemas.openxmlformats.org/drawingml/2006/main">
               <a:ext uri="{FF2B5EF4-FFF2-40B4-BE49-F238E27FC236}">
-                <a16:creationId xmlns:a16="http://schemas.microsoft.com/office/drawing/2014/main" id="{02DA8250-A2AE-4FA7-B031-EDAEED595CE8}"/>
+                <a16:creationId xmlns:a16="http://schemas.microsoft.com/office/drawing/2014/main" id="{D2C12CF7-C819-4EE0-8165-4EEAECCB385F}"/>
               </a:ext>
             </a:extLst>
           </p:cNvPr>
@@ -13713,7 +13718,7 @@
           <p:cNvPr id="18" name="">
             <a:extLst xmlns:a="http://schemas.openxmlformats.org/drawingml/2006/main">
               <a:ext uri="{FF2B5EF4-FFF2-40B4-BE49-F238E27FC236}">
-                <a16:creationId xmlns:a16="http://schemas.microsoft.com/office/drawing/2014/main" id="{FE3830B1-AA25-4AD9-A3B7-30D3B912BEBF}"/>
+                <a16:creationId xmlns:a16="http://schemas.microsoft.com/office/drawing/2014/main" id="{2B353DD4-0C4C-48EE-B614-E362AB4E040D}"/>
               </a:ext>
             </a:extLst>
           </p:cNvPr>
@@ -13744,7 +13749,7 @@
           <p:cNvPr id="19" name="관련 구현과 호출부&#10;코드의 분기">
             <a:extLst xmlns:a="http://schemas.openxmlformats.org/drawingml/2006/main">
               <a:ext uri="{FF2B5EF4-FFF2-40B4-BE49-F238E27FC236}">
-                <a16:creationId xmlns:a16="http://schemas.microsoft.com/office/drawing/2014/main" id="{F849F6F5-E470-4723-AA02-D6DAFD2A2715}"/>
+                <a16:creationId xmlns:a16="http://schemas.microsoft.com/office/drawing/2014/main" id="{4532CEE7-3AC7-486F-BA57-2B982EB5E5C1}"/>
               </a:ext>
             </a:extLst>
           </p:cNvPr>
@@ -13925,7 +13930,7 @@
           <p:cNvPr id="20" name="">
             <a:extLst xmlns:a="http://schemas.openxmlformats.org/drawingml/2006/main">
               <a:ext uri="{FF2B5EF4-FFF2-40B4-BE49-F238E27FC236}">
-                <a16:creationId xmlns:a16="http://schemas.microsoft.com/office/drawing/2014/main" id="{4E9C8C84-2A35-40D3-8EB1-3B22260C9A32}"/>
+                <a16:creationId xmlns:a16="http://schemas.microsoft.com/office/drawing/2014/main" id="{56674A25-46A8-4DDA-A81A-3678D03EBE50}"/>
               </a:ext>
             </a:extLst>
           </p:cNvPr>
@@ -13958,7 +13963,7 @@
           <p:cNvPr id="21" name="지역 변수·조사식">
             <a:extLst xmlns:a="http://schemas.openxmlformats.org/drawingml/2006/main">
               <a:ext uri="{FF2B5EF4-FFF2-40B4-BE49-F238E27FC236}">
-                <a16:creationId xmlns:a16="http://schemas.microsoft.com/office/drawing/2014/main" id="{FA7A46AA-BBC5-4922-B66B-F82612385C62}"/>
+                <a16:creationId xmlns:a16="http://schemas.microsoft.com/office/drawing/2014/main" id="{DDD3FC55-86E5-4D16-A989-2A8E713CB67F}"/>
               </a:ext>
             </a:extLst>
           </p:cNvPr>
@@ -14116,7 +14121,7 @@
           <p:cNvPr id="22" name="">
             <a:extLst xmlns:a="http://schemas.openxmlformats.org/drawingml/2006/main">
               <a:ext uri="{FF2B5EF4-FFF2-40B4-BE49-F238E27FC236}">
-                <a16:creationId xmlns:a16="http://schemas.microsoft.com/office/drawing/2014/main" id="{8107411C-EB52-47BD-BCEF-2F9B7713F6D7}"/>
+                <a16:creationId xmlns:a16="http://schemas.microsoft.com/office/drawing/2014/main" id="{9E7B134B-A1A1-4AC1-8585-4D25FC38ECC7}"/>
               </a:ext>
             </a:extLst>
           </p:cNvPr>
@@ -14147,7 +14152,7 @@
           <p:cNvPr id="23" name="멈춘 지점의 입력&#10;변수의 실제 값">
             <a:extLst xmlns:a="http://schemas.openxmlformats.org/drawingml/2006/main">
               <a:ext uri="{FF2B5EF4-FFF2-40B4-BE49-F238E27FC236}">
-                <a16:creationId xmlns:a16="http://schemas.microsoft.com/office/drawing/2014/main" id="{09D4A189-10DE-42F2-B8D6-10002A25B89F}"/>
+                <a16:creationId xmlns:a16="http://schemas.microsoft.com/office/drawing/2014/main" id="{2744C2A9-8BD1-4483-8FAC-5F743E120152}"/>
               </a:ext>
             </a:extLst>
           </p:cNvPr>
@@ -14328,7 +14333,7 @@
           <p:cNvPr id="24" name="">
             <a:extLst xmlns:a="http://schemas.openxmlformats.org/drawingml/2006/main">
               <a:ext uri="{FF2B5EF4-FFF2-40B4-BE49-F238E27FC236}">
-                <a16:creationId xmlns:a16="http://schemas.microsoft.com/office/drawing/2014/main" id="{D6F4681E-2714-445B-B427-BBE39F542A05}"/>
+                <a16:creationId xmlns:a16="http://schemas.microsoft.com/office/drawing/2014/main" id="{A7BA375D-4EE1-48E4-8C50-35EF64AF17A6}"/>
               </a:ext>
             </a:extLst>
           </p:cNvPr>
@@ -14361,7 +14366,7 @@
           <p:cNvPr id="25" name="출력·로그">
             <a:extLst xmlns:a="http://schemas.openxmlformats.org/drawingml/2006/main">
               <a:ext uri="{FF2B5EF4-FFF2-40B4-BE49-F238E27FC236}">
-                <a16:creationId xmlns:a16="http://schemas.microsoft.com/office/drawing/2014/main" id="{CC149622-3645-438F-BDA1-4FD147C8DF61}"/>
+                <a16:creationId xmlns:a16="http://schemas.microsoft.com/office/drawing/2014/main" id="{90FD975C-3D2D-4D50-A6E7-6E7FB7784A8E}"/>
               </a:ext>
             </a:extLst>
           </p:cNvPr>
@@ -14519,7 +14524,7 @@
           <p:cNvPr id="26" name="">
             <a:extLst xmlns:a="http://schemas.openxmlformats.org/drawingml/2006/main">
               <a:ext uri="{FF2B5EF4-FFF2-40B4-BE49-F238E27FC236}">
-                <a16:creationId xmlns:a16="http://schemas.microsoft.com/office/drawing/2014/main" id="{9FB56B59-0270-45EF-A145-400621938681}"/>
+                <a16:creationId xmlns:a16="http://schemas.microsoft.com/office/drawing/2014/main" id="{135A08E5-76EB-44CB-B754-8C405767144D}"/>
               </a:ext>
             </a:extLst>
           </p:cNvPr>
@@ -14550,7 +14555,7 @@
           <p:cNvPr id="27" name="빌드·실행 메시지&#10;오류가 난 시점">
             <a:extLst xmlns:a="http://schemas.openxmlformats.org/drawingml/2006/main">
               <a:ext uri="{FF2B5EF4-FFF2-40B4-BE49-F238E27FC236}">
-                <a16:creationId xmlns:a16="http://schemas.microsoft.com/office/drawing/2014/main" id="{A3A2B837-4D67-45DD-BA5F-66F1F24D0EA9}"/>
+                <a16:creationId xmlns:a16="http://schemas.microsoft.com/office/drawing/2014/main" id="{C829DA70-7A61-468B-9B92-433F8C6102F0}"/>
               </a:ext>
             </a:extLst>
           </p:cNvPr>
@@ -14731,7 +14736,7 @@
           <p:cNvPr id="28" name="">
             <a:extLst xmlns:a="http://schemas.openxmlformats.org/drawingml/2006/main">
               <a:ext uri="{FF2B5EF4-FFF2-40B4-BE49-F238E27FC236}">
-                <a16:creationId xmlns:a16="http://schemas.microsoft.com/office/drawing/2014/main" id="{09C6D943-BA36-402A-9603-E8F5B2D57276}"/>
+                <a16:creationId xmlns:a16="http://schemas.microsoft.com/office/drawing/2014/main" id="{E0842B9C-8BA1-4A25-9E75-955F99E3A092}"/>
               </a:ext>
             </a:extLst>
           </p:cNvPr>
@@ -14764,7 +14769,7 @@
           <p:cNvPr id="29" name="명세서 · 외부 문서">
             <a:extLst xmlns:a="http://schemas.openxmlformats.org/drawingml/2006/main">
               <a:ext uri="{FF2B5EF4-FFF2-40B4-BE49-F238E27FC236}">
-                <a16:creationId xmlns:a16="http://schemas.microsoft.com/office/drawing/2014/main" id="{CC66AE1E-5D20-4413-8365-9A14CCFA9FD7}"/>
+                <a16:creationId xmlns:a16="http://schemas.microsoft.com/office/drawing/2014/main" id="{86A5E6B2-86E2-4133-A7A5-7C190A35EF4A}"/>
               </a:ext>
             </a:extLst>
           </p:cNvPr>
@@ -14922,7 +14927,7 @@
           <p:cNvPr id="30" name="">
             <a:extLst xmlns:a="http://schemas.openxmlformats.org/drawingml/2006/main">
               <a:ext uri="{FF2B5EF4-FFF2-40B4-BE49-F238E27FC236}">
-                <a16:creationId xmlns:a16="http://schemas.microsoft.com/office/drawing/2014/main" id="{BF60352F-F44A-4064-AF5A-E26FC27EF450}"/>
+                <a16:creationId xmlns:a16="http://schemas.microsoft.com/office/drawing/2014/main" id="{C384F134-82FE-4638-BF93-AF8ADDAE4256}"/>
               </a:ext>
             </a:extLst>
           </p:cNvPr>
@@ -14953,7 +14958,7 @@
           <p:cNvPr id="31" name="기대하는 동작&#10;입력 범위·예외 조건">
             <a:extLst xmlns:a="http://schemas.openxmlformats.org/drawingml/2006/main">
               <a:ext uri="{FF2B5EF4-FFF2-40B4-BE49-F238E27FC236}">
-                <a16:creationId xmlns:a16="http://schemas.microsoft.com/office/drawing/2014/main" id="{92BB1E0C-EC6C-4E0C-8226-C557EA19A1A2}"/>
+                <a16:creationId xmlns:a16="http://schemas.microsoft.com/office/drawing/2014/main" id="{696294A2-0909-4CBD-80ED-37D65C28BB93}"/>
               </a:ext>
             </a:extLst>
           </p:cNvPr>
@@ -15134,7 +15139,7 @@
           <p:cNvPr id="32" name="이 정보 하나하나가 Context다.">
             <a:extLst xmlns:a="http://schemas.openxmlformats.org/drawingml/2006/main">
               <a:ext uri="{FF2B5EF4-FFF2-40B4-BE49-F238E27FC236}">
-                <a16:creationId xmlns:a16="http://schemas.microsoft.com/office/drawing/2014/main" id="{A3DAEB3D-D214-4C28-96F5-49DEBB3E09DF}"/>
+                <a16:creationId xmlns:a16="http://schemas.microsoft.com/office/drawing/2014/main" id="{90367078-4765-4E73-8C65-B65103F0FA16}"/>
               </a:ext>
             </a:extLst>
           </p:cNvPr>
@@ -15292,7 +15297,7 @@
           <p:cNvPr id="33" name="Legacy module connection">
             <a:extLst xmlns:a="http://schemas.openxmlformats.org/drawingml/2006/main">
               <a:ext uri="{FF2B5EF4-FFF2-40B4-BE49-F238E27FC236}">
-                <a16:creationId xmlns:a16="http://schemas.microsoft.com/office/drawing/2014/main" id="{A438A1E4-53C8-472B-9025-9EDF2D033F8A}"/>
+                <a16:creationId xmlns:a16="http://schemas.microsoft.com/office/drawing/2014/main" id="{A6371EF9-C307-4DD7-B1DA-4BE88A3FCBF8}"/>
               </a:ext>
             </a:extLst>
           </p:cNvPr>
@@ -15448,7 +15453,7 @@
     </p:spTree>
     <p:extLst>
       <p:ext uri="{BB962C8B-B14F-4D97-AF65-F5344CB8AC3E}">
-        <p14:creationId xmlns:p14="http://schemas.microsoft.com/office/powerpoint/2010/main" val="2145054980"/>
+        <p14:creationId xmlns:p14="http://schemas.microsoft.com/office/powerpoint/2010/main" val="1817750766"/>
       </p:ext>
     </p:extLst>
   </p:cSld>
@@ -15479,7 +15484,7 @@
           <p:cNvPr id="20" name="ACT 0 · Repository 조사 관찰">
             <a:extLst xmlns:a="http://schemas.openxmlformats.org/drawingml/2006/main">
               <a:ext uri="{FF2B5EF4-FFF2-40B4-BE49-F238E27FC236}">
-                <a16:creationId xmlns:a16="http://schemas.microsoft.com/office/drawing/2014/main" id="{85781611-84B8-4255-84D6-1E75ADC9D956}"/>
+                <a16:creationId xmlns:a16="http://schemas.microsoft.com/office/drawing/2014/main" id="{0B66086F-6A8E-477F-820E-BDA6E989E3D2}"/>
               </a:ext>
             </a:extLst>
           </p:cNvPr>
@@ -15637,7 +15642,7 @@
           <p:cNvPr id="2" name="S04">
             <a:extLst xmlns:a="http://schemas.openxmlformats.org/drawingml/2006/main">
               <a:ext uri="{FF2B5EF4-FFF2-40B4-BE49-F238E27FC236}">
-                <a16:creationId xmlns:a16="http://schemas.microsoft.com/office/drawing/2014/main" id="{01C981C4-A386-46A7-95D7-354B5615476D}"/>
+                <a16:creationId xmlns:a16="http://schemas.microsoft.com/office/drawing/2014/main" id="{8E7271B8-D55E-43EF-90C0-5F004B8A078E}"/>
               </a:ext>
             </a:extLst>
           </p:cNvPr>
@@ -15795,7 +15800,7 @@
           <p:cNvPr id="3" name="파일명을 주지 않으면 Agent는 어디부터 볼까?">
             <a:extLst xmlns:a="http://schemas.openxmlformats.org/drawingml/2006/main">
               <a:ext uri="{FF2B5EF4-FFF2-40B4-BE49-F238E27FC236}">
-                <a16:creationId xmlns:a16="http://schemas.microsoft.com/office/drawing/2014/main" id="{CDD8463B-037A-4536-B31C-921E62F45D91}"/>
+                <a16:creationId xmlns:a16="http://schemas.microsoft.com/office/drawing/2014/main" id="{21906681-A17D-4342-A935-C9D24EC29DE8}"/>
               </a:ext>
             </a:extLst>
           </p:cNvPr>
@@ -15953,7 +15958,7 @@
           <p:cNvPr id="4" name="">
             <a:extLst xmlns:a="http://schemas.openxmlformats.org/drawingml/2006/main">
               <a:ext uri="{FF2B5EF4-FFF2-40B4-BE49-F238E27FC236}">
-                <a16:creationId xmlns:a16="http://schemas.microsoft.com/office/drawing/2014/main" id="{76F79F77-45E9-4B70-A01B-EFC74E86DDC3}"/>
+                <a16:creationId xmlns:a16="http://schemas.microsoft.com/office/drawing/2014/main" id="{D19B1330-1F3F-41EC-BED6-19A5B1AABBA4}"/>
               </a:ext>
             </a:extLst>
           </p:cNvPr>
@@ -15984,7 +15989,7 @@
           <p:cNvPr id="5" name="실제 요청: TRIAL-001 · Codex CLI 0.154.0 · macOS · 읽기 전용">
             <a:extLst xmlns:a="http://schemas.openxmlformats.org/drawingml/2006/main">
               <a:ext uri="{FF2B5EF4-FFF2-40B4-BE49-F238E27FC236}">
-                <a16:creationId xmlns:a16="http://schemas.microsoft.com/office/drawing/2014/main" id="{178AFC25-6C67-4587-9EEA-953C727FA834}"/>
+                <a16:creationId xmlns:a16="http://schemas.microsoft.com/office/drawing/2014/main" id="{21786DBF-6065-432B-A1A0-34CABB2D9EB3}"/>
               </a:ext>
             </a:extLst>
           </p:cNvPr>
@@ -16142,7 +16147,7 @@
           <p:cNvPr id="6" name="우측은 가상 GoogleTest 예시 · 실제 Trial은 Python unittest · 현재 Deskto">
             <a:extLst xmlns:a="http://schemas.openxmlformats.org/drawingml/2006/main">
               <a:ext uri="{FF2B5EF4-FFF2-40B4-BE49-F238E27FC236}">
-                <a16:creationId xmlns:a16="http://schemas.microsoft.com/office/drawing/2014/main" id="{D0FF78B6-DA3D-4B3B-BB8E-345CF6EB6CA1}"/>
+                <a16:creationId xmlns:a16="http://schemas.microsoft.com/office/drawing/2014/main" id="{ADAEBC53-A5D0-4A82-BB58-D289BD6C4D33}"/>
               </a:ext>
             </a:extLst>
           </p:cNvPr>
@@ -16300,7 +16305,7 @@
           <p:cNvPr id="7" name="TRIAL-001의 실제 조사 요청">
             <a:extLst xmlns:a="http://schemas.openxmlformats.org/drawingml/2006/main">
               <a:ext uri="{FF2B5EF4-FFF2-40B4-BE49-F238E27FC236}">
-                <a16:creationId xmlns:a16="http://schemas.microsoft.com/office/drawing/2014/main" id="{7D5150CA-94C8-4A80-A09F-5B1306067204}"/>
+                <a16:creationId xmlns:a16="http://schemas.microsoft.com/office/drawing/2014/main" id="{06A699CF-BB4E-421F-889F-84B6646F245A}"/>
               </a:ext>
             </a:extLst>
           </p:cNvPr>
@@ -16458,7 +16463,7 @@
           <p:cNvPr id="8" name="실패 하나가 있는 상황">
             <a:extLst xmlns:a="http://schemas.openxmlformats.org/drawingml/2006/main">
               <a:ext uri="{FF2B5EF4-FFF2-40B4-BE49-F238E27FC236}">
-                <a16:creationId xmlns:a16="http://schemas.microsoft.com/office/drawing/2014/main" id="{71B80D65-FACA-4261-8DCB-7FFF6A564F7C}"/>
+                <a16:creationId xmlns:a16="http://schemas.microsoft.com/office/drawing/2014/main" id="{F5CFAD83-65D1-48F9-AC36-89DD8C5E768E}"/>
               </a:ext>
             </a:extLst>
           </p:cNvPr>
@@ -16616,7 +16621,7 @@
           <p:cNvPr id="9" name="C++ 설명용 가상 화면">
             <a:extLst xmlns:a="http://schemas.openxmlformats.org/drawingml/2006/main">
               <a:ext uri="{FF2B5EF4-FFF2-40B4-BE49-F238E27FC236}">
-                <a16:creationId xmlns:a16="http://schemas.microsoft.com/office/drawing/2014/main" id="{D045A44E-0705-45DF-ABC1-32CEB11EA63B}"/>
+                <a16:creationId xmlns:a16="http://schemas.microsoft.com/office/drawing/2014/main" id="{0E77DEB9-0625-449A-8247-867DE8A7D403}"/>
               </a:ext>
             </a:extLst>
           </p:cNvPr>
@@ -16774,7 +16779,7 @@
           <p:cNvPr id="10" name="">
             <a:extLst xmlns:a="http://schemas.openxmlformats.org/drawingml/2006/main">
               <a:ext uri="{FF2B5EF4-FFF2-40B4-BE49-F238E27FC236}">
-                <a16:creationId xmlns:a16="http://schemas.microsoft.com/office/drawing/2014/main" id="{407DB00B-32CF-4278-98F4-F3AFA33AAF74}"/>
+                <a16:creationId xmlns:a16="http://schemas.microsoft.com/office/drawing/2014/main" id="{60B1A413-CDA1-4634-8BDC-54920C497E26}"/>
               </a:ext>
             </a:extLst>
           </p:cNvPr>
@@ -16807,7 +16812,7 @@
           <p:cNvPr id="11" name="조사 요청 · 입력창 형태로 재구성">
             <a:extLst xmlns:a="http://schemas.openxmlformats.org/drawingml/2006/main">
               <a:ext uri="{FF2B5EF4-FFF2-40B4-BE49-F238E27FC236}">
-                <a16:creationId xmlns:a16="http://schemas.microsoft.com/office/drawing/2014/main" id="{B8295189-F17D-4A22-8977-2F51B97E9C84}"/>
+                <a16:creationId xmlns:a16="http://schemas.microsoft.com/office/drawing/2014/main" id="{A99FBB29-48A5-4B40-80E5-26ED0687010A}"/>
               </a:ext>
             </a:extLst>
           </p:cNvPr>
@@ -16965,7 +16970,7 @@
           <p:cNvPr id="12" name="">
             <a:extLst xmlns:a="http://schemas.openxmlformats.org/drawingml/2006/main">
               <a:ext uri="{FF2B5EF4-FFF2-40B4-BE49-F238E27FC236}">
-                <a16:creationId xmlns:a16="http://schemas.microsoft.com/office/drawing/2014/main" id="{2023D7E8-0D45-4DC9-B984-92C8035CC603}"/>
+                <a16:creationId xmlns:a16="http://schemas.microsoft.com/office/drawing/2014/main" id="{BCB1CA44-A79D-4952-91C3-946184B578D8}"/>
               </a:ext>
             </a:extLst>
           </p:cNvPr>
@@ -16996,7 +17001,7 @@
           <p:cNvPr id="13" name="현재 이 저장소에서 테스트 하나가&#10;실패하고 있다. 실패 원인을 조사해줘.&#10;관련 구현과 호출 경로, 실패하는&#10;">
             <a:extLst xmlns:a="http://schemas.openxmlformats.org/drawingml/2006/main">
               <a:ext uri="{FF2B5EF4-FFF2-40B4-BE49-F238E27FC236}">
-                <a16:creationId xmlns:a16="http://schemas.microsoft.com/office/drawing/2014/main" id="{53993618-7A89-4C18-992F-B1C6271B959D}"/>
+                <a16:creationId xmlns:a16="http://schemas.microsoft.com/office/drawing/2014/main" id="{77813C39-740E-4845-96E9-C508582359BC}"/>
               </a:ext>
             </a:extLst>
           </p:cNvPr>
@@ -17269,7 +17274,7 @@
           <p:cNvPr id="14" name="＋">
             <a:extLst xmlns:a="http://schemas.openxmlformats.org/drawingml/2006/main">
               <a:ext uri="{FF2B5EF4-FFF2-40B4-BE49-F238E27FC236}">
-                <a16:creationId xmlns:a16="http://schemas.microsoft.com/office/drawing/2014/main" id="{F5B1D3E3-EE3A-4225-B20B-1C7AB4647CCC}"/>
+                <a16:creationId xmlns:a16="http://schemas.microsoft.com/office/drawing/2014/main" id="{279CC94B-FC09-4658-B840-40BA93599E2B}"/>
               </a:ext>
             </a:extLst>
           </p:cNvPr>
@@ -17427,7 +17432,7 @@
           <p:cNvPr id="15" name="">
             <a:extLst xmlns:a="http://schemas.openxmlformats.org/drawingml/2006/main">
               <a:ext uri="{FF2B5EF4-FFF2-40B4-BE49-F238E27FC236}">
-                <a16:creationId xmlns:a16="http://schemas.microsoft.com/office/drawing/2014/main" id="{C92B22B8-5368-40DB-9D5F-1AD928A20445}"/>
+                <a16:creationId xmlns:a16="http://schemas.microsoft.com/office/drawing/2014/main" id="{1692CDFB-13D7-454B-89E5-7F8C38824449}"/>
               </a:ext>
             </a:extLst>
           </p:cNvPr>
@@ -17457,7 +17462,7 @@
           <p:cNvPr id="16" name="↑">
             <a:extLst xmlns:a="http://schemas.openxmlformats.org/drawingml/2006/main">
               <a:ext uri="{FF2B5EF4-FFF2-40B4-BE49-F238E27FC236}">
-                <a16:creationId xmlns:a16="http://schemas.microsoft.com/office/drawing/2014/main" id="{68357ED4-4D98-47E4-AB60-9B2C33DF3BBE}"/>
+                <a16:creationId xmlns:a16="http://schemas.microsoft.com/office/drawing/2014/main" id="{6D6DBF60-3116-4432-8F0B-E01C7B2DA3E0}"/>
               </a:ext>
             </a:extLst>
           </p:cNvPr>
@@ -17615,7 +17620,7 @@
           <p:cNvPr id="17" name="">
             <a:extLst xmlns:a="http://schemas.openxmlformats.org/drawingml/2006/main">
               <a:ext uri="{FF2B5EF4-FFF2-40B4-BE49-F238E27FC236}">
-                <a16:creationId xmlns:a16="http://schemas.microsoft.com/office/drawing/2014/main" id="{2FFBCFEE-075A-4BBE-8729-BB95D392A60E}"/>
+                <a16:creationId xmlns:a16="http://schemas.microsoft.com/office/drawing/2014/main" id="{C7BFB5FF-721F-4FB8-B606-9481F21C42D4}"/>
               </a:ext>
             </a:extLst>
           </p:cNvPr>
@@ -17625,7 +17630,7 @@
           <p:nvPr/>
         </p:nvPicPr>
         <p:blipFill>
-          <a:blip xmlns:r="http://schemas.openxmlformats.org/officeDocument/2006/relationships" xmlns:a="http://schemas.openxmlformats.org/drawingml/2006/main" r:embed="Rfdad71179e7b4c59"/>
+          <a:blip xmlns:r="http://schemas.openxmlformats.org/officeDocument/2006/relationships" xmlns:a="http://schemas.openxmlformats.org/drawingml/2006/main" r:embed="Rde476a5b2b284edf"/>
           <a:stretch xmlns:a="http://schemas.openxmlformats.org/drawingml/2006/main"/>
         </p:blipFill>
         <p:spPr>
@@ -17643,7 +17648,7 @@
           <p:cNvPr id="18" name="관찰할 것    실패 테스트  ·  관련 구현  ·  호출 경로">
             <a:extLst xmlns:a="http://schemas.openxmlformats.org/drawingml/2006/main">
               <a:ext uri="{FF2B5EF4-FFF2-40B4-BE49-F238E27FC236}">
-                <a16:creationId xmlns:a16="http://schemas.microsoft.com/office/drawing/2014/main" id="{A02C30C2-9979-4C81-B092-735EA05F25D4}"/>
+                <a16:creationId xmlns:a16="http://schemas.microsoft.com/office/drawing/2014/main" id="{52D0E5A3-BC69-42F4-8F82-2530C3FFE7AA}"/>
               </a:ext>
             </a:extLst>
           </p:cNvPr>
@@ -17801,7 +17806,7 @@
           <p:cNvPr id="19" name="Legacy module connection">
             <a:extLst xmlns:a="http://schemas.openxmlformats.org/drawingml/2006/main">
               <a:ext uri="{FF2B5EF4-FFF2-40B4-BE49-F238E27FC236}">
-                <a16:creationId xmlns:a16="http://schemas.microsoft.com/office/drawing/2014/main" id="{DB10F7F4-E74B-458C-A0C0-D00DB49A9148}"/>
+                <a16:creationId xmlns:a16="http://schemas.microsoft.com/office/drawing/2014/main" id="{7526C435-279A-4166-98F0-7F1E0B9E2B58}"/>
               </a:ext>
             </a:extLst>
           </p:cNvPr>
@@ -17957,7 +17962,7 @@
     </p:spTree>
     <p:extLst>
       <p:ext uri="{BB962C8B-B14F-4D97-AF65-F5344CB8AC3E}">
-        <p14:creationId xmlns:p14="http://schemas.microsoft.com/office/powerpoint/2010/main" val="644231841"/>
+        <p14:creationId xmlns:p14="http://schemas.microsoft.com/office/powerpoint/2010/main" val="1605278549"/>
       </p:ext>
     </p:extLst>
   </p:cSld>
@@ -17985,10 +17990,10 @@
       </p:grpSpPr>
       <p:sp>
         <p:nvSpPr>
-          <p:cNvPr id="64" name="ACT 0  ·  Repository 탐색">
+          <p:cNvPr id="46" name="ACT 0  ·  Repository 탐색">
             <a:extLst xmlns:a="http://schemas.openxmlformats.org/drawingml/2006/main">
               <a:ext uri="{FF2B5EF4-FFF2-40B4-BE49-F238E27FC236}">
-                <a16:creationId xmlns:a16="http://schemas.microsoft.com/office/drawing/2014/main" id="{48E260E0-B6B8-492D-8AAD-D8EBFB0E33EA}"/>
+                <a16:creationId xmlns:a16="http://schemas.microsoft.com/office/drawing/2014/main" id="{DC2BD79B-D9F3-4738-A38A-B03D400F8FAE}"/>
               </a:ext>
             </a:extLst>
           </p:cNvPr>
@@ -18146,7 +18151,7 @@
           <p:cNvPr id="2" name="S05">
             <a:extLst xmlns:a="http://schemas.openxmlformats.org/drawingml/2006/main">
               <a:ext uri="{FF2B5EF4-FFF2-40B4-BE49-F238E27FC236}">
-                <a16:creationId xmlns:a16="http://schemas.microsoft.com/office/drawing/2014/main" id="{0B91805C-1D6B-4A12-B6E2-ADEF2BA7A65F}"/>
+                <a16:creationId xmlns:a16="http://schemas.microsoft.com/office/drawing/2014/main" id="{C19B4F78-4695-4D46-840A-C19A8B067ED8}"/>
               </a:ext>
             </a:extLst>
           </p:cNvPr>
@@ -18304,7 +18309,7 @@
           <p:cNvPr id="3" name="Agent가 Test와 호출 경로를 찾았다">
             <a:extLst xmlns:a="http://schemas.openxmlformats.org/drawingml/2006/main">
               <a:ext uri="{FF2B5EF4-FFF2-40B4-BE49-F238E27FC236}">
-                <a16:creationId xmlns:a16="http://schemas.microsoft.com/office/drawing/2014/main" id="{6E754A0C-1E31-4EE3-B218-98268157EE3D}"/>
+                <a16:creationId xmlns:a16="http://schemas.microsoft.com/office/drawing/2014/main" id="{59FAEAD4-D870-4247-B0A6-BE3106616AFE}"/>
               </a:ext>
             </a:extLst>
           </p:cNvPr>
@@ -18462,7 +18467,7 @@
           <p:cNvPr id="4" name="">
             <a:extLst xmlns:a="http://schemas.openxmlformats.org/drawingml/2006/main">
               <a:ext uri="{FF2B5EF4-FFF2-40B4-BE49-F238E27FC236}">
-                <a16:creationId xmlns:a16="http://schemas.microsoft.com/office/drawing/2014/main" id="{FB77FDE6-C16B-44C2-BCD5-3D65C410B206}"/>
+                <a16:creationId xmlns:a16="http://schemas.microsoft.com/office/drawing/2014/main" id="{306217B2-99E4-4C12-A8FC-1658D236DEB7}"/>
               </a:ext>
             </a:extLst>
           </p:cNvPr>
@@ -18493,7 +18498,7 @@
           <p:cNvPr id="5" name="TRIAL-001 기록·STATE-00 테스트 재구성  |  Codex CLI 0.154.0 · 읽기 전용">
             <a:extLst xmlns:a="http://schemas.openxmlformats.org/drawingml/2006/main">
               <a:ext uri="{FF2B5EF4-FFF2-40B4-BE49-F238E27FC236}">
-                <a16:creationId xmlns:a16="http://schemas.microsoft.com/office/drawing/2014/main" id="{2B9A7143-D14A-4EDB-8B2B-67E00E5668B8}"/>
+                <a16:creationId xmlns:a16="http://schemas.microsoft.com/office/drawing/2014/main" id="{79DE35BE-295C-4EE8-9E28-1545BEE48238}"/>
               </a:ext>
             </a:extLst>
           </p:cNvPr>
@@ -18651,7 +18656,7 @@
           <p:cNvPr id="6" name="실제 실행 화면이 아님 · 이 조사에서는 코드 수정 없음 · 현재 Desktop 동작 미검증">
             <a:extLst xmlns:a="http://schemas.openxmlformats.org/drawingml/2006/main">
               <a:ext uri="{FF2B5EF4-FFF2-40B4-BE49-F238E27FC236}">
-                <a16:creationId xmlns:a16="http://schemas.microsoft.com/office/drawing/2014/main" id="{A90F87A0-F843-4EEC-B884-CDB51C1B2E5C}"/>
+                <a16:creationId xmlns:a16="http://schemas.microsoft.com/office/drawing/2014/main" id="{35E0A995-0106-4127-8F14-56C888EE1352}"/>
               </a:ext>
             </a:extLst>
           </p:cNvPr>
@@ -18806,10 +18811,10 @@
       </p:sp>
       <p:sp>
         <p:nvSpPr>
-          <p:cNvPr id="7" name="crop(image, 1, 3)">
+          <p:cNvPr id="7" name="의도한 폭과 실제로 포함된 열 수가 달랐다">
             <a:extLst xmlns:a="http://schemas.openxmlformats.org/drawingml/2006/main">
               <a:ext uri="{FF2B5EF4-FFF2-40B4-BE49-F238E27FC236}">
-                <a16:creationId xmlns:a16="http://schemas.microsoft.com/office/drawing/2014/main" id="{4840F452-36D5-4BC6-AD0C-19712902F7F3}"/>
+                <a16:creationId xmlns:a16="http://schemas.microsoft.com/office/drawing/2014/main" id="{E2D4030B-61C1-4FB8-91FA-D4AA32E30BCE}"/>
               </a:ext>
             </a:extLst>
           </p:cNvPr>
@@ -18820,8 +18825,8 @@
         </p:nvSpPr>
         <p:spPr>
           <a:xfrm xmlns:a="http://schemas.openxmlformats.org/drawingml/2006/main">
-            <a:off x="609600" y="1571625"/>
-            <a:ext cx="5334000" cy="409575"/>
+            <a:off x="609600" y="1600200"/>
+            <a:ext cx="10972800" cy="390525"/>
           </a:xfrm>
           <a:prstGeom xmlns:a="http://schemas.openxmlformats.org/drawingml/2006/main" prst="rect">
             <a:avLst/>
@@ -18837,137 +18842,137 @@
           </a:bodyPr>
           <a:lstStyle xmlns:a="http://schemas.openxmlformats.org/drawingml/2006/main">
             <a:defPPr algn="l">
-              <a:defRPr sz="2550" b="1">
-                <a:solidFill>
-                  <a:srgbClr val="0B6172"/>
-                </a:solidFill>
-                <a:latin typeface="Consolas"/>
-                <a:ea typeface="Consolas"/>
-                <a:cs typeface="Consolas"/>
+              <a:defRPr sz="2325" b="1">
+                <a:solidFill>
+                  <a:srgbClr val="0B6172"/>
+                </a:solidFill>
+                <a:latin typeface="Malgun Gothic"/>
+                <a:ea typeface="Malgun Gothic"/>
+                <a:cs typeface="Malgun Gothic"/>
               </a:defRPr>
             </a:defPPr>
             <a:lvl1pPr algn="l">
-              <a:defRPr sz="2550" b="1">
-                <a:solidFill>
-                  <a:srgbClr val="0B6172"/>
-                </a:solidFill>
-                <a:latin typeface="Consolas"/>
-                <a:ea typeface="Consolas"/>
-                <a:cs typeface="Consolas"/>
+              <a:defRPr sz="2325" b="1">
+                <a:solidFill>
+                  <a:srgbClr val="0B6172"/>
+                </a:solidFill>
+                <a:latin typeface="Malgun Gothic"/>
+                <a:ea typeface="Malgun Gothic"/>
+                <a:cs typeface="Malgun Gothic"/>
               </a:defRPr>
             </a:lvl1pPr>
             <a:lvl2pPr algn="l">
-              <a:defRPr sz="2550" b="1">
-                <a:solidFill>
-                  <a:srgbClr val="0B6172"/>
-                </a:solidFill>
-                <a:latin typeface="Consolas"/>
-                <a:ea typeface="Consolas"/>
-                <a:cs typeface="Consolas"/>
+              <a:defRPr sz="2325" b="1">
+                <a:solidFill>
+                  <a:srgbClr val="0B6172"/>
+                </a:solidFill>
+                <a:latin typeface="Malgun Gothic"/>
+                <a:ea typeface="Malgun Gothic"/>
+                <a:cs typeface="Malgun Gothic"/>
               </a:defRPr>
             </a:lvl2pPr>
             <a:lvl3pPr algn="l">
-              <a:defRPr sz="2550" b="1">
-                <a:solidFill>
-                  <a:srgbClr val="0B6172"/>
-                </a:solidFill>
-                <a:latin typeface="Consolas"/>
-                <a:ea typeface="Consolas"/>
-                <a:cs typeface="Consolas"/>
+              <a:defRPr sz="2325" b="1">
+                <a:solidFill>
+                  <a:srgbClr val="0B6172"/>
+                </a:solidFill>
+                <a:latin typeface="Malgun Gothic"/>
+                <a:ea typeface="Malgun Gothic"/>
+                <a:cs typeface="Malgun Gothic"/>
               </a:defRPr>
             </a:lvl3pPr>
             <a:lvl4pPr algn="l">
-              <a:defRPr sz="2550" b="1">
-                <a:solidFill>
-                  <a:srgbClr val="0B6172"/>
-                </a:solidFill>
-                <a:latin typeface="Consolas"/>
-                <a:ea typeface="Consolas"/>
-                <a:cs typeface="Consolas"/>
+              <a:defRPr sz="2325" b="1">
+                <a:solidFill>
+                  <a:srgbClr val="0B6172"/>
+                </a:solidFill>
+                <a:latin typeface="Malgun Gothic"/>
+                <a:ea typeface="Malgun Gothic"/>
+                <a:cs typeface="Malgun Gothic"/>
               </a:defRPr>
             </a:lvl4pPr>
             <a:lvl5pPr algn="l">
-              <a:defRPr sz="2550" b="1">
-                <a:solidFill>
-                  <a:srgbClr val="0B6172"/>
-                </a:solidFill>
-                <a:latin typeface="Consolas"/>
-                <a:ea typeface="Consolas"/>
-                <a:cs typeface="Consolas"/>
+              <a:defRPr sz="2325" b="1">
+                <a:solidFill>
+                  <a:srgbClr val="0B6172"/>
+                </a:solidFill>
+                <a:latin typeface="Malgun Gothic"/>
+                <a:ea typeface="Malgun Gothic"/>
+                <a:cs typeface="Malgun Gothic"/>
               </a:defRPr>
             </a:lvl5pPr>
             <a:lvl6pPr algn="l">
-              <a:defRPr sz="2550" b="1">
-                <a:solidFill>
-                  <a:srgbClr val="0B6172"/>
-                </a:solidFill>
-                <a:latin typeface="Consolas"/>
-                <a:ea typeface="Consolas"/>
-                <a:cs typeface="Consolas"/>
+              <a:defRPr sz="2325" b="1">
+                <a:solidFill>
+                  <a:srgbClr val="0B6172"/>
+                </a:solidFill>
+                <a:latin typeface="Malgun Gothic"/>
+                <a:ea typeface="Malgun Gothic"/>
+                <a:cs typeface="Malgun Gothic"/>
               </a:defRPr>
             </a:lvl6pPr>
             <a:lvl7pPr algn="l">
-              <a:defRPr sz="2550" b="1">
-                <a:solidFill>
-                  <a:srgbClr val="0B6172"/>
-                </a:solidFill>
-                <a:latin typeface="Consolas"/>
-                <a:ea typeface="Consolas"/>
-                <a:cs typeface="Consolas"/>
+              <a:defRPr sz="2325" b="1">
+                <a:solidFill>
+                  <a:srgbClr val="0B6172"/>
+                </a:solidFill>
+                <a:latin typeface="Malgun Gothic"/>
+                <a:ea typeface="Malgun Gothic"/>
+                <a:cs typeface="Malgun Gothic"/>
               </a:defRPr>
             </a:lvl7pPr>
             <a:lvl8pPr algn="l">
-              <a:defRPr sz="2550" b="1">
-                <a:solidFill>
-                  <a:srgbClr val="0B6172"/>
-                </a:solidFill>
-                <a:latin typeface="Consolas"/>
-                <a:ea typeface="Consolas"/>
-                <a:cs typeface="Consolas"/>
+              <a:defRPr sz="2325" b="1">
+                <a:solidFill>
+                  <a:srgbClr val="0B6172"/>
+                </a:solidFill>
+                <a:latin typeface="Malgun Gothic"/>
+                <a:ea typeface="Malgun Gothic"/>
+                <a:cs typeface="Malgun Gothic"/>
               </a:defRPr>
             </a:lvl8pPr>
             <a:lvl9pPr algn="l">
-              <a:defRPr sz="2550" b="1">
-                <a:solidFill>
-                  <a:srgbClr val="0B6172"/>
-                </a:solidFill>
-                <a:latin typeface="Consolas"/>
-                <a:ea typeface="Consolas"/>
-                <a:cs typeface="Consolas"/>
+              <a:defRPr sz="2325" b="1">
+                <a:solidFill>
+                  <a:srgbClr val="0B6172"/>
+                </a:solidFill>
+                <a:latin typeface="Malgun Gothic"/>
+                <a:ea typeface="Malgun Gothic"/>
+                <a:cs typeface="Malgun Gothic"/>
               </a:defRPr>
             </a:lvl9pPr>
           </a:lstStyle>
           <a:p xmlns:a="http://schemas.openxmlformats.org/drawingml/2006/main">
             <a:pPr algn="l">
-              <a:defRPr sz="2550" b="1">
-                <a:solidFill>
-                  <a:srgbClr val="0B6172"/>
-                </a:solidFill>
-                <a:latin typeface="Consolas"/>
-                <a:ea typeface="Consolas"/>
-                <a:cs typeface="Consolas"/>
+              <a:defRPr sz="2325" b="1">
+                <a:solidFill>
+                  <a:srgbClr val="0B6172"/>
+                </a:solidFill>
+                <a:latin typeface="Malgun Gothic"/>
+                <a:ea typeface="Malgun Gothic"/>
+                <a:cs typeface="Malgun Gothic"/>
               </a:defRPr>
             </a:pPr>
             <a:r>
-              <a:rPr sz="2550" b="1">
-                <a:solidFill>
-                  <a:srgbClr val="0B6172"/>
-                </a:solidFill>
-                <a:latin typeface="Consolas"/>
-                <a:ea typeface="Consolas"/>
-                <a:cs typeface="Consolas"/>
+              <a:rPr sz="2325" b="1">
+                <a:solidFill>
+                  <a:srgbClr val="0B6172"/>
+                </a:solidFill>
+                <a:latin typeface="Malgun Gothic"/>
+                <a:ea typeface="Malgun Gothic"/>
+                <a:cs typeface="Malgun Gothic"/>
               </a:rPr>
-              <a:t>crop(image, 1, 3)</a:t>
+              <a:t>의도한 폭과 실제로 포함된 열 수가 달랐다</a:t>
             </a:r>
           </a:p>
         </p:txBody>
       </p:sp>
       <p:sp>
         <p:nvSpPr>
-          <p:cNvPr id="8" name="끝 좌표 3은 포함하지 않는 계약">
+          <p:cNvPr id="8" name="crop(image, 1, 3)">
             <a:extLst xmlns:a="http://schemas.openxmlformats.org/drawingml/2006/main">
               <a:ext uri="{FF2B5EF4-FFF2-40B4-BE49-F238E27FC236}">
-                <a16:creationId xmlns:a16="http://schemas.microsoft.com/office/drawing/2014/main" id="{CC1BCF36-F4B7-4873-83D5-096B006B446B}"/>
+                <a16:creationId xmlns:a16="http://schemas.microsoft.com/office/drawing/2014/main" id="{498981F4-6971-49D3-ACBE-6835F8FD247B}"/>
               </a:ext>
             </a:extLst>
           </p:cNvPr>
@@ -18978,8 +18983,8 @@
         </p:nvSpPr>
         <p:spPr>
           <a:xfrm xmlns:a="http://schemas.openxmlformats.org/drawingml/2006/main">
-            <a:off x="609600" y="2019300"/>
-            <a:ext cx="5905500" cy="333375"/>
+            <a:off x="609600" y="2162175"/>
+            <a:ext cx="5905500" cy="381000"/>
           </a:xfrm>
           <a:prstGeom xmlns:a="http://schemas.openxmlformats.org/drawingml/2006/main" prst="rect">
             <a:avLst/>
@@ -18995,137 +19000,137 @@
           </a:bodyPr>
           <a:lstStyle xmlns:a="http://schemas.openxmlformats.org/drawingml/2006/main">
             <a:defPPr algn="l">
-              <a:defRPr sz="2025" b="0">
-                <a:solidFill>
-                  <a:srgbClr val="17212B"/>
-                </a:solidFill>
-                <a:latin typeface="Malgun Gothic"/>
-                <a:ea typeface="Malgun Gothic"/>
-                <a:cs typeface="Malgun Gothic"/>
+              <a:defRPr sz="2250" b="1">
+                <a:solidFill>
+                  <a:srgbClr val="17212B"/>
+                </a:solidFill>
+                <a:latin typeface="Consolas"/>
+                <a:ea typeface="Consolas"/>
+                <a:cs typeface="Consolas"/>
               </a:defRPr>
             </a:defPPr>
             <a:lvl1pPr algn="l">
-              <a:defRPr sz="2025" b="0">
-                <a:solidFill>
-                  <a:srgbClr val="17212B"/>
-                </a:solidFill>
-                <a:latin typeface="Malgun Gothic"/>
-                <a:ea typeface="Malgun Gothic"/>
-                <a:cs typeface="Malgun Gothic"/>
+              <a:defRPr sz="2250" b="1">
+                <a:solidFill>
+                  <a:srgbClr val="17212B"/>
+                </a:solidFill>
+                <a:latin typeface="Consolas"/>
+                <a:ea typeface="Consolas"/>
+                <a:cs typeface="Consolas"/>
               </a:defRPr>
             </a:lvl1pPr>
             <a:lvl2pPr algn="l">
-              <a:defRPr sz="2025" b="0">
-                <a:solidFill>
-                  <a:srgbClr val="17212B"/>
-                </a:solidFill>
-                <a:latin typeface="Malgun Gothic"/>
-                <a:ea typeface="Malgun Gothic"/>
-                <a:cs typeface="Malgun Gothic"/>
+              <a:defRPr sz="2250" b="1">
+                <a:solidFill>
+                  <a:srgbClr val="17212B"/>
+                </a:solidFill>
+                <a:latin typeface="Consolas"/>
+                <a:ea typeface="Consolas"/>
+                <a:cs typeface="Consolas"/>
               </a:defRPr>
             </a:lvl2pPr>
             <a:lvl3pPr algn="l">
-              <a:defRPr sz="2025" b="0">
-                <a:solidFill>
-                  <a:srgbClr val="17212B"/>
-                </a:solidFill>
-                <a:latin typeface="Malgun Gothic"/>
-                <a:ea typeface="Malgun Gothic"/>
-                <a:cs typeface="Malgun Gothic"/>
+              <a:defRPr sz="2250" b="1">
+                <a:solidFill>
+                  <a:srgbClr val="17212B"/>
+                </a:solidFill>
+                <a:latin typeface="Consolas"/>
+                <a:ea typeface="Consolas"/>
+                <a:cs typeface="Consolas"/>
               </a:defRPr>
             </a:lvl3pPr>
             <a:lvl4pPr algn="l">
-              <a:defRPr sz="2025" b="0">
-                <a:solidFill>
-                  <a:srgbClr val="17212B"/>
-                </a:solidFill>
-                <a:latin typeface="Malgun Gothic"/>
-                <a:ea typeface="Malgun Gothic"/>
-                <a:cs typeface="Malgun Gothic"/>
+              <a:defRPr sz="2250" b="1">
+                <a:solidFill>
+                  <a:srgbClr val="17212B"/>
+                </a:solidFill>
+                <a:latin typeface="Consolas"/>
+                <a:ea typeface="Consolas"/>
+                <a:cs typeface="Consolas"/>
               </a:defRPr>
             </a:lvl4pPr>
             <a:lvl5pPr algn="l">
-              <a:defRPr sz="2025" b="0">
-                <a:solidFill>
-                  <a:srgbClr val="17212B"/>
-                </a:solidFill>
-                <a:latin typeface="Malgun Gothic"/>
-                <a:ea typeface="Malgun Gothic"/>
-                <a:cs typeface="Malgun Gothic"/>
+              <a:defRPr sz="2250" b="1">
+                <a:solidFill>
+                  <a:srgbClr val="17212B"/>
+                </a:solidFill>
+                <a:latin typeface="Consolas"/>
+                <a:ea typeface="Consolas"/>
+                <a:cs typeface="Consolas"/>
               </a:defRPr>
             </a:lvl5pPr>
             <a:lvl6pPr algn="l">
-              <a:defRPr sz="2025" b="0">
-                <a:solidFill>
-                  <a:srgbClr val="17212B"/>
-                </a:solidFill>
-                <a:latin typeface="Malgun Gothic"/>
-                <a:ea typeface="Malgun Gothic"/>
-                <a:cs typeface="Malgun Gothic"/>
+              <a:defRPr sz="2250" b="1">
+                <a:solidFill>
+                  <a:srgbClr val="17212B"/>
+                </a:solidFill>
+                <a:latin typeface="Consolas"/>
+                <a:ea typeface="Consolas"/>
+                <a:cs typeface="Consolas"/>
               </a:defRPr>
             </a:lvl6pPr>
             <a:lvl7pPr algn="l">
-              <a:defRPr sz="2025" b="0">
-                <a:solidFill>
-                  <a:srgbClr val="17212B"/>
-                </a:solidFill>
-                <a:latin typeface="Malgun Gothic"/>
-                <a:ea typeface="Malgun Gothic"/>
-                <a:cs typeface="Malgun Gothic"/>
+              <a:defRPr sz="2250" b="1">
+                <a:solidFill>
+                  <a:srgbClr val="17212B"/>
+                </a:solidFill>
+                <a:latin typeface="Consolas"/>
+                <a:ea typeface="Consolas"/>
+                <a:cs typeface="Consolas"/>
               </a:defRPr>
             </a:lvl7pPr>
             <a:lvl8pPr algn="l">
-              <a:defRPr sz="2025" b="0">
-                <a:solidFill>
-                  <a:srgbClr val="17212B"/>
-                </a:solidFill>
-                <a:latin typeface="Malgun Gothic"/>
-                <a:ea typeface="Malgun Gothic"/>
-                <a:cs typeface="Malgun Gothic"/>
+              <a:defRPr sz="2250" b="1">
+                <a:solidFill>
+                  <a:srgbClr val="17212B"/>
+                </a:solidFill>
+                <a:latin typeface="Consolas"/>
+                <a:ea typeface="Consolas"/>
+                <a:cs typeface="Consolas"/>
               </a:defRPr>
             </a:lvl8pPr>
             <a:lvl9pPr algn="l">
-              <a:defRPr sz="2025" b="0">
-                <a:solidFill>
-                  <a:srgbClr val="17212B"/>
-                </a:solidFill>
-                <a:latin typeface="Malgun Gothic"/>
-                <a:ea typeface="Malgun Gothic"/>
-                <a:cs typeface="Malgun Gothic"/>
+              <a:defRPr sz="2250" b="1">
+                <a:solidFill>
+                  <a:srgbClr val="17212B"/>
+                </a:solidFill>
+                <a:latin typeface="Consolas"/>
+                <a:ea typeface="Consolas"/>
+                <a:cs typeface="Consolas"/>
               </a:defRPr>
             </a:lvl9pPr>
           </a:lstStyle>
           <a:p xmlns:a="http://schemas.openxmlformats.org/drawingml/2006/main">
             <a:pPr algn="l">
-              <a:defRPr sz="2025" b="0">
-                <a:solidFill>
-                  <a:srgbClr val="17212B"/>
-                </a:solidFill>
-                <a:latin typeface="Malgun Gothic"/>
-                <a:ea typeface="Malgun Gothic"/>
-                <a:cs typeface="Malgun Gothic"/>
+              <a:defRPr sz="2250" b="1">
+                <a:solidFill>
+                  <a:srgbClr val="17212B"/>
+                </a:solidFill>
+                <a:latin typeface="Consolas"/>
+                <a:ea typeface="Consolas"/>
+                <a:cs typeface="Consolas"/>
               </a:defRPr>
             </a:pPr>
             <a:r>
-              <a:rPr sz="2025" b="0">
-                <a:solidFill>
-                  <a:srgbClr val="17212B"/>
-                </a:solidFill>
-                <a:latin typeface="Malgun Gothic"/>
-                <a:ea typeface="Malgun Gothic"/>
-                <a:cs typeface="Malgun Gothic"/>
+              <a:rPr sz="2250" b="1">
+                <a:solidFill>
+                  <a:srgbClr val="17212B"/>
+                </a:solidFill>
+                <a:latin typeface="Consolas"/>
+                <a:ea typeface="Consolas"/>
+                <a:cs typeface="Consolas"/>
               </a:rPr>
-              <a:t>끝 좌표 3은 포함하지 않는 계약</a:t>
+              <a:t>crop(image, 1, 3)</a:t>
             </a:r>
           </a:p>
         </p:txBody>
       </p:sp>
       <p:sp>
         <p:nvSpPr>
-          <p:cNvPr id="9" name="입력">
+          <p:cNvPr id="9" name="명세: 끝 좌표 3은 제외">
             <a:extLst xmlns:a="http://schemas.openxmlformats.org/drawingml/2006/main">
               <a:ext uri="{FF2B5EF4-FFF2-40B4-BE49-F238E27FC236}">
-                <a16:creationId xmlns:a16="http://schemas.microsoft.com/office/drawing/2014/main" id="{03B3F7C3-CCC6-4CEF-836C-A17A4DE70EE9}"/>
+                <a16:creationId xmlns:a16="http://schemas.microsoft.com/office/drawing/2014/main" id="{B63E3A7C-57C9-4843-859C-64AE8AE042BC}"/>
               </a:ext>
             </a:extLst>
           </p:cNvPr>
@@ -19136,8 +19141,166 @@
         </p:nvSpPr>
         <p:spPr>
           <a:xfrm xmlns:a="http://schemas.openxmlformats.org/drawingml/2006/main">
-            <a:off x="609600" y="2571750"/>
-            <a:ext cx="685800" cy="381000"/>
+            <a:off x="609600" y="2600325"/>
+            <a:ext cx="5905500" cy="295275"/>
+          </a:xfrm>
+          <a:prstGeom xmlns:a="http://schemas.openxmlformats.org/drawingml/2006/main" prst="rect">
+            <a:avLst/>
+          </a:prstGeom>
+          <a:noFill xmlns:a="http://schemas.openxmlformats.org/drawingml/2006/main"/>
+          <a:ln xmlns:a="http://schemas.openxmlformats.org/drawingml/2006/main" w="0">
+            <a:noFill/>
+          </a:ln>
+        </p:spPr>
+        <p:txBody>
+          <a:bodyPr xmlns:a="http://schemas.openxmlformats.org/drawingml/2006/main" wrap="none" lIns="0" tIns="0" rIns="0" bIns="0" anchor="ctr">
+            <a:noAutofit/>
+          </a:bodyPr>
+          <a:lstStyle xmlns:a="http://schemas.openxmlformats.org/drawingml/2006/main">
+            <a:defPPr algn="l">
+              <a:defRPr sz="1875" b="0">
+                <a:solidFill>
+                  <a:srgbClr val="4D5A68"/>
+                </a:solidFill>
+                <a:latin typeface="Malgun Gothic"/>
+                <a:ea typeface="Malgun Gothic"/>
+                <a:cs typeface="Malgun Gothic"/>
+              </a:defRPr>
+            </a:defPPr>
+            <a:lvl1pPr algn="l">
+              <a:defRPr sz="1875" b="0">
+                <a:solidFill>
+                  <a:srgbClr val="4D5A68"/>
+                </a:solidFill>
+                <a:latin typeface="Malgun Gothic"/>
+                <a:ea typeface="Malgun Gothic"/>
+                <a:cs typeface="Malgun Gothic"/>
+              </a:defRPr>
+            </a:lvl1pPr>
+            <a:lvl2pPr algn="l">
+              <a:defRPr sz="1875" b="0">
+                <a:solidFill>
+                  <a:srgbClr val="4D5A68"/>
+                </a:solidFill>
+                <a:latin typeface="Malgun Gothic"/>
+                <a:ea typeface="Malgun Gothic"/>
+                <a:cs typeface="Malgun Gothic"/>
+              </a:defRPr>
+            </a:lvl2pPr>
+            <a:lvl3pPr algn="l">
+              <a:defRPr sz="1875" b="0">
+                <a:solidFill>
+                  <a:srgbClr val="4D5A68"/>
+                </a:solidFill>
+                <a:latin typeface="Malgun Gothic"/>
+                <a:ea typeface="Malgun Gothic"/>
+                <a:cs typeface="Malgun Gothic"/>
+              </a:defRPr>
+            </a:lvl3pPr>
+            <a:lvl4pPr algn="l">
+              <a:defRPr sz="1875" b="0">
+                <a:solidFill>
+                  <a:srgbClr val="4D5A68"/>
+                </a:solidFill>
+                <a:latin typeface="Malgun Gothic"/>
+                <a:ea typeface="Malgun Gothic"/>
+                <a:cs typeface="Malgun Gothic"/>
+              </a:defRPr>
+            </a:lvl4pPr>
+            <a:lvl5pPr algn="l">
+              <a:defRPr sz="1875" b="0">
+                <a:solidFill>
+                  <a:srgbClr val="4D5A68"/>
+                </a:solidFill>
+                <a:latin typeface="Malgun Gothic"/>
+                <a:ea typeface="Malgun Gothic"/>
+                <a:cs typeface="Malgun Gothic"/>
+              </a:defRPr>
+            </a:lvl5pPr>
+            <a:lvl6pPr algn="l">
+              <a:defRPr sz="1875" b="0">
+                <a:solidFill>
+                  <a:srgbClr val="4D5A68"/>
+                </a:solidFill>
+                <a:latin typeface="Malgun Gothic"/>
+                <a:ea typeface="Malgun Gothic"/>
+                <a:cs typeface="Malgun Gothic"/>
+              </a:defRPr>
+            </a:lvl6pPr>
+            <a:lvl7pPr algn="l">
+              <a:defRPr sz="1875" b="0">
+                <a:solidFill>
+                  <a:srgbClr val="4D5A68"/>
+                </a:solidFill>
+                <a:latin typeface="Malgun Gothic"/>
+                <a:ea typeface="Malgun Gothic"/>
+                <a:cs typeface="Malgun Gothic"/>
+              </a:defRPr>
+            </a:lvl7pPr>
+            <a:lvl8pPr algn="l">
+              <a:defRPr sz="1875" b="0">
+                <a:solidFill>
+                  <a:srgbClr val="4D5A68"/>
+                </a:solidFill>
+                <a:latin typeface="Malgun Gothic"/>
+                <a:ea typeface="Malgun Gothic"/>
+                <a:cs typeface="Malgun Gothic"/>
+              </a:defRPr>
+            </a:lvl8pPr>
+            <a:lvl9pPr algn="l">
+              <a:defRPr sz="1875" b="0">
+                <a:solidFill>
+                  <a:srgbClr val="4D5A68"/>
+                </a:solidFill>
+                <a:latin typeface="Malgun Gothic"/>
+                <a:ea typeface="Malgun Gothic"/>
+                <a:cs typeface="Malgun Gothic"/>
+              </a:defRPr>
+            </a:lvl9pPr>
+          </a:lstStyle>
+          <a:p xmlns:a="http://schemas.openxmlformats.org/drawingml/2006/main">
+            <a:pPr algn="l">
+              <a:defRPr sz="1875" b="0">
+                <a:solidFill>
+                  <a:srgbClr val="4D5A68"/>
+                </a:solidFill>
+                <a:latin typeface="Malgun Gothic"/>
+                <a:ea typeface="Malgun Gothic"/>
+                <a:cs typeface="Malgun Gothic"/>
+              </a:defRPr>
+            </a:pPr>
+            <a:r>
+              <a:rPr sz="1875" b="0">
+                <a:solidFill>
+                  <a:srgbClr val="4D5A68"/>
+                </a:solidFill>
+                <a:latin typeface="Malgun Gothic"/>
+                <a:ea typeface="Malgun Gothic"/>
+                <a:cs typeface="Malgun Gothic"/>
+              </a:rPr>
+              <a:t>명세: 끝 좌표 3은 제외</a:t>
+            </a:r>
+          </a:p>
+        </p:txBody>
+      </p:sp>
+      <p:sp>
+        <p:nvSpPr>
+          <p:cNvPr id="10" name="입력">
+            <a:extLst xmlns:a="http://schemas.openxmlformats.org/drawingml/2006/main">
+              <a:ext uri="{FF2B5EF4-FFF2-40B4-BE49-F238E27FC236}">
+                <a16:creationId xmlns:a16="http://schemas.microsoft.com/office/drawing/2014/main" id="{538C526A-D4A3-4C04-BABE-28263E82BD64}"/>
+              </a:ext>
+            </a:extLst>
+          </p:cNvPr>
+          <p:cNvSpPr>
+            <a:spLocks xmlns:a="http://schemas.openxmlformats.org/drawingml/2006/main" noGrp="1"/>
+          </p:cNvSpPr>
+          <p:nvPr/>
+        </p:nvSpPr>
+        <p:spPr>
+          <a:xfrm xmlns:a="http://schemas.openxmlformats.org/drawingml/2006/main">
+            <a:off x="609600" y="3333750"/>
+            <a:ext cx="685800" cy="333375"/>
           </a:xfrm>
           <a:prstGeom xmlns:a="http://schemas.openxmlformats.org/drawingml/2006/main" prst="rect">
             <a:avLst/>
@@ -19280,10 +19443,10 @@
       </p:sp>
       <p:sp>
         <p:nvSpPr>
-          <p:cNvPr id="10" name="0">
+          <p:cNvPr id="11" name="0">
             <a:extLst xmlns:a="http://schemas.openxmlformats.org/drawingml/2006/main">
               <a:ext uri="{FF2B5EF4-FFF2-40B4-BE49-F238E27FC236}">
-                <a16:creationId xmlns:a16="http://schemas.microsoft.com/office/drawing/2014/main" id="{0A67F74E-EB12-450B-AD27-C5B540E3F06A}"/>
+                <a16:creationId xmlns:a16="http://schemas.microsoft.com/office/drawing/2014/main" id="{E782B33B-AF4C-4A12-8B58-700284B63761}"/>
               </a:ext>
             </a:extLst>
           </p:cNvPr>
@@ -19294,8 +19457,8 @@
         </p:nvSpPr>
         <p:spPr>
           <a:xfrm xmlns:a="http://schemas.openxmlformats.org/drawingml/2006/main">
-            <a:off x="1485900" y="2428875"/>
-            <a:ext cx="628650" cy="266700"/>
+            <a:off x="1485900" y="3009900"/>
+            <a:ext cx="590550" cy="247650"/>
           </a:xfrm>
           <a:prstGeom xmlns:a="http://schemas.openxmlformats.org/drawingml/2006/main" prst="rect">
             <a:avLst/>
@@ -19438,10 +19601,10 @@
       </p:sp>
       <p:sp>
         <p:nvSpPr>
-          <p:cNvPr id="11" name="1">
+          <p:cNvPr id="12" name="1">
             <a:extLst xmlns:a="http://schemas.openxmlformats.org/drawingml/2006/main">
               <a:ext uri="{FF2B5EF4-FFF2-40B4-BE49-F238E27FC236}">
-                <a16:creationId xmlns:a16="http://schemas.microsoft.com/office/drawing/2014/main" id="{BF4A6D2D-96C7-44E5-81C8-6764DD5E9265}"/>
+                <a16:creationId xmlns:a16="http://schemas.microsoft.com/office/drawing/2014/main" id="{3DD12F3D-142B-49D9-9484-126F218CD6CF}"/>
               </a:ext>
             </a:extLst>
           </p:cNvPr>
@@ -19452,8 +19615,8 @@
         </p:nvSpPr>
         <p:spPr>
           <a:xfrm xmlns:a="http://schemas.openxmlformats.org/drawingml/2006/main">
-            <a:off x="2152650" y="2428875"/>
-            <a:ext cx="628650" cy="266700"/>
+            <a:off x="2114550" y="3009900"/>
+            <a:ext cx="590550" cy="247650"/>
           </a:xfrm>
           <a:prstGeom xmlns:a="http://schemas.openxmlformats.org/drawingml/2006/main" prst="rect">
             <a:avLst/>
@@ -19596,10 +19759,10 @@
       </p:sp>
       <p:sp>
         <p:nvSpPr>
-          <p:cNvPr id="12" name="2">
+          <p:cNvPr id="13" name="2">
             <a:extLst xmlns:a="http://schemas.openxmlformats.org/drawingml/2006/main">
               <a:ext uri="{FF2B5EF4-FFF2-40B4-BE49-F238E27FC236}">
-                <a16:creationId xmlns:a16="http://schemas.microsoft.com/office/drawing/2014/main" id="{048CBC2B-2525-4C37-9795-A5F4A05A6DBF}"/>
+                <a16:creationId xmlns:a16="http://schemas.microsoft.com/office/drawing/2014/main" id="{B24B656B-C929-409B-A04B-3BBB68C1F0FC}"/>
               </a:ext>
             </a:extLst>
           </p:cNvPr>
@@ -19610,8 +19773,8 @@
         </p:nvSpPr>
         <p:spPr>
           <a:xfrm xmlns:a="http://schemas.openxmlformats.org/drawingml/2006/main">
-            <a:off x="2819400" y="2428875"/>
-            <a:ext cx="628650" cy="266700"/>
+            <a:off x="2743200" y="3009900"/>
+            <a:ext cx="590550" cy="247650"/>
           </a:xfrm>
           <a:prstGeom xmlns:a="http://schemas.openxmlformats.org/drawingml/2006/main" prst="rect">
             <a:avLst/>
@@ -19754,10 +19917,10 @@
       </p:sp>
       <p:sp>
         <p:nvSpPr>
-          <p:cNvPr id="13" name="3">
+          <p:cNvPr id="14" name="3">
             <a:extLst xmlns:a="http://schemas.openxmlformats.org/drawingml/2006/main">
               <a:ext uri="{FF2B5EF4-FFF2-40B4-BE49-F238E27FC236}">
-                <a16:creationId xmlns:a16="http://schemas.microsoft.com/office/drawing/2014/main" id="{792B2EA8-629D-426F-9EF2-63DF13DC3BA8}"/>
+                <a16:creationId xmlns:a16="http://schemas.microsoft.com/office/drawing/2014/main" id="{2E71482E-6EB2-4D57-8F7F-9DD47D1D1444}"/>
               </a:ext>
             </a:extLst>
           </p:cNvPr>
@@ -19768,8 +19931,8 @@
         </p:nvSpPr>
         <p:spPr>
           <a:xfrm xmlns:a="http://schemas.openxmlformats.org/drawingml/2006/main">
-            <a:off x="3486150" y="2428875"/>
-            <a:ext cx="628650" cy="266700"/>
+            <a:off x="3371850" y="3009900"/>
+            <a:ext cx="590550" cy="247650"/>
           </a:xfrm>
           <a:prstGeom xmlns:a="http://schemas.openxmlformats.org/drawingml/2006/main" prst="rect">
             <a:avLst/>
@@ -19912,10 +20075,10 @@
       </p:sp>
       <p:sp>
         <p:nvSpPr>
-          <p:cNvPr id="14" name="">
+          <p:cNvPr id="15" name="">
             <a:extLst xmlns:a="http://schemas.openxmlformats.org/drawingml/2006/main">
               <a:ext uri="{FF2B5EF4-FFF2-40B4-BE49-F238E27FC236}">
-                <a16:creationId xmlns:a16="http://schemas.microsoft.com/office/drawing/2014/main" id="{8CBDB380-FCC1-42AC-ADD2-859D7D6BBE40}"/>
+                <a16:creationId xmlns:a16="http://schemas.microsoft.com/office/drawing/2014/main" id="{41778DFB-274B-45A9-BA2B-CF14509CD3F1}"/>
               </a:ext>
             </a:extLst>
           </p:cNvPr>
@@ -19926,8 +20089,8 @@
         </p:nvSpPr>
         <p:spPr>
           <a:xfrm xmlns:a="http://schemas.openxmlformats.org/drawingml/2006/main">
-            <a:off x="1485900" y="2771775"/>
-            <a:ext cx="628650" cy="628650"/>
+            <a:off x="1485900" y="3305175"/>
+            <a:ext cx="590550" cy="590550"/>
           </a:xfrm>
           <a:prstGeom xmlns:a="http://schemas.openxmlformats.org/drawingml/2006/main" prst="rect">
             <a:avLst/>
@@ -19945,10 +20108,10 @@
       </p:sp>
       <p:sp>
         <p:nvSpPr>
-          <p:cNvPr id="15" name="1">
+          <p:cNvPr id="16" name="1">
             <a:extLst xmlns:a="http://schemas.openxmlformats.org/drawingml/2006/main">
               <a:ext uri="{FF2B5EF4-FFF2-40B4-BE49-F238E27FC236}">
-                <a16:creationId xmlns:a16="http://schemas.microsoft.com/office/drawing/2014/main" id="{35293D85-252A-41A6-888F-8DC373CA832D}"/>
+                <a16:creationId xmlns:a16="http://schemas.microsoft.com/office/drawing/2014/main" id="{178EE6E5-272E-46F5-A060-57B55F16D7F5}"/>
               </a:ext>
             </a:extLst>
           </p:cNvPr>
@@ -19959,8 +20122,8 @@
         </p:nvSpPr>
         <p:spPr>
           <a:xfrm xmlns:a="http://schemas.openxmlformats.org/drawingml/2006/main">
-            <a:off x="1485900" y="2771775"/>
-            <a:ext cx="628650" cy="628650"/>
+            <a:off x="1485900" y="3305175"/>
+            <a:ext cx="590550" cy="590550"/>
           </a:xfrm>
           <a:prstGeom xmlns:a="http://schemas.openxmlformats.org/drawingml/2006/main" prst="rect">
             <a:avLst/>
@@ -20103,10 +20266,10 @@
       </p:sp>
       <p:sp>
         <p:nvSpPr>
-          <p:cNvPr id="16" name="">
+          <p:cNvPr id="17" name="">
             <a:extLst xmlns:a="http://schemas.openxmlformats.org/drawingml/2006/main">
               <a:ext uri="{FF2B5EF4-FFF2-40B4-BE49-F238E27FC236}">
-                <a16:creationId xmlns:a16="http://schemas.microsoft.com/office/drawing/2014/main" id="{1DAEF92C-5263-4BD1-B6B7-5FA04ADEE672}"/>
+                <a16:creationId xmlns:a16="http://schemas.microsoft.com/office/drawing/2014/main" id="{C5F82D9E-3280-4ACD-A965-013A1419BE35}"/>
               </a:ext>
             </a:extLst>
           </p:cNvPr>
@@ -20117,8 +20280,8 @@
         </p:nvSpPr>
         <p:spPr>
           <a:xfrm xmlns:a="http://schemas.openxmlformats.org/drawingml/2006/main">
-            <a:off x="2152650" y="2771775"/>
-            <a:ext cx="628650" cy="628650"/>
+            <a:off x="2114550" y="3305175"/>
+            <a:ext cx="590550" cy="590550"/>
           </a:xfrm>
           <a:prstGeom xmlns:a="http://schemas.openxmlformats.org/drawingml/2006/main" prst="rect">
             <a:avLst/>
@@ -20136,10 +20299,10 @@
       </p:sp>
       <p:sp>
         <p:nvSpPr>
-          <p:cNvPr id="17" name="2">
+          <p:cNvPr id="18" name="2">
             <a:extLst xmlns:a="http://schemas.openxmlformats.org/drawingml/2006/main">
               <a:ext uri="{FF2B5EF4-FFF2-40B4-BE49-F238E27FC236}">
-                <a16:creationId xmlns:a16="http://schemas.microsoft.com/office/drawing/2014/main" id="{89A4A2F0-94C0-4BB1-B668-83B68AB73439}"/>
+                <a16:creationId xmlns:a16="http://schemas.microsoft.com/office/drawing/2014/main" id="{5C857C82-7B0C-4328-A945-3C8A8DAB0104}"/>
               </a:ext>
             </a:extLst>
           </p:cNvPr>
@@ -20150,8 +20313,8 @@
         </p:nvSpPr>
         <p:spPr>
           <a:xfrm xmlns:a="http://schemas.openxmlformats.org/drawingml/2006/main">
-            <a:off x="2152650" y="2771775"/>
-            <a:ext cx="628650" cy="628650"/>
+            <a:off x="2114550" y="3305175"/>
+            <a:ext cx="590550" cy="590550"/>
           </a:xfrm>
           <a:prstGeom xmlns:a="http://schemas.openxmlformats.org/drawingml/2006/main" prst="rect">
             <a:avLst/>
@@ -20294,10 +20457,10 @@
       </p:sp>
       <p:sp>
         <p:nvSpPr>
-          <p:cNvPr id="18" name="">
+          <p:cNvPr id="19" name="">
             <a:extLst xmlns:a="http://schemas.openxmlformats.org/drawingml/2006/main">
               <a:ext uri="{FF2B5EF4-FFF2-40B4-BE49-F238E27FC236}">
-                <a16:creationId xmlns:a16="http://schemas.microsoft.com/office/drawing/2014/main" id="{43BAEF94-5E27-45B5-9612-59B0A451010A}"/>
+                <a16:creationId xmlns:a16="http://schemas.microsoft.com/office/drawing/2014/main" id="{ADEBB662-A364-469E-AECD-0DD8AB7B43C0}"/>
               </a:ext>
             </a:extLst>
           </p:cNvPr>
@@ -20308,8 +20471,8 @@
         </p:nvSpPr>
         <p:spPr>
           <a:xfrm xmlns:a="http://schemas.openxmlformats.org/drawingml/2006/main">
-            <a:off x="2819400" y="2771775"/>
-            <a:ext cx="628650" cy="628650"/>
+            <a:off x="2743200" y="3305175"/>
+            <a:ext cx="590550" cy="590550"/>
           </a:xfrm>
           <a:prstGeom xmlns:a="http://schemas.openxmlformats.org/drawingml/2006/main" prst="rect">
             <a:avLst/>
@@ -20327,10 +20490,10 @@
       </p:sp>
       <p:sp>
         <p:nvSpPr>
-          <p:cNvPr id="19" name="3">
+          <p:cNvPr id="20" name="3">
             <a:extLst xmlns:a="http://schemas.openxmlformats.org/drawingml/2006/main">
               <a:ext uri="{FF2B5EF4-FFF2-40B4-BE49-F238E27FC236}">
-                <a16:creationId xmlns:a16="http://schemas.microsoft.com/office/drawing/2014/main" id="{2C14D14B-9A9D-4AC5-A85D-55D4D29CBCEF}"/>
+                <a16:creationId xmlns:a16="http://schemas.microsoft.com/office/drawing/2014/main" id="{C5F9DAEF-C969-4C18-B38C-AB8ACF9840FD}"/>
               </a:ext>
             </a:extLst>
           </p:cNvPr>
@@ -20341,8 +20504,8 @@
         </p:nvSpPr>
         <p:spPr>
           <a:xfrm xmlns:a="http://schemas.openxmlformats.org/drawingml/2006/main">
-            <a:off x="2819400" y="2771775"/>
-            <a:ext cx="628650" cy="628650"/>
+            <a:off x="2743200" y="3305175"/>
+            <a:ext cx="590550" cy="590550"/>
           </a:xfrm>
           <a:prstGeom xmlns:a="http://schemas.openxmlformats.org/drawingml/2006/main" prst="rect">
             <a:avLst/>
@@ -20485,10 +20648,10 @@
       </p:sp>
       <p:sp>
         <p:nvSpPr>
-          <p:cNvPr id="20" name="">
+          <p:cNvPr id="21" name="">
             <a:extLst xmlns:a="http://schemas.openxmlformats.org/drawingml/2006/main">
               <a:ext uri="{FF2B5EF4-FFF2-40B4-BE49-F238E27FC236}">
-                <a16:creationId xmlns:a16="http://schemas.microsoft.com/office/drawing/2014/main" id="{A586F3C6-567C-4CD9-AEB2-60778A11E8E3}"/>
+                <a16:creationId xmlns:a16="http://schemas.microsoft.com/office/drawing/2014/main" id="{1E18949E-AD12-4FE1-8484-E7BB1295F7F9}"/>
               </a:ext>
             </a:extLst>
           </p:cNvPr>
@@ -20499,8 +20662,8 @@
         </p:nvSpPr>
         <p:spPr>
           <a:xfrm xmlns:a="http://schemas.openxmlformats.org/drawingml/2006/main">
-            <a:off x="3486150" y="2771775"/>
-            <a:ext cx="628650" cy="628650"/>
+            <a:off x="3371850" y="3305175"/>
+            <a:ext cx="590550" cy="590550"/>
           </a:xfrm>
           <a:prstGeom xmlns:a="http://schemas.openxmlformats.org/drawingml/2006/main" prst="rect">
             <a:avLst/>
@@ -20518,10 +20681,10 @@
       </p:sp>
       <p:sp>
         <p:nvSpPr>
-          <p:cNvPr id="21" name="4">
+          <p:cNvPr id="22" name="4">
             <a:extLst xmlns:a="http://schemas.openxmlformats.org/drawingml/2006/main">
               <a:ext uri="{FF2B5EF4-FFF2-40B4-BE49-F238E27FC236}">
-                <a16:creationId xmlns:a16="http://schemas.microsoft.com/office/drawing/2014/main" id="{FDB193CD-C661-4B24-9246-1BC130050DA3}"/>
+                <a16:creationId xmlns:a16="http://schemas.microsoft.com/office/drawing/2014/main" id="{26D8099E-5E90-4654-8C8C-FFD41B8128FD}"/>
               </a:ext>
             </a:extLst>
           </p:cNvPr>
@@ -20532,8 +20695,8 @@
         </p:nvSpPr>
         <p:spPr>
           <a:xfrm xmlns:a="http://schemas.openxmlformats.org/drawingml/2006/main">
-            <a:off x="3486150" y="2771775"/>
-            <a:ext cx="628650" cy="628650"/>
+            <a:off x="3371850" y="3305175"/>
+            <a:ext cx="590550" cy="590550"/>
           </a:xfrm>
           <a:prstGeom xmlns:a="http://schemas.openxmlformats.org/drawingml/2006/main" prst="rect">
             <a:avLst/>
@@ -20676,10 +20839,10 @@
       </p:sp>
       <p:sp>
         <p:nvSpPr>
-          <p:cNvPr id="22" name="">
+          <p:cNvPr id="23" name="첫 행만 표시">
             <a:extLst xmlns:a="http://schemas.openxmlformats.org/drawingml/2006/main">
               <a:ext uri="{FF2B5EF4-FFF2-40B4-BE49-F238E27FC236}">
-                <a16:creationId xmlns:a16="http://schemas.microsoft.com/office/drawing/2014/main" id="{5F0F5F10-DC83-4D51-9D39-BF0F6A10DFD7}"/>
+                <a16:creationId xmlns:a16="http://schemas.microsoft.com/office/drawing/2014/main" id="{3443AA58-37E2-4BDC-A872-71F5C46EB833}"/>
               </a:ext>
             </a:extLst>
           </p:cNvPr>
@@ -20690,41 +20853,8 @@
         </p:nvSpPr>
         <p:spPr>
           <a:xfrm xmlns:a="http://schemas.openxmlformats.org/drawingml/2006/main">
-            <a:off x="1485900" y="3438525"/>
-            <a:ext cx="628650" cy="628650"/>
-          </a:xfrm>
-          <a:prstGeom xmlns:a="http://schemas.openxmlformats.org/drawingml/2006/main" prst="rect">
-            <a:avLst/>
-          </a:prstGeom>
-          <a:solidFill xmlns:a="http://schemas.openxmlformats.org/drawingml/2006/main">
-            <a:srgbClr val="FFFFFF"/>
-          </a:solidFill>
-          <a:ln xmlns:a="http://schemas.openxmlformats.org/drawingml/2006/main" w="9525">
-            <a:solidFill>
-              <a:srgbClr val="C7D0DA"/>
-            </a:solidFill>
-            <a:prstDash val="solid"/>
-          </a:ln>
-        </p:spPr>
-      </p:sp>
-      <p:sp>
-        <p:nvSpPr>
-          <p:cNvPr id="23" name="5">
-            <a:extLst xmlns:a="http://schemas.openxmlformats.org/drawingml/2006/main">
-              <a:ext uri="{FF2B5EF4-FFF2-40B4-BE49-F238E27FC236}">
-                <a16:creationId xmlns:a16="http://schemas.microsoft.com/office/drawing/2014/main" id="{016F001A-893E-4452-A970-5EB7041CA1F7}"/>
-              </a:ext>
-            </a:extLst>
-          </p:cNvPr>
-          <p:cNvSpPr>
-            <a:spLocks xmlns:a="http://schemas.openxmlformats.org/drawingml/2006/main" noGrp="1"/>
-          </p:cNvSpPr>
-          <p:nvPr/>
-        </p:nvSpPr>
-        <p:spPr>
-          <a:xfrm xmlns:a="http://schemas.openxmlformats.org/drawingml/2006/main">
-            <a:off x="1485900" y="3438525"/>
-            <a:ext cx="628650" cy="628650"/>
+            <a:off x="4267200" y="3429000"/>
+            <a:ext cx="2095500" cy="285750"/>
           </a:xfrm>
           <a:prstGeom xmlns:a="http://schemas.openxmlformats.org/drawingml/2006/main" prst="rect">
             <a:avLst/>
@@ -20739,100 +20869,100 @@
             <a:noAutofit/>
           </a:bodyPr>
           <a:lstStyle xmlns:a="http://schemas.openxmlformats.org/drawingml/2006/main">
-            <a:defPPr algn="ctr">
-              <a:defRPr sz="2175" b="1">
-                <a:solidFill>
-                  <a:srgbClr val="17212B"/>
+            <a:defPPr algn="l">
+              <a:defRPr sz="1650" b="0">
+                <a:solidFill>
+                  <a:srgbClr val="4D5A68"/>
                 </a:solidFill>
                 <a:latin typeface="Malgun Gothic"/>
                 <a:ea typeface="Malgun Gothic"/>
                 <a:cs typeface="Malgun Gothic"/>
               </a:defRPr>
             </a:defPPr>
-            <a:lvl1pPr algn="ctr">
-              <a:defRPr sz="2175" b="1">
-                <a:solidFill>
-                  <a:srgbClr val="17212B"/>
+            <a:lvl1pPr algn="l">
+              <a:defRPr sz="1650" b="0">
+                <a:solidFill>
+                  <a:srgbClr val="4D5A68"/>
                 </a:solidFill>
                 <a:latin typeface="Malgun Gothic"/>
                 <a:ea typeface="Malgun Gothic"/>
                 <a:cs typeface="Malgun Gothic"/>
               </a:defRPr>
             </a:lvl1pPr>
-            <a:lvl2pPr algn="ctr">
-              <a:defRPr sz="2175" b="1">
-                <a:solidFill>
-                  <a:srgbClr val="17212B"/>
+            <a:lvl2pPr algn="l">
+              <a:defRPr sz="1650" b="0">
+                <a:solidFill>
+                  <a:srgbClr val="4D5A68"/>
                 </a:solidFill>
                 <a:latin typeface="Malgun Gothic"/>
                 <a:ea typeface="Malgun Gothic"/>
                 <a:cs typeface="Malgun Gothic"/>
               </a:defRPr>
             </a:lvl2pPr>
-            <a:lvl3pPr algn="ctr">
-              <a:defRPr sz="2175" b="1">
-                <a:solidFill>
-                  <a:srgbClr val="17212B"/>
+            <a:lvl3pPr algn="l">
+              <a:defRPr sz="1650" b="0">
+                <a:solidFill>
+                  <a:srgbClr val="4D5A68"/>
                 </a:solidFill>
                 <a:latin typeface="Malgun Gothic"/>
                 <a:ea typeface="Malgun Gothic"/>
                 <a:cs typeface="Malgun Gothic"/>
               </a:defRPr>
             </a:lvl3pPr>
-            <a:lvl4pPr algn="ctr">
-              <a:defRPr sz="2175" b="1">
-                <a:solidFill>
-                  <a:srgbClr val="17212B"/>
+            <a:lvl4pPr algn="l">
+              <a:defRPr sz="1650" b="0">
+                <a:solidFill>
+                  <a:srgbClr val="4D5A68"/>
                 </a:solidFill>
                 <a:latin typeface="Malgun Gothic"/>
                 <a:ea typeface="Malgun Gothic"/>
                 <a:cs typeface="Malgun Gothic"/>
               </a:defRPr>
             </a:lvl4pPr>
-            <a:lvl5pPr algn="ctr">
-              <a:defRPr sz="2175" b="1">
-                <a:solidFill>
-                  <a:srgbClr val="17212B"/>
+            <a:lvl5pPr algn="l">
+              <a:defRPr sz="1650" b="0">
+                <a:solidFill>
+                  <a:srgbClr val="4D5A68"/>
                 </a:solidFill>
                 <a:latin typeface="Malgun Gothic"/>
                 <a:ea typeface="Malgun Gothic"/>
                 <a:cs typeface="Malgun Gothic"/>
               </a:defRPr>
             </a:lvl5pPr>
-            <a:lvl6pPr algn="ctr">
-              <a:defRPr sz="2175" b="1">
-                <a:solidFill>
-                  <a:srgbClr val="17212B"/>
+            <a:lvl6pPr algn="l">
+              <a:defRPr sz="1650" b="0">
+                <a:solidFill>
+                  <a:srgbClr val="4D5A68"/>
                 </a:solidFill>
                 <a:latin typeface="Malgun Gothic"/>
                 <a:ea typeface="Malgun Gothic"/>
                 <a:cs typeface="Malgun Gothic"/>
               </a:defRPr>
             </a:lvl6pPr>
-            <a:lvl7pPr algn="ctr">
-              <a:defRPr sz="2175" b="1">
-                <a:solidFill>
-                  <a:srgbClr val="17212B"/>
+            <a:lvl7pPr algn="l">
+              <a:defRPr sz="1650" b="0">
+                <a:solidFill>
+                  <a:srgbClr val="4D5A68"/>
                 </a:solidFill>
                 <a:latin typeface="Malgun Gothic"/>
                 <a:ea typeface="Malgun Gothic"/>
                 <a:cs typeface="Malgun Gothic"/>
               </a:defRPr>
             </a:lvl7pPr>
-            <a:lvl8pPr algn="ctr">
-              <a:defRPr sz="2175" b="1">
-                <a:solidFill>
-                  <a:srgbClr val="17212B"/>
+            <a:lvl8pPr algn="l">
+              <a:defRPr sz="1650" b="0">
+                <a:solidFill>
+                  <a:srgbClr val="4D5A68"/>
                 </a:solidFill>
                 <a:latin typeface="Malgun Gothic"/>
                 <a:ea typeface="Malgun Gothic"/>
                 <a:cs typeface="Malgun Gothic"/>
               </a:defRPr>
             </a:lvl8pPr>
-            <a:lvl9pPr algn="ctr">
-              <a:defRPr sz="2175" b="1">
-                <a:solidFill>
-                  <a:srgbClr val="17212B"/>
+            <a:lvl9pPr algn="l">
+              <a:defRPr sz="1650" b="0">
+                <a:solidFill>
+                  <a:srgbClr val="4D5A68"/>
                 </a:solidFill>
                 <a:latin typeface="Malgun Gothic"/>
                 <a:ea typeface="Malgun Gothic"/>
@@ -20841,10 +20971,10 @@
             </a:lvl9pPr>
           </a:lstStyle>
           <a:p xmlns:a="http://schemas.openxmlformats.org/drawingml/2006/main">
-            <a:pPr algn="ctr">
-              <a:defRPr sz="2175" b="1">
-                <a:solidFill>
-                  <a:srgbClr val="17212B"/>
+            <a:pPr algn="l">
+              <a:defRPr sz="1650" b="0">
+                <a:solidFill>
+                  <a:srgbClr val="4D5A68"/>
                 </a:solidFill>
                 <a:latin typeface="Malgun Gothic"/>
                 <a:ea typeface="Malgun Gothic"/>
@@ -20852,25 +20982,25 @@
               </a:defRPr>
             </a:pPr>
             <a:r>
-              <a:rPr sz="2175" b="1">
-                <a:solidFill>
-                  <a:srgbClr val="17212B"/>
+              <a:rPr sz="1650" b="0">
+                <a:solidFill>
+                  <a:srgbClr val="4D5A68"/>
                 </a:solidFill>
                 <a:latin typeface="Malgun Gothic"/>
                 <a:ea typeface="Malgun Gothic"/>
                 <a:cs typeface="Malgun Gothic"/>
               </a:rPr>
-              <a:t>5</a:t>
+              <a:t>첫 행만 표시</a:t>
             </a:r>
           </a:p>
         </p:txBody>
       </p:sp>
       <p:sp>
         <p:nvSpPr>
-          <p:cNvPr id="24" name="">
+          <p:cNvPr id="24" name="명세 · 폭 2">
             <a:extLst xmlns:a="http://schemas.openxmlformats.org/drawingml/2006/main">
               <a:ext uri="{FF2B5EF4-FFF2-40B4-BE49-F238E27FC236}">
-                <a16:creationId xmlns:a16="http://schemas.microsoft.com/office/drawing/2014/main" id="{308D3D86-BED4-486E-9883-3DB9E1E7941A}"/>
+                <a16:creationId xmlns:a16="http://schemas.microsoft.com/office/drawing/2014/main" id="{2C2C4B3C-2C22-4BAD-852D-00BB73C625AF}"/>
               </a:ext>
             </a:extLst>
           </p:cNvPr>
@@ -20881,8 +21011,324 @@
         </p:nvSpPr>
         <p:spPr>
           <a:xfrm xmlns:a="http://schemas.openxmlformats.org/drawingml/2006/main">
-            <a:off x="2152650" y="3438525"/>
-            <a:ext cx="628650" cy="628650"/>
+            <a:off x="609600" y="4143375"/>
+            <a:ext cx="2667000" cy="352425"/>
+          </a:xfrm>
+          <a:prstGeom xmlns:a="http://schemas.openxmlformats.org/drawingml/2006/main" prst="rect">
+            <a:avLst/>
+          </a:prstGeom>
+          <a:noFill xmlns:a="http://schemas.openxmlformats.org/drawingml/2006/main"/>
+          <a:ln xmlns:a="http://schemas.openxmlformats.org/drawingml/2006/main" w="0">
+            <a:noFill/>
+          </a:ln>
+        </p:spPr>
+        <p:txBody>
+          <a:bodyPr xmlns:a="http://schemas.openxmlformats.org/drawingml/2006/main" wrap="none" lIns="0" tIns="0" rIns="0" bIns="0" anchor="ctr">
+            <a:noAutofit/>
+          </a:bodyPr>
+          <a:lstStyle xmlns:a="http://schemas.openxmlformats.org/drawingml/2006/main">
+            <a:defPPr algn="l">
+              <a:defRPr sz="2100" b="1">
+                <a:solidFill>
+                  <a:srgbClr val="0B6172"/>
+                </a:solidFill>
+                <a:latin typeface="Malgun Gothic"/>
+                <a:ea typeface="Malgun Gothic"/>
+                <a:cs typeface="Malgun Gothic"/>
+              </a:defRPr>
+            </a:defPPr>
+            <a:lvl1pPr algn="l">
+              <a:defRPr sz="2100" b="1">
+                <a:solidFill>
+                  <a:srgbClr val="0B6172"/>
+                </a:solidFill>
+                <a:latin typeface="Malgun Gothic"/>
+                <a:ea typeface="Malgun Gothic"/>
+                <a:cs typeface="Malgun Gothic"/>
+              </a:defRPr>
+            </a:lvl1pPr>
+            <a:lvl2pPr algn="l">
+              <a:defRPr sz="2100" b="1">
+                <a:solidFill>
+                  <a:srgbClr val="0B6172"/>
+                </a:solidFill>
+                <a:latin typeface="Malgun Gothic"/>
+                <a:ea typeface="Malgun Gothic"/>
+                <a:cs typeface="Malgun Gothic"/>
+              </a:defRPr>
+            </a:lvl2pPr>
+            <a:lvl3pPr algn="l">
+              <a:defRPr sz="2100" b="1">
+                <a:solidFill>
+                  <a:srgbClr val="0B6172"/>
+                </a:solidFill>
+                <a:latin typeface="Malgun Gothic"/>
+                <a:ea typeface="Malgun Gothic"/>
+                <a:cs typeface="Malgun Gothic"/>
+              </a:defRPr>
+            </a:lvl3pPr>
+            <a:lvl4pPr algn="l">
+              <a:defRPr sz="2100" b="1">
+                <a:solidFill>
+                  <a:srgbClr val="0B6172"/>
+                </a:solidFill>
+                <a:latin typeface="Malgun Gothic"/>
+                <a:ea typeface="Malgun Gothic"/>
+                <a:cs typeface="Malgun Gothic"/>
+              </a:defRPr>
+            </a:lvl4pPr>
+            <a:lvl5pPr algn="l">
+              <a:defRPr sz="2100" b="1">
+                <a:solidFill>
+                  <a:srgbClr val="0B6172"/>
+                </a:solidFill>
+                <a:latin typeface="Malgun Gothic"/>
+                <a:ea typeface="Malgun Gothic"/>
+                <a:cs typeface="Malgun Gothic"/>
+              </a:defRPr>
+            </a:lvl5pPr>
+            <a:lvl6pPr algn="l">
+              <a:defRPr sz="2100" b="1">
+                <a:solidFill>
+                  <a:srgbClr val="0B6172"/>
+                </a:solidFill>
+                <a:latin typeface="Malgun Gothic"/>
+                <a:ea typeface="Malgun Gothic"/>
+                <a:cs typeface="Malgun Gothic"/>
+              </a:defRPr>
+            </a:lvl6pPr>
+            <a:lvl7pPr algn="l">
+              <a:defRPr sz="2100" b="1">
+                <a:solidFill>
+                  <a:srgbClr val="0B6172"/>
+                </a:solidFill>
+                <a:latin typeface="Malgun Gothic"/>
+                <a:ea typeface="Malgun Gothic"/>
+                <a:cs typeface="Malgun Gothic"/>
+              </a:defRPr>
+            </a:lvl7pPr>
+            <a:lvl8pPr algn="l">
+              <a:defRPr sz="2100" b="1">
+                <a:solidFill>
+                  <a:srgbClr val="0B6172"/>
+                </a:solidFill>
+                <a:latin typeface="Malgun Gothic"/>
+                <a:ea typeface="Malgun Gothic"/>
+                <a:cs typeface="Malgun Gothic"/>
+              </a:defRPr>
+            </a:lvl8pPr>
+            <a:lvl9pPr algn="l">
+              <a:defRPr sz="2100" b="1">
+                <a:solidFill>
+                  <a:srgbClr val="0B6172"/>
+                </a:solidFill>
+                <a:latin typeface="Malgun Gothic"/>
+                <a:ea typeface="Malgun Gothic"/>
+                <a:cs typeface="Malgun Gothic"/>
+              </a:defRPr>
+            </a:lvl9pPr>
+          </a:lstStyle>
+          <a:p xmlns:a="http://schemas.openxmlformats.org/drawingml/2006/main">
+            <a:pPr algn="l">
+              <a:defRPr sz="2100" b="1">
+                <a:solidFill>
+                  <a:srgbClr val="0B6172"/>
+                </a:solidFill>
+                <a:latin typeface="Malgun Gothic"/>
+                <a:ea typeface="Malgun Gothic"/>
+                <a:cs typeface="Malgun Gothic"/>
+              </a:defRPr>
+            </a:pPr>
+            <a:r>
+              <a:rPr sz="2100" b="1">
+                <a:solidFill>
+                  <a:srgbClr val="0B6172"/>
+                </a:solidFill>
+                <a:latin typeface="Malgun Gothic"/>
+                <a:ea typeface="Malgun Gothic"/>
+                <a:cs typeface="Malgun Gothic"/>
+              </a:rPr>
+              <a:t>명세 · 폭 2</a:t>
+            </a:r>
+          </a:p>
+        </p:txBody>
+      </p:sp>
+      <p:sp>
+        <p:nvSpPr>
+          <p:cNvPr id="25" name="구현 · 폭 3">
+            <a:extLst xmlns:a="http://schemas.openxmlformats.org/drawingml/2006/main">
+              <a:ext uri="{FF2B5EF4-FFF2-40B4-BE49-F238E27FC236}">
+                <a16:creationId xmlns:a16="http://schemas.microsoft.com/office/drawing/2014/main" id="{4EB5F597-62C6-48F6-8AED-DB075F1820DD}"/>
+              </a:ext>
+            </a:extLst>
+          </p:cNvPr>
+          <p:cNvSpPr>
+            <a:spLocks xmlns:a="http://schemas.openxmlformats.org/drawingml/2006/main" noGrp="1"/>
+          </p:cNvSpPr>
+          <p:nvPr/>
+        </p:nvSpPr>
+        <p:spPr>
+          <a:xfrm xmlns:a="http://schemas.openxmlformats.org/drawingml/2006/main">
+            <a:off x="3714750" y="4143375"/>
+            <a:ext cx="2800350" cy="352425"/>
+          </a:xfrm>
+          <a:prstGeom xmlns:a="http://schemas.openxmlformats.org/drawingml/2006/main" prst="rect">
+            <a:avLst/>
+          </a:prstGeom>
+          <a:noFill xmlns:a="http://schemas.openxmlformats.org/drawingml/2006/main"/>
+          <a:ln xmlns:a="http://schemas.openxmlformats.org/drawingml/2006/main" w="0">
+            <a:noFill/>
+          </a:ln>
+        </p:spPr>
+        <p:txBody>
+          <a:bodyPr xmlns:a="http://schemas.openxmlformats.org/drawingml/2006/main" wrap="none" lIns="0" tIns="0" rIns="0" bIns="0" anchor="ctr">
+            <a:noAutofit/>
+          </a:bodyPr>
+          <a:lstStyle xmlns:a="http://schemas.openxmlformats.org/drawingml/2006/main">
+            <a:defPPr algn="l">
+              <a:defRPr sz="2100" b="1">
+                <a:solidFill>
+                  <a:srgbClr val="B42318"/>
+                </a:solidFill>
+                <a:latin typeface="Malgun Gothic"/>
+                <a:ea typeface="Malgun Gothic"/>
+                <a:cs typeface="Malgun Gothic"/>
+              </a:defRPr>
+            </a:defPPr>
+            <a:lvl1pPr algn="l">
+              <a:defRPr sz="2100" b="1">
+                <a:solidFill>
+                  <a:srgbClr val="B42318"/>
+                </a:solidFill>
+                <a:latin typeface="Malgun Gothic"/>
+                <a:ea typeface="Malgun Gothic"/>
+                <a:cs typeface="Malgun Gothic"/>
+              </a:defRPr>
+            </a:lvl1pPr>
+            <a:lvl2pPr algn="l">
+              <a:defRPr sz="2100" b="1">
+                <a:solidFill>
+                  <a:srgbClr val="B42318"/>
+                </a:solidFill>
+                <a:latin typeface="Malgun Gothic"/>
+                <a:ea typeface="Malgun Gothic"/>
+                <a:cs typeface="Malgun Gothic"/>
+              </a:defRPr>
+            </a:lvl2pPr>
+            <a:lvl3pPr algn="l">
+              <a:defRPr sz="2100" b="1">
+                <a:solidFill>
+                  <a:srgbClr val="B42318"/>
+                </a:solidFill>
+                <a:latin typeface="Malgun Gothic"/>
+                <a:ea typeface="Malgun Gothic"/>
+                <a:cs typeface="Malgun Gothic"/>
+              </a:defRPr>
+            </a:lvl3pPr>
+            <a:lvl4pPr algn="l">
+              <a:defRPr sz="2100" b="1">
+                <a:solidFill>
+                  <a:srgbClr val="B42318"/>
+                </a:solidFill>
+                <a:latin typeface="Malgun Gothic"/>
+                <a:ea typeface="Malgun Gothic"/>
+                <a:cs typeface="Malgun Gothic"/>
+              </a:defRPr>
+            </a:lvl4pPr>
+            <a:lvl5pPr algn="l">
+              <a:defRPr sz="2100" b="1">
+                <a:solidFill>
+                  <a:srgbClr val="B42318"/>
+                </a:solidFill>
+                <a:latin typeface="Malgun Gothic"/>
+                <a:ea typeface="Malgun Gothic"/>
+                <a:cs typeface="Malgun Gothic"/>
+              </a:defRPr>
+            </a:lvl5pPr>
+            <a:lvl6pPr algn="l">
+              <a:defRPr sz="2100" b="1">
+                <a:solidFill>
+                  <a:srgbClr val="B42318"/>
+                </a:solidFill>
+                <a:latin typeface="Malgun Gothic"/>
+                <a:ea typeface="Malgun Gothic"/>
+                <a:cs typeface="Malgun Gothic"/>
+              </a:defRPr>
+            </a:lvl6pPr>
+            <a:lvl7pPr algn="l">
+              <a:defRPr sz="2100" b="1">
+                <a:solidFill>
+                  <a:srgbClr val="B42318"/>
+                </a:solidFill>
+                <a:latin typeface="Malgun Gothic"/>
+                <a:ea typeface="Malgun Gothic"/>
+                <a:cs typeface="Malgun Gothic"/>
+              </a:defRPr>
+            </a:lvl7pPr>
+            <a:lvl8pPr algn="l">
+              <a:defRPr sz="2100" b="1">
+                <a:solidFill>
+                  <a:srgbClr val="B42318"/>
+                </a:solidFill>
+                <a:latin typeface="Malgun Gothic"/>
+                <a:ea typeface="Malgun Gothic"/>
+                <a:cs typeface="Malgun Gothic"/>
+              </a:defRPr>
+            </a:lvl8pPr>
+            <a:lvl9pPr algn="l">
+              <a:defRPr sz="2100" b="1">
+                <a:solidFill>
+                  <a:srgbClr val="B42318"/>
+                </a:solidFill>
+                <a:latin typeface="Malgun Gothic"/>
+                <a:ea typeface="Malgun Gothic"/>
+                <a:cs typeface="Malgun Gothic"/>
+              </a:defRPr>
+            </a:lvl9pPr>
+          </a:lstStyle>
+          <a:p xmlns:a="http://schemas.openxmlformats.org/drawingml/2006/main">
+            <a:pPr algn="l">
+              <a:defRPr sz="2100" b="1">
+                <a:solidFill>
+                  <a:srgbClr val="B42318"/>
+                </a:solidFill>
+                <a:latin typeface="Malgun Gothic"/>
+                <a:ea typeface="Malgun Gothic"/>
+                <a:cs typeface="Malgun Gothic"/>
+              </a:defRPr>
+            </a:pPr>
+            <a:r>
+              <a:rPr sz="2100" b="1">
+                <a:solidFill>
+                  <a:srgbClr val="B42318"/>
+                </a:solidFill>
+                <a:latin typeface="Malgun Gothic"/>
+                <a:ea typeface="Malgun Gothic"/>
+                <a:cs typeface="Malgun Gothic"/>
+              </a:rPr>
+              <a:t>구현 · 폭 3</a:t>
+            </a:r>
+          </a:p>
+        </p:txBody>
+      </p:sp>
+      <p:sp>
+        <p:nvSpPr>
+          <p:cNvPr id="26" name="">
+            <a:extLst xmlns:a="http://schemas.openxmlformats.org/drawingml/2006/main">
+              <a:ext uri="{FF2B5EF4-FFF2-40B4-BE49-F238E27FC236}">
+                <a16:creationId xmlns:a16="http://schemas.microsoft.com/office/drawing/2014/main" id="{AC620F3F-1B1D-45BA-9880-C871E874BBCC}"/>
+              </a:ext>
+            </a:extLst>
+          </p:cNvPr>
+          <p:cNvSpPr>
+            <a:spLocks xmlns:a="http://schemas.openxmlformats.org/drawingml/2006/main" noGrp="1"/>
+          </p:cNvSpPr>
+          <p:nvPr/>
+        </p:nvSpPr>
+        <p:spPr>
+          <a:xfrm xmlns:a="http://schemas.openxmlformats.org/drawingml/2006/main">
+            <a:off x="609600" y="4591050"/>
+            <a:ext cx="571500" cy="571500"/>
           </a:xfrm>
           <a:prstGeom xmlns:a="http://schemas.openxmlformats.org/drawingml/2006/main" prst="rect">
             <a:avLst/>
@@ -20900,10 +21346,10 @@
       </p:sp>
       <p:sp>
         <p:nvSpPr>
-          <p:cNvPr id="25" name="6">
+          <p:cNvPr id="27" name="2">
             <a:extLst xmlns:a="http://schemas.openxmlformats.org/drawingml/2006/main">
               <a:ext uri="{FF2B5EF4-FFF2-40B4-BE49-F238E27FC236}">
-                <a16:creationId xmlns:a16="http://schemas.microsoft.com/office/drawing/2014/main" id="{7BBC6B8C-BCB0-41EB-AC0F-5DF0A42BA353}"/>
+                <a16:creationId xmlns:a16="http://schemas.microsoft.com/office/drawing/2014/main" id="{4AC235C5-7E3B-4D2A-9A3D-9E9400D5CDA6}"/>
               </a:ext>
             </a:extLst>
           </p:cNvPr>
@@ -20914,8 +21360,8 @@
         </p:nvSpPr>
         <p:spPr>
           <a:xfrm xmlns:a="http://schemas.openxmlformats.org/drawingml/2006/main">
-            <a:off x="2152650" y="3438525"/>
-            <a:ext cx="628650" cy="628650"/>
+            <a:off x="609600" y="4591050"/>
+            <a:ext cx="571500" cy="571500"/>
           </a:xfrm>
           <a:prstGeom xmlns:a="http://schemas.openxmlformats.org/drawingml/2006/main" prst="rect">
             <a:avLst/>
@@ -21051,17 +21497,17 @@
                 <a:ea typeface="Malgun Gothic"/>
                 <a:cs typeface="Malgun Gothic"/>
               </a:rPr>
-              <a:t>6</a:t>
+              <a:t>2</a:t>
             </a:r>
           </a:p>
         </p:txBody>
       </p:sp>
       <p:sp>
         <p:nvSpPr>
-          <p:cNvPr id="26" name="">
+          <p:cNvPr id="28" name="">
             <a:extLst xmlns:a="http://schemas.openxmlformats.org/drawingml/2006/main">
               <a:ext uri="{FF2B5EF4-FFF2-40B4-BE49-F238E27FC236}">
-                <a16:creationId xmlns:a16="http://schemas.microsoft.com/office/drawing/2014/main" id="{3AC9F9C7-738D-4C21-B757-0E43683E800A}"/>
+                <a16:creationId xmlns:a16="http://schemas.microsoft.com/office/drawing/2014/main" id="{2CCDEB61-7809-4971-9574-7D3805608225}"/>
               </a:ext>
             </a:extLst>
           </p:cNvPr>
@@ -21072,8 +21518,8 @@
         </p:nvSpPr>
         <p:spPr>
           <a:xfrm xmlns:a="http://schemas.openxmlformats.org/drawingml/2006/main">
-            <a:off x="2819400" y="3438525"/>
-            <a:ext cx="628650" cy="628650"/>
+            <a:off x="1219200" y="4591050"/>
+            <a:ext cx="571500" cy="571500"/>
           </a:xfrm>
           <a:prstGeom xmlns:a="http://schemas.openxmlformats.org/drawingml/2006/main" prst="rect">
             <a:avLst/>
@@ -21091,10 +21537,10 @@
       </p:sp>
       <p:sp>
         <p:nvSpPr>
-          <p:cNvPr id="27" name="7">
+          <p:cNvPr id="29" name="3">
             <a:extLst xmlns:a="http://schemas.openxmlformats.org/drawingml/2006/main">
               <a:ext uri="{FF2B5EF4-FFF2-40B4-BE49-F238E27FC236}">
-                <a16:creationId xmlns:a16="http://schemas.microsoft.com/office/drawing/2014/main" id="{C3A66F6F-0974-4D01-8D0A-8CB6937E7B6B}"/>
+                <a16:creationId xmlns:a16="http://schemas.microsoft.com/office/drawing/2014/main" id="{F99720E5-0C9A-49F4-8294-CA423E65FEFE}"/>
               </a:ext>
             </a:extLst>
           </p:cNvPr>
@@ -21105,8 +21551,8 @@
         </p:nvSpPr>
         <p:spPr>
           <a:xfrm xmlns:a="http://schemas.openxmlformats.org/drawingml/2006/main">
-            <a:off x="2819400" y="3438525"/>
-            <a:ext cx="628650" cy="628650"/>
+            <a:off x="1219200" y="4591050"/>
+            <a:ext cx="571500" cy="571500"/>
           </a:xfrm>
           <a:prstGeom xmlns:a="http://schemas.openxmlformats.org/drawingml/2006/main" prst="rect">
             <a:avLst/>
@@ -21242,17 +21688,17 @@
                 <a:ea typeface="Malgun Gothic"/>
                 <a:cs typeface="Malgun Gothic"/>
               </a:rPr>
-              <a:t>7</a:t>
+              <a:t>3</a:t>
             </a:r>
           </a:p>
         </p:txBody>
       </p:sp>
       <p:sp>
         <p:nvSpPr>
-          <p:cNvPr id="28" name="">
+          <p:cNvPr id="30" name="">
             <a:extLst xmlns:a="http://schemas.openxmlformats.org/drawingml/2006/main">
               <a:ext uri="{FF2B5EF4-FFF2-40B4-BE49-F238E27FC236}">
-                <a16:creationId xmlns:a16="http://schemas.microsoft.com/office/drawing/2014/main" id="{3430C3A9-1ED8-47B2-8791-9B57F8395A94}"/>
+                <a16:creationId xmlns:a16="http://schemas.microsoft.com/office/drawing/2014/main" id="{311A3FC0-841D-4E8F-9089-2AF50A4742A2}"/>
               </a:ext>
             </a:extLst>
           </p:cNvPr>
@@ -21263,515 +21709,8 @@
         </p:nvSpPr>
         <p:spPr>
           <a:xfrm xmlns:a="http://schemas.openxmlformats.org/drawingml/2006/main">
-            <a:off x="3486150" y="3438525"/>
-            <a:ext cx="628650" cy="628650"/>
-          </a:xfrm>
-          <a:prstGeom xmlns:a="http://schemas.openxmlformats.org/drawingml/2006/main" prst="rect">
-            <a:avLst/>
-          </a:prstGeom>
-          <a:solidFill xmlns:a="http://schemas.openxmlformats.org/drawingml/2006/main">
-            <a:srgbClr val="FFFFFF"/>
-          </a:solidFill>
-          <a:ln xmlns:a="http://schemas.openxmlformats.org/drawingml/2006/main" w="9525">
-            <a:solidFill>
-              <a:srgbClr val="C7D0DA"/>
-            </a:solidFill>
-            <a:prstDash val="solid"/>
-          </a:ln>
-        </p:spPr>
-      </p:sp>
-      <p:sp>
-        <p:nvSpPr>
-          <p:cNvPr id="29" name="8">
-            <a:extLst xmlns:a="http://schemas.openxmlformats.org/drawingml/2006/main">
-              <a:ext uri="{FF2B5EF4-FFF2-40B4-BE49-F238E27FC236}">
-                <a16:creationId xmlns:a16="http://schemas.microsoft.com/office/drawing/2014/main" id="{5C3DCE8B-F5E7-41D5-B627-E944C466855D}"/>
-              </a:ext>
-            </a:extLst>
-          </p:cNvPr>
-          <p:cNvSpPr>
-            <a:spLocks xmlns:a="http://schemas.openxmlformats.org/drawingml/2006/main" noGrp="1"/>
-          </p:cNvSpPr>
-          <p:nvPr/>
-        </p:nvSpPr>
-        <p:spPr>
-          <a:xfrm xmlns:a="http://schemas.openxmlformats.org/drawingml/2006/main">
-            <a:off x="3486150" y="3438525"/>
-            <a:ext cx="628650" cy="628650"/>
-          </a:xfrm>
-          <a:prstGeom xmlns:a="http://schemas.openxmlformats.org/drawingml/2006/main" prst="rect">
-            <a:avLst/>
-          </a:prstGeom>
-          <a:noFill xmlns:a="http://schemas.openxmlformats.org/drawingml/2006/main"/>
-          <a:ln xmlns:a="http://schemas.openxmlformats.org/drawingml/2006/main" w="0">
-            <a:noFill/>
-          </a:ln>
-        </p:spPr>
-        <p:txBody>
-          <a:bodyPr xmlns:a="http://schemas.openxmlformats.org/drawingml/2006/main" wrap="none" lIns="0" tIns="0" rIns="0" bIns="0" anchor="ctr">
-            <a:noAutofit/>
-          </a:bodyPr>
-          <a:lstStyle xmlns:a="http://schemas.openxmlformats.org/drawingml/2006/main">
-            <a:defPPr algn="ctr">
-              <a:defRPr sz="2175" b="1">
-                <a:solidFill>
-                  <a:srgbClr val="17212B"/>
-                </a:solidFill>
-                <a:latin typeface="Malgun Gothic"/>
-                <a:ea typeface="Malgun Gothic"/>
-                <a:cs typeface="Malgun Gothic"/>
-              </a:defRPr>
-            </a:defPPr>
-            <a:lvl1pPr algn="ctr">
-              <a:defRPr sz="2175" b="1">
-                <a:solidFill>
-                  <a:srgbClr val="17212B"/>
-                </a:solidFill>
-                <a:latin typeface="Malgun Gothic"/>
-                <a:ea typeface="Malgun Gothic"/>
-                <a:cs typeface="Malgun Gothic"/>
-              </a:defRPr>
-            </a:lvl1pPr>
-            <a:lvl2pPr algn="ctr">
-              <a:defRPr sz="2175" b="1">
-                <a:solidFill>
-                  <a:srgbClr val="17212B"/>
-                </a:solidFill>
-                <a:latin typeface="Malgun Gothic"/>
-                <a:ea typeface="Malgun Gothic"/>
-                <a:cs typeface="Malgun Gothic"/>
-              </a:defRPr>
-            </a:lvl2pPr>
-            <a:lvl3pPr algn="ctr">
-              <a:defRPr sz="2175" b="1">
-                <a:solidFill>
-                  <a:srgbClr val="17212B"/>
-                </a:solidFill>
-                <a:latin typeface="Malgun Gothic"/>
-                <a:ea typeface="Malgun Gothic"/>
-                <a:cs typeface="Malgun Gothic"/>
-              </a:defRPr>
-            </a:lvl3pPr>
-            <a:lvl4pPr algn="ctr">
-              <a:defRPr sz="2175" b="1">
-                <a:solidFill>
-                  <a:srgbClr val="17212B"/>
-                </a:solidFill>
-                <a:latin typeface="Malgun Gothic"/>
-                <a:ea typeface="Malgun Gothic"/>
-                <a:cs typeface="Malgun Gothic"/>
-              </a:defRPr>
-            </a:lvl4pPr>
-            <a:lvl5pPr algn="ctr">
-              <a:defRPr sz="2175" b="1">
-                <a:solidFill>
-                  <a:srgbClr val="17212B"/>
-                </a:solidFill>
-                <a:latin typeface="Malgun Gothic"/>
-                <a:ea typeface="Malgun Gothic"/>
-                <a:cs typeface="Malgun Gothic"/>
-              </a:defRPr>
-            </a:lvl5pPr>
-            <a:lvl6pPr algn="ctr">
-              <a:defRPr sz="2175" b="1">
-                <a:solidFill>
-                  <a:srgbClr val="17212B"/>
-                </a:solidFill>
-                <a:latin typeface="Malgun Gothic"/>
-                <a:ea typeface="Malgun Gothic"/>
-                <a:cs typeface="Malgun Gothic"/>
-              </a:defRPr>
-            </a:lvl6pPr>
-            <a:lvl7pPr algn="ctr">
-              <a:defRPr sz="2175" b="1">
-                <a:solidFill>
-                  <a:srgbClr val="17212B"/>
-                </a:solidFill>
-                <a:latin typeface="Malgun Gothic"/>
-                <a:ea typeface="Malgun Gothic"/>
-                <a:cs typeface="Malgun Gothic"/>
-              </a:defRPr>
-            </a:lvl7pPr>
-            <a:lvl8pPr algn="ctr">
-              <a:defRPr sz="2175" b="1">
-                <a:solidFill>
-                  <a:srgbClr val="17212B"/>
-                </a:solidFill>
-                <a:latin typeface="Malgun Gothic"/>
-                <a:ea typeface="Malgun Gothic"/>
-                <a:cs typeface="Malgun Gothic"/>
-              </a:defRPr>
-            </a:lvl8pPr>
-            <a:lvl9pPr algn="ctr">
-              <a:defRPr sz="2175" b="1">
-                <a:solidFill>
-                  <a:srgbClr val="17212B"/>
-                </a:solidFill>
-                <a:latin typeface="Malgun Gothic"/>
-                <a:ea typeface="Malgun Gothic"/>
-                <a:cs typeface="Malgun Gothic"/>
-              </a:defRPr>
-            </a:lvl9pPr>
-          </a:lstStyle>
-          <a:p xmlns:a="http://schemas.openxmlformats.org/drawingml/2006/main">
-            <a:pPr algn="ctr">
-              <a:defRPr sz="2175" b="1">
-                <a:solidFill>
-                  <a:srgbClr val="17212B"/>
-                </a:solidFill>
-                <a:latin typeface="Malgun Gothic"/>
-                <a:ea typeface="Malgun Gothic"/>
-                <a:cs typeface="Malgun Gothic"/>
-              </a:defRPr>
-            </a:pPr>
-            <a:r>
-              <a:rPr sz="2175" b="1">
-                <a:solidFill>
-                  <a:srgbClr val="17212B"/>
-                </a:solidFill>
-                <a:latin typeface="Malgun Gothic"/>
-                <a:ea typeface="Malgun Gothic"/>
-                <a:cs typeface="Malgun Gothic"/>
-              </a:rPr>
-              <a:t>8</a:t>
-            </a:r>
-          </a:p>
-        </p:txBody>
-      </p:sp>
-      <p:sp>
-        <p:nvSpPr>
-          <p:cNvPr id="30" name="열 index">
-            <a:extLst xmlns:a="http://schemas.openxmlformats.org/drawingml/2006/main">
-              <a:ext uri="{FF2B5EF4-FFF2-40B4-BE49-F238E27FC236}">
-                <a16:creationId xmlns:a16="http://schemas.microsoft.com/office/drawing/2014/main" id="{7058534A-0354-47FE-A676-98908A8DF107}"/>
-              </a:ext>
-            </a:extLst>
-          </p:cNvPr>
-          <p:cNvSpPr>
-            <a:spLocks xmlns:a="http://schemas.openxmlformats.org/drawingml/2006/main" noGrp="1"/>
-          </p:cNvSpPr>
-          <p:nvPr/>
-        </p:nvSpPr>
-        <p:spPr>
-          <a:xfrm xmlns:a="http://schemas.openxmlformats.org/drawingml/2006/main">
-            <a:off x="4248150" y="2428875"/>
-            <a:ext cx="1257300" cy="266700"/>
-          </a:xfrm>
-          <a:prstGeom xmlns:a="http://schemas.openxmlformats.org/drawingml/2006/main" prst="rect">
-            <a:avLst/>
-          </a:prstGeom>
-          <a:noFill xmlns:a="http://schemas.openxmlformats.org/drawingml/2006/main"/>
-          <a:ln xmlns:a="http://schemas.openxmlformats.org/drawingml/2006/main" w="0">
-            <a:noFill/>
-          </a:ln>
-        </p:spPr>
-        <p:txBody>
-          <a:bodyPr xmlns:a="http://schemas.openxmlformats.org/drawingml/2006/main" wrap="none" lIns="0" tIns="0" rIns="0" bIns="0" anchor="ctr">
-            <a:noAutofit/>
-          </a:bodyPr>
-          <a:lstStyle xmlns:a="http://schemas.openxmlformats.org/drawingml/2006/main">
-            <a:defPPr algn="l">
-              <a:defRPr sz="1500" b="0">
-                <a:solidFill>
-                  <a:srgbClr val="4D5A68"/>
-                </a:solidFill>
-                <a:latin typeface="Malgun Gothic"/>
-                <a:ea typeface="Malgun Gothic"/>
-                <a:cs typeface="Malgun Gothic"/>
-              </a:defRPr>
-            </a:defPPr>
-            <a:lvl1pPr algn="l">
-              <a:defRPr sz="1500" b="0">
-                <a:solidFill>
-                  <a:srgbClr val="4D5A68"/>
-                </a:solidFill>
-                <a:latin typeface="Malgun Gothic"/>
-                <a:ea typeface="Malgun Gothic"/>
-                <a:cs typeface="Malgun Gothic"/>
-              </a:defRPr>
-            </a:lvl1pPr>
-            <a:lvl2pPr algn="l">
-              <a:defRPr sz="1500" b="0">
-                <a:solidFill>
-                  <a:srgbClr val="4D5A68"/>
-                </a:solidFill>
-                <a:latin typeface="Malgun Gothic"/>
-                <a:ea typeface="Malgun Gothic"/>
-                <a:cs typeface="Malgun Gothic"/>
-              </a:defRPr>
-            </a:lvl2pPr>
-            <a:lvl3pPr algn="l">
-              <a:defRPr sz="1500" b="0">
-                <a:solidFill>
-                  <a:srgbClr val="4D5A68"/>
-                </a:solidFill>
-                <a:latin typeface="Malgun Gothic"/>
-                <a:ea typeface="Malgun Gothic"/>
-                <a:cs typeface="Malgun Gothic"/>
-              </a:defRPr>
-            </a:lvl3pPr>
-            <a:lvl4pPr algn="l">
-              <a:defRPr sz="1500" b="0">
-                <a:solidFill>
-                  <a:srgbClr val="4D5A68"/>
-                </a:solidFill>
-                <a:latin typeface="Malgun Gothic"/>
-                <a:ea typeface="Malgun Gothic"/>
-                <a:cs typeface="Malgun Gothic"/>
-              </a:defRPr>
-            </a:lvl4pPr>
-            <a:lvl5pPr algn="l">
-              <a:defRPr sz="1500" b="0">
-                <a:solidFill>
-                  <a:srgbClr val="4D5A68"/>
-                </a:solidFill>
-                <a:latin typeface="Malgun Gothic"/>
-                <a:ea typeface="Malgun Gothic"/>
-                <a:cs typeface="Malgun Gothic"/>
-              </a:defRPr>
-            </a:lvl5pPr>
-            <a:lvl6pPr algn="l">
-              <a:defRPr sz="1500" b="0">
-                <a:solidFill>
-                  <a:srgbClr val="4D5A68"/>
-                </a:solidFill>
-                <a:latin typeface="Malgun Gothic"/>
-                <a:ea typeface="Malgun Gothic"/>
-                <a:cs typeface="Malgun Gothic"/>
-              </a:defRPr>
-            </a:lvl6pPr>
-            <a:lvl7pPr algn="l">
-              <a:defRPr sz="1500" b="0">
-                <a:solidFill>
-                  <a:srgbClr val="4D5A68"/>
-                </a:solidFill>
-                <a:latin typeface="Malgun Gothic"/>
-                <a:ea typeface="Malgun Gothic"/>
-                <a:cs typeface="Malgun Gothic"/>
-              </a:defRPr>
-            </a:lvl7pPr>
-            <a:lvl8pPr algn="l">
-              <a:defRPr sz="1500" b="0">
-                <a:solidFill>
-                  <a:srgbClr val="4D5A68"/>
-                </a:solidFill>
-                <a:latin typeface="Malgun Gothic"/>
-                <a:ea typeface="Malgun Gothic"/>
-                <a:cs typeface="Malgun Gothic"/>
-              </a:defRPr>
-            </a:lvl8pPr>
-            <a:lvl9pPr algn="l">
-              <a:defRPr sz="1500" b="0">
-                <a:solidFill>
-                  <a:srgbClr val="4D5A68"/>
-                </a:solidFill>
-                <a:latin typeface="Malgun Gothic"/>
-                <a:ea typeface="Malgun Gothic"/>
-                <a:cs typeface="Malgun Gothic"/>
-              </a:defRPr>
-            </a:lvl9pPr>
-          </a:lstStyle>
-          <a:p xmlns:a="http://schemas.openxmlformats.org/drawingml/2006/main">
-            <a:pPr algn="l">
-              <a:defRPr sz="1500" b="0">
-                <a:solidFill>
-                  <a:srgbClr val="4D5A68"/>
-                </a:solidFill>
-                <a:latin typeface="Malgun Gothic"/>
-                <a:ea typeface="Malgun Gothic"/>
-                <a:cs typeface="Malgun Gothic"/>
-              </a:defRPr>
-            </a:pPr>
-            <a:r>
-              <a:rPr sz="1500" b="0">
-                <a:solidFill>
-                  <a:srgbClr val="4D5A68"/>
-                </a:solidFill>
-                <a:latin typeface="Malgun Gothic"/>
-                <a:ea typeface="Malgun Gothic"/>
-                <a:cs typeface="Malgun Gothic"/>
-              </a:rPr>
-              <a:t>열 index</a:t>
-            </a:r>
-          </a:p>
-        </p:txBody>
-      </p:sp>
-      <p:sp>
-        <p:nvSpPr>
-          <p:cNvPr id="31" name="기대">
-            <a:extLst xmlns:a="http://schemas.openxmlformats.org/drawingml/2006/main">
-              <a:ext uri="{FF2B5EF4-FFF2-40B4-BE49-F238E27FC236}">
-                <a16:creationId xmlns:a16="http://schemas.microsoft.com/office/drawing/2014/main" id="{237493DD-F4CB-4138-BE2A-EAA7094A543C}"/>
-              </a:ext>
-            </a:extLst>
-          </p:cNvPr>
-          <p:cNvSpPr>
-            <a:spLocks xmlns:a="http://schemas.openxmlformats.org/drawingml/2006/main" noGrp="1"/>
-          </p:cNvSpPr>
-          <p:nvPr/>
-        </p:nvSpPr>
-        <p:spPr>
-          <a:xfrm xmlns:a="http://schemas.openxmlformats.org/drawingml/2006/main">
-            <a:off x="609600" y="4410075"/>
-            <a:ext cx="685800" cy="381000"/>
-          </a:xfrm>
-          <a:prstGeom xmlns:a="http://schemas.openxmlformats.org/drawingml/2006/main" prst="rect">
-            <a:avLst/>
-          </a:prstGeom>
-          <a:noFill xmlns:a="http://schemas.openxmlformats.org/drawingml/2006/main"/>
-          <a:ln xmlns:a="http://schemas.openxmlformats.org/drawingml/2006/main" w="0">
-            <a:noFill/>
-          </a:ln>
-        </p:spPr>
-        <p:txBody>
-          <a:bodyPr xmlns:a="http://schemas.openxmlformats.org/drawingml/2006/main" wrap="none" lIns="0" tIns="0" rIns="0" bIns="0" anchor="ctr">
-            <a:noAutofit/>
-          </a:bodyPr>
-          <a:lstStyle xmlns:a="http://schemas.openxmlformats.org/drawingml/2006/main">
-            <a:defPPr algn="l">
-              <a:defRPr sz="1800" b="1">
-                <a:solidFill>
-                  <a:srgbClr val="0B6172"/>
-                </a:solidFill>
-                <a:latin typeface="Malgun Gothic"/>
-                <a:ea typeface="Malgun Gothic"/>
-                <a:cs typeface="Malgun Gothic"/>
-              </a:defRPr>
-            </a:defPPr>
-            <a:lvl1pPr algn="l">
-              <a:defRPr sz="1800" b="1">
-                <a:solidFill>
-                  <a:srgbClr val="0B6172"/>
-                </a:solidFill>
-                <a:latin typeface="Malgun Gothic"/>
-                <a:ea typeface="Malgun Gothic"/>
-                <a:cs typeface="Malgun Gothic"/>
-              </a:defRPr>
-            </a:lvl1pPr>
-            <a:lvl2pPr algn="l">
-              <a:defRPr sz="1800" b="1">
-                <a:solidFill>
-                  <a:srgbClr val="0B6172"/>
-                </a:solidFill>
-                <a:latin typeface="Malgun Gothic"/>
-                <a:ea typeface="Malgun Gothic"/>
-                <a:cs typeface="Malgun Gothic"/>
-              </a:defRPr>
-            </a:lvl2pPr>
-            <a:lvl3pPr algn="l">
-              <a:defRPr sz="1800" b="1">
-                <a:solidFill>
-                  <a:srgbClr val="0B6172"/>
-                </a:solidFill>
-                <a:latin typeface="Malgun Gothic"/>
-                <a:ea typeface="Malgun Gothic"/>
-                <a:cs typeface="Malgun Gothic"/>
-              </a:defRPr>
-            </a:lvl3pPr>
-            <a:lvl4pPr algn="l">
-              <a:defRPr sz="1800" b="1">
-                <a:solidFill>
-                  <a:srgbClr val="0B6172"/>
-                </a:solidFill>
-                <a:latin typeface="Malgun Gothic"/>
-                <a:ea typeface="Malgun Gothic"/>
-                <a:cs typeface="Malgun Gothic"/>
-              </a:defRPr>
-            </a:lvl4pPr>
-            <a:lvl5pPr algn="l">
-              <a:defRPr sz="1800" b="1">
-                <a:solidFill>
-                  <a:srgbClr val="0B6172"/>
-                </a:solidFill>
-                <a:latin typeface="Malgun Gothic"/>
-                <a:ea typeface="Malgun Gothic"/>
-                <a:cs typeface="Malgun Gothic"/>
-              </a:defRPr>
-            </a:lvl5pPr>
-            <a:lvl6pPr algn="l">
-              <a:defRPr sz="1800" b="1">
-                <a:solidFill>
-                  <a:srgbClr val="0B6172"/>
-                </a:solidFill>
-                <a:latin typeface="Malgun Gothic"/>
-                <a:ea typeface="Malgun Gothic"/>
-                <a:cs typeface="Malgun Gothic"/>
-              </a:defRPr>
-            </a:lvl6pPr>
-            <a:lvl7pPr algn="l">
-              <a:defRPr sz="1800" b="1">
-                <a:solidFill>
-                  <a:srgbClr val="0B6172"/>
-                </a:solidFill>
-                <a:latin typeface="Malgun Gothic"/>
-                <a:ea typeface="Malgun Gothic"/>
-                <a:cs typeface="Malgun Gothic"/>
-              </a:defRPr>
-            </a:lvl7pPr>
-            <a:lvl8pPr algn="l">
-              <a:defRPr sz="1800" b="1">
-                <a:solidFill>
-                  <a:srgbClr val="0B6172"/>
-                </a:solidFill>
-                <a:latin typeface="Malgun Gothic"/>
-                <a:ea typeface="Malgun Gothic"/>
-                <a:cs typeface="Malgun Gothic"/>
-              </a:defRPr>
-            </a:lvl8pPr>
-            <a:lvl9pPr algn="l">
-              <a:defRPr sz="1800" b="1">
-                <a:solidFill>
-                  <a:srgbClr val="0B6172"/>
-                </a:solidFill>
-                <a:latin typeface="Malgun Gothic"/>
-                <a:ea typeface="Malgun Gothic"/>
-                <a:cs typeface="Malgun Gothic"/>
-              </a:defRPr>
-            </a:lvl9pPr>
-          </a:lstStyle>
-          <a:p xmlns:a="http://schemas.openxmlformats.org/drawingml/2006/main">
-            <a:pPr algn="l">
-              <a:defRPr sz="1800" b="1">
-                <a:solidFill>
-                  <a:srgbClr val="0B6172"/>
-                </a:solidFill>
-                <a:latin typeface="Malgun Gothic"/>
-                <a:ea typeface="Malgun Gothic"/>
-                <a:cs typeface="Malgun Gothic"/>
-              </a:defRPr>
-            </a:pPr>
-            <a:r>
-              <a:rPr sz="1800" b="1">
-                <a:solidFill>
-                  <a:srgbClr val="0B6172"/>
-                </a:solidFill>
-                <a:latin typeface="Malgun Gothic"/>
-                <a:ea typeface="Malgun Gothic"/>
-                <a:cs typeface="Malgun Gothic"/>
-              </a:rPr>
-              <a:t>기대</a:t>
-            </a:r>
-          </a:p>
-        </p:txBody>
-      </p:sp>
-      <p:sp>
-        <p:nvSpPr>
-          <p:cNvPr id="32" name="">
-            <a:extLst xmlns:a="http://schemas.openxmlformats.org/drawingml/2006/main">
-              <a:ext uri="{FF2B5EF4-FFF2-40B4-BE49-F238E27FC236}">
-                <a16:creationId xmlns:a16="http://schemas.microsoft.com/office/drawing/2014/main" id="{9D2A7EE8-BDA0-40B0-AE5F-345250333CA5}"/>
-              </a:ext>
-            </a:extLst>
-          </p:cNvPr>
-          <p:cNvSpPr>
-            <a:spLocks xmlns:a="http://schemas.openxmlformats.org/drawingml/2006/main" noGrp="1"/>
-          </p:cNvSpPr>
-          <p:nvPr/>
-        </p:nvSpPr>
-        <p:spPr>
-          <a:xfrm xmlns:a="http://schemas.openxmlformats.org/drawingml/2006/main">
-            <a:off x="1485900" y="4362450"/>
-            <a:ext cx="476250" cy="476250"/>
+            <a:off x="3714750" y="4591050"/>
+            <a:ext cx="571500" cy="571500"/>
           </a:xfrm>
           <a:prstGeom xmlns:a="http://schemas.openxmlformats.org/drawingml/2006/main" prst="rect">
             <a:avLst/>
@@ -21789,10 +21728,10 @@
       </p:sp>
       <p:sp>
         <p:nvSpPr>
-          <p:cNvPr id="33" name="2">
+          <p:cNvPr id="31" name="2">
             <a:extLst xmlns:a="http://schemas.openxmlformats.org/drawingml/2006/main">
               <a:ext uri="{FF2B5EF4-FFF2-40B4-BE49-F238E27FC236}">
-                <a16:creationId xmlns:a16="http://schemas.microsoft.com/office/drawing/2014/main" id="{76DE704B-58DF-4AB5-9A22-0C44647A21F9}"/>
+                <a16:creationId xmlns:a16="http://schemas.microsoft.com/office/drawing/2014/main" id="{8539A937-C5D8-43D6-B9E7-B71C49E84767}"/>
               </a:ext>
             </a:extLst>
           </p:cNvPr>
@@ -21803,8 +21742,8 @@
         </p:nvSpPr>
         <p:spPr>
           <a:xfrm xmlns:a="http://schemas.openxmlformats.org/drawingml/2006/main">
-            <a:off x="1485900" y="4362450"/>
-            <a:ext cx="476250" cy="476250"/>
+            <a:off x="3714750" y="4591050"/>
+            <a:ext cx="571500" cy="571500"/>
           </a:xfrm>
           <a:prstGeom xmlns:a="http://schemas.openxmlformats.org/drawingml/2006/main" prst="rect">
             <a:avLst/>
@@ -21947,10 +21886,10 @@
       </p:sp>
       <p:sp>
         <p:nvSpPr>
-          <p:cNvPr id="34" name="">
+          <p:cNvPr id="32" name="">
             <a:extLst xmlns:a="http://schemas.openxmlformats.org/drawingml/2006/main">
               <a:ext uri="{FF2B5EF4-FFF2-40B4-BE49-F238E27FC236}">
-                <a16:creationId xmlns:a16="http://schemas.microsoft.com/office/drawing/2014/main" id="{768AE25B-7D91-4FF5-9BF9-7C490D075986}"/>
+                <a16:creationId xmlns:a16="http://schemas.microsoft.com/office/drawing/2014/main" id="{1DC7DC13-504F-4D2D-9F61-8597494C864C}"/>
               </a:ext>
             </a:extLst>
           </p:cNvPr>
@@ -21961,8 +21900,8 @@
         </p:nvSpPr>
         <p:spPr>
           <a:xfrm xmlns:a="http://schemas.openxmlformats.org/drawingml/2006/main">
-            <a:off x="2000250" y="4362450"/>
-            <a:ext cx="476250" cy="476250"/>
+            <a:off x="4324350" y="4591050"/>
+            <a:ext cx="571500" cy="571500"/>
           </a:xfrm>
           <a:prstGeom xmlns:a="http://schemas.openxmlformats.org/drawingml/2006/main" prst="rect">
             <a:avLst/>
@@ -21980,10 +21919,10 @@
       </p:sp>
       <p:sp>
         <p:nvSpPr>
-          <p:cNvPr id="35" name="3">
+          <p:cNvPr id="33" name="3">
             <a:extLst xmlns:a="http://schemas.openxmlformats.org/drawingml/2006/main">
               <a:ext uri="{FF2B5EF4-FFF2-40B4-BE49-F238E27FC236}">
-                <a16:creationId xmlns:a16="http://schemas.microsoft.com/office/drawing/2014/main" id="{7DEA3E34-5B9B-4AF3-8D6C-4750795E8417}"/>
+                <a16:creationId xmlns:a16="http://schemas.microsoft.com/office/drawing/2014/main" id="{866E578A-C212-4D2F-999C-ED66E546E76F}"/>
               </a:ext>
             </a:extLst>
           </p:cNvPr>
@@ -21994,8 +21933,8 @@
         </p:nvSpPr>
         <p:spPr>
           <a:xfrm xmlns:a="http://schemas.openxmlformats.org/drawingml/2006/main">
-            <a:off x="2000250" y="4362450"/>
-            <a:ext cx="476250" cy="476250"/>
+            <a:off x="4324350" y="4591050"/>
+            <a:ext cx="571500" cy="571500"/>
           </a:xfrm>
           <a:prstGeom xmlns:a="http://schemas.openxmlformats.org/drawingml/2006/main" prst="rect">
             <a:avLst/>
@@ -22138,10 +22077,10 @@
       </p:sp>
       <p:sp>
         <p:nvSpPr>
-          <p:cNvPr id="36" name="">
+          <p:cNvPr id="34" name="">
             <a:extLst xmlns:a="http://schemas.openxmlformats.org/drawingml/2006/main">
               <a:ext uri="{FF2B5EF4-FFF2-40B4-BE49-F238E27FC236}">
-                <a16:creationId xmlns:a16="http://schemas.microsoft.com/office/drawing/2014/main" id="{83CC6C31-8249-4A71-8C70-0536A02DAB79}"/>
+                <a16:creationId xmlns:a16="http://schemas.microsoft.com/office/drawing/2014/main" id="{198BE7B3-0497-42A1-A0FD-972CD3DE8142}"/>
               </a:ext>
             </a:extLst>
           </p:cNvPr>
@@ -22152,930 +22091,8 @@
         </p:nvSpPr>
         <p:spPr>
           <a:xfrm xmlns:a="http://schemas.openxmlformats.org/drawingml/2006/main">
-            <a:off x="1485900" y="4876800"/>
-            <a:ext cx="476250" cy="476250"/>
-          </a:xfrm>
-          <a:prstGeom xmlns:a="http://schemas.openxmlformats.org/drawingml/2006/main" prst="rect">
-            <a:avLst/>
-          </a:prstGeom>
-          <a:solidFill xmlns:a="http://schemas.openxmlformats.org/drawingml/2006/main">
-            <a:srgbClr val="E0EFF0"/>
-          </a:solidFill>
-          <a:ln xmlns:a="http://schemas.openxmlformats.org/drawingml/2006/main" w="9525">
-            <a:solidFill>
-              <a:srgbClr val="C7D0DA"/>
-            </a:solidFill>
-            <a:prstDash val="solid"/>
-          </a:ln>
-        </p:spPr>
-      </p:sp>
-      <p:sp>
-        <p:nvSpPr>
-          <p:cNvPr id="37" name="6">
-            <a:extLst xmlns:a="http://schemas.openxmlformats.org/drawingml/2006/main">
-              <a:ext uri="{FF2B5EF4-FFF2-40B4-BE49-F238E27FC236}">
-                <a16:creationId xmlns:a16="http://schemas.microsoft.com/office/drawing/2014/main" id="{EC6B6F71-1FA7-491E-B631-9B7DF5CE081E}"/>
-              </a:ext>
-            </a:extLst>
-          </p:cNvPr>
-          <p:cNvSpPr>
-            <a:spLocks xmlns:a="http://schemas.openxmlformats.org/drawingml/2006/main" noGrp="1"/>
-          </p:cNvSpPr>
-          <p:nvPr/>
-        </p:nvSpPr>
-        <p:spPr>
-          <a:xfrm xmlns:a="http://schemas.openxmlformats.org/drawingml/2006/main">
-            <a:off x="1485900" y="4876800"/>
-            <a:ext cx="476250" cy="476250"/>
-          </a:xfrm>
-          <a:prstGeom xmlns:a="http://schemas.openxmlformats.org/drawingml/2006/main" prst="rect">
-            <a:avLst/>
-          </a:prstGeom>
-          <a:noFill xmlns:a="http://schemas.openxmlformats.org/drawingml/2006/main"/>
-          <a:ln xmlns:a="http://schemas.openxmlformats.org/drawingml/2006/main" w="0">
-            <a:noFill/>
-          </a:ln>
-        </p:spPr>
-        <p:txBody>
-          <a:bodyPr xmlns:a="http://schemas.openxmlformats.org/drawingml/2006/main" wrap="none" lIns="0" tIns="0" rIns="0" bIns="0" anchor="ctr">
-            <a:noAutofit/>
-          </a:bodyPr>
-          <a:lstStyle xmlns:a="http://schemas.openxmlformats.org/drawingml/2006/main">
-            <a:defPPr algn="ctr">
-              <a:defRPr sz="2175" b="1">
-                <a:solidFill>
-                  <a:srgbClr val="17212B"/>
-                </a:solidFill>
-                <a:latin typeface="Malgun Gothic"/>
-                <a:ea typeface="Malgun Gothic"/>
-                <a:cs typeface="Malgun Gothic"/>
-              </a:defRPr>
-            </a:defPPr>
-            <a:lvl1pPr algn="ctr">
-              <a:defRPr sz="2175" b="1">
-                <a:solidFill>
-                  <a:srgbClr val="17212B"/>
-                </a:solidFill>
-                <a:latin typeface="Malgun Gothic"/>
-                <a:ea typeface="Malgun Gothic"/>
-                <a:cs typeface="Malgun Gothic"/>
-              </a:defRPr>
-            </a:lvl1pPr>
-            <a:lvl2pPr algn="ctr">
-              <a:defRPr sz="2175" b="1">
-                <a:solidFill>
-                  <a:srgbClr val="17212B"/>
-                </a:solidFill>
-                <a:latin typeface="Malgun Gothic"/>
-                <a:ea typeface="Malgun Gothic"/>
-                <a:cs typeface="Malgun Gothic"/>
-              </a:defRPr>
-            </a:lvl2pPr>
-            <a:lvl3pPr algn="ctr">
-              <a:defRPr sz="2175" b="1">
-                <a:solidFill>
-                  <a:srgbClr val="17212B"/>
-                </a:solidFill>
-                <a:latin typeface="Malgun Gothic"/>
-                <a:ea typeface="Malgun Gothic"/>
-                <a:cs typeface="Malgun Gothic"/>
-              </a:defRPr>
-            </a:lvl3pPr>
-            <a:lvl4pPr algn="ctr">
-              <a:defRPr sz="2175" b="1">
-                <a:solidFill>
-                  <a:srgbClr val="17212B"/>
-                </a:solidFill>
-                <a:latin typeface="Malgun Gothic"/>
-                <a:ea typeface="Malgun Gothic"/>
-                <a:cs typeface="Malgun Gothic"/>
-              </a:defRPr>
-            </a:lvl4pPr>
-            <a:lvl5pPr algn="ctr">
-              <a:defRPr sz="2175" b="1">
-                <a:solidFill>
-                  <a:srgbClr val="17212B"/>
-                </a:solidFill>
-                <a:latin typeface="Malgun Gothic"/>
-                <a:ea typeface="Malgun Gothic"/>
-                <a:cs typeface="Malgun Gothic"/>
-              </a:defRPr>
-            </a:lvl5pPr>
-            <a:lvl6pPr algn="ctr">
-              <a:defRPr sz="2175" b="1">
-                <a:solidFill>
-                  <a:srgbClr val="17212B"/>
-                </a:solidFill>
-                <a:latin typeface="Malgun Gothic"/>
-                <a:ea typeface="Malgun Gothic"/>
-                <a:cs typeface="Malgun Gothic"/>
-              </a:defRPr>
-            </a:lvl6pPr>
-            <a:lvl7pPr algn="ctr">
-              <a:defRPr sz="2175" b="1">
-                <a:solidFill>
-                  <a:srgbClr val="17212B"/>
-                </a:solidFill>
-                <a:latin typeface="Malgun Gothic"/>
-                <a:ea typeface="Malgun Gothic"/>
-                <a:cs typeface="Malgun Gothic"/>
-              </a:defRPr>
-            </a:lvl7pPr>
-            <a:lvl8pPr algn="ctr">
-              <a:defRPr sz="2175" b="1">
-                <a:solidFill>
-                  <a:srgbClr val="17212B"/>
-                </a:solidFill>
-                <a:latin typeface="Malgun Gothic"/>
-                <a:ea typeface="Malgun Gothic"/>
-                <a:cs typeface="Malgun Gothic"/>
-              </a:defRPr>
-            </a:lvl8pPr>
-            <a:lvl9pPr algn="ctr">
-              <a:defRPr sz="2175" b="1">
-                <a:solidFill>
-                  <a:srgbClr val="17212B"/>
-                </a:solidFill>
-                <a:latin typeface="Malgun Gothic"/>
-                <a:ea typeface="Malgun Gothic"/>
-                <a:cs typeface="Malgun Gothic"/>
-              </a:defRPr>
-            </a:lvl9pPr>
-          </a:lstStyle>
-          <a:p xmlns:a="http://schemas.openxmlformats.org/drawingml/2006/main">
-            <a:pPr algn="ctr">
-              <a:defRPr sz="2175" b="1">
-                <a:solidFill>
-                  <a:srgbClr val="17212B"/>
-                </a:solidFill>
-                <a:latin typeface="Malgun Gothic"/>
-                <a:ea typeface="Malgun Gothic"/>
-                <a:cs typeface="Malgun Gothic"/>
-              </a:defRPr>
-            </a:pPr>
-            <a:r>
-              <a:rPr sz="2175" b="1">
-                <a:solidFill>
-                  <a:srgbClr val="17212B"/>
-                </a:solidFill>
-                <a:latin typeface="Malgun Gothic"/>
-                <a:ea typeface="Malgun Gothic"/>
-                <a:cs typeface="Malgun Gothic"/>
-              </a:rPr>
-              <a:t>6</a:t>
-            </a:r>
-          </a:p>
-        </p:txBody>
-      </p:sp>
-      <p:sp>
-        <p:nvSpPr>
-          <p:cNvPr id="38" name="">
-            <a:extLst xmlns:a="http://schemas.openxmlformats.org/drawingml/2006/main">
-              <a:ext uri="{FF2B5EF4-FFF2-40B4-BE49-F238E27FC236}">
-                <a16:creationId xmlns:a16="http://schemas.microsoft.com/office/drawing/2014/main" id="{6C5F3CF4-3FBE-44B8-8BD7-5246E5F6231F}"/>
-              </a:ext>
-            </a:extLst>
-          </p:cNvPr>
-          <p:cNvSpPr>
-            <a:spLocks xmlns:a="http://schemas.openxmlformats.org/drawingml/2006/main" noGrp="1"/>
-          </p:cNvSpPr>
-          <p:nvPr/>
-        </p:nvSpPr>
-        <p:spPr>
-          <a:xfrm xmlns:a="http://schemas.openxmlformats.org/drawingml/2006/main">
-            <a:off x="2000250" y="4876800"/>
-            <a:ext cx="476250" cy="476250"/>
-          </a:xfrm>
-          <a:prstGeom xmlns:a="http://schemas.openxmlformats.org/drawingml/2006/main" prst="rect">
-            <a:avLst/>
-          </a:prstGeom>
-          <a:solidFill xmlns:a="http://schemas.openxmlformats.org/drawingml/2006/main">
-            <a:srgbClr val="E0EFF0"/>
-          </a:solidFill>
-          <a:ln xmlns:a="http://schemas.openxmlformats.org/drawingml/2006/main" w="9525">
-            <a:solidFill>
-              <a:srgbClr val="C7D0DA"/>
-            </a:solidFill>
-            <a:prstDash val="solid"/>
-          </a:ln>
-        </p:spPr>
-      </p:sp>
-      <p:sp>
-        <p:nvSpPr>
-          <p:cNvPr id="39" name="7">
-            <a:extLst xmlns:a="http://schemas.openxmlformats.org/drawingml/2006/main">
-              <a:ext uri="{FF2B5EF4-FFF2-40B4-BE49-F238E27FC236}">
-                <a16:creationId xmlns:a16="http://schemas.microsoft.com/office/drawing/2014/main" id="{50778C04-0269-4316-AEF4-24D62DD11616}"/>
-              </a:ext>
-            </a:extLst>
-          </p:cNvPr>
-          <p:cNvSpPr>
-            <a:spLocks xmlns:a="http://schemas.openxmlformats.org/drawingml/2006/main" noGrp="1"/>
-          </p:cNvSpPr>
-          <p:nvPr/>
-        </p:nvSpPr>
-        <p:spPr>
-          <a:xfrm xmlns:a="http://schemas.openxmlformats.org/drawingml/2006/main">
-            <a:off x="2000250" y="4876800"/>
-            <a:ext cx="476250" cy="476250"/>
-          </a:xfrm>
-          <a:prstGeom xmlns:a="http://schemas.openxmlformats.org/drawingml/2006/main" prst="rect">
-            <a:avLst/>
-          </a:prstGeom>
-          <a:noFill xmlns:a="http://schemas.openxmlformats.org/drawingml/2006/main"/>
-          <a:ln xmlns:a="http://schemas.openxmlformats.org/drawingml/2006/main" w="0">
-            <a:noFill/>
-          </a:ln>
-        </p:spPr>
-        <p:txBody>
-          <a:bodyPr xmlns:a="http://schemas.openxmlformats.org/drawingml/2006/main" wrap="none" lIns="0" tIns="0" rIns="0" bIns="0" anchor="ctr">
-            <a:noAutofit/>
-          </a:bodyPr>
-          <a:lstStyle xmlns:a="http://schemas.openxmlformats.org/drawingml/2006/main">
-            <a:defPPr algn="ctr">
-              <a:defRPr sz="2175" b="1">
-                <a:solidFill>
-                  <a:srgbClr val="17212B"/>
-                </a:solidFill>
-                <a:latin typeface="Malgun Gothic"/>
-                <a:ea typeface="Malgun Gothic"/>
-                <a:cs typeface="Malgun Gothic"/>
-              </a:defRPr>
-            </a:defPPr>
-            <a:lvl1pPr algn="ctr">
-              <a:defRPr sz="2175" b="1">
-                <a:solidFill>
-                  <a:srgbClr val="17212B"/>
-                </a:solidFill>
-                <a:latin typeface="Malgun Gothic"/>
-                <a:ea typeface="Malgun Gothic"/>
-                <a:cs typeface="Malgun Gothic"/>
-              </a:defRPr>
-            </a:lvl1pPr>
-            <a:lvl2pPr algn="ctr">
-              <a:defRPr sz="2175" b="1">
-                <a:solidFill>
-                  <a:srgbClr val="17212B"/>
-                </a:solidFill>
-                <a:latin typeface="Malgun Gothic"/>
-                <a:ea typeface="Malgun Gothic"/>
-                <a:cs typeface="Malgun Gothic"/>
-              </a:defRPr>
-            </a:lvl2pPr>
-            <a:lvl3pPr algn="ctr">
-              <a:defRPr sz="2175" b="1">
-                <a:solidFill>
-                  <a:srgbClr val="17212B"/>
-                </a:solidFill>
-                <a:latin typeface="Malgun Gothic"/>
-                <a:ea typeface="Malgun Gothic"/>
-                <a:cs typeface="Malgun Gothic"/>
-              </a:defRPr>
-            </a:lvl3pPr>
-            <a:lvl4pPr algn="ctr">
-              <a:defRPr sz="2175" b="1">
-                <a:solidFill>
-                  <a:srgbClr val="17212B"/>
-                </a:solidFill>
-                <a:latin typeface="Malgun Gothic"/>
-                <a:ea typeface="Malgun Gothic"/>
-                <a:cs typeface="Malgun Gothic"/>
-              </a:defRPr>
-            </a:lvl4pPr>
-            <a:lvl5pPr algn="ctr">
-              <a:defRPr sz="2175" b="1">
-                <a:solidFill>
-                  <a:srgbClr val="17212B"/>
-                </a:solidFill>
-                <a:latin typeface="Malgun Gothic"/>
-                <a:ea typeface="Malgun Gothic"/>
-                <a:cs typeface="Malgun Gothic"/>
-              </a:defRPr>
-            </a:lvl5pPr>
-            <a:lvl6pPr algn="ctr">
-              <a:defRPr sz="2175" b="1">
-                <a:solidFill>
-                  <a:srgbClr val="17212B"/>
-                </a:solidFill>
-                <a:latin typeface="Malgun Gothic"/>
-                <a:ea typeface="Malgun Gothic"/>
-                <a:cs typeface="Malgun Gothic"/>
-              </a:defRPr>
-            </a:lvl6pPr>
-            <a:lvl7pPr algn="ctr">
-              <a:defRPr sz="2175" b="1">
-                <a:solidFill>
-                  <a:srgbClr val="17212B"/>
-                </a:solidFill>
-                <a:latin typeface="Malgun Gothic"/>
-                <a:ea typeface="Malgun Gothic"/>
-                <a:cs typeface="Malgun Gothic"/>
-              </a:defRPr>
-            </a:lvl7pPr>
-            <a:lvl8pPr algn="ctr">
-              <a:defRPr sz="2175" b="1">
-                <a:solidFill>
-                  <a:srgbClr val="17212B"/>
-                </a:solidFill>
-                <a:latin typeface="Malgun Gothic"/>
-                <a:ea typeface="Malgun Gothic"/>
-                <a:cs typeface="Malgun Gothic"/>
-              </a:defRPr>
-            </a:lvl8pPr>
-            <a:lvl9pPr algn="ctr">
-              <a:defRPr sz="2175" b="1">
-                <a:solidFill>
-                  <a:srgbClr val="17212B"/>
-                </a:solidFill>
-                <a:latin typeface="Malgun Gothic"/>
-                <a:ea typeface="Malgun Gothic"/>
-                <a:cs typeface="Malgun Gothic"/>
-              </a:defRPr>
-            </a:lvl9pPr>
-          </a:lstStyle>
-          <a:p xmlns:a="http://schemas.openxmlformats.org/drawingml/2006/main">
-            <a:pPr algn="ctr">
-              <a:defRPr sz="2175" b="1">
-                <a:solidFill>
-                  <a:srgbClr val="17212B"/>
-                </a:solidFill>
-                <a:latin typeface="Malgun Gothic"/>
-                <a:ea typeface="Malgun Gothic"/>
-                <a:cs typeface="Malgun Gothic"/>
-              </a:defRPr>
-            </a:pPr>
-            <a:r>
-              <a:rPr sz="2175" b="1">
-                <a:solidFill>
-                  <a:srgbClr val="17212B"/>
-                </a:solidFill>
-                <a:latin typeface="Malgun Gothic"/>
-                <a:ea typeface="Malgun Gothic"/>
-                <a:cs typeface="Malgun Gothic"/>
-              </a:rPr>
-              <a:t>7</a:t>
-            </a:r>
-          </a:p>
-        </p:txBody>
-      </p:sp>
-      <p:sp>
-        <p:nvSpPr>
-          <p:cNvPr id="40" name="구현 결과">
-            <a:extLst xmlns:a="http://schemas.openxmlformats.org/drawingml/2006/main">
-              <a:ext uri="{FF2B5EF4-FFF2-40B4-BE49-F238E27FC236}">
-                <a16:creationId xmlns:a16="http://schemas.microsoft.com/office/drawing/2014/main" id="{775104B2-F51A-4D59-8E04-94ED7BE52A1F}"/>
-              </a:ext>
-            </a:extLst>
-          </p:cNvPr>
-          <p:cNvSpPr>
-            <a:spLocks xmlns:a="http://schemas.openxmlformats.org/drawingml/2006/main" noGrp="1"/>
-          </p:cNvSpPr>
-          <p:nvPr/>
-        </p:nvSpPr>
-        <p:spPr>
-          <a:xfrm xmlns:a="http://schemas.openxmlformats.org/drawingml/2006/main">
-            <a:off x="3048000" y="4410075"/>
-            <a:ext cx="1238250" cy="381000"/>
-          </a:xfrm>
-          <a:prstGeom xmlns:a="http://schemas.openxmlformats.org/drawingml/2006/main" prst="rect">
-            <a:avLst/>
-          </a:prstGeom>
-          <a:noFill xmlns:a="http://schemas.openxmlformats.org/drawingml/2006/main"/>
-          <a:ln xmlns:a="http://schemas.openxmlformats.org/drawingml/2006/main" w="0">
-            <a:noFill/>
-          </a:ln>
-        </p:spPr>
-        <p:txBody>
-          <a:bodyPr xmlns:a="http://schemas.openxmlformats.org/drawingml/2006/main" wrap="none" lIns="0" tIns="0" rIns="0" bIns="0" anchor="ctr">
-            <a:noAutofit/>
-          </a:bodyPr>
-          <a:lstStyle xmlns:a="http://schemas.openxmlformats.org/drawingml/2006/main">
-            <a:defPPr algn="l">
-              <a:defRPr sz="1800" b="1">
-                <a:solidFill>
-                  <a:srgbClr val="B42318"/>
-                </a:solidFill>
-                <a:latin typeface="Malgun Gothic"/>
-                <a:ea typeface="Malgun Gothic"/>
-                <a:cs typeface="Malgun Gothic"/>
-              </a:defRPr>
-            </a:defPPr>
-            <a:lvl1pPr algn="l">
-              <a:defRPr sz="1800" b="1">
-                <a:solidFill>
-                  <a:srgbClr val="B42318"/>
-                </a:solidFill>
-                <a:latin typeface="Malgun Gothic"/>
-                <a:ea typeface="Malgun Gothic"/>
-                <a:cs typeface="Malgun Gothic"/>
-              </a:defRPr>
-            </a:lvl1pPr>
-            <a:lvl2pPr algn="l">
-              <a:defRPr sz="1800" b="1">
-                <a:solidFill>
-                  <a:srgbClr val="B42318"/>
-                </a:solidFill>
-                <a:latin typeface="Malgun Gothic"/>
-                <a:ea typeface="Malgun Gothic"/>
-                <a:cs typeface="Malgun Gothic"/>
-              </a:defRPr>
-            </a:lvl2pPr>
-            <a:lvl3pPr algn="l">
-              <a:defRPr sz="1800" b="1">
-                <a:solidFill>
-                  <a:srgbClr val="B42318"/>
-                </a:solidFill>
-                <a:latin typeface="Malgun Gothic"/>
-                <a:ea typeface="Malgun Gothic"/>
-                <a:cs typeface="Malgun Gothic"/>
-              </a:defRPr>
-            </a:lvl3pPr>
-            <a:lvl4pPr algn="l">
-              <a:defRPr sz="1800" b="1">
-                <a:solidFill>
-                  <a:srgbClr val="B42318"/>
-                </a:solidFill>
-                <a:latin typeface="Malgun Gothic"/>
-                <a:ea typeface="Malgun Gothic"/>
-                <a:cs typeface="Malgun Gothic"/>
-              </a:defRPr>
-            </a:lvl4pPr>
-            <a:lvl5pPr algn="l">
-              <a:defRPr sz="1800" b="1">
-                <a:solidFill>
-                  <a:srgbClr val="B42318"/>
-                </a:solidFill>
-                <a:latin typeface="Malgun Gothic"/>
-                <a:ea typeface="Malgun Gothic"/>
-                <a:cs typeface="Malgun Gothic"/>
-              </a:defRPr>
-            </a:lvl5pPr>
-            <a:lvl6pPr algn="l">
-              <a:defRPr sz="1800" b="1">
-                <a:solidFill>
-                  <a:srgbClr val="B42318"/>
-                </a:solidFill>
-                <a:latin typeface="Malgun Gothic"/>
-                <a:ea typeface="Malgun Gothic"/>
-                <a:cs typeface="Malgun Gothic"/>
-              </a:defRPr>
-            </a:lvl6pPr>
-            <a:lvl7pPr algn="l">
-              <a:defRPr sz="1800" b="1">
-                <a:solidFill>
-                  <a:srgbClr val="B42318"/>
-                </a:solidFill>
-                <a:latin typeface="Malgun Gothic"/>
-                <a:ea typeface="Malgun Gothic"/>
-                <a:cs typeface="Malgun Gothic"/>
-              </a:defRPr>
-            </a:lvl7pPr>
-            <a:lvl8pPr algn="l">
-              <a:defRPr sz="1800" b="1">
-                <a:solidFill>
-                  <a:srgbClr val="B42318"/>
-                </a:solidFill>
-                <a:latin typeface="Malgun Gothic"/>
-                <a:ea typeface="Malgun Gothic"/>
-                <a:cs typeface="Malgun Gothic"/>
-              </a:defRPr>
-            </a:lvl8pPr>
-            <a:lvl9pPr algn="l">
-              <a:defRPr sz="1800" b="1">
-                <a:solidFill>
-                  <a:srgbClr val="B42318"/>
-                </a:solidFill>
-                <a:latin typeface="Malgun Gothic"/>
-                <a:ea typeface="Malgun Gothic"/>
-                <a:cs typeface="Malgun Gothic"/>
-              </a:defRPr>
-            </a:lvl9pPr>
-          </a:lstStyle>
-          <a:p xmlns:a="http://schemas.openxmlformats.org/drawingml/2006/main">
-            <a:pPr algn="l">
-              <a:defRPr sz="1800" b="1">
-                <a:solidFill>
-                  <a:srgbClr val="B42318"/>
-                </a:solidFill>
-                <a:latin typeface="Malgun Gothic"/>
-                <a:ea typeface="Malgun Gothic"/>
-                <a:cs typeface="Malgun Gothic"/>
-              </a:defRPr>
-            </a:pPr>
-            <a:r>
-              <a:rPr sz="1800" b="1">
-                <a:solidFill>
-                  <a:srgbClr val="B42318"/>
-                </a:solidFill>
-                <a:latin typeface="Malgun Gothic"/>
-                <a:ea typeface="Malgun Gothic"/>
-                <a:cs typeface="Malgun Gothic"/>
-              </a:rPr>
-              <a:t>구현 결과</a:t>
-            </a:r>
-          </a:p>
-        </p:txBody>
-      </p:sp>
-      <p:sp>
-        <p:nvSpPr>
-          <p:cNvPr id="41" name="">
-            <a:extLst xmlns:a="http://schemas.openxmlformats.org/drawingml/2006/main">
-              <a:ext uri="{FF2B5EF4-FFF2-40B4-BE49-F238E27FC236}">
-                <a16:creationId xmlns:a16="http://schemas.microsoft.com/office/drawing/2014/main" id="{95A9DC51-AB71-4B5A-9359-F782D58988E4}"/>
-              </a:ext>
-            </a:extLst>
-          </p:cNvPr>
-          <p:cNvSpPr>
-            <a:spLocks xmlns:a="http://schemas.openxmlformats.org/drawingml/2006/main" noGrp="1"/>
-          </p:cNvSpPr>
-          <p:nvPr/>
-        </p:nvSpPr>
-        <p:spPr>
-          <a:xfrm xmlns:a="http://schemas.openxmlformats.org/drawingml/2006/main">
-            <a:off x="4391025" y="4362450"/>
-            <a:ext cx="476250" cy="476250"/>
-          </a:xfrm>
-          <a:prstGeom xmlns:a="http://schemas.openxmlformats.org/drawingml/2006/main" prst="rect">
-            <a:avLst/>
-          </a:prstGeom>
-          <a:solidFill xmlns:a="http://schemas.openxmlformats.org/drawingml/2006/main">
-            <a:srgbClr val="E0EFF0"/>
-          </a:solidFill>
-          <a:ln xmlns:a="http://schemas.openxmlformats.org/drawingml/2006/main" w="9525">
-            <a:solidFill>
-              <a:srgbClr val="C7D0DA"/>
-            </a:solidFill>
-            <a:prstDash val="solid"/>
-          </a:ln>
-        </p:spPr>
-      </p:sp>
-      <p:sp>
-        <p:nvSpPr>
-          <p:cNvPr id="42" name="2">
-            <a:extLst xmlns:a="http://schemas.openxmlformats.org/drawingml/2006/main">
-              <a:ext uri="{FF2B5EF4-FFF2-40B4-BE49-F238E27FC236}">
-                <a16:creationId xmlns:a16="http://schemas.microsoft.com/office/drawing/2014/main" id="{A579F2E8-E272-4EED-AAA6-9A146795A322}"/>
-              </a:ext>
-            </a:extLst>
-          </p:cNvPr>
-          <p:cNvSpPr>
-            <a:spLocks xmlns:a="http://schemas.openxmlformats.org/drawingml/2006/main" noGrp="1"/>
-          </p:cNvSpPr>
-          <p:nvPr/>
-        </p:nvSpPr>
-        <p:spPr>
-          <a:xfrm xmlns:a="http://schemas.openxmlformats.org/drawingml/2006/main">
-            <a:off x="4391025" y="4362450"/>
-            <a:ext cx="476250" cy="476250"/>
-          </a:xfrm>
-          <a:prstGeom xmlns:a="http://schemas.openxmlformats.org/drawingml/2006/main" prst="rect">
-            <a:avLst/>
-          </a:prstGeom>
-          <a:noFill xmlns:a="http://schemas.openxmlformats.org/drawingml/2006/main"/>
-          <a:ln xmlns:a="http://schemas.openxmlformats.org/drawingml/2006/main" w="0">
-            <a:noFill/>
-          </a:ln>
-        </p:spPr>
-        <p:txBody>
-          <a:bodyPr xmlns:a="http://schemas.openxmlformats.org/drawingml/2006/main" wrap="none" lIns="0" tIns="0" rIns="0" bIns="0" anchor="ctr">
-            <a:noAutofit/>
-          </a:bodyPr>
-          <a:lstStyle xmlns:a="http://schemas.openxmlformats.org/drawingml/2006/main">
-            <a:defPPr algn="ctr">
-              <a:defRPr sz="2175" b="1">
-                <a:solidFill>
-                  <a:srgbClr val="17212B"/>
-                </a:solidFill>
-                <a:latin typeface="Malgun Gothic"/>
-                <a:ea typeface="Malgun Gothic"/>
-                <a:cs typeface="Malgun Gothic"/>
-              </a:defRPr>
-            </a:defPPr>
-            <a:lvl1pPr algn="ctr">
-              <a:defRPr sz="2175" b="1">
-                <a:solidFill>
-                  <a:srgbClr val="17212B"/>
-                </a:solidFill>
-                <a:latin typeface="Malgun Gothic"/>
-                <a:ea typeface="Malgun Gothic"/>
-                <a:cs typeface="Malgun Gothic"/>
-              </a:defRPr>
-            </a:lvl1pPr>
-            <a:lvl2pPr algn="ctr">
-              <a:defRPr sz="2175" b="1">
-                <a:solidFill>
-                  <a:srgbClr val="17212B"/>
-                </a:solidFill>
-                <a:latin typeface="Malgun Gothic"/>
-                <a:ea typeface="Malgun Gothic"/>
-                <a:cs typeface="Malgun Gothic"/>
-              </a:defRPr>
-            </a:lvl2pPr>
-            <a:lvl3pPr algn="ctr">
-              <a:defRPr sz="2175" b="1">
-                <a:solidFill>
-                  <a:srgbClr val="17212B"/>
-                </a:solidFill>
-                <a:latin typeface="Malgun Gothic"/>
-                <a:ea typeface="Malgun Gothic"/>
-                <a:cs typeface="Malgun Gothic"/>
-              </a:defRPr>
-            </a:lvl3pPr>
-            <a:lvl4pPr algn="ctr">
-              <a:defRPr sz="2175" b="1">
-                <a:solidFill>
-                  <a:srgbClr val="17212B"/>
-                </a:solidFill>
-                <a:latin typeface="Malgun Gothic"/>
-                <a:ea typeface="Malgun Gothic"/>
-                <a:cs typeface="Malgun Gothic"/>
-              </a:defRPr>
-            </a:lvl4pPr>
-            <a:lvl5pPr algn="ctr">
-              <a:defRPr sz="2175" b="1">
-                <a:solidFill>
-                  <a:srgbClr val="17212B"/>
-                </a:solidFill>
-                <a:latin typeface="Malgun Gothic"/>
-                <a:ea typeface="Malgun Gothic"/>
-                <a:cs typeface="Malgun Gothic"/>
-              </a:defRPr>
-            </a:lvl5pPr>
-            <a:lvl6pPr algn="ctr">
-              <a:defRPr sz="2175" b="1">
-                <a:solidFill>
-                  <a:srgbClr val="17212B"/>
-                </a:solidFill>
-                <a:latin typeface="Malgun Gothic"/>
-                <a:ea typeface="Malgun Gothic"/>
-                <a:cs typeface="Malgun Gothic"/>
-              </a:defRPr>
-            </a:lvl6pPr>
-            <a:lvl7pPr algn="ctr">
-              <a:defRPr sz="2175" b="1">
-                <a:solidFill>
-                  <a:srgbClr val="17212B"/>
-                </a:solidFill>
-                <a:latin typeface="Malgun Gothic"/>
-                <a:ea typeface="Malgun Gothic"/>
-                <a:cs typeface="Malgun Gothic"/>
-              </a:defRPr>
-            </a:lvl7pPr>
-            <a:lvl8pPr algn="ctr">
-              <a:defRPr sz="2175" b="1">
-                <a:solidFill>
-                  <a:srgbClr val="17212B"/>
-                </a:solidFill>
-                <a:latin typeface="Malgun Gothic"/>
-                <a:ea typeface="Malgun Gothic"/>
-                <a:cs typeface="Malgun Gothic"/>
-              </a:defRPr>
-            </a:lvl8pPr>
-            <a:lvl9pPr algn="ctr">
-              <a:defRPr sz="2175" b="1">
-                <a:solidFill>
-                  <a:srgbClr val="17212B"/>
-                </a:solidFill>
-                <a:latin typeface="Malgun Gothic"/>
-                <a:ea typeface="Malgun Gothic"/>
-                <a:cs typeface="Malgun Gothic"/>
-              </a:defRPr>
-            </a:lvl9pPr>
-          </a:lstStyle>
-          <a:p xmlns:a="http://schemas.openxmlformats.org/drawingml/2006/main">
-            <a:pPr algn="ctr">
-              <a:defRPr sz="2175" b="1">
-                <a:solidFill>
-                  <a:srgbClr val="17212B"/>
-                </a:solidFill>
-                <a:latin typeface="Malgun Gothic"/>
-                <a:ea typeface="Malgun Gothic"/>
-                <a:cs typeface="Malgun Gothic"/>
-              </a:defRPr>
-            </a:pPr>
-            <a:r>
-              <a:rPr sz="2175" b="1">
-                <a:solidFill>
-                  <a:srgbClr val="17212B"/>
-                </a:solidFill>
-                <a:latin typeface="Malgun Gothic"/>
-                <a:ea typeface="Malgun Gothic"/>
-                <a:cs typeface="Malgun Gothic"/>
-              </a:rPr>
-              <a:t>2</a:t>
-            </a:r>
-          </a:p>
-        </p:txBody>
-      </p:sp>
-      <p:sp>
-        <p:nvSpPr>
-          <p:cNvPr id="43" name="">
-            <a:extLst xmlns:a="http://schemas.openxmlformats.org/drawingml/2006/main">
-              <a:ext uri="{FF2B5EF4-FFF2-40B4-BE49-F238E27FC236}">
-                <a16:creationId xmlns:a16="http://schemas.microsoft.com/office/drawing/2014/main" id="{770B3D95-91BB-4933-8EEF-DA406859D734}"/>
-              </a:ext>
-            </a:extLst>
-          </p:cNvPr>
-          <p:cNvSpPr>
-            <a:spLocks xmlns:a="http://schemas.openxmlformats.org/drawingml/2006/main" noGrp="1"/>
-          </p:cNvSpPr>
-          <p:nvPr/>
-        </p:nvSpPr>
-        <p:spPr>
-          <a:xfrm xmlns:a="http://schemas.openxmlformats.org/drawingml/2006/main">
-            <a:off x="4905375" y="4362450"/>
-            <a:ext cx="476250" cy="476250"/>
-          </a:xfrm>
-          <a:prstGeom xmlns:a="http://schemas.openxmlformats.org/drawingml/2006/main" prst="rect">
-            <a:avLst/>
-          </a:prstGeom>
-          <a:solidFill xmlns:a="http://schemas.openxmlformats.org/drawingml/2006/main">
-            <a:srgbClr val="E0EFF0"/>
-          </a:solidFill>
-          <a:ln xmlns:a="http://schemas.openxmlformats.org/drawingml/2006/main" w="9525">
-            <a:solidFill>
-              <a:srgbClr val="C7D0DA"/>
-            </a:solidFill>
-            <a:prstDash val="solid"/>
-          </a:ln>
-        </p:spPr>
-      </p:sp>
-      <p:sp>
-        <p:nvSpPr>
-          <p:cNvPr id="44" name="3">
-            <a:extLst xmlns:a="http://schemas.openxmlformats.org/drawingml/2006/main">
-              <a:ext uri="{FF2B5EF4-FFF2-40B4-BE49-F238E27FC236}">
-                <a16:creationId xmlns:a16="http://schemas.microsoft.com/office/drawing/2014/main" id="{6E1595EA-7985-4007-AB35-E277D9157B81}"/>
-              </a:ext>
-            </a:extLst>
-          </p:cNvPr>
-          <p:cNvSpPr>
-            <a:spLocks xmlns:a="http://schemas.openxmlformats.org/drawingml/2006/main" noGrp="1"/>
-          </p:cNvSpPr>
-          <p:nvPr/>
-        </p:nvSpPr>
-        <p:spPr>
-          <a:xfrm xmlns:a="http://schemas.openxmlformats.org/drawingml/2006/main">
-            <a:off x="4905375" y="4362450"/>
-            <a:ext cx="476250" cy="476250"/>
-          </a:xfrm>
-          <a:prstGeom xmlns:a="http://schemas.openxmlformats.org/drawingml/2006/main" prst="rect">
-            <a:avLst/>
-          </a:prstGeom>
-          <a:noFill xmlns:a="http://schemas.openxmlformats.org/drawingml/2006/main"/>
-          <a:ln xmlns:a="http://schemas.openxmlformats.org/drawingml/2006/main" w="0">
-            <a:noFill/>
-          </a:ln>
-        </p:spPr>
-        <p:txBody>
-          <a:bodyPr xmlns:a="http://schemas.openxmlformats.org/drawingml/2006/main" wrap="none" lIns="0" tIns="0" rIns="0" bIns="0" anchor="ctr">
-            <a:noAutofit/>
-          </a:bodyPr>
-          <a:lstStyle xmlns:a="http://schemas.openxmlformats.org/drawingml/2006/main">
-            <a:defPPr algn="ctr">
-              <a:defRPr sz="2175" b="1">
-                <a:solidFill>
-                  <a:srgbClr val="17212B"/>
-                </a:solidFill>
-                <a:latin typeface="Malgun Gothic"/>
-                <a:ea typeface="Malgun Gothic"/>
-                <a:cs typeface="Malgun Gothic"/>
-              </a:defRPr>
-            </a:defPPr>
-            <a:lvl1pPr algn="ctr">
-              <a:defRPr sz="2175" b="1">
-                <a:solidFill>
-                  <a:srgbClr val="17212B"/>
-                </a:solidFill>
-                <a:latin typeface="Malgun Gothic"/>
-                <a:ea typeface="Malgun Gothic"/>
-                <a:cs typeface="Malgun Gothic"/>
-              </a:defRPr>
-            </a:lvl1pPr>
-            <a:lvl2pPr algn="ctr">
-              <a:defRPr sz="2175" b="1">
-                <a:solidFill>
-                  <a:srgbClr val="17212B"/>
-                </a:solidFill>
-                <a:latin typeface="Malgun Gothic"/>
-                <a:ea typeface="Malgun Gothic"/>
-                <a:cs typeface="Malgun Gothic"/>
-              </a:defRPr>
-            </a:lvl2pPr>
-            <a:lvl3pPr algn="ctr">
-              <a:defRPr sz="2175" b="1">
-                <a:solidFill>
-                  <a:srgbClr val="17212B"/>
-                </a:solidFill>
-                <a:latin typeface="Malgun Gothic"/>
-                <a:ea typeface="Malgun Gothic"/>
-                <a:cs typeface="Malgun Gothic"/>
-              </a:defRPr>
-            </a:lvl3pPr>
-            <a:lvl4pPr algn="ctr">
-              <a:defRPr sz="2175" b="1">
-                <a:solidFill>
-                  <a:srgbClr val="17212B"/>
-                </a:solidFill>
-                <a:latin typeface="Malgun Gothic"/>
-                <a:ea typeface="Malgun Gothic"/>
-                <a:cs typeface="Malgun Gothic"/>
-              </a:defRPr>
-            </a:lvl4pPr>
-            <a:lvl5pPr algn="ctr">
-              <a:defRPr sz="2175" b="1">
-                <a:solidFill>
-                  <a:srgbClr val="17212B"/>
-                </a:solidFill>
-                <a:latin typeface="Malgun Gothic"/>
-                <a:ea typeface="Malgun Gothic"/>
-                <a:cs typeface="Malgun Gothic"/>
-              </a:defRPr>
-            </a:lvl5pPr>
-            <a:lvl6pPr algn="ctr">
-              <a:defRPr sz="2175" b="1">
-                <a:solidFill>
-                  <a:srgbClr val="17212B"/>
-                </a:solidFill>
-                <a:latin typeface="Malgun Gothic"/>
-                <a:ea typeface="Malgun Gothic"/>
-                <a:cs typeface="Malgun Gothic"/>
-              </a:defRPr>
-            </a:lvl6pPr>
-            <a:lvl7pPr algn="ctr">
-              <a:defRPr sz="2175" b="1">
-                <a:solidFill>
-                  <a:srgbClr val="17212B"/>
-                </a:solidFill>
-                <a:latin typeface="Malgun Gothic"/>
-                <a:ea typeface="Malgun Gothic"/>
-                <a:cs typeface="Malgun Gothic"/>
-              </a:defRPr>
-            </a:lvl7pPr>
-            <a:lvl8pPr algn="ctr">
-              <a:defRPr sz="2175" b="1">
-                <a:solidFill>
-                  <a:srgbClr val="17212B"/>
-                </a:solidFill>
-                <a:latin typeface="Malgun Gothic"/>
-                <a:ea typeface="Malgun Gothic"/>
-                <a:cs typeface="Malgun Gothic"/>
-              </a:defRPr>
-            </a:lvl8pPr>
-            <a:lvl9pPr algn="ctr">
-              <a:defRPr sz="2175" b="1">
-                <a:solidFill>
-                  <a:srgbClr val="17212B"/>
-                </a:solidFill>
-                <a:latin typeface="Malgun Gothic"/>
-                <a:ea typeface="Malgun Gothic"/>
-                <a:cs typeface="Malgun Gothic"/>
-              </a:defRPr>
-            </a:lvl9pPr>
-          </a:lstStyle>
-          <a:p xmlns:a="http://schemas.openxmlformats.org/drawingml/2006/main">
-            <a:pPr algn="ctr">
-              <a:defRPr sz="2175" b="1">
-                <a:solidFill>
-                  <a:srgbClr val="17212B"/>
-                </a:solidFill>
-                <a:latin typeface="Malgun Gothic"/>
-                <a:ea typeface="Malgun Gothic"/>
-                <a:cs typeface="Malgun Gothic"/>
-              </a:defRPr>
-            </a:pPr>
-            <a:r>
-              <a:rPr sz="2175" b="1">
-                <a:solidFill>
-                  <a:srgbClr val="17212B"/>
-                </a:solidFill>
-                <a:latin typeface="Malgun Gothic"/>
-                <a:ea typeface="Malgun Gothic"/>
-                <a:cs typeface="Malgun Gothic"/>
-              </a:rPr>
-              <a:t>3</a:t>
-            </a:r>
-          </a:p>
-        </p:txBody>
-      </p:sp>
-      <p:sp>
-        <p:nvSpPr>
-          <p:cNvPr id="45" name="">
-            <a:extLst xmlns:a="http://schemas.openxmlformats.org/drawingml/2006/main">
-              <a:ext uri="{FF2B5EF4-FFF2-40B4-BE49-F238E27FC236}">
-                <a16:creationId xmlns:a16="http://schemas.microsoft.com/office/drawing/2014/main" id="{A45DA4F7-2E7A-46C7-A71D-AA9DCC1CAC8E}"/>
-              </a:ext>
-            </a:extLst>
-          </p:cNvPr>
-          <p:cNvSpPr>
-            <a:spLocks xmlns:a="http://schemas.openxmlformats.org/drawingml/2006/main" noGrp="1"/>
-          </p:cNvSpPr>
-          <p:nvPr/>
-        </p:nvSpPr>
-        <p:spPr>
-          <a:xfrm xmlns:a="http://schemas.openxmlformats.org/drawingml/2006/main">
-            <a:off x="5419725" y="4362450"/>
-            <a:ext cx="476250" cy="476250"/>
+            <a:off x="4933950" y="4591050"/>
+            <a:ext cx="571500" cy="571500"/>
           </a:xfrm>
           <a:prstGeom xmlns:a="http://schemas.openxmlformats.org/drawingml/2006/main" prst="rect">
             <a:avLst/>
@@ -23093,10 +22110,10 @@
       </p:sp>
       <p:sp>
         <p:nvSpPr>
-          <p:cNvPr id="46" name="4">
+          <p:cNvPr id="35" name="4">
             <a:extLst xmlns:a="http://schemas.openxmlformats.org/drawingml/2006/main">
               <a:ext uri="{FF2B5EF4-FFF2-40B4-BE49-F238E27FC236}">
-                <a16:creationId xmlns:a16="http://schemas.microsoft.com/office/drawing/2014/main" id="{D62F8C29-90BB-477E-A48C-E1E3462F7A2E}"/>
+                <a16:creationId xmlns:a16="http://schemas.microsoft.com/office/drawing/2014/main" id="{93E476CC-AF3B-418D-893A-A3145CB7DBD1}"/>
               </a:ext>
             </a:extLst>
           </p:cNvPr>
@@ -23107,8 +22124,8 @@
         </p:nvSpPr>
         <p:spPr>
           <a:xfrm xmlns:a="http://schemas.openxmlformats.org/drawingml/2006/main">
-            <a:off x="5419725" y="4362450"/>
-            <a:ext cx="476250" cy="476250"/>
+            <a:off x="4933950" y="4591050"/>
+            <a:ext cx="571500" cy="571500"/>
           </a:xfrm>
           <a:prstGeom xmlns:a="http://schemas.openxmlformats.org/drawingml/2006/main" prst="rect">
             <a:avLst/>
@@ -23251,10 +22268,10 @@
       </p:sp>
       <p:sp>
         <p:nvSpPr>
-          <p:cNvPr id="47" name="">
+          <p:cNvPr id="36" name="명세와 구현의 범위 불일치">
             <a:extLst xmlns:a="http://schemas.openxmlformats.org/drawingml/2006/main">
               <a:ext uri="{FF2B5EF4-FFF2-40B4-BE49-F238E27FC236}">
-                <a16:creationId xmlns:a16="http://schemas.microsoft.com/office/drawing/2014/main" id="{5A614A1B-6D84-492B-A922-AD6099EC9CD9}"/>
+                <a16:creationId xmlns:a16="http://schemas.microsoft.com/office/drawing/2014/main" id="{A531379E-0EF8-460A-B8CF-2DE3986206EC}"/>
               </a:ext>
             </a:extLst>
           </p:cNvPr>
@@ -23265,581 +22282,8 @@
         </p:nvSpPr>
         <p:spPr>
           <a:xfrm xmlns:a="http://schemas.openxmlformats.org/drawingml/2006/main">
-            <a:off x="4391025" y="4876800"/>
-            <a:ext cx="476250" cy="476250"/>
-          </a:xfrm>
-          <a:prstGeom xmlns:a="http://schemas.openxmlformats.org/drawingml/2006/main" prst="rect">
-            <a:avLst/>
-          </a:prstGeom>
-          <a:solidFill xmlns:a="http://schemas.openxmlformats.org/drawingml/2006/main">
-            <a:srgbClr val="E0EFF0"/>
-          </a:solidFill>
-          <a:ln xmlns:a="http://schemas.openxmlformats.org/drawingml/2006/main" w="9525">
-            <a:solidFill>
-              <a:srgbClr val="C7D0DA"/>
-            </a:solidFill>
-            <a:prstDash val="solid"/>
-          </a:ln>
-        </p:spPr>
-      </p:sp>
-      <p:sp>
-        <p:nvSpPr>
-          <p:cNvPr id="48" name="6">
-            <a:extLst xmlns:a="http://schemas.openxmlformats.org/drawingml/2006/main">
-              <a:ext uri="{FF2B5EF4-FFF2-40B4-BE49-F238E27FC236}">
-                <a16:creationId xmlns:a16="http://schemas.microsoft.com/office/drawing/2014/main" id="{620F7E34-9ED7-4D1E-A690-2F0C96A12A57}"/>
-              </a:ext>
-            </a:extLst>
-          </p:cNvPr>
-          <p:cNvSpPr>
-            <a:spLocks xmlns:a="http://schemas.openxmlformats.org/drawingml/2006/main" noGrp="1"/>
-          </p:cNvSpPr>
-          <p:nvPr/>
-        </p:nvSpPr>
-        <p:spPr>
-          <a:xfrm xmlns:a="http://schemas.openxmlformats.org/drawingml/2006/main">
-            <a:off x="4391025" y="4876800"/>
-            <a:ext cx="476250" cy="476250"/>
-          </a:xfrm>
-          <a:prstGeom xmlns:a="http://schemas.openxmlformats.org/drawingml/2006/main" prst="rect">
-            <a:avLst/>
-          </a:prstGeom>
-          <a:noFill xmlns:a="http://schemas.openxmlformats.org/drawingml/2006/main"/>
-          <a:ln xmlns:a="http://schemas.openxmlformats.org/drawingml/2006/main" w="0">
-            <a:noFill/>
-          </a:ln>
-        </p:spPr>
-        <p:txBody>
-          <a:bodyPr xmlns:a="http://schemas.openxmlformats.org/drawingml/2006/main" wrap="none" lIns="0" tIns="0" rIns="0" bIns="0" anchor="ctr">
-            <a:noAutofit/>
-          </a:bodyPr>
-          <a:lstStyle xmlns:a="http://schemas.openxmlformats.org/drawingml/2006/main">
-            <a:defPPr algn="ctr">
-              <a:defRPr sz="2175" b="1">
-                <a:solidFill>
-                  <a:srgbClr val="17212B"/>
-                </a:solidFill>
-                <a:latin typeface="Malgun Gothic"/>
-                <a:ea typeface="Malgun Gothic"/>
-                <a:cs typeface="Malgun Gothic"/>
-              </a:defRPr>
-            </a:defPPr>
-            <a:lvl1pPr algn="ctr">
-              <a:defRPr sz="2175" b="1">
-                <a:solidFill>
-                  <a:srgbClr val="17212B"/>
-                </a:solidFill>
-                <a:latin typeface="Malgun Gothic"/>
-                <a:ea typeface="Malgun Gothic"/>
-                <a:cs typeface="Malgun Gothic"/>
-              </a:defRPr>
-            </a:lvl1pPr>
-            <a:lvl2pPr algn="ctr">
-              <a:defRPr sz="2175" b="1">
-                <a:solidFill>
-                  <a:srgbClr val="17212B"/>
-                </a:solidFill>
-                <a:latin typeface="Malgun Gothic"/>
-                <a:ea typeface="Malgun Gothic"/>
-                <a:cs typeface="Malgun Gothic"/>
-              </a:defRPr>
-            </a:lvl2pPr>
-            <a:lvl3pPr algn="ctr">
-              <a:defRPr sz="2175" b="1">
-                <a:solidFill>
-                  <a:srgbClr val="17212B"/>
-                </a:solidFill>
-                <a:latin typeface="Malgun Gothic"/>
-                <a:ea typeface="Malgun Gothic"/>
-                <a:cs typeface="Malgun Gothic"/>
-              </a:defRPr>
-            </a:lvl3pPr>
-            <a:lvl4pPr algn="ctr">
-              <a:defRPr sz="2175" b="1">
-                <a:solidFill>
-                  <a:srgbClr val="17212B"/>
-                </a:solidFill>
-                <a:latin typeface="Malgun Gothic"/>
-                <a:ea typeface="Malgun Gothic"/>
-                <a:cs typeface="Malgun Gothic"/>
-              </a:defRPr>
-            </a:lvl4pPr>
-            <a:lvl5pPr algn="ctr">
-              <a:defRPr sz="2175" b="1">
-                <a:solidFill>
-                  <a:srgbClr val="17212B"/>
-                </a:solidFill>
-                <a:latin typeface="Malgun Gothic"/>
-                <a:ea typeface="Malgun Gothic"/>
-                <a:cs typeface="Malgun Gothic"/>
-              </a:defRPr>
-            </a:lvl5pPr>
-            <a:lvl6pPr algn="ctr">
-              <a:defRPr sz="2175" b="1">
-                <a:solidFill>
-                  <a:srgbClr val="17212B"/>
-                </a:solidFill>
-                <a:latin typeface="Malgun Gothic"/>
-                <a:ea typeface="Malgun Gothic"/>
-                <a:cs typeface="Malgun Gothic"/>
-              </a:defRPr>
-            </a:lvl6pPr>
-            <a:lvl7pPr algn="ctr">
-              <a:defRPr sz="2175" b="1">
-                <a:solidFill>
-                  <a:srgbClr val="17212B"/>
-                </a:solidFill>
-                <a:latin typeface="Malgun Gothic"/>
-                <a:ea typeface="Malgun Gothic"/>
-                <a:cs typeface="Malgun Gothic"/>
-              </a:defRPr>
-            </a:lvl7pPr>
-            <a:lvl8pPr algn="ctr">
-              <a:defRPr sz="2175" b="1">
-                <a:solidFill>
-                  <a:srgbClr val="17212B"/>
-                </a:solidFill>
-                <a:latin typeface="Malgun Gothic"/>
-                <a:ea typeface="Malgun Gothic"/>
-                <a:cs typeface="Malgun Gothic"/>
-              </a:defRPr>
-            </a:lvl8pPr>
-            <a:lvl9pPr algn="ctr">
-              <a:defRPr sz="2175" b="1">
-                <a:solidFill>
-                  <a:srgbClr val="17212B"/>
-                </a:solidFill>
-                <a:latin typeface="Malgun Gothic"/>
-                <a:ea typeface="Malgun Gothic"/>
-                <a:cs typeface="Malgun Gothic"/>
-              </a:defRPr>
-            </a:lvl9pPr>
-          </a:lstStyle>
-          <a:p xmlns:a="http://schemas.openxmlformats.org/drawingml/2006/main">
-            <a:pPr algn="ctr">
-              <a:defRPr sz="2175" b="1">
-                <a:solidFill>
-                  <a:srgbClr val="17212B"/>
-                </a:solidFill>
-                <a:latin typeface="Malgun Gothic"/>
-                <a:ea typeface="Malgun Gothic"/>
-                <a:cs typeface="Malgun Gothic"/>
-              </a:defRPr>
-            </a:pPr>
-            <a:r>
-              <a:rPr sz="2175" b="1">
-                <a:solidFill>
-                  <a:srgbClr val="17212B"/>
-                </a:solidFill>
-                <a:latin typeface="Malgun Gothic"/>
-                <a:ea typeface="Malgun Gothic"/>
-                <a:cs typeface="Malgun Gothic"/>
-              </a:rPr>
-              <a:t>6</a:t>
-            </a:r>
-          </a:p>
-        </p:txBody>
-      </p:sp>
-      <p:sp>
-        <p:nvSpPr>
-          <p:cNvPr id="49" name="">
-            <a:extLst xmlns:a="http://schemas.openxmlformats.org/drawingml/2006/main">
-              <a:ext uri="{FF2B5EF4-FFF2-40B4-BE49-F238E27FC236}">
-                <a16:creationId xmlns:a16="http://schemas.microsoft.com/office/drawing/2014/main" id="{53589874-6889-477E-B0A4-28C9FBDD35FD}"/>
-              </a:ext>
-            </a:extLst>
-          </p:cNvPr>
-          <p:cNvSpPr>
-            <a:spLocks xmlns:a="http://schemas.openxmlformats.org/drawingml/2006/main" noGrp="1"/>
-          </p:cNvSpPr>
-          <p:nvPr/>
-        </p:nvSpPr>
-        <p:spPr>
-          <a:xfrm xmlns:a="http://schemas.openxmlformats.org/drawingml/2006/main">
-            <a:off x="4905375" y="4876800"/>
-            <a:ext cx="476250" cy="476250"/>
-          </a:xfrm>
-          <a:prstGeom xmlns:a="http://schemas.openxmlformats.org/drawingml/2006/main" prst="rect">
-            <a:avLst/>
-          </a:prstGeom>
-          <a:solidFill xmlns:a="http://schemas.openxmlformats.org/drawingml/2006/main">
-            <a:srgbClr val="E0EFF0"/>
-          </a:solidFill>
-          <a:ln xmlns:a="http://schemas.openxmlformats.org/drawingml/2006/main" w="9525">
-            <a:solidFill>
-              <a:srgbClr val="C7D0DA"/>
-            </a:solidFill>
-            <a:prstDash val="solid"/>
-          </a:ln>
-        </p:spPr>
-      </p:sp>
-      <p:sp>
-        <p:nvSpPr>
-          <p:cNvPr id="50" name="7">
-            <a:extLst xmlns:a="http://schemas.openxmlformats.org/drawingml/2006/main">
-              <a:ext uri="{FF2B5EF4-FFF2-40B4-BE49-F238E27FC236}">
-                <a16:creationId xmlns:a16="http://schemas.microsoft.com/office/drawing/2014/main" id="{5D2D5F7E-ADAD-4951-843F-6C84003B87D4}"/>
-              </a:ext>
-            </a:extLst>
-          </p:cNvPr>
-          <p:cNvSpPr>
-            <a:spLocks xmlns:a="http://schemas.openxmlformats.org/drawingml/2006/main" noGrp="1"/>
-          </p:cNvSpPr>
-          <p:nvPr/>
-        </p:nvSpPr>
-        <p:spPr>
-          <a:xfrm xmlns:a="http://schemas.openxmlformats.org/drawingml/2006/main">
-            <a:off x="4905375" y="4876800"/>
-            <a:ext cx="476250" cy="476250"/>
-          </a:xfrm>
-          <a:prstGeom xmlns:a="http://schemas.openxmlformats.org/drawingml/2006/main" prst="rect">
-            <a:avLst/>
-          </a:prstGeom>
-          <a:noFill xmlns:a="http://schemas.openxmlformats.org/drawingml/2006/main"/>
-          <a:ln xmlns:a="http://schemas.openxmlformats.org/drawingml/2006/main" w="0">
-            <a:noFill/>
-          </a:ln>
-        </p:spPr>
-        <p:txBody>
-          <a:bodyPr xmlns:a="http://schemas.openxmlformats.org/drawingml/2006/main" wrap="none" lIns="0" tIns="0" rIns="0" bIns="0" anchor="ctr">
-            <a:noAutofit/>
-          </a:bodyPr>
-          <a:lstStyle xmlns:a="http://schemas.openxmlformats.org/drawingml/2006/main">
-            <a:defPPr algn="ctr">
-              <a:defRPr sz="2175" b="1">
-                <a:solidFill>
-                  <a:srgbClr val="17212B"/>
-                </a:solidFill>
-                <a:latin typeface="Malgun Gothic"/>
-                <a:ea typeface="Malgun Gothic"/>
-                <a:cs typeface="Malgun Gothic"/>
-              </a:defRPr>
-            </a:defPPr>
-            <a:lvl1pPr algn="ctr">
-              <a:defRPr sz="2175" b="1">
-                <a:solidFill>
-                  <a:srgbClr val="17212B"/>
-                </a:solidFill>
-                <a:latin typeface="Malgun Gothic"/>
-                <a:ea typeface="Malgun Gothic"/>
-                <a:cs typeface="Malgun Gothic"/>
-              </a:defRPr>
-            </a:lvl1pPr>
-            <a:lvl2pPr algn="ctr">
-              <a:defRPr sz="2175" b="1">
-                <a:solidFill>
-                  <a:srgbClr val="17212B"/>
-                </a:solidFill>
-                <a:latin typeface="Malgun Gothic"/>
-                <a:ea typeface="Malgun Gothic"/>
-                <a:cs typeface="Malgun Gothic"/>
-              </a:defRPr>
-            </a:lvl2pPr>
-            <a:lvl3pPr algn="ctr">
-              <a:defRPr sz="2175" b="1">
-                <a:solidFill>
-                  <a:srgbClr val="17212B"/>
-                </a:solidFill>
-                <a:latin typeface="Malgun Gothic"/>
-                <a:ea typeface="Malgun Gothic"/>
-                <a:cs typeface="Malgun Gothic"/>
-              </a:defRPr>
-            </a:lvl3pPr>
-            <a:lvl4pPr algn="ctr">
-              <a:defRPr sz="2175" b="1">
-                <a:solidFill>
-                  <a:srgbClr val="17212B"/>
-                </a:solidFill>
-                <a:latin typeface="Malgun Gothic"/>
-                <a:ea typeface="Malgun Gothic"/>
-                <a:cs typeface="Malgun Gothic"/>
-              </a:defRPr>
-            </a:lvl4pPr>
-            <a:lvl5pPr algn="ctr">
-              <a:defRPr sz="2175" b="1">
-                <a:solidFill>
-                  <a:srgbClr val="17212B"/>
-                </a:solidFill>
-                <a:latin typeface="Malgun Gothic"/>
-                <a:ea typeface="Malgun Gothic"/>
-                <a:cs typeface="Malgun Gothic"/>
-              </a:defRPr>
-            </a:lvl5pPr>
-            <a:lvl6pPr algn="ctr">
-              <a:defRPr sz="2175" b="1">
-                <a:solidFill>
-                  <a:srgbClr val="17212B"/>
-                </a:solidFill>
-                <a:latin typeface="Malgun Gothic"/>
-                <a:ea typeface="Malgun Gothic"/>
-                <a:cs typeface="Malgun Gothic"/>
-              </a:defRPr>
-            </a:lvl6pPr>
-            <a:lvl7pPr algn="ctr">
-              <a:defRPr sz="2175" b="1">
-                <a:solidFill>
-                  <a:srgbClr val="17212B"/>
-                </a:solidFill>
-                <a:latin typeface="Malgun Gothic"/>
-                <a:ea typeface="Malgun Gothic"/>
-                <a:cs typeface="Malgun Gothic"/>
-              </a:defRPr>
-            </a:lvl7pPr>
-            <a:lvl8pPr algn="ctr">
-              <a:defRPr sz="2175" b="1">
-                <a:solidFill>
-                  <a:srgbClr val="17212B"/>
-                </a:solidFill>
-                <a:latin typeface="Malgun Gothic"/>
-                <a:ea typeface="Malgun Gothic"/>
-                <a:cs typeface="Malgun Gothic"/>
-              </a:defRPr>
-            </a:lvl8pPr>
-            <a:lvl9pPr algn="ctr">
-              <a:defRPr sz="2175" b="1">
-                <a:solidFill>
-                  <a:srgbClr val="17212B"/>
-                </a:solidFill>
-                <a:latin typeface="Malgun Gothic"/>
-                <a:ea typeface="Malgun Gothic"/>
-                <a:cs typeface="Malgun Gothic"/>
-              </a:defRPr>
-            </a:lvl9pPr>
-          </a:lstStyle>
-          <a:p xmlns:a="http://schemas.openxmlformats.org/drawingml/2006/main">
-            <a:pPr algn="ctr">
-              <a:defRPr sz="2175" b="1">
-                <a:solidFill>
-                  <a:srgbClr val="17212B"/>
-                </a:solidFill>
-                <a:latin typeface="Malgun Gothic"/>
-                <a:ea typeface="Malgun Gothic"/>
-                <a:cs typeface="Malgun Gothic"/>
-              </a:defRPr>
-            </a:pPr>
-            <a:r>
-              <a:rPr sz="2175" b="1">
-                <a:solidFill>
-                  <a:srgbClr val="17212B"/>
-                </a:solidFill>
-                <a:latin typeface="Malgun Gothic"/>
-                <a:ea typeface="Malgun Gothic"/>
-                <a:cs typeface="Malgun Gothic"/>
-              </a:rPr>
-              <a:t>7</a:t>
-            </a:r>
-          </a:p>
-        </p:txBody>
-      </p:sp>
-      <p:sp>
-        <p:nvSpPr>
-          <p:cNvPr id="51" name="">
-            <a:extLst xmlns:a="http://schemas.openxmlformats.org/drawingml/2006/main">
-              <a:ext uri="{FF2B5EF4-FFF2-40B4-BE49-F238E27FC236}">
-                <a16:creationId xmlns:a16="http://schemas.microsoft.com/office/drawing/2014/main" id="{F5B05FA7-6003-49E9-83DA-8BB345983E1C}"/>
-              </a:ext>
-            </a:extLst>
-          </p:cNvPr>
-          <p:cNvSpPr>
-            <a:spLocks xmlns:a="http://schemas.openxmlformats.org/drawingml/2006/main" noGrp="1"/>
-          </p:cNvSpPr>
-          <p:nvPr/>
-        </p:nvSpPr>
-        <p:spPr>
-          <a:xfrm xmlns:a="http://schemas.openxmlformats.org/drawingml/2006/main">
-            <a:off x="5419725" y="4876800"/>
-            <a:ext cx="476250" cy="476250"/>
-          </a:xfrm>
-          <a:prstGeom xmlns:a="http://schemas.openxmlformats.org/drawingml/2006/main" prst="rect">
-            <a:avLst/>
-          </a:prstGeom>
-          <a:solidFill xmlns:a="http://schemas.openxmlformats.org/drawingml/2006/main">
-            <a:srgbClr val="FBE4DF"/>
-          </a:solidFill>
-          <a:ln xmlns:a="http://schemas.openxmlformats.org/drawingml/2006/main" w="9525">
-            <a:solidFill>
-              <a:srgbClr val="C7D0DA"/>
-            </a:solidFill>
-            <a:prstDash val="solid"/>
-          </a:ln>
-        </p:spPr>
-      </p:sp>
-      <p:sp>
-        <p:nvSpPr>
-          <p:cNvPr id="52" name="8">
-            <a:extLst xmlns:a="http://schemas.openxmlformats.org/drawingml/2006/main">
-              <a:ext uri="{FF2B5EF4-FFF2-40B4-BE49-F238E27FC236}">
-                <a16:creationId xmlns:a16="http://schemas.microsoft.com/office/drawing/2014/main" id="{7760CD89-045C-495A-B4F7-6F3AAADE73B3}"/>
-              </a:ext>
-            </a:extLst>
-          </p:cNvPr>
-          <p:cNvSpPr>
-            <a:spLocks xmlns:a="http://schemas.openxmlformats.org/drawingml/2006/main" noGrp="1"/>
-          </p:cNvSpPr>
-          <p:nvPr/>
-        </p:nvSpPr>
-        <p:spPr>
-          <a:xfrm xmlns:a="http://schemas.openxmlformats.org/drawingml/2006/main">
-            <a:off x="5419725" y="4876800"/>
-            <a:ext cx="476250" cy="476250"/>
-          </a:xfrm>
-          <a:prstGeom xmlns:a="http://schemas.openxmlformats.org/drawingml/2006/main" prst="rect">
-            <a:avLst/>
-          </a:prstGeom>
-          <a:noFill xmlns:a="http://schemas.openxmlformats.org/drawingml/2006/main"/>
-          <a:ln xmlns:a="http://schemas.openxmlformats.org/drawingml/2006/main" w="0">
-            <a:noFill/>
-          </a:ln>
-        </p:spPr>
-        <p:txBody>
-          <a:bodyPr xmlns:a="http://schemas.openxmlformats.org/drawingml/2006/main" wrap="none" lIns="0" tIns="0" rIns="0" bIns="0" anchor="ctr">
-            <a:noAutofit/>
-          </a:bodyPr>
-          <a:lstStyle xmlns:a="http://schemas.openxmlformats.org/drawingml/2006/main">
-            <a:defPPr algn="ctr">
-              <a:defRPr sz="2175" b="1">
-                <a:solidFill>
-                  <a:srgbClr val="17212B"/>
-                </a:solidFill>
-                <a:latin typeface="Malgun Gothic"/>
-                <a:ea typeface="Malgun Gothic"/>
-                <a:cs typeface="Malgun Gothic"/>
-              </a:defRPr>
-            </a:defPPr>
-            <a:lvl1pPr algn="ctr">
-              <a:defRPr sz="2175" b="1">
-                <a:solidFill>
-                  <a:srgbClr val="17212B"/>
-                </a:solidFill>
-                <a:latin typeface="Malgun Gothic"/>
-                <a:ea typeface="Malgun Gothic"/>
-                <a:cs typeface="Malgun Gothic"/>
-              </a:defRPr>
-            </a:lvl1pPr>
-            <a:lvl2pPr algn="ctr">
-              <a:defRPr sz="2175" b="1">
-                <a:solidFill>
-                  <a:srgbClr val="17212B"/>
-                </a:solidFill>
-                <a:latin typeface="Malgun Gothic"/>
-                <a:ea typeface="Malgun Gothic"/>
-                <a:cs typeface="Malgun Gothic"/>
-              </a:defRPr>
-            </a:lvl2pPr>
-            <a:lvl3pPr algn="ctr">
-              <a:defRPr sz="2175" b="1">
-                <a:solidFill>
-                  <a:srgbClr val="17212B"/>
-                </a:solidFill>
-                <a:latin typeface="Malgun Gothic"/>
-                <a:ea typeface="Malgun Gothic"/>
-                <a:cs typeface="Malgun Gothic"/>
-              </a:defRPr>
-            </a:lvl3pPr>
-            <a:lvl4pPr algn="ctr">
-              <a:defRPr sz="2175" b="1">
-                <a:solidFill>
-                  <a:srgbClr val="17212B"/>
-                </a:solidFill>
-                <a:latin typeface="Malgun Gothic"/>
-                <a:ea typeface="Malgun Gothic"/>
-                <a:cs typeface="Malgun Gothic"/>
-              </a:defRPr>
-            </a:lvl4pPr>
-            <a:lvl5pPr algn="ctr">
-              <a:defRPr sz="2175" b="1">
-                <a:solidFill>
-                  <a:srgbClr val="17212B"/>
-                </a:solidFill>
-                <a:latin typeface="Malgun Gothic"/>
-                <a:ea typeface="Malgun Gothic"/>
-                <a:cs typeface="Malgun Gothic"/>
-              </a:defRPr>
-            </a:lvl5pPr>
-            <a:lvl6pPr algn="ctr">
-              <a:defRPr sz="2175" b="1">
-                <a:solidFill>
-                  <a:srgbClr val="17212B"/>
-                </a:solidFill>
-                <a:latin typeface="Malgun Gothic"/>
-                <a:ea typeface="Malgun Gothic"/>
-                <a:cs typeface="Malgun Gothic"/>
-              </a:defRPr>
-            </a:lvl6pPr>
-            <a:lvl7pPr algn="ctr">
-              <a:defRPr sz="2175" b="1">
-                <a:solidFill>
-                  <a:srgbClr val="17212B"/>
-                </a:solidFill>
-                <a:latin typeface="Malgun Gothic"/>
-                <a:ea typeface="Malgun Gothic"/>
-                <a:cs typeface="Malgun Gothic"/>
-              </a:defRPr>
-            </a:lvl7pPr>
-            <a:lvl8pPr algn="ctr">
-              <a:defRPr sz="2175" b="1">
-                <a:solidFill>
-                  <a:srgbClr val="17212B"/>
-                </a:solidFill>
-                <a:latin typeface="Malgun Gothic"/>
-                <a:ea typeface="Malgun Gothic"/>
-                <a:cs typeface="Malgun Gothic"/>
-              </a:defRPr>
-            </a:lvl8pPr>
-            <a:lvl9pPr algn="ctr">
-              <a:defRPr sz="2175" b="1">
-                <a:solidFill>
-                  <a:srgbClr val="17212B"/>
-                </a:solidFill>
-                <a:latin typeface="Malgun Gothic"/>
-                <a:ea typeface="Malgun Gothic"/>
-                <a:cs typeface="Malgun Gothic"/>
-              </a:defRPr>
-            </a:lvl9pPr>
-          </a:lstStyle>
-          <a:p xmlns:a="http://schemas.openxmlformats.org/drawingml/2006/main">
-            <a:pPr algn="ctr">
-              <a:defRPr sz="2175" b="1">
-                <a:solidFill>
-                  <a:srgbClr val="17212B"/>
-                </a:solidFill>
-                <a:latin typeface="Malgun Gothic"/>
-                <a:ea typeface="Malgun Gothic"/>
-                <a:cs typeface="Malgun Gothic"/>
-              </a:defRPr>
-            </a:pPr>
-            <a:r>
-              <a:rPr sz="2175" b="1">
-                <a:solidFill>
-                  <a:srgbClr val="17212B"/>
-                </a:solidFill>
-                <a:latin typeface="Malgun Gothic"/>
-                <a:ea typeface="Malgun Gothic"/>
-                <a:cs typeface="Malgun Gothic"/>
-              </a:rPr>
-              <a:t>8</a:t>
-            </a:r>
-          </a:p>
-        </p:txBody>
-      </p:sp>
-      <p:sp>
-        <p:nvSpPr>
-          <p:cNvPr id="53" name="한 열이 더 포함됨">
-            <a:extLst xmlns:a="http://schemas.openxmlformats.org/drawingml/2006/main">
-              <a:ext uri="{FF2B5EF4-FFF2-40B4-BE49-F238E27FC236}">
-                <a16:creationId xmlns:a16="http://schemas.microsoft.com/office/drawing/2014/main" id="{6C66AB59-F9BF-4B35-9C91-CAF4CE531886}"/>
-              </a:ext>
-            </a:extLst>
-          </p:cNvPr>
-          <p:cNvSpPr>
-            <a:spLocks xmlns:a="http://schemas.openxmlformats.org/drawingml/2006/main" noGrp="1"/>
-          </p:cNvSpPr>
-          <p:nvPr/>
-        </p:nvSpPr>
-        <p:spPr>
-          <a:xfrm xmlns:a="http://schemas.openxmlformats.org/drawingml/2006/main">
-            <a:off x="4391025" y="5429250"/>
-            <a:ext cx="1952625" cy="247650"/>
+            <a:off x="609600" y="5324475"/>
+            <a:ext cx="5905500" cy="323850"/>
           </a:xfrm>
           <a:prstGeom xmlns:a="http://schemas.openxmlformats.org/drawingml/2006/main" prst="rect">
             <a:avLst/>
@@ -23855,9 +22299,9 @@
           </a:bodyPr>
           <a:lstStyle xmlns:a="http://schemas.openxmlformats.org/drawingml/2006/main">
             <a:defPPr algn="l">
-              <a:defRPr sz="1650" b="1">
-                <a:solidFill>
-                  <a:srgbClr val="B42318"/>
+              <a:defRPr sz="2025" b="1">
+                <a:solidFill>
+                  <a:srgbClr val="0B6172"/>
                 </a:solidFill>
                 <a:latin typeface="Malgun Gothic"/>
                 <a:ea typeface="Malgun Gothic"/>
@@ -23865,9 +22309,9 @@
               </a:defRPr>
             </a:defPPr>
             <a:lvl1pPr algn="l">
-              <a:defRPr sz="1650" b="1">
-                <a:solidFill>
-                  <a:srgbClr val="B42318"/>
+              <a:defRPr sz="2025" b="1">
+                <a:solidFill>
+                  <a:srgbClr val="0B6172"/>
                 </a:solidFill>
                 <a:latin typeface="Malgun Gothic"/>
                 <a:ea typeface="Malgun Gothic"/>
@@ -23875,9 +22319,9 @@
               </a:defRPr>
             </a:lvl1pPr>
             <a:lvl2pPr algn="l">
-              <a:defRPr sz="1650" b="1">
-                <a:solidFill>
-                  <a:srgbClr val="B42318"/>
+              <a:defRPr sz="2025" b="1">
+                <a:solidFill>
+                  <a:srgbClr val="0B6172"/>
                 </a:solidFill>
                 <a:latin typeface="Malgun Gothic"/>
                 <a:ea typeface="Malgun Gothic"/>
@@ -23885,9 +22329,9 @@
               </a:defRPr>
             </a:lvl2pPr>
             <a:lvl3pPr algn="l">
-              <a:defRPr sz="1650" b="1">
-                <a:solidFill>
-                  <a:srgbClr val="B42318"/>
+              <a:defRPr sz="2025" b="1">
+                <a:solidFill>
+                  <a:srgbClr val="0B6172"/>
                 </a:solidFill>
                 <a:latin typeface="Malgun Gothic"/>
                 <a:ea typeface="Malgun Gothic"/>
@@ -23895,9 +22339,9 @@
               </a:defRPr>
             </a:lvl3pPr>
             <a:lvl4pPr algn="l">
-              <a:defRPr sz="1650" b="1">
-                <a:solidFill>
-                  <a:srgbClr val="B42318"/>
+              <a:defRPr sz="2025" b="1">
+                <a:solidFill>
+                  <a:srgbClr val="0B6172"/>
                 </a:solidFill>
                 <a:latin typeface="Malgun Gothic"/>
                 <a:ea typeface="Malgun Gothic"/>
@@ -23905,9 +22349,9 @@
               </a:defRPr>
             </a:lvl4pPr>
             <a:lvl5pPr algn="l">
-              <a:defRPr sz="1650" b="1">
-                <a:solidFill>
-                  <a:srgbClr val="B42318"/>
+              <a:defRPr sz="2025" b="1">
+                <a:solidFill>
+                  <a:srgbClr val="0B6172"/>
                 </a:solidFill>
                 <a:latin typeface="Malgun Gothic"/>
                 <a:ea typeface="Malgun Gothic"/>
@@ -23915,9 +22359,9 @@
               </a:defRPr>
             </a:lvl5pPr>
             <a:lvl6pPr algn="l">
-              <a:defRPr sz="1650" b="1">
-                <a:solidFill>
-                  <a:srgbClr val="B42318"/>
+              <a:defRPr sz="2025" b="1">
+                <a:solidFill>
+                  <a:srgbClr val="0B6172"/>
                 </a:solidFill>
                 <a:latin typeface="Malgun Gothic"/>
                 <a:ea typeface="Malgun Gothic"/>
@@ -23925,9 +22369,9 @@
               </a:defRPr>
             </a:lvl6pPr>
             <a:lvl7pPr algn="l">
-              <a:defRPr sz="1650" b="1">
-                <a:solidFill>
-                  <a:srgbClr val="B42318"/>
+              <a:defRPr sz="2025" b="1">
+                <a:solidFill>
+                  <a:srgbClr val="0B6172"/>
                 </a:solidFill>
                 <a:latin typeface="Malgun Gothic"/>
                 <a:ea typeface="Malgun Gothic"/>
@@ -23935,9 +22379,9 @@
               </a:defRPr>
             </a:lvl7pPr>
             <a:lvl8pPr algn="l">
-              <a:defRPr sz="1650" b="1">
-                <a:solidFill>
-                  <a:srgbClr val="B42318"/>
+              <a:defRPr sz="2025" b="1">
+                <a:solidFill>
+                  <a:srgbClr val="0B6172"/>
                 </a:solidFill>
                 <a:latin typeface="Malgun Gothic"/>
                 <a:ea typeface="Malgun Gothic"/>
@@ -23945,9 +22389,9 @@
               </a:defRPr>
             </a:lvl8pPr>
             <a:lvl9pPr algn="l">
-              <a:defRPr sz="1650" b="1">
-                <a:solidFill>
-                  <a:srgbClr val="B42318"/>
+              <a:defRPr sz="2025" b="1">
+                <a:solidFill>
+                  <a:srgbClr val="0B6172"/>
                 </a:solidFill>
                 <a:latin typeface="Malgun Gothic"/>
                 <a:ea typeface="Malgun Gothic"/>
@@ -23957,9 +22401,9 @@
           </a:lstStyle>
           <a:p xmlns:a="http://schemas.openxmlformats.org/drawingml/2006/main">
             <a:pPr algn="l">
-              <a:defRPr sz="1650" b="1">
-                <a:solidFill>
-                  <a:srgbClr val="B42318"/>
+              <a:defRPr sz="2025" b="1">
+                <a:solidFill>
+                  <a:srgbClr val="0B6172"/>
                 </a:solidFill>
                 <a:latin typeface="Malgun Gothic"/>
                 <a:ea typeface="Malgun Gothic"/>
@@ -23967,25 +22411,25 @@
               </a:defRPr>
             </a:pPr>
             <a:r>
-              <a:rPr sz="1650" b="1">
-                <a:solidFill>
-                  <a:srgbClr val="B42318"/>
+              <a:rPr sz="2025" b="1">
+                <a:solidFill>
+                  <a:srgbClr val="0B6172"/>
                 </a:solidFill>
                 <a:latin typeface="Malgun Gothic"/>
                 <a:ea typeface="Malgun Gothic"/>
                 <a:cs typeface="Malgun Gothic"/>
               </a:rPr>
-              <a:t>한 열이 더 포함됨</a:t>
+              <a:t>명세와 구현의 범위 불일치</a:t>
             </a:r>
           </a:p>
         </p:txBody>
       </p:sp>
       <p:sp>
         <p:nvSpPr>
-          <p:cNvPr id="54" name="">
+          <p:cNvPr id="37" name="">
             <a:extLst xmlns:a="http://schemas.openxmlformats.org/drawingml/2006/main">
               <a:ext uri="{FF2B5EF4-FFF2-40B4-BE49-F238E27FC236}">
-                <a16:creationId xmlns:a16="http://schemas.microsoft.com/office/drawing/2014/main" id="{8E54E517-9049-4822-8143-1F826D73C34D}"/>
+                <a16:creationId xmlns:a16="http://schemas.microsoft.com/office/drawing/2014/main" id="{E58C50D0-C930-42DA-8988-4AFCB155FFBB}"/>
               </a:ext>
             </a:extLst>
           </p:cNvPr>
@@ -23996,8 +22440,8 @@
         </p:nvSpPr>
         <p:spPr>
           <a:xfrm xmlns:a="http://schemas.openxmlformats.org/drawingml/2006/main">
-            <a:off x="6743700" y="1638300"/>
-            <a:ext cx="19050" cy="3962400"/>
+            <a:off x="6743700" y="2152650"/>
+            <a:ext cx="19050" cy="3457575"/>
           </a:xfrm>
           <a:prstGeom xmlns:a="http://schemas.openxmlformats.org/drawingml/2006/main" prst="rect">
             <a:avLst/>
@@ -24013,10 +22457,10 @@
       </p:sp>
       <p:sp>
         <p:nvSpPr>
-          <p:cNvPr id="55" name="조사에서 연결한 근거">
+          <p:cNvPr id="38" name="조사에서 연결한 근거">
             <a:extLst xmlns:a="http://schemas.openxmlformats.org/drawingml/2006/main">
               <a:ext uri="{FF2B5EF4-FFF2-40B4-BE49-F238E27FC236}">
-                <a16:creationId xmlns:a16="http://schemas.microsoft.com/office/drawing/2014/main" id="{294BCCE6-DA27-4DD0-88A8-CDC8F1A47AEE}"/>
+                <a16:creationId xmlns:a16="http://schemas.microsoft.com/office/drawing/2014/main" id="{2FBDC8C5-AF33-461E-80A7-7C323DDEF9BB}"/>
               </a:ext>
             </a:extLst>
           </p:cNvPr>
@@ -24027,8 +22471,8 @@
         </p:nvSpPr>
         <p:spPr>
           <a:xfrm xmlns:a="http://schemas.openxmlformats.org/drawingml/2006/main">
-            <a:off x="7162800" y="1638300"/>
-            <a:ext cx="4381500" cy="342900"/>
+            <a:off x="7162800" y="2152650"/>
+            <a:ext cx="4419600" cy="342900"/>
           </a:xfrm>
           <a:prstGeom xmlns:a="http://schemas.openxmlformats.org/drawingml/2006/main" prst="rect">
             <a:avLst/>
@@ -24171,10 +22615,10 @@
       </p:sp>
       <p:sp>
         <p:nvSpPr>
-          <p:cNvPr id="56" name="01  실패 테스트">
+          <p:cNvPr id="39" name="01  실패 테스트">
             <a:extLst xmlns:a="http://schemas.openxmlformats.org/drawingml/2006/main">
               <a:ext uri="{FF2B5EF4-FFF2-40B4-BE49-F238E27FC236}">
-                <a16:creationId xmlns:a16="http://schemas.microsoft.com/office/drawing/2014/main" id="{AA2691D5-DEB2-43C1-B541-67FC0E32C793}"/>
+                <a16:creationId xmlns:a16="http://schemas.microsoft.com/office/drawing/2014/main" id="{44FBF53B-E50F-4FE9-85E0-53CCB80D2B82}"/>
               </a:ext>
             </a:extLst>
           </p:cNvPr>
@@ -24185,7 +22629,7 @@
         </p:nvSpPr>
         <p:spPr>
           <a:xfrm xmlns:a="http://schemas.openxmlformats.org/drawingml/2006/main">
-            <a:off x="7162800" y="2247900"/>
+            <a:off x="7162800" y="2695575"/>
             <a:ext cx="4419600" cy="304800"/>
           </a:xfrm>
           <a:prstGeom xmlns:a="http://schemas.openxmlformats.org/drawingml/2006/main" prst="rect">
@@ -24329,10 +22773,10 @@
       </p:sp>
       <p:sp>
         <p:nvSpPr>
-          <p:cNvPr id="57" name="test_crop_excludes_&#10;end_coordinate">
+          <p:cNvPr id="40" name="test_crop_excludes_&#10;end_coordinate">
             <a:extLst xmlns:a="http://schemas.openxmlformats.org/drawingml/2006/main">
               <a:ext uri="{FF2B5EF4-FFF2-40B4-BE49-F238E27FC236}">
-                <a16:creationId xmlns:a16="http://schemas.microsoft.com/office/drawing/2014/main" id="{5433A4E8-93FF-41F9-B842-9331AB8C6DCB}"/>
+                <a16:creationId xmlns:a16="http://schemas.microsoft.com/office/drawing/2014/main" id="{EA51D77A-B59E-4F97-A1DB-4D55515D8C6B}"/>
               </a:ext>
             </a:extLst>
           </p:cNvPr>
@@ -24343,7 +22787,7 @@
         </p:nvSpPr>
         <p:spPr>
           <a:xfrm xmlns:a="http://schemas.openxmlformats.org/drawingml/2006/main">
-            <a:off x="7162800" y="2600325"/>
+            <a:off x="7162800" y="3038475"/>
             <a:ext cx="4419600" cy="609600"/>
           </a:xfrm>
           <a:prstGeom xmlns:a="http://schemas.openxmlformats.org/drawingml/2006/main" prst="rect">
@@ -24510,10 +22954,10 @@
       </p:sp>
       <p:sp>
         <p:nvSpPr>
-          <p:cNvPr id="58" name="02  제품의 호출 경로">
+          <p:cNvPr id="41" name="02  제품의 호출 경로">
             <a:extLst xmlns:a="http://schemas.openxmlformats.org/drawingml/2006/main">
               <a:ext uri="{FF2B5EF4-FFF2-40B4-BE49-F238E27FC236}">
-                <a16:creationId xmlns:a16="http://schemas.microsoft.com/office/drawing/2014/main" id="{39EB092B-7CE1-41C0-84B5-FF10755F5AA7}"/>
+                <a16:creationId xmlns:a16="http://schemas.microsoft.com/office/drawing/2014/main" id="{8C4BBD1B-5662-4408-B29C-15B1727B426B}"/>
               </a:ext>
             </a:extLst>
           </p:cNvPr>
@@ -24524,7 +22968,7 @@
         </p:nvSpPr>
         <p:spPr>
           <a:xfrm xmlns:a="http://schemas.openxmlformats.org/drawingml/2006/main">
-            <a:off x="7162800" y="3400425"/>
+            <a:off x="7162800" y="3829050"/>
             <a:ext cx="4419600" cy="304800"/>
           </a:xfrm>
           <a:prstGeom xmlns:a="http://schemas.openxmlformats.org/drawingml/2006/main" prst="rect">
@@ -24668,10 +23112,10 @@
       </p:sp>
       <p:sp>
         <p:nvSpPr>
-          <p:cNvPr id="59" name="cli.main → process_image → crop">
+          <p:cNvPr id="42" name="cli.main → process_image → crop">
             <a:extLst xmlns:a="http://schemas.openxmlformats.org/drawingml/2006/main">
               <a:ext uri="{FF2B5EF4-FFF2-40B4-BE49-F238E27FC236}">
-                <a16:creationId xmlns:a16="http://schemas.microsoft.com/office/drawing/2014/main" id="{BED4F45C-7071-4321-A545-BFA6F35E9693}"/>
+                <a16:creationId xmlns:a16="http://schemas.microsoft.com/office/drawing/2014/main" id="{671ECE44-AD9E-4C0C-8F42-0D47A300A72F}"/>
               </a:ext>
             </a:extLst>
           </p:cNvPr>
@@ -24682,7 +23126,7 @@
         </p:nvSpPr>
         <p:spPr>
           <a:xfrm xmlns:a="http://schemas.openxmlformats.org/drawingml/2006/main">
-            <a:off x="7162800" y="3781425"/>
+            <a:off x="7162800" y="4191000"/>
             <a:ext cx="4419600" cy="333375"/>
           </a:xfrm>
           <a:prstGeom xmlns:a="http://schemas.openxmlformats.org/drawingml/2006/main" prst="rect">
@@ -24826,10 +23270,10 @@
       </p:sp>
       <p:sp>
         <p:nvSpPr>
-          <p:cNvPr id="60" name="03  계약과 다른 구현">
+          <p:cNvPr id="43" name="03  끝 좌표까지 포함한 구현">
             <a:extLst xmlns:a="http://schemas.openxmlformats.org/drawingml/2006/main">
               <a:ext uri="{FF2B5EF4-FFF2-40B4-BE49-F238E27FC236}">
-                <a16:creationId xmlns:a16="http://schemas.microsoft.com/office/drawing/2014/main" id="{1F1B1FF5-2C9A-409F-850C-9ABF63C4CA8E}"/>
+                <a16:creationId xmlns:a16="http://schemas.microsoft.com/office/drawing/2014/main" id="{A3160976-531B-487E-8338-CA038AA5DD30}"/>
               </a:ext>
             </a:extLst>
           </p:cNvPr>
@@ -24840,7 +23284,7 @@
         </p:nvSpPr>
         <p:spPr>
           <a:xfrm xmlns:a="http://schemas.openxmlformats.org/drawingml/2006/main">
-            <a:off x="7162800" y="4352925"/>
+            <a:off x="7162800" y="4781550"/>
             <a:ext cx="4419600" cy="304800"/>
           </a:xfrm>
           <a:prstGeom xmlns:a="http://schemas.openxmlformats.org/drawingml/2006/main" prst="rect">
@@ -24977,17 +23421,17 @@
                 <a:ea typeface="Malgun Gothic"/>
                 <a:cs typeface="Malgun Gothic"/>
               </a:rPr>
-              <a:t>03  계약과 다른 구현</a:t>
+              <a:t>03  끝 좌표까지 포함한 구현</a:t>
             </a:r>
           </a:p>
         </p:txBody>
       </p:sp>
       <p:sp>
         <p:nvSpPr>
-          <p:cNvPr id="61" name="row[x_start : x_end + 1]">
+          <p:cNvPr id="44" name="row[x_start : x_end + 1]">
             <a:extLst xmlns:a="http://schemas.openxmlformats.org/drawingml/2006/main">
               <a:ext uri="{FF2B5EF4-FFF2-40B4-BE49-F238E27FC236}">
-                <a16:creationId xmlns:a16="http://schemas.microsoft.com/office/drawing/2014/main" id="{D08E81A9-F3B5-45E0-843D-20FAEDC5B291}"/>
+                <a16:creationId xmlns:a16="http://schemas.microsoft.com/office/drawing/2014/main" id="{2AAC435E-7E47-4FE0-AF8D-BFA47598FC0C}"/>
               </a:ext>
             </a:extLst>
           </p:cNvPr>
@@ -24998,8 +23442,8 @@
         </p:nvSpPr>
         <p:spPr>
           <a:xfrm xmlns:a="http://schemas.openxmlformats.org/drawingml/2006/main">
-            <a:off x="7162800" y="4743450"/>
-            <a:ext cx="4419600" cy="371475"/>
+            <a:off x="7162800" y="5200650"/>
+            <a:ext cx="4419600" cy="381000"/>
           </a:xfrm>
           <a:prstGeom xmlns:a="http://schemas.openxmlformats.org/drawingml/2006/main" prst="rect">
             <a:avLst/>
@@ -25142,168 +23586,10 @@
       </p:sp>
       <p:sp>
         <p:nvSpPr>
-          <p:cNvPr id="62" name="계약: [x_start, x_end)">
+          <p:cNvPr id="45" name="Legacy module connection">
             <a:extLst xmlns:a="http://schemas.openxmlformats.org/drawingml/2006/main">
               <a:ext uri="{FF2B5EF4-FFF2-40B4-BE49-F238E27FC236}">
-                <a16:creationId xmlns:a16="http://schemas.microsoft.com/office/drawing/2014/main" id="{C4B78BDE-9875-45A2-AF72-444D1D0DBC28}"/>
-              </a:ext>
-            </a:extLst>
-          </p:cNvPr>
-          <p:cNvSpPr>
-            <a:spLocks xmlns:a="http://schemas.openxmlformats.org/drawingml/2006/main" noGrp="1"/>
-          </p:cNvSpPr>
-          <p:nvPr/>
-        </p:nvSpPr>
-        <p:spPr>
-          <a:xfrm xmlns:a="http://schemas.openxmlformats.org/drawingml/2006/main">
-            <a:off x="7162800" y="5210175"/>
-            <a:ext cx="4419600" cy="323850"/>
-          </a:xfrm>
-          <a:prstGeom xmlns:a="http://schemas.openxmlformats.org/drawingml/2006/main" prst="rect">
-            <a:avLst/>
-          </a:prstGeom>
-          <a:noFill xmlns:a="http://schemas.openxmlformats.org/drawingml/2006/main"/>
-          <a:ln xmlns:a="http://schemas.openxmlformats.org/drawingml/2006/main" w="0">
-            <a:noFill/>
-          </a:ln>
-        </p:spPr>
-        <p:txBody>
-          <a:bodyPr xmlns:a="http://schemas.openxmlformats.org/drawingml/2006/main" wrap="none" lIns="0" tIns="0" rIns="0" bIns="0" anchor="ctr">
-            <a:noAutofit/>
-          </a:bodyPr>
-          <a:lstStyle xmlns:a="http://schemas.openxmlformats.org/drawingml/2006/main">
-            <a:defPPr algn="l">
-              <a:defRPr sz="1950" b="0">
-                <a:solidFill>
-                  <a:srgbClr val="4D5A68"/>
-                </a:solidFill>
-                <a:latin typeface="Consolas"/>
-                <a:ea typeface="Consolas"/>
-                <a:cs typeface="Consolas"/>
-              </a:defRPr>
-            </a:defPPr>
-            <a:lvl1pPr algn="l">
-              <a:defRPr sz="1950" b="0">
-                <a:solidFill>
-                  <a:srgbClr val="4D5A68"/>
-                </a:solidFill>
-                <a:latin typeface="Consolas"/>
-                <a:ea typeface="Consolas"/>
-                <a:cs typeface="Consolas"/>
-              </a:defRPr>
-            </a:lvl1pPr>
-            <a:lvl2pPr algn="l">
-              <a:defRPr sz="1950" b="0">
-                <a:solidFill>
-                  <a:srgbClr val="4D5A68"/>
-                </a:solidFill>
-                <a:latin typeface="Consolas"/>
-                <a:ea typeface="Consolas"/>
-                <a:cs typeface="Consolas"/>
-              </a:defRPr>
-            </a:lvl2pPr>
-            <a:lvl3pPr algn="l">
-              <a:defRPr sz="1950" b="0">
-                <a:solidFill>
-                  <a:srgbClr val="4D5A68"/>
-                </a:solidFill>
-                <a:latin typeface="Consolas"/>
-                <a:ea typeface="Consolas"/>
-                <a:cs typeface="Consolas"/>
-              </a:defRPr>
-            </a:lvl3pPr>
-            <a:lvl4pPr algn="l">
-              <a:defRPr sz="1950" b="0">
-                <a:solidFill>
-                  <a:srgbClr val="4D5A68"/>
-                </a:solidFill>
-                <a:latin typeface="Consolas"/>
-                <a:ea typeface="Consolas"/>
-                <a:cs typeface="Consolas"/>
-              </a:defRPr>
-            </a:lvl4pPr>
-            <a:lvl5pPr algn="l">
-              <a:defRPr sz="1950" b="0">
-                <a:solidFill>
-                  <a:srgbClr val="4D5A68"/>
-                </a:solidFill>
-                <a:latin typeface="Consolas"/>
-                <a:ea typeface="Consolas"/>
-                <a:cs typeface="Consolas"/>
-              </a:defRPr>
-            </a:lvl5pPr>
-            <a:lvl6pPr algn="l">
-              <a:defRPr sz="1950" b="0">
-                <a:solidFill>
-                  <a:srgbClr val="4D5A68"/>
-                </a:solidFill>
-                <a:latin typeface="Consolas"/>
-                <a:ea typeface="Consolas"/>
-                <a:cs typeface="Consolas"/>
-              </a:defRPr>
-            </a:lvl6pPr>
-            <a:lvl7pPr algn="l">
-              <a:defRPr sz="1950" b="0">
-                <a:solidFill>
-                  <a:srgbClr val="4D5A68"/>
-                </a:solidFill>
-                <a:latin typeface="Consolas"/>
-                <a:ea typeface="Consolas"/>
-                <a:cs typeface="Consolas"/>
-              </a:defRPr>
-            </a:lvl7pPr>
-            <a:lvl8pPr algn="l">
-              <a:defRPr sz="1950" b="0">
-                <a:solidFill>
-                  <a:srgbClr val="4D5A68"/>
-                </a:solidFill>
-                <a:latin typeface="Consolas"/>
-                <a:ea typeface="Consolas"/>
-                <a:cs typeface="Consolas"/>
-              </a:defRPr>
-            </a:lvl8pPr>
-            <a:lvl9pPr algn="l">
-              <a:defRPr sz="1950" b="0">
-                <a:solidFill>
-                  <a:srgbClr val="4D5A68"/>
-                </a:solidFill>
-                <a:latin typeface="Consolas"/>
-                <a:ea typeface="Consolas"/>
-                <a:cs typeface="Consolas"/>
-              </a:defRPr>
-            </a:lvl9pPr>
-          </a:lstStyle>
-          <a:p xmlns:a="http://schemas.openxmlformats.org/drawingml/2006/main">
-            <a:pPr algn="l">
-              <a:defRPr sz="1950" b="0">
-                <a:solidFill>
-                  <a:srgbClr val="4D5A68"/>
-                </a:solidFill>
-                <a:latin typeface="Consolas"/>
-                <a:ea typeface="Consolas"/>
-                <a:cs typeface="Consolas"/>
-              </a:defRPr>
-            </a:pPr>
-            <a:r>
-              <a:rPr sz="1950" b="0">
-                <a:solidFill>
-                  <a:srgbClr val="4D5A68"/>
-                </a:solidFill>
-                <a:latin typeface="Consolas"/>
-                <a:ea typeface="Consolas"/>
-                <a:cs typeface="Consolas"/>
-              </a:rPr>
-              <a:t>계약: [x_start, x_end)</a:t>
-            </a:r>
-          </a:p>
-        </p:txBody>
-      </p:sp>
-      <p:sp>
-        <p:nvSpPr>
-          <p:cNvPr id="63" name="Legacy module connection">
-            <a:extLst xmlns:a="http://schemas.openxmlformats.org/drawingml/2006/main">
-              <a:ext uri="{FF2B5EF4-FFF2-40B4-BE49-F238E27FC236}">
-                <a16:creationId xmlns:a16="http://schemas.microsoft.com/office/drawing/2014/main" id="{6C2C5EE2-7B33-4D8A-B6EF-400F6B2F30A3}"/>
+                <a16:creationId xmlns:a16="http://schemas.microsoft.com/office/drawing/2014/main" id="{DA0EF555-8486-4C65-944F-4344EA0EFCD9}"/>
               </a:ext>
             </a:extLst>
           </p:cNvPr>
@@ -25459,7 +23745,7 @@
     </p:spTree>
     <p:extLst>
       <p:ext uri="{BB962C8B-B14F-4D97-AF65-F5344CB8AC3E}">
-        <p14:creationId xmlns:p14="http://schemas.microsoft.com/office/powerpoint/2010/main" val="708916967"/>
+        <p14:creationId xmlns:p14="http://schemas.microsoft.com/office/powerpoint/2010/main" val="1040626971"/>
       </p:ext>
     </p:extLst>
   </p:cSld>
@@ -25487,10 +23773,10 @@
       </p:grpSpPr>
       <p:sp>
         <p:nvSpPr>
-          <p:cNvPr id="18" name="ACT 0 · 조사 결과 읽기">
+          <p:cNvPr id="21" name="ACT 0 · 전달한 Context와 실행 환경">
             <a:extLst xmlns:a="http://schemas.openxmlformats.org/drawingml/2006/main">
               <a:ext uri="{FF2B5EF4-FFF2-40B4-BE49-F238E27FC236}">
-                <a16:creationId xmlns:a16="http://schemas.microsoft.com/office/drawing/2014/main" id="{B585B08C-C4D1-4CC8-BBA5-ECA534897BC4}"/>
+                <a16:creationId xmlns:a16="http://schemas.microsoft.com/office/drawing/2014/main" id="{69866F0E-E51E-44E9-9A37-3BCEAF6D441B}"/>
               </a:ext>
             </a:extLst>
           </p:cNvPr>
@@ -25638,7 +23924,7 @@
                 <a:ea typeface="Malgun Gothic"/>
                 <a:cs typeface="Malgun Gothic"/>
               </a:rPr>
-              <a:t>ACT 0 · 조사 결과 읽기</a:t>
+              <a:t>ACT 0 · 전달한 Context와 실행 환경</a:t>
             </a:r>
           </a:p>
         </p:txBody>
@@ -25648,7 +23934,7 @@
           <p:cNvPr id="2" name="S06">
             <a:extLst xmlns:a="http://schemas.openxmlformats.org/drawingml/2006/main">
               <a:ext uri="{FF2B5EF4-FFF2-40B4-BE49-F238E27FC236}">
-                <a16:creationId xmlns:a16="http://schemas.microsoft.com/office/drawing/2014/main" id="{42FFBD4C-29B1-4B3E-962D-EC995EDFE13D}"/>
+                <a16:creationId xmlns:a16="http://schemas.microsoft.com/office/drawing/2014/main" id="{90DF5958-A4C1-441C-9EC6-7384845EFBA7}"/>
               </a:ext>
             </a:extLst>
           </p:cNvPr>
@@ -25806,7 +24092,7 @@
           <p:cNvPr id="3" name="관찰 결과와 실행 제한을 분리한다">
             <a:extLst xmlns:a="http://schemas.openxmlformats.org/drawingml/2006/main">
               <a:ext uri="{FF2B5EF4-FFF2-40B4-BE49-F238E27FC236}">
-                <a16:creationId xmlns:a16="http://schemas.microsoft.com/office/drawing/2014/main" id="{54703483-3FE8-453C-A301-B31E4E2744C0}"/>
+                <a16:creationId xmlns:a16="http://schemas.microsoft.com/office/drawing/2014/main" id="{8611F30E-3F1D-4FAC-A56F-19CE90A14B3E}"/>
               </a:ext>
             </a:extLst>
           </p:cNvPr>
@@ -25964,7 +24250,7 @@
           <p:cNvPr id="4" name="">
             <a:extLst xmlns:a="http://schemas.openxmlformats.org/drawingml/2006/main">
               <a:ext uri="{FF2B5EF4-FFF2-40B4-BE49-F238E27FC236}">
-                <a16:creationId xmlns:a16="http://schemas.microsoft.com/office/drawing/2014/main" id="{8ECC2D5F-98EC-4838-A495-C3BD6B547B04}"/>
+                <a16:creationId xmlns:a16="http://schemas.microsoft.com/office/drawing/2014/main" id="{EC791289-02AC-4D8E-B161-BE506FBB4C78}"/>
               </a:ext>
             </a:extLst>
           </p:cNvPr>
@@ -25992,10 +24278,10 @@
       </p:sp>
       <p:sp>
         <p:nvSpPr>
-          <p:cNvPr id="5" name="TRIAL-001 기록 재구성 · Codex CLI 0.154.0 · 단일 읽기 전용 조사">
+          <p:cNvPr id="5" name="TRIAL-001 관찰 + Context 범위의 교육용 해석 · Codex CLI 0.154.0 · 읽기 전">
             <a:extLst xmlns:a="http://schemas.openxmlformats.org/drawingml/2006/main">
               <a:ext uri="{FF2B5EF4-FFF2-40B4-BE49-F238E27FC236}">
-                <a16:creationId xmlns:a16="http://schemas.microsoft.com/office/drawing/2014/main" id="{F54EA3A5-4B88-41ED-95A0-1B4B95C11537}"/>
+                <a16:creationId xmlns:a16="http://schemas.microsoft.com/office/drawing/2014/main" id="{F4118E60-08BA-4532-98C5-AE1FDF7F9636}"/>
               </a:ext>
             </a:extLst>
           </p:cNvPr>
@@ -26143,17 +24429,17 @@
                 <a:ea typeface="Malgun Gothic"/>
                 <a:cs typeface="Malgun Gothic"/>
               </a:rPr>
-              <a:t>TRIAL-001 기록 재구성 · Codex CLI 0.154.0 · 단일 읽기 전용 조사</a:t>
+              <a:t>TRIAL-001 관찰 + Context 범위의 교육용 해석 · Codex CLI 0.154.0 · 읽기 전용</a:t>
             </a:r>
           </a:p>
         </p:txBody>
       </p:sp>
       <p:sp>
         <p:nvSpPr>
-          <p:cNvPr id="6" name="환경 오류 3건은 crop 결함의 증거가 아닙니다. 이 조사에서 코드는 수정하지 않았습니다.">
+          <p:cNvPr id="6" name="Chatbot과의 비교 실험 아님 · 이 Trial에서 코드 수정·읽기 전용 권한 해제 없음">
             <a:extLst xmlns:a="http://schemas.openxmlformats.org/drawingml/2006/main">
               <a:ext uri="{FF2B5EF4-FFF2-40B4-BE49-F238E27FC236}">
-                <a16:creationId xmlns:a16="http://schemas.microsoft.com/office/drawing/2014/main" id="{E419A8F2-6F01-4C4D-B048-5EA44BA5142D}"/>
+                <a16:creationId xmlns:a16="http://schemas.microsoft.com/office/drawing/2014/main" id="{18EB809A-A64E-421C-941C-EE4095C10C63}"/>
               </a:ext>
             </a:extLst>
           </p:cNvPr>
@@ -26301,17 +24587,17 @@
                 <a:ea typeface="Malgun Gothic"/>
                 <a:cs typeface="Malgun Gothic"/>
               </a:rPr>
-              <a:t>환경 오류 3건은 crop 결함의 증거가 아닙니다. 이 조사에서 코드는 수정하지 않았습니다.</a:t>
+              <a:t>Chatbot과의 비교 실험 아님 · 이 Trial에서 코드 수정·읽기 전용 권한 해제 없음</a:t>
             </a:r>
           </a:p>
         </p:txBody>
       </p:sp>
       <p:sp>
         <p:nvSpPr>
-          <p:cNvPr id="7" name="코드에서 확인한 문제">
+          <p:cNvPr id="7" name="Chatbot에 코드·명세만 골라 넣었다면?">
             <a:extLst xmlns:a="http://schemas.openxmlformats.org/drawingml/2006/main">
               <a:ext uri="{FF2B5EF4-FFF2-40B4-BE49-F238E27FC236}">
-                <a16:creationId xmlns:a16="http://schemas.microsoft.com/office/drawing/2014/main" id="{B9372716-2FB0-4B82-85CA-C56A71A054AD}"/>
+                <a16:creationId xmlns:a16="http://schemas.microsoft.com/office/drawing/2014/main" id="{B456C658-A256-4CFB-B16B-B61654CB0B69}"/>
               </a:ext>
             </a:extLst>
           </p:cNvPr>
@@ -26322,8 +24608,8 @@
         </p:nvSpPr>
         <p:spPr>
           <a:xfrm xmlns:a="http://schemas.openxmlformats.org/drawingml/2006/main">
-            <a:off x="609600" y="2266950"/>
-            <a:ext cx="5162550" cy="419100"/>
+            <a:off x="609600" y="1647825"/>
+            <a:ext cx="10972800" cy="400050"/>
           </a:xfrm>
           <a:prstGeom xmlns:a="http://schemas.openxmlformats.org/drawingml/2006/main" prst="rect">
             <a:avLst/>
@@ -26339,9 +24625,9 @@
           </a:bodyPr>
           <a:lstStyle xmlns:a="http://schemas.openxmlformats.org/drawingml/2006/main">
             <a:defPPr algn="l">
-              <a:defRPr sz="2550" b="1">
-                <a:solidFill>
-                  <a:srgbClr val="0B6172"/>
+              <a:defRPr sz="2325" b="1">
+                <a:solidFill>
+                  <a:srgbClr val="17212B"/>
                 </a:solidFill>
                 <a:latin typeface="Malgun Gothic"/>
                 <a:ea typeface="Malgun Gothic"/>
@@ -26349,9 +24635,9 @@
               </a:defRPr>
             </a:defPPr>
             <a:lvl1pPr algn="l">
-              <a:defRPr sz="2550" b="1">
-                <a:solidFill>
-                  <a:srgbClr val="0B6172"/>
+              <a:defRPr sz="2325" b="1">
+                <a:solidFill>
+                  <a:srgbClr val="17212B"/>
                 </a:solidFill>
                 <a:latin typeface="Malgun Gothic"/>
                 <a:ea typeface="Malgun Gothic"/>
@@ -26359,9 +24645,9 @@
               </a:defRPr>
             </a:lvl1pPr>
             <a:lvl2pPr algn="l">
-              <a:defRPr sz="2550" b="1">
-                <a:solidFill>
-                  <a:srgbClr val="0B6172"/>
+              <a:defRPr sz="2325" b="1">
+                <a:solidFill>
+                  <a:srgbClr val="17212B"/>
                 </a:solidFill>
                 <a:latin typeface="Malgun Gothic"/>
                 <a:ea typeface="Malgun Gothic"/>
@@ -26369,9 +24655,9 @@
               </a:defRPr>
             </a:lvl2pPr>
             <a:lvl3pPr algn="l">
-              <a:defRPr sz="2550" b="1">
-                <a:solidFill>
-                  <a:srgbClr val="0B6172"/>
+              <a:defRPr sz="2325" b="1">
+                <a:solidFill>
+                  <a:srgbClr val="17212B"/>
                 </a:solidFill>
                 <a:latin typeface="Malgun Gothic"/>
                 <a:ea typeface="Malgun Gothic"/>
@@ -26379,9 +24665,9 @@
               </a:defRPr>
             </a:lvl3pPr>
             <a:lvl4pPr algn="l">
-              <a:defRPr sz="2550" b="1">
-                <a:solidFill>
-                  <a:srgbClr val="0B6172"/>
+              <a:defRPr sz="2325" b="1">
+                <a:solidFill>
+                  <a:srgbClr val="17212B"/>
                 </a:solidFill>
                 <a:latin typeface="Malgun Gothic"/>
                 <a:ea typeface="Malgun Gothic"/>
@@ -26389,9 +24675,9 @@
               </a:defRPr>
             </a:lvl4pPr>
             <a:lvl5pPr algn="l">
-              <a:defRPr sz="2550" b="1">
-                <a:solidFill>
-                  <a:srgbClr val="0B6172"/>
+              <a:defRPr sz="2325" b="1">
+                <a:solidFill>
+                  <a:srgbClr val="17212B"/>
                 </a:solidFill>
                 <a:latin typeface="Malgun Gothic"/>
                 <a:ea typeface="Malgun Gothic"/>
@@ -26399,9 +24685,9 @@
               </a:defRPr>
             </a:lvl5pPr>
             <a:lvl6pPr algn="l">
-              <a:defRPr sz="2550" b="1">
-                <a:solidFill>
-                  <a:srgbClr val="0B6172"/>
+              <a:defRPr sz="2325" b="1">
+                <a:solidFill>
+                  <a:srgbClr val="17212B"/>
                 </a:solidFill>
                 <a:latin typeface="Malgun Gothic"/>
                 <a:ea typeface="Malgun Gothic"/>
@@ -26409,9 +24695,9 @@
               </a:defRPr>
             </a:lvl6pPr>
             <a:lvl7pPr algn="l">
-              <a:defRPr sz="2550" b="1">
-                <a:solidFill>
-                  <a:srgbClr val="0B6172"/>
+              <a:defRPr sz="2325" b="1">
+                <a:solidFill>
+                  <a:srgbClr val="17212B"/>
                 </a:solidFill>
                 <a:latin typeface="Malgun Gothic"/>
                 <a:ea typeface="Malgun Gothic"/>
@@ -26419,9 +24705,9 @@
               </a:defRPr>
             </a:lvl7pPr>
             <a:lvl8pPr algn="l">
-              <a:defRPr sz="2550" b="1">
-                <a:solidFill>
-                  <a:srgbClr val="0B6172"/>
+              <a:defRPr sz="2325" b="1">
+                <a:solidFill>
+                  <a:srgbClr val="17212B"/>
                 </a:solidFill>
                 <a:latin typeface="Malgun Gothic"/>
                 <a:ea typeface="Malgun Gothic"/>
@@ -26429,9 +24715,9 @@
               </a:defRPr>
             </a:lvl8pPr>
             <a:lvl9pPr algn="l">
-              <a:defRPr sz="2550" b="1">
-                <a:solidFill>
-                  <a:srgbClr val="0B6172"/>
+              <a:defRPr sz="2325" b="1">
+                <a:solidFill>
+                  <a:srgbClr val="17212B"/>
                 </a:solidFill>
                 <a:latin typeface="Malgun Gothic"/>
                 <a:ea typeface="Malgun Gothic"/>
@@ -26441,9 +24727,9 @@
           </a:lstStyle>
           <a:p xmlns:a="http://schemas.openxmlformats.org/drawingml/2006/main">
             <a:pPr algn="l">
-              <a:defRPr sz="2550" b="1">
-                <a:solidFill>
-                  <a:srgbClr val="0B6172"/>
+              <a:defRPr sz="2325" b="1">
+                <a:solidFill>
+                  <a:srgbClr val="17212B"/>
                 </a:solidFill>
                 <a:latin typeface="Malgun Gothic"/>
                 <a:ea typeface="Malgun Gothic"/>
@@ -26451,25 +24737,25 @@
               </a:defRPr>
             </a:pPr>
             <a:r>
-              <a:rPr sz="2550" b="1">
-                <a:solidFill>
-                  <a:srgbClr val="0B6172"/>
+              <a:rPr sz="2325" b="1">
+                <a:solidFill>
+                  <a:srgbClr val="17212B"/>
                 </a:solidFill>
                 <a:latin typeface="Malgun Gothic"/>
                 <a:ea typeface="Malgun Gothic"/>
                 <a:cs typeface="Malgun Gothic"/>
               </a:rPr>
-              <a:t>코드에서 확인한 문제</a:t>
+              <a:t>Chatbot에 코드·명세만 골라 넣었다면?</a:t>
             </a:r>
           </a:p>
         </p:txBody>
       </p:sp>
       <p:sp>
         <p:nvSpPr>
-          <p:cNvPr id="8" name="실행 환경에서 생긴 제한">
+          <p:cNvPr id="8" name="코드 Context로 논의할 수 있는 부분">
             <a:extLst xmlns:a="http://schemas.openxmlformats.org/drawingml/2006/main">
               <a:ext uri="{FF2B5EF4-FFF2-40B4-BE49-F238E27FC236}">
-                <a16:creationId xmlns:a16="http://schemas.microsoft.com/office/drawing/2014/main" id="{2FCCD3F3-5A01-4B1C-B264-B85F1DF4DB34}"/>
+                <a16:creationId xmlns:a16="http://schemas.microsoft.com/office/drawing/2014/main" id="{48D3655A-6360-45DA-ACFE-ACF988089D75}"/>
               </a:ext>
             </a:extLst>
           </p:cNvPr>
@@ -26480,8 +24766,8 @@
         </p:nvSpPr>
         <p:spPr>
           <a:xfrm xmlns:a="http://schemas.openxmlformats.org/drawingml/2006/main">
-            <a:off x="6667500" y="2266950"/>
-            <a:ext cx="4914900" cy="419100"/>
+            <a:off x="609600" y="2257425"/>
+            <a:ext cx="5162550" cy="390525"/>
           </a:xfrm>
           <a:prstGeom xmlns:a="http://schemas.openxmlformats.org/drawingml/2006/main" prst="rect">
             <a:avLst/>
@@ -26497,9 +24783,9 @@
           </a:bodyPr>
           <a:lstStyle xmlns:a="http://schemas.openxmlformats.org/drawingml/2006/main">
             <a:defPPr algn="l">
-              <a:defRPr sz="2550" b="1">
-                <a:solidFill>
-                  <a:srgbClr val="805400"/>
+              <a:defRPr sz="2100" b="1">
+                <a:solidFill>
+                  <a:srgbClr val="0B6172"/>
                 </a:solidFill>
                 <a:latin typeface="Malgun Gothic"/>
                 <a:ea typeface="Malgun Gothic"/>
@@ -26507,9 +24793,9 @@
               </a:defRPr>
             </a:defPPr>
             <a:lvl1pPr algn="l">
-              <a:defRPr sz="2550" b="1">
-                <a:solidFill>
-                  <a:srgbClr val="805400"/>
+              <a:defRPr sz="2100" b="1">
+                <a:solidFill>
+                  <a:srgbClr val="0B6172"/>
                 </a:solidFill>
                 <a:latin typeface="Malgun Gothic"/>
                 <a:ea typeface="Malgun Gothic"/>
@@ -26517,9 +24803,9 @@
               </a:defRPr>
             </a:lvl1pPr>
             <a:lvl2pPr algn="l">
-              <a:defRPr sz="2550" b="1">
-                <a:solidFill>
-                  <a:srgbClr val="805400"/>
+              <a:defRPr sz="2100" b="1">
+                <a:solidFill>
+                  <a:srgbClr val="0B6172"/>
                 </a:solidFill>
                 <a:latin typeface="Malgun Gothic"/>
                 <a:ea typeface="Malgun Gothic"/>
@@ -26527,9 +24813,9 @@
               </a:defRPr>
             </a:lvl2pPr>
             <a:lvl3pPr algn="l">
-              <a:defRPr sz="2550" b="1">
-                <a:solidFill>
-                  <a:srgbClr val="805400"/>
+              <a:defRPr sz="2100" b="1">
+                <a:solidFill>
+                  <a:srgbClr val="0B6172"/>
                 </a:solidFill>
                 <a:latin typeface="Malgun Gothic"/>
                 <a:ea typeface="Malgun Gothic"/>
@@ -26537,9 +24823,9 @@
               </a:defRPr>
             </a:lvl3pPr>
             <a:lvl4pPr algn="l">
-              <a:defRPr sz="2550" b="1">
-                <a:solidFill>
-                  <a:srgbClr val="805400"/>
+              <a:defRPr sz="2100" b="1">
+                <a:solidFill>
+                  <a:srgbClr val="0B6172"/>
                 </a:solidFill>
                 <a:latin typeface="Malgun Gothic"/>
                 <a:ea typeface="Malgun Gothic"/>
@@ -26547,9 +24833,9 @@
               </a:defRPr>
             </a:lvl4pPr>
             <a:lvl5pPr algn="l">
-              <a:defRPr sz="2550" b="1">
-                <a:solidFill>
-                  <a:srgbClr val="805400"/>
+              <a:defRPr sz="2100" b="1">
+                <a:solidFill>
+                  <a:srgbClr val="0B6172"/>
                 </a:solidFill>
                 <a:latin typeface="Malgun Gothic"/>
                 <a:ea typeface="Malgun Gothic"/>
@@ -26557,9 +24843,9 @@
               </a:defRPr>
             </a:lvl5pPr>
             <a:lvl6pPr algn="l">
-              <a:defRPr sz="2550" b="1">
-                <a:solidFill>
-                  <a:srgbClr val="805400"/>
+              <a:defRPr sz="2100" b="1">
+                <a:solidFill>
+                  <a:srgbClr val="0B6172"/>
                 </a:solidFill>
                 <a:latin typeface="Malgun Gothic"/>
                 <a:ea typeface="Malgun Gothic"/>
@@ -26567,9 +24853,9 @@
               </a:defRPr>
             </a:lvl6pPr>
             <a:lvl7pPr algn="l">
-              <a:defRPr sz="2550" b="1">
-                <a:solidFill>
-                  <a:srgbClr val="805400"/>
+              <a:defRPr sz="2100" b="1">
+                <a:solidFill>
+                  <a:srgbClr val="0B6172"/>
                 </a:solidFill>
                 <a:latin typeface="Malgun Gothic"/>
                 <a:ea typeface="Malgun Gothic"/>
@@ -26577,9 +24863,9 @@
               </a:defRPr>
             </a:lvl7pPr>
             <a:lvl8pPr algn="l">
-              <a:defRPr sz="2550" b="1">
-                <a:solidFill>
-                  <a:srgbClr val="805400"/>
+              <a:defRPr sz="2100" b="1">
+                <a:solidFill>
+                  <a:srgbClr val="0B6172"/>
                 </a:solidFill>
                 <a:latin typeface="Malgun Gothic"/>
                 <a:ea typeface="Malgun Gothic"/>
@@ -26587,9 +24873,9 @@
               </a:defRPr>
             </a:lvl8pPr>
             <a:lvl9pPr algn="l">
-              <a:defRPr sz="2550" b="1">
-                <a:solidFill>
-                  <a:srgbClr val="805400"/>
+              <a:defRPr sz="2100" b="1">
+                <a:solidFill>
+                  <a:srgbClr val="0B6172"/>
                 </a:solidFill>
                 <a:latin typeface="Malgun Gothic"/>
                 <a:ea typeface="Malgun Gothic"/>
@@ -26599,9 +24885,9 @@
           </a:lstStyle>
           <a:p xmlns:a="http://schemas.openxmlformats.org/drawingml/2006/main">
             <a:pPr algn="l">
-              <a:defRPr sz="2550" b="1">
-                <a:solidFill>
-                  <a:srgbClr val="805400"/>
+              <a:defRPr sz="2100" b="1">
+                <a:solidFill>
+                  <a:srgbClr val="0B6172"/>
                 </a:solidFill>
                 <a:latin typeface="Malgun Gothic"/>
                 <a:ea typeface="Malgun Gothic"/>
@@ -26609,25 +24895,25 @@
               </a:defRPr>
             </a:pPr>
             <a:r>
-              <a:rPr sz="2550" b="1">
-                <a:solidFill>
-                  <a:srgbClr val="805400"/>
+              <a:rPr sz="2100" b="1">
+                <a:solidFill>
+                  <a:srgbClr val="0B6172"/>
                 </a:solidFill>
                 <a:latin typeface="Malgun Gothic"/>
                 <a:ea typeface="Malgun Gothic"/>
                 <a:cs typeface="Malgun Gothic"/>
               </a:rPr>
-              <a:t>실행 환경에서 생긴 제한</a:t>
+              <a:t>코드 Context로 논의할 수 있는 부분</a:t>
             </a:r>
           </a:p>
         </p:txBody>
       </p:sp>
       <p:sp>
         <p:nvSpPr>
-          <p:cNvPr id="9" name="">
+          <p:cNvPr id="9" name="함께 전달하지 않은 실행 환경">
             <a:extLst xmlns:a="http://schemas.openxmlformats.org/drawingml/2006/main">
               <a:ext uri="{FF2B5EF4-FFF2-40B4-BE49-F238E27FC236}">
-                <a16:creationId xmlns:a16="http://schemas.microsoft.com/office/drawing/2014/main" id="{2792771F-F901-4FE5-80B6-66808986853F}"/>
+                <a16:creationId xmlns:a16="http://schemas.microsoft.com/office/drawing/2014/main" id="{27E87465-2317-4C2F-93F9-6514F7D3CCB0}"/>
               </a:ext>
             </a:extLst>
           </p:cNvPr>
@@ -26638,8 +24924,166 @@
         </p:nvSpPr>
         <p:spPr>
           <a:xfrm xmlns:a="http://schemas.openxmlformats.org/drawingml/2006/main">
-            <a:off x="609600" y="2924175"/>
-            <a:ext cx="5162550" cy="2009775"/>
+            <a:off x="6667500" y="2257425"/>
+            <a:ext cx="4914900" cy="390525"/>
+          </a:xfrm>
+          <a:prstGeom xmlns:a="http://schemas.openxmlformats.org/drawingml/2006/main" prst="rect">
+            <a:avLst/>
+          </a:prstGeom>
+          <a:noFill xmlns:a="http://schemas.openxmlformats.org/drawingml/2006/main"/>
+          <a:ln xmlns:a="http://schemas.openxmlformats.org/drawingml/2006/main" w="0">
+            <a:noFill/>
+          </a:ln>
+        </p:spPr>
+        <p:txBody>
+          <a:bodyPr xmlns:a="http://schemas.openxmlformats.org/drawingml/2006/main" wrap="none" lIns="0" tIns="0" rIns="0" bIns="0" anchor="ctr">
+            <a:noAutofit/>
+          </a:bodyPr>
+          <a:lstStyle xmlns:a="http://schemas.openxmlformats.org/drawingml/2006/main">
+            <a:defPPr algn="l">
+              <a:defRPr sz="2100" b="1">
+                <a:solidFill>
+                  <a:srgbClr val="805400"/>
+                </a:solidFill>
+                <a:latin typeface="Malgun Gothic"/>
+                <a:ea typeface="Malgun Gothic"/>
+                <a:cs typeface="Malgun Gothic"/>
+              </a:defRPr>
+            </a:defPPr>
+            <a:lvl1pPr algn="l">
+              <a:defRPr sz="2100" b="1">
+                <a:solidFill>
+                  <a:srgbClr val="805400"/>
+                </a:solidFill>
+                <a:latin typeface="Malgun Gothic"/>
+                <a:ea typeface="Malgun Gothic"/>
+                <a:cs typeface="Malgun Gothic"/>
+              </a:defRPr>
+            </a:lvl1pPr>
+            <a:lvl2pPr algn="l">
+              <a:defRPr sz="2100" b="1">
+                <a:solidFill>
+                  <a:srgbClr val="805400"/>
+                </a:solidFill>
+                <a:latin typeface="Malgun Gothic"/>
+                <a:ea typeface="Malgun Gothic"/>
+                <a:cs typeface="Malgun Gothic"/>
+              </a:defRPr>
+            </a:lvl2pPr>
+            <a:lvl3pPr algn="l">
+              <a:defRPr sz="2100" b="1">
+                <a:solidFill>
+                  <a:srgbClr val="805400"/>
+                </a:solidFill>
+                <a:latin typeface="Malgun Gothic"/>
+                <a:ea typeface="Malgun Gothic"/>
+                <a:cs typeface="Malgun Gothic"/>
+              </a:defRPr>
+            </a:lvl3pPr>
+            <a:lvl4pPr algn="l">
+              <a:defRPr sz="2100" b="1">
+                <a:solidFill>
+                  <a:srgbClr val="805400"/>
+                </a:solidFill>
+                <a:latin typeface="Malgun Gothic"/>
+                <a:ea typeface="Malgun Gothic"/>
+                <a:cs typeface="Malgun Gothic"/>
+              </a:defRPr>
+            </a:lvl4pPr>
+            <a:lvl5pPr algn="l">
+              <a:defRPr sz="2100" b="1">
+                <a:solidFill>
+                  <a:srgbClr val="805400"/>
+                </a:solidFill>
+                <a:latin typeface="Malgun Gothic"/>
+                <a:ea typeface="Malgun Gothic"/>
+                <a:cs typeface="Malgun Gothic"/>
+              </a:defRPr>
+            </a:lvl5pPr>
+            <a:lvl6pPr algn="l">
+              <a:defRPr sz="2100" b="1">
+                <a:solidFill>
+                  <a:srgbClr val="805400"/>
+                </a:solidFill>
+                <a:latin typeface="Malgun Gothic"/>
+                <a:ea typeface="Malgun Gothic"/>
+                <a:cs typeface="Malgun Gothic"/>
+              </a:defRPr>
+            </a:lvl6pPr>
+            <a:lvl7pPr algn="l">
+              <a:defRPr sz="2100" b="1">
+                <a:solidFill>
+                  <a:srgbClr val="805400"/>
+                </a:solidFill>
+                <a:latin typeface="Malgun Gothic"/>
+                <a:ea typeface="Malgun Gothic"/>
+                <a:cs typeface="Malgun Gothic"/>
+              </a:defRPr>
+            </a:lvl7pPr>
+            <a:lvl8pPr algn="l">
+              <a:defRPr sz="2100" b="1">
+                <a:solidFill>
+                  <a:srgbClr val="805400"/>
+                </a:solidFill>
+                <a:latin typeface="Malgun Gothic"/>
+                <a:ea typeface="Malgun Gothic"/>
+                <a:cs typeface="Malgun Gothic"/>
+              </a:defRPr>
+            </a:lvl8pPr>
+            <a:lvl9pPr algn="l">
+              <a:defRPr sz="2100" b="1">
+                <a:solidFill>
+                  <a:srgbClr val="805400"/>
+                </a:solidFill>
+                <a:latin typeface="Malgun Gothic"/>
+                <a:ea typeface="Malgun Gothic"/>
+                <a:cs typeface="Malgun Gothic"/>
+              </a:defRPr>
+            </a:lvl9pPr>
+          </a:lstStyle>
+          <a:p xmlns:a="http://schemas.openxmlformats.org/drawingml/2006/main">
+            <a:pPr algn="l">
+              <a:defRPr sz="2100" b="1">
+                <a:solidFill>
+                  <a:srgbClr val="805400"/>
+                </a:solidFill>
+                <a:latin typeface="Malgun Gothic"/>
+                <a:ea typeface="Malgun Gothic"/>
+                <a:cs typeface="Malgun Gothic"/>
+              </a:defRPr>
+            </a:pPr>
+            <a:r>
+              <a:rPr sz="2100" b="1">
+                <a:solidFill>
+                  <a:srgbClr val="805400"/>
+                </a:solidFill>
+                <a:latin typeface="Malgun Gothic"/>
+                <a:ea typeface="Malgun Gothic"/>
+                <a:cs typeface="Malgun Gothic"/>
+              </a:rPr>
+              <a:t>함께 전달하지 않은 실행 환경</a:t>
+            </a:r>
+          </a:p>
+        </p:txBody>
+      </p:sp>
+      <p:sp>
+        <p:nvSpPr>
+          <p:cNvPr id="10" name="">
+            <a:extLst xmlns:a="http://schemas.openxmlformats.org/drawingml/2006/main">
+              <a:ext uri="{FF2B5EF4-FFF2-40B4-BE49-F238E27FC236}">
+                <a16:creationId xmlns:a16="http://schemas.microsoft.com/office/drawing/2014/main" id="{E5144E92-2596-46AA-80EA-723270D3979E}"/>
+              </a:ext>
+            </a:extLst>
+          </p:cNvPr>
+          <p:cNvSpPr>
+            <a:spLocks xmlns:a="http://schemas.openxmlformats.org/drawingml/2006/main" noGrp="1"/>
+          </p:cNvSpPr>
+          <p:nvPr/>
+        </p:nvSpPr>
+        <p:spPr>
+          <a:xfrm xmlns:a="http://schemas.openxmlformats.org/drawingml/2006/main">
+            <a:off x="609600" y="2781300"/>
+            <a:ext cx="5162550" cy="2085975"/>
           </a:xfrm>
           <a:prstGeom xmlns:a="http://schemas.openxmlformats.org/drawingml/2006/main" prst="rect">
             <a:avLst/>
@@ -26657,10 +25101,10 @@
       </p:sp>
       <p:sp>
         <p:nvSpPr>
-          <p:cNvPr id="10" name="">
+          <p:cNvPr id="11" name="">
             <a:extLst xmlns:a="http://schemas.openxmlformats.org/drawingml/2006/main">
               <a:ext uri="{FF2B5EF4-FFF2-40B4-BE49-F238E27FC236}">
-                <a16:creationId xmlns:a16="http://schemas.microsoft.com/office/drawing/2014/main" id="{B2361843-35B3-43D3-BDA4-5FA8917E9EA4}"/>
+                <a16:creationId xmlns:a16="http://schemas.microsoft.com/office/drawing/2014/main" id="{08C281FB-B487-4EFA-B819-329375CE52F8}"/>
               </a:ext>
             </a:extLst>
           </p:cNvPr>
@@ -26671,8 +25115,8 @@
         </p:nvSpPr>
         <p:spPr>
           <a:xfrm xmlns:a="http://schemas.openxmlformats.org/drawingml/2006/main">
-            <a:off x="6667500" y="2924175"/>
-            <a:ext cx="4914900" cy="2009775"/>
+            <a:off x="6667500" y="2781300"/>
+            <a:ext cx="4914900" cy="2085975"/>
           </a:xfrm>
           <a:prstGeom xmlns:a="http://schemas.openxmlformats.org/drawingml/2006/main" prst="rect">
             <a:avLst/>
@@ -26688,10 +25132,10 @@
       </p:sp>
       <p:sp>
         <p:nvSpPr>
-          <p:cNvPr id="11" name="crop에 한 열이 더 포함됨">
+          <p:cNvPr id="12" name="기대 폭 2 ↔ 포함 폭 3">
             <a:extLst xmlns:a="http://schemas.openxmlformats.org/drawingml/2006/main">
               <a:ext uri="{FF2B5EF4-FFF2-40B4-BE49-F238E27FC236}">
-                <a16:creationId xmlns:a16="http://schemas.microsoft.com/office/drawing/2014/main" id="{4681415B-6EE5-4B0C-AE78-A9F2E2CE0052}"/>
+                <a16:creationId xmlns:a16="http://schemas.microsoft.com/office/drawing/2014/main" id="{044031DD-0B92-4B82-9378-DC2F1CC71707}"/>
               </a:ext>
             </a:extLst>
           </p:cNvPr>
@@ -26702,8 +25146,8 @@
         </p:nvSpPr>
         <p:spPr>
           <a:xfrm xmlns:a="http://schemas.openxmlformats.org/drawingml/2006/main">
-            <a:off x="838200" y="3133725"/>
-            <a:ext cx="4705350" cy="447675"/>
+            <a:off x="838200" y="2952750"/>
+            <a:ext cx="4705350" cy="438150"/>
           </a:xfrm>
           <a:prstGeom xmlns:a="http://schemas.openxmlformats.org/drawingml/2006/main" prst="rect">
             <a:avLst/>
@@ -26839,17 +25283,17 @@
                 <a:ea typeface="Malgun Gothic"/>
                 <a:cs typeface="Malgun Gothic"/>
               </a:rPr>
-              <a:t>crop에 한 열이 더 포함됨</a:t>
+              <a:t>기대 폭 2 ↔ 포함 폭 3</a:t>
             </a:r>
           </a:p>
         </p:txBody>
       </p:sp>
       <p:sp>
         <p:nvSpPr>
-          <p:cNvPr id="12" name="테스트·호출 경로·계약 연결&#10;원인 설명 / 코드 수정 없음">
+          <p:cNvPr id="13" name="명세·테스트·구현을 비교&#10;추가된 열의 원인을 추론">
             <a:extLst xmlns:a="http://schemas.openxmlformats.org/drawingml/2006/main">
               <a:ext uri="{FF2B5EF4-FFF2-40B4-BE49-F238E27FC236}">
-                <a16:creationId xmlns:a16="http://schemas.microsoft.com/office/drawing/2014/main" id="{7DE7CE16-2D75-4852-931B-43B4E02A1923}"/>
+                <a16:creationId xmlns:a16="http://schemas.microsoft.com/office/drawing/2014/main" id="{DB6CB935-ADD0-4589-8F9F-FFB06C081B26}"/>
               </a:ext>
             </a:extLst>
           </p:cNvPr>
@@ -26860,8 +25304,8 @@
         </p:nvSpPr>
         <p:spPr>
           <a:xfrm xmlns:a="http://schemas.openxmlformats.org/drawingml/2006/main">
-            <a:off x="838200" y="3867150"/>
-            <a:ext cx="4705350" cy="771525"/>
+            <a:off x="838200" y="3552825"/>
+            <a:ext cx="4705350" cy="685800"/>
           </a:xfrm>
           <a:prstGeom xmlns:a="http://schemas.openxmlformats.org/drawingml/2006/main" prst="rect">
             <a:avLst/>
@@ -26997,7 +25441,7 @@
                 <a:ea typeface="Malgun Gothic"/>
                 <a:cs typeface="Malgun Gothic"/>
               </a:rPr>
-              <a:t>테스트·호출 경로·계약 연결</a:t>
+              <a:t>명세·테스트·구현을 비교</a:t>
             </a:r>
           </a:p>
           <a:p xmlns:a="http://schemas.openxmlformats.org/drawingml/2006/main">
@@ -27020,17 +25464,17 @@
                 <a:ea typeface="Malgun Gothic"/>
                 <a:cs typeface="Malgun Gothic"/>
               </a:rPr>
-              <a:t>원인 설명 / 코드 수정 없음</a:t>
+              <a:t>추가된 열의 원인을 추론</a:t>
             </a:r>
           </a:p>
         </p:txBody>
       </p:sp>
       <p:sp>
         <p:nvSpPr>
-          <p:cNvPr id="13" name="임시 디렉터리를 만들 수 없음">
+          <p:cNvPr id="14" name="TRIAL-001: 원인 설명·코드 미수정">
             <a:extLst xmlns:a="http://schemas.openxmlformats.org/drawingml/2006/main">
               <a:ext uri="{FF2B5EF4-FFF2-40B4-BE49-F238E27FC236}">
-                <a16:creationId xmlns:a16="http://schemas.microsoft.com/office/drawing/2014/main" id="{90B5586C-C9A5-4514-A28C-F7F8DF784F03}"/>
+                <a16:creationId xmlns:a16="http://schemas.microsoft.com/office/drawing/2014/main" id="{2DEB23CB-4AD8-4156-AD91-4976DC322B20}"/>
               </a:ext>
             </a:extLst>
           </p:cNvPr>
@@ -27041,8 +25485,8 @@
         </p:nvSpPr>
         <p:spPr>
           <a:xfrm xmlns:a="http://schemas.openxmlformats.org/drawingml/2006/main">
-            <a:off x="6896100" y="3133725"/>
-            <a:ext cx="4457700" cy="447675"/>
+            <a:off x="838200" y="4391025"/>
+            <a:ext cx="4705350" cy="323850"/>
           </a:xfrm>
           <a:prstGeom xmlns:a="http://schemas.openxmlformats.org/drawingml/2006/main" prst="rect">
             <a:avLst/>
@@ -27058,9 +25502,9 @@
           </a:bodyPr>
           <a:lstStyle xmlns:a="http://schemas.openxmlformats.org/drawingml/2006/main">
             <a:defPPr algn="l">
-              <a:defRPr sz="2175" b="1">
-                <a:solidFill>
-                  <a:srgbClr val="805400"/>
+              <a:defRPr sz="1875" b="1">
+                <a:solidFill>
+                  <a:srgbClr val="0B6172"/>
                 </a:solidFill>
                 <a:latin typeface="Malgun Gothic"/>
                 <a:ea typeface="Malgun Gothic"/>
@@ -27068,9 +25512,9 @@
               </a:defRPr>
             </a:defPPr>
             <a:lvl1pPr algn="l">
-              <a:defRPr sz="2175" b="1">
-                <a:solidFill>
-                  <a:srgbClr val="805400"/>
+              <a:defRPr sz="1875" b="1">
+                <a:solidFill>
+                  <a:srgbClr val="0B6172"/>
                 </a:solidFill>
                 <a:latin typeface="Malgun Gothic"/>
                 <a:ea typeface="Malgun Gothic"/>
@@ -27078,9 +25522,9 @@
               </a:defRPr>
             </a:lvl1pPr>
             <a:lvl2pPr algn="l">
-              <a:defRPr sz="2175" b="1">
-                <a:solidFill>
-                  <a:srgbClr val="805400"/>
+              <a:defRPr sz="1875" b="1">
+                <a:solidFill>
+                  <a:srgbClr val="0B6172"/>
                 </a:solidFill>
                 <a:latin typeface="Malgun Gothic"/>
                 <a:ea typeface="Malgun Gothic"/>
@@ -27088,9 +25532,9 @@
               </a:defRPr>
             </a:lvl2pPr>
             <a:lvl3pPr algn="l">
-              <a:defRPr sz="2175" b="1">
-                <a:solidFill>
-                  <a:srgbClr val="805400"/>
+              <a:defRPr sz="1875" b="1">
+                <a:solidFill>
+                  <a:srgbClr val="0B6172"/>
                 </a:solidFill>
                 <a:latin typeface="Malgun Gothic"/>
                 <a:ea typeface="Malgun Gothic"/>
@@ -27098,9 +25542,9 @@
               </a:defRPr>
             </a:lvl3pPr>
             <a:lvl4pPr algn="l">
-              <a:defRPr sz="2175" b="1">
-                <a:solidFill>
-                  <a:srgbClr val="805400"/>
+              <a:defRPr sz="1875" b="1">
+                <a:solidFill>
+                  <a:srgbClr val="0B6172"/>
                 </a:solidFill>
                 <a:latin typeface="Malgun Gothic"/>
                 <a:ea typeface="Malgun Gothic"/>
@@ -27108,9 +25552,9 @@
               </a:defRPr>
             </a:lvl4pPr>
             <a:lvl5pPr algn="l">
-              <a:defRPr sz="2175" b="1">
-                <a:solidFill>
-                  <a:srgbClr val="805400"/>
+              <a:defRPr sz="1875" b="1">
+                <a:solidFill>
+                  <a:srgbClr val="0B6172"/>
                 </a:solidFill>
                 <a:latin typeface="Malgun Gothic"/>
                 <a:ea typeface="Malgun Gothic"/>
@@ -27118,9 +25562,9 @@
               </a:defRPr>
             </a:lvl5pPr>
             <a:lvl6pPr algn="l">
-              <a:defRPr sz="2175" b="1">
-                <a:solidFill>
-                  <a:srgbClr val="805400"/>
+              <a:defRPr sz="1875" b="1">
+                <a:solidFill>
+                  <a:srgbClr val="0B6172"/>
                 </a:solidFill>
                 <a:latin typeface="Malgun Gothic"/>
                 <a:ea typeface="Malgun Gothic"/>
@@ -27128,9 +25572,9 @@
               </a:defRPr>
             </a:lvl6pPr>
             <a:lvl7pPr algn="l">
-              <a:defRPr sz="2175" b="1">
-                <a:solidFill>
-                  <a:srgbClr val="805400"/>
+              <a:defRPr sz="1875" b="1">
+                <a:solidFill>
+                  <a:srgbClr val="0B6172"/>
                 </a:solidFill>
                 <a:latin typeface="Malgun Gothic"/>
                 <a:ea typeface="Malgun Gothic"/>
@@ -27138,9 +25582,9 @@
               </a:defRPr>
             </a:lvl7pPr>
             <a:lvl8pPr algn="l">
-              <a:defRPr sz="2175" b="1">
-                <a:solidFill>
-                  <a:srgbClr val="805400"/>
+              <a:defRPr sz="1875" b="1">
+                <a:solidFill>
+                  <a:srgbClr val="0B6172"/>
                 </a:solidFill>
                 <a:latin typeface="Malgun Gothic"/>
                 <a:ea typeface="Malgun Gothic"/>
@@ -27148,9 +25592,9 @@
               </a:defRPr>
             </a:lvl8pPr>
             <a:lvl9pPr algn="l">
-              <a:defRPr sz="2175" b="1">
-                <a:solidFill>
-                  <a:srgbClr val="805400"/>
+              <a:defRPr sz="1875" b="1">
+                <a:solidFill>
+                  <a:srgbClr val="0B6172"/>
                 </a:solidFill>
                 <a:latin typeface="Malgun Gothic"/>
                 <a:ea typeface="Malgun Gothic"/>
@@ -27160,9 +25604,9 @@
           </a:lstStyle>
           <a:p xmlns:a="http://schemas.openxmlformats.org/drawingml/2006/main">
             <a:pPr algn="l">
-              <a:defRPr sz="2175" b="1">
-                <a:solidFill>
-                  <a:srgbClr val="805400"/>
+              <a:defRPr sz="1875" b="1">
+                <a:solidFill>
+                  <a:srgbClr val="0B6172"/>
                 </a:solidFill>
                 <a:latin typeface="Malgun Gothic"/>
                 <a:ea typeface="Malgun Gothic"/>
@@ -27170,25 +25614,25 @@
               </a:defRPr>
             </a:pPr>
             <a:r>
-              <a:rPr sz="2175" b="1">
-                <a:solidFill>
-                  <a:srgbClr val="805400"/>
+              <a:rPr sz="1875" b="1">
+                <a:solidFill>
+                  <a:srgbClr val="0B6172"/>
                 </a:solidFill>
                 <a:latin typeface="Malgun Gothic"/>
                 <a:ea typeface="Malgun Gothic"/>
                 <a:cs typeface="Malgun Gothic"/>
               </a:rPr>
-              <a:t>임시 디렉터리를 만들 수 없음</a:t>
+              <a:t>TRIAL-001: 원인 설명·코드 미수정</a:t>
             </a:r>
           </a:p>
         </p:txBody>
       </p:sp>
       <p:sp>
         <p:nvSpPr>
-          <p:cNvPr id="14" name="읽기 전용 권한 때문에&#10;서로 다른 테스트 3건이 오류">
+          <p:cNvPr id="15" name="읽기 전용 · 임시 디렉터리 제한">
             <a:extLst xmlns:a="http://schemas.openxmlformats.org/drawingml/2006/main">
               <a:ext uri="{FF2B5EF4-FFF2-40B4-BE49-F238E27FC236}">
-                <a16:creationId xmlns:a16="http://schemas.microsoft.com/office/drawing/2014/main" id="{C0964F9F-5078-4097-B43B-B3789B32CA5F}"/>
+                <a16:creationId xmlns:a16="http://schemas.microsoft.com/office/drawing/2014/main" id="{8019BB75-1D77-4F03-AA60-3588F4AFB847}"/>
               </a:ext>
             </a:extLst>
           </p:cNvPr>
@@ -27199,8 +25643,166 @@
         </p:nvSpPr>
         <p:spPr>
           <a:xfrm xmlns:a="http://schemas.openxmlformats.org/drawingml/2006/main">
-            <a:off x="6896100" y="3867150"/>
-            <a:ext cx="4457700" cy="771525"/>
+            <a:off x="6896100" y="2952750"/>
+            <a:ext cx="4457700" cy="438150"/>
+          </a:xfrm>
+          <a:prstGeom xmlns:a="http://schemas.openxmlformats.org/drawingml/2006/main" prst="rect">
+            <a:avLst/>
+          </a:prstGeom>
+          <a:noFill xmlns:a="http://schemas.openxmlformats.org/drawingml/2006/main"/>
+          <a:ln xmlns:a="http://schemas.openxmlformats.org/drawingml/2006/main" w="0">
+            <a:noFill/>
+          </a:ln>
+        </p:spPr>
+        <p:txBody>
+          <a:bodyPr xmlns:a="http://schemas.openxmlformats.org/drawingml/2006/main" wrap="none" lIns="0" tIns="0" rIns="0" bIns="0" anchor="ctr">
+            <a:noAutofit/>
+          </a:bodyPr>
+          <a:lstStyle xmlns:a="http://schemas.openxmlformats.org/drawingml/2006/main">
+            <a:defPPr algn="l">
+              <a:defRPr sz="2100" b="1">
+                <a:solidFill>
+                  <a:srgbClr val="805400"/>
+                </a:solidFill>
+                <a:latin typeface="Malgun Gothic"/>
+                <a:ea typeface="Malgun Gothic"/>
+                <a:cs typeface="Malgun Gothic"/>
+              </a:defRPr>
+            </a:defPPr>
+            <a:lvl1pPr algn="l">
+              <a:defRPr sz="2100" b="1">
+                <a:solidFill>
+                  <a:srgbClr val="805400"/>
+                </a:solidFill>
+                <a:latin typeface="Malgun Gothic"/>
+                <a:ea typeface="Malgun Gothic"/>
+                <a:cs typeface="Malgun Gothic"/>
+              </a:defRPr>
+            </a:lvl1pPr>
+            <a:lvl2pPr algn="l">
+              <a:defRPr sz="2100" b="1">
+                <a:solidFill>
+                  <a:srgbClr val="805400"/>
+                </a:solidFill>
+                <a:latin typeface="Malgun Gothic"/>
+                <a:ea typeface="Malgun Gothic"/>
+                <a:cs typeface="Malgun Gothic"/>
+              </a:defRPr>
+            </a:lvl2pPr>
+            <a:lvl3pPr algn="l">
+              <a:defRPr sz="2100" b="1">
+                <a:solidFill>
+                  <a:srgbClr val="805400"/>
+                </a:solidFill>
+                <a:latin typeface="Malgun Gothic"/>
+                <a:ea typeface="Malgun Gothic"/>
+                <a:cs typeface="Malgun Gothic"/>
+              </a:defRPr>
+            </a:lvl3pPr>
+            <a:lvl4pPr algn="l">
+              <a:defRPr sz="2100" b="1">
+                <a:solidFill>
+                  <a:srgbClr val="805400"/>
+                </a:solidFill>
+                <a:latin typeface="Malgun Gothic"/>
+                <a:ea typeface="Malgun Gothic"/>
+                <a:cs typeface="Malgun Gothic"/>
+              </a:defRPr>
+            </a:lvl4pPr>
+            <a:lvl5pPr algn="l">
+              <a:defRPr sz="2100" b="1">
+                <a:solidFill>
+                  <a:srgbClr val="805400"/>
+                </a:solidFill>
+                <a:latin typeface="Malgun Gothic"/>
+                <a:ea typeface="Malgun Gothic"/>
+                <a:cs typeface="Malgun Gothic"/>
+              </a:defRPr>
+            </a:lvl5pPr>
+            <a:lvl6pPr algn="l">
+              <a:defRPr sz="2100" b="1">
+                <a:solidFill>
+                  <a:srgbClr val="805400"/>
+                </a:solidFill>
+                <a:latin typeface="Malgun Gothic"/>
+                <a:ea typeface="Malgun Gothic"/>
+                <a:cs typeface="Malgun Gothic"/>
+              </a:defRPr>
+            </a:lvl6pPr>
+            <a:lvl7pPr algn="l">
+              <a:defRPr sz="2100" b="1">
+                <a:solidFill>
+                  <a:srgbClr val="805400"/>
+                </a:solidFill>
+                <a:latin typeface="Malgun Gothic"/>
+                <a:ea typeface="Malgun Gothic"/>
+                <a:cs typeface="Malgun Gothic"/>
+              </a:defRPr>
+            </a:lvl7pPr>
+            <a:lvl8pPr algn="l">
+              <a:defRPr sz="2100" b="1">
+                <a:solidFill>
+                  <a:srgbClr val="805400"/>
+                </a:solidFill>
+                <a:latin typeface="Malgun Gothic"/>
+                <a:ea typeface="Malgun Gothic"/>
+                <a:cs typeface="Malgun Gothic"/>
+              </a:defRPr>
+            </a:lvl8pPr>
+            <a:lvl9pPr algn="l">
+              <a:defRPr sz="2100" b="1">
+                <a:solidFill>
+                  <a:srgbClr val="805400"/>
+                </a:solidFill>
+                <a:latin typeface="Malgun Gothic"/>
+                <a:ea typeface="Malgun Gothic"/>
+                <a:cs typeface="Malgun Gothic"/>
+              </a:defRPr>
+            </a:lvl9pPr>
+          </a:lstStyle>
+          <a:p xmlns:a="http://schemas.openxmlformats.org/drawingml/2006/main">
+            <a:pPr algn="l">
+              <a:defRPr sz="2100" b="1">
+                <a:solidFill>
+                  <a:srgbClr val="805400"/>
+                </a:solidFill>
+                <a:latin typeface="Malgun Gothic"/>
+                <a:ea typeface="Malgun Gothic"/>
+                <a:cs typeface="Malgun Gothic"/>
+              </a:defRPr>
+            </a:pPr>
+            <a:r>
+              <a:rPr sz="2100" b="1">
+                <a:solidFill>
+                  <a:srgbClr val="805400"/>
+                </a:solidFill>
+                <a:latin typeface="Malgun Gothic"/>
+                <a:ea typeface="Malgun Gothic"/>
+                <a:cs typeface="Malgun Gothic"/>
+              </a:rPr>
+              <a:t>읽기 전용 · 임시 디렉터리 제한</a:t>
+            </a:r>
+          </a:p>
+        </p:txBody>
+      </p:sp>
+      <p:sp>
+        <p:nvSpPr>
+          <p:cNvPr id="16" name="코드만으로는 부족&#10;실행 로그·권한 정보도 필요">
+            <a:extLst xmlns:a="http://schemas.openxmlformats.org/drawingml/2006/main">
+              <a:ext uri="{FF2B5EF4-FFF2-40B4-BE49-F238E27FC236}">
+                <a16:creationId xmlns:a16="http://schemas.microsoft.com/office/drawing/2014/main" id="{4A6EBC87-D419-4E84-A972-B3E6165CD41A}"/>
+              </a:ext>
+            </a:extLst>
+          </p:cNvPr>
+          <p:cNvSpPr>
+            <a:spLocks xmlns:a="http://schemas.openxmlformats.org/drawingml/2006/main" noGrp="1"/>
+          </p:cNvSpPr>
+          <p:nvPr/>
+        </p:nvSpPr>
+        <p:spPr>
+          <a:xfrm xmlns:a="http://schemas.openxmlformats.org/drawingml/2006/main">
+            <a:off x="6896100" y="3552825"/>
+            <a:ext cx="4457700" cy="685800"/>
           </a:xfrm>
           <a:prstGeom xmlns:a="http://schemas.openxmlformats.org/drawingml/2006/main" prst="rect">
             <a:avLst/>
@@ -27336,7 +25938,7 @@
                 <a:ea typeface="Malgun Gothic"/>
                 <a:cs typeface="Malgun Gothic"/>
               </a:rPr>
-              <a:t>읽기 전용 권한 때문에</a:t>
+              <a:t>코드만으로는 부족</a:t>
             </a:r>
           </a:p>
           <a:p xmlns:a="http://schemas.openxmlformats.org/drawingml/2006/main">
@@ -27359,17 +25961,17 @@
                 <a:ea typeface="Malgun Gothic"/>
                 <a:cs typeface="Malgun Gothic"/>
               </a:rPr>
-              <a:t>서로 다른 테스트 3건이 오류</a:t>
+              <a:t>실행 로그·권한 정보도 필요</a:t>
             </a:r>
           </a:p>
         </p:txBody>
       </p:sp>
       <p:sp>
         <p:nvSpPr>
-          <p:cNvPr id="15" name="">
+          <p:cNvPr id="17" name="TRIAL-001도 환경 오류 3건">
             <a:extLst xmlns:a="http://schemas.openxmlformats.org/drawingml/2006/main">
               <a:ext uri="{FF2B5EF4-FFF2-40B4-BE49-F238E27FC236}">
-                <a16:creationId xmlns:a16="http://schemas.microsoft.com/office/drawing/2014/main" id="{9C24F623-BBBD-4C7E-97C9-7C70BA4C5BF5}"/>
+                <a16:creationId xmlns:a16="http://schemas.microsoft.com/office/drawing/2014/main" id="{ED595DAD-4C78-4056-8C37-7CFB17A6E341}"/>
               </a:ext>
             </a:extLst>
           </p:cNvPr>
@@ -27380,27 +25982,154 @@
         </p:nvSpPr>
         <p:spPr>
           <a:xfrm xmlns:a="http://schemas.openxmlformats.org/drawingml/2006/main">
-            <a:off x="609600" y="5200650"/>
-            <a:ext cx="10972800" cy="0"/>
+            <a:off x="6896100" y="4391025"/>
+            <a:ext cx="4457700" cy="323850"/>
           </a:xfrm>
-          <a:prstGeom xmlns:a="http://schemas.openxmlformats.org/drawingml/2006/main" prst="line">
+          <a:prstGeom xmlns:a="http://schemas.openxmlformats.org/drawingml/2006/main" prst="rect">
             <a:avLst/>
           </a:prstGeom>
           <a:noFill xmlns:a="http://schemas.openxmlformats.org/drawingml/2006/main"/>
-          <a:ln xmlns:a="http://schemas.openxmlformats.org/drawingml/2006/main" w="9525">
-            <a:solidFill>
-              <a:srgbClr val="C7D0DA"/>
-            </a:solidFill>
-            <a:prstDash val="solid"/>
+          <a:ln xmlns:a="http://schemas.openxmlformats.org/drawingml/2006/main" w="0">
+            <a:noFill/>
           </a:ln>
         </p:spPr>
+        <p:txBody>
+          <a:bodyPr xmlns:a="http://schemas.openxmlformats.org/drawingml/2006/main" wrap="none" lIns="0" tIns="0" rIns="0" bIns="0" anchor="ctr">
+            <a:noAutofit/>
+          </a:bodyPr>
+          <a:lstStyle xmlns:a="http://schemas.openxmlformats.org/drawingml/2006/main">
+            <a:defPPr algn="l">
+              <a:defRPr sz="1875" b="1">
+                <a:solidFill>
+                  <a:srgbClr val="805400"/>
+                </a:solidFill>
+                <a:latin typeface="Malgun Gothic"/>
+                <a:ea typeface="Malgun Gothic"/>
+                <a:cs typeface="Malgun Gothic"/>
+              </a:defRPr>
+            </a:defPPr>
+            <a:lvl1pPr algn="l">
+              <a:defRPr sz="1875" b="1">
+                <a:solidFill>
+                  <a:srgbClr val="805400"/>
+                </a:solidFill>
+                <a:latin typeface="Malgun Gothic"/>
+                <a:ea typeface="Malgun Gothic"/>
+                <a:cs typeface="Malgun Gothic"/>
+              </a:defRPr>
+            </a:lvl1pPr>
+            <a:lvl2pPr algn="l">
+              <a:defRPr sz="1875" b="1">
+                <a:solidFill>
+                  <a:srgbClr val="805400"/>
+                </a:solidFill>
+                <a:latin typeface="Malgun Gothic"/>
+                <a:ea typeface="Malgun Gothic"/>
+                <a:cs typeface="Malgun Gothic"/>
+              </a:defRPr>
+            </a:lvl2pPr>
+            <a:lvl3pPr algn="l">
+              <a:defRPr sz="1875" b="1">
+                <a:solidFill>
+                  <a:srgbClr val="805400"/>
+                </a:solidFill>
+                <a:latin typeface="Malgun Gothic"/>
+                <a:ea typeface="Malgun Gothic"/>
+                <a:cs typeface="Malgun Gothic"/>
+              </a:defRPr>
+            </a:lvl3pPr>
+            <a:lvl4pPr algn="l">
+              <a:defRPr sz="1875" b="1">
+                <a:solidFill>
+                  <a:srgbClr val="805400"/>
+                </a:solidFill>
+                <a:latin typeface="Malgun Gothic"/>
+                <a:ea typeface="Malgun Gothic"/>
+                <a:cs typeface="Malgun Gothic"/>
+              </a:defRPr>
+            </a:lvl4pPr>
+            <a:lvl5pPr algn="l">
+              <a:defRPr sz="1875" b="1">
+                <a:solidFill>
+                  <a:srgbClr val="805400"/>
+                </a:solidFill>
+                <a:latin typeface="Malgun Gothic"/>
+                <a:ea typeface="Malgun Gothic"/>
+                <a:cs typeface="Malgun Gothic"/>
+              </a:defRPr>
+            </a:lvl5pPr>
+            <a:lvl6pPr algn="l">
+              <a:defRPr sz="1875" b="1">
+                <a:solidFill>
+                  <a:srgbClr val="805400"/>
+                </a:solidFill>
+                <a:latin typeface="Malgun Gothic"/>
+                <a:ea typeface="Malgun Gothic"/>
+                <a:cs typeface="Malgun Gothic"/>
+              </a:defRPr>
+            </a:lvl6pPr>
+            <a:lvl7pPr algn="l">
+              <a:defRPr sz="1875" b="1">
+                <a:solidFill>
+                  <a:srgbClr val="805400"/>
+                </a:solidFill>
+                <a:latin typeface="Malgun Gothic"/>
+                <a:ea typeface="Malgun Gothic"/>
+                <a:cs typeface="Malgun Gothic"/>
+              </a:defRPr>
+            </a:lvl7pPr>
+            <a:lvl8pPr algn="l">
+              <a:defRPr sz="1875" b="1">
+                <a:solidFill>
+                  <a:srgbClr val="805400"/>
+                </a:solidFill>
+                <a:latin typeface="Malgun Gothic"/>
+                <a:ea typeface="Malgun Gothic"/>
+                <a:cs typeface="Malgun Gothic"/>
+              </a:defRPr>
+            </a:lvl8pPr>
+            <a:lvl9pPr algn="l">
+              <a:defRPr sz="1875" b="1">
+                <a:solidFill>
+                  <a:srgbClr val="805400"/>
+                </a:solidFill>
+                <a:latin typeface="Malgun Gothic"/>
+                <a:ea typeface="Malgun Gothic"/>
+                <a:cs typeface="Malgun Gothic"/>
+              </a:defRPr>
+            </a:lvl9pPr>
+          </a:lstStyle>
+          <a:p xmlns:a="http://schemas.openxmlformats.org/drawingml/2006/main">
+            <a:pPr algn="l">
+              <a:defRPr sz="1875" b="1">
+                <a:solidFill>
+                  <a:srgbClr val="805400"/>
+                </a:solidFill>
+                <a:latin typeface="Malgun Gothic"/>
+                <a:ea typeface="Malgun Gothic"/>
+                <a:cs typeface="Malgun Gothic"/>
+              </a:defRPr>
+            </a:pPr>
+            <a:r>
+              <a:rPr sz="1875" b="1">
+                <a:solidFill>
+                  <a:srgbClr val="805400"/>
+                </a:solidFill>
+                <a:latin typeface="Malgun Gothic"/>
+                <a:ea typeface="Malgun Gothic"/>
+                <a:cs typeface="Malgun Gothic"/>
+              </a:rPr>
+              <a:t>TRIAL-001도 환경 오류 3건</a:t>
+            </a:r>
+          </a:p>
+        </p:txBody>
       </p:sp>
       <p:sp>
         <p:nvSpPr>
-          <p:cNvPr id="16" name="전체 실행 기록: 7개 통과 + crop 실패 + 환경 오류 3건">
+          <p:cNvPr id="18" name="코드만 옮기면, 실행 환경의 단서는 빠진다.">
             <a:extLst xmlns:a="http://schemas.openxmlformats.org/drawingml/2006/main">
               <a:ext uri="{FF2B5EF4-FFF2-40B4-BE49-F238E27FC236}">
-                <a16:creationId xmlns:a16="http://schemas.microsoft.com/office/drawing/2014/main" id="{41D3CF48-E674-492D-92F8-C9F5E415BF9D}"/>
+                <a16:creationId xmlns:a16="http://schemas.microsoft.com/office/drawing/2014/main" id="{685733C9-BF63-4DB1-894B-3023F8347859}"/>
               </a:ext>
             </a:extLst>
           </p:cNvPr>
@@ -27411,7 +26140,7 @@
         </p:nvSpPr>
         <p:spPr>
           <a:xfrm xmlns:a="http://schemas.openxmlformats.org/drawingml/2006/main">
-            <a:off x="609600" y="5295900"/>
+            <a:off x="609600" y="5048250"/>
             <a:ext cx="10972800" cy="381000"/>
           </a:xfrm>
           <a:prstGeom xmlns:a="http://schemas.openxmlformats.org/drawingml/2006/main" prst="rect">
@@ -27428,9 +26157,9 @@
           </a:bodyPr>
           <a:lstStyle xmlns:a="http://schemas.openxmlformats.org/drawingml/2006/main">
             <a:defPPr algn="l">
-              <a:defRPr sz="2100" b="0">
-                <a:solidFill>
-                  <a:srgbClr val="4D5A68"/>
+              <a:defRPr sz="2325" b="1">
+                <a:solidFill>
+                  <a:srgbClr val="0B6172"/>
                 </a:solidFill>
                 <a:latin typeface="Malgun Gothic"/>
                 <a:ea typeface="Malgun Gothic"/>
@@ -27438,9 +26167,9 @@
               </a:defRPr>
             </a:defPPr>
             <a:lvl1pPr algn="l">
-              <a:defRPr sz="2100" b="0">
-                <a:solidFill>
-                  <a:srgbClr val="4D5A68"/>
+              <a:defRPr sz="2325" b="1">
+                <a:solidFill>
+                  <a:srgbClr val="0B6172"/>
                 </a:solidFill>
                 <a:latin typeface="Malgun Gothic"/>
                 <a:ea typeface="Malgun Gothic"/>
@@ -27448,9 +26177,9 @@
               </a:defRPr>
             </a:lvl1pPr>
             <a:lvl2pPr algn="l">
-              <a:defRPr sz="2100" b="0">
-                <a:solidFill>
-                  <a:srgbClr val="4D5A68"/>
+              <a:defRPr sz="2325" b="1">
+                <a:solidFill>
+                  <a:srgbClr val="0B6172"/>
                 </a:solidFill>
                 <a:latin typeface="Malgun Gothic"/>
                 <a:ea typeface="Malgun Gothic"/>
@@ -27458,9 +26187,9 @@
               </a:defRPr>
             </a:lvl2pPr>
             <a:lvl3pPr algn="l">
-              <a:defRPr sz="2100" b="0">
-                <a:solidFill>
-                  <a:srgbClr val="4D5A68"/>
+              <a:defRPr sz="2325" b="1">
+                <a:solidFill>
+                  <a:srgbClr val="0B6172"/>
                 </a:solidFill>
                 <a:latin typeface="Malgun Gothic"/>
                 <a:ea typeface="Malgun Gothic"/>
@@ -27468,9 +26197,9 @@
               </a:defRPr>
             </a:lvl3pPr>
             <a:lvl4pPr algn="l">
-              <a:defRPr sz="2100" b="0">
-                <a:solidFill>
-                  <a:srgbClr val="4D5A68"/>
+              <a:defRPr sz="2325" b="1">
+                <a:solidFill>
+                  <a:srgbClr val="0B6172"/>
                 </a:solidFill>
                 <a:latin typeface="Malgun Gothic"/>
                 <a:ea typeface="Malgun Gothic"/>
@@ -27478,9 +26207,9 @@
               </a:defRPr>
             </a:lvl4pPr>
             <a:lvl5pPr algn="l">
-              <a:defRPr sz="2100" b="0">
-                <a:solidFill>
-                  <a:srgbClr val="4D5A68"/>
+              <a:defRPr sz="2325" b="1">
+                <a:solidFill>
+                  <a:srgbClr val="0B6172"/>
                 </a:solidFill>
                 <a:latin typeface="Malgun Gothic"/>
                 <a:ea typeface="Malgun Gothic"/>
@@ -27488,9 +26217,9 @@
               </a:defRPr>
             </a:lvl5pPr>
             <a:lvl6pPr algn="l">
-              <a:defRPr sz="2100" b="0">
-                <a:solidFill>
-                  <a:srgbClr val="4D5A68"/>
+              <a:defRPr sz="2325" b="1">
+                <a:solidFill>
+                  <a:srgbClr val="0B6172"/>
                 </a:solidFill>
                 <a:latin typeface="Malgun Gothic"/>
                 <a:ea typeface="Malgun Gothic"/>
@@ -27498,9 +26227,9 @@
               </a:defRPr>
             </a:lvl6pPr>
             <a:lvl7pPr algn="l">
-              <a:defRPr sz="2100" b="0">
-                <a:solidFill>
-                  <a:srgbClr val="4D5A68"/>
+              <a:defRPr sz="2325" b="1">
+                <a:solidFill>
+                  <a:srgbClr val="0B6172"/>
                 </a:solidFill>
                 <a:latin typeface="Malgun Gothic"/>
                 <a:ea typeface="Malgun Gothic"/>
@@ -27508,9 +26237,9 @@
               </a:defRPr>
             </a:lvl7pPr>
             <a:lvl8pPr algn="l">
-              <a:defRPr sz="2100" b="0">
-                <a:solidFill>
-                  <a:srgbClr val="4D5A68"/>
+              <a:defRPr sz="2325" b="1">
+                <a:solidFill>
+                  <a:srgbClr val="0B6172"/>
                 </a:solidFill>
                 <a:latin typeface="Malgun Gothic"/>
                 <a:ea typeface="Malgun Gothic"/>
@@ -27518,9 +26247,9 @@
               </a:defRPr>
             </a:lvl8pPr>
             <a:lvl9pPr algn="l">
-              <a:defRPr sz="2100" b="0">
-                <a:solidFill>
-                  <a:srgbClr val="4D5A68"/>
+              <a:defRPr sz="2325" b="1">
+                <a:solidFill>
+                  <a:srgbClr val="0B6172"/>
                 </a:solidFill>
                 <a:latin typeface="Malgun Gothic"/>
                 <a:ea typeface="Malgun Gothic"/>
@@ -27530,9 +26259,9 @@
           </a:lstStyle>
           <a:p xmlns:a="http://schemas.openxmlformats.org/drawingml/2006/main">
             <a:pPr algn="l">
-              <a:defRPr sz="2100" b="0">
-                <a:solidFill>
-                  <a:srgbClr val="4D5A68"/>
+              <a:defRPr sz="2325" b="1">
+                <a:solidFill>
+                  <a:srgbClr val="0B6172"/>
                 </a:solidFill>
                 <a:latin typeface="Malgun Gothic"/>
                 <a:ea typeface="Malgun Gothic"/>
@@ -27540,25 +26269,183 @@
               </a:defRPr>
             </a:pPr>
             <a:r>
-              <a:rPr sz="2100" b="0">
-                <a:solidFill>
-                  <a:srgbClr val="4D5A68"/>
+              <a:rPr sz="2325" b="1">
+                <a:solidFill>
+                  <a:srgbClr val="0B6172"/>
                 </a:solidFill>
                 <a:latin typeface="Malgun Gothic"/>
                 <a:ea typeface="Malgun Gothic"/>
                 <a:cs typeface="Malgun Gothic"/>
               </a:rPr>
-              <a:t>전체 실행 기록: 7개 통과 + crop 실패 + 환경 오류 3건</a:t>
+              <a:t>코드만 옮기면, 실행 환경의 단서는 빠진다.</a:t>
             </a:r>
           </a:p>
         </p:txBody>
       </p:sp>
       <p:sp>
         <p:nvSpPr>
-          <p:cNvPr id="17" name="Legacy module connection">
+          <p:cNvPr id="19" name="실제 전체 기록: 7개 통과 · crop 실패 1건 · 환경 오류 3건">
             <a:extLst xmlns:a="http://schemas.openxmlformats.org/drawingml/2006/main">
               <a:ext uri="{FF2B5EF4-FFF2-40B4-BE49-F238E27FC236}">
-                <a16:creationId xmlns:a16="http://schemas.microsoft.com/office/drawing/2014/main" id="{AEBAD6F7-5F9F-4DDE-B6E3-73AC3DFF180D}"/>
+                <a16:creationId xmlns:a16="http://schemas.microsoft.com/office/drawing/2014/main" id="{2602E0F7-D64B-4AB0-9E44-CB1D7E0C1A29}"/>
+              </a:ext>
+            </a:extLst>
+          </p:cNvPr>
+          <p:cNvSpPr>
+            <a:spLocks xmlns:a="http://schemas.openxmlformats.org/drawingml/2006/main" noGrp="1"/>
+          </p:cNvSpPr>
+          <p:nvPr/>
+        </p:nvSpPr>
+        <p:spPr>
+          <a:xfrm xmlns:a="http://schemas.openxmlformats.org/drawingml/2006/main">
+            <a:off x="609600" y="5476875"/>
+            <a:ext cx="10972800" cy="238125"/>
+          </a:xfrm>
+          <a:prstGeom xmlns:a="http://schemas.openxmlformats.org/drawingml/2006/main" prst="rect">
+            <a:avLst/>
+          </a:prstGeom>
+          <a:noFill xmlns:a="http://schemas.openxmlformats.org/drawingml/2006/main"/>
+          <a:ln xmlns:a="http://schemas.openxmlformats.org/drawingml/2006/main" w="0">
+            <a:noFill/>
+          </a:ln>
+        </p:spPr>
+        <p:txBody>
+          <a:bodyPr xmlns:a="http://schemas.openxmlformats.org/drawingml/2006/main" wrap="none" lIns="0" tIns="0" rIns="0" bIns="0" anchor="ctr">
+            <a:noAutofit/>
+          </a:bodyPr>
+          <a:lstStyle xmlns:a="http://schemas.openxmlformats.org/drawingml/2006/main">
+            <a:defPPr algn="l">
+              <a:defRPr sz="1725" b="0">
+                <a:solidFill>
+                  <a:srgbClr val="4D5A68"/>
+                </a:solidFill>
+                <a:latin typeface="Malgun Gothic"/>
+                <a:ea typeface="Malgun Gothic"/>
+                <a:cs typeface="Malgun Gothic"/>
+              </a:defRPr>
+            </a:defPPr>
+            <a:lvl1pPr algn="l">
+              <a:defRPr sz="1725" b="0">
+                <a:solidFill>
+                  <a:srgbClr val="4D5A68"/>
+                </a:solidFill>
+                <a:latin typeface="Malgun Gothic"/>
+                <a:ea typeface="Malgun Gothic"/>
+                <a:cs typeface="Malgun Gothic"/>
+              </a:defRPr>
+            </a:lvl1pPr>
+            <a:lvl2pPr algn="l">
+              <a:defRPr sz="1725" b="0">
+                <a:solidFill>
+                  <a:srgbClr val="4D5A68"/>
+                </a:solidFill>
+                <a:latin typeface="Malgun Gothic"/>
+                <a:ea typeface="Malgun Gothic"/>
+                <a:cs typeface="Malgun Gothic"/>
+              </a:defRPr>
+            </a:lvl2pPr>
+            <a:lvl3pPr algn="l">
+              <a:defRPr sz="1725" b="0">
+                <a:solidFill>
+                  <a:srgbClr val="4D5A68"/>
+                </a:solidFill>
+                <a:latin typeface="Malgun Gothic"/>
+                <a:ea typeface="Malgun Gothic"/>
+                <a:cs typeface="Malgun Gothic"/>
+              </a:defRPr>
+            </a:lvl3pPr>
+            <a:lvl4pPr algn="l">
+              <a:defRPr sz="1725" b="0">
+                <a:solidFill>
+                  <a:srgbClr val="4D5A68"/>
+                </a:solidFill>
+                <a:latin typeface="Malgun Gothic"/>
+                <a:ea typeface="Malgun Gothic"/>
+                <a:cs typeface="Malgun Gothic"/>
+              </a:defRPr>
+            </a:lvl4pPr>
+            <a:lvl5pPr algn="l">
+              <a:defRPr sz="1725" b="0">
+                <a:solidFill>
+                  <a:srgbClr val="4D5A68"/>
+                </a:solidFill>
+                <a:latin typeface="Malgun Gothic"/>
+                <a:ea typeface="Malgun Gothic"/>
+                <a:cs typeface="Malgun Gothic"/>
+              </a:defRPr>
+            </a:lvl5pPr>
+            <a:lvl6pPr algn="l">
+              <a:defRPr sz="1725" b="0">
+                <a:solidFill>
+                  <a:srgbClr val="4D5A68"/>
+                </a:solidFill>
+                <a:latin typeface="Malgun Gothic"/>
+                <a:ea typeface="Malgun Gothic"/>
+                <a:cs typeface="Malgun Gothic"/>
+              </a:defRPr>
+            </a:lvl6pPr>
+            <a:lvl7pPr algn="l">
+              <a:defRPr sz="1725" b="0">
+                <a:solidFill>
+                  <a:srgbClr val="4D5A68"/>
+                </a:solidFill>
+                <a:latin typeface="Malgun Gothic"/>
+                <a:ea typeface="Malgun Gothic"/>
+                <a:cs typeface="Malgun Gothic"/>
+              </a:defRPr>
+            </a:lvl7pPr>
+            <a:lvl8pPr algn="l">
+              <a:defRPr sz="1725" b="0">
+                <a:solidFill>
+                  <a:srgbClr val="4D5A68"/>
+                </a:solidFill>
+                <a:latin typeface="Malgun Gothic"/>
+                <a:ea typeface="Malgun Gothic"/>
+                <a:cs typeface="Malgun Gothic"/>
+              </a:defRPr>
+            </a:lvl8pPr>
+            <a:lvl9pPr algn="l">
+              <a:defRPr sz="1725" b="0">
+                <a:solidFill>
+                  <a:srgbClr val="4D5A68"/>
+                </a:solidFill>
+                <a:latin typeface="Malgun Gothic"/>
+                <a:ea typeface="Malgun Gothic"/>
+                <a:cs typeface="Malgun Gothic"/>
+              </a:defRPr>
+            </a:lvl9pPr>
+          </a:lstStyle>
+          <a:p xmlns:a="http://schemas.openxmlformats.org/drawingml/2006/main">
+            <a:pPr algn="l">
+              <a:defRPr sz="1725" b="0">
+                <a:solidFill>
+                  <a:srgbClr val="4D5A68"/>
+                </a:solidFill>
+                <a:latin typeface="Malgun Gothic"/>
+                <a:ea typeface="Malgun Gothic"/>
+                <a:cs typeface="Malgun Gothic"/>
+              </a:defRPr>
+            </a:pPr>
+            <a:r>
+              <a:rPr sz="1725" b="0">
+                <a:solidFill>
+                  <a:srgbClr val="4D5A68"/>
+                </a:solidFill>
+                <a:latin typeface="Malgun Gothic"/>
+                <a:ea typeface="Malgun Gothic"/>
+                <a:cs typeface="Malgun Gothic"/>
+              </a:rPr>
+              <a:t>실제 전체 기록: 7개 통과 · crop 실패 1건 · 환경 오류 3건</a:t>
+            </a:r>
+          </a:p>
+        </p:txBody>
+      </p:sp>
+      <p:sp>
+        <p:nvSpPr>
+          <p:cNvPr id="20" name="Legacy module connection">
+            <a:extLst xmlns:a="http://schemas.openxmlformats.org/drawingml/2006/main">
+              <a:ext uri="{FF2B5EF4-FFF2-40B4-BE49-F238E27FC236}">
+                <a16:creationId xmlns:a16="http://schemas.microsoft.com/office/drawing/2014/main" id="{7046A6A4-956B-4B47-9C6D-94012D143811}"/>
               </a:ext>
             </a:extLst>
           </p:cNvPr>
@@ -27714,7 +26601,7 @@
     </p:spTree>
     <p:extLst>
       <p:ext uri="{BB962C8B-B14F-4D97-AF65-F5344CB8AC3E}">
-        <p14:creationId xmlns:p14="http://schemas.microsoft.com/office/powerpoint/2010/main" val="236462596"/>
+        <p14:creationId xmlns:p14="http://schemas.microsoft.com/office/powerpoint/2010/main" val="82957514"/>
       </p:ext>
     </p:extLst>
   </p:cSld>
@@ -27745,7 +26632,7 @@
           <p:cNvPr id="14" name="ACT 0 · Context를 찾는 주체">
             <a:extLst xmlns:a="http://schemas.openxmlformats.org/drawingml/2006/main">
               <a:ext uri="{FF2B5EF4-FFF2-40B4-BE49-F238E27FC236}">
-                <a16:creationId xmlns:a16="http://schemas.microsoft.com/office/drawing/2014/main" id="{D3388B1E-EDC4-4415-9D64-8319D92C49D7}"/>
+                <a16:creationId xmlns:a16="http://schemas.microsoft.com/office/drawing/2014/main" id="{EBB3C862-C000-4B27-AA3B-0727A413E9A4}"/>
               </a:ext>
             </a:extLst>
           </p:cNvPr>
@@ -27903,7 +26790,7 @@
           <p:cNvPr id="2" name="S07">
             <a:extLst xmlns:a="http://schemas.openxmlformats.org/drawingml/2006/main">
               <a:ext uri="{FF2B5EF4-FFF2-40B4-BE49-F238E27FC236}">
-                <a16:creationId xmlns:a16="http://schemas.microsoft.com/office/drawing/2014/main" id="{4469944C-1C7B-4642-BE65-49587EE5BD26}"/>
+                <a16:creationId xmlns:a16="http://schemas.microsoft.com/office/drawing/2014/main" id="{325AD7CD-10DC-4F9C-A110-3D5370A5F30A}"/>
               </a:ext>
             </a:extLst>
           </p:cNvPr>
@@ -28061,7 +26948,7 @@
           <p:cNvPr id="3" name="코드를 AI에게 가져가는 대신&#10;AI를 Repository로 데려간다">
             <a:extLst xmlns:a="http://schemas.openxmlformats.org/drawingml/2006/main">
               <a:ext uri="{FF2B5EF4-FFF2-40B4-BE49-F238E27FC236}">
-                <a16:creationId xmlns:a16="http://schemas.microsoft.com/office/drawing/2014/main" id="{7ABD89C3-BA50-48D4-B6DE-3318C514E362}"/>
+                <a16:creationId xmlns:a16="http://schemas.microsoft.com/office/drawing/2014/main" id="{4EB894B6-BD05-4372-80B9-304CDB6CB864}"/>
               </a:ext>
             </a:extLst>
           </p:cNvPr>
@@ -28242,7 +27129,7 @@
           <p:cNvPr id="4" name="">
             <a:extLst xmlns:a="http://schemas.openxmlformats.org/drawingml/2006/main">
               <a:ext uri="{FF2B5EF4-FFF2-40B4-BE49-F238E27FC236}">
-                <a16:creationId xmlns:a16="http://schemas.microsoft.com/office/drawing/2014/main" id="{D80A7AB5-A3A1-4524-BB18-7B4C9E04E9E9}"/>
+                <a16:creationId xmlns:a16="http://schemas.microsoft.com/office/drawing/2014/main" id="{EFB72C0B-6DE3-44E2-BAC1-EF94BD4E9668}"/>
               </a:ext>
             </a:extLst>
           </p:cNvPr>
@@ -28273,7 +27160,7 @@
           <p:cNvPr id="5" name="교육 모델 · TRIAL-001 단일 CLI 관찰과 연결 · AI 생성 설명용 삽화">
             <a:extLst xmlns:a="http://schemas.openxmlformats.org/drawingml/2006/main">
               <a:ext uri="{FF2B5EF4-FFF2-40B4-BE49-F238E27FC236}">
-                <a16:creationId xmlns:a16="http://schemas.microsoft.com/office/drawing/2014/main" id="{E2549725-75AA-4E1A-9588-B920CFEB61BF}"/>
+                <a16:creationId xmlns:a16="http://schemas.microsoft.com/office/drawing/2014/main" id="{28C3C916-7FD5-4933-9878-32499274FB41}"/>
               </a:ext>
             </a:extLst>
           </p:cNvPr>
@@ -28431,7 +27318,7 @@
           <p:cNvPr id="6" name="목표 설정과 근거 검토는 개발자에게 남습니다. Repository 접근이 Task 의도를 정하지는 않습니다.">
             <a:extLst xmlns:a="http://schemas.openxmlformats.org/drawingml/2006/main">
               <a:ext uri="{FF2B5EF4-FFF2-40B4-BE49-F238E27FC236}">
-                <a16:creationId xmlns:a16="http://schemas.microsoft.com/office/drawing/2014/main" id="{62B593CE-C9BD-4336-A616-47B420325D4F}"/>
+                <a16:creationId xmlns:a16="http://schemas.microsoft.com/office/drawing/2014/main" id="{A1A6629A-8975-4349-A92E-856D60EA3F87}"/>
               </a:ext>
             </a:extLst>
           </p:cNvPr>
@@ -28589,7 +27476,7 @@
           <p:cNvPr id="7" name="내가 골라 전달하는 Context">
             <a:extLst xmlns:a="http://schemas.openxmlformats.org/drawingml/2006/main">
               <a:ext uri="{FF2B5EF4-FFF2-40B4-BE49-F238E27FC236}">
-                <a16:creationId xmlns:a16="http://schemas.microsoft.com/office/drawing/2014/main" id="{6B2F3445-9BD7-414E-97DE-50F4069168B2}"/>
+                <a16:creationId xmlns:a16="http://schemas.microsoft.com/office/drawing/2014/main" id="{A3165199-A1FF-4F33-A0C7-2519033309BD}"/>
               </a:ext>
             </a:extLst>
           </p:cNvPr>
@@ -28747,7 +27634,7 @@
           <p:cNvPr id="8" name="조사를 맡기고 근거를 확인">
             <a:extLst xmlns:a="http://schemas.openxmlformats.org/drawingml/2006/main">
               <a:ext uri="{FF2B5EF4-FFF2-40B4-BE49-F238E27FC236}">
-                <a16:creationId xmlns:a16="http://schemas.microsoft.com/office/drawing/2014/main" id="{928F78C9-F709-4E3A-87AD-ACD14B58D5A0}"/>
+                <a16:creationId xmlns:a16="http://schemas.microsoft.com/office/drawing/2014/main" id="{A31784CB-3480-41DF-B87F-C21C157DDE43}"/>
               </a:ext>
             </a:extLst>
           </p:cNvPr>
@@ -28905,7 +27792,7 @@
           <p:cNvPr id="9" name="">
             <a:extLst xmlns:a="http://schemas.openxmlformats.org/drawingml/2006/main">
               <a:ext uri="{FF2B5EF4-FFF2-40B4-BE49-F238E27FC236}">
-                <a16:creationId xmlns:a16="http://schemas.microsoft.com/office/drawing/2014/main" id="{A3844098-4841-4FB3-B62D-3D86429A38A8}"/>
+                <a16:creationId xmlns:a16="http://schemas.microsoft.com/office/drawing/2014/main" id="{01A52E1F-1786-4035-9E09-3154B0B35F69}"/>
               </a:ext>
             </a:extLst>
           </p:cNvPr>
@@ -28915,7 +27802,7 @@
           <p:nvPr/>
         </p:nvPicPr>
         <p:blipFill>
-          <a:blip xmlns:r="http://schemas.openxmlformats.org/officeDocument/2006/relationships" xmlns:a="http://schemas.openxmlformats.org/drawingml/2006/main" r:embed="R717ea0f2aa5049cb"/>
+          <a:blip xmlns:r="http://schemas.openxmlformats.org/officeDocument/2006/relationships" xmlns:a="http://schemas.openxmlformats.org/drawingml/2006/main" r:embed="Rc19865849f194c14"/>
           <a:srcRect xmlns:a="http://schemas.openxmlformats.org/drawingml/2006/main" l="0" t="18000" r="0" b="15000"/>
           <a:stretch xmlns:a="http://schemas.openxmlformats.org/drawingml/2006/main"/>
         </p:blipFill>
@@ -28934,7 +27821,7 @@
           <p:cNvPr id="10" name="코드 조각을 선택·복사">
             <a:extLst xmlns:a="http://schemas.openxmlformats.org/drawingml/2006/main">
               <a:ext uri="{FF2B5EF4-FFF2-40B4-BE49-F238E27FC236}">
-                <a16:creationId xmlns:a16="http://schemas.microsoft.com/office/drawing/2014/main" id="{F814C57A-54F7-46F0-ABEB-290486F35176}"/>
+                <a16:creationId xmlns:a16="http://schemas.microsoft.com/office/drawing/2014/main" id="{400EC119-B907-4A0F-9658-B4731707986C}"/>
               </a:ext>
             </a:extLst>
           </p:cNvPr>
@@ -29092,7 +27979,7 @@
           <p:cNvPr id="11" name="목표는 사람이, 탐색은 Agent와">
             <a:extLst xmlns:a="http://schemas.openxmlformats.org/drawingml/2006/main">
               <a:ext uri="{FF2B5EF4-FFF2-40B4-BE49-F238E27FC236}">
-                <a16:creationId xmlns:a16="http://schemas.microsoft.com/office/drawing/2014/main" id="{605E18B4-2926-49B7-ACD9-21CB37023CD9}"/>
+                <a16:creationId xmlns:a16="http://schemas.microsoft.com/office/drawing/2014/main" id="{5130CE85-C226-4A85-8DC0-DBD369291034}"/>
               </a:ext>
             </a:extLst>
           </p:cNvPr>
@@ -29250,7 +28137,7 @@
           <p:cNvPr id="12" name="접근 전: 승인된 도구·계정·자료·권한 범위를 확인한다.">
             <a:extLst xmlns:a="http://schemas.openxmlformats.org/drawingml/2006/main">
               <a:ext uri="{FF2B5EF4-FFF2-40B4-BE49-F238E27FC236}">
-                <a16:creationId xmlns:a16="http://schemas.microsoft.com/office/drawing/2014/main" id="{245D2D9C-3F70-47EC-8FC8-58D6589E929A}"/>
+                <a16:creationId xmlns:a16="http://schemas.microsoft.com/office/drawing/2014/main" id="{7296F1C6-9B3D-4031-A3E6-F30DFE88A468}"/>
               </a:ext>
             </a:extLst>
           </p:cNvPr>
@@ -29408,7 +28295,7 @@
           <p:cNvPr id="13" name="Legacy module connection">
             <a:extLst xmlns:a="http://schemas.openxmlformats.org/drawingml/2006/main">
               <a:ext uri="{FF2B5EF4-FFF2-40B4-BE49-F238E27FC236}">
-                <a16:creationId xmlns:a16="http://schemas.microsoft.com/office/drawing/2014/main" id="{6BA8677D-B9D7-4EB7-8774-5DC0472F24FE}"/>
+                <a16:creationId xmlns:a16="http://schemas.microsoft.com/office/drawing/2014/main" id="{A699030A-C561-44C6-9DC8-40F239288461}"/>
               </a:ext>
             </a:extLst>
           </p:cNvPr>
@@ -29564,7 +28451,7 @@
     </p:spTree>
     <p:extLst>
       <p:ext uri="{BB962C8B-B14F-4D97-AF65-F5344CB8AC3E}">
-        <p14:creationId xmlns:p14="http://schemas.microsoft.com/office/powerpoint/2010/main" val="360900707"/>
+        <p14:creationId xmlns:p14="http://schemas.microsoft.com/office/powerpoint/2010/main" val="1351196116"/>
       </p:ext>
     </p:extLst>
   </p:cSld>
@@ -29595,7 +28482,7 @@
           <p:cNvPr id="16" name="ACT 0 · 접근할 정보와 정할 목표">
             <a:extLst xmlns:a="http://schemas.openxmlformats.org/drawingml/2006/main">
               <a:ext uri="{FF2B5EF4-FFF2-40B4-BE49-F238E27FC236}">
-                <a16:creationId xmlns:a16="http://schemas.microsoft.com/office/drawing/2014/main" id="{118B752A-48A3-4740-B469-F5B353DB67C4}"/>
+                <a16:creationId xmlns:a16="http://schemas.microsoft.com/office/drawing/2014/main" id="{CE5BA19A-C8BF-48A7-958A-78D26ECCB992}"/>
               </a:ext>
             </a:extLst>
           </p:cNvPr>
@@ -29753,7 +28640,7 @@
           <p:cNvPr id="2" name="S08">
             <a:extLst xmlns:a="http://schemas.openxmlformats.org/drawingml/2006/main">
               <a:ext uri="{FF2B5EF4-FFF2-40B4-BE49-F238E27FC236}">
-                <a16:creationId xmlns:a16="http://schemas.microsoft.com/office/drawing/2014/main" id="{00C3182A-6F07-478D-B2C0-6A1AA7F90FF8}"/>
+                <a16:creationId xmlns:a16="http://schemas.microsoft.com/office/drawing/2014/main" id="{881FFD40-AECD-43A9-81FC-E054A836A922}"/>
               </a:ext>
             </a:extLst>
           </p:cNvPr>
@@ -29911,7 +28798,7 @@
           <p:cNvPr id="3" name="Repository 접근과 Task 의도는 별개다">
             <a:extLst xmlns:a="http://schemas.openxmlformats.org/drawingml/2006/main">
               <a:ext uri="{FF2B5EF4-FFF2-40B4-BE49-F238E27FC236}">
-                <a16:creationId xmlns:a16="http://schemas.microsoft.com/office/drawing/2014/main" id="{B064F0DB-F507-4B7F-A2F8-3323BEBA129C}"/>
+                <a16:creationId xmlns:a16="http://schemas.microsoft.com/office/drawing/2014/main" id="{EE696860-93E2-4E4C-91EF-B118F7E10868}"/>
               </a:ext>
             </a:extLst>
           </p:cNvPr>
@@ -30069,7 +28956,7 @@
           <p:cNvPr id="4" name="">
             <a:extLst xmlns:a="http://schemas.openxmlformats.org/drawingml/2006/main">
               <a:ext uri="{FF2B5EF4-FFF2-40B4-BE49-F238E27FC236}">
-                <a16:creationId xmlns:a16="http://schemas.microsoft.com/office/drawing/2014/main" id="{1BBC5C82-7706-43D9-894D-963D0D782DF6}"/>
+                <a16:creationId xmlns:a16="http://schemas.microsoft.com/office/drawing/2014/main" id="{049486E2-C30B-4D13-A5A6-E6B560344A25}"/>
               </a:ext>
             </a:extLst>
           </p:cNvPr>
@@ -30100,7 +28987,7 @@
           <p:cNvPr id="5" name="이 과정의 교육 모델 · Repository 접근과 작업 의도의 관계">
             <a:extLst xmlns:a="http://schemas.openxmlformats.org/drawingml/2006/main">
               <a:ext uri="{FF2B5EF4-FFF2-40B4-BE49-F238E27FC236}">
-                <a16:creationId xmlns:a16="http://schemas.microsoft.com/office/drawing/2014/main" id="{7EEB57A1-ADBE-498E-9AD5-829494F5DE21}"/>
+                <a16:creationId xmlns:a16="http://schemas.microsoft.com/office/drawing/2014/main" id="{8285B098-8E87-4468-BED4-A5C83F23C249}"/>
               </a:ext>
             </a:extLst>
           </p:cNvPr>
@@ -30258,7 +29145,7 @@
           <p:cNvPr id="6" name="모든 제품이나 환경의 기능을 설명하는 공식 분류가 아닙니다.">
             <a:extLst xmlns:a="http://schemas.openxmlformats.org/drawingml/2006/main">
               <a:ext uri="{FF2B5EF4-FFF2-40B4-BE49-F238E27FC236}">
-                <a16:creationId xmlns:a16="http://schemas.microsoft.com/office/drawing/2014/main" id="{84FF9756-A3B9-41E1-BB37-5B56C84F572E}"/>
+                <a16:creationId xmlns:a16="http://schemas.microsoft.com/office/drawing/2014/main" id="{1B573DAE-E591-429E-BE41-900A819D9A13}"/>
               </a:ext>
             </a:extLst>
           </p:cNvPr>
@@ -30416,7 +29303,7 @@
           <p:cNvPr id="7" name="볼 수 있는 것">
             <a:extLst xmlns:a="http://schemas.openxmlformats.org/drawingml/2006/main">
               <a:ext uri="{FF2B5EF4-FFF2-40B4-BE49-F238E27FC236}">
-                <a16:creationId xmlns:a16="http://schemas.microsoft.com/office/drawing/2014/main" id="{26BCFDB0-D20B-44A0-BFE2-62D613B43667}"/>
+                <a16:creationId xmlns:a16="http://schemas.microsoft.com/office/drawing/2014/main" id="{FE017089-05A6-40AC-A2C3-DE3DB594D22B}"/>
               </a:ext>
             </a:extLst>
           </p:cNvPr>
@@ -30574,7 +29461,7 @@
           <p:cNvPr id="8" name="정해야 하는 것">
             <a:extLst xmlns:a="http://schemas.openxmlformats.org/drawingml/2006/main">
               <a:ext uri="{FF2B5EF4-FFF2-40B4-BE49-F238E27FC236}">
-                <a16:creationId xmlns:a16="http://schemas.microsoft.com/office/drawing/2014/main" id="{284469FB-573F-445F-A855-86D9F4BCD93A}"/>
+                <a16:creationId xmlns:a16="http://schemas.microsoft.com/office/drawing/2014/main" id="{79FC7A0B-8F42-4A18-9EB5-45AD1AE4A328}"/>
               </a:ext>
             </a:extLst>
           </p:cNvPr>
@@ -30732,7 +29619,7 @@
           <p:cNvPr id="9" name="">
             <a:extLst xmlns:a="http://schemas.openxmlformats.org/drawingml/2006/main">
               <a:ext uri="{FF2B5EF4-FFF2-40B4-BE49-F238E27FC236}">
-                <a16:creationId xmlns:a16="http://schemas.microsoft.com/office/drawing/2014/main" id="{F9BC1EFA-6DD7-4C9B-B177-15F51F4D76FA}"/>
+                <a16:creationId xmlns:a16="http://schemas.microsoft.com/office/drawing/2014/main" id="{B0643450-1908-4D46-B432-035DA02BF711}"/>
               </a:ext>
             </a:extLst>
           </p:cNvPr>
@@ -30763,7 +29650,7 @@
           <p:cNvPr id="10" name="">
             <a:extLst xmlns:a="http://schemas.openxmlformats.org/drawingml/2006/main">
               <a:ext uri="{FF2B5EF4-FFF2-40B4-BE49-F238E27FC236}">
-                <a16:creationId xmlns:a16="http://schemas.microsoft.com/office/drawing/2014/main" id="{10073F4B-69A0-41F9-B191-BF8A6235EC17}"/>
+                <a16:creationId xmlns:a16="http://schemas.microsoft.com/office/drawing/2014/main" id="{D279EC18-2111-4A83-AADE-F0A4CB6CC7CF}"/>
               </a:ext>
             </a:extLst>
           </p:cNvPr>
@@ -30794,7 +29681,7 @@
           <p:cNvPr id="11" name="파일&#10;구현&#10;테스트">
             <a:extLst xmlns:a="http://schemas.openxmlformats.org/drawingml/2006/main">
               <a:ext uri="{FF2B5EF4-FFF2-40B4-BE49-F238E27FC236}">
-                <a16:creationId xmlns:a16="http://schemas.microsoft.com/office/drawing/2014/main" id="{20E24A8A-7CA3-4234-A492-988235BE03F9}"/>
+                <a16:creationId xmlns:a16="http://schemas.microsoft.com/office/drawing/2014/main" id="{DA10C8B2-C404-4821-9A74-FFFF4ED9D697}"/>
               </a:ext>
             </a:extLst>
           </p:cNvPr>
@@ -30998,7 +29885,7 @@
           <p:cNvPr id="12" name="원하는 변화&#10;허용할 범위&#10;완료 판단">
             <a:extLst xmlns:a="http://schemas.openxmlformats.org/drawingml/2006/main">
               <a:ext uri="{FF2B5EF4-FFF2-40B4-BE49-F238E27FC236}">
-                <a16:creationId xmlns:a16="http://schemas.microsoft.com/office/drawing/2014/main" id="{8EF862BE-E5E6-4657-8A5B-6854E82EEDFF}"/>
+                <a16:creationId xmlns:a16="http://schemas.microsoft.com/office/drawing/2014/main" id="{9F9CD4A6-4859-4981-B0EF-986979741556}"/>
               </a:ext>
             </a:extLst>
           </p:cNvPr>
@@ -31202,7 +30089,7 @@
           <p:cNvPr id="13" name="≠">
             <a:extLst xmlns:a="http://schemas.openxmlformats.org/drawingml/2006/main">
               <a:ext uri="{FF2B5EF4-FFF2-40B4-BE49-F238E27FC236}">
-                <a16:creationId xmlns:a16="http://schemas.microsoft.com/office/drawing/2014/main" id="{A147683C-6880-40CA-8C73-A2DF7F2C5078}"/>
+                <a16:creationId xmlns:a16="http://schemas.microsoft.com/office/drawing/2014/main" id="{7C4AD710-23D2-4986-A20D-8AFFF8BA6114}"/>
               </a:ext>
             </a:extLst>
           </p:cNvPr>
@@ -31360,7 +30247,7 @@
           <p:cNvPr id="14" name="코드가 보여도, 원하는 일은 따로 전달해야 한다.">
             <a:extLst xmlns:a="http://schemas.openxmlformats.org/drawingml/2006/main">
               <a:ext uri="{FF2B5EF4-FFF2-40B4-BE49-F238E27FC236}">
-                <a16:creationId xmlns:a16="http://schemas.microsoft.com/office/drawing/2014/main" id="{8E67E8FF-243A-4C80-A6B1-066EE4B14CA5}"/>
+                <a16:creationId xmlns:a16="http://schemas.microsoft.com/office/drawing/2014/main" id="{99C3F7C8-59BA-4B1A-B983-9087E69A0B3D}"/>
               </a:ext>
             </a:extLst>
           </p:cNvPr>
@@ -31518,7 +30405,7 @@
           <p:cNvPr id="15" name="Legacy module connection">
             <a:extLst xmlns:a="http://schemas.openxmlformats.org/drawingml/2006/main">
               <a:ext uri="{FF2B5EF4-FFF2-40B4-BE49-F238E27FC236}">
-                <a16:creationId xmlns:a16="http://schemas.microsoft.com/office/drawing/2014/main" id="{6CBECE70-368A-4DC7-9691-9755801C452D}"/>
+                <a16:creationId xmlns:a16="http://schemas.microsoft.com/office/drawing/2014/main" id="{09A0233C-03F2-4E85-8F9B-58D10AB3DA37}"/>
               </a:ext>
             </a:extLst>
           </p:cNvPr>
@@ -31674,7 +30561,7 @@
     </p:spTree>
     <p:extLst>
       <p:ext uri="{BB962C8B-B14F-4D97-AF65-F5344CB8AC3E}">
-        <p14:creationId xmlns:p14="http://schemas.microsoft.com/office/powerpoint/2010/main" val="1221205926"/>
+        <p14:creationId xmlns:p14="http://schemas.microsoft.com/office/powerpoint/2010/main" val="1208669752"/>
       </p:ext>
     </p:extLst>
   </p:cSld>
@@ -31705,7 +30592,7 @@
           <p:cNvPr id="12" name="ACT 0 · 내 작업에 적용할 질문">
             <a:extLst xmlns:a="http://schemas.openxmlformats.org/drawingml/2006/main">
               <a:ext uri="{FF2B5EF4-FFF2-40B4-BE49-F238E27FC236}">
-                <a16:creationId xmlns:a16="http://schemas.microsoft.com/office/drawing/2014/main" id="{7CB37BA4-B008-4933-97A5-1E057241A11C}"/>
+                <a16:creationId xmlns:a16="http://schemas.microsoft.com/office/drawing/2014/main" id="{200AC94C-FCBE-417E-9C6C-D2ED20FF2317}"/>
               </a:ext>
             </a:extLst>
           </p:cNvPr>
@@ -31863,7 +30750,7 @@
           <p:cNvPr id="2" name="S09">
             <a:extLst xmlns:a="http://schemas.openxmlformats.org/drawingml/2006/main">
               <a:ext uri="{FF2B5EF4-FFF2-40B4-BE49-F238E27FC236}">
-                <a16:creationId xmlns:a16="http://schemas.microsoft.com/office/drawing/2014/main" id="{81D15B1F-FBDF-4E3D-9184-D659D819EC3E}"/>
+                <a16:creationId xmlns:a16="http://schemas.microsoft.com/office/drawing/2014/main" id="{EEA0C075-B088-4A35-9130-837CBA133FF6}"/>
               </a:ext>
             </a:extLst>
           </p:cNvPr>
@@ -32021,7 +30908,7 @@
           <p:cNvPr id="3" name="Repository를 보면 내가 원하는 것까지 알까?">
             <a:extLst xmlns:a="http://schemas.openxmlformats.org/drawingml/2006/main">
               <a:ext uri="{FF2B5EF4-FFF2-40B4-BE49-F238E27FC236}">
-                <a16:creationId xmlns:a16="http://schemas.microsoft.com/office/drawing/2014/main" id="{6B969CA4-69BA-44A7-97B7-74FCE2113785}"/>
+                <a16:creationId xmlns:a16="http://schemas.microsoft.com/office/drawing/2014/main" id="{282708B6-4B39-4922-AE1C-591E0204A0B6}"/>
               </a:ext>
             </a:extLst>
           </p:cNvPr>
@@ -32179,7 +31066,7 @@
           <p:cNvPr id="4" name="">
             <a:extLst xmlns:a="http://schemas.openxmlformats.org/drawingml/2006/main">
               <a:ext uri="{FF2B5EF4-FFF2-40B4-BE49-F238E27FC236}">
-                <a16:creationId xmlns:a16="http://schemas.microsoft.com/office/drawing/2014/main" id="{C67D82A7-5C21-4C76-A311-CE93A8111110}"/>
+                <a16:creationId xmlns:a16="http://schemas.microsoft.com/office/drawing/2014/main" id="{66120272-BC5F-4A7A-B63C-21B9928FDC97}"/>
               </a:ext>
             </a:extLst>
           </p:cNvPr>
@@ -32210,7 +31097,7 @@
           <p:cNvPr id="5" name="함께 생각해 보기 · 교육 모델">
             <a:extLst xmlns:a="http://schemas.openxmlformats.org/drawingml/2006/main">
               <a:ext uri="{FF2B5EF4-FFF2-40B4-BE49-F238E27FC236}">
-                <a16:creationId xmlns:a16="http://schemas.microsoft.com/office/drawing/2014/main" id="{DCC5DBE1-BD5D-4178-8676-A6C6282E79BF}"/>
+                <a16:creationId xmlns:a16="http://schemas.microsoft.com/office/drawing/2014/main" id="{C649E945-761A-4436-AED3-ED8E718F06B0}"/>
               </a:ext>
             </a:extLst>
           </p:cNvPr>
@@ -32368,7 +31255,7 @@
           <p:cNvPr id="6" name="현재 맡기고 싶은 일을 떠올려 보세요. 질문과 경험 공유는 자발적으로 진행합니다.">
             <a:extLst xmlns:a="http://schemas.openxmlformats.org/drawingml/2006/main">
               <a:ext uri="{FF2B5EF4-FFF2-40B4-BE49-F238E27FC236}">
-                <a16:creationId xmlns:a16="http://schemas.microsoft.com/office/drawing/2014/main" id="{E316D910-8EE7-4585-B4E6-324DEDF3B16B}"/>
+                <a16:creationId xmlns:a16="http://schemas.microsoft.com/office/drawing/2014/main" id="{F9D182D5-F956-4D03-923B-F468E3465E4B}"/>
               </a:ext>
             </a:extLst>
           </p:cNvPr>
@@ -32526,7 +31413,7 @@
           <p:cNvPr id="7" name="지금 이 저장소에&#10;어떤 일을 맡기고 싶으신가요?">
             <a:extLst xmlns:a="http://schemas.openxmlformats.org/drawingml/2006/main">
               <a:ext uri="{FF2B5EF4-FFF2-40B4-BE49-F238E27FC236}">
-                <a16:creationId xmlns:a16="http://schemas.microsoft.com/office/drawing/2014/main" id="{30968823-2375-4F4C-8C19-A4BBF2F07BD0}"/>
+                <a16:creationId xmlns:a16="http://schemas.microsoft.com/office/drawing/2014/main" id="{C26A57B9-4488-4912-8CCC-A1758AF43451}"/>
               </a:ext>
             </a:extLst>
           </p:cNvPr>
@@ -32707,7 +31594,7 @@
           <p:cNvPr id="8" name="?">
             <a:extLst xmlns:a="http://schemas.openxmlformats.org/drawingml/2006/main">
               <a:ext uri="{FF2B5EF4-FFF2-40B4-BE49-F238E27FC236}">
-                <a16:creationId xmlns:a16="http://schemas.microsoft.com/office/drawing/2014/main" id="{B4CC6887-4142-4978-ADF8-DA80C8931104}"/>
+                <a16:creationId xmlns:a16="http://schemas.microsoft.com/office/drawing/2014/main" id="{1F4F960A-0AFA-4F7D-997C-D1F16536E19A}"/>
               </a:ext>
             </a:extLst>
           </p:cNvPr>
@@ -32865,7 +31752,7 @@
           <p:cNvPr id="9" name="">
             <a:extLst xmlns:a="http://schemas.openxmlformats.org/drawingml/2006/main">
               <a:ext uri="{FF2B5EF4-FFF2-40B4-BE49-F238E27FC236}">
-                <a16:creationId xmlns:a16="http://schemas.microsoft.com/office/drawing/2014/main" id="{13293845-8EF7-4544-915B-06743DC4CE77}"/>
+                <a16:creationId xmlns:a16="http://schemas.microsoft.com/office/drawing/2014/main" id="{5B80C2B0-523E-4273-AB5E-A9270341E6A9}"/>
               </a:ext>
             </a:extLst>
           </p:cNvPr>
@@ -32896,7 +31783,7 @@
           <p:cNvPr id="10" name="그 원하는 결과까지&#10;코드에 적혀 있을까요?">
             <a:extLst xmlns:a="http://schemas.openxmlformats.org/drawingml/2006/main">
               <a:ext uri="{FF2B5EF4-FFF2-40B4-BE49-F238E27FC236}">
-                <a16:creationId xmlns:a16="http://schemas.microsoft.com/office/drawing/2014/main" id="{9161CB3D-A603-4C09-95A3-49885C3990E6}"/>
+                <a16:creationId xmlns:a16="http://schemas.microsoft.com/office/drawing/2014/main" id="{CC75E229-07F1-4CB9-9234-A90573078634}"/>
               </a:ext>
             </a:extLst>
           </p:cNvPr>
@@ -33077,7 +31964,7 @@
           <p:cNvPr id="11" name="Legacy module connection">
             <a:extLst xmlns:a="http://schemas.openxmlformats.org/drawingml/2006/main">
               <a:ext uri="{FF2B5EF4-FFF2-40B4-BE49-F238E27FC236}">
-                <a16:creationId xmlns:a16="http://schemas.microsoft.com/office/drawing/2014/main" id="{5E8DF759-59AD-46BF-9148-BCB07CCA7512}"/>
+                <a16:creationId xmlns:a16="http://schemas.microsoft.com/office/drawing/2014/main" id="{4569FF4C-F7A2-44A0-977A-86D37BFC94C1}"/>
               </a:ext>
             </a:extLst>
           </p:cNvPr>
@@ -33233,7 +32120,7 @@
     </p:spTree>
     <p:extLst>
       <p:ext uri="{BB962C8B-B14F-4D97-AF65-F5344CB8AC3E}">
-        <p14:creationId xmlns:p14="http://schemas.microsoft.com/office/powerpoint/2010/main" val="614633715"/>
+        <p14:creationId xmlns:p14="http://schemas.microsoft.com/office/powerpoint/2010/main" val="1797482214"/>
       </p:ext>
     </p:extLst>
   </p:cSld>

--- a/production/ACT_0.pptx
+++ b/production/ACT_0.pptx
@@ -2,21 +2,22 @@
 <file path=ppt/presentation.xml><?xml version="1.0" encoding="utf-8"?>
 <p:presentation xmlns:p="http://schemas.openxmlformats.org/presentationml/2006/main">
   <p:sldMasterIdLst>
-    <p:sldMasterId xmlns:r="http://schemas.openxmlformats.org/officeDocument/2006/relationships" id="2147483648" r:id="R0006350e80584923"/>
+    <p:sldMasterId xmlns:r="http://schemas.openxmlformats.org/officeDocument/2006/relationships" id="2147483648" r:id="R1c712e04b8d64939"/>
   </p:sldMasterIdLst>
   <p:notesMasterIdLst>
-    <p:notesMasterId xmlns:r="http://schemas.openxmlformats.org/officeDocument/2006/relationships" r:id="Rac2733a811f44619"/>
+    <p:notesMasterId xmlns:r="http://schemas.openxmlformats.org/officeDocument/2006/relationships" r:id="Rb98b7b4b146f4655"/>
   </p:notesMasterIdLst>
   <p:sldIdLst>
-    <p:sldId xmlns:r="http://schemas.openxmlformats.org/officeDocument/2006/relationships" id="256" r:id="Ra75efc88eb164bc1"/>
-    <p:sldId xmlns:r="http://schemas.openxmlformats.org/officeDocument/2006/relationships" id="257" r:id="R308a1100439c4ef1"/>
-    <p:sldId xmlns:r="http://schemas.openxmlformats.org/officeDocument/2006/relationships" id="258" r:id="R4485ad4f09004de6"/>
-    <p:sldId xmlns:r="http://schemas.openxmlformats.org/officeDocument/2006/relationships" id="259" r:id="Rd30a477e21334bae"/>
-    <p:sldId xmlns:r="http://schemas.openxmlformats.org/officeDocument/2006/relationships" id="260" r:id="R8f1a72716d3246b0"/>
-    <p:sldId xmlns:r="http://schemas.openxmlformats.org/officeDocument/2006/relationships" id="261" r:id="R78a290c9ffbd4b6f"/>
-    <p:sldId xmlns:r="http://schemas.openxmlformats.org/officeDocument/2006/relationships" id="262" r:id="Rdae2a47de4404f8b"/>
-    <p:sldId xmlns:r="http://schemas.openxmlformats.org/officeDocument/2006/relationships" id="263" r:id="R92cc87ab002140e5"/>
-    <p:sldId xmlns:r="http://schemas.openxmlformats.org/officeDocument/2006/relationships" id="264" r:id="R1c3df8e91b894f01"/>
+    <p:sldId xmlns:r="http://schemas.openxmlformats.org/officeDocument/2006/relationships" id="256" r:id="Rab3dfd4e78154774"/>
+    <p:sldId xmlns:r="http://schemas.openxmlformats.org/officeDocument/2006/relationships" id="257" r:id="Rd67506d667e244af"/>
+    <p:sldId xmlns:r="http://schemas.openxmlformats.org/officeDocument/2006/relationships" id="258" r:id="Re245cf3811994fca"/>
+    <p:sldId xmlns:r="http://schemas.openxmlformats.org/officeDocument/2006/relationships" id="259" r:id="R2e5b1dbc438a4400"/>
+    <p:sldId xmlns:r="http://schemas.openxmlformats.org/officeDocument/2006/relationships" id="260" r:id="R6daa024d09d8419a"/>
+    <p:sldId xmlns:r="http://schemas.openxmlformats.org/officeDocument/2006/relationships" id="261" r:id="R0b743223a5174a43"/>
+    <p:sldId xmlns:r="http://schemas.openxmlformats.org/officeDocument/2006/relationships" id="262" r:id="R7343ccda41334b81"/>
+    <p:sldId xmlns:r="http://schemas.openxmlformats.org/officeDocument/2006/relationships" id="263" r:id="R15d7de5848734f7f"/>
+    <p:sldId xmlns:r="http://schemas.openxmlformats.org/officeDocument/2006/relationships" id="264" r:id="R186a2f8e5e624f0c"/>
+    <p:sldId xmlns:r="http://schemas.openxmlformats.org/officeDocument/2006/relationships" id="265" r:id="R49a2b78cbcb843f3"/>
   </p:sldIdLst>
   <p:sldSz cx="12192000" cy="6858000"/>
   <p:notesSz cx="6858000" cy="9144000"/>
@@ -685,6 +686,281 @@
 </p:notes>
 </file>
 
+<file path=ppt/notesSlides/notesSlide10.xml><?xml version="1.0" encoding="utf-8"?>
+<p:notes xmlns:p="http://schemas.openxmlformats.org/presentationml/2006/main">
+  <p:cSld>
+    <p:spTree>
+      <p:nvGrpSpPr>
+        <p:cNvPr id="1" name=""/>
+        <p:cNvGrpSpPr/>
+        <p:nvPr/>
+      </p:nvGrpSpPr>
+      <p:grpSpPr>
+        <a:xfrm xmlns:a="http://schemas.openxmlformats.org/drawingml/2006/main"/>
+      </p:grpSpPr>
+      <p:sp>
+        <p:nvSpPr>
+          <p:cNvPr id="2" name="Slide Image Placeholder 1"/>
+          <p:cNvSpPr>
+            <a:spLocks xmlns:a="http://schemas.openxmlformats.org/drawingml/2006/main" noGrp="1"/>
+          </p:cNvSpPr>
+          <p:nvPr>
+            <p:ph type="sldImg" idx="0"/>
+          </p:nvPr>
+        </p:nvSpPr>
+        <p:spPr/>
+      </p:sp>
+      <p:sp>
+        <p:nvSpPr>
+          <p:cNvPr id="3" name="Notes Placeholder 2"/>
+          <p:cNvSpPr>
+            <a:spLocks xmlns:a="http://schemas.openxmlformats.org/drawingml/2006/main" noGrp="1"/>
+          </p:cNvSpPr>
+          <p:nvPr>
+            <p:ph type="body" idx="1"/>
+          </p:nvPr>
+        </p:nvSpPr>
+        <p:spPr/>
+        <p:txBody>
+          <a:bodyPr xmlns:a="http://schemas.openxmlformats.org/drawingml/2006/main"/>
+          <a:lstStyle xmlns:a="http://schemas.openxmlformats.org/drawingml/2006/main"/>
+          <a:p xmlns:a="http://schemas.openxmlformats.org/drawingml/2006/main">
+            <a:r>
+              <a:t>## S10 — Repository를 보면 내가 원하는 것까지 알까?</a:t>
+            </a:r>
+          </a:p>
+          <a:p xmlns:a="http://schemas.openxmlformats.org/drawingml/2006/main">
+            <a:r>
+              <a:t/>
+            </a:r>
+          </a:p>
+          <a:p xmlns:a="http://schemas.openxmlformats.org/drawingml/2006/main">
+            <a:r>
+              <a:t>Slide ID: S10</a:t>
+            </a:r>
+          </a:p>
+          <a:p xmlns:a="http://schemas.openxmlformats.org/drawingml/2006/main">
+            <a:r>
+              <a:t/>
+            </a:r>
+          </a:p>
+          <a:p xmlns:a="http://schemas.openxmlformats.org/drawingml/2006/main">
+            <a:r>
+              <a:t>Working Title: Repository를 보면 내가 원하는 것까지 알까?</a:t>
+            </a:r>
+          </a:p>
+          <a:p xmlns:a="http://schemas.openxmlformats.org/drawingml/2006/main">
+            <a:r>
+              <a:t/>
+            </a:r>
+          </a:p>
+          <a:p xmlns:a="http://schemas.openxmlformats.org/drawingml/2006/main">
+            <a:r>
+              <a:t>ACT / Section: ACT 0 / 0F</a:t>
+            </a:r>
+          </a:p>
+          <a:p xmlns:a="http://schemas.openxmlformats.org/drawingml/2006/main">
+            <a:r>
+              <a:t/>
+            </a:r>
+          </a:p>
+          <a:p xmlns:a="http://schemas.openxmlformats.org/drawingml/2006/main">
+            <a:r>
+              <a:t>Allocated Time: 6 minutes</a:t>
+            </a:r>
+          </a:p>
+          <a:p xmlns:a="http://schemas.openxmlformats.org/drawingml/2006/main">
+            <a:r>
+              <a:t/>
+            </a:r>
+          </a:p>
+          <a:p xmlns:a="http://schemas.openxmlformats.org/drawingml/2006/main">
+            <a:r>
+              <a:t>Mode Split: Transition 3 minutes + Q&amp;A 3 minutes</a:t>
+            </a:r>
+          </a:p>
+          <a:p xmlns:a="http://schemas.openxmlformats.org/drawingml/2006/main">
+            <a:r>
+              <a:t/>
+            </a:r>
+          </a:p>
+          <a:p xmlns:a="http://schemas.openxmlformats.org/drawingml/2006/main">
+            <a:r>
+              <a:t>Primary Message: Repository를 볼 수 있다는 사실만으로 Task의 의도가 정해지지는 않는다.</a:t>
+            </a:r>
+          </a:p>
+          <a:p xmlns:a="http://schemas.openxmlformats.org/drawingml/2006/main">
+            <a:r>
+              <a:t/>
+            </a:r>
+          </a:p>
+          <a:p xmlns:a="http://schemas.openxmlformats.org/drawingml/2006/main">
+            <a:r>
+              <a:t>Opening Question: “내가 지금 맡기고 싶은 일의 원하는 결과까지 코드에 적혀 있을까?”</a:t>
+            </a:r>
+          </a:p>
+          <a:p xmlns:a="http://schemas.openxmlformats.org/drawingml/2006/main">
+            <a:r>
+              <a:t/>
+            </a:r>
+          </a:p>
+          <a:p xmlns:a="http://schemas.openxmlformats.org/drawingml/2006/main">
+            <a:r>
+              <a:t>Speaker Flow:</a:t>
+            </a:r>
+          </a:p>
+          <a:p xmlns:a="http://schemas.openxmlformats.org/drawingml/2006/main">
+            <a:r>
+              <a:t/>
+            </a:r>
+          </a:p>
+          <a:p xmlns:a="http://schemas.openxmlformats.org/drawingml/2006/main">
+            <a:r>
+              <a:t>1. **DISCUSS / TRANSITION (0:00–3:00):** 화면 상단의 “내 작업에 적용할 질문”을 짚고, 각자가 지금 맡기고 싶은 일 하나를 떠올리게 한다. “지금 이 저장소에 어떤 일을 맡기고 싶은가?”와 “그 원하는 결과까지 코드에 적혀 있는가?”를 차례로 읽는다. S09의 구분을 자기 작업에 대입하며 답이나 다음 단계의 체크리스트를 제시하지 않는다.</a:t>
+            </a:r>
+          </a:p>
+          <a:p xmlns:a="http://schemas.openxmlformats.org/drawingml/2006/main">
+            <a:r>
+              <a:t>2. **Q&amp;A (3:00–6:00):** 자발적인 질문을 받는다. 질문이 없으면 두 질문을 그대로 남긴 뒤 ACT 1의 모호한 요청으로 이동한다.</a:t>
+            </a:r>
+          </a:p>
+          <a:p xmlns:a="http://schemas.openxmlformats.org/drawingml/2006/main">
+            <a:r>
+              <a:t/>
+            </a:r>
+          </a:p>
+          <a:p xmlns:a="http://schemas.openxmlformats.org/drawingml/2006/main">
+            <a:r>
+              <a:t>Evidence / Source: BEAT-003 → BEAT-004, TRANSITIONS.md의 승인된 ACT handoff, DEMO-01 callback, CLM-0002, CLM-0009. TEACHING_MODEL.</a:t>
+            </a:r>
+          </a:p>
+          <a:p xmlns:a="http://schemas.openxmlformats.org/drawingml/2006/main">
+            <a:r>
+              <a:t/>
+            </a:r>
+          </a:p>
+          <a:p xmlns:a="http://schemas.openxmlformats.org/drawingml/2006/main">
+            <a:r>
+              <a:t>Claim Boundary: 이 장은 다음 문제를 여는 Teaching Model이다. ACT 1의 다섯 Task Specification 책임이나 구체적 해답을 공개하지 않는다.</a:t>
+            </a:r>
+          </a:p>
+          <a:p xmlns:a="http://schemas.openxmlformats.org/drawingml/2006/main">
+            <a:r>
+              <a:t/>
+            </a:r>
+          </a:p>
+          <a:p xmlns:a="http://schemas.openxmlformats.org/drawingml/2006/main">
+            <a:r>
+              <a:t>Beginner Explanation: Repository 접근이 생긴 뒤에도 원하는 결과를 설명할 문제는 남아 있다.</a:t>
+            </a:r>
+          </a:p>
+          <a:p xmlns:a="http://schemas.openxmlformats.org/drawingml/2006/main">
+            <a:r>
+              <a:t/>
+            </a:r>
+          </a:p>
+          <a:p xmlns:a="http://schemas.openxmlformats.org/drawingml/2006/main">
+            <a:r>
+              <a:t>Advanced Insight: 관찰 가능한 Context와 개발자가 정해야 할 의도를 구분하며 다음 Story 단계로 이동한다.</a:t>
+            </a:r>
+          </a:p>
+          <a:p xmlns:a="http://schemas.openxmlformats.org/drawingml/2006/main">
+            <a:r>
+              <a:t/>
+            </a:r>
+          </a:p>
+          <a:p xmlns:a="http://schemas.openxmlformats.org/drawingml/2006/main">
+            <a:r>
+              <a:t>C++ Vision Bridge: N/A.</a:t>
+            </a:r>
+          </a:p>
+          <a:p xmlns:a="http://schemas.openxmlformats.org/drawingml/2006/main">
+            <a:r>
+              <a:t/>
+            </a:r>
+          </a:p>
+          <a:p xmlns:a="http://schemas.openxmlformats.org/drawingml/2006/main">
+            <a:r>
+              <a:t>Demo Operation: N/A — 신규 Demo 또는 제품 기능 설명은 없다.</a:t>
+            </a:r>
+          </a:p>
+          <a:p xmlns:a="http://schemas.openxmlformats.org/drawingml/2006/main">
+            <a:r>
+              <a:t/>
+            </a:r>
+          </a:p>
+          <a:p xmlns:a="http://schemas.openxmlformats.org/drawingml/2006/main">
+            <a:r>
+              <a:t>Audience Interaction: Q&amp;A 3분은 선택적 질문 시간이다. 답변이나 공유를 강제하지 않는다. 침묵은 정상적인 결과로 둔다.</a:t>
+            </a:r>
+          </a:p>
+          <a:p xmlns:a="http://schemas.openxmlformats.org/drawingml/2006/main">
+            <a:r>
+              <a:t/>
+            </a:r>
+          </a:p>
+          <a:p xmlns:a="http://schemas.openxmlformats.org/drawingml/2006/main">
+            <a:r>
+              <a:t>Transition: “방금 떠올린 원하는 결과를 작업 요청으로 전달하려면 무엇이 더 필요할까요?”라는 질문으로 `Chatbot → Prompt`를 handoff한다. ACT 1의 내부 구조는 소개하지 않는다.</a:t>
+            </a:r>
+          </a:p>
+          <a:p xmlns:a="http://schemas.openxmlformats.org/drawingml/2006/main">
+            <a:r>
+              <a:t/>
+            </a:r>
+          </a:p>
+          <a:p xmlns:a="http://schemas.openxmlformats.org/drawingml/2006/main">
+            <a:r>
+              <a:t>Time Management: Slide Map의 순서를 유지해 Transition 3분 뒤 Q&amp;A 3분을 둔다. Q&amp;A를 늘려 ACT 전체 시간을 옮기지 않는다.</a:t>
+            </a:r>
+          </a:p>
+          <a:p xmlns:a="http://schemas.openxmlformats.org/drawingml/2006/main">
+            <a:r>
+              <a:t/>
+            </a:r>
+          </a:p>
+          <a:p xmlns:a="http://schemas.openxmlformats.org/drawingml/2006/main">
+            <a:r>
+              <a:t>Fallback: 질문이 없으면 Opening Question을 그대로 남기고 종료 cue로 ACT 1에 넘긴다. 강사가 질문에 답을 보태지 않는다.</a:t>
+            </a:r>
+          </a:p>
+          <a:p xmlns:a="http://schemas.openxmlformats.org/drawingml/2006/main">
+            <a:r>
+              <a:t/>
+            </a:r>
+          </a:p>
+          <a:p xmlns:a="http://schemas.openxmlformats.org/drawingml/2006/main">
+            <a:r>
+              <a:t>Validation Status: REVIEWED — 원문·Claim 경계, 화면의 설명 순서와 운영 지침을 대조했다. 최종 PPT/Notes/PNG 대조 결과는 production/evaluation/FULL_DECK_PRESENTATION_REVISION.md에 기록한다. Windows PowerPoint, 발표 PC 글꼴, 교육장 투사, 실제 시간 리허설은 UNVERIFIED.</a:t>
+            </a:r>
+          </a:p>
+        </p:txBody>
+      </p:sp>
+      <p:sp>
+        <p:nvSpPr>
+          <p:cNvPr id="4" name="Slide Number Placeholder 3"/>
+          <p:cNvSpPr>
+            <a:spLocks xmlns:a="http://schemas.openxmlformats.org/drawingml/2006/main" noGrp="1"/>
+          </p:cNvSpPr>
+          <p:nvPr>
+            <p:ph type="sldNum" idx="5"/>
+          </p:nvPr>
+        </p:nvSpPr>
+        <p:spPr/>
+        <p:txBody>
+          <a:bodyPr xmlns:a="http://schemas.openxmlformats.org/drawingml/2006/main"/>
+          <a:lstStyle xmlns:a="http://schemas.openxmlformats.org/drawingml/2006/main"/>
+          <a:p xmlns:a="http://schemas.openxmlformats.org/drawingml/2006/main"/>
+        </p:txBody>
+      </p:sp>
+    </p:spTree>
+  </p:cSld>
+  <p:clrMapOvr>
+    <a:masterClrMapping xmlns:a="http://schemas.openxmlformats.org/drawingml/2006/main"/>
+  </p:clrMapOvr>
+</p:notes>
+</file>
+
 <file path=ppt/notesSlides/notesSlide2.xml><?xml version="1.0" encoding="utf-8"?>
 <p:notes xmlns:p="http://schemas.openxmlformats.org/presentationml/2006/main">
   <p:cSld>
@@ -2205,7 +2481,7 @@
           </a:p>
           <a:p xmlns:a="http://schemas.openxmlformats.org/drawingml/2006/main">
             <a:r>
-              <a:t>Allocated Time: 3 minutes</a:t>
+              <a:t>Allocated Time: 2 minutes</a:t>
             </a:r>
           </a:p>
           <a:p xmlns:a="http://schemas.openxmlformats.org/drawingml/2006/main">
@@ -2215,16 +2491,26 @@
           </a:p>
           <a:p xmlns:a="http://schemas.openxmlformats.org/drawingml/2006/main">
             <a:r>
-              <a:t>Mode Split: Lecture 3 minutes</a:t>
-            </a:r>
-          </a:p>
-          <a:p xmlns:a="http://schemas.openxmlformats.org/drawingml/2006/main">
-            <a:r>
               <a:t/>
             </a:r>
           </a:p>
           <a:p xmlns:a="http://schemas.openxmlformats.org/drawingml/2006/main">
             <a:r>
+              <a:t>Mode Split: Lecture 2 minutes</a:t>
+            </a:r>
+          </a:p>
+          <a:p xmlns:a="http://schemas.openxmlformats.org/drawingml/2006/main">
+            <a:r>
+              <a:t/>
+            </a:r>
+          </a:p>
+          <a:p xmlns:a="http://schemas.openxmlformats.org/drawingml/2006/main">
+            <a:r>
+              <a:t/>
+            </a:r>
+          </a:p>
+          <a:p xmlns:a="http://schemas.openxmlformats.org/drawingml/2006/main">
+            <a:r>
               <a:t>Primary Message: Repository 조사는 개발자가 코드를 일일이 전달하는 대신 Agent가 사용 가능한 Context를 찾도록 할 수 있다.</a:t>
             </a:r>
           </a:p>
@@ -2255,22 +2541,22 @@
           </a:p>
           <a:p xmlns:a="http://schemas.openxmlformats.org/drawingml/2006/main">
             <a:r>
-              <a:t>1. **CALL BACK (0:00–0:30):** 왼쪽 Repository → 개발자 선택·복사 → AI 관계로 S02를 짧게 회수한다.</a:t>
-            </a:r>
-          </a:p>
-          <a:p xmlns:a="http://schemas.openxmlformats.org/drawingml/2006/main">
-            <a:r>
-              <a:t>2. **TRANSFER (0:30–1:30):** 오른쪽 개발자 조사 요청 → Agent ↔ Repository로 시선을 옮긴다. 바뀌는 것은 Context를 찾는 주체의 일부이며 목표와 검증 책임을 전부 넘긴다는 뜻이 아니다.</a:t>
-            </a:r>
-          </a:p>
-          <a:p xmlns:a="http://schemas.openxmlformats.org/drawingml/2006/main">
-            <a:r>
-              <a:t>3. **ACCESS BOUNDARY (1:30–2:15):** Repository를 연결하거나 자료를 전달하기 전에 승인된 도구·계정, 입력 가능한 자료와 허용된 접근 권한 범위를 먼저 확인한다고 설명한다. 회사의 실제 허용·금지 목록과 승인 절차는 이 자료에서 확정하지 않았으므로 해당 조직의 정책을 확인해야 한다. 새로운 제품 설정이나 정책 목록을 가르치지 않는다.</a:t>
-            </a:r>
-          </a:p>
-          <a:p xmlns:a="http://schemas.openxmlformats.org/drawingml/2006/main">
-            <a:r>
-              <a:t>4. **TRANSFER / TRANSITION (2:15–3:00):** 필요하면 큰 C++ 저장소에서도 모듈·테스트·계약을 찾는 상황을 한 문장으로만 연결한다. Repository 접근이 원하는 Task를 정하지는 않는다는 S08 질문으로 이동한다.</a:t>
+              <a:t>1. **CALL BACK (0:00–0:20):** 왼쪽 Repository → 개발자 선택·복사 → AI 관계로 S02를 짧게 회수한다.</a:t>
+            </a:r>
+          </a:p>
+          <a:p xmlns:a="http://schemas.openxmlformats.org/drawingml/2006/main">
+            <a:r>
+              <a:t>2. **TRANSFER (0:20–1:00):** 오른쪽 개발자 조사 요청 → Agent ↔ Repository로 시선을 옮긴다. 바뀌는 것은 Context를 찾는 주체의 일부이며 목표와 검증 책임을 전부 넘긴다는 뜻이 아니다. C++ 연결은 필요할 때 한 문장만 사용한다.</a:t>
+            </a:r>
+          </a:p>
+          <a:p xmlns:a="http://schemas.openxmlformats.org/drawingml/2006/main">
+            <a:r>
+              <a:t>3. **ACCESS BOUNDARY (1:00–1:45):** Repository를 연결하거나 자료를 전달하기 전에 승인된 도구·계정, 입력 가능한 자료와 허용된 접근 권한 범위를 먼저 확인한다고 설명한다. 회사의 실제 허용·금지 목록과 승인 절차는 이 자료에서 확정하지 않았으므로 해당 조직의 정책을 확인해야 한다. 새로운 제품 설정이나 정책 목록을 가르치지 않는다.</a:t>
+            </a:r>
+          </a:p>
+          <a:p xmlns:a="http://schemas.openxmlformats.org/drawingml/2006/main">
+            <a:r>
+              <a:t>4. **ENTRY QUESTION (1:45–2:00):** “그렇다면 Repository 작업은 어디서 시작할까요?”라고 물으며 새 S08의 Codex 진입 경로로 이동한다. 접근 권한과 Task 의도의 구분은 S09에서 회수한다.</a:t>
             </a:r>
           </a:p>
           <a:p xmlns:a="http://schemas.openxmlformats.org/drawingml/2006/main">
@@ -2280,6 +2566,11 @@
           </a:p>
           <a:p xmlns:a="http://schemas.openxmlformats.org/drawingml/2006/main">
             <a:r>
+              <a:t/>
+            </a:r>
+          </a:p>
+          <a:p xmlns:a="http://schemas.openxmlformats.org/drawingml/2006/main">
+            <a:r>
               <a:t>Evidence / Source: DEMO-01 / TRIAL-001 단일 CLI 관찰; BEAT-003, CLM-0002, CLM-0009. 본문은 Context 수집 역할을 비교하는 TEACHING_MODEL이며 하단에 연결된 과거 관찰의 범위를 별도로 표시한다. 삽화 출처: prototype/image-illustration-pilot/assets/S07.png, built-in image_gen, 2026-10-18. 생성 프롬프트: prototype/image-illustration-pilot/PROMPTS.md. 실제 화면·현장 사진·관찰 자료가 아니다.</a:t>
             </a:r>
           </a:p>
@@ -2350,7 +2641,7 @@
           </a:p>
           <a:p xmlns:a="http://schemas.openxmlformats.org/drawingml/2006/main">
             <a:r>
-              <a:t>Transition: “Repository 접근과 Task 의도는 같은가?”라고 물으며 S08에 간다.</a:t>
+              <a:t>Transition: “Repository 작업은 어디서 시작할까요?”라고 물으며 S08의 ChatGPT → Codex 진입 경로로 간다.</a:t>
             </a:r>
           </a:p>
           <a:p xmlns:a="http://schemas.openxmlformats.org/drawingml/2006/main">
@@ -2360,16 +2651,26 @@
           </a:p>
           <a:p xmlns:a="http://schemas.openxmlformats.org/drawingml/2006/main">
             <a:r>
-              <a:t>Time Management: 좌·우 관계의 변화에 집중한다. Trial 상세와 수치를 반복하지 않는다. 기존 관계 재설명과 선택적 C++ 해설을 줄여 접근 범위 확인 45초를 배치한다. C++ 연결은 선택적인 한 문장에 한정하고 Lecture 3분 안에 S08로 이동한다. 실제 시간 적합성은 리허설 전까지 UNVERIFIED다.</a:t>
-            </a:r>
-          </a:p>
-          <a:p xmlns:a="http://schemas.openxmlformats.org/drawingml/2006/main">
-            <a:r>
               <a:t/>
             </a:r>
           </a:p>
           <a:p xmlns:a="http://schemas.openxmlformats.org/drawingml/2006/main">
             <a:r>
+              <a:t>Time Management: Lecture 2분. S02 회수 20초, 좌·우 관계 40초, 승인된 도구·계정·자료·접근 범위 확인 45초, S08 연결 15초다. 접근 경계 45초는 줄이지 않고 관계 재설명·선택적 C++ 해설을 압축한다. 기존 S07의 Lecture 3분 중 1분을 신규 S08에 배정하며 ACT 0 40분과 전체 Mode를 유지한다. 실제 시간 적합성은 리허설 전까지 UNVERIFIED다.</a:t>
+            </a:r>
+          </a:p>
+          <a:p xmlns:a="http://schemas.openxmlformats.org/drawingml/2006/main">
+            <a:r>
+              <a:t/>
+            </a:r>
+          </a:p>
+          <a:p xmlns:a="http://schemas.openxmlformats.org/drawingml/2006/main">
+            <a:r>
+              <a:t/>
+            </a:r>
+          </a:p>
+          <a:p xmlns:a="http://schemas.openxmlformats.org/drawingml/2006/main">
+            <a:r>
               <a:t>Fallback: Trial record를 표시할 수 없으면 Mental Shift만 Teaching Model로 설명한다. 제품 전반의 사실처럼 말하지 않는다. 정적 파일: production/preview/act0/S07.png 및 production/preview/full/S07.png.</a:t>
             </a:r>
           </a:p>
@@ -2380,7 +2681,7 @@
           </a:p>
           <a:p xmlns:a="http://schemas.openxmlformats.org/drawingml/2006/main">
             <a:r>
-              <a:t>Validation Status: REVIEWED — 사용자 승인 삽화를 전체 제작본에 반영했다. PPT/Notes/PNG 대조와 S72 잘림 재검토 결과는 production/evaluation/FULL_DECK_IMAGE_INTEGRATION.md에 기록한다. Windows PowerPoint, 발표 PC 글꼴, 교육장 투사, 실제 시간 리허설은 UNVERIFIED.</a:t>
+              <a:t>Validation Status: ALIGNED — DEC-0036의 시간·전환 지침이다. 과거 80장판의 삽화·당시 S72(현재 S73) 잘림 검토는 production/evaluation/FULL_DECK_IMAGE_INTEGRATION.md에 보존한다. 새 제작본의 PPT/Notes/PNG 대조는 production/evaluation/CODEX_ENTRY_INSERTION.md에서 기록한다. Windows PowerPoint, 발표 PC 글꼴, 교육장 투사, 실제 시간 리허설은 UNVERIFIED.</a:t>
             </a:r>
           </a:p>
         </p:txBody>
@@ -2450,7 +2751,7 @@
           <a:lstStyle xmlns:a="http://schemas.openxmlformats.org/drawingml/2006/main"/>
           <a:p xmlns:a="http://schemas.openxmlformats.org/drawingml/2006/main">
             <a:r>
-              <a:t>## S08 — Repository 접근과 Task 의도는 별개다</a:t>
+              <a:t>## S08 — Repository 작업은 Codex에서 시작한다</a:t>
             </a:r>
           </a:p>
           <a:p xmlns:a="http://schemas.openxmlformats.org/drawingml/2006/main">
@@ -2470,7 +2771,7 @@
           </a:p>
           <a:p xmlns:a="http://schemas.openxmlformats.org/drawingml/2006/main">
             <a:r>
-              <a:t>Working Title: Repository 접근과 Task 의도는 별개다</a:t>
+              <a:t>Working Title: Repository 작업은 Codex에서 시작한다</a:t>
             </a:r>
           </a:p>
           <a:p xmlns:a="http://schemas.openxmlformats.org/drawingml/2006/main">
@@ -2490,7 +2791,7 @@
           </a:p>
           <a:p xmlns:a="http://schemas.openxmlformats.org/drawingml/2006/main">
             <a:r>
-              <a:t>Allocated Time: 2 minutes</a:t>
+              <a:t>Allocated Time: 1 minute</a:t>
             </a:r>
           </a:p>
           <a:p xmlns:a="http://schemas.openxmlformats.org/drawingml/2006/main">
@@ -2500,7 +2801,7 @@
           </a:p>
           <a:p xmlns:a="http://schemas.openxmlformats.org/drawingml/2006/main">
             <a:r>
-              <a:t>Mode Split: Lecture 2 minutes</a:t>
+              <a:t>Mode Split: Lecture 1 minute</a:t>
             </a:r>
           </a:p>
           <a:p xmlns:a="http://schemas.openxmlformats.org/drawingml/2006/main">
@@ -2510,7 +2811,7 @@
           </a:p>
           <a:p xmlns:a="http://schemas.openxmlformats.org/drawingml/2006/main">
             <a:r>
-              <a:t>Primary Message: Repository 탐색은 Context 수집에 도움을 줄 수 있지만, Task의 목표와 완료 조건까지 대신 정하지 않는다.</a:t>
+              <a:t>Primary Message: 이 교육에서 Repository를 조사하는 개발 작업은 ChatGPT 데스크톱 앱의 ChatGPT 메뉴에서 Codex를 선택해 시작한다.</a:t>
             </a:r>
           </a:p>
           <a:p xmlns:a="http://schemas.openxmlformats.org/drawingml/2006/main">
@@ -2520,7 +2821,7 @@
           </a:p>
           <a:p xmlns:a="http://schemas.openxmlformats.org/drawingml/2006/main">
             <a:r>
-              <a:t>Opening Question: “Repository를 볼 수 있으면 원하는 작업도 알게 되는가?”</a:t>
+              <a:t>Opening Question: “Repository 작업을 맡기려면 어디로 들어갈까?”</a:t>
             </a:r>
           </a:p>
           <a:p xmlns:a="http://schemas.openxmlformats.org/drawingml/2006/main">
@@ -2540,17 +2841,22 @@
           </a:p>
           <a:p xmlns:a="http://schemas.openxmlformats.org/drawingml/2006/main">
             <a:r>
-              <a:t>1. **OPEN (0:00–0:30):** 왼쪽 “볼 수 있는 것”과 오른쪽 “정해야 하는 것”을 분리한다.</a:t>
-            </a:r>
-          </a:p>
-          <a:p xmlns:a="http://schemas.openxmlformats.org/drawingml/2006/main">
-            <a:r>
-              <a:t>2. **EXPLAIN (0:30–1:30):** 파일·구현·테스트가 보여도 원하는 변화, 허용 범위, 완료 판단은 별도로 전달해야 한다는 구분만 설명한다.</a:t>
-            </a:r>
-          </a:p>
-          <a:p xmlns:a="http://schemas.openxmlformats.org/drawingml/2006/main">
-            <a:r>
-              <a:t>3. **TRANSFER (1:30–2:00):** 가운데 ≠를 짚고 “코드가 보여도 원하는 일은 따로 전달해야 한다”로 정리한다. 이어 이 구분을 각자가 맡기고 싶은 작업에 대입할 질문을 남긴다. ACT 1의 구체적인 요청 구조는 아직 소개하지 않는다.</a:t>
+              <a:t>1. **LOCATE (0:00–0:15):** 재구성 UI의 좌측 상단 ChatGPT 메뉴를 가리킨다. 사용자 지정 위치를 보여 주는 교육용 도식이며 실제 계정의 실행 캡처가 아님을 짧게 밝힌다.</a:t>
+            </a:r>
+          </a:p>
+          <a:p xmlns:a="http://schemas.openxmlformats.org/drawingml/2006/main">
+            <a:r>
+              <a:t>2. **SELECT (0:15–0:30):** 메뉴의 Codex를 가리킨다. 이 교육에서 코드베이스 조사와 개발 작업을 시작하는 표면을 연결한다.</a:t>
+            </a:r>
+          </a:p>
+          <a:p xmlns:a="http://schemas.openxmlformats.org/drawingml/2006/main">
+            <a:r>
+              <a:t>3. **REPOSITORY (0:30–0:45):** 허용된 Repository 폴더를 선택하는 흐름을 가리킨다. 앞 장에서 확인한 도구·계정·자료·권한 범위 안의 폴더만 대상이며 실제 선택이나 Live 실행을 하지 않는다.</a:t>
+            </a:r>
+          </a:p>
+          <a:p xmlns:a="http://schemas.openxmlformats.org/drawingml/2006/main">
+            <a:r>
+              <a:t>4. **ASK (0:45–1:00):** “먼저 조사해줘”라는 요청으로 S04의 조사 태도를 회수한다. “들어가는 곳을 알았으니, 무엇을 볼 수 있고 누가 최종 결정할지 나눠 보겠습니다”라며 S09로 간다.</a:t>
             </a:r>
           </a:p>
           <a:p xmlns:a="http://schemas.openxmlformats.org/drawingml/2006/main">
@@ -2560,7 +2866,7 @@
           </a:p>
           <a:p xmlns:a="http://schemas.openxmlformats.org/drawingml/2006/main">
             <a:r>
-              <a:t>Evidence / Source: BEAT-003 next friction, DEMO-01 callback, TRIAL-001; CLM-0002, CLM-0009. TEACHING_MODEL.</a:t>
+              <a:t>Evidence / Source: BEAT-003에 연결한 사용자 승인 진입 가교; DEC-0036; SRC-0228 (Quickstart), SRC-0229 (App), CLM-0031 (공식 문서의 전환 경로, 대상 UI·계정 UNVERIFIED). 공식 자료 [ChatGPT quickstart](https://learn.chatgpt.com/docs/quickstart?setup=app), [ChatGPT app](https://learn.chatgpt.com/docs/app), 확인 2026-10-21. Quickstart는 코드베이스 Context·개발 도구가 필요한 소프트웨어 개발에서 ChatGPT dropdown의 Codex 선택을 안내한다. 좌측 상단 위치는 사용자의 명시적 UI 요구다. 화면 구성은 공식 자료 기반 UI 재구성이며 실제 Screenshot이 아니다. 로컬 앱 직접 확인은 도구 안전 제약으로 수행하지 못해 UNVERIFIED다.</a:t>
             </a:r>
           </a:p>
           <a:p xmlns:a="http://schemas.openxmlformats.org/drawingml/2006/main">
@@ -2570,7 +2876,7 @@
           </a:p>
           <a:p xmlns:a="http://schemas.openxmlformats.org/drawingml/2006/main">
             <a:r>
-              <a:t>Claim Boundary: Mental Model이며 모든 제품·환경의 기능 설명이 아니다. Prompt 구조나 완료 조건의 구체 항목은 ACT 1에서 미리 설명하지 않는다.</a:t>
+              <a:t>Claim Boundary: 이 교육의 개발 작업 진입 경로를 안내한다. 모든 Repository 접근에 Codex만 가능하다는 보편적 주장이 아니다. ChatGPT의 다른 작업 표면에서도 파일 접근이 가능한 경우가 있으며 제품·계정·권한에 따라 다르다. 과거 CLI TRIAL-001을 현재 Desktop 동작의 검증 근거로 사용하지 않는다. 현재 대상 계정·Windows·정확한 메뉴와 폴더 선택 동작은 실제 환경 확인 전까지 UNVERIFIED다.</a:t>
             </a:r>
           </a:p>
           <a:p xmlns:a="http://schemas.openxmlformats.org/drawingml/2006/main">
@@ -2580,7 +2886,7 @@
           </a:p>
           <a:p xmlns:a="http://schemas.openxmlformats.org/drawingml/2006/main">
             <a:r>
-              <a:t>Beginner Explanation: Agent가 Repository를 읽을 수 있어도 원하는 결과는 개발자가 말해야 한다.</a:t>
+              <a:t>Beginner Explanation: 작은 코드 질문을 하던 대화에서 Repository 조사로 옮길 때, 이 교육에서는 Codex를 선택하는 진입점을 사용한다.</a:t>
             </a:r>
           </a:p>
           <a:p xmlns:a="http://schemas.openxmlformats.org/drawingml/2006/main">
@@ -2590,7 +2896,7 @@
           </a:p>
           <a:p xmlns:a="http://schemas.openxmlformats.org/drawingml/2006/main">
             <a:r>
-              <a:t>Advanced Insight: Context access와 objective/acceptance responsibility는 별도 경계다.</a:t>
+              <a:t>Advanced Insight: 제품 표면의 선택, Repository 접근 권한, 이번 Task의 의도는 서로 다른 경계다. 이 장은 진입 경로만 연결하며 제품별 접근 성능이나 독점적 기능을 주장하지 않는다.</a:t>
             </a:r>
           </a:p>
           <a:p xmlns:a="http://schemas.openxmlformats.org/drawingml/2006/main">
@@ -2600,7 +2906,7 @@
           </a:p>
           <a:p xmlns:a="http://schemas.openxmlformats.org/drawingml/2006/main">
             <a:r>
-              <a:t>C++ Vision Bridge: N/A.</a:t>
+              <a:t>C++ Vision Bridge: N/A. 언어·IDE별 설정을 추가하지 않는다.</a:t>
             </a:r>
           </a:p>
           <a:p xmlns:a="http://schemas.openxmlformats.org/drawingml/2006/main">
@@ -2610,7 +2916,7 @@
           </a:p>
           <a:p xmlns:a="http://schemas.openxmlformats.org/drawingml/2006/main">
             <a:r>
-              <a:t>Demo Operation: N/A — DEMO-01 성공 뒤 남는 문제를 설명한다.</a:t>
+              <a:t>Demo Operation: N/A — 공식 자료를 토대로 재구성한 정적 UI 도식이다. 실제 제품 조작·새 Trial·현장 실습은 없다. 대상 계정의 기능이 확인되지 않았으므로 Live 경로로 전환하지 않는다.</a:t>
             </a:r>
           </a:p>
           <a:p xmlns:a="http://schemas.openxmlformats.org/drawingml/2006/main">
@@ -2620,7 +2926,7 @@
           </a:p>
           <a:p xmlns:a="http://schemas.openxmlformats.org/drawingml/2006/main">
             <a:r>
-              <a:t>Audience Interaction: Opening question은 수사 질문이다. 짧은 강의 시간에 답변을 요구하지 않는다.</a:t>
+              <a:t>Audience Interaction: 위치를 함께 보는 1분 안내다. 청중에게 계정 로그인·폴더 선택·응답을 요구하지 않는다.</a:t>
             </a:r>
           </a:p>
           <a:p xmlns:a="http://schemas.openxmlformats.org/drawingml/2006/main">
@@ -2630,7 +2936,7 @@
           </a:p>
           <a:p xmlns:a="http://schemas.openxmlformats.org/drawingml/2006/main">
             <a:r>
-              <a:t>Transition: “이 구분을 여러분이 지금 맡기고 싶은 일에 대입해 보겠습니다.”라고 S09의 개인 적용 질문을 연다.</a:t>
+              <a:t>Transition: “Repository 안을 함께 볼 수 있어도, 어떤 결과를 받아들일지는 누가 정할까요?”라는 질문으로 S09에 간다.</a:t>
             </a:r>
           </a:p>
           <a:p xmlns:a="http://schemas.openxmlformats.org/drawingml/2006/main">
@@ -2640,7 +2946,7 @@
           </a:p>
           <a:p xmlns:a="http://schemas.openxmlformats.org/drawingml/2006/main">
             <a:r>
-              <a:t>Time Management: Access와 Intent 두 축만 설명하고 ACT 1의 구조나 목록은 소개하지 않는다.</a:t>
+              <a:t>Time Management: Lecture 1분. 메뉴 위치 15초, Codex 선택 15초, 허용 폴더 15초, 조사 요청·S09 연결 15초다. S07에서 이관한 1분이며 ACT 0 40분·전체 360분·Lecture 130분을 유지한다. 설정 tutorial을 추가하지 않는다.</a:t>
             </a:r>
           </a:p>
           <a:p xmlns:a="http://schemas.openxmlformats.org/drawingml/2006/main">
@@ -2650,7 +2956,7 @@
           </a:p>
           <a:p xmlns:a="http://schemas.openxmlformats.org/drawingml/2006/main">
             <a:r>
-              <a:t>Fallback: 화면 도식이 보이지 않으면 두 책임의 차이를 말로 한 번 설명하고 S09로 간다.</a:t>
+              <a:t>Fallback: 제작 완료 후 production/preview/act0/S08.png 또는 production/preview/full/S08.png의 정적 재구성 도식을 사용한다. 새 PNG와 PPT의 일치는 production/evaluation/CODEX_ENTRY_INSERTION.md에서 확인하기 전까지 미검증이다. 화면을 열 수 없으면 “이 교육에서는 ChatGPT 메뉴에서 Codex를 선택해 허용된 저장소 조사를 시작합니다”라고 말하고 S09로 간다. 즉석 계정 시연으로 대체하지 않는다.</a:t>
             </a:r>
           </a:p>
           <a:p xmlns:a="http://schemas.openxmlformats.org/drawingml/2006/main">
@@ -2660,7 +2966,7 @@
           </a:p>
           <a:p xmlns:a="http://schemas.openxmlformats.org/drawingml/2006/main">
             <a:r>
-              <a:t>Validation Status: REVIEWED — 원문·Claim 경계, 화면의 설명 순서와 운영 지침을 대조했다. 최종 PPT/Notes/PNG 대조 결과는 production/evaluation/FULL_DECK_PRESENTATION_REVISION.md에 기록한다. Windows PowerPoint, 발표 PC 글꼴, 교육장 투사, 실제 시간 리허설은 UNVERIFIED.</a:t>
+              <a:t>Validation Status: ALIGNED — 사용자 요청·공식 자료와 Notes를 정렬했다. 실제 Screenshot, 현재 계정의 제품 재현, Windows 호환성, 교육장 투사와 시간 리허설을 검증한 결과가 아니다. 새 PPT/PNG·내장 Notes 대조는 production/evaluation/CODEX_ENTRY_INSERTION.md에서 별도로 기록한다.</a:t>
             </a:r>
           </a:p>
         </p:txBody>
@@ -2730,7 +3036,7 @@
           <a:lstStyle xmlns:a="http://schemas.openxmlformats.org/drawingml/2006/main"/>
           <a:p xmlns:a="http://schemas.openxmlformats.org/drawingml/2006/main">
             <a:r>
-              <a:t>## S09 — Repository를 보면 내가 원하는 것까지 알까?</a:t>
+              <a:t>## S09 — Repository 접근과 Task 의도는 별개다</a:t>
             </a:r>
           </a:p>
           <a:p xmlns:a="http://schemas.openxmlformats.org/drawingml/2006/main">
@@ -2750,7 +3056,7 @@
           </a:p>
           <a:p xmlns:a="http://schemas.openxmlformats.org/drawingml/2006/main">
             <a:r>
-              <a:t>Working Title: Repository를 보면 내가 원하는 것까지 알까?</a:t>
+              <a:t>Working Title: Repository 접근과 Task 의도는 별개다</a:t>
             </a:r>
           </a:p>
           <a:p xmlns:a="http://schemas.openxmlformats.org/drawingml/2006/main">
@@ -2760,7 +3066,7 @@
           </a:p>
           <a:p xmlns:a="http://schemas.openxmlformats.org/drawingml/2006/main">
             <a:r>
-              <a:t>ACT / Section: ACT 0 / 0F</a:t>
+              <a:t>ACT / Section: ACT 0 / 0E</a:t>
             </a:r>
           </a:p>
           <a:p xmlns:a="http://schemas.openxmlformats.org/drawingml/2006/main">
@@ -2770,7 +3076,7 @@
           </a:p>
           <a:p xmlns:a="http://schemas.openxmlformats.org/drawingml/2006/main">
             <a:r>
-              <a:t>Allocated Time: 6 minutes</a:t>
+              <a:t>Allocated Time: 2 minutes</a:t>
             </a:r>
           </a:p>
           <a:p xmlns:a="http://schemas.openxmlformats.org/drawingml/2006/main">
@@ -2780,7 +3086,7 @@
           </a:p>
           <a:p xmlns:a="http://schemas.openxmlformats.org/drawingml/2006/main">
             <a:r>
-              <a:t>Mode Split: Transition 3 minutes + Q&amp;A 3 minutes</a:t>
+              <a:t>Mode Split: Lecture 2 minutes</a:t>
             </a:r>
           </a:p>
           <a:p xmlns:a="http://schemas.openxmlformats.org/drawingml/2006/main">
@@ -2790,7 +3096,7 @@
           </a:p>
           <a:p xmlns:a="http://schemas.openxmlformats.org/drawingml/2006/main">
             <a:r>
-              <a:t>Primary Message: Repository를 볼 수 있다는 사실만으로 Task의 의도가 정해지지는 않는다.</a:t>
+              <a:t>Primary Message: Repository 탐색은 Context 수집에 도움을 줄 수 있지만, Task의 목표와 완료 조건까지 대신 정하지 않는다.</a:t>
             </a:r>
           </a:p>
           <a:p xmlns:a="http://schemas.openxmlformats.org/drawingml/2006/main">
@@ -2800,7 +3106,7 @@
           </a:p>
           <a:p xmlns:a="http://schemas.openxmlformats.org/drawingml/2006/main">
             <a:r>
-              <a:t>Opening Question: “내가 지금 맡기고 싶은 일의 원하는 결과까지 코드에 적혀 있을까?”</a:t>
+              <a:t>Opening Question: “Repository를 볼 수 있으면 원하는 작업도 알게 되는가?”</a:t>
             </a:r>
           </a:p>
           <a:p xmlns:a="http://schemas.openxmlformats.org/drawingml/2006/main">
@@ -2820,12 +3126,22 @@
           </a:p>
           <a:p xmlns:a="http://schemas.openxmlformats.org/drawingml/2006/main">
             <a:r>
-              <a:t>1. **DISCUSS / TRANSITION (0:00–3:00):** 화면 상단의 “내 작업에 적용할 질문”을 짚고, 각자가 지금 맡기고 싶은 일 하나를 떠올리게 한다. “지금 이 저장소에 어떤 일을 맡기고 싶은가?”와 “그 원하는 결과까지 코드에 적혀 있는가?”를 차례로 읽는다. S08의 구분을 자기 작업에 대입하며 답이나 다음 단계의 체크리스트를 제시하지 않는다.</a:t>
-            </a:r>
-          </a:p>
-          <a:p xmlns:a="http://schemas.openxmlformats.org/drawingml/2006/main">
-            <a:r>
-              <a:t>2. **Q&amp;A (3:00–6:00):** 자발적인 질문을 받는다. 질문이 없으면 두 질문을 그대로 남긴 뒤 ACT 1의 모호한 요청으로 이동한다.</a:t>
+              <a:t>1. **OPEN (0:00–0:20):** 왼쪽 “볼 수 있는 것”과 오른쪽 “최종 정해야 하는 것”을 나눈다. 바로 앞 S08은 진입 경로, 이 장은 역할과 책임의 구분이다.</a:t>
+            </a:r>
+          </a:p>
+          <a:p xmlns:a="http://schemas.openxmlformats.org/drawingml/2006/main">
+            <a:r>
+              <a:t>2. **SHARED ACCESS (0:20–0:50):** 왼쪽 사람+AI Agent 아이콘과 허용된 파일·구현·테스트를 가리킨다. 사람도 Agent도 접근 권한과 제공된 도구 범위 안에서 이 정보를 살필 수 있다는 뜻이다.</a:t>
+            </a:r>
+          </a:p>
+          <a:p xmlns:a="http://schemas.openxmlformats.org/drawingml/2006/main">
+            <a:r>
+              <a:t>3. **HUMAN RESPONSIBILITY (0:50–1:30):** 오른쪽 사람 아이콘과 원하는 결과·허용 범위·완료 수용을 짚는다. Agent는 선택지와 근거를 제안할 수 있지만 최종 목표와 변경 승인·수용 책임은 사람에게 둔다.</a:t>
+            </a:r>
+          </a:p>
+          <a:p xmlns:a="http://schemas.openxmlformats.org/drawingml/2006/main">
+            <a:r>
+              <a:t>4. **TRANSFER (1:30–2:00):** “코드를 함께 볼 수 있어도, 맡길 일과 받아들일 결과는 사람이 정한다”로 묶는다. 이 구분을 각자 작업에 대입할 S10 질문으로 이동하며 ACT 1의 요청 구조는 미리 설명하지 않는다.</a:t>
             </a:r>
           </a:p>
           <a:p xmlns:a="http://schemas.openxmlformats.org/drawingml/2006/main">
@@ -2835,17 +3151,12 @@
           </a:p>
           <a:p xmlns:a="http://schemas.openxmlformats.org/drawingml/2006/main">
             <a:r>
-              <a:t>Evidence / Source: BEAT-003 → BEAT-004, TRANSITIONS.md의 승인된 ACT handoff, DEMO-01 callback, CLM-0002, CLM-0009. TEACHING_MODEL.</a:t>
-            </a:r>
-          </a:p>
-          <a:p xmlns:a="http://schemas.openxmlformats.org/drawingml/2006/main">
-            <a:r>
               <a:t/>
             </a:r>
           </a:p>
           <a:p xmlns:a="http://schemas.openxmlformats.org/drawingml/2006/main">
             <a:r>
-              <a:t>Claim Boundary: 이 장은 다음 문제를 여는 Teaching Model이다. ACT 1의 다섯 Task Specification 책임이나 구체적 해답을 공개하지 않는다.</a:t>
+              <a:t>Evidence / Source: BEAT-003 next friction, DEMO-01 callback, TRIAL-001; CLM-0002, CLM-0009; DEC-0036. TEACHING_MODEL. 사람·AI Agent 픽토그램: assets/slide-illustrations/human-agent-icons.png, image_gen 교육용 이미지이며 실제 사람 사진·제품 UI·관찰 결과가 아니다.</a:t>
             </a:r>
           </a:p>
           <a:p xmlns:a="http://schemas.openxmlformats.org/drawingml/2006/main">
@@ -2855,17 +3166,12 @@
           </a:p>
           <a:p xmlns:a="http://schemas.openxmlformats.org/drawingml/2006/main">
             <a:r>
-              <a:t>Beginner Explanation: Repository 접근이 생긴 뒤에도 원하는 결과를 설명할 문제는 남아 있다.</a:t>
-            </a:r>
-          </a:p>
-          <a:p xmlns:a="http://schemas.openxmlformats.org/drawingml/2006/main">
-            <a:r>
               <a:t/>
             </a:r>
           </a:p>
           <a:p xmlns:a="http://schemas.openxmlformats.org/drawingml/2006/main">
             <a:r>
-              <a:t>Advanced Insight: 관찰 가능한 Context와 개발자가 정해야 할 의도를 구분하며 다음 Story 단계로 이동한다.</a:t>
+              <a:t>Claim Boundary: Mental Model이며 모든 제품·환경의 기능 설명이 아니다. “볼 수 있다”는 허용된 자료·접근 범위 안의 조사 가능성을 뜻하며 무제한 접근을 보증하지 않는다. 사람의 최종 결정은 이 교육의 목표·범위·수용 책임 원칙이다. AI가 판단·추론·제안을 전혀 못한다는 뜻이 아니다. Prompt 구조나 완료 조건의 구체 항목은 ACT 1에서 미리 설명하지 않는다.</a:t>
             </a:r>
           </a:p>
           <a:p xmlns:a="http://schemas.openxmlformats.org/drawingml/2006/main">
@@ -2875,6 +3181,41 @@
           </a:p>
           <a:p xmlns:a="http://schemas.openxmlformats.org/drawingml/2006/main">
             <a:r>
+              <a:t/>
+            </a:r>
+          </a:p>
+          <a:p xmlns:a="http://schemas.openxmlformats.org/drawingml/2006/main">
+            <a:r>
+              <a:t>Beginner Explanation: 사람과 Agent가 같은 파일을 살필 수 있어도, 원하는 결과와 받아들일 변경은 사람이 최종 정한다.</a:t>
+            </a:r>
+          </a:p>
+          <a:p xmlns:a="http://schemas.openxmlformats.org/drawingml/2006/main">
+            <a:r>
+              <a:t/>
+            </a:r>
+          </a:p>
+          <a:p xmlns:a="http://schemas.openxmlformats.org/drawingml/2006/main">
+            <a:r>
+              <a:t/>
+            </a:r>
+          </a:p>
+          <a:p xmlns:a="http://schemas.openxmlformats.org/drawingml/2006/main">
+            <a:r>
+              <a:t>Advanced Insight: Context access와 objective/acceptance responsibility는 별도 경계다. Agent의 제안·근거와 사람의 최종 승인 책임을 구분한다.</a:t>
+            </a:r>
+          </a:p>
+          <a:p xmlns:a="http://schemas.openxmlformats.org/drawingml/2006/main">
+            <a:r>
+              <a:t/>
+            </a:r>
+          </a:p>
+          <a:p xmlns:a="http://schemas.openxmlformats.org/drawingml/2006/main">
+            <a:r>
+              <a:t/>
+            </a:r>
+          </a:p>
+          <a:p xmlns:a="http://schemas.openxmlformats.org/drawingml/2006/main">
+            <a:r>
               <a:t>C++ Vision Bridge: N/A.</a:t>
             </a:r>
           </a:p>
@@ -2885,7 +3226,7 @@
           </a:p>
           <a:p xmlns:a="http://schemas.openxmlformats.org/drawingml/2006/main">
             <a:r>
-              <a:t>Demo Operation: N/A — 신규 Demo 또는 제품 기능 설명은 없다.</a:t>
+              <a:t>Demo Operation: N/A — DEMO-01 성공 뒤 남는 문제를 설명한다.</a:t>
             </a:r>
           </a:p>
           <a:p xmlns:a="http://schemas.openxmlformats.org/drawingml/2006/main">
@@ -2895,7 +3236,7 @@
           </a:p>
           <a:p xmlns:a="http://schemas.openxmlformats.org/drawingml/2006/main">
             <a:r>
-              <a:t>Audience Interaction: Q&amp;A 3분은 선택적 질문 시간이다. 답변이나 공유를 강제하지 않는다. 침묵은 정상적인 결과로 둔다.</a:t>
+              <a:t>Audience Interaction: Opening question은 수사 질문이다. 짧은 강의 시간에 답변을 요구하지 않는다.</a:t>
             </a:r>
           </a:p>
           <a:p xmlns:a="http://schemas.openxmlformats.org/drawingml/2006/main">
@@ -2905,7 +3246,7 @@
           </a:p>
           <a:p xmlns:a="http://schemas.openxmlformats.org/drawingml/2006/main">
             <a:r>
-              <a:t>Transition: “방금 떠올린 원하는 결과를 작업 요청으로 전달하려면 무엇이 더 필요할까요?”라는 질문으로 `Chatbot → Prompt`를 handoff한다. ACT 1의 내부 구조는 소개하지 않는다.</a:t>
+              <a:t>Transition: “이 구분을 여러분이 지금 맡기고 싶은 일에 대입해 보겠습니다.”라고 S10의 개인 적용 질문을 연다.</a:t>
             </a:r>
           </a:p>
           <a:p xmlns:a="http://schemas.openxmlformats.org/drawingml/2006/main">
@@ -2915,7 +3256,7 @@
           </a:p>
           <a:p xmlns:a="http://schemas.openxmlformats.org/drawingml/2006/main">
             <a:r>
-              <a:t>Time Management: Slide Map의 순서를 유지해 Transition 3분 뒤 Q&amp;A 3분을 둔다. Q&amp;A를 늘려 ACT 전체 시간을 옮기지 않는다.</a:t>
+              <a:t>Time Management: Lecture 2분. 구분 20초, 사람+Agent의 허용 정보 접근 30초, 사람의 최종 책임 40초, 정리·S10 연결 30초다. Access와 Intent 두 축만 설명하고 ACT 1의 구조나 목록은 소개하지 않는다.</a:t>
             </a:r>
           </a:p>
           <a:p xmlns:a="http://schemas.openxmlformats.org/drawingml/2006/main">
@@ -2925,17 +3266,27 @@
           </a:p>
           <a:p xmlns:a="http://schemas.openxmlformats.org/drawingml/2006/main">
             <a:r>
-              <a:t>Fallback: 질문이 없으면 Opening Question을 그대로 남기고 종료 cue로 ACT 1에 넘긴다. 강사가 질문에 답을 보태지 않는다.</a:t>
-            </a:r>
-          </a:p>
-          <a:p xmlns:a="http://schemas.openxmlformats.org/drawingml/2006/main">
-            <a:r>
               <a:t/>
             </a:r>
           </a:p>
           <a:p xmlns:a="http://schemas.openxmlformats.org/drawingml/2006/main">
             <a:r>
-              <a:t>Validation Status: REVIEWED — 원문·Claim 경계, 화면의 설명 순서와 운영 지침을 대조했다. 최종 PPT/Notes/PNG 대조 결과는 production/evaluation/FULL_DECK_PRESENTATION_REVISION.md에 기록한다. Windows PowerPoint, 발표 PC 글꼴, 교육장 투사, 실제 시간 리허설은 UNVERIFIED.</a:t>
+              <a:t>Fallback: 화면 도식이 보이지 않으면 “자료는 함께 살펴보고, 목표·허용 범위·완료 수용은 사람이 최종 정합니다”라고 설명하고 S10으로 간다. Agent의 제안 가능성을 부정하지 않는다. 정적 경로는 production/preview/act0/S09.png 및 production/preview/full/S09.png이며 새 파일 일치는 후속 렌더 대조 전까지 미검증이다.</a:t>
+            </a:r>
+          </a:p>
+          <a:p xmlns:a="http://schemas.openxmlformats.org/drawingml/2006/main">
+            <a:r>
+              <a:t/>
+            </a:r>
+          </a:p>
+          <a:p xmlns:a="http://schemas.openxmlformats.org/drawingml/2006/main">
+            <a:r>
+              <a:t/>
+            </a:r>
+          </a:p>
+          <a:p xmlns:a="http://schemas.openxmlformats.org/drawingml/2006/main">
+            <a:r>
+              <a:t>Validation Status: ALIGNED — DEC-0036에 따라 사람·Agent 접근과 사람의 최종 책임을 구분했다. 새 PPT/PNG·내장 Notes 대조는 production/evaluation/CODEX_ENTRY_INSERTION.md에서 기록한다. Windows PowerPoint, 실제 계정·권한, 발표 PC 글꼴, 교육장 투사, 실제 시간 리허설은 UNVERIFIED.</a:t>
             </a:r>
           </a:p>
         </p:txBody>
@@ -2982,7 +3333,7 @@
           <p:cNvPr id="3" name="Title">
             <a:extLst xmlns:a="http://schemas.openxmlformats.org/drawingml/2006/main">
               <a:ext uri="{FF2B5EF4-FFF2-40B4-BE49-F238E27FC236}">
-                <a16:creationId xmlns:a16="http://schemas.microsoft.com/office/drawing/2014/main" id="{5933EAC9-7281-410C-AAEB-94FD6C42CF5C}"/>
+                <a16:creationId xmlns:a16="http://schemas.microsoft.com/office/drawing/2014/main" id="{EE55E0AF-4DDF-4BEE-9F13-57680555F586}"/>
               </a:ext>
             </a:extLst>
           </p:cNvPr>
@@ -3211,7 +3562,7 @@
           <p:cNvPr id="2" name="Subtitle">
             <a:extLst xmlns:a="http://schemas.openxmlformats.org/drawingml/2006/main">
               <a:ext uri="{FF2B5EF4-FFF2-40B4-BE49-F238E27FC236}">
-                <a16:creationId xmlns:a16="http://schemas.microsoft.com/office/drawing/2014/main" id="{B26FC804-3545-431E-AAAD-D7068D63E069}"/>
+                <a16:creationId xmlns:a16="http://schemas.microsoft.com/office/drawing/2014/main" id="{BB8DAEDC-008A-459D-B2DB-E1AF8C0BE608}"/>
               </a:ext>
             </a:extLst>
           </p:cNvPr>
@@ -3457,7 +3808,7 @@
           <p:cNvPr id="2" name="Section title">
             <a:extLst xmlns:a="http://schemas.openxmlformats.org/drawingml/2006/main">
               <a:ext uri="{FF2B5EF4-FFF2-40B4-BE49-F238E27FC236}">
-                <a16:creationId xmlns:a16="http://schemas.microsoft.com/office/drawing/2014/main" id="{993D1C9B-49EB-4004-9675-7F6C4FFF3B9A}"/>
+                <a16:creationId xmlns:a16="http://schemas.microsoft.com/office/drawing/2014/main" id="{5B0C661C-586F-4C1B-91B5-5AB25F3BEDAF}"/>
               </a:ext>
             </a:extLst>
           </p:cNvPr>
@@ -3703,7 +4054,7 @@
           <p:cNvPr id="3" name="Title">
             <a:extLst xmlns:a="http://schemas.openxmlformats.org/drawingml/2006/main">
               <a:ext uri="{FF2B5EF4-FFF2-40B4-BE49-F238E27FC236}">
-                <a16:creationId xmlns:a16="http://schemas.microsoft.com/office/drawing/2014/main" id="{4EBBEF1F-1209-49D3-B126-C59FCEE97C5E}"/>
+                <a16:creationId xmlns:a16="http://schemas.microsoft.com/office/drawing/2014/main" id="{6C03B130-0F33-4B4A-A0C8-130AD78D8C22}"/>
               </a:ext>
             </a:extLst>
           </p:cNvPr>
@@ -3932,7 +4283,7 @@
           <p:cNvPr id="2" name="Body">
             <a:extLst xmlns:a="http://schemas.openxmlformats.org/drawingml/2006/main">
               <a:ext uri="{FF2B5EF4-FFF2-40B4-BE49-F238E27FC236}">
-                <a16:creationId xmlns:a16="http://schemas.microsoft.com/office/drawing/2014/main" id="{1ABBDC9B-D9B6-42F2-87B1-354492DB83DC}"/>
+                <a16:creationId xmlns:a16="http://schemas.microsoft.com/office/drawing/2014/main" id="{D8DB088D-4268-4A77-B6E1-3313F9C94759}"/>
               </a:ext>
             </a:extLst>
           </p:cNvPr>
@@ -4178,7 +4529,7 @@
           <p:cNvPr id="4" name="Title">
             <a:extLst xmlns:a="http://schemas.openxmlformats.org/drawingml/2006/main">
               <a:ext uri="{FF2B5EF4-FFF2-40B4-BE49-F238E27FC236}">
-                <a16:creationId xmlns:a16="http://schemas.microsoft.com/office/drawing/2014/main" id="{6E82BA32-AAF6-466A-8C48-26B83A54203F}"/>
+                <a16:creationId xmlns:a16="http://schemas.microsoft.com/office/drawing/2014/main" id="{6BBCA946-CA3C-4D61-B228-8AFD4A140EF0}"/>
               </a:ext>
             </a:extLst>
           </p:cNvPr>
@@ -4407,7 +4758,7 @@
           <p:cNvPr id="2" name="Left column">
             <a:extLst xmlns:a="http://schemas.openxmlformats.org/drawingml/2006/main">
               <a:ext uri="{FF2B5EF4-FFF2-40B4-BE49-F238E27FC236}">
-                <a16:creationId xmlns:a16="http://schemas.microsoft.com/office/drawing/2014/main" id="{4A18D02C-3349-4085-A406-AE519CC939BB}"/>
+                <a16:creationId xmlns:a16="http://schemas.microsoft.com/office/drawing/2014/main" id="{4FFBFABD-0FE1-4F21-84B9-4C25BDF86576}"/>
               </a:ext>
             </a:extLst>
           </p:cNvPr>
@@ -4636,7 +4987,7 @@
           <p:cNvPr id="3" name="Right column">
             <a:extLst xmlns:a="http://schemas.openxmlformats.org/drawingml/2006/main">
               <a:ext uri="{FF2B5EF4-FFF2-40B4-BE49-F238E27FC236}">
-                <a16:creationId xmlns:a16="http://schemas.microsoft.com/office/drawing/2014/main" id="{57E5ACB9-1C58-4A83-8F05-28D8999632E0}"/>
+                <a16:creationId xmlns:a16="http://schemas.microsoft.com/office/drawing/2014/main" id="{ACD54D13-A46D-4BB8-B96C-606F34A7E834}"/>
               </a:ext>
             </a:extLst>
           </p:cNvPr>
@@ -4882,7 +5233,7 @@
           <p:cNvPr id="3" name="Title">
             <a:extLst xmlns:a="http://schemas.openxmlformats.org/drawingml/2006/main">
               <a:ext uri="{FF2B5EF4-FFF2-40B4-BE49-F238E27FC236}">
-                <a16:creationId xmlns:a16="http://schemas.microsoft.com/office/drawing/2014/main" id="{D5A85298-1B5A-4D92-8055-9D6C07EE52D0}"/>
+                <a16:creationId xmlns:a16="http://schemas.microsoft.com/office/drawing/2014/main" id="{F9715F6F-5AF0-4788-AC03-A02BCE88B336}"/>
               </a:ext>
             </a:extLst>
           </p:cNvPr>
@@ -5111,7 +5462,7 @@
           <p:cNvPr id="2" name="Left column">
             <a:extLst xmlns:a="http://schemas.openxmlformats.org/drawingml/2006/main">
               <a:ext uri="{FF2B5EF4-FFF2-40B4-BE49-F238E27FC236}">
-                <a16:creationId xmlns:a16="http://schemas.microsoft.com/office/drawing/2014/main" id="{5EDD1C8F-7393-480F-9B42-FAD619D3FB71}"/>
+                <a16:creationId xmlns:a16="http://schemas.microsoft.com/office/drawing/2014/main" id="{44266DF9-CE06-4CBB-A049-97D821F3D91F}"/>
               </a:ext>
             </a:extLst>
           </p:cNvPr>
@@ -5378,12 +5729,12 @@
   </p:cSld>
   <p:clrMap bg1="lt1" tx1="dk1" bg2="lt2" tx2="dk2" accent1="accent1" accent2="accent2" accent3="accent3" accent4="accent4" accent5="accent5" accent6="accent6" hlink="hlink" folHlink="folHlink"/>
   <p:sldLayoutIdLst>
-    <p:sldLayoutId xmlns:r="http://schemas.openxmlformats.org/officeDocument/2006/relationships" id="2147483649" r:id="R554fcec3636e45fb"/>
-    <p:sldLayoutId xmlns:r="http://schemas.openxmlformats.org/officeDocument/2006/relationships" id="2147483650" r:id="R941cf3754f9640ec"/>
-    <p:sldLayoutId xmlns:r="http://schemas.openxmlformats.org/officeDocument/2006/relationships" id="2147483651" r:id="R6e62641127b74b41"/>
-    <p:sldLayoutId xmlns:r="http://schemas.openxmlformats.org/officeDocument/2006/relationships" id="2147483652" r:id="R986633b992984469"/>
-    <p:sldLayoutId xmlns:r="http://schemas.openxmlformats.org/officeDocument/2006/relationships" id="2147483653" r:id="R36081cab6cef496b"/>
-    <p:sldLayoutId xmlns:r="http://schemas.openxmlformats.org/officeDocument/2006/relationships" id="2147483654" r:id="Rb396b8aa277a46ba"/>
+    <p:sldLayoutId xmlns:r="http://schemas.openxmlformats.org/officeDocument/2006/relationships" id="2147483649" r:id="R8dda593617b34775"/>
+    <p:sldLayoutId xmlns:r="http://schemas.openxmlformats.org/officeDocument/2006/relationships" id="2147483650" r:id="R636bca09ffab4cb1"/>
+    <p:sldLayoutId xmlns:r="http://schemas.openxmlformats.org/officeDocument/2006/relationships" id="2147483651" r:id="R584b31ef6b904700"/>
+    <p:sldLayoutId xmlns:r="http://schemas.openxmlformats.org/officeDocument/2006/relationships" id="2147483652" r:id="R51fbaadcb0344017"/>
+    <p:sldLayoutId xmlns:r="http://schemas.openxmlformats.org/officeDocument/2006/relationships" id="2147483653" r:id="R87966ff1da4a495c"/>
+    <p:sldLayoutId xmlns:r="http://schemas.openxmlformats.org/officeDocument/2006/relationships" id="2147483654" r:id="Ra50cdb5edd8b4728"/>
   </p:sldLayoutIdLst>
   <p:txStyles>
     <p:titleStyle>
@@ -5934,7 +6285,7 @@
           <p:cNvPr id="13" name="ACT 0 · 익숙한 사용에서 출발하기">
             <a:extLst xmlns:a="http://schemas.openxmlformats.org/drawingml/2006/main">
               <a:ext uri="{FF2B5EF4-FFF2-40B4-BE49-F238E27FC236}">
-                <a16:creationId xmlns:a16="http://schemas.microsoft.com/office/drawing/2014/main" id="{3984D748-1F93-45C4-9F38-15B60BFCD880}"/>
+                <a16:creationId xmlns:a16="http://schemas.microsoft.com/office/drawing/2014/main" id="{5A89DD2C-0F10-4833-B0CF-C638CC29E20D}"/>
               </a:ext>
             </a:extLst>
           </p:cNvPr>
@@ -6092,7 +6443,7 @@
           <p:cNvPr id="2" name="S01">
             <a:extLst xmlns:a="http://schemas.openxmlformats.org/drawingml/2006/main">
               <a:ext uri="{FF2B5EF4-FFF2-40B4-BE49-F238E27FC236}">
-                <a16:creationId xmlns:a16="http://schemas.microsoft.com/office/drawing/2014/main" id="{6EF38F9F-D99F-4B46-B5F5-752C98926988}"/>
+                <a16:creationId xmlns:a16="http://schemas.microsoft.com/office/drawing/2014/main" id="{34B2721C-10B9-4821-A62C-49CA0CAFDE8C}"/>
               </a:ext>
             </a:extLst>
           </p:cNvPr>
@@ -6250,7 +6601,7 @@
           <p:cNvPr id="3" name="AI에게 지금 무엇을 맡기고 있는가?">
             <a:extLst xmlns:a="http://schemas.openxmlformats.org/drawingml/2006/main">
               <a:ext uri="{FF2B5EF4-FFF2-40B4-BE49-F238E27FC236}">
-                <a16:creationId xmlns:a16="http://schemas.microsoft.com/office/drawing/2014/main" id="{81AD7F3B-9088-49F4-8AB9-2C5A97462596}"/>
+                <a16:creationId xmlns:a16="http://schemas.microsoft.com/office/drawing/2014/main" id="{03372D10-88BF-4ADE-BFE3-9F7171363EF1}"/>
               </a:ext>
             </a:extLst>
           </p:cNvPr>
@@ -6408,7 +6759,7 @@
           <p:cNvPr id="4" name="">
             <a:extLst xmlns:a="http://schemas.openxmlformats.org/drawingml/2006/main">
               <a:ext uri="{FF2B5EF4-FFF2-40B4-BE49-F238E27FC236}">
-                <a16:creationId xmlns:a16="http://schemas.microsoft.com/office/drawing/2014/main" id="{9956F10A-C733-417B-8E94-97B13CCF13EC}"/>
+                <a16:creationId xmlns:a16="http://schemas.microsoft.com/office/drawing/2014/main" id="{96A24E1E-A59D-48A9-8A98-9E32B69D253A}"/>
               </a:ext>
             </a:extLst>
           </p:cNvPr>
@@ -6439,7 +6790,7 @@
           <p:cNvPr id="5" name="교육용 사례 삽화 · AI 생성 이미지 · 실제 제품 실행 화면 아님">
             <a:extLst xmlns:a="http://schemas.openxmlformats.org/drawingml/2006/main">
               <a:ext uri="{FF2B5EF4-FFF2-40B4-BE49-F238E27FC236}">
-                <a16:creationId xmlns:a16="http://schemas.microsoft.com/office/drawing/2014/main" id="{E713A9DF-C607-4CCC-A691-A8905EDE248A}"/>
+                <a16:creationId xmlns:a16="http://schemas.microsoft.com/office/drawing/2014/main" id="{5A75EFC1-072C-4D63-92DE-1B60B46CECE3}"/>
               </a:ext>
             </a:extLst>
           </p:cNvPr>
@@ -6597,7 +6948,7 @@
           <p:cNvPr id="6" name="자신의 경험 하나만 떠올려 보세요. 사용 수준을 평가하는 질문이 아닙니다.">
             <a:extLst xmlns:a="http://schemas.openxmlformats.org/drawingml/2006/main">
               <a:ext uri="{FF2B5EF4-FFF2-40B4-BE49-F238E27FC236}">
-                <a16:creationId xmlns:a16="http://schemas.microsoft.com/office/drawing/2014/main" id="{FC4B5237-3494-4633-959F-764391CE60E9}"/>
+                <a16:creationId xmlns:a16="http://schemas.microsoft.com/office/drawing/2014/main" id="{E062C744-EDAB-46E6-910D-995F994AD053}"/>
               </a:ext>
             </a:extLst>
           </p:cNvPr>
@@ -6755,7 +7106,7 @@
           <p:cNvPr id="7" name="최근 AI에 맡긴 일 하나를 떠올려 보세요.">
             <a:extLst xmlns:a="http://schemas.openxmlformats.org/drawingml/2006/main">
               <a:ext uri="{FF2B5EF4-FFF2-40B4-BE49-F238E27FC236}">
-                <a16:creationId xmlns:a16="http://schemas.microsoft.com/office/drawing/2014/main" id="{B6DC5323-7235-4B39-9AC9-E158277FF060}"/>
+                <a16:creationId xmlns:a16="http://schemas.microsoft.com/office/drawing/2014/main" id="{16AD7C3C-2034-4DBE-A69F-F50DEE42DD58}"/>
               </a:ext>
             </a:extLst>
           </p:cNvPr>
@@ -6913,7 +7264,7 @@
           <p:cNvPr id="8" name="">
             <a:extLst xmlns:a="http://schemas.openxmlformats.org/drawingml/2006/main">
               <a:ext uri="{FF2B5EF4-FFF2-40B4-BE49-F238E27FC236}">
-                <a16:creationId xmlns:a16="http://schemas.microsoft.com/office/drawing/2014/main" id="{1D708921-5F67-4872-9C06-88DCFFAEC8B7}"/>
+                <a16:creationId xmlns:a16="http://schemas.microsoft.com/office/drawing/2014/main" id="{EEA7B434-9055-4503-808A-D3460C2CEE4E}"/>
               </a:ext>
             </a:extLst>
           </p:cNvPr>
@@ -6923,7 +7274,7 @@
           <p:nvPr/>
         </p:nvPicPr>
         <p:blipFill>
-          <a:blip xmlns:r="http://schemas.openxmlformats.org/officeDocument/2006/relationships" xmlns:a="http://schemas.openxmlformats.org/drawingml/2006/main" r:embed="R37e4031e3d134e67"/>
+          <a:blip xmlns:r="http://schemas.openxmlformats.org/officeDocument/2006/relationships" xmlns:a="http://schemas.openxmlformats.org/drawingml/2006/main" r:embed="R807734244afe403d"/>
           <a:stretch xmlns:a="http://schemas.openxmlformats.org/drawingml/2006/main"/>
         </p:blipFill>
         <p:spPr>
@@ -6941,7 +7292,7 @@
           <p:cNvPr id="9" name="설명 받기">
             <a:extLst xmlns:a="http://schemas.openxmlformats.org/drawingml/2006/main">
               <a:ext uri="{FF2B5EF4-FFF2-40B4-BE49-F238E27FC236}">
-                <a16:creationId xmlns:a16="http://schemas.microsoft.com/office/drawing/2014/main" id="{392369A7-75C7-4BB8-883C-66C47A2D4574}"/>
+                <a16:creationId xmlns:a16="http://schemas.microsoft.com/office/drawing/2014/main" id="{61B93894-E66A-4782-9E70-BEB49F6C88FE}"/>
               </a:ext>
             </a:extLst>
           </p:cNvPr>
@@ -7099,7 +7450,7 @@
           <p:cNvPr id="10" name="조사 맡기기">
             <a:extLst xmlns:a="http://schemas.openxmlformats.org/drawingml/2006/main">
               <a:ext uri="{FF2B5EF4-FFF2-40B4-BE49-F238E27FC236}">
-                <a16:creationId xmlns:a16="http://schemas.microsoft.com/office/drawing/2014/main" id="{91293FC5-27CC-4BF4-B9D2-04F44C513726}"/>
+                <a16:creationId xmlns:a16="http://schemas.microsoft.com/office/drawing/2014/main" id="{C9859056-90B6-4C1C-9560-8795E82A3C80}"/>
               </a:ext>
             </a:extLst>
           </p:cNvPr>
@@ -7257,7 +7608,7 @@
           <p:cNvPr id="11" name="결과 확인">
             <a:extLst xmlns:a="http://schemas.openxmlformats.org/drawingml/2006/main">
               <a:ext uri="{FF2B5EF4-FFF2-40B4-BE49-F238E27FC236}">
-                <a16:creationId xmlns:a16="http://schemas.microsoft.com/office/drawing/2014/main" id="{E96FA58C-7E6A-44D7-B970-7154FD0230EF}"/>
+                <a16:creationId xmlns:a16="http://schemas.microsoft.com/office/drawing/2014/main" id="{770B1BAE-CD62-4D72-8FEC-943E2754CC5E}"/>
               </a:ext>
             </a:extLst>
           </p:cNvPr>
@@ -7415,7 +7766,7 @@
           <p:cNvPr id="12" name="Legacy module connection">
             <a:extLst xmlns:a="http://schemas.openxmlformats.org/drawingml/2006/main">
               <a:ext uri="{FF2B5EF4-FFF2-40B4-BE49-F238E27FC236}">
-                <a16:creationId xmlns:a16="http://schemas.microsoft.com/office/drawing/2014/main" id="{8BEBB1D1-4CC2-4EDA-B1FA-B0428CB1E804}"/>
+                <a16:creationId xmlns:a16="http://schemas.microsoft.com/office/drawing/2014/main" id="{59ABB3C3-D662-4E31-B387-9EBF6FB50B36}"/>
               </a:ext>
             </a:extLst>
           </p:cNvPr>
@@ -7571,7 +7922,1566 @@
     </p:spTree>
     <p:extLst>
       <p:ext uri="{BB962C8B-B14F-4D97-AF65-F5344CB8AC3E}">
-        <p14:creationId xmlns:p14="http://schemas.microsoft.com/office/powerpoint/2010/main" val="54391211"/>
+        <p14:creationId xmlns:p14="http://schemas.microsoft.com/office/powerpoint/2010/main" val="731034601"/>
+      </p:ext>
+    </p:extLst>
+  </p:cSld>
+</p:sld>
+</file>
+
+<file path=ppt/slides/slide10.xml><?xml version="1.0" encoding="utf-8"?>
+<p:sld xmlns:p="http://schemas.openxmlformats.org/presentationml/2006/main">
+  <p:cSld>
+    <p:bg>
+      <p:bgPr>
+        <a:solidFill xmlns:a="http://schemas.openxmlformats.org/drawingml/2006/main">
+          <a:srgbClr val="F4F6F8"/>
+        </a:solidFill>
+      </p:bgPr>
+    </p:bg>
+    <p:spTree>
+      <p:nvGrpSpPr>
+        <p:cNvPr id="1" name=""/>
+        <p:cNvGrpSpPr/>
+        <p:nvPr/>
+      </p:nvGrpSpPr>
+      <p:grpSpPr>
+        <a:xfrm xmlns:a="http://schemas.openxmlformats.org/drawingml/2006/main"/>
+      </p:grpSpPr>
+      <p:sp>
+        <p:nvSpPr>
+          <p:cNvPr id="12" name="ACT 0 · 내 작업에 적용할 질문">
+            <a:extLst xmlns:a="http://schemas.openxmlformats.org/drawingml/2006/main">
+              <a:ext uri="{FF2B5EF4-FFF2-40B4-BE49-F238E27FC236}">
+                <a16:creationId xmlns:a16="http://schemas.microsoft.com/office/drawing/2014/main" id="{58B01338-44B6-415D-9AEE-7B673E0D8243}"/>
+              </a:ext>
+            </a:extLst>
+          </p:cNvPr>
+          <p:cNvSpPr>
+            <a:spLocks xmlns:a="http://schemas.openxmlformats.org/drawingml/2006/main" noGrp="1"/>
+          </p:cNvSpPr>
+          <p:nvPr/>
+        </p:nvSpPr>
+        <p:spPr>
+          <a:xfrm xmlns:a="http://schemas.openxmlformats.org/drawingml/2006/main">
+            <a:off x="609600" y="457200"/>
+            <a:ext cx="9810750" cy="247650"/>
+          </a:xfrm>
+          <a:prstGeom xmlns:a="http://schemas.openxmlformats.org/drawingml/2006/main" prst="rect">
+            <a:avLst/>
+          </a:prstGeom>
+          <a:noFill xmlns:a="http://schemas.openxmlformats.org/drawingml/2006/main"/>
+          <a:ln xmlns:a="http://schemas.openxmlformats.org/drawingml/2006/main" w="0">
+            <a:noFill/>
+          </a:ln>
+        </p:spPr>
+        <p:txBody>
+          <a:bodyPr xmlns:a="http://schemas.openxmlformats.org/drawingml/2006/main" wrap="none" lIns="0" tIns="0" rIns="0" bIns="0" anchor="ctr">
+            <a:noAutofit/>
+          </a:bodyPr>
+          <a:lstStyle xmlns:a="http://schemas.openxmlformats.org/drawingml/2006/main">
+            <a:defPPr algn="l">
+              <a:defRPr sz="1425" b="1">
+                <a:solidFill>
+                  <a:srgbClr val="0B6172"/>
+                </a:solidFill>
+                <a:latin typeface="Malgun Gothic"/>
+                <a:ea typeface="Malgun Gothic"/>
+                <a:cs typeface="Malgun Gothic"/>
+              </a:defRPr>
+            </a:defPPr>
+            <a:lvl1pPr algn="l">
+              <a:defRPr sz="1425" b="1">
+                <a:solidFill>
+                  <a:srgbClr val="0B6172"/>
+                </a:solidFill>
+                <a:latin typeface="Malgun Gothic"/>
+                <a:ea typeface="Malgun Gothic"/>
+                <a:cs typeface="Malgun Gothic"/>
+              </a:defRPr>
+            </a:lvl1pPr>
+            <a:lvl2pPr algn="l">
+              <a:defRPr sz="1425" b="1">
+                <a:solidFill>
+                  <a:srgbClr val="0B6172"/>
+                </a:solidFill>
+                <a:latin typeface="Malgun Gothic"/>
+                <a:ea typeface="Malgun Gothic"/>
+                <a:cs typeface="Malgun Gothic"/>
+              </a:defRPr>
+            </a:lvl2pPr>
+            <a:lvl3pPr algn="l">
+              <a:defRPr sz="1425" b="1">
+                <a:solidFill>
+                  <a:srgbClr val="0B6172"/>
+                </a:solidFill>
+                <a:latin typeface="Malgun Gothic"/>
+                <a:ea typeface="Malgun Gothic"/>
+                <a:cs typeface="Malgun Gothic"/>
+              </a:defRPr>
+            </a:lvl3pPr>
+            <a:lvl4pPr algn="l">
+              <a:defRPr sz="1425" b="1">
+                <a:solidFill>
+                  <a:srgbClr val="0B6172"/>
+                </a:solidFill>
+                <a:latin typeface="Malgun Gothic"/>
+                <a:ea typeface="Malgun Gothic"/>
+                <a:cs typeface="Malgun Gothic"/>
+              </a:defRPr>
+            </a:lvl4pPr>
+            <a:lvl5pPr algn="l">
+              <a:defRPr sz="1425" b="1">
+                <a:solidFill>
+                  <a:srgbClr val="0B6172"/>
+                </a:solidFill>
+                <a:latin typeface="Malgun Gothic"/>
+                <a:ea typeface="Malgun Gothic"/>
+                <a:cs typeface="Malgun Gothic"/>
+              </a:defRPr>
+            </a:lvl5pPr>
+            <a:lvl6pPr algn="l">
+              <a:defRPr sz="1425" b="1">
+                <a:solidFill>
+                  <a:srgbClr val="0B6172"/>
+                </a:solidFill>
+                <a:latin typeface="Malgun Gothic"/>
+                <a:ea typeface="Malgun Gothic"/>
+                <a:cs typeface="Malgun Gothic"/>
+              </a:defRPr>
+            </a:lvl6pPr>
+            <a:lvl7pPr algn="l">
+              <a:defRPr sz="1425" b="1">
+                <a:solidFill>
+                  <a:srgbClr val="0B6172"/>
+                </a:solidFill>
+                <a:latin typeface="Malgun Gothic"/>
+                <a:ea typeface="Malgun Gothic"/>
+                <a:cs typeface="Malgun Gothic"/>
+              </a:defRPr>
+            </a:lvl7pPr>
+            <a:lvl8pPr algn="l">
+              <a:defRPr sz="1425" b="1">
+                <a:solidFill>
+                  <a:srgbClr val="0B6172"/>
+                </a:solidFill>
+                <a:latin typeface="Malgun Gothic"/>
+                <a:ea typeface="Malgun Gothic"/>
+                <a:cs typeface="Malgun Gothic"/>
+              </a:defRPr>
+            </a:lvl8pPr>
+            <a:lvl9pPr algn="l">
+              <a:defRPr sz="1425" b="1">
+                <a:solidFill>
+                  <a:srgbClr val="0B6172"/>
+                </a:solidFill>
+                <a:latin typeface="Malgun Gothic"/>
+                <a:ea typeface="Malgun Gothic"/>
+                <a:cs typeface="Malgun Gothic"/>
+              </a:defRPr>
+            </a:lvl9pPr>
+          </a:lstStyle>
+          <a:p xmlns:a="http://schemas.openxmlformats.org/drawingml/2006/main">
+            <a:pPr algn="l">
+              <a:defRPr sz="1425" b="1">
+                <a:solidFill>
+                  <a:srgbClr val="0B6172"/>
+                </a:solidFill>
+                <a:latin typeface="Malgun Gothic"/>
+                <a:ea typeface="Malgun Gothic"/>
+                <a:cs typeface="Malgun Gothic"/>
+              </a:defRPr>
+            </a:pPr>
+            <a:r>
+              <a:rPr sz="1425" b="1">
+                <a:solidFill>
+                  <a:srgbClr val="0B6172"/>
+                </a:solidFill>
+                <a:latin typeface="Malgun Gothic"/>
+                <a:ea typeface="Malgun Gothic"/>
+                <a:cs typeface="Malgun Gothic"/>
+              </a:rPr>
+              <a:t>ACT 0 · 내 작업에 적용할 질문</a:t>
+            </a:r>
+          </a:p>
+        </p:txBody>
+      </p:sp>
+      <p:sp>
+        <p:nvSpPr>
+          <p:cNvPr id="2" name="S10">
+            <a:extLst xmlns:a="http://schemas.openxmlformats.org/drawingml/2006/main">
+              <a:ext uri="{FF2B5EF4-FFF2-40B4-BE49-F238E27FC236}">
+                <a16:creationId xmlns:a16="http://schemas.microsoft.com/office/drawing/2014/main" id="{B1404B8D-2D7F-499C-8C01-DF73BD89E9A2}"/>
+              </a:ext>
+            </a:extLst>
+          </p:cNvPr>
+          <p:cNvSpPr>
+            <a:spLocks xmlns:a="http://schemas.openxmlformats.org/drawingml/2006/main" noGrp="1"/>
+          </p:cNvSpPr>
+          <p:nvPr/>
+        </p:nvSpPr>
+        <p:spPr>
+          <a:xfrm xmlns:a="http://schemas.openxmlformats.org/drawingml/2006/main">
+            <a:off x="10668000" y="457200"/>
+            <a:ext cx="914400" cy="247650"/>
+          </a:xfrm>
+          <a:prstGeom xmlns:a="http://schemas.openxmlformats.org/drawingml/2006/main" prst="rect">
+            <a:avLst/>
+          </a:prstGeom>
+          <a:noFill xmlns:a="http://schemas.openxmlformats.org/drawingml/2006/main"/>
+          <a:ln xmlns:a="http://schemas.openxmlformats.org/drawingml/2006/main" w="0">
+            <a:noFill/>
+          </a:ln>
+        </p:spPr>
+        <p:txBody>
+          <a:bodyPr xmlns:a="http://schemas.openxmlformats.org/drawingml/2006/main" wrap="none" lIns="0" tIns="0" rIns="0" bIns="0" anchor="ctr">
+            <a:noAutofit/>
+          </a:bodyPr>
+          <a:lstStyle xmlns:a="http://schemas.openxmlformats.org/drawingml/2006/main">
+            <a:defPPr algn="r">
+              <a:defRPr sz="1425" b="0">
+                <a:solidFill>
+                  <a:srgbClr val="4D5A68"/>
+                </a:solidFill>
+                <a:latin typeface="Malgun Gothic"/>
+                <a:ea typeface="Malgun Gothic"/>
+                <a:cs typeface="Malgun Gothic"/>
+              </a:defRPr>
+            </a:defPPr>
+            <a:lvl1pPr algn="r">
+              <a:defRPr sz="1425" b="0">
+                <a:solidFill>
+                  <a:srgbClr val="4D5A68"/>
+                </a:solidFill>
+                <a:latin typeface="Malgun Gothic"/>
+                <a:ea typeface="Malgun Gothic"/>
+                <a:cs typeface="Malgun Gothic"/>
+              </a:defRPr>
+            </a:lvl1pPr>
+            <a:lvl2pPr algn="r">
+              <a:defRPr sz="1425" b="0">
+                <a:solidFill>
+                  <a:srgbClr val="4D5A68"/>
+                </a:solidFill>
+                <a:latin typeface="Malgun Gothic"/>
+                <a:ea typeface="Malgun Gothic"/>
+                <a:cs typeface="Malgun Gothic"/>
+              </a:defRPr>
+            </a:lvl2pPr>
+            <a:lvl3pPr algn="r">
+              <a:defRPr sz="1425" b="0">
+                <a:solidFill>
+                  <a:srgbClr val="4D5A68"/>
+                </a:solidFill>
+                <a:latin typeface="Malgun Gothic"/>
+                <a:ea typeface="Malgun Gothic"/>
+                <a:cs typeface="Malgun Gothic"/>
+              </a:defRPr>
+            </a:lvl3pPr>
+            <a:lvl4pPr algn="r">
+              <a:defRPr sz="1425" b="0">
+                <a:solidFill>
+                  <a:srgbClr val="4D5A68"/>
+                </a:solidFill>
+                <a:latin typeface="Malgun Gothic"/>
+                <a:ea typeface="Malgun Gothic"/>
+                <a:cs typeface="Malgun Gothic"/>
+              </a:defRPr>
+            </a:lvl4pPr>
+            <a:lvl5pPr algn="r">
+              <a:defRPr sz="1425" b="0">
+                <a:solidFill>
+                  <a:srgbClr val="4D5A68"/>
+                </a:solidFill>
+                <a:latin typeface="Malgun Gothic"/>
+                <a:ea typeface="Malgun Gothic"/>
+                <a:cs typeface="Malgun Gothic"/>
+              </a:defRPr>
+            </a:lvl5pPr>
+            <a:lvl6pPr algn="r">
+              <a:defRPr sz="1425" b="0">
+                <a:solidFill>
+                  <a:srgbClr val="4D5A68"/>
+                </a:solidFill>
+                <a:latin typeface="Malgun Gothic"/>
+                <a:ea typeface="Malgun Gothic"/>
+                <a:cs typeface="Malgun Gothic"/>
+              </a:defRPr>
+            </a:lvl6pPr>
+            <a:lvl7pPr algn="r">
+              <a:defRPr sz="1425" b="0">
+                <a:solidFill>
+                  <a:srgbClr val="4D5A68"/>
+                </a:solidFill>
+                <a:latin typeface="Malgun Gothic"/>
+                <a:ea typeface="Malgun Gothic"/>
+                <a:cs typeface="Malgun Gothic"/>
+              </a:defRPr>
+            </a:lvl7pPr>
+            <a:lvl8pPr algn="r">
+              <a:defRPr sz="1425" b="0">
+                <a:solidFill>
+                  <a:srgbClr val="4D5A68"/>
+                </a:solidFill>
+                <a:latin typeface="Malgun Gothic"/>
+                <a:ea typeface="Malgun Gothic"/>
+                <a:cs typeface="Malgun Gothic"/>
+              </a:defRPr>
+            </a:lvl8pPr>
+            <a:lvl9pPr algn="r">
+              <a:defRPr sz="1425" b="0">
+                <a:solidFill>
+                  <a:srgbClr val="4D5A68"/>
+                </a:solidFill>
+                <a:latin typeface="Malgun Gothic"/>
+                <a:ea typeface="Malgun Gothic"/>
+                <a:cs typeface="Malgun Gothic"/>
+              </a:defRPr>
+            </a:lvl9pPr>
+          </a:lstStyle>
+          <a:p xmlns:a="http://schemas.openxmlformats.org/drawingml/2006/main">
+            <a:pPr algn="r">
+              <a:defRPr sz="1425" b="0">
+                <a:solidFill>
+                  <a:srgbClr val="4D5A68"/>
+                </a:solidFill>
+                <a:latin typeface="Malgun Gothic"/>
+                <a:ea typeface="Malgun Gothic"/>
+                <a:cs typeface="Malgun Gothic"/>
+              </a:defRPr>
+            </a:pPr>
+            <a:r>
+              <a:rPr sz="1425" b="0">
+                <a:solidFill>
+                  <a:srgbClr val="4D5A68"/>
+                </a:solidFill>
+                <a:latin typeface="Malgun Gothic"/>
+                <a:ea typeface="Malgun Gothic"/>
+                <a:cs typeface="Malgun Gothic"/>
+              </a:rPr>
+              <a:t>S10</a:t>
+            </a:r>
+          </a:p>
+        </p:txBody>
+      </p:sp>
+      <p:sp>
+        <p:nvSpPr>
+          <p:cNvPr id="3" name="Repository를 보면 내가 원하는 것까지 알까?">
+            <a:extLst xmlns:a="http://schemas.openxmlformats.org/drawingml/2006/main">
+              <a:ext uri="{FF2B5EF4-FFF2-40B4-BE49-F238E27FC236}">
+                <a16:creationId xmlns:a16="http://schemas.microsoft.com/office/drawing/2014/main" id="{66F50F01-5881-41C0-9481-640106B3BAFB}"/>
+              </a:ext>
+            </a:extLst>
+          </p:cNvPr>
+          <p:cNvSpPr>
+            <a:spLocks xmlns:a="http://schemas.openxmlformats.org/drawingml/2006/main" noGrp="1"/>
+          </p:cNvSpPr>
+          <p:nvPr/>
+        </p:nvSpPr>
+        <p:spPr>
+          <a:xfrm xmlns:a="http://schemas.openxmlformats.org/drawingml/2006/main">
+            <a:off x="609600" y="800100"/>
+            <a:ext cx="10972800" cy="609600"/>
+          </a:xfrm>
+          <a:prstGeom xmlns:a="http://schemas.openxmlformats.org/drawingml/2006/main" prst="rect">
+            <a:avLst/>
+          </a:prstGeom>
+          <a:noFill xmlns:a="http://schemas.openxmlformats.org/drawingml/2006/main"/>
+          <a:ln xmlns:a="http://schemas.openxmlformats.org/drawingml/2006/main" w="0">
+            <a:noFill/>
+          </a:ln>
+        </p:spPr>
+        <p:txBody>
+          <a:bodyPr xmlns:a="http://schemas.openxmlformats.org/drawingml/2006/main" wrap="none" lIns="0" tIns="0" rIns="0" bIns="0" anchor="ctr">
+            <a:noAutofit/>
+          </a:bodyPr>
+          <a:lstStyle xmlns:a="http://schemas.openxmlformats.org/drawingml/2006/main">
+            <a:defPPr algn="l">
+              <a:defRPr sz="3600" b="1">
+                <a:solidFill>
+                  <a:srgbClr val="17212B"/>
+                </a:solidFill>
+                <a:latin typeface="Malgun Gothic"/>
+                <a:ea typeface="Malgun Gothic"/>
+                <a:cs typeface="Malgun Gothic"/>
+              </a:defRPr>
+            </a:defPPr>
+            <a:lvl1pPr algn="l">
+              <a:defRPr sz="3600" b="1">
+                <a:solidFill>
+                  <a:srgbClr val="17212B"/>
+                </a:solidFill>
+                <a:latin typeface="Malgun Gothic"/>
+                <a:ea typeface="Malgun Gothic"/>
+                <a:cs typeface="Malgun Gothic"/>
+              </a:defRPr>
+            </a:lvl1pPr>
+            <a:lvl2pPr algn="l">
+              <a:defRPr sz="3600" b="1">
+                <a:solidFill>
+                  <a:srgbClr val="17212B"/>
+                </a:solidFill>
+                <a:latin typeface="Malgun Gothic"/>
+                <a:ea typeface="Malgun Gothic"/>
+                <a:cs typeface="Malgun Gothic"/>
+              </a:defRPr>
+            </a:lvl2pPr>
+            <a:lvl3pPr algn="l">
+              <a:defRPr sz="3600" b="1">
+                <a:solidFill>
+                  <a:srgbClr val="17212B"/>
+                </a:solidFill>
+                <a:latin typeface="Malgun Gothic"/>
+                <a:ea typeface="Malgun Gothic"/>
+                <a:cs typeface="Malgun Gothic"/>
+              </a:defRPr>
+            </a:lvl3pPr>
+            <a:lvl4pPr algn="l">
+              <a:defRPr sz="3600" b="1">
+                <a:solidFill>
+                  <a:srgbClr val="17212B"/>
+                </a:solidFill>
+                <a:latin typeface="Malgun Gothic"/>
+                <a:ea typeface="Malgun Gothic"/>
+                <a:cs typeface="Malgun Gothic"/>
+              </a:defRPr>
+            </a:lvl4pPr>
+            <a:lvl5pPr algn="l">
+              <a:defRPr sz="3600" b="1">
+                <a:solidFill>
+                  <a:srgbClr val="17212B"/>
+                </a:solidFill>
+                <a:latin typeface="Malgun Gothic"/>
+                <a:ea typeface="Malgun Gothic"/>
+                <a:cs typeface="Malgun Gothic"/>
+              </a:defRPr>
+            </a:lvl5pPr>
+            <a:lvl6pPr algn="l">
+              <a:defRPr sz="3600" b="1">
+                <a:solidFill>
+                  <a:srgbClr val="17212B"/>
+                </a:solidFill>
+                <a:latin typeface="Malgun Gothic"/>
+                <a:ea typeface="Malgun Gothic"/>
+                <a:cs typeface="Malgun Gothic"/>
+              </a:defRPr>
+            </a:lvl6pPr>
+            <a:lvl7pPr algn="l">
+              <a:defRPr sz="3600" b="1">
+                <a:solidFill>
+                  <a:srgbClr val="17212B"/>
+                </a:solidFill>
+                <a:latin typeface="Malgun Gothic"/>
+                <a:ea typeface="Malgun Gothic"/>
+                <a:cs typeface="Malgun Gothic"/>
+              </a:defRPr>
+            </a:lvl7pPr>
+            <a:lvl8pPr algn="l">
+              <a:defRPr sz="3600" b="1">
+                <a:solidFill>
+                  <a:srgbClr val="17212B"/>
+                </a:solidFill>
+                <a:latin typeface="Malgun Gothic"/>
+                <a:ea typeface="Malgun Gothic"/>
+                <a:cs typeface="Malgun Gothic"/>
+              </a:defRPr>
+            </a:lvl8pPr>
+            <a:lvl9pPr algn="l">
+              <a:defRPr sz="3600" b="1">
+                <a:solidFill>
+                  <a:srgbClr val="17212B"/>
+                </a:solidFill>
+                <a:latin typeface="Malgun Gothic"/>
+                <a:ea typeface="Malgun Gothic"/>
+                <a:cs typeface="Malgun Gothic"/>
+              </a:defRPr>
+            </a:lvl9pPr>
+          </a:lstStyle>
+          <a:p xmlns:a="http://schemas.openxmlformats.org/drawingml/2006/main">
+            <a:pPr algn="l">
+              <a:defRPr sz="3600" b="1">
+                <a:solidFill>
+                  <a:srgbClr val="17212B"/>
+                </a:solidFill>
+                <a:latin typeface="Malgun Gothic"/>
+                <a:ea typeface="Malgun Gothic"/>
+                <a:cs typeface="Malgun Gothic"/>
+              </a:defRPr>
+            </a:pPr>
+            <a:r>
+              <a:rPr sz="3600" b="1">
+                <a:solidFill>
+                  <a:srgbClr val="17212B"/>
+                </a:solidFill>
+                <a:latin typeface="Malgun Gothic"/>
+                <a:ea typeface="Malgun Gothic"/>
+                <a:cs typeface="Malgun Gothic"/>
+              </a:rPr>
+              <a:t>Repository를 보면 내가 원하는 것까지 알까?</a:t>
+            </a:r>
+          </a:p>
+        </p:txBody>
+      </p:sp>
+      <p:sp>
+        <p:nvSpPr>
+          <p:cNvPr id="4" name="">
+            <a:extLst xmlns:a="http://schemas.openxmlformats.org/drawingml/2006/main">
+              <a:ext uri="{FF2B5EF4-FFF2-40B4-BE49-F238E27FC236}">
+                <a16:creationId xmlns:a16="http://schemas.microsoft.com/office/drawing/2014/main" id="{E54623C6-F44E-4057-96DB-14687F9AC784}"/>
+              </a:ext>
+            </a:extLst>
+          </p:cNvPr>
+          <p:cNvSpPr>
+            <a:spLocks xmlns:a="http://schemas.openxmlformats.org/drawingml/2006/main" noGrp="1"/>
+          </p:cNvSpPr>
+          <p:nvPr/>
+        </p:nvSpPr>
+        <p:spPr>
+          <a:xfrm xmlns:a="http://schemas.openxmlformats.org/drawingml/2006/main">
+            <a:off x="609600" y="5753100"/>
+            <a:ext cx="10972800" cy="0"/>
+          </a:xfrm>
+          <a:prstGeom xmlns:a="http://schemas.openxmlformats.org/drawingml/2006/main" prst="line">
+            <a:avLst/>
+          </a:prstGeom>
+          <a:noFill xmlns:a="http://schemas.openxmlformats.org/drawingml/2006/main"/>
+          <a:ln xmlns:a="http://schemas.openxmlformats.org/drawingml/2006/main" w="9525">
+            <a:solidFill>
+              <a:srgbClr val="C7D0DA"/>
+            </a:solidFill>
+            <a:prstDash val="solid"/>
+          </a:ln>
+        </p:spPr>
+      </p:sp>
+      <p:sp>
+        <p:nvSpPr>
+          <p:cNvPr id="5" name="함께 생각해 보기 · 교육 모델">
+            <a:extLst xmlns:a="http://schemas.openxmlformats.org/drawingml/2006/main">
+              <a:ext uri="{FF2B5EF4-FFF2-40B4-BE49-F238E27FC236}">
+                <a16:creationId xmlns:a16="http://schemas.microsoft.com/office/drawing/2014/main" id="{B0E03E03-8617-4E92-BB71-98EABBCD5F6D}"/>
+              </a:ext>
+            </a:extLst>
+          </p:cNvPr>
+          <p:cNvSpPr>
+            <a:spLocks xmlns:a="http://schemas.openxmlformats.org/drawingml/2006/main" noGrp="1"/>
+          </p:cNvSpPr>
+          <p:nvPr/>
+        </p:nvSpPr>
+        <p:spPr>
+          <a:xfrm xmlns:a="http://schemas.openxmlformats.org/drawingml/2006/main">
+            <a:off x="609600" y="5791200"/>
+            <a:ext cx="10972800" cy="228600"/>
+          </a:xfrm>
+          <a:prstGeom xmlns:a="http://schemas.openxmlformats.org/drawingml/2006/main" prst="rect">
+            <a:avLst/>
+          </a:prstGeom>
+          <a:noFill xmlns:a="http://schemas.openxmlformats.org/drawingml/2006/main"/>
+          <a:ln xmlns:a="http://schemas.openxmlformats.org/drawingml/2006/main" w="0">
+            <a:noFill/>
+          </a:ln>
+        </p:spPr>
+        <p:txBody>
+          <a:bodyPr xmlns:a="http://schemas.openxmlformats.org/drawingml/2006/main" wrap="none" lIns="0" tIns="0" rIns="0" bIns="0" anchor="ctr">
+            <a:noAutofit/>
+          </a:bodyPr>
+          <a:lstStyle xmlns:a="http://schemas.openxmlformats.org/drawingml/2006/main">
+            <a:defPPr algn="l">
+              <a:defRPr sz="1425" b="1">
+                <a:solidFill>
+                  <a:srgbClr val="4D5A68"/>
+                </a:solidFill>
+                <a:latin typeface="Malgun Gothic"/>
+                <a:ea typeface="Malgun Gothic"/>
+                <a:cs typeface="Malgun Gothic"/>
+              </a:defRPr>
+            </a:defPPr>
+            <a:lvl1pPr algn="l">
+              <a:defRPr sz="1425" b="1">
+                <a:solidFill>
+                  <a:srgbClr val="4D5A68"/>
+                </a:solidFill>
+                <a:latin typeface="Malgun Gothic"/>
+                <a:ea typeface="Malgun Gothic"/>
+                <a:cs typeface="Malgun Gothic"/>
+              </a:defRPr>
+            </a:lvl1pPr>
+            <a:lvl2pPr algn="l">
+              <a:defRPr sz="1425" b="1">
+                <a:solidFill>
+                  <a:srgbClr val="4D5A68"/>
+                </a:solidFill>
+                <a:latin typeface="Malgun Gothic"/>
+                <a:ea typeface="Malgun Gothic"/>
+                <a:cs typeface="Malgun Gothic"/>
+              </a:defRPr>
+            </a:lvl2pPr>
+            <a:lvl3pPr algn="l">
+              <a:defRPr sz="1425" b="1">
+                <a:solidFill>
+                  <a:srgbClr val="4D5A68"/>
+                </a:solidFill>
+                <a:latin typeface="Malgun Gothic"/>
+                <a:ea typeface="Malgun Gothic"/>
+                <a:cs typeface="Malgun Gothic"/>
+              </a:defRPr>
+            </a:lvl3pPr>
+            <a:lvl4pPr algn="l">
+              <a:defRPr sz="1425" b="1">
+                <a:solidFill>
+                  <a:srgbClr val="4D5A68"/>
+                </a:solidFill>
+                <a:latin typeface="Malgun Gothic"/>
+                <a:ea typeface="Malgun Gothic"/>
+                <a:cs typeface="Malgun Gothic"/>
+              </a:defRPr>
+            </a:lvl4pPr>
+            <a:lvl5pPr algn="l">
+              <a:defRPr sz="1425" b="1">
+                <a:solidFill>
+                  <a:srgbClr val="4D5A68"/>
+                </a:solidFill>
+                <a:latin typeface="Malgun Gothic"/>
+                <a:ea typeface="Malgun Gothic"/>
+                <a:cs typeface="Malgun Gothic"/>
+              </a:defRPr>
+            </a:lvl5pPr>
+            <a:lvl6pPr algn="l">
+              <a:defRPr sz="1425" b="1">
+                <a:solidFill>
+                  <a:srgbClr val="4D5A68"/>
+                </a:solidFill>
+                <a:latin typeface="Malgun Gothic"/>
+                <a:ea typeface="Malgun Gothic"/>
+                <a:cs typeface="Malgun Gothic"/>
+              </a:defRPr>
+            </a:lvl6pPr>
+            <a:lvl7pPr algn="l">
+              <a:defRPr sz="1425" b="1">
+                <a:solidFill>
+                  <a:srgbClr val="4D5A68"/>
+                </a:solidFill>
+                <a:latin typeface="Malgun Gothic"/>
+                <a:ea typeface="Malgun Gothic"/>
+                <a:cs typeface="Malgun Gothic"/>
+              </a:defRPr>
+            </a:lvl7pPr>
+            <a:lvl8pPr algn="l">
+              <a:defRPr sz="1425" b="1">
+                <a:solidFill>
+                  <a:srgbClr val="4D5A68"/>
+                </a:solidFill>
+                <a:latin typeface="Malgun Gothic"/>
+                <a:ea typeface="Malgun Gothic"/>
+                <a:cs typeface="Malgun Gothic"/>
+              </a:defRPr>
+            </a:lvl8pPr>
+            <a:lvl9pPr algn="l">
+              <a:defRPr sz="1425" b="1">
+                <a:solidFill>
+                  <a:srgbClr val="4D5A68"/>
+                </a:solidFill>
+                <a:latin typeface="Malgun Gothic"/>
+                <a:ea typeface="Malgun Gothic"/>
+                <a:cs typeface="Malgun Gothic"/>
+              </a:defRPr>
+            </a:lvl9pPr>
+          </a:lstStyle>
+          <a:p xmlns:a="http://schemas.openxmlformats.org/drawingml/2006/main">
+            <a:pPr algn="l">
+              <a:defRPr sz="1425" b="1">
+                <a:solidFill>
+                  <a:srgbClr val="4D5A68"/>
+                </a:solidFill>
+                <a:latin typeface="Malgun Gothic"/>
+                <a:ea typeface="Malgun Gothic"/>
+                <a:cs typeface="Malgun Gothic"/>
+              </a:defRPr>
+            </a:pPr>
+            <a:r>
+              <a:rPr sz="1425" b="1">
+                <a:solidFill>
+                  <a:srgbClr val="4D5A68"/>
+                </a:solidFill>
+                <a:latin typeface="Malgun Gothic"/>
+                <a:ea typeface="Malgun Gothic"/>
+                <a:cs typeface="Malgun Gothic"/>
+              </a:rPr>
+              <a:t>함께 생각해 보기 · 교육 모델</a:t>
+            </a:r>
+          </a:p>
+        </p:txBody>
+      </p:sp>
+      <p:sp>
+        <p:nvSpPr>
+          <p:cNvPr id="6" name="현재 맡기고 싶은 일을 떠올려 보세요. 질문과 경험 공유는 자발적으로 진행합니다.">
+            <a:extLst xmlns:a="http://schemas.openxmlformats.org/drawingml/2006/main">
+              <a:ext uri="{FF2B5EF4-FFF2-40B4-BE49-F238E27FC236}">
+                <a16:creationId xmlns:a16="http://schemas.microsoft.com/office/drawing/2014/main" id="{E4CF2F2D-3F47-4011-9C52-A1D9EB959BE5}"/>
+              </a:ext>
+            </a:extLst>
+          </p:cNvPr>
+          <p:cNvSpPr>
+            <a:spLocks xmlns:a="http://schemas.openxmlformats.org/drawingml/2006/main" noGrp="1"/>
+          </p:cNvSpPr>
+          <p:nvPr/>
+        </p:nvSpPr>
+        <p:spPr>
+          <a:xfrm xmlns:a="http://schemas.openxmlformats.org/drawingml/2006/main">
+            <a:off x="609600" y="6019800"/>
+            <a:ext cx="10972800" cy="209550"/>
+          </a:xfrm>
+          <a:prstGeom xmlns:a="http://schemas.openxmlformats.org/drawingml/2006/main" prst="rect">
+            <a:avLst/>
+          </a:prstGeom>
+          <a:noFill xmlns:a="http://schemas.openxmlformats.org/drawingml/2006/main"/>
+          <a:ln xmlns:a="http://schemas.openxmlformats.org/drawingml/2006/main" w="0">
+            <a:noFill/>
+          </a:ln>
+        </p:spPr>
+        <p:txBody>
+          <a:bodyPr xmlns:a="http://schemas.openxmlformats.org/drawingml/2006/main" wrap="none" lIns="0" tIns="0" rIns="0" bIns="0" anchor="ctr">
+            <a:noAutofit/>
+          </a:bodyPr>
+          <a:lstStyle xmlns:a="http://schemas.openxmlformats.org/drawingml/2006/main">
+            <a:defPPr algn="l">
+              <a:defRPr sz="1425" b="0">
+                <a:solidFill>
+                  <a:srgbClr val="4D5A68"/>
+                </a:solidFill>
+                <a:latin typeface="Malgun Gothic"/>
+                <a:ea typeface="Malgun Gothic"/>
+                <a:cs typeface="Malgun Gothic"/>
+              </a:defRPr>
+            </a:defPPr>
+            <a:lvl1pPr algn="l">
+              <a:defRPr sz="1425" b="0">
+                <a:solidFill>
+                  <a:srgbClr val="4D5A68"/>
+                </a:solidFill>
+                <a:latin typeface="Malgun Gothic"/>
+                <a:ea typeface="Malgun Gothic"/>
+                <a:cs typeface="Malgun Gothic"/>
+              </a:defRPr>
+            </a:lvl1pPr>
+            <a:lvl2pPr algn="l">
+              <a:defRPr sz="1425" b="0">
+                <a:solidFill>
+                  <a:srgbClr val="4D5A68"/>
+                </a:solidFill>
+                <a:latin typeface="Malgun Gothic"/>
+                <a:ea typeface="Malgun Gothic"/>
+                <a:cs typeface="Malgun Gothic"/>
+              </a:defRPr>
+            </a:lvl2pPr>
+            <a:lvl3pPr algn="l">
+              <a:defRPr sz="1425" b="0">
+                <a:solidFill>
+                  <a:srgbClr val="4D5A68"/>
+                </a:solidFill>
+                <a:latin typeface="Malgun Gothic"/>
+                <a:ea typeface="Malgun Gothic"/>
+                <a:cs typeface="Malgun Gothic"/>
+              </a:defRPr>
+            </a:lvl3pPr>
+            <a:lvl4pPr algn="l">
+              <a:defRPr sz="1425" b="0">
+                <a:solidFill>
+                  <a:srgbClr val="4D5A68"/>
+                </a:solidFill>
+                <a:latin typeface="Malgun Gothic"/>
+                <a:ea typeface="Malgun Gothic"/>
+                <a:cs typeface="Malgun Gothic"/>
+              </a:defRPr>
+            </a:lvl4pPr>
+            <a:lvl5pPr algn="l">
+              <a:defRPr sz="1425" b="0">
+                <a:solidFill>
+                  <a:srgbClr val="4D5A68"/>
+                </a:solidFill>
+                <a:latin typeface="Malgun Gothic"/>
+                <a:ea typeface="Malgun Gothic"/>
+                <a:cs typeface="Malgun Gothic"/>
+              </a:defRPr>
+            </a:lvl5pPr>
+            <a:lvl6pPr algn="l">
+              <a:defRPr sz="1425" b="0">
+                <a:solidFill>
+                  <a:srgbClr val="4D5A68"/>
+                </a:solidFill>
+                <a:latin typeface="Malgun Gothic"/>
+                <a:ea typeface="Malgun Gothic"/>
+                <a:cs typeface="Malgun Gothic"/>
+              </a:defRPr>
+            </a:lvl6pPr>
+            <a:lvl7pPr algn="l">
+              <a:defRPr sz="1425" b="0">
+                <a:solidFill>
+                  <a:srgbClr val="4D5A68"/>
+                </a:solidFill>
+                <a:latin typeface="Malgun Gothic"/>
+                <a:ea typeface="Malgun Gothic"/>
+                <a:cs typeface="Malgun Gothic"/>
+              </a:defRPr>
+            </a:lvl7pPr>
+            <a:lvl8pPr algn="l">
+              <a:defRPr sz="1425" b="0">
+                <a:solidFill>
+                  <a:srgbClr val="4D5A68"/>
+                </a:solidFill>
+                <a:latin typeface="Malgun Gothic"/>
+                <a:ea typeface="Malgun Gothic"/>
+                <a:cs typeface="Malgun Gothic"/>
+              </a:defRPr>
+            </a:lvl8pPr>
+            <a:lvl9pPr algn="l">
+              <a:defRPr sz="1425" b="0">
+                <a:solidFill>
+                  <a:srgbClr val="4D5A68"/>
+                </a:solidFill>
+                <a:latin typeface="Malgun Gothic"/>
+                <a:ea typeface="Malgun Gothic"/>
+                <a:cs typeface="Malgun Gothic"/>
+              </a:defRPr>
+            </a:lvl9pPr>
+          </a:lstStyle>
+          <a:p xmlns:a="http://schemas.openxmlformats.org/drawingml/2006/main">
+            <a:pPr algn="l">
+              <a:defRPr sz="1425" b="0">
+                <a:solidFill>
+                  <a:srgbClr val="4D5A68"/>
+                </a:solidFill>
+                <a:latin typeface="Malgun Gothic"/>
+                <a:ea typeface="Malgun Gothic"/>
+                <a:cs typeface="Malgun Gothic"/>
+              </a:defRPr>
+            </a:pPr>
+            <a:r>
+              <a:rPr sz="1425" b="0">
+                <a:solidFill>
+                  <a:srgbClr val="4D5A68"/>
+                </a:solidFill>
+                <a:latin typeface="Malgun Gothic"/>
+                <a:ea typeface="Malgun Gothic"/>
+                <a:cs typeface="Malgun Gothic"/>
+              </a:rPr>
+              <a:t>현재 맡기고 싶은 일을 떠올려 보세요. 질문과 경험 공유는 자발적으로 진행합니다.</a:t>
+            </a:r>
+          </a:p>
+        </p:txBody>
+      </p:sp>
+      <p:sp>
+        <p:nvSpPr>
+          <p:cNvPr id="7" name="지금 이 저장소에&#10;어떤 일을 맡기고 싶으신가요?">
+            <a:extLst xmlns:a="http://schemas.openxmlformats.org/drawingml/2006/main">
+              <a:ext uri="{FF2B5EF4-FFF2-40B4-BE49-F238E27FC236}">
+                <a16:creationId xmlns:a16="http://schemas.microsoft.com/office/drawing/2014/main" id="{16BF375D-1293-4BCC-A46C-77BAAEA87096}"/>
+              </a:ext>
+            </a:extLst>
+          </p:cNvPr>
+          <p:cNvSpPr>
+            <a:spLocks xmlns:a="http://schemas.openxmlformats.org/drawingml/2006/main" noGrp="1"/>
+          </p:cNvSpPr>
+          <p:nvPr/>
+        </p:nvSpPr>
+        <p:spPr>
+          <a:xfrm xmlns:a="http://schemas.openxmlformats.org/drawingml/2006/main">
+            <a:off x="609600" y="2333625"/>
+            <a:ext cx="9620250" cy="1371600"/>
+          </a:xfrm>
+          <a:prstGeom xmlns:a="http://schemas.openxmlformats.org/drawingml/2006/main" prst="rect">
+            <a:avLst/>
+          </a:prstGeom>
+          <a:noFill xmlns:a="http://schemas.openxmlformats.org/drawingml/2006/main"/>
+          <a:ln xmlns:a="http://schemas.openxmlformats.org/drawingml/2006/main" w="0">
+            <a:noFill/>
+          </a:ln>
+        </p:spPr>
+        <p:txBody>
+          <a:bodyPr xmlns:a="http://schemas.openxmlformats.org/drawingml/2006/main" wrap="none" lIns="0" tIns="0" rIns="0" bIns="0" anchor="ctr">
+            <a:noAutofit/>
+          </a:bodyPr>
+          <a:lstStyle xmlns:a="http://schemas.openxmlformats.org/drawingml/2006/main">
+            <a:defPPr algn="l">
+              <a:defRPr sz="3375" b="1">
+                <a:solidFill>
+                  <a:srgbClr val="17212B"/>
+                </a:solidFill>
+                <a:latin typeface="Malgun Gothic"/>
+                <a:ea typeface="Malgun Gothic"/>
+                <a:cs typeface="Malgun Gothic"/>
+              </a:defRPr>
+            </a:defPPr>
+            <a:lvl1pPr algn="l">
+              <a:defRPr sz="3375" b="1">
+                <a:solidFill>
+                  <a:srgbClr val="17212B"/>
+                </a:solidFill>
+                <a:latin typeface="Malgun Gothic"/>
+                <a:ea typeface="Malgun Gothic"/>
+                <a:cs typeface="Malgun Gothic"/>
+              </a:defRPr>
+            </a:lvl1pPr>
+            <a:lvl2pPr algn="l">
+              <a:defRPr sz="3375" b="1">
+                <a:solidFill>
+                  <a:srgbClr val="17212B"/>
+                </a:solidFill>
+                <a:latin typeface="Malgun Gothic"/>
+                <a:ea typeface="Malgun Gothic"/>
+                <a:cs typeface="Malgun Gothic"/>
+              </a:defRPr>
+            </a:lvl2pPr>
+            <a:lvl3pPr algn="l">
+              <a:defRPr sz="3375" b="1">
+                <a:solidFill>
+                  <a:srgbClr val="17212B"/>
+                </a:solidFill>
+                <a:latin typeface="Malgun Gothic"/>
+                <a:ea typeface="Malgun Gothic"/>
+                <a:cs typeface="Malgun Gothic"/>
+              </a:defRPr>
+            </a:lvl3pPr>
+            <a:lvl4pPr algn="l">
+              <a:defRPr sz="3375" b="1">
+                <a:solidFill>
+                  <a:srgbClr val="17212B"/>
+                </a:solidFill>
+                <a:latin typeface="Malgun Gothic"/>
+                <a:ea typeface="Malgun Gothic"/>
+                <a:cs typeface="Malgun Gothic"/>
+              </a:defRPr>
+            </a:lvl4pPr>
+            <a:lvl5pPr algn="l">
+              <a:defRPr sz="3375" b="1">
+                <a:solidFill>
+                  <a:srgbClr val="17212B"/>
+                </a:solidFill>
+                <a:latin typeface="Malgun Gothic"/>
+                <a:ea typeface="Malgun Gothic"/>
+                <a:cs typeface="Malgun Gothic"/>
+              </a:defRPr>
+            </a:lvl5pPr>
+            <a:lvl6pPr algn="l">
+              <a:defRPr sz="3375" b="1">
+                <a:solidFill>
+                  <a:srgbClr val="17212B"/>
+                </a:solidFill>
+                <a:latin typeface="Malgun Gothic"/>
+                <a:ea typeface="Malgun Gothic"/>
+                <a:cs typeface="Malgun Gothic"/>
+              </a:defRPr>
+            </a:lvl6pPr>
+            <a:lvl7pPr algn="l">
+              <a:defRPr sz="3375" b="1">
+                <a:solidFill>
+                  <a:srgbClr val="17212B"/>
+                </a:solidFill>
+                <a:latin typeface="Malgun Gothic"/>
+                <a:ea typeface="Malgun Gothic"/>
+                <a:cs typeface="Malgun Gothic"/>
+              </a:defRPr>
+            </a:lvl7pPr>
+            <a:lvl8pPr algn="l">
+              <a:defRPr sz="3375" b="1">
+                <a:solidFill>
+                  <a:srgbClr val="17212B"/>
+                </a:solidFill>
+                <a:latin typeface="Malgun Gothic"/>
+                <a:ea typeface="Malgun Gothic"/>
+                <a:cs typeface="Malgun Gothic"/>
+              </a:defRPr>
+            </a:lvl8pPr>
+            <a:lvl9pPr algn="l">
+              <a:defRPr sz="3375" b="1">
+                <a:solidFill>
+                  <a:srgbClr val="17212B"/>
+                </a:solidFill>
+                <a:latin typeface="Malgun Gothic"/>
+                <a:ea typeface="Malgun Gothic"/>
+                <a:cs typeface="Malgun Gothic"/>
+              </a:defRPr>
+            </a:lvl9pPr>
+          </a:lstStyle>
+          <a:p xmlns:a="http://schemas.openxmlformats.org/drawingml/2006/main">
+            <a:pPr algn="l">
+              <a:defRPr sz="3375" b="1">
+                <a:solidFill>
+                  <a:srgbClr val="17212B"/>
+                </a:solidFill>
+                <a:latin typeface="Malgun Gothic"/>
+                <a:ea typeface="Malgun Gothic"/>
+                <a:cs typeface="Malgun Gothic"/>
+              </a:defRPr>
+            </a:pPr>
+            <a:r>
+              <a:rPr sz="3375" b="1">
+                <a:solidFill>
+                  <a:srgbClr val="17212B"/>
+                </a:solidFill>
+                <a:latin typeface="Malgun Gothic"/>
+                <a:ea typeface="Malgun Gothic"/>
+                <a:cs typeface="Malgun Gothic"/>
+              </a:rPr>
+              <a:t>지금 이 저장소에</a:t>
+            </a:r>
+          </a:p>
+          <a:p xmlns:a="http://schemas.openxmlformats.org/drawingml/2006/main">
+            <a:pPr algn="l">
+              <a:defRPr sz="3375" b="1">
+                <a:solidFill>
+                  <a:srgbClr val="17212B"/>
+                </a:solidFill>
+                <a:latin typeface="Malgun Gothic"/>
+                <a:ea typeface="Malgun Gothic"/>
+                <a:cs typeface="Malgun Gothic"/>
+              </a:defRPr>
+            </a:pPr>
+            <a:r>
+              <a:rPr sz="3375" b="1">
+                <a:solidFill>
+                  <a:srgbClr val="17212B"/>
+                </a:solidFill>
+                <a:latin typeface="Malgun Gothic"/>
+                <a:ea typeface="Malgun Gothic"/>
+                <a:cs typeface="Malgun Gothic"/>
+              </a:rPr>
+              <a:t>어떤 일을 맡기고 싶으신가요?</a:t>
+            </a:r>
+          </a:p>
+        </p:txBody>
+      </p:sp>
+      <p:sp>
+        <p:nvSpPr>
+          <p:cNvPr id="8" name="?">
+            <a:extLst xmlns:a="http://schemas.openxmlformats.org/drawingml/2006/main">
+              <a:ext uri="{FF2B5EF4-FFF2-40B4-BE49-F238E27FC236}">
+                <a16:creationId xmlns:a16="http://schemas.microsoft.com/office/drawing/2014/main" id="{F081431A-4BB7-432B-9623-1D79B7496202}"/>
+              </a:ext>
+            </a:extLst>
+          </p:cNvPr>
+          <p:cNvSpPr>
+            <a:spLocks xmlns:a="http://schemas.openxmlformats.org/drawingml/2006/main" noGrp="1"/>
+          </p:cNvSpPr>
+          <p:nvPr/>
+        </p:nvSpPr>
+        <p:spPr>
+          <a:xfrm xmlns:a="http://schemas.openxmlformats.org/drawingml/2006/main">
+            <a:off x="10287000" y="2381250"/>
+            <a:ext cx="1238250" cy="1333500"/>
+          </a:xfrm>
+          <a:prstGeom xmlns:a="http://schemas.openxmlformats.org/drawingml/2006/main" prst="rect">
+            <a:avLst/>
+          </a:prstGeom>
+          <a:noFill xmlns:a="http://schemas.openxmlformats.org/drawingml/2006/main"/>
+          <a:ln xmlns:a="http://schemas.openxmlformats.org/drawingml/2006/main" w="0">
+            <a:noFill/>
+          </a:ln>
+        </p:spPr>
+        <p:txBody>
+          <a:bodyPr xmlns:a="http://schemas.openxmlformats.org/drawingml/2006/main" wrap="none" lIns="0" tIns="0" rIns="0" bIns="0" anchor="ctr">
+            <a:noAutofit/>
+          </a:bodyPr>
+          <a:lstStyle xmlns:a="http://schemas.openxmlformats.org/drawingml/2006/main">
+            <a:defPPr algn="l">
+              <a:defRPr sz="8400" b="1">
+                <a:solidFill>
+                  <a:srgbClr val="0B6172"/>
+                </a:solidFill>
+                <a:latin typeface="Malgun Gothic"/>
+                <a:ea typeface="Malgun Gothic"/>
+                <a:cs typeface="Malgun Gothic"/>
+              </a:defRPr>
+            </a:defPPr>
+            <a:lvl1pPr algn="l">
+              <a:defRPr sz="8400" b="1">
+                <a:solidFill>
+                  <a:srgbClr val="0B6172"/>
+                </a:solidFill>
+                <a:latin typeface="Malgun Gothic"/>
+                <a:ea typeface="Malgun Gothic"/>
+                <a:cs typeface="Malgun Gothic"/>
+              </a:defRPr>
+            </a:lvl1pPr>
+            <a:lvl2pPr algn="l">
+              <a:defRPr sz="8400" b="1">
+                <a:solidFill>
+                  <a:srgbClr val="0B6172"/>
+                </a:solidFill>
+                <a:latin typeface="Malgun Gothic"/>
+                <a:ea typeface="Malgun Gothic"/>
+                <a:cs typeface="Malgun Gothic"/>
+              </a:defRPr>
+            </a:lvl2pPr>
+            <a:lvl3pPr algn="l">
+              <a:defRPr sz="8400" b="1">
+                <a:solidFill>
+                  <a:srgbClr val="0B6172"/>
+                </a:solidFill>
+                <a:latin typeface="Malgun Gothic"/>
+                <a:ea typeface="Malgun Gothic"/>
+                <a:cs typeface="Malgun Gothic"/>
+              </a:defRPr>
+            </a:lvl3pPr>
+            <a:lvl4pPr algn="l">
+              <a:defRPr sz="8400" b="1">
+                <a:solidFill>
+                  <a:srgbClr val="0B6172"/>
+                </a:solidFill>
+                <a:latin typeface="Malgun Gothic"/>
+                <a:ea typeface="Malgun Gothic"/>
+                <a:cs typeface="Malgun Gothic"/>
+              </a:defRPr>
+            </a:lvl4pPr>
+            <a:lvl5pPr algn="l">
+              <a:defRPr sz="8400" b="1">
+                <a:solidFill>
+                  <a:srgbClr val="0B6172"/>
+                </a:solidFill>
+                <a:latin typeface="Malgun Gothic"/>
+                <a:ea typeface="Malgun Gothic"/>
+                <a:cs typeface="Malgun Gothic"/>
+              </a:defRPr>
+            </a:lvl5pPr>
+            <a:lvl6pPr algn="l">
+              <a:defRPr sz="8400" b="1">
+                <a:solidFill>
+                  <a:srgbClr val="0B6172"/>
+                </a:solidFill>
+                <a:latin typeface="Malgun Gothic"/>
+                <a:ea typeface="Malgun Gothic"/>
+                <a:cs typeface="Malgun Gothic"/>
+              </a:defRPr>
+            </a:lvl6pPr>
+            <a:lvl7pPr algn="l">
+              <a:defRPr sz="8400" b="1">
+                <a:solidFill>
+                  <a:srgbClr val="0B6172"/>
+                </a:solidFill>
+                <a:latin typeface="Malgun Gothic"/>
+                <a:ea typeface="Malgun Gothic"/>
+                <a:cs typeface="Malgun Gothic"/>
+              </a:defRPr>
+            </a:lvl7pPr>
+            <a:lvl8pPr algn="l">
+              <a:defRPr sz="8400" b="1">
+                <a:solidFill>
+                  <a:srgbClr val="0B6172"/>
+                </a:solidFill>
+                <a:latin typeface="Malgun Gothic"/>
+                <a:ea typeface="Malgun Gothic"/>
+                <a:cs typeface="Malgun Gothic"/>
+              </a:defRPr>
+            </a:lvl8pPr>
+            <a:lvl9pPr algn="l">
+              <a:defRPr sz="8400" b="1">
+                <a:solidFill>
+                  <a:srgbClr val="0B6172"/>
+                </a:solidFill>
+                <a:latin typeface="Malgun Gothic"/>
+                <a:ea typeface="Malgun Gothic"/>
+                <a:cs typeface="Malgun Gothic"/>
+              </a:defRPr>
+            </a:lvl9pPr>
+          </a:lstStyle>
+          <a:p xmlns:a="http://schemas.openxmlformats.org/drawingml/2006/main">
+            <a:pPr algn="l">
+              <a:defRPr sz="8400" b="1">
+                <a:solidFill>
+                  <a:srgbClr val="0B6172"/>
+                </a:solidFill>
+                <a:latin typeface="Malgun Gothic"/>
+                <a:ea typeface="Malgun Gothic"/>
+                <a:cs typeface="Malgun Gothic"/>
+              </a:defRPr>
+            </a:pPr>
+            <a:r>
+              <a:rPr sz="8400" b="1">
+                <a:solidFill>
+                  <a:srgbClr val="0B6172"/>
+                </a:solidFill>
+                <a:latin typeface="Malgun Gothic"/>
+                <a:ea typeface="Malgun Gothic"/>
+                <a:cs typeface="Malgun Gothic"/>
+              </a:rPr>
+              <a:t>?</a:t>
+            </a:r>
+          </a:p>
+        </p:txBody>
+      </p:sp>
+      <p:sp>
+        <p:nvSpPr>
+          <p:cNvPr id="9" name="">
+            <a:extLst xmlns:a="http://schemas.openxmlformats.org/drawingml/2006/main">
+              <a:ext uri="{FF2B5EF4-FFF2-40B4-BE49-F238E27FC236}">
+                <a16:creationId xmlns:a16="http://schemas.microsoft.com/office/drawing/2014/main" id="{43E8FFC6-04E4-4608-A535-A3AB805F73DE}"/>
+              </a:ext>
+            </a:extLst>
+          </p:cNvPr>
+          <p:cNvSpPr>
+            <a:spLocks xmlns:a="http://schemas.openxmlformats.org/drawingml/2006/main" noGrp="1"/>
+          </p:cNvSpPr>
+          <p:nvPr/>
+        </p:nvSpPr>
+        <p:spPr>
+          <a:xfrm xmlns:a="http://schemas.openxmlformats.org/drawingml/2006/main">
+            <a:off x="609600" y="4238625"/>
+            <a:ext cx="10972800" cy="0"/>
+          </a:xfrm>
+          <a:prstGeom xmlns:a="http://schemas.openxmlformats.org/drawingml/2006/main" prst="line">
+            <a:avLst/>
+          </a:prstGeom>
+          <a:noFill xmlns:a="http://schemas.openxmlformats.org/drawingml/2006/main"/>
+          <a:ln xmlns:a="http://schemas.openxmlformats.org/drawingml/2006/main" w="9525">
+            <a:solidFill>
+              <a:srgbClr val="C7D0DA"/>
+            </a:solidFill>
+            <a:prstDash val="solid"/>
+          </a:ln>
+        </p:spPr>
+      </p:sp>
+      <p:sp>
+        <p:nvSpPr>
+          <p:cNvPr id="10" name="그 원하는 결과까지&#10;코드에 적혀 있을까요?">
+            <a:extLst xmlns:a="http://schemas.openxmlformats.org/drawingml/2006/main">
+              <a:ext uri="{FF2B5EF4-FFF2-40B4-BE49-F238E27FC236}">
+                <a16:creationId xmlns:a16="http://schemas.microsoft.com/office/drawing/2014/main" id="{F2813F95-3CA3-4D01-BB45-2BDC6226CFD7}"/>
+              </a:ext>
+            </a:extLst>
+          </p:cNvPr>
+          <p:cNvSpPr>
+            <a:spLocks xmlns:a="http://schemas.openxmlformats.org/drawingml/2006/main" noGrp="1"/>
+          </p:cNvSpPr>
+          <p:nvPr/>
+        </p:nvSpPr>
+        <p:spPr>
+          <a:xfrm xmlns:a="http://schemas.openxmlformats.org/drawingml/2006/main">
+            <a:off x="609600" y="4600575"/>
+            <a:ext cx="10972800" cy="914400"/>
+          </a:xfrm>
+          <a:prstGeom xmlns:a="http://schemas.openxmlformats.org/drawingml/2006/main" prst="rect">
+            <a:avLst/>
+          </a:prstGeom>
+          <a:noFill xmlns:a="http://schemas.openxmlformats.org/drawingml/2006/main"/>
+          <a:ln xmlns:a="http://schemas.openxmlformats.org/drawingml/2006/main" w="0">
+            <a:noFill/>
+          </a:ln>
+        </p:spPr>
+        <p:txBody>
+          <a:bodyPr xmlns:a="http://schemas.openxmlformats.org/drawingml/2006/main" wrap="none" lIns="0" tIns="0" rIns="0" bIns="0" anchor="ctr">
+            <a:noAutofit/>
+          </a:bodyPr>
+          <a:lstStyle xmlns:a="http://schemas.openxmlformats.org/drawingml/2006/main">
+            <a:defPPr algn="l">
+              <a:defRPr sz="2700" b="1">
+                <a:solidFill>
+                  <a:srgbClr val="0B6172"/>
+                </a:solidFill>
+                <a:latin typeface="Malgun Gothic"/>
+                <a:ea typeface="Malgun Gothic"/>
+                <a:cs typeface="Malgun Gothic"/>
+              </a:defRPr>
+            </a:defPPr>
+            <a:lvl1pPr algn="l">
+              <a:defRPr sz="2700" b="1">
+                <a:solidFill>
+                  <a:srgbClr val="0B6172"/>
+                </a:solidFill>
+                <a:latin typeface="Malgun Gothic"/>
+                <a:ea typeface="Malgun Gothic"/>
+                <a:cs typeface="Malgun Gothic"/>
+              </a:defRPr>
+            </a:lvl1pPr>
+            <a:lvl2pPr algn="l">
+              <a:defRPr sz="2700" b="1">
+                <a:solidFill>
+                  <a:srgbClr val="0B6172"/>
+                </a:solidFill>
+                <a:latin typeface="Malgun Gothic"/>
+                <a:ea typeface="Malgun Gothic"/>
+                <a:cs typeface="Malgun Gothic"/>
+              </a:defRPr>
+            </a:lvl2pPr>
+            <a:lvl3pPr algn="l">
+              <a:defRPr sz="2700" b="1">
+                <a:solidFill>
+                  <a:srgbClr val="0B6172"/>
+                </a:solidFill>
+                <a:latin typeface="Malgun Gothic"/>
+                <a:ea typeface="Malgun Gothic"/>
+                <a:cs typeface="Malgun Gothic"/>
+              </a:defRPr>
+            </a:lvl3pPr>
+            <a:lvl4pPr algn="l">
+              <a:defRPr sz="2700" b="1">
+                <a:solidFill>
+                  <a:srgbClr val="0B6172"/>
+                </a:solidFill>
+                <a:latin typeface="Malgun Gothic"/>
+                <a:ea typeface="Malgun Gothic"/>
+                <a:cs typeface="Malgun Gothic"/>
+              </a:defRPr>
+            </a:lvl4pPr>
+            <a:lvl5pPr algn="l">
+              <a:defRPr sz="2700" b="1">
+                <a:solidFill>
+                  <a:srgbClr val="0B6172"/>
+                </a:solidFill>
+                <a:latin typeface="Malgun Gothic"/>
+                <a:ea typeface="Malgun Gothic"/>
+                <a:cs typeface="Malgun Gothic"/>
+              </a:defRPr>
+            </a:lvl5pPr>
+            <a:lvl6pPr algn="l">
+              <a:defRPr sz="2700" b="1">
+                <a:solidFill>
+                  <a:srgbClr val="0B6172"/>
+                </a:solidFill>
+                <a:latin typeface="Malgun Gothic"/>
+                <a:ea typeface="Malgun Gothic"/>
+                <a:cs typeface="Malgun Gothic"/>
+              </a:defRPr>
+            </a:lvl6pPr>
+            <a:lvl7pPr algn="l">
+              <a:defRPr sz="2700" b="1">
+                <a:solidFill>
+                  <a:srgbClr val="0B6172"/>
+                </a:solidFill>
+                <a:latin typeface="Malgun Gothic"/>
+                <a:ea typeface="Malgun Gothic"/>
+                <a:cs typeface="Malgun Gothic"/>
+              </a:defRPr>
+            </a:lvl7pPr>
+            <a:lvl8pPr algn="l">
+              <a:defRPr sz="2700" b="1">
+                <a:solidFill>
+                  <a:srgbClr val="0B6172"/>
+                </a:solidFill>
+                <a:latin typeface="Malgun Gothic"/>
+                <a:ea typeface="Malgun Gothic"/>
+                <a:cs typeface="Malgun Gothic"/>
+              </a:defRPr>
+            </a:lvl8pPr>
+            <a:lvl9pPr algn="l">
+              <a:defRPr sz="2700" b="1">
+                <a:solidFill>
+                  <a:srgbClr val="0B6172"/>
+                </a:solidFill>
+                <a:latin typeface="Malgun Gothic"/>
+                <a:ea typeface="Malgun Gothic"/>
+                <a:cs typeface="Malgun Gothic"/>
+              </a:defRPr>
+            </a:lvl9pPr>
+          </a:lstStyle>
+          <a:p xmlns:a="http://schemas.openxmlformats.org/drawingml/2006/main">
+            <a:pPr algn="l">
+              <a:defRPr sz="2700" b="1">
+                <a:solidFill>
+                  <a:srgbClr val="0B6172"/>
+                </a:solidFill>
+                <a:latin typeface="Malgun Gothic"/>
+                <a:ea typeface="Malgun Gothic"/>
+                <a:cs typeface="Malgun Gothic"/>
+              </a:defRPr>
+            </a:pPr>
+            <a:r>
+              <a:rPr sz="2700" b="1">
+                <a:solidFill>
+                  <a:srgbClr val="0B6172"/>
+                </a:solidFill>
+                <a:latin typeface="Malgun Gothic"/>
+                <a:ea typeface="Malgun Gothic"/>
+                <a:cs typeface="Malgun Gothic"/>
+              </a:rPr>
+              <a:t>그 원하는 결과까지</a:t>
+            </a:r>
+          </a:p>
+          <a:p xmlns:a="http://schemas.openxmlformats.org/drawingml/2006/main">
+            <a:pPr algn="l">
+              <a:defRPr sz="2700" b="1">
+                <a:solidFill>
+                  <a:srgbClr val="0B6172"/>
+                </a:solidFill>
+                <a:latin typeface="Malgun Gothic"/>
+                <a:ea typeface="Malgun Gothic"/>
+                <a:cs typeface="Malgun Gothic"/>
+              </a:defRPr>
+            </a:pPr>
+            <a:r>
+              <a:rPr sz="2700" b="1">
+                <a:solidFill>
+                  <a:srgbClr val="0B6172"/>
+                </a:solidFill>
+                <a:latin typeface="Malgun Gothic"/>
+                <a:ea typeface="Malgun Gothic"/>
+                <a:cs typeface="Malgun Gothic"/>
+              </a:rPr>
+              <a:t>코드에 적혀 있을까요?</a:t>
+            </a:r>
+          </a:p>
+        </p:txBody>
+      </p:sp>
+      <p:sp>
+        <p:nvSpPr>
+          <p:cNvPr id="11" name="Legacy module connection">
+            <a:extLst xmlns:a="http://schemas.openxmlformats.org/drawingml/2006/main">
+              <a:ext uri="{FF2B5EF4-FFF2-40B4-BE49-F238E27FC236}">
+                <a16:creationId xmlns:a16="http://schemas.microsoft.com/office/drawing/2014/main" id="{85AA3855-2414-4E49-BD78-9E622E689566}"/>
+              </a:ext>
+            </a:extLst>
+          </p:cNvPr>
+          <p:cNvSpPr>
+            <a:spLocks xmlns:a="http://schemas.openxmlformats.org/drawingml/2006/main" noGrp="1"/>
+          </p:cNvSpPr>
+          <p:nvPr/>
+        </p:nvSpPr>
+        <p:spPr>
+          <a:xfrm xmlns:a="http://schemas.openxmlformats.org/drawingml/2006/main">
+            <a:off x="609600" y="6229350"/>
+            <a:ext cx="10972800" cy="171450"/>
+          </a:xfrm>
+          <a:prstGeom xmlns:a="http://schemas.openxmlformats.org/drawingml/2006/main" prst="rect">
+            <a:avLst/>
+          </a:prstGeom>
+          <a:noFill xmlns:a="http://schemas.openxmlformats.org/drawingml/2006/main"/>
+          <a:ln xmlns:a="http://schemas.openxmlformats.org/drawingml/2006/main" w="0">
+            <a:noFill/>
+          </a:ln>
+        </p:spPr>
+        <p:txBody>
+          <a:bodyPr xmlns:a="http://schemas.openxmlformats.org/drawingml/2006/main" wrap="none" lIns="0" tIns="0" rIns="0" bIns="0" anchor="ctr">
+            <a:noAutofit/>
+          </a:bodyPr>
+          <a:lstStyle xmlns:a="http://schemas.openxmlformats.org/drawingml/2006/main">
+            <a:defPPr algn="r">
+              <a:defRPr sz="1200" b="0">
+                <a:solidFill>
+                  <a:srgbClr val="4D5A68"/>
+                </a:solidFill>
+                <a:latin typeface="Malgun Gothic"/>
+                <a:ea typeface="Malgun Gothic"/>
+                <a:cs typeface="Malgun Gothic"/>
+              </a:defRPr>
+            </a:defPPr>
+            <a:lvl1pPr algn="r">
+              <a:defRPr sz="1200" b="0">
+                <a:solidFill>
+                  <a:srgbClr val="4D5A68"/>
+                </a:solidFill>
+                <a:latin typeface="Malgun Gothic"/>
+                <a:ea typeface="Malgun Gothic"/>
+                <a:cs typeface="Malgun Gothic"/>
+              </a:defRPr>
+            </a:lvl1pPr>
+            <a:lvl2pPr algn="r">
+              <a:defRPr sz="1200" b="0">
+                <a:solidFill>
+                  <a:srgbClr val="4D5A68"/>
+                </a:solidFill>
+                <a:latin typeface="Malgun Gothic"/>
+                <a:ea typeface="Malgun Gothic"/>
+                <a:cs typeface="Malgun Gothic"/>
+              </a:defRPr>
+            </a:lvl2pPr>
+            <a:lvl3pPr algn="r">
+              <a:defRPr sz="1200" b="0">
+                <a:solidFill>
+                  <a:srgbClr val="4D5A68"/>
+                </a:solidFill>
+                <a:latin typeface="Malgun Gothic"/>
+                <a:ea typeface="Malgun Gothic"/>
+                <a:cs typeface="Malgun Gothic"/>
+              </a:defRPr>
+            </a:lvl3pPr>
+            <a:lvl4pPr algn="r">
+              <a:defRPr sz="1200" b="0">
+                <a:solidFill>
+                  <a:srgbClr val="4D5A68"/>
+                </a:solidFill>
+                <a:latin typeface="Malgun Gothic"/>
+                <a:ea typeface="Malgun Gothic"/>
+                <a:cs typeface="Malgun Gothic"/>
+              </a:defRPr>
+            </a:lvl4pPr>
+            <a:lvl5pPr algn="r">
+              <a:defRPr sz="1200" b="0">
+                <a:solidFill>
+                  <a:srgbClr val="4D5A68"/>
+                </a:solidFill>
+                <a:latin typeface="Malgun Gothic"/>
+                <a:ea typeface="Malgun Gothic"/>
+                <a:cs typeface="Malgun Gothic"/>
+              </a:defRPr>
+            </a:lvl5pPr>
+            <a:lvl6pPr algn="r">
+              <a:defRPr sz="1200" b="0">
+                <a:solidFill>
+                  <a:srgbClr val="4D5A68"/>
+                </a:solidFill>
+                <a:latin typeface="Malgun Gothic"/>
+                <a:ea typeface="Malgun Gothic"/>
+                <a:cs typeface="Malgun Gothic"/>
+              </a:defRPr>
+            </a:lvl6pPr>
+            <a:lvl7pPr algn="r">
+              <a:defRPr sz="1200" b="0">
+                <a:solidFill>
+                  <a:srgbClr val="4D5A68"/>
+                </a:solidFill>
+                <a:latin typeface="Malgun Gothic"/>
+                <a:ea typeface="Malgun Gothic"/>
+                <a:cs typeface="Malgun Gothic"/>
+              </a:defRPr>
+            </a:lvl7pPr>
+            <a:lvl8pPr algn="r">
+              <a:defRPr sz="1200" b="0">
+                <a:solidFill>
+                  <a:srgbClr val="4D5A68"/>
+                </a:solidFill>
+                <a:latin typeface="Malgun Gothic"/>
+                <a:ea typeface="Malgun Gothic"/>
+                <a:cs typeface="Malgun Gothic"/>
+              </a:defRPr>
+            </a:lvl8pPr>
+            <a:lvl9pPr algn="r">
+              <a:defRPr sz="1200" b="0">
+                <a:solidFill>
+                  <a:srgbClr val="4D5A68"/>
+                </a:solidFill>
+                <a:latin typeface="Malgun Gothic"/>
+                <a:ea typeface="Malgun Gothic"/>
+                <a:cs typeface="Malgun Gothic"/>
+              </a:defRPr>
+            </a:lvl9pPr>
+          </a:lstStyle>
+          <a:p xmlns:a="http://schemas.openxmlformats.org/drawingml/2006/main">
+            <a:pPr algn="r">
+              <a:defRPr sz="1200" b="0">
+                <a:solidFill>
+                  <a:srgbClr val="4D5A68"/>
+                </a:solidFill>
+                <a:latin typeface="Malgun Gothic"/>
+                <a:ea typeface="Malgun Gothic"/>
+                <a:cs typeface="Malgun Gothic"/>
+              </a:defRPr>
+            </a:pPr>
+            <a:r>
+              <a:rPr sz="1200" b="0">
+                <a:solidFill>
+                  <a:srgbClr val="4D5A68"/>
+                </a:solidFill>
+                <a:latin typeface="Malgun Gothic"/>
+                <a:ea typeface="Malgun Gothic"/>
+                <a:cs typeface="Malgun Gothic"/>
+              </a:rPr>
+              <a:t>M 연계 · M1 · M2</a:t>
+            </a:r>
+          </a:p>
+        </p:txBody>
+      </p:sp>
+    </p:spTree>
+    <p:extLst>
+      <p:ext uri="{BB962C8B-B14F-4D97-AF65-F5344CB8AC3E}">
+        <p14:creationId xmlns:p14="http://schemas.microsoft.com/office/powerpoint/2010/main" val="247580704"/>
       </p:ext>
     </p:extLst>
   </p:cSld>
@@ -7602,7 +9512,7 @@
           <p:cNvPr id="39" name="ACT 0 · 혼동하기 쉬운 C++ 초기화">
             <a:extLst xmlns:a="http://schemas.openxmlformats.org/drawingml/2006/main">
               <a:ext uri="{FF2B5EF4-FFF2-40B4-BE49-F238E27FC236}">
-                <a16:creationId xmlns:a16="http://schemas.microsoft.com/office/drawing/2014/main" id="{49948178-BEE7-4727-BAF2-86140EFCC78D}"/>
+                <a16:creationId xmlns:a16="http://schemas.microsoft.com/office/drawing/2014/main" id="{AD7D8C0D-4B66-4D25-AFA0-9151CF471388}"/>
               </a:ext>
             </a:extLst>
           </p:cNvPr>
@@ -7760,7 +9670,7 @@
           <p:cNvPr id="2" name="S02">
             <a:extLst xmlns:a="http://schemas.openxmlformats.org/drawingml/2006/main">
               <a:ext uri="{FF2B5EF4-FFF2-40B4-BE49-F238E27FC236}">
-                <a16:creationId xmlns:a16="http://schemas.microsoft.com/office/drawing/2014/main" id="{820ADE24-AF41-4329-9AEC-54CF179266E7}"/>
+                <a16:creationId xmlns:a16="http://schemas.microsoft.com/office/drawing/2014/main" id="{FACDD573-2EB7-48F8-BE93-57E7845B53EE}"/>
               </a:ext>
             </a:extLst>
           </p:cNvPr>
@@ -7918,7 +9828,7 @@
           <p:cNvPr id="3" name="작은 질문에는 Chatbot이 유용하다">
             <a:extLst xmlns:a="http://schemas.openxmlformats.org/drawingml/2006/main">
               <a:ext uri="{FF2B5EF4-FFF2-40B4-BE49-F238E27FC236}">
-                <a16:creationId xmlns:a16="http://schemas.microsoft.com/office/drawing/2014/main" id="{1D190064-5EAD-4CC1-9C68-775BD3E399D3}"/>
+                <a16:creationId xmlns:a16="http://schemas.microsoft.com/office/drawing/2014/main" id="{D6CA7B50-A41E-4603-8550-08CBECE43067}"/>
               </a:ext>
             </a:extLst>
           </p:cNvPr>
@@ -8076,7 +9986,7 @@
           <p:cNvPr id="4" name="">
             <a:extLst xmlns:a="http://schemas.openxmlformats.org/drawingml/2006/main">
               <a:ext uri="{FF2B5EF4-FFF2-40B4-BE49-F238E27FC236}">
-                <a16:creationId xmlns:a16="http://schemas.microsoft.com/office/drawing/2014/main" id="{FC1C1E94-F921-41BA-8F67-F06146146754}"/>
+                <a16:creationId xmlns:a16="http://schemas.microsoft.com/office/drawing/2014/main" id="{5155E2D5-6B80-4CF1-9A8D-2562F3BE9CB5}"/>
               </a:ext>
             </a:extLst>
           </p:cNvPr>
@@ -8107,7 +10017,7 @@
           <p:cNvPr id="5" name="Microsoft C++ 문서 기반 교육 예시 · 실제 ChatGPT 대화·실행 화면 아님">
             <a:extLst xmlns:a="http://schemas.openxmlformats.org/drawingml/2006/main">
               <a:ext uri="{FF2B5EF4-FFF2-40B4-BE49-F238E27FC236}">
-                <a16:creationId xmlns:a16="http://schemas.microsoft.com/office/drawing/2014/main" id="{38D65CED-B786-4301-8FB8-A4254EBF501F}"/>
+                <a16:creationId xmlns:a16="http://schemas.microsoft.com/office/drawing/2014/main" id="{6B1A202F-7808-4AE3-A672-43FE6281EBC0}"/>
               </a:ext>
             </a:extLst>
           </p:cNvPr>
@@ -8265,7 +10175,7 @@
           <p:cNvPr id="6" name="괄호는 개수·값 생성자, 중괄호는 이 예시의 initializer_list 생성자를 사용합니다.">
             <a:extLst xmlns:a="http://schemas.openxmlformats.org/drawingml/2006/main">
               <a:ext uri="{FF2B5EF4-FFF2-40B4-BE49-F238E27FC236}">
-                <a16:creationId xmlns:a16="http://schemas.microsoft.com/office/drawing/2014/main" id="{E93BC56A-FFAF-4726-8260-BE392DFAAE0E}"/>
+                <a16:creationId xmlns:a16="http://schemas.microsoft.com/office/drawing/2014/main" id="{A91C9285-B26D-4F45-9A75-07A3DB99F050}"/>
               </a:ext>
             </a:extLst>
           </p:cNvPr>
@@ -8423,7 +10333,7 @@
           <p:cNvPr id="7" name="괄호만 바뀌었는데, 같은 Vector일까?">
             <a:extLst xmlns:a="http://schemas.openxmlformats.org/drawingml/2006/main">
               <a:ext uri="{FF2B5EF4-FFF2-40B4-BE49-F238E27FC236}">
-                <a16:creationId xmlns:a16="http://schemas.microsoft.com/office/drawing/2014/main" id="{7EAF42E4-3FE5-4D92-AF00-7EC2A902359E}"/>
+                <a16:creationId xmlns:a16="http://schemas.microsoft.com/office/drawing/2014/main" id="{02E12FC7-83DC-412A-85D2-13FA9035B427}"/>
               </a:ext>
             </a:extLst>
           </p:cNvPr>
@@ -8581,7 +10491,7 @@
           <p:cNvPr id="8" name="">
             <a:extLst xmlns:a="http://schemas.openxmlformats.org/drawingml/2006/main">
               <a:ext uri="{FF2B5EF4-FFF2-40B4-BE49-F238E27FC236}">
-                <a16:creationId xmlns:a16="http://schemas.microsoft.com/office/drawing/2014/main" id="{86EAA020-D152-4D87-9939-C452EBA4A1FB}"/>
+                <a16:creationId xmlns:a16="http://schemas.microsoft.com/office/drawing/2014/main" id="{EEE68591-CDC6-4B93-81E4-656A6FDE45E5}"/>
               </a:ext>
             </a:extLst>
           </p:cNvPr>
@@ -8612,7 +10522,7 @@
           <p:cNvPr id="9" name="std::vector&lt;int&gt; a(3, 1);">
             <a:extLst xmlns:a="http://schemas.openxmlformats.org/drawingml/2006/main">
               <a:ext uri="{FF2B5EF4-FFF2-40B4-BE49-F238E27FC236}">
-                <a16:creationId xmlns:a16="http://schemas.microsoft.com/office/drawing/2014/main" id="{B979B36D-DAA8-4CD7-AF62-E27DC46819EB}"/>
+                <a16:creationId xmlns:a16="http://schemas.microsoft.com/office/drawing/2014/main" id="{999A15E6-29FF-4F1F-B09D-1677249DF399}"/>
               </a:ext>
             </a:extLst>
           </p:cNvPr>
@@ -8770,7 +10680,7 @@
           <p:cNvPr id="10" name="">
             <a:extLst xmlns:a="http://schemas.openxmlformats.org/drawingml/2006/main">
               <a:ext uri="{FF2B5EF4-FFF2-40B4-BE49-F238E27FC236}">
-                <a16:creationId xmlns:a16="http://schemas.microsoft.com/office/drawing/2014/main" id="{0A200057-7FA7-4631-AF9F-0757FACF7DE0}"/>
+                <a16:creationId xmlns:a16="http://schemas.microsoft.com/office/drawing/2014/main" id="{56C6825B-89AA-463A-A36A-2CF7982CC080}"/>
               </a:ext>
             </a:extLst>
           </p:cNvPr>
@@ -8800,7 +10710,7 @@
           <p:cNvPr id="11" name="">
             <a:extLst xmlns:a="http://schemas.openxmlformats.org/drawingml/2006/main">
               <a:ext uri="{FF2B5EF4-FFF2-40B4-BE49-F238E27FC236}">
-                <a16:creationId xmlns:a16="http://schemas.microsoft.com/office/drawing/2014/main" id="{3B01B226-3299-4078-9065-CB1C09806366}"/>
+                <a16:creationId xmlns:a16="http://schemas.microsoft.com/office/drawing/2014/main" id="{88B3B71E-A8F9-4004-B69E-49BB42341DEE}"/>
               </a:ext>
             </a:extLst>
           </p:cNvPr>
@@ -8833,7 +10743,7 @@
           <p:cNvPr id="12" name="1">
             <a:extLst xmlns:a="http://schemas.openxmlformats.org/drawingml/2006/main">
               <a:ext uri="{FF2B5EF4-FFF2-40B4-BE49-F238E27FC236}">
-                <a16:creationId xmlns:a16="http://schemas.microsoft.com/office/drawing/2014/main" id="{81AA9D1C-E27A-44B7-BBDA-FF379D9CD71A}"/>
+                <a16:creationId xmlns:a16="http://schemas.microsoft.com/office/drawing/2014/main" id="{A4BDF7A2-F9CB-422A-8D06-3D847204D540}"/>
               </a:ext>
             </a:extLst>
           </p:cNvPr>
@@ -8991,7 +10901,7 @@
           <p:cNvPr id="13" name="">
             <a:extLst xmlns:a="http://schemas.openxmlformats.org/drawingml/2006/main">
               <a:ext uri="{FF2B5EF4-FFF2-40B4-BE49-F238E27FC236}">
-                <a16:creationId xmlns:a16="http://schemas.microsoft.com/office/drawing/2014/main" id="{3C83AE81-4D90-4ADE-8290-F5FC9BE5246C}"/>
+                <a16:creationId xmlns:a16="http://schemas.microsoft.com/office/drawing/2014/main" id="{6AC1DC93-9876-481E-BCC0-8E5F9B5F703E}"/>
               </a:ext>
             </a:extLst>
           </p:cNvPr>
@@ -9024,7 +10934,7 @@
           <p:cNvPr id="14" name="1">
             <a:extLst xmlns:a="http://schemas.openxmlformats.org/drawingml/2006/main">
               <a:ext uri="{FF2B5EF4-FFF2-40B4-BE49-F238E27FC236}">
-                <a16:creationId xmlns:a16="http://schemas.microsoft.com/office/drawing/2014/main" id="{DDD728F1-FC03-4105-8A11-A17A1355B869}"/>
+                <a16:creationId xmlns:a16="http://schemas.microsoft.com/office/drawing/2014/main" id="{9C2C7929-4C43-46C8-9A73-4450A404F64A}"/>
               </a:ext>
             </a:extLst>
           </p:cNvPr>
@@ -9182,7 +11092,7 @@
           <p:cNvPr id="15" name="">
             <a:extLst xmlns:a="http://schemas.openxmlformats.org/drawingml/2006/main">
               <a:ext uri="{FF2B5EF4-FFF2-40B4-BE49-F238E27FC236}">
-                <a16:creationId xmlns:a16="http://schemas.microsoft.com/office/drawing/2014/main" id="{1D40629D-3C5D-418F-B626-74FC97BC541C}"/>
+                <a16:creationId xmlns:a16="http://schemas.microsoft.com/office/drawing/2014/main" id="{575D0456-7110-4BD1-8B97-2EDD5C4086F8}"/>
               </a:ext>
             </a:extLst>
           </p:cNvPr>
@@ -9215,7 +11125,7 @@
           <p:cNvPr id="16" name="1">
             <a:extLst xmlns:a="http://schemas.openxmlformats.org/drawingml/2006/main">
               <a:ext uri="{FF2B5EF4-FFF2-40B4-BE49-F238E27FC236}">
-                <a16:creationId xmlns:a16="http://schemas.microsoft.com/office/drawing/2014/main" id="{44885AC3-CA44-461D-B14E-F4D69E0E84E0}"/>
+                <a16:creationId xmlns:a16="http://schemas.microsoft.com/office/drawing/2014/main" id="{DBA2E043-FACC-4B94-94FE-E5C39034D33C}"/>
               </a:ext>
             </a:extLst>
           </p:cNvPr>
@@ -9373,7 +11283,7 @@
           <p:cNvPr id="17" name="3개">
             <a:extLst xmlns:a="http://schemas.openxmlformats.org/drawingml/2006/main">
               <a:ext uri="{FF2B5EF4-FFF2-40B4-BE49-F238E27FC236}">
-                <a16:creationId xmlns:a16="http://schemas.microsoft.com/office/drawing/2014/main" id="{B33A6611-002F-4E1E-96EF-87718E4062D1}"/>
+                <a16:creationId xmlns:a16="http://schemas.microsoft.com/office/drawing/2014/main" id="{79F3D998-83CC-4716-8DBC-6B873131D37C}"/>
               </a:ext>
             </a:extLst>
           </p:cNvPr>
@@ -9531,7 +11441,7 @@
           <p:cNvPr id="18" name="">
             <a:extLst xmlns:a="http://schemas.openxmlformats.org/drawingml/2006/main">
               <a:ext uri="{FF2B5EF4-FFF2-40B4-BE49-F238E27FC236}">
-                <a16:creationId xmlns:a16="http://schemas.microsoft.com/office/drawing/2014/main" id="{456D4E38-0840-47D0-95B1-7EFC8DD5CD60}"/>
+                <a16:creationId xmlns:a16="http://schemas.microsoft.com/office/drawing/2014/main" id="{41AAFDAE-DF27-4CAC-8A93-26466DE5F129}"/>
               </a:ext>
             </a:extLst>
           </p:cNvPr>
@@ -9562,7 +11472,7 @@
           <p:cNvPr id="19" name="std::vector&lt;int&gt; b{3, 1};">
             <a:extLst xmlns:a="http://schemas.openxmlformats.org/drawingml/2006/main">
               <a:ext uri="{FF2B5EF4-FFF2-40B4-BE49-F238E27FC236}">
-                <a16:creationId xmlns:a16="http://schemas.microsoft.com/office/drawing/2014/main" id="{48368637-C413-488A-8E5C-55C8FCC967AB}"/>
+                <a16:creationId xmlns:a16="http://schemas.microsoft.com/office/drawing/2014/main" id="{BA09DEA8-BC7A-4D4A-82C5-6B290AD3CBC5}"/>
               </a:ext>
             </a:extLst>
           </p:cNvPr>
@@ -9720,7 +11630,7 @@
           <p:cNvPr id="20" name="">
             <a:extLst xmlns:a="http://schemas.openxmlformats.org/drawingml/2006/main">
               <a:ext uri="{FF2B5EF4-FFF2-40B4-BE49-F238E27FC236}">
-                <a16:creationId xmlns:a16="http://schemas.microsoft.com/office/drawing/2014/main" id="{960E5209-80D3-44D2-9557-17A7C5166A88}"/>
+                <a16:creationId xmlns:a16="http://schemas.microsoft.com/office/drawing/2014/main" id="{53DBED12-D96E-4008-B4AB-1B013E0200BD}"/>
               </a:ext>
             </a:extLst>
           </p:cNvPr>
@@ -9750,7 +11660,7 @@
           <p:cNvPr id="21" name="">
             <a:extLst xmlns:a="http://schemas.openxmlformats.org/drawingml/2006/main">
               <a:ext uri="{FF2B5EF4-FFF2-40B4-BE49-F238E27FC236}">
-                <a16:creationId xmlns:a16="http://schemas.microsoft.com/office/drawing/2014/main" id="{249CD70B-FF85-4932-925E-AA2DA239B8AF}"/>
+                <a16:creationId xmlns:a16="http://schemas.microsoft.com/office/drawing/2014/main" id="{C01B842D-0A8A-46C7-8F3C-1420CFFB089A}"/>
               </a:ext>
             </a:extLst>
           </p:cNvPr>
@@ -9783,7 +11693,7 @@
           <p:cNvPr id="22" name="3">
             <a:extLst xmlns:a="http://schemas.openxmlformats.org/drawingml/2006/main">
               <a:ext uri="{FF2B5EF4-FFF2-40B4-BE49-F238E27FC236}">
-                <a16:creationId xmlns:a16="http://schemas.microsoft.com/office/drawing/2014/main" id="{113CB842-E268-4B4B-9916-D29B5616B006}"/>
+                <a16:creationId xmlns:a16="http://schemas.microsoft.com/office/drawing/2014/main" id="{09B1EDEA-3663-41DC-951A-991BD023C4EA}"/>
               </a:ext>
             </a:extLst>
           </p:cNvPr>
@@ -9941,7 +11851,7 @@
           <p:cNvPr id="23" name="">
             <a:extLst xmlns:a="http://schemas.openxmlformats.org/drawingml/2006/main">
               <a:ext uri="{FF2B5EF4-FFF2-40B4-BE49-F238E27FC236}">
-                <a16:creationId xmlns:a16="http://schemas.microsoft.com/office/drawing/2014/main" id="{6DBACCDF-39A7-4E58-A5BB-A3CD92D72B43}"/>
+                <a16:creationId xmlns:a16="http://schemas.microsoft.com/office/drawing/2014/main" id="{3718CA18-5D71-4EC3-9FDE-B356945CE357}"/>
               </a:ext>
             </a:extLst>
           </p:cNvPr>
@@ -9974,7 +11884,7 @@
           <p:cNvPr id="24" name="1">
             <a:extLst xmlns:a="http://schemas.openxmlformats.org/drawingml/2006/main">
               <a:ext uri="{FF2B5EF4-FFF2-40B4-BE49-F238E27FC236}">
-                <a16:creationId xmlns:a16="http://schemas.microsoft.com/office/drawing/2014/main" id="{6506E9A5-24F0-457A-8B45-52D804A6E9EA}"/>
+                <a16:creationId xmlns:a16="http://schemas.microsoft.com/office/drawing/2014/main" id="{9D20C340-8DAA-400C-83A9-E5DAF2276374}"/>
               </a:ext>
             </a:extLst>
           </p:cNvPr>
@@ -10132,7 +12042,7 @@
           <p:cNvPr id="25" name="2개">
             <a:extLst xmlns:a="http://schemas.openxmlformats.org/drawingml/2006/main">
               <a:ext uri="{FF2B5EF4-FFF2-40B4-BE49-F238E27FC236}">
-                <a16:creationId xmlns:a16="http://schemas.microsoft.com/office/drawing/2014/main" id="{CC35DF09-C92B-4E60-A8EF-E0CD9844367A}"/>
+                <a16:creationId xmlns:a16="http://schemas.microsoft.com/office/drawing/2014/main" id="{54688FF0-33F7-45E4-BD36-61AEB8E429AD}"/>
               </a:ext>
             </a:extLst>
           </p:cNvPr>
@@ -10290,7 +12200,7 @@
           <p:cNvPr id="26" name="">
             <a:extLst xmlns:a="http://schemas.openxmlformats.org/drawingml/2006/main">
               <a:ext uri="{FF2B5EF4-FFF2-40B4-BE49-F238E27FC236}">
-                <a16:creationId xmlns:a16="http://schemas.microsoft.com/office/drawing/2014/main" id="{AE04542C-A7F4-4DC8-935D-6336840260F6}"/>
+                <a16:creationId xmlns:a16="http://schemas.microsoft.com/office/drawing/2014/main" id="{65BCD954-DEF0-4FB3-A518-58EA702E4C7F}"/>
               </a:ext>
             </a:extLst>
           </p:cNvPr>
@@ -10323,7 +12233,7 @@
           <p:cNvPr id="27" name="IDE">
             <a:extLst xmlns:a="http://schemas.openxmlformats.org/drawingml/2006/main">
               <a:ext uri="{FF2B5EF4-FFF2-40B4-BE49-F238E27FC236}">
-                <a16:creationId xmlns:a16="http://schemas.microsoft.com/office/drawing/2014/main" id="{E85E83B4-6408-48D9-BC32-0271D06A4B69}"/>
+                <a16:creationId xmlns:a16="http://schemas.microsoft.com/office/drawing/2014/main" id="{B1AC07BB-4EF9-4022-9FE8-B25A89F4FAF7}"/>
               </a:ext>
             </a:extLst>
           </p:cNvPr>
@@ -10481,7 +12391,7 @@
           <p:cNvPr id="28" name="코드 선택·복사">
             <a:extLst xmlns:a="http://schemas.openxmlformats.org/drawingml/2006/main">
               <a:ext uri="{FF2B5EF4-FFF2-40B4-BE49-F238E27FC236}">
-                <a16:creationId xmlns:a16="http://schemas.microsoft.com/office/drawing/2014/main" id="{2E43F827-D693-416C-AFFF-A70598D8DA6D}"/>
+                <a16:creationId xmlns:a16="http://schemas.microsoft.com/office/drawing/2014/main" id="{5CBCC9C7-C325-4DC1-85A3-BF97C989C45F}"/>
               </a:ext>
             </a:extLst>
           </p:cNvPr>
@@ -10639,7 +12549,7 @@
           <p:cNvPr id="29" name="">
             <a:extLst xmlns:a="http://schemas.openxmlformats.org/drawingml/2006/main">
               <a:ext uri="{FF2B5EF4-FFF2-40B4-BE49-F238E27FC236}">
-                <a16:creationId xmlns:a16="http://schemas.microsoft.com/office/drawing/2014/main" id="{6DBD3352-0443-4208-A301-3A7CA915F966}"/>
+                <a16:creationId xmlns:a16="http://schemas.microsoft.com/office/drawing/2014/main" id="{AF34E466-E37A-44E9-AB78-47C7D8E953AD}"/>
               </a:ext>
             </a:extLst>
           </p:cNvPr>
@@ -10672,7 +12582,7 @@
           <p:cNvPr id="30" name="Chatbot">
             <a:extLst xmlns:a="http://schemas.openxmlformats.org/drawingml/2006/main">
               <a:ext uri="{FF2B5EF4-FFF2-40B4-BE49-F238E27FC236}">
-                <a16:creationId xmlns:a16="http://schemas.microsoft.com/office/drawing/2014/main" id="{B08B0B3D-C8FC-4183-88E0-46EBBD20B816}"/>
+                <a16:creationId xmlns:a16="http://schemas.microsoft.com/office/drawing/2014/main" id="{C8707B25-DB17-4502-8EC9-EF7C65E8969C}"/>
               </a:ext>
             </a:extLst>
           </p:cNvPr>
@@ -10830,7 +12740,7 @@
           <p:cNvPr id="31" name="붙여넣고 질문">
             <a:extLst xmlns:a="http://schemas.openxmlformats.org/drawingml/2006/main">
               <a:ext uri="{FF2B5EF4-FFF2-40B4-BE49-F238E27FC236}">
-                <a16:creationId xmlns:a16="http://schemas.microsoft.com/office/drawing/2014/main" id="{31FB3AA8-216C-4209-A24B-008E77EFD01A}"/>
+                <a16:creationId xmlns:a16="http://schemas.microsoft.com/office/drawing/2014/main" id="{7B61A1CB-3CB0-4BEB-93ED-285DC82B9574}"/>
               </a:ext>
             </a:extLst>
           </p:cNvPr>
@@ -10988,7 +12898,7 @@
           <p:cNvPr id="32" name="">
             <a:extLst xmlns:a="http://schemas.openxmlformats.org/drawingml/2006/main">
               <a:ext uri="{FF2B5EF4-FFF2-40B4-BE49-F238E27FC236}">
-                <a16:creationId xmlns:a16="http://schemas.microsoft.com/office/drawing/2014/main" id="{02087D4B-26CF-44AE-A6C5-247139558EBB}"/>
+                <a16:creationId xmlns:a16="http://schemas.microsoft.com/office/drawing/2014/main" id="{6D08B11E-FB89-4AAB-91A2-2B866249E5B9}"/>
               </a:ext>
             </a:extLst>
           </p:cNvPr>
@@ -11021,7 +12931,7 @@
           <p:cNvPr id="33" name="IDE">
             <a:extLst xmlns:a="http://schemas.openxmlformats.org/drawingml/2006/main">
               <a:ext uri="{FF2B5EF4-FFF2-40B4-BE49-F238E27FC236}">
-                <a16:creationId xmlns:a16="http://schemas.microsoft.com/office/drawing/2014/main" id="{0F9914DB-EC82-4E10-9370-9E67F2B44212}"/>
+                <a16:creationId xmlns:a16="http://schemas.microsoft.com/office/drawing/2014/main" id="{15C027BB-2611-4D55-9EDB-009489305847}"/>
               </a:ext>
             </a:extLst>
           </p:cNvPr>
@@ -11179,7 +13089,7 @@
           <p:cNvPr id="34" name="답 확인·적용">
             <a:extLst xmlns:a="http://schemas.openxmlformats.org/drawingml/2006/main">
               <a:ext uri="{FF2B5EF4-FFF2-40B4-BE49-F238E27FC236}">
-                <a16:creationId xmlns:a16="http://schemas.microsoft.com/office/drawing/2014/main" id="{A56B7C8D-E3FB-4BC4-BCC3-C46204D9C167}"/>
+                <a16:creationId xmlns:a16="http://schemas.microsoft.com/office/drawing/2014/main" id="{FD2410D9-BEAD-4B8A-9222-FD7919974251}"/>
               </a:ext>
             </a:extLst>
           </p:cNvPr>
@@ -11337,7 +13247,7 @@
           <p:cNvPr id="35" name="">
             <a:extLst xmlns:a="http://schemas.openxmlformats.org/drawingml/2006/main">
               <a:ext uri="{FF2B5EF4-FFF2-40B4-BE49-F238E27FC236}">
-                <a16:creationId xmlns:a16="http://schemas.microsoft.com/office/drawing/2014/main" id="{AE1DFF6B-0EF2-4757-93A1-86515CE58CEE}"/>
+                <a16:creationId xmlns:a16="http://schemas.microsoft.com/office/drawing/2014/main" id="{90901E9C-4DC0-4587-89DC-754C10FC0F23}"/>
               </a:ext>
             </a:extLst>
           </p:cNvPr>
@@ -11367,7 +13277,7 @@
           <p:cNvPr id="36" name="">
             <a:extLst xmlns:a="http://schemas.openxmlformats.org/drawingml/2006/main">
               <a:ext uri="{FF2B5EF4-FFF2-40B4-BE49-F238E27FC236}">
-                <a16:creationId xmlns:a16="http://schemas.microsoft.com/office/drawing/2014/main" id="{A1BB1F1C-1FDB-48EA-9353-C884090EE74C}"/>
+                <a16:creationId xmlns:a16="http://schemas.microsoft.com/office/drawing/2014/main" id="{31CDBF49-105E-41CF-88A3-2D9B704C263A}"/>
               </a:ext>
             </a:extLst>
           </p:cNvPr>
@@ -11397,7 +13307,7 @@
           <p:cNvPr id="37" name="필요한 코드와 맥락을 사람이 골라 전달한다.">
             <a:extLst xmlns:a="http://schemas.openxmlformats.org/drawingml/2006/main">
               <a:ext uri="{FF2B5EF4-FFF2-40B4-BE49-F238E27FC236}">
-                <a16:creationId xmlns:a16="http://schemas.microsoft.com/office/drawing/2014/main" id="{57FAFDC1-5B4C-448E-B689-7B9D5A51ADF3}"/>
+                <a16:creationId xmlns:a16="http://schemas.microsoft.com/office/drawing/2014/main" id="{1B5CAFB5-14B1-4F0D-9496-38BE2C1CAE2E}"/>
               </a:ext>
             </a:extLst>
           </p:cNvPr>
@@ -11555,7 +13465,7 @@
           <p:cNvPr id="38" name="Legacy module connection">
             <a:extLst xmlns:a="http://schemas.openxmlformats.org/drawingml/2006/main">
               <a:ext uri="{FF2B5EF4-FFF2-40B4-BE49-F238E27FC236}">
-                <a16:creationId xmlns:a16="http://schemas.microsoft.com/office/drawing/2014/main" id="{61080872-55DD-4B51-A77D-4882CFAD5DCF}"/>
+                <a16:creationId xmlns:a16="http://schemas.microsoft.com/office/drawing/2014/main" id="{6234A565-2F94-4E14-B195-AFC2109EA6D0}"/>
               </a:ext>
             </a:extLst>
           </p:cNvPr>
@@ -11711,7 +13621,7 @@
     </p:spTree>
     <p:extLst>
       <p:ext uri="{BB962C8B-B14F-4D97-AF65-F5344CB8AC3E}">
-        <p14:creationId xmlns:p14="http://schemas.microsoft.com/office/powerpoint/2010/main" val="413691871"/>
+        <p14:creationId xmlns:p14="http://schemas.microsoft.com/office/powerpoint/2010/main" val="793166334"/>
       </p:ext>
     </p:extLst>
   </p:cSld>
@@ -11742,7 +13652,7 @@
           <p:cNvPr id="34" name="ACT 0 · Visual Studio에서 디버깅할 때 살펴보던 정보">
             <a:extLst xmlns:a="http://schemas.openxmlformats.org/drawingml/2006/main">
               <a:ext uri="{FF2B5EF4-FFF2-40B4-BE49-F238E27FC236}">
-                <a16:creationId xmlns:a16="http://schemas.microsoft.com/office/drawing/2014/main" id="{9DE228F8-A269-4E28-B70B-3CDD891D5B8A}"/>
+                <a16:creationId xmlns:a16="http://schemas.microsoft.com/office/drawing/2014/main" id="{7096972C-5FED-4C64-B447-9D4ADB96AFE1}"/>
               </a:ext>
             </a:extLst>
           </p:cNvPr>
@@ -11900,7 +13810,7 @@
           <p:cNvPr id="2" name="S03">
             <a:extLst xmlns:a="http://schemas.openxmlformats.org/drawingml/2006/main">
               <a:ext uri="{FF2B5EF4-FFF2-40B4-BE49-F238E27FC236}">
-                <a16:creationId xmlns:a16="http://schemas.microsoft.com/office/drawing/2014/main" id="{2FB59E02-F790-4CB8-8102-F187C0283FCA}"/>
+                <a16:creationId xmlns:a16="http://schemas.microsoft.com/office/drawing/2014/main" id="{1CCC7CCA-CBE8-4FCD-9012-B5260A247BE0}"/>
               </a:ext>
             </a:extLst>
           </p:cNvPr>
@@ -12058,7 +13968,7 @@
           <p:cNvPr id="3" name="질문이 커지면 Context를 모으는 일이 생긴다">
             <a:extLst xmlns:a="http://schemas.openxmlformats.org/drawingml/2006/main">
               <a:ext uri="{FF2B5EF4-FFF2-40B4-BE49-F238E27FC236}">
-                <a16:creationId xmlns:a16="http://schemas.microsoft.com/office/drawing/2014/main" id="{6FB21F9A-83DA-488A-9249-69D6C75AC745}"/>
+                <a16:creationId xmlns:a16="http://schemas.microsoft.com/office/drawing/2014/main" id="{A779DC40-3F95-4425-9068-2E7D30D12A9A}"/>
               </a:ext>
             </a:extLst>
           </p:cNvPr>
@@ -12216,7 +14126,7 @@
           <p:cNvPr id="4" name="">
             <a:extLst xmlns:a="http://schemas.openxmlformats.org/drawingml/2006/main">
               <a:ext uri="{FF2B5EF4-FFF2-40B4-BE49-F238E27FC236}">
-                <a16:creationId xmlns:a16="http://schemas.microsoft.com/office/drawing/2014/main" id="{B4893C9C-3BA9-4E4C-A2F0-C8EED7546BEE}"/>
+                <a16:creationId xmlns:a16="http://schemas.microsoft.com/office/drawing/2014/main" id="{537E6432-848E-428C-8051-ADFAACEC6A5E}"/>
               </a:ext>
             </a:extLst>
           </p:cNvPr>
@@ -12247,7 +14157,7 @@
           <p:cNvPr id="5" name="Visual Studio 사용자의 디버깅 정보를 설명하는 교육용 병렬 도식">
             <a:extLst xmlns:a="http://schemas.openxmlformats.org/drawingml/2006/main">
               <a:ext uri="{FF2B5EF4-FFF2-40B4-BE49-F238E27FC236}">
-                <a16:creationId xmlns:a16="http://schemas.microsoft.com/office/drawing/2014/main" id="{5576832C-F256-44B3-A54A-C6784912F5A6}"/>
+                <a16:creationId xmlns:a16="http://schemas.microsoft.com/office/drawing/2014/main" id="{5DCE98E5-DA82-482C-9C7C-5892239E6335}"/>
               </a:ext>
             </a:extLst>
           </p:cNvPr>
@@ -12405,7 +14315,7 @@
           <p:cNvPr id="6" name="특정 Trial의 실제 화면이 아닙니다. 명세서는 IDE 밖에서도 함께 참고하는 문서입니다.">
             <a:extLst xmlns:a="http://schemas.openxmlformats.org/drawingml/2006/main">
               <a:ext uri="{FF2B5EF4-FFF2-40B4-BE49-F238E27FC236}">
-                <a16:creationId xmlns:a16="http://schemas.microsoft.com/office/drawing/2014/main" id="{95515E08-F67E-4103-B391-1B37B2BDB7D1}"/>
+                <a16:creationId xmlns:a16="http://schemas.microsoft.com/office/drawing/2014/main" id="{26F8E23E-2680-4A88-BFE7-19681B9178C5}"/>
               </a:ext>
             </a:extLst>
           </p:cNvPr>
@@ -12563,7 +14473,7 @@
           <p:cNvPr id="7" name="“결과가 기대와 다르다” — 우리는 어디를 살펴볼까?">
             <a:extLst xmlns:a="http://schemas.openxmlformats.org/drawingml/2006/main">
               <a:ext uri="{FF2B5EF4-FFF2-40B4-BE49-F238E27FC236}">
-                <a16:creationId xmlns:a16="http://schemas.microsoft.com/office/drawing/2014/main" id="{8C130E9D-3021-4204-8E83-98F99BD60EC7}"/>
+                <a16:creationId xmlns:a16="http://schemas.microsoft.com/office/drawing/2014/main" id="{327E4239-8456-4BD7-9EEA-A9973CE34682}"/>
               </a:ext>
             </a:extLst>
           </p:cNvPr>
@@ -12721,7 +14631,7 @@
           <p:cNvPr id="8" name="">
             <a:extLst xmlns:a="http://schemas.openxmlformats.org/drawingml/2006/main">
               <a:ext uri="{FF2B5EF4-FFF2-40B4-BE49-F238E27FC236}">
-                <a16:creationId xmlns:a16="http://schemas.microsoft.com/office/drawing/2014/main" id="{4E836679-BA7B-4F21-94CD-3771A05CEC7A}"/>
+                <a16:creationId xmlns:a16="http://schemas.microsoft.com/office/drawing/2014/main" id="{26E800FE-9258-4DE0-8045-FDCFD571F583}"/>
               </a:ext>
             </a:extLst>
           </p:cNvPr>
@@ -12754,7 +14664,7 @@
           <p:cNvPr id="9" name="테스트 탐색기">
             <a:extLst xmlns:a="http://schemas.openxmlformats.org/drawingml/2006/main">
               <a:ext uri="{FF2B5EF4-FFF2-40B4-BE49-F238E27FC236}">
-                <a16:creationId xmlns:a16="http://schemas.microsoft.com/office/drawing/2014/main" id="{490F2575-CC81-4B8F-8C73-A0DB13FF0B7E}"/>
+                <a16:creationId xmlns:a16="http://schemas.microsoft.com/office/drawing/2014/main" id="{93072E69-81C9-40AB-B603-D0E9768A7258}"/>
               </a:ext>
             </a:extLst>
           </p:cNvPr>
@@ -12912,7 +14822,7 @@
           <p:cNvPr id="10" name="">
             <a:extLst xmlns:a="http://schemas.openxmlformats.org/drawingml/2006/main">
               <a:ext uri="{FF2B5EF4-FFF2-40B4-BE49-F238E27FC236}">
-                <a16:creationId xmlns:a16="http://schemas.microsoft.com/office/drawing/2014/main" id="{29CA23CA-1434-4437-91A9-787987F6EA28}"/>
+                <a16:creationId xmlns:a16="http://schemas.microsoft.com/office/drawing/2014/main" id="{60AE65B0-C5AE-4931-8E30-DD01777B1FB0}"/>
               </a:ext>
             </a:extLst>
           </p:cNvPr>
@@ -12943,7 +14853,7 @@
           <p:cNvPr id="11" name="실패한 테스트&#10;기대값과 실제값">
             <a:extLst xmlns:a="http://schemas.openxmlformats.org/drawingml/2006/main">
               <a:ext uri="{FF2B5EF4-FFF2-40B4-BE49-F238E27FC236}">
-                <a16:creationId xmlns:a16="http://schemas.microsoft.com/office/drawing/2014/main" id="{7948EEAB-C701-4D34-8E8F-9B4C5BE1B2F5}"/>
+                <a16:creationId xmlns:a16="http://schemas.microsoft.com/office/drawing/2014/main" id="{7150E85B-3E4D-4966-9DBD-298A0882A2DE}"/>
               </a:ext>
             </a:extLst>
           </p:cNvPr>
@@ -13124,7 +15034,7 @@
           <p:cNvPr id="12" name="">
             <a:extLst xmlns:a="http://schemas.openxmlformats.org/drawingml/2006/main">
               <a:ext uri="{FF2B5EF4-FFF2-40B4-BE49-F238E27FC236}">
-                <a16:creationId xmlns:a16="http://schemas.microsoft.com/office/drawing/2014/main" id="{E1B81865-7A6A-4E61-971B-870B5E5487FB}"/>
+                <a16:creationId xmlns:a16="http://schemas.microsoft.com/office/drawing/2014/main" id="{18242A52-7B14-4973-AA1A-13658D96E9A7}"/>
               </a:ext>
             </a:extLst>
           </p:cNvPr>
@@ -13157,7 +15067,7 @@
           <p:cNvPr id="13" name="호출 스택">
             <a:extLst xmlns:a="http://schemas.openxmlformats.org/drawingml/2006/main">
               <a:ext uri="{FF2B5EF4-FFF2-40B4-BE49-F238E27FC236}">
-                <a16:creationId xmlns:a16="http://schemas.microsoft.com/office/drawing/2014/main" id="{1E7AD3CB-6128-4F4F-8439-47324D0A3A91}"/>
+                <a16:creationId xmlns:a16="http://schemas.microsoft.com/office/drawing/2014/main" id="{F4CCEAC6-86C2-4B2D-8FB2-AE1EC791F491}"/>
               </a:ext>
             </a:extLst>
           </p:cNvPr>
@@ -13315,7 +15225,7 @@
           <p:cNvPr id="14" name="">
             <a:extLst xmlns:a="http://schemas.openxmlformats.org/drawingml/2006/main">
               <a:ext uri="{FF2B5EF4-FFF2-40B4-BE49-F238E27FC236}">
-                <a16:creationId xmlns:a16="http://schemas.microsoft.com/office/drawing/2014/main" id="{492874C6-7396-4368-B934-A54D03475E7A}"/>
+                <a16:creationId xmlns:a16="http://schemas.microsoft.com/office/drawing/2014/main" id="{0CF35FD9-5CEE-4A18-BD04-65B396B60404}"/>
               </a:ext>
             </a:extLst>
           </p:cNvPr>
@@ -13346,7 +15256,7 @@
           <p:cNvPr id="15" name="어디서 호출됐나?&#10;함수와 호출 순서">
             <a:extLst xmlns:a="http://schemas.openxmlformats.org/drawingml/2006/main">
               <a:ext uri="{FF2B5EF4-FFF2-40B4-BE49-F238E27FC236}">
-                <a16:creationId xmlns:a16="http://schemas.microsoft.com/office/drawing/2014/main" id="{D09AD326-1D4E-498C-A6CA-0F0691080540}"/>
+                <a16:creationId xmlns:a16="http://schemas.microsoft.com/office/drawing/2014/main" id="{49C12749-836C-4F62-AC07-453C46741FB9}"/>
               </a:ext>
             </a:extLst>
           </p:cNvPr>
@@ -13527,7 +15437,7 @@
           <p:cNvPr id="16" name="">
             <a:extLst xmlns:a="http://schemas.openxmlformats.org/drawingml/2006/main">
               <a:ext uri="{FF2B5EF4-FFF2-40B4-BE49-F238E27FC236}">
-                <a16:creationId xmlns:a16="http://schemas.microsoft.com/office/drawing/2014/main" id="{0644506D-2EF3-462E-A4E3-94DF9E75AFB5}"/>
+                <a16:creationId xmlns:a16="http://schemas.microsoft.com/office/drawing/2014/main" id="{68CD8662-1E1D-46DC-8C58-3AE7550ECACB}"/>
               </a:ext>
             </a:extLst>
           </p:cNvPr>
@@ -13560,7 +15470,7 @@
           <p:cNvPr id="17" name="소스·참조">
             <a:extLst xmlns:a="http://schemas.openxmlformats.org/drawingml/2006/main">
               <a:ext uri="{FF2B5EF4-FFF2-40B4-BE49-F238E27FC236}">
-                <a16:creationId xmlns:a16="http://schemas.microsoft.com/office/drawing/2014/main" id="{D2C12CF7-C819-4EE0-8165-4EEAECCB385F}"/>
+                <a16:creationId xmlns:a16="http://schemas.microsoft.com/office/drawing/2014/main" id="{54B4C4DB-EFD0-4290-9E06-5EDB4D80F85E}"/>
               </a:ext>
             </a:extLst>
           </p:cNvPr>
@@ -13718,7 +15628,7 @@
           <p:cNvPr id="18" name="">
             <a:extLst xmlns:a="http://schemas.openxmlformats.org/drawingml/2006/main">
               <a:ext uri="{FF2B5EF4-FFF2-40B4-BE49-F238E27FC236}">
-                <a16:creationId xmlns:a16="http://schemas.microsoft.com/office/drawing/2014/main" id="{2B353DD4-0C4C-48EE-B614-E362AB4E040D}"/>
+                <a16:creationId xmlns:a16="http://schemas.microsoft.com/office/drawing/2014/main" id="{A6660977-DD2C-4177-A3DC-25E0E8147A0F}"/>
               </a:ext>
             </a:extLst>
           </p:cNvPr>
@@ -13749,7 +15659,7 @@
           <p:cNvPr id="19" name="관련 구현과 호출부&#10;코드의 분기">
             <a:extLst xmlns:a="http://schemas.openxmlformats.org/drawingml/2006/main">
               <a:ext uri="{FF2B5EF4-FFF2-40B4-BE49-F238E27FC236}">
-                <a16:creationId xmlns:a16="http://schemas.microsoft.com/office/drawing/2014/main" id="{4532CEE7-3AC7-486F-BA57-2B982EB5E5C1}"/>
+                <a16:creationId xmlns:a16="http://schemas.microsoft.com/office/drawing/2014/main" id="{F3B8450E-297A-47DD-BE69-24A0D379ED02}"/>
               </a:ext>
             </a:extLst>
           </p:cNvPr>
@@ -13930,7 +15840,7 @@
           <p:cNvPr id="20" name="">
             <a:extLst xmlns:a="http://schemas.openxmlformats.org/drawingml/2006/main">
               <a:ext uri="{FF2B5EF4-FFF2-40B4-BE49-F238E27FC236}">
-                <a16:creationId xmlns:a16="http://schemas.microsoft.com/office/drawing/2014/main" id="{56674A25-46A8-4DDA-A81A-3678D03EBE50}"/>
+                <a16:creationId xmlns:a16="http://schemas.microsoft.com/office/drawing/2014/main" id="{01F2D4DB-D7B0-413D-B2D2-39CA534120E9}"/>
               </a:ext>
             </a:extLst>
           </p:cNvPr>
@@ -13963,7 +15873,7 @@
           <p:cNvPr id="21" name="지역 변수·조사식">
             <a:extLst xmlns:a="http://schemas.openxmlformats.org/drawingml/2006/main">
               <a:ext uri="{FF2B5EF4-FFF2-40B4-BE49-F238E27FC236}">
-                <a16:creationId xmlns:a16="http://schemas.microsoft.com/office/drawing/2014/main" id="{DDD3FC55-86E5-4D16-A989-2A8E713CB67F}"/>
+                <a16:creationId xmlns:a16="http://schemas.microsoft.com/office/drawing/2014/main" id="{B6A94784-1202-4A31-A03A-6EBA981F71A6}"/>
               </a:ext>
             </a:extLst>
           </p:cNvPr>
@@ -14121,7 +16031,7 @@
           <p:cNvPr id="22" name="">
             <a:extLst xmlns:a="http://schemas.openxmlformats.org/drawingml/2006/main">
               <a:ext uri="{FF2B5EF4-FFF2-40B4-BE49-F238E27FC236}">
-                <a16:creationId xmlns:a16="http://schemas.microsoft.com/office/drawing/2014/main" id="{9E7B134B-A1A1-4AC1-8585-4D25FC38ECC7}"/>
+                <a16:creationId xmlns:a16="http://schemas.microsoft.com/office/drawing/2014/main" id="{BE57BECE-0889-4DAA-9305-9D2D33CAC54E}"/>
               </a:ext>
             </a:extLst>
           </p:cNvPr>
@@ -14152,7 +16062,7 @@
           <p:cNvPr id="23" name="멈춘 지점의 입력&#10;변수의 실제 값">
             <a:extLst xmlns:a="http://schemas.openxmlformats.org/drawingml/2006/main">
               <a:ext uri="{FF2B5EF4-FFF2-40B4-BE49-F238E27FC236}">
-                <a16:creationId xmlns:a16="http://schemas.microsoft.com/office/drawing/2014/main" id="{2744C2A9-8BD1-4483-8FAC-5F743E120152}"/>
+                <a16:creationId xmlns:a16="http://schemas.microsoft.com/office/drawing/2014/main" id="{59E67982-A1B6-4617-9177-A8149338A817}"/>
               </a:ext>
             </a:extLst>
           </p:cNvPr>
@@ -14333,7 +16243,7 @@
           <p:cNvPr id="24" name="">
             <a:extLst xmlns:a="http://schemas.openxmlformats.org/drawingml/2006/main">
               <a:ext uri="{FF2B5EF4-FFF2-40B4-BE49-F238E27FC236}">
-                <a16:creationId xmlns:a16="http://schemas.microsoft.com/office/drawing/2014/main" id="{A7BA375D-4EE1-48E4-8C50-35EF64AF17A6}"/>
+                <a16:creationId xmlns:a16="http://schemas.microsoft.com/office/drawing/2014/main" id="{A8362056-331F-400B-97AF-7325EC437EA8}"/>
               </a:ext>
             </a:extLst>
           </p:cNvPr>
@@ -14366,7 +16276,7 @@
           <p:cNvPr id="25" name="출력·로그">
             <a:extLst xmlns:a="http://schemas.openxmlformats.org/drawingml/2006/main">
               <a:ext uri="{FF2B5EF4-FFF2-40B4-BE49-F238E27FC236}">
-                <a16:creationId xmlns:a16="http://schemas.microsoft.com/office/drawing/2014/main" id="{90FD975C-3D2D-4D50-A6E7-6E7FB7784A8E}"/>
+                <a16:creationId xmlns:a16="http://schemas.microsoft.com/office/drawing/2014/main" id="{B4635911-F49B-4FD2-B2B9-45F30633CE9B}"/>
               </a:ext>
             </a:extLst>
           </p:cNvPr>
@@ -14524,7 +16434,7 @@
           <p:cNvPr id="26" name="">
             <a:extLst xmlns:a="http://schemas.openxmlformats.org/drawingml/2006/main">
               <a:ext uri="{FF2B5EF4-FFF2-40B4-BE49-F238E27FC236}">
-                <a16:creationId xmlns:a16="http://schemas.microsoft.com/office/drawing/2014/main" id="{135A08E5-76EB-44CB-B754-8C405767144D}"/>
+                <a16:creationId xmlns:a16="http://schemas.microsoft.com/office/drawing/2014/main" id="{2FC8AEA1-E8E0-4A19-AB51-10B005A92814}"/>
               </a:ext>
             </a:extLst>
           </p:cNvPr>
@@ -14555,7 +16465,7 @@
           <p:cNvPr id="27" name="빌드·실행 메시지&#10;오류가 난 시점">
             <a:extLst xmlns:a="http://schemas.openxmlformats.org/drawingml/2006/main">
               <a:ext uri="{FF2B5EF4-FFF2-40B4-BE49-F238E27FC236}">
-                <a16:creationId xmlns:a16="http://schemas.microsoft.com/office/drawing/2014/main" id="{C829DA70-7A61-468B-9B92-433F8C6102F0}"/>
+                <a16:creationId xmlns:a16="http://schemas.microsoft.com/office/drawing/2014/main" id="{9698BBA2-C529-4537-A849-AE8053F61E68}"/>
               </a:ext>
             </a:extLst>
           </p:cNvPr>
@@ -14736,7 +16646,7 @@
           <p:cNvPr id="28" name="">
             <a:extLst xmlns:a="http://schemas.openxmlformats.org/drawingml/2006/main">
               <a:ext uri="{FF2B5EF4-FFF2-40B4-BE49-F238E27FC236}">
-                <a16:creationId xmlns:a16="http://schemas.microsoft.com/office/drawing/2014/main" id="{E0842B9C-8BA1-4A25-9E75-955F99E3A092}"/>
+                <a16:creationId xmlns:a16="http://schemas.microsoft.com/office/drawing/2014/main" id="{6DAB26AE-37B6-4074-A440-F98EC8A3072F}"/>
               </a:ext>
             </a:extLst>
           </p:cNvPr>
@@ -14769,7 +16679,7 @@
           <p:cNvPr id="29" name="명세서 · 외부 문서">
             <a:extLst xmlns:a="http://schemas.openxmlformats.org/drawingml/2006/main">
               <a:ext uri="{FF2B5EF4-FFF2-40B4-BE49-F238E27FC236}">
-                <a16:creationId xmlns:a16="http://schemas.microsoft.com/office/drawing/2014/main" id="{86A5E6B2-86E2-4133-A7A5-7C190A35EF4A}"/>
+                <a16:creationId xmlns:a16="http://schemas.microsoft.com/office/drawing/2014/main" id="{7ABE47CB-519B-4167-8743-F801F6215BD1}"/>
               </a:ext>
             </a:extLst>
           </p:cNvPr>
@@ -14927,7 +16837,7 @@
           <p:cNvPr id="30" name="">
             <a:extLst xmlns:a="http://schemas.openxmlformats.org/drawingml/2006/main">
               <a:ext uri="{FF2B5EF4-FFF2-40B4-BE49-F238E27FC236}">
-                <a16:creationId xmlns:a16="http://schemas.microsoft.com/office/drawing/2014/main" id="{C384F134-82FE-4638-BF93-AF8ADDAE4256}"/>
+                <a16:creationId xmlns:a16="http://schemas.microsoft.com/office/drawing/2014/main" id="{56FE5E7F-1E32-4405-8EEE-173585E0CCE5}"/>
               </a:ext>
             </a:extLst>
           </p:cNvPr>
@@ -14958,7 +16868,7 @@
           <p:cNvPr id="31" name="기대하는 동작&#10;입력 범위·예외 조건">
             <a:extLst xmlns:a="http://schemas.openxmlformats.org/drawingml/2006/main">
               <a:ext uri="{FF2B5EF4-FFF2-40B4-BE49-F238E27FC236}">
-                <a16:creationId xmlns:a16="http://schemas.microsoft.com/office/drawing/2014/main" id="{696294A2-0909-4CBD-80ED-37D65C28BB93}"/>
+                <a16:creationId xmlns:a16="http://schemas.microsoft.com/office/drawing/2014/main" id="{3C246A2E-8F64-4DFA-A920-49066AD179D1}"/>
               </a:ext>
             </a:extLst>
           </p:cNvPr>
@@ -15139,7 +17049,7 @@
           <p:cNvPr id="32" name="이 정보 하나하나가 Context다.">
             <a:extLst xmlns:a="http://schemas.openxmlformats.org/drawingml/2006/main">
               <a:ext uri="{FF2B5EF4-FFF2-40B4-BE49-F238E27FC236}">
-                <a16:creationId xmlns:a16="http://schemas.microsoft.com/office/drawing/2014/main" id="{90367078-4765-4E73-8C65-B65103F0FA16}"/>
+                <a16:creationId xmlns:a16="http://schemas.microsoft.com/office/drawing/2014/main" id="{17B07E1F-C816-474B-A6F8-B731C1728C2E}"/>
               </a:ext>
             </a:extLst>
           </p:cNvPr>
@@ -15297,7 +17207,7 @@
           <p:cNvPr id="33" name="Legacy module connection">
             <a:extLst xmlns:a="http://schemas.openxmlformats.org/drawingml/2006/main">
               <a:ext uri="{FF2B5EF4-FFF2-40B4-BE49-F238E27FC236}">
-                <a16:creationId xmlns:a16="http://schemas.microsoft.com/office/drawing/2014/main" id="{A6371EF9-C307-4DD7-B1DA-4BE88A3FCBF8}"/>
+                <a16:creationId xmlns:a16="http://schemas.microsoft.com/office/drawing/2014/main" id="{8C8102D7-58B4-4F88-88BE-1AB59B9F022D}"/>
               </a:ext>
             </a:extLst>
           </p:cNvPr>
@@ -15453,7 +17363,7 @@
     </p:spTree>
     <p:extLst>
       <p:ext uri="{BB962C8B-B14F-4D97-AF65-F5344CB8AC3E}">
-        <p14:creationId xmlns:p14="http://schemas.microsoft.com/office/powerpoint/2010/main" val="1817750766"/>
+        <p14:creationId xmlns:p14="http://schemas.microsoft.com/office/powerpoint/2010/main" val="450649659"/>
       </p:ext>
     </p:extLst>
   </p:cSld>
@@ -15484,7 +17394,7 @@
           <p:cNvPr id="20" name="ACT 0 · Repository 조사 관찰">
             <a:extLst xmlns:a="http://schemas.openxmlformats.org/drawingml/2006/main">
               <a:ext uri="{FF2B5EF4-FFF2-40B4-BE49-F238E27FC236}">
-                <a16:creationId xmlns:a16="http://schemas.microsoft.com/office/drawing/2014/main" id="{0B66086F-6A8E-477F-820E-BDA6E989E3D2}"/>
+                <a16:creationId xmlns:a16="http://schemas.microsoft.com/office/drawing/2014/main" id="{DCB146D9-17E0-4388-A4EB-A95F484CCD4B}"/>
               </a:ext>
             </a:extLst>
           </p:cNvPr>
@@ -15642,7 +17552,7 @@
           <p:cNvPr id="2" name="S04">
             <a:extLst xmlns:a="http://schemas.openxmlformats.org/drawingml/2006/main">
               <a:ext uri="{FF2B5EF4-FFF2-40B4-BE49-F238E27FC236}">
-                <a16:creationId xmlns:a16="http://schemas.microsoft.com/office/drawing/2014/main" id="{8E7271B8-D55E-43EF-90C0-5F004B8A078E}"/>
+                <a16:creationId xmlns:a16="http://schemas.microsoft.com/office/drawing/2014/main" id="{73D0F7EC-D67A-4EB5-BACC-EB2EEEE504AA}"/>
               </a:ext>
             </a:extLst>
           </p:cNvPr>
@@ -15800,7 +17710,7 @@
           <p:cNvPr id="3" name="파일명을 주지 않으면 Agent는 어디부터 볼까?">
             <a:extLst xmlns:a="http://schemas.openxmlformats.org/drawingml/2006/main">
               <a:ext uri="{FF2B5EF4-FFF2-40B4-BE49-F238E27FC236}">
-                <a16:creationId xmlns:a16="http://schemas.microsoft.com/office/drawing/2014/main" id="{21906681-A17D-4342-A935-C9D24EC29DE8}"/>
+                <a16:creationId xmlns:a16="http://schemas.microsoft.com/office/drawing/2014/main" id="{FCEDE6BE-6A1A-4383-A575-24595A09B74E}"/>
               </a:ext>
             </a:extLst>
           </p:cNvPr>
@@ -15958,7 +17868,7 @@
           <p:cNvPr id="4" name="">
             <a:extLst xmlns:a="http://schemas.openxmlformats.org/drawingml/2006/main">
               <a:ext uri="{FF2B5EF4-FFF2-40B4-BE49-F238E27FC236}">
-                <a16:creationId xmlns:a16="http://schemas.microsoft.com/office/drawing/2014/main" id="{D19B1330-1F3F-41EC-BED6-19A5B1AABBA4}"/>
+                <a16:creationId xmlns:a16="http://schemas.microsoft.com/office/drawing/2014/main" id="{2733EFBE-65BC-40B8-A943-DCDC243E1D3D}"/>
               </a:ext>
             </a:extLst>
           </p:cNvPr>
@@ -15989,7 +17899,7 @@
           <p:cNvPr id="5" name="실제 요청: TRIAL-001 · Codex CLI 0.154.0 · macOS · 읽기 전용">
             <a:extLst xmlns:a="http://schemas.openxmlformats.org/drawingml/2006/main">
               <a:ext uri="{FF2B5EF4-FFF2-40B4-BE49-F238E27FC236}">
-                <a16:creationId xmlns:a16="http://schemas.microsoft.com/office/drawing/2014/main" id="{21786DBF-6065-432B-A1A0-34CABB2D9EB3}"/>
+                <a16:creationId xmlns:a16="http://schemas.microsoft.com/office/drawing/2014/main" id="{D026C3F0-8544-4F0C-BF64-EFE88820840E}"/>
               </a:ext>
             </a:extLst>
           </p:cNvPr>
@@ -16147,7 +18057,7 @@
           <p:cNvPr id="6" name="우측은 가상 GoogleTest 예시 · 실제 Trial은 Python unittest · 현재 Deskto">
             <a:extLst xmlns:a="http://schemas.openxmlformats.org/drawingml/2006/main">
               <a:ext uri="{FF2B5EF4-FFF2-40B4-BE49-F238E27FC236}">
-                <a16:creationId xmlns:a16="http://schemas.microsoft.com/office/drawing/2014/main" id="{ADAEBC53-A5D0-4A82-BB58-D289BD6C4D33}"/>
+                <a16:creationId xmlns:a16="http://schemas.microsoft.com/office/drawing/2014/main" id="{FE93313C-6B5B-462F-AC1A-CF9EEB1A57C4}"/>
               </a:ext>
             </a:extLst>
           </p:cNvPr>
@@ -16305,7 +18215,7 @@
           <p:cNvPr id="7" name="TRIAL-001의 실제 조사 요청">
             <a:extLst xmlns:a="http://schemas.openxmlformats.org/drawingml/2006/main">
               <a:ext uri="{FF2B5EF4-FFF2-40B4-BE49-F238E27FC236}">
-                <a16:creationId xmlns:a16="http://schemas.microsoft.com/office/drawing/2014/main" id="{06A699CF-BB4E-421F-889F-84B6646F245A}"/>
+                <a16:creationId xmlns:a16="http://schemas.microsoft.com/office/drawing/2014/main" id="{160F0C36-A0F0-4117-99D7-B86AD6B14D5B}"/>
               </a:ext>
             </a:extLst>
           </p:cNvPr>
@@ -16463,7 +18373,7 @@
           <p:cNvPr id="8" name="실패 하나가 있는 상황">
             <a:extLst xmlns:a="http://schemas.openxmlformats.org/drawingml/2006/main">
               <a:ext uri="{FF2B5EF4-FFF2-40B4-BE49-F238E27FC236}">
-                <a16:creationId xmlns:a16="http://schemas.microsoft.com/office/drawing/2014/main" id="{F5CFAD83-65D1-48F9-AC36-89DD8C5E768E}"/>
+                <a16:creationId xmlns:a16="http://schemas.microsoft.com/office/drawing/2014/main" id="{379DFE18-B826-48C7-91CB-77B9E32109C3}"/>
               </a:ext>
             </a:extLst>
           </p:cNvPr>
@@ -16621,7 +18531,7 @@
           <p:cNvPr id="9" name="C++ 설명용 가상 화면">
             <a:extLst xmlns:a="http://schemas.openxmlformats.org/drawingml/2006/main">
               <a:ext uri="{FF2B5EF4-FFF2-40B4-BE49-F238E27FC236}">
-                <a16:creationId xmlns:a16="http://schemas.microsoft.com/office/drawing/2014/main" id="{0E77DEB9-0625-449A-8247-867DE8A7D403}"/>
+                <a16:creationId xmlns:a16="http://schemas.microsoft.com/office/drawing/2014/main" id="{9094B35A-6D1A-4443-83E3-70060759DC6B}"/>
               </a:ext>
             </a:extLst>
           </p:cNvPr>
@@ -16779,7 +18689,7 @@
           <p:cNvPr id="10" name="">
             <a:extLst xmlns:a="http://schemas.openxmlformats.org/drawingml/2006/main">
               <a:ext uri="{FF2B5EF4-FFF2-40B4-BE49-F238E27FC236}">
-                <a16:creationId xmlns:a16="http://schemas.microsoft.com/office/drawing/2014/main" id="{60B1A413-CDA1-4634-8BDC-54920C497E26}"/>
+                <a16:creationId xmlns:a16="http://schemas.microsoft.com/office/drawing/2014/main" id="{75164269-4DE3-4AA2-B9CA-1B10648C0D75}"/>
               </a:ext>
             </a:extLst>
           </p:cNvPr>
@@ -16812,7 +18722,7 @@
           <p:cNvPr id="11" name="조사 요청 · 입력창 형태로 재구성">
             <a:extLst xmlns:a="http://schemas.openxmlformats.org/drawingml/2006/main">
               <a:ext uri="{FF2B5EF4-FFF2-40B4-BE49-F238E27FC236}">
-                <a16:creationId xmlns:a16="http://schemas.microsoft.com/office/drawing/2014/main" id="{A99FBB29-48A5-4B40-80E5-26ED0687010A}"/>
+                <a16:creationId xmlns:a16="http://schemas.microsoft.com/office/drawing/2014/main" id="{1AE06FC2-E939-4D13-B0E9-26C88374646C}"/>
               </a:ext>
             </a:extLst>
           </p:cNvPr>
@@ -16970,7 +18880,7 @@
           <p:cNvPr id="12" name="">
             <a:extLst xmlns:a="http://schemas.openxmlformats.org/drawingml/2006/main">
               <a:ext uri="{FF2B5EF4-FFF2-40B4-BE49-F238E27FC236}">
-                <a16:creationId xmlns:a16="http://schemas.microsoft.com/office/drawing/2014/main" id="{BCB1CA44-A79D-4952-91C3-946184B578D8}"/>
+                <a16:creationId xmlns:a16="http://schemas.microsoft.com/office/drawing/2014/main" id="{C2FCDA20-BA5E-40BC-8A79-C5466EAB1EC3}"/>
               </a:ext>
             </a:extLst>
           </p:cNvPr>
@@ -17001,7 +18911,7 @@
           <p:cNvPr id="13" name="현재 이 저장소에서 테스트 하나가&#10;실패하고 있다. 실패 원인을 조사해줘.&#10;관련 구현과 호출 경로, 실패하는&#10;">
             <a:extLst xmlns:a="http://schemas.openxmlformats.org/drawingml/2006/main">
               <a:ext uri="{FF2B5EF4-FFF2-40B4-BE49-F238E27FC236}">
-                <a16:creationId xmlns:a16="http://schemas.microsoft.com/office/drawing/2014/main" id="{77813C39-740E-4845-96E9-C508582359BC}"/>
+                <a16:creationId xmlns:a16="http://schemas.microsoft.com/office/drawing/2014/main" id="{A3ECDCDD-0FEA-4C1C-8E9D-47F6A480A7B1}"/>
               </a:ext>
             </a:extLst>
           </p:cNvPr>
@@ -17274,7 +19184,7 @@
           <p:cNvPr id="14" name="＋">
             <a:extLst xmlns:a="http://schemas.openxmlformats.org/drawingml/2006/main">
               <a:ext uri="{FF2B5EF4-FFF2-40B4-BE49-F238E27FC236}">
-                <a16:creationId xmlns:a16="http://schemas.microsoft.com/office/drawing/2014/main" id="{279CC94B-FC09-4658-B840-40BA93599E2B}"/>
+                <a16:creationId xmlns:a16="http://schemas.microsoft.com/office/drawing/2014/main" id="{4C4B2A54-FE7C-496C-BF1F-D7DE5AF3B124}"/>
               </a:ext>
             </a:extLst>
           </p:cNvPr>
@@ -17432,7 +19342,7 @@
           <p:cNvPr id="15" name="">
             <a:extLst xmlns:a="http://schemas.openxmlformats.org/drawingml/2006/main">
               <a:ext uri="{FF2B5EF4-FFF2-40B4-BE49-F238E27FC236}">
-                <a16:creationId xmlns:a16="http://schemas.microsoft.com/office/drawing/2014/main" id="{1692CDFB-13D7-454B-89E5-7F8C38824449}"/>
+                <a16:creationId xmlns:a16="http://schemas.microsoft.com/office/drawing/2014/main" id="{999CE4E8-92AB-47D0-82FF-A43C8C03E486}"/>
               </a:ext>
             </a:extLst>
           </p:cNvPr>
@@ -17462,7 +19372,7 @@
           <p:cNvPr id="16" name="↑">
             <a:extLst xmlns:a="http://schemas.openxmlformats.org/drawingml/2006/main">
               <a:ext uri="{FF2B5EF4-FFF2-40B4-BE49-F238E27FC236}">
-                <a16:creationId xmlns:a16="http://schemas.microsoft.com/office/drawing/2014/main" id="{6D6DBF60-3116-4432-8F0B-E01C7B2DA3E0}"/>
+                <a16:creationId xmlns:a16="http://schemas.microsoft.com/office/drawing/2014/main" id="{618CB643-A82B-4094-A695-C15865702554}"/>
               </a:ext>
             </a:extLst>
           </p:cNvPr>
@@ -17620,7 +19530,7 @@
           <p:cNvPr id="17" name="">
             <a:extLst xmlns:a="http://schemas.openxmlformats.org/drawingml/2006/main">
               <a:ext uri="{FF2B5EF4-FFF2-40B4-BE49-F238E27FC236}">
-                <a16:creationId xmlns:a16="http://schemas.microsoft.com/office/drawing/2014/main" id="{C7BFB5FF-721F-4FB8-B606-9481F21C42D4}"/>
+                <a16:creationId xmlns:a16="http://schemas.microsoft.com/office/drawing/2014/main" id="{4E40EA58-95CC-4872-B6D4-5574398B868F}"/>
               </a:ext>
             </a:extLst>
           </p:cNvPr>
@@ -17630,7 +19540,7 @@
           <p:nvPr/>
         </p:nvPicPr>
         <p:blipFill>
-          <a:blip xmlns:r="http://schemas.openxmlformats.org/officeDocument/2006/relationships" xmlns:a="http://schemas.openxmlformats.org/drawingml/2006/main" r:embed="Rde476a5b2b284edf"/>
+          <a:blip xmlns:r="http://schemas.openxmlformats.org/officeDocument/2006/relationships" xmlns:a="http://schemas.openxmlformats.org/drawingml/2006/main" r:embed="Rf6232fdb52d74d1e"/>
           <a:stretch xmlns:a="http://schemas.openxmlformats.org/drawingml/2006/main"/>
         </p:blipFill>
         <p:spPr>
@@ -17648,7 +19558,7 @@
           <p:cNvPr id="18" name="관찰할 것    실패 테스트  ·  관련 구현  ·  호출 경로">
             <a:extLst xmlns:a="http://schemas.openxmlformats.org/drawingml/2006/main">
               <a:ext uri="{FF2B5EF4-FFF2-40B4-BE49-F238E27FC236}">
-                <a16:creationId xmlns:a16="http://schemas.microsoft.com/office/drawing/2014/main" id="{52D0E5A3-BC69-42F4-8F82-2530C3FFE7AA}"/>
+                <a16:creationId xmlns:a16="http://schemas.microsoft.com/office/drawing/2014/main" id="{39F57436-3B1D-4118-85AC-0925EC0CA171}"/>
               </a:ext>
             </a:extLst>
           </p:cNvPr>
@@ -17806,7 +19716,7 @@
           <p:cNvPr id="19" name="Legacy module connection">
             <a:extLst xmlns:a="http://schemas.openxmlformats.org/drawingml/2006/main">
               <a:ext uri="{FF2B5EF4-FFF2-40B4-BE49-F238E27FC236}">
-                <a16:creationId xmlns:a16="http://schemas.microsoft.com/office/drawing/2014/main" id="{7526C435-279A-4166-98F0-7F1E0B9E2B58}"/>
+                <a16:creationId xmlns:a16="http://schemas.microsoft.com/office/drawing/2014/main" id="{C0082E97-2B63-40A3-A034-9438FB542CEF}"/>
               </a:ext>
             </a:extLst>
           </p:cNvPr>
@@ -17962,7 +19872,7 @@
     </p:spTree>
     <p:extLst>
       <p:ext uri="{BB962C8B-B14F-4D97-AF65-F5344CB8AC3E}">
-        <p14:creationId xmlns:p14="http://schemas.microsoft.com/office/powerpoint/2010/main" val="1605278549"/>
+        <p14:creationId xmlns:p14="http://schemas.microsoft.com/office/powerpoint/2010/main" val="1402716363"/>
       </p:ext>
     </p:extLst>
   </p:cSld>
@@ -17993,7 +19903,7 @@
           <p:cNvPr id="46" name="ACT 0  ·  Repository 탐색">
             <a:extLst xmlns:a="http://schemas.openxmlformats.org/drawingml/2006/main">
               <a:ext uri="{FF2B5EF4-FFF2-40B4-BE49-F238E27FC236}">
-                <a16:creationId xmlns:a16="http://schemas.microsoft.com/office/drawing/2014/main" id="{DC2BD79B-D9F3-4738-A38A-B03D400F8FAE}"/>
+                <a16:creationId xmlns:a16="http://schemas.microsoft.com/office/drawing/2014/main" id="{C834C7A5-E362-4045-B8E6-C3C3E0D8CB62}"/>
               </a:ext>
             </a:extLst>
           </p:cNvPr>
@@ -18151,7 +20061,7 @@
           <p:cNvPr id="2" name="S05">
             <a:extLst xmlns:a="http://schemas.openxmlformats.org/drawingml/2006/main">
               <a:ext uri="{FF2B5EF4-FFF2-40B4-BE49-F238E27FC236}">
-                <a16:creationId xmlns:a16="http://schemas.microsoft.com/office/drawing/2014/main" id="{C19B4F78-4695-4D46-840A-C19A8B067ED8}"/>
+                <a16:creationId xmlns:a16="http://schemas.microsoft.com/office/drawing/2014/main" id="{8BCFB7C9-C18F-4C78-AA74-077296C68C9A}"/>
               </a:ext>
             </a:extLst>
           </p:cNvPr>
@@ -18309,7 +20219,7 @@
           <p:cNvPr id="3" name="Agent가 Test와 호출 경로를 찾았다">
             <a:extLst xmlns:a="http://schemas.openxmlformats.org/drawingml/2006/main">
               <a:ext uri="{FF2B5EF4-FFF2-40B4-BE49-F238E27FC236}">
-                <a16:creationId xmlns:a16="http://schemas.microsoft.com/office/drawing/2014/main" id="{59FAEAD4-D870-4247-B0A6-BE3106616AFE}"/>
+                <a16:creationId xmlns:a16="http://schemas.microsoft.com/office/drawing/2014/main" id="{DB1CFCBC-6BAE-4325-B10C-DC28F17CB609}"/>
               </a:ext>
             </a:extLst>
           </p:cNvPr>
@@ -18467,7 +20377,7 @@
           <p:cNvPr id="4" name="">
             <a:extLst xmlns:a="http://schemas.openxmlformats.org/drawingml/2006/main">
               <a:ext uri="{FF2B5EF4-FFF2-40B4-BE49-F238E27FC236}">
-                <a16:creationId xmlns:a16="http://schemas.microsoft.com/office/drawing/2014/main" id="{306217B2-99E4-4C12-A8FC-1658D236DEB7}"/>
+                <a16:creationId xmlns:a16="http://schemas.microsoft.com/office/drawing/2014/main" id="{52740299-EC8D-4E1D-99F3-ACB8ECDF885A}"/>
               </a:ext>
             </a:extLst>
           </p:cNvPr>
@@ -18498,7 +20408,7 @@
           <p:cNvPr id="5" name="TRIAL-001 기록·STATE-00 테스트 재구성  |  Codex CLI 0.154.0 · 읽기 전용">
             <a:extLst xmlns:a="http://schemas.openxmlformats.org/drawingml/2006/main">
               <a:ext uri="{FF2B5EF4-FFF2-40B4-BE49-F238E27FC236}">
-                <a16:creationId xmlns:a16="http://schemas.microsoft.com/office/drawing/2014/main" id="{79DE35BE-295C-4EE8-9E28-1545BEE48238}"/>
+                <a16:creationId xmlns:a16="http://schemas.microsoft.com/office/drawing/2014/main" id="{94EB4392-AA9F-457D-AAC4-C6910A255997}"/>
               </a:ext>
             </a:extLst>
           </p:cNvPr>
@@ -18656,7 +20566,7 @@
           <p:cNvPr id="6" name="실제 실행 화면이 아님 · 이 조사에서는 코드 수정 없음 · 현재 Desktop 동작 미검증">
             <a:extLst xmlns:a="http://schemas.openxmlformats.org/drawingml/2006/main">
               <a:ext uri="{FF2B5EF4-FFF2-40B4-BE49-F238E27FC236}">
-                <a16:creationId xmlns:a16="http://schemas.microsoft.com/office/drawing/2014/main" id="{35E0A995-0106-4127-8F14-56C888EE1352}"/>
+                <a16:creationId xmlns:a16="http://schemas.microsoft.com/office/drawing/2014/main" id="{B8940AC8-401B-430A-93F3-925C2016EDE4}"/>
               </a:ext>
             </a:extLst>
           </p:cNvPr>
@@ -18814,7 +20724,7 @@
           <p:cNvPr id="7" name="의도한 폭과 실제로 포함된 열 수가 달랐다">
             <a:extLst xmlns:a="http://schemas.openxmlformats.org/drawingml/2006/main">
               <a:ext uri="{FF2B5EF4-FFF2-40B4-BE49-F238E27FC236}">
-                <a16:creationId xmlns:a16="http://schemas.microsoft.com/office/drawing/2014/main" id="{E2D4030B-61C1-4FB8-91FA-D4AA32E30BCE}"/>
+                <a16:creationId xmlns:a16="http://schemas.microsoft.com/office/drawing/2014/main" id="{57F96365-4F5C-46F0-A36D-114FCF95DE57}"/>
               </a:ext>
             </a:extLst>
           </p:cNvPr>
@@ -18972,7 +20882,7 @@
           <p:cNvPr id="8" name="crop(image, 1, 3)">
             <a:extLst xmlns:a="http://schemas.openxmlformats.org/drawingml/2006/main">
               <a:ext uri="{FF2B5EF4-FFF2-40B4-BE49-F238E27FC236}">
-                <a16:creationId xmlns:a16="http://schemas.microsoft.com/office/drawing/2014/main" id="{498981F4-6971-49D3-ACBE-6835F8FD247B}"/>
+                <a16:creationId xmlns:a16="http://schemas.microsoft.com/office/drawing/2014/main" id="{C4758CDB-F234-46FD-9C90-5D1F5CCC98B7}"/>
               </a:ext>
             </a:extLst>
           </p:cNvPr>
@@ -19130,7 +21040,7 @@
           <p:cNvPr id="9" name="명세: 끝 좌표 3은 제외">
             <a:extLst xmlns:a="http://schemas.openxmlformats.org/drawingml/2006/main">
               <a:ext uri="{FF2B5EF4-FFF2-40B4-BE49-F238E27FC236}">
-                <a16:creationId xmlns:a16="http://schemas.microsoft.com/office/drawing/2014/main" id="{B63E3A7C-57C9-4843-859C-64AE8AE042BC}"/>
+                <a16:creationId xmlns:a16="http://schemas.microsoft.com/office/drawing/2014/main" id="{CBCB80CC-A3F1-4291-903C-111F25247294}"/>
               </a:ext>
             </a:extLst>
           </p:cNvPr>
@@ -19288,7 +21198,7 @@
           <p:cNvPr id="10" name="입력">
             <a:extLst xmlns:a="http://schemas.openxmlformats.org/drawingml/2006/main">
               <a:ext uri="{FF2B5EF4-FFF2-40B4-BE49-F238E27FC236}">
-                <a16:creationId xmlns:a16="http://schemas.microsoft.com/office/drawing/2014/main" id="{538C526A-D4A3-4C04-BABE-28263E82BD64}"/>
+                <a16:creationId xmlns:a16="http://schemas.microsoft.com/office/drawing/2014/main" id="{08BFE2F4-30EF-45D6-8096-81D560B142CB}"/>
               </a:ext>
             </a:extLst>
           </p:cNvPr>
@@ -19446,7 +21356,7 @@
           <p:cNvPr id="11" name="0">
             <a:extLst xmlns:a="http://schemas.openxmlformats.org/drawingml/2006/main">
               <a:ext uri="{FF2B5EF4-FFF2-40B4-BE49-F238E27FC236}">
-                <a16:creationId xmlns:a16="http://schemas.microsoft.com/office/drawing/2014/main" id="{E782B33B-AF4C-4A12-8B58-700284B63761}"/>
+                <a16:creationId xmlns:a16="http://schemas.microsoft.com/office/drawing/2014/main" id="{DAC667B4-48B7-4C87-8DAD-4F20E08EAAEE}"/>
               </a:ext>
             </a:extLst>
           </p:cNvPr>
@@ -19604,7 +21514,7 @@
           <p:cNvPr id="12" name="1">
             <a:extLst xmlns:a="http://schemas.openxmlformats.org/drawingml/2006/main">
               <a:ext uri="{FF2B5EF4-FFF2-40B4-BE49-F238E27FC236}">
-                <a16:creationId xmlns:a16="http://schemas.microsoft.com/office/drawing/2014/main" id="{3DD12F3D-142B-49D9-9484-126F218CD6CF}"/>
+                <a16:creationId xmlns:a16="http://schemas.microsoft.com/office/drawing/2014/main" id="{BABB1379-32B6-48F6-BA5E-7D8EE5F77031}"/>
               </a:ext>
             </a:extLst>
           </p:cNvPr>
@@ -19762,7 +21672,7 @@
           <p:cNvPr id="13" name="2">
             <a:extLst xmlns:a="http://schemas.openxmlformats.org/drawingml/2006/main">
               <a:ext uri="{FF2B5EF4-FFF2-40B4-BE49-F238E27FC236}">
-                <a16:creationId xmlns:a16="http://schemas.microsoft.com/office/drawing/2014/main" id="{B24B656B-C929-409B-A04B-3BBB68C1F0FC}"/>
+                <a16:creationId xmlns:a16="http://schemas.microsoft.com/office/drawing/2014/main" id="{A57C8A7C-618D-4211-AA32-51F30C17CDBD}"/>
               </a:ext>
             </a:extLst>
           </p:cNvPr>
@@ -19920,7 +21830,7 @@
           <p:cNvPr id="14" name="3">
             <a:extLst xmlns:a="http://schemas.openxmlformats.org/drawingml/2006/main">
               <a:ext uri="{FF2B5EF4-FFF2-40B4-BE49-F238E27FC236}">
-                <a16:creationId xmlns:a16="http://schemas.microsoft.com/office/drawing/2014/main" id="{2E71482E-6EB2-4D57-8F7F-9DD47D1D1444}"/>
+                <a16:creationId xmlns:a16="http://schemas.microsoft.com/office/drawing/2014/main" id="{BFBA8208-767F-46E4-9296-6A8AB2FD52CD}"/>
               </a:ext>
             </a:extLst>
           </p:cNvPr>
@@ -20078,7 +21988,7 @@
           <p:cNvPr id="15" name="">
             <a:extLst xmlns:a="http://schemas.openxmlformats.org/drawingml/2006/main">
               <a:ext uri="{FF2B5EF4-FFF2-40B4-BE49-F238E27FC236}">
-                <a16:creationId xmlns:a16="http://schemas.microsoft.com/office/drawing/2014/main" id="{41778DFB-274B-45A9-BA2B-CF14509CD3F1}"/>
+                <a16:creationId xmlns:a16="http://schemas.microsoft.com/office/drawing/2014/main" id="{CF78BC2F-98E6-4AD1-9B54-6243CA8A29F4}"/>
               </a:ext>
             </a:extLst>
           </p:cNvPr>
@@ -20111,7 +22021,7 @@
           <p:cNvPr id="16" name="1">
             <a:extLst xmlns:a="http://schemas.openxmlformats.org/drawingml/2006/main">
               <a:ext uri="{FF2B5EF4-FFF2-40B4-BE49-F238E27FC236}">
-                <a16:creationId xmlns:a16="http://schemas.microsoft.com/office/drawing/2014/main" id="{178EE6E5-272E-46F5-A060-57B55F16D7F5}"/>
+                <a16:creationId xmlns:a16="http://schemas.microsoft.com/office/drawing/2014/main" id="{FFC458B6-6064-48BC-BE74-FCD77E16164A}"/>
               </a:ext>
             </a:extLst>
           </p:cNvPr>
@@ -20269,7 +22179,7 @@
           <p:cNvPr id="17" name="">
             <a:extLst xmlns:a="http://schemas.openxmlformats.org/drawingml/2006/main">
               <a:ext uri="{FF2B5EF4-FFF2-40B4-BE49-F238E27FC236}">
-                <a16:creationId xmlns:a16="http://schemas.microsoft.com/office/drawing/2014/main" id="{C5F82D9E-3280-4ACD-A965-013A1419BE35}"/>
+                <a16:creationId xmlns:a16="http://schemas.microsoft.com/office/drawing/2014/main" id="{CE053E59-DBB8-40CB-8D56-80868CF72072}"/>
               </a:ext>
             </a:extLst>
           </p:cNvPr>
@@ -20302,7 +22212,7 @@
           <p:cNvPr id="18" name="2">
             <a:extLst xmlns:a="http://schemas.openxmlformats.org/drawingml/2006/main">
               <a:ext uri="{FF2B5EF4-FFF2-40B4-BE49-F238E27FC236}">
-                <a16:creationId xmlns:a16="http://schemas.microsoft.com/office/drawing/2014/main" id="{5C857C82-7B0C-4328-A945-3C8A8DAB0104}"/>
+                <a16:creationId xmlns:a16="http://schemas.microsoft.com/office/drawing/2014/main" id="{2BE87B18-F4DD-4EB1-AF2B-B78B00EB0D6C}"/>
               </a:ext>
             </a:extLst>
           </p:cNvPr>
@@ -20460,7 +22370,7 @@
           <p:cNvPr id="19" name="">
             <a:extLst xmlns:a="http://schemas.openxmlformats.org/drawingml/2006/main">
               <a:ext uri="{FF2B5EF4-FFF2-40B4-BE49-F238E27FC236}">
-                <a16:creationId xmlns:a16="http://schemas.microsoft.com/office/drawing/2014/main" id="{ADEBB662-A364-469E-AECD-0DD8AB7B43C0}"/>
+                <a16:creationId xmlns:a16="http://schemas.microsoft.com/office/drawing/2014/main" id="{585E5E3C-1927-4F44-937C-709C1767D216}"/>
               </a:ext>
             </a:extLst>
           </p:cNvPr>
@@ -20493,7 +22403,7 @@
           <p:cNvPr id="20" name="3">
             <a:extLst xmlns:a="http://schemas.openxmlformats.org/drawingml/2006/main">
               <a:ext uri="{FF2B5EF4-FFF2-40B4-BE49-F238E27FC236}">
-                <a16:creationId xmlns:a16="http://schemas.microsoft.com/office/drawing/2014/main" id="{C5F9DAEF-C969-4C18-B38C-AB8ACF9840FD}"/>
+                <a16:creationId xmlns:a16="http://schemas.microsoft.com/office/drawing/2014/main" id="{13AD42FC-9E1A-483C-90E0-CC99C2EFD2F4}"/>
               </a:ext>
             </a:extLst>
           </p:cNvPr>
@@ -20651,7 +22561,7 @@
           <p:cNvPr id="21" name="">
             <a:extLst xmlns:a="http://schemas.openxmlformats.org/drawingml/2006/main">
               <a:ext uri="{FF2B5EF4-FFF2-40B4-BE49-F238E27FC236}">
-                <a16:creationId xmlns:a16="http://schemas.microsoft.com/office/drawing/2014/main" id="{1E18949E-AD12-4FE1-8484-E7BB1295F7F9}"/>
+                <a16:creationId xmlns:a16="http://schemas.microsoft.com/office/drawing/2014/main" id="{FC3DF84A-1638-43C6-AC40-579FE22659B3}"/>
               </a:ext>
             </a:extLst>
           </p:cNvPr>
@@ -20684,7 +22594,7 @@
           <p:cNvPr id="22" name="4">
             <a:extLst xmlns:a="http://schemas.openxmlformats.org/drawingml/2006/main">
               <a:ext uri="{FF2B5EF4-FFF2-40B4-BE49-F238E27FC236}">
-                <a16:creationId xmlns:a16="http://schemas.microsoft.com/office/drawing/2014/main" id="{26D8099E-5E90-4654-8C8C-FFD41B8128FD}"/>
+                <a16:creationId xmlns:a16="http://schemas.microsoft.com/office/drawing/2014/main" id="{1232A90E-9934-44C8-BA0D-A393544C5E62}"/>
               </a:ext>
             </a:extLst>
           </p:cNvPr>
@@ -20842,7 +22752,7 @@
           <p:cNvPr id="23" name="첫 행만 표시">
             <a:extLst xmlns:a="http://schemas.openxmlformats.org/drawingml/2006/main">
               <a:ext uri="{FF2B5EF4-FFF2-40B4-BE49-F238E27FC236}">
-                <a16:creationId xmlns:a16="http://schemas.microsoft.com/office/drawing/2014/main" id="{3443AA58-37E2-4BDC-A872-71F5C46EB833}"/>
+                <a16:creationId xmlns:a16="http://schemas.microsoft.com/office/drawing/2014/main" id="{FC91A4D9-8885-4CB2-B25A-EA3D67831F51}"/>
               </a:ext>
             </a:extLst>
           </p:cNvPr>
@@ -21000,7 +22910,7 @@
           <p:cNvPr id="24" name="명세 · 폭 2">
             <a:extLst xmlns:a="http://schemas.openxmlformats.org/drawingml/2006/main">
               <a:ext uri="{FF2B5EF4-FFF2-40B4-BE49-F238E27FC236}">
-                <a16:creationId xmlns:a16="http://schemas.microsoft.com/office/drawing/2014/main" id="{2C2C4B3C-2C22-4BAD-852D-00BB73C625AF}"/>
+                <a16:creationId xmlns:a16="http://schemas.microsoft.com/office/drawing/2014/main" id="{BF77136E-70B4-45C3-ADE7-D37FFA6A2056}"/>
               </a:ext>
             </a:extLst>
           </p:cNvPr>
@@ -21158,7 +23068,7 @@
           <p:cNvPr id="25" name="구현 · 폭 3">
             <a:extLst xmlns:a="http://schemas.openxmlformats.org/drawingml/2006/main">
               <a:ext uri="{FF2B5EF4-FFF2-40B4-BE49-F238E27FC236}">
-                <a16:creationId xmlns:a16="http://schemas.microsoft.com/office/drawing/2014/main" id="{4EB5F597-62C6-48F6-8AED-DB075F1820DD}"/>
+                <a16:creationId xmlns:a16="http://schemas.microsoft.com/office/drawing/2014/main" id="{F5BE13EA-3783-4BF8-87D0-A7EB0F61065D}"/>
               </a:ext>
             </a:extLst>
           </p:cNvPr>
@@ -21316,7 +23226,7 @@
           <p:cNvPr id="26" name="">
             <a:extLst xmlns:a="http://schemas.openxmlformats.org/drawingml/2006/main">
               <a:ext uri="{FF2B5EF4-FFF2-40B4-BE49-F238E27FC236}">
-                <a16:creationId xmlns:a16="http://schemas.microsoft.com/office/drawing/2014/main" id="{AC620F3F-1B1D-45BA-9880-C871E874BBCC}"/>
+                <a16:creationId xmlns:a16="http://schemas.microsoft.com/office/drawing/2014/main" id="{4AF06385-C433-46EE-88E5-6B560984BA77}"/>
               </a:ext>
             </a:extLst>
           </p:cNvPr>
@@ -21349,7 +23259,7 @@
           <p:cNvPr id="27" name="2">
             <a:extLst xmlns:a="http://schemas.openxmlformats.org/drawingml/2006/main">
               <a:ext uri="{FF2B5EF4-FFF2-40B4-BE49-F238E27FC236}">
-                <a16:creationId xmlns:a16="http://schemas.microsoft.com/office/drawing/2014/main" id="{4AC235C5-7E3B-4D2A-9A3D-9E9400D5CDA6}"/>
+                <a16:creationId xmlns:a16="http://schemas.microsoft.com/office/drawing/2014/main" id="{EC63165C-3FF5-4F02-8983-2EC95A083788}"/>
               </a:ext>
             </a:extLst>
           </p:cNvPr>
@@ -21507,7 +23417,7 @@
           <p:cNvPr id="28" name="">
             <a:extLst xmlns:a="http://schemas.openxmlformats.org/drawingml/2006/main">
               <a:ext uri="{FF2B5EF4-FFF2-40B4-BE49-F238E27FC236}">
-                <a16:creationId xmlns:a16="http://schemas.microsoft.com/office/drawing/2014/main" id="{2CCDEB61-7809-4971-9574-7D3805608225}"/>
+                <a16:creationId xmlns:a16="http://schemas.microsoft.com/office/drawing/2014/main" id="{EEB16387-D5AB-473A-9416-CED1FDF06DDE}"/>
               </a:ext>
             </a:extLst>
           </p:cNvPr>
@@ -21540,7 +23450,7 @@
           <p:cNvPr id="29" name="3">
             <a:extLst xmlns:a="http://schemas.openxmlformats.org/drawingml/2006/main">
               <a:ext uri="{FF2B5EF4-FFF2-40B4-BE49-F238E27FC236}">
-                <a16:creationId xmlns:a16="http://schemas.microsoft.com/office/drawing/2014/main" id="{F99720E5-0C9A-49F4-8294-CA423E65FEFE}"/>
+                <a16:creationId xmlns:a16="http://schemas.microsoft.com/office/drawing/2014/main" id="{6451D136-2FB9-4740-8200-98BD6F3C841E}"/>
               </a:ext>
             </a:extLst>
           </p:cNvPr>
@@ -21698,7 +23608,7 @@
           <p:cNvPr id="30" name="">
             <a:extLst xmlns:a="http://schemas.openxmlformats.org/drawingml/2006/main">
               <a:ext uri="{FF2B5EF4-FFF2-40B4-BE49-F238E27FC236}">
-                <a16:creationId xmlns:a16="http://schemas.microsoft.com/office/drawing/2014/main" id="{311A3FC0-841D-4E8F-9089-2AF50A4742A2}"/>
+                <a16:creationId xmlns:a16="http://schemas.microsoft.com/office/drawing/2014/main" id="{A2BD72C0-C34A-408B-989D-6A795449492D}"/>
               </a:ext>
             </a:extLst>
           </p:cNvPr>
@@ -21731,7 +23641,7 @@
           <p:cNvPr id="31" name="2">
             <a:extLst xmlns:a="http://schemas.openxmlformats.org/drawingml/2006/main">
               <a:ext uri="{FF2B5EF4-FFF2-40B4-BE49-F238E27FC236}">
-                <a16:creationId xmlns:a16="http://schemas.microsoft.com/office/drawing/2014/main" id="{8539A937-C5D8-43D6-B9E7-B71C49E84767}"/>
+                <a16:creationId xmlns:a16="http://schemas.microsoft.com/office/drawing/2014/main" id="{664988CD-B712-4B67-A4D2-3B9BA0180E01}"/>
               </a:ext>
             </a:extLst>
           </p:cNvPr>
@@ -21889,7 +23799,7 @@
           <p:cNvPr id="32" name="">
             <a:extLst xmlns:a="http://schemas.openxmlformats.org/drawingml/2006/main">
               <a:ext uri="{FF2B5EF4-FFF2-40B4-BE49-F238E27FC236}">
-                <a16:creationId xmlns:a16="http://schemas.microsoft.com/office/drawing/2014/main" id="{1DC7DC13-504F-4D2D-9F61-8597494C864C}"/>
+                <a16:creationId xmlns:a16="http://schemas.microsoft.com/office/drawing/2014/main" id="{E654034C-A5BF-470E-A9FB-7A7DF5216C52}"/>
               </a:ext>
             </a:extLst>
           </p:cNvPr>
@@ -21922,7 +23832,7 @@
           <p:cNvPr id="33" name="3">
             <a:extLst xmlns:a="http://schemas.openxmlformats.org/drawingml/2006/main">
               <a:ext uri="{FF2B5EF4-FFF2-40B4-BE49-F238E27FC236}">
-                <a16:creationId xmlns:a16="http://schemas.microsoft.com/office/drawing/2014/main" id="{866E578A-C212-4D2F-999C-ED66E546E76F}"/>
+                <a16:creationId xmlns:a16="http://schemas.microsoft.com/office/drawing/2014/main" id="{898F3999-7D6F-4909-99A8-02802AD5259D}"/>
               </a:ext>
             </a:extLst>
           </p:cNvPr>
@@ -22080,7 +23990,7 @@
           <p:cNvPr id="34" name="">
             <a:extLst xmlns:a="http://schemas.openxmlformats.org/drawingml/2006/main">
               <a:ext uri="{FF2B5EF4-FFF2-40B4-BE49-F238E27FC236}">
-                <a16:creationId xmlns:a16="http://schemas.microsoft.com/office/drawing/2014/main" id="{198BE7B3-0497-42A1-A0FD-972CD3DE8142}"/>
+                <a16:creationId xmlns:a16="http://schemas.microsoft.com/office/drawing/2014/main" id="{7CD64B91-2680-43E3-BD9A-2CB69B4C519D}"/>
               </a:ext>
             </a:extLst>
           </p:cNvPr>
@@ -22113,7 +24023,7 @@
           <p:cNvPr id="35" name="4">
             <a:extLst xmlns:a="http://schemas.openxmlformats.org/drawingml/2006/main">
               <a:ext uri="{FF2B5EF4-FFF2-40B4-BE49-F238E27FC236}">
-                <a16:creationId xmlns:a16="http://schemas.microsoft.com/office/drawing/2014/main" id="{93E476CC-AF3B-418D-893A-A3145CB7DBD1}"/>
+                <a16:creationId xmlns:a16="http://schemas.microsoft.com/office/drawing/2014/main" id="{826761C1-919A-4109-8950-DA1D55E76A4D}"/>
               </a:ext>
             </a:extLst>
           </p:cNvPr>
@@ -22271,7 +24181,7 @@
           <p:cNvPr id="36" name="명세와 구현의 범위 불일치">
             <a:extLst xmlns:a="http://schemas.openxmlformats.org/drawingml/2006/main">
               <a:ext uri="{FF2B5EF4-FFF2-40B4-BE49-F238E27FC236}">
-                <a16:creationId xmlns:a16="http://schemas.microsoft.com/office/drawing/2014/main" id="{A531379E-0EF8-460A-B8CF-2DE3986206EC}"/>
+                <a16:creationId xmlns:a16="http://schemas.microsoft.com/office/drawing/2014/main" id="{28FDC395-88F0-4B55-91C0-B7D6196BE3E5}"/>
               </a:ext>
             </a:extLst>
           </p:cNvPr>
@@ -22429,7 +24339,7 @@
           <p:cNvPr id="37" name="">
             <a:extLst xmlns:a="http://schemas.openxmlformats.org/drawingml/2006/main">
               <a:ext uri="{FF2B5EF4-FFF2-40B4-BE49-F238E27FC236}">
-                <a16:creationId xmlns:a16="http://schemas.microsoft.com/office/drawing/2014/main" id="{E58C50D0-C930-42DA-8988-4AFCB155FFBB}"/>
+                <a16:creationId xmlns:a16="http://schemas.microsoft.com/office/drawing/2014/main" id="{9218C785-6227-41DD-BC85-069AFA8FBE12}"/>
               </a:ext>
             </a:extLst>
           </p:cNvPr>
@@ -22460,7 +24370,7 @@
           <p:cNvPr id="38" name="조사에서 연결한 근거">
             <a:extLst xmlns:a="http://schemas.openxmlformats.org/drawingml/2006/main">
               <a:ext uri="{FF2B5EF4-FFF2-40B4-BE49-F238E27FC236}">
-                <a16:creationId xmlns:a16="http://schemas.microsoft.com/office/drawing/2014/main" id="{2FBDC8C5-AF33-461E-80A7-7C323DDEF9BB}"/>
+                <a16:creationId xmlns:a16="http://schemas.microsoft.com/office/drawing/2014/main" id="{FC9778A8-C2E3-4D67-9B62-630A21FF8A0F}"/>
               </a:ext>
             </a:extLst>
           </p:cNvPr>
@@ -22618,7 +24528,7 @@
           <p:cNvPr id="39" name="01  실패 테스트">
             <a:extLst xmlns:a="http://schemas.openxmlformats.org/drawingml/2006/main">
               <a:ext uri="{FF2B5EF4-FFF2-40B4-BE49-F238E27FC236}">
-                <a16:creationId xmlns:a16="http://schemas.microsoft.com/office/drawing/2014/main" id="{44FBF53B-E50F-4FE9-85E0-53CCB80D2B82}"/>
+                <a16:creationId xmlns:a16="http://schemas.microsoft.com/office/drawing/2014/main" id="{85F9322F-3B38-4B3F-B23A-4B3DC6C52C80}"/>
               </a:ext>
             </a:extLst>
           </p:cNvPr>
@@ -22776,7 +24686,7 @@
           <p:cNvPr id="40" name="test_crop_excludes_&#10;end_coordinate">
             <a:extLst xmlns:a="http://schemas.openxmlformats.org/drawingml/2006/main">
               <a:ext uri="{FF2B5EF4-FFF2-40B4-BE49-F238E27FC236}">
-                <a16:creationId xmlns:a16="http://schemas.microsoft.com/office/drawing/2014/main" id="{EA51D77A-B59E-4F97-A1DB-4D55515D8C6B}"/>
+                <a16:creationId xmlns:a16="http://schemas.microsoft.com/office/drawing/2014/main" id="{3A3152DF-EB04-4966-8B53-682AF1232B6F}"/>
               </a:ext>
             </a:extLst>
           </p:cNvPr>
@@ -22957,7 +24867,7 @@
           <p:cNvPr id="41" name="02  제품의 호출 경로">
             <a:extLst xmlns:a="http://schemas.openxmlformats.org/drawingml/2006/main">
               <a:ext uri="{FF2B5EF4-FFF2-40B4-BE49-F238E27FC236}">
-                <a16:creationId xmlns:a16="http://schemas.microsoft.com/office/drawing/2014/main" id="{8C4BBD1B-5662-4408-B29C-15B1727B426B}"/>
+                <a16:creationId xmlns:a16="http://schemas.microsoft.com/office/drawing/2014/main" id="{C8722539-4707-446B-BAAB-0CFFD452E0EA}"/>
               </a:ext>
             </a:extLst>
           </p:cNvPr>
@@ -23115,7 +25025,7 @@
           <p:cNvPr id="42" name="cli.main → process_image → crop">
             <a:extLst xmlns:a="http://schemas.openxmlformats.org/drawingml/2006/main">
               <a:ext uri="{FF2B5EF4-FFF2-40B4-BE49-F238E27FC236}">
-                <a16:creationId xmlns:a16="http://schemas.microsoft.com/office/drawing/2014/main" id="{671ECE44-AD9E-4C0C-8F42-0D47A300A72F}"/>
+                <a16:creationId xmlns:a16="http://schemas.microsoft.com/office/drawing/2014/main" id="{E610DB8C-B894-4AC2-953E-DF21F47D020B}"/>
               </a:ext>
             </a:extLst>
           </p:cNvPr>
@@ -23273,7 +25183,7 @@
           <p:cNvPr id="43" name="03  끝 좌표까지 포함한 구현">
             <a:extLst xmlns:a="http://schemas.openxmlformats.org/drawingml/2006/main">
               <a:ext uri="{FF2B5EF4-FFF2-40B4-BE49-F238E27FC236}">
-                <a16:creationId xmlns:a16="http://schemas.microsoft.com/office/drawing/2014/main" id="{A3160976-531B-487E-8338-CA038AA5DD30}"/>
+                <a16:creationId xmlns:a16="http://schemas.microsoft.com/office/drawing/2014/main" id="{9AA42457-15C6-49F0-AACF-35660F2442D6}"/>
               </a:ext>
             </a:extLst>
           </p:cNvPr>
@@ -23431,7 +25341,7 @@
           <p:cNvPr id="44" name="row[x_start : x_end + 1]">
             <a:extLst xmlns:a="http://schemas.openxmlformats.org/drawingml/2006/main">
               <a:ext uri="{FF2B5EF4-FFF2-40B4-BE49-F238E27FC236}">
-                <a16:creationId xmlns:a16="http://schemas.microsoft.com/office/drawing/2014/main" id="{2AAC435E-7E47-4FE0-AF8D-BFA47598FC0C}"/>
+                <a16:creationId xmlns:a16="http://schemas.microsoft.com/office/drawing/2014/main" id="{FA40696C-A318-42DF-93ED-942421C4470D}"/>
               </a:ext>
             </a:extLst>
           </p:cNvPr>
@@ -23589,7 +25499,7 @@
           <p:cNvPr id="45" name="Legacy module connection">
             <a:extLst xmlns:a="http://schemas.openxmlformats.org/drawingml/2006/main">
               <a:ext uri="{FF2B5EF4-FFF2-40B4-BE49-F238E27FC236}">
-                <a16:creationId xmlns:a16="http://schemas.microsoft.com/office/drawing/2014/main" id="{DA0EF555-8486-4C65-944F-4344EA0EFCD9}"/>
+                <a16:creationId xmlns:a16="http://schemas.microsoft.com/office/drawing/2014/main" id="{C70F7B31-DA0A-487F-AF4F-A7910055C09B}"/>
               </a:ext>
             </a:extLst>
           </p:cNvPr>
@@ -23745,7 +25655,7 @@
     </p:spTree>
     <p:extLst>
       <p:ext uri="{BB962C8B-B14F-4D97-AF65-F5344CB8AC3E}">
-        <p14:creationId xmlns:p14="http://schemas.microsoft.com/office/powerpoint/2010/main" val="1040626971"/>
+        <p14:creationId xmlns:p14="http://schemas.microsoft.com/office/powerpoint/2010/main" val="1153529882"/>
       </p:ext>
     </p:extLst>
   </p:cSld>
@@ -23776,7 +25686,7 @@
           <p:cNvPr id="21" name="ACT 0 · 전달한 Context와 실행 환경">
             <a:extLst xmlns:a="http://schemas.openxmlformats.org/drawingml/2006/main">
               <a:ext uri="{FF2B5EF4-FFF2-40B4-BE49-F238E27FC236}">
-                <a16:creationId xmlns:a16="http://schemas.microsoft.com/office/drawing/2014/main" id="{69866F0E-E51E-44E9-9A37-3BCEAF6D441B}"/>
+                <a16:creationId xmlns:a16="http://schemas.microsoft.com/office/drawing/2014/main" id="{61210B62-88A5-4475-843F-C14BE4614C71}"/>
               </a:ext>
             </a:extLst>
           </p:cNvPr>
@@ -23934,7 +25844,7 @@
           <p:cNvPr id="2" name="S06">
             <a:extLst xmlns:a="http://schemas.openxmlformats.org/drawingml/2006/main">
               <a:ext uri="{FF2B5EF4-FFF2-40B4-BE49-F238E27FC236}">
-                <a16:creationId xmlns:a16="http://schemas.microsoft.com/office/drawing/2014/main" id="{90DF5958-A4C1-441C-9EC6-7384845EFBA7}"/>
+                <a16:creationId xmlns:a16="http://schemas.microsoft.com/office/drawing/2014/main" id="{DA2A759F-02F9-4BCA-882B-251ADB00C6E3}"/>
               </a:ext>
             </a:extLst>
           </p:cNvPr>
@@ -24092,7 +26002,7 @@
           <p:cNvPr id="3" name="관찰 결과와 실행 제한을 분리한다">
             <a:extLst xmlns:a="http://schemas.openxmlformats.org/drawingml/2006/main">
               <a:ext uri="{FF2B5EF4-FFF2-40B4-BE49-F238E27FC236}">
-                <a16:creationId xmlns:a16="http://schemas.microsoft.com/office/drawing/2014/main" id="{8611F30E-3F1D-4FAC-A56F-19CE90A14B3E}"/>
+                <a16:creationId xmlns:a16="http://schemas.microsoft.com/office/drawing/2014/main" id="{9E3C7B79-5D50-4842-9044-CABBCC007C31}"/>
               </a:ext>
             </a:extLst>
           </p:cNvPr>
@@ -24250,7 +26160,7 @@
           <p:cNvPr id="4" name="">
             <a:extLst xmlns:a="http://schemas.openxmlformats.org/drawingml/2006/main">
               <a:ext uri="{FF2B5EF4-FFF2-40B4-BE49-F238E27FC236}">
-                <a16:creationId xmlns:a16="http://schemas.microsoft.com/office/drawing/2014/main" id="{EC791289-02AC-4D8E-B161-BE506FBB4C78}"/>
+                <a16:creationId xmlns:a16="http://schemas.microsoft.com/office/drawing/2014/main" id="{22B14B5E-B87B-4ABC-8259-7CD35B296177}"/>
               </a:ext>
             </a:extLst>
           </p:cNvPr>
@@ -24281,7 +26191,7 @@
           <p:cNvPr id="5" name="TRIAL-001 관찰 + Context 범위의 교육용 해석 · Codex CLI 0.154.0 · 읽기 전">
             <a:extLst xmlns:a="http://schemas.openxmlformats.org/drawingml/2006/main">
               <a:ext uri="{FF2B5EF4-FFF2-40B4-BE49-F238E27FC236}">
-                <a16:creationId xmlns:a16="http://schemas.microsoft.com/office/drawing/2014/main" id="{F4118E60-08BA-4532-98C5-AE1FDF7F9636}"/>
+                <a16:creationId xmlns:a16="http://schemas.microsoft.com/office/drawing/2014/main" id="{356C8221-9D10-489F-8B85-965EA6526EF6}"/>
               </a:ext>
             </a:extLst>
           </p:cNvPr>
@@ -24439,7 +26349,7 @@
           <p:cNvPr id="6" name="Chatbot과의 비교 실험 아님 · 이 Trial에서 코드 수정·읽기 전용 권한 해제 없음">
             <a:extLst xmlns:a="http://schemas.openxmlformats.org/drawingml/2006/main">
               <a:ext uri="{FF2B5EF4-FFF2-40B4-BE49-F238E27FC236}">
-                <a16:creationId xmlns:a16="http://schemas.microsoft.com/office/drawing/2014/main" id="{18EB809A-A64E-421C-941C-EE4095C10C63}"/>
+                <a16:creationId xmlns:a16="http://schemas.microsoft.com/office/drawing/2014/main" id="{CDFD7823-FA3F-4C40-A47C-D88E0F337DA7}"/>
               </a:ext>
             </a:extLst>
           </p:cNvPr>
@@ -24597,7 +26507,7 @@
           <p:cNvPr id="7" name="Chatbot에 코드·명세만 골라 넣었다면?">
             <a:extLst xmlns:a="http://schemas.openxmlformats.org/drawingml/2006/main">
               <a:ext uri="{FF2B5EF4-FFF2-40B4-BE49-F238E27FC236}">
-                <a16:creationId xmlns:a16="http://schemas.microsoft.com/office/drawing/2014/main" id="{B456C658-A256-4CFB-B16B-B61654CB0B69}"/>
+                <a16:creationId xmlns:a16="http://schemas.microsoft.com/office/drawing/2014/main" id="{98C8FC19-DC6A-41D8-82B1-2936E7916AF8}"/>
               </a:ext>
             </a:extLst>
           </p:cNvPr>
@@ -24755,7 +26665,7 @@
           <p:cNvPr id="8" name="코드 Context로 논의할 수 있는 부분">
             <a:extLst xmlns:a="http://schemas.openxmlformats.org/drawingml/2006/main">
               <a:ext uri="{FF2B5EF4-FFF2-40B4-BE49-F238E27FC236}">
-                <a16:creationId xmlns:a16="http://schemas.microsoft.com/office/drawing/2014/main" id="{48D3655A-6360-45DA-ACFE-ACF988089D75}"/>
+                <a16:creationId xmlns:a16="http://schemas.microsoft.com/office/drawing/2014/main" id="{721EEB54-6497-40CF-8B46-A9EF4AA174AC}"/>
               </a:ext>
             </a:extLst>
           </p:cNvPr>
@@ -24913,7 +26823,7 @@
           <p:cNvPr id="9" name="함께 전달하지 않은 실행 환경">
             <a:extLst xmlns:a="http://schemas.openxmlformats.org/drawingml/2006/main">
               <a:ext uri="{FF2B5EF4-FFF2-40B4-BE49-F238E27FC236}">
-                <a16:creationId xmlns:a16="http://schemas.microsoft.com/office/drawing/2014/main" id="{27E87465-2317-4C2F-93F9-6514F7D3CCB0}"/>
+                <a16:creationId xmlns:a16="http://schemas.microsoft.com/office/drawing/2014/main" id="{7553CD86-7A7B-4161-AA57-21F893617C54}"/>
               </a:ext>
             </a:extLst>
           </p:cNvPr>
@@ -25071,7 +26981,7 @@
           <p:cNvPr id="10" name="">
             <a:extLst xmlns:a="http://schemas.openxmlformats.org/drawingml/2006/main">
               <a:ext uri="{FF2B5EF4-FFF2-40B4-BE49-F238E27FC236}">
-                <a16:creationId xmlns:a16="http://schemas.microsoft.com/office/drawing/2014/main" id="{E5144E92-2596-46AA-80EA-723270D3979E}"/>
+                <a16:creationId xmlns:a16="http://schemas.microsoft.com/office/drawing/2014/main" id="{D568003E-31E4-4E50-9764-7665F1266B87}"/>
               </a:ext>
             </a:extLst>
           </p:cNvPr>
@@ -25104,7 +27014,7 @@
           <p:cNvPr id="11" name="">
             <a:extLst xmlns:a="http://schemas.openxmlformats.org/drawingml/2006/main">
               <a:ext uri="{FF2B5EF4-FFF2-40B4-BE49-F238E27FC236}">
-                <a16:creationId xmlns:a16="http://schemas.microsoft.com/office/drawing/2014/main" id="{08C281FB-B487-4EFA-B819-329375CE52F8}"/>
+                <a16:creationId xmlns:a16="http://schemas.microsoft.com/office/drawing/2014/main" id="{D2A00EB5-EEAA-41F0-96B6-7DCC5865AE32}"/>
               </a:ext>
             </a:extLst>
           </p:cNvPr>
@@ -25135,7 +27045,7 @@
           <p:cNvPr id="12" name="기대 폭 2 ↔ 포함 폭 3">
             <a:extLst xmlns:a="http://schemas.openxmlformats.org/drawingml/2006/main">
               <a:ext uri="{FF2B5EF4-FFF2-40B4-BE49-F238E27FC236}">
-                <a16:creationId xmlns:a16="http://schemas.microsoft.com/office/drawing/2014/main" id="{044031DD-0B92-4B82-9378-DC2F1CC71707}"/>
+                <a16:creationId xmlns:a16="http://schemas.microsoft.com/office/drawing/2014/main" id="{6FD4FC48-E093-4C1F-B4D9-B248B72098FD}"/>
               </a:ext>
             </a:extLst>
           </p:cNvPr>
@@ -25293,7 +27203,7 @@
           <p:cNvPr id="13" name="명세·테스트·구현을 비교&#10;추가된 열의 원인을 추론">
             <a:extLst xmlns:a="http://schemas.openxmlformats.org/drawingml/2006/main">
               <a:ext uri="{FF2B5EF4-FFF2-40B4-BE49-F238E27FC236}">
-                <a16:creationId xmlns:a16="http://schemas.microsoft.com/office/drawing/2014/main" id="{DB6CB935-ADD0-4589-8F9F-FFB06C081B26}"/>
+                <a16:creationId xmlns:a16="http://schemas.microsoft.com/office/drawing/2014/main" id="{65416257-52ED-4A59-AD93-3E8BD2C1D19E}"/>
               </a:ext>
             </a:extLst>
           </p:cNvPr>
@@ -25474,7 +27384,7 @@
           <p:cNvPr id="14" name="TRIAL-001: 원인 설명·코드 미수정">
             <a:extLst xmlns:a="http://schemas.openxmlformats.org/drawingml/2006/main">
               <a:ext uri="{FF2B5EF4-FFF2-40B4-BE49-F238E27FC236}">
-                <a16:creationId xmlns:a16="http://schemas.microsoft.com/office/drawing/2014/main" id="{2DEB23CB-4AD8-4156-AD91-4976DC322B20}"/>
+                <a16:creationId xmlns:a16="http://schemas.microsoft.com/office/drawing/2014/main" id="{2F8956D7-53EB-4F58-A2B7-B4D833E8BBB7}"/>
               </a:ext>
             </a:extLst>
           </p:cNvPr>
@@ -25632,7 +27542,7 @@
           <p:cNvPr id="15" name="읽기 전용 · 임시 디렉터리 제한">
             <a:extLst xmlns:a="http://schemas.openxmlformats.org/drawingml/2006/main">
               <a:ext uri="{FF2B5EF4-FFF2-40B4-BE49-F238E27FC236}">
-                <a16:creationId xmlns:a16="http://schemas.microsoft.com/office/drawing/2014/main" id="{8019BB75-1D77-4F03-AA60-3588F4AFB847}"/>
+                <a16:creationId xmlns:a16="http://schemas.microsoft.com/office/drawing/2014/main" id="{95691776-D322-4772-B327-421D5CF7AF3A}"/>
               </a:ext>
             </a:extLst>
           </p:cNvPr>
@@ -25790,7 +27700,7 @@
           <p:cNvPr id="16" name="코드만으로는 부족&#10;실행 로그·권한 정보도 필요">
             <a:extLst xmlns:a="http://schemas.openxmlformats.org/drawingml/2006/main">
               <a:ext uri="{FF2B5EF4-FFF2-40B4-BE49-F238E27FC236}">
-                <a16:creationId xmlns:a16="http://schemas.microsoft.com/office/drawing/2014/main" id="{4A6EBC87-D419-4E84-A972-B3E6165CD41A}"/>
+                <a16:creationId xmlns:a16="http://schemas.microsoft.com/office/drawing/2014/main" id="{96089296-9175-4000-8EAC-9B7C127F0D8E}"/>
               </a:ext>
             </a:extLst>
           </p:cNvPr>
@@ -25971,7 +27881,7 @@
           <p:cNvPr id="17" name="TRIAL-001도 환경 오류 3건">
             <a:extLst xmlns:a="http://schemas.openxmlformats.org/drawingml/2006/main">
               <a:ext uri="{FF2B5EF4-FFF2-40B4-BE49-F238E27FC236}">
-                <a16:creationId xmlns:a16="http://schemas.microsoft.com/office/drawing/2014/main" id="{ED595DAD-4C78-4056-8C37-7CFB17A6E341}"/>
+                <a16:creationId xmlns:a16="http://schemas.microsoft.com/office/drawing/2014/main" id="{33AD1FD7-0BFF-44A9-9ECC-1A6BEA77F29A}"/>
               </a:ext>
             </a:extLst>
           </p:cNvPr>
@@ -26129,7 +28039,7 @@
           <p:cNvPr id="18" name="코드만 옮기면, 실행 환경의 단서는 빠진다.">
             <a:extLst xmlns:a="http://schemas.openxmlformats.org/drawingml/2006/main">
               <a:ext uri="{FF2B5EF4-FFF2-40B4-BE49-F238E27FC236}">
-                <a16:creationId xmlns:a16="http://schemas.microsoft.com/office/drawing/2014/main" id="{685733C9-BF63-4DB1-894B-3023F8347859}"/>
+                <a16:creationId xmlns:a16="http://schemas.microsoft.com/office/drawing/2014/main" id="{95A8220F-C511-4D99-85FE-EFA80190295F}"/>
               </a:ext>
             </a:extLst>
           </p:cNvPr>
@@ -26287,7 +28197,7 @@
           <p:cNvPr id="19" name="실제 전체 기록: 7개 통과 · crop 실패 1건 · 환경 오류 3건">
             <a:extLst xmlns:a="http://schemas.openxmlformats.org/drawingml/2006/main">
               <a:ext uri="{FF2B5EF4-FFF2-40B4-BE49-F238E27FC236}">
-                <a16:creationId xmlns:a16="http://schemas.microsoft.com/office/drawing/2014/main" id="{2602E0F7-D64B-4AB0-9E44-CB1D7E0C1A29}"/>
+                <a16:creationId xmlns:a16="http://schemas.microsoft.com/office/drawing/2014/main" id="{F1A7B359-C72C-4E08-AF7D-FB8979579E85}"/>
               </a:ext>
             </a:extLst>
           </p:cNvPr>
@@ -26445,7 +28355,7 @@
           <p:cNvPr id="20" name="Legacy module connection">
             <a:extLst xmlns:a="http://schemas.openxmlformats.org/drawingml/2006/main">
               <a:ext uri="{FF2B5EF4-FFF2-40B4-BE49-F238E27FC236}">
-                <a16:creationId xmlns:a16="http://schemas.microsoft.com/office/drawing/2014/main" id="{7046A6A4-956B-4B47-9C6D-94012D143811}"/>
+                <a16:creationId xmlns:a16="http://schemas.microsoft.com/office/drawing/2014/main" id="{1B9E1775-2074-4291-8D57-EEA96A189C6D}"/>
               </a:ext>
             </a:extLst>
           </p:cNvPr>
@@ -26601,7 +28511,7 @@
     </p:spTree>
     <p:extLst>
       <p:ext uri="{BB962C8B-B14F-4D97-AF65-F5344CB8AC3E}">
-        <p14:creationId xmlns:p14="http://schemas.microsoft.com/office/powerpoint/2010/main" val="82957514"/>
+        <p14:creationId xmlns:p14="http://schemas.microsoft.com/office/powerpoint/2010/main" val="54509864"/>
       </p:ext>
     </p:extLst>
   </p:cSld>
@@ -26632,7 +28542,7 @@
           <p:cNvPr id="14" name="ACT 0 · Context를 찾는 주체">
             <a:extLst xmlns:a="http://schemas.openxmlformats.org/drawingml/2006/main">
               <a:ext uri="{FF2B5EF4-FFF2-40B4-BE49-F238E27FC236}">
-                <a16:creationId xmlns:a16="http://schemas.microsoft.com/office/drawing/2014/main" id="{EBB3C862-C000-4B27-AA3B-0727A413E9A4}"/>
+                <a16:creationId xmlns:a16="http://schemas.microsoft.com/office/drawing/2014/main" id="{673D54D8-C764-4D67-9065-8626CEC6878A}"/>
               </a:ext>
             </a:extLst>
           </p:cNvPr>
@@ -26790,7 +28700,7 @@
           <p:cNvPr id="2" name="S07">
             <a:extLst xmlns:a="http://schemas.openxmlformats.org/drawingml/2006/main">
               <a:ext uri="{FF2B5EF4-FFF2-40B4-BE49-F238E27FC236}">
-                <a16:creationId xmlns:a16="http://schemas.microsoft.com/office/drawing/2014/main" id="{325AD7CD-10DC-4F9C-A110-3D5370A5F30A}"/>
+                <a16:creationId xmlns:a16="http://schemas.microsoft.com/office/drawing/2014/main" id="{20001E67-4B7A-416F-86C2-3587ED308CFA}"/>
               </a:ext>
             </a:extLst>
           </p:cNvPr>
@@ -26948,7 +28858,7 @@
           <p:cNvPr id="3" name="코드를 AI에게 가져가는 대신&#10;AI를 Repository로 데려간다">
             <a:extLst xmlns:a="http://schemas.openxmlformats.org/drawingml/2006/main">
               <a:ext uri="{FF2B5EF4-FFF2-40B4-BE49-F238E27FC236}">
-                <a16:creationId xmlns:a16="http://schemas.microsoft.com/office/drawing/2014/main" id="{4EB894B6-BD05-4372-80B9-304CDB6CB864}"/>
+                <a16:creationId xmlns:a16="http://schemas.microsoft.com/office/drawing/2014/main" id="{618D6391-F931-409E-BBFA-C4224D28EA3D}"/>
               </a:ext>
             </a:extLst>
           </p:cNvPr>
@@ -27129,7 +29039,7 @@
           <p:cNvPr id="4" name="">
             <a:extLst xmlns:a="http://schemas.openxmlformats.org/drawingml/2006/main">
               <a:ext uri="{FF2B5EF4-FFF2-40B4-BE49-F238E27FC236}">
-                <a16:creationId xmlns:a16="http://schemas.microsoft.com/office/drawing/2014/main" id="{EFB72C0B-6DE3-44E2-BAC1-EF94BD4E9668}"/>
+                <a16:creationId xmlns:a16="http://schemas.microsoft.com/office/drawing/2014/main" id="{AC09FF52-D581-48C2-A78B-B23A88983865}"/>
               </a:ext>
             </a:extLst>
           </p:cNvPr>
@@ -27160,7 +29070,7 @@
           <p:cNvPr id="5" name="교육 모델 · TRIAL-001 단일 CLI 관찰과 연결 · AI 생성 설명용 삽화">
             <a:extLst xmlns:a="http://schemas.openxmlformats.org/drawingml/2006/main">
               <a:ext uri="{FF2B5EF4-FFF2-40B4-BE49-F238E27FC236}">
-                <a16:creationId xmlns:a16="http://schemas.microsoft.com/office/drawing/2014/main" id="{28C3C916-7FD5-4933-9878-32499274FB41}"/>
+                <a16:creationId xmlns:a16="http://schemas.microsoft.com/office/drawing/2014/main" id="{45CEBC35-193D-492C-B73A-69F24983954E}"/>
               </a:ext>
             </a:extLst>
           </p:cNvPr>
@@ -27318,7 +29228,7 @@
           <p:cNvPr id="6" name="목표 설정과 근거 검토는 개발자에게 남습니다. Repository 접근이 Task 의도를 정하지는 않습니다.">
             <a:extLst xmlns:a="http://schemas.openxmlformats.org/drawingml/2006/main">
               <a:ext uri="{FF2B5EF4-FFF2-40B4-BE49-F238E27FC236}">
-                <a16:creationId xmlns:a16="http://schemas.microsoft.com/office/drawing/2014/main" id="{A1A6629A-8975-4349-A92E-856D60EA3F87}"/>
+                <a16:creationId xmlns:a16="http://schemas.microsoft.com/office/drawing/2014/main" id="{AEF5B256-4DF2-4AC0-98AA-3FF43E36097B}"/>
               </a:ext>
             </a:extLst>
           </p:cNvPr>
@@ -27476,7 +29386,7 @@
           <p:cNvPr id="7" name="내가 골라 전달하는 Context">
             <a:extLst xmlns:a="http://schemas.openxmlformats.org/drawingml/2006/main">
               <a:ext uri="{FF2B5EF4-FFF2-40B4-BE49-F238E27FC236}">
-                <a16:creationId xmlns:a16="http://schemas.microsoft.com/office/drawing/2014/main" id="{A3165199-A1FF-4F33-A0C7-2519033309BD}"/>
+                <a16:creationId xmlns:a16="http://schemas.microsoft.com/office/drawing/2014/main" id="{2952CD63-5CE1-49F6-A1C8-C43E9D9481AB}"/>
               </a:ext>
             </a:extLst>
           </p:cNvPr>
@@ -27634,7 +29544,7 @@
           <p:cNvPr id="8" name="조사를 맡기고 근거를 확인">
             <a:extLst xmlns:a="http://schemas.openxmlformats.org/drawingml/2006/main">
               <a:ext uri="{FF2B5EF4-FFF2-40B4-BE49-F238E27FC236}">
-                <a16:creationId xmlns:a16="http://schemas.microsoft.com/office/drawing/2014/main" id="{A31784CB-3480-41DF-B87F-C21C157DDE43}"/>
+                <a16:creationId xmlns:a16="http://schemas.microsoft.com/office/drawing/2014/main" id="{F192B8B2-B829-4536-B42D-B0DB6947039D}"/>
               </a:ext>
             </a:extLst>
           </p:cNvPr>
@@ -27792,7 +29702,7 @@
           <p:cNvPr id="9" name="">
             <a:extLst xmlns:a="http://schemas.openxmlformats.org/drawingml/2006/main">
               <a:ext uri="{FF2B5EF4-FFF2-40B4-BE49-F238E27FC236}">
-                <a16:creationId xmlns:a16="http://schemas.microsoft.com/office/drawing/2014/main" id="{01A52E1F-1786-4035-9E09-3154B0B35F69}"/>
+                <a16:creationId xmlns:a16="http://schemas.microsoft.com/office/drawing/2014/main" id="{738323D1-0ACA-4A81-A637-4F7A3B8B7668}"/>
               </a:ext>
             </a:extLst>
           </p:cNvPr>
@@ -27802,7 +29712,7 @@
           <p:nvPr/>
         </p:nvPicPr>
         <p:blipFill>
-          <a:blip xmlns:r="http://schemas.openxmlformats.org/officeDocument/2006/relationships" xmlns:a="http://schemas.openxmlformats.org/drawingml/2006/main" r:embed="Rc19865849f194c14"/>
+          <a:blip xmlns:r="http://schemas.openxmlformats.org/officeDocument/2006/relationships" xmlns:a="http://schemas.openxmlformats.org/drawingml/2006/main" r:embed="R507c53e1cb624d17"/>
           <a:srcRect xmlns:a="http://schemas.openxmlformats.org/drawingml/2006/main" l="0" t="18000" r="0" b="15000"/>
           <a:stretch xmlns:a="http://schemas.openxmlformats.org/drawingml/2006/main"/>
         </p:blipFill>
@@ -27821,7 +29731,7 @@
           <p:cNvPr id="10" name="코드 조각을 선택·복사">
             <a:extLst xmlns:a="http://schemas.openxmlformats.org/drawingml/2006/main">
               <a:ext uri="{FF2B5EF4-FFF2-40B4-BE49-F238E27FC236}">
-                <a16:creationId xmlns:a16="http://schemas.microsoft.com/office/drawing/2014/main" id="{400EC119-B907-4A0F-9658-B4731707986C}"/>
+                <a16:creationId xmlns:a16="http://schemas.microsoft.com/office/drawing/2014/main" id="{F534787D-EE47-4DBF-84D0-CA8D5D4E3E37}"/>
               </a:ext>
             </a:extLst>
           </p:cNvPr>
@@ -27979,7 +29889,7 @@
           <p:cNvPr id="11" name="목표는 사람이, 탐색은 Agent와">
             <a:extLst xmlns:a="http://schemas.openxmlformats.org/drawingml/2006/main">
               <a:ext uri="{FF2B5EF4-FFF2-40B4-BE49-F238E27FC236}">
-                <a16:creationId xmlns:a16="http://schemas.microsoft.com/office/drawing/2014/main" id="{5130CE85-C226-4A85-8DC0-DBD369291034}"/>
+                <a16:creationId xmlns:a16="http://schemas.microsoft.com/office/drawing/2014/main" id="{4EB131E8-396B-424B-B867-CC3EA98F4E33}"/>
               </a:ext>
             </a:extLst>
           </p:cNvPr>
@@ -28137,7 +30047,7 @@
           <p:cNvPr id="12" name="접근 전: 승인된 도구·계정·자료·권한 범위를 확인한다.">
             <a:extLst xmlns:a="http://schemas.openxmlformats.org/drawingml/2006/main">
               <a:ext uri="{FF2B5EF4-FFF2-40B4-BE49-F238E27FC236}">
-                <a16:creationId xmlns:a16="http://schemas.microsoft.com/office/drawing/2014/main" id="{7296F1C6-9B3D-4031-A3E6-F30DFE88A468}"/>
+                <a16:creationId xmlns:a16="http://schemas.microsoft.com/office/drawing/2014/main" id="{A75C6D63-4B69-4EED-8A8D-AB0F559C6D2F}"/>
               </a:ext>
             </a:extLst>
           </p:cNvPr>
@@ -28295,7 +30205,7 @@
           <p:cNvPr id="13" name="Legacy module connection">
             <a:extLst xmlns:a="http://schemas.openxmlformats.org/drawingml/2006/main">
               <a:ext uri="{FF2B5EF4-FFF2-40B4-BE49-F238E27FC236}">
-                <a16:creationId xmlns:a16="http://schemas.microsoft.com/office/drawing/2014/main" id="{A699030A-C561-44C6-9DC8-40F239288461}"/>
+                <a16:creationId xmlns:a16="http://schemas.microsoft.com/office/drawing/2014/main" id="{1E85EEF9-268F-4639-A6EE-30C8759A8DC0}"/>
               </a:ext>
             </a:extLst>
           </p:cNvPr>
@@ -28451,7 +30361,7 @@
     </p:spTree>
     <p:extLst>
       <p:ext uri="{BB962C8B-B14F-4D97-AF65-F5344CB8AC3E}">
-        <p14:creationId xmlns:p14="http://schemas.microsoft.com/office/powerpoint/2010/main" val="1351196116"/>
+        <p14:creationId xmlns:p14="http://schemas.microsoft.com/office/powerpoint/2010/main" val="875184615"/>
       </p:ext>
     </p:extLst>
   </p:cSld>
@@ -28479,10 +30389,10 @@
       </p:grpSpPr>
       <p:sp>
         <p:nvSpPr>
-          <p:cNvPr id="16" name="ACT 0 · 접근할 정보와 정할 목표">
+          <p:cNvPr id="29" name="ACT 0 · ChatGPT 데스크톱 앱의 진입 경로">
             <a:extLst xmlns:a="http://schemas.openxmlformats.org/drawingml/2006/main">
               <a:ext uri="{FF2B5EF4-FFF2-40B4-BE49-F238E27FC236}">
-                <a16:creationId xmlns:a16="http://schemas.microsoft.com/office/drawing/2014/main" id="{CE5BA19A-C8BF-48A7-958A-78D26ECCB992}"/>
+                <a16:creationId xmlns:a16="http://schemas.microsoft.com/office/drawing/2014/main" id="{762B733B-1A1C-4C28-9001-7699908D21CF}"/>
               </a:ext>
             </a:extLst>
           </p:cNvPr>
@@ -28630,7 +30540,7 @@
                 <a:ea typeface="Malgun Gothic"/>
                 <a:cs typeface="Malgun Gothic"/>
               </a:rPr>
-              <a:t>ACT 0 · 접근할 정보와 정할 목표</a:t>
+              <a:t>ACT 0 · ChatGPT 데스크톱 앱의 진입 경로</a:t>
             </a:r>
           </a:p>
         </p:txBody>
@@ -28640,7 +30550,7 @@
           <p:cNvPr id="2" name="S08">
             <a:extLst xmlns:a="http://schemas.openxmlformats.org/drawingml/2006/main">
               <a:ext uri="{FF2B5EF4-FFF2-40B4-BE49-F238E27FC236}">
-                <a16:creationId xmlns:a16="http://schemas.microsoft.com/office/drawing/2014/main" id="{881FFD40-AECD-43A9-81FC-E054A836A922}"/>
+                <a16:creationId xmlns:a16="http://schemas.microsoft.com/office/drawing/2014/main" id="{8446BF62-BA33-4043-A9BB-7559474E691F}"/>
               </a:ext>
             </a:extLst>
           </p:cNvPr>
@@ -28795,10 +30705,10 @@
       </p:sp>
       <p:sp>
         <p:nvSpPr>
-          <p:cNvPr id="3" name="Repository 접근과 Task 의도는 별개다">
+          <p:cNvPr id="3" name="Repository 작업은 Codex에서 시작한다">
             <a:extLst xmlns:a="http://schemas.openxmlformats.org/drawingml/2006/main">
               <a:ext uri="{FF2B5EF4-FFF2-40B4-BE49-F238E27FC236}">
-                <a16:creationId xmlns:a16="http://schemas.microsoft.com/office/drawing/2014/main" id="{EE696860-93E2-4E4C-91EF-B118F7E10868}"/>
+                <a16:creationId xmlns:a16="http://schemas.microsoft.com/office/drawing/2014/main" id="{8479D438-8731-4D77-9DF4-AEB7D3FC2C64}"/>
               </a:ext>
             </a:extLst>
           </p:cNvPr>
@@ -28946,7 +30856,7 @@
                 <a:ea typeface="Malgun Gothic"/>
                 <a:cs typeface="Malgun Gothic"/>
               </a:rPr>
-              <a:t>Repository 접근과 Task 의도는 별개다</a:t>
+              <a:t>Repository 작업은 Codex에서 시작한다</a:t>
             </a:r>
           </a:p>
         </p:txBody>
@@ -28956,7 +30866,7 @@
           <p:cNvPr id="4" name="">
             <a:extLst xmlns:a="http://schemas.openxmlformats.org/drawingml/2006/main">
               <a:ext uri="{FF2B5EF4-FFF2-40B4-BE49-F238E27FC236}">
-                <a16:creationId xmlns:a16="http://schemas.microsoft.com/office/drawing/2014/main" id="{049486E2-C30B-4D13-A5A6-E6B560344A25}"/>
+                <a16:creationId xmlns:a16="http://schemas.microsoft.com/office/drawing/2014/main" id="{1AFC6128-2B4F-41C3-8D71-CD673546821F}"/>
               </a:ext>
             </a:extLst>
           </p:cNvPr>
@@ -28984,10 +30894,10 @@
       </p:sp>
       <p:sp>
         <p:nvSpPr>
-          <p:cNvPr id="5" name="이 과정의 교육 모델 · Repository 접근과 작업 의도의 관계">
+          <p:cNvPr id="5" name="OpenAI Quickstart · 공식 문서 2026-10-21 확인 · 앱 전환 메뉴 재구성">
             <a:extLst xmlns:a="http://schemas.openxmlformats.org/drawingml/2006/main">
               <a:ext uri="{FF2B5EF4-FFF2-40B4-BE49-F238E27FC236}">
-                <a16:creationId xmlns:a16="http://schemas.microsoft.com/office/drawing/2014/main" id="{8285B098-8E87-4468-BED4-A5C83F23C249}"/>
+                <a16:creationId xmlns:a16="http://schemas.microsoft.com/office/drawing/2014/main" id="{F84FD1AE-E799-4C05-8CA1-0BCDDB5F0373}"/>
               </a:ext>
             </a:extLst>
           </p:cNvPr>
@@ -29135,17 +31045,17 @@
                 <a:ea typeface="Malgun Gothic"/>
                 <a:cs typeface="Malgun Gothic"/>
               </a:rPr>
-              <a:t>이 과정의 교육 모델 · Repository 접근과 작업 의도의 관계</a:t>
+              <a:t>OpenAI Quickstart · 공식 문서 2026-10-21 확인 · 앱 전환 메뉴 재구성</a:t>
             </a:r>
           </a:p>
         </p:txBody>
       </p:sp>
       <p:sp>
         <p:nvSpPr>
-          <p:cNvPr id="6" name="모든 제품이나 환경의 기능을 설명하는 공식 분류가 아닙니다.">
+          <p:cNvPr id="6" name="교육용 도식입니다. 앱 버전·계정별 표시와 접근 권한은 발표 환경에서 확인합니다.">
             <a:extLst xmlns:a="http://schemas.openxmlformats.org/drawingml/2006/main">
               <a:ext uri="{FF2B5EF4-FFF2-40B4-BE49-F238E27FC236}">
-                <a16:creationId xmlns:a16="http://schemas.microsoft.com/office/drawing/2014/main" id="{1B573DAE-E591-429E-BE41-900A819D9A13}"/>
+                <a16:creationId xmlns:a16="http://schemas.microsoft.com/office/drawing/2014/main" id="{30AE6759-2F2D-4D5C-A593-9D582F2589C1}"/>
               </a:ext>
             </a:extLst>
           </p:cNvPr>
@@ -29293,17 +31203,17 @@
                 <a:ea typeface="Malgun Gothic"/>
                 <a:cs typeface="Malgun Gothic"/>
               </a:rPr>
-              <a:t>모든 제품이나 환경의 기능을 설명하는 공식 분류가 아닙니다.</a:t>
+              <a:t>교육용 도식입니다. 앱 버전·계정별 표시와 접근 권한은 발표 환경에서 확인합니다.</a:t>
             </a:r>
           </a:p>
         </p:txBody>
       </p:sp>
       <p:sp>
         <p:nvSpPr>
-          <p:cNvPr id="7" name="볼 수 있는 것">
+          <p:cNvPr id="7" name="앱 좌측 상단에서 ChatGPT → Codex 선택">
             <a:extLst xmlns:a="http://schemas.openxmlformats.org/drawingml/2006/main">
               <a:ext uri="{FF2B5EF4-FFF2-40B4-BE49-F238E27FC236}">
-                <a16:creationId xmlns:a16="http://schemas.microsoft.com/office/drawing/2014/main" id="{FE017089-05A6-40AC-A2C3-DE3DB594D22B}"/>
+                <a16:creationId xmlns:a16="http://schemas.microsoft.com/office/drawing/2014/main" id="{FD3C5562-6085-46E5-A761-1D3E791B1D62}"/>
               </a:ext>
             </a:extLst>
           </p:cNvPr>
@@ -29314,8 +31224,737 @@
         </p:nvSpPr>
         <p:spPr>
           <a:xfrm xmlns:a="http://schemas.openxmlformats.org/drawingml/2006/main">
-            <a:off x="609600" y="2352675"/>
-            <a:ext cx="4838700" cy="428625"/>
+            <a:off x="609600" y="1647825"/>
+            <a:ext cx="10972800" cy="400050"/>
+          </a:xfrm>
+          <a:prstGeom xmlns:a="http://schemas.openxmlformats.org/drawingml/2006/main" prst="rect">
+            <a:avLst/>
+          </a:prstGeom>
+          <a:noFill xmlns:a="http://schemas.openxmlformats.org/drawingml/2006/main"/>
+          <a:ln xmlns:a="http://schemas.openxmlformats.org/drawingml/2006/main" w="0">
+            <a:noFill/>
+          </a:ln>
+        </p:spPr>
+        <p:txBody>
+          <a:bodyPr xmlns:a="http://schemas.openxmlformats.org/drawingml/2006/main" wrap="none" lIns="0" tIns="0" rIns="0" bIns="0" anchor="ctr">
+            <a:noAutofit/>
+          </a:bodyPr>
+          <a:lstStyle xmlns:a="http://schemas.openxmlformats.org/drawingml/2006/main">
+            <a:defPPr algn="l">
+              <a:defRPr sz="2325" b="1">
+                <a:solidFill>
+                  <a:srgbClr val="0B6172"/>
+                </a:solidFill>
+                <a:latin typeface="Malgun Gothic"/>
+                <a:ea typeface="Malgun Gothic"/>
+                <a:cs typeface="Malgun Gothic"/>
+              </a:defRPr>
+            </a:defPPr>
+            <a:lvl1pPr algn="l">
+              <a:defRPr sz="2325" b="1">
+                <a:solidFill>
+                  <a:srgbClr val="0B6172"/>
+                </a:solidFill>
+                <a:latin typeface="Malgun Gothic"/>
+                <a:ea typeface="Malgun Gothic"/>
+                <a:cs typeface="Malgun Gothic"/>
+              </a:defRPr>
+            </a:lvl1pPr>
+            <a:lvl2pPr algn="l">
+              <a:defRPr sz="2325" b="1">
+                <a:solidFill>
+                  <a:srgbClr val="0B6172"/>
+                </a:solidFill>
+                <a:latin typeface="Malgun Gothic"/>
+                <a:ea typeface="Malgun Gothic"/>
+                <a:cs typeface="Malgun Gothic"/>
+              </a:defRPr>
+            </a:lvl2pPr>
+            <a:lvl3pPr algn="l">
+              <a:defRPr sz="2325" b="1">
+                <a:solidFill>
+                  <a:srgbClr val="0B6172"/>
+                </a:solidFill>
+                <a:latin typeface="Malgun Gothic"/>
+                <a:ea typeface="Malgun Gothic"/>
+                <a:cs typeface="Malgun Gothic"/>
+              </a:defRPr>
+            </a:lvl3pPr>
+            <a:lvl4pPr algn="l">
+              <a:defRPr sz="2325" b="1">
+                <a:solidFill>
+                  <a:srgbClr val="0B6172"/>
+                </a:solidFill>
+                <a:latin typeface="Malgun Gothic"/>
+                <a:ea typeface="Malgun Gothic"/>
+                <a:cs typeface="Malgun Gothic"/>
+              </a:defRPr>
+            </a:lvl4pPr>
+            <a:lvl5pPr algn="l">
+              <a:defRPr sz="2325" b="1">
+                <a:solidFill>
+                  <a:srgbClr val="0B6172"/>
+                </a:solidFill>
+                <a:latin typeface="Malgun Gothic"/>
+                <a:ea typeface="Malgun Gothic"/>
+                <a:cs typeface="Malgun Gothic"/>
+              </a:defRPr>
+            </a:lvl5pPr>
+            <a:lvl6pPr algn="l">
+              <a:defRPr sz="2325" b="1">
+                <a:solidFill>
+                  <a:srgbClr val="0B6172"/>
+                </a:solidFill>
+                <a:latin typeface="Malgun Gothic"/>
+                <a:ea typeface="Malgun Gothic"/>
+                <a:cs typeface="Malgun Gothic"/>
+              </a:defRPr>
+            </a:lvl6pPr>
+            <a:lvl7pPr algn="l">
+              <a:defRPr sz="2325" b="1">
+                <a:solidFill>
+                  <a:srgbClr val="0B6172"/>
+                </a:solidFill>
+                <a:latin typeface="Malgun Gothic"/>
+                <a:ea typeface="Malgun Gothic"/>
+                <a:cs typeface="Malgun Gothic"/>
+              </a:defRPr>
+            </a:lvl7pPr>
+            <a:lvl8pPr algn="l">
+              <a:defRPr sz="2325" b="1">
+                <a:solidFill>
+                  <a:srgbClr val="0B6172"/>
+                </a:solidFill>
+                <a:latin typeface="Malgun Gothic"/>
+                <a:ea typeface="Malgun Gothic"/>
+                <a:cs typeface="Malgun Gothic"/>
+              </a:defRPr>
+            </a:lvl8pPr>
+            <a:lvl9pPr algn="l">
+              <a:defRPr sz="2325" b="1">
+                <a:solidFill>
+                  <a:srgbClr val="0B6172"/>
+                </a:solidFill>
+                <a:latin typeface="Malgun Gothic"/>
+                <a:ea typeface="Malgun Gothic"/>
+                <a:cs typeface="Malgun Gothic"/>
+              </a:defRPr>
+            </a:lvl9pPr>
+          </a:lstStyle>
+          <a:p xmlns:a="http://schemas.openxmlformats.org/drawingml/2006/main">
+            <a:pPr algn="l">
+              <a:defRPr sz="2325" b="1">
+                <a:solidFill>
+                  <a:srgbClr val="0B6172"/>
+                </a:solidFill>
+                <a:latin typeface="Malgun Gothic"/>
+                <a:ea typeface="Malgun Gothic"/>
+                <a:cs typeface="Malgun Gothic"/>
+              </a:defRPr>
+            </a:pPr>
+            <a:r>
+              <a:rPr sz="2325" b="1">
+                <a:solidFill>
+                  <a:srgbClr val="0B6172"/>
+                </a:solidFill>
+                <a:latin typeface="Malgun Gothic"/>
+                <a:ea typeface="Malgun Gothic"/>
+                <a:cs typeface="Malgun Gothic"/>
+              </a:rPr>
+              <a:t>앱 좌측 상단에서 ChatGPT → Codex 선택</a:t>
+            </a:r>
+          </a:p>
+        </p:txBody>
+      </p:sp>
+      <p:sp>
+        <p:nvSpPr>
+          <p:cNvPr id="8" name="">
+            <a:extLst xmlns:a="http://schemas.openxmlformats.org/drawingml/2006/main">
+              <a:ext uri="{FF2B5EF4-FFF2-40B4-BE49-F238E27FC236}">
+                <a16:creationId xmlns:a16="http://schemas.microsoft.com/office/drawing/2014/main" id="{E6AD61C2-9A57-4AA2-85A9-A3D5C3C27181}"/>
+              </a:ext>
+            </a:extLst>
+          </p:cNvPr>
+          <p:cNvSpPr>
+            <a:spLocks xmlns:a="http://schemas.openxmlformats.org/drawingml/2006/main" noGrp="1"/>
+          </p:cNvSpPr>
+          <p:nvPr/>
+        </p:nvSpPr>
+        <p:spPr>
+          <a:xfrm xmlns:a="http://schemas.openxmlformats.org/drawingml/2006/main">
+            <a:off x="609600" y="2343150"/>
+            <a:ext cx="4343400" cy="581025"/>
+          </a:xfrm>
+          <a:prstGeom xmlns:a="http://schemas.openxmlformats.org/drawingml/2006/main" prst="rect">
+            <a:avLst/>
+          </a:prstGeom>
+          <a:solidFill xmlns:a="http://schemas.openxmlformats.org/drawingml/2006/main">
+            <a:srgbClr val="FFFFFF"/>
+          </a:solidFill>
+          <a:ln xmlns:a="http://schemas.openxmlformats.org/drawingml/2006/main" w="19050">
+            <a:solidFill>
+              <a:srgbClr val="C7D0DA"/>
+            </a:solidFill>
+            <a:prstDash val="solid"/>
+          </a:ln>
+        </p:spPr>
+      </p:sp>
+      <p:sp>
+        <p:nvSpPr>
+          <p:cNvPr id="9" name="ChatGPT">
+            <a:extLst xmlns:a="http://schemas.openxmlformats.org/drawingml/2006/main">
+              <a:ext uri="{FF2B5EF4-FFF2-40B4-BE49-F238E27FC236}">
+                <a16:creationId xmlns:a16="http://schemas.microsoft.com/office/drawing/2014/main" id="{529AD402-DB2D-499F-A96E-4714588ADF8C}"/>
+              </a:ext>
+            </a:extLst>
+          </p:cNvPr>
+          <p:cNvSpPr>
+            <a:spLocks xmlns:a="http://schemas.openxmlformats.org/drawingml/2006/main" noGrp="1"/>
+          </p:cNvSpPr>
+          <p:nvPr/>
+        </p:nvSpPr>
+        <p:spPr>
+          <a:xfrm xmlns:a="http://schemas.openxmlformats.org/drawingml/2006/main">
+            <a:off x="838200" y="2457450"/>
+            <a:ext cx="3238500" cy="352425"/>
+          </a:xfrm>
+          <a:prstGeom xmlns:a="http://schemas.openxmlformats.org/drawingml/2006/main" prst="rect">
+            <a:avLst/>
+          </a:prstGeom>
+          <a:noFill xmlns:a="http://schemas.openxmlformats.org/drawingml/2006/main"/>
+          <a:ln xmlns:a="http://schemas.openxmlformats.org/drawingml/2006/main" w="0">
+            <a:noFill/>
+          </a:ln>
+        </p:spPr>
+        <p:txBody>
+          <a:bodyPr xmlns:a="http://schemas.openxmlformats.org/drawingml/2006/main" wrap="none" lIns="0" tIns="0" rIns="0" bIns="0" anchor="ctr">
+            <a:noAutofit/>
+          </a:bodyPr>
+          <a:lstStyle xmlns:a="http://schemas.openxmlformats.org/drawingml/2006/main">
+            <a:defPPr algn="l">
+              <a:defRPr sz="2250" b="1">
+                <a:solidFill>
+                  <a:srgbClr val="17212B"/>
+                </a:solidFill>
+                <a:latin typeface="Malgun Gothic"/>
+                <a:ea typeface="Malgun Gothic"/>
+                <a:cs typeface="Malgun Gothic"/>
+              </a:defRPr>
+            </a:defPPr>
+            <a:lvl1pPr algn="l">
+              <a:defRPr sz="2250" b="1">
+                <a:solidFill>
+                  <a:srgbClr val="17212B"/>
+                </a:solidFill>
+                <a:latin typeface="Malgun Gothic"/>
+                <a:ea typeface="Malgun Gothic"/>
+                <a:cs typeface="Malgun Gothic"/>
+              </a:defRPr>
+            </a:lvl1pPr>
+            <a:lvl2pPr algn="l">
+              <a:defRPr sz="2250" b="1">
+                <a:solidFill>
+                  <a:srgbClr val="17212B"/>
+                </a:solidFill>
+                <a:latin typeface="Malgun Gothic"/>
+                <a:ea typeface="Malgun Gothic"/>
+                <a:cs typeface="Malgun Gothic"/>
+              </a:defRPr>
+            </a:lvl2pPr>
+            <a:lvl3pPr algn="l">
+              <a:defRPr sz="2250" b="1">
+                <a:solidFill>
+                  <a:srgbClr val="17212B"/>
+                </a:solidFill>
+                <a:latin typeface="Malgun Gothic"/>
+                <a:ea typeface="Malgun Gothic"/>
+                <a:cs typeface="Malgun Gothic"/>
+              </a:defRPr>
+            </a:lvl3pPr>
+            <a:lvl4pPr algn="l">
+              <a:defRPr sz="2250" b="1">
+                <a:solidFill>
+                  <a:srgbClr val="17212B"/>
+                </a:solidFill>
+                <a:latin typeface="Malgun Gothic"/>
+                <a:ea typeface="Malgun Gothic"/>
+                <a:cs typeface="Malgun Gothic"/>
+              </a:defRPr>
+            </a:lvl4pPr>
+            <a:lvl5pPr algn="l">
+              <a:defRPr sz="2250" b="1">
+                <a:solidFill>
+                  <a:srgbClr val="17212B"/>
+                </a:solidFill>
+                <a:latin typeface="Malgun Gothic"/>
+                <a:ea typeface="Malgun Gothic"/>
+                <a:cs typeface="Malgun Gothic"/>
+              </a:defRPr>
+            </a:lvl5pPr>
+            <a:lvl6pPr algn="l">
+              <a:defRPr sz="2250" b="1">
+                <a:solidFill>
+                  <a:srgbClr val="17212B"/>
+                </a:solidFill>
+                <a:latin typeface="Malgun Gothic"/>
+                <a:ea typeface="Malgun Gothic"/>
+                <a:cs typeface="Malgun Gothic"/>
+              </a:defRPr>
+            </a:lvl6pPr>
+            <a:lvl7pPr algn="l">
+              <a:defRPr sz="2250" b="1">
+                <a:solidFill>
+                  <a:srgbClr val="17212B"/>
+                </a:solidFill>
+                <a:latin typeface="Malgun Gothic"/>
+                <a:ea typeface="Malgun Gothic"/>
+                <a:cs typeface="Malgun Gothic"/>
+              </a:defRPr>
+            </a:lvl7pPr>
+            <a:lvl8pPr algn="l">
+              <a:defRPr sz="2250" b="1">
+                <a:solidFill>
+                  <a:srgbClr val="17212B"/>
+                </a:solidFill>
+                <a:latin typeface="Malgun Gothic"/>
+                <a:ea typeface="Malgun Gothic"/>
+                <a:cs typeface="Malgun Gothic"/>
+              </a:defRPr>
+            </a:lvl8pPr>
+            <a:lvl9pPr algn="l">
+              <a:defRPr sz="2250" b="1">
+                <a:solidFill>
+                  <a:srgbClr val="17212B"/>
+                </a:solidFill>
+                <a:latin typeface="Malgun Gothic"/>
+                <a:ea typeface="Malgun Gothic"/>
+                <a:cs typeface="Malgun Gothic"/>
+              </a:defRPr>
+            </a:lvl9pPr>
+          </a:lstStyle>
+          <a:p xmlns:a="http://schemas.openxmlformats.org/drawingml/2006/main">
+            <a:pPr algn="l">
+              <a:defRPr sz="2250" b="1">
+                <a:solidFill>
+                  <a:srgbClr val="17212B"/>
+                </a:solidFill>
+                <a:latin typeface="Malgun Gothic"/>
+                <a:ea typeface="Malgun Gothic"/>
+                <a:cs typeface="Malgun Gothic"/>
+              </a:defRPr>
+            </a:pPr>
+            <a:r>
+              <a:rPr sz="2250" b="1">
+                <a:solidFill>
+                  <a:srgbClr val="17212B"/>
+                </a:solidFill>
+                <a:latin typeface="Malgun Gothic"/>
+                <a:ea typeface="Malgun Gothic"/>
+                <a:cs typeface="Malgun Gothic"/>
+              </a:rPr>
+              <a:t>ChatGPT</a:t>
+            </a:r>
+          </a:p>
+        </p:txBody>
+      </p:sp>
+      <p:sp>
+        <p:nvSpPr>
+          <p:cNvPr id="10" name="▾">
+            <a:extLst xmlns:a="http://schemas.openxmlformats.org/drawingml/2006/main">
+              <a:ext uri="{FF2B5EF4-FFF2-40B4-BE49-F238E27FC236}">
+                <a16:creationId xmlns:a16="http://schemas.microsoft.com/office/drawing/2014/main" id="{8AB9F70F-53CA-4D6C-AC06-D6B8B4ED8252}"/>
+              </a:ext>
+            </a:extLst>
+          </p:cNvPr>
+          <p:cNvSpPr>
+            <a:spLocks xmlns:a="http://schemas.openxmlformats.org/drawingml/2006/main" noGrp="1"/>
+          </p:cNvSpPr>
+          <p:nvPr/>
+        </p:nvSpPr>
+        <p:spPr>
+          <a:xfrm xmlns:a="http://schemas.openxmlformats.org/drawingml/2006/main">
+            <a:off x="4267200" y="2457450"/>
+            <a:ext cx="457200" cy="352425"/>
+          </a:xfrm>
+          <a:prstGeom xmlns:a="http://schemas.openxmlformats.org/drawingml/2006/main" prst="rect">
+            <a:avLst/>
+          </a:prstGeom>
+          <a:noFill xmlns:a="http://schemas.openxmlformats.org/drawingml/2006/main"/>
+          <a:ln xmlns:a="http://schemas.openxmlformats.org/drawingml/2006/main" w="0">
+            <a:noFill/>
+          </a:ln>
+        </p:spPr>
+        <p:txBody>
+          <a:bodyPr xmlns:a="http://schemas.openxmlformats.org/drawingml/2006/main" wrap="none" lIns="0" tIns="0" rIns="0" bIns="0" anchor="ctr">
+            <a:noAutofit/>
+          </a:bodyPr>
+          <a:lstStyle xmlns:a="http://schemas.openxmlformats.org/drawingml/2006/main">
+            <a:defPPr algn="ctr">
+              <a:defRPr sz="2175" b="0">
+                <a:solidFill>
+                  <a:srgbClr val="4D5A68"/>
+                </a:solidFill>
+                <a:latin typeface="Malgun Gothic"/>
+                <a:ea typeface="Malgun Gothic"/>
+                <a:cs typeface="Malgun Gothic"/>
+              </a:defRPr>
+            </a:defPPr>
+            <a:lvl1pPr algn="ctr">
+              <a:defRPr sz="2175" b="0">
+                <a:solidFill>
+                  <a:srgbClr val="4D5A68"/>
+                </a:solidFill>
+                <a:latin typeface="Malgun Gothic"/>
+                <a:ea typeface="Malgun Gothic"/>
+                <a:cs typeface="Malgun Gothic"/>
+              </a:defRPr>
+            </a:lvl1pPr>
+            <a:lvl2pPr algn="ctr">
+              <a:defRPr sz="2175" b="0">
+                <a:solidFill>
+                  <a:srgbClr val="4D5A68"/>
+                </a:solidFill>
+                <a:latin typeface="Malgun Gothic"/>
+                <a:ea typeface="Malgun Gothic"/>
+                <a:cs typeface="Malgun Gothic"/>
+              </a:defRPr>
+            </a:lvl2pPr>
+            <a:lvl3pPr algn="ctr">
+              <a:defRPr sz="2175" b="0">
+                <a:solidFill>
+                  <a:srgbClr val="4D5A68"/>
+                </a:solidFill>
+                <a:latin typeface="Malgun Gothic"/>
+                <a:ea typeface="Malgun Gothic"/>
+                <a:cs typeface="Malgun Gothic"/>
+              </a:defRPr>
+            </a:lvl3pPr>
+            <a:lvl4pPr algn="ctr">
+              <a:defRPr sz="2175" b="0">
+                <a:solidFill>
+                  <a:srgbClr val="4D5A68"/>
+                </a:solidFill>
+                <a:latin typeface="Malgun Gothic"/>
+                <a:ea typeface="Malgun Gothic"/>
+                <a:cs typeface="Malgun Gothic"/>
+              </a:defRPr>
+            </a:lvl4pPr>
+            <a:lvl5pPr algn="ctr">
+              <a:defRPr sz="2175" b="0">
+                <a:solidFill>
+                  <a:srgbClr val="4D5A68"/>
+                </a:solidFill>
+                <a:latin typeface="Malgun Gothic"/>
+                <a:ea typeface="Malgun Gothic"/>
+                <a:cs typeface="Malgun Gothic"/>
+              </a:defRPr>
+            </a:lvl5pPr>
+            <a:lvl6pPr algn="ctr">
+              <a:defRPr sz="2175" b="0">
+                <a:solidFill>
+                  <a:srgbClr val="4D5A68"/>
+                </a:solidFill>
+                <a:latin typeface="Malgun Gothic"/>
+                <a:ea typeface="Malgun Gothic"/>
+                <a:cs typeface="Malgun Gothic"/>
+              </a:defRPr>
+            </a:lvl6pPr>
+            <a:lvl7pPr algn="ctr">
+              <a:defRPr sz="2175" b="0">
+                <a:solidFill>
+                  <a:srgbClr val="4D5A68"/>
+                </a:solidFill>
+                <a:latin typeface="Malgun Gothic"/>
+                <a:ea typeface="Malgun Gothic"/>
+                <a:cs typeface="Malgun Gothic"/>
+              </a:defRPr>
+            </a:lvl7pPr>
+            <a:lvl8pPr algn="ctr">
+              <a:defRPr sz="2175" b="0">
+                <a:solidFill>
+                  <a:srgbClr val="4D5A68"/>
+                </a:solidFill>
+                <a:latin typeface="Malgun Gothic"/>
+                <a:ea typeface="Malgun Gothic"/>
+                <a:cs typeface="Malgun Gothic"/>
+              </a:defRPr>
+            </a:lvl8pPr>
+            <a:lvl9pPr algn="ctr">
+              <a:defRPr sz="2175" b="0">
+                <a:solidFill>
+                  <a:srgbClr val="4D5A68"/>
+                </a:solidFill>
+                <a:latin typeface="Malgun Gothic"/>
+                <a:ea typeface="Malgun Gothic"/>
+                <a:cs typeface="Malgun Gothic"/>
+              </a:defRPr>
+            </a:lvl9pPr>
+          </a:lstStyle>
+          <a:p xmlns:a="http://schemas.openxmlformats.org/drawingml/2006/main">
+            <a:pPr algn="ctr">
+              <a:defRPr sz="2175" b="0">
+                <a:solidFill>
+                  <a:srgbClr val="4D5A68"/>
+                </a:solidFill>
+                <a:latin typeface="Malgun Gothic"/>
+                <a:ea typeface="Malgun Gothic"/>
+                <a:cs typeface="Malgun Gothic"/>
+              </a:defRPr>
+            </a:pPr>
+            <a:r>
+              <a:rPr sz="2175" b="0">
+                <a:solidFill>
+                  <a:srgbClr val="4D5A68"/>
+                </a:solidFill>
+                <a:latin typeface="Malgun Gothic"/>
+                <a:ea typeface="Malgun Gothic"/>
+                <a:cs typeface="Malgun Gothic"/>
+              </a:rPr>
+              <a:t>▾</a:t>
+            </a:r>
+          </a:p>
+        </p:txBody>
+      </p:sp>
+      <p:sp>
+        <p:nvSpPr>
+          <p:cNvPr id="11" name="">
+            <a:extLst xmlns:a="http://schemas.openxmlformats.org/drawingml/2006/main">
+              <a:ext uri="{FF2B5EF4-FFF2-40B4-BE49-F238E27FC236}">
+                <a16:creationId xmlns:a16="http://schemas.microsoft.com/office/drawing/2014/main" id="{6F28C9EB-D3A9-4D9F-89AE-DF7829BF8647}"/>
+              </a:ext>
+            </a:extLst>
+          </p:cNvPr>
+          <p:cNvSpPr>
+            <a:spLocks xmlns:a="http://schemas.openxmlformats.org/drawingml/2006/main" noGrp="1"/>
+          </p:cNvSpPr>
+          <p:nvPr/>
+        </p:nvSpPr>
+        <p:spPr>
+          <a:xfrm xmlns:a="http://schemas.openxmlformats.org/drawingml/2006/main">
+            <a:off x="609600" y="3000375"/>
+            <a:ext cx="4343400" cy="1428750"/>
+          </a:xfrm>
+          <a:prstGeom xmlns:a="http://schemas.openxmlformats.org/drawingml/2006/main" prst="rect">
+            <a:avLst/>
+          </a:prstGeom>
+          <a:solidFill xmlns:a="http://schemas.openxmlformats.org/drawingml/2006/main">
+            <a:srgbClr val="FFFFFF"/>
+          </a:solidFill>
+          <a:ln xmlns:a="http://schemas.openxmlformats.org/drawingml/2006/main" w="19050">
+            <a:solidFill>
+              <a:srgbClr val="C7D0DA"/>
+            </a:solidFill>
+            <a:prstDash val="solid"/>
+          </a:ln>
+        </p:spPr>
+      </p:sp>
+      <p:sp>
+        <p:nvSpPr>
+          <p:cNvPr id="12" name="ChatGPT">
+            <a:extLst xmlns:a="http://schemas.openxmlformats.org/drawingml/2006/main">
+              <a:ext uri="{FF2B5EF4-FFF2-40B4-BE49-F238E27FC236}">
+                <a16:creationId xmlns:a16="http://schemas.microsoft.com/office/drawing/2014/main" id="{6AB98D71-D04A-48A5-99E7-4D891E9A9EE5}"/>
+              </a:ext>
+            </a:extLst>
+          </p:cNvPr>
+          <p:cNvSpPr>
+            <a:spLocks xmlns:a="http://schemas.openxmlformats.org/drawingml/2006/main" noGrp="1"/>
+          </p:cNvSpPr>
+          <p:nvPr/>
+        </p:nvSpPr>
+        <p:spPr>
+          <a:xfrm xmlns:a="http://schemas.openxmlformats.org/drawingml/2006/main">
+            <a:off x="838200" y="3124200"/>
+            <a:ext cx="3657600" cy="428625"/>
+          </a:xfrm>
+          <a:prstGeom xmlns:a="http://schemas.openxmlformats.org/drawingml/2006/main" prst="rect">
+            <a:avLst/>
+          </a:prstGeom>
+          <a:noFill xmlns:a="http://schemas.openxmlformats.org/drawingml/2006/main"/>
+          <a:ln xmlns:a="http://schemas.openxmlformats.org/drawingml/2006/main" w="0">
+            <a:noFill/>
+          </a:ln>
+        </p:spPr>
+        <p:txBody>
+          <a:bodyPr xmlns:a="http://schemas.openxmlformats.org/drawingml/2006/main" wrap="none" lIns="0" tIns="0" rIns="0" bIns="0" anchor="ctr">
+            <a:noAutofit/>
+          </a:bodyPr>
+          <a:lstStyle xmlns:a="http://schemas.openxmlformats.org/drawingml/2006/main">
+            <a:defPPr algn="l">
+              <a:defRPr sz="2175" b="0">
+                <a:solidFill>
+                  <a:srgbClr val="4D5A68"/>
+                </a:solidFill>
+                <a:latin typeface="Malgun Gothic"/>
+                <a:ea typeface="Malgun Gothic"/>
+                <a:cs typeface="Malgun Gothic"/>
+              </a:defRPr>
+            </a:defPPr>
+            <a:lvl1pPr algn="l">
+              <a:defRPr sz="2175" b="0">
+                <a:solidFill>
+                  <a:srgbClr val="4D5A68"/>
+                </a:solidFill>
+                <a:latin typeface="Malgun Gothic"/>
+                <a:ea typeface="Malgun Gothic"/>
+                <a:cs typeface="Malgun Gothic"/>
+              </a:defRPr>
+            </a:lvl1pPr>
+            <a:lvl2pPr algn="l">
+              <a:defRPr sz="2175" b="0">
+                <a:solidFill>
+                  <a:srgbClr val="4D5A68"/>
+                </a:solidFill>
+                <a:latin typeface="Malgun Gothic"/>
+                <a:ea typeface="Malgun Gothic"/>
+                <a:cs typeface="Malgun Gothic"/>
+              </a:defRPr>
+            </a:lvl2pPr>
+            <a:lvl3pPr algn="l">
+              <a:defRPr sz="2175" b="0">
+                <a:solidFill>
+                  <a:srgbClr val="4D5A68"/>
+                </a:solidFill>
+                <a:latin typeface="Malgun Gothic"/>
+                <a:ea typeface="Malgun Gothic"/>
+                <a:cs typeface="Malgun Gothic"/>
+              </a:defRPr>
+            </a:lvl3pPr>
+            <a:lvl4pPr algn="l">
+              <a:defRPr sz="2175" b="0">
+                <a:solidFill>
+                  <a:srgbClr val="4D5A68"/>
+                </a:solidFill>
+                <a:latin typeface="Malgun Gothic"/>
+                <a:ea typeface="Malgun Gothic"/>
+                <a:cs typeface="Malgun Gothic"/>
+              </a:defRPr>
+            </a:lvl4pPr>
+            <a:lvl5pPr algn="l">
+              <a:defRPr sz="2175" b="0">
+                <a:solidFill>
+                  <a:srgbClr val="4D5A68"/>
+                </a:solidFill>
+                <a:latin typeface="Malgun Gothic"/>
+                <a:ea typeface="Malgun Gothic"/>
+                <a:cs typeface="Malgun Gothic"/>
+              </a:defRPr>
+            </a:lvl5pPr>
+            <a:lvl6pPr algn="l">
+              <a:defRPr sz="2175" b="0">
+                <a:solidFill>
+                  <a:srgbClr val="4D5A68"/>
+                </a:solidFill>
+                <a:latin typeface="Malgun Gothic"/>
+                <a:ea typeface="Malgun Gothic"/>
+                <a:cs typeface="Malgun Gothic"/>
+              </a:defRPr>
+            </a:lvl6pPr>
+            <a:lvl7pPr algn="l">
+              <a:defRPr sz="2175" b="0">
+                <a:solidFill>
+                  <a:srgbClr val="4D5A68"/>
+                </a:solidFill>
+                <a:latin typeface="Malgun Gothic"/>
+                <a:ea typeface="Malgun Gothic"/>
+                <a:cs typeface="Malgun Gothic"/>
+              </a:defRPr>
+            </a:lvl7pPr>
+            <a:lvl8pPr algn="l">
+              <a:defRPr sz="2175" b="0">
+                <a:solidFill>
+                  <a:srgbClr val="4D5A68"/>
+                </a:solidFill>
+                <a:latin typeface="Malgun Gothic"/>
+                <a:ea typeface="Malgun Gothic"/>
+                <a:cs typeface="Malgun Gothic"/>
+              </a:defRPr>
+            </a:lvl8pPr>
+            <a:lvl9pPr algn="l">
+              <a:defRPr sz="2175" b="0">
+                <a:solidFill>
+                  <a:srgbClr val="4D5A68"/>
+                </a:solidFill>
+                <a:latin typeface="Malgun Gothic"/>
+                <a:ea typeface="Malgun Gothic"/>
+                <a:cs typeface="Malgun Gothic"/>
+              </a:defRPr>
+            </a:lvl9pPr>
+          </a:lstStyle>
+          <a:p xmlns:a="http://schemas.openxmlformats.org/drawingml/2006/main">
+            <a:pPr algn="l">
+              <a:defRPr sz="2175" b="0">
+                <a:solidFill>
+                  <a:srgbClr val="4D5A68"/>
+                </a:solidFill>
+                <a:latin typeface="Malgun Gothic"/>
+                <a:ea typeface="Malgun Gothic"/>
+                <a:cs typeface="Malgun Gothic"/>
+              </a:defRPr>
+            </a:pPr>
+            <a:r>
+              <a:rPr sz="2175" b="0">
+                <a:solidFill>
+                  <a:srgbClr val="4D5A68"/>
+                </a:solidFill>
+                <a:latin typeface="Malgun Gothic"/>
+                <a:ea typeface="Malgun Gothic"/>
+                <a:cs typeface="Malgun Gothic"/>
+              </a:rPr>
+              <a:t>ChatGPT</a:t>
+            </a:r>
+          </a:p>
+        </p:txBody>
+      </p:sp>
+      <p:sp>
+        <p:nvSpPr>
+          <p:cNvPr id="13" name="">
+            <a:extLst xmlns:a="http://schemas.openxmlformats.org/drawingml/2006/main">
+              <a:ext uri="{FF2B5EF4-FFF2-40B4-BE49-F238E27FC236}">
+                <a16:creationId xmlns:a16="http://schemas.microsoft.com/office/drawing/2014/main" id="{5D4831F5-389E-45DD-8C35-7AB9C43374E2}"/>
+              </a:ext>
+            </a:extLst>
+          </p:cNvPr>
+          <p:cNvSpPr>
+            <a:spLocks xmlns:a="http://schemas.openxmlformats.org/drawingml/2006/main" noGrp="1"/>
+          </p:cNvSpPr>
+          <p:nvPr/>
+        </p:nvSpPr>
+        <p:spPr>
+          <a:xfrm xmlns:a="http://schemas.openxmlformats.org/drawingml/2006/main">
+            <a:off x="704850" y="3667125"/>
+            <a:ext cx="4152900" cy="609600"/>
+          </a:xfrm>
+          <a:prstGeom xmlns:a="http://schemas.openxmlformats.org/drawingml/2006/main" prst="rect">
+            <a:avLst/>
+          </a:prstGeom>
+          <a:solidFill xmlns:a="http://schemas.openxmlformats.org/drawingml/2006/main">
+            <a:srgbClr val="E0EFF0"/>
+          </a:solidFill>
+          <a:ln xmlns:a="http://schemas.openxmlformats.org/drawingml/2006/main" w="0">
+            <a:noFill/>
+            <a:prstDash val="solid"/>
+          </a:ln>
+        </p:spPr>
+      </p:sp>
+      <p:sp>
+        <p:nvSpPr>
+          <p:cNvPr id="14" name="Codex">
+            <a:extLst xmlns:a="http://schemas.openxmlformats.org/drawingml/2006/main">
+              <a:ext uri="{FF2B5EF4-FFF2-40B4-BE49-F238E27FC236}">
+                <a16:creationId xmlns:a16="http://schemas.microsoft.com/office/drawing/2014/main" id="{A6AD44A9-04DB-4C33-B23F-81943BF511B6}"/>
+              </a:ext>
+            </a:extLst>
+          </p:cNvPr>
+          <p:cNvSpPr>
+            <a:spLocks xmlns:a="http://schemas.openxmlformats.org/drawingml/2006/main" noGrp="1"/>
+          </p:cNvSpPr>
+          <p:nvPr/>
+        </p:nvSpPr>
+        <p:spPr>
+          <a:xfrm xmlns:a="http://schemas.openxmlformats.org/drawingml/2006/main">
+            <a:off x="838200" y="3752850"/>
+            <a:ext cx="3352800" cy="419100"/>
           </a:xfrm>
           <a:prstGeom xmlns:a="http://schemas.openxmlformats.org/drawingml/2006/main" prst="rect">
             <a:avLst/>
@@ -29451,17 +32090,17 @@
                 <a:ea typeface="Malgun Gothic"/>
                 <a:cs typeface="Malgun Gothic"/>
               </a:rPr>
-              <a:t>볼 수 있는 것</a:t>
+              <a:t>Codex</a:t>
             </a:r>
           </a:p>
         </p:txBody>
       </p:sp>
       <p:sp>
         <p:nvSpPr>
-          <p:cNvPr id="8" name="정해야 하는 것">
+          <p:cNvPr id="15" name="✓">
             <a:extLst xmlns:a="http://schemas.openxmlformats.org/drawingml/2006/main">
               <a:ext uri="{FF2B5EF4-FFF2-40B4-BE49-F238E27FC236}">
-                <a16:creationId xmlns:a16="http://schemas.microsoft.com/office/drawing/2014/main" id="{79FC7A0B-8F42-4A18-9EB5-45AD1AE4A328}"/>
+                <a16:creationId xmlns:a16="http://schemas.microsoft.com/office/drawing/2014/main" id="{3C2C8777-9A9E-4442-A196-9A2A1DFD5593}"/>
               </a:ext>
             </a:extLst>
           </p:cNvPr>
@@ -29472,8 +32111,166 @@
         </p:nvSpPr>
         <p:spPr>
           <a:xfrm xmlns:a="http://schemas.openxmlformats.org/drawingml/2006/main">
-            <a:off x="7181850" y="2352675"/>
-            <a:ext cx="4400550" cy="428625"/>
+            <a:off x="4324350" y="3762375"/>
+            <a:ext cx="400050" cy="400050"/>
+          </a:xfrm>
+          <a:prstGeom xmlns:a="http://schemas.openxmlformats.org/drawingml/2006/main" prst="rect">
+            <a:avLst/>
+          </a:prstGeom>
+          <a:noFill xmlns:a="http://schemas.openxmlformats.org/drawingml/2006/main"/>
+          <a:ln xmlns:a="http://schemas.openxmlformats.org/drawingml/2006/main" w="0">
+            <a:noFill/>
+          </a:ln>
+        </p:spPr>
+        <p:txBody>
+          <a:bodyPr xmlns:a="http://schemas.openxmlformats.org/drawingml/2006/main" wrap="none" lIns="0" tIns="0" rIns="0" bIns="0" anchor="ctr">
+            <a:noAutofit/>
+          </a:bodyPr>
+          <a:lstStyle xmlns:a="http://schemas.openxmlformats.org/drawingml/2006/main">
+            <a:defPPr algn="ctr">
+              <a:defRPr sz="2250" b="1">
+                <a:solidFill>
+                  <a:srgbClr val="0B6172"/>
+                </a:solidFill>
+                <a:latin typeface="Malgun Gothic"/>
+                <a:ea typeface="Malgun Gothic"/>
+                <a:cs typeface="Malgun Gothic"/>
+              </a:defRPr>
+            </a:defPPr>
+            <a:lvl1pPr algn="ctr">
+              <a:defRPr sz="2250" b="1">
+                <a:solidFill>
+                  <a:srgbClr val="0B6172"/>
+                </a:solidFill>
+                <a:latin typeface="Malgun Gothic"/>
+                <a:ea typeface="Malgun Gothic"/>
+                <a:cs typeface="Malgun Gothic"/>
+              </a:defRPr>
+            </a:lvl1pPr>
+            <a:lvl2pPr algn="ctr">
+              <a:defRPr sz="2250" b="1">
+                <a:solidFill>
+                  <a:srgbClr val="0B6172"/>
+                </a:solidFill>
+                <a:latin typeface="Malgun Gothic"/>
+                <a:ea typeface="Malgun Gothic"/>
+                <a:cs typeface="Malgun Gothic"/>
+              </a:defRPr>
+            </a:lvl2pPr>
+            <a:lvl3pPr algn="ctr">
+              <a:defRPr sz="2250" b="1">
+                <a:solidFill>
+                  <a:srgbClr val="0B6172"/>
+                </a:solidFill>
+                <a:latin typeface="Malgun Gothic"/>
+                <a:ea typeface="Malgun Gothic"/>
+                <a:cs typeface="Malgun Gothic"/>
+              </a:defRPr>
+            </a:lvl3pPr>
+            <a:lvl4pPr algn="ctr">
+              <a:defRPr sz="2250" b="1">
+                <a:solidFill>
+                  <a:srgbClr val="0B6172"/>
+                </a:solidFill>
+                <a:latin typeface="Malgun Gothic"/>
+                <a:ea typeface="Malgun Gothic"/>
+                <a:cs typeface="Malgun Gothic"/>
+              </a:defRPr>
+            </a:lvl4pPr>
+            <a:lvl5pPr algn="ctr">
+              <a:defRPr sz="2250" b="1">
+                <a:solidFill>
+                  <a:srgbClr val="0B6172"/>
+                </a:solidFill>
+                <a:latin typeface="Malgun Gothic"/>
+                <a:ea typeface="Malgun Gothic"/>
+                <a:cs typeface="Malgun Gothic"/>
+              </a:defRPr>
+            </a:lvl5pPr>
+            <a:lvl6pPr algn="ctr">
+              <a:defRPr sz="2250" b="1">
+                <a:solidFill>
+                  <a:srgbClr val="0B6172"/>
+                </a:solidFill>
+                <a:latin typeface="Malgun Gothic"/>
+                <a:ea typeface="Malgun Gothic"/>
+                <a:cs typeface="Malgun Gothic"/>
+              </a:defRPr>
+            </a:lvl6pPr>
+            <a:lvl7pPr algn="ctr">
+              <a:defRPr sz="2250" b="1">
+                <a:solidFill>
+                  <a:srgbClr val="0B6172"/>
+                </a:solidFill>
+                <a:latin typeface="Malgun Gothic"/>
+                <a:ea typeface="Malgun Gothic"/>
+                <a:cs typeface="Malgun Gothic"/>
+              </a:defRPr>
+            </a:lvl7pPr>
+            <a:lvl8pPr algn="ctr">
+              <a:defRPr sz="2250" b="1">
+                <a:solidFill>
+                  <a:srgbClr val="0B6172"/>
+                </a:solidFill>
+                <a:latin typeface="Malgun Gothic"/>
+                <a:ea typeface="Malgun Gothic"/>
+                <a:cs typeface="Malgun Gothic"/>
+              </a:defRPr>
+            </a:lvl8pPr>
+            <a:lvl9pPr algn="ctr">
+              <a:defRPr sz="2250" b="1">
+                <a:solidFill>
+                  <a:srgbClr val="0B6172"/>
+                </a:solidFill>
+                <a:latin typeface="Malgun Gothic"/>
+                <a:ea typeface="Malgun Gothic"/>
+                <a:cs typeface="Malgun Gothic"/>
+              </a:defRPr>
+            </a:lvl9pPr>
+          </a:lstStyle>
+          <a:p xmlns:a="http://schemas.openxmlformats.org/drawingml/2006/main">
+            <a:pPr algn="ctr">
+              <a:defRPr sz="2250" b="1">
+                <a:solidFill>
+                  <a:srgbClr val="0B6172"/>
+                </a:solidFill>
+                <a:latin typeface="Malgun Gothic"/>
+                <a:ea typeface="Malgun Gothic"/>
+                <a:cs typeface="Malgun Gothic"/>
+              </a:defRPr>
+            </a:pPr>
+            <a:r>
+              <a:rPr sz="2250" b="1">
+                <a:solidFill>
+                  <a:srgbClr val="0B6172"/>
+                </a:solidFill>
+                <a:latin typeface="Malgun Gothic"/>
+                <a:ea typeface="Malgun Gothic"/>
+                <a:cs typeface="Malgun Gothic"/>
+              </a:rPr>
+              <a:t>✓</a:t>
+            </a:r>
+          </a:p>
+        </p:txBody>
+      </p:sp>
+      <p:sp>
+        <p:nvSpPr>
+          <p:cNvPr id="16" name="전환 메뉴 재구성">
+            <a:extLst xmlns:a="http://schemas.openxmlformats.org/drawingml/2006/main">
+              <a:ext uri="{FF2B5EF4-FFF2-40B4-BE49-F238E27FC236}">
+                <a16:creationId xmlns:a16="http://schemas.microsoft.com/office/drawing/2014/main" id="{28F95AE9-606D-4F95-8538-C2BD107B2181}"/>
+              </a:ext>
+            </a:extLst>
+          </p:cNvPr>
+          <p:cNvSpPr>
+            <a:spLocks xmlns:a="http://schemas.openxmlformats.org/drawingml/2006/main" noGrp="1"/>
+          </p:cNvSpPr>
+          <p:nvPr/>
+        </p:nvSpPr>
+        <p:spPr>
+          <a:xfrm xmlns:a="http://schemas.openxmlformats.org/drawingml/2006/main">
+            <a:off x="609600" y="4619625"/>
+            <a:ext cx="4343400" cy="304800"/>
           </a:xfrm>
           <a:prstGeom xmlns:a="http://schemas.openxmlformats.org/drawingml/2006/main" prst="rect">
             <a:avLst/>
@@ -29489,9 +32286,9 @@
           </a:bodyPr>
           <a:lstStyle xmlns:a="http://schemas.openxmlformats.org/drawingml/2006/main">
             <a:defPPr algn="l">
-              <a:defRPr sz="2400" b="1">
-                <a:solidFill>
-                  <a:srgbClr val="0B6172"/>
+              <a:defRPr sz="1725" b="0">
+                <a:solidFill>
+                  <a:srgbClr val="4D5A68"/>
                 </a:solidFill>
                 <a:latin typeface="Malgun Gothic"/>
                 <a:ea typeface="Malgun Gothic"/>
@@ -29499,9 +32296,9 @@
               </a:defRPr>
             </a:defPPr>
             <a:lvl1pPr algn="l">
-              <a:defRPr sz="2400" b="1">
-                <a:solidFill>
-                  <a:srgbClr val="0B6172"/>
+              <a:defRPr sz="1725" b="0">
+                <a:solidFill>
+                  <a:srgbClr val="4D5A68"/>
                 </a:solidFill>
                 <a:latin typeface="Malgun Gothic"/>
                 <a:ea typeface="Malgun Gothic"/>
@@ -29509,9 +32306,9 @@
               </a:defRPr>
             </a:lvl1pPr>
             <a:lvl2pPr algn="l">
-              <a:defRPr sz="2400" b="1">
-                <a:solidFill>
-                  <a:srgbClr val="0B6172"/>
+              <a:defRPr sz="1725" b="0">
+                <a:solidFill>
+                  <a:srgbClr val="4D5A68"/>
                 </a:solidFill>
                 <a:latin typeface="Malgun Gothic"/>
                 <a:ea typeface="Malgun Gothic"/>
@@ -29519,9 +32316,9 @@
               </a:defRPr>
             </a:lvl2pPr>
             <a:lvl3pPr algn="l">
-              <a:defRPr sz="2400" b="1">
-                <a:solidFill>
-                  <a:srgbClr val="0B6172"/>
+              <a:defRPr sz="1725" b="0">
+                <a:solidFill>
+                  <a:srgbClr val="4D5A68"/>
                 </a:solidFill>
                 <a:latin typeface="Malgun Gothic"/>
                 <a:ea typeface="Malgun Gothic"/>
@@ -29529,9 +32326,9 @@
               </a:defRPr>
             </a:lvl3pPr>
             <a:lvl4pPr algn="l">
-              <a:defRPr sz="2400" b="1">
-                <a:solidFill>
-                  <a:srgbClr val="0B6172"/>
+              <a:defRPr sz="1725" b="0">
+                <a:solidFill>
+                  <a:srgbClr val="4D5A68"/>
                 </a:solidFill>
                 <a:latin typeface="Malgun Gothic"/>
                 <a:ea typeface="Malgun Gothic"/>
@@ -29539,9 +32336,9 @@
               </a:defRPr>
             </a:lvl4pPr>
             <a:lvl5pPr algn="l">
-              <a:defRPr sz="2400" b="1">
-                <a:solidFill>
-                  <a:srgbClr val="0B6172"/>
+              <a:defRPr sz="1725" b="0">
+                <a:solidFill>
+                  <a:srgbClr val="4D5A68"/>
                 </a:solidFill>
                 <a:latin typeface="Malgun Gothic"/>
                 <a:ea typeface="Malgun Gothic"/>
@@ -29549,9 +32346,9 @@
               </a:defRPr>
             </a:lvl5pPr>
             <a:lvl6pPr algn="l">
-              <a:defRPr sz="2400" b="1">
-                <a:solidFill>
-                  <a:srgbClr val="0B6172"/>
+              <a:defRPr sz="1725" b="0">
+                <a:solidFill>
+                  <a:srgbClr val="4D5A68"/>
                 </a:solidFill>
                 <a:latin typeface="Malgun Gothic"/>
                 <a:ea typeface="Malgun Gothic"/>
@@ -29559,9 +32356,9 @@
               </a:defRPr>
             </a:lvl6pPr>
             <a:lvl7pPr algn="l">
-              <a:defRPr sz="2400" b="1">
-                <a:solidFill>
-                  <a:srgbClr val="0B6172"/>
+              <a:defRPr sz="1725" b="0">
+                <a:solidFill>
+                  <a:srgbClr val="4D5A68"/>
                 </a:solidFill>
                 <a:latin typeface="Malgun Gothic"/>
                 <a:ea typeface="Malgun Gothic"/>
@@ -29569,9 +32366,9 @@
               </a:defRPr>
             </a:lvl7pPr>
             <a:lvl8pPr algn="l">
-              <a:defRPr sz="2400" b="1">
-                <a:solidFill>
-                  <a:srgbClr val="0B6172"/>
+              <a:defRPr sz="1725" b="0">
+                <a:solidFill>
+                  <a:srgbClr val="4D5A68"/>
                 </a:solidFill>
                 <a:latin typeface="Malgun Gothic"/>
                 <a:ea typeface="Malgun Gothic"/>
@@ -29579,9 +32376,9 @@
               </a:defRPr>
             </a:lvl8pPr>
             <a:lvl9pPr algn="l">
-              <a:defRPr sz="2400" b="1">
-                <a:solidFill>
-                  <a:srgbClr val="0B6172"/>
+              <a:defRPr sz="1725" b="0">
+                <a:solidFill>
+                  <a:srgbClr val="4D5A68"/>
                 </a:solidFill>
                 <a:latin typeface="Malgun Gothic"/>
                 <a:ea typeface="Malgun Gothic"/>
@@ -29591,9 +32388,9 @@
           </a:lstStyle>
           <a:p xmlns:a="http://schemas.openxmlformats.org/drawingml/2006/main">
             <a:pPr algn="l">
-              <a:defRPr sz="2400" b="1">
-                <a:solidFill>
-                  <a:srgbClr val="0B6172"/>
+              <a:defRPr sz="1725" b="0">
+                <a:solidFill>
+                  <a:srgbClr val="4D5A68"/>
                 </a:solidFill>
                 <a:latin typeface="Malgun Gothic"/>
                 <a:ea typeface="Malgun Gothic"/>
@@ -29601,25 +32398,25 @@
               </a:defRPr>
             </a:pPr>
             <a:r>
-              <a:rPr sz="2400" b="1">
-                <a:solidFill>
-                  <a:srgbClr val="0B6172"/>
+              <a:rPr sz="1725" b="0">
+                <a:solidFill>
+                  <a:srgbClr val="4D5A68"/>
                 </a:solidFill>
                 <a:latin typeface="Malgun Gothic"/>
                 <a:ea typeface="Malgun Gothic"/>
                 <a:cs typeface="Malgun Gothic"/>
               </a:rPr>
-              <a:t>정해야 하는 것</a:t>
+              <a:t>전환 메뉴 재구성</a:t>
             </a:r>
           </a:p>
         </p:txBody>
       </p:sp>
       <p:sp>
         <p:nvSpPr>
-          <p:cNvPr id="9" name="">
+          <p:cNvPr id="17" name="">
             <a:extLst xmlns:a="http://schemas.openxmlformats.org/drawingml/2006/main">
               <a:ext uri="{FF2B5EF4-FFF2-40B4-BE49-F238E27FC236}">
-                <a16:creationId xmlns:a16="http://schemas.microsoft.com/office/drawing/2014/main" id="{B0643450-1908-4D46-B432-035DA02BF711}"/>
+                <a16:creationId xmlns:a16="http://schemas.microsoft.com/office/drawing/2014/main" id="{D5206131-1069-415A-A2C2-E16440C90382}"/>
               </a:ext>
             </a:extLst>
           </p:cNvPr>
@@ -29630,27 +32427,26 @@
         </p:nvSpPr>
         <p:spPr>
           <a:xfrm xmlns:a="http://schemas.openxmlformats.org/drawingml/2006/main">
-            <a:off x="609600" y="2981325"/>
-            <a:ext cx="4838700" cy="0"/>
+            <a:off x="5248275" y="3362325"/>
+            <a:ext cx="581025" cy="276225"/>
           </a:xfrm>
-          <a:prstGeom xmlns:a="http://schemas.openxmlformats.org/drawingml/2006/main" prst="line">
+          <a:prstGeom xmlns:a="http://schemas.openxmlformats.org/drawingml/2006/main" prst="rightArrow">
             <a:avLst/>
           </a:prstGeom>
-          <a:noFill xmlns:a="http://schemas.openxmlformats.org/drawingml/2006/main"/>
-          <a:ln xmlns:a="http://schemas.openxmlformats.org/drawingml/2006/main" w="9525">
-            <a:solidFill>
-              <a:srgbClr val="C7D0DA"/>
-            </a:solidFill>
-            <a:prstDash val="solid"/>
+          <a:solidFill xmlns:a="http://schemas.openxmlformats.org/drawingml/2006/main">
+            <a:srgbClr val="0B6172"/>
+          </a:solidFill>
+          <a:ln xmlns:a="http://schemas.openxmlformats.org/drawingml/2006/main" w="0">
+            <a:noFill/>
           </a:ln>
         </p:spPr>
       </p:sp>
       <p:sp>
         <p:nvSpPr>
-          <p:cNvPr id="10" name="">
+          <p:cNvPr id="18" name="01">
             <a:extLst xmlns:a="http://schemas.openxmlformats.org/drawingml/2006/main">
               <a:ext uri="{FF2B5EF4-FFF2-40B4-BE49-F238E27FC236}">
-                <a16:creationId xmlns:a16="http://schemas.microsoft.com/office/drawing/2014/main" id="{D279EC18-2111-4A83-AADE-F0A4CB6CC7CF}"/>
+                <a16:creationId xmlns:a16="http://schemas.microsoft.com/office/drawing/2014/main" id="{99CD691B-4E37-48AC-9338-44D42CBCFD97}"/>
               </a:ext>
             </a:extLst>
           </p:cNvPr>
@@ -29661,39 +32457,8 @@
         </p:nvSpPr>
         <p:spPr>
           <a:xfrm xmlns:a="http://schemas.openxmlformats.org/drawingml/2006/main">
-            <a:off x="7181850" y="2981325"/>
-            <a:ext cx="4400550" cy="0"/>
-          </a:xfrm>
-          <a:prstGeom xmlns:a="http://schemas.openxmlformats.org/drawingml/2006/main" prst="line">
-            <a:avLst/>
-          </a:prstGeom>
-          <a:noFill xmlns:a="http://schemas.openxmlformats.org/drawingml/2006/main"/>
-          <a:ln xmlns:a="http://schemas.openxmlformats.org/drawingml/2006/main" w="9525">
-            <a:solidFill>
-              <a:srgbClr val="C7D0DA"/>
-            </a:solidFill>
-            <a:prstDash val="solid"/>
-          </a:ln>
-        </p:spPr>
-      </p:sp>
-      <p:sp>
-        <p:nvSpPr>
-          <p:cNvPr id="11" name="파일&#10;구현&#10;테스트">
-            <a:extLst xmlns:a="http://schemas.openxmlformats.org/drawingml/2006/main">
-              <a:ext uri="{FF2B5EF4-FFF2-40B4-BE49-F238E27FC236}">
-                <a16:creationId xmlns:a16="http://schemas.microsoft.com/office/drawing/2014/main" id="{DA10C8B2-C404-4821-9A74-FFFF4ED9D697}"/>
-              </a:ext>
-            </a:extLst>
-          </p:cNvPr>
-          <p:cNvSpPr>
-            <a:spLocks xmlns:a="http://schemas.openxmlformats.org/drawingml/2006/main" noGrp="1"/>
-          </p:cNvSpPr>
-          <p:nvPr/>
-        </p:nvSpPr>
-        <p:spPr>
-          <a:xfrm xmlns:a="http://schemas.openxmlformats.org/drawingml/2006/main">
-            <a:off x="609600" y="3295650"/>
-            <a:ext cx="4838700" cy="1676400"/>
+            <a:off x="6229350" y="2295525"/>
+            <a:ext cx="571500" cy="323850"/>
           </a:xfrm>
           <a:prstGeom xmlns:a="http://schemas.openxmlformats.org/drawingml/2006/main" prst="rect">
             <a:avLst/>
@@ -29709,9 +32474,9 @@
           </a:bodyPr>
           <a:lstStyle xmlns:a="http://schemas.openxmlformats.org/drawingml/2006/main">
             <a:defPPr algn="l">
-              <a:defRPr sz="2700" b="0">
-                <a:solidFill>
-                  <a:srgbClr val="17212B"/>
+              <a:defRPr sz="1725" b="1">
+                <a:solidFill>
+                  <a:srgbClr val="0B6172"/>
                 </a:solidFill>
                 <a:latin typeface="Malgun Gothic"/>
                 <a:ea typeface="Malgun Gothic"/>
@@ -29719,9 +32484,9 @@
               </a:defRPr>
             </a:defPPr>
             <a:lvl1pPr algn="l">
-              <a:defRPr sz="2700" b="0">
-                <a:solidFill>
-                  <a:srgbClr val="17212B"/>
+              <a:defRPr sz="1725" b="1">
+                <a:solidFill>
+                  <a:srgbClr val="0B6172"/>
                 </a:solidFill>
                 <a:latin typeface="Malgun Gothic"/>
                 <a:ea typeface="Malgun Gothic"/>
@@ -29729,9 +32494,9 @@
               </a:defRPr>
             </a:lvl1pPr>
             <a:lvl2pPr algn="l">
-              <a:defRPr sz="2700" b="0">
-                <a:solidFill>
-                  <a:srgbClr val="17212B"/>
+              <a:defRPr sz="1725" b="1">
+                <a:solidFill>
+                  <a:srgbClr val="0B6172"/>
                 </a:solidFill>
                 <a:latin typeface="Malgun Gothic"/>
                 <a:ea typeface="Malgun Gothic"/>
@@ -29739,9 +32504,9 @@
               </a:defRPr>
             </a:lvl2pPr>
             <a:lvl3pPr algn="l">
-              <a:defRPr sz="2700" b="0">
-                <a:solidFill>
-                  <a:srgbClr val="17212B"/>
+              <a:defRPr sz="1725" b="1">
+                <a:solidFill>
+                  <a:srgbClr val="0B6172"/>
                 </a:solidFill>
                 <a:latin typeface="Malgun Gothic"/>
                 <a:ea typeface="Malgun Gothic"/>
@@ -29749,9 +32514,9 @@
               </a:defRPr>
             </a:lvl3pPr>
             <a:lvl4pPr algn="l">
-              <a:defRPr sz="2700" b="0">
-                <a:solidFill>
-                  <a:srgbClr val="17212B"/>
+              <a:defRPr sz="1725" b="1">
+                <a:solidFill>
+                  <a:srgbClr val="0B6172"/>
                 </a:solidFill>
                 <a:latin typeface="Malgun Gothic"/>
                 <a:ea typeface="Malgun Gothic"/>
@@ -29759,9 +32524,9 @@
               </a:defRPr>
             </a:lvl4pPr>
             <a:lvl5pPr algn="l">
-              <a:defRPr sz="2700" b="0">
-                <a:solidFill>
-                  <a:srgbClr val="17212B"/>
+              <a:defRPr sz="1725" b="1">
+                <a:solidFill>
+                  <a:srgbClr val="0B6172"/>
                 </a:solidFill>
                 <a:latin typeface="Malgun Gothic"/>
                 <a:ea typeface="Malgun Gothic"/>
@@ -29769,9 +32534,9 @@
               </a:defRPr>
             </a:lvl5pPr>
             <a:lvl6pPr algn="l">
-              <a:defRPr sz="2700" b="0">
-                <a:solidFill>
-                  <a:srgbClr val="17212B"/>
+              <a:defRPr sz="1725" b="1">
+                <a:solidFill>
+                  <a:srgbClr val="0B6172"/>
                 </a:solidFill>
                 <a:latin typeface="Malgun Gothic"/>
                 <a:ea typeface="Malgun Gothic"/>
@@ -29779,9 +32544,9 @@
               </a:defRPr>
             </a:lvl6pPr>
             <a:lvl7pPr algn="l">
-              <a:defRPr sz="2700" b="0">
-                <a:solidFill>
-                  <a:srgbClr val="17212B"/>
+              <a:defRPr sz="1725" b="1">
+                <a:solidFill>
+                  <a:srgbClr val="0B6172"/>
                 </a:solidFill>
                 <a:latin typeface="Malgun Gothic"/>
                 <a:ea typeface="Malgun Gothic"/>
@@ -29789,9 +32554,9 @@
               </a:defRPr>
             </a:lvl7pPr>
             <a:lvl8pPr algn="l">
-              <a:defRPr sz="2700" b="0">
-                <a:solidFill>
-                  <a:srgbClr val="17212B"/>
+              <a:defRPr sz="1725" b="1">
+                <a:solidFill>
+                  <a:srgbClr val="0B6172"/>
                 </a:solidFill>
                 <a:latin typeface="Malgun Gothic"/>
                 <a:ea typeface="Malgun Gothic"/>
@@ -29799,9 +32564,9 @@
               </a:defRPr>
             </a:lvl8pPr>
             <a:lvl9pPr algn="l">
-              <a:defRPr sz="2700" b="0">
-                <a:solidFill>
-                  <a:srgbClr val="17212B"/>
+              <a:defRPr sz="1725" b="1">
+                <a:solidFill>
+                  <a:srgbClr val="0B6172"/>
                 </a:solidFill>
                 <a:latin typeface="Malgun Gothic"/>
                 <a:ea typeface="Malgun Gothic"/>
@@ -29811,9 +32576,9 @@
           </a:lstStyle>
           <a:p xmlns:a="http://schemas.openxmlformats.org/drawingml/2006/main">
             <a:pPr algn="l">
-              <a:defRPr sz="2700" b="0">
-                <a:solidFill>
-                  <a:srgbClr val="17212B"/>
+              <a:defRPr sz="1725" b="1">
+                <a:solidFill>
+                  <a:srgbClr val="0B6172"/>
                 </a:solidFill>
                 <a:latin typeface="Malgun Gothic"/>
                 <a:ea typeface="Malgun Gothic"/>
@@ -29821,71 +32586,25 @@
               </a:defRPr>
             </a:pPr>
             <a:r>
-              <a:rPr sz="2700" b="0">
-                <a:solidFill>
-                  <a:srgbClr val="17212B"/>
+              <a:rPr sz="1725" b="1">
+                <a:solidFill>
+                  <a:srgbClr val="0B6172"/>
                 </a:solidFill>
                 <a:latin typeface="Malgun Gothic"/>
                 <a:ea typeface="Malgun Gothic"/>
                 <a:cs typeface="Malgun Gothic"/>
               </a:rPr>
-              <a:t>파일</a:t>
-            </a:r>
-          </a:p>
-          <a:p xmlns:a="http://schemas.openxmlformats.org/drawingml/2006/main">
-            <a:pPr algn="l">
-              <a:defRPr sz="2700" b="0">
-                <a:solidFill>
-                  <a:srgbClr val="17212B"/>
-                </a:solidFill>
-                <a:latin typeface="Malgun Gothic"/>
-                <a:ea typeface="Malgun Gothic"/>
-                <a:cs typeface="Malgun Gothic"/>
-              </a:defRPr>
-            </a:pPr>
-            <a:r>
-              <a:rPr sz="2700" b="0">
-                <a:solidFill>
-                  <a:srgbClr val="17212B"/>
-                </a:solidFill>
-                <a:latin typeface="Malgun Gothic"/>
-                <a:ea typeface="Malgun Gothic"/>
-                <a:cs typeface="Malgun Gothic"/>
-              </a:rPr>
-              <a:t>구현</a:t>
-            </a:r>
-          </a:p>
-          <a:p xmlns:a="http://schemas.openxmlformats.org/drawingml/2006/main">
-            <a:pPr algn="l">
-              <a:defRPr sz="2700" b="0">
-                <a:solidFill>
-                  <a:srgbClr val="17212B"/>
-                </a:solidFill>
-                <a:latin typeface="Malgun Gothic"/>
-                <a:ea typeface="Malgun Gothic"/>
-                <a:cs typeface="Malgun Gothic"/>
-              </a:defRPr>
-            </a:pPr>
-            <a:r>
-              <a:rPr sz="2700" b="0">
-                <a:solidFill>
-                  <a:srgbClr val="17212B"/>
-                </a:solidFill>
-                <a:latin typeface="Malgun Gothic"/>
-                <a:ea typeface="Malgun Gothic"/>
-                <a:cs typeface="Malgun Gothic"/>
-              </a:rPr>
-              <a:t>테스트</a:t>
+              <a:t>01</a:t>
             </a:r>
           </a:p>
         </p:txBody>
       </p:sp>
       <p:sp>
         <p:nvSpPr>
-          <p:cNvPr id="12" name="원하는 변화&#10;허용할 범위&#10;완료 판단">
+          <p:cNvPr id="19" name="Codex 선택">
             <a:extLst xmlns:a="http://schemas.openxmlformats.org/drawingml/2006/main">
               <a:ext uri="{FF2B5EF4-FFF2-40B4-BE49-F238E27FC236}">
-                <a16:creationId xmlns:a16="http://schemas.microsoft.com/office/drawing/2014/main" id="{9F9CD4A6-4859-4981-B0EF-986979741556}"/>
+                <a16:creationId xmlns:a16="http://schemas.microsoft.com/office/drawing/2014/main" id="{96A9187E-1793-41AE-921D-4C626C8D9E9C}"/>
               </a:ext>
             </a:extLst>
           </p:cNvPr>
@@ -29896,370 +32615,8 @@
         </p:nvSpPr>
         <p:spPr>
           <a:xfrm xmlns:a="http://schemas.openxmlformats.org/drawingml/2006/main">
-            <a:off x="7181850" y="3295650"/>
-            <a:ext cx="4400550" cy="1676400"/>
-          </a:xfrm>
-          <a:prstGeom xmlns:a="http://schemas.openxmlformats.org/drawingml/2006/main" prst="rect">
-            <a:avLst/>
-          </a:prstGeom>
-          <a:noFill xmlns:a="http://schemas.openxmlformats.org/drawingml/2006/main"/>
-          <a:ln xmlns:a="http://schemas.openxmlformats.org/drawingml/2006/main" w="0">
-            <a:noFill/>
-          </a:ln>
-        </p:spPr>
-        <p:txBody>
-          <a:bodyPr xmlns:a="http://schemas.openxmlformats.org/drawingml/2006/main" wrap="none" lIns="0" tIns="0" rIns="0" bIns="0" anchor="ctr">
-            <a:noAutofit/>
-          </a:bodyPr>
-          <a:lstStyle xmlns:a="http://schemas.openxmlformats.org/drawingml/2006/main">
-            <a:defPPr algn="l">
-              <a:defRPr sz="2700" b="0">
-                <a:solidFill>
-                  <a:srgbClr val="17212B"/>
-                </a:solidFill>
-                <a:latin typeface="Malgun Gothic"/>
-                <a:ea typeface="Malgun Gothic"/>
-                <a:cs typeface="Malgun Gothic"/>
-              </a:defRPr>
-            </a:defPPr>
-            <a:lvl1pPr algn="l">
-              <a:defRPr sz="2700" b="0">
-                <a:solidFill>
-                  <a:srgbClr val="17212B"/>
-                </a:solidFill>
-                <a:latin typeface="Malgun Gothic"/>
-                <a:ea typeface="Malgun Gothic"/>
-                <a:cs typeface="Malgun Gothic"/>
-              </a:defRPr>
-            </a:lvl1pPr>
-            <a:lvl2pPr algn="l">
-              <a:defRPr sz="2700" b="0">
-                <a:solidFill>
-                  <a:srgbClr val="17212B"/>
-                </a:solidFill>
-                <a:latin typeface="Malgun Gothic"/>
-                <a:ea typeface="Malgun Gothic"/>
-                <a:cs typeface="Malgun Gothic"/>
-              </a:defRPr>
-            </a:lvl2pPr>
-            <a:lvl3pPr algn="l">
-              <a:defRPr sz="2700" b="0">
-                <a:solidFill>
-                  <a:srgbClr val="17212B"/>
-                </a:solidFill>
-                <a:latin typeface="Malgun Gothic"/>
-                <a:ea typeface="Malgun Gothic"/>
-                <a:cs typeface="Malgun Gothic"/>
-              </a:defRPr>
-            </a:lvl3pPr>
-            <a:lvl4pPr algn="l">
-              <a:defRPr sz="2700" b="0">
-                <a:solidFill>
-                  <a:srgbClr val="17212B"/>
-                </a:solidFill>
-                <a:latin typeface="Malgun Gothic"/>
-                <a:ea typeface="Malgun Gothic"/>
-                <a:cs typeface="Malgun Gothic"/>
-              </a:defRPr>
-            </a:lvl4pPr>
-            <a:lvl5pPr algn="l">
-              <a:defRPr sz="2700" b="0">
-                <a:solidFill>
-                  <a:srgbClr val="17212B"/>
-                </a:solidFill>
-                <a:latin typeface="Malgun Gothic"/>
-                <a:ea typeface="Malgun Gothic"/>
-                <a:cs typeface="Malgun Gothic"/>
-              </a:defRPr>
-            </a:lvl5pPr>
-            <a:lvl6pPr algn="l">
-              <a:defRPr sz="2700" b="0">
-                <a:solidFill>
-                  <a:srgbClr val="17212B"/>
-                </a:solidFill>
-                <a:latin typeface="Malgun Gothic"/>
-                <a:ea typeface="Malgun Gothic"/>
-                <a:cs typeface="Malgun Gothic"/>
-              </a:defRPr>
-            </a:lvl6pPr>
-            <a:lvl7pPr algn="l">
-              <a:defRPr sz="2700" b="0">
-                <a:solidFill>
-                  <a:srgbClr val="17212B"/>
-                </a:solidFill>
-                <a:latin typeface="Malgun Gothic"/>
-                <a:ea typeface="Malgun Gothic"/>
-                <a:cs typeface="Malgun Gothic"/>
-              </a:defRPr>
-            </a:lvl7pPr>
-            <a:lvl8pPr algn="l">
-              <a:defRPr sz="2700" b="0">
-                <a:solidFill>
-                  <a:srgbClr val="17212B"/>
-                </a:solidFill>
-                <a:latin typeface="Malgun Gothic"/>
-                <a:ea typeface="Malgun Gothic"/>
-                <a:cs typeface="Malgun Gothic"/>
-              </a:defRPr>
-            </a:lvl8pPr>
-            <a:lvl9pPr algn="l">
-              <a:defRPr sz="2700" b="0">
-                <a:solidFill>
-                  <a:srgbClr val="17212B"/>
-                </a:solidFill>
-                <a:latin typeface="Malgun Gothic"/>
-                <a:ea typeface="Malgun Gothic"/>
-                <a:cs typeface="Malgun Gothic"/>
-              </a:defRPr>
-            </a:lvl9pPr>
-          </a:lstStyle>
-          <a:p xmlns:a="http://schemas.openxmlformats.org/drawingml/2006/main">
-            <a:pPr algn="l">
-              <a:defRPr sz="2700" b="0">
-                <a:solidFill>
-                  <a:srgbClr val="17212B"/>
-                </a:solidFill>
-                <a:latin typeface="Malgun Gothic"/>
-                <a:ea typeface="Malgun Gothic"/>
-                <a:cs typeface="Malgun Gothic"/>
-              </a:defRPr>
-            </a:pPr>
-            <a:r>
-              <a:rPr sz="2700" b="0">
-                <a:solidFill>
-                  <a:srgbClr val="17212B"/>
-                </a:solidFill>
-                <a:latin typeface="Malgun Gothic"/>
-                <a:ea typeface="Malgun Gothic"/>
-                <a:cs typeface="Malgun Gothic"/>
-              </a:rPr>
-              <a:t>원하는 변화</a:t>
-            </a:r>
-          </a:p>
-          <a:p xmlns:a="http://schemas.openxmlformats.org/drawingml/2006/main">
-            <a:pPr algn="l">
-              <a:defRPr sz="2700" b="0">
-                <a:solidFill>
-                  <a:srgbClr val="17212B"/>
-                </a:solidFill>
-                <a:latin typeface="Malgun Gothic"/>
-                <a:ea typeface="Malgun Gothic"/>
-                <a:cs typeface="Malgun Gothic"/>
-              </a:defRPr>
-            </a:pPr>
-            <a:r>
-              <a:rPr sz="2700" b="0">
-                <a:solidFill>
-                  <a:srgbClr val="17212B"/>
-                </a:solidFill>
-                <a:latin typeface="Malgun Gothic"/>
-                <a:ea typeface="Malgun Gothic"/>
-                <a:cs typeface="Malgun Gothic"/>
-              </a:rPr>
-              <a:t>허용할 범위</a:t>
-            </a:r>
-          </a:p>
-          <a:p xmlns:a="http://schemas.openxmlformats.org/drawingml/2006/main">
-            <a:pPr algn="l">
-              <a:defRPr sz="2700" b="0">
-                <a:solidFill>
-                  <a:srgbClr val="17212B"/>
-                </a:solidFill>
-                <a:latin typeface="Malgun Gothic"/>
-                <a:ea typeface="Malgun Gothic"/>
-                <a:cs typeface="Malgun Gothic"/>
-              </a:defRPr>
-            </a:pPr>
-            <a:r>
-              <a:rPr sz="2700" b="0">
-                <a:solidFill>
-                  <a:srgbClr val="17212B"/>
-                </a:solidFill>
-                <a:latin typeface="Malgun Gothic"/>
-                <a:ea typeface="Malgun Gothic"/>
-                <a:cs typeface="Malgun Gothic"/>
-              </a:rPr>
-              <a:t>완료 판단</a:t>
-            </a:r>
-          </a:p>
-        </p:txBody>
-      </p:sp>
-      <p:sp>
-        <p:nvSpPr>
-          <p:cNvPr id="13" name="≠">
-            <a:extLst xmlns:a="http://schemas.openxmlformats.org/drawingml/2006/main">
-              <a:ext uri="{FF2B5EF4-FFF2-40B4-BE49-F238E27FC236}">
-                <a16:creationId xmlns:a16="http://schemas.microsoft.com/office/drawing/2014/main" id="{7C4AD710-23D2-4986-A20D-8AFFF8BA6114}"/>
-              </a:ext>
-            </a:extLst>
-          </p:cNvPr>
-          <p:cNvSpPr>
-            <a:spLocks xmlns:a="http://schemas.openxmlformats.org/drawingml/2006/main" noGrp="1"/>
-          </p:cNvSpPr>
-          <p:nvPr/>
-        </p:nvSpPr>
-        <p:spPr>
-          <a:xfrm xmlns:a="http://schemas.openxmlformats.org/drawingml/2006/main">
-            <a:off x="5810250" y="3514725"/>
-            <a:ext cx="971550" cy="952500"/>
-          </a:xfrm>
-          <a:prstGeom xmlns:a="http://schemas.openxmlformats.org/drawingml/2006/main" prst="rect">
-            <a:avLst/>
-          </a:prstGeom>
-          <a:noFill xmlns:a="http://schemas.openxmlformats.org/drawingml/2006/main"/>
-          <a:ln xmlns:a="http://schemas.openxmlformats.org/drawingml/2006/main" w="0">
-            <a:noFill/>
-          </a:ln>
-        </p:spPr>
-        <p:txBody>
-          <a:bodyPr xmlns:a="http://schemas.openxmlformats.org/drawingml/2006/main" wrap="none" lIns="0" tIns="0" rIns="0" bIns="0" anchor="ctr">
-            <a:noAutofit/>
-          </a:bodyPr>
-          <a:lstStyle xmlns:a="http://schemas.openxmlformats.org/drawingml/2006/main">
-            <a:defPPr algn="l">
-              <a:defRPr sz="4800" b="1">
-                <a:solidFill>
-                  <a:srgbClr val="0B6172"/>
-                </a:solidFill>
-                <a:latin typeface="Malgun Gothic"/>
-                <a:ea typeface="Malgun Gothic"/>
-                <a:cs typeface="Malgun Gothic"/>
-              </a:defRPr>
-            </a:defPPr>
-            <a:lvl1pPr algn="l">
-              <a:defRPr sz="4800" b="1">
-                <a:solidFill>
-                  <a:srgbClr val="0B6172"/>
-                </a:solidFill>
-                <a:latin typeface="Malgun Gothic"/>
-                <a:ea typeface="Malgun Gothic"/>
-                <a:cs typeface="Malgun Gothic"/>
-              </a:defRPr>
-            </a:lvl1pPr>
-            <a:lvl2pPr algn="l">
-              <a:defRPr sz="4800" b="1">
-                <a:solidFill>
-                  <a:srgbClr val="0B6172"/>
-                </a:solidFill>
-                <a:latin typeface="Malgun Gothic"/>
-                <a:ea typeface="Malgun Gothic"/>
-                <a:cs typeface="Malgun Gothic"/>
-              </a:defRPr>
-            </a:lvl2pPr>
-            <a:lvl3pPr algn="l">
-              <a:defRPr sz="4800" b="1">
-                <a:solidFill>
-                  <a:srgbClr val="0B6172"/>
-                </a:solidFill>
-                <a:latin typeface="Malgun Gothic"/>
-                <a:ea typeface="Malgun Gothic"/>
-                <a:cs typeface="Malgun Gothic"/>
-              </a:defRPr>
-            </a:lvl3pPr>
-            <a:lvl4pPr algn="l">
-              <a:defRPr sz="4800" b="1">
-                <a:solidFill>
-                  <a:srgbClr val="0B6172"/>
-                </a:solidFill>
-                <a:latin typeface="Malgun Gothic"/>
-                <a:ea typeface="Malgun Gothic"/>
-                <a:cs typeface="Malgun Gothic"/>
-              </a:defRPr>
-            </a:lvl4pPr>
-            <a:lvl5pPr algn="l">
-              <a:defRPr sz="4800" b="1">
-                <a:solidFill>
-                  <a:srgbClr val="0B6172"/>
-                </a:solidFill>
-                <a:latin typeface="Malgun Gothic"/>
-                <a:ea typeface="Malgun Gothic"/>
-                <a:cs typeface="Malgun Gothic"/>
-              </a:defRPr>
-            </a:lvl5pPr>
-            <a:lvl6pPr algn="l">
-              <a:defRPr sz="4800" b="1">
-                <a:solidFill>
-                  <a:srgbClr val="0B6172"/>
-                </a:solidFill>
-                <a:latin typeface="Malgun Gothic"/>
-                <a:ea typeface="Malgun Gothic"/>
-                <a:cs typeface="Malgun Gothic"/>
-              </a:defRPr>
-            </a:lvl6pPr>
-            <a:lvl7pPr algn="l">
-              <a:defRPr sz="4800" b="1">
-                <a:solidFill>
-                  <a:srgbClr val="0B6172"/>
-                </a:solidFill>
-                <a:latin typeface="Malgun Gothic"/>
-                <a:ea typeface="Malgun Gothic"/>
-                <a:cs typeface="Malgun Gothic"/>
-              </a:defRPr>
-            </a:lvl7pPr>
-            <a:lvl8pPr algn="l">
-              <a:defRPr sz="4800" b="1">
-                <a:solidFill>
-                  <a:srgbClr val="0B6172"/>
-                </a:solidFill>
-                <a:latin typeface="Malgun Gothic"/>
-                <a:ea typeface="Malgun Gothic"/>
-                <a:cs typeface="Malgun Gothic"/>
-              </a:defRPr>
-            </a:lvl8pPr>
-            <a:lvl9pPr algn="l">
-              <a:defRPr sz="4800" b="1">
-                <a:solidFill>
-                  <a:srgbClr val="0B6172"/>
-                </a:solidFill>
-                <a:latin typeface="Malgun Gothic"/>
-                <a:ea typeface="Malgun Gothic"/>
-                <a:cs typeface="Malgun Gothic"/>
-              </a:defRPr>
-            </a:lvl9pPr>
-          </a:lstStyle>
-          <a:p xmlns:a="http://schemas.openxmlformats.org/drawingml/2006/main">
-            <a:pPr algn="l">
-              <a:defRPr sz="4800" b="1">
-                <a:solidFill>
-                  <a:srgbClr val="0B6172"/>
-                </a:solidFill>
-                <a:latin typeface="Malgun Gothic"/>
-                <a:ea typeface="Malgun Gothic"/>
-                <a:cs typeface="Malgun Gothic"/>
-              </a:defRPr>
-            </a:pPr>
-            <a:r>
-              <a:rPr sz="4800" b="1">
-                <a:solidFill>
-                  <a:srgbClr val="0B6172"/>
-                </a:solidFill>
-                <a:latin typeface="Malgun Gothic"/>
-                <a:ea typeface="Malgun Gothic"/>
-                <a:cs typeface="Malgun Gothic"/>
-              </a:rPr>
-              <a:t>≠</a:t>
-            </a:r>
-          </a:p>
-        </p:txBody>
-      </p:sp>
-      <p:sp>
-        <p:nvSpPr>
-          <p:cNvPr id="14" name="코드가 보여도, 원하는 일은 따로 전달해야 한다.">
-            <a:extLst xmlns:a="http://schemas.openxmlformats.org/drawingml/2006/main">
-              <a:ext uri="{FF2B5EF4-FFF2-40B4-BE49-F238E27FC236}">
-                <a16:creationId xmlns:a16="http://schemas.microsoft.com/office/drawing/2014/main" id="{99C3F7C8-59BA-4B1A-B983-9087E69A0B3D}"/>
-              </a:ext>
-            </a:extLst>
-          </p:cNvPr>
-          <p:cNvSpPr>
-            <a:spLocks xmlns:a="http://schemas.openxmlformats.org/drawingml/2006/main" noGrp="1"/>
-          </p:cNvSpPr>
-          <p:nvPr/>
-        </p:nvSpPr>
-        <p:spPr>
-          <a:xfrm xmlns:a="http://schemas.openxmlformats.org/drawingml/2006/main">
-            <a:off x="609600" y="5248275"/>
-            <a:ext cx="10972800" cy="409575"/>
+            <a:off x="6934200" y="2276475"/>
+            <a:ext cx="4648200" cy="381000"/>
           </a:xfrm>
           <a:prstGeom xmlns:a="http://schemas.openxmlformats.org/drawingml/2006/main" prst="rect">
             <a:avLst/>
@@ -30395,17 +32752,1281 @@
                 <a:ea typeface="Malgun Gothic"/>
                 <a:cs typeface="Malgun Gothic"/>
               </a:rPr>
-              <a:t>코드가 보여도, 원하는 일은 따로 전달해야 한다.</a:t>
+              <a:t>Codex 선택</a:t>
             </a:r>
           </a:p>
         </p:txBody>
       </p:sp>
       <p:sp>
         <p:nvSpPr>
-          <p:cNvPr id="15" name="Legacy module connection">
+          <p:cNvPr id="20" name="개발 작업으로 전환">
             <a:extLst xmlns:a="http://schemas.openxmlformats.org/drawingml/2006/main">
               <a:ext uri="{FF2B5EF4-FFF2-40B4-BE49-F238E27FC236}">
-                <a16:creationId xmlns:a16="http://schemas.microsoft.com/office/drawing/2014/main" id="{09A0233C-03F2-4E85-8F9B-58D10AB3DA37}"/>
+                <a16:creationId xmlns:a16="http://schemas.microsoft.com/office/drawing/2014/main" id="{F3D16662-B130-4A77-9BA3-632EEF259102}"/>
+              </a:ext>
+            </a:extLst>
+          </p:cNvPr>
+          <p:cNvSpPr>
+            <a:spLocks xmlns:a="http://schemas.openxmlformats.org/drawingml/2006/main" noGrp="1"/>
+          </p:cNvSpPr>
+          <p:nvPr/>
+        </p:nvSpPr>
+        <p:spPr>
+          <a:xfrm xmlns:a="http://schemas.openxmlformats.org/drawingml/2006/main">
+            <a:off x="6934200" y="2686050"/>
+            <a:ext cx="4648200" cy="295275"/>
+          </a:xfrm>
+          <a:prstGeom xmlns:a="http://schemas.openxmlformats.org/drawingml/2006/main" prst="rect">
+            <a:avLst/>
+          </a:prstGeom>
+          <a:noFill xmlns:a="http://schemas.openxmlformats.org/drawingml/2006/main"/>
+          <a:ln xmlns:a="http://schemas.openxmlformats.org/drawingml/2006/main" w="0">
+            <a:noFill/>
+          </a:ln>
+        </p:spPr>
+        <p:txBody>
+          <a:bodyPr xmlns:a="http://schemas.openxmlformats.org/drawingml/2006/main" wrap="none" lIns="0" tIns="0" rIns="0" bIns="0" anchor="ctr">
+            <a:noAutofit/>
+          </a:bodyPr>
+          <a:lstStyle xmlns:a="http://schemas.openxmlformats.org/drawingml/2006/main">
+            <a:defPPr algn="l">
+              <a:defRPr sz="1800" b="0">
+                <a:solidFill>
+                  <a:srgbClr val="4D5A68"/>
+                </a:solidFill>
+                <a:latin typeface="Malgun Gothic"/>
+                <a:ea typeface="Malgun Gothic"/>
+                <a:cs typeface="Malgun Gothic"/>
+              </a:defRPr>
+            </a:defPPr>
+            <a:lvl1pPr algn="l">
+              <a:defRPr sz="1800" b="0">
+                <a:solidFill>
+                  <a:srgbClr val="4D5A68"/>
+                </a:solidFill>
+                <a:latin typeface="Malgun Gothic"/>
+                <a:ea typeface="Malgun Gothic"/>
+                <a:cs typeface="Malgun Gothic"/>
+              </a:defRPr>
+            </a:lvl1pPr>
+            <a:lvl2pPr algn="l">
+              <a:defRPr sz="1800" b="0">
+                <a:solidFill>
+                  <a:srgbClr val="4D5A68"/>
+                </a:solidFill>
+                <a:latin typeface="Malgun Gothic"/>
+                <a:ea typeface="Malgun Gothic"/>
+                <a:cs typeface="Malgun Gothic"/>
+              </a:defRPr>
+            </a:lvl2pPr>
+            <a:lvl3pPr algn="l">
+              <a:defRPr sz="1800" b="0">
+                <a:solidFill>
+                  <a:srgbClr val="4D5A68"/>
+                </a:solidFill>
+                <a:latin typeface="Malgun Gothic"/>
+                <a:ea typeface="Malgun Gothic"/>
+                <a:cs typeface="Malgun Gothic"/>
+              </a:defRPr>
+            </a:lvl3pPr>
+            <a:lvl4pPr algn="l">
+              <a:defRPr sz="1800" b="0">
+                <a:solidFill>
+                  <a:srgbClr val="4D5A68"/>
+                </a:solidFill>
+                <a:latin typeface="Malgun Gothic"/>
+                <a:ea typeface="Malgun Gothic"/>
+                <a:cs typeface="Malgun Gothic"/>
+              </a:defRPr>
+            </a:lvl4pPr>
+            <a:lvl5pPr algn="l">
+              <a:defRPr sz="1800" b="0">
+                <a:solidFill>
+                  <a:srgbClr val="4D5A68"/>
+                </a:solidFill>
+                <a:latin typeface="Malgun Gothic"/>
+                <a:ea typeface="Malgun Gothic"/>
+                <a:cs typeface="Malgun Gothic"/>
+              </a:defRPr>
+            </a:lvl5pPr>
+            <a:lvl6pPr algn="l">
+              <a:defRPr sz="1800" b="0">
+                <a:solidFill>
+                  <a:srgbClr val="4D5A68"/>
+                </a:solidFill>
+                <a:latin typeface="Malgun Gothic"/>
+                <a:ea typeface="Malgun Gothic"/>
+                <a:cs typeface="Malgun Gothic"/>
+              </a:defRPr>
+            </a:lvl6pPr>
+            <a:lvl7pPr algn="l">
+              <a:defRPr sz="1800" b="0">
+                <a:solidFill>
+                  <a:srgbClr val="4D5A68"/>
+                </a:solidFill>
+                <a:latin typeface="Malgun Gothic"/>
+                <a:ea typeface="Malgun Gothic"/>
+                <a:cs typeface="Malgun Gothic"/>
+              </a:defRPr>
+            </a:lvl7pPr>
+            <a:lvl8pPr algn="l">
+              <a:defRPr sz="1800" b="0">
+                <a:solidFill>
+                  <a:srgbClr val="4D5A68"/>
+                </a:solidFill>
+                <a:latin typeface="Malgun Gothic"/>
+                <a:ea typeface="Malgun Gothic"/>
+                <a:cs typeface="Malgun Gothic"/>
+              </a:defRPr>
+            </a:lvl8pPr>
+            <a:lvl9pPr algn="l">
+              <a:defRPr sz="1800" b="0">
+                <a:solidFill>
+                  <a:srgbClr val="4D5A68"/>
+                </a:solidFill>
+                <a:latin typeface="Malgun Gothic"/>
+                <a:ea typeface="Malgun Gothic"/>
+                <a:cs typeface="Malgun Gothic"/>
+              </a:defRPr>
+            </a:lvl9pPr>
+          </a:lstStyle>
+          <a:p xmlns:a="http://schemas.openxmlformats.org/drawingml/2006/main">
+            <a:pPr algn="l">
+              <a:defRPr sz="1800" b="0">
+                <a:solidFill>
+                  <a:srgbClr val="4D5A68"/>
+                </a:solidFill>
+                <a:latin typeface="Malgun Gothic"/>
+                <a:ea typeface="Malgun Gothic"/>
+                <a:cs typeface="Malgun Gothic"/>
+              </a:defRPr>
+            </a:pPr>
+            <a:r>
+              <a:rPr sz="1800" b="0">
+                <a:solidFill>
+                  <a:srgbClr val="4D5A68"/>
+                </a:solidFill>
+                <a:latin typeface="Malgun Gothic"/>
+                <a:ea typeface="Malgun Gothic"/>
+                <a:cs typeface="Malgun Gothic"/>
+              </a:rPr>
+              <a:t>개발 작업으로 전환</a:t>
+            </a:r>
+          </a:p>
+        </p:txBody>
+      </p:sp>
+      <p:sp>
+        <p:nvSpPr>
+          <p:cNvPr id="21" name="02">
+            <a:extLst xmlns:a="http://schemas.openxmlformats.org/drawingml/2006/main">
+              <a:ext uri="{FF2B5EF4-FFF2-40B4-BE49-F238E27FC236}">
+                <a16:creationId xmlns:a16="http://schemas.microsoft.com/office/drawing/2014/main" id="{3BCC79F2-7FD7-477D-91A3-5CAECAB9CA61}"/>
+              </a:ext>
+            </a:extLst>
+          </p:cNvPr>
+          <p:cNvSpPr>
+            <a:spLocks xmlns:a="http://schemas.openxmlformats.org/drawingml/2006/main" noGrp="1"/>
+          </p:cNvSpPr>
+          <p:nvPr/>
+        </p:nvSpPr>
+        <p:spPr>
+          <a:xfrm xmlns:a="http://schemas.openxmlformats.org/drawingml/2006/main">
+            <a:off x="6229350" y="3181350"/>
+            <a:ext cx="571500" cy="323850"/>
+          </a:xfrm>
+          <a:prstGeom xmlns:a="http://schemas.openxmlformats.org/drawingml/2006/main" prst="rect">
+            <a:avLst/>
+          </a:prstGeom>
+          <a:noFill xmlns:a="http://schemas.openxmlformats.org/drawingml/2006/main"/>
+          <a:ln xmlns:a="http://schemas.openxmlformats.org/drawingml/2006/main" w="0">
+            <a:noFill/>
+          </a:ln>
+        </p:spPr>
+        <p:txBody>
+          <a:bodyPr xmlns:a="http://schemas.openxmlformats.org/drawingml/2006/main" wrap="none" lIns="0" tIns="0" rIns="0" bIns="0" anchor="ctr">
+            <a:noAutofit/>
+          </a:bodyPr>
+          <a:lstStyle xmlns:a="http://schemas.openxmlformats.org/drawingml/2006/main">
+            <a:defPPr algn="l">
+              <a:defRPr sz="1725" b="1">
+                <a:solidFill>
+                  <a:srgbClr val="0B6172"/>
+                </a:solidFill>
+                <a:latin typeface="Malgun Gothic"/>
+                <a:ea typeface="Malgun Gothic"/>
+                <a:cs typeface="Malgun Gothic"/>
+              </a:defRPr>
+            </a:defPPr>
+            <a:lvl1pPr algn="l">
+              <a:defRPr sz="1725" b="1">
+                <a:solidFill>
+                  <a:srgbClr val="0B6172"/>
+                </a:solidFill>
+                <a:latin typeface="Malgun Gothic"/>
+                <a:ea typeface="Malgun Gothic"/>
+                <a:cs typeface="Malgun Gothic"/>
+              </a:defRPr>
+            </a:lvl1pPr>
+            <a:lvl2pPr algn="l">
+              <a:defRPr sz="1725" b="1">
+                <a:solidFill>
+                  <a:srgbClr val="0B6172"/>
+                </a:solidFill>
+                <a:latin typeface="Malgun Gothic"/>
+                <a:ea typeface="Malgun Gothic"/>
+                <a:cs typeface="Malgun Gothic"/>
+              </a:defRPr>
+            </a:lvl2pPr>
+            <a:lvl3pPr algn="l">
+              <a:defRPr sz="1725" b="1">
+                <a:solidFill>
+                  <a:srgbClr val="0B6172"/>
+                </a:solidFill>
+                <a:latin typeface="Malgun Gothic"/>
+                <a:ea typeface="Malgun Gothic"/>
+                <a:cs typeface="Malgun Gothic"/>
+              </a:defRPr>
+            </a:lvl3pPr>
+            <a:lvl4pPr algn="l">
+              <a:defRPr sz="1725" b="1">
+                <a:solidFill>
+                  <a:srgbClr val="0B6172"/>
+                </a:solidFill>
+                <a:latin typeface="Malgun Gothic"/>
+                <a:ea typeface="Malgun Gothic"/>
+                <a:cs typeface="Malgun Gothic"/>
+              </a:defRPr>
+            </a:lvl4pPr>
+            <a:lvl5pPr algn="l">
+              <a:defRPr sz="1725" b="1">
+                <a:solidFill>
+                  <a:srgbClr val="0B6172"/>
+                </a:solidFill>
+                <a:latin typeface="Malgun Gothic"/>
+                <a:ea typeface="Malgun Gothic"/>
+                <a:cs typeface="Malgun Gothic"/>
+              </a:defRPr>
+            </a:lvl5pPr>
+            <a:lvl6pPr algn="l">
+              <a:defRPr sz="1725" b="1">
+                <a:solidFill>
+                  <a:srgbClr val="0B6172"/>
+                </a:solidFill>
+                <a:latin typeface="Malgun Gothic"/>
+                <a:ea typeface="Malgun Gothic"/>
+                <a:cs typeface="Malgun Gothic"/>
+              </a:defRPr>
+            </a:lvl6pPr>
+            <a:lvl7pPr algn="l">
+              <a:defRPr sz="1725" b="1">
+                <a:solidFill>
+                  <a:srgbClr val="0B6172"/>
+                </a:solidFill>
+                <a:latin typeface="Malgun Gothic"/>
+                <a:ea typeface="Malgun Gothic"/>
+                <a:cs typeface="Malgun Gothic"/>
+              </a:defRPr>
+            </a:lvl7pPr>
+            <a:lvl8pPr algn="l">
+              <a:defRPr sz="1725" b="1">
+                <a:solidFill>
+                  <a:srgbClr val="0B6172"/>
+                </a:solidFill>
+                <a:latin typeface="Malgun Gothic"/>
+                <a:ea typeface="Malgun Gothic"/>
+                <a:cs typeface="Malgun Gothic"/>
+              </a:defRPr>
+            </a:lvl8pPr>
+            <a:lvl9pPr algn="l">
+              <a:defRPr sz="1725" b="1">
+                <a:solidFill>
+                  <a:srgbClr val="0B6172"/>
+                </a:solidFill>
+                <a:latin typeface="Malgun Gothic"/>
+                <a:ea typeface="Malgun Gothic"/>
+                <a:cs typeface="Malgun Gothic"/>
+              </a:defRPr>
+            </a:lvl9pPr>
+          </a:lstStyle>
+          <a:p xmlns:a="http://schemas.openxmlformats.org/drawingml/2006/main">
+            <a:pPr algn="l">
+              <a:defRPr sz="1725" b="1">
+                <a:solidFill>
+                  <a:srgbClr val="0B6172"/>
+                </a:solidFill>
+                <a:latin typeface="Malgun Gothic"/>
+                <a:ea typeface="Malgun Gothic"/>
+                <a:cs typeface="Malgun Gothic"/>
+              </a:defRPr>
+            </a:pPr>
+            <a:r>
+              <a:rPr sz="1725" b="1">
+                <a:solidFill>
+                  <a:srgbClr val="0B6172"/>
+                </a:solidFill>
+                <a:latin typeface="Malgun Gothic"/>
+                <a:ea typeface="Malgun Gothic"/>
+                <a:cs typeface="Malgun Gothic"/>
+              </a:rPr>
+              <a:t>02</a:t>
+            </a:r>
+          </a:p>
+        </p:txBody>
+      </p:sp>
+      <p:sp>
+        <p:nvSpPr>
+          <p:cNvPr id="22" name="Repository 폴더 열기">
+            <a:extLst xmlns:a="http://schemas.openxmlformats.org/drawingml/2006/main">
+              <a:ext uri="{FF2B5EF4-FFF2-40B4-BE49-F238E27FC236}">
+                <a16:creationId xmlns:a16="http://schemas.microsoft.com/office/drawing/2014/main" id="{93F86581-C5D7-42C0-9EC1-762182A5283A}"/>
+              </a:ext>
+            </a:extLst>
+          </p:cNvPr>
+          <p:cNvSpPr>
+            <a:spLocks xmlns:a="http://schemas.openxmlformats.org/drawingml/2006/main" noGrp="1"/>
+          </p:cNvSpPr>
+          <p:nvPr/>
+        </p:nvSpPr>
+        <p:spPr>
+          <a:xfrm xmlns:a="http://schemas.openxmlformats.org/drawingml/2006/main">
+            <a:off x="6934200" y="3162300"/>
+            <a:ext cx="4648200" cy="381000"/>
+          </a:xfrm>
+          <a:prstGeom xmlns:a="http://schemas.openxmlformats.org/drawingml/2006/main" prst="rect">
+            <a:avLst/>
+          </a:prstGeom>
+          <a:noFill xmlns:a="http://schemas.openxmlformats.org/drawingml/2006/main"/>
+          <a:ln xmlns:a="http://schemas.openxmlformats.org/drawingml/2006/main" w="0">
+            <a:noFill/>
+          </a:ln>
+        </p:spPr>
+        <p:txBody>
+          <a:bodyPr xmlns:a="http://schemas.openxmlformats.org/drawingml/2006/main" wrap="none" lIns="0" tIns="0" rIns="0" bIns="0" anchor="ctr">
+            <a:noAutofit/>
+          </a:bodyPr>
+          <a:lstStyle xmlns:a="http://schemas.openxmlformats.org/drawingml/2006/main">
+            <a:defPPr algn="l">
+              <a:defRPr sz="2175" b="1">
+                <a:solidFill>
+                  <a:srgbClr val="17212B"/>
+                </a:solidFill>
+                <a:latin typeface="Malgun Gothic"/>
+                <a:ea typeface="Malgun Gothic"/>
+                <a:cs typeface="Malgun Gothic"/>
+              </a:defRPr>
+            </a:defPPr>
+            <a:lvl1pPr algn="l">
+              <a:defRPr sz="2175" b="1">
+                <a:solidFill>
+                  <a:srgbClr val="17212B"/>
+                </a:solidFill>
+                <a:latin typeface="Malgun Gothic"/>
+                <a:ea typeface="Malgun Gothic"/>
+                <a:cs typeface="Malgun Gothic"/>
+              </a:defRPr>
+            </a:lvl1pPr>
+            <a:lvl2pPr algn="l">
+              <a:defRPr sz="2175" b="1">
+                <a:solidFill>
+                  <a:srgbClr val="17212B"/>
+                </a:solidFill>
+                <a:latin typeface="Malgun Gothic"/>
+                <a:ea typeface="Malgun Gothic"/>
+                <a:cs typeface="Malgun Gothic"/>
+              </a:defRPr>
+            </a:lvl2pPr>
+            <a:lvl3pPr algn="l">
+              <a:defRPr sz="2175" b="1">
+                <a:solidFill>
+                  <a:srgbClr val="17212B"/>
+                </a:solidFill>
+                <a:latin typeface="Malgun Gothic"/>
+                <a:ea typeface="Malgun Gothic"/>
+                <a:cs typeface="Malgun Gothic"/>
+              </a:defRPr>
+            </a:lvl3pPr>
+            <a:lvl4pPr algn="l">
+              <a:defRPr sz="2175" b="1">
+                <a:solidFill>
+                  <a:srgbClr val="17212B"/>
+                </a:solidFill>
+                <a:latin typeface="Malgun Gothic"/>
+                <a:ea typeface="Malgun Gothic"/>
+                <a:cs typeface="Malgun Gothic"/>
+              </a:defRPr>
+            </a:lvl4pPr>
+            <a:lvl5pPr algn="l">
+              <a:defRPr sz="2175" b="1">
+                <a:solidFill>
+                  <a:srgbClr val="17212B"/>
+                </a:solidFill>
+                <a:latin typeface="Malgun Gothic"/>
+                <a:ea typeface="Malgun Gothic"/>
+                <a:cs typeface="Malgun Gothic"/>
+              </a:defRPr>
+            </a:lvl5pPr>
+            <a:lvl6pPr algn="l">
+              <a:defRPr sz="2175" b="1">
+                <a:solidFill>
+                  <a:srgbClr val="17212B"/>
+                </a:solidFill>
+                <a:latin typeface="Malgun Gothic"/>
+                <a:ea typeface="Malgun Gothic"/>
+                <a:cs typeface="Malgun Gothic"/>
+              </a:defRPr>
+            </a:lvl6pPr>
+            <a:lvl7pPr algn="l">
+              <a:defRPr sz="2175" b="1">
+                <a:solidFill>
+                  <a:srgbClr val="17212B"/>
+                </a:solidFill>
+                <a:latin typeface="Malgun Gothic"/>
+                <a:ea typeface="Malgun Gothic"/>
+                <a:cs typeface="Malgun Gothic"/>
+              </a:defRPr>
+            </a:lvl7pPr>
+            <a:lvl8pPr algn="l">
+              <a:defRPr sz="2175" b="1">
+                <a:solidFill>
+                  <a:srgbClr val="17212B"/>
+                </a:solidFill>
+                <a:latin typeface="Malgun Gothic"/>
+                <a:ea typeface="Malgun Gothic"/>
+                <a:cs typeface="Malgun Gothic"/>
+              </a:defRPr>
+            </a:lvl8pPr>
+            <a:lvl9pPr algn="l">
+              <a:defRPr sz="2175" b="1">
+                <a:solidFill>
+                  <a:srgbClr val="17212B"/>
+                </a:solidFill>
+                <a:latin typeface="Malgun Gothic"/>
+                <a:ea typeface="Malgun Gothic"/>
+                <a:cs typeface="Malgun Gothic"/>
+              </a:defRPr>
+            </a:lvl9pPr>
+          </a:lstStyle>
+          <a:p xmlns:a="http://schemas.openxmlformats.org/drawingml/2006/main">
+            <a:pPr algn="l">
+              <a:defRPr sz="2175" b="1">
+                <a:solidFill>
+                  <a:srgbClr val="17212B"/>
+                </a:solidFill>
+                <a:latin typeface="Malgun Gothic"/>
+                <a:ea typeface="Malgun Gothic"/>
+                <a:cs typeface="Malgun Gothic"/>
+              </a:defRPr>
+            </a:pPr>
+            <a:r>
+              <a:rPr sz="2175" b="1">
+                <a:solidFill>
+                  <a:srgbClr val="17212B"/>
+                </a:solidFill>
+                <a:latin typeface="Malgun Gothic"/>
+                <a:ea typeface="Malgun Gothic"/>
+                <a:cs typeface="Malgun Gothic"/>
+              </a:rPr>
+              <a:t>Repository 폴더 열기</a:t>
+            </a:r>
+          </a:p>
+        </p:txBody>
+      </p:sp>
+      <p:sp>
+        <p:nvSpPr>
+          <p:cNvPr id="23" name="코드가 있는 폴더를 작업 위치로">
+            <a:extLst xmlns:a="http://schemas.openxmlformats.org/drawingml/2006/main">
+              <a:ext uri="{FF2B5EF4-FFF2-40B4-BE49-F238E27FC236}">
+                <a16:creationId xmlns:a16="http://schemas.microsoft.com/office/drawing/2014/main" id="{C8EA555F-2736-46A0-822F-8D7FB1AD631B}"/>
+              </a:ext>
+            </a:extLst>
+          </p:cNvPr>
+          <p:cNvSpPr>
+            <a:spLocks xmlns:a="http://schemas.openxmlformats.org/drawingml/2006/main" noGrp="1"/>
+          </p:cNvSpPr>
+          <p:nvPr/>
+        </p:nvSpPr>
+        <p:spPr>
+          <a:xfrm xmlns:a="http://schemas.openxmlformats.org/drawingml/2006/main">
+            <a:off x="6934200" y="3571875"/>
+            <a:ext cx="4648200" cy="295275"/>
+          </a:xfrm>
+          <a:prstGeom xmlns:a="http://schemas.openxmlformats.org/drawingml/2006/main" prst="rect">
+            <a:avLst/>
+          </a:prstGeom>
+          <a:noFill xmlns:a="http://schemas.openxmlformats.org/drawingml/2006/main"/>
+          <a:ln xmlns:a="http://schemas.openxmlformats.org/drawingml/2006/main" w="0">
+            <a:noFill/>
+          </a:ln>
+        </p:spPr>
+        <p:txBody>
+          <a:bodyPr xmlns:a="http://schemas.openxmlformats.org/drawingml/2006/main" wrap="none" lIns="0" tIns="0" rIns="0" bIns="0" anchor="ctr">
+            <a:noAutofit/>
+          </a:bodyPr>
+          <a:lstStyle xmlns:a="http://schemas.openxmlformats.org/drawingml/2006/main">
+            <a:defPPr algn="l">
+              <a:defRPr sz="1800" b="0">
+                <a:solidFill>
+                  <a:srgbClr val="4D5A68"/>
+                </a:solidFill>
+                <a:latin typeface="Malgun Gothic"/>
+                <a:ea typeface="Malgun Gothic"/>
+                <a:cs typeface="Malgun Gothic"/>
+              </a:defRPr>
+            </a:defPPr>
+            <a:lvl1pPr algn="l">
+              <a:defRPr sz="1800" b="0">
+                <a:solidFill>
+                  <a:srgbClr val="4D5A68"/>
+                </a:solidFill>
+                <a:latin typeface="Malgun Gothic"/>
+                <a:ea typeface="Malgun Gothic"/>
+                <a:cs typeface="Malgun Gothic"/>
+              </a:defRPr>
+            </a:lvl1pPr>
+            <a:lvl2pPr algn="l">
+              <a:defRPr sz="1800" b="0">
+                <a:solidFill>
+                  <a:srgbClr val="4D5A68"/>
+                </a:solidFill>
+                <a:latin typeface="Malgun Gothic"/>
+                <a:ea typeface="Malgun Gothic"/>
+                <a:cs typeface="Malgun Gothic"/>
+              </a:defRPr>
+            </a:lvl2pPr>
+            <a:lvl3pPr algn="l">
+              <a:defRPr sz="1800" b="0">
+                <a:solidFill>
+                  <a:srgbClr val="4D5A68"/>
+                </a:solidFill>
+                <a:latin typeface="Malgun Gothic"/>
+                <a:ea typeface="Malgun Gothic"/>
+                <a:cs typeface="Malgun Gothic"/>
+              </a:defRPr>
+            </a:lvl3pPr>
+            <a:lvl4pPr algn="l">
+              <a:defRPr sz="1800" b="0">
+                <a:solidFill>
+                  <a:srgbClr val="4D5A68"/>
+                </a:solidFill>
+                <a:latin typeface="Malgun Gothic"/>
+                <a:ea typeface="Malgun Gothic"/>
+                <a:cs typeface="Malgun Gothic"/>
+              </a:defRPr>
+            </a:lvl4pPr>
+            <a:lvl5pPr algn="l">
+              <a:defRPr sz="1800" b="0">
+                <a:solidFill>
+                  <a:srgbClr val="4D5A68"/>
+                </a:solidFill>
+                <a:latin typeface="Malgun Gothic"/>
+                <a:ea typeface="Malgun Gothic"/>
+                <a:cs typeface="Malgun Gothic"/>
+              </a:defRPr>
+            </a:lvl5pPr>
+            <a:lvl6pPr algn="l">
+              <a:defRPr sz="1800" b="0">
+                <a:solidFill>
+                  <a:srgbClr val="4D5A68"/>
+                </a:solidFill>
+                <a:latin typeface="Malgun Gothic"/>
+                <a:ea typeface="Malgun Gothic"/>
+                <a:cs typeface="Malgun Gothic"/>
+              </a:defRPr>
+            </a:lvl6pPr>
+            <a:lvl7pPr algn="l">
+              <a:defRPr sz="1800" b="0">
+                <a:solidFill>
+                  <a:srgbClr val="4D5A68"/>
+                </a:solidFill>
+                <a:latin typeface="Malgun Gothic"/>
+                <a:ea typeface="Malgun Gothic"/>
+                <a:cs typeface="Malgun Gothic"/>
+              </a:defRPr>
+            </a:lvl7pPr>
+            <a:lvl8pPr algn="l">
+              <a:defRPr sz="1800" b="0">
+                <a:solidFill>
+                  <a:srgbClr val="4D5A68"/>
+                </a:solidFill>
+                <a:latin typeface="Malgun Gothic"/>
+                <a:ea typeface="Malgun Gothic"/>
+                <a:cs typeface="Malgun Gothic"/>
+              </a:defRPr>
+            </a:lvl8pPr>
+            <a:lvl9pPr algn="l">
+              <a:defRPr sz="1800" b="0">
+                <a:solidFill>
+                  <a:srgbClr val="4D5A68"/>
+                </a:solidFill>
+                <a:latin typeface="Malgun Gothic"/>
+                <a:ea typeface="Malgun Gothic"/>
+                <a:cs typeface="Malgun Gothic"/>
+              </a:defRPr>
+            </a:lvl9pPr>
+          </a:lstStyle>
+          <a:p xmlns:a="http://schemas.openxmlformats.org/drawingml/2006/main">
+            <a:pPr algn="l">
+              <a:defRPr sz="1800" b="0">
+                <a:solidFill>
+                  <a:srgbClr val="4D5A68"/>
+                </a:solidFill>
+                <a:latin typeface="Malgun Gothic"/>
+                <a:ea typeface="Malgun Gothic"/>
+                <a:cs typeface="Malgun Gothic"/>
+              </a:defRPr>
+            </a:pPr>
+            <a:r>
+              <a:rPr sz="1800" b="0">
+                <a:solidFill>
+                  <a:srgbClr val="4D5A68"/>
+                </a:solidFill>
+                <a:latin typeface="Malgun Gothic"/>
+                <a:ea typeface="Malgun Gothic"/>
+                <a:cs typeface="Malgun Gothic"/>
+              </a:rPr>
+              <a:t>코드가 있는 폴더를 작업 위치로</a:t>
+            </a:r>
+          </a:p>
+        </p:txBody>
+      </p:sp>
+      <p:sp>
+        <p:nvSpPr>
+          <p:cNvPr id="24" name="03">
+            <a:extLst xmlns:a="http://schemas.openxmlformats.org/drawingml/2006/main">
+              <a:ext uri="{FF2B5EF4-FFF2-40B4-BE49-F238E27FC236}">
+                <a16:creationId xmlns:a16="http://schemas.microsoft.com/office/drawing/2014/main" id="{B6AB92C1-CFE0-4563-B1B3-BD545B894A3F}"/>
+              </a:ext>
+            </a:extLst>
+          </p:cNvPr>
+          <p:cNvSpPr>
+            <a:spLocks xmlns:a="http://schemas.openxmlformats.org/drawingml/2006/main" noGrp="1"/>
+          </p:cNvSpPr>
+          <p:nvPr/>
+        </p:nvSpPr>
+        <p:spPr>
+          <a:xfrm xmlns:a="http://schemas.openxmlformats.org/drawingml/2006/main">
+            <a:off x="6229350" y="4067175"/>
+            <a:ext cx="571500" cy="323850"/>
+          </a:xfrm>
+          <a:prstGeom xmlns:a="http://schemas.openxmlformats.org/drawingml/2006/main" prst="rect">
+            <a:avLst/>
+          </a:prstGeom>
+          <a:noFill xmlns:a="http://schemas.openxmlformats.org/drawingml/2006/main"/>
+          <a:ln xmlns:a="http://schemas.openxmlformats.org/drawingml/2006/main" w="0">
+            <a:noFill/>
+          </a:ln>
+        </p:spPr>
+        <p:txBody>
+          <a:bodyPr xmlns:a="http://schemas.openxmlformats.org/drawingml/2006/main" wrap="none" lIns="0" tIns="0" rIns="0" bIns="0" anchor="ctr">
+            <a:noAutofit/>
+          </a:bodyPr>
+          <a:lstStyle xmlns:a="http://schemas.openxmlformats.org/drawingml/2006/main">
+            <a:defPPr algn="l">
+              <a:defRPr sz="1725" b="1">
+                <a:solidFill>
+                  <a:srgbClr val="0B6172"/>
+                </a:solidFill>
+                <a:latin typeface="Malgun Gothic"/>
+                <a:ea typeface="Malgun Gothic"/>
+                <a:cs typeface="Malgun Gothic"/>
+              </a:defRPr>
+            </a:defPPr>
+            <a:lvl1pPr algn="l">
+              <a:defRPr sz="1725" b="1">
+                <a:solidFill>
+                  <a:srgbClr val="0B6172"/>
+                </a:solidFill>
+                <a:latin typeface="Malgun Gothic"/>
+                <a:ea typeface="Malgun Gothic"/>
+                <a:cs typeface="Malgun Gothic"/>
+              </a:defRPr>
+            </a:lvl1pPr>
+            <a:lvl2pPr algn="l">
+              <a:defRPr sz="1725" b="1">
+                <a:solidFill>
+                  <a:srgbClr val="0B6172"/>
+                </a:solidFill>
+                <a:latin typeface="Malgun Gothic"/>
+                <a:ea typeface="Malgun Gothic"/>
+                <a:cs typeface="Malgun Gothic"/>
+              </a:defRPr>
+            </a:lvl2pPr>
+            <a:lvl3pPr algn="l">
+              <a:defRPr sz="1725" b="1">
+                <a:solidFill>
+                  <a:srgbClr val="0B6172"/>
+                </a:solidFill>
+                <a:latin typeface="Malgun Gothic"/>
+                <a:ea typeface="Malgun Gothic"/>
+                <a:cs typeface="Malgun Gothic"/>
+              </a:defRPr>
+            </a:lvl3pPr>
+            <a:lvl4pPr algn="l">
+              <a:defRPr sz="1725" b="1">
+                <a:solidFill>
+                  <a:srgbClr val="0B6172"/>
+                </a:solidFill>
+                <a:latin typeface="Malgun Gothic"/>
+                <a:ea typeface="Malgun Gothic"/>
+                <a:cs typeface="Malgun Gothic"/>
+              </a:defRPr>
+            </a:lvl4pPr>
+            <a:lvl5pPr algn="l">
+              <a:defRPr sz="1725" b="1">
+                <a:solidFill>
+                  <a:srgbClr val="0B6172"/>
+                </a:solidFill>
+                <a:latin typeface="Malgun Gothic"/>
+                <a:ea typeface="Malgun Gothic"/>
+                <a:cs typeface="Malgun Gothic"/>
+              </a:defRPr>
+            </a:lvl5pPr>
+            <a:lvl6pPr algn="l">
+              <a:defRPr sz="1725" b="1">
+                <a:solidFill>
+                  <a:srgbClr val="0B6172"/>
+                </a:solidFill>
+                <a:latin typeface="Malgun Gothic"/>
+                <a:ea typeface="Malgun Gothic"/>
+                <a:cs typeface="Malgun Gothic"/>
+              </a:defRPr>
+            </a:lvl6pPr>
+            <a:lvl7pPr algn="l">
+              <a:defRPr sz="1725" b="1">
+                <a:solidFill>
+                  <a:srgbClr val="0B6172"/>
+                </a:solidFill>
+                <a:latin typeface="Malgun Gothic"/>
+                <a:ea typeface="Malgun Gothic"/>
+                <a:cs typeface="Malgun Gothic"/>
+              </a:defRPr>
+            </a:lvl7pPr>
+            <a:lvl8pPr algn="l">
+              <a:defRPr sz="1725" b="1">
+                <a:solidFill>
+                  <a:srgbClr val="0B6172"/>
+                </a:solidFill>
+                <a:latin typeface="Malgun Gothic"/>
+                <a:ea typeface="Malgun Gothic"/>
+                <a:cs typeface="Malgun Gothic"/>
+              </a:defRPr>
+            </a:lvl8pPr>
+            <a:lvl9pPr algn="l">
+              <a:defRPr sz="1725" b="1">
+                <a:solidFill>
+                  <a:srgbClr val="0B6172"/>
+                </a:solidFill>
+                <a:latin typeface="Malgun Gothic"/>
+                <a:ea typeface="Malgun Gothic"/>
+                <a:cs typeface="Malgun Gothic"/>
+              </a:defRPr>
+            </a:lvl9pPr>
+          </a:lstStyle>
+          <a:p xmlns:a="http://schemas.openxmlformats.org/drawingml/2006/main">
+            <a:pPr algn="l">
+              <a:defRPr sz="1725" b="1">
+                <a:solidFill>
+                  <a:srgbClr val="0B6172"/>
+                </a:solidFill>
+                <a:latin typeface="Malgun Gothic"/>
+                <a:ea typeface="Malgun Gothic"/>
+                <a:cs typeface="Malgun Gothic"/>
+              </a:defRPr>
+            </a:pPr>
+            <a:r>
+              <a:rPr sz="1725" b="1">
+                <a:solidFill>
+                  <a:srgbClr val="0B6172"/>
+                </a:solidFill>
+                <a:latin typeface="Malgun Gothic"/>
+                <a:ea typeface="Malgun Gothic"/>
+                <a:cs typeface="Malgun Gothic"/>
+              </a:rPr>
+              <a:t>03</a:t>
+            </a:r>
+          </a:p>
+        </p:txBody>
+      </p:sp>
+      <p:sp>
+        <p:nvSpPr>
+          <p:cNvPr id="25" name="수정 전에 조사부터 요청">
+            <a:extLst xmlns:a="http://schemas.openxmlformats.org/drawingml/2006/main">
+              <a:ext uri="{FF2B5EF4-FFF2-40B4-BE49-F238E27FC236}">
+                <a16:creationId xmlns:a16="http://schemas.microsoft.com/office/drawing/2014/main" id="{937752BB-89CA-4A7E-979E-BA7CB607A855}"/>
+              </a:ext>
+            </a:extLst>
+          </p:cNvPr>
+          <p:cNvSpPr>
+            <a:spLocks xmlns:a="http://schemas.openxmlformats.org/drawingml/2006/main" noGrp="1"/>
+          </p:cNvSpPr>
+          <p:nvPr/>
+        </p:nvSpPr>
+        <p:spPr>
+          <a:xfrm xmlns:a="http://schemas.openxmlformats.org/drawingml/2006/main">
+            <a:off x="6934200" y="4048125"/>
+            <a:ext cx="4648200" cy="381000"/>
+          </a:xfrm>
+          <a:prstGeom xmlns:a="http://schemas.openxmlformats.org/drawingml/2006/main" prst="rect">
+            <a:avLst/>
+          </a:prstGeom>
+          <a:noFill xmlns:a="http://schemas.openxmlformats.org/drawingml/2006/main"/>
+          <a:ln xmlns:a="http://schemas.openxmlformats.org/drawingml/2006/main" w="0">
+            <a:noFill/>
+          </a:ln>
+        </p:spPr>
+        <p:txBody>
+          <a:bodyPr xmlns:a="http://schemas.openxmlformats.org/drawingml/2006/main" wrap="none" lIns="0" tIns="0" rIns="0" bIns="0" anchor="ctr">
+            <a:noAutofit/>
+          </a:bodyPr>
+          <a:lstStyle xmlns:a="http://schemas.openxmlformats.org/drawingml/2006/main">
+            <a:defPPr algn="l">
+              <a:defRPr sz="2175" b="1">
+                <a:solidFill>
+                  <a:srgbClr val="17212B"/>
+                </a:solidFill>
+                <a:latin typeface="Malgun Gothic"/>
+                <a:ea typeface="Malgun Gothic"/>
+                <a:cs typeface="Malgun Gothic"/>
+              </a:defRPr>
+            </a:defPPr>
+            <a:lvl1pPr algn="l">
+              <a:defRPr sz="2175" b="1">
+                <a:solidFill>
+                  <a:srgbClr val="17212B"/>
+                </a:solidFill>
+                <a:latin typeface="Malgun Gothic"/>
+                <a:ea typeface="Malgun Gothic"/>
+                <a:cs typeface="Malgun Gothic"/>
+              </a:defRPr>
+            </a:lvl1pPr>
+            <a:lvl2pPr algn="l">
+              <a:defRPr sz="2175" b="1">
+                <a:solidFill>
+                  <a:srgbClr val="17212B"/>
+                </a:solidFill>
+                <a:latin typeface="Malgun Gothic"/>
+                <a:ea typeface="Malgun Gothic"/>
+                <a:cs typeface="Malgun Gothic"/>
+              </a:defRPr>
+            </a:lvl2pPr>
+            <a:lvl3pPr algn="l">
+              <a:defRPr sz="2175" b="1">
+                <a:solidFill>
+                  <a:srgbClr val="17212B"/>
+                </a:solidFill>
+                <a:latin typeface="Malgun Gothic"/>
+                <a:ea typeface="Malgun Gothic"/>
+                <a:cs typeface="Malgun Gothic"/>
+              </a:defRPr>
+            </a:lvl3pPr>
+            <a:lvl4pPr algn="l">
+              <a:defRPr sz="2175" b="1">
+                <a:solidFill>
+                  <a:srgbClr val="17212B"/>
+                </a:solidFill>
+                <a:latin typeface="Malgun Gothic"/>
+                <a:ea typeface="Malgun Gothic"/>
+                <a:cs typeface="Malgun Gothic"/>
+              </a:defRPr>
+            </a:lvl4pPr>
+            <a:lvl5pPr algn="l">
+              <a:defRPr sz="2175" b="1">
+                <a:solidFill>
+                  <a:srgbClr val="17212B"/>
+                </a:solidFill>
+                <a:latin typeface="Malgun Gothic"/>
+                <a:ea typeface="Malgun Gothic"/>
+                <a:cs typeface="Malgun Gothic"/>
+              </a:defRPr>
+            </a:lvl5pPr>
+            <a:lvl6pPr algn="l">
+              <a:defRPr sz="2175" b="1">
+                <a:solidFill>
+                  <a:srgbClr val="17212B"/>
+                </a:solidFill>
+                <a:latin typeface="Malgun Gothic"/>
+                <a:ea typeface="Malgun Gothic"/>
+                <a:cs typeface="Malgun Gothic"/>
+              </a:defRPr>
+            </a:lvl6pPr>
+            <a:lvl7pPr algn="l">
+              <a:defRPr sz="2175" b="1">
+                <a:solidFill>
+                  <a:srgbClr val="17212B"/>
+                </a:solidFill>
+                <a:latin typeface="Malgun Gothic"/>
+                <a:ea typeface="Malgun Gothic"/>
+                <a:cs typeface="Malgun Gothic"/>
+              </a:defRPr>
+            </a:lvl7pPr>
+            <a:lvl8pPr algn="l">
+              <a:defRPr sz="2175" b="1">
+                <a:solidFill>
+                  <a:srgbClr val="17212B"/>
+                </a:solidFill>
+                <a:latin typeface="Malgun Gothic"/>
+                <a:ea typeface="Malgun Gothic"/>
+                <a:cs typeface="Malgun Gothic"/>
+              </a:defRPr>
+            </a:lvl8pPr>
+            <a:lvl9pPr algn="l">
+              <a:defRPr sz="2175" b="1">
+                <a:solidFill>
+                  <a:srgbClr val="17212B"/>
+                </a:solidFill>
+                <a:latin typeface="Malgun Gothic"/>
+                <a:ea typeface="Malgun Gothic"/>
+                <a:cs typeface="Malgun Gothic"/>
+              </a:defRPr>
+            </a:lvl9pPr>
+          </a:lstStyle>
+          <a:p xmlns:a="http://schemas.openxmlformats.org/drawingml/2006/main">
+            <a:pPr algn="l">
+              <a:defRPr sz="2175" b="1">
+                <a:solidFill>
+                  <a:srgbClr val="17212B"/>
+                </a:solidFill>
+                <a:latin typeface="Malgun Gothic"/>
+                <a:ea typeface="Malgun Gothic"/>
+                <a:cs typeface="Malgun Gothic"/>
+              </a:defRPr>
+            </a:pPr>
+            <a:r>
+              <a:rPr sz="2175" b="1">
+                <a:solidFill>
+                  <a:srgbClr val="17212B"/>
+                </a:solidFill>
+                <a:latin typeface="Malgun Gothic"/>
+                <a:ea typeface="Malgun Gothic"/>
+                <a:cs typeface="Malgun Gothic"/>
+              </a:rPr>
+              <a:t>수정 전에 조사부터 요청</a:t>
+            </a:r>
+          </a:p>
+        </p:txBody>
+      </p:sp>
+      <p:sp>
+        <p:nvSpPr>
+          <p:cNvPr id="26" name="찾은 파일과 근거를 함께 확인">
+            <a:extLst xmlns:a="http://schemas.openxmlformats.org/drawingml/2006/main">
+              <a:ext uri="{FF2B5EF4-FFF2-40B4-BE49-F238E27FC236}">
+                <a16:creationId xmlns:a16="http://schemas.microsoft.com/office/drawing/2014/main" id="{CA2CEB17-CCB3-4E2E-9A61-DC7A3030EB68}"/>
+              </a:ext>
+            </a:extLst>
+          </p:cNvPr>
+          <p:cNvSpPr>
+            <a:spLocks xmlns:a="http://schemas.openxmlformats.org/drawingml/2006/main" noGrp="1"/>
+          </p:cNvSpPr>
+          <p:nvPr/>
+        </p:nvSpPr>
+        <p:spPr>
+          <a:xfrm xmlns:a="http://schemas.openxmlformats.org/drawingml/2006/main">
+            <a:off x="6934200" y="4457700"/>
+            <a:ext cx="4648200" cy="295275"/>
+          </a:xfrm>
+          <a:prstGeom xmlns:a="http://schemas.openxmlformats.org/drawingml/2006/main" prst="rect">
+            <a:avLst/>
+          </a:prstGeom>
+          <a:noFill xmlns:a="http://schemas.openxmlformats.org/drawingml/2006/main"/>
+          <a:ln xmlns:a="http://schemas.openxmlformats.org/drawingml/2006/main" w="0">
+            <a:noFill/>
+          </a:ln>
+        </p:spPr>
+        <p:txBody>
+          <a:bodyPr xmlns:a="http://schemas.openxmlformats.org/drawingml/2006/main" wrap="none" lIns="0" tIns="0" rIns="0" bIns="0" anchor="ctr">
+            <a:noAutofit/>
+          </a:bodyPr>
+          <a:lstStyle xmlns:a="http://schemas.openxmlformats.org/drawingml/2006/main">
+            <a:defPPr algn="l">
+              <a:defRPr sz="1800" b="0">
+                <a:solidFill>
+                  <a:srgbClr val="4D5A68"/>
+                </a:solidFill>
+                <a:latin typeface="Malgun Gothic"/>
+                <a:ea typeface="Malgun Gothic"/>
+                <a:cs typeface="Malgun Gothic"/>
+              </a:defRPr>
+            </a:defPPr>
+            <a:lvl1pPr algn="l">
+              <a:defRPr sz="1800" b="0">
+                <a:solidFill>
+                  <a:srgbClr val="4D5A68"/>
+                </a:solidFill>
+                <a:latin typeface="Malgun Gothic"/>
+                <a:ea typeface="Malgun Gothic"/>
+                <a:cs typeface="Malgun Gothic"/>
+              </a:defRPr>
+            </a:lvl1pPr>
+            <a:lvl2pPr algn="l">
+              <a:defRPr sz="1800" b="0">
+                <a:solidFill>
+                  <a:srgbClr val="4D5A68"/>
+                </a:solidFill>
+                <a:latin typeface="Malgun Gothic"/>
+                <a:ea typeface="Malgun Gothic"/>
+                <a:cs typeface="Malgun Gothic"/>
+              </a:defRPr>
+            </a:lvl2pPr>
+            <a:lvl3pPr algn="l">
+              <a:defRPr sz="1800" b="0">
+                <a:solidFill>
+                  <a:srgbClr val="4D5A68"/>
+                </a:solidFill>
+                <a:latin typeface="Malgun Gothic"/>
+                <a:ea typeface="Malgun Gothic"/>
+                <a:cs typeface="Malgun Gothic"/>
+              </a:defRPr>
+            </a:lvl3pPr>
+            <a:lvl4pPr algn="l">
+              <a:defRPr sz="1800" b="0">
+                <a:solidFill>
+                  <a:srgbClr val="4D5A68"/>
+                </a:solidFill>
+                <a:latin typeface="Malgun Gothic"/>
+                <a:ea typeface="Malgun Gothic"/>
+                <a:cs typeface="Malgun Gothic"/>
+              </a:defRPr>
+            </a:lvl4pPr>
+            <a:lvl5pPr algn="l">
+              <a:defRPr sz="1800" b="0">
+                <a:solidFill>
+                  <a:srgbClr val="4D5A68"/>
+                </a:solidFill>
+                <a:latin typeface="Malgun Gothic"/>
+                <a:ea typeface="Malgun Gothic"/>
+                <a:cs typeface="Malgun Gothic"/>
+              </a:defRPr>
+            </a:lvl5pPr>
+            <a:lvl6pPr algn="l">
+              <a:defRPr sz="1800" b="0">
+                <a:solidFill>
+                  <a:srgbClr val="4D5A68"/>
+                </a:solidFill>
+                <a:latin typeface="Malgun Gothic"/>
+                <a:ea typeface="Malgun Gothic"/>
+                <a:cs typeface="Malgun Gothic"/>
+              </a:defRPr>
+            </a:lvl6pPr>
+            <a:lvl7pPr algn="l">
+              <a:defRPr sz="1800" b="0">
+                <a:solidFill>
+                  <a:srgbClr val="4D5A68"/>
+                </a:solidFill>
+                <a:latin typeface="Malgun Gothic"/>
+                <a:ea typeface="Malgun Gothic"/>
+                <a:cs typeface="Malgun Gothic"/>
+              </a:defRPr>
+            </a:lvl7pPr>
+            <a:lvl8pPr algn="l">
+              <a:defRPr sz="1800" b="0">
+                <a:solidFill>
+                  <a:srgbClr val="4D5A68"/>
+                </a:solidFill>
+                <a:latin typeface="Malgun Gothic"/>
+                <a:ea typeface="Malgun Gothic"/>
+                <a:cs typeface="Malgun Gothic"/>
+              </a:defRPr>
+            </a:lvl8pPr>
+            <a:lvl9pPr algn="l">
+              <a:defRPr sz="1800" b="0">
+                <a:solidFill>
+                  <a:srgbClr val="4D5A68"/>
+                </a:solidFill>
+                <a:latin typeface="Malgun Gothic"/>
+                <a:ea typeface="Malgun Gothic"/>
+                <a:cs typeface="Malgun Gothic"/>
+              </a:defRPr>
+            </a:lvl9pPr>
+          </a:lstStyle>
+          <a:p xmlns:a="http://schemas.openxmlformats.org/drawingml/2006/main">
+            <a:pPr algn="l">
+              <a:defRPr sz="1800" b="0">
+                <a:solidFill>
+                  <a:srgbClr val="4D5A68"/>
+                </a:solidFill>
+                <a:latin typeface="Malgun Gothic"/>
+                <a:ea typeface="Malgun Gothic"/>
+                <a:cs typeface="Malgun Gothic"/>
+              </a:defRPr>
+            </a:pPr>
+            <a:r>
+              <a:rPr sz="1800" b="0">
+                <a:solidFill>
+                  <a:srgbClr val="4D5A68"/>
+                </a:solidFill>
+                <a:latin typeface="Malgun Gothic"/>
+                <a:ea typeface="Malgun Gothic"/>
+                <a:cs typeface="Malgun Gothic"/>
+              </a:rPr>
+              <a:t>찾은 파일과 근거를 함께 확인</a:t>
+            </a:r>
+          </a:p>
+        </p:txBody>
+      </p:sp>
+      <p:sp>
+        <p:nvSpPr>
+          <p:cNvPr id="27" name="이 교육의 Repository 조사는 Codex로 진행한다.">
+            <a:extLst xmlns:a="http://schemas.openxmlformats.org/drawingml/2006/main">
+              <a:ext uri="{FF2B5EF4-FFF2-40B4-BE49-F238E27FC236}">
+                <a16:creationId xmlns:a16="http://schemas.microsoft.com/office/drawing/2014/main" id="{8D13F0DB-5680-473A-A421-F438C639F3DE}"/>
+              </a:ext>
+            </a:extLst>
+          </p:cNvPr>
+          <p:cNvSpPr>
+            <a:spLocks xmlns:a="http://schemas.openxmlformats.org/drawingml/2006/main" noGrp="1"/>
+          </p:cNvSpPr>
+          <p:nvPr/>
+        </p:nvSpPr>
+        <p:spPr>
+          <a:xfrm xmlns:a="http://schemas.openxmlformats.org/drawingml/2006/main">
+            <a:off x="609600" y="5276850"/>
+            <a:ext cx="10972800" cy="390525"/>
+          </a:xfrm>
+          <a:prstGeom xmlns:a="http://schemas.openxmlformats.org/drawingml/2006/main" prst="rect">
+            <a:avLst/>
+          </a:prstGeom>
+          <a:noFill xmlns:a="http://schemas.openxmlformats.org/drawingml/2006/main"/>
+          <a:ln xmlns:a="http://schemas.openxmlformats.org/drawingml/2006/main" w="0">
+            <a:noFill/>
+          </a:ln>
+        </p:spPr>
+        <p:txBody>
+          <a:bodyPr xmlns:a="http://schemas.openxmlformats.org/drawingml/2006/main" wrap="none" lIns="0" tIns="0" rIns="0" bIns="0" anchor="ctr">
+            <a:noAutofit/>
+          </a:bodyPr>
+          <a:lstStyle xmlns:a="http://schemas.openxmlformats.org/drawingml/2006/main">
+            <a:defPPr algn="l">
+              <a:defRPr sz="2325" b="1">
+                <a:solidFill>
+                  <a:srgbClr val="0B6172"/>
+                </a:solidFill>
+                <a:latin typeface="Malgun Gothic"/>
+                <a:ea typeface="Malgun Gothic"/>
+                <a:cs typeface="Malgun Gothic"/>
+              </a:defRPr>
+            </a:defPPr>
+            <a:lvl1pPr algn="l">
+              <a:defRPr sz="2325" b="1">
+                <a:solidFill>
+                  <a:srgbClr val="0B6172"/>
+                </a:solidFill>
+                <a:latin typeface="Malgun Gothic"/>
+                <a:ea typeface="Malgun Gothic"/>
+                <a:cs typeface="Malgun Gothic"/>
+              </a:defRPr>
+            </a:lvl1pPr>
+            <a:lvl2pPr algn="l">
+              <a:defRPr sz="2325" b="1">
+                <a:solidFill>
+                  <a:srgbClr val="0B6172"/>
+                </a:solidFill>
+                <a:latin typeface="Malgun Gothic"/>
+                <a:ea typeface="Malgun Gothic"/>
+                <a:cs typeface="Malgun Gothic"/>
+              </a:defRPr>
+            </a:lvl2pPr>
+            <a:lvl3pPr algn="l">
+              <a:defRPr sz="2325" b="1">
+                <a:solidFill>
+                  <a:srgbClr val="0B6172"/>
+                </a:solidFill>
+                <a:latin typeface="Malgun Gothic"/>
+                <a:ea typeface="Malgun Gothic"/>
+                <a:cs typeface="Malgun Gothic"/>
+              </a:defRPr>
+            </a:lvl3pPr>
+            <a:lvl4pPr algn="l">
+              <a:defRPr sz="2325" b="1">
+                <a:solidFill>
+                  <a:srgbClr val="0B6172"/>
+                </a:solidFill>
+                <a:latin typeface="Malgun Gothic"/>
+                <a:ea typeface="Malgun Gothic"/>
+                <a:cs typeface="Malgun Gothic"/>
+              </a:defRPr>
+            </a:lvl4pPr>
+            <a:lvl5pPr algn="l">
+              <a:defRPr sz="2325" b="1">
+                <a:solidFill>
+                  <a:srgbClr val="0B6172"/>
+                </a:solidFill>
+                <a:latin typeface="Malgun Gothic"/>
+                <a:ea typeface="Malgun Gothic"/>
+                <a:cs typeface="Malgun Gothic"/>
+              </a:defRPr>
+            </a:lvl5pPr>
+            <a:lvl6pPr algn="l">
+              <a:defRPr sz="2325" b="1">
+                <a:solidFill>
+                  <a:srgbClr val="0B6172"/>
+                </a:solidFill>
+                <a:latin typeface="Malgun Gothic"/>
+                <a:ea typeface="Malgun Gothic"/>
+                <a:cs typeface="Malgun Gothic"/>
+              </a:defRPr>
+            </a:lvl6pPr>
+            <a:lvl7pPr algn="l">
+              <a:defRPr sz="2325" b="1">
+                <a:solidFill>
+                  <a:srgbClr val="0B6172"/>
+                </a:solidFill>
+                <a:latin typeface="Malgun Gothic"/>
+                <a:ea typeface="Malgun Gothic"/>
+                <a:cs typeface="Malgun Gothic"/>
+              </a:defRPr>
+            </a:lvl7pPr>
+            <a:lvl8pPr algn="l">
+              <a:defRPr sz="2325" b="1">
+                <a:solidFill>
+                  <a:srgbClr val="0B6172"/>
+                </a:solidFill>
+                <a:latin typeface="Malgun Gothic"/>
+                <a:ea typeface="Malgun Gothic"/>
+                <a:cs typeface="Malgun Gothic"/>
+              </a:defRPr>
+            </a:lvl8pPr>
+            <a:lvl9pPr algn="l">
+              <a:defRPr sz="2325" b="1">
+                <a:solidFill>
+                  <a:srgbClr val="0B6172"/>
+                </a:solidFill>
+                <a:latin typeface="Malgun Gothic"/>
+                <a:ea typeface="Malgun Gothic"/>
+                <a:cs typeface="Malgun Gothic"/>
+              </a:defRPr>
+            </a:lvl9pPr>
+          </a:lstStyle>
+          <a:p xmlns:a="http://schemas.openxmlformats.org/drawingml/2006/main">
+            <a:pPr algn="l">
+              <a:defRPr sz="2325" b="1">
+                <a:solidFill>
+                  <a:srgbClr val="0B6172"/>
+                </a:solidFill>
+                <a:latin typeface="Malgun Gothic"/>
+                <a:ea typeface="Malgun Gothic"/>
+                <a:cs typeface="Malgun Gothic"/>
+              </a:defRPr>
+            </a:pPr>
+            <a:r>
+              <a:rPr sz="2325" b="1">
+                <a:solidFill>
+                  <a:srgbClr val="0B6172"/>
+                </a:solidFill>
+                <a:latin typeface="Malgun Gothic"/>
+                <a:ea typeface="Malgun Gothic"/>
+                <a:cs typeface="Malgun Gothic"/>
+              </a:rPr>
+              <a:t>이 교육의 Repository 조사는 Codex로 진행한다.</a:t>
+            </a:r>
+          </a:p>
+        </p:txBody>
+      </p:sp>
+      <p:sp>
+        <p:nvSpPr>
+          <p:cNvPr id="28" name="Legacy module connection">
+            <a:extLst xmlns:a="http://schemas.openxmlformats.org/drawingml/2006/main">
+              <a:ext uri="{FF2B5EF4-FFF2-40B4-BE49-F238E27FC236}">
+                <a16:creationId xmlns:a16="http://schemas.microsoft.com/office/drawing/2014/main" id="{AF27DD71-F360-41F6-AB26-B8012A5F9F02}"/>
               </a:ext>
             </a:extLst>
           </p:cNvPr>
@@ -30553,7 +34174,7 @@
                 <a:ea typeface="Malgun Gothic"/>
                 <a:cs typeface="Malgun Gothic"/>
               </a:rPr>
-              <a:t>M 연계 · M1 · M2</a:t>
+              <a:t>M 연계 · M1</a:t>
             </a:r>
           </a:p>
         </p:txBody>
@@ -30561,7 +34182,7 @@
     </p:spTree>
     <p:extLst>
       <p:ext uri="{BB962C8B-B14F-4D97-AF65-F5344CB8AC3E}">
-        <p14:creationId xmlns:p14="http://schemas.microsoft.com/office/powerpoint/2010/main" val="1208669752"/>
+        <p14:creationId xmlns:p14="http://schemas.microsoft.com/office/powerpoint/2010/main" val="764528692"/>
       </p:ext>
     </p:extLst>
   </p:cSld>
@@ -30589,10 +34210,10 @@
       </p:grpSpPr>
       <p:sp>
         <p:nvSpPr>
-          <p:cNvPr id="12" name="ACT 0 · 내 작업에 적용할 질문">
+          <p:cNvPr id="23" name="ACT 0 · 누가 볼 수 있고, 누가 정하는가">
             <a:extLst xmlns:a="http://schemas.openxmlformats.org/drawingml/2006/main">
               <a:ext uri="{FF2B5EF4-FFF2-40B4-BE49-F238E27FC236}">
-                <a16:creationId xmlns:a16="http://schemas.microsoft.com/office/drawing/2014/main" id="{200AC94C-FCBE-417E-9C6C-D2ED20FF2317}"/>
+                <a16:creationId xmlns:a16="http://schemas.microsoft.com/office/drawing/2014/main" id="{B7649B56-29E8-440B-997E-C6E2C23FDBF1}"/>
               </a:ext>
             </a:extLst>
           </p:cNvPr>
@@ -30740,7 +34361,7 @@
                 <a:ea typeface="Malgun Gothic"/>
                 <a:cs typeface="Malgun Gothic"/>
               </a:rPr>
-              <a:t>ACT 0 · 내 작업에 적용할 질문</a:t>
+              <a:t>ACT 0 · 누가 볼 수 있고, 누가 정하는가</a:t>
             </a:r>
           </a:p>
         </p:txBody>
@@ -30750,7 +34371,7 @@
           <p:cNvPr id="2" name="S09">
             <a:extLst xmlns:a="http://schemas.openxmlformats.org/drawingml/2006/main">
               <a:ext uri="{FF2B5EF4-FFF2-40B4-BE49-F238E27FC236}">
-                <a16:creationId xmlns:a16="http://schemas.microsoft.com/office/drawing/2014/main" id="{EEA0C075-B088-4A35-9130-837CBA133FF6}"/>
+                <a16:creationId xmlns:a16="http://schemas.microsoft.com/office/drawing/2014/main" id="{65F2EF51-2D98-42C4-831D-4F089C2A378A}"/>
               </a:ext>
             </a:extLst>
           </p:cNvPr>
@@ -30905,10 +34526,10 @@
       </p:sp>
       <p:sp>
         <p:nvSpPr>
-          <p:cNvPr id="3" name="Repository를 보면 내가 원하는 것까지 알까?">
+          <p:cNvPr id="3" name="Repository 접근과 Task 의도는 별개다">
             <a:extLst xmlns:a="http://schemas.openxmlformats.org/drawingml/2006/main">
               <a:ext uri="{FF2B5EF4-FFF2-40B4-BE49-F238E27FC236}">
-                <a16:creationId xmlns:a16="http://schemas.microsoft.com/office/drawing/2014/main" id="{282708B6-4B39-4922-AE1C-591E0204A0B6}"/>
+                <a16:creationId xmlns:a16="http://schemas.microsoft.com/office/drawing/2014/main" id="{C0E0A743-0030-4E41-9E7F-272799C4E6B0}"/>
               </a:ext>
             </a:extLst>
           </p:cNvPr>
@@ -31056,7 +34677,7 @@
                 <a:ea typeface="Malgun Gothic"/>
                 <a:cs typeface="Malgun Gothic"/>
               </a:rPr>
-              <a:t>Repository를 보면 내가 원하는 것까지 알까?</a:t>
+              <a:t>Repository 접근과 Task 의도는 별개다</a:t>
             </a:r>
           </a:p>
         </p:txBody>
@@ -31066,7 +34687,7 @@
           <p:cNvPr id="4" name="">
             <a:extLst xmlns:a="http://schemas.openxmlformats.org/drawingml/2006/main">
               <a:ext uri="{FF2B5EF4-FFF2-40B4-BE49-F238E27FC236}">
-                <a16:creationId xmlns:a16="http://schemas.microsoft.com/office/drawing/2014/main" id="{66120272-BC5F-4A7A-B63C-21B9928FDC97}"/>
+                <a16:creationId xmlns:a16="http://schemas.microsoft.com/office/drawing/2014/main" id="{F1B8E70D-1F6D-4680-9B73-2E7D20ADB04D}"/>
               </a:ext>
             </a:extLst>
           </p:cNvPr>
@@ -31094,10 +34715,10 @@
       </p:sp>
       <p:sp>
         <p:nvSpPr>
-          <p:cNvPr id="5" name="함께 생각해 보기 · 교육 모델">
+          <p:cNvPr id="5" name="이 과정의 교육 모델 · 정보 접근과 최종 결정 책임의 구분 · AI 생성 역할 아이콘">
             <a:extLst xmlns:a="http://schemas.openxmlformats.org/drawingml/2006/main">
               <a:ext uri="{FF2B5EF4-FFF2-40B4-BE49-F238E27FC236}">
-                <a16:creationId xmlns:a16="http://schemas.microsoft.com/office/drawing/2014/main" id="{C649E945-761A-4436-AED3-ED8E718F06B0}"/>
+                <a16:creationId xmlns:a16="http://schemas.microsoft.com/office/drawing/2014/main" id="{FED97B90-B4A2-4A9C-A406-90FF167D7ECB}"/>
               </a:ext>
             </a:extLst>
           </p:cNvPr>
@@ -31245,17 +34866,17 @@
                 <a:ea typeface="Malgun Gothic"/>
                 <a:cs typeface="Malgun Gothic"/>
               </a:rPr>
-              <a:t>함께 생각해 보기 · 교육 모델</a:t>
+              <a:t>이 과정의 교육 모델 · 정보 접근과 최종 결정 책임의 구분 · AI 생성 역할 아이콘</a:t>
             </a:r>
           </a:p>
         </p:txBody>
       </p:sp>
       <p:sp>
         <p:nvSpPr>
-          <p:cNvPr id="6" name="현재 맡기고 싶은 일을 떠올려 보세요. 질문과 경험 공유는 자발적으로 진행합니다.">
+          <p:cNvPr id="6" name="Agent는 조사·제안을 할 수 있습니다. 목표·허용 범위·완료 수용의 최종 결정과 책임은 사람에게 있습니다">
             <a:extLst xmlns:a="http://schemas.openxmlformats.org/drawingml/2006/main">
               <a:ext uri="{FF2B5EF4-FFF2-40B4-BE49-F238E27FC236}">
-                <a16:creationId xmlns:a16="http://schemas.microsoft.com/office/drawing/2014/main" id="{F9D182D5-F956-4D03-923B-F468E3465E4B}"/>
+                <a16:creationId xmlns:a16="http://schemas.microsoft.com/office/drawing/2014/main" id="{79AB4C72-FCA6-4EE5-8692-DC6337349916}"/>
               </a:ext>
             </a:extLst>
           </p:cNvPr>
@@ -31403,17 +35024,17 @@
                 <a:ea typeface="Malgun Gothic"/>
                 <a:cs typeface="Malgun Gothic"/>
               </a:rPr>
-              <a:t>현재 맡기고 싶은 일을 떠올려 보세요. 질문과 경험 공유는 자발적으로 진행합니다.</a:t>
+              <a:t>Agent는 조사·제안을 할 수 있습니다. 목표·허용 범위·완료 수용의 최종 결정과 책임은 사람에게 있습니다.</a:t>
             </a:r>
           </a:p>
         </p:txBody>
       </p:sp>
       <p:sp>
         <p:nvSpPr>
-          <p:cNvPr id="7" name="지금 이 저장소에&#10;어떤 일을 맡기고 싶으신가요?">
+          <p:cNvPr id="7" name="볼 수 있는 것">
             <a:extLst xmlns:a="http://schemas.openxmlformats.org/drawingml/2006/main">
               <a:ext uri="{FF2B5EF4-FFF2-40B4-BE49-F238E27FC236}">
-                <a16:creationId xmlns:a16="http://schemas.microsoft.com/office/drawing/2014/main" id="{C26A57B9-4488-4912-8CCC-A1758AF43451}"/>
+                <a16:creationId xmlns:a16="http://schemas.microsoft.com/office/drawing/2014/main" id="{87AF582A-DA5E-4980-AEAA-1E2130F17CC6}"/>
               </a:ext>
             </a:extLst>
           </p:cNvPr>
@@ -31424,8 +35045,8 @@
         </p:nvSpPr>
         <p:spPr>
           <a:xfrm xmlns:a="http://schemas.openxmlformats.org/drawingml/2006/main">
-            <a:off x="609600" y="2333625"/>
-            <a:ext cx="9620250" cy="1371600"/>
+            <a:off x="609600" y="1885950"/>
+            <a:ext cx="4953000" cy="419100"/>
           </a:xfrm>
           <a:prstGeom xmlns:a="http://schemas.openxmlformats.org/drawingml/2006/main" prst="rect">
             <a:avLst/>
@@ -31441,9 +35062,9 @@
           </a:bodyPr>
           <a:lstStyle xmlns:a="http://schemas.openxmlformats.org/drawingml/2006/main">
             <a:defPPr algn="l">
-              <a:defRPr sz="3375" b="1">
-                <a:solidFill>
-                  <a:srgbClr val="17212B"/>
+              <a:defRPr sz="2400" b="1">
+                <a:solidFill>
+                  <a:srgbClr val="0B6172"/>
                 </a:solidFill>
                 <a:latin typeface="Malgun Gothic"/>
                 <a:ea typeface="Malgun Gothic"/>
@@ -31451,9 +35072,9 @@
               </a:defRPr>
             </a:defPPr>
             <a:lvl1pPr algn="l">
-              <a:defRPr sz="3375" b="1">
-                <a:solidFill>
-                  <a:srgbClr val="17212B"/>
+              <a:defRPr sz="2400" b="1">
+                <a:solidFill>
+                  <a:srgbClr val="0B6172"/>
                 </a:solidFill>
                 <a:latin typeface="Malgun Gothic"/>
                 <a:ea typeface="Malgun Gothic"/>
@@ -31461,9 +35082,9 @@
               </a:defRPr>
             </a:lvl1pPr>
             <a:lvl2pPr algn="l">
-              <a:defRPr sz="3375" b="1">
-                <a:solidFill>
-                  <a:srgbClr val="17212B"/>
+              <a:defRPr sz="2400" b="1">
+                <a:solidFill>
+                  <a:srgbClr val="0B6172"/>
                 </a:solidFill>
                 <a:latin typeface="Malgun Gothic"/>
                 <a:ea typeface="Malgun Gothic"/>
@@ -31471,9 +35092,9 @@
               </a:defRPr>
             </a:lvl2pPr>
             <a:lvl3pPr algn="l">
-              <a:defRPr sz="3375" b="1">
-                <a:solidFill>
-                  <a:srgbClr val="17212B"/>
+              <a:defRPr sz="2400" b="1">
+                <a:solidFill>
+                  <a:srgbClr val="0B6172"/>
                 </a:solidFill>
                 <a:latin typeface="Malgun Gothic"/>
                 <a:ea typeface="Malgun Gothic"/>
@@ -31481,9 +35102,9 @@
               </a:defRPr>
             </a:lvl3pPr>
             <a:lvl4pPr algn="l">
-              <a:defRPr sz="3375" b="1">
-                <a:solidFill>
-                  <a:srgbClr val="17212B"/>
+              <a:defRPr sz="2400" b="1">
+                <a:solidFill>
+                  <a:srgbClr val="0B6172"/>
                 </a:solidFill>
                 <a:latin typeface="Malgun Gothic"/>
                 <a:ea typeface="Malgun Gothic"/>
@@ -31491,9 +35112,9 @@
               </a:defRPr>
             </a:lvl4pPr>
             <a:lvl5pPr algn="l">
-              <a:defRPr sz="3375" b="1">
-                <a:solidFill>
-                  <a:srgbClr val="17212B"/>
+              <a:defRPr sz="2400" b="1">
+                <a:solidFill>
+                  <a:srgbClr val="0B6172"/>
                 </a:solidFill>
                 <a:latin typeface="Malgun Gothic"/>
                 <a:ea typeface="Malgun Gothic"/>
@@ -31501,9 +35122,9 @@
               </a:defRPr>
             </a:lvl5pPr>
             <a:lvl6pPr algn="l">
-              <a:defRPr sz="3375" b="1">
-                <a:solidFill>
-                  <a:srgbClr val="17212B"/>
+              <a:defRPr sz="2400" b="1">
+                <a:solidFill>
+                  <a:srgbClr val="0B6172"/>
                 </a:solidFill>
                 <a:latin typeface="Malgun Gothic"/>
                 <a:ea typeface="Malgun Gothic"/>
@@ -31511,9 +35132,9 @@
               </a:defRPr>
             </a:lvl6pPr>
             <a:lvl7pPr algn="l">
-              <a:defRPr sz="3375" b="1">
-                <a:solidFill>
-                  <a:srgbClr val="17212B"/>
+              <a:defRPr sz="2400" b="1">
+                <a:solidFill>
+                  <a:srgbClr val="0B6172"/>
                 </a:solidFill>
                 <a:latin typeface="Malgun Gothic"/>
                 <a:ea typeface="Malgun Gothic"/>
@@ -31521,9 +35142,9 @@
               </a:defRPr>
             </a:lvl7pPr>
             <a:lvl8pPr algn="l">
-              <a:defRPr sz="3375" b="1">
-                <a:solidFill>
-                  <a:srgbClr val="17212B"/>
+              <a:defRPr sz="2400" b="1">
+                <a:solidFill>
+                  <a:srgbClr val="0B6172"/>
                 </a:solidFill>
                 <a:latin typeface="Malgun Gothic"/>
                 <a:ea typeface="Malgun Gothic"/>
@@ -31531,9 +35152,9 @@
               </a:defRPr>
             </a:lvl8pPr>
             <a:lvl9pPr algn="l">
-              <a:defRPr sz="3375" b="1">
-                <a:solidFill>
-                  <a:srgbClr val="17212B"/>
+              <a:defRPr sz="2400" b="1">
+                <a:solidFill>
+                  <a:srgbClr val="0B6172"/>
                 </a:solidFill>
                 <a:latin typeface="Malgun Gothic"/>
                 <a:ea typeface="Malgun Gothic"/>
@@ -31543,9 +35164,9 @@
           </a:lstStyle>
           <a:p xmlns:a="http://schemas.openxmlformats.org/drawingml/2006/main">
             <a:pPr algn="l">
-              <a:defRPr sz="3375" b="1">
-                <a:solidFill>
-                  <a:srgbClr val="17212B"/>
+              <a:defRPr sz="2400" b="1">
+                <a:solidFill>
+                  <a:srgbClr val="0B6172"/>
                 </a:solidFill>
                 <a:latin typeface="Malgun Gothic"/>
                 <a:ea typeface="Malgun Gothic"/>
@@ -31553,48 +35174,25 @@
               </a:defRPr>
             </a:pPr>
             <a:r>
-              <a:rPr sz="3375" b="1">
-                <a:solidFill>
-                  <a:srgbClr val="17212B"/>
+              <a:rPr sz="2400" b="1">
+                <a:solidFill>
+                  <a:srgbClr val="0B6172"/>
                 </a:solidFill>
                 <a:latin typeface="Malgun Gothic"/>
                 <a:ea typeface="Malgun Gothic"/>
                 <a:cs typeface="Malgun Gothic"/>
               </a:rPr>
-              <a:t>지금 이 저장소에</a:t>
-            </a:r>
-          </a:p>
-          <a:p xmlns:a="http://schemas.openxmlformats.org/drawingml/2006/main">
-            <a:pPr algn="l">
-              <a:defRPr sz="3375" b="1">
-                <a:solidFill>
-                  <a:srgbClr val="17212B"/>
-                </a:solidFill>
-                <a:latin typeface="Malgun Gothic"/>
-                <a:ea typeface="Malgun Gothic"/>
-                <a:cs typeface="Malgun Gothic"/>
-              </a:defRPr>
-            </a:pPr>
-            <a:r>
-              <a:rPr sz="3375" b="1">
-                <a:solidFill>
-                  <a:srgbClr val="17212B"/>
-                </a:solidFill>
-                <a:latin typeface="Malgun Gothic"/>
-                <a:ea typeface="Malgun Gothic"/>
-                <a:cs typeface="Malgun Gothic"/>
-              </a:rPr>
-              <a:t>어떤 일을 맡기고 싶으신가요?</a:t>
+              <a:t>볼 수 있는 것</a:t>
             </a:r>
           </a:p>
         </p:txBody>
       </p:sp>
       <p:sp>
         <p:nvSpPr>
-          <p:cNvPr id="8" name="?">
+          <p:cNvPr id="8" name="정해야 하는 것">
             <a:extLst xmlns:a="http://schemas.openxmlformats.org/drawingml/2006/main">
               <a:ext uri="{FF2B5EF4-FFF2-40B4-BE49-F238E27FC236}">
-                <a16:creationId xmlns:a16="http://schemas.microsoft.com/office/drawing/2014/main" id="{1F4F960A-0AFA-4F7D-997C-D1F16536E19A}"/>
+                <a16:creationId xmlns:a16="http://schemas.microsoft.com/office/drawing/2014/main" id="{95FB1E23-BE97-4948-B953-FB1CBEC096E1}"/>
               </a:ext>
             </a:extLst>
           </p:cNvPr>
@@ -31605,8 +35203,8 @@
         </p:nvSpPr>
         <p:spPr>
           <a:xfrm xmlns:a="http://schemas.openxmlformats.org/drawingml/2006/main">
-            <a:off x="10287000" y="2381250"/>
-            <a:ext cx="1238250" cy="1333500"/>
+            <a:off x="7181850" y="1885950"/>
+            <a:ext cx="4400550" cy="419100"/>
           </a:xfrm>
           <a:prstGeom xmlns:a="http://schemas.openxmlformats.org/drawingml/2006/main" prst="rect">
             <a:avLst/>
@@ -31622,7 +35220,7 @@
           </a:bodyPr>
           <a:lstStyle xmlns:a="http://schemas.openxmlformats.org/drawingml/2006/main">
             <a:defPPr algn="l">
-              <a:defRPr sz="8400" b="1">
+              <a:defRPr sz="2400" b="1">
                 <a:solidFill>
                   <a:srgbClr val="0B6172"/>
                 </a:solidFill>
@@ -31632,7 +35230,7 @@
               </a:defRPr>
             </a:defPPr>
             <a:lvl1pPr algn="l">
-              <a:defRPr sz="8400" b="1">
+              <a:defRPr sz="2400" b="1">
                 <a:solidFill>
                   <a:srgbClr val="0B6172"/>
                 </a:solidFill>
@@ -31642,7 +35240,7 @@
               </a:defRPr>
             </a:lvl1pPr>
             <a:lvl2pPr algn="l">
-              <a:defRPr sz="8400" b="1">
+              <a:defRPr sz="2400" b="1">
                 <a:solidFill>
                   <a:srgbClr val="0B6172"/>
                 </a:solidFill>
@@ -31652,7 +35250,7 @@
               </a:defRPr>
             </a:lvl2pPr>
             <a:lvl3pPr algn="l">
-              <a:defRPr sz="8400" b="1">
+              <a:defRPr sz="2400" b="1">
                 <a:solidFill>
                   <a:srgbClr val="0B6172"/>
                 </a:solidFill>
@@ -31662,7 +35260,7 @@
               </a:defRPr>
             </a:lvl3pPr>
             <a:lvl4pPr algn="l">
-              <a:defRPr sz="8400" b="1">
+              <a:defRPr sz="2400" b="1">
                 <a:solidFill>
                   <a:srgbClr val="0B6172"/>
                 </a:solidFill>
@@ -31672,7 +35270,7 @@
               </a:defRPr>
             </a:lvl4pPr>
             <a:lvl5pPr algn="l">
-              <a:defRPr sz="8400" b="1">
+              <a:defRPr sz="2400" b="1">
                 <a:solidFill>
                   <a:srgbClr val="0B6172"/>
                 </a:solidFill>
@@ -31682,7 +35280,7 @@
               </a:defRPr>
             </a:lvl5pPr>
             <a:lvl6pPr algn="l">
-              <a:defRPr sz="8400" b="1">
+              <a:defRPr sz="2400" b="1">
                 <a:solidFill>
                   <a:srgbClr val="0B6172"/>
                 </a:solidFill>
@@ -31692,7 +35290,7 @@
               </a:defRPr>
             </a:lvl6pPr>
             <a:lvl7pPr algn="l">
-              <a:defRPr sz="8400" b="1">
+              <a:defRPr sz="2400" b="1">
                 <a:solidFill>
                   <a:srgbClr val="0B6172"/>
                 </a:solidFill>
@@ -31702,7 +35300,7 @@
               </a:defRPr>
             </a:lvl7pPr>
             <a:lvl8pPr algn="l">
-              <a:defRPr sz="8400" b="1">
+              <a:defRPr sz="2400" b="1">
                 <a:solidFill>
                   <a:srgbClr val="0B6172"/>
                 </a:solidFill>
@@ -31712,7 +35310,7 @@
               </a:defRPr>
             </a:lvl8pPr>
             <a:lvl9pPr algn="l">
-              <a:defRPr sz="8400" b="1">
+              <a:defRPr sz="2400" b="1">
                 <a:solidFill>
                   <a:srgbClr val="0B6172"/>
                 </a:solidFill>
@@ -31724,7 +35322,7 @@
           </a:lstStyle>
           <a:p xmlns:a="http://schemas.openxmlformats.org/drawingml/2006/main">
             <a:pPr algn="l">
-              <a:defRPr sz="8400" b="1">
+              <a:defRPr sz="2400" b="1">
                 <a:solidFill>
                   <a:srgbClr val="0B6172"/>
                 </a:solidFill>
@@ -31734,7 +35332,7 @@
               </a:defRPr>
             </a:pPr>
             <a:r>
-              <a:rPr sz="8400" b="1">
+              <a:rPr sz="2400" b="1">
                 <a:solidFill>
                   <a:srgbClr val="0B6172"/>
                 </a:solidFill>
@@ -31742,17 +35340,46 @@
                 <a:ea typeface="Malgun Gothic"/>
                 <a:cs typeface="Malgun Gothic"/>
               </a:rPr>
-              <a:t>?</a:t>
+              <a:t>정해야 하는 것</a:t>
             </a:r>
           </a:p>
         </p:txBody>
       </p:sp>
-      <p:sp>
-        <p:nvSpPr>
+      <p:pic>
+        <p:nvPicPr>
           <p:cNvPr id="9" name="">
             <a:extLst xmlns:a="http://schemas.openxmlformats.org/drawingml/2006/main">
               <a:ext uri="{FF2B5EF4-FFF2-40B4-BE49-F238E27FC236}">
-                <a16:creationId xmlns:a16="http://schemas.microsoft.com/office/drawing/2014/main" id="{5B80C2B0-523E-4273-AB5E-A9270341E6A9}"/>
+                <a16:creationId xmlns:a16="http://schemas.microsoft.com/office/drawing/2014/main" id="{183630DF-575B-4F30-AD88-627FF66F050F}"/>
+              </a:ext>
+            </a:extLst>
+          </p:cNvPr>
+          <p:cNvPicPr>
+            <a:picLocks xmlns:a="http://schemas.openxmlformats.org/drawingml/2006/main" noChangeAspect="1"/>
+          </p:cNvPicPr>
+          <p:nvPr/>
+        </p:nvPicPr>
+        <p:blipFill>
+          <a:blip xmlns:r="http://schemas.openxmlformats.org/officeDocument/2006/relationships" xmlns:a="http://schemas.openxmlformats.org/drawingml/2006/main" r:embed="Rd31943cd830f4bca"/>
+          <a:srcRect xmlns:a="http://schemas.openxmlformats.org/drawingml/2006/main" l="0" t="0" r="50000" b="0"/>
+          <a:stretch xmlns:a="http://schemas.openxmlformats.org/drawingml/2006/main"/>
+        </p:blipFill>
+        <p:spPr>
+          <a:xfrm xmlns:a="http://schemas.openxmlformats.org/drawingml/2006/main">
+            <a:off x="609600" y="2505075"/>
+            <a:ext cx="838200" cy="838200"/>
+          </a:xfrm>
+          <a:prstGeom xmlns:a="http://schemas.openxmlformats.org/drawingml/2006/main" prst="rect">
+            <a:avLst/>
+          </a:prstGeom>
+        </p:spPr>
+      </p:pic>
+      <p:sp>
+        <p:nvSpPr>
+          <p:cNvPr id="10" name="사람">
+            <a:extLst xmlns:a="http://schemas.openxmlformats.org/drawingml/2006/main">
+              <a:ext uri="{FF2B5EF4-FFF2-40B4-BE49-F238E27FC236}">
+                <a16:creationId xmlns:a16="http://schemas.microsoft.com/office/drawing/2014/main" id="{CE7F038C-A0C3-4736-BE71-652C2044C9CC}"/>
               </a:ext>
             </a:extLst>
           </p:cNvPr>
@@ -31763,39 +35390,8 @@
         </p:nvSpPr>
         <p:spPr>
           <a:xfrm xmlns:a="http://schemas.openxmlformats.org/drawingml/2006/main">
-            <a:off x="609600" y="4238625"/>
-            <a:ext cx="10972800" cy="0"/>
-          </a:xfrm>
-          <a:prstGeom xmlns:a="http://schemas.openxmlformats.org/drawingml/2006/main" prst="line">
-            <a:avLst/>
-          </a:prstGeom>
-          <a:noFill xmlns:a="http://schemas.openxmlformats.org/drawingml/2006/main"/>
-          <a:ln xmlns:a="http://schemas.openxmlformats.org/drawingml/2006/main" w="9525">
-            <a:solidFill>
-              <a:srgbClr val="C7D0DA"/>
-            </a:solidFill>
-            <a:prstDash val="solid"/>
-          </a:ln>
-        </p:spPr>
-      </p:sp>
-      <p:sp>
-        <p:nvSpPr>
-          <p:cNvPr id="10" name="그 원하는 결과까지&#10;코드에 적혀 있을까요?">
-            <a:extLst xmlns:a="http://schemas.openxmlformats.org/drawingml/2006/main">
-              <a:ext uri="{FF2B5EF4-FFF2-40B4-BE49-F238E27FC236}">
-                <a16:creationId xmlns:a16="http://schemas.microsoft.com/office/drawing/2014/main" id="{CC75E229-07F1-4CB9-9234-A90573078634}"/>
-              </a:ext>
-            </a:extLst>
-          </p:cNvPr>
-          <p:cNvSpPr>
-            <a:spLocks xmlns:a="http://schemas.openxmlformats.org/drawingml/2006/main" noGrp="1"/>
-          </p:cNvSpPr>
-          <p:nvPr/>
-        </p:nvSpPr>
-        <p:spPr>
-          <a:xfrm xmlns:a="http://schemas.openxmlformats.org/drawingml/2006/main">
-            <a:off x="609600" y="4600575"/>
-            <a:ext cx="10972800" cy="914400"/>
+            <a:off x="1504950" y="2714625"/>
+            <a:ext cx="857250" cy="352425"/>
           </a:xfrm>
           <a:prstGeom xmlns:a="http://schemas.openxmlformats.org/drawingml/2006/main" prst="rect">
             <a:avLst/>
@@ -31811,9 +35407,9 @@
           </a:bodyPr>
           <a:lstStyle xmlns:a="http://schemas.openxmlformats.org/drawingml/2006/main">
             <a:defPPr algn="l">
-              <a:defRPr sz="2700" b="1">
-                <a:solidFill>
-                  <a:srgbClr val="0B6172"/>
+              <a:defRPr sz="2100" b="1">
+                <a:solidFill>
+                  <a:srgbClr val="17212B"/>
                 </a:solidFill>
                 <a:latin typeface="Malgun Gothic"/>
                 <a:ea typeface="Malgun Gothic"/>
@@ -31821,9 +35417,9 @@
               </a:defRPr>
             </a:defPPr>
             <a:lvl1pPr algn="l">
-              <a:defRPr sz="2700" b="1">
-                <a:solidFill>
-                  <a:srgbClr val="0B6172"/>
+              <a:defRPr sz="2100" b="1">
+                <a:solidFill>
+                  <a:srgbClr val="17212B"/>
                 </a:solidFill>
                 <a:latin typeface="Malgun Gothic"/>
                 <a:ea typeface="Malgun Gothic"/>
@@ -31831,9 +35427,9 @@
               </a:defRPr>
             </a:lvl1pPr>
             <a:lvl2pPr algn="l">
-              <a:defRPr sz="2700" b="1">
-                <a:solidFill>
-                  <a:srgbClr val="0B6172"/>
+              <a:defRPr sz="2100" b="1">
+                <a:solidFill>
+                  <a:srgbClr val="17212B"/>
                 </a:solidFill>
                 <a:latin typeface="Malgun Gothic"/>
                 <a:ea typeface="Malgun Gothic"/>
@@ -31841,9 +35437,9 @@
               </a:defRPr>
             </a:lvl2pPr>
             <a:lvl3pPr algn="l">
-              <a:defRPr sz="2700" b="1">
-                <a:solidFill>
-                  <a:srgbClr val="0B6172"/>
+              <a:defRPr sz="2100" b="1">
+                <a:solidFill>
+                  <a:srgbClr val="17212B"/>
                 </a:solidFill>
                 <a:latin typeface="Malgun Gothic"/>
                 <a:ea typeface="Malgun Gothic"/>
@@ -31851,9 +35447,9 @@
               </a:defRPr>
             </a:lvl3pPr>
             <a:lvl4pPr algn="l">
-              <a:defRPr sz="2700" b="1">
-                <a:solidFill>
-                  <a:srgbClr val="0B6172"/>
+              <a:defRPr sz="2100" b="1">
+                <a:solidFill>
+                  <a:srgbClr val="17212B"/>
                 </a:solidFill>
                 <a:latin typeface="Malgun Gothic"/>
                 <a:ea typeface="Malgun Gothic"/>
@@ -31861,9 +35457,9 @@
               </a:defRPr>
             </a:lvl4pPr>
             <a:lvl5pPr algn="l">
-              <a:defRPr sz="2700" b="1">
-                <a:solidFill>
-                  <a:srgbClr val="0B6172"/>
+              <a:defRPr sz="2100" b="1">
+                <a:solidFill>
+                  <a:srgbClr val="17212B"/>
                 </a:solidFill>
                 <a:latin typeface="Malgun Gothic"/>
                 <a:ea typeface="Malgun Gothic"/>
@@ -31871,9 +35467,9 @@
               </a:defRPr>
             </a:lvl5pPr>
             <a:lvl6pPr algn="l">
-              <a:defRPr sz="2700" b="1">
-                <a:solidFill>
-                  <a:srgbClr val="0B6172"/>
+              <a:defRPr sz="2100" b="1">
+                <a:solidFill>
+                  <a:srgbClr val="17212B"/>
                 </a:solidFill>
                 <a:latin typeface="Malgun Gothic"/>
                 <a:ea typeface="Malgun Gothic"/>
@@ -31881,9 +35477,9 @@
               </a:defRPr>
             </a:lvl6pPr>
             <a:lvl7pPr algn="l">
-              <a:defRPr sz="2700" b="1">
-                <a:solidFill>
-                  <a:srgbClr val="0B6172"/>
+              <a:defRPr sz="2100" b="1">
+                <a:solidFill>
+                  <a:srgbClr val="17212B"/>
                 </a:solidFill>
                 <a:latin typeface="Malgun Gothic"/>
                 <a:ea typeface="Malgun Gothic"/>
@@ -31891,9 +35487,9 @@
               </a:defRPr>
             </a:lvl7pPr>
             <a:lvl8pPr algn="l">
-              <a:defRPr sz="2700" b="1">
-                <a:solidFill>
-                  <a:srgbClr val="0B6172"/>
+              <a:defRPr sz="2100" b="1">
+                <a:solidFill>
+                  <a:srgbClr val="17212B"/>
                 </a:solidFill>
                 <a:latin typeface="Malgun Gothic"/>
                 <a:ea typeface="Malgun Gothic"/>
@@ -31901,9 +35497,9 @@
               </a:defRPr>
             </a:lvl8pPr>
             <a:lvl9pPr algn="l">
-              <a:defRPr sz="2700" b="1">
-                <a:solidFill>
-                  <a:srgbClr val="0B6172"/>
+              <a:defRPr sz="2100" b="1">
+                <a:solidFill>
+                  <a:srgbClr val="17212B"/>
                 </a:solidFill>
                 <a:latin typeface="Malgun Gothic"/>
                 <a:ea typeface="Malgun Gothic"/>
@@ -31913,9 +35509,9 @@
           </a:lstStyle>
           <a:p xmlns:a="http://schemas.openxmlformats.org/drawingml/2006/main">
             <a:pPr algn="l">
-              <a:defRPr sz="2700" b="1">
-                <a:solidFill>
-                  <a:srgbClr val="0B6172"/>
+              <a:defRPr sz="2100" b="1">
+                <a:solidFill>
+                  <a:srgbClr val="17212B"/>
                 </a:solidFill>
                 <a:latin typeface="Malgun Gothic"/>
                 <a:ea typeface="Malgun Gothic"/>
@@ -31923,48 +35519,1343 @@
               </a:defRPr>
             </a:pPr>
             <a:r>
-              <a:rPr sz="2700" b="1">
-                <a:solidFill>
-                  <a:srgbClr val="0B6172"/>
+              <a:rPr sz="2100" b="1">
+                <a:solidFill>
+                  <a:srgbClr val="17212B"/>
                 </a:solidFill>
                 <a:latin typeface="Malgun Gothic"/>
                 <a:ea typeface="Malgun Gothic"/>
                 <a:cs typeface="Malgun Gothic"/>
               </a:rPr>
-              <a:t>그 원하는 결과까지</a:t>
-            </a:r>
-          </a:p>
-          <a:p xmlns:a="http://schemas.openxmlformats.org/drawingml/2006/main">
-            <a:pPr algn="l">
-              <a:defRPr sz="2700" b="1">
-                <a:solidFill>
-                  <a:srgbClr val="0B6172"/>
-                </a:solidFill>
-                <a:latin typeface="Malgun Gothic"/>
-                <a:ea typeface="Malgun Gothic"/>
-                <a:cs typeface="Malgun Gothic"/>
-              </a:defRPr>
-            </a:pPr>
-            <a:r>
-              <a:rPr sz="2700" b="1">
-                <a:solidFill>
-                  <a:srgbClr val="0B6172"/>
-                </a:solidFill>
-                <a:latin typeface="Malgun Gothic"/>
-                <a:ea typeface="Malgun Gothic"/>
-                <a:cs typeface="Malgun Gothic"/>
-              </a:rPr>
-              <a:t>코드에 적혀 있을까요?</a:t>
+              <a:t>사람</a:t>
             </a:r>
           </a:p>
         </p:txBody>
       </p:sp>
       <p:sp>
         <p:nvSpPr>
-          <p:cNvPr id="11" name="Legacy module connection">
+          <p:cNvPr id="11" name="+">
             <a:extLst xmlns:a="http://schemas.openxmlformats.org/drawingml/2006/main">
               <a:ext uri="{FF2B5EF4-FFF2-40B4-BE49-F238E27FC236}">
-                <a16:creationId xmlns:a16="http://schemas.microsoft.com/office/drawing/2014/main" id="{4569FF4C-F7A2-44A0-977A-86D37BFC94C1}"/>
+                <a16:creationId xmlns:a16="http://schemas.microsoft.com/office/drawing/2014/main" id="{9B14A180-4B5E-4113-BF22-018A60B93249}"/>
+              </a:ext>
+            </a:extLst>
+          </p:cNvPr>
+          <p:cNvSpPr>
+            <a:spLocks xmlns:a="http://schemas.openxmlformats.org/drawingml/2006/main" noGrp="1"/>
+          </p:cNvSpPr>
+          <p:nvPr/>
+        </p:nvSpPr>
+        <p:spPr>
+          <a:xfrm xmlns:a="http://schemas.openxmlformats.org/drawingml/2006/main">
+            <a:off x="2371725" y="2686050"/>
+            <a:ext cx="361950" cy="400050"/>
+          </a:xfrm>
+          <a:prstGeom xmlns:a="http://schemas.openxmlformats.org/drawingml/2006/main" prst="rect">
+            <a:avLst/>
+          </a:prstGeom>
+          <a:noFill xmlns:a="http://schemas.openxmlformats.org/drawingml/2006/main"/>
+          <a:ln xmlns:a="http://schemas.openxmlformats.org/drawingml/2006/main" w="0">
+            <a:noFill/>
+          </a:ln>
+        </p:spPr>
+        <p:txBody>
+          <a:bodyPr xmlns:a="http://schemas.openxmlformats.org/drawingml/2006/main" wrap="none" lIns="0" tIns="0" rIns="0" bIns="0" anchor="ctr">
+            <a:noAutofit/>
+          </a:bodyPr>
+          <a:lstStyle xmlns:a="http://schemas.openxmlformats.org/drawingml/2006/main">
+            <a:defPPr algn="ctr">
+              <a:defRPr sz="2475" b="0">
+                <a:solidFill>
+                  <a:srgbClr val="4D5A68"/>
+                </a:solidFill>
+                <a:latin typeface="Malgun Gothic"/>
+                <a:ea typeface="Malgun Gothic"/>
+                <a:cs typeface="Malgun Gothic"/>
+              </a:defRPr>
+            </a:defPPr>
+            <a:lvl1pPr algn="ctr">
+              <a:defRPr sz="2475" b="0">
+                <a:solidFill>
+                  <a:srgbClr val="4D5A68"/>
+                </a:solidFill>
+                <a:latin typeface="Malgun Gothic"/>
+                <a:ea typeface="Malgun Gothic"/>
+                <a:cs typeface="Malgun Gothic"/>
+              </a:defRPr>
+            </a:lvl1pPr>
+            <a:lvl2pPr algn="ctr">
+              <a:defRPr sz="2475" b="0">
+                <a:solidFill>
+                  <a:srgbClr val="4D5A68"/>
+                </a:solidFill>
+                <a:latin typeface="Malgun Gothic"/>
+                <a:ea typeface="Malgun Gothic"/>
+                <a:cs typeface="Malgun Gothic"/>
+              </a:defRPr>
+            </a:lvl2pPr>
+            <a:lvl3pPr algn="ctr">
+              <a:defRPr sz="2475" b="0">
+                <a:solidFill>
+                  <a:srgbClr val="4D5A68"/>
+                </a:solidFill>
+                <a:latin typeface="Malgun Gothic"/>
+                <a:ea typeface="Malgun Gothic"/>
+                <a:cs typeface="Malgun Gothic"/>
+              </a:defRPr>
+            </a:lvl3pPr>
+            <a:lvl4pPr algn="ctr">
+              <a:defRPr sz="2475" b="0">
+                <a:solidFill>
+                  <a:srgbClr val="4D5A68"/>
+                </a:solidFill>
+                <a:latin typeface="Malgun Gothic"/>
+                <a:ea typeface="Malgun Gothic"/>
+                <a:cs typeface="Malgun Gothic"/>
+              </a:defRPr>
+            </a:lvl4pPr>
+            <a:lvl5pPr algn="ctr">
+              <a:defRPr sz="2475" b="0">
+                <a:solidFill>
+                  <a:srgbClr val="4D5A68"/>
+                </a:solidFill>
+                <a:latin typeface="Malgun Gothic"/>
+                <a:ea typeface="Malgun Gothic"/>
+                <a:cs typeface="Malgun Gothic"/>
+              </a:defRPr>
+            </a:lvl5pPr>
+            <a:lvl6pPr algn="ctr">
+              <a:defRPr sz="2475" b="0">
+                <a:solidFill>
+                  <a:srgbClr val="4D5A68"/>
+                </a:solidFill>
+                <a:latin typeface="Malgun Gothic"/>
+                <a:ea typeface="Malgun Gothic"/>
+                <a:cs typeface="Malgun Gothic"/>
+              </a:defRPr>
+            </a:lvl6pPr>
+            <a:lvl7pPr algn="ctr">
+              <a:defRPr sz="2475" b="0">
+                <a:solidFill>
+                  <a:srgbClr val="4D5A68"/>
+                </a:solidFill>
+                <a:latin typeface="Malgun Gothic"/>
+                <a:ea typeface="Malgun Gothic"/>
+                <a:cs typeface="Malgun Gothic"/>
+              </a:defRPr>
+            </a:lvl7pPr>
+            <a:lvl8pPr algn="ctr">
+              <a:defRPr sz="2475" b="0">
+                <a:solidFill>
+                  <a:srgbClr val="4D5A68"/>
+                </a:solidFill>
+                <a:latin typeface="Malgun Gothic"/>
+                <a:ea typeface="Malgun Gothic"/>
+                <a:cs typeface="Malgun Gothic"/>
+              </a:defRPr>
+            </a:lvl8pPr>
+            <a:lvl9pPr algn="ctr">
+              <a:defRPr sz="2475" b="0">
+                <a:solidFill>
+                  <a:srgbClr val="4D5A68"/>
+                </a:solidFill>
+                <a:latin typeface="Malgun Gothic"/>
+                <a:ea typeface="Malgun Gothic"/>
+                <a:cs typeface="Malgun Gothic"/>
+              </a:defRPr>
+            </a:lvl9pPr>
+          </a:lstStyle>
+          <a:p xmlns:a="http://schemas.openxmlformats.org/drawingml/2006/main">
+            <a:pPr algn="ctr">
+              <a:defRPr sz="2475" b="0">
+                <a:solidFill>
+                  <a:srgbClr val="4D5A68"/>
+                </a:solidFill>
+                <a:latin typeface="Malgun Gothic"/>
+                <a:ea typeface="Malgun Gothic"/>
+                <a:cs typeface="Malgun Gothic"/>
+              </a:defRPr>
+            </a:pPr>
+            <a:r>
+              <a:rPr sz="2475" b="0">
+                <a:solidFill>
+                  <a:srgbClr val="4D5A68"/>
+                </a:solidFill>
+                <a:latin typeface="Malgun Gothic"/>
+                <a:ea typeface="Malgun Gothic"/>
+                <a:cs typeface="Malgun Gothic"/>
+              </a:rPr>
+              <a:t>+</a:t>
+            </a:r>
+          </a:p>
+        </p:txBody>
+      </p:sp>
+      <p:pic>
+        <p:nvPicPr>
+          <p:cNvPr id="12" name="">
+            <a:extLst xmlns:a="http://schemas.openxmlformats.org/drawingml/2006/main">
+              <a:ext uri="{FF2B5EF4-FFF2-40B4-BE49-F238E27FC236}">
+                <a16:creationId xmlns:a16="http://schemas.microsoft.com/office/drawing/2014/main" id="{55EDD7AC-0886-4931-9A44-48894A11910B}"/>
+              </a:ext>
+            </a:extLst>
+          </p:cNvPr>
+          <p:cNvPicPr>
+            <a:picLocks xmlns:a="http://schemas.openxmlformats.org/drawingml/2006/main" noChangeAspect="1"/>
+          </p:cNvPicPr>
+          <p:nvPr/>
+        </p:nvPicPr>
+        <p:blipFill>
+          <a:blip xmlns:r="http://schemas.openxmlformats.org/officeDocument/2006/relationships" xmlns:a="http://schemas.openxmlformats.org/drawingml/2006/main" r:embed="Rb5d12a5669f04831"/>
+          <a:srcRect xmlns:a="http://schemas.openxmlformats.org/drawingml/2006/main" l="50000" t="0" r="0" b="0"/>
+          <a:stretch xmlns:a="http://schemas.openxmlformats.org/drawingml/2006/main"/>
+        </p:blipFill>
+        <p:spPr>
+          <a:xfrm xmlns:a="http://schemas.openxmlformats.org/drawingml/2006/main">
+            <a:off x="2762250" y="2505075"/>
+            <a:ext cx="838200" cy="838200"/>
+          </a:xfrm>
+          <a:prstGeom xmlns:a="http://schemas.openxmlformats.org/drawingml/2006/main" prst="rect">
+            <a:avLst/>
+          </a:prstGeom>
+        </p:spPr>
+      </p:pic>
+      <p:sp>
+        <p:nvSpPr>
+          <p:cNvPr id="13" name="AI Agent">
+            <a:extLst xmlns:a="http://schemas.openxmlformats.org/drawingml/2006/main">
+              <a:ext uri="{FF2B5EF4-FFF2-40B4-BE49-F238E27FC236}">
+                <a16:creationId xmlns:a16="http://schemas.microsoft.com/office/drawing/2014/main" id="{A9B66E49-D01E-43EA-A1F7-198445DEFF83}"/>
+              </a:ext>
+            </a:extLst>
+          </p:cNvPr>
+          <p:cNvSpPr>
+            <a:spLocks xmlns:a="http://schemas.openxmlformats.org/drawingml/2006/main" noGrp="1"/>
+          </p:cNvSpPr>
+          <p:nvPr/>
+        </p:nvSpPr>
+        <p:spPr>
+          <a:xfrm xmlns:a="http://schemas.openxmlformats.org/drawingml/2006/main">
+            <a:off x="3705225" y="2714625"/>
+            <a:ext cx="1857375" cy="352425"/>
+          </a:xfrm>
+          <a:prstGeom xmlns:a="http://schemas.openxmlformats.org/drawingml/2006/main" prst="rect">
+            <a:avLst/>
+          </a:prstGeom>
+          <a:noFill xmlns:a="http://schemas.openxmlformats.org/drawingml/2006/main"/>
+          <a:ln xmlns:a="http://schemas.openxmlformats.org/drawingml/2006/main" w="0">
+            <a:noFill/>
+          </a:ln>
+        </p:spPr>
+        <p:txBody>
+          <a:bodyPr xmlns:a="http://schemas.openxmlformats.org/drawingml/2006/main" wrap="none" lIns="0" tIns="0" rIns="0" bIns="0" anchor="ctr">
+            <a:noAutofit/>
+          </a:bodyPr>
+          <a:lstStyle xmlns:a="http://schemas.openxmlformats.org/drawingml/2006/main">
+            <a:defPPr algn="l">
+              <a:defRPr sz="2100" b="1">
+                <a:solidFill>
+                  <a:srgbClr val="17212B"/>
+                </a:solidFill>
+                <a:latin typeface="Malgun Gothic"/>
+                <a:ea typeface="Malgun Gothic"/>
+                <a:cs typeface="Malgun Gothic"/>
+              </a:defRPr>
+            </a:defPPr>
+            <a:lvl1pPr algn="l">
+              <a:defRPr sz="2100" b="1">
+                <a:solidFill>
+                  <a:srgbClr val="17212B"/>
+                </a:solidFill>
+                <a:latin typeface="Malgun Gothic"/>
+                <a:ea typeface="Malgun Gothic"/>
+                <a:cs typeface="Malgun Gothic"/>
+              </a:defRPr>
+            </a:lvl1pPr>
+            <a:lvl2pPr algn="l">
+              <a:defRPr sz="2100" b="1">
+                <a:solidFill>
+                  <a:srgbClr val="17212B"/>
+                </a:solidFill>
+                <a:latin typeface="Malgun Gothic"/>
+                <a:ea typeface="Malgun Gothic"/>
+                <a:cs typeface="Malgun Gothic"/>
+              </a:defRPr>
+            </a:lvl2pPr>
+            <a:lvl3pPr algn="l">
+              <a:defRPr sz="2100" b="1">
+                <a:solidFill>
+                  <a:srgbClr val="17212B"/>
+                </a:solidFill>
+                <a:latin typeface="Malgun Gothic"/>
+                <a:ea typeface="Malgun Gothic"/>
+                <a:cs typeface="Malgun Gothic"/>
+              </a:defRPr>
+            </a:lvl3pPr>
+            <a:lvl4pPr algn="l">
+              <a:defRPr sz="2100" b="1">
+                <a:solidFill>
+                  <a:srgbClr val="17212B"/>
+                </a:solidFill>
+                <a:latin typeface="Malgun Gothic"/>
+                <a:ea typeface="Malgun Gothic"/>
+                <a:cs typeface="Malgun Gothic"/>
+              </a:defRPr>
+            </a:lvl4pPr>
+            <a:lvl5pPr algn="l">
+              <a:defRPr sz="2100" b="1">
+                <a:solidFill>
+                  <a:srgbClr val="17212B"/>
+                </a:solidFill>
+                <a:latin typeface="Malgun Gothic"/>
+                <a:ea typeface="Malgun Gothic"/>
+                <a:cs typeface="Malgun Gothic"/>
+              </a:defRPr>
+            </a:lvl5pPr>
+            <a:lvl6pPr algn="l">
+              <a:defRPr sz="2100" b="1">
+                <a:solidFill>
+                  <a:srgbClr val="17212B"/>
+                </a:solidFill>
+                <a:latin typeface="Malgun Gothic"/>
+                <a:ea typeface="Malgun Gothic"/>
+                <a:cs typeface="Malgun Gothic"/>
+              </a:defRPr>
+            </a:lvl6pPr>
+            <a:lvl7pPr algn="l">
+              <a:defRPr sz="2100" b="1">
+                <a:solidFill>
+                  <a:srgbClr val="17212B"/>
+                </a:solidFill>
+                <a:latin typeface="Malgun Gothic"/>
+                <a:ea typeface="Malgun Gothic"/>
+                <a:cs typeface="Malgun Gothic"/>
+              </a:defRPr>
+            </a:lvl7pPr>
+            <a:lvl8pPr algn="l">
+              <a:defRPr sz="2100" b="1">
+                <a:solidFill>
+                  <a:srgbClr val="17212B"/>
+                </a:solidFill>
+                <a:latin typeface="Malgun Gothic"/>
+                <a:ea typeface="Malgun Gothic"/>
+                <a:cs typeface="Malgun Gothic"/>
+              </a:defRPr>
+            </a:lvl8pPr>
+            <a:lvl9pPr algn="l">
+              <a:defRPr sz="2100" b="1">
+                <a:solidFill>
+                  <a:srgbClr val="17212B"/>
+                </a:solidFill>
+                <a:latin typeface="Malgun Gothic"/>
+                <a:ea typeface="Malgun Gothic"/>
+                <a:cs typeface="Malgun Gothic"/>
+              </a:defRPr>
+            </a:lvl9pPr>
+          </a:lstStyle>
+          <a:p xmlns:a="http://schemas.openxmlformats.org/drawingml/2006/main">
+            <a:pPr algn="l">
+              <a:defRPr sz="2100" b="1">
+                <a:solidFill>
+                  <a:srgbClr val="17212B"/>
+                </a:solidFill>
+                <a:latin typeface="Malgun Gothic"/>
+                <a:ea typeface="Malgun Gothic"/>
+                <a:cs typeface="Malgun Gothic"/>
+              </a:defRPr>
+            </a:pPr>
+            <a:r>
+              <a:rPr sz="2100" b="1">
+                <a:solidFill>
+                  <a:srgbClr val="17212B"/>
+                </a:solidFill>
+                <a:latin typeface="Malgun Gothic"/>
+                <a:ea typeface="Malgun Gothic"/>
+                <a:cs typeface="Malgun Gothic"/>
+              </a:rPr>
+              <a:t>AI Agent</a:t>
+            </a:r>
+          </a:p>
+        </p:txBody>
+      </p:sp>
+      <p:pic>
+        <p:nvPicPr>
+          <p:cNvPr id="14" name="">
+            <a:extLst xmlns:a="http://schemas.openxmlformats.org/drawingml/2006/main">
+              <a:ext uri="{FF2B5EF4-FFF2-40B4-BE49-F238E27FC236}">
+                <a16:creationId xmlns:a16="http://schemas.microsoft.com/office/drawing/2014/main" id="{A8872E1C-13EE-42E1-BFF5-FDDD5694CD0E}"/>
+              </a:ext>
+            </a:extLst>
+          </p:cNvPr>
+          <p:cNvPicPr>
+            <a:picLocks xmlns:a="http://schemas.openxmlformats.org/drawingml/2006/main" noChangeAspect="1"/>
+          </p:cNvPicPr>
+          <p:nvPr/>
+        </p:nvPicPr>
+        <p:blipFill>
+          <a:blip xmlns:r="http://schemas.openxmlformats.org/officeDocument/2006/relationships" xmlns:a="http://schemas.openxmlformats.org/drawingml/2006/main" r:embed="R7fe06a6afb434d90"/>
+          <a:srcRect xmlns:a="http://schemas.openxmlformats.org/drawingml/2006/main" l="0" t="0" r="50000" b="0"/>
+          <a:stretch xmlns:a="http://schemas.openxmlformats.org/drawingml/2006/main"/>
+        </p:blipFill>
+        <p:spPr>
+          <a:xfrm xmlns:a="http://schemas.openxmlformats.org/drawingml/2006/main">
+            <a:off x="7181850" y="2505075"/>
+            <a:ext cx="838200" cy="838200"/>
+          </a:xfrm>
+          <a:prstGeom xmlns:a="http://schemas.openxmlformats.org/drawingml/2006/main" prst="rect">
+            <a:avLst/>
+          </a:prstGeom>
+        </p:spPr>
+      </p:pic>
+      <p:sp>
+        <p:nvSpPr>
+          <p:cNvPr id="15" name="사람이 최종 결정">
+            <a:extLst xmlns:a="http://schemas.openxmlformats.org/drawingml/2006/main">
+              <a:ext uri="{FF2B5EF4-FFF2-40B4-BE49-F238E27FC236}">
+                <a16:creationId xmlns:a16="http://schemas.microsoft.com/office/drawing/2014/main" id="{B5064076-3FEC-45E7-AA1D-9F999665F69C}"/>
+              </a:ext>
+            </a:extLst>
+          </p:cNvPr>
+          <p:cNvSpPr>
+            <a:spLocks xmlns:a="http://schemas.openxmlformats.org/drawingml/2006/main" noGrp="1"/>
+          </p:cNvSpPr>
+          <p:nvPr/>
+        </p:nvSpPr>
+        <p:spPr>
+          <a:xfrm xmlns:a="http://schemas.openxmlformats.org/drawingml/2006/main">
+            <a:off x="8172450" y="2714625"/>
+            <a:ext cx="3409950" cy="352425"/>
+          </a:xfrm>
+          <a:prstGeom xmlns:a="http://schemas.openxmlformats.org/drawingml/2006/main" prst="rect">
+            <a:avLst/>
+          </a:prstGeom>
+          <a:noFill xmlns:a="http://schemas.openxmlformats.org/drawingml/2006/main"/>
+          <a:ln xmlns:a="http://schemas.openxmlformats.org/drawingml/2006/main" w="0">
+            <a:noFill/>
+          </a:ln>
+        </p:spPr>
+        <p:txBody>
+          <a:bodyPr xmlns:a="http://schemas.openxmlformats.org/drawingml/2006/main" wrap="none" lIns="0" tIns="0" rIns="0" bIns="0" anchor="ctr">
+            <a:noAutofit/>
+          </a:bodyPr>
+          <a:lstStyle xmlns:a="http://schemas.openxmlformats.org/drawingml/2006/main">
+            <a:defPPr algn="l">
+              <a:defRPr sz="2175" b="1">
+                <a:solidFill>
+                  <a:srgbClr val="0B6172"/>
+                </a:solidFill>
+                <a:latin typeface="Malgun Gothic"/>
+                <a:ea typeface="Malgun Gothic"/>
+                <a:cs typeface="Malgun Gothic"/>
+              </a:defRPr>
+            </a:defPPr>
+            <a:lvl1pPr algn="l">
+              <a:defRPr sz="2175" b="1">
+                <a:solidFill>
+                  <a:srgbClr val="0B6172"/>
+                </a:solidFill>
+                <a:latin typeface="Malgun Gothic"/>
+                <a:ea typeface="Malgun Gothic"/>
+                <a:cs typeface="Malgun Gothic"/>
+              </a:defRPr>
+            </a:lvl1pPr>
+            <a:lvl2pPr algn="l">
+              <a:defRPr sz="2175" b="1">
+                <a:solidFill>
+                  <a:srgbClr val="0B6172"/>
+                </a:solidFill>
+                <a:latin typeface="Malgun Gothic"/>
+                <a:ea typeface="Malgun Gothic"/>
+                <a:cs typeface="Malgun Gothic"/>
+              </a:defRPr>
+            </a:lvl2pPr>
+            <a:lvl3pPr algn="l">
+              <a:defRPr sz="2175" b="1">
+                <a:solidFill>
+                  <a:srgbClr val="0B6172"/>
+                </a:solidFill>
+                <a:latin typeface="Malgun Gothic"/>
+                <a:ea typeface="Malgun Gothic"/>
+                <a:cs typeface="Malgun Gothic"/>
+              </a:defRPr>
+            </a:lvl3pPr>
+            <a:lvl4pPr algn="l">
+              <a:defRPr sz="2175" b="1">
+                <a:solidFill>
+                  <a:srgbClr val="0B6172"/>
+                </a:solidFill>
+                <a:latin typeface="Malgun Gothic"/>
+                <a:ea typeface="Malgun Gothic"/>
+                <a:cs typeface="Malgun Gothic"/>
+              </a:defRPr>
+            </a:lvl4pPr>
+            <a:lvl5pPr algn="l">
+              <a:defRPr sz="2175" b="1">
+                <a:solidFill>
+                  <a:srgbClr val="0B6172"/>
+                </a:solidFill>
+                <a:latin typeface="Malgun Gothic"/>
+                <a:ea typeface="Malgun Gothic"/>
+                <a:cs typeface="Malgun Gothic"/>
+              </a:defRPr>
+            </a:lvl5pPr>
+            <a:lvl6pPr algn="l">
+              <a:defRPr sz="2175" b="1">
+                <a:solidFill>
+                  <a:srgbClr val="0B6172"/>
+                </a:solidFill>
+                <a:latin typeface="Malgun Gothic"/>
+                <a:ea typeface="Malgun Gothic"/>
+                <a:cs typeface="Malgun Gothic"/>
+              </a:defRPr>
+            </a:lvl6pPr>
+            <a:lvl7pPr algn="l">
+              <a:defRPr sz="2175" b="1">
+                <a:solidFill>
+                  <a:srgbClr val="0B6172"/>
+                </a:solidFill>
+                <a:latin typeface="Malgun Gothic"/>
+                <a:ea typeface="Malgun Gothic"/>
+                <a:cs typeface="Malgun Gothic"/>
+              </a:defRPr>
+            </a:lvl7pPr>
+            <a:lvl8pPr algn="l">
+              <a:defRPr sz="2175" b="1">
+                <a:solidFill>
+                  <a:srgbClr val="0B6172"/>
+                </a:solidFill>
+                <a:latin typeface="Malgun Gothic"/>
+                <a:ea typeface="Malgun Gothic"/>
+                <a:cs typeface="Malgun Gothic"/>
+              </a:defRPr>
+            </a:lvl8pPr>
+            <a:lvl9pPr algn="l">
+              <a:defRPr sz="2175" b="1">
+                <a:solidFill>
+                  <a:srgbClr val="0B6172"/>
+                </a:solidFill>
+                <a:latin typeface="Malgun Gothic"/>
+                <a:ea typeface="Malgun Gothic"/>
+                <a:cs typeface="Malgun Gothic"/>
+              </a:defRPr>
+            </a:lvl9pPr>
+          </a:lstStyle>
+          <a:p xmlns:a="http://schemas.openxmlformats.org/drawingml/2006/main">
+            <a:pPr algn="l">
+              <a:defRPr sz="2175" b="1">
+                <a:solidFill>
+                  <a:srgbClr val="0B6172"/>
+                </a:solidFill>
+                <a:latin typeface="Malgun Gothic"/>
+                <a:ea typeface="Malgun Gothic"/>
+                <a:cs typeface="Malgun Gothic"/>
+              </a:defRPr>
+            </a:pPr>
+            <a:r>
+              <a:rPr sz="2175" b="1">
+                <a:solidFill>
+                  <a:srgbClr val="0B6172"/>
+                </a:solidFill>
+                <a:latin typeface="Malgun Gothic"/>
+                <a:ea typeface="Malgun Gothic"/>
+                <a:cs typeface="Malgun Gothic"/>
+              </a:rPr>
+              <a:t>사람이 최종 결정</a:t>
+            </a:r>
+          </a:p>
+        </p:txBody>
+      </p:sp>
+      <p:sp>
+        <p:nvSpPr>
+          <p:cNvPr id="16" name="">
+            <a:extLst xmlns:a="http://schemas.openxmlformats.org/drawingml/2006/main">
+              <a:ext uri="{FF2B5EF4-FFF2-40B4-BE49-F238E27FC236}">
+                <a16:creationId xmlns:a16="http://schemas.microsoft.com/office/drawing/2014/main" id="{A6C01102-FE08-4B2F-BF59-746E0535DE66}"/>
+              </a:ext>
+            </a:extLst>
+          </p:cNvPr>
+          <p:cNvSpPr>
+            <a:spLocks xmlns:a="http://schemas.openxmlformats.org/drawingml/2006/main" noGrp="1"/>
+          </p:cNvSpPr>
+          <p:nvPr/>
+        </p:nvSpPr>
+        <p:spPr>
+          <a:xfrm xmlns:a="http://schemas.openxmlformats.org/drawingml/2006/main">
+            <a:off x="609600" y="3495675"/>
+            <a:ext cx="4953000" cy="0"/>
+          </a:xfrm>
+          <a:prstGeom xmlns:a="http://schemas.openxmlformats.org/drawingml/2006/main" prst="line">
+            <a:avLst/>
+          </a:prstGeom>
+          <a:noFill xmlns:a="http://schemas.openxmlformats.org/drawingml/2006/main"/>
+          <a:ln xmlns:a="http://schemas.openxmlformats.org/drawingml/2006/main" w="19050">
+            <a:solidFill>
+              <a:srgbClr val="C7D0DA"/>
+            </a:solidFill>
+            <a:prstDash val="solid"/>
+          </a:ln>
+        </p:spPr>
+      </p:sp>
+      <p:sp>
+        <p:nvSpPr>
+          <p:cNvPr id="17" name="">
+            <a:extLst xmlns:a="http://schemas.openxmlformats.org/drawingml/2006/main">
+              <a:ext uri="{FF2B5EF4-FFF2-40B4-BE49-F238E27FC236}">
+                <a16:creationId xmlns:a16="http://schemas.microsoft.com/office/drawing/2014/main" id="{9F4C7FFC-23DE-4E9C-8E04-EF140A6B18DF}"/>
+              </a:ext>
+            </a:extLst>
+          </p:cNvPr>
+          <p:cNvSpPr>
+            <a:spLocks xmlns:a="http://schemas.openxmlformats.org/drawingml/2006/main" noGrp="1"/>
+          </p:cNvSpPr>
+          <p:nvPr/>
+        </p:nvSpPr>
+        <p:spPr>
+          <a:xfrm xmlns:a="http://schemas.openxmlformats.org/drawingml/2006/main">
+            <a:off x="7181850" y="3495675"/>
+            <a:ext cx="4400550" cy="0"/>
+          </a:xfrm>
+          <a:prstGeom xmlns:a="http://schemas.openxmlformats.org/drawingml/2006/main" prst="line">
+            <a:avLst/>
+          </a:prstGeom>
+          <a:noFill xmlns:a="http://schemas.openxmlformats.org/drawingml/2006/main"/>
+          <a:ln xmlns:a="http://schemas.openxmlformats.org/drawingml/2006/main" w="19050">
+            <a:solidFill>
+              <a:srgbClr val="C7D0DA"/>
+            </a:solidFill>
+            <a:prstDash val="solid"/>
+          </a:ln>
+        </p:spPr>
+      </p:sp>
+      <p:sp>
+        <p:nvSpPr>
+          <p:cNvPr id="18" name="파일&#10;구현&#10;테스트">
+            <a:extLst xmlns:a="http://schemas.openxmlformats.org/drawingml/2006/main">
+              <a:ext uri="{FF2B5EF4-FFF2-40B4-BE49-F238E27FC236}">
+                <a16:creationId xmlns:a16="http://schemas.microsoft.com/office/drawing/2014/main" id="{AC7AF679-A88B-4397-9213-3AB2A67646C4}"/>
+              </a:ext>
+            </a:extLst>
+          </p:cNvPr>
+          <p:cNvSpPr>
+            <a:spLocks xmlns:a="http://schemas.openxmlformats.org/drawingml/2006/main" noGrp="1"/>
+          </p:cNvSpPr>
+          <p:nvPr/>
+        </p:nvSpPr>
+        <p:spPr>
+          <a:xfrm xmlns:a="http://schemas.openxmlformats.org/drawingml/2006/main">
+            <a:off x="609600" y="3790950"/>
+            <a:ext cx="4953000" cy="1428750"/>
+          </a:xfrm>
+          <a:prstGeom xmlns:a="http://schemas.openxmlformats.org/drawingml/2006/main" prst="rect">
+            <a:avLst/>
+          </a:prstGeom>
+          <a:noFill xmlns:a="http://schemas.openxmlformats.org/drawingml/2006/main"/>
+          <a:ln xmlns:a="http://schemas.openxmlformats.org/drawingml/2006/main" w="0">
+            <a:noFill/>
+          </a:ln>
+        </p:spPr>
+        <p:txBody>
+          <a:bodyPr xmlns:a="http://schemas.openxmlformats.org/drawingml/2006/main" wrap="none" lIns="0" tIns="0" rIns="0" bIns="0" anchor="ctr">
+            <a:noAutofit/>
+          </a:bodyPr>
+          <a:lstStyle xmlns:a="http://schemas.openxmlformats.org/drawingml/2006/main">
+            <a:defPPr algn="l">
+              <a:defRPr sz="2625" b="0">
+                <a:solidFill>
+                  <a:srgbClr val="17212B"/>
+                </a:solidFill>
+                <a:latin typeface="Malgun Gothic"/>
+                <a:ea typeface="Malgun Gothic"/>
+                <a:cs typeface="Malgun Gothic"/>
+              </a:defRPr>
+            </a:defPPr>
+            <a:lvl1pPr algn="l">
+              <a:defRPr sz="2625" b="0">
+                <a:solidFill>
+                  <a:srgbClr val="17212B"/>
+                </a:solidFill>
+                <a:latin typeface="Malgun Gothic"/>
+                <a:ea typeface="Malgun Gothic"/>
+                <a:cs typeface="Malgun Gothic"/>
+              </a:defRPr>
+            </a:lvl1pPr>
+            <a:lvl2pPr algn="l">
+              <a:defRPr sz="2625" b="0">
+                <a:solidFill>
+                  <a:srgbClr val="17212B"/>
+                </a:solidFill>
+                <a:latin typeface="Malgun Gothic"/>
+                <a:ea typeface="Malgun Gothic"/>
+                <a:cs typeface="Malgun Gothic"/>
+              </a:defRPr>
+            </a:lvl2pPr>
+            <a:lvl3pPr algn="l">
+              <a:defRPr sz="2625" b="0">
+                <a:solidFill>
+                  <a:srgbClr val="17212B"/>
+                </a:solidFill>
+                <a:latin typeface="Malgun Gothic"/>
+                <a:ea typeface="Malgun Gothic"/>
+                <a:cs typeface="Malgun Gothic"/>
+              </a:defRPr>
+            </a:lvl3pPr>
+            <a:lvl4pPr algn="l">
+              <a:defRPr sz="2625" b="0">
+                <a:solidFill>
+                  <a:srgbClr val="17212B"/>
+                </a:solidFill>
+                <a:latin typeface="Malgun Gothic"/>
+                <a:ea typeface="Malgun Gothic"/>
+                <a:cs typeface="Malgun Gothic"/>
+              </a:defRPr>
+            </a:lvl4pPr>
+            <a:lvl5pPr algn="l">
+              <a:defRPr sz="2625" b="0">
+                <a:solidFill>
+                  <a:srgbClr val="17212B"/>
+                </a:solidFill>
+                <a:latin typeface="Malgun Gothic"/>
+                <a:ea typeface="Malgun Gothic"/>
+                <a:cs typeface="Malgun Gothic"/>
+              </a:defRPr>
+            </a:lvl5pPr>
+            <a:lvl6pPr algn="l">
+              <a:defRPr sz="2625" b="0">
+                <a:solidFill>
+                  <a:srgbClr val="17212B"/>
+                </a:solidFill>
+                <a:latin typeface="Malgun Gothic"/>
+                <a:ea typeface="Malgun Gothic"/>
+                <a:cs typeface="Malgun Gothic"/>
+              </a:defRPr>
+            </a:lvl6pPr>
+            <a:lvl7pPr algn="l">
+              <a:defRPr sz="2625" b="0">
+                <a:solidFill>
+                  <a:srgbClr val="17212B"/>
+                </a:solidFill>
+                <a:latin typeface="Malgun Gothic"/>
+                <a:ea typeface="Malgun Gothic"/>
+                <a:cs typeface="Malgun Gothic"/>
+              </a:defRPr>
+            </a:lvl7pPr>
+            <a:lvl8pPr algn="l">
+              <a:defRPr sz="2625" b="0">
+                <a:solidFill>
+                  <a:srgbClr val="17212B"/>
+                </a:solidFill>
+                <a:latin typeface="Malgun Gothic"/>
+                <a:ea typeface="Malgun Gothic"/>
+                <a:cs typeface="Malgun Gothic"/>
+              </a:defRPr>
+            </a:lvl8pPr>
+            <a:lvl9pPr algn="l">
+              <a:defRPr sz="2625" b="0">
+                <a:solidFill>
+                  <a:srgbClr val="17212B"/>
+                </a:solidFill>
+                <a:latin typeface="Malgun Gothic"/>
+                <a:ea typeface="Malgun Gothic"/>
+                <a:cs typeface="Malgun Gothic"/>
+              </a:defRPr>
+            </a:lvl9pPr>
+          </a:lstStyle>
+          <a:p xmlns:a="http://schemas.openxmlformats.org/drawingml/2006/main">
+            <a:pPr algn="l">
+              <a:defRPr sz="2625" b="0">
+                <a:solidFill>
+                  <a:srgbClr val="17212B"/>
+                </a:solidFill>
+                <a:latin typeface="Malgun Gothic"/>
+                <a:ea typeface="Malgun Gothic"/>
+                <a:cs typeface="Malgun Gothic"/>
+              </a:defRPr>
+            </a:pPr>
+            <a:r>
+              <a:rPr sz="2625" b="0">
+                <a:solidFill>
+                  <a:srgbClr val="17212B"/>
+                </a:solidFill>
+                <a:latin typeface="Malgun Gothic"/>
+                <a:ea typeface="Malgun Gothic"/>
+                <a:cs typeface="Malgun Gothic"/>
+              </a:rPr>
+              <a:t>파일</a:t>
+            </a:r>
+          </a:p>
+          <a:p xmlns:a="http://schemas.openxmlformats.org/drawingml/2006/main">
+            <a:pPr algn="l">
+              <a:defRPr sz="2625" b="0">
+                <a:solidFill>
+                  <a:srgbClr val="17212B"/>
+                </a:solidFill>
+                <a:latin typeface="Malgun Gothic"/>
+                <a:ea typeface="Malgun Gothic"/>
+                <a:cs typeface="Malgun Gothic"/>
+              </a:defRPr>
+            </a:pPr>
+            <a:r>
+              <a:rPr sz="2625" b="0">
+                <a:solidFill>
+                  <a:srgbClr val="17212B"/>
+                </a:solidFill>
+                <a:latin typeface="Malgun Gothic"/>
+                <a:ea typeface="Malgun Gothic"/>
+                <a:cs typeface="Malgun Gothic"/>
+              </a:rPr>
+              <a:t>구현</a:t>
+            </a:r>
+          </a:p>
+          <a:p xmlns:a="http://schemas.openxmlformats.org/drawingml/2006/main">
+            <a:pPr algn="l">
+              <a:defRPr sz="2625" b="0">
+                <a:solidFill>
+                  <a:srgbClr val="17212B"/>
+                </a:solidFill>
+                <a:latin typeface="Malgun Gothic"/>
+                <a:ea typeface="Malgun Gothic"/>
+                <a:cs typeface="Malgun Gothic"/>
+              </a:defRPr>
+            </a:pPr>
+            <a:r>
+              <a:rPr sz="2625" b="0">
+                <a:solidFill>
+                  <a:srgbClr val="17212B"/>
+                </a:solidFill>
+                <a:latin typeface="Malgun Gothic"/>
+                <a:ea typeface="Malgun Gothic"/>
+                <a:cs typeface="Malgun Gothic"/>
+              </a:rPr>
+              <a:t>테스트</a:t>
+            </a:r>
+          </a:p>
+        </p:txBody>
+      </p:sp>
+      <p:sp>
+        <p:nvSpPr>
+          <p:cNvPr id="19" name="원하는 결과&#10;허용할 범위&#10;완료 수용">
+            <a:extLst xmlns:a="http://schemas.openxmlformats.org/drawingml/2006/main">
+              <a:ext uri="{FF2B5EF4-FFF2-40B4-BE49-F238E27FC236}">
+                <a16:creationId xmlns:a16="http://schemas.microsoft.com/office/drawing/2014/main" id="{192002DD-C511-4BFF-B68B-B5DF9A4DCD4D}"/>
+              </a:ext>
+            </a:extLst>
+          </p:cNvPr>
+          <p:cNvSpPr>
+            <a:spLocks xmlns:a="http://schemas.openxmlformats.org/drawingml/2006/main" noGrp="1"/>
+          </p:cNvSpPr>
+          <p:nvPr/>
+        </p:nvSpPr>
+        <p:spPr>
+          <a:xfrm xmlns:a="http://schemas.openxmlformats.org/drawingml/2006/main">
+            <a:off x="7181850" y="3790950"/>
+            <a:ext cx="4400550" cy="1428750"/>
+          </a:xfrm>
+          <a:prstGeom xmlns:a="http://schemas.openxmlformats.org/drawingml/2006/main" prst="rect">
+            <a:avLst/>
+          </a:prstGeom>
+          <a:noFill xmlns:a="http://schemas.openxmlformats.org/drawingml/2006/main"/>
+          <a:ln xmlns:a="http://schemas.openxmlformats.org/drawingml/2006/main" w="0">
+            <a:noFill/>
+          </a:ln>
+        </p:spPr>
+        <p:txBody>
+          <a:bodyPr xmlns:a="http://schemas.openxmlformats.org/drawingml/2006/main" wrap="none" lIns="0" tIns="0" rIns="0" bIns="0" anchor="ctr">
+            <a:noAutofit/>
+          </a:bodyPr>
+          <a:lstStyle xmlns:a="http://schemas.openxmlformats.org/drawingml/2006/main">
+            <a:defPPr algn="l">
+              <a:defRPr sz="2625" b="0">
+                <a:solidFill>
+                  <a:srgbClr val="17212B"/>
+                </a:solidFill>
+                <a:latin typeface="Malgun Gothic"/>
+                <a:ea typeface="Malgun Gothic"/>
+                <a:cs typeface="Malgun Gothic"/>
+              </a:defRPr>
+            </a:defPPr>
+            <a:lvl1pPr algn="l">
+              <a:defRPr sz="2625" b="0">
+                <a:solidFill>
+                  <a:srgbClr val="17212B"/>
+                </a:solidFill>
+                <a:latin typeface="Malgun Gothic"/>
+                <a:ea typeface="Malgun Gothic"/>
+                <a:cs typeface="Malgun Gothic"/>
+              </a:defRPr>
+            </a:lvl1pPr>
+            <a:lvl2pPr algn="l">
+              <a:defRPr sz="2625" b="0">
+                <a:solidFill>
+                  <a:srgbClr val="17212B"/>
+                </a:solidFill>
+                <a:latin typeface="Malgun Gothic"/>
+                <a:ea typeface="Malgun Gothic"/>
+                <a:cs typeface="Malgun Gothic"/>
+              </a:defRPr>
+            </a:lvl2pPr>
+            <a:lvl3pPr algn="l">
+              <a:defRPr sz="2625" b="0">
+                <a:solidFill>
+                  <a:srgbClr val="17212B"/>
+                </a:solidFill>
+                <a:latin typeface="Malgun Gothic"/>
+                <a:ea typeface="Malgun Gothic"/>
+                <a:cs typeface="Malgun Gothic"/>
+              </a:defRPr>
+            </a:lvl3pPr>
+            <a:lvl4pPr algn="l">
+              <a:defRPr sz="2625" b="0">
+                <a:solidFill>
+                  <a:srgbClr val="17212B"/>
+                </a:solidFill>
+                <a:latin typeface="Malgun Gothic"/>
+                <a:ea typeface="Malgun Gothic"/>
+                <a:cs typeface="Malgun Gothic"/>
+              </a:defRPr>
+            </a:lvl4pPr>
+            <a:lvl5pPr algn="l">
+              <a:defRPr sz="2625" b="0">
+                <a:solidFill>
+                  <a:srgbClr val="17212B"/>
+                </a:solidFill>
+                <a:latin typeface="Malgun Gothic"/>
+                <a:ea typeface="Malgun Gothic"/>
+                <a:cs typeface="Malgun Gothic"/>
+              </a:defRPr>
+            </a:lvl5pPr>
+            <a:lvl6pPr algn="l">
+              <a:defRPr sz="2625" b="0">
+                <a:solidFill>
+                  <a:srgbClr val="17212B"/>
+                </a:solidFill>
+                <a:latin typeface="Malgun Gothic"/>
+                <a:ea typeface="Malgun Gothic"/>
+                <a:cs typeface="Malgun Gothic"/>
+              </a:defRPr>
+            </a:lvl6pPr>
+            <a:lvl7pPr algn="l">
+              <a:defRPr sz="2625" b="0">
+                <a:solidFill>
+                  <a:srgbClr val="17212B"/>
+                </a:solidFill>
+                <a:latin typeface="Malgun Gothic"/>
+                <a:ea typeface="Malgun Gothic"/>
+                <a:cs typeface="Malgun Gothic"/>
+              </a:defRPr>
+            </a:lvl7pPr>
+            <a:lvl8pPr algn="l">
+              <a:defRPr sz="2625" b="0">
+                <a:solidFill>
+                  <a:srgbClr val="17212B"/>
+                </a:solidFill>
+                <a:latin typeface="Malgun Gothic"/>
+                <a:ea typeface="Malgun Gothic"/>
+                <a:cs typeface="Malgun Gothic"/>
+              </a:defRPr>
+            </a:lvl8pPr>
+            <a:lvl9pPr algn="l">
+              <a:defRPr sz="2625" b="0">
+                <a:solidFill>
+                  <a:srgbClr val="17212B"/>
+                </a:solidFill>
+                <a:latin typeface="Malgun Gothic"/>
+                <a:ea typeface="Malgun Gothic"/>
+                <a:cs typeface="Malgun Gothic"/>
+              </a:defRPr>
+            </a:lvl9pPr>
+          </a:lstStyle>
+          <a:p xmlns:a="http://schemas.openxmlformats.org/drawingml/2006/main">
+            <a:pPr algn="l">
+              <a:defRPr sz="2625" b="0">
+                <a:solidFill>
+                  <a:srgbClr val="17212B"/>
+                </a:solidFill>
+                <a:latin typeface="Malgun Gothic"/>
+                <a:ea typeface="Malgun Gothic"/>
+                <a:cs typeface="Malgun Gothic"/>
+              </a:defRPr>
+            </a:pPr>
+            <a:r>
+              <a:rPr sz="2625" b="0">
+                <a:solidFill>
+                  <a:srgbClr val="17212B"/>
+                </a:solidFill>
+                <a:latin typeface="Malgun Gothic"/>
+                <a:ea typeface="Malgun Gothic"/>
+                <a:cs typeface="Malgun Gothic"/>
+              </a:rPr>
+              <a:t>원하는 결과</a:t>
+            </a:r>
+          </a:p>
+          <a:p xmlns:a="http://schemas.openxmlformats.org/drawingml/2006/main">
+            <a:pPr algn="l">
+              <a:defRPr sz="2625" b="0">
+                <a:solidFill>
+                  <a:srgbClr val="17212B"/>
+                </a:solidFill>
+                <a:latin typeface="Malgun Gothic"/>
+                <a:ea typeface="Malgun Gothic"/>
+                <a:cs typeface="Malgun Gothic"/>
+              </a:defRPr>
+            </a:pPr>
+            <a:r>
+              <a:rPr sz="2625" b="0">
+                <a:solidFill>
+                  <a:srgbClr val="17212B"/>
+                </a:solidFill>
+                <a:latin typeface="Malgun Gothic"/>
+                <a:ea typeface="Malgun Gothic"/>
+                <a:cs typeface="Malgun Gothic"/>
+              </a:rPr>
+              <a:t>허용할 범위</a:t>
+            </a:r>
+          </a:p>
+          <a:p xmlns:a="http://schemas.openxmlformats.org/drawingml/2006/main">
+            <a:pPr algn="l">
+              <a:defRPr sz="2625" b="0">
+                <a:solidFill>
+                  <a:srgbClr val="17212B"/>
+                </a:solidFill>
+                <a:latin typeface="Malgun Gothic"/>
+                <a:ea typeface="Malgun Gothic"/>
+                <a:cs typeface="Malgun Gothic"/>
+              </a:defRPr>
+            </a:pPr>
+            <a:r>
+              <a:rPr sz="2625" b="0">
+                <a:solidFill>
+                  <a:srgbClr val="17212B"/>
+                </a:solidFill>
+                <a:latin typeface="Malgun Gothic"/>
+                <a:ea typeface="Malgun Gothic"/>
+                <a:cs typeface="Malgun Gothic"/>
+              </a:rPr>
+              <a:t>완료 수용</a:t>
+            </a:r>
+          </a:p>
+        </p:txBody>
+      </p:sp>
+      <p:sp>
+        <p:nvSpPr>
+          <p:cNvPr id="20" name="≠">
+            <a:extLst xmlns:a="http://schemas.openxmlformats.org/drawingml/2006/main">
+              <a:ext uri="{FF2B5EF4-FFF2-40B4-BE49-F238E27FC236}">
+                <a16:creationId xmlns:a16="http://schemas.microsoft.com/office/drawing/2014/main" id="{D58A1FA4-3D7B-49D4-AD24-38139B483A6A}"/>
+              </a:ext>
+            </a:extLst>
+          </p:cNvPr>
+          <p:cNvSpPr>
+            <a:spLocks xmlns:a="http://schemas.openxmlformats.org/drawingml/2006/main" noGrp="1"/>
+          </p:cNvSpPr>
+          <p:nvPr/>
+        </p:nvSpPr>
+        <p:spPr>
+          <a:xfrm xmlns:a="http://schemas.openxmlformats.org/drawingml/2006/main">
+            <a:off x="5810250" y="3905250"/>
+            <a:ext cx="971550" cy="914400"/>
+          </a:xfrm>
+          <a:prstGeom xmlns:a="http://schemas.openxmlformats.org/drawingml/2006/main" prst="rect">
+            <a:avLst/>
+          </a:prstGeom>
+          <a:noFill xmlns:a="http://schemas.openxmlformats.org/drawingml/2006/main"/>
+          <a:ln xmlns:a="http://schemas.openxmlformats.org/drawingml/2006/main" w="0">
+            <a:noFill/>
+          </a:ln>
+        </p:spPr>
+        <p:txBody>
+          <a:bodyPr xmlns:a="http://schemas.openxmlformats.org/drawingml/2006/main" wrap="none" lIns="0" tIns="0" rIns="0" bIns="0" anchor="ctr">
+            <a:noAutofit/>
+          </a:bodyPr>
+          <a:lstStyle xmlns:a="http://schemas.openxmlformats.org/drawingml/2006/main">
+            <a:defPPr algn="ctr">
+              <a:defRPr sz="4800" b="1">
+                <a:solidFill>
+                  <a:srgbClr val="0B6172"/>
+                </a:solidFill>
+                <a:latin typeface="Malgun Gothic"/>
+                <a:ea typeface="Malgun Gothic"/>
+                <a:cs typeface="Malgun Gothic"/>
+              </a:defRPr>
+            </a:defPPr>
+            <a:lvl1pPr algn="ctr">
+              <a:defRPr sz="4800" b="1">
+                <a:solidFill>
+                  <a:srgbClr val="0B6172"/>
+                </a:solidFill>
+                <a:latin typeface="Malgun Gothic"/>
+                <a:ea typeface="Malgun Gothic"/>
+                <a:cs typeface="Malgun Gothic"/>
+              </a:defRPr>
+            </a:lvl1pPr>
+            <a:lvl2pPr algn="ctr">
+              <a:defRPr sz="4800" b="1">
+                <a:solidFill>
+                  <a:srgbClr val="0B6172"/>
+                </a:solidFill>
+                <a:latin typeface="Malgun Gothic"/>
+                <a:ea typeface="Malgun Gothic"/>
+                <a:cs typeface="Malgun Gothic"/>
+              </a:defRPr>
+            </a:lvl2pPr>
+            <a:lvl3pPr algn="ctr">
+              <a:defRPr sz="4800" b="1">
+                <a:solidFill>
+                  <a:srgbClr val="0B6172"/>
+                </a:solidFill>
+                <a:latin typeface="Malgun Gothic"/>
+                <a:ea typeface="Malgun Gothic"/>
+                <a:cs typeface="Malgun Gothic"/>
+              </a:defRPr>
+            </a:lvl3pPr>
+            <a:lvl4pPr algn="ctr">
+              <a:defRPr sz="4800" b="1">
+                <a:solidFill>
+                  <a:srgbClr val="0B6172"/>
+                </a:solidFill>
+                <a:latin typeface="Malgun Gothic"/>
+                <a:ea typeface="Malgun Gothic"/>
+                <a:cs typeface="Malgun Gothic"/>
+              </a:defRPr>
+            </a:lvl4pPr>
+            <a:lvl5pPr algn="ctr">
+              <a:defRPr sz="4800" b="1">
+                <a:solidFill>
+                  <a:srgbClr val="0B6172"/>
+                </a:solidFill>
+                <a:latin typeface="Malgun Gothic"/>
+                <a:ea typeface="Malgun Gothic"/>
+                <a:cs typeface="Malgun Gothic"/>
+              </a:defRPr>
+            </a:lvl5pPr>
+            <a:lvl6pPr algn="ctr">
+              <a:defRPr sz="4800" b="1">
+                <a:solidFill>
+                  <a:srgbClr val="0B6172"/>
+                </a:solidFill>
+                <a:latin typeface="Malgun Gothic"/>
+                <a:ea typeface="Malgun Gothic"/>
+                <a:cs typeface="Malgun Gothic"/>
+              </a:defRPr>
+            </a:lvl6pPr>
+            <a:lvl7pPr algn="ctr">
+              <a:defRPr sz="4800" b="1">
+                <a:solidFill>
+                  <a:srgbClr val="0B6172"/>
+                </a:solidFill>
+                <a:latin typeface="Malgun Gothic"/>
+                <a:ea typeface="Malgun Gothic"/>
+                <a:cs typeface="Malgun Gothic"/>
+              </a:defRPr>
+            </a:lvl7pPr>
+            <a:lvl8pPr algn="ctr">
+              <a:defRPr sz="4800" b="1">
+                <a:solidFill>
+                  <a:srgbClr val="0B6172"/>
+                </a:solidFill>
+                <a:latin typeface="Malgun Gothic"/>
+                <a:ea typeface="Malgun Gothic"/>
+                <a:cs typeface="Malgun Gothic"/>
+              </a:defRPr>
+            </a:lvl8pPr>
+            <a:lvl9pPr algn="ctr">
+              <a:defRPr sz="4800" b="1">
+                <a:solidFill>
+                  <a:srgbClr val="0B6172"/>
+                </a:solidFill>
+                <a:latin typeface="Malgun Gothic"/>
+                <a:ea typeface="Malgun Gothic"/>
+                <a:cs typeface="Malgun Gothic"/>
+              </a:defRPr>
+            </a:lvl9pPr>
+          </a:lstStyle>
+          <a:p xmlns:a="http://schemas.openxmlformats.org/drawingml/2006/main">
+            <a:pPr algn="ctr">
+              <a:defRPr sz="4800" b="1">
+                <a:solidFill>
+                  <a:srgbClr val="0B6172"/>
+                </a:solidFill>
+                <a:latin typeface="Malgun Gothic"/>
+                <a:ea typeface="Malgun Gothic"/>
+                <a:cs typeface="Malgun Gothic"/>
+              </a:defRPr>
+            </a:pPr>
+            <a:r>
+              <a:rPr sz="4800" b="1">
+                <a:solidFill>
+                  <a:srgbClr val="0B6172"/>
+                </a:solidFill>
+                <a:latin typeface="Malgun Gothic"/>
+                <a:ea typeface="Malgun Gothic"/>
+                <a:cs typeface="Malgun Gothic"/>
+              </a:rPr>
+              <a:t>≠</a:t>
+            </a:r>
+          </a:p>
+        </p:txBody>
+      </p:sp>
+      <p:sp>
+        <p:nvSpPr>
+          <p:cNvPr id="21" name="Agent는 제안하고, 사람은 최종 선택·승인한다.">
+            <a:extLst xmlns:a="http://schemas.openxmlformats.org/drawingml/2006/main">
+              <a:ext uri="{FF2B5EF4-FFF2-40B4-BE49-F238E27FC236}">
+                <a16:creationId xmlns:a16="http://schemas.microsoft.com/office/drawing/2014/main" id="{FA3EB7DB-7082-4769-9347-97C358C576D5}"/>
+              </a:ext>
+            </a:extLst>
+          </p:cNvPr>
+          <p:cNvSpPr>
+            <a:spLocks xmlns:a="http://schemas.openxmlformats.org/drawingml/2006/main" noGrp="1"/>
+          </p:cNvSpPr>
+          <p:nvPr/>
+        </p:nvSpPr>
+        <p:spPr>
+          <a:xfrm xmlns:a="http://schemas.openxmlformats.org/drawingml/2006/main">
+            <a:off x="609600" y="5362575"/>
+            <a:ext cx="10972800" cy="333375"/>
+          </a:xfrm>
+          <a:prstGeom xmlns:a="http://schemas.openxmlformats.org/drawingml/2006/main" prst="rect">
+            <a:avLst/>
+          </a:prstGeom>
+          <a:noFill xmlns:a="http://schemas.openxmlformats.org/drawingml/2006/main"/>
+          <a:ln xmlns:a="http://schemas.openxmlformats.org/drawingml/2006/main" w="0">
+            <a:noFill/>
+          </a:ln>
+        </p:spPr>
+        <p:txBody>
+          <a:bodyPr xmlns:a="http://schemas.openxmlformats.org/drawingml/2006/main" wrap="none" lIns="0" tIns="0" rIns="0" bIns="0" anchor="ctr">
+            <a:noAutofit/>
+          </a:bodyPr>
+          <a:lstStyle xmlns:a="http://schemas.openxmlformats.org/drawingml/2006/main">
+            <a:defPPr algn="l">
+              <a:defRPr sz="2100" b="1">
+                <a:solidFill>
+                  <a:srgbClr val="0B6172"/>
+                </a:solidFill>
+                <a:latin typeface="Malgun Gothic"/>
+                <a:ea typeface="Malgun Gothic"/>
+                <a:cs typeface="Malgun Gothic"/>
+              </a:defRPr>
+            </a:defPPr>
+            <a:lvl1pPr algn="l">
+              <a:defRPr sz="2100" b="1">
+                <a:solidFill>
+                  <a:srgbClr val="0B6172"/>
+                </a:solidFill>
+                <a:latin typeface="Malgun Gothic"/>
+                <a:ea typeface="Malgun Gothic"/>
+                <a:cs typeface="Malgun Gothic"/>
+              </a:defRPr>
+            </a:lvl1pPr>
+            <a:lvl2pPr algn="l">
+              <a:defRPr sz="2100" b="1">
+                <a:solidFill>
+                  <a:srgbClr val="0B6172"/>
+                </a:solidFill>
+                <a:latin typeface="Malgun Gothic"/>
+                <a:ea typeface="Malgun Gothic"/>
+                <a:cs typeface="Malgun Gothic"/>
+              </a:defRPr>
+            </a:lvl2pPr>
+            <a:lvl3pPr algn="l">
+              <a:defRPr sz="2100" b="1">
+                <a:solidFill>
+                  <a:srgbClr val="0B6172"/>
+                </a:solidFill>
+                <a:latin typeface="Malgun Gothic"/>
+                <a:ea typeface="Malgun Gothic"/>
+                <a:cs typeface="Malgun Gothic"/>
+              </a:defRPr>
+            </a:lvl3pPr>
+            <a:lvl4pPr algn="l">
+              <a:defRPr sz="2100" b="1">
+                <a:solidFill>
+                  <a:srgbClr val="0B6172"/>
+                </a:solidFill>
+                <a:latin typeface="Malgun Gothic"/>
+                <a:ea typeface="Malgun Gothic"/>
+                <a:cs typeface="Malgun Gothic"/>
+              </a:defRPr>
+            </a:lvl4pPr>
+            <a:lvl5pPr algn="l">
+              <a:defRPr sz="2100" b="1">
+                <a:solidFill>
+                  <a:srgbClr val="0B6172"/>
+                </a:solidFill>
+                <a:latin typeface="Malgun Gothic"/>
+                <a:ea typeface="Malgun Gothic"/>
+                <a:cs typeface="Malgun Gothic"/>
+              </a:defRPr>
+            </a:lvl5pPr>
+            <a:lvl6pPr algn="l">
+              <a:defRPr sz="2100" b="1">
+                <a:solidFill>
+                  <a:srgbClr val="0B6172"/>
+                </a:solidFill>
+                <a:latin typeface="Malgun Gothic"/>
+                <a:ea typeface="Malgun Gothic"/>
+                <a:cs typeface="Malgun Gothic"/>
+              </a:defRPr>
+            </a:lvl6pPr>
+            <a:lvl7pPr algn="l">
+              <a:defRPr sz="2100" b="1">
+                <a:solidFill>
+                  <a:srgbClr val="0B6172"/>
+                </a:solidFill>
+                <a:latin typeface="Malgun Gothic"/>
+                <a:ea typeface="Malgun Gothic"/>
+                <a:cs typeface="Malgun Gothic"/>
+              </a:defRPr>
+            </a:lvl7pPr>
+            <a:lvl8pPr algn="l">
+              <a:defRPr sz="2100" b="1">
+                <a:solidFill>
+                  <a:srgbClr val="0B6172"/>
+                </a:solidFill>
+                <a:latin typeface="Malgun Gothic"/>
+                <a:ea typeface="Malgun Gothic"/>
+                <a:cs typeface="Malgun Gothic"/>
+              </a:defRPr>
+            </a:lvl8pPr>
+            <a:lvl9pPr algn="l">
+              <a:defRPr sz="2100" b="1">
+                <a:solidFill>
+                  <a:srgbClr val="0B6172"/>
+                </a:solidFill>
+                <a:latin typeface="Malgun Gothic"/>
+                <a:ea typeface="Malgun Gothic"/>
+                <a:cs typeface="Malgun Gothic"/>
+              </a:defRPr>
+            </a:lvl9pPr>
+          </a:lstStyle>
+          <a:p xmlns:a="http://schemas.openxmlformats.org/drawingml/2006/main">
+            <a:pPr algn="l">
+              <a:defRPr sz="2100" b="1">
+                <a:solidFill>
+                  <a:srgbClr val="0B6172"/>
+                </a:solidFill>
+                <a:latin typeface="Malgun Gothic"/>
+                <a:ea typeface="Malgun Gothic"/>
+                <a:cs typeface="Malgun Gothic"/>
+              </a:defRPr>
+            </a:pPr>
+            <a:r>
+              <a:rPr sz="2100" b="1">
+                <a:solidFill>
+                  <a:srgbClr val="0B6172"/>
+                </a:solidFill>
+                <a:latin typeface="Malgun Gothic"/>
+                <a:ea typeface="Malgun Gothic"/>
+                <a:cs typeface="Malgun Gothic"/>
+              </a:rPr>
+              <a:t>Agent는 제안하고, 사람은 최종 선택·승인한다.</a:t>
+            </a:r>
+          </a:p>
+        </p:txBody>
+      </p:sp>
+      <p:sp>
+        <p:nvSpPr>
+          <p:cNvPr id="22" name="Legacy module connection">
+            <a:extLst xmlns:a="http://schemas.openxmlformats.org/drawingml/2006/main">
+              <a:ext uri="{FF2B5EF4-FFF2-40B4-BE49-F238E27FC236}">
+                <a16:creationId xmlns:a16="http://schemas.microsoft.com/office/drawing/2014/main" id="{936D9511-1FD2-4630-899E-33A7FD10596B}"/>
               </a:ext>
             </a:extLst>
           </p:cNvPr>
@@ -32120,7 +37011,7 @@
     </p:spTree>
     <p:extLst>
       <p:ext uri="{BB962C8B-B14F-4D97-AF65-F5344CB8AC3E}">
-        <p14:creationId xmlns:p14="http://schemas.microsoft.com/office/powerpoint/2010/main" val="1797482214"/>
+        <p14:creationId xmlns:p14="http://schemas.microsoft.com/office/powerpoint/2010/main" val="859092308"/>
       </p:ext>
     </p:extLst>
   </p:cSld>

--- a/production/ACT_0.pptx
+++ b/production/ACT_0.pptx
@@ -2,22 +2,22 @@
 <file path=ppt/presentation.xml><?xml version="1.0" encoding="utf-8"?>
 <p:presentation xmlns:p="http://schemas.openxmlformats.org/presentationml/2006/main">
   <p:sldMasterIdLst>
-    <p:sldMasterId xmlns:r="http://schemas.openxmlformats.org/officeDocument/2006/relationships" id="2147483648" r:id="R1c712e04b8d64939"/>
+    <p:sldMasterId xmlns:r="http://schemas.openxmlformats.org/officeDocument/2006/relationships" id="2147483648" r:id="Rd21c0e335b05427d"/>
   </p:sldMasterIdLst>
   <p:notesMasterIdLst>
-    <p:notesMasterId xmlns:r="http://schemas.openxmlformats.org/officeDocument/2006/relationships" r:id="Rb98b7b4b146f4655"/>
+    <p:notesMasterId xmlns:r="http://schemas.openxmlformats.org/officeDocument/2006/relationships" r:id="R212af61a6c534ba5"/>
   </p:notesMasterIdLst>
   <p:sldIdLst>
-    <p:sldId xmlns:r="http://schemas.openxmlformats.org/officeDocument/2006/relationships" id="256" r:id="Rab3dfd4e78154774"/>
-    <p:sldId xmlns:r="http://schemas.openxmlformats.org/officeDocument/2006/relationships" id="257" r:id="Rd67506d667e244af"/>
-    <p:sldId xmlns:r="http://schemas.openxmlformats.org/officeDocument/2006/relationships" id="258" r:id="Re245cf3811994fca"/>
-    <p:sldId xmlns:r="http://schemas.openxmlformats.org/officeDocument/2006/relationships" id="259" r:id="R2e5b1dbc438a4400"/>
-    <p:sldId xmlns:r="http://schemas.openxmlformats.org/officeDocument/2006/relationships" id="260" r:id="R6daa024d09d8419a"/>
-    <p:sldId xmlns:r="http://schemas.openxmlformats.org/officeDocument/2006/relationships" id="261" r:id="R0b743223a5174a43"/>
-    <p:sldId xmlns:r="http://schemas.openxmlformats.org/officeDocument/2006/relationships" id="262" r:id="R7343ccda41334b81"/>
-    <p:sldId xmlns:r="http://schemas.openxmlformats.org/officeDocument/2006/relationships" id="263" r:id="R15d7de5848734f7f"/>
-    <p:sldId xmlns:r="http://schemas.openxmlformats.org/officeDocument/2006/relationships" id="264" r:id="R186a2f8e5e624f0c"/>
-    <p:sldId xmlns:r="http://schemas.openxmlformats.org/officeDocument/2006/relationships" id="265" r:id="R49a2b78cbcb843f3"/>
+    <p:sldId xmlns:r="http://schemas.openxmlformats.org/officeDocument/2006/relationships" id="256" r:id="R9dcc8b90814f45f6"/>
+    <p:sldId xmlns:r="http://schemas.openxmlformats.org/officeDocument/2006/relationships" id="257" r:id="R0c3dc8b9838b4bcb"/>
+    <p:sldId xmlns:r="http://schemas.openxmlformats.org/officeDocument/2006/relationships" id="258" r:id="R0dd6bea19eff4160"/>
+    <p:sldId xmlns:r="http://schemas.openxmlformats.org/officeDocument/2006/relationships" id="259" r:id="Rff13f22c6170482e"/>
+    <p:sldId xmlns:r="http://schemas.openxmlformats.org/officeDocument/2006/relationships" id="260" r:id="R64fa2bdef36d4ecc"/>
+    <p:sldId xmlns:r="http://schemas.openxmlformats.org/officeDocument/2006/relationships" id="261" r:id="R47a09a89c4bd4e66"/>
+    <p:sldId xmlns:r="http://schemas.openxmlformats.org/officeDocument/2006/relationships" id="262" r:id="R91a6163563ce4339"/>
+    <p:sldId xmlns:r="http://schemas.openxmlformats.org/officeDocument/2006/relationships" id="263" r:id="R488156db55fd4180"/>
+    <p:sldId xmlns:r="http://schemas.openxmlformats.org/officeDocument/2006/relationships" id="264" r:id="R470c8e76a56d4414"/>
+    <p:sldId xmlns:r="http://schemas.openxmlformats.org/officeDocument/2006/relationships" id="265" r:id="R082c427b9c1b49f7"/>
   </p:sldIdLst>
   <p:sldSz cx="12192000" cy="6858000"/>
   <p:notesSz cx="6858000" cy="9144000"/>
@@ -796,7 +796,7 @@
           </a:p>
           <a:p xmlns:a="http://schemas.openxmlformats.org/drawingml/2006/main">
             <a:r>
-              <a:t>Opening Question: “내가 지금 맡기고 싶은 일의 원하는 결과까지 코드에 적혀 있을까?”</a:t>
+              <a:t>Opening Question: “지금 이 저장소에 어떤 일을 맡기고 싶으신가요?” 제조 라인 검사장비로 확장한다는 가정 아래 원하는 검사 작업을 떠올리게 한다.</a:t>
             </a:r>
           </a:p>
           <a:p xmlns:a="http://schemas.openxmlformats.org/drawingml/2006/main">
@@ -816,12 +816,27 @@
           </a:p>
           <a:p xmlns:a="http://schemas.openxmlformats.org/drawingml/2006/main">
             <a:r>
-              <a:t>1. **DISCUSS / TRANSITION (0:00–3:00):** 화면 상단의 “내 작업에 적용할 질문”을 짚고, 각자가 지금 맡기고 싶은 일 하나를 떠올리게 한다. “지금 이 저장소에 어떤 일을 맡기고 싶은가?”와 “그 원하는 결과까지 코드에 적혀 있는가?”를 차례로 읽는다. S09의 구분을 자기 작업에 대입하며 답이나 다음 단계의 체크리스트를 제시하지 않는다.</a:t>
-            </a:r>
-          </a:p>
-          <a:p xmlns:a="http://schemas.openxmlformats.org/drawingml/2006/main">
-            <a:r>
-              <a:t>2. **Q&amp;A (3:00–6:00):** 자발적인 질문을 받는다. 질문이 없으면 두 질문을 그대로 남긴 뒤 ACT 1의 모호한 요청으로 이동한다.</a:t>
+              <a:t>1. **CALLBACK (0:00–0:25 / Transition):** S09에서 사람이 정할 목표·허용 범위·완료 수용을 남겼음을 짧게 회수한다. 화면의 제조 검사 Task는 교육용 가정이라고 말한다.</a:t>
+            </a:r>
+          </a:p>
+          <a:p xmlns:a="http://schemas.openxmlformats.org/drawingml/2006/main">
+            <a:r>
+              <a:t>2. **PIPELINE CONTEXT (0:25–1:15 / Transition):** 입력 이미지에서 관심 영역을 crop하는 실선을 가리키고 “앞서 조사한 기존 구현”이라고 말한다. 이후 점선의 밝기 정규화, 크기 맞춤, 통계·특징, 양불 판정을 한 번 훑는다. 점선은 이 검사 흐름에서 추가로 정의·연결할 범위이지 실제 저장소의 함수 미구현을 뜻하지 않는다. 각 알고리즘의 원리·판정 기준을 강의하거나 구현 결과로 보여주지 않는다.</a:t>
+            </a:r>
+          </a:p>
+          <a:p xmlns:a="http://schemas.openxmlformats.org/drawingml/2006/main">
+            <a:r>
+              <a:t>3. **TASK QUESTION (1:15–2:30 / Transition):** 하단의 “지금 이 저장소에 어떤 일을 맡기고 싶으신가요?”를 읽고 원하는 작업 하나를 조용히 떠올리게 한다. 판정 카드의 ?를 남겨 두며 정답이나 새 기능 목록을 제시하지 않는다.</a:t>
+            </a:r>
+          </a:p>
+          <a:p xmlns:a="http://schemas.openxmlformats.org/drawingml/2006/main">
+            <a:r>
+              <a:t>4. **HANDOFF (2:30–3:00 / Transition):** “그 원하는 결과까지 코드에 적혀 있을까요?”를 읽는다. 같은 Repository를 보더라도 원하는 검사는 별도로 전달해야 한다는 다음 문제를 남긴다. ACT 1의 다섯 책임을 먼저 펼치지 않는다.</a:t>
+            </a:r>
+          </a:p>
+          <a:p xmlns:a="http://schemas.openxmlformats.org/drawingml/2006/main">
+            <a:r>
+              <a:t>5. **Q&amp;A (3:00–6:00):** 자발적인 질문을 받는다. 질문이 없으면 두 질문을 화면에 남기고, 종료 시 기존 Transition 문구로 S11의 모호한 요청에 연결한다.</a:t>
             </a:r>
           </a:p>
           <a:p xmlns:a="http://schemas.openxmlformats.org/drawingml/2006/main">
@@ -831,7 +846,7 @@
           </a:p>
           <a:p xmlns:a="http://schemas.openxmlformats.org/drawingml/2006/main">
             <a:r>
-              <a:t>Evidence / Source: BEAT-003 → BEAT-004, TRANSITIONS.md의 승인된 ACT handoff, DEMO-01 callback, CLM-0002, CLM-0009. TEACHING_MODEL.</a:t>
+              <a:t>Evidence / Source: BEAT-003 → BEAT-004, DEMO-01 callback, CLM-0002, CLM-0009, DEC-0037. TEACHING_MODEL. plan/DEMO_REPOSITORY_SPEC.md의 초기 모듈 범위 및 ai-dev-training-demo의 src/graypipe/pipeline.py·statistics.py와 대조했다. 실제 구현은 load→normalize→optional invert/crop/resize→save→statistics 경로이며 현재 도식과 동일한 제조 검사 순서가 아니다. 새로운 실행·Trial은 수행하지 않았다.</a:t>
             </a:r>
           </a:p>
           <a:p xmlns:a="http://schemas.openxmlformats.org/drawingml/2006/main">
@@ -841,7 +856,7 @@
           </a:p>
           <a:p xmlns:a="http://schemas.openxmlformats.org/drawingml/2006/main">
             <a:r>
-              <a:t>Claim Boundary: 이 장은 다음 문제를 여는 Teaching Model이다. ACT 1의 다섯 Task Specification 책임이나 구체적 해답을 공개하지 않는다.</a:t>
+              <a:t>Claim Boundary: 제조 검사장비로 확장하는 교육용 가정이다. 실제 저장소에는 normalize/resize/statistics도 구현돼 있으므로 점선을 함수 미구현으로 설명하지 않는다. crop의 실선도 정상·검증 완료를 뜻하지 않는다. TRIAL-001 조사 뒤 실제 crop 수정은 다음 ACT의 TRIAL-002에서 회수한다. 통계 카드의 막대는 추상 기호이며 측정 히스토그램·결함 검출·양불 판정 결과가 아니다. 판정 조건·알고리즘 정답이나 완성된 Task 요청을 이 장에서 제공하지 않는다.</a:t>
             </a:r>
           </a:p>
           <a:p xmlns:a="http://schemas.openxmlformats.org/drawingml/2006/main">
@@ -851,7 +866,7 @@
           </a:p>
           <a:p xmlns:a="http://schemas.openxmlformats.org/drawingml/2006/main">
             <a:r>
-              <a:t>Beginner Explanation: Repository 접근이 생긴 뒤에도 원하는 결과를 설명할 문제는 남아 있다.</a:t>
+              <a:t>Beginner Explanation: ROI crop 이후 검사에서 무엇을 더 하고 싶은지는 코드를 보는 것만으로 정해지지 않는다. 그림의 점선 중 어디까지 맡기고 싶은지 떠올리면 충분하다.</a:t>
             </a:r>
           </a:p>
           <a:p xmlns:a="http://schemas.openxmlformats.org/drawingml/2006/main">
@@ -861,7 +876,7 @@
           </a:p>
           <a:p xmlns:a="http://schemas.openxmlformats.org/drawingml/2006/main">
             <a:r>
-              <a:t>Advanced Insight: 관찰 가능한 Context와 개발자가 정해야 할 의도를 구분하며 다음 Story 단계로 이동한다.</a:t>
+              <a:t>Advanced Insight: 강사용 연결: ROI crop의 동작·보존 범위는 ACT 1, 좌표·밝기·크기 조건은 ACT 2, Normalize/Resize/Statistics의 반복 성능 조사는 ACT 3, 개별 단계와 연결 검증 범위·환경 변화는 ACT 4와 대응한다. 이 연결을 지금 미리 강의하지 않는다. 뒤 ACT가 이 가상의 제조 검사 파이프라인 전체를 실제로 구현·검증한다고 약속하지 않는다.</a:t>
             </a:r>
           </a:p>
           <a:p xmlns:a="http://schemas.openxmlformats.org/drawingml/2006/main">
@@ -871,7 +886,7 @@
           </a:p>
           <a:p xmlns:a="http://schemas.openxmlformats.org/drawingml/2006/main">
             <a:r>
-              <a:t>C++ Vision Bridge: N/A.</a:t>
+              <a:t>C++ Vision Bridge: N/A. 제조 검사 도메인은 질문의 배경이며 새로운 C++ 도구·하드웨어 검증이나 전용 Bridge를 추가하지 않는다.</a:t>
             </a:r>
           </a:p>
           <a:p xmlns:a="http://schemas.openxmlformats.org/drawingml/2006/main">
@@ -881,7 +896,7 @@
           </a:p>
           <a:p xmlns:a="http://schemas.openxmlformats.org/drawingml/2006/main">
             <a:r>
-              <a:t>Demo Operation: N/A — 신규 Demo 또는 제품 기능 설명은 없다.</a:t>
+              <a:t>Demo Operation: N/A. 편집 가능한 native 도식으로 질문을 여는 정적 화면이다. 검사장비 실행·신규 Demo·새 Trial을 시연하지 않는다.</a:t>
             </a:r>
           </a:p>
           <a:p xmlns:a="http://schemas.openxmlformats.org/drawingml/2006/main">
@@ -891,7 +906,7 @@
           </a:p>
           <a:p xmlns:a="http://schemas.openxmlformats.org/drawingml/2006/main">
             <a:r>
-              <a:t>Audience Interaction: Q&amp;A 3분은 선택적 질문 시간이다. 답변이나 공유를 강제하지 않는다. 침묵은 정상적인 결과로 둔다.</a:t>
+              <a:t>Audience Interaction: Transition 3분에서 개인적으로 작업을 떠올리게 하고 Q&amp;A 3분은 선택적 질문 시간으로 둔다. 답변·공유·코드 작성·알고리즘 설계를 강제하지 않는다.</a:t>
             </a:r>
           </a:p>
           <a:p xmlns:a="http://schemas.openxmlformats.org/drawingml/2006/main">
@@ -911,7 +926,7 @@
           </a:p>
           <a:p xmlns:a="http://schemas.openxmlformats.org/drawingml/2006/main">
             <a:r>
-              <a:t>Time Management: Slide Map의 순서를 유지해 Transition 3분 뒤 Q&amp;A 3분을 둔다. Q&amp;A를 늘려 ACT 전체 시간을 옮기지 않는다.</a:t>
+              <a:t>Time Management: Transition 3분 뒤 Q&amp;A 3분 순서를 유지한다. 파이프라인 설명은 50초 정도로 제한하고 이름·실선/점선 범위만 짚는다. Q&amp;A를 늘려 ACT 시간을 옮기지 않는다. 실제 운영 시간은 리허설 전까지 UNVERIFIED다.</a:t>
             </a:r>
           </a:p>
           <a:p xmlns:a="http://schemas.openxmlformats.org/drawingml/2006/main">
@@ -921,7 +936,7 @@
           </a:p>
           <a:p xmlns:a="http://schemas.openxmlformats.org/drawingml/2006/main">
             <a:r>
-              <a:t>Fallback: 질문이 없으면 Opening Question을 그대로 남기고 종료 cue로 ACT 1에 넘긴다. 강사가 질문에 답을 보태지 않는다.</a:t>
+              <a:t>Fallback: production/ACT_0.pptx S10 또는 production/preview/act0/S10.png의 동일 도식을 사용한다. 질문이 없으면 판정의 ?와 두 질문을 남긴 채 기존 Transition으로 S11에 넘긴다. 즉석 검사 알고리즘·실행 화면으로 대체하지 않는다.</a:t>
             </a:r>
           </a:p>
           <a:p xmlns:a="http://schemas.openxmlformats.org/drawingml/2006/main">
@@ -931,7 +946,7 @@
           </a:p>
           <a:p xmlns:a="http://schemas.openxmlformats.org/drawingml/2006/main">
             <a:r>
-              <a:t>Validation Status: REVIEWED — 원문·Claim 경계, 화면의 설명 순서와 운영 지침을 대조했다. 최종 PPT/Notes/PNG 대조 결과는 production/evaluation/FULL_DECK_PRESENTATION_REVISION.md에 기록한다. Windows PowerPoint, 발표 PC 글꼴, 교육장 투사, 실제 시간 리허설은 UNVERIFIED.</a:t>
+              <a:t>Validation Status: ALIGNED — DEC-0037에 따라 교육용 파이프라인과 실제 구현 범위, 기존 질문·시간·Story 연결을 대조했다. 최종 PPT/내장 Notes/PNG 검토는 production/evaluation/S10_INSPECTION_PIPELINE_REVISION.md에 기록한다. Windows PowerPoint·발표 PC 글꼴·교육장 투사·실측 리허설은 UNVERIFIED.</a:t>
             </a:r>
           </a:p>
         </p:txBody>
@@ -3333,7 +3348,7 @@
           <p:cNvPr id="3" name="Title">
             <a:extLst xmlns:a="http://schemas.openxmlformats.org/drawingml/2006/main">
               <a:ext uri="{FF2B5EF4-FFF2-40B4-BE49-F238E27FC236}">
-                <a16:creationId xmlns:a16="http://schemas.microsoft.com/office/drawing/2014/main" id="{EE55E0AF-4DDF-4BEE-9F13-57680555F586}"/>
+                <a16:creationId xmlns:a16="http://schemas.microsoft.com/office/drawing/2014/main" id="{BB12AAE9-4F03-4A3F-948F-00455E9A267E}"/>
               </a:ext>
             </a:extLst>
           </p:cNvPr>
@@ -3562,7 +3577,7 @@
           <p:cNvPr id="2" name="Subtitle">
             <a:extLst xmlns:a="http://schemas.openxmlformats.org/drawingml/2006/main">
               <a:ext uri="{FF2B5EF4-FFF2-40B4-BE49-F238E27FC236}">
-                <a16:creationId xmlns:a16="http://schemas.microsoft.com/office/drawing/2014/main" id="{BB8DAEDC-008A-459D-B2DB-E1AF8C0BE608}"/>
+                <a16:creationId xmlns:a16="http://schemas.microsoft.com/office/drawing/2014/main" id="{56818308-4910-47B1-BCD1-0301CF024674}"/>
               </a:ext>
             </a:extLst>
           </p:cNvPr>
@@ -3808,7 +3823,7 @@
           <p:cNvPr id="2" name="Section title">
             <a:extLst xmlns:a="http://schemas.openxmlformats.org/drawingml/2006/main">
               <a:ext uri="{FF2B5EF4-FFF2-40B4-BE49-F238E27FC236}">
-                <a16:creationId xmlns:a16="http://schemas.microsoft.com/office/drawing/2014/main" id="{5B0C661C-586F-4C1B-91B5-5AB25F3BEDAF}"/>
+                <a16:creationId xmlns:a16="http://schemas.microsoft.com/office/drawing/2014/main" id="{FE58B822-3E8F-4139-9889-F6E6C02C0C8B}"/>
               </a:ext>
             </a:extLst>
           </p:cNvPr>
@@ -4054,7 +4069,7 @@
           <p:cNvPr id="3" name="Title">
             <a:extLst xmlns:a="http://schemas.openxmlformats.org/drawingml/2006/main">
               <a:ext uri="{FF2B5EF4-FFF2-40B4-BE49-F238E27FC236}">
-                <a16:creationId xmlns:a16="http://schemas.microsoft.com/office/drawing/2014/main" id="{6C03B130-0F33-4B4A-A0C8-130AD78D8C22}"/>
+                <a16:creationId xmlns:a16="http://schemas.microsoft.com/office/drawing/2014/main" id="{09848AD8-5AD2-4E3B-8EF7-124DD0517DF1}"/>
               </a:ext>
             </a:extLst>
           </p:cNvPr>
@@ -4283,7 +4298,7 @@
           <p:cNvPr id="2" name="Body">
             <a:extLst xmlns:a="http://schemas.openxmlformats.org/drawingml/2006/main">
               <a:ext uri="{FF2B5EF4-FFF2-40B4-BE49-F238E27FC236}">
-                <a16:creationId xmlns:a16="http://schemas.microsoft.com/office/drawing/2014/main" id="{D8DB088D-4268-4A77-B6E1-3313F9C94759}"/>
+                <a16:creationId xmlns:a16="http://schemas.microsoft.com/office/drawing/2014/main" id="{1D036850-FD55-4E39-8176-CA984C3BF2F8}"/>
               </a:ext>
             </a:extLst>
           </p:cNvPr>
@@ -4529,7 +4544,7 @@
           <p:cNvPr id="4" name="Title">
             <a:extLst xmlns:a="http://schemas.openxmlformats.org/drawingml/2006/main">
               <a:ext uri="{FF2B5EF4-FFF2-40B4-BE49-F238E27FC236}">
-                <a16:creationId xmlns:a16="http://schemas.microsoft.com/office/drawing/2014/main" id="{6BBCA946-CA3C-4D61-B228-8AFD4A140EF0}"/>
+                <a16:creationId xmlns:a16="http://schemas.microsoft.com/office/drawing/2014/main" id="{F240B7AC-0300-4999-BABD-27310984A7CF}"/>
               </a:ext>
             </a:extLst>
           </p:cNvPr>
@@ -4758,7 +4773,7 @@
           <p:cNvPr id="2" name="Left column">
             <a:extLst xmlns:a="http://schemas.openxmlformats.org/drawingml/2006/main">
               <a:ext uri="{FF2B5EF4-FFF2-40B4-BE49-F238E27FC236}">
-                <a16:creationId xmlns:a16="http://schemas.microsoft.com/office/drawing/2014/main" id="{4FFBFABD-0FE1-4F21-84B9-4C25BDF86576}"/>
+                <a16:creationId xmlns:a16="http://schemas.microsoft.com/office/drawing/2014/main" id="{915E2170-3EC5-4D3B-8DF8-C6B9BACB37C7}"/>
               </a:ext>
             </a:extLst>
           </p:cNvPr>
@@ -4987,7 +5002,7 @@
           <p:cNvPr id="3" name="Right column">
             <a:extLst xmlns:a="http://schemas.openxmlformats.org/drawingml/2006/main">
               <a:ext uri="{FF2B5EF4-FFF2-40B4-BE49-F238E27FC236}">
-                <a16:creationId xmlns:a16="http://schemas.microsoft.com/office/drawing/2014/main" id="{ACD54D13-A46D-4BB8-B96C-606F34A7E834}"/>
+                <a16:creationId xmlns:a16="http://schemas.microsoft.com/office/drawing/2014/main" id="{6A7AB39F-155C-49CA-953A-8913E5BB7C93}"/>
               </a:ext>
             </a:extLst>
           </p:cNvPr>
@@ -5233,7 +5248,7 @@
           <p:cNvPr id="3" name="Title">
             <a:extLst xmlns:a="http://schemas.openxmlformats.org/drawingml/2006/main">
               <a:ext uri="{FF2B5EF4-FFF2-40B4-BE49-F238E27FC236}">
-                <a16:creationId xmlns:a16="http://schemas.microsoft.com/office/drawing/2014/main" id="{F9715F6F-5AF0-4788-AC03-A02BCE88B336}"/>
+                <a16:creationId xmlns:a16="http://schemas.microsoft.com/office/drawing/2014/main" id="{168561EF-FA87-4BA0-AA49-3CF74926EA14}"/>
               </a:ext>
             </a:extLst>
           </p:cNvPr>
@@ -5462,7 +5477,7 @@
           <p:cNvPr id="2" name="Left column">
             <a:extLst xmlns:a="http://schemas.openxmlformats.org/drawingml/2006/main">
               <a:ext uri="{FF2B5EF4-FFF2-40B4-BE49-F238E27FC236}">
-                <a16:creationId xmlns:a16="http://schemas.microsoft.com/office/drawing/2014/main" id="{44266DF9-CE06-4CBB-A049-97D821F3D91F}"/>
+                <a16:creationId xmlns:a16="http://schemas.microsoft.com/office/drawing/2014/main" id="{3DD01500-0CD5-46C1-A122-B1B51317B37A}"/>
               </a:ext>
             </a:extLst>
           </p:cNvPr>
@@ -5729,12 +5744,12 @@
   </p:cSld>
   <p:clrMap bg1="lt1" tx1="dk1" bg2="lt2" tx2="dk2" accent1="accent1" accent2="accent2" accent3="accent3" accent4="accent4" accent5="accent5" accent6="accent6" hlink="hlink" folHlink="folHlink"/>
   <p:sldLayoutIdLst>
-    <p:sldLayoutId xmlns:r="http://schemas.openxmlformats.org/officeDocument/2006/relationships" id="2147483649" r:id="R8dda593617b34775"/>
-    <p:sldLayoutId xmlns:r="http://schemas.openxmlformats.org/officeDocument/2006/relationships" id="2147483650" r:id="R636bca09ffab4cb1"/>
-    <p:sldLayoutId xmlns:r="http://schemas.openxmlformats.org/officeDocument/2006/relationships" id="2147483651" r:id="R584b31ef6b904700"/>
-    <p:sldLayoutId xmlns:r="http://schemas.openxmlformats.org/officeDocument/2006/relationships" id="2147483652" r:id="R51fbaadcb0344017"/>
-    <p:sldLayoutId xmlns:r="http://schemas.openxmlformats.org/officeDocument/2006/relationships" id="2147483653" r:id="R87966ff1da4a495c"/>
-    <p:sldLayoutId xmlns:r="http://schemas.openxmlformats.org/officeDocument/2006/relationships" id="2147483654" r:id="Ra50cdb5edd8b4728"/>
+    <p:sldLayoutId xmlns:r="http://schemas.openxmlformats.org/officeDocument/2006/relationships" id="2147483649" r:id="Rd1dc6d2eeb5a4834"/>
+    <p:sldLayoutId xmlns:r="http://schemas.openxmlformats.org/officeDocument/2006/relationships" id="2147483650" r:id="R55c4714d26d44b3f"/>
+    <p:sldLayoutId xmlns:r="http://schemas.openxmlformats.org/officeDocument/2006/relationships" id="2147483651" r:id="R16543eab65bc4792"/>
+    <p:sldLayoutId xmlns:r="http://schemas.openxmlformats.org/officeDocument/2006/relationships" id="2147483652" r:id="Rd22564c724e04d6a"/>
+    <p:sldLayoutId xmlns:r="http://schemas.openxmlformats.org/officeDocument/2006/relationships" id="2147483653" r:id="Rbf1c6752f804471a"/>
+    <p:sldLayoutId xmlns:r="http://schemas.openxmlformats.org/officeDocument/2006/relationships" id="2147483654" r:id="Rad7f9495680a4e77"/>
   </p:sldLayoutIdLst>
   <p:txStyles>
     <p:titleStyle>
@@ -6285,7 +6300,7 @@
           <p:cNvPr id="13" name="ACT 0 · 익숙한 사용에서 출발하기">
             <a:extLst xmlns:a="http://schemas.openxmlformats.org/drawingml/2006/main">
               <a:ext uri="{FF2B5EF4-FFF2-40B4-BE49-F238E27FC236}">
-                <a16:creationId xmlns:a16="http://schemas.microsoft.com/office/drawing/2014/main" id="{5A89DD2C-0F10-4833-B0CF-C638CC29E20D}"/>
+                <a16:creationId xmlns:a16="http://schemas.microsoft.com/office/drawing/2014/main" id="{5BFB7079-867F-4219-A9A9-D9FD8B4B4E6A}"/>
               </a:ext>
             </a:extLst>
           </p:cNvPr>
@@ -6443,7 +6458,7 @@
           <p:cNvPr id="2" name="S01">
             <a:extLst xmlns:a="http://schemas.openxmlformats.org/drawingml/2006/main">
               <a:ext uri="{FF2B5EF4-FFF2-40B4-BE49-F238E27FC236}">
-                <a16:creationId xmlns:a16="http://schemas.microsoft.com/office/drawing/2014/main" id="{34B2721C-10B9-4821-A62C-49CA0CAFDE8C}"/>
+                <a16:creationId xmlns:a16="http://schemas.microsoft.com/office/drawing/2014/main" id="{2861F305-4315-4EAD-99F6-D9F1C62F7E70}"/>
               </a:ext>
             </a:extLst>
           </p:cNvPr>
@@ -6601,7 +6616,7 @@
           <p:cNvPr id="3" name="AI에게 지금 무엇을 맡기고 있는가?">
             <a:extLst xmlns:a="http://schemas.openxmlformats.org/drawingml/2006/main">
               <a:ext uri="{FF2B5EF4-FFF2-40B4-BE49-F238E27FC236}">
-                <a16:creationId xmlns:a16="http://schemas.microsoft.com/office/drawing/2014/main" id="{03372D10-88BF-4ADE-BFE3-9F7171363EF1}"/>
+                <a16:creationId xmlns:a16="http://schemas.microsoft.com/office/drawing/2014/main" id="{702D7808-7C74-4A41-A8F4-D0CE42C91B44}"/>
               </a:ext>
             </a:extLst>
           </p:cNvPr>
@@ -6759,7 +6774,7 @@
           <p:cNvPr id="4" name="">
             <a:extLst xmlns:a="http://schemas.openxmlformats.org/drawingml/2006/main">
               <a:ext uri="{FF2B5EF4-FFF2-40B4-BE49-F238E27FC236}">
-                <a16:creationId xmlns:a16="http://schemas.microsoft.com/office/drawing/2014/main" id="{96A24E1E-A59D-48A9-8A98-9E32B69D253A}"/>
+                <a16:creationId xmlns:a16="http://schemas.microsoft.com/office/drawing/2014/main" id="{3EE8A7EA-DFAD-4702-8F4E-7D46A0D5D4D2}"/>
               </a:ext>
             </a:extLst>
           </p:cNvPr>
@@ -6790,7 +6805,7 @@
           <p:cNvPr id="5" name="교육용 사례 삽화 · AI 생성 이미지 · 실제 제품 실행 화면 아님">
             <a:extLst xmlns:a="http://schemas.openxmlformats.org/drawingml/2006/main">
               <a:ext uri="{FF2B5EF4-FFF2-40B4-BE49-F238E27FC236}">
-                <a16:creationId xmlns:a16="http://schemas.microsoft.com/office/drawing/2014/main" id="{5A75EFC1-072C-4D63-92DE-1B60B46CECE3}"/>
+                <a16:creationId xmlns:a16="http://schemas.microsoft.com/office/drawing/2014/main" id="{9A83816A-B0D8-4769-862F-FA9A31B11E20}"/>
               </a:ext>
             </a:extLst>
           </p:cNvPr>
@@ -6948,7 +6963,7 @@
           <p:cNvPr id="6" name="자신의 경험 하나만 떠올려 보세요. 사용 수준을 평가하는 질문이 아닙니다.">
             <a:extLst xmlns:a="http://schemas.openxmlformats.org/drawingml/2006/main">
               <a:ext uri="{FF2B5EF4-FFF2-40B4-BE49-F238E27FC236}">
-                <a16:creationId xmlns:a16="http://schemas.microsoft.com/office/drawing/2014/main" id="{E062C744-EDAB-46E6-910D-995F994AD053}"/>
+                <a16:creationId xmlns:a16="http://schemas.microsoft.com/office/drawing/2014/main" id="{B4B6DE4E-F379-4420-BA67-F0CB8185DE7A}"/>
               </a:ext>
             </a:extLst>
           </p:cNvPr>
@@ -7106,7 +7121,7 @@
           <p:cNvPr id="7" name="최근 AI에 맡긴 일 하나를 떠올려 보세요.">
             <a:extLst xmlns:a="http://schemas.openxmlformats.org/drawingml/2006/main">
               <a:ext uri="{FF2B5EF4-FFF2-40B4-BE49-F238E27FC236}">
-                <a16:creationId xmlns:a16="http://schemas.microsoft.com/office/drawing/2014/main" id="{16AD7C3C-2034-4DBE-A69F-F50DEE42DD58}"/>
+                <a16:creationId xmlns:a16="http://schemas.microsoft.com/office/drawing/2014/main" id="{284942B1-C98C-43D3-B325-78535F9D8736}"/>
               </a:ext>
             </a:extLst>
           </p:cNvPr>
@@ -7264,7 +7279,7 @@
           <p:cNvPr id="8" name="">
             <a:extLst xmlns:a="http://schemas.openxmlformats.org/drawingml/2006/main">
               <a:ext uri="{FF2B5EF4-FFF2-40B4-BE49-F238E27FC236}">
-                <a16:creationId xmlns:a16="http://schemas.microsoft.com/office/drawing/2014/main" id="{EEA7B434-9055-4503-808A-D3460C2CEE4E}"/>
+                <a16:creationId xmlns:a16="http://schemas.microsoft.com/office/drawing/2014/main" id="{3A6348F9-37EB-4A3E-8ACC-08C9FDC5F5F6}"/>
               </a:ext>
             </a:extLst>
           </p:cNvPr>
@@ -7274,7 +7289,7 @@
           <p:nvPr/>
         </p:nvPicPr>
         <p:blipFill>
-          <a:blip xmlns:r="http://schemas.openxmlformats.org/officeDocument/2006/relationships" xmlns:a="http://schemas.openxmlformats.org/drawingml/2006/main" r:embed="R807734244afe403d"/>
+          <a:blip xmlns:r="http://schemas.openxmlformats.org/officeDocument/2006/relationships" xmlns:a="http://schemas.openxmlformats.org/drawingml/2006/main" r:embed="Rd82d1b50a6524915"/>
           <a:stretch xmlns:a="http://schemas.openxmlformats.org/drawingml/2006/main"/>
         </p:blipFill>
         <p:spPr>
@@ -7292,7 +7307,7 @@
           <p:cNvPr id="9" name="설명 받기">
             <a:extLst xmlns:a="http://schemas.openxmlformats.org/drawingml/2006/main">
               <a:ext uri="{FF2B5EF4-FFF2-40B4-BE49-F238E27FC236}">
-                <a16:creationId xmlns:a16="http://schemas.microsoft.com/office/drawing/2014/main" id="{61B93894-E66A-4782-9E70-BEB49F6C88FE}"/>
+                <a16:creationId xmlns:a16="http://schemas.microsoft.com/office/drawing/2014/main" id="{2BD3E86E-E916-4026-BC82-F041625190D0}"/>
               </a:ext>
             </a:extLst>
           </p:cNvPr>
@@ -7450,7 +7465,7 @@
           <p:cNvPr id="10" name="조사 맡기기">
             <a:extLst xmlns:a="http://schemas.openxmlformats.org/drawingml/2006/main">
               <a:ext uri="{FF2B5EF4-FFF2-40B4-BE49-F238E27FC236}">
-                <a16:creationId xmlns:a16="http://schemas.microsoft.com/office/drawing/2014/main" id="{C9859056-90B6-4C1C-9560-8795E82A3C80}"/>
+                <a16:creationId xmlns:a16="http://schemas.microsoft.com/office/drawing/2014/main" id="{80995DB1-D372-425A-9F23-EE6E7E7807C6}"/>
               </a:ext>
             </a:extLst>
           </p:cNvPr>
@@ -7608,7 +7623,7 @@
           <p:cNvPr id="11" name="결과 확인">
             <a:extLst xmlns:a="http://schemas.openxmlformats.org/drawingml/2006/main">
               <a:ext uri="{FF2B5EF4-FFF2-40B4-BE49-F238E27FC236}">
-                <a16:creationId xmlns:a16="http://schemas.microsoft.com/office/drawing/2014/main" id="{770B1BAE-CD62-4D72-8FEC-943E2754CC5E}"/>
+                <a16:creationId xmlns:a16="http://schemas.microsoft.com/office/drawing/2014/main" id="{E6E4CB83-D8D0-41E4-8940-5A8F00F3F8D4}"/>
               </a:ext>
             </a:extLst>
           </p:cNvPr>
@@ -7766,7 +7781,7 @@
           <p:cNvPr id="12" name="Legacy module connection">
             <a:extLst xmlns:a="http://schemas.openxmlformats.org/drawingml/2006/main">
               <a:ext uri="{FF2B5EF4-FFF2-40B4-BE49-F238E27FC236}">
-                <a16:creationId xmlns:a16="http://schemas.microsoft.com/office/drawing/2014/main" id="{59ABB3C3-D662-4E31-B387-9EBF6FB50B36}"/>
+                <a16:creationId xmlns:a16="http://schemas.microsoft.com/office/drawing/2014/main" id="{DC4C5CE1-60E2-4DB2-ABC4-F21BDD0D39C4}"/>
               </a:ext>
             </a:extLst>
           </p:cNvPr>
@@ -7922,7 +7937,7 @@
     </p:spTree>
     <p:extLst>
       <p:ext uri="{BB962C8B-B14F-4D97-AF65-F5344CB8AC3E}">
-        <p14:creationId xmlns:p14="http://schemas.microsoft.com/office/powerpoint/2010/main" val="731034601"/>
+        <p14:creationId xmlns:p14="http://schemas.microsoft.com/office/powerpoint/2010/main" val="655351876"/>
       </p:ext>
     </p:extLst>
   </p:cSld>
@@ -7950,10 +7965,10 @@
       </p:grpSpPr>
       <p:sp>
         <p:nvSpPr>
-          <p:cNvPr id="12" name="ACT 0 · 내 작업에 적용할 질문">
+          <p:cNvPr id="62" name="ACT 0 · 제조 라인 검사 Task로 이어지는 질문">
             <a:extLst xmlns:a="http://schemas.openxmlformats.org/drawingml/2006/main">
               <a:ext uri="{FF2B5EF4-FFF2-40B4-BE49-F238E27FC236}">
-                <a16:creationId xmlns:a16="http://schemas.microsoft.com/office/drawing/2014/main" id="{58B01338-44B6-415D-9AEE-7B673E0D8243}"/>
+                <a16:creationId xmlns:a16="http://schemas.microsoft.com/office/drawing/2014/main" id="{43E63D0E-F149-43D4-9A92-C03C30ABEC72}"/>
               </a:ext>
             </a:extLst>
           </p:cNvPr>
@@ -8101,7 +8116,7 @@
                 <a:ea typeface="Malgun Gothic"/>
                 <a:cs typeface="Malgun Gothic"/>
               </a:rPr>
-              <a:t>ACT 0 · 내 작업에 적용할 질문</a:t>
+              <a:t>ACT 0 · 제조 라인 검사 Task로 이어지는 질문</a:t>
             </a:r>
           </a:p>
         </p:txBody>
@@ -8111,7 +8126,7 @@
           <p:cNvPr id="2" name="S10">
             <a:extLst xmlns:a="http://schemas.openxmlformats.org/drawingml/2006/main">
               <a:ext uri="{FF2B5EF4-FFF2-40B4-BE49-F238E27FC236}">
-                <a16:creationId xmlns:a16="http://schemas.microsoft.com/office/drawing/2014/main" id="{B1404B8D-2D7F-499C-8C01-DF73BD89E9A2}"/>
+                <a16:creationId xmlns:a16="http://schemas.microsoft.com/office/drawing/2014/main" id="{E673DE90-48ED-488E-BE14-B171ED82BFA4}"/>
               </a:ext>
             </a:extLst>
           </p:cNvPr>
@@ -8269,7 +8284,7 @@
           <p:cNvPr id="3" name="Repository를 보면 내가 원하는 것까지 알까?">
             <a:extLst xmlns:a="http://schemas.openxmlformats.org/drawingml/2006/main">
               <a:ext uri="{FF2B5EF4-FFF2-40B4-BE49-F238E27FC236}">
-                <a16:creationId xmlns:a16="http://schemas.microsoft.com/office/drawing/2014/main" id="{66F50F01-5881-41C0-9481-640106B3BAFB}"/>
+                <a16:creationId xmlns:a16="http://schemas.microsoft.com/office/drawing/2014/main" id="{B08E957C-C912-4933-B306-467BFB608543}"/>
               </a:ext>
             </a:extLst>
           </p:cNvPr>
@@ -8427,7 +8442,7 @@
           <p:cNvPr id="4" name="">
             <a:extLst xmlns:a="http://schemas.openxmlformats.org/drawingml/2006/main">
               <a:ext uri="{FF2B5EF4-FFF2-40B4-BE49-F238E27FC236}">
-                <a16:creationId xmlns:a16="http://schemas.microsoft.com/office/drawing/2014/main" id="{E54623C6-F44E-4057-96DB-14687F9AC784}"/>
+                <a16:creationId xmlns:a16="http://schemas.microsoft.com/office/drawing/2014/main" id="{1C1C6B67-ACD5-4A53-9192-98A284138397}"/>
               </a:ext>
             </a:extLst>
           </p:cNvPr>
@@ -8455,10 +8470,10 @@
       </p:sp>
       <p:sp>
         <p:nvSpPr>
-          <p:cNvPr id="5" name="함께 생각해 보기 · 교육 모델">
+          <p:cNvPr id="5" name="교육용 검사 Task 가정 · 점선은 추가 정의·연결 범위 · 실제 실행 결과 아님">
             <a:extLst xmlns:a="http://schemas.openxmlformats.org/drawingml/2006/main">
               <a:ext uri="{FF2B5EF4-FFF2-40B4-BE49-F238E27FC236}">
-                <a16:creationId xmlns:a16="http://schemas.microsoft.com/office/drawing/2014/main" id="{B0E03E03-8617-4E92-BB71-98EABBCD5F6D}"/>
+                <a16:creationId xmlns:a16="http://schemas.microsoft.com/office/drawing/2014/main" id="{C72FA2B0-33E4-4384-92A2-C73E60D7D322}"/>
               </a:ext>
             </a:extLst>
           </p:cNvPr>
@@ -8606,17 +8621,17 @@
                 <a:ea typeface="Malgun Gothic"/>
                 <a:cs typeface="Malgun Gothic"/>
               </a:rPr>
-              <a:t>함께 생각해 보기 · 교육 모델</a:t>
+              <a:t>교육용 검사 Task 가정 · 점선은 추가 정의·연결 범위 · 실제 실행 결과 아님</a:t>
             </a:r>
           </a:p>
         </p:txBody>
       </p:sp>
       <p:sp>
         <p:nvSpPr>
-          <p:cNvPr id="6" name="현재 맡기고 싶은 일을 떠올려 보세요. 질문과 경험 공유는 자발적으로 진행합니다.">
+          <p:cNvPr id="6" name="실제 저장소에는 후속 함수도 있습니다. 도식은 실제 실행 순서나 함수의 미구현 상태를 재현하지 않습니다.">
             <a:extLst xmlns:a="http://schemas.openxmlformats.org/drawingml/2006/main">
               <a:ext uri="{FF2B5EF4-FFF2-40B4-BE49-F238E27FC236}">
-                <a16:creationId xmlns:a16="http://schemas.microsoft.com/office/drawing/2014/main" id="{E4CF2F2D-3F47-4011-9C52-A1D9EB959BE5}"/>
+                <a16:creationId xmlns:a16="http://schemas.microsoft.com/office/drawing/2014/main" id="{E072576E-FCF2-41DE-84AD-160B878679A5}"/>
               </a:ext>
             </a:extLst>
           </p:cNvPr>
@@ -8764,17 +8779,17 @@
                 <a:ea typeface="Malgun Gothic"/>
                 <a:cs typeface="Malgun Gothic"/>
               </a:rPr>
-              <a:t>현재 맡기고 싶은 일을 떠올려 보세요. 질문과 경험 공유는 자발적으로 진행합니다.</a:t>
+              <a:t>실제 저장소에는 후속 함수도 있습니다. 도식은 실제 실행 순서나 함수의 미구현 상태를 재현하지 않습니다.</a:t>
             </a:r>
           </a:p>
         </p:txBody>
       </p:sp>
       <p:sp>
         <p:nvSpPr>
-          <p:cNvPr id="7" name="지금 이 저장소에&#10;어떤 일을 맡기고 싶으신가요?">
+          <p:cNvPr id="7" name="제조 라인 검사장비로 확장한다면?">
             <a:extLst xmlns:a="http://schemas.openxmlformats.org/drawingml/2006/main">
               <a:ext uri="{FF2B5EF4-FFF2-40B4-BE49-F238E27FC236}">
-                <a16:creationId xmlns:a16="http://schemas.microsoft.com/office/drawing/2014/main" id="{16BF375D-1293-4BCC-A46C-77BAAEA87096}"/>
+                <a16:creationId xmlns:a16="http://schemas.microsoft.com/office/drawing/2014/main" id="{B426B943-2D29-4FA1-B92B-FD8F94133BE0}"/>
               </a:ext>
             </a:extLst>
           </p:cNvPr>
@@ -8785,8 +8800,8 @@
         </p:nvSpPr>
         <p:spPr>
           <a:xfrm xmlns:a="http://schemas.openxmlformats.org/drawingml/2006/main">
-            <a:off x="609600" y="2333625"/>
-            <a:ext cx="9620250" cy="1371600"/>
+            <a:off x="609600" y="1619250"/>
+            <a:ext cx="10972800" cy="323850"/>
           </a:xfrm>
           <a:prstGeom xmlns:a="http://schemas.openxmlformats.org/drawingml/2006/main" prst="rect">
             <a:avLst/>
@@ -8802,7 +8817,7 @@
           </a:bodyPr>
           <a:lstStyle xmlns:a="http://schemas.openxmlformats.org/drawingml/2006/main">
             <a:defPPr algn="l">
-              <a:defRPr sz="3375" b="1">
+              <a:defRPr sz="2025" b="1">
                 <a:solidFill>
                   <a:srgbClr val="17212B"/>
                 </a:solidFill>
@@ -8812,7 +8827,7 @@
               </a:defRPr>
             </a:defPPr>
             <a:lvl1pPr algn="l">
-              <a:defRPr sz="3375" b="1">
+              <a:defRPr sz="2025" b="1">
                 <a:solidFill>
                   <a:srgbClr val="17212B"/>
                 </a:solidFill>
@@ -8822,7 +8837,7 @@
               </a:defRPr>
             </a:lvl1pPr>
             <a:lvl2pPr algn="l">
-              <a:defRPr sz="3375" b="1">
+              <a:defRPr sz="2025" b="1">
                 <a:solidFill>
                   <a:srgbClr val="17212B"/>
                 </a:solidFill>
@@ -8832,7 +8847,7 @@
               </a:defRPr>
             </a:lvl2pPr>
             <a:lvl3pPr algn="l">
-              <a:defRPr sz="3375" b="1">
+              <a:defRPr sz="2025" b="1">
                 <a:solidFill>
                   <a:srgbClr val="17212B"/>
                 </a:solidFill>
@@ -8842,7 +8857,7 @@
               </a:defRPr>
             </a:lvl3pPr>
             <a:lvl4pPr algn="l">
-              <a:defRPr sz="3375" b="1">
+              <a:defRPr sz="2025" b="1">
                 <a:solidFill>
                   <a:srgbClr val="17212B"/>
                 </a:solidFill>
@@ -8852,7 +8867,7 @@
               </a:defRPr>
             </a:lvl4pPr>
             <a:lvl5pPr algn="l">
-              <a:defRPr sz="3375" b="1">
+              <a:defRPr sz="2025" b="1">
                 <a:solidFill>
                   <a:srgbClr val="17212B"/>
                 </a:solidFill>
@@ -8862,7 +8877,7 @@
               </a:defRPr>
             </a:lvl5pPr>
             <a:lvl6pPr algn="l">
-              <a:defRPr sz="3375" b="1">
+              <a:defRPr sz="2025" b="1">
                 <a:solidFill>
                   <a:srgbClr val="17212B"/>
                 </a:solidFill>
@@ -8872,7 +8887,7 @@
               </a:defRPr>
             </a:lvl6pPr>
             <a:lvl7pPr algn="l">
-              <a:defRPr sz="3375" b="1">
+              <a:defRPr sz="2025" b="1">
                 <a:solidFill>
                   <a:srgbClr val="17212B"/>
                 </a:solidFill>
@@ -8882,7 +8897,7 @@
               </a:defRPr>
             </a:lvl7pPr>
             <a:lvl8pPr algn="l">
-              <a:defRPr sz="3375" b="1">
+              <a:defRPr sz="2025" b="1">
                 <a:solidFill>
                   <a:srgbClr val="17212B"/>
                 </a:solidFill>
@@ -8892,7 +8907,7 @@
               </a:defRPr>
             </a:lvl8pPr>
             <a:lvl9pPr algn="l">
-              <a:defRPr sz="3375" b="1">
+              <a:defRPr sz="2025" b="1">
                 <a:solidFill>
                   <a:srgbClr val="17212B"/>
                 </a:solidFill>
@@ -8904,7 +8919,7 @@
           </a:lstStyle>
           <a:p xmlns:a="http://schemas.openxmlformats.org/drawingml/2006/main">
             <a:pPr algn="l">
-              <a:defRPr sz="3375" b="1">
+              <a:defRPr sz="2025" b="1">
                 <a:solidFill>
                   <a:srgbClr val="17212B"/>
                 </a:solidFill>
@@ -8914,7 +8929,7 @@
               </a:defRPr>
             </a:pPr>
             <a:r>
-              <a:rPr sz="3375" b="1">
+              <a:rPr sz="2025" b="1">
                 <a:solidFill>
                   <a:srgbClr val="17212B"/>
                 </a:solidFill>
@@ -8922,40 +8937,17 @@
                 <a:ea typeface="Malgun Gothic"/>
                 <a:cs typeface="Malgun Gothic"/>
               </a:rPr>
-              <a:t>지금 이 저장소에</a:t>
-            </a:r>
-          </a:p>
-          <a:p xmlns:a="http://schemas.openxmlformats.org/drawingml/2006/main">
-            <a:pPr algn="l">
-              <a:defRPr sz="3375" b="1">
-                <a:solidFill>
-                  <a:srgbClr val="17212B"/>
-                </a:solidFill>
-                <a:latin typeface="Malgun Gothic"/>
-                <a:ea typeface="Malgun Gothic"/>
-                <a:cs typeface="Malgun Gothic"/>
-              </a:defRPr>
-            </a:pPr>
-            <a:r>
-              <a:rPr sz="3375" b="1">
-                <a:solidFill>
-                  <a:srgbClr val="17212B"/>
-                </a:solidFill>
-                <a:latin typeface="Malgun Gothic"/>
-                <a:ea typeface="Malgun Gothic"/>
-                <a:cs typeface="Malgun Gothic"/>
-              </a:rPr>
-              <a:t>어떤 일을 맡기고 싶으신가요?</a:t>
+              <a:t>제조 라인 검사장비로 확장한다면?</a:t>
             </a:r>
           </a:p>
         </p:txBody>
       </p:sp>
       <p:sp>
         <p:nvSpPr>
-          <p:cNvPr id="8" name="?">
+          <p:cNvPr id="8" name="앞서 살펴본 기존 구현">
             <a:extLst xmlns:a="http://schemas.openxmlformats.org/drawingml/2006/main">
               <a:ext uri="{FF2B5EF4-FFF2-40B4-BE49-F238E27FC236}">
-                <a16:creationId xmlns:a16="http://schemas.microsoft.com/office/drawing/2014/main" id="{F081431A-4BB7-432B-9623-1D79B7496202}"/>
+                <a16:creationId xmlns:a16="http://schemas.microsoft.com/office/drawing/2014/main" id="{AF80D5D8-6A79-41D5-AED2-683E35F00367}"/>
               </a:ext>
             </a:extLst>
           </p:cNvPr>
@@ -8966,8 +8958,8 @@
         </p:nvSpPr>
         <p:spPr>
           <a:xfrm xmlns:a="http://schemas.openxmlformats.org/drawingml/2006/main">
-            <a:off x="10287000" y="2381250"/>
-            <a:ext cx="1238250" cy="1333500"/>
+            <a:off x="609600" y="2047875"/>
+            <a:ext cx="3505200" cy="304800"/>
           </a:xfrm>
           <a:prstGeom xmlns:a="http://schemas.openxmlformats.org/drawingml/2006/main" prst="rect">
             <a:avLst/>
@@ -8983,7 +8975,7 @@
           </a:bodyPr>
           <a:lstStyle xmlns:a="http://schemas.openxmlformats.org/drawingml/2006/main">
             <a:defPPr algn="l">
-              <a:defRPr sz="8400" b="1">
+              <a:defRPr sz="1725" b="1">
                 <a:solidFill>
                   <a:srgbClr val="0B6172"/>
                 </a:solidFill>
@@ -8993,7 +8985,7 @@
               </a:defRPr>
             </a:defPPr>
             <a:lvl1pPr algn="l">
-              <a:defRPr sz="8400" b="1">
+              <a:defRPr sz="1725" b="1">
                 <a:solidFill>
                   <a:srgbClr val="0B6172"/>
                 </a:solidFill>
@@ -9003,7 +8995,7 @@
               </a:defRPr>
             </a:lvl1pPr>
             <a:lvl2pPr algn="l">
-              <a:defRPr sz="8400" b="1">
+              <a:defRPr sz="1725" b="1">
                 <a:solidFill>
                   <a:srgbClr val="0B6172"/>
                 </a:solidFill>
@@ -9013,7 +9005,7 @@
               </a:defRPr>
             </a:lvl2pPr>
             <a:lvl3pPr algn="l">
-              <a:defRPr sz="8400" b="1">
+              <a:defRPr sz="1725" b="1">
                 <a:solidFill>
                   <a:srgbClr val="0B6172"/>
                 </a:solidFill>
@@ -9023,7 +9015,7 @@
               </a:defRPr>
             </a:lvl3pPr>
             <a:lvl4pPr algn="l">
-              <a:defRPr sz="8400" b="1">
+              <a:defRPr sz="1725" b="1">
                 <a:solidFill>
                   <a:srgbClr val="0B6172"/>
                 </a:solidFill>
@@ -9033,7 +9025,7 @@
               </a:defRPr>
             </a:lvl4pPr>
             <a:lvl5pPr algn="l">
-              <a:defRPr sz="8400" b="1">
+              <a:defRPr sz="1725" b="1">
                 <a:solidFill>
                   <a:srgbClr val="0B6172"/>
                 </a:solidFill>
@@ -9043,7 +9035,7 @@
               </a:defRPr>
             </a:lvl5pPr>
             <a:lvl6pPr algn="l">
-              <a:defRPr sz="8400" b="1">
+              <a:defRPr sz="1725" b="1">
                 <a:solidFill>
                   <a:srgbClr val="0B6172"/>
                 </a:solidFill>
@@ -9053,7 +9045,7 @@
               </a:defRPr>
             </a:lvl6pPr>
             <a:lvl7pPr algn="l">
-              <a:defRPr sz="8400" b="1">
+              <a:defRPr sz="1725" b="1">
                 <a:solidFill>
                   <a:srgbClr val="0B6172"/>
                 </a:solidFill>
@@ -9063,7 +9055,7 @@
               </a:defRPr>
             </a:lvl7pPr>
             <a:lvl8pPr algn="l">
-              <a:defRPr sz="8400" b="1">
+              <a:defRPr sz="1725" b="1">
                 <a:solidFill>
                   <a:srgbClr val="0B6172"/>
                 </a:solidFill>
@@ -9073,7 +9065,7 @@
               </a:defRPr>
             </a:lvl8pPr>
             <a:lvl9pPr algn="l">
-              <a:defRPr sz="8400" b="1">
+              <a:defRPr sz="1725" b="1">
                 <a:solidFill>
                   <a:srgbClr val="0B6172"/>
                 </a:solidFill>
@@ -9085,7 +9077,7 @@
           </a:lstStyle>
           <a:p xmlns:a="http://schemas.openxmlformats.org/drawingml/2006/main">
             <a:pPr algn="l">
-              <a:defRPr sz="8400" b="1">
+              <a:defRPr sz="1725" b="1">
                 <a:solidFill>
                   <a:srgbClr val="0B6172"/>
                 </a:solidFill>
@@ -9095,7 +9087,7 @@
               </a:defRPr>
             </a:pPr>
             <a:r>
-              <a:rPr sz="8400" b="1">
+              <a:rPr sz="1725" b="1">
                 <a:solidFill>
                   <a:srgbClr val="0B6172"/>
                 </a:solidFill>
@@ -9103,17 +9095,17 @@
                 <a:ea typeface="Malgun Gothic"/>
                 <a:cs typeface="Malgun Gothic"/>
               </a:rPr>
-              <a:t>?</a:t>
+              <a:t>앞서 살펴본 기존 구현</a:t>
             </a:r>
           </a:p>
         </p:txBody>
       </p:sp>
       <p:sp>
         <p:nvSpPr>
-          <p:cNvPr id="9" name="">
+          <p:cNvPr id="9" name="검사 흐름으로 추가 정의·연결할 범위">
             <a:extLst xmlns:a="http://schemas.openxmlformats.org/drawingml/2006/main">
               <a:ext uri="{FF2B5EF4-FFF2-40B4-BE49-F238E27FC236}">
-                <a16:creationId xmlns:a16="http://schemas.microsoft.com/office/drawing/2014/main" id="{43E8FFC6-04E4-4608-A535-A3AB805F73DE}"/>
+                <a16:creationId xmlns:a16="http://schemas.microsoft.com/office/drawing/2014/main" id="{0F088E82-8341-45A7-B536-530EC72B7B08}"/>
               </a:ext>
             </a:extLst>
           </p:cNvPr>
@@ -9124,39 +9116,8 @@
         </p:nvSpPr>
         <p:spPr>
           <a:xfrm xmlns:a="http://schemas.openxmlformats.org/drawingml/2006/main">
-            <a:off x="609600" y="4238625"/>
-            <a:ext cx="10972800" cy="0"/>
-          </a:xfrm>
-          <a:prstGeom xmlns:a="http://schemas.openxmlformats.org/drawingml/2006/main" prst="line">
-            <a:avLst/>
-          </a:prstGeom>
-          <a:noFill xmlns:a="http://schemas.openxmlformats.org/drawingml/2006/main"/>
-          <a:ln xmlns:a="http://schemas.openxmlformats.org/drawingml/2006/main" w="9525">
-            <a:solidFill>
-              <a:srgbClr val="C7D0DA"/>
-            </a:solidFill>
-            <a:prstDash val="solid"/>
-          </a:ln>
-        </p:spPr>
-      </p:sp>
-      <p:sp>
-        <p:nvSpPr>
-          <p:cNvPr id="10" name="그 원하는 결과까지&#10;코드에 적혀 있을까요?">
-            <a:extLst xmlns:a="http://schemas.openxmlformats.org/drawingml/2006/main">
-              <a:ext uri="{FF2B5EF4-FFF2-40B4-BE49-F238E27FC236}">
-                <a16:creationId xmlns:a16="http://schemas.microsoft.com/office/drawing/2014/main" id="{F2813F95-3CA3-4D01-BB45-2BDC6226CFD7}"/>
-              </a:ext>
-            </a:extLst>
-          </p:cNvPr>
-          <p:cNvSpPr>
-            <a:spLocks xmlns:a="http://schemas.openxmlformats.org/drawingml/2006/main" noGrp="1"/>
-          </p:cNvSpPr>
-          <p:nvPr/>
-        </p:nvSpPr>
-        <p:spPr>
-          <a:xfrm xmlns:a="http://schemas.openxmlformats.org/drawingml/2006/main">
-            <a:off x="609600" y="4600575"/>
-            <a:ext cx="10972800" cy="914400"/>
+            <a:off x="4343400" y="2047875"/>
+            <a:ext cx="7239000" cy="304800"/>
           </a:xfrm>
           <a:prstGeom xmlns:a="http://schemas.openxmlformats.org/drawingml/2006/main" prst="rect">
             <a:avLst/>
@@ -9172,9 +9133,9 @@
           </a:bodyPr>
           <a:lstStyle xmlns:a="http://schemas.openxmlformats.org/drawingml/2006/main">
             <a:defPPr algn="l">
-              <a:defRPr sz="2700" b="1">
-                <a:solidFill>
-                  <a:srgbClr val="0B6172"/>
+              <a:defRPr sz="1725" b="1">
+                <a:solidFill>
+                  <a:srgbClr val="805400"/>
                 </a:solidFill>
                 <a:latin typeface="Malgun Gothic"/>
                 <a:ea typeface="Malgun Gothic"/>
@@ -9182,9 +9143,9 @@
               </a:defRPr>
             </a:defPPr>
             <a:lvl1pPr algn="l">
-              <a:defRPr sz="2700" b="1">
-                <a:solidFill>
-                  <a:srgbClr val="0B6172"/>
+              <a:defRPr sz="1725" b="1">
+                <a:solidFill>
+                  <a:srgbClr val="805400"/>
                 </a:solidFill>
                 <a:latin typeface="Malgun Gothic"/>
                 <a:ea typeface="Malgun Gothic"/>
@@ -9192,9 +9153,9 @@
               </a:defRPr>
             </a:lvl1pPr>
             <a:lvl2pPr algn="l">
-              <a:defRPr sz="2700" b="1">
-                <a:solidFill>
-                  <a:srgbClr val="0B6172"/>
+              <a:defRPr sz="1725" b="1">
+                <a:solidFill>
+                  <a:srgbClr val="805400"/>
                 </a:solidFill>
                 <a:latin typeface="Malgun Gothic"/>
                 <a:ea typeface="Malgun Gothic"/>
@@ -9202,9 +9163,9 @@
               </a:defRPr>
             </a:lvl2pPr>
             <a:lvl3pPr algn="l">
-              <a:defRPr sz="2700" b="1">
-                <a:solidFill>
-                  <a:srgbClr val="0B6172"/>
+              <a:defRPr sz="1725" b="1">
+                <a:solidFill>
+                  <a:srgbClr val="805400"/>
                 </a:solidFill>
                 <a:latin typeface="Malgun Gothic"/>
                 <a:ea typeface="Malgun Gothic"/>
@@ -9212,9 +9173,9 @@
               </a:defRPr>
             </a:lvl3pPr>
             <a:lvl4pPr algn="l">
-              <a:defRPr sz="2700" b="1">
-                <a:solidFill>
-                  <a:srgbClr val="0B6172"/>
+              <a:defRPr sz="1725" b="1">
+                <a:solidFill>
+                  <a:srgbClr val="805400"/>
                 </a:solidFill>
                 <a:latin typeface="Malgun Gothic"/>
                 <a:ea typeface="Malgun Gothic"/>
@@ -9222,9 +9183,9 @@
               </a:defRPr>
             </a:lvl4pPr>
             <a:lvl5pPr algn="l">
-              <a:defRPr sz="2700" b="1">
-                <a:solidFill>
-                  <a:srgbClr val="0B6172"/>
+              <a:defRPr sz="1725" b="1">
+                <a:solidFill>
+                  <a:srgbClr val="805400"/>
                 </a:solidFill>
                 <a:latin typeface="Malgun Gothic"/>
                 <a:ea typeface="Malgun Gothic"/>
@@ -9232,9 +9193,9 @@
               </a:defRPr>
             </a:lvl5pPr>
             <a:lvl6pPr algn="l">
-              <a:defRPr sz="2700" b="1">
-                <a:solidFill>
-                  <a:srgbClr val="0B6172"/>
+              <a:defRPr sz="1725" b="1">
+                <a:solidFill>
+                  <a:srgbClr val="805400"/>
                 </a:solidFill>
                 <a:latin typeface="Malgun Gothic"/>
                 <a:ea typeface="Malgun Gothic"/>
@@ -9242,9 +9203,9 @@
               </a:defRPr>
             </a:lvl6pPr>
             <a:lvl7pPr algn="l">
-              <a:defRPr sz="2700" b="1">
-                <a:solidFill>
-                  <a:srgbClr val="0B6172"/>
+              <a:defRPr sz="1725" b="1">
+                <a:solidFill>
+                  <a:srgbClr val="805400"/>
                 </a:solidFill>
                 <a:latin typeface="Malgun Gothic"/>
                 <a:ea typeface="Malgun Gothic"/>
@@ -9252,9 +9213,9 @@
               </a:defRPr>
             </a:lvl7pPr>
             <a:lvl8pPr algn="l">
-              <a:defRPr sz="2700" b="1">
-                <a:solidFill>
-                  <a:srgbClr val="0B6172"/>
+              <a:defRPr sz="1725" b="1">
+                <a:solidFill>
+                  <a:srgbClr val="805400"/>
                 </a:solidFill>
                 <a:latin typeface="Malgun Gothic"/>
                 <a:ea typeface="Malgun Gothic"/>
@@ -9262,9 +9223,9 @@
               </a:defRPr>
             </a:lvl8pPr>
             <a:lvl9pPr algn="l">
-              <a:defRPr sz="2700" b="1">
-                <a:solidFill>
-                  <a:srgbClr val="0B6172"/>
+              <a:defRPr sz="1725" b="1">
+                <a:solidFill>
+                  <a:srgbClr val="805400"/>
                 </a:solidFill>
                 <a:latin typeface="Malgun Gothic"/>
                 <a:ea typeface="Malgun Gothic"/>
@@ -9274,9 +9235,9 @@
           </a:lstStyle>
           <a:p xmlns:a="http://schemas.openxmlformats.org/drawingml/2006/main">
             <a:pPr algn="l">
-              <a:defRPr sz="2700" b="1">
-                <a:solidFill>
-                  <a:srgbClr val="0B6172"/>
+              <a:defRPr sz="1725" b="1">
+                <a:solidFill>
+                  <a:srgbClr val="805400"/>
                 </a:solidFill>
                 <a:latin typeface="Malgun Gothic"/>
                 <a:ea typeface="Malgun Gothic"/>
@@ -9284,48 +9245,3515 @@
               </a:defRPr>
             </a:pPr>
             <a:r>
-              <a:rPr sz="2700" b="1">
-                <a:solidFill>
-                  <a:srgbClr val="0B6172"/>
+              <a:rPr sz="1725" b="1">
+                <a:solidFill>
+                  <a:srgbClr val="805400"/>
                 </a:solidFill>
                 <a:latin typeface="Malgun Gothic"/>
                 <a:ea typeface="Malgun Gothic"/>
                 <a:cs typeface="Malgun Gothic"/>
               </a:rPr>
-              <a:t>그 원하는 결과까지</a:t>
-            </a:r>
-          </a:p>
-          <a:p xmlns:a="http://schemas.openxmlformats.org/drawingml/2006/main">
-            <a:pPr algn="l">
-              <a:defRPr sz="2700" b="1">
-                <a:solidFill>
-                  <a:srgbClr val="0B6172"/>
-                </a:solidFill>
-                <a:latin typeface="Malgun Gothic"/>
-                <a:ea typeface="Malgun Gothic"/>
-                <a:cs typeface="Malgun Gothic"/>
-              </a:defRPr>
-            </a:pPr>
-            <a:r>
-              <a:rPr sz="2700" b="1">
-                <a:solidFill>
-                  <a:srgbClr val="0B6172"/>
-                </a:solidFill>
-                <a:latin typeface="Malgun Gothic"/>
-                <a:ea typeface="Malgun Gothic"/>
-                <a:cs typeface="Malgun Gothic"/>
-              </a:rPr>
-              <a:t>코드에 적혀 있을까요?</a:t>
+              <a:t>검사 흐름으로 추가 정의·연결할 범위</a:t>
             </a:r>
           </a:p>
         </p:txBody>
       </p:sp>
       <p:sp>
         <p:nvSpPr>
-          <p:cNvPr id="11" name="Legacy module connection">
+          <p:cNvPr id="10" name="">
             <a:extLst xmlns:a="http://schemas.openxmlformats.org/drawingml/2006/main">
               <a:ext uri="{FF2B5EF4-FFF2-40B4-BE49-F238E27FC236}">
-                <a16:creationId xmlns:a16="http://schemas.microsoft.com/office/drawing/2014/main" id="{85AA3855-2414-4E49-BD78-9E622E689566}"/>
+                <a16:creationId xmlns:a16="http://schemas.microsoft.com/office/drawing/2014/main" id="{B08BE84A-FAB8-4DF4-B07D-76A95512987C}"/>
+              </a:ext>
+            </a:extLst>
+          </p:cNvPr>
+          <p:cNvSpPr>
+            <a:spLocks xmlns:a="http://schemas.openxmlformats.org/drawingml/2006/main" noGrp="1"/>
+          </p:cNvSpPr>
+          <p:nvPr/>
+        </p:nvSpPr>
+        <p:spPr>
+          <a:xfrm xmlns:a="http://schemas.openxmlformats.org/drawingml/2006/main">
+            <a:off x="609600" y="2457450"/>
+            <a:ext cx="1638300" cy="1790700"/>
+          </a:xfrm>
+          <a:prstGeom xmlns:a="http://schemas.openxmlformats.org/drawingml/2006/main" prst="rect">
+            <a:avLst/>
+          </a:prstGeom>
+          <a:solidFill xmlns:a="http://schemas.openxmlformats.org/drawingml/2006/main">
+            <a:srgbClr val="F4F6F8"/>
+          </a:solidFill>
+          <a:ln xmlns:a="http://schemas.openxmlformats.org/drawingml/2006/main" w="14288">
+            <a:solidFill>
+              <a:srgbClr val="C7D0DA"/>
+            </a:solidFill>
+            <a:prstDash val="solid"/>
+          </a:ln>
+        </p:spPr>
+      </p:sp>
+      <p:sp>
+        <p:nvSpPr>
+          <p:cNvPr id="11" name="촬영 이미지">
+            <a:extLst xmlns:a="http://schemas.openxmlformats.org/drawingml/2006/main">
+              <a:ext uri="{FF2B5EF4-FFF2-40B4-BE49-F238E27FC236}">
+                <a16:creationId xmlns:a16="http://schemas.microsoft.com/office/drawing/2014/main" id="{B14C043A-BAA2-46D9-9EAE-2FB0511760D6}"/>
+              </a:ext>
+            </a:extLst>
+          </p:cNvPr>
+          <p:cNvSpPr>
+            <a:spLocks xmlns:a="http://schemas.openxmlformats.org/drawingml/2006/main" noGrp="1"/>
+          </p:cNvSpPr>
+          <p:nvPr/>
+        </p:nvSpPr>
+        <p:spPr>
+          <a:xfrm xmlns:a="http://schemas.openxmlformats.org/drawingml/2006/main">
+            <a:off x="685800" y="3648075"/>
+            <a:ext cx="1485900" cy="323850"/>
+          </a:xfrm>
+          <a:prstGeom xmlns:a="http://schemas.openxmlformats.org/drawingml/2006/main" prst="rect">
+            <a:avLst/>
+          </a:prstGeom>
+          <a:noFill xmlns:a="http://schemas.openxmlformats.org/drawingml/2006/main"/>
+          <a:ln xmlns:a="http://schemas.openxmlformats.org/drawingml/2006/main" w="0">
+            <a:noFill/>
+          </a:ln>
+        </p:spPr>
+        <p:txBody>
+          <a:bodyPr xmlns:a="http://schemas.openxmlformats.org/drawingml/2006/main" wrap="none" lIns="0" tIns="0" rIns="0" bIns="0" anchor="ctr">
+            <a:noAutofit/>
+          </a:bodyPr>
+          <a:lstStyle xmlns:a="http://schemas.openxmlformats.org/drawingml/2006/main">
+            <a:defPPr algn="ctr">
+              <a:defRPr sz="1950" b="1">
+                <a:solidFill>
+                  <a:srgbClr val="17212B"/>
+                </a:solidFill>
+                <a:latin typeface="Malgun Gothic"/>
+                <a:ea typeface="Malgun Gothic"/>
+                <a:cs typeface="Malgun Gothic"/>
+              </a:defRPr>
+            </a:defPPr>
+            <a:lvl1pPr algn="ctr">
+              <a:defRPr sz="1950" b="1">
+                <a:solidFill>
+                  <a:srgbClr val="17212B"/>
+                </a:solidFill>
+                <a:latin typeface="Malgun Gothic"/>
+                <a:ea typeface="Malgun Gothic"/>
+                <a:cs typeface="Malgun Gothic"/>
+              </a:defRPr>
+            </a:lvl1pPr>
+            <a:lvl2pPr algn="ctr">
+              <a:defRPr sz="1950" b="1">
+                <a:solidFill>
+                  <a:srgbClr val="17212B"/>
+                </a:solidFill>
+                <a:latin typeface="Malgun Gothic"/>
+                <a:ea typeface="Malgun Gothic"/>
+                <a:cs typeface="Malgun Gothic"/>
+              </a:defRPr>
+            </a:lvl2pPr>
+            <a:lvl3pPr algn="ctr">
+              <a:defRPr sz="1950" b="1">
+                <a:solidFill>
+                  <a:srgbClr val="17212B"/>
+                </a:solidFill>
+                <a:latin typeface="Malgun Gothic"/>
+                <a:ea typeface="Malgun Gothic"/>
+                <a:cs typeface="Malgun Gothic"/>
+              </a:defRPr>
+            </a:lvl3pPr>
+            <a:lvl4pPr algn="ctr">
+              <a:defRPr sz="1950" b="1">
+                <a:solidFill>
+                  <a:srgbClr val="17212B"/>
+                </a:solidFill>
+                <a:latin typeface="Malgun Gothic"/>
+                <a:ea typeface="Malgun Gothic"/>
+                <a:cs typeface="Malgun Gothic"/>
+              </a:defRPr>
+            </a:lvl4pPr>
+            <a:lvl5pPr algn="ctr">
+              <a:defRPr sz="1950" b="1">
+                <a:solidFill>
+                  <a:srgbClr val="17212B"/>
+                </a:solidFill>
+                <a:latin typeface="Malgun Gothic"/>
+                <a:ea typeface="Malgun Gothic"/>
+                <a:cs typeface="Malgun Gothic"/>
+              </a:defRPr>
+            </a:lvl5pPr>
+            <a:lvl6pPr algn="ctr">
+              <a:defRPr sz="1950" b="1">
+                <a:solidFill>
+                  <a:srgbClr val="17212B"/>
+                </a:solidFill>
+                <a:latin typeface="Malgun Gothic"/>
+                <a:ea typeface="Malgun Gothic"/>
+                <a:cs typeface="Malgun Gothic"/>
+              </a:defRPr>
+            </a:lvl6pPr>
+            <a:lvl7pPr algn="ctr">
+              <a:defRPr sz="1950" b="1">
+                <a:solidFill>
+                  <a:srgbClr val="17212B"/>
+                </a:solidFill>
+                <a:latin typeface="Malgun Gothic"/>
+                <a:ea typeface="Malgun Gothic"/>
+                <a:cs typeface="Malgun Gothic"/>
+              </a:defRPr>
+            </a:lvl7pPr>
+            <a:lvl8pPr algn="ctr">
+              <a:defRPr sz="1950" b="1">
+                <a:solidFill>
+                  <a:srgbClr val="17212B"/>
+                </a:solidFill>
+                <a:latin typeface="Malgun Gothic"/>
+                <a:ea typeface="Malgun Gothic"/>
+                <a:cs typeface="Malgun Gothic"/>
+              </a:defRPr>
+            </a:lvl8pPr>
+            <a:lvl9pPr algn="ctr">
+              <a:defRPr sz="1950" b="1">
+                <a:solidFill>
+                  <a:srgbClr val="17212B"/>
+                </a:solidFill>
+                <a:latin typeface="Malgun Gothic"/>
+                <a:ea typeface="Malgun Gothic"/>
+                <a:cs typeface="Malgun Gothic"/>
+              </a:defRPr>
+            </a:lvl9pPr>
+          </a:lstStyle>
+          <a:p xmlns:a="http://schemas.openxmlformats.org/drawingml/2006/main">
+            <a:pPr algn="ctr">
+              <a:defRPr sz="1950" b="1">
+                <a:solidFill>
+                  <a:srgbClr val="17212B"/>
+                </a:solidFill>
+                <a:latin typeface="Malgun Gothic"/>
+                <a:ea typeface="Malgun Gothic"/>
+                <a:cs typeface="Malgun Gothic"/>
+              </a:defRPr>
+            </a:pPr>
+            <a:r>
+              <a:rPr sz="1950" b="1">
+                <a:solidFill>
+                  <a:srgbClr val="17212B"/>
+                </a:solidFill>
+                <a:latin typeface="Malgun Gothic"/>
+                <a:ea typeface="Malgun Gothic"/>
+                <a:cs typeface="Malgun Gothic"/>
+              </a:rPr>
+              <a:t>촬영 이미지</a:t>
+            </a:r>
+          </a:p>
+        </p:txBody>
+      </p:sp>
+      <p:sp>
+        <p:nvSpPr>
+          <p:cNvPr id="12" name="Input">
+            <a:extLst xmlns:a="http://schemas.openxmlformats.org/drawingml/2006/main">
+              <a:ext uri="{FF2B5EF4-FFF2-40B4-BE49-F238E27FC236}">
+                <a16:creationId xmlns:a16="http://schemas.microsoft.com/office/drawing/2014/main" id="{E4823BDC-E3B0-4FAB-B9E6-7D526F6F71F3}"/>
+              </a:ext>
+            </a:extLst>
+          </p:cNvPr>
+          <p:cNvSpPr>
+            <a:spLocks xmlns:a="http://schemas.openxmlformats.org/drawingml/2006/main" noGrp="1"/>
+          </p:cNvSpPr>
+          <p:nvPr/>
+        </p:nvSpPr>
+        <p:spPr>
+          <a:xfrm xmlns:a="http://schemas.openxmlformats.org/drawingml/2006/main">
+            <a:off x="657225" y="3990975"/>
+            <a:ext cx="1543050" cy="219075"/>
+          </a:xfrm>
+          <a:prstGeom xmlns:a="http://schemas.openxmlformats.org/drawingml/2006/main" prst="rect">
+            <a:avLst/>
+          </a:prstGeom>
+          <a:noFill xmlns:a="http://schemas.openxmlformats.org/drawingml/2006/main"/>
+          <a:ln xmlns:a="http://schemas.openxmlformats.org/drawingml/2006/main" w="0">
+            <a:noFill/>
+          </a:ln>
+        </p:spPr>
+        <p:txBody>
+          <a:bodyPr xmlns:a="http://schemas.openxmlformats.org/drawingml/2006/main" wrap="none" lIns="0" tIns="0" rIns="0" bIns="0" anchor="ctr">
+            <a:noAutofit/>
+          </a:bodyPr>
+          <a:lstStyle xmlns:a="http://schemas.openxmlformats.org/drawingml/2006/main">
+            <a:defPPr algn="ctr">
+              <a:defRPr sz="1500" b="0">
+                <a:solidFill>
+                  <a:srgbClr val="0B6172"/>
+                </a:solidFill>
+                <a:latin typeface="Malgun Gothic"/>
+                <a:ea typeface="Malgun Gothic"/>
+                <a:cs typeface="Malgun Gothic"/>
+              </a:defRPr>
+            </a:defPPr>
+            <a:lvl1pPr algn="ctr">
+              <a:defRPr sz="1500" b="0">
+                <a:solidFill>
+                  <a:srgbClr val="0B6172"/>
+                </a:solidFill>
+                <a:latin typeface="Malgun Gothic"/>
+                <a:ea typeface="Malgun Gothic"/>
+                <a:cs typeface="Malgun Gothic"/>
+              </a:defRPr>
+            </a:lvl1pPr>
+            <a:lvl2pPr algn="ctr">
+              <a:defRPr sz="1500" b="0">
+                <a:solidFill>
+                  <a:srgbClr val="0B6172"/>
+                </a:solidFill>
+                <a:latin typeface="Malgun Gothic"/>
+                <a:ea typeface="Malgun Gothic"/>
+                <a:cs typeface="Malgun Gothic"/>
+              </a:defRPr>
+            </a:lvl2pPr>
+            <a:lvl3pPr algn="ctr">
+              <a:defRPr sz="1500" b="0">
+                <a:solidFill>
+                  <a:srgbClr val="0B6172"/>
+                </a:solidFill>
+                <a:latin typeface="Malgun Gothic"/>
+                <a:ea typeface="Malgun Gothic"/>
+                <a:cs typeface="Malgun Gothic"/>
+              </a:defRPr>
+            </a:lvl3pPr>
+            <a:lvl4pPr algn="ctr">
+              <a:defRPr sz="1500" b="0">
+                <a:solidFill>
+                  <a:srgbClr val="0B6172"/>
+                </a:solidFill>
+                <a:latin typeface="Malgun Gothic"/>
+                <a:ea typeface="Malgun Gothic"/>
+                <a:cs typeface="Malgun Gothic"/>
+              </a:defRPr>
+            </a:lvl4pPr>
+            <a:lvl5pPr algn="ctr">
+              <a:defRPr sz="1500" b="0">
+                <a:solidFill>
+                  <a:srgbClr val="0B6172"/>
+                </a:solidFill>
+                <a:latin typeface="Malgun Gothic"/>
+                <a:ea typeface="Malgun Gothic"/>
+                <a:cs typeface="Malgun Gothic"/>
+              </a:defRPr>
+            </a:lvl5pPr>
+            <a:lvl6pPr algn="ctr">
+              <a:defRPr sz="1500" b="0">
+                <a:solidFill>
+                  <a:srgbClr val="0B6172"/>
+                </a:solidFill>
+                <a:latin typeface="Malgun Gothic"/>
+                <a:ea typeface="Malgun Gothic"/>
+                <a:cs typeface="Malgun Gothic"/>
+              </a:defRPr>
+            </a:lvl6pPr>
+            <a:lvl7pPr algn="ctr">
+              <a:defRPr sz="1500" b="0">
+                <a:solidFill>
+                  <a:srgbClr val="0B6172"/>
+                </a:solidFill>
+                <a:latin typeface="Malgun Gothic"/>
+                <a:ea typeface="Malgun Gothic"/>
+                <a:cs typeface="Malgun Gothic"/>
+              </a:defRPr>
+            </a:lvl7pPr>
+            <a:lvl8pPr algn="ctr">
+              <a:defRPr sz="1500" b="0">
+                <a:solidFill>
+                  <a:srgbClr val="0B6172"/>
+                </a:solidFill>
+                <a:latin typeface="Malgun Gothic"/>
+                <a:ea typeface="Malgun Gothic"/>
+                <a:cs typeface="Malgun Gothic"/>
+              </a:defRPr>
+            </a:lvl8pPr>
+            <a:lvl9pPr algn="ctr">
+              <a:defRPr sz="1500" b="0">
+                <a:solidFill>
+                  <a:srgbClr val="0B6172"/>
+                </a:solidFill>
+                <a:latin typeface="Malgun Gothic"/>
+                <a:ea typeface="Malgun Gothic"/>
+                <a:cs typeface="Malgun Gothic"/>
+              </a:defRPr>
+            </a:lvl9pPr>
+          </a:lstStyle>
+          <a:p xmlns:a="http://schemas.openxmlformats.org/drawingml/2006/main">
+            <a:pPr algn="ctr">
+              <a:defRPr sz="1500" b="0">
+                <a:solidFill>
+                  <a:srgbClr val="0B6172"/>
+                </a:solidFill>
+                <a:latin typeface="Malgun Gothic"/>
+                <a:ea typeface="Malgun Gothic"/>
+                <a:cs typeface="Malgun Gothic"/>
+              </a:defRPr>
+            </a:pPr>
+            <a:r>
+              <a:rPr sz="1500" b="0">
+                <a:solidFill>
+                  <a:srgbClr val="0B6172"/>
+                </a:solidFill>
+                <a:latin typeface="Malgun Gothic"/>
+                <a:ea typeface="Malgun Gothic"/>
+                <a:cs typeface="Malgun Gothic"/>
+              </a:rPr>
+              <a:t>Input</a:t>
+            </a:r>
+          </a:p>
+        </p:txBody>
+      </p:sp>
+      <p:sp>
+        <p:nvSpPr>
+          <p:cNvPr id="13" name="">
+            <a:extLst xmlns:a="http://schemas.openxmlformats.org/drawingml/2006/main">
+              <a:ext uri="{FF2B5EF4-FFF2-40B4-BE49-F238E27FC236}">
+                <a16:creationId xmlns:a16="http://schemas.microsoft.com/office/drawing/2014/main" id="{280290AA-BF1F-4504-B05F-9942B24F6F75}"/>
+              </a:ext>
+            </a:extLst>
+          </p:cNvPr>
+          <p:cNvSpPr>
+            <a:spLocks xmlns:a="http://schemas.openxmlformats.org/drawingml/2006/main" noGrp="1"/>
+          </p:cNvSpPr>
+          <p:nvPr/>
+        </p:nvSpPr>
+        <p:spPr>
+          <a:xfrm xmlns:a="http://schemas.openxmlformats.org/drawingml/2006/main">
+            <a:off x="2286000" y="3124200"/>
+            <a:ext cx="152400" cy="123825"/>
+          </a:xfrm>
+          <a:prstGeom xmlns:a="http://schemas.openxmlformats.org/drawingml/2006/main" prst="rightArrow">
+            <a:avLst/>
+          </a:prstGeom>
+          <a:solidFill xmlns:a="http://schemas.openxmlformats.org/drawingml/2006/main">
+            <a:srgbClr val="0B6172"/>
+          </a:solidFill>
+          <a:ln xmlns:a="http://schemas.openxmlformats.org/drawingml/2006/main" w="0">
+            <a:noFill/>
+          </a:ln>
+        </p:spPr>
+      </p:sp>
+      <p:sp>
+        <p:nvSpPr>
+          <p:cNvPr id="14" name="">
+            <a:extLst xmlns:a="http://schemas.openxmlformats.org/drawingml/2006/main">
+              <a:ext uri="{FF2B5EF4-FFF2-40B4-BE49-F238E27FC236}">
+                <a16:creationId xmlns:a16="http://schemas.microsoft.com/office/drawing/2014/main" id="{F5C2DDB9-51C1-4745-A5B8-DA06625BFB32}"/>
+              </a:ext>
+            </a:extLst>
+          </p:cNvPr>
+          <p:cNvSpPr>
+            <a:spLocks xmlns:a="http://schemas.openxmlformats.org/drawingml/2006/main" noGrp="1"/>
+          </p:cNvSpPr>
+          <p:nvPr/>
+        </p:nvSpPr>
+        <p:spPr>
+          <a:xfrm xmlns:a="http://schemas.openxmlformats.org/drawingml/2006/main">
+            <a:off x="2476500" y="2457450"/>
+            <a:ext cx="1638300" cy="1790700"/>
+          </a:xfrm>
+          <a:prstGeom xmlns:a="http://schemas.openxmlformats.org/drawingml/2006/main" prst="rect">
+            <a:avLst/>
+          </a:prstGeom>
+          <a:solidFill xmlns:a="http://schemas.openxmlformats.org/drawingml/2006/main">
+            <a:srgbClr val="E0EFF0"/>
+          </a:solidFill>
+          <a:ln xmlns:a="http://schemas.openxmlformats.org/drawingml/2006/main" w="14288">
+            <a:solidFill>
+              <a:srgbClr val="0B6172"/>
+            </a:solidFill>
+            <a:prstDash val="solid"/>
+          </a:ln>
+        </p:spPr>
+      </p:sp>
+      <p:sp>
+        <p:nvSpPr>
+          <p:cNvPr id="15" name="ROI crop">
+            <a:extLst xmlns:a="http://schemas.openxmlformats.org/drawingml/2006/main">
+              <a:ext uri="{FF2B5EF4-FFF2-40B4-BE49-F238E27FC236}">
+                <a16:creationId xmlns:a16="http://schemas.microsoft.com/office/drawing/2014/main" id="{C78078DB-D3E4-4DBA-9E4D-3346E9FCD8DA}"/>
+              </a:ext>
+            </a:extLst>
+          </p:cNvPr>
+          <p:cNvSpPr>
+            <a:spLocks xmlns:a="http://schemas.openxmlformats.org/drawingml/2006/main" noGrp="1"/>
+          </p:cNvSpPr>
+          <p:nvPr/>
+        </p:nvSpPr>
+        <p:spPr>
+          <a:xfrm xmlns:a="http://schemas.openxmlformats.org/drawingml/2006/main">
+            <a:off x="2552700" y="3648075"/>
+            <a:ext cx="1485900" cy="323850"/>
+          </a:xfrm>
+          <a:prstGeom xmlns:a="http://schemas.openxmlformats.org/drawingml/2006/main" prst="rect">
+            <a:avLst/>
+          </a:prstGeom>
+          <a:noFill xmlns:a="http://schemas.openxmlformats.org/drawingml/2006/main"/>
+          <a:ln xmlns:a="http://schemas.openxmlformats.org/drawingml/2006/main" w="0">
+            <a:noFill/>
+          </a:ln>
+        </p:spPr>
+        <p:txBody>
+          <a:bodyPr xmlns:a="http://schemas.openxmlformats.org/drawingml/2006/main" wrap="none" lIns="0" tIns="0" rIns="0" bIns="0" anchor="ctr">
+            <a:noAutofit/>
+          </a:bodyPr>
+          <a:lstStyle xmlns:a="http://schemas.openxmlformats.org/drawingml/2006/main">
+            <a:defPPr algn="ctr">
+              <a:defRPr sz="1950" b="1">
+                <a:solidFill>
+                  <a:srgbClr val="17212B"/>
+                </a:solidFill>
+                <a:latin typeface="Malgun Gothic"/>
+                <a:ea typeface="Malgun Gothic"/>
+                <a:cs typeface="Malgun Gothic"/>
+              </a:defRPr>
+            </a:defPPr>
+            <a:lvl1pPr algn="ctr">
+              <a:defRPr sz="1950" b="1">
+                <a:solidFill>
+                  <a:srgbClr val="17212B"/>
+                </a:solidFill>
+                <a:latin typeface="Malgun Gothic"/>
+                <a:ea typeface="Malgun Gothic"/>
+                <a:cs typeface="Malgun Gothic"/>
+              </a:defRPr>
+            </a:lvl1pPr>
+            <a:lvl2pPr algn="ctr">
+              <a:defRPr sz="1950" b="1">
+                <a:solidFill>
+                  <a:srgbClr val="17212B"/>
+                </a:solidFill>
+                <a:latin typeface="Malgun Gothic"/>
+                <a:ea typeface="Malgun Gothic"/>
+                <a:cs typeface="Malgun Gothic"/>
+              </a:defRPr>
+            </a:lvl2pPr>
+            <a:lvl3pPr algn="ctr">
+              <a:defRPr sz="1950" b="1">
+                <a:solidFill>
+                  <a:srgbClr val="17212B"/>
+                </a:solidFill>
+                <a:latin typeface="Malgun Gothic"/>
+                <a:ea typeface="Malgun Gothic"/>
+                <a:cs typeface="Malgun Gothic"/>
+              </a:defRPr>
+            </a:lvl3pPr>
+            <a:lvl4pPr algn="ctr">
+              <a:defRPr sz="1950" b="1">
+                <a:solidFill>
+                  <a:srgbClr val="17212B"/>
+                </a:solidFill>
+                <a:latin typeface="Malgun Gothic"/>
+                <a:ea typeface="Malgun Gothic"/>
+                <a:cs typeface="Malgun Gothic"/>
+              </a:defRPr>
+            </a:lvl4pPr>
+            <a:lvl5pPr algn="ctr">
+              <a:defRPr sz="1950" b="1">
+                <a:solidFill>
+                  <a:srgbClr val="17212B"/>
+                </a:solidFill>
+                <a:latin typeface="Malgun Gothic"/>
+                <a:ea typeface="Malgun Gothic"/>
+                <a:cs typeface="Malgun Gothic"/>
+              </a:defRPr>
+            </a:lvl5pPr>
+            <a:lvl6pPr algn="ctr">
+              <a:defRPr sz="1950" b="1">
+                <a:solidFill>
+                  <a:srgbClr val="17212B"/>
+                </a:solidFill>
+                <a:latin typeface="Malgun Gothic"/>
+                <a:ea typeface="Malgun Gothic"/>
+                <a:cs typeface="Malgun Gothic"/>
+              </a:defRPr>
+            </a:lvl6pPr>
+            <a:lvl7pPr algn="ctr">
+              <a:defRPr sz="1950" b="1">
+                <a:solidFill>
+                  <a:srgbClr val="17212B"/>
+                </a:solidFill>
+                <a:latin typeface="Malgun Gothic"/>
+                <a:ea typeface="Malgun Gothic"/>
+                <a:cs typeface="Malgun Gothic"/>
+              </a:defRPr>
+            </a:lvl7pPr>
+            <a:lvl8pPr algn="ctr">
+              <a:defRPr sz="1950" b="1">
+                <a:solidFill>
+                  <a:srgbClr val="17212B"/>
+                </a:solidFill>
+                <a:latin typeface="Malgun Gothic"/>
+                <a:ea typeface="Malgun Gothic"/>
+                <a:cs typeface="Malgun Gothic"/>
+              </a:defRPr>
+            </a:lvl8pPr>
+            <a:lvl9pPr algn="ctr">
+              <a:defRPr sz="1950" b="1">
+                <a:solidFill>
+                  <a:srgbClr val="17212B"/>
+                </a:solidFill>
+                <a:latin typeface="Malgun Gothic"/>
+                <a:ea typeface="Malgun Gothic"/>
+                <a:cs typeface="Malgun Gothic"/>
+              </a:defRPr>
+            </a:lvl9pPr>
+          </a:lstStyle>
+          <a:p xmlns:a="http://schemas.openxmlformats.org/drawingml/2006/main">
+            <a:pPr algn="ctr">
+              <a:defRPr sz="1950" b="1">
+                <a:solidFill>
+                  <a:srgbClr val="17212B"/>
+                </a:solidFill>
+                <a:latin typeface="Malgun Gothic"/>
+                <a:ea typeface="Malgun Gothic"/>
+                <a:cs typeface="Malgun Gothic"/>
+              </a:defRPr>
+            </a:pPr>
+            <a:r>
+              <a:rPr sz="1950" b="1">
+                <a:solidFill>
+                  <a:srgbClr val="17212B"/>
+                </a:solidFill>
+                <a:latin typeface="Malgun Gothic"/>
+                <a:ea typeface="Malgun Gothic"/>
+                <a:cs typeface="Malgun Gothic"/>
+              </a:rPr>
+              <a:t>ROI crop</a:t>
+            </a:r>
+          </a:p>
+        </p:txBody>
+      </p:sp>
+      <p:sp>
+        <p:nvSpPr>
+          <p:cNvPr id="16" name="기존 구현 · 조사한 범위">
+            <a:extLst xmlns:a="http://schemas.openxmlformats.org/drawingml/2006/main">
+              <a:ext uri="{FF2B5EF4-FFF2-40B4-BE49-F238E27FC236}">
+                <a16:creationId xmlns:a16="http://schemas.microsoft.com/office/drawing/2014/main" id="{ED4F0AED-00E2-40FC-AC63-E60CA969EF4E}"/>
+              </a:ext>
+            </a:extLst>
+          </p:cNvPr>
+          <p:cNvSpPr>
+            <a:spLocks xmlns:a="http://schemas.openxmlformats.org/drawingml/2006/main" noGrp="1"/>
+          </p:cNvSpPr>
+          <p:nvPr/>
+        </p:nvSpPr>
+        <p:spPr>
+          <a:xfrm xmlns:a="http://schemas.openxmlformats.org/drawingml/2006/main">
+            <a:off x="2524125" y="3990975"/>
+            <a:ext cx="1543050" cy="219075"/>
+          </a:xfrm>
+          <a:prstGeom xmlns:a="http://schemas.openxmlformats.org/drawingml/2006/main" prst="rect">
+            <a:avLst/>
+          </a:prstGeom>
+          <a:noFill xmlns:a="http://schemas.openxmlformats.org/drawingml/2006/main"/>
+          <a:ln xmlns:a="http://schemas.openxmlformats.org/drawingml/2006/main" w="0">
+            <a:noFill/>
+          </a:ln>
+        </p:spPr>
+        <p:txBody>
+          <a:bodyPr xmlns:a="http://schemas.openxmlformats.org/drawingml/2006/main" wrap="none" lIns="0" tIns="0" rIns="0" bIns="0" anchor="ctr">
+            <a:noAutofit/>
+          </a:bodyPr>
+          <a:lstStyle xmlns:a="http://schemas.openxmlformats.org/drawingml/2006/main">
+            <a:defPPr algn="ctr">
+              <a:defRPr sz="1350" b="0">
+                <a:solidFill>
+                  <a:srgbClr val="0B6172"/>
+                </a:solidFill>
+                <a:latin typeface="Malgun Gothic"/>
+                <a:ea typeface="Malgun Gothic"/>
+                <a:cs typeface="Malgun Gothic"/>
+              </a:defRPr>
+            </a:defPPr>
+            <a:lvl1pPr algn="ctr">
+              <a:defRPr sz="1350" b="0">
+                <a:solidFill>
+                  <a:srgbClr val="0B6172"/>
+                </a:solidFill>
+                <a:latin typeface="Malgun Gothic"/>
+                <a:ea typeface="Malgun Gothic"/>
+                <a:cs typeface="Malgun Gothic"/>
+              </a:defRPr>
+            </a:lvl1pPr>
+            <a:lvl2pPr algn="ctr">
+              <a:defRPr sz="1350" b="0">
+                <a:solidFill>
+                  <a:srgbClr val="0B6172"/>
+                </a:solidFill>
+                <a:latin typeface="Malgun Gothic"/>
+                <a:ea typeface="Malgun Gothic"/>
+                <a:cs typeface="Malgun Gothic"/>
+              </a:defRPr>
+            </a:lvl2pPr>
+            <a:lvl3pPr algn="ctr">
+              <a:defRPr sz="1350" b="0">
+                <a:solidFill>
+                  <a:srgbClr val="0B6172"/>
+                </a:solidFill>
+                <a:latin typeface="Malgun Gothic"/>
+                <a:ea typeface="Malgun Gothic"/>
+                <a:cs typeface="Malgun Gothic"/>
+              </a:defRPr>
+            </a:lvl3pPr>
+            <a:lvl4pPr algn="ctr">
+              <a:defRPr sz="1350" b="0">
+                <a:solidFill>
+                  <a:srgbClr val="0B6172"/>
+                </a:solidFill>
+                <a:latin typeface="Malgun Gothic"/>
+                <a:ea typeface="Malgun Gothic"/>
+                <a:cs typeface="Malgun Gothic"/>
+              </a:defRPr>
+            </a:lvl4pPr>
+            <a:lvl5pPr algn="ctr">
+              <a:defRPr sz="1350" b="0">
+                <a:solidFill>
+                  <a:srgbClr val="0B6172"/>
+                </a:solidFill>
+                <a:latin typeface="Malgun Gothic"/>
+                <a:ea typeface="Malgun Gothic"/>
+                <a:cs typeface="Malgun Gothic"/>
+              </a:defRPr>
+            </a:lvl5pPr>
+            <a:lvl6pPr algn="ctr">
+              <a:defRPr sz="1350" b="0">
+                <a:solidFill>
+                  <a:srgbClr val="0B6172"/>
+                </a:solidFill>
+                <a:latin typeface="Malgun Gothic"/>
+                <a:ea typeface="Malgun Gothic"/>
+                <a:cs typeface="Malgun Gothic"/>
+              </a:defRPr>
+            </a:lvl6pPr>
+            <a:lvl7pPr algn="ctr">
+              <a:defRPr sz="1350" b="0">
+                <a:solidFill>
+                  <a:srgbClr val="0B6172"/>
+                </a:solidFill>
+                <a:latin typeface="Malgun Gothic"/>
+                <a:ea typeface="Malgun Gothic"/>
+                <a:cs typeface="Malgun Gothic"/>
+              </a:defRPr>
+            </a:lvl7pPr>
+            <a:lvl8pPr algn="ctr">
+              <a:defRPr sz="1350" b="0">
+                <a:solidFill>
+                  <a:srgbClr val="0B6172"/>
+                </a:solidFill>
+                <a:latin typeface="Malgun Gothic"/>
+                <a:ea typeface="Malgun Gothic"/>
+                <a:cs typeface="Malgun Gothic"/>
+              </a:defRPr>
+            </a:lvl8pPr>
+            <a:lvl9pPr algn="ctr">
+              <a:defRPr sz="1350" b="0">
+                <a:solidFill>
+                  <a:srgbClr val="0B6172"/>
+                </a:solidFill>
+                <a:latin typeface="Malgun Gothic"/>
+                <a:ea typeface="Malgun Gothic"/>
+                <a:cs typeface="Malgun Gothic"/>
+              </a:defRPr>
+            </a:lvl9pPr>
+          </a:lstStyle>
+          <a:p xmlns:a="http://schemas.openxmlformats.org/drawingml/2006/main">
+            <a:pPr algn="ctr">
+              <a:defRPr sz="1350" b="0">
+                <a:solidFill>
+                  <a:srgbClr val="0B6172"/>
+                </a:solidFill>
+                <a:latin typeface="Malgun Gothic"/>
+                <a:ea typeface="Malgun Gothic"/>
+                <a:cs typeface="Malgun Gothic"/>
+              </a:defRPr>
+            </a:pPr>
+            <a:r>
+              <a:rPr sz="1350" b="0">
+                <a:solidFill>
+                  <a:srgbClr val="0B6172"/>
+                </a:solidFill>
+                <a:latin typeface="Malgun Gothic"/>
+                <a:ea typeface="Malgun Gothic"/>
+                <a:cs typeface="Malgun Gothic"/>
+              </a:rPr>
+              <a:t>기존 구현 · 조사한 범위</a:t>
+            </a:r>
+          </a:p>
+        </p:txBody>
+      </p:sp>
+      <p:sp>
+        <p:nvSpPr>
+          <p:cNvPr id="17" name="">
+            <a:extLst xmlns:a="http://schemas.openxmlformats.org/drawingml/2006/main">
+              <a:ext uri="{FF2B5EF4-FFF2-40B4-BE49-F238E27FC236}">
+                <a16:creationId xmlns:a16="http://schemas.microsoft.com/office/drawing/2014/main" id="{06ABCF5C-D2EB-4EA2-997A-6F2E32A22CCE}"/>
+              </a:ext>
+            </a:extLst>
+          </p:cNvPr>
+          <p:cNvSpPr>
+            <a:spLocks xmlns:a="http://schemas.openxmlformats.org/drawingml/2006/main" noGrp="1"/>
+          </p:cNvSpPr>
+          <p:nvPr/>
+        </p:nvSpPr>
+        <p:spPr>
+          <a:xfrm xmlns:a="http://schemas.openxmlformats.org/drawingml/2006/main">
+            <a:off x="4143375" y="3181350"/>
+            <a:ext cx="123825" cy="0"/>
+          </a:xfrm>
+          <a:prstGeom xmlns:a="http://schemas.openxmlformats.org/drawingml/2006/main" prst="line">
+            <a:avLst/>
+          </a:prstGeom>
+          <a:noFill xmlns:a="http://schemas.openxmlformats.org/drawingml/2006/main"/>
+          <a:ln xmlns:a="http://schemas.openxmlformats.org/drawingml/2006/main" w="19050">
+            <a:solidFill>
+              <a:srgbClr val="805400"/>
+            </a:solidFill>
+            <a:prstDash val="dash"/>
+          </a:ln>
+        </p:spPr>
+      </p:sp>
+      <p:sp>
+        <p:nvSpPr>
+          <p:cNvPr id="18" name="">
+            <a:extLst xmlns:a="http://schemas.openxmlformats.org/drawingml/2006/main">
+              <a:ext uri="{FF2B5EF4-FFF2-40B4-BE49-F238E27FC236}">
+                <a16:creationId xmlns:a16="http://schemas.microsoft.com/office/drawing/2014/main" id="{4AA8D995-4E32-4459-A411-8F08E1C56397}"/>
+              </a:ext>
+            </a:extLst>
+          </p:cNvPr>
+          <p:cNvSpPr>
+            <a:spLocks xmlns:a="http://schemas.openxmlformats.org/drawingml/2006/main" noGrp="1"/>
+          </p:cNvSpPr>
+          <p:nvPr/>
+        </p:nvSpPr>
+        <p:spPr>
+          <a:xfrm xmlns:a="http://schemas.openxmlformats.org/drawingml/2006/main">
+            <a:off x="4257675" y="3133725"/>
+            <a:ext cx="66675" cy="95250"/>
+          </a:xfrm>
+          <a:prstGeom xmlns:a="http://schemas.openxmlformats.org/drawingml/2006/main" prst="rightArrow">
+            <a:avLst/>
+          </a:prstGeom>
+          <a:solidFill xmlns:a="http://schemas.openxmlformats.org/drawingml/2006/main">
+            <a:srgbClr val="805400"/>
+          </a:solidFill>
+          <a:ln xmlns:a="http://schemas.openxmlformats.org/drawingml/2006/main" w="0">
+            <a:noFill/>
+          </a:ln>
+        </p:spPr>
+      </p:sp>
+      <p:sp>
+        <p:nvSpPr>
+          <p:cNvPr id="19" name="">
+            <a:extLst xmlns:a="http://schemas.openxmlformats.org/drawingml/2006/main">
+              <a:ext uri="{FF2B5EF4-FFF2-40B4-BE49-F238E27FC236}">
+                <a16:creationId xmlns:a16="http://schemas.microsoft.com/office/drawing/2014/main" id="{DE44527D-B83E-48D8-8591-7860EAD8285E}"/>
+              </a:ext>
+            </a:extLst>
+          </p:cNvPr>
+          <p:cNvSpPr>
+            <a:spLocks xmlns:a="http://schemas.openxmlformats.org/drawingml/2006/main" noGrp="1"/>
+          </p:cNvSpPr>
+          <p:nvPr/>
+        </p:nvSpPr>
+        <p:spPr>
+          <a:xfrm xmlns:a="http://schemas.openxmlformats.org/drawingml/2006/main">
+            <a:off x="4343400" y="2457450"/>
+            <a:ext cx="1638300" cy="1790700"/>
+          </a:xfrm>
+          <a:prstGeom xmlns:a="http://schemas.openxmlformats.org/drawingml/2006/main" prst="rect">
+            <a:avLst/>
+          </a:prstGeom>
+          <a:solidFill xmlns:a="http://schemas.openxmlformats.org/drawingml/2006/main">
+            <a:srgbClr val="F4F6F8"/>
+          </a:solidFill>
+          <a:ln xmlns:a="http://schemas.openxmlformats.org/drawingml/2006/main" w="19050">
+            <a:solidFill>
+              <a:srgbClr val="805400"/>
+            </a:solidFill>
+            <a:prstDash val="dash"/>
+          </a:ln>
+        </p:spPr>
+      </p:sp>
+      <p:sp>
+        <p:nvSpPr>
+          <p:cNvPr id="20" name="밝기 정규화">
+            <a:extLst xmlns:a="http://schemas.openxmlformats.org/drawingml/2006/main">
+              <a:ext uri="{FF2B5EF4-FFF2-40B4-BE49-F238E27FC236}">
+                <a16:creationId xmlns:a16="http://schemas.microsoft.com/office/drawing/2014/main" id="{9EC835B1-D3E9-4FAC-8420-06FAA14FBEBB}"/>
+              </a:ext>
+            </a:extLst>
+          </p:cNvPr>
+          <p:cNvSpPr>
+            <a:spLocks xmlns:a="http://schemas.openxmlformats.org/drawingml/2006/main" noGrp="1"/>
+          </p:cNvSpPr>
+          <p:nvPr/>
+        </p:nvSpPr>
+        <p:spPr>
+          <a:xfrm xmlns:a="http://schemas.openxmlformats.org/drawingml/2006/main">
+            <a:off x="4419600" y="3648075"/>
+            <a:ext cx="1485900" cy="323850"/>
+          </a:xfrm>
+          <a:prstGeom xmlns:a="http://schemas.openxmlformats.org/drawingml/2006/main" prst="rect">
+            <a:avLst/>
+          </a:prstGeom>
+          <a:noFill xmlns:a="http://schemas.openxmlformats.org/drawingml/2006/main"/>
+          <a:ln xmlns:a="http://schemas.openxmlformats.org/drawingml/2006/main" w="0">
+            <a:noFill/>
+          </a:ln>
+        </p:spPr>
+        <p:txBody>
+          <a:bodyPr xmlns:a="http://schemas.openxmlformats.org/drawingml/2006/main" wrap="none" lIns="0" tIns="0" rIns="0" bIns="0" anchor="ctr">
+            <a:noAutofit/>
+          </a:bodyPr>
+          <a:lstStyle xmlns:a="http://schemas.openxmlformats.org/drawingml/2006/main">
+            <a:defPPr algn="ctr">
+              <a:defRPr sz="1950" b="1">
+                <a:solidFill>
+                  <a:srgbClr val="17212B"/>
+                </a:solidFill>
+                <a:latin typeface="Malgun Gothic"/>
+                <a:ea typeface="Malgun Gothic"/>
+                <a:cs typeface="Malgun Gothic"/>
+              </a:defRPr>
+            </a:defPPr>
+            <a:lvl1pPr algn="ctr">
+              <a:defRPr sz="1950" b="1">
+                <a:solidFill>
+                  <a:srgbClr val="17212B"/>
+                </a:solidFill>
+                <a:latin typeface="Malgun Gothic"/>
+                <a:ea typeface="Malgun Gothic"/>
+                <a:cs typeface="Malgun Gothic"/>
+              </a:defRPr>
+            </a:lvl1pPr>
+            <a:lvl2pPr algn="ctr">
+              <a:defRPr sz="1950" b="1">
+                <a:solidFill>
+                  <a:srgbClr val="17212B"/>
+                </a:solidFill>
+                <a:latin typeface="Malgun Gothic"/>
+                <a:ea typeface="Malgun Gothic"/>
+                <a:cs typeface="Malgun Gothic"/>
+              </a:defRPr>
+            </a:lvl2pPr>
+            <a:lvl3pPr algn="ctr">
+              <a:defRPr sz="1950" b="1">
+                <a:solidFill>
+                  <a:srgbClr val="17212B"/>
+                </a:solidFill>
+                <a:latin typeface="Malgun Gothic"/>
+                <a:ea typeface="Malgun Gothic"/>
+                <a:cs typeface="Malgun Gothic"/>
+              </a:defRPr>
+            </a:lvl3pPr>
+            <a:lvl4pPr algn="ctr">
+              <a:defRPr sz="1950" b="1">
+                <a:solidFill>
+                  <a:srgbClr val="17212B"/>
+                </a:solidFill>
+                <a:latin typeface="Malgun Gothic"/>
+                <a:ea typeface="Malgun Gothic"/>
+                <a:cs typeface="Malgun Gothic"/>
+              </a:defRPr>
+            </a:lvl4pPr>
+            <a:lvl5pPr algn="ctr">
+              <a:defRPr sz="1950" b="1">
+                <a:solidFill>
+                  <a:srgbClr val="17212B"/>
+                </a:solidFill>
+                <a:latin typeface="Malgun Gothic"/>
+                <a:ea typeface="Malgun Gothic"/>
+                <a:cs typeface="Malgun Gothic"/>
+              </a:defRPr>
+            </a:lvl5pPr>
+            <a:lvl6pPr algn="ctr">
+              <a:defRPr sz="1950" b="1">
+                <a:solidFill>
+                  <a:srgbClr val="17212B"/>
+                </a:solidFill>
+                <a:latin typeface="Malgun Gothic"/>
+                <a:ea typeface="Malgun Gothic"/>
+                <a:cs typeface="Malgun Gothic"/>
+              </a:defRPr>
+            </a:lvl6pPr>
+            <a:lvl7pPr algn="ctr">
+              <a:defRPr sz="1950" b="1">
+                <a:solidFill>
+                  <a:srgbClr val="17212B"/>
+                </a:solidFill>
+                <a:latin typeface="Malgun Gothic"/>
+                <a:ea typeface="Malgun Gothic"/>
+                <a:cs typeface="Malgun Gothic"/>
+              </a:defRPr>
+            </a:lvl7pPr>
+            <a:lvl8pPr algn="ctr">
+              <a:defRPr sz="1950" b="1">
+                <a:solidFill>
+                  <a:srgbClr val="17212B"/>
+                </a:solidFill>
+                <a:latin typeface="Malgun Gothic"/>
+                <a:ea typeface="Malgun Gothic"/>
+                <a:cs typeface="Malgun Gothic"/>
+              </a:defRPr>
+            </a:lvl8pPr>
+            <a:lvl9pPr algn="ctr">
+              <a:defRPr sz="1950" b="1">
+                <a:solidFill>
+                  <a:srgbClr val="17212B"/>
+                </a:solidFill>
+                <a:latin typeface="Malgun Gothic"/>
+                <a:ea typeface="Malgun Gothic"/>
+                <a:cs typeface="Malgun Gothic"/>
+              </a:defRPr>
+            </a:lvl9pPr>
+          </a:lstStyle>
+          <a:p xmlns:a="http://schemas.openxmlformats.org/drawingml/2006/main">
+            <a:pPr algn="ctr">
+              <a:defRPr sz="1950" b="1">
+                <a:solidFill>
+                  <a:srgbClr val="17212B"/>
+                </a:solidFill>
+                <a:latin typeface="Malgun Gothic"/>
+                <a:ea typeface="Malgun Gothic"/>
+                <a:cs typeface="Malgun Gothic"/>
+              </a:defRPr>
+            </a:pPr>
+            <a:r>
+              <a:rPr sz="1950" b="1">
+                <a:solidFill>
+                  <a:srgbClr val="17212B"/>
+                </a:solidFill>
+                <a:latin typeface="Malgun Gothic"/>
+                <a:ea typeface="Malgun Gothic"/>
+                <a:cs typeface="Malgun Gothic"/>
+              </a:rPr>
+              <a:t>밝기 정규화</a:t>
+            </a:r>
+          </a:p>
+        </p:txBody>
+      </p:sp>
+      <p:sp>
+        <p:nvSpPr>
+          <p:cNvPr id="21" name="Normalize">
+            <a:extLst xmlns:a="http://schemas.openxmlformats.org/drawingml/2006/main">
+              <a:ext uri="{FF2B5EF4-FFF2-40B4-BE49-F238E27FC236}">
+                <a16:creationId xmlns:a16="http://schemas.microsoft.com/office/drawing/2014/main" id="{3F02C3E1-3038-4045-9BC8-4B5F48A70452}"/>
+              </a:ext>
+            </a:extLst>
+          </p:cNvPr>
+          <p:cNvSpPr>
+            <a:spLocks xmlns:a="http://schemas.openxmlformats.org/drawingml/2006/main" noGrp="1"/>
+          </p:cNvSpPr>
+          <p:nvPr/>
+        </p:nvSpPr>
+        <p:spPr>
+          <a:xfrm xmlns:a="http://schemas.openxmlformats.org/drawingml/2006/main">
+            <a:off x="4391025" y="3990975"/>
+            <a:ext cx="1543050" cy="219075"/>
+          </a:xfrm>
+          <a:prstGeom xmlns:a="http://schemas.openxmlformats.org/drawingml/2006/main" prst="rect">
+            <a:avLst/>
+          </a:prstGeom>
+          <a:noFill xmlns:a="http://schemas.openxmlformats.org/drawingml/2006/main"/>
+          <a:ln xmlns:a="http://schemas.openxmlformats.org/drawingml/2006/main" w="0">
+            <a:noFill/>
+          </a:ln>
+        </p:spPr>
+        <p:txBody>
+          <a:bodyPr xmlns:a="http://schemas.openxmlformats.org/drawingml/2006/main" wrap="none" lIns="0" tIns="0" rIns="0" bIns="0" anchor="ctr">
+            <a:noAutofit/>
+          </a:bodyPr>
+          <a:lstStyle xmlns:a="http://schemas.openxmlformats.org/drawingml/2006/main">
+            <a:defPPr algn="ctr">
+              <a:defRPr sz="1500" b="0">
+                <a:solidFill>
+                  <a:srgbClr val="4D5A68"/>
+                </a:solidFill>
+                <a:latin typeface="Malgun Gothic"/>
+                <a:ea typeface="Malgun Gothic"/>
+                <a:cs typeface="Malgun Gothic"/>
+              </a:defRPr>
+            </a:defPPr>
+            <a:lvl1pPr algn="ctr">
+              <a:defRPr sz="1500" b="0">
+                <a:solidFill>
+                  <a:srgbClr val="4D5A68"/>
+                </a:solidFill>
+                <a:latin typeface="Malgun Gothic"/>
+                <a:ea typeface="Malgun Gothic"/>
+                <a:cs typeface="Malgun Gothic"/>
+              </a:defRPr>
+            </a:lvl1pPr>
+            <a:lvl2pPr algn="ctr">
+              <a:defRPr sz="1500" b="0">
+                <a:solidFill>
+                  <a:srgbClr val="4D5A68"/>
+                </a:solidFill>
+                <a:latin typeface="Malgun Gothic"/>
+                <a:ea typeface="Malgun Gothic"/>
+                <a:cs typeface="Malgun Gothic"/>
+              </a:defRPr>
+            </a:lvl2pPr>
+            <a:lvl3pPr algn="ctr">
+              <a:defRPr sz="1500" b="0">
+                <a:solidFill>
+                  <a:srgbClr val="4D5A68"/>
+                </a:solidFill>
+                <a:latin typeface="Malgun Gothic"/>
+                <a:ea typeface="Malgun Gothic"/>
+                <a:cs typeface="Malgun Gothic"/>
+              </a:defRPr>
+            </a:lvl3pPr>
+            <a:lvl4pPr algn="ctr">
+              <a:defRPr sz="1500" b="0">
+                <a:solidFill>
+                  <a:srgbClr val="4D5A68"/>
+                </a:solidFill>
+                <a:latin typeface="Malgun Gothic"/>
+                <a:ea typeface="Malgun Gothic"/>
+                <a:cs typeface="Malgun Gothic"/>
+              </a:defRPr>
+            </a:lvl4pPr>
+            <a:lvl5pPr algn="ctr">
+              <a:defRPr sz="1500" b="0">
+                <a:solidFill>
+                  <a:srgbClr val="4D5A68"/>
+                </a:solidFill>
+                <a:latin typeface="Malgun Gothic"/>
+                <a:ea typeface="Malgun Gothic"/>
+                <a:cs typeface="Malgun Gothic"/>
+              </a:defRPr>
+            </a:lvl5pPr>
+            <a:lvl6pPr algn="ctr">
+              <a:defRPr sz="1500" b="0">
+                <a:solidFill>
+                  <a:srgbClr val="4D5A68"/>
+                </a:solidFill>
+                <a:latin typeface="Malgun Gothic"/>
+                <a:ea typeface="Malgun Gothic"/>
+                <a:cs typeface="Malgun Gothic"/>
+              </a:defRPr>
+            </a:lvl6pPr>
+            <a:lvl7pPr algn="ctr">
+              <a:defRPr sz="1500" b="0">
+                <a:solidFill>
+                  <a:srgbClr val="4D5A68"/>
+                </a:solidFill>
+                <a:latin typeface="Malgun Gothic"/>
+                <a:ea typeface="Malgun Gothic"/>
+                <a:cs typeface="Malgun Gothic"/>
+              </a:defRPr>
+            </a:lvl7pPr>
+            <a:lvl8pPr algn="ctr">
+              <a:defRPr sz="1500" b="0">
+                <a:solidFill>
+                  <a:srgbClr val="4D5A68"/>
+                </a:solidFill>
+                <a:latin typeface="Malgun Gothic"/>
+                <a:ea typeface="Malgun Gothic"/>
+                <a:cs typeface="Malgun Gothic"/>
+              </a:defRPr>
+            </a:lvl8pPr>
+            <a:lvl9pPr algn="ctr">
+              <a:defRPr sz="1500" b="0">
+                <a:solidFill>
+                  <a:srgbClr val="4D5A68"/>
+                </a:solidFill>
+                <a:latin typeface="Malgun Gothic"/>
+                <a:ea typeface="Malgun Gothic"/>
+                <a:cs typeface="Malgun Gothic"/>
+              </a:defRPr>
+            </a:lvl9pPr>
+          </a:lstStyle>
+          <a:p xmlns:a="http://schemas.openxmlformats.org/drawingml/2006/main">
+            <a:pPr algn="ctr">
+              <a:defRPr sz="1500" b="0">
+                <a:solidFill>
+                  <a:srgbClr val="4D5A68"/>
+                </a:solidFill>
+                <a:latin typeface="Malgun Gothic"/>
+                <a:ea typeface="Malgun Gothic"/>
+                <a:cs typeface="Malgun Gothic"/>
+              </a:defRPr>
+            </a:pPr>
+            <a:r>
+              <a:rPr sz="1500" b="0">
+                <a:solidFill>
+                  <a:srgbClr val="4D5A68"/>
+                </a:solidFill>
+                <a:latin typeface="Malgun Gothic"/>
+                <a:ea typeface="Malgun Gothic"/>
+                <a:cs typeface="Malgun Gothic"/>
+              </a:rPr>
+              <a:t>Normalize</a:t>
+            </a:r>
+          </a:p>
+        </p:txBody>
+      </p:sp>
+      <p:sp>
+        <p:nvSpPr>
+          <p:cNvPr id="22" name="">
+            <a:extLst xmlns:a="http://schemas.openxmlformats.org/drawingml/2006/main">
+              <a:ext uri="{FF2B5EF4-FFF2-40B4-BE49-F238E27FC236}">
+                <a16:creationId xmlns:a16="http://schemas.microsoft.com/office/drawing/2014/main" id="{4480DF54-BD58-4EB3-AAAC-AF1733C1A8C3}"/>
+              </a:ext>
+            </a:extLst>
+          </p:cNvPr>
+          <p:cNvSpPr>
+            <a:spLocks xmlns:a="http://schemas.openxmlformats.org/drawingml/2006/main" noGrp="1"/>
+          </p:cNvSpPr>
+          <p:nvPr/>
+        </p:nvSpPr>
+        <p:spPr>
+          <a:xfrm xmlns:a="http://schemas.openxmlformats.org/drawingml/2006/main">
+            <a:off x="6010275" y="3181350"/>
+            <a:ext cx="123825" cy="0"/>
+          </a:xfrm>
+          <a:prstGeom xmlns:a="http://schemas.openxmlformats.org/drawingml/2006/main" prst="line">
+            <a:avLst/>
+          </a:prstGeom>
+          <a:noFill xmlns:a="http://schemas.openxmlformats.org/drawingml/2006/main"/>
+          <a:ln xmlns:a="http://schemas.openxmlformats.org/drawingml/2006/main" w="19050">
+            <a:solidFill>
+              <a:srgbClr val="805400"/>
+            </a:solidFill>
+            <a:prstDash val="dash"/>
+          </a:ln>
+        </p:spPr>
+      </p:sp>
+      <p:sp>
+        <p:nvSpPr>
+          <p:cNvPr id="23" name="">
+            <a:extLst xmlns:a="http://schemas.openxmlformats.org/drawingml/2006/main">
+              <a:ext uri="{FF2B5EF4-FFF2-40B4-BE49-F238E27FC236}">
+                <a16:creationId xmlns:a16="http://schemas.microsoft.com/office/drawing/2014/main" id="{FC200A3B-3439-4124-BEAD-9C925CA45431}"/>
+              </a:ext>
+            </a:extLst>
+          </p:cNvPr>
+          <p:cNvSpPr>
+            <a:spLocks xmlns:a="http://schemas.openxmlformats.org/drawingml/2006/main" noGrp="1"/>
+          </p:cNvSpPr>
+          <p:nvPr/>
+        </p:nvSpPr>
+        <p:spPr>
+          <a:xfrm xmlns:a="http://schemas.openxmlformats.org/drawingml/2006/main">
+            <a:off x="6124575" y="3133725"/>
+            <a:ext cx="66675" cy="95250"/>
+          </a:xfrm>
+          <a:prstGeom xmlns:a="http://schemas.openxmlformats.org/drawingml/2006/main" prst="rightArrow">
+            <a:avLst/>
+          </a:prstGeom>
+          <a:solidFill xmlns:a="http://schemas.openxmlformats.org/drawingml/2006/main">
+            <a:srgbClr val="805400"/>
+          </a:solidFill>
+          <a:ln xmlns:a="http://schemas.openxmlformats.org/drawingml/2006/main" w="0">
+            <a:noFill/>
+          </a:ln>
+        </p:spPr>
+      </p:sp>
+      <p:sp>
+        <p:nvSpPr>
+          <p:cNvPr id="24" name="">
+            <a:extLst xmlns:a="http://schemas.openxmlformats.org/drawingml/2006/main">
+              <a:ext uri="{FF2B5EF4-FFF2-40B4-BE49-F238E27FC236}">
+                <a16:creationId xmlns:a16="http://schemas.microsoft.com/office/drawing/2014/main" id="{A1E9EEDB-FAD9-40B9-9D14-E0220905E1E9}"/>
+              </a:ext>
+            </a:extLst>
+          </p:cNvPr>
+          <p:cNvSpPr>
+            <a:spLocks xmlns:a="http://schemas.openxmlformats.org/drawingml/2006/main" noGrp="1"/>
+          </p:cNvSpPr>
+          <p:nvPr/>
+        </p:nvSpPr>
+        <p:spPr>
+          <a:xfrm xmlns:a="http://schemas.openxmlformats.org/drawingml/2006/main">
+            <a:off x="6210300" y="2457450"/>
+            <a:ext cx="1638300" cy="1790700"/>
+          </a:xfrm>
+          <a:prstGeom xmlns:a="http://schemas.openxmlformats.org/drawingml/2006/main" prst="rect">
+            <a:avLst/>
+          </a:prstGeom>
+          <a:solidFill xmlns:a="http://schemas.openxmlformats.org/drawingml/2006/main">
+            <a:srgbClr val="F4F6F8"/>
+          </a:solidFill>
+          <a:ln xmlns:a="http://schemas.openxmlformats.org/drawingml/2006/main" w="19050">
+            <a:solidFill>
+              <a:srgbClr val="805400"/>
+            </a:solidFill>
+            <a:prstDash val="dash"/>
+          </a:ln>
+        </p:spPr>
+      </p:sp>
+      <p:sp>
+        <p:nvSpPr>
+          <p:cNvPr id="25" name="크기 맞춤">
+            <a:extLst xmlns:a="http://schemas.openxmlformats.org/drawingml/2006/main">
+              <a:ext uri="{FF2B5EF4-FFF2-40B4-BE49-F238E27FC236}">
+                <a16:creationId xmlns:a16="http://schemas.microsoft.com/office/drawing/2014/main" id="{98ECF4FC-4F50-4BE0-B9C6-7AD807FF12EE}"/>
+              </a:ext>
+            </a:extLst>
+          </p:cNvPr>
+          <p:cNvSpPr>
+            <a:spLocks xmlns:a="http://schemas.openxmlformats.org/drawingml/2006/main" noGrp="1"/>
+          </p:cNvSpPr>
+          <p:nvPr/>
+        </p:nvSpPr>
+        <p:spPr>
+          <a:xfrm xmlns:a="http://schemas.openxmlformats.org/drawingml/2006/main">
+            <a:off x="6286500" y="3648075"/>
+            <a:ext cx="1485900" cy="323850"/>
+          </a:xfrm>
+          <a:prstGeom xmlns:a="http://schemas.openxmlformats.org/drawingml/2006/main" prst="rect">
+            <a:avLst/>
+          </a:prstGeom>
+          <a:noFill xmlns:a="http://schemas.openxmlformats.org/drawingml/2006/main"/>
+          <a:ln xmlns:a="http://schemas.openxmlformats.org/drawingml/2006/main" w="0">
+            <a:noFill/>
+          </a:ln>
+        </p:spPr>
+        <p:txBody>
+          <a:bodyPr xmlns:a="http://schemas.openxmlformats.org/drawingml/2006/main" wrap="none" lIns="0" tIns="0" rIns="0" bIns="0" anchor="ctr">
+            <a:noAutofit/>
+          </a:bodyPr>
+          <a:lstStyle xmlns:a="http://schemas.openxmlformats.org/drawingml/2006/main">
+            <a:defPPr algn="ctr">
+              <a:defRPr sz="1950" b="1">
+                <a:solidFill>
+                  <a:srgbClr val="17212B"/>
+                </a:solidFill>
+                <a:latin typeface="Malgun Gothic"/>
+                <a:ea typeface="Malgun Gothic"/>
+                <a:cs typeface="Malgun Gothic"/>
+              </a:defRPr>
+            </a:defPPr>
+            <a:lvl1pPr algn="ctr">
+              <a:defRPr sz="1950" b="1">
+                <a:solidFill>
+                  <a:srgbClr val="17212B"/>
+                </a:solidFill>
+                <a:latin typeface="Malgun Gothic"/>
+                <a:ea typeface="Malgun Gothic"/>
+                <a:cs typeface="Malgun Gothic"/>
+              </a:defRPr>
+            </a:lvl1pPr>
+            <a:lvl2pPr algn="ctr">
+              <a:defRPr sz="1950" b="1">
+                <a:solidFill>
+                  <a:srgbClr val="17212B"/>
+                </a:solidFill>
+                <a:latin typeface="Malgun Gothic"/>
+                <a:ea typeface="Malgun Gothic"/>
+                <a:cs typeface="Malgun Gothic"/>
+              </a:defRPr>
+            </a:lvl2pPr>
+            <a:lvl3pPr algn="ctr">
+              <a:defRPr sz="1950" b="1">
+                <a:solidFill>
+                  <a:srgbClr val="17212B"/>
+                </a:solidFill>
+                <a:latin typeface="Malgun Gothic"/>
+                <a:ea typeface="Malgun Gothic"/>
+                <a:cs typeface="Malgun Gothic"/>
+              </a:defRPr>
+            </a:lvl3pPr>
+            <a:lvl4pPr algn="ctr">
+              <a:defRPr sz="1950" b="1">
+                <a:solidFill>
+                  <a:srgbClr val="17212B"/>
+                </a:solidFill>
+                <a:latin typeface="Malgun Gothic"/>
+                <a:ea typeface="Malgun Gothic"/>
+                <a:cs typeface="Malgun Gothic"/>
+              </a:defRPr>
+            </a:lvl4pPr>
+            <a:lvl5pPr algn="ctr">
+              <a:defRPr sz="1950" b="1">
+                <a:solidFill>
+                  <a:srgbClr val="17212B"/>
+                </a:solidFill>
+                <a:latin typeface="Malgun Gothic"/>
+                <a:ea typeface="Malgun Gothic"/>
+                <a:cs typeface="Malgun Gothic"/>
+              </a:defRPr>
+            </a:lvl5pPr>
+            <a:lvl6pPr algn="ctr">
+              <a:defRPr sz="1950" b="1">
+                <a:solidFill>
+                  <a:srgbClr val="17212B"/>
+                </a:solidFill>
+                <a:latin typeface="Malgun Gothic"/>
+                <a:ea typeface="Malgun Gothic"/>
+                <a:cs typeface="Malgun Gothic"/>
+              </a:defRPr>
+            </a:lvl6pPr>
+            <a:lvl7pPr algn="ctr">
+              <a:defRPr sz="1950" b="1">
+                <a:solidFill>
+                  <a:srgbClr val="17212B"/>
+                </a:solidFill>
+                <a:latin typeface="Malgun Gothic"/>
+                <a:ea typeface="Malgun Gothic"/>
+                <a:cs typeface="Malgun Gothic"/>
+              </a:defRPr>
+            </a:lvl7pPr>
+            <a:lvl8pPr algn="ctr">
+              <a:defRPr sz="1950" b="1">
+                <a:solidFill>
+                  <a:srgbClr val="17212B"/>
+                </a:solidFill>
+                <a:latin typeface="Malgun Gothic"/>
+                <a:ea typeface="Malgun Gothic"/>
+                <a:cs typeface="Malgun Gothic"/>
+              </a:defRPr>
+            </a:lvl8pPr>
+            <a:lvl9pPr algn="ctr">
+              <a:defRPr sz="1950" b="1">
+                <a:solidFill>
+                  <a:srgbClr val="17212B"/>
+                </a:solidFill>
+                <a:latin typeface="Malgun Gothic"/>
+                <a:ea typeface="Malgun Gothic"/>
+                <a:cs typeface="Malgun Gothic"/>
+              </a:defRPr>
+            </a:lvl9pPr>
+          </a:lstStyle>
+          <a:p xmlns:a="http://schemas.openxmlformats.org/drawingml/2006/main">
+            <a:pPr algn="ctr">
+              <a:defRPr sz="1950" b="1">
+                <a:solidFill>
+                  <a:srgbClr val="17212B"/>
+                </a:solidFill>
+                <a:latin typeface="Malgun Gothic"/>
+                <a:ea typeface="Malgun Gothic"/>
+                <a:cs typeface="Malgun Gothic"/>
+              </a:defRPr>
+            </a:pPr>
+            <a:r>
+              <a:rPr sz="1950" b="1">
+                <a:solidFill>
+                  <a:srgbClr val="17212B"/>
+                </a:solidFill>
+                <a:latin typeface="Malgun Gothic"/>
+                <a:ea typeface="Malgun Gothic"/>
+                <a:cs typeface="Malgun Gothic"/>
+              </a:rPr>
+              <a:t>크기 맞춤</a:t>
+            </a:r>
+          </a:p>
+        </p:txBody>
+      </p:sp>
+      <p:sp>
+        <p:nvSpPr>
+          <p:cNvPr id="26" name="Resize">
+            <a:extLst xmlns:a="http://schemas.openxmlformats.org/drawingml/2006/main">
+              <a:ext uri="{FF2B5EF4-FFF2-40B4-BE49-F238E27FC236}">
+                <a16:creationId xmlns:a16="http://schemas.microsoft.com/office/drawing/2014/main" id="{76581C25-01E6-4B4D-9515-74B602DF5AE4}"/>
+              </a:ext>
+            </a:extLst>
+          </p:cNvPr>
+          <p:cNvSpPr>
+            <a:spLocks xmlns:a="http://schemas.openxmlformats.org/drawingml/2006/main" noGrp="1"/>
+          </p:cNvSpPr>
+          <p:nvPr/>
+        </p:nvSpPr>
+        <p:spPr>
+          <a:xfrm xmlns:a="http://schemas.openxmlformats.org/drawingml/2006/main">
+            <a:off x="6257925" y="3990975"/>
+            <a:ext cx="1543050" cy="219075"/>
+          </a:xfrm>
+          <a:prstGeom xmlns:a="http://schemas.openxmlformats.org/drawingml/2006/main" prst="rect">
+            <a:avLst/>
+          </a:prstGeom>
+          <a:noFill xmlns:a="http://schemas.openxmlformats.org/drawingml/2006/main"/>
+          <a:ln xmlns:a="http://schemas.openxmlformats.org/drawingml/2006/main" w="0">
+            <a:noFill/>
+          </a:ln>
+        </p:spPr>
+        <p:txBody>
+          <a:bodyPr xmlns:a="http://schemas.openxmlformats.org/drawingml/2006/main" wrap="none" lIns="0" tIns="0" rIns="0" bIns="0" anchor="ctr">
+            <a:noAutofit/>
+          </a:bodyPr>
+          <a:lstStyle xmlns:a="http://schemas.openxmlformats.org/drawingml/2006/main">
+            <a:defPPr algn="ctr">
+              <a:defRPr sz="1500" b="0">
+                <a:solidFill>
+                  <a:srgbClr val="4D5A68"/>
+                </a:solidFill>
+                <a:latin typeface="Malgun Gothic"/>
+                <a:ea typeface="Malgun Gothic"/>
+                <a:cs typeface="Malgun Gothic"/>
+              </a:defRPr>
+            </a:defPPr>
+            <a:lvl1pPr algn="ctr">
+              <a:defRPr sz="1500" b="0">
+                <a:solidFill>
+                  <a:srgbClr val="4D5A68"/>
+                </a:solidFill>
+                <a:latin typeface="Malgun Gothic"/>
+                <a:ea typeface="Malgun Gothic"/>
+                <a:cs typeface="Malgun Gothic"/>
+              </a:defRPr>
+            </a:lvl1pPr>
+            <a:lvl2pPr algn="ctr">
+              <a:defRPr sz="1500" b="0">
+                <a:solidFill>
+                  <a:srgbClr val="4D5A68"/>
+                </a:solidFill>
+                <a:latin typeface="Malgun Gothic"/>
+                <a:ea typeface="Malgun Gothic"/>
+                <a:cs typeface="Malgun Gothic"/>
+              </a:defRPr>
+            </a:lvl2pPr>
+            <a:lvl3pPr algn="ctr">
+              <a:defRPr sz="1500" b="0">
+                <a:solidFill>
+                  <a:srgbClr val="4D5A68"/>
+                </a:solidFill>
+                <a:latin typeface="Malgun Gothic"/>
+                <a:ea typeface="Malgun Gothic"/>
+                <a:cs typeface="Malgun Gothic"/>
+              </a:defRPr>
+            </a:lvl3pPr>
+            <a:lvl4pPr algn="ctr">
+              <a:defRPr sz="1500" b="0">
+                <a:solidFill>
+                  <a:srgbClr val="4D5A68"/>
+                </a:solidFill>
+                <a:latin typeface="Malgun Gothic"/>
+                <a:ea typeface="Malgun Gothic"/>
+                <a:cs typeface="Malgun Gothic"/>
+              </a:defRPr>
+            </a:lvl4pPr>
+            <a:lvl5pPr algn="ctr">
+              <a:defRPr sz="1500" b="0">
+                <a:solidFill>
+                  <a:srgbClr val="4D5A68"/>
+                </a:solidFill>
+                <a:latin typeface="Malgun Gothic"/>
+                <a:ea typeface="Malgun Gothic"/>
+                <a:cs typeface="Malgun Gothic"/>
+              </a:defRPr>
+            </a:lvl5pPr>
+            <a:lvl6pPr algn="ctr">
+              <a:defRPr sz="1500" b="0">
+                <a:solidFill>
+                  <a:srgbClr val="4D5A68"/>
+                </a:solidFill>
+                <a:latin typeface="Malgun Gothic"/>
+                <a:ea typeface="Malgun Gothic"/>
+                <a:cs typeface="Malgun Gothic"/>
+              </a:defRPr>
+            </a:lvl6pPr>
+            <a:lvl7pPr algn="ctr">
+              <a:defRPr sz="1500" b="0">
+                <a:solidFill>
+                  <a:srgbClr val="4D5A68"/>
+                </a:solidFill>
+                <a:latin typeface="Malgun Gothic"/>
+                <a:ea typeface="Malgun Gothic"/>
+                <a:cs typeface="Malgun Gothic"/>
+              </a:defRPr>
+            </a:lvl7pPr>
+            <a:lvl8pPr algn="ctr">
+              <a:defRPr sz="1500" b="0">
+                <a:solidFill>
+                  <a:srgbClr val="4D5A68"/>
+                </a:solidFill>
+                <a:latin typeface="Malgun Gothic"/>
+                <a:ea typeface="Malgun Gothic"/>
+                <a:cs typeface="Malgun Gothic"/>
+              </a:defRPr>
+            </a:lvl8pPr>
+            <a:lvl9pPr algn="ctr">
+              <a:defRPr sz="1500" b="0">
+                <a:solidFill>
+                  <a:srgbClr val="4D5A68"/>
+                </a:solidFill>
+                <a:latin typeface="Malgun Gothic"/>
+                <a:ea typeface="Malgun Gothic"/>
+                <a:cs typeface="Malgun Gothic"/>
+              </a:defRPr>
+            </a:lvl9pPr>
+          </a:lstStyle>
+          <a:p xmlns:a="http://schemas.openxmlformats.org/drawingml/2006/main">
+            <a:pPr algn="ctr">
+              <a:defRPr sz="1500" b="0">
+                <a:solidFill>
+                  <a:srgbClr val="4D5A68"/>
+                </a:solidFill>
+                <a:latin typeface="Malgun Gothic"/>
+                <a:ea typeface="Malgun Gothic"/>
+                <a:cs typeface="Malgun Gothic"/>
+              </a:defRPr>
+            </a:pPr>
+            <a:r>
+              <a:rPr sz="1500" b="0">
+                <a:solidFill>
+                  <a:srgbClr val="4D5A68"/>
+                </a:solidFill>
+                <a:latin typeface="Malgun Gothic"/>
+                <a:ea typeface="Malgun Gothic"/>
+                <a:cs typeface="Malgun Gothic"/>
+              </a:rPr>
+              <a:t>Resize</a:t>
+            </a:r>
+          </a:p>
+        </p:txBody>
+      </p:sp>
+      <p:sp>
+        <p:nvSpPr>
+          <p:cNvPr id="27" name="">
+            <a:extLst xmlns:a="http://schemas.openxmlformats.org/drawingml/2006/main">
+              <a:ext uri="{FF2B5EF4-FFF2-40B4-BE49-F238E27FC236}">
+                <a16:creationId xmlns:a16="http://schemas.microsoft.com/office/drawing/2014/main" id="{6DC6DD99-D521-404C-9BB8-D1F71E2FCB4E}"/>
+              </a:ext>
+            </a:extLst>
+          </p:cNvPr>
+          <p:cNvSpPr>
+            <a:spLocks xmlns:a="http://schemas.openxmlformats.org/drawingml/2006/main" noGrp="1"/>
+          </p:cNvSpPr>
+          <p:nvPr/>
+        </p:nvSpPr>
+        <p:spPr>
+          <a:xfrm xmlns:a="http://schemas.openxmlformats.org/drawingml/2006/main">
+            <a:off x="7877175" y="3181350"/>
+            <a:ext cx="123825" cy="0"/>
+          </a:xfrm>
+          <a:prstGeom xmlns:a="http://schemas.openxmlformats.org/drawingml/2006/main" prst="line">
+            <a:avLst/>
+          </a:prstGeom>
+          <a:noFill xmlns:a="http://schemas.openxmlformats.org/drawingml/2006/main"/>
+          <a:ln xmlns:a="http://schemas.openxmlformats.org/drawingml/2006/main" w="19050">
+            <a:solidFill>
+              <a:srgbClr val="805400"/>
+            </a:solidFill>
+            <a:prstDash val="dash"/>
+          </a:ln>
+        </p:spPr>
+      </p:sp>
+      <p:sp>
+        <p:nvSpPr>
+          <p:cNvPr id="28" name="">
+            <a:extLst xmlns:a="http://schemas.openxmlformats.org/drawingml/2006/main">
+              <a:ext uri="{FF2B5EF4-FFF2-40B4-BE49-F238E27FC236}">
+                <a16:creationId xmlns:a16="http://schemas.microsoft.com/office/drawing/2014/main" id="{2695DD46-58F5-4A88-B1F0-185C825F3312}"/>
+              </a:ext>
+            </a:extLst>
+          </p:cNvPr>
+          <p:cNvSpPr>
+            <a:spLocks xmlns:a="http://schemas.openxmlformats.org/drawingml/2006/main" noGrp="1"/>
+          </p:cNvSpPr>
+          <p:nvPr/>
+        </p:nvSpPr>
+        <p:spPr>
+          <a:xfrm xmlns:a="http://schemas.openxmlformats.org/drawingml/2006/main">
+            <a:off x="7991475" y="3133725"/>
+            <a:ext cx="66675" cy="95250"/>
+          </a:xfrm>
+          <a:prstGeom xmlns:a="http://schemas.openxmlformats.org/drawingml/2006/main" prst="rightArrow">
+            <a:avLst/>
+          </a:prstGeom>
+          <a:solidFill xmlns:a="http://schemas.openxmlformats.org/drawingml/2006/main">
+            <a:srgbClr val="805400"/>
+          </a:solidFill>
+          <a:ln xmlns:a="http://schemas.openxmlformats.org/drawingml/2006/main" w="0">
+            <a:noFill/>
+          </a:ln>
+        </p:spPr>
+      </p:sp>
+      <p:sp>
+        <p:nvSpPr>
+          <p:cNvPr id="29" name="">
+            <a:extLst xmlns:a="http://schemas.openxmlformats.org/drawingml/2006/main">
+              <a:ext uri="{FF2B5EF4-FFF2-40B4-BE49-F238E27FC236}">
+                <a16:creationId xmlns:a16="http://schemas.microsoft.com/office/drawing/2014/main" id="{62AE0C6D-8F40-4776-8F53-5491CA98FED4}"/>
+              </a:ext>
+            </a:extLst>
+          </p:cNvPr>
+          <p:cNvSpPr>
+            <a:spLocks xmlns:a="http://schemas.openxmlformats.org/drawingml/2006/main" noGrp="1"/>
+          </p:cNvSpPr>
+          <p:nvPr/>
+        </p:nvSpPr>
+        <p:spPr>
+          <a:xfrm xmlns:a="http://schemas.openxmlformats.org/drawingml/2006/main">
+            <a:off x="8077200" y="2457450"/>
+            <a:ext cx="1638300" cy="1790700"/>
+          </a:xfrm>
+          <a:prstGeom xmlns:a="http://schemas.openxmlformats.org/drawingml/2006/main" prst="rect">
+            <a:avLst/>
+          </a:prstGeom>
+          <a:solidFill xmlns:a="http://schemas.openxmlformats.org/drawingml/2006/main">
+            <a:srgbClr val="F4F6F8"/>
+          </a:solidFill>
+          <a:ln xmlns:a="http://schemas.openxmlformats.org/drawingml/2006/main" w="19050">
+            <a:solidFill>
+              <a:srgbClr val="805400"/>
+            </a:solidFill>
+            <a:prstDash val="dash"/>
+          </a:ln>
+        </p:spPr>
+      </p:sp>
+      <p:sp>
+        <p:nvSpPr>
+          <p:cNvPr id="30" name="통계·특징">
+            <a:extLst xmlns:a="http://schemas.openxmlformats.org/drawingml/2006/main">
+              <a:ext uri="{FF2B5EF4-FFF2-40B4-BE49-F238E27FC236}">
+                <a16:creationId xmlns:a16="http://schemas.microsoft.com/office/drawing/2014/main" id="{AFB4C3BF-7310-48FB-A71C-AF51F5BDDF63}"/>
+              </a:ext>
+            </a:extLst>
+          </p:cNvPr>
+          <p:cNvSpPr>
+            <a:spLocks xmlns:a="http://schemas.openxmlformats.org/drawingml/2006/main" noGrp="1"/>
+          </p:cNvSpPr>
+          <p:nvPr/>
+        </p:nvSpPr>
+        <p:spPr>
+          <a:xfrm xmlns:a="http://schemas.openxmlformats.org/drawingml/2006/main">
+            <a:off x="8153400" y="3648075"/>
+            <a:ext cx="1485900" cy="323850"/>
+          </a:xfrm>
+          <a:prstGeom xmlns:a="http://schemas.openxmlformats.org/drawingml/2006/main" prst="rect">
+            <a:avLst/>
+          </a:prstGeom>
+          <a:noFill xmlns:a="http://schemas.openxmlformats.org/drawingml/2006/main"/>
+          <a:ln xmlns:a="http://schemas.openxmlformats.org/drawingml/2006/main" w="0">
+            <a:noFill/>
+          </a:ln>
+        </p:spPr>
+        <p:txBody>
+          <a:bodyPr xmlns:a="http://schemas.openxmlformats.org/drawingml/2006/main" wrap="none" lIns="0" tIns="0" rIns="0" bIns="0" anchor="ctr">
+            <a:noAutofit/>
+          </a:bodyPr>
+          <a:lstStyle xmlns:a="http://schemas.openxmlformats.org/drawingml/2006/main">
+            <a:defPPr algn="ctr">
+              <a:defRPr sz="1950" b="1">
+                <a:solidFill>
+                  <a:srgbClr val="17212B"/>
+                </a:solidFill>
+                <a:latin typeface="Malgun Gothic"/>
+                <a:ea typeface="Malgun Gothic"/>
+                <a:cs typeface="Malgun Gothic"/>
+              </a:defRPr>
+            </a:defPPr>
+            <a:lvl1pPr algn="ctr">
+              <a:defRPr sz="1950" b="1">
+                <a:solidFill>
+                  <a:srgbClr val="17212B"/>
+                </a:solidFill>
+                <a:latin typeface="Malgun Gothic"/>
+                <a:ea typeface="Malgun Gothic"/>
+                <a:cs typeface="Malgun Gothic"/>
+              </a:defRPr>
+            </a:lvl1pPr>
+            <a:lvl2pPr algn="ctr">
+              <a:defRPr sz="1950" b="1">
+                <a:solidFill>
+                  <a:srgbClr val="17212B"/>
+                </a:solidFill>
+                <a:latin typeface="Malgun Gothic"/>
+                <a:ea typeface="Malgun Gothic"/>
+                <a:cs typeface="Malgun Gothic"/>
+              </a:defRPr>
+            </a:lvl2pPr>
+            <a:lvl3pPr algn="ctr">
+              <a:defRPr sz="1950" b="1">
+                <a:solidFill>
+                  <a:srgbClr val="17212B"/>
+                </a:solidFill>
+                <a:latin typeface="Malgun Gothic"/>
+                <a:ea typeface="Malgun Gothic"/>
+                <a:cs typeface="Malgun Gothic"/>
+              </a:defRPr>
+            </a:lvl3pPr>
+            <a:lvl4pPr algn="ctr">
+              <a:defRPr sz="1950" b="1">
+                <a:solidFill>
+                  <a:srgbClr val="17212B"/>
+                </a:solidFill>
+                <a:latin typeface="Malgun Gothic"/>
+                <a:ea typeface="Malgun Gothic"/>
+                <a:cs typeface="Malgun Gothic"/>
+              </a:defRPr>
+            </a:lvl4pPr>
+            <a:lvl5pPr algn="ctr">
+              <a:defRPr sz="1950" b="1">
+                <a:solidFill>
+                  <a:srgbClr val="17212B"/>
+                </a:solidFill>
+                <a:latin typeface="Malgun Gothic"/>
+                <a:ea typeface="Malgun Gothic"/>
+                <a:cs typeface="Malgun Gothic"/>
+              </a:defRPr>
+            </a:lvl5pPr>
+            <a:lvl6pPr algn="ctr">
+              <a:defRPr sz="1950" b="1">
+                <a:solidFill>
+                  <a:srgbClr val="17212B"/>
+                </a:solidFill>
+                <a:latin typeface="Malgun Gothic"/>
+                <a:ea typeface="Malgun Gothic"/>
+                <a:cs typeface="Malgun Gothic"/>
+              </a:defRPr>
+            </a:lvl6pPr>
+            <a:lvl7pPr algn="ctr">
+              <a:defRPr sz="1950" b="1">
+                <a:solidFill>
+                  <a:srgbClr val="17212B"/>
+                </a:solidFill>
+                <a:latin typeface="Malgun Gothic"/>
+                <a:ea typeface="Malgun Gothic"/>
+                <a:cs typeface="Malgun Gothic"/>
+              </a:defRPr>
+            </a:lvl7pPr>
+            <a:lvl8pPr algn="ctr">
+              <a:defRPr sz="1950" b="1">
+                <a:solidFill>
+                  <a:srgbClr val="17212B"/>
+                </a:solidFill>
+                <a:latin typeface="Malgun Gothic"/>
+                <a:ea typeface="Malgun Gothic"/>
+                <a:cs typeface="Malgun Gothic"/>
+              </a:defRPr>
+            </a:lvl8pPr>
+            <a:lvl9pPr algn="ctr">
+              <a:defRPr sz="1950" b="1">
+                <a:solidFill>
+                  <a:srgbClr val="17212B"/>
+                </a:solidFill>
+                <a:latin typeface="Malgun Gothic"/>
+                <a:ea typeface="Malgun Gothic"/>
+                <a:cs typeface="Malgun Gothic"/>
+              </a:defRPr>
+            </a:lvl9pPr>
+          </a:lstStyle>
+          <a:p xmlns:a="http://schemas.openxmlformats.org/drawingml/2006/main">
+            <a:pPr algn="ctr">
+              <a:defRPr sz="1950" b="1">
+                <a:solidFill>
+                  <a:srgbClr val="17212B"/>
+                </a:solidFill>
+                <a:latin typeface="Malgun Gothic"/>
+                <a:ea typeface="Malgun Gothic"/>
+                <a:cs typeface="Malgun Gothic"/>
+              </a:defRPr>
+            </a:pPr>
+            <a:r>
+              <a:rPr sz="1950" b="1">
+                <a:solidFill>
+                  <a:srgbClr val="17212B"/>
+                </a:solidFill>
+                <a:latin typeface="Malgun Gothic"/>
+                <a:ea typeface="Malgun Gothic"/>
+                <a:cs typeface="Malgun Gothic"/>
+              </a:rPr>
+              <a:t>통계·특징</a:t>
+            </a:r>
+          </a:p>
+        </p:txBody>
+      </p:sp>
+      <p:sp>
+        <p:nvSpPr>
+          <p:cNvPr id="31" name="Statistics">
+            <a:extLst xmlns:a="http://schemas.openxmlformats.org/drawingml/2006/main">
+              <a:ext uri="{FF2B5EF4-FFF2-40B4-BE49-F238E27FC236}">
+                <a16:creationId xmlns:a16="http://schemas.microsoft.com/office/drawing/2014/main" id="{6B057464-3354-4A8E-8221-9BEBA5154775}"/>
+              </a:ext>
+            </a:extLst>
+          </p:cNvPr>
+          <p:cNvSpPr>
+            <a:spLocks xmlns:a="http://schemas.openxmlformats.org/drawingml/2006/main" noGrp="1"/>
+          </p:cNvSpPr>
+          <p:nvPr/>
+        </p:nvSpPr>
+        <p:spPr>
+          <a:xfrm xmlns:a="http://schemas.openxmlformats.org/drawingml/2006/main">
+            <a:off x="8124825" y="3990975"/>
+            <a:ext cx="1543050" cy="219075"/>
+          </a:xfrm>
+          <a:prstGeom xmlns:a="http://schemas.openxmlformats.org/drawingml/2006/main" prst="rect">
+            <a:avLst/>
+          </a:prstGeom>
+          <a:noFill xmlns:a="http://schemas.openxmlformats.org/drawingml/2006/main"/>
+          <a:ln xmlns:a="http://schemas.openxmlformats.org/drawingml/2006/main" w="0">
+            <a:noFill/>
+          </a:ln>
+        </p:spPr>
+        <p:txBody>
+          <a:bodyPr xmlns:a="http://schemas.openxmlformats.org/drawingml/2006/main" wrap="none" lIns="0" tIns="0" rIns="0" bIns="0" anchor="ctr">
+            <a:noAutofit/>
+          </a:bodyPr>
+          <a:lstStyle xmlns:a="http://schemas.openxmlformats.org/drawingml/2006/main">
+            <a:defPPr algn="ctr">
+              <a:defRPr sz="1500" b="0">
+                <a:solidFill>
+                  <a:srgbClr val="4D5A68"/>
+                </a:solidFill>
+                <a:latin typeface="Malgun Gothic"/>
+                <a:ea typeface="Malgun Gothic"/>
+                <a:cs typeface="Malgun Gothic"/>
+              </a:defRPr>
+            </a:defPPr>
+            <a:lvl1pPr algn="ctr">
+              <a:defRPr sz="1500" b="0">
+                <a:solidFill>
+                  <a:srgbClr val="4D5A68"/>
+                </a:solidFill>
+                <a:latin typeface="Malgun Gothic"/>
+                <a:ea typeface="Malgun Gothic"/>
+                <a:cs typeface="Malgun Gothic"/>
+              </a:defRPr>
+            </a:lvl1pPr>
+            <a:lvl2pPr algn="ctr">
+              <a:defRPr sz="1500" b="0">
+                <a:solidFill>
+                  <a:srgbClr val="4D5A68"/>
+                </a:solidFill>
+                <a:latin typeface="Malgun Gothic"/>
+                <a:ea typeface="Malgun Gothic"/>
+                <a:cs typeface="Malgun Gothic"/>
+              </a:defRPr>
+            </a:lvl2pPr>
+            <a:lvl3pPr algn="ctr">
+              <a:defRPr sz="1500" b="0">
+                <a:solidFill>
+                  <a:srgbClr val="4D5A68"/>
+                </a:solidFill>
+                <a:latin typeface="Malgun Gothic"/>
+                <a:ea typeface="Malgun Gothic"/>
+                <a:cs typeface="Malgun Gothic"/>
+              </a:defRPr>
+            </a:lvl3pPr>
+            <a:lvl4pPr algn="ctr">
+              <a:defRPr sz="1500" b="0">
+                <a:solidFill>
+                  <a:srgbClr val="4D5A68"/>
+                </a:solidFill>
+                <a:latin typeface="Malgun Gothic"/>
+                <a:ea typeface="Malgun Gothic"/>
+                <a:cs typeface="Malgun Gothic"/>
+              </a:defRPr>
+            </a:lvl4pPr>
+            <a:lvl5pPr algn="ctr">
+              <a:defRPr sz="1500" b="0">
+                <a:solidFill>
+                  <a:srgbClr val="4D5A68"/>
+                </a:solidFill>
+                <a:latin typeface="Malgun Gothic"/>
+                <a:ea typeface="Malgun Gothic"/>
+                <a:cs typeface="Malgun Gothic"/>
+              </a:defRPr>
+            </a:lvl5pPr>
+            <a:lvl6pPr algn="ctr">
+              <a:defRPr sz="1500" b="0">
+                <a:solidFill>
+                  <a:srgbClr val="4D5A68"/>
+                </a:solidFill>
+                <a:latin typeface="Malgun Gothic"/>
+                <a:ea typeface="Malgun Gothic"/>
+                <a:cs typeface="Malgun Gothic"/>
+              </a:defRPr>
+            </a:lvl6pPr>
+            <a:lvl7pPr algn="ctr">
+              <a:defRPr sz="1500" b="0">
+                <a:solidFill>
+                  <a:srgbClr val="4D5A68"/>
+                </a:solidFill>
+                <a:latin typeface="Malgun Gothic"/>
+                <a:ea typeface="Malgun Gothic"/>
+                <a:cs typeface="Malgun Gothic"/>
+              </a:defRPr>
+            </a:lvl7pPr>
+            <a:lvl8pPr algn="ctr">
+              <a:defRPr sz="1500" b="0">
+                <a:solidFill>
+                  <a:srgbClr val="4D5A68"/>
+                </a:solidFill>
+                <a:latin typeface="Malgun Gothic"/>
+                <a:ea typeface="Malgun Gothic"/>
+                <a:cs typeface="Malgun Gothic"/>
+              </a:defRPr>
+            </a:lvl8pPr>
+            <a:lvl9pPr algn="ctr">
+              <a:defRPr sz="1500" b="0">
+                <a:solidFill>
+                  <a:srgbClr val="4D5A68"/>
+                </a:solidFill>
+                <a:latin typeface="Malgun Gothic"/>
+                <a:ea typeface="Malgun Gothic"/>
+                <a:cs typeface="Malgun Gothic"/>
+              </a:defRPr>
+            </a:lvl9pPr>
+          </a:lstStyle>
+          <a:p xmlns:a="http://schemas.openxmlformats.org/drawingml/2006/main">
+            <a:pPr algn="ctr">
+              <a:defRPr sz="1500" b="0">
+                <a:solidFill>
+                  <a:srgbClr val="4D5A68"/>
+                </a:solidFill>
+                <a:latin typeface="Malgun Gothic"/>
+                <a:ea typeface="Malgun Gothic"/>
+                <a:cs typeface="Malgun Gothic"/>
+              </a:defRPr>
+            </a:pPr>
+            <a:r>
+              <a:rPr sz="1500" b="0">
+                <a:solidFill>
+                  <a:srgbClr val="4D5A68"/>
+                </a:solidFill>
+                <a:latin typeface="Malgun Gothic"/>
+                <a:ea typeface="Malgun Gothic"/>
+                <a:cs typeface="Malgun Gothic"/>
+              </a:rPr>
+              <a:t>Statistics</a:t>
+            </a:r>
+          </a:p>
+        </p:txBody>
+      </p:sp>
+      <p:sp>
+        <p:nvSpPr>
+          <p:cNvPr id="32" name="">
+            <a:extLst xmlns:a="http://schemas.openxmlformats.org/drawingml/2006/main">
+              <a:ext uri="{FF2B5EF4-FFF2-40B4-BE49-F238E27FC236}">
+                <a16:creationId xmlns:a16="http://schemas.microsoft.com/office/drawing/2014/main" id="{AA62C983-F230-4E87-BD8A-CDF4024F55DF}"/>
+              </a:ext>
+            </a:extLst>
+          </p:cNvPr>
+          <p:cNvSpPr>
+            <a:spLocks xmlns:a="http://schemas.openxmlformats.org/drawingml/2006/main" noGrp="1"/>
+          </p:cNvSpPr>
+          <p:nvPr/>
+        </p:nvSpPr>
+        <p:spPr>
+          <a:xfrm xmlns:a="http://schemas.openxmlformats.org/drawingml/2006/main">
+            <a:off x="9744075" y="3181350"/>
+            <a:ext cx="123825" cy="0"/>
+          </a:xfrm>
+          <a:prstGeom xmlns:a="http://schemas.openxmlformats.org/drawingml/2006/main" prst="line">
+            <a:avLst/>
+          </a:prstGeom>
+          <a:noFill xmlns:a="http://schemas.openxmlformats.org/drawingml/2006/main"/>
+          <a:ln xmlns:a="http://schemas.openxmlformats.org/drawingml/2006/main" w="19050">
+            <a:solidFill>
+              <a:srgbClr val="805400"/>
+            </a:solidFill>
+            <a:prstDash val="dash"/>
+          </a:ln>
+        </p:spPr>
+      </p:sp>
+      <p:sp>
+        <p:nvSpPr>
+          <p:cNvPr id="33" name="">
+            <a:extLst xmlns:a="http://schemas.openxmlformats.org/drawingml/2006/main">
+              <a:ext uri="{FF2B5EF4-FFF2-40B4-BE49-F238E27FC236}">
+                <a16:creationId xmlns:a16="http://schemas.microsoft.com/office/drawing/2014/main" id="{1A5D653F-D13F-4875-9952-36F6CF0A7907}"/>
+              </a:ext>
+            </a:extLst>
+          </p:cNvPr>
+          <p:cNvSpPr>
+            <a:spLocks xmlns:a="http://schemas.openxmlformats.org/drawingml/2006/main" noGrp="1"/>
+          </p:cNvSpPr>
+          <p:nvPr/>
+        </p:nvSpPr>
+        <p:spPr>
+          <a:xfrm xmlns:a="http://schemas.openxmlformats.org/drawingml/2006/main">
+            <a:off x="9858375" y="3133725"/>
+            <a:ext cx="66675" cy="95250"/>
+          </a:xfrm>
+          <a:prstGeom xmlns:a="http://schemas.openxmlformats.org/drawingml/2006/main" prst="rightArrow">
+            <a:avLst/>
+          </a:prstGeom>
+          <a:solidFill xmlns:a="http://schemas.openxmlformats.org/drawingml/2006/main">
+            <a:srgbClr val="805400"/>
+          </a:solidFill>
+          <a:ln xmlns:a="http://schemas.openxmlformats.org/drawingml/2006/main" w="0">
+            <a:noFill/>
+          </a:ln>
+        </p:spPr>
+      </p:sp>
+      <p:sp>
+        <p:nvSpPr>
+          <p:cNvPr id="34" name="">
+            <a:extLst xmlns:a="http://schemas.openxmlformats.org/drawingml/2006/main">
+              <a:ext uri="{FF2B5EF4-FFF2-40B4-BE49-F238E27FC236}">
+                <a16:creationId xmlns:a16="http://schemas.microsoft.com/office/drawing/2014/main" id="{EAC3029F-9A7F-4E0E-8F82-F3673CDA1AC0}"/>
+              </a:ext>
+            </a:extLst>
+          </p:cNvPr>
+          <p:cNvSpPr>
+            <a:spLocks xmlns:a="http://schemas.openxmlformats.org/drawingml/2006/main" noGrp="1"/>
+          </p:cNvSpPr>
+          <p:nvPr/>
+        </p:nvSpPr>
+        <p:spPr>
+          <a:xfrm xmlns:a="http://schemas.openxmlformats.org/drawingml/2006/main">
+            <a:off x="9944100" y="2457450"/>
+            <a:ext cx="1638300" cy="1790700"/>
+          </a:xfrm>
+          <a:prstGeom xmlns:a="http://schemas.openxmlformats.org/drawingml/2006/main" prst="rect">
+            <a:avLst/>
+          </a:prstGeom>
+          <a:solidFill xmlns:a="http://schemas.openxmlformats.org/drawingml/2006/main">
+            <a:srgbClr val="F4F6F8"/>
+          </a:solidFill>
+          <a:ln xmlns:a="http://schemas.openxmlformats.org/drawingml/2006/main" w="19050">
+            <a:solidFill>
+              <a:srgbClr val="805400"/>
+            </a:solidFill>
+            <a:prstDash val="dash"/>
+          </a:ln>
+        </p:spPr>
+      </p:sp>
+      <p:sp>
+        <p:nvSpPr>
+          <p:cNvPr id="35" name="양불 판정">
+            <a:extLst xmlns:a="http://schemas.openxmlformats.org/drawingml/2006/main">
+              <a:ext uri="{FF2B5EF4-FFF2-40B4-BE49-F238E27FC236}">
+                <a16:creationId xmlns:a16="http://schemas.microsoft.com/office/drawing/2014/main" id="{F4567BEF-14C5-4A2A-80C1-39F35671782D}"/>
+              </a:ext>
+            </a:extLst>
+          </p:cNvPr>
+          <p:cNvSpPr>
+            <a:spLocks xmlns:a="http://schemas.openxmlformats.org/drawingml/2006/main" noGrp="1"/>
+          </p:cNvSpPr>
+          <p:nvPr/>
+        </p:nvSpPr>
+        <p:spPr>
+          <a:xfrm xmlns:a="http://schemas.openxmlformats.org/drawingml/2006/main">
+            <a:off x="10020300" y="3648075"/>
+            <a:ext cx="1485900" cy="323850"/>
+          </a:xfrm>
+          <a:prstGeom xmlns:a="http://schemas.openxmlformats.org/drawingml/2006/main" prst="rect">
+            <a:avLst/>
+          </a:prstGeom>
+          <a:noFill xmlns:a="http://schemas.openxmlformats.org/drawingml/2006/main"/>
+          <a:ln xmlns:a="http://schemas.openxmlformats.org/drawingml/2006/main" w="0">
+            <a:noFill/>
+          </a:ln>
+        </p:spPr>
+        <p:txBody>
+          <a:bodyPr xmlns:a="http://schemas.openxmlformats.org/drawingml/2006/main" wrap="none" lIns="0" tIns="0" rIns="0" bIns="0" anchor="ctr">
+            <a:noAutofit/>
+          </a:bodyPr>
+          <a:lstStyle xmlns:a="http://schemas.openxmlformats.org/drawingml/2006/main">
+            <a:defPPr algn="ctr">
+              <a:defRPr sz="1950" b="1">
+                <a:solidFill>
+                  <a:srgbClr val="17212B"/>
+                </a:solidFill>
+                <a:latin typeface="Malgun Gothic"/>
+                <a:ea typeface="Malgun Gothic"/>
+                <a:cs typeface="Malgun Gothic"/>
+              </a:defRPr>
+            </a:defPPr>
+            <a:lvl1pPr algn="ctr">
+              <a:defRPr sz="1950" b="1">
+                <a:solidFill>
+                  <a:srgbClr val="17212B"/>
+                </a:solidFill>
+                <a:latin typeface="Malgun Gothic"/>
+                <a:ea typeface="Malgun Gothic"/>
+                <a:cs typeface="Malgun Gothic"/>
+              </a:defRPr>
+            </a:lvl1pPr>
+            <a:lvl2pPr algn="ctr">
+              <a:defRPr sz="1950" b="1">
+                <a:solidFill>
+                  <a:srgbClr val="17212B"/>
+                </a:solidFill>
+                <a:latin typeface="Malgun Gothic"/>
+                <a:ea typeface="Malgun Gothic"/>
+                <a:cs typeface="Malgun Gothic"/>
+              </a:defRPr>
+            </a:lvl2pPr>
+            <a:lvl3pPr algn="ctr">
+              <a:defRPr sz="1950" b="1">
+                <a:solidFill>
+                  <a:srgbClr val="17212B"/>
+                </a:solidFill>
+                <a:latin typeface="Malgun Gothic"/>
+                <a:ea typeface="Malgun Gothic"/>
+                <a:cs typeface="Malgun Gothic"/>
+              </a:defRPr>
+            </a:lvl3pPr>
+            <a:lvl4pPr algn="ctr">
+              <a:defRPr sz="1950" b="1">
+                <a:solidFill>
+                  <a:srgbClr val="17212B"/>
+                </a:solidFill>
+                <a:latin typeface="Malgun Gothic"/>
+                <a:ea typeface="Malgun Gothic"/>
+                <a:cs typeface="Malgun Gothic"/>
+              </a:defRPr>
+            </a:lvl4pPr>
+            <a:lvl5pPr algn="ctr">
+              <a:defRPr sz="1950" b="1">
+                <a:solidFill>
+                  <a:srgbClr val="17212B"/>
+                </a:solidFill>
+                <a:latin typeface="Malgun Gothic"/>
+                <a:ea typeface="Malgun Gothic"/>
+                <a:cs typeface="Malgun Gothic"/>
+              </a:defRPr>
+            </a:lvl5pPr>
+            <a:lvl6pPr algn="ctr">
+              <a:defRPr sz="1950" b="1">
+                <a:solidFill>
+                  <a:srgbClr val="17212B"/>
+                </a:solidFill>
+                <a:latin typeface="Malgun Gothic"/>
+                <a:ea typeface="Malgun Gothic"/>
+                <a:cs typeface="Malgun Gothic"/>
+              </a:defRPr>
+            </a:lvl6pPr>
+            <a:lvl7pPr algn="ctr">
+              <a:defRPr sz="1950" b="1">
+                <a:solidFill>
+                  <a:srgbClr val="17212B"/>
+                </a:solidFill>
+                <a:latin typeface="Malgun Gothic"/>
+                <a:ea typeface="Malgun Gothic"/>
+                <a:cs typeface="Malgun Gothic"/>
+              </a:defRPr>
+            </a:lvl7pPr>
+            <a:lvl8pPr algn="ctr">
+              <a:defRPr sz="1950" b="1">
+                <a:solidFill>
+                  <a:srgbClr val="17212B"/>
+                </a:solidFill>
+                <a:latin typeface="Malgun Gothic"/>
+                <a:ea typeface="Malgun Gothic"/>
+                <a:cs typeface="Malgun Gothic"/>
+              </a:defRPr>
+            </a:lvl8pPr>
+            <a:lvl9pPr algn="ctr">
+              <a:defRPr sz="1950" b="1">
+                <a:solidFill>
+                  <a:srgbClr val="17212B"/>
+                </a:solidFill>
+                <a:latin typeface="Malgun Gothic"/>
+                <a:ea typeface="Malgun Gothic"/>
+                <a:cs typeface="Malgun Gothic"/>
+              </a:defRPr>
+            </a:lvl9pPr>
+          </a:lstStyle>
+          <a:p xmlns:a="http://schemas.openxmlformats.org/drawingml/2006/main">
+            <a:pPr algn="ctr">
+              <a:defRPr sz="1950" b="1">
+                <a:solidFill>
+                  <a:srgbClr val="17212B"/>
+                </a:solidFill>
+                <a:latin typeface="Malgun Gothic"/>
+                <a:ea typeface="Malgun Gothic"/>
+                <a:cs typeface="Malgun Gothic"/>
+              </a:defRPr>
+            </a:pPr>
+            <a:r>
+              <a:rPr sz="1950" b="1">
+                <a:solidFill>
+                  <a:srgbClr val="17212B"/>
+                </a:solidFill>
+                <a:latin typeface="Malgun Gothic"/>
+                <a:ea typeface="Malgun Gothic"/>
+                <a:cs typeface="Malgun Gothic"/>
+              </a:rPr>
+              <a:t>양불 판정</a:t>
+            </a:r>
+          </a:p>
+        </p:txBody>
+      </p:sp>
+      <p:sp>
+        <p:nvSpPr>
+          <p:cNvPr id="36" name="기준 미정">
+            <a:extLst xmlns:a="http://schemas.openxmlformats.org/drawingml/2006/main">
+              <a:ext uri="{FF2B5EF4-FFF2-40B4-BE49-F238E27FC236}">
+                <a16:creationId xmlns:a16="http://schemas.microsoft.com/office/drawing/2014/main" id="{3F0280D1-8371-4D0C-AD50-3D76138A4594}"/>
+              </a:ext>
+            </a:extLst>
+          </p:cNvPr>
+          <p:cNvSpPr>
+            <a:spLocks xmlns:a="http://schemas.openxmlformats.org/drawingml/2006/main" noGrp="1"/>
+          </p:cNvSpPr>
+          <p:nvPr/>
+        </p:nvSpPr>
+        <p:spPr>
+          <a:xfrm xmlns:a="http://schemas.openxmlformats.org/drawingml/2006/main">
+            <a:off x="9991725" y="3990975"/>
+            <a:ext cx="1543050" cy="219075"/>
+          </a:xfrm>
+          <a:prstGeom xmlns:a="http://schemas.openxmlformats.org/drawingml/2006/main" prst="rect">
+            <a:avLst/>
+          </a:prstGeom>
+          <a:noFill xmlns:a="http://schemas.openxmlformats.org/drawingml/2006/main"/>
+          <a:ln xmlns:a="http://schemas.openxmlformats.org/drawingml/2006/main" w="0">
+            <a:noFill/>
+          </a:ln>
+        </p:spPr>
+        <p:txBody>
+          <a:bodyPr xmlns:a="http://schemas.openxmlformats.org/drawingml/2006/main" wrap="none" lIns="0" tIns="0" rIns="0" bIns="0" anchor="ctr">
+            <a:noAutofit/>
+          </a:bodyPr>
+          <a:lstStyle xmlns:a="http://schemas.openxmlformats.org/drawingml/2006/main">
+            <a:defPPr algn="ctr">
+              <a:defRPr sz="1500" b="0">
+                <a:solidFill>
+                  <a:srgbClr val="4D5A68"/>
+                </a:solidFill>
+                <a:latin typeface="Malgun Gothic"/>
+                <a:ea typeface="Malgun Gothic"/>
+                <a:cs typeface="Malgun Gothic"/>
+              </a:defRPr>
+            </a:defPPr>
+            <a:lvl1pPr algn="ctr">
+              <a:defRPr sz="1500" b="0">
+                <a:solidFill>
+                  <a:srgbClr val="4D5A68"/>
+                </a:solidFill>
+                <a:latin typeface="Malgun Gothic"/>
+                <a:ea typeface="Malgun Gothic"/>
+                <a:cs typeface="Malgun Gothic"/>
+              </a:defRPr>
+            </a:lvl1pPr>
+            <a:lvl2pPr algn="ctr">
+              <a:defRPr sz="1500" b="0">
+                <a:solidFill>
+                  <a:srgbClr val="4D5A68"/>
+                </a:solidFill>
+                <a:latin typeface="Malgun Gothic"/>
+                <a:ea typeface="Malgun Gothic"/>
+                <a:cs typeface="Malgun Gothic"/>
+              </a:defRPr>
+            </a:lvl2pPr>
+            <a:lvl3pPr algn="ctr">
+              <a:defRPr sz="1500" b="0">
+                <a:solidFill>
+                  <a:srgbClr val="4D5A68"/>
+                </a:solidFill>
+                <a:latin typeface="Malgun Gothic"/>
+                <a:ea typeface="Malgun Gothic"/>
+                <a:cs typeface="Malgun Gothic"/>
+              </a:defRPr>
+            </a:lvl3pPr>
+            <a:lvl4pPr algn="ctr">
+              <a:defRPr sz="1500" b="0">
+                <a:solidFill>
+                  <a:srgbClr val="4D5A68"/>
+                </a:solidFill>
+                <a:latin typeface="Malgun Gothic"/>
+                <a:ea typeface="Malgun Gothic"/>
+                <a:cs typeface="Malgun Gothic"/>
+              </a:defRPr>
+            </a:lvl4pPr>
+            <a:lvl5pPr algn="ctr">
+              <a:defRPr sz="1500" b="0">
+                <a:solidFill>
+                  <a:srgbClr val="4D5A68"/>
+                </a:solidFill>
+                <a:latin typeface="Malgun Gothic"/>
+                <a:ea typeface="Malgun Gothic"/>
+                <a:cs typeface="Malgun Gothic"/>
+              </a:defRPr>
+            </a:lvl5pPr>
+            <a:lvl6pPr algn="ctr">
+              <a:defRPr sz="1500" b="0">
+                <a:solidFill>
+                  <a:srgbClr val="4D5A68"/>
+                </a:solidFill>
+                <a:latin typeface="Malgun Gothic"/>
+                <a:ea typeface="Malgun Gothic"/>
+                <a:cs typeface="Malgun Gothic"/>
+              </a:defRPr>
+            </a:lvl6pPr>
+            <a:lvl7pPr algn="ctr">
+              <a:defRPr sz="1500" b="0">
+                <a:solidFill>
+                  <a:srgbClr val="4D5A68"/>
+                </a:solidFill>
+                <a:latin typeface="Malgun Gothic"/>
+                <a:ea typeface="Malgun Gothic"/>
+                <a:cs typeface="Malgun Gothic"/>
+              </a:defRPr>
+            </a:lvl7pPr>
+            <a:lvl8pPr algn="ctr">
+              <a:defRPr sz="1500" b="0">
+                <a:solidFill>
+                  <a:srgbClr val="4D5A68"/>
+                </a:solidFill>
+                <a:latin typeface="Malgun Gothic"/>
+                <a:ea typeface="Malgun Gothic"/>
+                <a:cs typeface="Malgun Gothic"/>
+              </a:defRPr>
+            </a:lvl8pPr>
+            <a:lvl9pPr algn="ctr">
+              <a:defRPr sz="1500" b="0">
+                <a:solidFill>
+                  <a:srgbClr val="4D5A68"/>
+                </a:solidFill>
+                <a:latin typeface="Malgun Gothic"/>
+                <a:ea typeface="Malgun Gothic"/>
+                <a:cs typeface="Malgun Gothic"/>
+              </a:defRPr>
+            </a:lvl9pPr>
+          </a:lstStyle>
+          <a:p xmlns:a="http://schemas.openxmlformats.org/drawingml/2006/main">
+            <a:pPr algn="ctr">
+              <a:defRPr sz="1500" b="0">
+                <a:solidFill>
+                  <a:srgbClr val="4D5A68"/>
+                </a:solidFill>
+                <a:latin typeface="Malgun Gothic"/>
+                <a:ea typeface="Malgun Gothic"/>
+                <a:cs typeface="Malgun Gothic"/>
+              </a:defRPr>
+            </a:pPr>
+            <a:r>
+              <a:rPr sz="1500" b="0">
+                <a:solidFill>
+                  <a:srgbClr val="4D5A68"/>
+                </a:solidFill>
+                <a:latin typeface="Malgun Gothic"/>
+                <a:ea typeface="Malgun Gothic"/>
+                <a:cs typeface="Malgun Gothic"/>
+              </a:rPr>
+              <a:t>기준 미정</a:t>
+            </a:r>
+          </a:p>
+        </p:txBody>
+      </p:sp>
+      <p:sp>
+        <p:nvSpPr>
+          <p:cNvPr id="37" name="">
+            <a:extLst xmlns:a="http://schemas.openxmlformats.org/drawingml/2006/main">
+              <a:ext uri="{FF2B5EF4-FFF2-40B4-BE49-F238E27FC236}">
+                <a16:creationId xmlns:a16="http://schemas.microsoft.com/office/drawing/2014/main" id="{F24F2BD5-5128-4E03-947D-2C8C5C59EC76}"/>
+              </a:ext>
+            </a:extLst>
+          </p:cNvPr>
+          <p:cNvSpPr>
+            <a:spLocks xmlns:a="http://schemas.openxmlformats.org/drawingml/2006/main" noGrp="1"/>
+          </p:cNvSpPr>
+          <p:nvPr/>
+        </p:nvSpPr>
+        <p:spPr>
+          <a:xfrm xmlns:a="http://schemas.openxmlformats.org/drawingml/2006/main">
+            <a:off x="838200" y="2705100"/>
+            <a:ext cx="1181100" cy="819150"/>
+          </a:xfrm>
+          <a:prstGeom xmlns:a="http://schemas.openxmlformats.org/drawingml/2006/main" prst="rect">
+            <a:avLst/>
+          </a:prstGeom>
+          <a:solidFill xmlns:a="http://schemas.openxmlformats.org/drawingml/2006/main">
+            <a:srgbClr val="E2E7EB"/>
+          </a:solidFill>
+          <a:ln xmlns:a="http://schemas.openxmlformats.org/drawingml/2006/main" w="14288">
+            <a:solidFill>
+              <a:srgbClr val="4D5A68"/>
+            </a:solidFill>
+            <a:prstDash val="solid"/>
+          </a:ln>
+        </p:spPr>
+      </p:sp>
+      <p:sp>
+        <p:nvSpPr>
+          <p:cNvPr id="38" name="">
+            <a:extLst xmlns:a="http://schemas.openxmlformats.org/drawingml/2006/main">
+              <a:ext uri="{FF2B5EF4-FFF2-40B4-BE49-F238E27FC236}">
+                <a16:creationId xmlns:a16="http://schemas.microsoft.com/office/drawing/2014/main" id="{7EE3C757-51A3-44C5-8573-2D707A43769E}"/>
+              </a:ext>
+            </a:extLst>
+          </p:cNvPr>
+          <p:cNvSpPr>
+            <a:spLocks xmlns:a="http://schemas.openxmlformats.org/drawingml/2006/main" noGrp="1"/>
+          </p:cNvSpPr>
+          <p:nvPr/>
+        </p:nvSpPr>
+        <p:spPr>
+          <a:xfrm xmlns:a="http://schemas.openxmlformats.org/drawingml/2006/main">
+            <a:off x="971550" y="2819400"/>
+            <a:ext cx="142875" cy="142875"/>
+          </a:xfrm>
+          <a:prstGeom xmlns:a="http://schemas.openxmlformats.org/drawingml/2006/main" prst="ellipse">
+            <a:avLst/>
+          </a:prstGeom>
+          <a:solidFill xmlns:a="http://schemas.openxmlformats.org/drawingml/2006/main">
+            <a:srgbClr val="4D5A68"/>
+          </a:solidFill>
+          <a:ln xmlns:a="http://schemas.openxmlformats.org/drawingml/2006/main" w="0">
+            <a:noFill/>
+          </a:ln>
+        </p:spPr>
+      </p:sp>
+      <p:sp>
+        <p:nvSpPr>
+          <p:cNvPr id="39" name="">
+            <a:extLst xmlns:a="http://schemas.openxmlformats.org/drawingml/2006/main">
+              <a:ext uri="{FF2B5EF4-FFF2-40B4-BE49-F238E27FC236}">
+                <a16:creationId xmlns:a16="http://schemas.microsoft.com/office/drawing/2014/main" id="{18BD3F55-8526-4922-BF16-35D2BB0962EF}"/>
+              </a:ext>
+            </a:extLst>
+          </p:cNvPr>
+          <p:cNvSpPr>
+            <a:spLocks xmlns:a="http://schemas.openxmlformats.org/drawingml/2006/main" noGrp="1"/>
+          </p:cNvSpPr>
+          <p:nvPr/>
+        </p:nvSpPr>
+        <p:spPr>
+          <a:xfrm xmlns:a="http://schemas.openxmlformats.org/drawingml/2006/main">
+            <a:off x="1685925" y="2819400"/>
+            <a:ext cx="142875" cy="142875"/>
+          </a:xfrm>
+          <a:prstGeom xmlns:a="http://schemas.openxmlformats.org/drawingml/2006/main" prst="ellipse">
+            <a:avLst/>
+          </a:prstGeom>
+          <a:solidFill xmlns:a="http://schemas.openxmlformats.org/drawingml/2006/main">
+            <a:srgbClr val="4D5A68"/>
+          </a:solidFill>
+          <a:ln xmlns:a="http://schemas.openxmlformats.org/drawingml/2006/main" w="0">
+            <a:noFill/>
+          </a:ln>
+        </p:spPr>
+      </p:sp>
+      <p:sp>
+        <p:nvSpPr>
+          <p:cNvPr id="40" name="">
+            <a:extLst xmlns:a="http://schemas.openxmlformats.org/drawingml/2006/main">
+              <a:ext uri="{FF2B5EF4-FFF2-40B4-BE49-F238E27FC236}">
+                <a16:creationId xmlns:a16="http://schemas.microsoft.com/office/drawing/2014/main" id="{A12DF1A4-14E9-4317-9DB7-F35B56D7D119}"/>
+              </a:ext>
+            </a:extLst>
+          </p:cNvPr>
+          <p:cNvSpPr>
+            <a:spLocks xmlns:a="http://schemas.openxmlformats.org/drawingml/2006/main" noGrp="1"/>
+          </p:cNvSpPr>
+          <p:nvPr/>
+        </p:nvSpPr>
+        <p:spPr>
+          <a:xfrm xmlns:a="http://schemas.openxmlformats.org/drawingml/2006/main">
+            <a:off x="971550" y="3257550"/>
+            <a:ext cx="142875" cy="142875"/>
+          </a:xfrm>
+          <a:prstGeom xmlns:a="http://schemas.openxmlformats.org/drawingml/2006/main" prst="ellipse">
+            <a:avLst/>
+          </a:prstGeom>
+          <a:solidFill xmlns:a="http://schemas.openxmlformats.org/drawingml/2006/main">
+            <a:srgbClr val="4D5A68"/>
+          </a:solidFill>
+          <a:ln xmlns:a="http://schemas.openxmlformats.org/drawingml/2006/main" w="0">
+            <a:noFill/>
+          </a:ln>
+        </p:spPr>
+      </p:sp>
+      <p:sp>
+        <p:nvSpPr>
+          <p:cNvPr id="41" name="">
+            <a:extLst xmlns:a="http://schemas.openxmlformats.org/drawingml/2006/main">
+              <a:ext uri="{FF2B5EF4-FFF2-40B4-BE49-F238E27FC236}">
+                <a16:creationId xmlns:a16="http://schemas.microsoft.com/office/drawing/2014/main" id="{0C37A0F8-CD7F-4E19-AFC6-B191318926C1}"/>
+              </a:ext>
+            </a:extLst>
+          </p:cNvPr>
+          <p:cNvSpPr>
+            <a:spLocks xmlns:a="http://schemas.openxmlformats.org/drawingml/2006/main" noGrp="1"/>
+          </p:cNvSpPr>
+          <p:nvPr/>
+        </p:nvSpPr>
+        <p:spPr>
+          <a:xfrm xmlns:a="http://schemas.openxmlformats.org/drawingml/2006/main">
+            <a:off x="1685925" y="3257550"/>
+            <a:ext cx="142875" cy="142875"/>
+          </a:xfrm>
+          <a:prstGeom xmlns:a="http://schemas.openxmlformats.org/drawingml/2006/main" prst="ellipse">
+            <a:avLst/>
+          </a:prstGeom>
+          <a:solidFill xmlns:a="http://schemas.openxmlformats.org/drawingml/2006/main">
+            <a:srgbClr val="4D5A68"/>
+          </a:solidFill>
+          <a:ln xmlns:a="http://schemas.openxmlformats.org/drawingml/2006/main" w="0">
+            <a:noFill/>
+          </a:ln>
+        </p:spPr>
+      </p:sp>
+      <p:sp>
+        <p:nvSpPr>
+          <p:cNvPr id="42" name="">
+            <a:extLst xmlns:a="http://schemas.openxmlformats.org/drawingml/2006/main">
+              <a:ext uri="{FF2B5EF4-FFF2-40B4-BE49-F238E27FC236}">
+                <a16:creationId xmlns:a16="http://schemas.microsoft.com/office/drawing/2014/main" id="{0E6E110F-021E-4C43-B1EA-ADA802AC27AF}"/>
+              </a:ext>
+            </a:extLst>
+          </p:cNvPr>
+          <p:cNvSpPr>
+            <a:spLocks xmlns:a="http://schemas.openxmlformats.org/drawingml/2006/main" noGrp="1"/>
+          </p:cNvSpPr>
+          <p:nvPr/>
+        </p:nvSpPr>
+        <p:spPr>
+          <a:xfrm xmlns:a="http://schemas.openxmlformats.org/drawingml/2006/main">
+            <a:off x="1390650" y="2752725"/>
+            <a:ext cx="533400" cy="628650"/>
+          </a:xfrm>
+          <a:prstGeom xmlns:a="http://schemas.openxmlformats.org/drawingml/2006/main" prst="rect">
+            <a:avLst/>
+          </a:prstGeom>
+          <a:noFill xmlns:a="http://schemas.openxmlformats.org/drawingml/2006/main"/>
+          <a:ln xmlns:a="http://schemas.openxmlformats.org/drawingml/2006/main" w="28575">
+            <a:solidFill>
+              <a:srgbClr val="0B6172"/>
+            </a:solidFill>
+            <a:prstDash val="solid"/>
+          </a:ln>
+        </p:spPr>
+      </p:sp>
+      <p:sp>
+        <p:nvSpPr>
+          <p:cNvPr id="43" name="">
+            <a:extLst xmlns:a="http://schemas.openxmlformats.org/drawingml/2006/main">
+              <a:ext uri="{FF2B5EF4-FFF2-40B4-BE49-F238E27FC236}">
+                <a16:creationId xmlns:a16="http://schemas.microsoft.com/office/drawing/2014/main" id="{0C992D56-E6F4-458F-B97E-3A51A8D3E5AB}"/>
+              </a:ext>
+            </a:extLst>
+          </p:cNvPr>
+          <p:cNvSpPr>
+            <a:spLocks xmlns:a="http://schemas.openxmlformats.org/drawingml/2006/main" noGrp="1"/>
+          </p:cNvSpPr>
+          <p:nvPr/>
+        </p:nvSpPr>
+        <p:spPr>
+          <a:xfrm xmlns:a="http://schemas.openxmlformats.org/drawingml/2006/main">
+            <a:off x="2743200" y="2676525"/>
+            <a:ext cx="1104900" cy="857250"/>
+          </a:xfrm>
+          <a:prstGeom xmlns:a="http://schemas.openxmlformats.org/drawingml/2006/main" prst="rect">
+            <a:avLst/>
+          </a:prstGeom>
+          <a:solidFill xmlns:a="http://schemas.openxmlformats.org/drawingml/2006/main">
+            <a:srgbClr val="E2E7EB"/>
+          </a:solidFill>
+          <a:ln xmlns:a="http://schemas.openxmlformats.org/drawingml/2006/main" w="19050">
+            <a:solidFill>
+              <a:srgbClr val="0B6172"/>
+            </a:solidFill>
+            <a:prstDash val="solid"/>
+          </a:ln>
+        </p:spPr>
+      </p:sp>
+      <p:sp>
+        <p:nvSpPr>
+          <p:cNvPr id="44" name="">
+            <a:extLst xmlns:a="http://schemas.openxmlformats.org/drawingml/2006/main">
+              <a:ext uri="{FF2B5EF4-FFF2-40B4-BE49-F238E27FC236}">
+                <a16:creationId xmlns:a16="http://schemas.microsoft.com/office/drawing/2014/main" id="{A9AA6B2C-D4D9-4DFF-8772-60A0F74BA950}"/>
+              </a:ext>
+            </a:extLst>
+          </p:cNvPr>
+          <p:cNvSpPr>
+            <a:spLocks xmlns:a="http://schemas.openxmlformats.org/drawingml/2006/main" noGrp="1"/>
+          </p:cNvSpPr>
+          <p:nvPr/>
+        </p:nvSpPr>
+        <p:spPr>
+          <a:xfrm xmlns:a="http://schemas.openxmlformats.org/drawingml/2006/main">
+            <a:off x="3267075" y="2828925"/>
+            <a:ext cx="257175" cy="257175"/>
+          </a:xfrm>
+          <a:prstGeom xmlns:a="http://schemas.openxmlformats.org/drawingml/2006/main" prst="ellipse">
+            <a:avLst/>
+          </a:prstGeom>
+          <a:solidFill xmlns:a="http://schemas.openxmlformats.org/drawingml/2006/main">
+            <a:srgbClr val="4D5A68"/>
+          </a:solidFill>
+          <a:ln xmlns:a="http://schemas.openxmlformats.org/drawingml/2006/main" w="0">
+            <a:noFill/>
+          </a:ln>
+        </p:spPr>
+      </p:sp>
+      <p:sp>
+        <p:nvSpPr>
+          <p:cNvPr id="45" name="">
+            <a:extLst xmlns:a="http://schemas.openxmlformats.org/drawingml/2006/main">
+              <a:ext uri="{FF2B5EF4-FFF2-40B4-BE49-F238E27FC236}">
+                <a16:creationId xmlns:a16="http://schemas.microsoft.com/office/drawing/2014/main" id="{A2D1BE9C-B995-45F9-85A0-B355FE6B0028}"/>
+              </a:ext>
+            </a:extLst>
+          </p:cNvPr>
+          <p:cNvSpPr>
+            <a:spLocks xmlns:a="http://schemas.openxmlformats.org/drawingml/2006/main" noGrp="1"/>
+          </p:cNvSpPr>
+          <p:nvPr/>
+        </p:nvSpPr>
+        <p:spPr>
+          <a:xfrm xmlns:a="http://schemas.openxmlformats.org/drawingml/2006/main">
+            <a:off x="3267075" y="3219450"/>
+            <a:ext cx="257175" cy="257175"/>
+          </a:xfrm>
+          <a:prstGeom xmlns:a="http://schemas.openxmlformats.org/drawingml/2006/main" prst="ellipse">
+            <a:avLst/>
+          </a:prstGeom>
+          <a:solidFill xmlns:a="http://schemas.openxmlformats.org/drawingml/2006/main">
+            <a:srgbClr val="4D5A68"/>
+          </a:solidFill>
+          <a:ln xmlns:a="http://schemas.openxmlformats.org/drawingml/2006/main" w="0">
+            <a:noFill/>
+          </a:ln>
+        </p:spPr>
+      </p:sp>
+      <p:sp>
+        <p:nvSpPr>
+          <p:cNvPr id="46" name="">
+            <a:extLst xmlns:a="http://schemas.openxmlformats.org/drawingml/2006/main">
+              <a:ext uri="{FF2B5EF4-FFF2-40B4-BE49-F238E27FC236}">
+                <a16:creationId xmlns:a16="http://schemas.microsoft.com/office/drawing/2014/main" id="{00FA9953-B804-41B2-9962-AC2F9B951910}"/>
+              </a:ext>
+            </a:extLst>
+          </p:cNvPr>
+          <p:cNvSpPr>
+            <a:spLocks xmlns:a="http://schemas.openxmlformats.org/drawingml/2006/main" noGrp="1"/>
+          </p:cNvSpPr>
+          <p:nvPr/>
+        </p:nvSpPr>
+        <p:spPr>
+          <a:xfrm xmlns:a="http://schemas.openxmlformats.org/drawingml/2006/main">
+            <a:off x="4619625" y="2762250"/>
+            <a:ext cx="238125" cy="714375"/>
+          </a:xfrm>
+          <a:prstGeom xmlns:a="http://schemas.openxmlformats.org/drawingml/2006/main" prst="rect">
+            <a:avLst/>
+          </a:prstGeom>
+          <a:solidFill xmlns:a="http://schemas.openxmlformats.org/drawingml/2006/main">
+            <a:srgbClr val="3F4B56"/>
+          </a:solidFill>
+          <a:ln xmlns:a="http://schemas.openxmlformats.org/drawingml/2006/main" w="0">
+            <a:noFill/>
+            <a:prstDash val="solid"/>
+          </a:ln>
+        </p:spPr>
+      </p:sp>
+      <p:sp>
+        <p:nvSpPr>
+          <p:cNvPr id="47" name="">
+            <a:extLst xmlns:a="http://schemas.openxmlformats.org/drawingml/2006/main">
+              <a:ext uri="{FF2B5EF4-FFF2-40B4-BE49-F238E27FC236}">
+                <a16:creationId xmlns:a16="http://schemas.microsoft.com/office/drawing/2014/main" id="{126A376D-6DA6-4138-8E0C-CEA1976C0C1B}"/>
+              </a:ext>
+            </a:extLst>
+          </p:cNvPr>
+          <p:cNvSpPr>
+            <a:spLocks xmlns:a="http://schemas.openxmlformats.org/drawingml/2006/main" noGrp="1"/>
+          </p:cNvSpPr>
+          <p:nvPr/>
+        </p:nvSpPr>
+        <p:spPr>
+          <a:xfrm xmlns:a="http://schemas.openxmlformats.org/drawingml/2006/main">
+            <a:off x="4886325" y="2762250"/>
+            <a:ext cx="238125" cy="714375"/>
+          </a:xfrm>
+          <a:prstGeom xmlns:a="http://schemas.openxmlformats.org/drawingml/2006/main" prst="rect">
+            <a:avLst/>
+          </a:prstGeom>
+          <a:solidFill xmlns:a="http://schemas.openxmlformats.org/drawingml/2006/main">
+            <a:srgbClr val="66727D"/>
+          </a:solidFill>
+          <a:ln xmlns:a="http://schemas.openxmlformats.org/drawingml/2006/main" w="0">
+            <a:noFill/>
+            <a:prstDash val="solid"/>
+          </a:ln>
+        </p:spPr>
+      </p:sp>
+      <p:sp>
+        <p:nvSpPr>
+          <p:cNvPr id="48" name="">
+            <a:extLst xmlns:a="http://schemas.openxmlformats.org/drawingml/2006/main">
+              <a:ext uri="{FF2B5EF4-FFF2-40B4-BE49-F238E27FC236}">
+                <a16:creationId xmlns:a16="http://schemas.microsoft.com/office/drawing/2014/main" id="{BB80F20D-1B33-4B5B-9844-284E9642BEBE}"/>
+              </a:ext>
+            </a:extLst>
+          </p:cNvPr>
+          <p:cNvSpPr>
+            <a:spLocks xmlns:a="http://schemas.openxmlformats.org/drawingml/2006/main" noGrp="1"/>
+          </p:cNvSpPr>
+          <p:nvPr/>
+        </p:nvSpPr>
+        <p:spPr>
+          <a:xfrm xmlns:a="http://schemas.openxmlformats.org/drawingml/2006/main">
+            <a:off x="5153025" y="2762250"/>
+            <a:ext cx="238125" cy="714375"/>
+          </a:xfrm>
+          <a:prstGeom xmlns:a="http://schemas.openxmlformats.org/drawingml/2006/main" prst="rect">
+            <a:avLst/>
+          </a:prstGeom>
+          <a:solidFill xmlns:a="http://schemas.openxmlformats.org/drawingml/2006/main">
+            <a:srgbClr val="9DA7B0"/>
+          </a:solidFill>
+          <a:ln xmlns:a="http://schemas.openxmlformats.org/drawingml/2006/main" w="0">
+            <a:noFill/>
+            <a:prstDash val="solid"/>
+          </a:ln>
+        </p:spPr>
+      </p:sp>
+      <p:sp>
+        <p:nvSpPr>
+          <p:cNvPr id="49" name="">
+            <a:extLst xmlns:a="http://schemas.openxmlformats.org/drawingml/2006/main">
+              <a:ext uri="{FF2B5EF4-FFF2-40B4-BE49-F238E27FC236}">
+                <a16:creationId xmlns:a16="http://schemas.microsoft.com/office/drawing/2014/main" id="{16973979-891E-4FFB-87F3-34E3E73D70B4}"/>
+              </a:ext>
+            </a:extLst>
+          </p:cNvPr>
+          <p:cNvSpPr>
+            <a:spLocks xmlns:a="http://schemas.openxmlformats.org/drawingml/2006/main" noGrp="1"/>
+          </p:cNvSpPr>
+          <p:nvPr/>
+        </p:nvSpPr>
+        <p:spPr>
+          <a:xfrm xmlns:a="http://schemas.openxmlformats.org/drawingml/2006/main">
+            <a:off x="5419725" y="2762250"/>
+            <a:ext cx="238125" cy="714375"/>
+          </a:xfrm>
+          <a:prstGeom xmlns:a="http://schemas.openxmlformats.org/drawingml/2006/main" prst="rect">
+            <a:avLst/>
+          </a:prstGeom>
+          <a:solidFill xmlns:a="http://schemas.openxmlformats.org/drawingml/2006/main">
+            <a:srgbClr val="D5DCE2"/>
+          </a:solidFill>
+          <a:ln xmlns:a="http://schemas.openxmlformats.org/drawingml/2006/main" w="0">
+            <a:noFill/>
+            <a:prstDash val="solid"/>
+          </a:ln>
+        </p:spPr>
+      </p:sp>
+      <p:sp>
+        <p:nvSpPr>
+          <p:cNvPr id="50" name="">
+            <a:extLst xmlns:a="http://schemas.openxmlformats.org/drawingml/2006/main">
+              <a:ext uri="{FF2B5EF4-FFF2-40B4-BE49-F238E27FC236}">
+                <a16:creationId xmlns:a16="http://schemas.microsoft.com/office/drawing/2014/main" id="{C1BB6F5C-6BE8-4975-B331-2AD278821A45}"/>
+              </a:ext>
+            </a:extLst>
+          </p:cNvPr>
+          <p:cNvSpPr>
+            <a:spLocks xmlns:a="http://schemas.openxmlformats.org/drawingml/2006/main" noGrp="1"/>
+          </p:cNvSpPr>
+          <p:nvPr/>
+        </p:nvSpPr>
+        <p:spPr>
+          <a:xfrm xmlns:a="http://schemas.openxmlformats.org/drawingml/2006/main">
+            <a:off x="6467475" y="2838450"/>
+            <a:ext cx="428625" cy="428625"/>
+          </a:xfrm>
+          <a:prstGeom xmlns:a="http://schemas.openxmlformats.org/drawingml/2006/main" prst="rect">
+            <a:avLst/>
+          </a:prstGeom>
+          <a:noFill xmlns:a="http://schemas.openxmlformats.org/drawingml/2006/main"/>
+          <a:ln xmlns:a="http://schemas.openxmlformats.org/drawingml/2006/main" w="19050">
+            <a:solidFill>
+              <a:srgbClr val="4D5A68"/>
+            </a:solidFill>
+            <a:prstDash val="solid"/>
+          </a:ln>
+        </p:spPr>
+      </p:sp>
+      <p:sp>
+        <p:nvSpPr>
+          <p:cNvPr id="51" name="">
+            <a:extLst xmlns:a="http://schemas.openxmlformats.org/drawingml/2006/main">
+              <a:ext uri="{FF2B5EF4-FFF2-40B4-BE49-F238E27FC236}">
+                <a16:creationId xmlns:a16="http://schemas.microsoft.com/office/drawing/2014/main" id="{F4618585-2127-434C-888A-96FA5221FABA}"/>
+              </a:ext>
+            </a:extLst>
+          </p:cNvPr>
+          <p:cNvSpPr>
+            <a:spLocks xmlns:a="http://schemas.openxmlformats.org/drawingml/2006/main" noGrp="1"/>
+          </p:cNvSpPr>
+          <p:nvPr/>
+        </p:nvSpPr>
+        <p:spPr>
+          <a:xfrm xmlns:a="http://schemas.openxmlformats.org/drawingml/2006/main">
+            <a:off x="6981825" y="3009900"/>
+            <a:ext cx="171450" cy="114300"/>
+          </a:xfrm>
+          <a:prstGeom xmlns:a="http://schemas.openxmlformats.org/drawingml/2006/main" prst="rightArrow">
+            <a:avLst/>
+          </a:prstGeom>
+          <a:solidFill xmlns:a="http://schemas.openxmlformats.org/drawingml/2006/main">
+            <a:srgbClr val="4D5A68"/>
+          </a:solidFill>
+          <a:ln xmlns:a="http://schemas.openxmlformats.org/drawingml/2006/main" w="0">
+            <a:noFill/>
+          </a:ln>
+        </p:spPr>
+      </p:sp>
+      <p:sp>
+        <p:nvSpPr>
+          <p:cNvPr id="52" name="">
+            <a:extLst xmlns:a="http://schemas.openxmlformats.org/drawingml/2006/main">
+              <a:ext uri="{FF2B5EF4-FFF2-40B4-BE49-F238E27FC236}">
+                <a16:creationId xmlns:a16="http://schemas.microsoft.com/office/drawing/2014/main" id="{117FAC9A-C029-4197-A3EB-1EA2600D3369}"/>
+              </a:ext>
+            </a:extLst>
+          </p:cNvPr>
+          <p:cNvSpPr>
+            <a:spLocks xmlns:a="http://schemas.openxmlformats.org/drawingml/2006/main" noGrp="1"/>
+          </p:cNvSpPr>
+          <p:nvPr/>
+        </p:nvSpPr>
+        <p:spPr>
+          <a:xfrm xmlns:a="http://schemas.openxmlformats.org/drawingml/2006/main">
+            <a:off x="7239000" y="2657475"/>
+            <a:ext cx="400050" cy="771525"/>
+          </a:xfrm>
+          <a:prstGeom xmlns:a="http://schemas.openxmlformats.org/drawingml/2006/main" prst="rect">
+            <a:avLst/>
+          </a:prstGeom>
+          <a:noFill xmlns:a="http://schemas.openxmlformats.org/drawingml/2006/main"/>
+          <a:ln xmlns:a="http://schemas.openxmlformats.org/drawingml/2006/main" w="19050">
+            <a:solidFill>
+              <a:srgbClr val="4D5A68"/>
+            </a:solidFill>
+            <a:prstDash val="solid"/>
+          </a:ln>
+        </p:spPr>
+      </p:sp>
+      <p:sp>
+        <p:nvSpPr>
+          <p:cNvPr id="53" name="">
+            <a:extLst xmlns:a="http://schemas.openxmlformats.org/drawingml/2006/main">
+              <a:ext uri="{FF2B5EF4-FFF2-40B4-BE49-F238E27FC236}">
+                <a16:creationId xmlns:a16="http://schemas.microsoft.com/office/drawing/2014/main" id="{10870B03-D571-41C5-82A5-7B630C49CE30}"/>
+              </a:ext>
+            </a:extLst>
+          </p:cNvPr>
+          <p:cNvSpPr>
+            <a:spLocks xmlns:a="http://schemas.openxmlformats.org/drawingml/2006/main" noGrp="1"/>
+          </p:cNvSpPr>
+          <p:nvPr/>
+        </p:nvSpPr>
+        <p:spPr>
+          <a:xfrm xmlns:a="http://schemas.openxmlformats.org/drawingml/2006/main">
+            <a:off x="8334375" y="3248025"/>
+            <a:ext cx="142875" cy="238125"/>
+          </a:xfrm>
+          <a:prstGeom xmlns:a="http://schemas.openxmlformats.org/drawingml/2006/main" prst="rect">
+            <a:avLst/>
+          </a:prstGeom>
+          <a:solidFill xmlns:a="http://schemas.openxmlformats.org/drawingml/2006/main">
+            <a:srgbClr val="82929E"/>
+          </a:solidFill>
+          <a:ln xmlns:a="http://schemas.openxmlformats.org/drawingml/2006/main" w="0">
+            <a:noFill/>
+            <a:prstDash val="solid"/>
+          </a:ln>
+        </p:spPr>
+      </p:sp>
+      <p:sp>
+        <p:nvSpPr>
+          <p:cNvPr id="54" name="">
+            <a:extLst xmlns:a="http://schemas.openxmlformats.org/drawingml/2006/main">
+              <a:ext uri="{FF2B5EF4-FFF2-40B4-BE49-F238E27FC236}">
+                <a16:creationId xmlns:a16="http://schemas.microsoft.com/office/drawing/2014/main" id="{374F9D00-9D7D-4E0F-8D1F-737303EC41EE}"/>
+              </a:ext>
+            </a:extLst>
+          </p:cNvPr>
+          <p:cNvSpPr>
+            <a:spLocks xmlns:a="http://schemas.openxmlformats.org/drawingml/2006/main" noGrp="1"/>
+          </p:cNvSpPr>
+          <p:nvPr/>
+        </p:nvSpPr>
+        <p:spPr>
+          <a:xfrm xmlns:a="http://schemas.openxmlformats.org/drawingml/2006/main">
+            <a:off x="8562975" y="2981325"/>
+            <a:ext cx="142875" cy="504825"/>
+          </a:xfrm>
+          <a:prstGeom xmlns:a="http://schemas.openxmlformats.org/drawingml/2006/main" prst="rect">
+            <a:avLst/>
+          </a:prstGeom>
+          <a:solidFill xmlns:a="http://schemas.openxmlformats.org/drawingml/2006/main">
+            <a:srgbClr val="82929E"/>
+          </a:solidFill>
+          <a:ln xmlns:a="http://schemas.openxmlformats.org/drawingml/2006/main" w="0">
+            <a:noFill/>
+            <a:prstDash val="solid"/>
+          </a:ln>
+        </p:spPr>
+      </p:sp>
+      <p:sp>
+        <p:nvSpPr>
+          <p:cNvPr id="55" name="">
+            <a:extLst xmlns:a="http://schemas.openxmlformats.org/drawingml/2006/main">
+              <a:ext uri="{FF2B5EF4-FFF2-40B4-BE49-F238E27FC236}">
+                <a16:creationId xmlns:a16="http://schemas.microsoft.com/office/drawing/2014/main" id="{0DCF7844-36EF-45DF-AC9D-66D146D57170}"/>
+              </a:ext>
+            </a:extLst>
+          </p:cNvPr>
+          <p:cNvSpPr>
+            <a:spLocks xmlns:a="http://schemas.openxmlformats.org/drawingml/2006/main" noGrp="1"/>
+          </p:cNvSpPr>
+          <p:nvPr/>
+        </p:nvSpPr>
+        <p:spPr>
+          <a:xfrm xmlns:a="http://schemas.openxmlformats.org/drawingml/2006/main">
+            <a:off x="8791575" y="2752725"/>
+            <a:ext cx="142875" cy="733425"/>
+          </a:xfrm>
+          <a:prstGeom xmlns:a="http://schemas.openxmlformats.org/drawingml/2006/main" prst="rect">
+            <a:avLst/>
+          </a:prstGeom>
+          <a:solidFill xmlns:a="http://schemas.openxmlformats.org/drawingml/2006/main">
+            <a:srgbClr val="82929E"/>
+          </a:solidFill>
+          <a:ln xmlns:a="http://schemas.openxmlformats.org/drawingml/2006/main" w="0">
+            <a:noFill/>
+            <a:prstDash val="solid"/>
+          </a:ln>
+        </p:spPr>
+      </p:sp>
+      <p:sp>
+        <p:nvSpPr>
+          <p:cNvPr id="56" name="">
+            <a:extLst xmlns:a="http://schemas.openxmlformats.org/drawingml/2006/main">
+              <a:ext uri="{FF2B5EF4-FFF2-40B4-BE49-F238E27FC236}">
+                <a16:creationId xmlns:a16="http://schemas.microsoft.com/office/drawing/2014/main" id="{BFAA720B-7439-43B5-A9B9-B52646AFDE1F}"/>
+              </a:ext>
+            </a:extLst>
+          </p:cNvPr>
+          <p:cNvSpPr>
+            <a:spLocks xmlns:a="http://schemas.openxmlformats.org/drawingml/2006/main" noGrp="1"/>
+          </p:cNvSpPr>
+          <p:nvPr/>
+        </p:nvSpPr>
+        <p:spPr>
+          <a:xfrm xmlns:a="http://schemas.openxmlformats.org/drawingml/2006/main">
+            <a:off x="9020175" y="3057525"/>
+            <a:ext cx="142875" cy="428625"/>
+          </a:xfrm>
+          <a:prstGeom xmlns:a="http://schemas.openxmlformats.org/drawingml/2006/main" prst="rect">
+            <a:avLst/>
+          </a:prstGeom>
+          <a:solidFill xmlns:a="http://schemas.openxmlformats.org/drawingml/2006/main">
+            <a:srgbClr val="82929E"/>
+          </a:solidFill>
+          <a:ln xmlns:a="http://schemas.openxmlformats.org/drawingml/2006/main" w="0">
+            <a:noFill/>
+            <a:prstDash val="solid"/>
+          </a:ln>
+        </p:spPr>
+      </p:sp>
+      <p:sp>
+        <p:nvSpPr>
+          <p:cNvPr id="57" name="">
+            <a:extLst xmlns:a="http://schemas.openxmlformats.org/drawingml/2006/main">
+              <a:ext uri="{FF2B5EF4-FFF2-40B4-BE49-F238E27FC236}">
+                <a16:creationId xmlns:a16="http://schemas.microsoft.com/office/drawing/2014/main" id="{1B98CFA3-268A-4DB7-A30F-04EFE99D541C}"/>
+              </a:ext>
+            </a:extLst>
+          </p:cNvPr>
+          <p:cNvSpPr>
+            <a:spLocks xmlns:a="http://schemas.openxmlformats.org/drawingml/2006/main" noGrp="1"/>
+          </p:cNvSpPr>
+          <p:nvPr/>
+        </p:nvSpPr>
+        <p:spPr>
+          <a:xfrm xmlns:a="http://schemas.openxmlformats.org/drawingml/2006/main">
+            <a:off x="9248775" y="3295650"/>
+            <a:ext cx="142875" cy="190500"/>
+          </a:xfrm>
+          <a:prstGeom xmlns:a="http://schemas.openxmlformats.org/drawingml/2006/main" prst="rect">
+            <a:avLst/>
+          </a:prstGeom>
+          <a:solidFill xmlns:a="http://schemas.openxmlformats.org/drawingml/2006/main">
+            <a:srgbClr val="82929E"/>
+          </a:solidFill>
+          <a:ln xmlns:a="http://schemas.openxmlformats.org/drawingml/2006/main" w="0">
+            <a:noFill/>
+            <a:prstDash val="solid"/>
+          </a:ln>
+        </p:spPr>
+      </p:sp>
+      <p:sp>
+        <p:nvSpPr>
+          <p:cNvPr id="58" name="?">
+            <a:extLst xmlns:a="http://schemas.openxmlformats.org/drawingml/2006/main">
+              <a:ext uri="{FF2B5EF4-FFF2-40B4-BE49-F238E27FC236}">
+                <a16:creationId xmlns:a16="http://schemas.microsoft.com/office/drawing/2014/main" id="{F6D09D70-F51A-446F-A944-F566446FA279}"/>
+              </a:ext>
+            </a:extLst>
+          </p:cNvPr>
+          <p:cNvSpPr>
+            <a:spLocks xmlns:a="http://schemas.openxmlformats.org/drawingml/2006/main" noGrp="1"/>
+          </p:cNvSpPr>
+          <p:nvPr/>
+        </p:nvSpPr>
+        <p:spPr>
+          <a:xfrm xmlns:a="http://schemas.openxmlformats.org/drawingml/2006/main">
+            <a:off x="10258425" y="2609850"/>
+            <a:ext cx="1009650" cy="914400"/>
+          </a:xfrm>
+          <a:prstGeom xmlns:a="http://schemas.openxmlformats.org/drawingml/2006/main" prst="rect">
+            <a:avLst/>
+          </a:prstGeom>
+          <a:noFill xmlns:a="http://schemas.openxmlformats.org/drawingml/2006/main"/>
+          <a:ln xmlns:a="http://schemas.openxmlformats.org/drawingml/2006/main" w="0">
+            <a:noFill/>
+          </a:ln>
+        </p:spPr>
+        <p:txBody>
+          <a:bodyPr xmlns:a="http://schemas.openxmlformats.org/drawingml/2006/main" wrap="none" lIns="0" tIns="0" rIns="0" bIns="0" anchor="ctr">
+            <a:noAutofit/>
+          </a:bodyPr>
+          <a:lstStyle xmlns:a="http://schemas.openxmlformats.org/drawingml/2006/main">
+            <a:defPPr algn="ctr">
+              <a:defRPr sz="5625" b="1">
+                <a:solidFill>
+                  <a:srgbClr val="805400"/>
+                </a:solidFill>
+                <a:latin typeface="Malgun Gothic"/>
+                <a:ea typeface="Malgun Gothic"/>
+                <a:cs typeface="Malgun Gothic"/>
+              </a:defRPr>
+            </a:defPPr>
+            <a:lvl1pPr algn="ctr">
+              <a:defRPr sz="5625" b="1">
+                <a:solidFill>
+                  <a:srgbClr val="805400"/>
+                </a:solidFill>
+                <a:latin typeface="Malgun Gothic"/>
+                <a:ea typeface="Malgun Gothic"/>
+                <a:cs typeface="Malgun Gothic"/>
+              </a:defRPr>
+            </a:lvl1pPr>
+            <a:lvl2pPr algn="ctr">
+              <a:defRPr sz="5625" b="1">
+                <a:solidFill>
+                  <a:srgbClr val="805400"/>
+                </a:solidFill>
+                <a:latin typeface="Malgun Gothic"/>
+                <a:ea typeface="Malgun Gothic"/>
+                <a:cs typeface="Malgun Gothic"/>
+              </a:defRPr>
+            </a:lvl2pPr>
+            <a:lvl3pPr algn="ctr">
+              <a:defRPr sz="5625" b="1">
+                <a:solidFill>
+                  <a:srgbClr val="805400"/>
+                </a:solidFill>
+                <a:latin typeface="Malgun Gothic"/>
+                <a:ea typeface="Malgun Gothic"/>
+                <a:cs typeface="Malgun Gothic"/>
+              </a:defRPr>
+            </a:lvl3pPr>
+            <a:lvl4pPr algn="ctr">
+              <a:defRPr sz="5625" b="1">
+                <a:solidFill>
+                  <a:srgbClr val="805400"/>
+                </a:solidFill>
+                <a:latin typeface="Malgun Gothic"/>
+                <a:ea typeface="Malgun Gothic"/>
+                <a:cs typeface="Malgun Gothic"/>
+              </a:defRPr>
+            </a:lvl4pPr>
+            <a:lvl5pPr algn="ctr">
+              <a:defRPr sz="5625" b="1">
+                <a:solidFill>
+                  <a:srgbClr val="805400"/>
+                </a:solidFill>
+                <a:latin typeface="Malgun Gothic"/>
+                <a:ea typeface="Malgun Gothic"/>
+                <a:cs typeface="Malgun Gothic"/>
+              </a:defRPr>
+            </a:lvl5pPr>
+            <a:lvl6pPr algn="ctr">
+              <a:defRPr sz="5625" b="1">
+                <a:solidFill>
+                  <a:srgbClr val="805400"/>
+                </a:solidFill>
+                <a:latin typeface="Malgun Gothic"/>
+                <a:ea typeface="Malgun Gothic"/>
+                <a:cs typeface="Malgun Gothic"/>
+              </a:defRPr>
+            </a:lvl6pPr>
+            <a:lvl7pPr algn="ctr">
+              <a:defRPr sz="5625" b="1">
+                <a:solidFill>
+                  <a:srgbClr val="805400"/>
+                </a:solidFill>
+                <a:latin typeface="Malgun Gothic"/>
+                <a:ea typeface="Malgun Gothic"/>
+                <a:cs typeface="Malgun Gothic"/>
+              </a:defRPr>
+            </a:lvl7pPr>
+            <a:lvl8pPr algn="ctr">
+              <a:defRPr sz="5625" b="1">
+                <a:solidFill>
+                  <a:srgbClr val="805400"/>
+                </a:solidFill>
+                <a:latin typeface="Malgun Gothic"/>
+                <a:ea typeface="Malgun Gothic"/>
+                <a:cs typeface="Malgun Gothic"/>
+              </a:defRPr>
+            </a:lvl8pPr>
+            <a:lvl9pPr algn="ctr">
+              <a:defRPr sz="5625" b="1">
+                <a:solidFill>
+                  <a:srgbClr val="805400"/>
+                </a:solidFill>
+                <a:latin typeface="Malgun Gothic"/>
+                <a:ea typeface="Malgun Gothic"/>
+                <a:cs typeface="Malgun Gothic"/>
+              </a:defRPr>
+            </a:lvl9pPr>
+          </a:lstStyle>
+          <a:p xmlns:a="http://schemas.openxmlformats.org/drawingml/2006/main">
+            <a:pPr algn="ctr">
+              <a:defRPr sz="5625" b="1">
+                <a:solidFill>
+                  <a:srgbClr val="805400"/>
+                </a:solidFill>
+                <a:latin typeface="Malgun Gothic"/>
+                <a:ea typeface="Malgun Gothic"/>
+                <a:cs typeface="Malgun Gothic"/>
+              </a:defRPr>
+            </a:pPr>
+            <a:r>
+              <a:rPr sz="5625" b="1">
+                <a:solidFill>
+                  <a:srgbClr val="805400"/>
+                </a:solidFill>
+                <a:latin typeface="Malgun Gothic"/>
+                <a:ea typeface="Malgun Gothic"/>
+                <a:cs typeface="Malgun Gothic"/>
+              </a:rPr>
+              <a:t>?</a:t>
+            </a:r>
+          </a:p>
+        </p:txBody>
+      </p:sp>
+      <p:sp>
+        <p:nvSpPr>
+          <p:cNvPr id="59" name="지금 이 저장소에 어떤 일을 맡기고 싶으신가요?">
+            <a:extLst xmlns:a="http://schemas.openxmlformats.org/drawingml/2006/main">
+              <a:ext uri="{FF2B5EF4-FFF2-40B4-BE49-F238E27FC236}">
+                <a16:creationId xmlns:a16="http://schemas.microsoft.com/office/drawing/2014/main" id="{702444B2-E698-4FBE-8FED-B9F19FBA1466}"/>
+              </a:ext>
+            </a:extLst>
+          </p:cNvPr>
+          <p:cNvSpPr>
+            <a:spLocks xmlns:a="http://schemas.openxmlformats.org/drawingml/2006/main" noGrp="1"/>
+          </p:cNvSpPr>
+          <p:nvPr/>
+        </p:nvSpPr>
+        <p:spPr>
+          <a:xfrm xmlns:a="http://schemas.openxmlformats.org/drawingml/2006/main">
+            <a:off x="609600" y="4562475"/>
+            <a:ext cx="10972800" cy="466725"/>
+          </a:xfrm>
+          <a:prstGeom xmlns:a="http://schemas.openxmlformats.org/drawingml/2006/main" prst="rect">
+            <a:avLst/>
+          </a:prstGeom>
+          <a:noFill xmlns:a="http://schemas.openxmlformats.org/drawingml/2006/main"/>
+          <a:ln xmlns:a="http://schemas.openxmlformats.org/drawingml/2006/main" w="0">
+            <a:noFill/>
+          </a:ln>
+        </p:spPr>
+        <p:txBody>
+          <a:bodyPr xmlns:a="http://schemas.openxmlformats.org/drawingml/2006/main" wrap="none" lIns="0" tIns="0" rIns="0" bIns="0" anchor="ctr">
+            <a:noAutofit/>
+          </a:bodyPr>
+          <a:lstStyle xmlns:a="http://schemas.openxmlformats.org/drawingml/2006/main">
+            <a:defPPr algn="l">
+              <a:defRPr sz="2625" b="1">
+                <a:solidFill>
+                  <a:srgbClr val="17212B"/>
+                </a:solidFill>
+                <a:latin typeface="Malgun Gothic"/>
+                <a:ea typeface="Malgun Gothic"/>
+                <a:cs typeface="Malgun Gothic"/>
+              </a:defRPr>
+            </a:defPPr>
+            <a:lvl1pPr algn="l">
+              <a:defRPr sz="2625" b="1">
+                <a:solidFill>
+                  <a:srgbClr val="17212B"/>
+                </a:solidFill>
+                <a:latin typeface="Malgun Gothic"/>
+                <a:ea typeface="Malgun Gothic"/>
+                <a:cs typeface="Malgun Gothic"/>
+              </a:defRPr>
+            </a:lvl1pPr>
+            <a:lvl2pPr algn="l">
+              <a:defRPr sz="2625" b="1">
+                <a:solidFill>
+                  <a:srgbClr val="17212B"/>
+                </a:solidFill>
+                <a:latin typeface="Malgun Gothic"/>
+                <a:ea typeface="Malgun Gothic"/>
+                <a:cs typeface="Malgun Gothic"/>
+              </a:defRPr>
+            </a:lvl2pPr>
+            <a:lvl3pPr algn="l">
+              <a:defRPr sz="2625" b="1">
+                <a:solidFill>
+                  <a:srgbClr val="17212B"/>
+                </a:solidFill>
+                <a:latin typeface="Malgun Gothic"/>
+                <a:ea typeface="Malgun Gothic"/>
+                <a:cs typeface="Malgun Gothic"/>
+              </a:defRPr>
+            </a:lvl3pPr>
+            <a:lvl4pPr algn="l">
+              <a:defRPr sz="2625" b="1">
+                <a:solidFill>
+                  <a:srgbClr val="17212B"/>
+                </a:solidFill>
+                <a:latin typeface="Malgun Gothic"/>
+                <a:ea typeface="Malgun Gothic"/>
+                <a:cs typeface="Malgun Gothic"/>
+              </a:defRPr>
+            </a:lvl4pPr>
+            <a:lvl5pPr algn="l">
+              <a:defRPr sz="2625" b="1">
+                <a:solidFill>
+                  <a:srgbClr val="17212B"/>
+                </a:solidFill>
+                <a:latin typeface="Malgun Gothic"/>
+                <a:ea typeface="Malgun Gothic"/>
+                <a:cs typeface="Malgun Gothic"/>
+              </a:defRPr>
+            </a:lvl5pPr>
+            <a:lvl6pPr algn="l">
+              <a:defRPr sz="2625" b="1">
+                <a:solidFill>
+                  <a:srgbClr val="17212B"/>
+                </a:solidFill>
+                <a:latin typeface="Malgun Gothic"/>
+                <a:ea typeface="Malgun Gothic"/>
+                <a:cs typeface="Malgun Gothic"/>
+              </a:defRPr>
+            </a:lvl6pPr>
+            <a:lvl7pPr algn="l">
+              <a:defRPr sz="2625" b="1">
+                <a:solidFill>
+                  <a:srgbClr val="17212B"/>
+                </a:solidFill>
+                <a:latin typeface="Malgun Gothic"/>
+                <a:ea typeface="Malgun Gothic"/>
+                <a:cs typeface="Malgun Gothic"/>
+              </a:defRPr>
+            </a:lvl7pPr>
+            <a:lvl8pPr algn="l">
+              <a:defRPr sz="2625" b="1">
+                <a:solidFill>
+                  <a:srgbClr val="17212B"/>
+                </a:solidFill>
+                <a:latin typeface="Malgun Gothic"/>
+                <a:ea typeface="Malgun Gothic"/>
+                <a:cs typeface="Malgun Gothic"/>
+              </a:defRPr>
+            </a:lvl8pPr>
+            <a:lvl9pPr algn="l">
+              <a:defRPr sz="2625" b="1">
+                <a:solidFill>
+                  <a:srgbClr val="17212B"/>
+                </a:solidFill>
+                <a:latin typeface="Malgun Gothic"/>
+                <a:ea typeface="Malgun Gothic"/>
+                <a:cs typeface="Malgun Gothic"/>
+              </a:defRPr>
+            </a:lvl9pPr>
+          </a:lstStyle>
+          <a:p xmlns:a="http://schemas.openxmlformats.org/drawingml/2006/main">
+            <a:pPr algn="l">
+              <a:defRPr sz="2625" b="1">
+                <a:solidFill>
+                  <a:srgbClr val="17212B"/>
+                </a:solidFill>
+                <a:latin typeface="Malgun Gothic"/>
+                <a:ea typeface="Malgun Gothic"/>
+                <a:cs typeface="Malgun Gothic"/>
+              </a:defRPr>
+            </a:pPr>
+            <a:r>
+              <a:rPr sz="2625" b="1">
+                <a:solidFill>
+                  <a:srgbClr val="17212B"/>
+                </a:solidFill>
+                <a:latin typeface="Malgun Gothic"/>
+                <a:ea typeface="Malgun Gothic"/>
+                <a:cs typeface="Malgun Gothic"/>
+              </a:rPr>
+              <a:t>지금 이 저장소에 어떤 일을 맡기고 싶으신가요?</a:t>
+            </a:r>
+          </a:p>
+        </p:txBody>
+      </p:sp>
+      <p:sp>
+        <p:nvSpPr>
+          <p:cNvPr id="60" name="그 원하는 결과까지 코드에 적혀 있을까요?">
+            <a:extLst xmlns:a="http://schemas.openxmlformats.org/drawingml/2006/main">
+              <a:ext uri="{FF2B5EF4-FFF2-40B4-BE49-F238E27FC236}">
+                <a16:creationId xmlns:a16="http://schemas.microsoft.com/office/drawing/2014/main" id="{958D9EF8-A678-4178-934D-65408DD135AF}"/>
+              </a:ext>
+            </a:extLst>
+          </p:cNvPr>
+          <p:cNvSpPr>
+            <a:spLocks xmlns:a="http://schemas.openxmlformats.org/drawingml/2006/main" noGrp="1"/>
+          </p:cNvSpPr>
+          <p:nvPr/>
+        </p:nvSpPr>
+        <p:spPr>
+          <a:xfrm xmlns:a="http://schemas.openxmlformats.org/drawingml/2006/main">
+            <a:off x="609600" y="5143500"/>
+            <a:ext cx="10972800" cy="400050"/>
+          </a:xfrm>
+          <a:prstGeom xmlns:a="http://schemas.openxmlformats.org/drawingml/2006/main" prst="rect">
+            <a:avLst/>
+          </a:prstGeom>
+          <a:noFill xmlns:a="http://schemas.openxmlformats.org/drawingml/2006/main"/>
+          <a:ln xmlns:a="http://schemas.openxmlformats.org/drawingml/2006/main" w="0">
+            <a:noFill/>
+          </a:ln>
+        </p:spPr>
+        <p:txBody>
+          <a:bodyPr xmlns:a="http://schemas.openxmlformats.org/drawingml/2006/main" wrap="none" lIns="0" tIns="0" rIns="0" bIns="0" anchor="ctr">
+            <a:noAutofit/>
+          </a:bodyPr>
+          <a:lstStyle xmlns:a="http://schemas.openxmlformats.org/drawingml/2006/main">
+            <a:defPPr algn="l">
+              <a:defRPr sz="2325" b="1">
+                <a:solidFill>
+                  <a:srgbClr val="0B6172"/>
+                </a:solidFill>
+                <a:latin typeface="Malgun Gothic"/>
+                <a:ea typeface="Malgun Gothic"/>
+                <a:cs typeface="Malgun Gothic"/>
+              </a:defRPr>
+            </a:defPPr>
+            <a:lvl1pPr algn="l">
+              <a:defRPr sz="2325" b="1">
+                <a:solidFill>
+                  <a:srgbClr val="0B6172"/>
+                </a:solidFill>
+                <a:latin typeface="Malgun Gothic"/>
+                <a:ea typeface="Malgun Gothic"/>
+                <a:cs typeface="Malgun Gothic"/>
+              </a:defRPr>
+            </a:lvl1pPr>
+            <a:lvl2pPr algn="l">
+              <a:defRPr sz="2325" b="1">
+                <a:solidFill>
+                  <a:srgbClr val="0B6172"/>
+                </a:solidFill>
+                <a:latin typeface="Malgun Gothic"/>
+                <a:ea typeface="Malgun Gothic"/>
+                <a:cs typeface="Malgun Gothic"/>
+              </a:defRPr>
+            </a:lvl2pPr>
+            <a:lvl3pPr algn="l">
+              <a:defRPr sz="2325" b="1">
+                <a:solidFill>
+                  <a:srgbClr val="0B6172"/>
+                </a:solidFill>
+                <a:latin typeface="Malgun Gothic"/>
+                <a:ea typeface="Malgun Gothic"/>
+                <a:cs typeface="Malgun Gothic"/>
+              </a:defRPr>
+            </a:lvl3pPr>
+            <a:lvl4pPr algn="l">
+              <a:defRPr sz="2325" b="1">
+                <a:solidFill>
+                  <a:srgbClr val="0B6172"/>
+                </a:solidFill>
+                <a:latin typeface="Malgun Gothic"/>
+                <a:ea typeface="Malgun Gothic"/>
+                <a:cs typeface="Malgun Gothic"/>
+              </a:defRPr>
+            </a:lvl4pPr>
+            <a:lvl5pPr algn="l">
+              <a:defRPr sz="2325" b="1">
+                <a:solidFill>
+                  <a:srgbClr val="0B6172"/>
+                </a:solidFill>
+                <a:latin typeface="Malgun Gothic"/>
+                <a:ea typeface="Malgun Gothic"/>
+                <a:cs typeface="Malgun Gothic"/>
+              </a:defRPr>
+            </a:lvl5pPr>
+            <a:lvl6pPr algn="l">
+              <a:defRPr sz="2325" b="1">
+                <a:solidFill>
+                  <a:srgbClr val="0B6172"/>
+                </a:solidFill>
+                <a:latin typeface="Malgun Gothic"/>
+                <a:ea typeface="Malgun Gothic"/>
+                <a:cs typeface="Malgun Gothic"/>
+              </a:defRPr>
+            </a:lvl6pPr>
+            <a:lvl7pPr algn="l">
+              <a:defRPr sz="2325" b="1">
+                <a:solidFill>
+                  <a:srgbClr val="0B6172"/>
+                </a:solidFill>
+                <a:latin typeface="Malgun Gothic"/>
+                <a:ea typeface="Malgun Gothic"/>
+                <a:cs typeface="Malgun Gothic"/>
+              </a:defRPr>
+            </a:lvl7pPr>
+            <a:lvl8pPr algn="l">
+              <a:defRPr sz="2325" b="1">
+                <a:solidFill>
+                  <a:srgbClr val="0B6172"/>
+                </a:solidFill>
+                <a:latin typeface="Malgun Gothic"/>
+                <a:ea typeface="Malgun Gothic"/>
+                <a:cs typeface="Malgun Gothic"/>
+              </a:defRPr>
+            </a:lvl8pPr>
+            <a:lvl9pPr algn="l">
+              <a:defRPr sz="2325" b="1">
+                <a:solidFill>
+                  <a:srgbClr val="0B6172"/>
+                </a:solidFill>
+                <a:latin typeface="Malgun Gothic"/>
+                <a:ea typeface="Malgun Gothic"/>
+                <a:cs typeface="Malgun Gothic"/>
+              </a:defRPr>
+            </a:lvl9pPr>
+          </a:lstStyle>
+          <a:p xmlns:a="http://schemas.openxmlformats.org/drawingml/2006/main">
+            <a:pPr algn="l">
+              <a:defRPr sz="2325" b="1">
+                <a:solidFill>
+                  <a:srgbClr val="0B6172"/>
+                </a:solidFill>
+                <a:latin typeface="Malgun Gothic"/>
+                <a:ea typeface="Malgun Gothic"/>
+                <a:cs typeface="Malgun Gothic"/>
+              </a:defRPr>
+            </a:pPr>
+            <a:r>
+              <a:rPr sz="2325" b="1">
+                <a:solidFill>
+                  <a:srgbClr val="0B6172"/>
+                </a:solidFill>
+                <a:latin typeface="Malgun Gothic"/>
+                <a:ea typeface="Malgun Gothic"/>
+                <a:cs typeface="Malgun Gothic"/>
+              </a:rPr>
+              <a:t>그 원하는 결과까지 코드에 적혀 있을까요?</a:t>
+            </a:r>
+          </a:p>
+        </p:txBody>
+      </p:sp>
+      <p:sp>
+        <p:nvSpPr>
+          <p:cNvPr id="61" name="Legacy module connection">
+            <a:extLst xmlns:a="http://schemas.openxmlformats.org/drawingml/2006/main">
+              <a:ext uri="{FF2B5EF4-FFF2-40B4-BE49-F238E27FC236}">
+                <a16:creationId xmlns:a16="http://schemas.microsoft.com/office/drawing/2014/main" id="{964CA0D2-A223-47BD-87ED-9AA788B0231E}"/>
               </a:ext>
             </a:extLst>
           </p:cNvPr>
@@ -9481,7 +12909,7 @@
     </p:spTree>
     <p:extLst>
       <p:ext uri="{BB962C8B-B14F-4D97-AF65-F5344CB8AC3E}">
-        <p14:creationId xmlns:p14="http://schemas.microsoft.com/office/powerpoint/2010/main" val="247580704"/>
+        <p14:creationId xmlns:p14="http://schemas.microsoft.com/office/powerpoint/2010/main" val="438720705"/>
       </p:ext>
     </p:extLst>
   </p:cSld>
@@ -9512,7 +12940,7 @@
           <p:cNvPr id="39" name="ACT 0 · 혼동하기 쉬운 C++ 초기화">
             <a:extLst xmlns:a="http://schemas.openxmlformats.org/drawingml/2006/main">
               <a:ext uri="{FF2B5EF4-FFF2-40B4-BE49-F238E27FC236}">
-                <a16:creationId xmlns:a16="http://schemas.microsoft.com/office/drawing/2014/main" id="{AD7D8C0D-4B66-4D25-AFA0-9151CF471388}"/>
+                <a16:creationId xmlns:a16="http://schemas.microsoft.com/office/drawing/2014/main" id="{F7DF16A5-0B3F-4246-9E06-0AC267644240}"/>
               </a:ext>
             </a:extLst>
           </p:cNvPr>
@@ -9670,7 +13098,7 @@
           <p:cNvPr id="2" name="S02">
             <a:extLst xmlns:a="http://schemas.openxmlformats.org/drawingml/2006/main">
               <a:ext uri="{FF2B5EF4-FFF2-40B4-BE49-F238E27FC236}">
-                <a16:creationId xmlns:a16="http://schemas.microsoft.com/office/drawing/2014/main" id="{FACDD573-2EB7-48F8-BE93-57E7845B53EE}"/>
+                <a16:creationId xmlns:a16="http://schemas.microsoft.com/office/drawing/2014/main" id="{FEC1E5DF-9B12-4AB2-9FF8-EE7D260DA87D}"/>
               </a:ext>
             </a:extLst>
           </p:cNvPr>
@@ -9828,7 +13256,7 @@
           <p:cNvPr id="3" name="작은 질문에는 Chatbot이 유용하다">
             <a:extLst xmlns:a="http://schemas.openxmlformats.org/drawingml/2006/main">
               <a:ext uri="{FF2B5EF4-FFF2-40B4-BE49-F238E27FC236}">
-                <a16:creationId xmlns:a16="http://schemas.microsoft.com/office/drawing/2014/main" id="{D6CA7B50-A41E-4603-8550-08CBECE43067}"/>
+                <a16:creationId xmlns:a16="http://schemas.microsoft.com/office/drawing/2014/main" id="{956E677D-AFED-4DAC-80D4-C75C2F1AD211}"/>
               </a:ext>
             </a:extLst>
           </p:cNvPr>
@@ -9986,7 +13414,7 @@
           <p:cNvPr id="4" name="">
             <a:extLst xmlns:a="http://schemas.openxmlformats.org/drawingml/2006/main">
               <a:ext uri="{FF2B5EF4-FFF2-40B4-BE49-F238E27FC236}">
-                <a16:creationId xmlns:a16="http://schemas.microsoft.com/office/drawing/2014/main" id="{5155E2D5-6B80-4CF1-9A8D-2562F3BE9CB5}"/>
+                <a16:creationId xmlns:a16="http://schemas.microsoft.com/office/drawing/2014/main" id="{DB03FC7C-3571-4268-A81B-6FA45C278369}"/>
               </a:ext>
             </a:extLst>
           </p:cNvPr>
@@ -10017,7 +13445,7 @@
           <p:cNvPr id="5" name="Microsoft C++ 문서 기반 교육 예시 · 실제 ChatGPT 대화·실행 화면 아님">
             <a:extLst xmlns:a="http://schemas.openxmlformats.org/drawingml/2006/main">
               <a:ext uri="{FF2B5EF4-FFF2-40B4-BE49-F238E27FC236}">
-                <a16:creationId xmlns:a16="http://schemas.microsoft.com/office/drawing/2014/main" id="{6B1A202F-7808-4AE3-A672-43FE6281EBC0}"/>
+                <a16:creationId xmlns:a16="http://schemas.microsoft.com/office/drawing/2014/main" id="{9EA10140-AAF0-49EE-8D8A-E63F4619F932}"/>
               </a:ext>
             </a:extLst>
           </p:cNvPr>
@@ -10175,7 +13603,7 @@
           <p:cNvPr id="6" name="괄호는 개수·값 생성자, 중괄호는 이 예시의 initializer_list 생성자를 사용합니다.">
             <a:extLst xmlns:a="http://schemas.openxmlformats.org/drawingml/2006/main">
               <a:ext uri="{FF2B5EF4-FFF2-40B4-BE49-F238E27FC236}">
-                <a16:creationId xmlns:a16="http://schemas.microsoft.com/office/drawing/2014/main" id="{A91C9285-B26D-4F45-9A75-07A3DB99F050}"/>
+                <a16:creationId xmlns:a16="http://schemas.microsoft.com/office/drawing/2014/main" id="{B451C5C7-8522-4F4D-A130-F4E4187410E7}"/>
               </a:ext>
             </a:extLst>
           </p:cNvPr>
@@ -10333,7 +13761,7 @@
           <p:cNvPr id="7" name="괄호만 바뀌었는데, 같은 Vector일까?">
             <a:extLst xmlns:a="http://schemas.openxmlformats.org/drawingml/2006/main">
               <a:ext uri="{FF2B5EF4-FFF2-40B4-BE49-F238E27FC236}">
-                <a16:creationId xmlns:a16="http://schemas.microsoft.com/office/drawing/2014/main" id="{02E12FC7-83DC-412A-85D2-13FA9035B427}"/>
+                <a16:creationId xmlns:a16="http://schemas.microsoft.com/office/drawing/2014/main" id="{0EEA73EB-F935-43EC-AEA9-855FDC2DA90C}"/>
               </a:ext>
             </a:extLst>
           </p:cNvPr>
@@ -10491,7 +13919,7 @@
           <p:cNvPr id="8" name="">
             <a:extLst xmlns:a="http://schemas.openxmlformats.org/drawingml/2006/main">
               <a:ext uri="{FF2B5EF4-FFF2-40B4-BE49-F238E27FC236}">
-                <a16:creationId xmlns:a16="http://schemas.microsoft.com/office/drawing/2014/main" id="{EEE68591-CDC6-4B93-81E4-656A6FDE45E5}"/>
+                <a16:creationId xmlns:a16="http://schemas.microsoft.com/office/drawing/2014/main" id="{950C06F1-BAA5-44BE-A4E0-F76ABAABCB34}"/>
               </a:ext>
             </a:extLst>
           </p:cNvPr>
@@ -10522,7 +13950,7 @@
           <p:cNvPr id="9" name="std::vector&lt;int&gt; a(3, 1);">
             <a:extLst xmlns:a="http://schemas.openxmlformats.org/drawingml/2006/main">
               <a:ext uri="{FF2B5EF4-FFF2-40B4-BE49-F238E27FC236}">
-                <a16:creationId xmlns:a16="http://schemas.microsoft.com/office/drawing/2014/main" id="{999A15E6-29FF-4F1F-B09D-1677249DF399}"/>
+                <a16:creationId xmlns:a16="http://schemas.microsoft.com/office/drawing/2014/main" id="{91EE8607-D8E5-4C18-9A16-238FD196970F}"/>
               </a:ext>
             </a:extLst>
           </p:cNvPr>
@@ -10680,7 +14108,7 @@
           <p:cNvPr id="10" name="">
             <a:extLst xmlns:a="http://schemas.openxmlformats.org/drawingml/2006/main">
               <a:ext uri="{FF2B5EF4-FFF2-40B4-BE49-F238E27FC236}">
-                <a16:creationId xmlns:a16="http://schemas.microsoft.com/office/drawing/2014/main" id="{56C6825B-89AA-463A-A36A-2CF7982CC080}"/>
+                <a16:creationId xmlns:a16="http://schemas.microsoft.com/office/drawing/2014/main" id="{29414C1A-E9F8-47E2-8F46-D1B5FBA5F872}"/>
               </a:ext>
             </a:extLst>
           </p:cNvPr>
@@ -10710,7 +14138,7 @@
           <p:cNvPr id="11" name="">
             <a:extLst xmlns:a="http://schemas.openxmlformats.org/drawingml/2006/main">
               <a:ext uri="{FF2B5EF4-FFF2-40B4-BE49-F238E27FC236}">
-                <a16:creationId xmlns:a16="http://schemas.microsoft.com/office/drawing/2014/main" id="{88B3B71E-A8F9-4004-B69E-49BB42341DEE}"/>
+                <a16:creationId xmlns:a16="http://schemas.microsoft.com/office/drawing/2014/main" id="{01F92893-0C74-42E4-8765-7FB0E3F415A8}"/>
               </a:ext>
             </a:extLst>
           </p:cNvPr>
@@ -10743,7 +14171,7 @@
           <p:cNvPr id="12" name="1">
             <a:extLst xmlns:a="http://schemas.openxmlformats.org/drawingml/2006/main">
               <a:ext uri="{FF2B5EF4-FFF2-40B4-BE49-F238E27FC236}">
-                <a16:creationId xmlns:a16="http://schemas.microsoft.com/office/drawing/2014/main" id="{A4BDF7A2-F9CB-422A-8D06-3D847204D540}"/>
+                <a16:creationId xmlns:a16="http://schemas.microsoft.com/office/drawing/2014/main" id="{FE51E0F0-4B26-463A-8D33-41576F036B29}"/>
               </a:ext>
             </a:extLst>
           </p:cNvPr>
@@ -10901,7 +14329,7 @@
           <p:cNvPr id="13" name="">
             <a:extLst xmlns:a="http://schemas.openxmlformats.org/drawingml/2006/main">
               <a:ext uri="{FF2B5EF4-FFF2-40B4-BE49-F238E27FC236}">
-                <a16:creationId xmlns:a16="http://schemas.microsoft.com/office/drawing/2014/main" id="{6AC1DC93-9876-481E-BCC0-8E5F9B5F703E}"/>
+                <a16:creationId xmlns:a16="http://schemas.microsoft.com/office/drawing/2014/main" id="{CF44E809-3DC6-4393-8987-2F77A5FBE978}"/>
               </a:ext>
             </a:extLst>
           </p:cNvPr>
@@ -10934,7 +14362,7 @@
           <p:cNvPr id="14" name="1">
             <a:extLst xmlns:a="http://schemas.openxmlformats.org/drawingml/2006/main">
               <a:ext uri="{FF2B5EF4-FFF2-40B4-BE49-F238E27FC236}">
-                <a16:creationId xmlns:a16="http://schemas.microsoft.com/office/drawing/2014/main" id="{9C2C7929-4C43-46C8-9A73-4450A404F64A}"/>
+                <a16:creationId xmlns:a16="http://schemas.microsoft.com/office/drawing/2014/main" id="{06DA1528-C005-4DBB-A3E3-EB99BEF8426A}"/>
               </a:ext>
             </a:extLst>
           </p:cNvPr>
@@ -11092,7 +14520,7 @@
           <p:cNvPr id="15" name="">
             <a:extLst xmlns:a="http://schemas.openxmlformats.org/drawingml/2006/main">
               <a:ext uri="{FF2B5EF4-FFF2-40B4-BE49-F238E27FC236}">
-                <a16:creationId xmlns:a16="http://schemas.microsoft.com/office/drawing/2014/main" id="{575D0456-7110-4BD1-8B97-2EDD5C4086F8}"/>
+                <a16:creationId xmlns:a16="http://schemas.microsoft.com/office/drawing/2014/main" id="{FA9B90AD-4586-4098-9D48-AC6EE24AC87C}"/>
               </a:ext>
             </a:extLst>
           </p:cNvPr>
@@ -11125,7 +14553,7 @@
           <p:cNvPr id="16" name="1">
             <a:extLst xmlns:a="http://schemas.openxmlformats.org/drawingml/2006/main">
               <a:ext uri="{FF2B5EF4-FFF2-40B4-BE49-F238E27FC236}">
-                <a16:creationId xmlns:a16="http://schemas.microsoft.com/office/drawing/2014/main" id="{DBA2E043-FACC-4B94-94FE-E5C39034D33C}"/>
+                <a16:creationId xmlns:a16="http://schemas.microsoft.com/office/drawing/2014/main" id="{C1CB7B67-2E5C-49E8-9E72-C6F0B994C298}"/>
               </a:ext>
             </a:extLst>
           </p:cNvPr>
@@ -11283,7 +14711,7 @@
           <p:cNvPr id="17" name="3개">
             <a:extLst xmlns:a="http://schemas.openxmlformats.org/drawingml/2006/main">
               <a:ext uri="{FF2B5EF4-FFF2-40B4-BE49-F238E27FC236}">
-                <a16:creationId xmlns:a16="http://schemas.microsoft.com/office/drawing/2014/main" id="{79F3D998-83CC-4716-8DBC-6B873131D37C}"/>
+                <a16:creationId xmlns:a16="http://schemas.microsoft.com/office/drawing/2014/main" id="{221ECE66-96C3-4828-BCF4-D75F6AEF4EAF}"/>
               </a:ext>
             </a:extLst>
           </p:cNvPr>
@@ -11441,7 +14869,7 @@
           <p:cNvPr id="18" name="">
             <a:extLst xmlns:a="http://schemas.openxmlformats.org/drawingml/2006/main">
               <a:ext uri="{FF2B5EF4-FFF2-40B4-BE49-F238E27FC236}">
-                <a16:creationId xmlns:a16="http://schemas.microsoft.com/office/drawing/2014/main" id="{41AAFDAE-DF27-4CAC-8A93-26466DE5F129}"/>
+                <a16:creationId xmlns:a16="http://schemas.microsoft.com/office/drawing/2014/main" id="{C1DAB3FF-50B7-4DE5-B371-1D0B8791E3BB}"/>
               </a:ext>
             </a:extLst>
           </p:cNvPr>
@@ -11472,7 +14900,7 @@
           <p:cNvPr id="19" name="std::vector&lt;int&gt; b{3, 1};">
             <a:extLst xmlns:a="http://schemas.openxmlformats.org/drawingml/2006/main">
               <a:ext uri="{FF2B5EF4-FFF2-40B4-BE49-F238E27FC236}">
-                <a16:creationId xmlns:a16="http://schemas.microsoft.com/office/drawing/2014/main" id="{BA09DEA8-BC7A-4D4A-82C5-6B290AD3CBC5}"/>
+                <a16:creationId xmlns:a16="http://schemas.microsoft.com/office/drawing/2014/main" id="{06EA873B-EF83-4538-9154-F5DF9ABAB1D4}"/>
               </a:ext>
             </a:extLst>
           </p:cNvPr>
@@ -11630,7 +15058,7 @@
           <p:cNvPr id="20" name="">
             <a:extLst xmlns:a="http://schemas.openxmlformats.org/drawingml/2006/main">
               <a:ext uri="{FF2B5EF4-FFF2-40B4-BE49-F238E27FC236}">
-                <a16:creationId xmlns:a16="http://schemas.microsoft.com/office/drawing/2014/main" id="{53DBED12-D96E-4008-B4AB-1B013E0200BD}"/>
+                <a16:creationId xmlns:a16="http://schemas.microsoft.com/office/drawing/2014/main" id="{81357C4F-4C44-4E15-B24C-E4D248A2BAB7}"/>
               </a:ext>
             </a:extLst>
           </p:cNvPr>
@@ -11660,7 +15088,7 @@
           <p:cNvPr id="21" name="">
             <a:extLst xmlns:a="http://schemas.openxmlformats.org/drawingml/2006/main">
               <a:ext uri="{FF2B5EF4-FFF2-40B4-BE49-F238E27FC236}">
-                <a16:creationId xmlns:a16="http://schemas.microsoft.com/office/drawing/2014/main" id="{C01B842D-0A8A-46C7-8F3C-1420CFFB089A}"/>
+                <a16:creationId xmlns:a16="http://schemas.microsoft.com/office/drawing/2014/main" id="{B5F9FAB3-122D-4799-B56D-B730C08D363F}"/>
               </a:ext>
             </a:extLst>
           </p:cNvPr>
@@ -11693,7 +15121,7 @@
           <p:cNvPr id="22" name="3">
             <a:extLst xmlns:a="http://schemas.openxmlformats.org/drawingml/2006/main">
               <a:ext uri="{FF2B5EF4-FFF2-40B4-BE49-F238E27FC236}">
-                <a16:creationId xmlns:a16="http://schemas.microsoft.com/office/drawing/2014/main" id="{09B1EDEA-3663-41DC-951A-991BD023C4EA}"/>
+                <a16:creationId xmlns:a16="http://schemas.microsoft.com/office/drawing/2014/main" id="{9CCCDE2D-1714-4F7E-A915-89664E4669A4}"/>
               </a:ext>
             </a:extLst>
           </p:cNvPr>
@@ -11851,7 +15279,7 @@
           <p:cNvPr id="23" name="">
             <a:extLst xmlns:a="http://schemas.openxmlformats.org/drawingml/2006/main">
               <a:ext uri="{FF2B5EF4-FFF2-40B4-BE49-F238E27FC236}">
-                <a16:creationId xmlns:a16="http://schemas.microsoft.com/office/drawing/2014/main" id="{3718CA18-5D71-4EC3-9FDE-B356945CE357}"/>
+                <a16:creationId xmlns:a16="http://schemas.microsoft.com/office/drawing/2014/main" id="{5A71DB17-9FD4-465E-89E6-94F23A8BC312}"/>
               </a:ext>
             </a:extLst>
           </p:cNvPr>
@@ -11884,7 +15312,7 @@
           <p:cNvPr id="24" name="1">
             <a:extLst xmlns:a="http://schemas.openxmlformats.org/drawingml/2006/main">
               <a:ext uri="{FF2B5EF4-FFF2-40B4-BE49-F238E27FC236}">
-                <a16:creationId xmlns:a16="http://schemas.microsoft.com/office/drawing/2014/main" id="{9D20C340-8DAA-400C-83A9-E5DAF2276374}"/>
+                <a16:creationId xmlns:a16="http://schemas.microsoft.com/office/drawing/2014/main" id="{B6BEFC60-3713-40B7-9BA5-44847C8B1E7E}"/>
               </a:ext>
             </a:extLst>
           </p:cNvPr>
@@ -12042,7 +15470,7 @@
           <p:cNvPr id="25" name="2개">
             <a:extLst xmlns:a="http://schemas.openxmlformats.org/drawingml/2006/main">
               <a:ext uri="{FF2B5EF4-FFF2-40B4-BE49-F238E27FC236}">
-                <a16:creationId xmlns:a16="http://schemas.microsoft.com/office/drawing/2014/main" id="{54688FF0-33F7-45E4-BD36-61AEB8E429AD}"/>
+                <a16:creationId xmlns:a16="http://schemas.microsoft.com/office/drawing/2014/main" id="{8D88B992-7CBE-41EF-952B-B70ACA490915}"/>
               </a:ext>
             </a:extLst>
           </p:cNvPr>
@@ -12200,7 +15628,7 @@
           <p:cNvPr id="26" name="">
             <a:extLst xmlns:a="http://schemas.openxmlformats.org/drawingml/2006/main">
               <a:ext uri="{FF2B5EF4-FFF2-40B4-BE49-F238E27FC236}">
-                <a16:creationId xmlns:a16="http://schemas.microsoft.com/office/drawing/2014/main" id="{65BCD954-DEF0-4FB3-A518-58EA702E4C7F}"/>
+                <a16:creationId xmlns:a16="http://schemas.microsoft.com/office/drawing/2014/main" id="{2B888D21-8B71-4ECD-A805-06870BA03129}"/>
               </a:ext>
             </a:extLst>
           </p:cNvPr>
@@ -12233,7 +15661,7 @@
           <p:cNvPr id="27" name="IDE">
             <a:extLst xmlns:a="http://schemas.openxmlformats.org/drawingml/2006/main">
               <a:ext uri="{FF2B5EF4-FFF2-40B4-BE49-F238E27FC236}">
-                <a16:creationId xmlns:a16="http://schemas.microsoft.com/office/drawing/2014/main" id="{B1AC07BB-4EF9-4022-9FE8-B25A89F4FAF7}"/>
+                <a16:creationId xmlns:a16="http://schemas.microsoft.com/office/drawing/2014/main" id="{87264392-3F92-4631-96B1-E715D57A0613}"/>
               </a:ext>
             </a:extLst>
           </p:cNvPr>
@@ -12391,7 +15819,7 @@
           <p:cNvPr id="28" name="코드 선택·복사">
             <a:extLst xmlns:a="http://schemas.openxmlformats.org/drawingml/2006/main">
               <a:ext uri="{FF2B5EF4-FFF2-40B4-BE49-F238E27FC236}">
-                <a16:creationId xmlns:a16="http://schemas.microsoft.com/office/drawing/2014/main" id="{5CBCC9C7-C325-4DC1-85A3-BF97C989C45F}"/>
+                <a16:creationId xmlns:a16="http://schemas.microsoft.com/office/drawing/2014/main" id="{65A7C16F-05E0-41C0-832C-B8374F750F88}"/>
               </a:ext>
             </a:extLst>
           </p:cNvPr>
@@ -12549,7 +15977,7 @@
           <p:cNvPr id="29" name="">
             <a:extLst xmlns:a="http://schemas.openxmlformats.org/drawingml/2006/main">
               <a:ext uri="{FF2B5EF4-FFF2-40B4-BE49-F238E27FC236}">
-                <a16:creationId xmlns:a16="http://schemas.microsoft.com/office/drawing/2014/main" id="{AF34E466-E37A-44E9-AB78-47C7D8E953AD}"/>
+                <a16:creationId xmlns:a16="http://schemas.microsoft.com/office/drawing/2014/main" id="{4ECC28EB-73CA-48F7-9945-049034661056}"/>
               </a:ext>
             </a:extLst>
           </p:cNvPr>
@@ -12582,7 +16010,7 @@
           <p:cNvPr id="30" name="Chatbot">
             <a:extLst xmlns:a="http://schemas.openxmlformats.org/drawingml/2006/main">
               <a:ext uri="{FF2B5EF4-FFF2-40B4-BE49-F238E27FC236}">
-                <a16:creationId xmlns:a16="http://schemas.microsoft.com/office/drawing/2014/main" id="{C8707B25-DB17-4502-8EC9-EF7C65E8969C}"/>
+                <a16:creationId xmlns:a16="http://schemas.microsoft.com/office/drawing/2014/main" id="{C88A1F7C-8DE9-433F-8653-5BFE7ECA9CB2}"/>
               </a:ext>
             </a:extLst>
           </p:cNvPr>
@@ -12740,7 +16168,7 @@
           <p:cNvPr id="31" name="붙여넣고 질문">
             <a:extLst xmlns:a="http://schemas.openxmlformats.org/drawingml/2006/main">
               <a:ext uri="{FF2B5EF4-FFF2-40B4-BE49-F238E27FC236}">
-                <a16:creationId xmlns:a16="http://schemas.microsoft.com/office/drawing/2014/main" id="{7B61A1CB-3CB0-4BEB-93ED-285DC82B9574}"/>
+                <a16:creationId xmlns:a16="http://schemas.microsoft.com/office/drawing/2014/main" id="{7CE5B206-3AEC-4342-8167-4D6675063A93}"/>
               </a:ext>
             </a:extLst>
           </p:cNvPr>
@@ -12898,7 +16326,7 @@
           <p:cNvPr id="32" name="">
             <a:extLst xmlns:a="http://schemas.openxmlformats.org/drawingml/2006/main">
               <a:ext uri="{FF2B5EF4-FFF2-40B4-BE49-F238E27FC236}">
-                <a16:creationId xmlns:a16="http://schemas.microsoft.com/office/drawing/2014/main" id="{6D08B11E-FB89-4AAB-91A2-2B866249E5B9}"/>
+                <a16:creationId xmlns:a16="http://schemas.microsoft.com/office/drawing/2014/main" id="{D6181BCD-7DC2-4A20-833D-FC58DA9EC013}"/>
               </a:ext>
             </a:extLst>
           </p:cNvPr>
@@ -12931,7 +16359,7 @@
           <p:cNvPr id="33" name="IDE">
             <a:extLst xmlns:a="http://schemas.openxmlformats.org/drawingml/2006/main">
               <a:ext uri="{FF2B5EF4-FFF2-40B4-BE49-F238E27FC236}">
-                <a16:creationId xmlns:a16="http://schemas.microsoft.com/office/drawing/2014/main" id="{15C027BB-2611-4D55-9EDB-009489305847}"/>
+                <a16:creationId xmlns:a16="http://schemas.microsoft.com/office/drawing/2014/main" id="{17030D43-726B-4B26-8639-7C268C22B9CD}"/>
               </a:ext>
             </a:extLst>
           </p:cNvPr>
@@ -13089,7 +16517,7 @@
           <p:cNvPr id="34" name="답 확인·적용">
             <a:extLst xmlns:a="http://schemas.openxmlformats.org/drawingml/2006/main">
               <a:ext uri="{FF2B5EF4-FFF2-40B4-BE49-F238E27FC236}">
-                <a16:creationId xmlns:a16="http://schemas.microsoft.com/office/drawing/2014/main" id="{FD2410D9-BEAD-4B8A-9222-FD7919974251}"/>
+                <a16:creationId xmlns:a16="http://schemas.microsoft.com/office/drawing/2014/main" id="{C4072FCD-DBA3-4F4F-968C-832DC66F1342}"/>
               </a:ext>
             </a:extLst>
           </p:cNvPr>
@@ -13247,7 +16675,7 @@
           <p:cNvPr id="35" name="">
             <a:extLst xmlns:a="http://schemas.openxmlformats.org/drawingml/2006/main">
               <a:ext uri="{FF2B5EF4-FFF2-40B4-BE49-F238E27FC236}">
-                <a16:creationId xmlns:a16="http://schemas.microsoft.com/office/drawing/2014/main" id="{90901E9C-4DC0-4587-89DC-754C10FC0F23}"/>
+                <a16:creationId xmlns:a16="http://schemas.microsoft.com/office/drawing/2014/main" id="{9F47F7B9-372C-4244-B65F-934A5F6D31E8}"/>
               </a:ext>
             </a:extLst>
           </p:cNvPr>
@@ -13277,7 +16705,7 @@
           <p:cNvPr id="36" name="">
             <a:extLst xmlns:a="http://schemas.openxmlformats.org/drawingml/2006/main">
               <a:ext uri="{FF2B5EF4-FFF2-40B4-BE49-F238E27FC236}">
-                <a16:creationId xmlns:a16="http://schemas.microsoft.com/office/drawing/2014/main" id="{31CDBF49-105E-41CF-88A3-2D9B704C263A}"/>
+                <a16:creationId xmlns:a16="http://schemas.microsoft.com/office/drawing/2014/main" id="{BA9380C6-057A-45B9-B9FD-60B77D5CBCC7}"/>
               </a:ext>
             </a:extLst>
           </p:cNvPr>
@@ -13307,7 +16735,7 @@
           <p:cNvPr id="37" name="필요한 코드와 맥락을 사람이 골라 전달한다.">
             <a:extLst xmlns:a="http://schemas.openxmlformats.org/drawingml/2006/main">
               <a:ext uri="{FF2B5EF4-FFF2-40B4-BE49-F238E27FC236}">
-                <a16:creationId xmlns:a16="http://schemas.microsoft.com/office/drawing/2014/main" id="{1B5CAFB5-14B1-4F0D-9496-38BE2C1CAE2E}"/>
+                <a16:creationId xmlns:a16="http://schemas.microsoft.com/office/drawing/2014/main" id="{3630A13C-7E88-43FC-814D-8C7FA64CC3D8}"/>
               </a:ext>
             </a:extLst>
           </p:cNvPr>
@@ -13465,7 +16893,7 @@
           <p:cNvPr id="38" name="Legacy module connection">
             <a:extLst xmlns:a="http://schemas.openxmlformats.org/drawingml/2006/main">
               <a:ext uri="{FF2B5EF4-FFF2-40B4-BE49-F238E27FC236}">
-                <a16:creationId xmlns:a16="http://schemas.microsoft.com/office/drawing/2014/main" id="{6234A565-2F94-4E14-B195-AFC2109EA6D0}"/>
+                <a16:creationId xmlns:a16="http://schemas.microsoft.com/office/drawing/2014/main" id="{890EA394-3F4E-4EE1-9ACD-0F265D6DC843}"/>
               </a:ext>
             </a:extLst>
           </p:cNvPr>
@@ -13621,7 +17049,7 @@
     </p:spTree>
     <p:extLst>
       <p:ext uri="{BB962C8B-B14F-4D97-AF65-F5344CB8AC3E}">
-        <p14:creationId xmlns:p14="http://schemas.microsoft.com/office/powerpoint/2010/main" val="793166334"/>
+        <p14:creationId xmlns:p14="http://schemas.microsoft.com/office/powerpoint/2010/main" val="258440049"/>
       </p:ext>
     </p:extLst>
   </p:cSld>
@@ -13652,7 +17080,7 @@
           <p:cNvPr id="34" name="ACT 0 · Visual Studio에서 디버깅할 때 살펴보던 정보">
             <a:extLst xmlns:a="http://schemas.openxmlformats.org/drawingml/2006/main">
               <a:ext uri="{FF2B5EF4-FFF2-40B4-BE49-F238E27FC236}">
-                <a16:creationId xmlns:a16="http://schemas.microsoft.com/office/drawing/2014/main" id="{7096972C-5FED-4C64-B447-9D4ADB96AFE1}"/>
+                <a16:creationId xmlns:a16="http://schemas.microsoft.com/office/drawing/2014/main" id="{7E80D56F-B434-4CB2-A526-724F9E98BB55}"/>
               </a:ext>
             </a:extLst>
           </p:cNvPr>
@@ -13810,7 +17238,7 @@
           <p:cNvPr id="2" name="S03">
             <a:extLst xmlns:a="http://schemas.openxmlformats.org/drawingml/2006/main">
               <a:ext uri="{FF2B5EF4-FFF2-40B4-BE49-F238E27FC236}">
-                <a16:creationId xmlns:a16="http://schemas.microsoft.com/office/drawing/2014/main" id="{1CCC7CCA-CBE8-4FCD-9012-B5260A247BE0}"/>
+                <a16:creationId xmlns:a16="http://schemas.microsoft.com/office/drawing/2014/main" id="{C2FA008A-7721-4D42-B3E2-86996E56627E}"/>
               </a:ext>
             </a:extLst>
           </p:cNvPr>
@@ -13968,7 +17396,7 @@
           <p:cNvPr id="3" name="질문이 커지면 Context를 모으는 일이 생긴다">
             <a:extLst xmlns:a="http://schemas.openxmlformats.org/drawingml/2006/main">
               <a:ext uri="{FF2B5EF4-FFF2-40B4-BE49-F238E27FC236}">
-                <a16:creationId xmlns:a16="http://schemas.microsoft.com/office/drawing/2014/main" id="{A779DC40-3F95-4425-9068-2E7D30D12A9A}"/>
+                <a16:creationId xmlns:a16="http://schemas.microsoft.com/office/drawing/2014/main" id="{BEE0C68C-DAA5-4BFA-97A8-E602439B48B3}"/>
               </a:ext>
             </a:extLst>
           </p:cNvPr>
@@ -14126,7 +17554,7 @@
           <p:cNvPr id="4" name="">
             <a:extLst xmlns:a="http://schemas.openxmlformats.org/drawingml/2006/main">
               <a:ext uri="{FF2B5EF4-FFF2-40B4-BE49-F238E27FC236}">
-                <a16:creationId xmlns:a16="http://schemas.microsoft.com/office/drawing/2014/main" id="{537E6432-848E-428C-8051-ADFAACEC6A5E}"/>
+                <a16:creationId xmlns:a16="http://schemas.microsoft.com/office/drawing/2014/main" id="{E0A075C0-A062-45CB-BF53-52D2D5BDE013}"/>
               </a:ext>
             </a:extLst>
           </p:cNvPr>
@@ -14157,7 +17585,7 @@
           <p:cNvPr id="5" name="Visual Studio 사용자의 디버깅 정보를 설명하는 교육용 병렬 도식">
             <a:extLst xmlns:a="http://schemas.openxmlformats.org/drawingml/2006/main">
               <a:ext uri="{FF2B5EF4-FFF2-40B4-BE49-F238E27FC236}">
-                <a16:creationId xmlns:a16="http://schemas.microsoft.com/office/drawing/2014/main" id="{5DCE98E5-DA82-482C-9C7C-5892239E6335}"/>
+                <a16:creationId xmlns:a16="http://schemas.microsoft.com/office/drawing/2014/main" id="{5267E447-B7C3-4521-A98B-38D4BAAA59C3}"/>
               </a:ext>
             </a:extLst>
           </p:cNvPr>
@@ -14315,7 +17743,7 @@
           <p:cNvPr id="6" name="특정 Trial의 실제 화면이 아닙니다. 명세서는 IDE 밖에서도 함께 참고하는 문서입니다.">
             <a:extLst xmlns:a="http://schemas.openxmlformats.org/drawingml/2006/main">
               <a:ext uri="{FF2B5EF4-FFF2-40B4-BE49-F238E27FC236}">
-                <a16:creationId xmlns:a16="http://schemas.microsoft.com/office/drawing/2014/main" id="{26F8E23E-2680-4A88-BFE7-19681B9178C5}"/>
+                <a16:creationId xmlns:a16="http://schemas.microsoft.com/office/drawing/2014/main" id="{1F6CE01D-4CB7-490A-9239-2D46933B78F3}"/>
               </a:ext>
             </a:extLst>
           </p:cNvPr>
@@ -14473,7 +17901,7 @@
           <p:cNvPr id="7" name="“결과가 기대와 다르다” — 우리는 어디를 살펴볼까?">
             <a:extLst xmlns:a="http://schemas.openxmlformats.org/drawingml/2006/main">
               <a:ext uri="{FF2B5EF4-FFF2-40B4-BE49-F238E27FC236}">
-                <a16:creationId xmlns:a16="http://schemas.microsoft.com/office/drawing/2014/main" id="{327E4239-8456-4BD7-9EEA-A9973CE34682}"/>
+                <a16:creationId xmlns:a16="http://schemas.microsoft.com/office/drawing/2014/main" id="{8A1D2229-0159-44EC-B3EE-5D680783BBDC}"/>
               </a:ext>
             </a:extLst>
           </p:cNvPr>
@@ -14631,7 +18059,7 @@
           <p:cNvPr id="8" name="">
             <a:extLst xmlns:a="http://schemas.openxmlformats.org/drawingml/2006/main">
               <a:ext uri="{FF2B5EF4-FFF2-40B4-BE49-F238E27FC236}">
-                <a16:creationId xmlns:a16="http://schemas.microsoft.com/office/drawing/2014/main" id="{26E800FE-9258-4DE0-8045-FDCFD571F583}"/>
+                <a16:creationId xmlns:a16="http://schemas.microsoft.com/office/drawing/2014/main" id="{435FFF8C-D2A2-4939-9C4C-62C56EE5A17A}"/>
               </a:ext>
             </a:extLst>
           </p:cNvPr>
@@ -14664,7 +18092,7 @@
           <p:cNvPr id="9" name="테스트 탐색기">
             <a:extLst xmlns:a="http://schemas.openxmlformats.org/drawingml/2006/main">
               <a:ext uri="{FF2B5EF4-FFF2-40B4-BE49-F238E27FC236}">
-                <a16:creationId xmlns:a16="http://schemas.microsoft.com/office/drawing/2014/main" id="{93072E69-81C9-40AB-B603-D0E9768A7258}"/>
+                <a16:creationId xmlns:a16="http://schemas.microsoft.com/office/drawing/2014/main" id="{4C0CF85D-4287-4725-98EF-ECB54B8E3D5D}"/>
               </a:ext>
             </a:extLst>
           </p:cNvPr>
@@ -14822,7 +18250,7 @@
           <p:cNvPr id="10" name="">
             <a:extLst xmlns:a="http://schemas.openxmlformats.org/drawingml/2006/main">
               <a:ext uri="{FF2B5EF4-FFF2-40B4-BE49-F238E27FC236}">
-                <a16:creationId xmlns:a16="http://schemas.microsoft.com/office/drawing/2014/main" id="{60AE65B0-C5AE-4931-8E30-DD01777B1FB0}"/>
+                <a16:creationId xmlns:a16="http://schemas.microsoft.com/office/drawing/2014/main" id="{EECC26C0-FA8B-4467-90E4-F50C1ED36481}"/>
               </a:ext>
             </a:extLst>
           </p:cNvPr>
@@ -14853,7 +18281,7 @@
           <p:cNvPr id="11" name="실패한 테스트&#10;기대값과 실제값">
             <a:extLst xmlns:a="http://schemas.openxmlformats.org/drawingml/2006/main">
               <a:ext uri="{FF2B5EF4-FFF2-40B4-BE49-F238E27FC236}">
-                <a16:creationId xmlns:a16="http://schemas.microsoft.com/office/drawing/2014/main" id="{7150E85B-3E4D-4966-9DBD-298A0882A2DE}"/>
+                <a16:creationId xmlns:a16="http://schemas.microsoft.com/office/drawing/2014/main" id="{A4C8533A-8E5C-49E4-9F39-97CFB44E3424}"/>
               </a:ext>
             </a:extLst>
           </p:cNvPr>
@@ -15034,7 +18462,7 @@
           <p:cNvPr id="12" name="">
             <a:extLst xmlns:a="http://schemas.openxmlformats.org/drawingml/2006/main">
               <a:ext uri="{FF2B5EF4-FFF2-40B4-BE49-F238E27FC236}">
-                <a16:creationId xmlns:a16="http://schemas.microsoft.com/office/drawing/2014/main" id="{18242A52-7B14-4973-AA1A-13658D96E9A7}"/>
+                <a16:creationId xmlns:a16="http://schemas.microsoft.com/office/drawing/2014/main" id="{5B19FCFB-F056-4548-BA14-F5C00268BDDA}"/>
               </a:ext>
             </a:extLst>
           </p:cNvPr>
@@ -15067,7 +18495,7 @@
           <p:cNvPr id="13" name="호출 스택">
             <a:extLst xmlns:a="http://schemas.openxmlformats.org/drawingml/2006/main">
               <a:ext uri="{FF2B5EF4-FFF2-40B4-BE49-F238E27FC236}">
-                <a16:creationId xmlns:a16="http://schemas.microsoft.com/office/drawing/2014/main" id="{F4CCEAC6-86C2-4B2D-8FB2-AE1EC791F491}"/>
+                <a16:creationId xmlns:a16="http://schemas.microsoft.com/office/drawing/2014/main" id="{ED264802-30E3-4BAD-AFA8-ECF1BDC178FD}"/>
               </a:ext>
             </a:extLst>
           </p:cNvPr>
@@ -15225,7 +18653,7 @@
           <p:cNvPr id="14" name="">
             <a:extLst xmlns:a="http://schemas.openxmlformats.org/drawingml/2006/main">
               <a:ext uri="{FF2B5EF4-FFF2-40B4-BE49-F238E27FC236}">
-                <a16:creationId xmlns:a16="http://schemas.microsoft.com/office/drawing/2014/main" id="{0CF35FD9-5CEE-4A18-BD04-65B396B60404}"/>
+                <a16:creationId xmlns:a16="http://schemas.microsoft.com/office/drawing/2014/main" id="{016FB87A-14EF-49E3-8F4B-9705AB42A8D1}"/>
               </a:ext>
             </a:extLst>
           </p:cNvPr>
@@ -15256,7 +18684,7 @@
           <p:cNvPr id="15" name="어디서 호출됐나?&#10;함수와 호출 순서">
             <a:extLst xmlns:a="http://schemas.openxmlformats.org/drawingml/2006/main">
               <a:ext uri="{FF2B5EF4-FFF2-40B4-BE49-F238E27FC236}">
-                <a16:creationId xmlns:a16="http://schemas.microsoft.com/office/drawing/2014/main" id="{49C12749-836C-4F62-AC07-453C46741FB9}"/>
+                <a16:creationId xmlns:a16="http://schemas.microsoft.com/office/drawing/2014/main" id="{319DE529-89D3-40CC-847F-67F7913D443F}"/>
               </a:ext>
             </a:extLst>
           </p:cNvPr>
@@ -15437,7 +18865,7 @@
           <p:cNvPr id="16" name="">
             <a:extLst xmlns:a="http://schemas.openxmlformats.org/drawingml/2006/main">
               <a:ext uri="{FF2B5EF4-FFF2-40B4-BE49-F238E27FC236}">
-                <a16:creationId xmlns:a16="http://schemas.microsoft.com/office/drawing/2014/main" id="{68CD8662-1E1D-46DC-8C58-3AE7550ECACB}"/>
+                <a16:creationId xmlns:a16="http://schemas.microsoft.com/office/drawing/2014/main" id="{D4DEF035-DB80-47FC-BE73-50C5D1711071}"/>
               </a:ext>
             </a:extLst>
           </p:cNvPr>
@@ -15470,7 +18898,7 @@
           <p:cNvPr id="17" name="소스·참조">
             <a:extLst xmlns:a="http://schemas.openxmlformats.org/drawingml/2006/main">
               <a:ext uri="{FF2B5EF4-FFF2-40B4-BE49-F238E27FC236}">
-                <a16:creationId xmlns:a16="http://schemas.microsoft.com/office/drawing/2014/main" id="{54B4C4DB-EFD0-4290-9E06-5EDB4D80F85E}"/>
+                <a16:creationId xmlns:a16="http://schemas.microsoft.com/office/drawing/2014/main" id="{2600AFF5-98D2-4E3E-B8C3-746CA9260DDC}"/>
               </a:ext>
             </a:extLst>
           </p:cNvPr>
@@ -15628,7 +19056,7 @@
           <p:cNvPr id="18" name="">
             <a:extLst xmlns:a="http://schemas.openxmlformats.org/drawingml/2006/main">
               <a:ext uri="{FF2B5EF4-FFF2-40B4-BE49-F238E27FC236}">
-                <a16:creationId xmlns:a16="http://schemas.microsoft.com/office/drawing/2014/main" id="{A6660977-DD2C-4177-A3DC-25E0E8147A0F}"/>
+                <a16:creationId xmlns:a16="http://schemas.microsoft.com/office/drawing/2014/main" id="{A614124E-ABEE-4779-9C16-6A126E1E09D0}"/>
               </a:ext>
             </a:extLst>
           </p:cNvPr>
@@ -15659,7 +19087,7 @@
           <p:cNvPr id="19" name="관련 구현과 호출부&#10;코드의 분기">
             <a:extLst xmlns:a="http://schemas.openxmlformats.org/drawingml/2006/main">
               <a:ext uri="{FF2B5EF4-FFF2-40B4-BE49-F238E27FC236}">
-                <a16:creationId xmlns:a16="http://schemas.microsoft.com/office/drawing/2014/main" id="{F3B8450E-297A-47DD-BE69-24A0D379ED02}"/>
+                <a16:creationId xmlns:a16="http://schemas.microsoft.com/office/drawing/2014/main" id="{58A35564-0452-4652-8028-D9C58FBB48E2}"/>
               </a:ext>
             </a:extLst>
           </p:cNvPr>
@@ -15840,7 +19268,7 @@
           <p:cNvPr id="20" name="">
             <a:extLst xmlns:a="http://schemas.openxmlformats.org/drawingml/2006/main">
               <a:ext uri="{FF2B5EF4-FFF2-40B4-BE49-F238E27FC236}">
-                <a16:creationId xmlns:a16="http://schemas.microsoft.com/office/drawing/2014/main" id="{01F2D4DB-D7B0-413D-B2D2-39CA534120E9}"/>
+                <a16:creationId xmlns:a16="http://schemas.microsoft.com/office/drawing/2014/main" id="{B42EE497-054C-46AF-92C7-0CC237990547}"/>
               </a:ext>
             </a:extLst>
           </p:cNvPr>
@@ -15873,7 +19301,7 @@
           <p:cNvPr id="21" name="지역 변수·조사식">
             <a:extLst xmlns:a="http://schemas.openxmlformats.org/drawingml/2006/main">
               <a:ext uri="{FF2B5EF4-FFF2-40B4-BE49-F238E27FC236}">
-                <a16:creationId xmlns:a16="http://schemas.microsoft.com/office/drawing/2014/main" id="{B6A94784-1202-4A31-A03A-6EBA981F71A6}"/>
+                <a16:creationId xmlns:a16="http://schemas.microsoft.com/office/drawing/2014/main" id="{FE1D9C61-234A-4CA7-9C57-5D8191F713E7}"/>
               </a:ext>
             </a:extLst>
           </p:cNvPr>
@@ -16031,7 +19459,7 @@
           <p:cNvPr id="22" name="">
             <a:extLst xmlns:a="http://schemas.openxmlformats.org/drawingml/2006/main">
               <a:ext uri="{FF2B5EF4-FFF2-40B4-BE49-F238E27FC236}">
-                <a16:creationId xmlns:a16="http://schemas.microsoft.com/office/drawing/2014/main" id="{BE57BECE-0889-4DAA-9305-9D2D33CAC54E}"/>
+                <a16:creationId xmlns:a16="http://schemas.microsoft.com/office/drawing/2014/main" id="{A211BF7A-DB4B-4991-AB1D-1CF999FCB819}"/>
               </a:ext>
             </a:extLst>
           </p:cNvPr>
@@ -16062,7 +19490,7 @@
           <p:cNvPr id="23" name="멈춘 지점의 입력&#10;변수의 실제 값">
             <a:extLst xmlns:a="http://schemas.openxmlformats.org/drawingml/2006/main">
               <a:ext uri="{FF2B5EF4-FFF2-40B4-BE49-F238E27FC236}">
-                <a16:creationId xmlns:a16="http://schemas.microsoft.com/office/drawing/2014/main" id="{59E67982-A1B6-4617-9177-A8149338A817}"/>
+                <a16:creationId xmlns:a16="http://schemas.microsoft.com/office/drawing/2014/main" id="{264A9E73-77AF-445C-8A10-F3D128E26838}"/>
               </a:ext>
             </a:extLst>
           </p:cNvPr>
@@ -16243,7 +19671,7 @@
           <p:cNvPr id="24" name="">
             <a:extLst xmlns:a="http://schemas.openxmlformats.org/drawingml/2006/main">
               <a:ext uri="{FF2B5EF4-FFF2-40B4-BE49-F238E27FC236}">
-                <a16:creationId xmlns:a16="http://schemas.microsoft.com/office/drawing/2014/main" id="{A8362056-331F-400B-97AF-7325EC437EA8}"/>
+                <a16:creationId xmlns:a16="http://schemas.microsoft.com/office/drawing/2014/main" id="{6154BCC2-927A-44B4-919D-852B94FB6DBA}"/>
               </a:ext>
             </a:extLst>
           </p:cNvPr>
@@ -16276,7 +19704,7 @@
           <p:cNvPr id="25" name="출력·로그">
             <a:extLst xmlns:a="http://schemas.openxmlformats.org/drawingml/2006/main">
               <a:ext uri="{FF2B5EF4-FFF2-40B4-BE49-F238E27FC236}">
-                <a16:creationId xmlns:a16="http://schemas.microsoft.com/office/drawing/2014/main" id="{B4635911-F49B-4FD2-B2B9-45F30633CE9B}"/>
+                <a16:creationId xmlns:a16="http://schemas.microsoft.com/office/drawing/2014/main" id="{D2134C43-5D62-4F96-8605-C21CC0C26BE1}"/>
               </a:ext>
             </a:extLst>
           </p:cNvPr>
@@ -16434,7 +19862,7 @@
           <p:cNvPr id="26" name="">
             <a:extLst xmlns:a="http://schemas.openxmlformats.org/drawingml/2006/main">
               <a:ext uri="{FF2B5EF4-FFF2-40B4-BE49-F238E27FC236}">
-                <a16:creationId xmlns:a16="http://schemas.microsoft.com/office/drawing/2014/main" id="{2FC8AEA1-E8E0-4A19-AB51-10B005A92814}"/>
+                <a16:creationId xmlns:a16="http://schemas.microsoft.com/office/drawing/2014/main" id="{7548EBE3-A426-40A8-9283-C01E090C7024}"/>
               </a:ext>
             </a:extLst>
           </p:cNvPr>
@@ -16465,7 +19893,7 @@
           <p:cNvPr id="27" name="빌드·실행 메시지&#10;오류가 난 시점">
             <a:extLst xmlns:a="http://schemas.openxmlformats.org/drawingml/2006/main">
               <a:ext uri="{FF2B5EF4-FFF2-40B4-BE49-F238E27FC236}">
-                <a16:creationId xmlns:a16="http://schemas.microsoft.com/office/drawing/2014/main" id="{9698BBA2-C529-4537-A849-AE8053F61E68}"/>
+                <a16:creationId xmlns:a16="http://schemas.microsoft.com/office/drawing/2014/main" id="{970C8694-5079-4017-8191-180BD273F766}"/>
               </a:ext>
             </a:extLst>
           </p:cNvPr>
@@ -16646,7 +20074,7 @@
           <p:cNvPr id="28" name="">
             <a:extLst xmlns:a="http://schemas.openxmlformats.org/drawingml/2006/main">
               <a:ext uri="{FF2B5EF4-FFF2-40B4-BE49-F238E27FC236}">
-                <a16:creationId xmlns:a16="http://schemas.microsoft.com/office/drawing/2014/main" id="{6DAB26AE-37B6-4074-A440-F98EC8A3072F}"/>
+                <a16:creationId xmlns:a16="http://schemas.microsoft.com/office/drawing/2014/main" id="{60721826-E9E0-45E1-9947-1C36AD3419BA}"/>
               </a:ext>
             </a:extLst>
           </p:cNvPr>
@@ -16679,7 +20107,7 @@
           <p:cNvPr id="29" name="명세서 · 외부 문서">
             <a:extLst xmlns:a="http://schemas.openxmlformats.org/drawingml/2006/main">
               <a:ext uri="{FF2B5EF4-FFF2-40B4-BE49-F238E27FC236}">
-                <a16:creationId xmlns:a16="http://schemas.microsoft.com/office/drawing/2014/main" id="{7ABE47CB-519B-4167-8743-F801F6215BD1}"/>
+                <a16:creationId xmlns:a16="http://schemas.microsoft.com/office/drawing/2014/main" id="{E2918C47-6C6F-4ABB-A415-77EC4FA328CB}"/>
               </a:ext>
             </a:extLst>
           </p:cNvPr>
@@ -16837,7 +20265,7 @@
           <p:cNvPr id="30" name="">
             <a:extLst xmlns:a="http://schemas.openxmlformats.org/drawingml/2006/main">
               <a:ext uri="{FF2B5EF4-FFF2-40B4-BE49-F238E27FC236}">
-                <a16:creationId xmlns:a16="http://schemas.microsoft.com/office/drawing/2014/main" id="{56FE5E7F-1E32-4405-8EEE-173585E0CCE5}"/>
+                <a16:creationId xmlns:a16="http://schemas.microsoft.com/office/drawing/2014/main" id="{8C865D03-54D4-4A7B-A941-CEF06393CD6A}"/>
               </a:ext>
             </a:extLst>
           </p:cNvPr>
@@ -16868,7 +20296,7 @@
           <p:cNvPr id="31" name="기대하는 동작&#10;입력 범위·예외 조건">
             <a:extLst xmlns:a="http://schemas.openxmlformats.org/drawingml/2006/main">
               <a:ext uri="{FF2B5EF4-FFF2-40B4-BE49-F238E27FC236}">
-                <a16:creationId xmlns:a16="http://schemas.microsoft.com/office/drawing/2014/main" id="{3C246A2E-8F64-4DFA-A920-49066AD179D1}"/>
+                <a16:creationId xmlns:a16="http://schemas.microsoft.com/office/drawing/2014/main" id="{5925B204-F806-4315-A670-F809934EA26B}"/>
               </a:ext>
             </a:extLst>
           </p:cNvPr>
@@ -17049,7 +20477,7 @@
           <p:cNvPr id="32" name="이 정보 하나하나가 Context다.">
             <a:extLst xmlns:a="http://schemas.openxmlformats.org/drawingml/2006/main">
               <a:ext uri="{FF2B5EF4-FFF2-40B4-BE49-F238E27FC236}">
-                <a16:creationId xmlns:a16="http://schemas.microsoft.com/office/drawing/2014/main" id="{17B07E1F-C816-474B-A6F8-B731C1728C2E}"/>
+                <a16:creationId xmlns:a16="http://schemas.microsoft.com/office/drawing/2014/main" id="{158E01A5-B2B8-49F2-BABC-D1D563DEC47F}"/>
               </a:ext>
             </a:extLst>
           </p:cNvPr>
@@ -17207,7 +20635,7 @@
           <p:cNvPr id="33" name="Legacy module connection">
             <a:extLst xmlns:a="http://schemas.openxmlformats.org/drawingml/2006/main">
               <a:ext uri="{FF2B5EF4-FFF2-40B4-BE49-F238E27FC236}">
-                <a16:creationId xmlns:a16="http://schemas.microsoft.com/office/drawing/2014/main" id="{8C8102D7-58B4-4F88-88BE-1AB59B9F022D}"/>
+                <a16:creationId xmlns:a16="http://schemas.microsoft.com/office/drawing/2014/main" id="{3B05764A-DC2E-410A-AD04-08F542BE270D}"/>
               </a:ext>
             </a:extLst>
           </p:cNvPr>
@@ -17363,7 +20791,7 @@
     </p:spTree>
     <p:extLst>
       <p:ext uri="{BB962C8B-B14F-4D97-AF65-F5344CB8AC3E}">
-        <p14:creationId xmlns:p14="http://schemas.microsoft.com/office/powerpoint/2010/main" val="450649659"/>
+        <p14:creationId xmlns:p14="http://schemas.microsoft.com/office/powerpoint/2010/main" val="1165927641"/>
       </p:ext>
     </p:extLst>
   </p:cSld>
@@ -17394,7 +20822,7 @@
           <p:cNvPr id="20" name="ACT 0 · Repository 조사 관찰">
             <a:extLst xmlns:a="http://schemas.openxmlformats.org/drawingml/2006/main">
               <a:ext uri="{FF2B5EF4-FFF2-40B4-BE49-F238E27FC236}">
-                <a16:creationId xmlns:a16="http://schemas.microsoft.com/office/drawing/2014/main" id="{DCB146D9-17E0-4388-A4EB-A95F484CCD4B}"/>
+                <a16:creationId xmlns:a16="http://schemas.microsoft.com/office/drawing/2014/main" id="{857A41F7-383A-47E1-BF56-126037DA4DDF}"/>
               </a:ext>
             </a:extLst>
           </p:cNvPr>
@@ -17552,7 +20980,7 @@
           <p:cNvPr id="2" name="S04">
             <a:extLst xmlns:a="http://schemas.openxmlformats.org/drawingml/2006/main">
               <a:ext uri="{FF2B5EF4-FFF2-40B4-BE49-F238E27FC236}">
-                <a16:creationId xmlns:a16="http://schemas.microsoft.com/office/drawing/2014/main" id="{73D0F7EC-D67A-4EB5-BACC-EB2EEEE504AA}"/>
+                <a16:creationId xmlns:a16="http://schemas.microsoft.com/office/drawing/2014/main" id="{C252F760-F5F8-47EF-AE20-508FD2AAFC7E}"/>
               </a:ext>
             </a:extLst>
           </p:cNvPr>
@@ -17710,7 +21138,7 @@
           <p:cNvPr id="3" name="파일명을 주지 않으면 Agent는 어디부터 볼까?">
             <a:extLst xmlns:a="http://schemas.openxmlformats.org/drawingml/2006/main">
               <a:ext uri="{FF2B5EF4-FFF2-40B4-BE49-F238E27FC236}">
-                <a16:creationId xmlns:a16="http://schemas.microsoft.com/office/drawing/2014/main" id="{FCEDE6BE-6A1A-4383-A575-24595A09B74E}"/>
+                <a16:creationId xmlns:a16="http://schemas.microsoft.com/office/drawing/2014/main" id="{7D21E2B6-A4BE-495C-B9C4-AC4FF9D3138D}"/>
               </a:ext>
             </a:extLst>
           </p:cNvPr>
@@ -17868,7 +21296,7 @@
           <p:cNvPr id="4" name="">
             <a:extLst xmlns:a="http://schemas.openxmlformats.org/drawingml/2006/main">
               <a:ext uri="{FF2B5EF4-FFF2-40B4-BE49-F238E27FC236}">
-                <a16:creationId xmlns:a16="http://schemas.microsoft.com/office/drawing/2014/main" id="{2733EFBE-65BC-40B8-A943-DCDC243E1D3D}"/>
+                <a16:creationId xmlns:a16="http://schemas.microsoft.com/office/drawing/2014/main" id="{82BEF6D0-823C-47E9-94C8-0AF5608AE734}"/>
               </a:ext>
             </a:extLst>
           </p:cNvPr>
@@ -17899,7 +21327,7 @@
           <p:cNvPr id="5" name="실제 요청: TRIAL-001 · Codex CLI 0.154.0 · macOS · 읽기 전용">
             <a:extLst xmlns:a="http://schemas.openxmlformats.org/drawingml/2006/main">
               <a:ext uri="{FF2B5EF4-FFF2-40B4-BE49-F238E27FC236}">
-                <a16:creationId xmlns:a16="http://schemas.microsoft.com/office/drawing/2014/main" id="{D026C3F0-8544-4F0C-BF64-EFE88820840E}"/>
+                <a16:creationId xmlns:a16="http://schemas.microsoft.com/office/drawing/2014/main" id="{12B2E7D5-7FFE-405E-8B87-3EFE93D38BBD}"/>
               </a:ext>
             </a:extLst>
           </p:cNvPr>
@@ -18057,7 +21485,7 @@
           <p:cNvPr id="6" name="우측은 가상 GoogleTest 예시 · 실제 Trial은 Python unittest · 현재 Deskto">
             <a:extLst xmlns:a="http://schemas.openxmlformats.org/drawingml/2006/main">
               <a:ext uri="{FF2B5EF4-FFF2-40B4-BE49-F238E27FC236}">
-                <a16:creationId xmlns:a16="http://schemas.microsoft.com/office/drawing/2014/main" id="{FE93313C-6B5B-462F-AC1A-CF9EEB1A57C4}"/>
+                <a16:creationId xmlns:a16="http://schemas.microsoft.com/office/drawing/2014/main" id="{DE6B1670-ACB9-48C4-8E7D-CA817AE8AAF3}"/>
               </a:ext>
             </a:extLst>
           </p:cNvPr>
@@ -18215,7 +21643,7 @@
           <p:cNvPr id="7" name="TRIAL-001의 실제 조사 요청">
             <a:extLst xmlns:a="http://schemas.openxmlformats.org/drawingml/2006/main">
               <a:ext uri="{FF2B5EF4-FFF2-40B4-BE49-F238E27FC236}">
-                <a16:creationId xmlns:a16="http://schemas.microsoft.com/office/drawing/2014/main" id="{160F0C36-A0F0-4117-99D7-B86AD6B14D5B}"/>
+                <a16:creationId xmlns:a16="http://schemas.microsoft.com/office/drawing/2014/main" id="{25279297-05EE-43C3-9CD3-47417B833A71}"/>
               </a:ext>
             </a:extLst>
           </p:cNvPr>
@@ -18373,7 +21801,7 @@
           <p:cNvPr id="8" name="실패 하나가 있는 상황">
             <a:extLst xmlns:a="http://schemas.openxmlformats.org/drawingml/2006/main">
               <a:ext uri="{FF2B5EF4-FFF2-40B4-BE49-F238E27FC236}">
-                <a16:creationId xmlns:a16="http://schemas.microsoft.com/office/drawing/2014/main" id="{379DFE18-B826-48C7-91CB-77B9E32109C3}"/>
+                <a16:creationId xmlns:a16="http://schemas.microsoft.com/office/drawing/2014/main" id="{6F330B3F-B7E7-4A60-B613-453C812EE278}"/>
               </a:ext>
             </a:extLst>
           </p:cNvPr>
@@ -18531,7 +21959,7 @@
           <p:cNvPr id="9" name="C++ 설명용 가상 화면">
             <a:extLst xmlns:a="http://schemas.openxmlformats.org/drawingml/2006/main">
               <a:ext uri="{FF2B5EF4-FFF2-40B4-BE49-F238E27FC236}">
-                <a16:creationId xmlns:a16="http://schemas.microsoft.com/office/drawing/2014/main" id="{9094B35A-6D1A-4443-83E3-70060759DC6B}"/>
+                <a16:creationId xmlns:a16="http://schemas.microsoft.com/office/drawing/2014/main" id="{5E11DEDE-9425-4F19-8B8B-2E62D197BC8F}"/>
               </a:ext>
             </a:extLst>
           </p:cNvPr>
@@ -18689,7 +22117,7 @@
           <p:cNvPr id="10" name="">
             <a:extLst xmlns:a="http://schemas.openxmlformats.org/drawingml/2006/main">
               <a:ext uri="{FF2B5EF4-FFF2-40B4-BE49-F238E27FC236}">
-                <a16:creationId xmlns:a16="http://schemas.microsoft.com/office/drawing/2014/main" id="{75164269-4DE3-4AA2-B9CA-1B10648C0D75}"/>
+                <a16:creationId xmlns:a16="http://schemas.microsoft.com/office/drawing/2014/main" id="{CE85DF5C-39A0-4DCC-AAD5-BB144EE080EF}"/>
               </a:ext>
             </a:extLst>
           </p:cNvPr>
@@ -18722,7 +22150,7 @@
           <p:cNvPr id="11" name="조사 요청 · 입력창 형태로 재구성">
             <a:extLst xmlns:a="http://schemas.openxmlformats.org/drawingml/2006/main">
               <a:ext uri="{FF2B5EF4-FFF2-40B4-BE49-F238E27FC236}">
-                <a16:creationId xmlns:a16="http://schemas.microsoft.com/office/drawing/2014/main" id="{1AE06FC2-E939-4D13-B0E9-26C88374646C}"/>
+                <a16:creationId xmlns:a16="http://schemas.microsoft.com/office/drawing/2014/main" id="{1C58C749-F28C-4C90-BCD0-CB1C7CE5E17B}"/>
               </a:ext>
             </a:extLst>
           </p:cNvPr>
@@ -18880,7 +22308,7 @@
           <p:cNvPr id="12" name="">
             <a:extLst xmlns:a="http://schemas.openxmlformats.org/drawingml/2006/main">
               <a:ext uri="{FF2B5EF4-FFF2-40B4-BE49-F238E27FC236}">
-                <a16:creationId xmlns:a16="http://schemas.microsoft.com/office/drawing/2014/main" id="{C2FCDA20-BA5E-40BC-8A79-C5466EAB1EC3}"/>
+                <a16:creationId xmlns:a16="http://schemas.microsoft.com/office/drawing/2014/main" id="{F020E54B-9BA2-44AC-BEB5-96034E583963}"/>
               </a:ext>
             </a:extLst>
           </p:cNvPr>
@@ -18911,7 +22339,7 @@
           <p:cNvPr id="13" name="현재 이 저장소에서 테스트 하나가&#10;실패하고 있다. 실패 원인을 조사해줘.&#10;관련 구현과 호출 경로, 실패하는&#10;">
             <a:extLst xmlns:a="http://schemas.openxmlformats.org/drawingml/2006/main">
               <a:ext uri="{FF2B5EF4-FFF2-40B4-BE49-F238E27FC236}">
-                <a16:creationId xmlns:a16="http://schemas.microsoft.com/office/drawing/2014/main" id="{A3ECDCDD-0FEA-4C1C-8E9D-47F6A480A7B1}"/>
+                <a16:creationId xmlns:a16="http://schemas.microsoft.com/office/drawing/2014/main" id="{ADCFC511-2402-4C0D-8321-001477C8FF3E}"/>
               </a:ext>
             </a:extLst>
           </p:cNvPr>
@@ -19184,7 +22612,7 @@
           <p:cNvPr id="14" name="＋">
             <a:extLst xmlns:a="http://schemas.openxmlformats.org/drawingml/2006/main">
               <a:ext uri="{FF2B5EF4-FFF2-40B4-BE49-F238E27FC236}">
-                <a16:creationId xmlns:a16="http://schemas.microsoft.com/office/drawing/2014/main" id="{4C4B2A54-FE7C-496C-BF1F-D7DE5AF3B124}"/>
+                <a16:creationId xmlns:a16="http://schemas.microsoft.com/office/drawing/2014/main" id="{CE71FCF4-6FB2-479F-865D-32CBB98180BC}"/>
               </a:ext>
             </a:extLst>
           </p:cNvPr>
@@ -19342,7 +22770,7 @@
           <p:cNvPr id="15" name="">
             <a:extLst xmlns:a="http://schemas.openxmlformats.org/drawingml/2006/main">
               <a:ext uri="{FF2B5EF4-FFF2-40B4-BE49-F238E27FC236}">
-                <a16:creationId xmlns:a16="http://schemas.microsoft.com/office/drawing/2014/main" id="{999CE4E8-92AB-47D0-82FF-A43C8C03E486}"/>
+                <a16:creationId xmlns:a16="http://schemas.microsoft.com/office/drawing/2014/main" id="{2148F5EA-16DE-4B0A-861D-E13FE7CB97DD}"/>
               </a:ext>
             </a:extLst>
           </p:cNvPr>
@@ -19372,7 +22800,7 @@
           <p:cNvPr id="16" name="↑">
             <a:extLst xmlns:a="http://schemas.openxmlformats.org/drawingml/2006/main">
               <a:ext uri="{FF2B5EF4-FFF2-40B4-BE49-F238E27FC236}">
-                <a16:creationId xmlns:a16="http://schemas.microsoft.com/office/drawing/2014/main" id="{618CB643-A82B-4094-A695-C15865702554}"/>
+                <a16:creationId xmlns:a16="http://schemas.microsoft.com/office/drawing/2014/main" id="{147CF43A-71B0-44B0-9E5C-19C23EBD02F5}"/>
               </a:ext>
             </a:extLst>
           </p:cNvPr>
@@ -19530,7 +22958,7 @@
           <p:cNvPr id="17" name="">
             <a:extLst xmlns:a="http://schemas.openxmlformats.org/drawingml/2006/main">
               <a:ext uri="{FF2B5EF4-FFF2-40B4-BE49-F238E27FC236}">
-                <a16:creationId xmlns:a16="http://schemas.microsoft.com/office/drawing/2014/main" id="{4E40EA58-95CC-4872-B6D4-5574398B868F}"/>
+                <a16:creationId xmlns:a16="http://schemas.microsoft.com/office/drawing/2014/main" id="{BECAA12E-3780-414F-95A7-4656E7F0359C}"/>
               </a:ext>
             </a:extLst>
           </p:cNvPr>
@@ -19540,7 +22968,7 @@
           <p:nvPr/>
         </p:nvPicPr>
         <p:blipFill>
-          <a:blip xmlns:r="http://schemas.openxmlformats.org/officeDocument/2006/relationships" xmlns:a="http://schemas.openxmlformats.org/drawingml/2006/main" r:embed="Rf6232fdb52d74d1e"/>
+          <a:blip xmlns:r="http://schemas.openxmlformats.org/officeDocument/2006/relationships" xmlns:a="http://schemas.openxmlformats.org/drawingml/2006/main" r:embed="R2dd38606307b4e4e"/>
           <a:stretch xmlns:a="http://schemas.openxmlformats.org/drawingml/2006/main"/>
         </p:blipFill>
         <p:spPr>
@@ -19558,7 +22986,7 @@
           <p:cNvPr id="18" name="관찰할 것    실패 테스트  ·  관련 구현  ·  호출 경로">
             <a:extLst xmlns:a="http://schemas.openxmlformats.org/drawingml/2006/main">
               <a:ext uri="{FF2B5EF4-FFF2-40B4-BE49-F238E27FC236}">
-                <a16:creationId xmlns:a16="http://schemas.microsoft.com/office/drawing/2014/main" id="{39F57436-3B1D-4118-85AC-0925EC0CA171}"/>
+                <a16:creationId xmlns:a16="http://schemas.microsoft.com/office/drawing/2014/main" id="{2B15B1DF-DF75-4B09-9C38-CCE7FE736259}"/>
               </a:ext>
             </a:extLst>
           </p:cNvPr>
@@ -19716,7 +23144,7 @@
           <p:cNvPr id="19" name="Legacy module connection">
             <a:extLst xmlns:a="http://schemas.openxmlformats.org/drawingml/2006/main">
               <a:ext uri="{FF2B5EF4-FFF2-40B4-BE49-F238E27FC236}">
-                <a16:creationId xmlns:a16="http://schemas.microsoft.com/office/drawing/2014/main" id="{C0082E97-2B63-40A3-A034-9438FB542CEF}"/>
+                <a16:creationId xmlns:a16="http://schemas.microsoft.com/office/drawing/2014/main" id="{18AFB3E6-73C0-4825-93C3-69D75B5DB607}"/>
               </a:ext>
             </a:extLst>
           </p:cNvPr>
@@ -19872,7 +23300,7 @@
     </p:spTree>
     <p:extLst>
       <p:ext uri="{BB962C8B-B14F-4D97-AF65-F5344CB8AC3E}">
-        <p14:creationId xmlns:p14="http://schemas.microsoft.com/office/powerpoint/2010/main" val="1402716363"/>
+        <p14:creationId xmlns:p14="http://schemas.microsoft.com/office/powerpoint/2010/main" val="2060138080"/>
       </p:ext>
     </p:extLst>
   </p:cSld>
@@ -19903,7 +23331,7 @@
           <p:cNvPr id="46" name="ACT 0  ·  Repository 탐색">
             <a:extLst xmlns:a="http://schemas.openxmlformats.org/drawingml/2006/main">
               <a:ext uri="{FF2B5EF4-FFF2-40B4-BE49-F238E27FC236}">
-                <a16:creationId xmlns:a16="http://schemas.microsoft.com/office/drawing/2014/main" id="{C834C7A5-E362-4045-B8E6-C3C3E0D8CB62}"/>
+                <a16:creationId xmlns:a16="http://schemas.microsoft.com/office/drawing/2014/main" id="{D07CF29C-6D72-464F-A071-0F79D109EBA0}"/>
               </a:ext>
             </a:extLst>
           </p:cNvPr>
@@ -20061,7 +23489,7 @@
           <p:cNvPr id="2" name="S05">
             <a:extLst xmlns:a="http://schemas.openxmlformats.org/drawingml/2006/main">
               <a:ext uri="{FF2B5EF4-FFF2-40B4-BE49-F238E27FC236}">
-                <a16:creationId xmlns:a16="http://schemas.microsoft.com/office/drawing/2014/main" id="{8BCFB7C9-C18F-4C78-AA74-077296C68C9A}"/>
+                <a16:creationId xmlns:a16="http://schemas.microsoft.com/office/drawing/2014/main" id="{B66C1C3A-E96F-4286-BA5B-8FC811D0E682}"/>
               </a:ext>
             </a:extLst>
           </p:cNvPr>
@@ -20219,7 +23647,7 @@
           <p:cNvPr id="3" name="Agent가 Test와 호출 경로를 찾았다">
             <a:extLst xmlns:a="http://schemas.openxmlformats.org/drawingml/2006/main">
               <a:ext uri="{FF2B5EF4-FFF2-40B4-BE49-F238E27FC236}">
-                <a16:creationId xmlns:a16="http://schemas.microsoft.com/office/drawing/2014/main" id="{DB1CFCBC-6BAE-4325-B10C-DC28F17CB609}"/>
+                <a16:creationId xmlns:a16="http://schemas.microsoft.com/office/drawing/2014/main" id="{D425B4FB-FE2F-4B4E-AD0D-8A72F2324B56}"/>
               </a:ext>
             </a:extLst>
           </p:cNvPr>
@@ -20377,7 +23805,7 @@
           <p:cNvPr id="4" name="">
             <a:extLst xmlns:a="http://schemas.openxmlformats.org/drawingml/2006/main">
               <a:ext uri="{FF2B5EF4-FFF2-40B4-BE49-F238E27FC236}">
-                <a16:creationId xmlns:a16="http://schemas.microsoft.com/office/drawing/2014/main" id="{52740299-EC8D-4E1D-99F3-ACB8ECDF885A}"/>
+                <a16:creationId xmlns:a16="http://schemas.microsoft.com/office/drawing/2014/main" id="{23DD38AE-825A-4AF1-9E02-687E61781402}"/>
               </a:ext>
             </a:extLst>
           </p:cNvPr>
@@ -20408,7 +23836,7 @@
           <p:cNvPr id="5" name="TRIAL-001 기록·STATE-00 테스트 재구성  |  Codex CLI 0.154.0 · 읽기 전용">
             <a:extLst xmlns:a="http://schemas.openxmlformats.org/drawingml/2006/main">
               <a:ext uri="{FF2B5EF4-FFF2-40B4-BE49-F238E27FC236}">
-                <a16:creationId xmlns:a16="http://schemas.microsoft.com/office/drawing/2014/main" id="{94EB4392-AA9F-457D-AAC4-C6910A255997}"/>
+                <a16:creationId xmlns:a16="http://schemas.microsoft.com/office/drawing/2014/main" id="{AB137EC4-9898-4AB3-A19F-85A1D2BC9C66}"/>
               </a:ext>
             </a:extLst>
           </p:cNvPr>
@@ -20566,7 +23994,7 @@
           <p:cNvPr id="6" name="실제 실행 화면이 아님 · 이 조사에서는 코드 수정 없음 · 현재 Desktop 동작 미검증">
             <a:extLst xmlns:a="http://schemas.openxmlformats.org/drawingml/2006/main">
               <a:ext uri="{FF2B5EF4-FFF2-40B4-BE49-F238E27FC236}">
-                <a16:creationId xmlns:a16="http://schemas.microsoft.com/office/drawing/2014/main" id="{B8940AC8-401B-430A-93F3-925C2016EDE4}"/>
+                <a16:creationId xmlns:a16="http://schemas.microsoft.com/office/drawing/2014/main" id="{22D0D0F8-B69E-48E6-BF7A-A12B50C9660D}"/>
               </a:ext>
             </a:extLst>
           </p:cNvPr>
@@ -20724,7 +24152,7 @@
           <p:cNvPr id="7" name="의도한 폭과 실제로 포함된 열 수가 달랐다">
             <a:extLst xmlns:a="http://schemas.openxmlformats.org/drawingml/2006/main">
               <a:ext uri="{FF2B5EF4-FFF2-40B4-BE49-F238E27FC236}">
-                <a16:creationId xmlns:a16="http://schemas.microsoft.com/office/drawing/2014/main" id="{57F96365-4F5C-46F0-A36D-114FCF95DE57}"/>
+                <a16:creationId xmlns:a16="http://schemas.microsoft.com/office/drawing/2014/main" id="{CD4E7373-364F-4263-8FB8-98689ED60843}"/>
               </a:ext>
             </a:extLst>
           </p:cNvPr>
@@ -20882,7 +24310,7 @@
           <p:cNvPr id="8" name="crop(image, 1, 3)">
             <a:extLst xmlns:a="http://schemas.openxmlformats.org/drawingml/2006/main">
               <a:ext uri="{FF2B5EF4-FFF2-40B4-BE49-F238E27FC236}">
-                <a16:creationId xmlns:a16="http://schemas.microsoft.com/office/drawing/2014/main" id="{C4758CDB-F234-46FD-9C90-5D1F5CCC98B7}"/>
+                <a16:creationId xmlns:a16="http://schemas.microsoft.com/office/drawing/2014/main" id="{3F394FEE-F260-4891-B60F-501B06AA7FE0}"/>
               </a:ext>
             </a:extLst>
           </p:cNvPr>
@@ -21040,7 +24468,7 @@
           <p:cNvPr id="9" name="명세: 끝 좌표 3은 제외">
             <a:extLst xmlns:a="http://schemas.openxmlformats.org/drawingml/2006/main">
               <a:ext uri="{FF2B5EF4-FFF2-40B4-BE49-F238E27FC236}">
-                <a16:creationId xmlns:a16="http://schemas.microsoft.com/office/drawing/2014/main" id="{CBCB80CC-A3F1-4291-903C-111F25247294}"/>
+                <a16:creationId xmlns:a16="http://schemas.microsoft.com/office/drawing/2014/main" id="{0CB67AC1-C2E2-4C2D-9E6E-44ADA9579BB0}"/>
               </a:ext>
             </a:extLst>
           </p:cNvPr>
@@ -21198,7 +24626,7 @@
           <p:cNvPr id="10" name="입력">
             <a:extLst xmlns:a="http://schemas.openxmlformats.org/drawingml/2006/main">
               <a:ext uri="{FF2B5EF4-FFF2-40B4-BE49-F238E27FC236}">
-                <a16:creationId xmlns:a16="http://schemas.microsoft.com/office/drawing/2014/main" id="{08BFE2F4-30EF-45D6-8096-81D560B142CB}"/>
+                <a16:creationId xmlns:a16="http://schemas.microsoft.com/office/drawing/2014/main" id="{1D1136D9-D140-44A5-9C4F-115A3E39BF47}"/>
               </a:ext>
             </a:extLst>
           </p:cNvPr>
@@ -21356,7 +24784,7 @@
           <p:cNvPr id="11" name="0">
             <a:extLst xmlns:a="http://schemas.openxmlformats.org/drawingml/2006/main">
               <a:ext uri="{FF2B5EF4-FFF2-40B4-BE49-F238E27FC236}">
-                <a16:creationId xmlns:a16="http://schemas.microsoft.com/office/drawing/2014/main" id="{DAC667B4-48B7-4C87-8DAD-4F20E08EAAEE}"/>
+                <a16:creationId xmlns:a16="http://schemas.microsoft.com/office/drawing/2014/main" id="{64678901-3124-472F-B97A-645AA3E49C9A}"/>
               </a:ext>
             </a:extLst>
           </p:cNvPr>
@@ -21514,7 +24942,7 @@
           <p:cNvPr id="12" name="1">
             <a:extLst xmlns:a="http://schemas.openxmlformats.org/drawingml/2006/main">
               <a:ext uri="{FF2B5EF4-FFF2-40B4-BE49-F238E27FC236}">
-                <a16:creationId xmlns:a16="http://schemas.microsoft.com/office/drawing/2014/main" id="{BABB1379-32B6-48F6-BA5E-7D8EE5F77031}"/>
+                <a16:creationId xmlns:a16="http://schemas.microsoft.com/office/drawing/2014/main" id="{9B57128B-FFE6-4E7B-84FC-0E5D6B9700E7}"/>
               </a:ext>
             </a:extLst>
           </p:cNvPr>
@@ -21672,7 +25100,7 @@
           <p:cNvPr id="13" name="2">
             <a:extLst xmlns:a="http://schemas.openxmlformats.org/drawingml/2006/main">
               <a:ext uri="{FF2B5EF4-FFF2-40B4-BE49-F238E27FC236}">
-                <a16:creationId xmlns:a16="http://schemas.microsoft.com/office/drawing/2014/main" id="{A57C8A7C-618D-4211-AA32-51F30C17CDBD}"/>
+                <a16:creationId xmlns:a16="http://schemas.microsoft.com/office/drawing/2014/main" id="{9E6002E0-BC51-448B-8685-20D388894D7E}"/>
               </a:ext>
             </a:extLst>
           </p:cNvPr>
@@ -21830,7 +25258,7 @@
           <p:cNvPr id="14" name="3">
             <a:extLst xmlns:a="http://schemas.openxmlformats.org/drawingml/2006/main">
               <a:ext uri="{FF2B5EF4-FFF2-40B4-BE49-F238E27FC236}">
-                <a16:creationId xmlns:a16="http://schemas.microsoft.com/office/drawing/2014/main" id="{BFBA8208-767F-46E4-9296-6A8AB2FD52CD}"/>
+                <a16:creationId xmlns:a16="http://schemas.microsoft.com/office/drawing/2014/main" id="{191E7978-877E-4956-9A89-0907B4882F14}"/>
               </a:ext>
             </a:extLst>
           </p:cNvPr>
@@ -21988,7 +25416,7 @@
           <p:cNvPr id="15" name="">
             <a:extLst xmlns:a="http://schemas.openxmlformats.org/drawingml/2006/main">
               <a:ext uri="{FF2B5EF4-FFF2-40B4-BE49-F238E27FC236}">
-                <a16:creationId xmlns:a16="http://schemas.microsoft.com/office/drawing/2014/main" id="{CF78BC2F-98E6-4AD1-9B54-6243CA8A29F4}"/>
+                <a16:creationId xmlns:a16="http://schemas.microsoft.com/office/drawing/2014/main" id="{4F5F73E3-24DD-4722-AD41-EE9397E74DC4}"/>
               </a:ext>
             </a:extLst>
           </p:cNvPr>
@@ -22021,7 +25449,7 @@
           <p:cNvPr id="16" name="1">
             <a:extLst xmlns:a="http://schemas.openxmlformats.org/drawingml/2006/main">
               <a:ext uri="{FF2B5EF4-FFF2-40B4-BE49-F238E27FC236}">
-                <a16:creationId xmlns:a16="http://schemas.microsoft.com/office/drawing/2014/main" id="{FFC458B6-6064-48BC-BE74-FCD77E16164A}"/>
+                <a16:creationId xmlns:a16="http://schemas.microsoft.com/office/drawing/2014/main" id="{0E54EC95-DE0D-43A9-9123-208B16380EB4}"/>
               </a:ext>
             </a:extLst>
           </p:cNvPr>
@@ -22179,7 +25607,7 @@
           <p:cNvPr id="17" name="">
             <a:extLst xmlns:a="http://schemas.openxmlformats.org/drawingml/2006/main">
               <a:ext uri="{FF2B5EF4-FFF2-40B4-BE49-F238E27FC236}">
-                <a16:creationId xmlns:a16="http://schemas.microsoft.com/office/drawing/2014/main" id="{CE053E59-DBB8-40CB-8D56-80868CF72072}"/>
+                <a16:creationId xmlns:a16="http://schemas.microsoft.com/office/drawing/2014/main" id="{5BFA8511-0642-46AA-98AE-D515623010F5}"/>
               </a:ext>
             </a:extLst>
           </p:cNvPr>
@@ -22212,7 +25640,7 @@
           <p:cNvPr id="18" name="2">
             <a:extLst xmlns:a="http://schemas.openxmlformats.org/drawingml/2006/main">
               <a:ext uri="{FF2B5EF4-FFF2-40B4-BE49-F238E27FC236}">
-                <a16:creationId xmlns:a16="http://schemas.microsoft.com/office/drawing/2014/main" id="{2BE87B18-F4DD-4EB1-AF2B-B78B00EB0D6C}"/>
+                <a16:creationId xmlns:a16="http://schemas.microsoft.com/office/drawing/2014/main" id="{B38AF030-4BFB-4215-9668-BAC6E0B257F8}"/>
               </a:ext>
             </a:extLst>
           </p:cNvPr>
@@ -22370,7 +25798,7 @@
           <p:cNvPr id="19" name="">
             <a:extLst xmlns:a="http://schemas.openxmlformats.org/drawingml/2006/main">
               <a:ext uri="{FF2B5EF4-FFF2-40B4-BE49-F238E27FC236}">
-                <a16:creationId xmlns:a16="http://schemas.microsoft.com/office/drawing/2014/main" id="{585E5E3C-1927-4F44-937C-709C1767D216}"/>
+                <a16:creationId xmlns:a16="http://schemas.microsoft.com/office/drawing/2014/main" id="{FB35193A-CF87-4F0B-8506-139AFDBA4089}"/>
               </a:ext>
             </a:extLst>
           </p:cNvPr>
@@ -22403,7 +25831,7 @@
           <p:cNvPr id="20" name="3">
             <a:extLst xmlns:a="http://schemas.openxmlformats.org/drawingml/2006/main">
               <a:ext uri="{FF2B5EF4-FFF2-40B4-BE49-F238E27FC236}">
-                <a16:creationId xmlns:a16="http://schemas.microsoft.com/office/drawing/2014/main" id="{13AD42FC-9E1A-483C-90E0-CC99C2EFD2F4}"/>
+                <a16:creationId xmlns:a16="http://schemas.microsoft.com/office/drawing/2014/main" id="{81FE13E8-C723-440C-A273-ACB8D78E54BA}"/>
               </a:ext>
             </a:extLst>
           </p:cNvPr>
@@ -22561,7 +25989,7 @@
           <p:cNvPr id="21" name="">
             <a:extLst xmlns:a="http://schemas.openxmlformats.org/drawingml/2006/main">
               <a:ext uri="{FF2B5EF4-FFF2-40B4-BE49-F238E27FC236}">
-                <a16:creationId xmlns:a16="http://schemas.microsoft.com/office/drawing/2014/main" id="{FC3DF84A-1638-43C6-AC40-579FE22659B3}"/>
+                <a16:creationId xmlns:a16="http://schemas.microsoft.com/office/drawing/2014/main" id="{63419E5D-BD86-424A-A083-E05A4FA25D54}"/>
               </a:ext>
             </a:extLst>
           </p:cNvPr>
@@ -22594,7 +26022,7 @@
           <p:cNvPr id="22" name="4">
             <a:extLst xmlns:a="http://schemas.openxmlformats.org/drawingml/2006/main">
               <a:ext uri="{FF2B5EF4-FFF2-40B4-BE49-F238E27FC236}">
-                <a16:creationId xmlns:a16="http://schemas.microsoft.com/office/drawing/2014/main" id="{1232A90E-9934-44C8-BA0D-A393544C5E62}"/>
+                <a16:creationId xmlns:a16="http://schemas.microsoft.com/office/drawing/2014/main" id="{AE2B528B-DD03-47AE-B535-7CED7491507F}"/>
               </a:ext>
             </a:extLst>
           </p:cNvPr>
@@ -22752,7 +26180,7 @@
           <p:cNvPr id="23" name="첫 행만 표시">
             <a:extLst xmlns:a="http://schemas.openxmlformats.org/drawingml/2006/main">
               <a:ext uri="{FF2B5EF4-FFF2-40B4-BE49-F238E27FC236}">
-                <a16:creationId xmlns:a16="http://schemas.microsoft.com/office/drawing/2014/main" id="{FC91A4D9-8885-4CB2-B25A-EA3D67831F51}"/>
+                <a16:creationId xmlns:a16="http://schemas.microsoft.com/office/drawing/2014/main" id="{BA792EE3-3AD7-44F6-9231-F024FD333D4F}"/>
               </a:ext>
             </a:extLst>
           </p:cNvPr>
@@ -22910,7 +26338,7 @@
           <p:cNvPr id="24" name="명세 · 폭 2">
             <a:extLst xmlns:a="http://schemas.openxmlformats.org/drawingml/2006/main">
               <a:ext uri="{FF2B5EF4-FFF2-40B4-BE49-F238E27FC236}">
-                <a16:creationId xmlns:a16="http://schemas.microsoft.com/office/drawing/2014/main" id="{BF77136E-70B4-45C3-ADE7-D37FFA6A2056}"/>
+                <a16:creationId xmlns:a16="http://schemas.microsoft.com/office/drawing/2014/main" id="{A993DBC7-FC4B-4563-A94B-43499B4E80DD}"/>
               </a:ext>
             </a:extLst>
           </p:cNvPr>
@@ -23068,7 +26496,7 @@
           <p:cNvPr id="25" name="구현 · 폭 3">
             <a:extLst xmlns:a="http://schemas.openxmlformats.org/drawingml/2006/main">
               <a:ext uri="{FF2B5EF4-FFF2-40B4-BE49-F238E27FC236}">
-                <a16:creationId xmlns:a16="http://schemas.microsoft.com/office/drawing/2014/main" id="{F5BE13EA-3783-4BF8-87D0-A7EB0F61065D}"/>
+                <a16:creationId xmlns:a16="http://schemas.microsoft.com/office/drawing/2014/main" id="{0B693FBE-30EB-4770-8643-CFD4E8C9CA95}"/>
               </a:ext>
             </a:extLst>
           </p:cNvPr>
@@ -23226,7 +26654,7 @@
           <p:cNvPr id="26" name="">
             <a:extLst xmlns:a="http://schemas.openxmlformats.org/drawingml/2006/main">
               <a:ext uri="{FF2B5EF4-FFF2-40B4-BE49-F238E27FC236}">
-                <a16:creationId xmlns:a16="http://schemas.microsoft.com/office/drawing/2014/main" id="{4AF06385-C433-46EE-88E5-6B560984BA77}"/>
+                <a16:creationId xmlns:a16="http://schemas.microsoft.com/office/drawing/2014/main" id="{73CDEB15-7051-47F8-AC8D-787F20581DCD}"/>
               </a:ext>
             </a:extLst>
           </p:cNvPr>
@@ -23259,7 +26687,7 @@
           <p:cNvPr id="27" name="2">
             <a:extLst xmlns:a="http://schemas.openxmlformats.org/drawingml/2006/main">
               <a:ext uri="{FF2B5EF4-FFF2-40B4-BE49-F238E27FC236}">
-                <a16:creationId xmlns:a16="http://schemas.microsoft.com/office/drawing/2014/main" id="{EC63165C-3FF5-4F02-8983-2EC95A083788}"/>
+                <a16:creationId xmlns:a16="http://schemas.microsoft.com/office/drawing/2014/main" id="{D2E84B1A-47B8-4487-A0B6-512825B47559}"/>
               </a:ext>
             </a:extLst>
           </p:cNvPr>
@@ -23417,7 +26845,7 @@
           <p:cNvPr id="28" name="">
             <a:extLst xmlns:a="http://schemas.openxmlformats.org/drawingml/2006/main">
               <a:ext uri="{FF2B5EF4-FFF2-40B4-BE49-F238E27FC236}">
-                <a16:creationId xmlns:a16="http://schemas.microsoft.com/office/drawing/2014/main" id="{EEB16387-D5AB-473A-9416-CED1FDF06DDE}"/>
+                <a16:creationId xmlns:a16="http://schemas.microsoft.com/office/drawing/2014/main" id="{AA0268CC-2310-4020-89A0-48F013FA25EB}"/>
               </a:ext>
             </a:extLst>
           </p:cNvPr>
@@ -23450,7 +26878,7 @@
           <p:cNvPr id="29" name="3">
             <a:extLst xmlns:a="http://schemas.openxmlformats.org/drawingml/2006/main">
               <a:ext uri="{FF2B5EF4-FFF2-40B4-BE49-F238E27FC236}">
-                <a16:creationId xmlns:a16="http://schemas.microsoft.com/office/drawing/2014/main" id="{6451D136-2FB9-4740-8200-98BD6F3C841E}"/>
+                <a16:creationId xmlns:a16="http://schemas.microsoft.com/office/drawing/2014/main" id="{11DF6B74-E4E5-45FB-9029-274AA6C60CD2}"/>
               </a:ext>
             </a:extLst>
           </p:cNvPr>
@@ -23608,7 +27036,7 @@
           <p:cNvPr id="30" name="">
             <a:extLst xmlns:a="http://schemas.openxmlformats.org/drawingml/2006/main">
               <a:ext uri="{FF2B5EF4-FFF2-40B4-BE49-F238E27FC236}">
-                <a16:creationId xmlns:a16="http://schemas.microsoft.com/office/drawing/2014/main" id="{A2BD72C0-C34A-408B-989D-6A795449492D}"/>
+                <a16:creationId xmlns:a16="http://schemas.microsoft.com/office/drawing/2014/main" id="{6C9926D3-3430-4095-BE51-47B6A9E3B78A}"/>
               </a:ext>
             </a:extLst>
           </p:cNvPr>
@@ -23641,7 +27069,7 @@
           <p:cNvPr id="31" name="2">
             <a:extLst xmlns:a="http://schemas.openxmlformats.org/drawingml/2006/main">
               <a:ext uri="{FF2B5EF4-FFF2-40B4-BE49-F238E27FC236}">
-                <a16:creationId xmlns:a16="http://schemas.microsoft.com/office/drawing/2014/main" id="{664988CD-B712-4B67-A4D2-3B9BA0180E01}"/>
+                <a16:creationId xmlns:a16="http://schemas.microsoft.com/office/drawing/2014/main" id="{0E44ACEA-255E-421A-BD81-09FD7DF1FEFD}"/>
               </a:ext>
             </a:extLst>
           </p:cNvPr>
@@ -23799,7 +27227,7 @@
           <p:cNvPr id="32" name="">
             <a:extLst xmlns:a="http://schemas.openxmlformats.org/drawingml/2006/main">
               <a:ext uri="{FF2B5EF4-FFF2-40B4-BE49-F238E27FC236}">
-                <a16:creationId xmlns:a16="http://schemas.microsoft.com/office/drawing/2014/main" id="{E654034C-A5BF-470E-A9FB-7A7DF5216C52}"/>
+                <a16:creationId xmlns:a16="http://schemas.microsoft.com/office/drawing/2014/main" id="{B01E2645-6F3A-4B98-80D0-107A8A7D1690}"/>
               </a:ext>
             </a:extLst>
           </p:cNvPr>
@@ -23832,7 +27260,7 @@
           <p:cNvPr id="33" name="3">
             <a:extLst xmlns:a="http://schemas.openxmlformats.org/drawingml/2006/main">
               <a:ext uri="{FF2B5EF4-FFF2-40B4-BE49-F238E27FC236}">
-                <a16:creationId xmlns:a16="http://schemas.microsoft.com/office/drawing/2014/main" id="{898F3999-7D6F-4909-99A8-02802AD5259D}"/>
+                <a16:creationId xmlns:a16="http://schemas.microsoft.com/office/drawing/2014/main" id="{E87579F1-B7EF-4120-A1EB-5C0BC15B68C0}"/>
               </a:ext>
             </a:extLst>
           </p:cNvPr>
@@ -23990,7 +27418,7 @@
           <p:cNvPr id="34" name="">
             <a:extLst xmlns:a="http://schemas.openxmlformats.org/drawingml/2006/main">
               <a:ext uri="{FF2B5EF4-FFF2-40B4-BE49-F238E27FC236}">
-                <a16:creationId xmlns:a16="http://schemas.microsoft.com/office/drawing/2014/main" id="{7CD64B91-2680-43E3-BD9A-2CB69B4C519D}"/>
+                <a16:creationId xmlns:a16="http://schemas.microsoft.com/office/drawing/2014/main" id="{107A4DB8-313E-4A93-BB8C-74EC3A6C0592}"/>
               </a:ext>
             </a:extLst>
           </p:cNvPr>
@@ -24023,7 +27451,7 @@
           <p:cNvPr id="35" name="4">
             <a:extLst xmlns:a="http://schemas.openxmlformats.org/drawingml/2006/main">
               <a:ext uri="{FF2B5EF4-FFF2-40B4-BE49-F238E27FC236}">
-                <a16:creationId xmlns:a16="http://schemas.microsoft.com/office/drawing/2014/main" id="{826761C1-919A-4109-8950-DA1D55E76A4D}"/>
+                <a16:creationId xmlns:a16="http://schemas.microsoft.com/office/drawing/2014/main" id="{BFDC4969-B4E4-41C8-9408-4265B1A4D92C}"/>
               </a:ext>
             </a:extLst>
           </p:cNvPr>
@@ -24181,7 +27609,7 @@
           <p:cNvPr id="36" name="명세와 구현의 범위 불일치">
             <a:extLst xmlns:a="http://schemas.openxmlformats.org/drawingml/2006/main">
               <a:ext uri="{FF2B5EF4-FFF2-40B4-BE49-F238E27FC236}">
-                <a16:creationId xmlns:a16="http://schemas.microsoft.com/office/drawing/2014/main" id="{28FDC395-88F0-4B55-91C0-B7D6196BE3E5}"/>
+                <a16:creationId xmlns:a16="http://schemas.microsoft.com/office/drawing/2014/main" id="{C954F54F-065F-4BFB-A989-E445894B93B4}"/>
               </a:ext>
             </a:extLst>
           </p:cNvPr>
@@ -24339,7 +27767,7 @@
           <p:cNvPr id="37" name="">
             <a:extLst xmlns:a="http://schemas.openxmlformats.org/drawingml/2006/main">
               <a:ext uri="{FF2B5EF4-FFF2-40B4-BE49-F238E27FC236}">
-                <a16:creationId xmlns:a16="http://schemas.microsoft.com/office/drawing/2014/main" id="{9218C785-6227-41DD-BC85-069AFA8FBE12}"/>
+                <a16:creationId xmlns:a16="http://schemas.microsoft.com/office/drawing/2014/main" id="{70E7C3B7-BC86-4052-9C2D-3950DE9F6BE6}"/>
               </a:ext>
             </a:extLst>
           </p:cNvPr>
@@ -24370,7 +27798,7 @@
           <p:cNvPr id="38" name="조사에서 연결한 근거">
             <a:extLst xmlns:a="http://schemas.openxmlformats.org/drawingml/2006/main">
               <a:ext uri="{FF2B5EF4-FFF2-40B4-BE49-F238E27FC236}">
-                <a16:creationId xmlns:a16="http://schemas.microsoft.com/office/drawing/2014/main" id="{FC9778A8-C2E3-4D67-9B62-630A21FF8A0F}"/>
+                <a16:creationId xmlns:a16="http://schemas.microsoft.com/office/drawing/2014/main" id="{4651904A-6853-455B-9F95-D7B0D583335F}"/>
               </a:ext>
             </a:extLst>
           </p:cNvPr>
@@ -24528,7 +27956,7 @@
           <p:cNvPr id="39" name="01  실패 테스트">
             <a:extLst xmlns:a="http://schemas.openxmlformats.org/drawingml/2006/main">
               <a:ext uri="{FF2B5EF4-FFF2-40B4-BE49-F238E27FC236}">
-                <a16:creationId xmlns:a16="http://schemas.microsoft.com/office/drawing/2014/main" id="{85F9322F-3B38-4B3F-B23A-4B3DC6C52C80}"/>
+                <a16:creationId xmlns:a16="http://schemas.microsoft.com/office/drawing/2014/main" id="{367FCC86-84A2-477D-AB95-8CB636C632A2}"/>
               </a:ext>
             </a:extLst>
           </p:cNvPr>
@@ -24686,7 +28114,7 @@
           <p:cNvPr id="40" name="test_crop_excludes_&#10;end_coordinate">
             <a:extLst xmlns:a="http://schemas.openxmlformats.org/drawingml/2006/main">
               <a:ext uri="{FF2B5EF4-FFF2-40B4-BE49-F238E27FC236}">
-                <a16:creationId xmlns:a16="http://schemas.microsoft.com/office/drawing/2014/main" id="{3A3152DF-EB04-4966-8B53-682AF1232B6F}"/>
+                <a16:creationId xmlns:a16="http://schemas.microsoft.com/office/drawing/2014/main" id="{E2238661-F43A-460C-A7FC-E87B3318D7CF}"/>
               </a:ext>
             </a:extLst>
           </p:cNvPr>
@@ -24867,7 +28295,7 @@
           <p:cNvPr id="41" name="02  제품의 호출 경로">
             <a:extLst xmlns:a="http://schemas.openxmlformats.org/drawingml/2006/main">
               <a:ext uri="{FF2B5EF4-FFF2-40B4-BE49-F238E27FC236}">
-                <a16:creationId xmlns:a16="http://schemas.microsoft.com/office/drawing/2014/main" id="{C8722539-4707-446B-BAAB-0CFFD452E0EA}"/>
+                <a16:creationId xmlns:a16="http://schemas.microsoft.com/office/drawing/2014/main" id="{49504AF7-EADF-4EE3-931D-65E99D639D4B}"/>
               </a:ext>
             </a:extLst>
           </p:cNvPr>
@@ -25025,7 +28453,7 @@
           <p:cNvPr id="42" name="cli.main → process_image → crop">
             <a:extLst xmlns:a="http://schemas.openxmlformats.org/drawingml/2006/main">
               <a:ext uri="{FF2B5EF4-FFF2-40B4-BE49-F238E27FC236}">
-                <a16:creationId xmlns:a16="http://schemas.microsoft.com/office/drawing/2014/main" id="{E610DB8C-B894-4AC2-953E-DF21F47D020B}"/>
+                <a16:creationId xmlns:a16="http://schemas.microsoft.com/office/drawing/2014/main" id="{A028C526-0FB6-4E81-B4F3-229CAC846447}"/>
               </a:ext>
             </a:extLst>
           </p:cNvPr>
@@ -25183,7 +28611,7 @@
           <p:cNvPr id="43" name="03  끝 좌표까지 포함한 구현">
             <a:extLst xmlns:a="http://schemas.openxmlformats.org/drawingml/2006/main">
               <a:ext uri="{FF2B5EF4-FFF2-40B4-BE49-F238E27FC236}">
-                <a16:creationId xmlns:a16="http://schemas.microsoft.com/office/drawing/2014/main" id="{9AA42457-15C6-49F0-AACF-35660F2442D6}"/>
+                <a16:creationId xmlns:a16="http://schemas.microsoft.com/office/drawing/2014/main" id="{D572E39D-2260-40E5-8C35-F2EF426E5EF5}"/>
               </a:ext>
             </a:extLst>
           </p:cNvPr>
@@ -25341,7 +28769,7 @@
           <p:cNvPr id="44" name="row[x_start : x_end + 1]">
             <a:extLst xmlns:a="http://schemas.openxmlformats.org/drawingml/2006/main">
               <a:ext uri="{FF2B5EF4-FFF2-40B4-BE49-F238E27FC236}">
-                <a16:creationId xmlns:a16="http://schemas.microsoft.com/office/drawing/2014/main" id="{FA40696C-A318-42DF-93ED-942421C4470D}"/>
+                <a16:creationId xmlns:a16="http://schemas.microsoft.com/office/drawing/2014/main" id="{78DB29F3-F3FE-47FB-A679-84466DE9B662}"/>
               </a:ext>
             </a:extLst>
           </p:cNvPr>
@@ -25499,7 +28927,7 @@
           <p:cNvPr id="45" name="Legacy module connection">
             <a:extLst xmlns:a="http://schemas.openxmlformats.org/drawingml/2006/main">
               <a:ext uri="{FF2B5EF4-FFF2-40B4-BE49-F238E27FC236}">
-                <a16:creationId xmlns:a16="http://schemas.microsoft.com/office/drawing/2014/main" id="{C70F7B31-DA0A-487F-AF4F-A7910055C09B}"/>
+                <a16:creationId xmlns:a16="http://schemas.microsoft.com/office/drawing/2014/main" id="{9FD84B87-EDE7-4DCD-991A-3A7BD4358784}"/>
               </a:ext>
             </a:extLst>
           </p:cNvPr>
@@ -25655,7 +29083,7 @@
     </p:spTree>
     <p:extLst>
       <p:ext uri="{BB962C8B-B14F-4D97-AF65-F5344CB8AC3E}">
-        <p14:creationId xmlns:p14="http://schemas.microsoft.com/office/powerpoint/2010/main" val="1153529882"/>
+        <p14:creationId xmlns:p14="http://schemas.microsoft.com/office/powerpoint/2010/main" val="508572483"/>
       </p:ext>
     </p:extLst>
   </p:cSld>
@@ -25686,7 +29114,7 @@
           <p:cNvPr id="21" name="ACT 0 · 전달한 Context와 실행 환경">
             <a:extLst xmlns:a="http://schemas.openxmlformats.org/drawingml/2006/main">
               <a:ext uri="{FF2B5EF4-FFF2-40B4-BE49-F238E27FC236}">
-                <a16:creationId xmlns:a16="http://schemas.microsoft.com/office/drawing/2014/main" id="{61210B62-88A5-4475-843F-C14BE4614C71}"/>
+                <a16:creationId xmlns:a16="http://schemas.microsoft.com/office/drawing/2014/main" id="{82F6E077-6829-4684-98C5-46E15BAB5EA1}"/>
               </a:ext>
             </a:extLst>
           </p:cNvPr>
@@ -25844,7 +29272,7 @@
           <p:cNvPr id="2" name="S06">
             <a:extLst xmlns:a="http://schemas.openxmlformats.org/drawingml/2006/main">
               <a:ext uri="{FF2B5EF4-FFF2-40B4-BE49-F238E27FC236}">
-                <a16:creationId xmlns:a16="http://schemas.microsoft.com/office/drawing/2014/main" id="{DA2A759F-02F9-4BCA-882B-251ADB00C6E3}"/>
+                <a16:creationId xmlns:a16="http://schemas.microsoft.com/office/drawing/2014/main" id="{D684F20D-B6DB-42E0-9C0A-DCF28EA9CB28}"/>
               </a:ext>
             </a:extLst>
           </p:cNvPr>
@@ -26002,7 +29430,7 @@
           <p:cNvPr id="3" name="관찰 결과와 실행 제한을 분리한다">
             <a:extLst xmlns:a="http://schemas.openxmlformats.org/drawingml/2006/main">
               <a:ext uri="{FF2B5EF4-FFF2-40B4-BE49-F238E27FC236}">
-                <a16:creationId xmlns:a16="http://schemas.microsoft.com/office/drawing/2014/main" id="{9E3C7B79-5D50-4842-9044-CABBCC007C31}"/>
+                <a16:creationId xmlns:a16="http://schemas.microsoft.com/office/drawing/2014/main" id="{FC3FCF4F-D0D0-4F3D-9215-8B9E0FF8E093}"/>
               </a:ext>
             </a:extLst>
           </p:cNvPr>
@@ -26160,7 +29588,7 @@
           <p:cNvPr id="4" name="">
             <a:extLst xmlns:a="http://schemas.openxmlformats.org/drawingml/2006/main">
               <a:ext uri="{FF2B5EF4-FFF2-40B4-BE49-F238E27FC236}">
-                <a16:creationId xmlns:a16="http://schemas.microsoft.com/office/drawing/2014/main" id="{22B14B5E-B87B-4ABC-8259-7CD35B296177}"/>
+                <a16:creationId xmlns:a16="http://schemas.microsoft.com/office/drawing/2014/main" id="{6D77DB4B-9699-4A95-A48F-C33361129C49}"/>
               </a:ext>
             </a:extLst>
           </p:cNvPr>
@@ -26191,7 +29619,7 @@
           <p:cNvPr id="5" name="TRIAL-001 관찰 + Context 범위의 교육용 해석 · Codex CLI 0.154.0 · 읽기 전">
             <a:extLst xmlns:a="http://schemas.openxmlformats.org/drawingml/2006/main">
               <a:ext uri="{FF2B5EF4-FFF2-40B4-BE49-F238E27FC236}">
-                <a16:creationId xmlns:a16="http://schemas.microsoft.com/office/drawing/2014/main" id="{356C8221-9D10-489F-8B85-965EA6526EF6}"/>
+                <a16:creationId xmlns:a16="http://schemas.microsoft.com/office/drawing/2014/main" id="{98DF5AC9-7DA8-4178-8562-DE9952891E65}"/>
               </a:ext>
             </a:extLst>
           </p:cNvPr>
@@ -26349,7 +29777,7 @@
           <p:cNvPr id="6" name="Chatbot과의 비교 실험 아님 · 이 Trial에서 코드 수정·읽기 전용 권한 해제 없음">
             <a:extLst xmlns:a="http://schemas.openxmlformats.org/drawingml/2006/main">
               <a:ext uri="{FF2B5EF4-FFF2-40B4-BE49-F238E27FC236}">
-                <a16:creationId xmlns:a16="http://schemas.microsoft.com/office/drawing/2014/main" id="{CDFD7823-FA3F-4C40-A47C-D88E0F337DA7}"/>
+                <a16:creationId xmlns:a16="http://schemas.microsoft.com/office/drawing/2014/main" id="{71FEC99C-50CA-4E2B-88D4-20073568E0AC}"/>
               </a:ext>
             </a:extLst>
           </p:cNvPr>
@@ -26507,7 +29935,7 @@
           <p:cNvPr id="7" name="Chatbot에 코드·명세만 골라 넣었다면?">
             <a:extLst xmlns:a="http://schemas.openxmlformats.org/drawingml/2006/main">
               <a:ext uri="{FF2B5EF4-FFF2-40B4-BE49-F238E27FC236}">
-                <a16:creationId xmlns:a16="http://schemas.microsoft.com/office/drawing/2014/main" id="{98C8FC19-DC6A-41D8-82B1-2936E7916AF8}"/>
+                <a16:creationId xmlns:a16="http://schemas.microsoft.com/office/drawing/2014/main" id="{DD2F223D-C826-4356-B889-2A2882BE374A}"/>
               </a:ext>
             </a:extLst>
           </p:cNvPr>
@@ -26665,7 +30093,7 @@
           <p:cNvPr id="8" name="코드 Context로 논의할 수 있는 부분">
             <a:extLst xmlns:a="http://schemas.openxmlformats.org/drawingml/2006/main">
               <a:ext uri="{FF2B5EF4-FFF2-40B4-BE49-F238E27FC236}">
-                <a16:creationId xmlns:a16="http://schemas.microsoft.com/office/drawing/2014/main" id="{721EEB54-6497-40CF-8B46-A9EF4AA174AC}"/>
+                <a16:creationId xmlns:a16="http://schemas.microsoft.com/office/drawing/2014/main" id="{D6455478-D1CB-4E2F-8575-EA972A7A0C27}"/>
               </a:ext>
             </a:extLst>
           </p:cNvPr>
@@ -26823,7 +30251,7 @@
           <p:cNvPr id="9" name="함께 전달하지 않은 실행 환경">
             <a:extLst xmlns:a="http://schemas.openxmlformats.org/drawingml/2006/main">
               <a:ext uri="{FF2B5EF4-FFF2-40B4-BE49-F238E27FC236}">
-                <a16:creationId xmlns:a16="http://schemas.microsoft.com/office/drawing/2014/main" id="{7553CD86-7A7B-4161-AA57-21F893617C54}"/>
+                <a16:creationId xmlns:a16="http://schemas.microsoft.com/office/drawing/2014/main" id="{C68EF714-64F0-4C5C-82C1-2C2F6AAF019F}"/>
               </a:ext>
             </a:extLst>
           </p:cNvPr>
@@ -26981,7 +30409,7 @@
           <p:cNvPr id="10" name="">
             <a:extLst xmlns:a="http://schemas.openxmlformats.org/drawingml/2006/main">
               <a:ext uri="{FF2B5EF4-FFF2-40B4-BE49-F238E27FC236}">
-                <a16:creationId xmlns:a16="http://schemas.microsoft.com/office/drawing/2014/main" id="{D568003E-31E4-4E50-9764-7665F1266B87}"/>
+                <a16:creationId xmlns:a16="http://schemas.microsoft.com/office/drawing/2014/main" id="{0510C80F-9B33-427F-A52C-66C6446ABD38}"/>
               </a:ext>
             </a:extLst>
           </p:cNvPr>
@@ -27014,7 +30442,7 @@
           <p:cNvPr id="11" name="">
             <a:extLst xmlns:a="http://schemas.openxmlformats.org/drawingml/2006/main">
               <a:ext uri="{FF2B5EF4-FFF2-40B4-BE49-F238E27FC236}">
-                <a16:creationId xmlns:a16="http://schemas.microsoft.com/office/drawing/2014/main" id="{D2A00EB5-EEAA-41F0-96B6-7DCC5865AE32}"/>
+                <a16:creationId xmlns:a16="http://schemas.microsoft.com/office/drawing/2014/main" id="{7A56F872-34FA-44EE-96FC-3CEE13C4FDB6}"/>
               </a:ext>
             </a:extLst>
           </p:cNvPr>
@@ -27045,7 +30473,7 @@
           <p:cNvPr id="12" name="기대 폭 2 ↔ 포함 폭 3">
             <a:extLst xmlns:a="http://schemas.openxmlformats.org/drawingml/2006/main">
               <a:ext uri="{FF2B5EF4-FFF2-40B4-BE49-F238E27FC236}">
-                <a16:creationId xmlns:a16="http://schemas.microsoft.com/office/drawing/2014/main" id="{6FD4FC48-E093-4C1F-B4D9-B248B72098FD}"/>
+                <a16:creationId xmlns:a16="http://schemas.microsoft.com/office/drawing/2014/main" id="{FDC9B1B0-7D03-4279-97EF-FE2534C6957B}"/>
               </a:ext>
             </a:extLst>
           </p:cNvPr>
@@ -27203,7 +30631,7 @@
           <p:cNvPr id="13" name="명세·테스트·구현을 비교&#10;추가된 열의 원인을 추론">
             <a:extLst xmlns:a="http://schemas.openxmlformats.org/drawingml/2006/main">
               <a:ext uri="{FF2B5EF4-FFF2-40B4-BE49-F238E27FC236}">
-                <a16:creationId xmlns:a16="http://schemas.microsoft.com/office/drawing/2014/main" id="{65416257-52ED-4A59-AD93-3E8BD2C1D19E}"/>
+                <a16:creationId xmlns:a16="http://schemas.microsoft.com/office/drawing/2014/main" id="{7142A857-2340-4B5C-A0E4-2AC776F6B1EB}"/>
               </a:ext>
             </a:extLst>
           </p:cNvPr>
@@ -27384,7 +30812,7 @@
           <p:cNvPr id="14" name="TRIAL-001: 원인 설명·코드 미수정">
             <a:extLst xmlns:a="http://schemas.openxmlformats.org/drawingml/2006/main">
               <a:ext uri="{FF2B5EF4-FFF2-40B4-BE49-F238E27FC236}">
-                <a16:creationId xmlns:a16="http://schemas.microsoft.com/office/drawing/2014/main" id="{2F8956D7-53EB-4F58-A2B7-B4D833E8BBB7}"/>
+                <a16:creationId xmlns:a16="http://schemas.microsoft.com/office/drawing/2014/main" id="{761758F4-3F3B-4C38-AA4D-E86F2521E351}"/>
               </a:ext>
             </a:extLst>
           </p:cNvPr>
@@ -27542,7 +30970,7 @@
           <p:cNvPr id="15" name="읽기 전용 · 임시 디렉터리 제한">
             <a:extLst xmlns:a="http://schemas.openxmlformats.org/drawingml/2006/main">
               <a:ext uri="{FF2B5EF4-FFF2-40B4-BE49-F238E27FC236}">
-                <a16:creationId xmlns:a16="http://schemas.microsoft.com/office/drawing/2014/main" id="{95691776-D322-4772-B327-421D5CF7AF3A}"/>
+                <a16:creationId xmlns:a16="http://schemas.microsoft.com/office/drawing/2014/main" id="{036A4FC7-0009-47F6-B753-E63440D413A8}"/>
               </a:ext>
             </a:extLst>
           </p:cNvPr>
@@ -27700,7 +31128,7 @@
           <p:cNvPr id="16" name="코드만으로는 부족&#10;실행 로그·권한 정보도 필요">
             <a:extLst xmlns:a="http://schemas.openxmlformats.org/drawingml/2006/main">
               <a:ext uri="{FF2B5EF4-FFF2-40B4-BE49-F238E27FC236}">
-                <a16:creationId xmlns:a16="http://schemas.microsoft.com/office/drawing/2014/main" id="{96089296-9175-4000-8EAC-9B7C127F0D8E}"/>
+                <a16:creationId xmlns:a16="http://schemas.microsoft.com/office/drawing/2014/main" id="{AE0406FB-F4FB-406B-8CE9-65FA8404563D}"/>
               </a:ext>
             </a:extLst>
           </p:cNvPr>
@@ -27881,7 +31309,7 @@
           <p:cNvPr id="17" name="TRIAL-001도 환경 오류 3건">
             <a:extLst xmlns:a="http://schemas.openxmlformats.org/drawingml/2006/main">
               <a:ext uri="{FF2B5EF4-FFF2-40B4-BE49-F238E27FC236}">
-                <a16:creationId xmlns:a16="http://schemas.microsoft.com/office/drawing/2014/main" id="{33AD1FD7-0BFF-44A9-9ECC-1A6BEA77F29A}"/>
+                <a16:creationId xmlns:a16="http://schemas.microsoft.com/office/drawing/2014/main" id="{F5EA2909-DB57-431D-8AEE-838AF7691FBD}"/>
               </a:ext>
             </a:extLst>
           </p:cNvPr>
@@ -28039,7 +31467,7 @@
           <p:cNvPr id="18" name="코드만 옮기면, 실행 환경의 단서는 빠진다.">
             <a:extLst xmlns:a="http://schemas.openxmlformats.org/drawingml/2006/main">
               <a:ext uri="{FF2B5EF4-FFF2-40B4-BE49-F238E27FC236}">
-                <a16:creationId xmlns:a16="http://schemas.microsoft.com/office/drawing/2014/main" id="{95A8220F-C511-4D99-85FE-EFA80190295F}"/>
+                <a16:creationId xmlns:a16="http://schemas.microsoft.com/office/drawing/2014/main" id="{B5203234-039E-4653-88EE-DCE078CC2F4E}"/>
               </a:ext>
             </a:extLst>
           </p:cNvPr>
@@ -28197,7 +31625,7 @@
           <p:cNvPr id="19" name="실제 전체 기록: 7개 통과 · crop 실패 1건 · 환경 오류 3건">
             <a:extLst xmlns:a="http://schemas.openxmlformats.org/drawingml/2006/main">
               <a:ext uri="{FF2B5EF4-FFF2-40B4-BE49-F238E27FC236}">
-                <a16:creationId xmlns:a16="http://schemas.microsoft.com/office/drawing/2014/main" id="{F1A7B359-C72C-4E08-AF7D-FB8979579E85}"/>
+                <a16:creationId xmlns:a16="http://schemas.microsoft.com/office/drawing/2014/main" id="{60475873-2738-4523-B9EF-F1B8633898CC}"/>
               </a:ext>
             </a:extLst>
           </p:cNvPr>
@@ -28355,7 +31783,7 @@
           <p:cNvPr id="20" name="Legacy module connection">
             <a:extLst xmlns:a="http://schemas.openxmlformats.org/drawingml/2006/main">
               <a:ext uri="{FF2B5EF4-FFF2-40B4-BE49-F238E27FC236}">
-                <a16:creationId xmlns:a16="http://schemas.microsoft.com/office/drawing/2014/main" id="{1B9E1775-2074-4291-8D57-EEA96A189C6D}"/>
+                <a16:creationId xmlns:a16="http://schemas.microsoft.com/office/drawing/2014/main" id="{B2C4D231-4584-4BB7-8629-8C3C5461B4B6}"/>
               </a:ext>
             </a:extLst>
           </p:cNvPr>
@@ -28511,7 +31939,7 @@
     </p:spTree>
     <p:extLst>
       <p:ext uri="{BB962C8B-B14F-4D97-AF65-F5344CB8AC3E}">
-        <p14:creationId xmlns:p14="http://schemas.microsoft.com/office/powerpoint/2010/main" val="54509864"/>
+        <p14:creationId xmlns:p14="http://schemas.microsoft.com/office/powerpoint/2010/main" val="491149811"/>
       </p:ext>
     </p:extLst>
   </p:cSld>
@@ -28542,7 +31970,7 @@
           <p:cNvPr id="14" name="ACT 0 · Context를 찾는 주체">
             <a:extLst xmlns:a="http://schemas.openxmlformats.org/drawingml/2006/main">
               <a:ext uri="{FF2B5EF4-FFF2-40B4-BE49-F238E27FC236}">
-                <a16:creationId xmlns:a16="http://schemas.microsoft.com/office/drawing/2014/main" id="{673D54D8-C764-4D67-9065-8626CEC6878A}"/>
+                <a16:creationId xmlns:a16="http://schemas.microsoft.com/office/drawing/2014/main" id="{CDD76895-44D1-42D3-B73F-D8A8A0366273}"/>
               </a:ext>
             </a:extLst>
           </p:cNvPr>
@@ -28700,7 +32128,7 @@
           <p:cNvPr id="2" name="S07">
             <a:extLst xmlns:a="http://schemas.openxmlformats.org/drawingml/2006/main">
               <a:ext uri="{FF2B5EF4-FFF2-40B4-BE49-F238E27FC236}">
-                <a16:creationId xmlns:a16="http://schemas.microsoft.com/office/drawing/2014/main" id="{20001E67-4B7A-416F-86C2-3587ED308CFA}"/>
+                <a16:creationId xmlns:a16="http://schemas.microsoft.com/office/drawing/2014/main" id="{8CE3AC64-9410-4596-BCC0-784C02F54911}"/>
               </a:ext>
             </a:extLst>
           </p:cNvPr>
@@ -28858,7 +32286,7 @@
           <p:cNvPr id="3" name="코드를 AI에게 가져가는 대신&#10;AI를 Repository로 데려간다">
             <a:extLst xmlns:a="http://schemas.openxmlformats.org/drawingml/2006/main">
               <a:ext uri="{FF2B5EF4-FFF2-40B4-BE49-F238E27FC236}">
-                <a16:creationId xmlns:a16="http://schemas.microsoft.com/office/drawing/2014/main" id="{618D6391-F931-409E-BBFA-C4224D28EA3D}"/>
+                <a16:creationId xmlns:a16="http://schemas.microsoft.com/office/drawing/2014/main" id="{11E6D027-EF0D-4DC3-846C-0F18733CD09C}"/>
               </a:ext>
             </a:extLst>
           </p:cNvPr>
@@ -29039,7 +32467,7 @@
           <